--- a/docs/decks/L01.pptx
+++ b/docs/decks/L01.pptx
@@ -14130,7 +14130,7 @@
         </p:nvSpPr>
         <p:spPr>
           <a:xfrm>
-            <a:off x="566928" y="932688"/>
+            <a:off x="566928" y="1005840"/>
             <a:ext cx="8881567" cy="292608"/>
           </a:xfrm>
           <a:prstGeom prst="rect">
@@ -22110,7 +22110,7 @@
         </p:nvSpPr>
         <p:spPr>
           <a:xfrm>
-            <a:off x="566928" y="932688"/>
+            <a:off x="566928" y="1005840"/>
             <a:ext cx="8881567" cy="292608"/>
           </a:xfrm>
           <a:prstGeom prst="rect">

--- a/docs/decks/L01.pptx
+++ b/docs/decks/L01.pptx
@@ -5368,18 +5368,57 @@
       </p:sp>
       <p:sp>
         <p:nvSpPr>
-          <p:cNvPr id="17" name="Shape 15"/>
-          <p:cNvSpPr/>
-          <p:nvPr/>
-        </p:nvSpPr>
-        <p:spPr>
-          <a:xfrm>
-            <a:off x="566928" y="4069080"/>
-            <a:ext cx="11064240" cy="1234440"/>
+          <p:cNvPr id="17" name="Text 15"/>
+          <p:cNvSpPr/>
+          <p:nvPr/>
+        </p:nvSpPr>
+        <p:spPr>
+          <a:xfrm>
+            <a:off x="566928" y="3767328"/>
+            <a:ext cx="11064240" cy="274320"/>
+          </a:xfrm>
+          <a:prstGeom prst="rect">
+            <a:avLst/>
+          </a:prstGeom>
+          <a:noFill/>
+          <a:ln/>
+        </p:spPr>
+        <p:txBody>
+          <a:bodyPr wrap="square" lIns="0" tIns="0" rIns="0" bIns="0" rtlCol="0" anchor="ctr"/>
+          <a:lstStyle/>
+          <a:p>
+            <a:pPr indent="0" marL="0">
+              <a:buNone/>
+            </a:pPr>
+            <a:r>
+              <a:rPr lang="en-US" sz="1050" i="1" dirty="0">
+                <a:solidFill>
+                  <a:srgbClr val="8A90A0"/>
+                </a:solidFill>
+                <a:latin typeface="Calibri" pitchFamily="34" charset="0"/>
+                <a:ea typeface="Calibri" pitchFamily="34" charset="-122"/>
+                <a:cs typeface="Calibri" pitchFamily="34" charset="-120"/>
+              </a:rPr>
+              <a:t>схематично: співвідношення часток, а не виміряні значення — конкретні числа побачите у власному лозі</a:t>
+            </a:r>
+            <a:endParaRPr lang="en-US" sz="1050" dirty="0"/>
+          </a:p>
+        </p:txBody>
+      </p:sp>
+      <p:sp>
+        <p:nvSpPr>
+          <p:cNvPr id="18" name="Shape 16"/>
+          <p:cNvSpPr/>
+          <p:nvPr/>
+        </p:nvSpPr>
+        <p:spPr>
+          <a:xfrm>
+            <a:off x="566928" y="4160520"/>
+            <a:ext cx="11064240" cy="1188720"/>
           </a:xfrm>
           <a:prstGeom prst="roundRect">
             <a:avLst>
-              <a:gd name="adj" fmla="val 8889"/>
+              <a:gd name="adj" fmla="val 9231"/>
             </a:avLst>
           </a:prstGeom>
           <a:solidFill>
@@ -5390,13 +5429,13 @@
       </p:sp>
       <p:sp>
         <p:nvSpPr>
-          <p:cNvPr id="18" name="Text 16"/>
-          <p:cNvSpPr/>
-          <p:nvPr/>
-        </p:nvSpPr>
-        <p:spPr>
-          <a:xfrm>
-            <a:off x="786384" y="4197096"/>
+          <p:cNvPr id="19" name="Text 17"/>
+          <p:cNvSpPr/>
+          <p:nvPr/>
+        </p:nvSpPr>
+        <p:spPr>
+          <a:xfrm>
+            <a:off x="786384" y="4288536"/>
             <a:ext cx="10625328" cy="219456"/>
           </a:xfrm>
           <a:prstGeom prst="rect">
@@ -5429,14 +5468,14 @@
       </p:sp>
       <p:sp>
         <p:nvSpPr>
-          <p:cNvPr id="19" name="Text 17"/>
-          <p:cNvSpPr/>
-          <p:nvPr/>
-        </p:nvSpPr>
-        <p:spPr>
-          <a:xfrm>
-            <a:off x="786384" y="4453128"/>
-            <a:ext cx="10625328" cy="722376"/>
+          <p:cNvPr id="20" name="Text 18"/>
+          <p:cNvSpPr/>
+          <p:nvPr/>
+        </p:nvSpPr>
+        <p:spPr>
+          <a:xfrm>
+            <a:off x="786384" y="4544568"/>
+            <a:ext cx="10625328" cy="676656"/>
           </a:xfrm>
           <a:prstGeom prst="rect">
             <a:avLst/>
@@ -5468,7 +5507,7 @@
       </p:sp>
       <p:sp>
         <p:nvSpPr>
-          <p:cNvPr id="20" name="Text 18"/>
+          <p:cNvPr id="21" name="Text 19"/>
           <p:cNvSpPr/>
           <p:nvPr/>
         </p:nvSpPr>
@@ -16272,7 +16311,7 @@
             </a:avLst>
           </a:prstGeom>
           <a:solidFill>
-            <a:srgbClr val="ECEBFB"/>
+            <a:srgbClr val="F8F0E2"/>
           </a:solidFill>
           <a:ln/>
         </p:spPr>
@@ -16304,13 +16343,13 @@
             <a:r>
               <a:rPr lang="en-US" sz="900" b="1" spc="100" kern="0" dirty="0">
                 <a:solidFill>
-                  <a:srgbClr val="4038C4"/>
+                  <a:srgbClr val="9A5B12"/>
                 </a:solidFill>
                 <a:latin typeface="Courier New" pitchFamily="34" charset="0"/>
                 <a:ea typeface="Courier New" pitchFamily="34" charset="-122"/>
                 <a:cs typeface="Courier New" pitchFamily="34" charset="-120"/>
               </a:rPr>
-              <a:t>ТЕОРІЯ</a:t>
+              <a:t>РЕФЛЕКСІЯ</a:t>
             </a:r>
             <a:endParaRPr lang="en-US" sz="900" dirty="0"/>
           </a:p>
@@ -18477,7 +18516,7 @@
             </a:avLst>
           </a:prstGeom>
           <a:solidFill>
-            <a:srgbClr val="ECEBFB"/>
+            <a:srgbClr val="F8F0E2"/>
           </a:solidFill>
           <a:ln/>
         </p:spPr>
@@ -18509,13 +18548,13 @@
             <a:r>
               <a:rPr lang="en-US" sz="900" b="1" spc="100" kern="0" dirty="0">
                 <a:solidFill>
-                  <a:srgbClr val="4038C4"/>
+                  <a:srgbClr val="9A5B12"/>
                 </a:solidFill>
                 <a:latin typeface="Courier New" pitchFamily="34" charset="0"/>
                 <a:ea typeface="Courier New" pitchFamily="34" charset="-122"/>
                 <a:cs typeface="Courier New" pitchFamily="34" charset="-120"/>
               </a:rPr>
-              <a:t>ТЕОРІЯ</a:t>
+              <a:t>РЕФЛЕКСІЯ</a:t>
             </a:r>
             <a:endParaRPr lang="en-US" sz="900" dirty="0"/>
           </a:p>

--- a/docs/decks/L01.pptx
+++ b/docs/decks/L01.pptx
@@ -7381,9 +7381,14 @@
             </a:avLst>
           </a:prstGeom>
           <a:solidFill>
-            <a:srgbClr val="141018"/>
+            <a:srgbClr val="F5F4FA"/>
           </a:solidFill>
-          <a:ln/>
+          <a:ln w="12700">
+            <a:solidFill>
+              <a:srgbClr val="E6E7EC"/>
+            </a:solidFill>
+            <a:prstDash val="solid"/>
+          </a:ln>
         </p:spPr>
       </p:sp>
       <p:sp>
@@ -7416,7 +7421,7 @@
             <a:r>
               <a:rPr lang="en-US" sz="1300" dirty="0">
                 <a:solidFill>
-                  <a:srgbClr val="C3E88D"/>
+                  <a:srgbClr val="177245"/>
                 </a:solidFill>
                 <a:latin typeface="Courier New" pitchFamily="34" charset="0"/>
                 <a:ea typeface="Courier New" pitchFamily="34" charset="-122"/>
@@ -7433,7 +7438,7 @@
             <a:r>
               <a:rPr lang="en-US" sz="1300" dirty="0">
                 <a:solidFill>
-                  <a:srgbClr val="6A7385"/>
+                  <a:srgbClr val="8A7FA6"/>
                 </a:solidFill>
                 <a:latin typeface="Courier New" pitchFamily="34" charset="0"/>
                 <a:ea typeface="Courier New" pitchFamily="34" charset="-122"/>
@@ -9377,9 +9382,14 @@
             </a:avLst>
           </a:prstGeom>
           <a:solidFill>
-            <a:srgbClr val="141018"/>
+            <a:srgbClr val="F5F4FA"/>
           </a:solidFill>
-          <a:ln/>
+          <a:ln w="12700">
+            <a:solidFill>
+              <a:srgbClr val="E6E7EC"/>
+            </a:solidFill>
+            <a:prstDash val="solid"/>
+          </a:ln>
         </p:spPr>
       </p:sp>
       <p:sp>
@@ -9412,7 +9422,7 @@
             <a:r>
               <a:rPr lang="en-US" sz="1300" dirty="0">
                 <a:solidFill>
-                  <a:srgbClr val="ECE8F6"/>
+                  <a:srgbClr val="23262F"/>
                 </a:solidFill>
                 <a:latin typeface="Courier New" pitchFamily="34" charset="0"/>
                 <a:ea typeface="Courier New" pitchFamily="34" charset="-122"/>
@@ -9429,7 +9439,7 @@
             <a:r>
               <a:rPr lang="en-US" sz="1300" dirty="0">
                 <a:solidFill>
-                  <a:srgbClr val="F78C6C"/>
+                  <a:srgbClr val="B45309"/>
                 </a:solidFill>
                 <a:latin typeface="Courier New" pitchFamily="34" charset="0"/>
                 <a:ea typeface="Courier New" pitchFamily="34" charset="-122"/>
@@ -9446,7 +9456,7 @@
             <a:r>
               <a:rPr lang="en-US" sz="1300" dirty="0">
                 <a:solidFill>
-                  <a:srgbClr val="ECE8F6"/>
+                  <a:srgbClr val="23262F"/>
                 </a:solidFill>
                 <a:latin typeface="Courier New" pitchFamily="34" charset="0"/>
                 <a:ea typeface="Courier New" pitchFamily="34" charset="-122"/>
@@ -9463,7 +9473,7 @@
             <a:r>
               <a:rPr lang="en-US" sz="1300" dirty="0">
                 <a:solidFill>
-                  <a:srgbClr val="F78C6C"/>
+                  <a:srgbClr val="B45309"/>
                 </a:solidFill>
                 <a:latin typeface="Courier New" pitchFamily="34" charset="0"/>
                 <a:ea typeface="Courier New" pitchFamily="34" charset="-122"/>
@@ -9480,7 +9490,7 @@
             <a:r>
               <a:rPr lang="en-US" sz="1300" dirty="0">
                 <a:solidFill>
-                  <a:srgbClr val="ECE8F6"/>
+                  <a:srgbClr val="23262F"/>
                 </a:solidFill>
                 <a:latin typeface="Courier New" pitchFamily="34" charset="0"/>
                 <a:ea typeface="Courier New" pitchFamily="34" charset="-122"/>
@@ -12254,9 +12264,14 @@
             </a:avLst>
           </a:prstGeom>
           <a:solidFill>
-            <a:srgbClr val="141018"/>
+            <a:srgbClr val="F5F4FA"/>
           </a:solidFill>
-          <a:ln/>
+          <a:ln w="12700">
+            <a:solidFill>
+              <a:srgbClr val="E6E7EC"/>
+            </a:solidFill>
+            <a:prstDash val="solid"/>
+          </a:ln>
         </p:spPr>
       </p:sp>
       <p:sp>
@@ -12289,7 +12304,7 @@
             <a:r>
               <a:rPr lang="en-US" sz="1250" dirty="0">
                 <a:solidFill>
-                  <a:srgbClr val="C3E88D"/>
+                  <a:srgbClr val="177245"/>
                 </a:solidFill>
                 <a:latin typeface="Courier New" pitchFamily="34" charset="0"/>
                 <a:ea typeface="Courier New" pitchFamily="34" charset="-122"/>
@@ -12306,7 +12321,7 @@
             <a:r>
               <a:rPr lang="en-US" sz="1250" dirty="0">
                 <a:solidFill>
-                  <a:srgbClr val="6A7385"/>
+                  <a:srgbClr val="8A7FA6"/>
                 </a:solidFill>
                 <a:latin typeface="Courier New" pitchFamily="34" charset="0"/>
                 <a:ea typeface="Courier New" pitchFamily="34" charset="-122"/>
@@ -12326,7 +12341,7 @@
             <a:r>
               <a:rPr lang="en-US" sz="1250" dirty="0">
                 <a:solidFill>
-                  <a:srgbClr val="C3E88D"/>
+                  <a:srgbClr val="177245"/>
                 </a:solidFill>
                 <a:latin typeface="Courier New" pitchFamily="34" charset="0"/>
                 <a:ea typeface="Courier New" pitchFamily="34" charset="-122"/>
@@ -12343,7 +12358,7 @@
             <a:r>
               <a:rPr lang="en-US" sz="1250" dirty="0">
                 <a:solidFill>
-                  <a:srgbClr val="6A7385"/>
+                  <a:srgbClr val="8A7FA6"/>
                 </a:solidFill>
                 <a:latin typeface="Courier New" pitchFamily="34" charset="0"/>
                 <a:ea typeface="Courier New" pitchFamily="34" charset="-122"/>
@@ -12363,7 +12378,7 @@
             <a:r>
               <a:rPr lang="en-US" sz="1250" dirty="0">
                 <a:solidFill>
-                  <a:srgbClr val="C3E88D"/>
+                  <a:srgbClr val="177245"/>
                 </a:solidFill>
                 <a:latin typeface="Courier New" pitchFamily="34" charset="0"/>
                 <a:ea typeface="Courier New" pitchFamily="34" charset="-122"/>
@@ -12380,7 +12395,7 @@
             <a:r>
               <a:rPr lang="en-US" sz="1250" dirty="0">
                 <a:solidFill>
-                  <a:srgbClr val="6A7385"/>
+                  <a:srgbClr val="8A7FA6"/>
                 </a:solidFill>
                 <a:latin typeface="Courier New" pitchFamily="34" charset="0"/>
                 <a:ea typeface="Courier New" pitchFamily="34" charset="-122"/>
@@ -26024,9 +26039,14 @@
             </a:avLst>
           </a:prstGeom>
           <a:solidFill>
-            <a:srgbClr val="141018"/>
+            <a:srgbClr val="F5F4FA"/>
           </a:solidFill>
-          <a:ln/>
+          <a:ln w="12700">
+            <a:solidFill>
+              <a:srgbClr val="E6E7EC"/>
+            </a:solidFill>
+            <a:prstDash val="solid"/>
+          </a:ln>
         </p:spPr>
       </p:sp>
       <p:sp>
@@ -26059,7 +26079,7 @@
             <a:r>
               <a:rPr lang="en-US" sz="1150" dirty="0">
                 <a:solidFill>
-                  <a:srgbClr val="ECE8F6"/>
+                  <a:srgbClr val="23262F"/>
                 </a:solidFill>
                 <a:latin typeface="Courier New" pitchFamily="34" charset="0"/>
                 <a:ea typeface="Courier New" pitchFamily="34" charset="-122"/>
@@ -26079,7 +26099,7 @@
             <a:r>
               <a:rPr lang="en-US" sz="1150" dirty="0">
                 <a:solidFill>
-                  <a:srgbClr val="82AAFF"/>
+                  <a:srgbClr val="5A05F4"/>
                 </a:solidFill>
                 <a:latin typeface="Courier New" pitchFamily="34" charset="0"/>
                 <a:ea typeface="Courier New" pitchFamily="34" charset="-122"/>
@@ -26096,7 +26116,7 @@
             <a:r>
               <a:rPr lang="en-US" sz="1150" dirty="0">
                 <a:solidFill>
-                  <a:srgbClr val="C3E88D"/>
+                  <a:srgbClr val="177245"/>
                 </a:solidFill>
                 <a:latin typeface="Courier New" pitchFamily="34" charset="0"/>
                 <a:ea typeface="Courier New" pitchFamily="34" charset="-122"/>
@@ -26116,7 +26136,7 @@
             <a:r>
               <a:rPr lang="en-US" sz="1150" dirty="0">
                 <a:solidFill>
-                  <a:srgbClr val="82AAFF"/>
+                  <a:srgbClr val="5A05F4"/>
                 </a:solidFill>
                 <a:latin typeface="Courier New" pitchFamily="34" charset="0"/>
                 <a:ea typeface="Courier New" pitchFamily="34" charset="-122"/>
@@ -26133,7 +26153,7 @@
             <a:r>
               <a:rPr lang="en-US" sz="1150" dirty="0">
                 <a:solidFill>
-                  <a:srgbClr val="ECE8F6"/>
+                  <a:srgbClr val="23262F"/>
                 </a:solidFill>
                 <a:latin typeface="Courier New" pitchFamily="34" charset="0"/>
                 <a:ea typeface="Courier New" pitchFamily="34" charset="-122"/>
@@ -26153,7 +26173,7 @@
             <a:r>
               <a:rPr lang="en-US" sz="1150" dirty="0">
                 <a:solidFill>
-                  <a:srgbClr val="C3E88D"/>
+                  <a:srgbClr val="177245"/>
                 </a:solidFill>
                 <a:latin typeface="Courier New" pitchFamily="34" charset="0"/>
                 <a:ea typeface="Courier New" pitchFamily="34" charset="-122"/>
@@ -26173,7 +26193,7 @@
             <a:r>
               <a:rPr lang="en-US" sz="1150" dirty="0">
                 <a:solidFill>
-                  <a:srgbClr val="C3E88D"/>
+                  <a:srgbClr val="177245"/>
                 </a:solidFill>
                 <a:latin typeface="Courier New" pitchFamily="34" charset="0"/>
                 <a:ea typeface="Courier New" pitchFamily="34" charset="-122"/>
@@ -26193,7 +26213,7 @@
             <a:r>
               <a:rPr lang="en-US" sz="1150" dirty="0">
                 <a:solidFill>
-                  <a:srgbClr val="ECE8F6"/>
+                  <a:srgbClr val="23262F"/>
                 </a:solidFill>
                 <a:latin typeface="Courier New" pitchFamily="34" charset="0"/>
                 <a:ea typeface="Courier New" pitchFamily="34" charset="-122"/>
@@ -26213,7 +26233,7 @@
             <a:r>
               <a:rPr lang="en-US" sz="1150" dirty="0">
                 <a:solidFill>
-                  <a:srgbClr val="ECE8F6"/>
+                  <a:srgbClr val="23262F"/>
                 </a:solidFill>
                 <a:latin typeface="Courier New" pitchFamily="34" charset="0"/>
                 <a:ea typeface="Courier New" pitchFamily="34" charset="-122"/>
@@ -26233,7 +26253,7 @@
             <a:r>
               <a:rPr lang="en-US" sz="1150" dirty="0">
                 <a:solidFill>
-                  <a:srgbClr val="6A7385"/>
+                  <a:srgbClr val="8A7FA6"/>
                 </a:solidFill>
                 <a:latin typeface="Courier New" pitchFamily="34" charset="0"/>
                 <a:ea typeface="Courier New" pitchFamily="34" charset="-122"/>

--- a/docs/decks/L01.pptx
+++ b/docs/decks/L01.pptx
@@ -526,7 +526,7 @@
           <a:p>
             <a:r>
               <a:rPr lang="en-US" dirty="0"/>
-              <a:t/>
+              <a:t>Вітаю на першому уроці курсу. Викликати модель — три рядки коду, і саме тому LLM-прототипи народжуються за день. Але між «API відповів 200» і системою, якою можна керувати, лежить весь цей курс. Сьогодні розберемо сам об'єкт керування: що фізично летить у модель і повертається назад, у чому міряється рахунок, чому та сама модель відповідає щоразу інакше і якими способами виклик ламається. Потім піднімемо каркас капстоуна однією командою — і чесно зламаємо його, щоб побачити, скільки роботи попереду. Курс триває шість тижнів, дванадцять уроків; кожен тиждень закриває одне операційне питання — механізмом, а не порадою. Це перший урок тижня «Основа + промпти».</a:t>
             </a:r>
             <a:endParaRPr lang="en-US" dirty="0"/>
           </a:p>
@@ -614,7 +614,7 @@
           <a:p>
             <a:r>
               <a:rPr lang="en-US" dirty="0"/>
-              <a:t/>
+              <a:t>Дві властивості з блока 01 варті окремого розтину, бо саме через них не працюють звичні тестування і моніторинг. Почнемо з недетермінізму. Модель на кожному кроці має розподіл ймовірностей наступного токена і обирає з нього; temperature керує тим, наскільки охоче вона відходить від найімовірнішого варіанта. Звідси природна думка: поставлю нуль — отримаю повторюваність. Це ілюзія, і покладатися на неї небезпечно. Навіть на нулі відповідь може відрізнятися між викликами, і на це три причини. Провайдер обробляє запити пакетами — і склад пакета впливає на арифметику. Обчислення з плаваючою точкою не асоціативні. А сама «модель» за незмінною назвою — це снапшот, який постачальник періодично оновлює. Звідси принцип: перевіряти LLM-відповідь порівнянням рядків не можна — ні в тестах, ні в кеші, ні в eval'ах. Перевіряються властивості: чи є в відповіді потрібне, чи немає забороненого, чи виконується формат, чи спрацював потрібний інструмент. Саме на цьому стоїть golden dataset уроку 10 — і саме тому там expect та forbid, а не «дорівнює». Практичний висновок: коли ви двічі напишете боту те саме і побачите інші слова — це не баг вашої системи. Баг — коли ви на це розраховували.</a:t>
             </a:r>
             <a:endParaRPr lang="en-US" dirty="0"/>
           </a:p>
@@ -702,7 +702,7 @@
           <a:p>
             <a:r>
               <a:rPr lang="en-US" dirty="0"/>
-              <a:t/>
+              <a:t>Друга властивість — природа латентності. Час LLM-виклику складається з двох частин: очікування першого токена, поки модель «читає» ваш вхід, і власне генерації, яка йде послідовно, токен за токеном. Тому виклик, що згенерував три абзаци, буде в рази повільніший за виклик з одним рядком — на тій самій моделі, при тому самому здоровому провайдері. Типова помилка — дивитися на p95 latency як на характеристику інфраструктури. P95 — це час, у який вкладаються 95 відсотків запитів; детально розберемо в уроці 9. У LLM-системі зростання p95 так само легко означає «відповіді стали довшими» — хтось змінив промпт або підняв max_tokens, — як і «провайдеру погано». Тому latency у лозі живе поряд із кількістю вихідних токенів: дві цифри разом відповідають на питання, на яке кожна окремо відповісти не може. Для інтерфейсів, де відповідь друкується на очах, окремо міряють час до першого токена — користувач суб'єктивно оцінює саме його. Стрімінгу в нашому контурі немає, це свідомо за межами курсу, але метрику варто знати на ім'я: time-to-first-token.</a:t>
             </a:r>
             <a:endParaRPr lang="en-US" dirty="0"/>
           </a:p>
@@ -790,7 +790,7 @@
           <a:p>
             <a:r>
               <a:rPr lang="en-US" dirty="0"/>
-              <a:t/>
+              <a:t>Останній шматок фундаменту — таксономія відмов. Вона потрібна вже сьогодні, бо визначає, які поля мають бути в лозі; детально кожен випадок закриваємо на тижні 4. Перші три категорії — видимі. Ліміт запитів: 429, вичерпано квоту — у сучасних API одразу по кількох осях: запити, токени, паралельні виклики. Збій провайдера: 5xx, інцидент на його боці. Таймаут або зависання: відповіді немає взагалі або вона приходить після того, як користувач пішов, — це моніторинг бачить частково. А тепер два рядки, заради яких існує цей курс. «Успішна, але непридатна»: HTTP 200 — і обрізана, порожня або не-JSON там, де чекали JSON. І «тиха деградація якості»: все «ок», але відповіді стали гіршими — змінився снапшот моделі або хтось правив промпт. Ці дві категорії не бачить жодна інфраструктурна метрика: щоб їх помітити, потрібні власний лог із версією промпта, перевірки якості та гейт, який не пускає регресію. Це рівно те, що ми будуємо шість тижнів. [Ведучому: веди курсором по рядках — це найдовший безкодовий відрізок, тримай динаміку.]</a:t>
             </a:r>
             <a:endParaRPr lang="en-US" dirty="0"/>
           </a:p>
@@ -878,7 +878,7 @@
           <a:p>
             <a:r>
               <a:rPr lang="en-US" dirty="0"/>
-              <a:t/>
+              <a:t>Переходимо від об'єкта керування до каркаса, в якому ви житимете шість тижнів. Одна команда docker compose up піднімає п'ять компонентів — і це ті самі ролі, які ви зустрінете в будь-якому проді, незалежно від інструментів. Шлях запиту: користувач пише в Chat UI, запит приходить у сервіс — це контур керування, де ухвалюються всі рішення. Сервіс звертається до gateway-адаптера — єдиного виходу до провайдерів, а той викликає модель; у нашому стеку це mock. Паралельно кожен запит лишає рядок лога в базі. Запам'ятайте цю стрічку — в лабораторній я попрошу вас відтворити її з пам'яті, а на співбесіді чи в проді ви впізнаєте ці самі ролі під іншими назвами.</a:t>
             </a:r>
             <a:endParaRPr lang="en-US" dirty="0"/>
           </a:p>
@@ -966,7 +966,7 @@
           <a:p>
             <a:r>
               <a:rPr lang="en-US" dirty="0"/>
-              <a:t/>
+              <a:t>Пройдімося по ролях. Chat UI з консоллю — обличчя системи: чат для користувача, панель для оператора. Ви ними користуєтесь, але не змінюєте. Сервіс — контур керування: усі рішення — яку модель, чи кеш, чи fallback, скільки коштувало. Тут уся ваша робота на шість тижнів. Gateway-адаптер — єдиний вихід до провайдерів: виконує виклик, згладжує їхні розбіжності, тримає ключі. Ви конфігуруєте список моделей. База — лог запитів, реєстр промптів, записи вартості: читаєте і розширюєте. І mock-провайдер — фейкова «модель» для розробки і CI, безкоштовна і керована: використовуєте для тестів і симуляції збоїв. Зверніть увагу на праву колонку: вона чесно ділить стек на те, що ви будуєте, і те, чим просто користуєтесь.</a:t>
             </a:r>
             <a:endParaRPr lang="en-US" dirty="0"/>
           </a:p>
@@ -1054,7 +1054,7 @@
           <a:p>
             <a:r>
               <a:rPr lang="en-US" dirty="0"/>
-              <a:t/>
+              <a:t>Головна межа архітектури проходить між двома словами: вирішує і виконує. Сервіс вирішує. Адаптер виконує. Уся цінність курсу живе на боці «вирішує» — тому ми й називаємо сервіс контуром керування, control plane. З практики великої агентної платформи, яку я супроводжую: там кредентіали провайдерів інжектяться в шарі інструментів під конкретного тенанта, а прикладний код їх не бачить взагалі — ні в конфізі, ні в змінних оточення свого процесу. Це те саме правило, доведене до продукту: чим менше шарів «знають» секрет, тим менше місць, звідки він може витекти в лог, у трейс або в чужий тенант. Звідси принцип: ключ провайдера живе тільки в gateway. Якщо секрет лежить у коді застосунку — контуру керування у вас ще немає, є розкидані виклики. Це найчастіша помилка на старті: ключ «тимчасово» кладуть у код, і він там лишається до першого витоку. І типова помилка з іншого боку: віддати рішення адаптеру. Він теж уміє і роутити, і фейлитись сам — через конфіг. Спокусливо, але тоді ви вчитеся клікати прапорці конкретного інструмента, а не будувати механізм. Рішення мають бути кодом, який ви розумієте, тестуєте і логуєте.</a:t>
             </a:r>
             <a:endParaRPr lang="en-US" dirty="0"/>
           </a:p>
@@ -1142,7 +1142,7 @@
           <a:p>
             <a:r>
               <a:rPr lang="en-US" dirty="0"/>
-              <a:t/>
+              <a:t>Кожен запит лишає в базі один рядок: request_id, model, prompt_version, latency_ms, prompt_tokens, completion_tokens, cost_usd, status. Текстів запиту і відповіді у рядку немає — і це навмисно, а не недоробка: чому їх не логують суцільно і як розслідувати «бот верзе дурниці» без них, детально розбере урок 9. Виглядає скромно. Але подивіться, що з цього рядка виростає — це буквально мапа курсу. Model — розподіл трафіку між моделями і доказ, що routing працює, тиждень 2. Prompt_version — розслідування «що зламалось учора о 19:40», уже наступний урок. Токени і cost_usd — облік вартості, бюджет, алерти, тиждень 2. Latency_ms і status — p95, error rate, сліди інцидентів, тижні 4–5. А весь рядок разом — метрики консолі й докази для гейтів якості, тижні 5–6. Сьогодні два поля порожні — prompt_version і cost_usd. Це не недоробка каркаса, це ваша робота на найближчі два тижні. З практики: на тій самій платформі одним із перших артефактів агентного рантайму став контракт метаданих виклику — окрема структура з моделлю, токенами, часом і статусом. Усе інше виросло поверх нього. Принцип: немає лога — немає операцій.</a:t>
             </a:r>
             <a:endParaRPr lang="en-US" dirty="0"/>
           </a:p>
@@ -1230,7 +1230,7 @@
           <a:p>
             <a:r>
               <a:rPr lang="en-US" dirty="0"/>
-              <a:t/>
+              <a:t>У стеку живе фейковий провайдер, сумісний за API зі справжніми: сервіс не відрізняє його від реального. У mock дві суперсили. Перша: він падає на замовлення. Напишіть у повідомленні маркер — і отримаєте керований інцидент. __fail_503 — провайдер лежить: на цьому будуємо fallback і деградацію на тижні 4. __fail_429 — вичерпані ліміти: розбираємо в уроці 7, чому спершу fallback, а retry — свідомо ні. __delay — стрибок latency: таймаути і p95. __garbage — беззмістовна відповідь: перевірки якості, ДЗ тижня 5. Надійність, яку тренують лише на реальних інцидентах, — це не інженерія, а сподівання. Mock робить кожен «інцидент» відтворюваним: у лабі, у ДЗ і в CI. Друга суперсила: mock реагує на промпт. Нормальні відповіді він віддає лише з правильним системним промптом; зіпсуєте промпт — відповіді стануть «не знаю». Навіщо так? Щоб регресію промпта можна було ловити автоматично: зламали — перевірки почервоніли. Ви побачите це наживо вже наступного уроку, а на тижні 5–6 цей механізм стане гейтом у CI. І чому це переноситься на прод: механіка контуру однакова для mock і реальної моделі — міняється лише «мозок» на іншому кінці дроту.</a:t>
             </a:r>
             <a:endParaRPr lang="en-US" dirty="0"/>
           </a:p>
@@ -1318,7 +1318,7 @@
           <a:p>
             <a:r>
               <a:rPr lang="en-US" dirty="0"/>
-              <a:t/>
+              <a:t>Це опційний блок — усе обов'язкове в курсі проходиться на mock, але дві можливості закладені з першого дня. Перша — реальний провайдер: скопіювати приклад env-файлу gateway, вписати ключ і підняти стек зі змінною MODEL. З реальним ключем зміниться справжня якість відповідей, багатоходовий діалог і цифри вартості; не зміниться — жоден механізм контуру. Радимо не вмикати це в перші тижні: на mock видно механіку, а не магію моделі. Друга — розширений профіль: advanced додає рівно один сервіс, Redis, — він знадобиться для semantic cache на тижні 3. Індустріальні дашборди, опційно на тижні 6, за бажання піднімете поруч самі: обов'язкова доріжка будує метрики всередині продукту, поверх власного лога. І лайфхак — перша операційна звичка курсу, ще до уроку про вартість: берете реальний ключ — одразу поставте ліміт витрат у кабінеті провайдера.</a:t>
             </a:r>
             <a:endParaRPr lang="en-US" dirty="0"/>
           </a:p>
@@ -1406,7 +1406,7 @@
           <a:p>
             <a:r>
               <a:rPr lang="en-US" dirty="0"/>
-              <a:t/>
+              <a:t>Перш ніж перейти до екрана — що саме ви зараз побачите і навіщо. Послідовність така: стек піднімається однією командою; чат відповідає на «Як скинути пароль?»; консоль оператора показує «—» у кожній плитці; у service/Program.cs знаходимо всі TODO(student) — мапу вашої роботи на шість тижнів; у таблиці requests з'являється рядок вашого запиту; і нарешті — чесний злам через __fail_503. Навіщо це все: зафіксувати точку А — стан системи до того, як ви почнете додавати шари керування. Порожня консоль і збій без плану Б — це не дефект демо, це і є предмет курсу. [Ведучому: перший запуск docker compose довгий — образи мають бути в кеші заздалегідь. Якщо перша відповідь у чаті — «Сервіс тимчасово недоступний», повторіть запит: gateway ще прогрівається після старту стека. До готовності gateway запити падають тихо — дочекайтеся health-ендпоінта або ~30 секунд після up.]</a:t>
             </a:r>
             <a:endParaRPr lang="en-US" dirty="0"/>
           </a:p>
@@ -1494,7 +1494,7 @@
           <a:p>
             <a:r>
               <a:rPr lang="en-US" dirty="0"/>
-              <a:t/>
+              <a:t>Домовимось про результат уроку — конкретними діями, а не «зрозуміти» чи «ознайомитись». Після сьогоднішнього заняття ви зможете: підняти стек капстоуна однією командою і оглянути обидві його половини — чат і консоль оператора; намалювати з пам'яті шлях запиту від UI через сервіс і адаптер до mock і лога; читати відповідь моделі як оператор — дивитися не лише на текст, а на finish_reason і usage; пояснити, чому temperature=0 не дає повторюваності і що з цього випливає для перевірки якості; назвати дві категорії відмов, яких HTTP-моніторинг не бачить у принципі; і знайти свій запит у таблиці requests, чесно відповівши, яких полів там бракує. Кожен пункт ви перевірите руками ще сьогодні — у лабораторній.</a:t>
             </a:r>
             <a:endParaRPr lang="en-US" dirty="0"/>
           </a:p>
@@ -1582,7 +1582,7 @@
           <a:p>
             <a:r>
               <a:rPr lang="en-US" dirty="0"/>
-              <a:t/>
+              <a:t>Крок перший: підняти стек. Docker compose up --build у корені проєкту; перший запуск довгий — тягне образи, далі швидко. Відкрити localhost:4200. Крок другий: оглянути обидві половини. Написати боту «Як скинути пароль?» — відповідь приходить. Якщо перша відповідь — «Сервіс тимчасово недоступний», повторіть: gateway ще прогрівається. Тепер консоль праворуч: «—» у кожній плитці. Запам'ятайте цю картинку — це точка А, з якою ви порівняєте себе на тижні 6. Крок третій: пройти шлях запиту в коді. Відкрити service/Program.cs і прочитати /chat згори вниз: звідки береться модель, як збирається запит до адаптера, куди пишеться лог. Знайти всі TODO(student, W#) — це мапа вашої роботи, підписана потижнево. Крок четвертий: знайти свій запит у лозі. Один раз на весь курс — команда повністю: docker compose exec postgres psql -U llmops -d llmops -c «SELECT * FROM requests ORDER BY created_at DESC LIMIT 5;» — далі в курсі SQL виконується так само. Знайти рядок свого повідомлення і чесно відповісти собі: які поля порожні і кому вони потрібні. Крок п'ятий: зламати. Написати в чат __fail_503. Бот скаже «сервіс недоступний» — жодного плану Б поки не існує. Це чесний стан системи до тижня 4. І опційний шостий: підняти профіль advanced, переконатися, що додався контейнер Redis, і погасити.</a:t>
             </a:r>
             <a:endParaRPr lang="en-US" dirty="0"/>
           </a:p>
@@ -1670,7 +1670,7 @@
           <a:p>
             <a:r>
               <a:rPr lang="en-US" dirty="0"/>
-              <a:t/>
+              <a:t>Зафіксуємо, що ми щойно побачили — і що це доводить. Перше: система жива і шлях запиту видно наскрізь — від чату через сервіс і адаптер до mock і рядка в базі. Ви можете намалювати його з пам'яті. Друге: консоль оператора показує «—» у кожній плитці, а в рядку лога порожні prompt_version і cost_usd. Це не недоробка каркаса — це ваша робота на найближчі два тижні. Курс влаштований так: лог з'являється першим, усе інше — надбудови над ним. Третє: на __fail_503 бот сказав «сервіс недоступний» — і все. Жодного плану Б: ні fallback, ні деградації, ні сліду в метриках. Це чесний стан системи до тижня 4. Разом ці три картинки — точка А вашого капстоуна. Точку Б ви збудуєте самі: реєстр промптів, маршрутизація, облік вартості, кеш, fallback, безпека, метрики, evals і CI-гейт — шар за шаром, тиждень за тижнем.</a:t>
             </a:r>
             <a:endParaRPr lang="en-US" dirty="0"/>
           </a:p>
@@ -1758,7 +1758,7 @@
           <a:p>
             <a:r>
               <a:rPr lang="en-US" dirty="0"/>
-              <a:t/>
+              <a:t>Перш ніж розійтися — чесна перевірка, без оцінок. Пройдіться по шести пунктах; де завагалися — туди і повертайтеся в матеріалі уроку. Стек піднявся, чат відповідає, консоль показує «—». Можете намалювати шлях запиту з пам'яті: UI, сервіс, адаптер, mock, лог. Бачили рядок свого запиту в requests і знаєте, яких полів бракує. Бачили, як система поводиться при збої провайдера — і чому це погано. Можете пояснити своїми словами, чому temperature=0 не дає повторюваності — і що з цього випливає для перевірки якості. І можете назвати дві категорії відмов, яких HTTP-моніторинг не бачить у принципі, і чому саме вони найдорожчі. Якщо всі шість пунктів — «так», ви готові до наступного уроку. Питання, які лишилися, — несіть у канал потоку або на Q&amp;A.</a:t>
             </a:r>
             <a:endParaRPr lang="en-US" dirty="0"/>
           </a:p>
@@ -1846,7 +1846,7 @@
           <a:p>
             <a:r>
               <a:rPr lang="en-US" dirty="0"/>
-              <a:t/>
+              <a:t>П'ять способів зіпсувати собі перший тиждень — усі перевірені чужими граблями. Ключ провайдера в коді застосунку: «потім перенесемо» — не перенесете; місце ключа визначається в перший день. Демо на одному запиті як доказ готовності: готовність — це відповіді на чотири питання з блока 01, а не один вдалий скріншот. «Логи подивимось, коли зламається»: коли зламається — дивитися буде нікуди; лог або є з першого дня, або його немає в потрібний момент. Почати з трьох провайдерів і оркестрації: спочатку один контур наскрізь — складність додається шарами, а не закладається наперед. І одразу взяти реальний ключ, «щоб по-справжньому»: на mock видно механіку, на реальній моделі перші тижні видно лише рахунок.</a:t>
             </a:r>
             <a:endParaRPr lang="en-US" dirty="0"/>
           </a:p>
@@ -1934,7 +1934,7 @@
           <a:p>
             <a:r>
               <a:rPr lang="en-US" dirty="0"/>
-              <a:t/>
+              <a:t>Обов'язково до наступного уроку — без здачі: пройти всі п'ять обов'язкових кроків лабораторної; витримати чек-лист «перевір себе»; і переглянути гайд для студента по діагоналі — щоб знати, де що шукати. Опційно: підняти розширений профіль стека і подивитися, що додається; якщо є свій ключ — поставити ліміт витрат у кабінеті провайдера, сам ключ поки не підключати. І про ДЗ тижня: воно здається після уроку 2. ДЗ тижня 1 — логування плюс prompt registry; тиждень здається одним PR у своєму репозиторії. Критерії приймання будуть у файлі ДЗ після наступного уроку.</a:t>
             </a:r>
             <a:endParaRPr lang="en-US" dirty="0"/>
           </a:p>
@@ -2022,7 +2022,7 @@
           <a:p>
             <a:r>
               <a:rPr lang="en-US" dirty="0"/>
-              <a:t/>
+              <a:t>Підсумуємо. 200 — це не «працює»: у production LLM-системи є чотири питання — гроші, надійність, якість, видимість, — і на них відповідає власний контур керування, а не HTTP-моніторинг. Контракт виклику один у всіх великих провайдерів: messages, три операційні параметри, finish_reason і usage. Перевіряти LLM-відповідь можна тільки за властивостями, а латентність читається лише разом із довжиною відповіді. В архітектурі сервіс вирішує, адаптер виконує, і ключ живе тільки в gateway. А unified log — це рядок, з якого виросте весь курс: сьогодні ви бачили його точку А. Наступний урок — prompt lifecycle. Сьогодні ваш системний промпт захардкоджений у коді, і це остання доба, коли це прийнятно. Розберемо, чому промпт — це production-артефакт з версіями, promote і rollback; що стається з якістю, коли «маленьку правку промпта» викочують без сліду; і як зробити відкат за секунди замість розкопок «а як там було вчора». До зустрічі.</a:t>
             </a:r>
             <a:endParaRPr lang="en-US" dirty="0"/>
           </a:p>
@@ -2110,7 +2110,7 @@
           <a:p>
             <a:r>
               <a:rPr lang="en-US" dirty="0"/>
-              <a:t/>
+              <a:t>Маршрут такий. Перша половина уроку — розтин об'єкта керування: чому 200 — це не «працює», контракт виклику, токени, недетермінізм із латентністю і таксономія відмов. Без цього фундаменту решта курсу перетворюється на набір рецептів. Друга половина — каркас капстоуна: архітектура з п'яти компонентів, unified log і mock-провайдер; окремим опційним блоком — реальний ключ. Потім лабораторна на п'ять кроків, антипатерни тижня і домашнє завдання. [Ведучому: блоки 01–05 — найдовший відрізок курсу без коду, ~10 хвилин на таблицях. На блоці токенів дай врізку живого екрана консолі з «—», на таксономії відмов веди курсором по рядках, інакше картинка «повисне».]</a:t>
             </a:r>
             <a:endParaRPr lang="en-US" dirty="0"/>
           </a:p>
@@ -2198,7 +2198,7 @@
           <a:p>
             <a:r>
               <a:rPr lang="en-US" dirty="0"/>
-              <a:t/>
+              <a:t>Перш ніж занурюватись, домовимось про шість слів, які сьогодні звучатимуть постійно. Токен — частинка тексту, якою модель міряє і вхід, і вихід; саме в токенах рахується рахунок, а не в запитах. Системний промпт — інструкція моделі, як поводитися; вона їде в кожному запиті і вже наступного уроку переїде в реєстр версій. finish_reason — поле відповіді, яке каже, чому модель зупинилася: сама завершила думку, вперлася в стелю довжини чи попросила інструмент. usage — блок із кількістю токенів входу й виходу, єдине джерело правди про гроші. Контур керування, англійською control plane, — це наш сервіс: шар, який ухвалює рішення, на відміну від шару, який виконує виклик. І mock-провайдер — фейкова модель, сумісна за API зі справжньою: вона вміє падати на замовлення і реагувати на промпт, тому весь курс проходиться без ключа. Якщо якесь із цих слів зараз незнайоме — нормально, кожне розберемо на місці; тут вони лише щоб не спотикатися.</a:t>
             </a:r>
             <a:endParaRPr lang="en-US" dirty="0"/>
           </a:p>
@@ -2286,7 +2286,7 @@
           <a:p>
             <a:r>
               <a:rPr lang="en-US" dirty="0"/>
-              <a:t/>
+              <a:t>Викликати модель — три рядки коду. Запит пішов, 200 повернувся, демо готове, всі задоволені. Саме тому LLM-прототипи народжуються за день — і саме тому більшість із них ніколи не доживає до проду. Ось чотири питання, на які ті три рядки не відповідають. Гроші: скільки ця фіча коштує на тиждень, на якій задачі бюджет згорає дарма, і хто це помітить — сьогодні чи в рахунку наприкінці місяця? Надійність: що станеться, коли провайдер ляже на 20 хвилин у робочий час, а коли поверне ліміт запитів у пік трафіку? Якість: хто помітить, що відповіді стали гіршими після «маленької» правки промпта? Промпт не проходить компіляцію — це «просто текст», який тихо змінює поведінку системи. І видимість: куди дивитися, коли користувач каже «бот верзе дурниці», а всі графіки зелені? Кожен тиждень курсу закриває одне з цих питань — механізмом, а не порадою.</a:t>
             </a:r>
             <a:endParaRPr lang="en-US" dirty="0"/>
           </a:p>
@@ -2374,7 +2374,7 @@
           <a:p>
             <a:r>
               <a:rPr lang="en-US" dirty="0"/>
-              <a:t/>
+              <a:t>LLM-система може бути «здоровою» за всіма HTTP-метриками — і при цьому брехати користувачам, палити бюджет і деградувати тижнями. Причина — у чотирьох властивостях, яких немає у звичайних сервісів. Недетермінізм: той самий вхід — різний вихід. Оплата за токен: вартість залежить від поведінки, а не від кількості запитів. Регресії без коміта: поведінку змінює правка промпта або оновлення моделі провайдером — жодного деплою. І чужа інфраструктура: ваш uptime залежить від чужого. Звідси теза курсу: LLMOps — не про те, як покликати модель. Це про те, як експлуатувати її як production-сервіс — керувати вартістю, надійністю, якістю і видимістю. І одразу про навантаження, щоб ви планували сили: читання в курсі рівне — кожен тиждень приблизно 45–49 хвилин. А от кодове навантаження нерівне: ДЗ тижня 1 — близько 60 рядків C# з нуля, ДЗ тижня 2 — переважно готовий код з уроку, а пік припадає на тиждень 4, де в одному PR збираються fallback і human-in-the-loop.</a:t>
             </a:r>
             <a:endParaRPr lang="en-US" dirty="0"/>
           </a:p>
@@ -2462,7 +2462,7 @@
           <a:p>
             <a:r>
               <a:rPr lang="en-US" dirty="0"/>
-              <a:t/>
+              <a:t>Перед тим як керувати, треба знати, чим саме керуємо. Виклик моделі — це звичайний HTTP POST з JSON, і в цьому JSON немає магії: є контракт, однаковий у всіх великих провайдерів. Кожен наступний урок додає рішення саме в цей контракт. Головне поле — messages: масив реплік, у кожної роль. System — інструкція, як поводитися: це і є той промпт, який наступного уроку переїде в реєстр. User — те, що написав користувач. Assistant — попередні відповіді моделі, якщо ведете діалог. Важливо: модель не має пам'яті. Історію щоразу привозите ви — і саме тому довгий діалог дорожчає лінійно. З параметрів для операцій важливі три. Temperature і top_p — наскільки «вільно» модель обирає наступний токен: вище — різноманітніше і менш передбачувано, для підтримки зазвичай тримають низьким. Max_tokens — стеля довжини відповіді, тобто стеля вартості одного виклику і найчастіша причина обрізаних відповідей. Response_format — вимога віддати строгий JSON за схемою: перетворює «розпарсимо як вийде» на контракт, який валідує провайдер.</a:t>
             </a:r>
             <a:endParaRPr lang="en-US" dirty="0"/>
           </a:p>
@@ -2550,7 +2550,7 @@
           <a:p>
             <a:r>
               <a:rPr lang="en-US" dirty="0"/>
-              <a:t/>
+              <a:t>Два поля вирішують долю вашої відповіді. Перше — сам текст: choices нуль, message, content. Друге, яке пропускають майже всі, — finish_reason: чому модель зупинилася. Stop — модель сама завершила думку, нормальний випадок. Length — вдарилася в max_tokens, відповідь обрізана: це помилка, а не відповідь — логувати, не кешувати, не показувати як є. Tool_calls — модель просить викликати інструмент, про це урок 6; текст може бути порожнім, і це не збій. Content_filter — відповідь зрізав фільтр провайдера: окрема категорія в метриках, не «помилка сервера». Типова помилка — читати лише content. Тоді обрізана на півслові відповідь виглядає цілком успішною: HTTP 200, текст є, метрики зелені. Користувач бачить фразу, що обривається, а ви — «модель почала дурити». Я витратив на такий випадок пів дня, поки не поставив у лог одне поле. Наш mock віддає лише stop і tool_calls — гілку length наш контур відтворити не може, тому її обробку перевіряють юніт-тестом; це опційна частина ДЗ тижня 1. І третє поле, потрібне весь курс, — usage: скільки токенів пішло на вхід, на вихід і скільки обслужив кеш провайдера.</a:t>
             </a:r>
             <a:endParaRPr lang="en-US" dirty="0"/>
           </a:p>
@@ -2638,7 +2638,7 @@
           <a:p>
             <a:r>
               <a:rPr lang="en-US" dirty="0"/>
-              <a:t/>
+              <a:t>Модель не бачить ні символів, ні слів — вона бачить токени, частинки тексту від токенізатора. Для англійської один токен — приблизно чотири символи, десь три чверті слова. Для української відчутно гірше: кирилиця гірше представлена у словниках токенізаторів, і слово легко розпадається на кілька токенів. Наслідок, який варто перевірити руками на власному тексті: той самий зміст українською коштує дорожче і швидше вибиває контекстне вікно. Це вже операційне рішення — якою мовою тримати системний промпт, що їде в кожному запиті. Друге: токени тарифікуються не однаково. Вхідні — ваш промпт та історія — найдешевші. Вихідні, які модель згенерувала, — типово в кілька разів дорожчі, бо генерація послідовна. А стабільний початок промпта, який провайдер уже бачив, може обслужитися з його кешу за різко нижчою ставкою. Три різні ціни в одному виклику. Звідси принцип: вартість LLM-фічі не виводиться з кількості запитів. Два запити «по тому самому прайсу» відрізняються в десятки разів, якщо один просив рядок відповіді, а другий тягнув історію на десять реплік і згенерував три абзаци. Тому в лозі вхідні й вихідні токени стоять окремо: без них будь-яка цифра вартості — вигадка.</a:t>
             </a:r>
             <a:endParaRPr lang="en-US" dirty="0"/>
           </a:p>
@@ -3950,7 +3950,7 @@
       </p:pic>
       <p:sp>
         <p:nvSpPr>
-          <p:cNvPr id="7" name="Shape 4"/>
+          <p:cNvPr id="8" name="Shape 4"/>
           <p:cNvSpPr/>
           <p:nvPr/>
         </p:nvSpPr>
@@ -3977,7 +3977,7 @@
       </p:sp>
       <p:sp>
         <p:nvSpPr>
-          <p:cNvPr id="8" name="Shape 5"/>
+          <p:cNvPr id="9" name="Shape 5"/>
           <p:cNvSpPr/>
           <p:nvPr/>
         </p:nvSpPr>
@@ -3997,7 +3997,7 @@
       </p:sp>
       <p:sp>
         <p:nvSpPr>
-          <p:cNvPr id="9" name="Text 6"/>
+          <p:cNvPr id="10" name="Text 6"/>
           <p:cNvSpPr/>
           <p:nvPr/>
         </p:nvSpPr>
@@ -4036,7 +4036,7 @@
       </p:sp>
       <p:sp>
         <p:nvSpPr>
-          <p:cNvPr id="10" name="Text 7"/>
+          <p:cNvPr id="11" name="Text 7"/>
           <p:cNvSpPr/>
           <p:nvPr/>
         </p:nvSpPr>
@@ -4075,7 +4075,7 @@
       </p:sp>
       <p:sp>
         <p:nvSpPr>
-          <p:cNvPr id="11" name="Text 8"/>
+          <p:cNvPr id="12" name="Text 8"/>
           <p:cNvSpPr/>
           <p:nvPr/>
         </p:nvSpPr>
@@ -4117,7 +4117,7 @@
       </p:sp>
       <p:sp>
         <p:nvSpPr>
-          <p:cNvPr id="12" name="Shape 9"/>
+          <p:cNvPr id="13" name="Shape 9"/>
           <p:cNvSpPr/>
           <p:nvPr/>
         </p:nvSpPr>
@@ -4144,7 +4144,7 @@
       </p:sp>
       <p:sp>
         <p:nvSpPr>
-          <p:cNvPr id="13" name="Shape 10"/>
+          <p:cNvPr id="14" name="Shape 10"/>
           <p:cNvSpPr/>
           <p:nvPr/>
         </p:nvSpPr>
@@ -4164,7 +4164,7 @@
       </p:sp>
       <p:sp>
         <p:nvSpPr>
-          <p:cNvPr id="14" name="Text 11"/>
+          <p:cNvPr id="15" name="Text 11"/>
           <p:cNvSpPr/>
           <p:nvPr/>
         </p:nvSpPr>
@@ -4203,7 +4203,7 @@
       </p:sp>
       <p:sp>
         <p:nvSpPr>
-          <p:cNvPr id="15" name="Text 12"/>
+          <p:cNvPr id="16" name="Text 12"/>
           <p:cNvSpPr/>
           <p:nvPr/>
         </p:nvSpPr>
@@ -4242,7 +4242,7 @@
       </p:sp>
       <p:sp>
         <p:nvSpPr>
-          <p:cNvPr id="16" name="Text 13"/>
+          <p:cNvPr id="17" name="Text 13"/>
           <p:cNvSpPr/>
           <p:nvPr/>
         </p:nvSpPr>
@@ -4284,7 +4284,7 @@
       </p:sp>
       <p:sp>
         <p:nvSpPr>
-          <p:cNvPr id="17" name="Shape 14"/>
+          <p:cNvPr id="18" name="Shape 14"/>
           <p:cNvSpPr/>
           <p:nvPr/>
         </p:nvSpPr>
@@ -4311,7 +4311,7 @@
       </p:sp>
       <p:sp>
         <p:nvSpPr>
-          <p:cNvPr id="18" name="Shape 15"/>
+          <p:cNvPr id="19" name="Shape 15"/>
           <p:cNvSpPr/>
           <p:nvPr/>
         </p:nvSpPr>
@@ -4331,7 +4331,7 @@
       </p:sp>
       <p:sp>
         <p:nvSpPr>
-          <p:cNvPr id="19" name="Text 16"/>
+          <p:cNvPr id="20" name="Text 16"/>
           <p:cNvSpPr/>
           <p:nvPr/>
         </p:nvSpPr>
@@ -4370,7 +4370,7 @@
       </p:sp>
       <p:sp>
         <p:nvSpPr>
-          <p:cNvPr id="20" name="Text 17"/>
+          <p:cNvPr id="21" name="Text 17"/>
           <p:cNvSpPr/>
           <p:nvPr/>
         </p:nvSpPr>
@@ -4409,7 +4409,7 @@
       </p:sp>
       <p:sp>
         <p:nvSpPr>
-          <p:cNvPr id="21" name="Text 18"/>
+          <p:cNvPr id="22" name="Text 18"/>
           <p:cNvSpPr/>
           <p:nvPr/>
         </p:nvSpPr>
@@ -4451,7 +4451,7 @@
       </p:sp>
       <p:sp>
         <p:nvSpPr>
-          <p:cNvPr id="22" name="Shape 19"/>
+          <p:cNvPr id="23" name="Shape 19"/>
           <p:cNvSpPr/>
           <p:nvPr/>
         </p:nvSpPr>
@@ -4473,7 +4473,7 @@
       </p:sp>
       <p:sp>
         <p:nvSpPr>
-          <p:cNvPr id="23" name="Text 20"/>
+          <p:cNvPr id="24" name="Text 20"/>
           <p:cNvSpPr/>
           <p:nvPr/>
         </p:nvSpPr>
@@ -4512,7 +4512,7 @@
       </p:sp>
       <p:sp>
         <p:nvSpPr>
-          <p:cNvPr id="24" name="Shape 21"/>
+          <p:cNvPr id="25" name="Shape 21"/>
           <p:cNvSpPr/>
           <p:nvPr/>
         </p:nvSpPr>
@@ -4535,7 +4535,7 @@
       </p:sp>
       <p:sp>
         <p:nvSpPr>
-          <p:cNvPr id="25" name="Shape 22"/>
+          <p:cNvPr id="26" name="Shape 22"/>
           <p:cNvSpPr/>
           <p:nvPr/>
         </p:nvSpPr>
@@ -4555,7 +4555,7 @@
       </p:sp>
       <p:sp>
         <p:nvSpPr>
-          <p:cNvPr id="26" name="Shape 23"/>
+          <p:cNvPr id="27" name="Shape 23"/>
           <p:cNvSpPr/>
           <p:nvPr/>
         </p:nvSpPr>
@@ -4582,7 +4582,7 @@
       </p:sp>
       <p:sp>
         <p:nvSpPr>
-          <p:cNvPr id="27" name="Text 24"/>
+          <p:cNvPr id="28" name="Text 24"/>
           <p:cNvSpPr/>
           <p:nvPr/>
         </p:nvSpPr>
@@ -4621,7 +4621,7 @@
       </p:sp>
       <p:sp>
         <p:nvSpPr>
-          <p:cNvPr id="28" name="Shape 25"/>
+          <p:cNvPr id="29" name="Shape 25"/>
           <p:cNvSpPr/>
           <p:nvPr/>
         </p:nvSpPr>
@@ -4644,7 +4644,7 @@
       </p:sp>
       <p:sp>
         <p:nvSpPr>
-          <p:cNvPr id="29" name="Shape 26"/>
+          <p:cNvPr id="30" name="Shape 26"/>
           <p:cNvSpPr/>
           <p:nvPr/>
         </p:nvSpPr>
@@ -4664,7 +4664,7 @@
       </p:sp>
       <p:sp>
         <p:nvSpPr>
-          <p:cNvPr id="30" name="Shape 27"/>
+          <p:cNvPr id="31" name="Shape 27"/>
           <p:cNvSpPr/>
           <p:nvPr/>
         </p:nvSpPr>
@@ -4686,7 +4686,7 @@
       </p:sp>
       <p:sp>
         <p:nvSpPr>
-          <p:cNvPr id="31" name="Text 28"/>
+          <p:cNvPr id="32" name="Text 28"/>
           <p:cNvSpPr/>
           <p:nvPr/>
         </p:nvSpPr>
@@ -4725,7 +4725,7 @@
       </p:sp>
       <p:sp>
         <p:nvSpPr>
-          <p:cNvPr id="32" name="Shape 29"/>
+          <p:cNvPr id="33" name="Shape 29"/>
           <p:cNvSpPr/>
           <p:nvPr/>
         </p:nvSpPr>
@@ -4747,7 +4747,7 @@
       </p:sp>
       <p:sp>
         <p:nvSpPr>
-          <p:cNvPr id="33" name="Text 30"/>
+          <p:cNvPr id="34" name="Text 30"/>
           <p:cNvSpPr/>
           <p:nvPr/>
         </p:nvSpPr>
@@ -4786,7 +4786,7 @@
       </p:sp>
       <p:sp>
         <p:nvSpPr>
-          <p:cNvPr id="34" name="Text 31"/>
+          <p:cNvPr id="35" name="Text 31"/>
           <p:cNvSpPr/>
           <p:nvPr/>
         </p:nvSpPr>
@@ -4820,7 +4820,7 @@
                 <a:ea typeface="Montserrat" pitchFamily="34" charset="-122"/>
                 <a:cs typeface="Montserrat" pitchFamily="34" charset="-120"/>
               </a:rPr>
-              <a:t>Перевіряємо властивості, а не рядки: чи є потрібне, чи немає забороненого, чи тримається формат. На цьому стоїть golden dataset уроку 10 — expect і forbid, а не «дорівнює».</a:t>
+              <a:t>Перевіряємо властивості, а не рядки: expect і forbid, не «дорівнює».</a:t>
             </a:r>
             <a:endParaRPr lang="en-US" sz="1300" dirty="0"/>
           </a:p>
@@ -4992,7 +4992,7 @@
         </p:nvSpPr>
         <p:spPr>
           <a:xfrm>
-            <a:off x="1280160" y="1024128"/>
+            <a:off x="1280160" y="1193140"/>
             <a:ext cx="777240" cy="256032"/>
           </a:xfrm>
           <a:prstGeom prst="roundRect">
@@ -5014,7 +5014,7 @@
         </p:nvSpPr>
         <p:spPr>
           <a:xfrm>
-            <a:off x="1280160" y="1024128"/>
+            <a:off x="1280160" y="1193140"/>
             <a:ext cx="777240" cy="256032"/>
           </a:xfrm>
           <a:prstGeom prst="rect">
@@ -5071,7 +5071,7 @@
       </p:pic>
       <p:sp>
         <p:nvSpPr>
-          <p:cNvPr id="7" name="Text 4"/>
+          <p:cNvPr id="8" name="Text 4"/>
           <p:cNvSpPr/>
           <p:nvPr/>
         </p:nvSpPr>
@@ -5110,7 +5110,7 @@
       </p:sp>
       <p:sp>
         <p:nvSpPr>
-          <p:cNvPr id="8" name="Shape 5"/>
+          <p:cNvPr id="9" name="Shape 5"/>
           <p:cNvSpPr/>
           <p:nvPr/>
         </p:nvSpPr>
@@ -5125,14 +5125,14 @@
             </a:avLst>
           </a:prstGeom>
           <a:solidFill>
-            <a:srgbClr val="000000"/>
+            <a:srgbClr val="EFEAFE"/>
           </a:solidFill>
           <a:ln/>
         </p:spPr>
       </p:sp>
       <p:sp>
         <p:nvSpPr>
-          <p:cNvPr id="9" name="Text 6"/>
+          <p:cNvPr id="10" name="Text 6"/>
           <p:cNvSpPr/>
           <p:nvPr/>
         </p:nvSpPr>
@@ -5171,7 +5171,7 @@
       </p:sp>
       <p:sp>
         <p:nvSpPr>
-          <p:cNvPr id="10" name="Shape 7"/>
+          <p:cNvPr id="11" name="Shape 7"/>
           <p:cNvSpPr/>
           <p:nvPr/>
         </p:nvSpPr>
@@ -5193,7 +5193,7 @@
       </p:sp>
       <p:sp>
         <p:nvSpPr>
-          <p:cNvPr id="11" name="Text 8"/>
+          <p:cNvPr id="12" name="Text 8"/>
           <p:cNvSpPr/>
           <p:nvPr/>
         </p:nvSpPr>
@@ -5232,7 +5232,7 @@
       </p:sp>
       <p:sp>
         <p:nvSpPr>
-          <p:cNvPr id="12" name="Text 9"/>
+          <p:cNvPr id="13" name="Text 9"/>
           <p:cNvSpPr/>
           <p:nvPr/>
         </p:nvSpPr>
@@ -5271,7 +5271,7 @@
       </p:sp>
       <p:sp>
         <p:nvSpPr>
-          <p:cNvPr id="13" name="Shape 10"/>
+          <p:cNvPr id="14" name="Shape 10"/>
           <p:cNvSpPr/>
           <p:nvPr/>
         </p:nvSpPr>
@@ -5286,14 +5286,14 @@
             </a:avLst>
           </a:prstGeom>
           <a:solidFill>
-            <a:srgbClr val="000000"/>
+            <a:srgbClr val="EFEAFE"/>
           </a:solidFill>
           <a:ln/>
         </p:spPr>
       </p:sp>
       <p:sp>
         <p:nvSpPr>
-          <p:cNvPr id="14" name="Text 11"/>
+          <p:cNvPr id="15" name="Text 11"/>
           <p:cNvSpPr/>
           <p:nvPr/>
         </p:nvSpPr>
@@ -5332,7 +5332,7 @@
       </p:sp>
       <p:sp>
         <p:nvSpPr>
-          <p:cNvPr id="15" name="Shape 12"/>
+          <p:cNvPr id="16" name="Shape 12"/>
           <p:cNvSpPr/>
           <p:nvPr/>
         </p:nvSpPr>
@@ -5354,7 +5354,7 @@
       </p:sp>
       <p:sp>
         <p:nvSpPr>
-          <p:cNvPr id="16" name="Text 13"/>
+          <p:cNvPr id="17" name="Text 13"/>
           <p:cNvSpPr/>
           <p:nvPr/>
         </p:nvSpPr>
@@ -5393,7 +5393,7 @@
       </p:sp>
       <p:sp>
         <p:nvSpPr>
-          <p:cNvPr id="17" name="Text 14"/>
+          <p:cNvPr id="18" name="Text 14"/>
           <p:cNvSpPr/>
           <p:nvPr/>
         </p:nvSpPr>
@@ -5424,7 +5424,7 @@
                 <a:ea typeface="Montserrat" pitchFamily="34" charset="-122"/>
                 <a:cs typeface="Montserrat" pitchFamily="34" charset="-120"/>
               </a:rPr>
-              <a:t>схематично: співвідношення часток, а не виміряні значення — конкретні числа побачите у власному лозі</a:t>
+              <a:t>схематично: співвідношення часток, не виміряні значення</a:t>
             </a:r>
             <a:endParaRPr lang="en-US" sz="1050" dirty="0"/>
           </a:p>
@@ -5432,7 +5432,7 @@
       </p:sp>
       <p:sp>
         <p:nvSpPr>
-          <p:cNvPr id="18" name="Shape 15"/>
+          <p:cNvPr id="19" name="Shape 15"/>
           <p:cNvSpPr/>
           <p:nvPr/>
         </p:nvSpPr>
@@ -5454,7 +5454,7 @@
       </p:sp>
       <p:sp>
         <p:nvSpPr>
-          <p:cNvPr id="19" name="Text 16"/>
+          <p:cNvPr id="20" name="Text 16"/>
           <p:cNvSpPr/>
           <p:nvPr/>
         </p:nvSpPr>
@@ -5493,7 +5493,7 @@
       </p:sp>
       <p:sp>
         <p:nvSpPr>
-          <p:cNvPr id="20" name="Text 17"/>
+          <p:cNvPr id="21" name="Text 17"/>
           <p:cNvSpPr/>
           <p:nvPr/>
         </p:nvSpPr>
@@ -5527,7 +5527,7 @@
                 <a:ea typeface="Montserrat" pitchFamily="34" charset="-122"/>
                 <a:cs typeface="Montserrat" pitchFamily="34" charset="-120"/>
               </a:rPr>
-              <a:t>Читати p95 як характеристику інфраструктури. Зростання p95 однаково легко означає «відповіді подовшали», як і «провайдеру погано» — тому latency у лозі живе поряд із вихідними токенами.</a:t>
+              <a:t>p95 росте і від довших відповідей, і від проблем провайдера.</a:t>
             </a:r>
             <a:endParaRPr lang="en-US" sz="1300" dirty="0"/>
           </a:p>
@@ -5535,7 +5535,7 @@
       </p:sp>
       <p:sp>
         <p:nvSpPr>
-          <p:cNvPr id="21" name="Text 18"/>
+          <p:cNvPr id="22" name="Text 18"/>
           <p:cNvSpPr/>
           <p:nvPr/>
         </p:nvSpPr>
@@ -5752,7 +5752,7 @@
         </p:nvSpPr>
         <p:spPr>
           <a:xfrm>
-            <a:off x="1280160" y="1024128"/>
+            <a:off x="1280160" y="1193140"/>
             <a:ext cx="777240" cy="256032"/>
           </a:xfrm>
           <a:prstGeom prst="roundRect">
@@ -5774,7 +5774,7 @@
         </p:nvSpPr>
         <p:spPr>
           <a:xfrm>
-            <a:off x="1280160" y="1024128"/>
+            <a:off x="1280160" y="1193140"/>
             <a:ext cx="777240" cy="256032"/>
           </a:xfrm>
           <a:prstGeom prst="rect">
@@ -5831,7 +5831,7 @@
       </p:pic>
       <p:sp>
         <p:nvSpPr>
-          <p:cNvPr id="7" name="Shape 4"/>
+          <p:cNvPr id="8" name="Shape 4"/>
           <p:cNvSpPr/>
           <p:nvPr/>
         </p:nvSpPr>
@@ -5853,7 +5853,7 @@
       </p:sp>
       <p:sp>
         <p:nvSpPr>
-          <p:cNvPr id="8" name="Text 5"/>
+          <p:cNvPr id="9" name="Text 5"/>
           <p:cNvSpPr/>
           <p:nvPr/>
         </p:nvSpPr>
@@ -5892,7 +5892,7 @@
       </p:sp>
       <p:sp>
         <p:nvSpPr>
-          <p:cNvPr id="9" name="Shape 6"/>
+          <p:cNvPr id="10" name="Shape 6"/>
           <p:cNvSpPr/>
           <p:nvPr/>
         </p:nvSpPr>
@@ -5914,7 +5914,7 @@
       </p:sp>
       <p:sp>
         <p:nvSpPr>
-          <p:cNvPr id="10" name="Text 7"/>
+          <p:cNvPr id="11" name="Text 7"/>
           <p:cNvSpPr/>
           <p:nvPr/>
         </p:nvSpPr>
@@ -5953,7 +5953,7 @@
       </p:sp>
       <p:sp>
         <p:nvSpPr>
-          <p:cNvPr id="11" name="Text 8"/>
+          <p:cNvPr id="12" name="Text 8"/>
           <p:cNvSpPr/>
           <p:nvPr/>
         </p:nvSpPr>
@@ -5992,7 +5992,7 @@
       </p:sp>
       <p:sp>
         <p:nvSpPr>
-          <p:cNvPr id="12" name="Shape 9"/>
+          <p:cNvPr id="13" name="Shape 9"/>
           <p:cNvSpPr/>
           <p:nvPr/>
         </p:nvSpPr>
@@ -6014,7 +6014,7 @@
       </p:sp>
       <p:sp>
         <p:nvSpPr>
-          <p:cNvPr id="13" name="Text 10"/>
+          <p:cNvPr id="14" name="Text 10"/>
           <p:cNvSpPr/>
           <p:nvPr/>
         </p:nvSpPr>
@@ -6053,7 +6053,7 @@
       </p:sp>
       <p:sp>
         <p:nvSpPr>
-          <p:cNvPr id="14" name="Text 11"/>
+          <p:cNvPr id="15" name="Text 11"/>
           <p:cNvSpPr/>
           <p:nvPr/>
         </p:nvSpPr>
@@ -6092,7 +6092,7 @@
       </p:sp>
       <p:sp>
         <p:nvSpPr>
-          <p:cNvPr id="15" name="Shape 12"/>
+          <p:cNvPr id="16" name="Shape 12"/>
           <p:cNvSpPr/>
           <p:nvPr/>
         </p:nvSpPr>
@@ -6114,7 +6114,7 @@
       </p:sp>
       <p:sp>
         <p:nvSpPr>
-          <p:cNvPr id="16" name="Text 13"/>
+          <p:cNvPr id="17" name="Text 13"/>
           <p:cNvSpPr/>
           <p:nvPr/>
         </p:nvSpPr>
@@ -6153,7 +6153,7 @@
       </p:sp>
       <p:sp>
         <p:nvSpPr>
-          <p:cNvPr id="17" name="Text 14"/>
+          <p:cNvPr id="18" name="Text 14"/>
           <p:cNvSpPr/>
           <p:nvPr/>
         </p:nvSpPr>
@@ -6192,7 +6192,7 @@
       </p:sp>
       <p:sp>
         <p:nvSpPr>
-          <p:cNvPr id="18" name="Shape 15"/>
+          <p:cNvPr id="19" name="Shape 15"/>
           <p:cNvSpPr/>
           <p:nvPr/>
         </p:nvSpPr>
@@ -6214,7 +6214,7 @@
       </p:sp>
       <p:sp>
         <p:nvSpPr>
-          <p:cNvPr id="19" name="Text 16"/>
+          <p:cNvPr id="20" name="Text 16"/>
           <p:cNvSpPr/>
           <p:nvPr/>
         </p:nvSpPr>
@@ -6253,7 +6253,7 @@
       </p:sp>
       <p:sp>
         <p:nvSpPr>
-          <p:cNvPr id="20" name="Shape 17"/>
+          <p:cNvPr id="21" name="Shape 17"/>
           <p:cNvSpPr/>
           <p:nvPr/>
         </p:nvSpPr>
@@ -6275,7 +6275,7 @@
       </p:sp>
       <p:sp>
         <p:nvSpPr>
-          <p:cNvPr id="21" name="Text 18"/>
+          <p:cNvPr id="22" name="Text 18"/>
           <p:cNvSpPr/>
           <p:nvPr/>
         </p:nvSpPr>
@@ -6314,7 +6314,7 @@
       </p:sp>
       <p:sp>
         <p:nvSpPr>
-          <p:cNvPr id="22" name="Text 19"/>
+          <p:cNvPr id="23" name="Text 19"/>
           <p:cNvSpPr/>
           <p:nvPr/>
         </p:nvSpPr>
@@ -6353,7 +6353,7 @@
       </p:sp>
       <p:sp>
         <p:nvSpPr>
-          <p:cNvPr id="23" name="Shape 20"/>
+          <p:cNvPr id="24" name="Shape 20"/>
           <p:cNvSpPr/>
           <p:nvPr/>
         </p:nvSpPr>
@@ -6375,7 +6375,7 @@
       </p:sp>
       <p:sp>
         <p:nvSpPr>
-          <p:cNvPr id="24" name="Text 21"/>
+          <p:cNvPr id="25" name="Text 21"/>
           <p:cNvSpPr/>
           <p:nvPr/>
         </p:nvSpPr>
@@ -6414,7 +6414,7 @@
       </p:sp>
       <p:sp>
         <p:nvSpPr>
-          <p:cNvPr id="25" name="Text 22"/>
+          <p:cNvPr id="26" name="Text 22"/>
           <p:cNvSpPr/>
           <p:nvPr/>
         </p:nvSpPr>
@@ -6453,7 +6453,7 @@
       </p:sp>
       <p:sp>
         <p:nvSpPr>
-          <p:cNvPr id="26" name="Shape 23"/>
+          <p:cNvPr id="27" name="Shape 23"/>
           <p:cNvSpPr/>
           <p:nvPr/>
         </p:nvSpPr>
@@ -6480,7 +6480,7 @@
       </p:sp>
       <p:sp>
         <p:nvSpPr>
-          <p:cNvPr id="27" name="Text 24"/>
+          <p:cNvPr id="28" name="Text 24"/>
           <p:cNvSpPr/>
           <p:nvPr/>
         </p:nvSpPr>
@@ -6514,7 +6514,7 @@
                 <a:ea typeface="Montserrat" pitchFamily="34" charset="-122"/>
                 <a:cs typeface="Montserrat" pitchFamily="34" charset="-120"/>
               </a:rPr>
-              <a:t>Дві праві категорії — причина, чому цей курс існує: їх ловить лише власний лог, перевірки якості та гейт.</a:t>
+              <a:t>Дві праві категорії ловить лише власний лог і гейт якості.</a:t>
             </a:r>
             <a:endParaRPr lang="en-US" sz="1300" dirty="0"/>
           </a:p>
@@ -6765,7 +6765,7 @@
       </p:pic>
       <p:sp>
         <p:nvSpPr>
-          <p:cNvPr id="7" name="Shape 4"/>
+          <p:cNvPr id="8" name="Shape 4"/>
           <p:cNvSpPr/>
           <p:nvPr/>
         </p:nvSpPr>
@@ -6792,7 +6792,7 @@
       </p:sp>
       <p:sp>
         <p:nvSpPr>
-          <p:cNvPr id="8" name="Text 5"/>
+          <p:cNvPr id="9" name="Text 5"/>
           <p:cNvSpPr/>
           <p:nvPr/>
         </p:nvSpPr>
@@ -6831,7 +6831,7 @@
       </p:sp>
       <p:sp>
         <p:nvSpPr>
-          <p:cNvPr id="9" name="Shape 6"/>
+          <p:cNvPr id="10" name="Shape 6"/>
           <p:cNvSpPr/>
           <p:nvPr/>
         </p:nvSpPr>
@@ -6854,7 +6854,7 @@
       </p:sp>
       <p:sp>
         <p:nvSpPr>
-          <p:cNvPr id="10" name="Shape 7"/>
+          <p:cNvPr id="11" name="Shape 7"/>
           <p:cNvSpPr/>
           <p:nvPr/>
         </p:nvSpPr>
@@ -6874,7 +6874,7 @@
       </p:sp>
       <p:sp>
         <p:nvSpPr>
-          <p:cNvPr id="11" name="Shape 8"/>
+          <p:cNvPr id="12" name="Shape 8"/>
           <p:cNvSpPr/>
           <p:nvPr/>
         </p:nvSpPr>
@@ -6901,7 +6901,7 @@
       </p:sp>
       <p:sp>
         <p:nvSpPr>
-          <p:cNvPr id="12" name="Text 9"/>
+          <p:cNvPr id="13" name="Text 9"/>
           <p:cNvSpPr/>
           <p:nvPr/>
         </p:nvSpPr>
@@ -6940,7 +6940,7 @@
       </p:sp>
       <p:sp>
         <p:nvSpPr>
-          <p:cNvPr id="13" name="Shape 10"/>
+          <p:cNvPr id="14" name="Shape 10"/>
           <p:cNvSpPr/>
           <p:nvPr/>
         </p:nvSpPr>
@@ -6963,7 +6963,7 @@
       </p:sp>
       <p:sp>
         <p:nvSpPr>
-          <p:cNvPr id="14" name="Shape 11"/>
+          <p:cNvPr id="15" name="Shape 11"/>
           <p:cNvSpPr/>
           <p:nvPr/>
         </p:nvSpPr>
@@ -6983,7 +6983,7 @@
       </p:sp>
       <p:sp>
         <p:nvSpPr>
-          <p:cNvPr id="15" name="Shape 12"/>
+          <p:cNvPr id="16" name="Shape 12"/>
           <p:cNvSpPr/>
           <p:nvPr/>
         </p:nvSpPr>
@@ -7005,7 +7005,7 @@
       </p:sp>
       <p:sp>
         <p:nvSpPr>
-          <p:cNvPr id="16" name="Text 13"/>
+          <p:cNvPr id="17" name="Text 13"/>
           <p:cNvSpPr/>
           <p:nvPr/>
         </p:nvSpPr>
@@ -7044,7 +7044,7 @@
       </p:sp>
       <p:sp>
         <p:nvSpPr>
-          <p:cNvPr id="17" name="Shape 14"/>
+          <p:cNvPr id="18" name="Shape 14"/>
           <p:cNvSpPr/>
           <p:nvPr/>
         </p:nvSpPr>
@@ -7067,7 +7067,7 @@
       </p:sp>
       <p:sp>
         <p:nvSpPr>
-          <p:cNvPr id="18" name="Shape 15"/>
+          <p:cNvPr id="19" name="Shape 15"/>
           <p:cNvSpPr/>
           <p:nvPr/>
         </p:nvSpPr>
@@ -7087,7 +7087,7 @@
       </p:sp>
       <p:sp>
         <p:nvSpPr>
-          <p:cNvPr id="19" name="Shape 16"/>
+          <p:cNvPr id="20" name="Shape 16"/>
           <p:cNvSpPr/>
           <p:nvPr/>
         </p:nvSpPr>
@@ -7114,7 +7114,7 @@
       </p:sp>
       <p:sp>
         <p:nvSpPr>
-          <p:cNvPr id="20" name="Text 17"/>
+          <p:cNvPr id="21" name="Text 17"/>
           <p:cNvSpPr/>
           <p:nvPr/>
         </p:nvSpPr>
@@ -7153,7 +7153,7 @@
       </p:sp>
       <p:sp>
         <p:nvSpPr>
-          <p:cNvPr id="21" name="Shape 18"/>
+          <p:cNvPr id="22" name="Shape 18"/>
           <p:cNvSpPr/>
           <p:nvPr/>
         </p:nvSpPr>
@@ -7176,7 +7176,7 @@
       </p:sp>
       <p:sp>
         <p:nvSpPr>
-          <p:cNvPr id="22" name="Shape 19"/>
+          <p:cNvPr id="23" name="Shape 19"/>
           <p:cNvSpPr/>
           <p:nvPr/>
         </p:nvSpPr>
@@ -7196,7 +7196,7 @@
       </p:sp>
       <p:sp>
         <p:nvSpPr>
-          <p:cNvPr id="23" name="Shape 20"/>
+          <p:cNvPr id="24" name="Shape 20"/>
           <p:cNvSpPr/>
           <p:nvPr/>
         </p:nvSpPr>
@@ -7223,7 +7223,7 @@
       </p:sp>
       <p:sp>
         <p:nvSpPr>
-          <p:cNvPr id="24" name="Text 21"/>
+          <p:cNvPr id="25" name="Text 21"/>
           <p:cNvSpPr/>
           <p:nvPr/>
         </p:nvSpPr>
@@ -7262,7 +7262,7 @@
       </p:sp>
       <p:sp>
         <p:nvSpPr>
-          <p:cNvPr id="25" name="Shape 22"/>
+          <p:cNvPr id="26" name="Shape 22"/>
           <p:cNvSpPr/>
           <p:nvPr/>
         </p:nvSpPr>
@@ -7285,7 +7285,7 @@
       </p:sp>
       <p:sp>
         <p:nvSpPr>
-          <p:cNvPr id="26" name="Shape 23"/>
+          <p:cNvPr id="27" name="Shape 23"/>
           <p:cNvSpPr/>
           <p:nvPr/>
         </p:nvSpPr>
@@ -7305,7 +7305,7 @@
       </p:sp>
       <p:sp>
         <p:nvSpPr>
-          <p:cNvPr id="27" name="Shape 24"/>
+          <p:cNvPr id="28" name="Shape 24"/>
           <p:cNvSpPr/>
           <p:nvPr/>
         </p:nvSpPr>
@@ -7327,7 +7327,7 @@
       </p:sp>
       <p:sp>
         <p:nvSpPr>
-          <p:cNvPr id="28" name="Text 25"/>
+          <p:cNvPr id="29" name="Text 25"/>
           <p:cNvSpPr/>
           <p:nvPr/>
         </p:nvSpPr>
@@ -7366,7 +7366,7 @@
       </p:sp>
       <p:sp>
         <p:nvSpPr>
-          <p:cNvPr id="29" name="Shape 26"/>
+          <p:cNvPr id="30" name="Shape 26"/>
           <p:cNvSpPr/>
           <p:nvPr/>
         </p:nvSpPr>
@@ -7393,7 +7393,7 @@
       </p:sp>
       <p:sp>
         <p:nvSpPr>
-          <p:cNvPr id="30" name="Text 27"/>
+          <p:cNvPr id="31" name="Text 27"/>
           <p:cNvSpPr/>
           <p:nvPr/>
         </p:nvSpPr>
@@ -7452,7 +7452,7 @@
       </p:sp>
       <p:sp>
         <p:nvSpPr>
-          <p:cNvPr id="31" name="Shape 28"/>
+          <p:cNvPr id="32" name="Shape 28"/>
           <p:cNvSpPr/>
           <p:nvPr/>
         </p:nvSpPr>
@@ -7479,7 +7479,7 @@
       </p:sp>
       <p:sp>
         <p:nvSpPr>
-          <p:cNvPr id="32" name="Text 29"/>
+          <p:cNvPr id="33" name="Text 29"/>
           <p:cNvSpPr/>
           <p:nvPr/>
         </p:nvSpPr>
@@ -7685,7 +7685,7 @@
         </p:nvSpPr>
         <p:spPr>
           <a:xfrm>
-            <a:off x="1280160" y="1024128"/>
+            <a:off x="1280160" y="1193140"/>
             <a:ext cx="777240" cy="256032"/>
           </a:xfrm>
           <a:prstGeom prst="roundRect">
@@ -7707,7 +7707,7 @@
         </p:nvSpPr>
         <p:spPr>
           <a:xfrm>
-            <a:off x="1280160" y="1024128"/>
+            <a:off x="1280160" y="1193140"/>
             <a:ext cx="777240" cy="256032"/>
           </a:xfrm>
           <a:prstGeom prst="rect">
@@ -7764,7 +7764,7 @@
       </p:pic>
       <p:sp>
         <p:nvSpPr>
-          <p:cNvPr id="7" name="Shape 4"/>
+          <p:cNvPr id="8" name="Shape 4"/>
           <p:cNvSpPr/>
           <p:nvPr/>
         </p:nvSpPr>
@@ -7791,7 +7791,7 @@
       </p:sp>
       <p:sp>
         <p:nvSpPr>
-          <p:cNvPr id="8" name="Text 5"/>
+          <p:cNvPr id="9" name="Text 5"/>
           <p:cNvSpPr/>
           <p:nvPr/>
         </p:nvSpPr>
@@ -7830,7 +7830,7 @@
       </p:sp>
       <p:sp>
         <p:nvSpPr>
-          <p:cNvPr id="9" name="Text 6"/>
+          <p:cNvPr id="10" name="Text 6"/>
           <p:cNvSpPr/>
           <p:nvPr/>
         </p:nvSpPr>
@@ -7869,7 +7869,7 @@
       </p:sp>
       <p:sp>
         <p:nvSpPr>
-          <p:cNvPr id="10" name="Shape 7"/>
+          <p:cNvPr id="11" name="Shape 7"/>
           <p:cNvSpPr/>
           <p:nvPr/>
         </p:nvSpPr>
@@ -7891,7 +7891,7 @@
       </p:sp>
       <p:sp>
         <p:nvSpPr>
-          <p:cNvPr id="11" name="Text 8"/>
+          <p:cNvPr id="12" name="Text 8"/>
           <p:cNvSpPr/>
           <p:nvPr/>
         </p:nvSpPr>
@@ -7930,7 +7930,7 @@
       </p:sp>
       <p:sp>
         <p:nvSpPr>
-          <p:cNvPr id="12" name="Text 9"/>
+          <p:cNvPr id="13" name="Text 9"/>
           <p:cNvSpPr/>
           <p:nvPr/>
         </p:nvSpPr>
@@ -7969,7 +7969,7 @@
       </p:sp>
       <p:sp>
         <p:nvSpPr>
-          <p:cNvPr id="13" name="Shape 10"/>
+          <p:cNvPr id="14" name="Shape 10"/>
           <p:cNvSpPr/>
           <p:nvPr/>
         </p:nvSpPr>
@@ -7996,7 +7996,7 @@
       </p:sp>
       <p:sp>
         <p:nvSpPr>
-          <p:cNvPr id="14" name="Text 11"/>
+          <p:cNvPr id="15" name="Text 11"/>
           <p:cNvSpPr/>
           <p:nvPr/>
         </p:nvSpPr>
@@ -8035,7 +8035,7 @@
       </p:sp>
       <p:sp>
         <p:nvSpPr>
-          <p:cNvPr id="15" name="Text 12"/>
+          <p:cNvPr id="16" name="Text 12"/>
           <p:cNvSpPr/>
           <p:nvPr/>
         </p:nvSpPr>
@@ -8074,7 +8074,7 @@
       </p:sp>
       <p:sp>
         <p:nvSpPr>
-          <p:cNvPr id="16" name="Shape 13"/>
+          <p:cNvPr id="17" name="Shape 13"/>
           <p:cNvSpPr/>
           <p:nvPr/>
         </p:nvSpPr>
@@ -8101,7 +8101,7 @@
       </p:sp>
       <p:sp>
         <p:nvSpPr>
-          <p:cNvPr id="17" name="Text 14"/>
+          <p:cNvPr id="18" name="Text 14"/>
           <p:cNvSpPr/>
           <p:nvPr/>
         </p:nvSpPr>
@@ -8140,7 +8140,7 @@
       </p:sp>
       <p:sp>
         <p:nvSpPr>
-          <p:cNvPr id="18" name="Text 15"/>
+          <p:cNvPr id="19" name="Text 15"/>
           <p:cNvSpPr/>
           <p:nvPr/>
         </p:nvSpPr>
@@ -8179,7 +8179,7 @@
       </p:sp>
       <p:sp>
         <p:nvSpPr>
-          <p:cNvPr id="19" name="Shape 16"/>
+          <p:cNvPr id="20" name="Shape 16"/>
           <p:cNvSpPr/>
           <p:nvPr/>
         </p:nvSpPr>
@@ -8206,7 +8206,7 @@
       </p:sp>
       <p:sp>
         <p:nvSpPr>
-          <p:cNvPr id="20" name="Text 17"/>
+          <p:cNvPr id="21" name="Text 17"/>
           <p:cNvSpPr/>
           <p:nvPr/>
         </p:nvSpPr>
@@ -8245,7 +8245,7 @@
       </p:sp>
       <p:sp>
         <p:nvSpPr>
-          <p:cNvPr id="21" name="Text 18"/>
+          <p:cNvPr id="22" name="Text 18"/>
           <p:cNvSpPr/>
           <p:nvPr/>
         </p:nvSpPr>
@@ -8284,7 +8284,7 @@
       </p:sp>
       <p:sp>
         <p:nvSpPr>
-          <p:cNvPr id="22" name="Shape 19"/>
+          <p:cNvPr id="23" name="Shape 19"/>
           <p:cNvSpPr/>
           <p:nvPr/>
         </p:nvSpPr>
@@ -8311,7 +8311,7 @@
       </p:sp>
       <p:sp>
         <p:nvSpPr>
-          <p:cNvPr id="23" name="Text 20"/>
+          <p:cNvPr id="24" name="Text 20"/>
           <p:cNvSpPr/>
           <p:nvPr/>
         </p:nvSpPr>
@@ -8596,7 +8596,7 @@
       </p:pic>
       <p:sp>
         <p:nvSpPr>
-          <p:cNvPr id="7" name="Shape 4"/>
+          <p:cNvPr id="8" name="Shape 4"/>
           <p:cNvSpPr/>
           <p:nvPr/>
         </p:nvSpPr>
@@ -8618,7 +8618,7 @@
       </p:sp>
       <p:sp>
         <p:nvSpPr>
-          <p:cNvPr id="8" name="Text 5"/>
+          <p:cNvPr id="9" name="Text 5"/>
           <p:cNvSpPr/>
           <p:nvPr/>
         </p:nvSpPr>
@@ -8657,7 +8657,7 @@
       </p:sp>
       <p:sp>
         <p:nvSpPr>
-          <p:cNvPr id="9" name="Text 6"/>
+          <p:cNvPr id="10" name="Text 6"/>
           <p:cNvSpPr/>
           <p:nvPr/>
         </p:nvSpPr>
@@ -8696,7 +8696,7 @@
       </p:sp>
       <p:sp>
         <p:nvSpPr>
-          <p:cNvPr id="10" name="Text 7"/>
+          <p:cNvPr id="11" name="Text 7"/>
           <p:cNvSpPr/>
           <p:nvPr/>
         </p:nvSpPr>
@@ -8735,7 +8735,7 @@
       </p:sp>
       <p:sp>
         <p:nvSpPr>
-          <p:cNvPr id="11" name="Shape 8"/>
+          <p:cNvPr id="12" name="Shape 8"/>
           <p:cNvSpPr/>
           <p:nvPr/>
         </p:nvSpPr>
@@ -8762,7 +8762,7 @@
       </p:sp>
       <p:sp>
         <p:nvSpPr>
-          <p:cNvPr id="12" name="Text 9"/>
+          <p:cNvPr id="13" name="Text 9"/>
           <p:cNvSpPr/>
           <p:nvPr/>
         </p:nvSpPr>
@@ -8801,7 +8801,7 @@
       </p:sp>
       <p:sp>
         <p:nvSpPr>
-          <p:cNvPr id="13" name="Text 10"/>
+          <p:cNvPr id="14" name="Text 10"/>
           <p:cNvSpPr/>
           <p:nvPr/>
         </p:nvSpPr>
@@ -8840,7 +8840,7 @@
       </p:sp>
       <p:sp>
         <p:nvSpPr>
-          <p:cNvPr id="14" name="Text 11"/>
+          <p:cNvPr id="15" name="Text 11"/>
           <p:cNvSpPr/>
           <p:nvPr/>
         </p:nvSpPr>
@@ -8879,7 +8879,7 @@
       </p:sp>
       <p:sp>
         <p:nvSpPr>
-          <p:cNvPr id="15" name="Shape 12"/>
+          <p:cNvPr id="16" name="Shape 12"/>
           <p:cNvSpPr/>
           <p:nvPr/>
         </p:nvSpPr>
@@ -8901,7 +8901,7 @@
       </p:sp>
       <p:sp>
         <p:nvSpPr>
-          <p:cNvPr id="16" name="Text 13"/>
+          <p:cNvPr id="17" name="Text 13"/>
           <p:cNvSpPr/>
           <p:nvPr/>
         </p:nvSpPr>
@@ -8940,7 +8940,7 @@
       </p:sp>
       <p:sp>
         <p:nvSpPr>
-          <p:cNvPr id="17" name="Text 14"/>
+          <p:cNvPr id="18" name="Text 14"/>
           <p:cNvSpPr/>
           <p:nvPr/>
         </p:nvSpPr>
@@ -8974,7 +8974,7 @@
                 <a:ea typeface="Montserrat" pitchFamily="34" charset="-122"/>
                 <a:cs typeface="Montserrat" pitchFamily="34" charset="-120"/>
               </a:rPr>
-              <a:t>Ключ провайдера живе тільки в gateway. Секрет у коді застосунку = контуру керування ще немає.</a:t>
+              <a:t>Ключ живе тільки в gateway — інакше контуру керування немає.</a:t>
             </a:r>
             <a:endParaRPr lang="en-US" sz="1300" dirty="0"/>
           </a:p>
@@ -8982,7 +8982,7 @@
       </p:sp>
       <p:sp>
         <p:nvSpPr>
-          <p:cNvPr id="18" name="Shape 15"/>
+          <p:cNvPr id="19" name="Shape 15"/>
           <p:cNvSpPr/>
           <p:nvPr/>
         </p:nvSpPr>
@@ -9004,7 +9004,7 @@
       </p:sp>
       <p:sp>
         <p:nvSpPr>
-          <p:cNvPr id="19" name="Text 16"/>
+          <p:cNvPr id="20" name="Text 16"/>
           <p:cNvSpPr/>
           <p:nvPr/>
         </p:nvSpPr>
@@ -9043,7 +9043,7 @@
       </p:sp>
       <p:sp>
         <p:nvSpPr>
-          <p:cNvPr id="20" name="Text 17"/>
+          <p:cNvPr id="21" name="Text 17"/>
           <p:cNvSpPr/>
           <p:nvPr/>
         </p:nvSpPr>
@@ -9077,7 +9077,7 @@
                 <a:ea typeface="Montserrat" pitchFamily="34" charset="-122"/>
                 <a:cs typeface="Montserrat" pitchFamily="34" charset="-120"/>
               </a:rPr>
-              <a:t>Віддати рішення адаптеру: тоді ви вчитеся клікати прапорці інструмента, а не будувати механізм.</a:t>
+              <a:t>Рішення в адаптері — ви клікаєте прапорці, а не будуєте механізм.</a:t>
             </a:r>
             <a:endParaRPr lang="en-US" sz="1300" dirty="0"/>
           </a:p>
@@ -9085,7 +9085,7 @@
       </p:sp>
       <p:sp>
         <p:nvSpPr>
-          <p:cNvPr id="21" name="Text 18"/>
+          <p:cNvPr id="22" name="Text 18"/>
           <p:cNvSpPr/>
           <p:nvPr/>
         </p:nvSpPr>
@@ -9288,7 +9288,7 @@
         </p:nvSpPr>
         <p:spPr>
           <a:xfrm>
-            <a:off x="1280160" y="1024128"/>
+            <a:off x="1280160" y="1193140"/>
             <a:ext cx="777240" cy="256032"/>
           </a:xfrm>
           <a:prstGeom prst="roundRect">
@@ -9310,7 +9310,7 @@
         </p:nvSpPr>
         <p:spPr>
           <a:xfrm>
-            <a:off x="1280160" y="1024128"/>
+            <a:off x="1280160" y="1193140"/>
             <a:ext cx="777240" cy="256032"/>
           </a:xfrm>
           <a:prstGeom prst="rect">
@@ -9367,7 +9367,7 @@
       </p:pic>
       <p:sp>
         <p:nvSpPr>
-          <p:cNvPr id="7" name="Shape 4"/>
+          <p:cNvPr id="8" name="Shape 4"/>
           <p:cNvSpPr/>
           <p:nvPr/>
         </p:nvSpPr>
@@ -9394,7 +9394,7 @@
       </p:sp>
       <p:sp>
         <p:nvSpPr>
-          <p:cNvPr id="8" name="Text 5"/>
+          <p:cNvPr id="9" name="Text 5"/>
           <p:cNvSpPr/>
           <p:nvPr/>
         </p:nvSpPr>
@@ -9504,7 +9504,7 @@
       </p:sp>
       <p:sp>
         <p:nvSpPr>
-          <p:cNvPr id="9" name="Text 6"/>
+          <p:cNvPr id="10" name="Text 6"/>
           <p:cNvSpPr/>
           <p:nvPr/>
         </p:nvSpPr>
@@ -9543,7 +9543,7 @@
       </p:sp>
       <p:sp>
         <p:nvSpPr>
-          <p:cNvPr id="10" name="Text 7"/>
+          <p:cNvPr id="11" name="Text 7"/>
           <p:cNvSpPr/>
           <p:nvPr/>
         </p:nvSpPr>
@@ -9582,7 +9582,7 @@
       </p:sp>
       <p:sp>
         <p:nvSpPr>
-          <p:cNvPr id="11" name="Shape 8"/>
+          <p:cNvPr id="12" name="Shape 8"/>
           <p:cNvSpPr/>
           <p:nvPr/>
         </p:nvSpPr>
@@ -9605,7 +9605,7 @@
       </p:sp>
       <p:sp>
         <p:nvSpPr>
-          <p:cNvPr id="12" name="Shape 9"/>
+          <p:cNvPr id="13" name="Shape 9"/>
           <p:cNvSpPr/>
           <p:nvPr/>
         </p:nvSpPr>
@@ -9625,7 +9625,7 @@
       </p:sp>
       <p:sp>
         <p:nvSpPr>
-          <p:cNvPr id="13" name="Text 10"/>
+          <p:cNvPr id="14" name="Text 10"/>
           <p:cNvSpPr/>
           <p:nvPr/>
         </p:nvSpPr>
@@ -9664,7 +9664,7 @@
       </p:sp>
       <p:sp>
         <p:nvSpPr>
-          <p:cNvPr id="14" name="Shape 11"/>
+          <p:cNvPr id="15" name="Shape 11"/>
           <p:cNvSpPr/>
           <p:nvPr/>
         </p:nvSpPr>
@@ -9679,14 +9679,14 @@
             </a:avLst>
           </a:prstGeom>
           <a:solidFill>
-            <a:srgbClr val="000000"/>
+            <a:srgbClr val="EFEAFE"/>
           </a:solidFill>
           <a:ln/>
         </p:spPr>
       </p:sp>
       <p:sp>
         <p:nvSpPr>
-          <p:cNvPr id="15" name="Text 12"/>
+          <p:cNvPr id="16" name="Text 12"/>
           <p:cNvSpPr/>
           <p:nvPr/>
         </p:nvSpPr>
@@ -9725,7 +9725,7 @@
       </p:sp>
       <p:sp>
         <p:nvSpPr>
-          <p:cNvPr id="16" name="Text 13"/>
+          <p:cNvPr id="17" name="Text 13"/>
           <p:cNvSpPr/>
           <p:nvPr/>
         </p:nvSpPr>
@@ -9764,7 +9764,7 @@
       </p:sp>
       <p:sp>
         <p:nvSpPr>
-          <p:cNvPr id="17" name="Shape 14"/>
+          <p:cNvPr id="18" name="Shape 14"/>
           <p:cNvSpPr/>
           <p:nvPr/>
         </p:nvSpPr>
@@ -9787,7 +9787,7 @@
       </p:sp>
       <p:sp>
         <p:nvSpPr>
-          <p:cNvPr id="18" name="Shape 15"/>
+          <p:cNvPr id="19" name="Shape 15"/>
           <p:cNvSpPr/>
           <p:nvPr/>
         </p:nvSpPr>
@@ -9807,7 +9807,7 @@
       </p:sp>
       <p:sp>
         <p:nvSpPr>
-          <p:cNvPr id="19" name="Text 16"/>
+          <p:cNvPr id="20" name="Text 16"/>
           <p:cNvSpPr/>
           <p:nvPr/>
         </p:nvSpPr>
@@ -9846,7 +9846,7 @@
       </p:sp>
       <p:sp>
         <p:nvSpPr>
-          <p:cNvPr id="20" name="Shape 17"/>
+          <p:cNvPr id="21" name="Shape 17"/>
           <p:cNvSpPr/>
           <p:nvPr/>
         </p:nvSpPr>
@@ -9861,14 +9861,14 @@
             </a:avLst>
           </a:prstGeom>
           <a:solidFill>
-            <a:srgbClr val="000000"/>
+            <a:srgbClr val="EFEAFE"/>
           </a:solidFill>
           <a:ln/>
         </p:spPr>
       </p:sp>
       <p:sp>
         <p:nvSpPr>
-          <p:cNvPr id="21" name="Text 18"/>
+          <p:cNvPr id="22" name="Text 18"/>
           <p:cNvSpPr/>
           <p:nvPr/>
         </p:nvSpPr>
@@ -9907,7 +9907,7 @@
       </p:sp>
       <p:sp>
         <p:nvSpPr>
-          <p:cNvPr id="22" name="Text 19"/>
+          <p:cNvPr id="23" name="Text 19"/>
           <p:cNvSpPr/>
           <p:nvPr/>
         </p:nvSpPr>
@@ -9946,7 +9946,7 @@
       </p:sp>
       <p:sp>
         <p:nvSpPr>
-          <p:cNvPr id="23" name="Shape 20"/>
+          <p:cNvPr id="24" name="Shape 20"/>
           <p:cNvSpPr/>
           <p:nvPr/>
         </p:nvSpPr>
@@ -9969,7 +9969,7 @@
       </p:sp>
       <p:sp>
         <p:nvSpPr>
-          <p:cNvPr id="24" name="Shape 21"/>
+          <p:cNvPr id="25" name="Shape 21"/>
           <p:cNvSpPr/>
           <p:nvPr/>
         </p:nvSpPr>
@@ -9989,7 +9989,7 @@
       </p:sp>
       <p:sp>
         <p:nvSpPr>
-          <p:cNvPr id="25" name="Text 22"/>
+          <p:cNvPr id="26" name="Text 22"/>
           <p:cNvSpPr/>
           <p:nvPr/>
         </p:nvSpPr>
@@ -10028,7 +10028,7 @@
       </p:sp>
       <p:sp>
         <p:nvSpPr>
-          <p:cNvPr id="26" name="Shape 23"/>
+          <p:cNvPr id="27" name="Shape 23"/>
           <p:cNvSpPr/>
           <p:nvPr/>
         </p:nvSpPr>
@@ -10043,14 +10043,14 @@
             </a:avLst>
           </a:prstGeom>
           <a:solidFill>
-            <a:srgbClr val="000000"/>
+            <a:srgbClr val="EFEAFE"/>
           </a:solidFill>
           <a:ln/>
         </p:spPr>
       </p:sp>
       <p:sp>
         <p:nvSpPr>
-          <p:cNvPr id="27" name="Text 24"/>
+          <p:cNvPr id="28" name="Text 24"/>
           <p:cNvSpPr/>
           <p:nvPr/>
         </p:nvSpPr>
@@ -10089,7 +10089,7 @@
       </p:sp>
       <p:sp>
         <p:nvSpPr>
-          <p:cNvPr id="28" name="Text 25"/>
+          <p:cNvPr id="29" name="Text 25"/>
           <p:cNvSpPr/>
           <p:nvPr/>
         </p:nvSpPr>
@@ -10128,7 +10128,7 @@
       </p:sp>
       <p:sp>
         <p:nvSpPr>
-          <p:cNvPr id="29" name="Shape 26"/>
+          <p:cNvPr id="30" name="Shape 26"/>
           <p:cNvSpPr/>
           <p:nvPr/>
         </p:nvSpPr>
@@ -10151,7 +10151,7 @@
       </p:sp>
       <p:sp>
         <p:nvSpPr>
-          <p:cNvPr id="30" name="Shape 27"/>
+          <p:cNvPr id="31" name="Shape 27"/>
           <p:cNvSpPr/>
           <p:nvPr/>
         </p:nvSpPr>
@@ -10171,7 +10171,7 @@
       </p:sp>
       <p:sp>
         <p:nvSpPr>
-          <p:cNvPr id="31" name="Text 28"/>
+          <p:cNvPr id="32" name="Text 28"/>
           <p:cNvSpPr/>
           <p:nvPr/>
         </p:nvSpPr>
@@ -10210,7 +10210,7 @@
       </p:sp>
       <p:sp>
         <p:nvSpPr>
-          <p:cNvPr id="32" name="Shape 29"/>
+          <p:cNvPr id="33" name="Shape 29"/>
           <p:cNvSpPr/>
           <p:nvPr/>
         </p:nvSpPr>
@@ -10225,14 +10225,14 @@
             </a:avLst>
           </a:prstGeom>
           <a:solidFill>
-            <a:srgbClr val="000000"/>
+            <a:srgbClr val="EFEAFE"/>
           </a:solidFill>
           <a:ln/>
         </p:spPr>
       </p:sp>
       <p:sp>
         <p:nvSpPr>
-          <p:cNvPr id="33" name="Text 30"/>
+          <p:cNvPr id="34" name="Text 30"/>
           <p:cNvSpPr/>
           <p:nvPr/>
         </p:nvSpPr>
@@ -10271,7 +10271,7 @@
       </p:sp>
       <p:sp>
         <p:nvSpPr>
-          <p:cNvPr id="34" name="Text 31"/>
+          <p:cNvPr id="35" name="Text 31"/>
           <p:cNvSpPr/>
           <p:nvPr/>
         </p:nvSpPr>
@@ -10310,7 +10310,7 @@
       </p:sp>
       <p:sp>
         <p:nvSpPr>
-          <p:cNvPr id="35" name="Shape 32"/>
+          <p:cNvPr id="36" name="Shape 32"/>
           <p:cNvSpPr/>
           <p:nvPr/>
         </p:nvSpPr>
@@ -10333,7 +10333,7 @@
       </p:sp>
       <p:sp>
         <p:nvSpPr>
-          <p:cNvPr id="36" name="Shape 33"/>
+          <p:cNvPr id="37" name="Shape 33"/>
           <p:cNvSpPr/>
           <p:nvPr/>
         </p:nvSpPr>
@@ -10353,7 +10353,7 @@
       </p:sp>
       <p:sp>
         <p:nvSpPr>
-          <p:cNvPr id="37" name="Text 34"/>
+          <p:cNvPr id="38" name="Text 34"/>
           <p:cNvSpPr/>
           <p:nvPr/>
         </p:nvSpPr>
@@ -10392,7 +10392,7 @@
       </p:sp>
       <p:sp>
         <p:nvSpPr>
-          <p:cNvPr id="38" name="Shape 35"/>
+          <p:cNvPr id="39" name="Shape 35"/>
           <p:cNvSpPr/>
           <p:nvPr/>
         </p:nvSpPr>
@@ -10407,14 +10407,14 @@
             </a:avLst>
           </a:prstGeom>
           <a:solidFill>
-            <a:srgbClr val="000000"/>
+            <a:srgbClr val="EFEAFE"/>
           </a:solidFill>
           <a:ln/>
         </p:spPr>
       </p:sp>
       <p:sp>
         <p:nvSpPr>
-          <p:cNvPr id="39" name="Text 36"/>
+          <p:cNvPr id="40" name="Text 36"/>
           <p:cNvSpPr/>
           <p:nvPr/>
         </p:nvSpPr>
@@ -10453,7 +10453,7 @@
       </p:sp>
       <p:sp>
         <p:nvSpPr>
-          <p:cNvPr id="40" name="Shape 37"/>
+          <p:cNvPr id="41" name="Shape 37"/>
           <p:cNvSpPr/>
           <p:nvPr/>
         </p:nvSpPr>
@@ -10475,7 +10475,7 @@
       </p:sp>
       <p:sp>
         <p:nvSpPr>
-          <p:cNvPr id="41" name="Text 38"/>
+          <p:cNvPr id="42" name="Text 38"/>
           <p:cNvSpPr/>
           <p:nvPr/>
         </p:nvSpPr>
@@ -10681,7 +10681,7 @@
         </p:nvSpPr>
         <p:spPr>
           <a:xfrm>
-            <a:off x="1280160" y="1024128"/>
+            <a:off x="1280160" y="1193140"/>
             <a:ext cx="777240" cy="256032"/>
           </a:xfrm>
           <a:prstGeom prst="roundRect">
@@ -10703,7 +10703,7 @@
         </p:nvSpPr>
         <p:spPr>
           <a:xfrm>
-            <a:off x="1280160" y="1024128"/>
+            <a:off x="1280160" y="1193140"/>
             <a:ext cx="777240" cy="256032"/>
           </a:xfrm>
           <a:prstGeom prst="rect">
@@ -10760,7 +10760,7 @@
       </p:pic>
       <p:sp>
         <p:nvSpPr>
-          <p:cNvPr id="7" name="Text 4"/>
+          <p:cNvPr id="8" name="Text 4"/>
           <p:cNvSpPr/>
           <p:nvPr/>
         </p:nvSpPr>
@@ -10799,7 +10799,7 @@
       </p:sp>
       <p:sp>
         <p:nvSpPr>
-          <p:cNvPr id="8" name="Shape 5"/>
+          <p:cNvPr id="9" name="Shape 5"/>
           <p:cNvSpPr/>
           <p:nvPr/>
         </p:nvSpPr>
@@ -10821,7 +10821,7 @@
       </p:sp>
       <p:sp>
         <p:nvSpPr>
-          <p:cNvPr id="9" name="Text 6"/>
+          <p:cNvPr id="10" name="Text 6"/>
           <p:cNvSpPr/>
           <p:nvPr/>
         </p:nvSpPr>
@@ -10860,7 +10860,7 @@
       </p:sp>
       <p:sp>
         <p:nvSpPr>
-          <p:cNvPr id="10" name="Text 7"/>
+          <p:cNvPr id="11" name="Text 7"/>
           <p:cNvSpPr/>
           <p:nvPr/>
         </p:nvSpPr>
@@ -10899,7 +10899,7 @@
       </p:sp>
       <p:sp>
         <p:nvSpPr>
-          <p:cNvPr id="11" name="Text 8"/>
+          <p:cNvPr id="12" name="Text 8"/>
           <p:cNvSpPr/>
           <p:nvPr/>
         </p:nvSpPr>
@@ -10938,7 +10938,7 @@
       </p:sp>
       <p:sp>
         <p:nvSpPr>
-          <p:cNvPr id="12" name="Shape 9"/>
+          <p:cNvPr id="13" name="Shape 9"/>
           <p:cNvSpPr/>
           <p:nvPr/>
         </p:nvSpPr>
@@ -10960,7 +10960,7 @@
       </p:sp>
       <p:sp>
         <p:nvSpPr>
-          <p:cNvPr id="13" name="Text 10"/>
+          <p:cNvPr id="14" name="Text 10"/>
           <p:cNvSpPr/>
           <p:nvPr/>
         </p:nvSpPr>
@@ -10999,7 +10999,7 @@
       </p:sp>
       <p:sp>
         <p:nvSpPr>
-          <p:cNvPr id="14" name="Text 11"/>
+          <p:cNvPr id="15" name="Text 11"/>
           <p:cNvSpPr/>
           <p:nvPr/>
         </p:nvSpPr>
@@ -11038,7 +11038,7 @@
       </p:sp>
       <p:sp>
         <p:nvSpPr>
-          <p:cNvPr id="15" name="Text 12"/>
+          <p:cNvPr id="16" name="Text 12"/>
           <p:cNvSpPr/>
           <p:nvPr/>
         </p:nvSpPr>
@@ -11077,7 +11077,7 @@
       </p:sp>
       <p:sp>
         <p:nvSpPr>
-          <p:cNvPr id="16" name="Shape 13"/>
+          <p:cNvPr id="17" name="Shape 13"/>
           <p:cNvSpPr/>
           <p:nvPr/>
         </p:nvSpPr>
@@ -11099,7 +11099,7 @@
       </p:sp>
       <p:sp>
         <p:nvSpPr>
-          <p:cNvPr id="17" name="Text 14"/>
+          <p:cNvPr id="18" name="Text 14"/>
           <p:cNvSpPr/>
           <p:nvPr/>
         </p:nvSpPr>
@@ -11138,7 +11138,7 @@
       </p:sp>
       <p:sp>
         <p:nvSpPr>
-          <p:cNvPr id="18" name="Text 15"/>
+          <p:cNvPr id="19" name="Text 15"/>
           <p:cNvSpPr/>
           <p:nvPr/>
         </p:nvSpPr>
@@ -11177,7 +11177,7 @@
       </p:sp>
       <p:sp>
         <p:nvSpPr>
-          <p:cNvPr id="19" name="Text 16"/>
+          <p:cNvPr id="20" name="Text 16"/>
           <p:cNvSpPr/>
           <p:nvPr/>
         </p:nvSpPr>
@@ -11216,7 +11216,7 @@
       </p:sp>
       <p:sp>
         <p:nvSpPr>
-          <p:cNvPr id="20" name="Shape 17"/>
+          <p:cNvPr id="21" name="Shape 17"/>
           <p:cNvSpPr/>
           <p:nvPr/>
         </p:nvSpPr>
@@ -11238,7 +11238,7 @@
       </p:sp>
       <p:sp>
         <p:nvSpPr>
-          <p:cNvPr id="21" name="Text 18"/>
+          <p:cNvPr id="22" name="Text 18"/>
           <p:cNvSpPr/>
           <p:nvPr/>
         </p:nvSpPr>
@@ -11277,7 +11277,7 @@
       </p:sp>
       <p:sp>
         <p:nvSpPr>
-          <p:cNvPr id="22" name="Text 19"/>
+          <p:cNvPr id="23" name="Text 19"/>
           <p:cNvSpPr/>
           <p:nvPr/>
         </p:nvSpPr>
@@ -11316,7 +11316,7 @@
       </p:sp>
       <p:sp>
         <p:nvSpPr>
-          <p:cNvPr id="23" name="Text 20"/>
+          <p:cNvPr id="24" name="Text 20"/>
           <p:cNvSpPr/>
           <p:nvPr/>
         </p:nvSpPr>
@@ -11355,7 +11355,7 @@
       </p:sp>
       <p:sp>
         <p:nvSpPr>
-          <p:cNvPr id="24" name="Text 21"/>
+          <p:cNvPr id="25" name="Text 21"/>
           <p:cNvSpPr/>
           <p:nvPr/>
         </p:nvSpPr>
@@ -11394,7 +11394,7 @@
       </p:sp>
       <p:sp>
         <p:nvSpPr>
-          <p:cNvPr id="25" name="Text 22"/>
+          <p:cNvPr id="26" name="Text 22"/>
           <p:cNvSpPr/>
           <p:nvPr/>
         </p:nvSpPr>
@@ -11433,7 +11433,7 @@
       </p:sp>
       <p:sp>
         <p:nvSpPr>
-          <p:cNvPr id="26" name="Shape 23"/>
+          <p:cNvPr id="27" name="Shape 23"/>
           <p:cNvSpPr/>
           <p:nvPr/>
         </p:nvSpPr>
@@ -11455,7 +11455,7 @@
       </p:sp>
       <p:sp>
         <p:nvSpPr>
-          <p:cNvPr id="27" name="Text 24"/>
+          <p:cNvPr id="28" name="Text 24"/>
           <p:cNvSpPr/>
           <p:nvPr/>
         </p:nvSpPr>
@@ -11494,7 +11494,7 @@
       </p:sp>
       <p:sp>
         <p:nvSpPr>
-          <p:cNvPr id="28" name="Shape 25"/>
+          <p:cNvPr id="29" name="Shape 25"/>
           <p:cNvSpPr/>
           <p:nvPr/>
         </p:nvSpPr>
@@ -11517,7 +11517,7 @@
       </p:sp>
       <p:sp>
         <p:nvSpPr>
-          <p:cNvPr id="29" name="Shape 26"/>
+          <p:cNvPr id="30" name="Shape 26"/>
           <p:cNvSpPr/>
           <p:nvPr/>
         </p:nvSpPr>
@@ -11537,7 +11537,7 @@
       </p:sp>
       <p:sp>
         <p:nvSpPr>
-          <p:cNvPr id="30" name="Shape 27"/>
+          <p:cNvPr id="31" name="Shape 27"/>
           <p:cNvSpPr/>
           <p:nvPr/>
         </p:nvSpPr>
@@ -11564,7 +11564,7 @@
       </p:sp>
       <p:sp>
         <p:nvSpPr>
-          <p:cNvPr id="31" name="Text 28"/>
+          <p:cNvPr id="32" name="Text 28"/>
           <p:cNvSpPr/>
           <p:nvPr/>
         </p:nvSpPr>
@@ -11603,7 +11603,7 @@
       </p:sp>
       <p:sp>
         <p:nvSpPr>
-          <p:cNvPr id="32" name="Shape 29"/>
+          <p:cNvPr id="33" name="Shape 29"/>
           <p:cNvSpPr/>
           <p:nvPr/>
         </p:nvSpPr>
@@ -11625,7 +11625,7 @@
       </p:sp>
       <p:sp>
         <p:nvSpPr>
-          <p:cNvPr id="33" name="Text 30"/>
+          <p:cNvPr id="34" name="Text 30"/>
           <p:cNvSpPr/>
           <p:nvPr/>
         </p:nvSpPr>
@@ -11664,7 +11664,7 @@
       </p:sp>
       <p:sp>
         <p:nvSpPr>
-          <p:cNvPr id="34" name="Shape 31"/>
+          <p:cNvPr id="35" name="Shape 31"/>
           <p:cNvSpPr/>
           <p:nvPr/>
         </p:nvSpPr>
@@ -11687,7 +11687,7 @@
       </p:sp>
       <p:sp>
         <p:nvSpPr>
-          <p:cNvPr id="35" name="Shape 32"/>
+          <p:cNvPr id="36" name="Shape 32"/>
           <p:cNvSpPr/>
           <p:nvPr/>
         </p:nvSpPr>
@@ -11707,7 +11707,7 @@
       </p:sp>
       <p:sp>
         <p:nvSpPr>
-          <p:cNvPr id="36" name="Shape 33"/>
+          <p:cNvPr id="37" name="Shape 33"/>
           <p:cNvSpPr/>
           <p:nvPr/>
         </p:nvSpPr>
@@ -11734,7 +11734,7 @@
       </p:sp>
       <p:sp>
         <p:nvSpPr>
-          <p:cNvPr id="37" name="Text 34"/>
+          <p:cNvPr id="38" name="Text 34"/>
           <p:cNvSpPr/>
           <p:nvPr/>
         </p:nvSpPr>
@@ -11773,7 +11773,7 @@
       </p:sp>
       <p:sp>
         <p:nvSpPr>
-          <p:cNvPr id="38" name="Shape 35"/>
+          <p:cNvPr id="39" name="Shape 35"/>
           <p:cNvSpPr/>
           <p:nvPr/>
         </p:nvSpPr>
@@ -11795,7 +11795,7 @@
       </p:sp>
       <p:sp>
         <p:nvSpPr>
-          <p:cNvPr id="39" name="Text 36"/>
+          <p:cNvPr id="40" name="Text 36"/>
           <p:cNvSpPr/>
           <p:nvPr/>
         </p:nvSpPr>
@@ -11829,7 +11829,7 @@
                 <a:ea typeface="Montserrat" pitchFamily="34" charset="-122"/>
                 <a:cs typeface="Montserrat" pitchFamily="34" charset="-120"/>
               </a:rPr>
-              <a:t>Тому регресію промпта видно автоматично: зламали — перевірки почервоніли. На тижні 5–6 це стане гейтом у CI.</a:t>
+              <a:t>Регресію промпта видно автоматично: зламали — почервоніло.</a:t>
             </a:r>
             <a:endParaRPr lang="en-US" sz="1300" dirty="0"/>
           </a:p>
@@ -11837,7 +11837,7 @@
       </p:sp>
       <p:sp>
         <p:nvSpPr>
-          <p:cNvPr id="40" name="Shape 37"/>
+          <p:cNvPr id="41" name="Shape 37"/>
           <p:cNvSpPr/>
           <p:nvPr/>
         </p:nvSpPr>
@@ -11864,7 +11864,7 @@
       </p:sp>
       <p:sp>
         <p:nvSpPr>
-          <p:cNvPr id="41" name="Text 38"/>
+          <p:cNvPr id="42" name="Text 38"/>
           <p:cNvSpPr/>
           <p:nvPr/>
         </p:nvSpPr>
@@ -11903,7 +11903,7 @@
       </p:sp>
       <p:sp>
         <p:nvSpPr>
-          <p:cNvPr id="42" name="Text 39"/>
+          <p:cNvPr id="43" name="Text 39"/>
           <p:cNvSpPr/>
           <p:nvPr/>
         </p:nvSpPr>
@@ -12249,7 +12249,7 @@
       </p:pic>
       <p:sp>
         <p:nvSpPr>
-          <p:cNvPr id="9" name="Shape 6"/>
+          <p:cNvPr id="10" name="Shape 6"/>
           <p:cNvSpPr/>
           <p:nvPr/>
         </p:nvSpPr>
@@ -12276,7 +12276,7 @@
       </p:sp>
       <p:sp>
         <p:nvSpPr>
-          <p:cNvPr id="10" name="Text 7"/>
+          <p:cNvPr id="11" name="Text 7"/>
           <p:cNvSpPr/>
           <p:nvPr/>
         </p:nvSpPr>
@@ -12409,7 +12409,7 @@
       </p:sp>
       <p:sp>
         <p:nvSpPr>
-          <p:cNvPr id="11" name="Shape 8"/>
+          <p:cNvPr id="12" name="Shape 8"/>
           <p:cNvSpPr/>
           <p:nvPr/>
         </p:nvSpPr>
@@ -12436,7 +12436,7 @@
       </p:sp>
       <p:sp>
         <p:nvSpPr>
-          <p:cNvPr id="12" name="Text 9"/>
+          <p:cNvPr id="13" name="Text 9"/>
           <p:cNvSpPr/>
           <p:nvPr/>
         </p:nvSpPr>
@@ -12475,7 +12475,7 @@
       </p:sp>
       <p:sp>
         <p:nvSpPr>
-          <p:cNvPr id="13" name="Text 10"/>
+          <p:cNvPr id="14" name="Text 10"/>
           <p:cNvSpPr/>
           <p:nvPr/>
         </p:nvSpPr>
@@ -12517,7 +12517,7 @@
       </p:sp>
       <p:sp>
         <p:nvSpPr>
-          <p:cNvPr id="14" name="Shape 11"/>
+          <p:cNvPr id="15" name="Shape 11"/>
           <p:cNvSpPr/>
           <p:nvPr/>
         </p:nvSpPr>
@@ -12539,7 +12539,7 @@
       </p:sp>
       <p:sp>
         <p:nvSpPr>
-          <p:cNvPr id="15" name="Text 12"/>
+          <p:cNvPr id="16" name="Text 12"/>
           <p:cNvSpPr/>
           <p:nvPr/>
         </p:nvSpPr>
@@ -12578,7 +12578,7 @@
       </p:sp>
       <p:sp>
         <p:nvSpPr>
-          <p:cNvPr id="16" name="Text 13"/>
+          <p:cNvPr id="17" name="Text 13"/>
           <p:cNvSpPr/>
           <p:nvPr/>
         </p:nvSpPr>
@@ -12620,7 +12620,7 @@
       </p:sp>
       <p:sp>
         <p:nvSpPr>
-          <p:cNvPr id="17" name="Shape 14"/>
+          <p:cNvPr id="18" name="Shape 14"/>
           <p:cNvSpPr/>
           <p:nvPr/>
         </p:nvSpPr>
@@ -12642,7 +12642,7 @@
       </p:sp>
       <p:sp>
         <p:nvSpPr>
-          <p:cNvPr id="18" name="Text 15"/>
+          <p:cNvPr id="19" name="Text 15"/>
           <p:cNvSpPr/>
           <p:nvPr/>
         </p:nvSpPr>
@@ -12681,7 +12681,7 @@
       </p:sp>
       <p:sp>
         <p:nvSpPr>
-          <p:cNvPr id="19" name="Text 16"/>
+          <p:cNvPr id="20" name="Text 16"/>
           <p:cNvSpPr/>
           <p:nvPr/>
         </p:nvSpPr>
@@ -12715,7 +12715,7 @@
                 <a:ea typeface="Montserrat" pitchFamily="34" charset="-122"/>
                 <a:cs typeface="Montserrat" pitchFamily="34" charset="-120"/>
               </a:rPr>
-              <a:t>Берете ключ — одразу поставте ліміт витрат у кабінеті провайдера. Перша операційна звичка курсу.</a:t>
+              <a:t>Берете ключ — одразу ставте ліміт витрат у провайдера.</a:t>
             </a:r>
             <a:endParaRPr lang="en-US" sz="1300" dirty="0"/>
           </a:p>
@@ -12723,7 +12723,7 @@
       </p:sp>
       <p:sp>
         <p:nvSpPr>
-          <p:cNvPr id="20" name="Text 17"/>
+          <p:cNvPr id="21" name="Text 17"/>
           <p:cNvSpPr/>
           <p:nvPr/>
         </p:nvSpPr>
@@ -12966,7 +12966,7 @@
       </p:pic>
       <p:sp>
         <p:nvSpPr>
-          <p:cNvPr id="6" name="Shape 3"/>
+          <p:cNvPr id="7" name="Shape 3"/>
           <p:cNvSpPr/>
           <p:nvPr/>
         </p:nvSpPr>
@@ -12988,7 +12988,7 @@
       </p:sp>
       <p:sp>
         <p:nvSpPr>
-          <p:cNvPr id="7" name="Shape 4"/>
+          <p:cNvPr id="8" name="Shape 4"/>
           <p:cNvSpPr/>
           <p:nvPr/>
         </p:nvSpPr>
@@ -13008,7 +13008,7 @@
       </p:sp>
       <p:sp>
         <p:nvSpPr>
-          <p:cNvPr id="8" name="Text 5"/>
+          <p:cNvPr id="9" name="Text 5"/>
           <p:cNvSpPr/>
           <p:nvPr/>
         </p:nvSpPr>
@@ -13047,7 +13047,7 @@
       </p:sp>
       <p:sp>
         <p:nvSpPr>
-          <p:cNvPr id="9" name="Text 6"/>
+          <p:cNvPr id="10" name="Text 6"/>
           <p:cNvSpPr/>
           <p:nvPr/>
         </p:nvSpPr>
@@ -13086,7 +13086,7 @@
       </p:sp>
       <p:sp>
         <p:nvSpPr>
-          <p:cNvPr id="10" name="Text 7"/>
+          <p:cNvPr id="11" name="Text 7"/>
           <p:cNvSpPr/>
           <p:nvPr/>
         </p:nvSpPr>
@@ -13128,7 +13128,7 @@
       </p:sp>
       <p:sp>
         <p:nvSpPr>
-          <p:cNvPr id="11" name="Shape 8"/>
+          <p:cNvPr id="12" name="Shape 8"/>
           <p:cNvSpPr/>
           <p:nvPr/>
         </p:nvSpPr>
@@ -13150,7 +13150,7 @@
       </p:sp>
       <p:sp>
         <p:nvSpPr>
-          <p:cNvPr id="12" name="Shape 9"/>
+          <p:cNvPr id="13" name="Shape 9"/>
           <p:cNvSpPr/>
           <p:nvPr/>
         </p:nvSpPr>
@@ -13170,7 +13170,7 @@
       </p:sp>
       <p:sp>
         <p:nvSpPr>
-          <p:cNvPr id="13" name="Text 10"/>
+          <p:cNvPr id="14" name="Text 10"/>
           <p:cNvSpPr/>
           <p:nvPr/>
         </p:nvSpPr>
@@ -13209,7 +13209,7 @@
       </p:sp>
       <p:sp>
         <p:nvSpPr>
-          <p:cNvPr id="14" name="Text 11"/>
+          <p:cNvPr id="15" name="Text 11"/>
           <p:cNvSpPr/>
           <p:nvPr/>
         </p:nvSpPr>
@@ -13248,7 +13248,7 @@
       </p:sp>
       <p:sp>
         <p:nvSpPr>
-          <p:cNvPr id="15" name="Text 12"/>
+          <p:cNvPr id="16" name="Text 12"/>
           <p:cNvSpPr/>
           <p:nvPr/>
         </p:nvSpPr>
@@ -13290,7 +13290,7 @@
       </p:sp>
       <p:sp>
         <p:nvSpPr>
-          <p:cNvPr id="16" name="Shape 13"/>
+          <p:cNvPr id="17" name="Shape 13"/>
           <p:cNvSpPr/>
           <p:nvPr/>
         </p:nvSpPr>
@@ -13312,7 +13312,7 @@
       </p:sp>
       <p:sp>
         <p:nvSpPr>
-          <p:cNvPr id="17" name="Shape 14"/>
+          <p:cNvPr id="18" name="Shape 14"/>
           <p:cNvSpPr/>
           <p:nvPr/>
         </p:nvSpPr>
@@ -13332,7 +13332,7 @@
       </p:sp>
       <p:sp>
         <p:nvSpPr>
-          <p:cNvPr id="18" name="Text 15"/>
+          <p:cNvPr id="19" name="Text 15"/>
           <p:cNvSpPr/>
           <p:nvPr/>
         </p:nvSpPr>
@@ -13371,7 +13371,7 @@
       </p:sp>
       <p:sp>
         <p:nvSpPr>
-          <p:cNvPr id="19" name="Text 16"/>
+          <p:cNvPr id="20" name="Text 16"/>
           <p:cNvSpPr/>
           <p:nvPr/>
         </p:nvSpPr>
@@ -13410,7 +13410,7 @@
       </p:sp>
       <p:sp>
         <p:nvSpPr>
-          <p:cNvPr id="20" name="Text 17"/>
+          <p:cNvPr id="21" name="Text 17"/>
           <p:cNvSpPr/>
           <p:nvPr/>
         </p:nvSpPr>
@@ -13452,7 +13452,7 @@
       </p:sp>
       <p:sp>
         <p:nvSpPr>
-          <p:cNvPr id="21" name="Shape 18"/>
+          <p:cNvPr id="22" name="Shape 18"/>
           <p:cNvSpPr/>
           <p:nvPr/>
         </p:nvSpPr>
@@ -13474,7 +13474,7 @@
       </p:sp>
       <p:sp>
         <p:nvSpPr>
-          <p:cNvPr id="22" name="Shape 19"/>
+          <p:cNvPr id="23" name="Shape 19"/>
           <p:cNvSpPr/>
           <p:nvPr/>
         </p:nvSpPr>
@@ -13494,7 +13494,7 @@
       </p:sp>
       <p:sp>
         <p:nvSpPr>
-          <p:cNvPr id="23" name="Text 20"/>
+          <p:cNvPr id="24" name="Text 20"/>
           <p:cNvSpPr/>
           <p:nvPr/>
         </p:nvSpPr>
@@ -13533,7 +13533,7 @@
       </p:sp>
       <p:sp>
         <p:nvSpPr>
-          <p:cNvPr id="24" name="Text 21"/>
+          <p:cNvPr id="25" name="Text 21"/>
           <p:cNvSpPr/>
           <p:nvPr/>
         </p:nvSpPr>
@@ -13572,7 +13572,7 @@
       </p:sp>
       <p:sp>
         <p:nvSpPr>
-          <p:cNvPr id="25" name="Text 22"/>
+          <p:cNvPr id="26" name="Text 22"/>
           <p:cNvSpPr/>
           <p:nvPr/>
         </p:nvSpPr>
@@ -13614,7 +13614,7 @@
       </p:sp>
       <p:sp>
         <p:nvSpPr>
-          <p:cNvPr id="26" name="Shape 23"/>
+          <p:cNvPr id="27" name="Shape 23"/>
           <p:cNvSpPr/>
           <p:nvPr/>
         </p:nvSpPr>
@@ -13636,7 +13636,7 @@
       </p:sp>
       <p:sp>
         <p:nvSpPr>
-          <p:cNvPr id="27" name="Shape 24"/>
+          <p:cNvPr id="28" name="Shape 24"/>
           <p:cNvSpPr/>
           <p:nvPr/>
         </p:nvSpPr>
@@ -13656,7 +13656,7 @@
       </p:sp>
       <p:sp>
         <p:nvSpPr>
-          <p:cNvPr id="28" name="Text 25"/>
+          <p:cNvPr id="29" name="Text 25"/>
           <p:cNvSpPr/>
           <p:nvPr/>
         </p:nvSpPr>
@@ -13695,7 +13695,7 @@
       </p:sp>
       <p:sp>
         <p:nvSpPr>
-          <p:cNvPr id="29" name="Text 26"/>
+          <p:cNvPr id="30" name="Text 26"/>
           <p:cNvSpPr/>
           <p:nvPr/>
         </p:nvSpPr>
@@ -13734,7 +13734,7 @@
       </p:sp>
       <p:sp>
         <p:nvSpPr>
-          <p:cNvPr id="30" name="Text 27"/>
+          <p:cNvPr id="31" name="Text 27"/>
           <p:cNvSpPr/>
           <p:nvPr/>
         </p:nvSpPr>
@@ -13776,7 +13776,7 @@
       </p:sp>
       <p:sp>
         <p:nvSpPr>
-          <p:cNvPr id="31" name="Shape 28"/>
+          <p:cNvPr id="32" name="Shape 28"/>
           <p:cNvSpPr/>
           <p:nvPr/>
         </p:nvSpPr>
@@ -13798,7 +13798,7 @@
       </p:sp>
       <p:sp>
         <p:nvSpPr>
-          <p:cNvPr id="32" name="Shape 29"/>
+          <p:cNvPr id="33" name="Shape 29"/>
           <p:cNvSpPr/>
           <p:nvPr/>
         </p:nvSpPr>
@@ -13818,7 +13818,7 @@
       </p:sp>
       <p:sp>
         <p:nvSpPr>
-          <p:cNvPr id="33" name="Text 30"/>
+          <p:cNvPr id="34" name="Text 30"/>
           <p:cNvSpPr/>
           <p:nvPr/>
         </p:nvSpPr>
@@ -13857,7 +13857,7 @@
       </p:sp>
       <p:sp>
         <p:nvSpPr>
-          <p:cNvPr id="34" name="Text 31"/>
+          <p:cNvPr id="35" name="Text 31"/>
           <p:cNvSpPr/>
           <p:nvPr/>
         </p:nvSpPr>
@@ -13896,7 +13896,7 @@
       </p:sp>
       <p:sp>
         <p:nvSpPr>
-          <p:cNvPr id="35" name="Text 32"/>
+          <p:cNvPr id="36" name="Text 32"/>
           <p:cNvSpPr/>
           <p:nvPr/>
         </p:nvSpPr>
@@ -13938,7 +13938,7 @@
       </p:sp>
       <p:sp>
         <p:nvSpPr>
-          <p:cNvPr id="36" name="Shape 33"/>
+          <p:cNvPr id="37" name="Shape 33"/>
           <p:cNvSpPr/>
           <p:nvPr/>
         </p:nvSpPr>
@@ -13960,7 +13960,7 @@
       </p:sp>
       <p:sp>
         <p:nvSpPr>
-          <p:cNvPr id="37" name="Text 34"/>
+          <p:cNvPr id="38" name="Text 34"/>
           <p:cNvSpPr/>
           <p:nvPr/>
         </p:nvSpPr>
@@ -13999,7 +13999,7 @@
       </p:sp>
       <p:sp>
         <p:nvSpPr>
-          <p:cNvPr id="38" name="Text 35"/>
+          <p:cNvPr id="39" name="Text 35"/>
           <p:cNvSpPr/>
           <p:nvPr/>
         </p:nvSpPr>
@@ -14287,7 +14287,7 @@
       </p:pic>
       <p:sp>
         <p:nvSpPr>
-          <p:cNvPr id="7" name="Shape 4"/>
+          <p:cNvPr id="8" name="Shape 4"/>
           <p:cNvSpPr/>
           <p:nvPr/>
         </p:nvSpPr>
@@ -14314,7 +14314,7 @@
       </p:sp>
       <p:sp>
         <p:nvSpPr>
-          <p:cNvPr id="8" name="Shape 5"/>
+          <p:cNvPr id="9" name="Shape 5"/>
           <p:cNvSpPr/>
           <p:nvPr/>
         </p:nvSpPr>
@@ -14334,7 +14334,7 @@
       </p:sp>
       <p:sp>
         <p:nvSpPr>
-          <p:cNvPr id="9" name="Text 6"/>
+          <p:cNvPr id="10" name="Text 6"/>
           <p:cNvSpPr/>
           <p:nvPr/>
         </p:nvSpPr>
@@ -14373,7 +14373,7 @@
       </p:sp>
       <p:sp>
         <p:nvSpPr>
-          <p:cNvPr id="10" name="Text 7"/>
+          <p:cNvPr id="11" name="Text 7"/>
           <p:cNvSpPr/>
           <p:nvPr/>
         </p:nvSpPr>
@@ -14412,7 +14412,7 @@
       </p:sp>
       <p:sp>
         <p:nvSpPr>
-          <p:cNvPr id="11" name="Text 8"/>
+          <p:cNvPr id="12" name="Text 8"/>
           <p:cNvSpPr/>
           <p:nvPr/>
         </p:nvSpPr>
@@ -14454,7 +14454,7 @@
       </p:sp>
       <p:sp>
         <p:nvSpPr>
-          <p:cNvPr id="12" name="Shape 9"/>
+          <p:cNvPr id="13" name="Shape 9"/>
           <p:cNvSpPr/>
           <p:nvPr/>
         </p:nvSpPr>
@@ -14481,7 +14481,7 @@
       </p:sp>
       <p:sp>
         <p:nvSpPr>
-          <p:cNvPr id="13" name="Shape 10"/>
+          <p:cNvPr id="14" name="Shape 10"/>
           <p:cNvSpPr/>
           <p:nvPr/>
         </p:nvSpPr>
@@ -14501,7 +14501,7 @@
       </p:sp>
       <p:sp>
         <p:nvSpPr>
-          <p:cNvPr id="14" name="Text 11"/>
+          <p:cNvPr id="15" name="Text 11"/>
           <p:cNvSpPr/>
           <p:nvPr/>
         </p:nvSpPr>
@@ -14540,7 +14540,7 @@
       </p:sp>
       <p:sp>
         <p:nvSpPr>
-          <p:cNvPr id="15" name="Text 12"/>
+          <p:cNvPr id="16" name="Text 12"/>
           <p:cNvSpPr/>
           <p:nvPr/>
         </p:nvSpPr>
@@ -14579,7 +14579,7 @@
       </p:sp>
       <p:sp>
         <p:nvSpPr>
-          <p:cNvPr id="16" name="Text 13"/>
+          <p:cNvPr id="17" name="Text 13"/>
           <p:cNvSpPr/>
           <p:nvPr/>
         </p:nvSpPr>
@@ -14621,7 +14621,7 @@
       </p:sp>
       <p:sp>
         <p:nvSpPr>
-          <p:cNvPr id="17" name="Shape 14"/>
+          <p:cNvPr id="18" name="Shape 14"/>
           <p:cNvSpPr/>
           <p:nvPr/>
         </p:nvSpPr>
@@ -14648,7 +14648,7 @@
       </p:sp>
       <p:sp>
         <p:nvSpPr>
-          <p:cNvPr id="18" name="Shape 15"/>
+          <p:cNvPr id="19" name="Shape 15"/>
           <p:cNvSpPr/>
           <p:nvPr/>
         </p:nvSpPr>
@@ -14668,7 +14668,7 @@
       </p:sp>
       <p:sp>
         <p:nvSpPr>
-          <p:cNvPr id="19" name="Text 16"/>
+          <p:cNvPr id="20" name="Text 16"/>
           <p:cNvSpPr/>
           <p:nvPr/>
         </p:nvSpPr>
@@ -14707,7 +14707,7 @@
       </p:sp>
       <p:sp>
         <p:nvSpPr>
-          <p:cNvPr id="20" name="Text 17"/>
+          <p:cNvPr id="21" name="Text 17"/>
           <p:cNvSpPr/>
           <p:nvPr/>
         </p:nvSpPr>
@@ -14746,7 +14746,7 @@
       </p:sp>
       <p:sp>
         <p:nvSpPr>
-          <p:cNvPr id="21" name="Text 18"/>
+          <p:cNvPr id="22" name="Text 18"/>
           <p:cNvSpPr/>
           <p:nvPr/>
         </p:nvSpPr>
@@ -14788,7 +14788,7 @@
       </p:sp>
       <p:sp>
         <p:nvSpPr>
-          <p:cNvPr id="22" name="Shape 19"/>
+          <p:cNvPr id="23" name="Shape 19"/>
           <p:cNvSpPr/>
           <p:nvPr/>
         </p:nvSpPr>
@@ -14815,7 +14815,7 @@
       </p:sp>
       <p:sp>
         <p:nvSpPr>
-          <p:cNvPr id="23" name="Shape 20"/>
+          <p:cNvPr id="24" name="Shape 20"/>
           <p:cNvSpPr/>
           <p:nvPr/>
         </p:nvSpPr>
@@ -14835,7 +14835,7 @@
       </p:sp>
       <p:sp>
         <p:nvSpPr>
-          <p:cNvPr id="24" name="Text 21"/>
+          <p:cNvPr id="25" name="Text 21"/>
           <p:cNvSpPr/>
           <p:nvPr/>
         </p:nvSpPr>
@@ -14874,7 +14874,7 @@
       </p:sp>
       <p:sp>
         <p:nvSpPr>
-          <p:cNvPr id="25" name="Text 22"/>
+          <p:cNvPr id="26" name="Text 22"/>
           <p:cNvSpPr/>
           <p:nvPr/>
         </p:nvSpPr>
@@ -14913,7 +14913,7 @@
       </p:sp>
       <p:sp>
         <p:nvSpPr>
-          <p:cNvPr id="26" name="Text 23"/>
+          <p:cNvPr id="27" name="Text 23"/>
           <p:cNvSpPr/>
           <p:nvPr/>
         </p:nvSpPr>
@@ -14955,7 +14955,7 @@
       </p:sp>
       <p:sp>
         <p:nvSpPr>
-          <p:cNvPr id="27" name="Shape 24"/>
+          <p:cNvPr id="28" name="Shape 24"/>
           <p:cNvSpPr/>
           <p:nvPr/>
         </p:nvSpPr>
@@ -14982,7 +14982,7 @@
       </p:sp>
       <p:sp>
         <p:nvSpPr>
-          <p:cNvPr id="28" name="Shape 25"/>
+          <p:cNvPr id="29" name="Shape 25"/>
           <p:cNvSpPr/>
           <p:nvPr/>
         </p:nvSpPr>
@@ -15002,7 +15002,7 @@
       </p:sp>
       <p:sp>
         <p:nvSpPr>
-          <p:cNvPr id="29" name="Text 26"/>
+          <p:cNvPr id="30" name="Text 26"/>
           <p:cNvSpPr/>
           <p:nvPr/>
         </p:nvSpPr>
@@ -15041,7 +15041,7 @@
       </p:sp>
       <p:sp>
         <p:nvSpPr>
-          <p:cNvPr id="30" name="Text 27"/>
+          <p:cNvPr id="31" name="Text 27"/>
           <p:cNvSpPr/>
           <p:nvPr/>
         </p:nvSpPr>
@@ -15080,7 +15080,7 @@
       </p:sp>
       <p:sp>
         <p:nvSpPr>
-          <p:cNvPr id="31" name="Text 28"/>
+          <p:cNvPr id="32" name="Text 28"/>
           <p:cNvSpPr/>
           <p:nvPr/>
         </p:nvSpPr>
@@ -15122,7 +15122,7 @@
       </p:sp>
       <p:sp>
         <p:nvSpPr>
-          <p:cNvPr id="32" name="Shape 29"/>
+          <p:cNvPr id="33" name="Shape 29"/>
           <p:cNvSpPr/>
           <p:nvPr/>
         </p:nvSpPr>
@@ -15149,7 +15149,7 @@
       </p:sp>
       <p:sp>
         <p:nvSpPr>
-          <p:cNvPr id="33" name="Shape 30"/>
+          <p:cNvPr id="34" name="Shape 30"/>
           <p:cNvSpPr/>
           <p:nvPr/>
         </p:nvSpPr>
@@ -15169,7 +15169,7 @@
       </p:sp>
       <p:sp>
         <p:nvSpPr>
-          <p:cNvPr id="34" name="Text 31"/>
+          <p:cNvPr id="35" name="Text 31"/>
           <p:cNvSpPr/>
           <p:nvPr/>
         </p:nvSpPr>
@@ -15208,7 +15208,7 @@
       </p:sp>
       <p:sp>
         <p:nvSpPr>
-          <p:cNvPr id="35" name="Text 32"/>
+          <p:cNvPr id="36" name="Text 32"/>
           <p:cNvSpPr/>
           <p:nvPr/>
         </p:nvSpPr>
@@ -15247,7 +15247,7 @@
       </p:sp>
       <p:sp>
         <p:nvSpPr>
-          <p:cNvPr id="36" name="Text 33"/>
+          <p:cNvPr id="37" name="Text 33"/>
           <p:cNvSpPr/>
           <p:nvPr/>
         </p:nvSpPr>
@@ -15414,7 +15414,7 @@
         </p:nvSpPr>
         <p:spPr>
           <a:xfrm>
-            <a:off x="566928" y="1024128"/>
+            <a:off x="566928" y="1193140"/>
             <a:ext cx="950976" cy="256032"/>
           </a:xfrm>
           <a:prstGeom prst="roundRect">
@@ -15436,7 +15436,7 @@
         </p:nvSpPr>
         <p:spPr>
           <a:xfrm>
-            <a:off x="566928" y="1024128"/>
+            <a:off x="566928" y="1193140"/>
             <a:ext cx="950976" cy="256032"/>
           </a:xfrm>
           <a:prstGeom prst="rect">
@@ -15493,7 +15493,7 @@
       </p:pic>
       <p:sp>
         <p:nvSpPr>
-          <p:cNvPr id="6" name="Shape 3"/>
+          <p:cNvPr id="7" name="Shape 3"/>
           <p:cNvSpPr/>
           <p:nvPr/>
         </p:nvSpPr>
@@ -15513,7 +15513,7 @@
       </p:sp>
       <p:sp>
         <p:nvSpPr>
-          <p:cNvPr id="7" name="Text 4"/>
+          <p:cNvPr id="8" name="Text 4"/>
           <p:cNvSpPr/>
           <p:nvPr/>
         </p:nvSpPr>
@@ -15552,7 +15552,7 @@
       </p:sp>
       <p:sp>
         <p:nvSpPr>
-          <p:cNvPr id="8" name="Text 5"/>
+          <p:cNvPr id="9" name="Text 5"/>
           <p:cNvSpPr/>
           <p:nvPr/>
         </p:nvSpPr>
@@ -15605,7 +15605,7 @@
       </p:sp>
       <p:sp>
         <p:nvSpPr>
-          <p:cNvPr id="9" name="Shape 6"/>
+          <p:cNvPr id="10" name="Shape 6"/>
           <p:cNvSpPr/>
           <p:nvPr/>
         </p:nvSpPr>
@@ -15625,7 +15625,7 @@
       </p:sp>
       <p:sp>
         <p:nvSpPr>
-          <p:cNvPr id="10" name="Text 7"/>
+          <p:cNvPr id="11" name="Text 7"/>
           <p:cNvSpPr/>
           <p:nvPr/>
         </p:nvSpPr>
@@ -15664,7 +15664,7 @@
       </p:sp>
       <p:sp>
         <p:nvSpPr>
-          <p:cNvPr id="11" name="Text 8"/>
+          <p:cNvPr id="12" name="Text 8"/>
           <p:cNvSpPr/>
           <p:nvPr/>
         </p:nvSpPr>
@@ -15717,7 +15717,7 @@
       </p:sp>
       <p:sp>
         <p:nvSpPr>
-          <p:cNvPr id="12" name="Shape 9"/>
+          <p:cNvPr id="13" name="Shape 9"/>
           <p:cNvSpPr/>
           <p:nvPr/>
         </p:nvSpPr>
@@ -15737,7 +15737,7 @@
       </p:sp>
       <p:sp>
         <p:nvSpPr>
-          <p:cNvPr id="13" name="Text 10"/>
+          <p:cNvPr id="14" name="Text 10"/>
           <p:cNvSpPr/>
           <p:nvPr/>
         </p:nvSpPr>
@@ -15776,7 +15776,7 @@
       </p:sp>
       <p:sp>
         <p:nvSpPr>
-          <p:cNvPr id="14" name="Text 11"/>
+          <p:cNvPr id="15" name="Text 11"/>
           <p:cNvSpPr/>
           <p:nvPr/>
         </p:nvSpPr>
@@ -15829,7 +15829,7 @@
       </p:sp>
       <p:sp>
         <p:nvSpPr>
-          <p:cNvPr id="15" name="Shape 12"/>
+          <p:cNvPr id="16" name="Shape 12"/>
           <p:cNvSpPr/>
           <p:nvPr/>
         </p:nvSpPr>
@@ -15849,7 +15849,7 @@
       </p:sp>
       <p:sp>
         <p:nvSpPr>
-          <p:cNvPr id="16" name="Text 13"/>
+          <p:cNvPr id="17" name="Text 13"/>
           <p:cNvSpPr/>
           <p:nvPr/>
         </p:nvSpPr>
@@ -15888,7 +15888,7 @@
       </p:sp>
       <p:sp>
         <p:nvSpPr>
-          <p:cNvPr id="17" name="Text 14"/>
+          <p:cNvPr id="18" name="Text 14"/>
           <p:cNvSpPr/>
           <p:nvPr/>
         </p:nvSpPr>
@@ -15941,7 +15941,7 @@
       </p:sp>
       <p:sp>
         <p:nvSpPr>
-          <p:cNvPr id="18" name="Shape 15"/>
+          <p:cNvPr id="19" name="Shape 15"/>
           <p:cNvSpPr/>
           <p:nvPr/>
         </p:nvSpPr>
@@ -15961,7 +15961,7 @@
       </p:sp>
       <p:sp>
         <p:nvSpPr>
-          <p:cNvPr id="19" name="Text 16"/>
+          <p:cNvPr id="20" name="Text 16"/>
           <p:cNvSpPr/>
           <p:nvPr/>
         </p:nvSpPr>
@@ -16000,7 +16000,7 @@
       </p:sp>
       <p:sp>
         <p:nvSpPr>
-          <p:cNvPr id="20" name="Text 17"/>
+          <p:cNvPr id="21" name="Text 17"/>
           <p:cNvSpPr/>
           <p:nvPr/>
         </p:nvSpPr>
@@ -16053,7 +16053,7 @@
       </p:sp>
       <p:sp>
         <p:nvSpPr>
-          <p:cNvPr id="21" name="Shape 18"/>
+          <p:cNvPr id="22" name="Shape 18"/>
           <p:cNvSpPr/>
           <p:nvPr/>
         </p:nvSpPr>
@@ -16073,7 +16073,7 @@
       </p:sp>
       <p:sp>
         <p:nvSpPr>
-          <p:cNvPr id="22" name="Text 19"/>
+          <p:cNvPr id="23" name="Text 19"/>
           <p:cNvSpPr/>
           <p:nvPr/>
         </p:nvSpPr>
@@ -16112,7 +16112,7 @@
       </p:sp>
       <p:sp>
         <p:nvSpPr>
-          <p:cNvPr id="23" name="Text 20"/>
+          <p:cNvPr id="24" name="Text 20"/>
           <p:cNvSpPr/>
           <p:nvPr/>
         </p:nvSpPr>
@@ -16369,7 +16369,7 @@
       </p:pic>
       <p:sp>
         <p:nvSpPr>
-          <p:cNvPr id="6" name="Shape 3"/>
+          <p:cNvPr id="7" name="Shape 3"/>
           <p:cNvSpPr/>
           <p:nvPr/>
         </p:nvSpPr>
@@ -16391,7 +16391,7 @@
       </p:sp>
       <p:sp>
         <p:nvSpPr>
-          <p:cNvPr id="7" name="Text 4"/>
+          <p:cNvPr id="8" name="Text 4"/>
           <p:cNvSpPr/>
           <p:nvPr/>
         </p:nvSpPr>
@@ -16430,7 +16430,7 @@
       </p:sp>
       <p:sp>
         <p:nvSpPr>
-          <p:cNvPr id="8" name="Text 5"/>
+          <p:cNvPr id="9" name="Text 5"/>
           <p:cNvSpPr/>
           <p:nvPr/>
         </p:nvSpPr>
@@ -16472,7 +16472,7 @@
       </p:sp>
       <p:sp>
         <p:nvSpPr>
-          <p:cNvPr id="9" name="Shape 6"/>
+          <p:cNvPr id="10" name="Shape 6"/>
           <p:cNvSpPr/>
           <p:nvPr/>
         </p:nvSpPr>
@@ -16494,7 +16494,7 @@
       </p:sp>
       <p:sp>
         <p:nvSpPr>
-          <p:cNvPr id="10" name="Text 7"/>
+          <p:cNvPr id="11" name="Text 7"/>
           <p:cNvSpPr/>
           <p:nvPr/>
         </p:nvSpPr>
@@ -16533,7 +16533,7 @@
       </p:sp>
       <p:sp>
         <p:nvSpPr>
-          <p:cNvPr id="11" name="Text 8"/>
+          <p:cNvPr id="12" name="Text 8"/>
           <p:cNvSpPr/>
           <p:nvPr/>
         </p:nvSpPr>
@@ -16575,7 +16575,7 @@
       </p:sp>
       <p:sp>
         <p:nvSpPr>
-          <p:cNvPr id="12" name="Shape 9"/>
+          <p:cNvPr id="13" name="Shape 9"/>
           <p:cNvSpPr/>
           <p:nvPr/>
         </p:nvSpPr>
@@ -16597,7 +16597,7 @@
       </p:sp>
       <p:sp>
         <p:nvSpPr>
-          <p:cNvPr id="13" name="Text 10"/>
+          <p:cNvPr id="14" name="Text 10"/>
           <p:cNvSpPr/>
           <p:nvPr/>
         </p:nvSpPr>
@@ -16636,7 +16636,7 @@
       </p:sp>
       <p:sp>
         <p:nvSpPr>
-          <p:cNvPr id="14" name="Text 11"/>
+          <p:cNvPr id="15" name="Text 11"/>
           <p:cNvSpPr/>
           <p:nvPr/>
         </p:nvSpPr>
@@ -16678,7 +16678,7 @@
       </p:sp>
       <p:sp>
         <p:nvSpPr>
-          <p:cNvPr id="15" name="Shape 12"/>
+          <p:cNvPr id="16" name="Shape 12"/>
           <p:cNvSpPr/>
           <p:nvPr/>
         </p:nvSpPr>
@@ -16700,7 +16700,7 @@
       </p:sp>
       <p:sp>
         <p:nvSpPr>
-          <p:cNvPr id="16" name="Text 13"/>
+          <p:cNvPr id="17" name="Text 13"/>
           <p:cNvSpPr/>
           <p:nvPr/>
         </p:nvSpPr>
@@ -16739,7 +16739,7 @@
       </p:sp>
       <p:sp>
         <p:nvSpPr>
-          <p:cNvPr id="17" name="Shape 14"/>
+          <p:cNvPr id="18" name="Shape 14"/>
           <p:cNvSpPr/>
           <p:nvPr/>
         </p:nvSpPr>
@@ -16762,7 +16762,7 @@
       </p:sp>
       <p:sp>
         <p:nvSpPr>
-          <p:cNvPr id="18" name="Shape 15"/>
+          <p:cNvPr id="19" name="Shape 15"/>
           <p:cNvSpPr/>
           <p:nvPr/>
         </p:nvSpPr>
@@ -16782,7 +16782,7 @@
       </p:sp>
       <p:sp>
         <p:nvSpPr>
-          <p:cNvPr id="19" name="Shape 16"/>
+          <p:cNvPr id="20" name="Shape 16"/>
           <p:cNvSpPr/>
           <p:nvPr/>
         </p:nvSpPr>
@@ -16809,7 +16809,7 @@
       </p:sp>
       <p:sp>
         <p:nvSpPr>
-          <p:cNvPr id="20" name="Text 17"/>
+          <p:cNvPr id="21" name="Text 17"/>
           <p:cNvSpPr/>
           <p:nvPr/>
         </p:nvSpPr>
@@ -16848,7 +16848,7 @@
       </p:sp>
       <p:sp>
         <p:nvSpPr>
-          <p:cNvPr id="21" name="Shape 18"/>
+          <p:cNvPr id="22" name="Shape 18"/>
           <p:cNvSpPr/>
           <p:nvPr/>
         </p:nvSpPr>
@@ -16871,7 +16871,7 @@
       </p:sp>
       <p:sp>
         <p:nvSpPr>
-          <p:cNvPr id="22" name="Shape 19"/>
+          <p:cNvPr id="23" name="Shape 19"/>
           <p:cNvSpPr/>
           <p:nvPr/>
         </p:nvSpPr>
@@ -16891,7 +16891,7 @@
       </p:sp>
       <p:sp>
         <p:nvSpPr>
-          <p:cNvPr id="23" name="Shape 20"/>
+          <p:cNvPr id="24" name="Shape 20"/>
           <p:cNvSpPr/>
           <p:nvPr/>
         </p:nvSpPr>
@@ -16918,7 +16918,7 @@
       </p:sp>
       <p:sp>
         <p:nvSpPr>
-          <p:cNvPr id="24" name="Text 21"/>
+          <p:cNvPr id="25" name="Text 21"/>
           <p:cNvSpPr/>
           <p:nvPr/>
         </p:nvSpPr>
@@ -16957,7 +16957,7 @@
       </p:sp>
       <p:sp>
         <p:nvSpPr>
-          <p:cNvPr id="25" name="Shape 22"/>
+          <p:cNvPr id="26" name="Shape 22"/>
           <p:cNvSpPr/>
           <p:nvPr/>
         </p:nvSpPr>
@@ -16980,7 +16980,7 @@
       </p:sp>
       <p:sp>
         <p:nvSpPr>
-          <p:cNvPr id="26" name="Shape 23"/>
+          <p:cNvPr id="27" name="Shape 23"/>
           <p:cNvSpPr/>
           <p:nvPr/>
         </p:nvSpPr>
@@ -17000,7 +17000,7 @@
       </p:sp>
       <p:sp>
         <p:nvSpPr>
-          <p:cNvPr id="27" name="Shape 24"/>
+          <p:cNvPr id="28" name="Shape 24"/>
           <p:cNvSpPr/>
           <p:nvPr/>
         </p:nvSpPr>
@@ -17027,7 +17027,7 @@
       </p:sp>
       <p:sp>
         <p:nvSpPr>
-          <p:cNvPr id="28" name="Text 25"/>
+          <p:cNvPr id="29" name="Text 25"/>
           <p:cNvSpPr/>
           <p:nvPr/>
         </p:nvSpPr>
@@ -17066,7 +17066,7 @@
       </p:sp>
       <p:sp>
         <p:nvSpPr>
-          <p:cNvPr id="29" name="Shape 26"/>
+          <p:cNvPr id="30" name="Shape 26"/>
           <p:cNvSpPr/>
           <p:nvPr/>
         </p:nvSpPr>
@@ -17089,7 +17089,7 @@
       </p:sp>
       <p:sp>
         <p:nvSpPr>
-          <p:cNvPr id="30" name="Shape 27"/>
+          <p:cNvPr id="31" name="Shape 27"/>
           <p:cNvSpPr/>
           <p:nvPr/>
         </p:nvSpPr>
@@ -17109,7 +17109,7 @@
       </p:sp>
       <p:sp>
         <p:nvSpPr>
-          <p:cNvPr id="31" name="Shape 28"/>
+          <p:cNvPr id="32" name="Shape 28"/>
           <p:cNvSpPr/>
           <p:nvPr/>
         </p:nvSpPr>
@@ -17136,7 +17136,7 @@
       </p:sp>
       <p:sp>
         <p:nvSpPr>
-          <p:cNvPr id="32" name="Text 29"/>
+          <p:cNvPr id="33" name="Text 29"/>
           <p:cNvSpPr/>
           <p:nvPr/>
         </p:nvSpPr>
@@ -17175,7 +17175,7 @@
       </p:sp>
       <p:sp>
         <p:nvSpPr>
-          <p:cNvPr id="33" name="Shape 30"/>
+          <p:cNvPr id="34" name="Shape 30"/>
           <p:cNvSpPr/>
           <p:nvPr/>
         </p:nvSpPr>
@@ -17198,7 +17198,7 @@
       </p:sp>
       <p:sp>
         <p:nvSpPr>
-          <p:cNvPr id="34" name="Shape 31"/>
+          <p:cNvPr id="35" name="Shape 31"/>
           <p:cNvSpPr/>
           <p:nvPr/>
         </p:nvSpPr>
@@ -17218,7 +17218,7 @@
       </p:sp>
       <p:sp>
         <p:nvSpPr>
-          <p:cNvPr id="35" name="Shape 32"/>
+          <p:cNvPr id="36" name="Shape 32"/>
           <p:cNvSpPr/>
           <p:nvPr/>
         </p:nvSpPr>
@@ -17245,7 +17245,7 @@
       </p:sp>
       <p:sp>
         <p:nvSpPr>
-          <p:cNvPr id="36" name="Text 33"/>
+          <p:cNvPr id="37" name="Text 33"/>
           <p:cNvSpPr/>
           <p:nvPr/>
         </p:nvSpPr>
@@ -17284,7 +17284,7 @@
       </p:sp>
       <p:sp>
         <p:nvSpPr>
-          <p:cNvPr id="37" name="Shape 34"/>
+          <p:cNvPr id="38" name="Shape 34"/>
           <p:cNvSpPr/>
           <p:nvPr/>
         </p:nvSpPr>
@@ -17307,7 +17307,7 @@
       </p:sp>
       <p:sp>
         <p:nvSpPr>
-          <p:cNvPr id="38" name="Shape 35"/>
+          <p:cNvPr id="39" name="Shape 35"/>
           <p:cNvSpPr/>
           <p:nvPr/>
         </p:nvSpPr>
@@ -17327,7 +17327,7 @@
       </p:sp>
       <p:sp>
         <p:nvSpPr>
-          <p:cNvPr id="39" name="Shape 36"/>
+          <p:cNvPr id="40" name="Shape 36"/>
           <p:cNvSpPr/>
           <p:nvPr/>
         </p:nvSpPr>
@@ -17349,7 +17349,7 @@
       </p:sp>
       <p:sp>
         <p:nvSpPr>
-          <p:cNvPr id="40" name="Text 37"/>
+          <p:cNvPr id="41" name="Text 37"/>
           <p:cNvSpPr/>
           <p:nvPr/>
         </p:nvSpPr>
@@ -17388,7 +17388,7 @@
       </p:sp>
       <p:sp>
         <p:nvSpPr>
-          <p:cNvPr id="41" name="Shape 38"/>
+          <p:cNvPr id="42" name="Shape 38"/>
           <p:cNvSpPr/>
           <p:nvPr/>
         </p:nvSpPr>
@@ -17410,7 +17410,7 @@
       </p:sp>
       <p:sp>
         <p:nvSpPr>
-          <p:cNvPr id="42" name="Text 39"/>
+          <p:cNvPr id="43" name="Text 39"/>
           <p:cNvSpPr/>
           <p:nvPr/>
         </p:nvSpPr>
@@ -17656,7 +17656,7 @@
       </p:pic>
       <p:sp>
         <p:nvSpPr>
-          <p:cNvPr id="6" name="Shape 3"/>
+          <p:cNvPr id="7" name="Shape 3"/>
           <p:cNvSpPr/>
           <p:nvPr/>
         </p:nvSpPr>
@@ -17683,7 +17683,7 @@
       </p:sp>
       <p:sp>
         <p:nvSpPr>
-          <p:cNvPr id="7" name="Shape 4"/>
+          <p:cNvPr id="8" name="Shape 4"/>
           <p:cNvSpPr/>
           <p:nvPr/>
         </p:nvSpPr>
@@ -17710,76 +17710,77 @@
       </p:sp>
       <p:sp>
         <p:nvSpPr>
-          <p:cNvPr id="8" name="Text 5"/>
-          <p:cNvSpPr/>
-          <p:nvPr/>
-        </p:nvSpPr>
-        <p:spPr>
-          <a:xfrm>
-            <a:off x="978408" y="2157984"/>
-            <a:ext cx="256032" cy="256032"/>
-          </a:xfrm>
-          <a:prstGeom prst="rect">
-            <a:avLst/>
-          </a:prstGeom>
-          <a:noFill/>
-          <a:ln/>
-        </p:spPr>
-        <p:txBody>
-          <a:bodyPr wrap="square" lIns="0" tIns="0" rIns="0" bIns="0" rtlCol="0" anchor="ctr"/>
-          <a:lstStyle/>
-          <a:p>
-            <a:pPr algn="ctr" indent="0" marL="0">
-              <a:buNone/>
-            </a:pPr>
-            <a:r>
-              <a:rPr lang="en-US" sz="1000" b="1" dirty="0">
-                <a:solidFill>
-                  <a:srgbClr val="5A05F4"/>
+          <p:cNvPr id="9" name="Shape 5"/>
+          <p:cNvSpPr/>
+          <p:nvPr/>
+        </p:nvSpPr>
+        <p:spPr>
+          <a:xfrm rot="2700000">
+            <a:off x="1041227" y="2297430"/>
+            <a:ext cx="58156" cy="27432"/>
+          </a:xfrm>
+          <a:prstGeom prst="rect">
+            <a:avLst/>
+          </a:prstGeom>
+          <a:solidFill>
+            <a:srgbClr val="5A05F4"/>
+          </a:solidFill>
+          <a:ln/>
+        </p:spPr>
+      </p:sp>
+      <p:sp>
+        <p:nvSpPr>
+          <p:cNvPr id="10" name="Shape 6"/>
+          <p:cNvSpPr/>
+          <p:nvPr/>
+        </p:nvSpPr>
+        <p:spPr>
+          <a:xfrm rot="-3000000">
+            <a:off x="1069025" y="2271370"/>
+            <a:ext cx="121432" cy="27432"/>
+          </a:xfrm>
+          <a:prstGeom prst="rect">
+            <a:avLst/>
+          </a:prstGeom>
+          <a:solidFill>
+            <a:srgbClr val="5A05F4"/>
+          </a:solidFill>
+          <a:ln/>
+        </p:spPr>
+      </p:sp>
+      <p:sp>
+        <p:nvSpPr>
+          <p:cNvPr id="11" name="Text 7"/>
+          <p:cNvSpPr/>
+          <p:nvPr/>
+        </p:nvSpPr>
+        <p:spPr>
+          <a:xfrm>
+            <a:off x="1362456" y="2103120"/>
+            <a:ext cx="4617720" cy="384048"/>
+          </a:xfrm>
+          <a:prstGeom prst="rect">
+            <a:avLst/>
+          </a:prstGeom>
+          <a:noFill/>
+          <a:ln/>
+        </p:spPr>
+        <p:txBody>
+          <a:bodyPr wrap="square" lIns="0" tIns="0" rIns="0" bIns="0" rtlCol="0" anchor="ctr"/>
+          <a:lstStyle/>
+          <a:p>
+            <a:pPr indent="0" marL="0">
+              <a:buNone/>
+            </a:pPr>
+            <a:r>
+              <a:rPr lang="en-US" sz="1250" dirty="0">
+                <a:solidFill>
+                  <a:srgbClr val="111318"/>
                 </a:solidFill>
                 <a:latin typeface="Montserrat" pitchFamily="34" charset="0"/>
                 <a:ea typeface="Montserrat" pitchFamily="34" charset="-122"/>
                 <a:cs typeface="Montserrat" pitchFamily="34" charset="-120"/>
               </a:rPr>
-              <a:t>✓</a:t>
-            </a:r>
-            <a:endParaRPr lang="en-US" sz="1000" dirty="0"/>
-          </a:p>
-        </p:txBody>
-      </p:sp>
-      <p:sp>
-        <p:nvSpPr>
-          <p:cNvPr id="9" name="Text 6"/>
-          <p:cNvSpPr/>
-          <p:nvPr/>
-        </p:nvSpPr>
-        <p:spPr>
-          <a:xfrm>
-            <a:off x="1362456" y="2103120"/>
-            <a:ext cx="4617720" cy="384048"/>
-          </a:xfrm>
-          <a:prstGeom prst="rect">
-            <a:avLst/>
-          </a:prstGeom>
-          <a:noFill/>
-          <a:ln/>
-        </p:spPr>
-        <p:txBody>
-          <a:bodyPr wrap="square" lIns="0" tIns="0" rIns="0" bIns="0" rtlCol="0" anchor="ctr"/>
-          <a:lstStyle/>
-          <a:p>
-            <a:pPr indent="0" marL="0">
-              <a:buNone/>
-            </a:pPr>
-            <a:r>
-              <a:rPr lang="en-US" sz="1250" dirty="0">
-                <a:solidFill>
-                  <a:srgbClr val="111318"/>
-                </a:solidFill>
-                <a:latin typeface="Montserrat" pitchFamily="34" charset="0"/>
-                <a:ea typeface="Montserrat" pitchFamily="34" charset="-122"/>
-                <a:cs typeface="Montserrat" pitchFamily="34" charset="-120"/>
-              </a:rPr>
               <a:t>стек піднявся, консоль показує «—»</a:t>
             </a:r>
             <a:endParaRPr lang="en-US" sz="1250" dirty="0"/>
@@ -17788,7 +17789,7 @@
       </p:sp>
       <p:sp>
         <p:nvSpPr>
-          <p:cNvPr id="10" name="Shape 7"/>
+          <p:cNvPr id="12" name="Shape 8"/>
           <p:cNvSpPr/>
           <p:nvPr/>
         </p:nvSpPr>
@@ -17815,76 +17816,77 @@
       </p:sp>
       <p:sp>
         <p:nvSpPr>
-          <p:cNvPr id="11" name="Text 8"/>
-          <p:cNvSpPr/>
-          <p:nvPr/>
-        </p:nvSpPr>
-        <p:spPr>
-          <a:xfrm>
-            <a:off x="978408" y="2724912"/>
-            <a:ext cx="256032" cy="256032"/>
-          </a:xfrm>
-          <a:prstGeom prst="rect">
-            <a:avLst/>
-          </a:prstGeom>
-          <a:noFill/>
-          <a:ln/>
-        </p:spPr>
-        <p:txBody>
-          <a:bodyPr wrap="square" lIns="0" tIns="0" rIns="0" bIns="0" rtlCol="0" anchor="ctr"/>
-          <a:lstStyle/>
-          <a:p>
-            <a:pPr algn="ctr" indent="0" marL="0">
-              <a:buNone/>
-            </a:pPr>
-            <a:r>
-              <a:rPr lang="en-US" sz="1000" b="1" dirty="0">
-                <a:solidFill>
-                  <a:srgbClr val="5A05F4"/>
+          <p:cNvPr id="13" name="Shape 9"/>
+          <p:cNvSpPr/>
+          <p:nvPr/>
+        </p:nvSpPr>
+        <p:spPr>
+          <a:xfrm rot="2700000">
+            <a:off x="1041227" y="2864358"/>
+            <a:ext cx="58156" cy="27432"/>
+          </a:xfrm>
+          <a:prstGeom prst="rect">
+            <a:avLst/>
+          </a:prstGeom>
+          <a:solidFill>
+            <a:srgbClr val="5A05F4"/>
+          </a:solidFill>
+          <a:ln/>
+        </p:spPr>
+      </p:sp>
+      <p:sp>
+        <p:nvSpPr>
+          <p:cNvPr id="14" name="Shape 10"/>
+          <p:cNvSpPr/>
+          <p:nvPr/>
+        </p:nvSpPr>
+        <p:spPr>
+          <a:xfrm rot="-3000000">
+            <a:off x="1069025" y="2838298"/>
+            <a:ext cx="121432" cy="27432"/>
+          </a:xfrm>
+          <a:prstGeom prst="rect">
+            <a:avLst/>
+          </a:prstGeom>
+          <a:solidFill>
+            <a:srgbClr val="5A05F4"/>
+          </a:solidFill>
+          <a:ln/>
+        </p:spPr>
+      </p:sp>
+      <p:sp>
+        <p:nvSpPr>
+          <p:cNvPr id="15" name="Text 11"/>
+          <p:cNvSpPr/>
+          <p:nvPr/>
+        </p:nvSpPr>
+        <p:spPr>
+          <a:xfrm>
+            <a:off x="1362456" y="2670048"/>
+            <a:ext cx="4617720" cy="384048"/>
+          </a:xfrm>
+          <a:prstGeom prst="rect">
+            <a:avLst/>
+          </a:prstGeom>
+          <a:noFill/>
+          <a:ln/>
+        </p:spPr>
+        <p:txBody>
+          <a:bodyPr wrap="square" lIns="0" tIns="0" rIns="0" bIns="0" rtlCol="0" anchor="ctr"/>
+          <a:lstStyle/>
+          <a:p>
+            <a:pPr indent="0" marL="0">
+              <a:buNone/>
+            </a:pPr>
+            <a:r>
+              <a:rPr lang="en-US" sz="1250" dirty="0">
+                <a:solidFill>
+                  <a:srgbClr val="111318"/>
                 </a:solidFill>
                 <a:latin typeface="Montserrat" pitchFamily="34" charset="0"/>
                 <a:ea typeface="Montserrat" pitchFamily="34" charset="-122"/>
                 <a:cs typeface="Montserrat" pitchFamily="34" charset="-120"/>
               </a:rPr>
-              <a:t>✓</a:t>
-            </a:r>
-            <a:endParaRPr lang="en-US" sz="1000" dirty="0"/>
-          </a:p>
-        </p:txBody>
-      </p:sp>
-      <p:sp>
-        <p:nvSpPr>
-          <p:cNvPr id="12" name="Text 9"/>
-          <p:cNvSpPr/>
-          <p:nvPr/>
-        </p:nvSpPr>
-        <p:spPr>
-          <a:xfrm>
-            <a:off x="1362456" y="2670048"/>
-            <a:ext cx="4617720" cy="384048"/>
-          </a:xfrm>
-          <a:prstGeom prst="rect">
-            <a:avLst/>
-          </a:prstGeom>
-          <a:noFill/>
-          <a:ln/>
-        </p:spPr>
-        <p:txBody>
-          <a:bodyPr wrap="square" lIns="0" tIns="0" rIns="0" bIns="0" rtlCol="0" anchor="ctr"/>
-          <a:lstStyle/>
-          <a:p>
-            <a:pPr indent="0" marL="0">
-              <a:buNone/>
-            </a:pPr>
-            <a:r>
-              <a:rPr lang="en-US" sz="1250" dirty="0">
-                <a:solidFill>
-                  <a:srgbClr val="111318"/>
-                </a:solidFill>
-                <a:latin typeface="Montserrat" pitchFamily="34" charset="0"/>
-                <a:ea typeface="Montserrat" pitchFamily="34" charset="-122"/>
-                <a:cs typeface="Montserrat" pitchFamily="34" charset="-120"/>
-              </a:rPr>
               <a:t>малюю шлях запиту з пам'яті</a:t>
             </a:r>
             <a:endParaRPr lang="en-US" sz="1250" dirty="0"/>
@@ -17893,7 +17895,7 @@
       </p:sp>
       <p:sp>
         <p:nvSpPr>
-          <p:cNvPr id="13" name="Shape 10"/>
+          <p:cNvPr id="16" name="Shape 12"/>
           <p:cNvSpPr/>
           <p:nvPr/>
         </p:nvSpPr>
@@ -17920,76 +17922,77 @@
       </p:sp>
       <p:sp>
         <p:nvSpPr>
-          <p:cNvPr id="14" name="Text 11"/>
-          <p:cNvSpPr/>
-          <p:nvPr/>
-        </p:nvSpPr>
-        <p:spPr>
-          <a:xfrm>
-            <a:off x="978408" y="3291840"/>
-            <a:ext cx="256032" cy="256032"/>
-          </a:xfrm>
-          <a:prstGeom prst="rect">
-            <a:avLst/>
-          </a:prstGeom>
-          <a:noFill/>
-          <a:ln/>
-        </p:spPr>
-        <p:txBody>
-          <a:bodyPr wrap="square" lIns="0" tIns="0" rIns="0" bIns="0" rtlCol="0" anchor="ctr"/>
-          <a:lstStyle/>
-          <a:p>
-            <a:pPr algn="ctr" indent="0" marL="0">
-              <a:buNone/>
-            </a:pPr>
-            <a:r>
-              <a:rPr lang="en-US" sz="1000" b="1" dirty="0">
-                <a:solidFill>
-                  <a:srgbClr val="5A05F4"/>
+          <p:cNvPr id="17" name="Shape 13"/>
+          <p:cNvSpPr/>
+          <p:nvPr/>
+        </p:nvSpPr>
+        <p:spPr>
+          <a:xfrm rot="2700000">
+            <a:off x="1041227" y="3431286"/>
+            <a:ext cx="58156" cy="27432"/>
+          </a:xfrm>
+          <a:prstGeom prst="rect">
+            <a:avLst/>
+          </a:prstGeom>
+          <a:solidFill>
+            <a:srgbClr val="5A05F4"/>
+          </a:solidFill>
+          <a:ln/>
+        </p:spPr>
+      </p:sp>
+      <p:sp>
+        <p:nvSpPr>
+          <p:cNvPr id="18" name="Shape 14"/>
+          <p:cNvSpPr/>
+          <p:nvPr/>
+        </p:nvSpPr>
+        <p:spPr>
+          <a:xfrm rot="-3000000">
+            <a:off x="1069025" y="3405226"/>
+            <a:ext cx="121432" cy="27432"/>
+          </a:xfrm>
+          <a:prstGeom prst="rect">
+            <a:avLst/>
+          </a:prstGeom>
+          <a:solidFill>
+            <a:srgbClr val="5A05F4"/>
+          </a:solidFill>
+          <a:ln/>
+        </p:spPr>
+      </p:sp>
+      <p:sp>
+        <p:nvSpPr>
+          <p:cNvPr id="19" name="Text 15"/>
+          <p:cNvSpPr/>
+          <p:nvPr/>
+        </p:nvSpPr>
+        <p:spPr>
+          <a:xfrm>
+            <a:off x="1362456" y="3236976"/>
+            <a:ext cx="4617720" cy="384048"/>
+          </a:xfrm>
+          <a:prstGeom prst="rect">
+            <a:avLst/>
+          </a:prstGeom>
+          <a:noFill/>
+          <a:ln/>
+        </p:spPr>
+        <p:txBody>
+          <a:bodyPr wrap="square" lIns="0" tIns="0" rIns="0" bIns="0" rtlCol="0" anchor="ctr"/>
+          <a:lstStyle/>
+          <a:p>
+            <a:pPr indent="0" marL="0">
+              <a:buNone/>
+            </a:pPr>
+            <a:r>
+              <a:rPr lang="en-US" sz="1250" dirty="0">
+                <a:solidFill>
+                  <a:srgbClr val="111318"/>
                 </a:solidFill>
                 <a:latin typeface="Montserrat" pitchFamily="34" charset="0"/>
                 <a:ea typeface="Montserrat" pitchFamily="34" charset="-122"/>
                 <a:cs typeface="Montserrat" pitchFamily="34" charset="-120"/>
               </a:rPr>
-              <a:t>✓</a:t>
-            </a:r>
-            <a:endParaRPr lang="en-US" sz="1000" dirty="0"/>
-          </a:p>
-        </p:txBody>
-      </p:sp>
-      <p:sp>
-        <p:nvSpPr>
-          <p:cNvPr id="15" name="Text 12"/>
-          <p:cNvSpPr/>
-          <p:nvPr/>
-        </p:nvSpPr>
-        <p:spPr>
-          <a:xfrm>
-            <a:off x="1362456" y="3236976"/>
-            <a:ext cx="4617720" cy="384048"/>
-          </a:xfrm>
-          <a:prstGeom prst="rect">
-            <a:avLst/>
-          </a:prstGeom>
-          <a:noFill/>
-          <a:ln/>
-        </p:spPr>
-        <p:txBody>
-          <a:bodyPr wrap="square" lIns="0" tIns="0" rIns="0" bIns="0" rtlCol="0" anchor="ctr"/>
-          <a:lstStyle/>
-          <a:p>
-            <a:pPr indent="0" marL="0">
-              <a:buNone/>
-            </a:pPr>
-            <a:r>
-              <a:rPr lang="en-US" sz="1250" dirty="0">
-                <a:solidFill>
-                  <a:srgbClr val="111318"/>
-                </a:solidFill>
-                <a:latin typeface="Montserrat" pitchFamily="34" charset="0"/>
-                <a:ea typeface="Montserrat" pitchFamily="34" charset="-122"/>
-                <a:cs typeface="Montserrat" pitchFamily="34" charset="-120"/>
-              </a:rPr>
               <a:t>знайшов свій рядок у requests</a:t>
             </a:r>
             <a:endParaRPr lang="en-US" sz="1250" dirty="0"/>
@@ -17998,7 +18001,7 @@
       </p:sp>
       <p:sp>
         <p:nvSpPr>
-          <p:cNvPr id="16" name="Shape 13"/>
+          <p:cNvPr id="20" name="Shape 16"/>
           <p:cNvSpPr/>
           <p:nvPr/>
         </p:nvSpPr>
@@ -18025,76 +18028,77 @@
       </p:sp>
       <p:sp>
         <p:nvSpPr>
-          <p:cNvPr id="17" name="Text 14"/>
-          <p:cNvSpPr/>
-          <p:nvPr/>
-        </p:nvSpPr>
-        <p:spPr>
-          <a:xfrm>
-            <a:off x="6144768" y="2157984"/>
-            <a:ext cx="256032" cy="256032"/>
-          </a:xfrm>
-          <a:prstGeom prst="rect">
-            <a:avLst/>
-          </a:prstGeom>
-          <a:noFill/>
-          <a:ln/>
-        </p:spPr>
-        <p:txBody>
-          <a:bodyPr wrap="square" lIns="0" tIns="0" rIns="0" bIns="0" rtlCol="0" anchor="ctr"/>
-          <a:lstStyle/>
-          <a:p>
-            <a:pPr algn="ctr" indent="0" marL="0">
-              <a:buNone/>
-            </a:pPr>
-            <a:r>
-              <a:rPr lang="en-US" sz="1000" b="1" dirty="0">
-                <a:solidFill>
-                  <a:srgbClr val="5A05F4"/>
+          <p:cNvPr id="21" name="Shape 17"/>
+          <p:cNvSpPr/>
+          <p:nvPr/>
+        </p:nvSpPr>
+        <p:spPr>
+          <a:xfrm rot="2700000">
+            <a:off x="6207587" y="2297430"/>
+            <a:ext cx="58156" cy="27432"/>
+          </a:xfrm>
+          <a:prstGeom prst="rect">
+            <a:avLst/>
+          </a:prstGeom>
+          <a:solidFill>
+            <a:srgbClr val="5A05F4"/>
+          </a:solidFill>
+          <a:ln/>
+        </p:spPr>
+      </p:sp>
+      <p:sp>
+        <p:nvSpPr>
+          <p:cNvPr id="22" name="Shape 18"/>
+          <p:cNvSpPr/>
+          <p:nvPr/>
+        </p:nvSpPr>
+        <p:spPr>
+          <a:xfrm rot="-3000000">
+            <a:off x="6235385" y="2271370"/>
+            <a:ext cx="121432" cy="27432"/>
+          </a:xfrm>
+          <a:prstGeom prst="rect">
+            <a:avLst/>
+          </a:prstGeom>
+          <a:solidFill>
+            <a:srgbClr val="5A05F4"/>
+          </a:solidFill>
+          <a:ln/>
+        </p:spPr>
+      </p:sp>
+      <p:sp>
+        <p:nvSpPr>
+          <p:cNvPr id="23" name="Text 19"/>
+          <p:cNvSpPr/>
+          <p:nvPr/>
+        </p:nvSpPr>
+        <p:spPr>
+          <a:xfrm>
+            <a:off x="6528816" y="2103120"/>
+            <a:ext cx="4617720" cy="384048"/>
+          </a:xfrm>
+          <a:prstGeom prst="rect">
+            <a:avLst/>
+          </a:prstGeom>
+          <a:noFill/>
+          <a:ln/>
+        </p:spPr>
+        <p:txBody>
+          <a:bodyPr wrap="square" lIns="0" tIns="0" rIns="0" bIns="0" rtlCol="0" anchor="ctr"/>
+          <a:lstStyle/>
+          <a:p>
+            <a:pPr indent="0" marL="0">
+              <a:buNone/>
+            </a:pPr>
+            <a:r>
+              <a:rPr lang="en-US" sz="1250" dirty="0">
+                <a:solidFill>
+                  <a:srgbClr val="111318"/>
                 </a:solidFill>
                 <a:latin typeface="Montserrat" pitchFamily="34" charset="0"/>
                 <a:ea typeface="Montserrat" pitchFamily="34" charset="-122"/>
                 <a:cs typeface="Montserrat" pitchFamily="34" charset="-120"/>
               </a:rPr>
-              <a:t>✓</a:t>
-            </a:r>
-            <a:endParaRPr lang="en-US" sz="1000" dirty="0"/>
-          </a:p>
-        </p:txBody>
-      </p:sp>
-      <p:sp>
-        <p:nvSpPr>
-          <p:cNvPr id="18" name="Text 15"/>
-          <p:cNvSpPr/>
-          <p:nvPr/>
-        </p:nvSpPr>
-        <p:spPr>
-          <a:xfrm>
-            <a:off x="6528816" y="2103120"/>
-            <a:ext cx="4617720" cy="384048"/>
-          </a:xfrm>
-          <a:prstGeom prst="rect">
-            <a:avLst/>
-          </a:prstGeom>
-          <a:noFill/>
-          <a:ln/>
-        </p:spPr>
-        <p:txBody>
-          <a:bodyPr wrap="square" lIns="0" tIns="0" rIns="0" bIns="0" rtlCol="0" anchor="ctr"/>
-          <a:lstStyle/>
-          <a:p>
-            <a:pPr indent="0" marL="0">
-              <a:buNone/>
-            </a:pPr>
-            <a:r>
-              <a:rPr lang="en-US" sz="1250" dirty="0">
-                <a:solidFill>
-                  <a:srgbClr val="111318"/>
-                </a:solidFill>
-                <a:latin typeface="Montserrat" pitchFamily="34" charset="0"/>
-                <a:ea typeface="Montserrat" pitchFamily="34" charset="-122"/>
-                <a:cs typeface="Montserrat" pitchFamily="34" charset="-120"/>
-              </a:rPr>
               <a:t>бачив поведінку при збої провайдера</a:t>
             </a:r>
             <a:endParaRPr lang="en-US" sz="1250" dirty="0"/>
@@ -18103,7 +18107,7 @@
       </p:sp>
       <p:sp>
         <p:nvSpPr>
-          <p:cNvPr id="19" name="Shape 16"/>
+          <p:cNvPr id="24" name="Shape 20"/>
           <p:cNvSpPr/>
           <p:nvPr/>
         </p:nvSpPr>
@@ -18130,76 +18134,77 @@
       </p:sp>
       <p:sp>
         <p:nvSpPr>
-          <p:cNvPr id="20" name="Text 17"/>
-          <p:cNvSpPr/>
-          <p:nvPr/>
-        </p:nvSpPr>
-        <p:spPr>
-          <a:xfrm>
-            <a:off x="6144768" y="2724912"/>
-            <a:ext cx="256032" cy="256032"/>
-          </a:xfrm>
-          <a:prstGeom prst="rect">
-            <a:avLst/>
-          </a:prstGeom>
-          <a:noFill/>
-          <a:ln/>
-        </p:spPr>
-        <p:txBody>
-          <a:bodyPr wrap="square" lIns="0" tIns="0" rIns="0" bIns="0" rtlCol="0" anchor="ctr"/>
-          <a:lstStyle/>
-          <a:p>
-            <a:pPr algn="ctr" indent="0" marL="0">
-              <a:buNone/>
-            </a:pPr>
-            <a:r>
-              <a:rPr lang="en-US" sz="1000" b="1" dirty="0">
-                <a:solidFill>
-                  <a:srgbClr val="5A05F4"/>
+          <p:cNvPr id="25" name="Shape 21"/>
+          <p:cNvSpPr/>
+          <p:nvPr/>
+        </p:nvSpPr>
+        <p:spPr>
+          <a:xfrm rot="2700000">
+            <a:off x="6207587" y="2864358"/>
+            <a:ext cx="58156" cy="27432"/>
+          </a:xfrm>
+          <a:prstGeom prst="rect">
+            <a:avLst/>
+          </a:prstGeom>
+          <a:solidFill>
+            <a:srgbClr val="5A05F4"/>
+          </a:solidFill>
+          <a:ln/>
+        </p:spPr>
+      </p:sp>
+      <p:sp>
+        <p:nvSpPr>
+          <p:cNvPr id="26" name="Shape 22"/>
+          <p:cNvSpPr/>
+          <p:nvPr/>
+        </p:nvSpPr>
+        <p:spPr>
+          <a:xfrm rot="-3000000">
+            <a:off x="6235385" y="2838298"/>
+            <a:ext cx="121432" cy="27432"/>
+          </a:xfrm>
+          <a:prstGeom prst="rect">
+            <a:avLst/>
+          </a:prstGeom>
+          <a:solidFill>
+            <a:srgbClr val="5A05F4"/>
+          </a:solidFill>
+          <a:ln/>
+        </p:spPr>
+      </p:sp>
+      <p:sp>
+        <p:nvSpPr>
+          <p:cNvPr id="27" name="Text 23"/>
+          <p:cNvSpPr/>
+          <p:nvPr/>
+        </p:nvSpPr>
+        <p:spPr>
+          <a:xfrm>
+            <a:off x="6528816" y="2670048"/>
+            <a:ext cx="4617720" cy="384048"/>
+          </a:xfrm>
+          <a:prstGeom prst="rect">
+            <a:avLst/>
+          </a:prstGeom>
+          <a:noFill/>
+          <a:ln/>
+        </p:spPr>
+        <p:txBody>
+          <a:bodyPr wrap="square" lIns="0" tIns="0" rIns="0" bIns="0" rtlCol="0" anchor="ctr"/>
+          <a:lstStyle/>
+          <a:p>
+            <a:pPr indent="0" marL="0">
+              <a:buNone/>
+            </a:pPr>
+            <a:r>
+              <a:rPr lang="en-US" sz="1250" dirty="0">
+                <a:solidFill>
+                  <a:srgbClr val="111318"/>
                 </a:solidFill>
                 <a:latin typeface="Montserrat" pitchFamily="34" charset="0"/>
                 <a:ea typeface="Montserrat" pitchFamily="34" charset="-122"/>
                 <a:cs typeface="Montserrat" pitchFamily="34" charset="-120"/>
               </a:rPr>
-              <a:t>✓</a:t>
-            </a:r>
-            <a:endParaRPr lang="en-US" sz="1000" dirty="0"/>
-          </a:p>
-        </p:txBody>
-      </p:sp>
-      <p:sp>
-        <p:nvSpPr>
-          <p:cNvPr id="21" name="Text 18"/>
-          <p:cNvSpPr/>
-          <p:nvPr/>
-        </p:nvSpPr>
-        <p:spPr>
-          <a:xfrm>
-            <a:off x="6528816" y="2670048"/>
-            <a:ext cx="4617720" cy="384048"/>
-          </a:xfrm>
-          <a:prstGeom prst="rect">
-            <a:avLst/>
-          </a:prstGeom>
-          <a:noFill/>
-          <a:ln/>
-        </p:spPr>
-        <p:txBody>
-          <a:bodyPr wrap="square" lIns="0" tIns="0" rIns="0" bIns="0" rtlCol="0" anchor="ctr"/>
-          <a:lstStyle/>
-          <a:p>
-            <a:pPr indent="0" marL="0">
-              <a:buNone/>
-            </a:pPr>
-            <a:r>
-              <a:rPr lang="en-US" sz="1250" dirty="0">
-                <a:solidFill>
-                  <a:srgbClr val="111318"/>
-                </a:solidFill>
-                <a:latin typeface="Montserrat" pitchFamily="34" charset="0"/>
-                <a:ea typeface="Montserrat" pitchFamily="34" charset="-122"/>
-                <a:cs typeface="Montserrat" pitchFamily="34" charset="-120"/>
-              </a:rPr>
               <a:t>поясню, чому temperature=0 не рятує</a:t>
             </a:r>
             <a:endParaRPr lang="en-US" sz="1250" dirty="0"/>
@@ -18208,7 +18213,7 @@
       </p:sp>
       <p:sp>
         <p:nvSpPr>
-          <p:cNvPr id="22" name="Shape 19"/>
+          <p:cNvPr id="28" name="Shape 24"/>
           <p:cNvSpPr/>
           <p:nvPr/>
         </p:nvSpPr>
@@ -18235,76 +18240,77 @@
       </p:sp>
       <p:sp>
         <p:nvSpPr>
-          <p:cNvPr id="23" name="Text 20"/>
-          <p:cNvSpPr/>
-          <p:nvPr/>
-        </p:nvSpPr>
-        <p:spPr>
-          <a:xfrm>
-            <a:off x="6144768" y="3291840"/>
-            <a:ext cx="256032" cy="256032"/>
-          </a:xfrm>
-          <a:prstGeom prst="rect">
-            <a:avLst/>
-          </a:prstGeom>
-          <a:noFill/>
-          <a:ln/>
-        </p:spPr>
-        <p:txBody>
-          <a:bodyPr wrap="square" lIns="0" tIns="0" rIns="0" bIns="0" rtlCol="0" anchor="ctr"/>
-          <a:lstStyle/>
-          <a:p>
-            <a:pPr algn="ctr" indent="0" marL="0">
-              <a:buNone/>
-            </a:pPr>
-            <a:r>
-              <a:rPr lang="en-US" sz="1000" b="1" dirty="0">
-                <a:solidFill>
-                  <a:srgbClr val="5A05F4"/>
+          <p:cNvPr id="29" name="Shape 25"/>
+          <p:cNvSpPr/>
+          <p:nvPr/>
+        </p:nvSpPr>
+        <p:spPr>
+          <a:xfrm rot="2700000">
+            <a:off x="6207587" y="3431286"/>
+            <a:ext cx="58156" cy="27432"/>
+          </a:xfrm>
+          <a:prstGeom prst="rect">
+            <a:avLst/>
+          </a:prstGeom>
+          <a:solidFill>
+            <a:srgbClr val="5A05F4"/>
+          </a:solidFill>
+          <a:ln/>
+        </p:spPr>
+      </p:sp>
+      <p:sp>
+        <p:nvSpPr>
+          <p:cNvPr id="30" name="Shape 26"/>
+          <p:cNvSpPr/>
+          <p:nvPr/>
+        </p:nvSpPr>
+        <p:spPr>
+          <a:xfrm rot="-3000000">
+            <a:off x="6235385" y="3405226"/>
+            <a:ext cx="121432" cy="27432"/>
+          </a:xfrm>
+          <a:prstGeom prst="rect">
+            <a:avLst/>
+          </a:prstGeom>
+          <a:solidFill>
+            <a:srgbClr val="5A05F4"/>
+          </a:solidFill>
+          <a:ln/>
+        </p:spPr>
+      </p:sp>
+      <p:sp>
+        <p:nvSpPr>
+          <p:cNvPr id="31" name="Text 27"/>
+          <p:cNvSpPr/>
+          <p:nvPr/>
+        </p:nvSpPr>
+        <p:spPr>
+          <a:xfrm>
+            <a:off x="6528816" y="3236976"/>
+            <a:ext cx="4617720" cy="384048"/>
+          </a:xfrm>
+          <a:prstGeom prst="rect">
+            <a:avLst/>
+          </a:prstGeom>
+          <a:noFill/>
+          <a:ln/>
+        </p:spPr>
+        <p:txBody>
+          <a:bodyPr wrap="square" lIns="0" tIns="0" rIns="0" bIns="0" rtlCol="0" anchor="ctr"/>
+          <a:lstStyle/>
+          <a:p>
+            <a:pPr indent="0" marL="0">
+              <a:buNone/>
+            </a:pPr>
+            <a:r>
+              <a:rPr lang="en-US" sz="1250" dirty="0">
+                <a:solidFill>
+                  <a:srgbClr val="111318"/>
                 </a:solidFill>
                 <a:latin typeface="Montserrat" pitchFamily="34" charset="0"/>
                 <a:ea typeface="Montserrat" pitchFamily="34" charset="-122"/>
                 <a:cs typeface="Montserrat" pitchFamily="34" charset="-120"/>
               </a:rPr>
-              <a:t>✓</a:t>
-            </a:r>
-            <a:endParaRPr lang="en-US" sz="1000" dirty="0"/>
-          </a:p>
-        </p:txBody>
-      </p:sp>
-      <p:sp>
-        <p:nvSpPr>
-          <p:cNvPr id="24" name="Text 21"/>
-          <p:cNvSpPr/>
-          <p:nvPr/>
-        </p:nvSpPr>
-        <p:spPr>
-          <a:xfrm>
-            <a:off x="6528816" y="3236976"/>
-            <a:ext cx="4617720" cy="384048"/>
-          </a:xfrm>
-          <a:prstGeom prst="rect">
-            <a:avLst/>
-          </a:prstGeom>
-          <a:noFill/>
-          <a:ln/>
-        </p:spPr>
-        <p:txBody>
-          <a:bodyPr wrap="square" lIns="0" tIns="0" rIns="0" bIns="0" rtlCol="0" anchor="ctr"/>
-          <a:lstStyle/>
-          <a:p>
-            <a:pPr indent="0" marL="0">
-              <a:buNone/>
-            </a:pPr>
-            <a:r>
-              <a:rPr lang="en-US" sz="1250" dirty="0">
-                <a:solidFill>
-                  <a:srgbClr val="111318"/>
-                </a:solidFill>
-                <a:latin typeface="Montserrat" pitchFamily="34" charset="0"/>
-                <a:ea typeface="Montserrat" pitchFamily="34" charset="-122"/>
-                <a:cs typeface="Montserrat" pitchFamily="34" charset="-120"/>
-              </a:rPr>
               <a:t>назву дві невидимі категорії відмов</a:t>
             </a:r>
             <a:endParaRPr lang="en-US" sz="1250" dirty="0"/>
@@ -18313,7 +18319,7 @@
       </p:sp>
       <p:sp>
         <p:nvSpPr>
-          <p:cNvPr id="25" name="Text 22"/>
+          <p:cNvPr id="32" name="Text 28"/>
           <p:cNvSpPr/>
           <p:nvPr/>
         </p:nvSpPr>
@@ -18556,7 +18562,7 @@
       </p:pic>
       <p:sp>
         <p:nvSpPr>
-          <p:cNvPr id="6" name="Shape 3"/>
+          <p:cNvPr id="7" name="Shape 3"/>
           <p:cNvSpPr/>
           <p:nvPr/>
         </p:nvSpPr>
@@ -18583,7 +18589,7 @@
       </p:sp>
       <p:sp>
         <p:nvSpPr>
-          <p:cNvPr id="7" name="Shape 4"/>
+          <p:cNvPr id="8" name="Shape 4"/>
           <p:cNvSpPr/>
           <p:nvPr/>
         </p:nvSpPr>
@@ -18603,90 +18609,91 @@
       </p:sp>
       <p:sp>
         <p:nvSpPr>
-          <p:cNvPr id="8" name="Text 5"/>
-          <p:cNvSpPr/>
-          <p:nvPr/>
-        </p:nvSpPr>
-        <p:spPr>
-          <a:xfrm>
-            <a:off x="768096" y="1865376"/>
-            <a:ext cx="384048" cy="384048"/>
-          </a:xfrm>
-          <a:prstGeom prst="rect">
-            <a:avLst/>
-          </a:prstGeom>
-          <a:noFill/>
-          <a:ln/>
-        </p:spPr>
-        <p:txBody>
-          <a:bodyPr wrap="square" lIns="0" tIns="0" rIns="0" bIns="0" rtlCol="0" anchor="ctr"/>
-          <a:lstStyle/>
-          <a:p>
-            <a:pPr algn="ctr" indent="0" marL="0">
-              <a:buNone/>
-            </a:pPr>
-            <a:r>
-              <a:rPr lang="en-US" sz="1300" b="1" dirty="0">
-                <a:solidFill>
-                  <a:srgbClr val="C62A2A"/>
+          <p:cNvPr id="9" name="Shape 5"/>
+          <p:cNvSpPr/>
+          <p:nvPr/>
+        </p:nvSpPr>
+        <p:spPr>
+          <a:xfrm rot="2700000">
+            <a:off x="871789" y="2041654"/>
+            <a:ext cx="176662" cy="31492"/>
+          </a:xfrm>
+          <a:prstGeom prst="rect">
+            <a:avLst/>
+          </a:prstGeom>
+          <a:solidFill>
+            <a:srgbClr val="C62A2A"/>
+          </a:solidFill>
+          <a:ln/>
+        </p:spPr>
+      </p:sp>
+      <p:sp>
+        <p:nvSpPr>
+          <p:cNvPr id="10" name="Shape 6"/>
+          <p:cNvSpPr/>
+          <p:nvPr/>
+        </p:nvSpPr>
+        <p:spPr>
+          <a:xfrm rot="-2700000">
+            <a:off x="871789" y="2041654"/>
+            <a:ext cx="176662" cy="31492"/>
+          </a:xfrm>
+          <a:prstGeom prst="rect">
+            <a:avLst/>
+          </a:prstGeom>
+          <a:solidFill>
+            <a:srgbClr val="C62A2A"/>
+          </a:solidFill>
+          <a:ln/>
+        </p:spPr>
+      </p:sp>
+      <p:sp>
+        <p:nvSpPr>
+          <p:cNvPr id="11" name="Text 7"/>
+          <p:cNvSpPr/>
+          <p:nvPr/>
+        </p:nvSpPr>
+        <p:spPr>
+          <a:xfrm>
+            <a:off x="1298448" y="1691640"/>
+            <a:ext cx="10149840" cy="731520"/>
+          </a:xfrm>
+          <a:prstGeom prst="rect">
+            <a:avLst/>
+          </a:prstGeom>
+          <a:noFill/>
+          <a:ln/>
+        </p:spPr>
+        <p:txBody>
+          <a:bodyPr wrap="square" lIns="0" tIns="0" rIns="0" bIns="0" rtlCol="0" anchor="ctr"/>
+          <a:lstStyle/>
+          <a:p>
+            <a:pPr indent="0" marL="0">
+              <a:buNone/>
+            </a:pPr>
+            <a:r>
+              <a:rPr lang="en-US" sz="1400" b="1" dirty="0">
+                <a:solidFill>
+                  <a:srgbClr val="111318"/>
                 </a:solidFill>
                 <a:latin typeface="Montserrat" pitchFamily="34" charset="0"/>
                 <a:ea typeface="Montserrat" pitchFamily="34" charset="-122"/>
                 <a:cs typeface="Montserrat" pitchFamily="34" charset="-120"/>
               </a:rPr>
-              <a:t>✕</a:t>
-            </a:r>
-            <a:endParaRPr lang="en-US" sz="1300" dirty="0"/>
-          </a:p>
-        </p:txBody>
-      </p:sp>
-      <p:sp>
-        <p:nvSpPr>
-          <p:cNvPr id="9" name="Text 6"/>
-          <p:cNvSpPr/>
-          <p:nvPr/>
-        </p:nvSpPr>
-        <p:spPr>
-          <a:xfrm>
-            <a:off x="1298448" y="1691640"/>
-            <a:ext cx="10149840" cy="731520"/>
-          </a:xfrm>
-          <a:prstGeom prst="rect">
-            <a:avLst/>
-          </a:prstGeom>
-          <a:noFill/>
-          <a:ln/>
-        </p:spPr>
-        <p:txBody>
-          <a:bodyPr wrap="square" lIns="0" tIns="0" rIns="0" bIns="0" rtlCol="0" anchor="ctr"/>
-          <a:lstStyle/>
-          <a:p>
+              <a:t>Ключ у коді застосунку   </a:t>
+            </a:r>
             <a:pPr indent="0" marL="0">
               <a:buNone/>
             </a:pPr>
             <a:r>
-              <a:rPr lang="en-US" sz="1400" b="1" dirty="0">
-                <a:solidFill>
-                  <a:srgbClr val="111318"/>
+              <a:rPr lang="en-US" sz="1250" dirty="0">
+                <a:solidFill>
+                  <a:srgbClr val="555B66"/>
                 </a:solidFill>
                 <a:latin typeface="Montserrat" pitchFamily="34" charset="0"/>
                 <a:ea typeface="Montserrat" pitchFamily="34" charset="-122"/>
                 <a:cs typeface="Montserrat" pitchFamily="34" charset="-120"/>
               </a:rPr>
-              <a:t>Ключ у коді застосунку   </a:t>
-            </a:r>
-            <a:pPr indent="0" marL="0">
-              <a:buNone/>
-            </a:pPr>
-            <a:r>
-              <a:rPr lang="en-US" sz="1250" dirty="0">
-                <a:solidFill>
-                  <a:srgbClr val="555B66"/>
-                </a:solidFill>
-                <a:latin typeface="Montserrat" pitchFamily="34" charset="0"/>
-                <a:ea typeface="Montserrat" pitchFamily="34" charset="-122"/>
-                <a:cs typeface="Montserrat" pitchFamily="34" charset="-120"/>
-              </a:rPr>
               <a:t>«потім перенесемо» — не перенесете</a:t>
             </a:r>
             <a:endParaRPr lang="en-US" sz="1400" dirty="0"/>
@@ -18695,7 +18702,7 @@
       </p:sp>
       <p:sp>
         <p:nvSpPr>
-          <p:cNvPr id="10" name="Shape 7"/>
+          <p:cNvPr id="12" name="Shape 8"/>
           <p:cNvSpPr/>
           <p:nvPr/>
         </p:nvSpPr>
@@ -18722,7 +18729,7 @@
       </p:sp>
       <p:sp>
         <p:nvSpPr>
-          <p:cNvPr id="11" name="Shape 8"/>
+          <p:cNvPr id="13" name="Shape 9"/>
           <p:cNvSpPr/>
           <p:nvPr/>
         </p:nvSpPr>
@@ -18742,90 +18749,91 @@
       </p:sp>
       <p:sp>
         <p:nvSpPr>
-          <p:cNvPr id="12" name="Text 9"/>
-          <p:cNvSpPr/>
-          <p:nvPr/>
-        </p:nvSpPr>
-        <p:spPr>
-          <a:xfrm>
-            <a:off x="768096" y="2734056"/>
-            <a:ext cx="384048" cy="384048"/>
-          </a:xfrm>
-          <a:prstGeom prst="rect">
-            <a:avLst/>
-          </a:prstGeom>
-          <a:noFill/>
-          <a:ln/>
-        </p:spPr>
-        <p:txBody>
-          <a:bodyPr wrap="square" lIns="0" tIns="0" rIns="0" bIns="0" rtlCol="0" anchor="ctr"/>
-          <a:lstStyle/>
-          <a:p>
-            <a:pPr algn="ctr" indent="0" marL="0">
-              <a:buNone/>
-            </a:pPr>
-            <a:r>
-              <a:rPr lang="en-US" sz="1300" b="1" dirty="0">
-                <a:solidFill>
-                  <a:srgbClr val="C62A2A"/>
+          <p:cNvPr id="14" name="Shape 10"/>
+          <p:cNvSpPr/>
+          <p:nvPr/>
+        </p:nvSpPr>
+        <p:spPr>
+          <a:xfrm rot="2700000">
+            <a:off x="871789" y="2910334"/>
+            <a:ext cx="176662" cy="31492"/>
+          </a:xfrm>
+          <a:prstGeom prst="rect">
+            <a:avLst/>
+          </a:prstGeom>
+          <a:solidFill>
+            <a:srgbClr val="C62A2A"/>
+          </a:solidFill>
+          <a:ln/>
+        </p:spPr>
+      </p:sp>
+      <p:sp>
+        <p:nvSpPr>
+          <p:cNvPr id="15" name="Shape 11"/>
+          <p:cNvSpPr/>
+          <p:nvPr/>
+        </p:nvSpPr>
+        <p:spPr>
+          <a:xfrm rot="-2700000">
+            <a:off x="871789" y="2910334"/>
+            <a:ext cx="176662" cy="31492"/>
+          </a:xfrm>
+          <a:prstGeom prst="rect">
+            <a:avLst/>
+          </a:prstGeom>
+          <a:solidFill>
+            <a:srgbClr val="C62A2A"/>
+          </a:solidFill>
+          <a:ln/>
+        </p:spPr>
+      </p:sp>
+      <p:sp>
+        <p:nvSpPr>
+          <p:cNvPr id="16" name="Text 12"/>
+          <p:cNvSpPr/>
+          <p:nvPr/>
+        </p:nvSpPr>
+        <p:spPr>
+          <a:xfrm>
+            <a:off x="1298448" y="2560320"/>
+            <a:ext cx="10149840" cy="731520"/>
+          </a:xfrm>
+          <a:prstGeom prst="rect">
+            <a:avLst/>
+          </a:prstGeom>
+          <a:noFill/>
+          <a:ln/>
+        </p:spPr>
+        <p:txBody>
+          <a:bodyPr wrap="square" lIns="0" tIns="0" rIns="0" bIns="0" rtlCol="0" anchor="ctr"/>
+          <a:lstStyle/>
+          <a:p>
+            <a:pPr indent="0" marL="0">
+              <a:buNone/>
+            </a:pPr>
+            <a:r>
+              <a:rPr lang="en-US" sz="1400" b="1" dirty="0">
+                <a:solidFill>
+                  <a:srgbClr val="111318"/>
                 </a:solidFill>
                 <a:latin typeface="Montserrat" pitchFamily="34" charset="0"/>
                 <a:ea typeface="Montserrat" pitchFamily="34" charset="-122"/>
                 <a:cs typeface="Montserrat" pitchFamily="34" charset="-120"/>
               </a:rPr>
-              <a:t>✕</a:t>
-            </a:r>
-            <a:endParaRPr lang="en-US" sz="1300" dirty="0"/>
-          </a:p>
-        </p:txBody>
-      </p:sp>
-      <p:sp>
-        <p:nvSpPr>
-          <p:cNvPr id="13" name="Text 10"/>
-          <p:cNvSpPr/>
-          <p:nvPr/>
-        </p:nvSpPr>
-        <p:spPr>
-          <a:xfrm>
-            <a:off x="1298448" y="2560320"/>
-            <a:ext cx="10149840" cy="731520"/>
-          </a:xfrm>
-          <a:prstGeom prst="rect">
-            <a:avLst/>
-          </a:prstGeom>
-          <a:noFill/>
-          <a:ln/>
-        </p:spPr>
-        <p:txBody>
-          <a:bodyPr wrap="square" lIns="0" tIns="0" rIns="0" bIns="0" rtlCol="0" anchor="ctr"/>
-          <a:lstStyle/>
-          <a:p>
+              <a:t>Демо на одному запиті   </a:t>
+            </a:r>
             <a:pPr indent="0" marL="0">
               <a:buNone/>
             </a:pPr>
             <a:r>
-              <a:rPr lang="en-US" sz="1400" b="1" dirty="0">
-                <a:solidFill>
-                  <a:srgbClr val="111318"/>
+              <a:rPr lang="en-US" sz="1250" dirty="0">
+                <a:solidFill>
+                  <a:srgbClr val="555B66"/>
                 </a:solidFill>
                 <a:latin typeface="Montserrat" pitchFamily="34" charset="0"/>
                 <a:ea typeface="Montserrat" pitchFamily="34" charset="-122"/>
                 <a:cs typeface="Montserrat" pitchFamily="34" charset="-120"/>
               </a:rPr>
-              <a:t>Демо на одному запиті   </a:t>
-            </a:r>
-            <a:pPr indent="0" marL="0">
-              <a:buNone/>
-            </a:pPr>
-            <a:r>
-              <a:rPr lang="en-US" sz="1250" dirty="0">
-                <a:solidFill>
-                  <a:srgbClr val="555B66"/>
-                </a:solidFill>
-                <a:latin typeface="Montserrat" pitchFamily="34" charset="0"/>
-                <a:ea typeface="Montserrat" pitchFamily="34" charset="-122"/>
-                <a:cs typeface="Montserrat" pitchFamily="34" charset="-120"/>
-              </a:rPr>
               <a:t>готовність — це чотири питання, а не скріншот</a:t>
             </a:r>
             <a:endParaRPr lang="en-US" sz="1400" dirty="0"/>
@@ -18834,7 +18842,7 @@
       </p:sp>
       <p:sp>
         <p:nvSpPr>
-          <p:cNvPr id="14" name="Shape 11"/>
+          <p:cNvPr id="17" name="Shape 13"/>
           <p:cNvSpPr/>
           <p:nvPr/>
         </p:nvSpPr>
@@ -18861,7 +18869,7 @@
       </p:sp>
       <p:sp>
         <p:nvSpPr>
-          <p:cNvPr id="15" name="Shape 12"/>
+          <p:cNvPr id="18" name="Shape 14"/>
           <p:cNvSpPr/>
           <p:nvPr/>
         </p:nvSpPr>
@@ -18881,90 +18889,91 @@
       </p:sp>
       <p:sp>
         <p:nvSpPr>
-          <p:cNvPr id="16" name="Text 13"/>
-          <p:cNvSpPr/>
-          <p:nvPr/>
-        </p:nvSpPr>
-        <p:spPr>
-          <a:xfrm>
-            <a:off x="768096" y="3602736"/>
-            <a:ext cx="384048" cy="384048"/>
-          </a:xfrm>
-          <a:prstGeom prst="rect">
-            <a:avLst/>
-          </a:prstGeom>
-          <a:noFill/>
-          <a:ln/>
-        </p:spPr>
-        <p:txBody>
-          <a:bodyPr wrap="square" lIns="0" tIns="0" rIns="0" bIns="0" rtlCol="0" anchor="ctr"/>
-          <a:lstStyle/>
-          <a:p>
-            <a:pPr algn="ctr" indent="0" marL="0">
-              <a:buNone/>
-            </a:pPr>
-            <a:r>
-              <a:rPr lang="en-US" sz="1300" b="1" dirty="0">
-                <a:solidFill>
-                  <a:srgbClr val="C62A2A"/>
+          <p:cNvPr id="19" name="Shape 15"/>
+          <p:cNvSpPr/>
+          <p:nvPr/>
+        </p:nvSpPr>
+        <p:spPr>
+          <a:xfrm rot="2700000">
+            <a:off x="871789" y="3779014"/>
+            <a:ext cx="176662" cy="31492"/>
+          </a:xfrm>
+          <a:prstGeom prst="rect">
+            <a:avLst/>
+          </a:prstGeom>
+          <a:solidFill>
+            <a:srgbClr val="C62A2A"/>
+          </a:solidFill>
+          <a:ln/>
+        </p:spPr>
+      </p:sp>
+      <p:sp>
+        <p:nvSpPr>
+          <p:cNvPr id="20" name="Shape 16"/>
+          <p:cNvSpPr/>
+          <p:nvPr/>
+        </p:nvSpPr>
+        <p:spPr>
+          <a:xfrm rot="-2700000">
+            <a:off x="871789" y="3779014"/>
+            <a:ext cx="176662" cy="31492"/>
+          </a:xfrm>
+          <a:prstGeom prst="rect">
+            <a:avLst/>
+          </a:prstGeom>
+          <a:solidFill>
+            <a:srgbClr val="C62A2A"/>
+          </a:solidFill>
+          <a:ln/>
+        </p:spPr>
+      </p:sp>
+      <p:sp>
+        <p:nvSpPr>
+          <p:cNvPr id="21" name="Text 17"/>
+          <p:cNvSpPr/>
+          <p:nvPr/>
+        </p:nvSpPr>
+        <p:spPr>
+          <a:xfrm>
+            <a:off x="1298448" y="3429000"/>
+            <a:ext cx="10149840" cy="731520"/>
+          </a:xfrm>
+          <a:prstGeom prst="rect">
+            <a:avLst/>
+          </a:prstGeom>
+          <a:noFill/>
+          <a:ln/>
+        </p:spPr>
+        <p:txBody>
+          <a:bodyPr wrap="square" lIns="0" tIns="0" rIns="0" bIns="0" rtlCol="0" anchor="ctr"/>
+          <a:lstStyle/>
+          <a:p>
+            <a:pPr indent="0" marL="0">
+              <a:buNone/>
+            </a:pPr>
+            <a:r>
+              <a:rPr lang="en-US" sz="1400" b="1" dirty="0">
+                <a:solidFill>
+                  <a:srgbClr val="111318"/>
                 </a:solidFill>
                 <a:latin typeface="Montserrat" pitchFamily="34" charset="0"/>
                 <a:ea typeface="Montserrat" pitchFamily="34" charset="-122"/>
                 <a:cs typeface="Montserrat" pitchFamily="34" charset="-120"/>
               </a:rPr>
-              <a:t>✕</a:t>
-            </a:r>
-            <a:endParaRPr lang="en-US" sz="1300" dirty="0"/>
-          </a:p>
-        </p:txBody>
-      </p:sp>
-      <p:sp>
-        <p:nvSpPr>
-          <p:cNvPr id="17" name="Text 14"/>
-          <p:cNvSpPr/>
-          <p:nvPr/>
-        </p:nvSpPr>
-        <p:spPr>
-          <a:xfrm>
-            <a:off x="1298448" y="3429000"/>
-            <a:ext cx="10149840" cy="731520"/>
-          </a:xfrm>
-          <a:prstGeom prst="rect">
-            <a:avLst/>
-          </a:prstGeom>
-          <a:noFill/>
-          <a:ln/>
-        </p:spPr>
-        <p:txBody>
-          <a:bodyPr wrap="square" lIns="0" tIns="0" rIns="0" bIns="0" rtlCol="0" anchor="ctr"/>
-          <a:lstStyle/>
-          <a:p>
+              <a:t>«Логи — коли зламається»   </a:t>
+            </a:r>
             <a:pPr indent="0" marL="0">
               <a:buNone/>
             </a:pPr>
             <a:r>
-              <a:rPr lang="en-US" sz="1400" b="1" dirty="0">
-                <a:solidFill>
-                  <a:srgbClr val="111318"/>
+              <a:rPr lang="en-US" sz="1250" dirty="0">
+                <a:solidFill>
+                  <a:srgbClr val="555B66"/>
                 </a:solidFill>
                 <a:latin typeface="Montserrat" pitchFamily="34" charset="0"/>
                 <a:ea typeface="Montserrat" pitchFamily="34" charset="-122"/>
                 <a:cs typeface="Montserrat" pitchFamily="34" charset="-120"/>
               </a:rPr>
-              <a:t>«Логи — коли зламається»   </a:t>
-            </a:r>
-            <a:pPr indent="0" marL="0">
-              <a:buNone/>
-            </a:pPr>
-            <a:r>
-              <a:rPr lang="en-US" sz="1250" dirty="0">
-                <a:solidFill>
-                  <a:srgbClr val="555B66"/>
-                </a:solidFill>
-                <a:latin typeface="Montserrat" pitchFamily="34" charset="0"/>
-                <a:ea typeface="Montserrat" pitchFamily="34" charset="-122"/>
-                <a:cs typeface="Montserrat" pitchFamily="34" charset="-120"/>
-              </a:rPr>
               <a:t>тоді дивитися буде нікуди</a:t>
             </a:r>
             <a:endParaRPr lang="en-US" sz="1400" dirty="0"/>
@@ -18973,7 +18982,7 @@
       </p:sp>
       <p:sp>
         <p:nvSpPr>
-          <p:cNvPr id="18" name="Shape 15"/>
+          <p:cNvPr id="22" name="Shape 18"/>
           <p:cNvSpPr/>
           <p:nvPr/>
         </p:nvSpPr>
@@ -19000,7 +19009,7 @@
       </p:sp>
       <p:sp>
         <p:nvSpPr>
-          <p:cNvPr id="19" name="Shape 16"/>
+          <p:cNvPr id="23" name="Shape 19"/>
           <p:cNvSpPr/>
           <p:nvPr/>
         </p:nvSpPr>
@@ -19020,90 +19029,91 @@
       </p:sp>
       <p:sp>
         <p:nvSpPr>
-          <p:cNvPr id="20" name="Text 17"/>
-          <p:cNvSpPr/>
-          <p:nvPr/>
-        </p:nvSpPr>
-        <p:spPr>
-          <a:xfrm>
-            <a:off x="768096" y="4471416"/>
-            <a:ext cx="384048" cy="384048"/>
-          </a:xfrm>
-          <a:prstGeom prst="rect">
-            <a:avLst/>
-          </a:prstGeom>
-          <a:noFill/>
-          <a:ln/>
-        </p:spPr>
-        <p:txBody>
-          <a:bodyPr wrap="square" lIns="0" tIns="0" rIns="0" bIns="0" rtlCol="0" anchor="ctr"/>
-          <a:lstStyle/>
-          <a:p>
-            <a:pPr algn="ctr" indent="0" marL="0">
-              <a:buNone/>
-            </a:pPr>
-            <a:r>
-              <a:rPr lang="en-US" sz="1300" b="1" dirty="0">
-                <a:solidFill>
-                  <a:srgbClr val="C62A2A"/>
+          <p:cNvPr id="24" name="Shape 20"/>
+          <p:cNvSpPr/>
+          <p:nvPr/>
+        </p:nvSpPr>
+        <p:spPr>
+          <a:xfrm rot="2700000">
+            <a:off x="871789" y="4647694"/>
+            <a:ext cx="176662" cy="31492"/>
+          </a:xfrm>
+          <a:prstGeom prst="rect">
+            <a:avLst/>
+          </a:prstGeom>
+          <a:solidFill>
+            <a:srgbClr val="C62A2A"/>
+          </a:solidFill>
+          <a:ln/>
+        </p:spPr>
+      </p:sp>
+      <p:sp>
+        <p:nvSpPr>
+          <p:cNvPr id="25" name="Shape 21"/>
+          <p:cNvSpPr/>
+          <p:nvPr/>
+        </p:nvSpPr>
+        <p:spPr>
+          <a:xfrm rot="-2700000">
+            <a:off x="871789" y="4647694"/>
+            <a:ext cx="176662" cy="31492"/>
+          </a:xfrm>
+          <a:prstGeom prst="rect">
+            <a:avLst/>
+          </a:prstGeom>
+          <a:solidFill>
+            <a:srgbClr val="C62A2A"/>
+          </a:solidFill>
+          <a:ln/>
+        </p:spPr>
+      </p:sp>
+      <p:sp>
+        <p:nvSpPr>
+          <p:cNvPr id="26" name="Text 22"/>
+          <p:cNvSpPr/>
+          <p:nvPr/>
+        </p:nvSpPr>
+        <p:spPr>
+          <a:xfrm>
+            <a:off x="1298448" y="4297680"/>
+            <a:ext cx="10149840" cy="731520"/>
+          </a:xfrm>
+          <a:prstGeom prst="rect">
+            <a:avLst/>
+          </a:prstGeom>
+          <a:noFill/>
+          <a:ln/>
+        </p:spPr>
+        <p:txBody>
+          <a:bodyPr wrap="square" lIns="0" tIns="0" rIns="0" bIns="0" rtlCol="0" anchor="ctr"/>
+          <a:lstStyle/>
+          <a:p>
+            <a:pPr indent="0" marL="0">
+              <a:buNone/>
+            </a:pPr>
+            <a:r>
+              <a:rPr lang="en-US" sz="1400" b="1" dirty="0">
+                <a:solidFill>
+                  <a:srgbClr val="111318"/>
                 </a:solidFill>
                 <a:latin typeface="Montserrat" pitchFamily="34" charset="0"/>
                 <a:ea typeface="Montserrat" pitchFamily="34" charset="-122"/>
                 <a:cs typeface="Montserrat" pitchFamily="34" charset="-120"/>
               </a:rPr>
-              <a:t>✕</a:t>
-            </a:r>
-            <a:endParaRPr lang="en-US" sz="1300" dirty="0"/>
-          </a:p>
-        </p:txBody>
-      </p:sp>
-      <p:sp>
-        <p:nvSpPr>
-          <p:cNvPr id="21" name="Text 18"/>
-          <p:cNvSpPr/>
-          <p:nvPr/>
-        </p:nvSpPr>
-        <p:spPr>
-          <a:xfrm>
-            <a:off x="1298448" y="4297680"/>
-            <a:ext cx="10149840" cy="731520"/>
-          </a:xfrm>
-          <a:prstGeom prst="rect">
-            <a:avLst/>
-          </a:prstGeom>
-          <a:noFill/>
-          <a:ln/>
-        </p:spPr>
-        <p:txBody>
-          <a:bodyPr wrap="square" lIns="0" tIns="0" rIns="0" bIns="0" rtlCol="0" anchor="ctr"/>
-          <a:lstStyle/>
-          <a:p>
+              <a:t>Три провайдери одразу   </a:t>
+            </a:r>
             <a:pPr indent="0" marL="0">
               <a:buNone/>
             </a:pPr>
             <a:r>
-              <a:rPr lang="en-US" sz="1400" b="1" dirty="0">
-                <a:solidFill>
-                  <a:srgbClr val="111318"/>
+              <a:rPr lang="en-US" sz="1250" dirty="0">
+                <a:solidFill>
+                  <a:srgbClr val="555B66"/>
                 </a:solidFill>
                 <a:latin typeface="Montserrat" pitchFamily="34" charset="0"/>
                 <a:ea typeface="Montserrat" pitchFamily="34" charset="-122"/>
                 <a:cs typeface="Montserrat" pitchFamily="34" charset="-120"/>
               </a:rPr>
-              <a:t>Три провайдери одразу   </a:t>
-            </a:r>
-            <a:pPr indent="0" marL="0">
-              <a:buNone/>
-            </a:pPr>
-            <a:r>
-              <a:rPr lang="en-US" sz="1250" dirty="0">
-                <a:solidFill>
-                  <a:srgbClr val="555B66"/>
-                </a:solidFill>
-                <a:latin typeface="Montserrat" pitchFamily="34" charset="0"/>
-                <a:ea typeface="Montserrat" pitchFamily="34" charset="-122"/>
-                <a:cs typeface="Montserrat" pitchFamily="34" charset="-120"/>
-              </a:rPr>
               <a:t>спочатку один контур наскрізь</a:t>
             </a:r>
             <a:endParaRPr lang="en-US" sz="1400" dirty="0"/>
@@ -19112,7 +19122,7 @@
       </p:sp>
       <p:sp>
         <p:nvSpPr>
-          <p:cNvPr id="22" name="Shape 19"/>
+          <p:cNvPr id="27" name="Shape 23"/>
           <p:cNvSpPr/>
           <p:nvPr/>
         </p:nvSpPr>
@@ -19139,7 +19149,7 @@
       </p:sp>
       <p:sp>
         <p:nvSpPr>
-          <p:cNvPr id="23" name="Shape 20"/>
+          <p:cNvPr id="28" name="Shape 24"/>
           <p:cNvSpPr/>
           <p:nvPr/>
         </p:nvSpPr>
@@ -19159,46 +19169,47 @@
       </p:sp>
       <p:sp>
         <p:nvSpPr>
-          <p:cNvPr id="24" name="Text 21"/>
-          <p:cNvSpPr/>
-          <p:nvPr/>
-        </p:nvSpPr>
-        <p:spPr>
-          <a:xfrm>
-            <a:off x="768096" y="5340096"/>
-            <a:ext cx="384048" cy="384048"/>
-          </a:xfrm>
-          <a:prstGeom prst="rect">
-            <a:avLst/>
-          </a:prstGeom>
-          <a:noFill/>
-          <a:ln/>
-        </p:spPr>
-        <p:txBody>
-          <a:bodyPr wrap="square" lIns="0" tIns="0" rIns="0" bIns="0" rtlCol="0" anchor="ctr"/>
-          <a:lstStyle/>
-          <a:p>
-            <a:pPr algn="ctr" indent="0" marL="0">
-              <a:buNone/>
-            </a:pPr>
-            <a:r>
-              <a:rPr lang="en-US" sz="1300" b="1" dirty="0">
-                <a:solidFill>
-                  <a:srgbClr val="C62A2A"/>
-                </a:solidFill>
-                <a:latin typeface="Montserrat" pitchFamily="34" charset="0"/>
-                <a:ea typeface="Montserrat" pitchFamily="34" charset="-122"/>
-                <a:cs typeface="Montserrat" pitchFamily="34" charset="-120"/>
-              </a:rPr>
-              <a:t>✕</a:t>
-            </a:r>
-            <a:endParaRPr lang="en-US" sz="1300" dirty="0"/>
-          </a:p>
-        </p:txBody>
-      </p:sp>
-      <p:sp>
-        <p:nvSpPr>
-          <p:cNvPr id="25" name="Text 22"/>
+          <p:cNvPr id="29" name="Shape 25"/>
+          <p:cNvSpPr/>
+          <p:nvPr/>
+        </p:nvSpPr>
+        <p:spPr>
+          <a:xfrm rot="2700000">
+            <a:off x="871789" y="5516374"/>
+            <a:ext cx="176662" cy="31492"/>
+          </a:xfrm>
+          <a:prstGeom prst="rect">
+            <a:avLst/>
+          </a:prstGeom>
+          <a:solidFill>
+            <a:srgbClr val="C62A2A"/>
+          </a:solidFill>
+          <a:ln/>
+        </p:spPr>
+      </p:sp>
+      <p:sp>
+        <p:nvSpPr>
+          <p:cNvPr id="30" name="Shape 26"/>
+          <p:cNvSpPr/>
+          <p:nvPr/>
+        </p:nvSpPr>
+        <p:spPr>
+          <a:xfrm rot="-2700000">
+            <a:off x="871789" y="5516374"/>
+            <a:ext cx="176662" cy="31492"/>
+          </a:xfrm>
+          <a:prstGeom prst="rect">
+            <a:avLst/>
+          </a:prstGeom>
+          <a:solidFill>
+            <a:srgbClr val="C62A2A"/>
+          </a:solidFill>
+          <a:ln/>
+        </p:spPr>
+      </p:sp>
+      <p:sp>
+        <p:nvSpPr>
+          <p:cNvPr id="31" name="Text 27"/>
           <p:cNvSpPr/>
           <p:nvPr/>
         </p:nvSpPr>
@@ -19455,7 +19466,7 @@
       </p:pic>
       <p:sp>
         <p:nvSpPr>
-          <p:cNvPr id="6" name="Shape 3"/>
+          <p:cNvPr id="7" name="Shape 3"/>
           <p:cNvSpPr/>
           <p:nvPr/>
         </p:nvSpPr>
@@ -19482,7 +19493,7 @@
       </p:sp>
       <p:sp>
         <p:nvSpPr>
-          <p:cNvPr id="7" name="Text 4"/>
+          <p:cNvPr id="8" name="Text 4"/>
           <p:cNvSpPr/>
           <p:nvPr/>
         </p:nvSpPr>
@@ -19521,7 +19532,7 @@
       </p:sp>
       <p:sp>
         <p:nvSpPr>
-          <p:cNvPr id="8" name="Text 5"/>
+          <p:cNvPr id="9" name="Text 5"/>
           <p:cNvSpPr/>
           <p:nvPr/>
         </p:nvSpPr>
@@ -19621,7 +19632,7 @@
       </p:sp>
       <p:sp>
         <p:nvSpPr>
-          <p:cNvPr id="9" name="Shape 6"/>
+          <p:cNvPr id="10" name="Shape 6"/>
           <p:cNvSpPr/>
           <p:nvPr/>
         </p:nvSpPr>
@@ -19643,7 +19654,7 @@
       </p:sp>
       <p:sp>
         <p:nvSpPr>
-          <p:cNvPr id="10" name="Text 7"/>
+          <p:cNvPr id="11" name="Text 7"/>
           <p:cNvSpPr/>
           <p:nvPr/>
         </p:nvSpPr>
@@ -19682,7 +19693,7 @@
       </p:sp>
       <p:sp>
         <p:nvSpPr>
-          <p:cNvPr id="11" name="Text 8"/>
+          <p:cNvPr id="12" name="Text 8"/>
           <p:cNvSpPr/>
           <p:nvPr/>
         </p:nvSpPr>
@@ -19753,7 +19764,7 @@
       </p:sp>
       <p:sp>
         <p:nvSpPr>
-          <p:cNvPr id="12" name="Shape 9"/>
+          <p:cNvPr id="13" name="Shape 9"/>
           <p:cNvSpPr/>
           <p:nvPr/>
         </p:nvSpPr>
@@ -19780,7 +19791,7 @@
       </p:sp>
       <p:sp>
         <p:nvSpPr>
-          <p:cNvPr id="13" name="Text 10"/>
+          <p:cNvPr id="14" name="Text 10"/>
           <p:cNvSpPr/>
           <p:nvPr/>
         </p:nvSpPr>
@@ -19819,7 +19830,7 @@
       </p:sp>
       <p:sp>
         <p:nvSpPr>
-          <p:cNvPr id="14" name="Text 11"/>
+          <p:cNvPr id="15" name="Text 11"/>
           <p:cNvSpPr/>
           <p:nvPr/>
         </p:nvSpPr>
@@ -20421,7 +20432,7 @@
                 <a:ea typeface="Montserrat" pitchFamily="34" charset="-122"/>
                 <a:cs typeface="Montserrat" pitchFamily="34" charset="-120"/>
               </a:rPr>
-              <a:t>Сьогодні ваш системний промпт захардкоджений у коді — і це остання доба, коли це прийнятно. Далі: версії, promote і rollback; що стається з якістю, коли «маленьку правку промпта» викочують без сліду; і як зробити відкат за секунди замість розкопок «а як там було вчора».</a:t>
+              <a:t>Ваш системний промпт захардкоджений у коді — і це остання доба, коли це прийнятно. Далі: версії, promote, rollback і відкат за секунди.</a:t>
             </a:r>
             <a:endParaRPr lang="en-US" sz="1250" dirty="0"/>
           </a:p>
@@ -20585,7 +20596,7 @@
       </p:pic>
       <p:sp>
         <p:nvSpPr>
-          <p:cNvPr id="6" name="Shape 3"/>
+          <p:cNvPr id="7" name="Shape 3"/>
           <p:cNvSpPr/>
           <p:nvPr/>
         </p:nvSpPr>
@@ -20607,7 +20618,7 @@
       </p:sp>
       <p:sp>
         <p:nvSpPr>
-          <p:cNvPr id="7" name="Shape 4"/>
+          <p:cNvPr id="8" name="Shape 4"/>
           <p:cNvSpPr/>
           <p:nvPr/>
         </p:nvSpPr>
@@ -20627,7 +20638,7 @@
       </p:sp>
       <p:sp>
         <p:nvSpPr>
-          <p:cNvPr id="8" name="Text 5"/>
+          <p:cNvPr id="9" name="Text 5"/>
           <p:cNvSpPr/>
           <p:nvPr/>
         </p:nvSpPr>
@@ -20666,7 +20677,7 @@
       </p:sp>
       <p:sp>
         <p:nvSpPr>
-          <p:cNvPr id="9" name="Text 6"/>
+          <p:cNvPr id="10" name="Text 6"/>
           <p:cNvSpPr/>
           <p:nvPr/>
         </p:nvSpPr>
@@ -20705,7 +20716,7 @@
       </p:sp>
       <p:sp>
         <p:nvSpPr>
-          <p:cNvPr id="10" name="Shape 7"/>
+          <p:cNvPr id="11" name="Shape 7"/>
           <p:cNvSpPr/>
           <p:nvPr/>
         </p:nvSpPr>
@@ -20727,7 +20738,7 @@
       </p:sp>
       <p:sp>
         <p:nvSpPr>
-          <p:cNvPr id="11" name="Shape 8"/>
+          <p:cNvPr id="12" name="Shape 8"/>
           <p:cNvSpPr/>
           <p:nvPr/>
         </p:nvSpPr>
@@ -20747,7 +20758,7 @@
       </p:sp>
       <p:sp>
         <p:nvSpPr>
-          <p:cNvPr id="12" name="Text 9"/>
+          <p:cNvPr id="13" name="Text 9"/>
           <p:cNvSpPr/>
           <p:nvPr/>
         </p:nvSpPr>
@@ -20786,7 +20797,7 @@
       </p:sp>
       <p:sp>
         <p:nvSpPr>
-          <p:cNvPr id="13" name="Text 10"/>
+          <p:cNvPr id="14" name="Text 10"/>
           <p:cNvSpPr/>
           <p:nvPr/>
         </p:nvSpPr>
@@ -20825,7 +20836,7 @@
       </p:sp>
       <p:sp>
         <p:nvSpPr>
-          <p:cNvPr id="14" name="Shape 11"/>
+          <p:cNvPr id="15" name="Shape 11"/>
           <p:cNvSpPr/>
           <p:nvPr/>
         </p:nvSpPr>
@@ -20847,7 +20858,7 @@
       </p:sp>
       <p:sp>
         <p:nvSpPr>
-          <p:cNvPr id="15" name="Shape 12"/>
+          <p:cNvPr id="16" name="Shape 12"/>
           <p:cNvSpPr/>
           <p:nvPr/>
         </p:nvSpPr>
@@ -20867,7 +20878,7 @@
       </p:sp>
       <p:sp>
         <p:nvSpPr>
-          <p:cNvPr id="16" name="Text 13"/>
+          <p:cNvPr id="17" name="Text 13"/>
           <p:cNvSpPr/>
           <p:nvPr/>
         </p:nvSpPr>
@@ -20906,7 +20917,7 @@
       </p:sp>
       <p:sp>
         <p:nvSpPr>
-          <p:cNvPr id="17" name="Text 14"/>
+          <p:cNvPr id="18" name="Text 14"/>
           <p:cNvSpPr/>
           <p:nvPr/>
         </p:nvSpPr>
@@ -20945,7 +20956,7 @@
       </p:sp>
       <p:sp>
         <p:nvSpPr>
-          <p:cNvPr id="18" name="Shape 15"/>
+          <p:cNvPr id="19" name="Shape 15"/>
           <p:cNvSpPr/>
           <p:nvPr/>
         </p:nvSpPr>
@@ -20967,7 +20978,7 @@
       </p:sp>
       <p:sp>
         <p:nvSpPr>
-          <p:cNvPr id="19" name="Shape 16"/>
+          <p:cNvPr id="20" name="Shape 16"/>
           <p:cNvSpPr/>
           <p:nvPr/>
         </p:nvSpPr>
@@ -20987,7 +20998,7 @@
       </p:sp>
       <p:sp>
         <p:nvSpPr>
-          <p:cNvPr id="20" name="Text 17"/>
+          <p:cNvPr id="21" name="Text 17"/>
           <p:cNvSpPr/>
           <p:nvPr/>
         </p:nvSpPr>
@@ -21026,7 +21037,7 @@
       </p:sp>
       <p:sp>
         <p:nvSpPr>
-          <p:cNvPr id="21" name="Text 18"/>
+          <p:cNvPr id="22" name="Text 18"/>
           <p:cNvSpPr/>
           <p:nvPr/>
         </p:nvSpPr>
@@ -21065,7 +21076,7 @@
       </p:sp>
       <p:sp>
         <p:nvSpPr>
-          <p:cNvPr id="22" name="Shape 19"/>
+          <p:cNvPr id="23" name="Shape 19"/>
           <p:cNvSpPr/>
           <p:nvPr/>
         </p:nvSpPr>
@@ -21087,7 +21098,7 @@
       </p:sp>
       <p:sp>
         <p:nvSpPr>
-          <p:cNvPr id="23" name="Shape 20"/>
+          <p:cNvPr id="24" name="Shape 20"/>
           <p:cNvSpPr/>
           <p:nvPr/>
         </p:nvSpPr>
@@ -21107,7 +21118,7 @@
       </p:sp>
       <p:sp>
         <p:nvSpPr>
-          <p:cNvPr id="24" name="Text 21"/>
+          <p:cNvPr id="25" name="Text 21"/>
           <p:cNvSpPr/>
           <p:nvPr/>
         </p:nvSpPr>
@@ -21146,7 +21157,7 @@
       </p:sp>
       <p:sp>
         <p:nvSpPr>
-          <p:cNvPr id="25" name="Text 22"/>
+          <p:cNvPr id="26" name="Text 22"/>
           <p:cNvSpPr/>
           <p:nvPr/>
         </p:nvSpPr>
@@ -21185,7 +21196,7 @@
       </p:sp>
       <p:sp>
         <p:nvSpPr>
-          <p:cNvPr id="26" name="Shape 23"/>
+          <p:cNvPr id="27" name="Shape 23"/>
           <p:cNvSpPr/>
           <p:nvPr/>
         </p:nvSpPr>
@@ -21212,7 +21223,7 @@
       </p:sp>
       <p:sp>
         <p:nvSpPr>
-          <p:cNvPr id="27" name="Shape 24"/>
+          <p:cNvPr id="28" name="Shape 24"/>
           <p:cNvSpPr/>
           <p:nvPr/>
         </p:nvSpPr>
@@ -21232,7 +21243,7 @@
       </p:sp>
       <p:sp>
         <p:nvSpPr>
-          <p:cNvPr id="28" name="Text 25"/>
+          <p:cNvPr id="29" name="Text 25"/>
           <p:cNvSpPr/>
           <p:nvPr/>
         </p:nvSpPr>
@@ -21271,7 +21282,7 @@
       </p:sp>
       <p:sp>
         <p:nvSpPr>
-          <p:cNvPr id="29" name="Text 26"/>
+          <p:cNvPr id="30" name="Text 26"/>
           <p:cNvSpPr/>
           <p:nvPr/>
         </p:nvSpPr>
@@ -21310,7 +21321,7 @@
       </p:sp>
       <p:sp>
         <p:nvSpPr>
-          <p:cNvPr id="30" name="Shape 27"/>
+          <p:cNvPr id="31" name="Shape 27"/>
           <p:cNvSpPr/>
           <p:nvPr/>
         </p:nvSpPr>
@@ -21337,7 +21348,7 @@
       </p:sp>
       <p:sp>
         <p:nvSpPr>
-          <p:cNvPr id="31" name="Shape 28"/>
+          <p:cNvPr id="32" name="Shape 28"/>
           <p:cNvSpPr/>
           <p:nvPr/>
         </p:nvSpPr>
@@ -21357,7 +21368,7 @@
       </p:sp>
       <p:sp>
         <p:nvSpPr>
-          <p:cNvPr id="32" name="Text 29"/>
+          <p:cNvPr id="33" name="Text 29"/>
           <p:cNvSpPr/>
           <p:nvPr/>
         </p:nvSpPr>
@@ -21396,7 +21407,7 @@
       </p:sp>
       <p:sp>
         <p:nvSpPr>
-          <p:cNvPr id="33" name="Text 30"/>
+          <p:cNvPr id="34" name="Text 30"/>
           <p:cNvSpPr/>
           <p:nvPr/>
         </p:nvSpPr>
@@ -21435,7 +21446,7 @@
       </p:sp>
       <p:sp>
         <p:nvSpPr>
-          <p:cNvPr id="34" name="Shape 31"/>
+          <p:cNvPr id="35" name="Shape 31"/>
           <p:cNvSpPr/>
           <p:nvPr/>
         </p:nvSpPr>
@@ -21462,7 +21473,7 @@
       </p:sp>
       <p:sp>
         <p:nvSpPr>
-          <p:cNvPr id="35" name="Shape 32"/>
+          <p:cNvPr id="36" name="Shape 32"/>
           <p:cNvSpPr/>
           <p:nvPr/>
         </p:nvSpPr>
@@ -21482,7 +21493,7 @@
       </p:sp>
       <p:sp>
         <p:nvSpPr>
-          <p:cNvPr id="36" name="Text 33"/>
+          <p:cNvPr id="37" name="Text 33"/>
           <p:cNvSpPr/>
           <p:nvPr/>
         </p:nvSpPr>
@@ -21521,7 +21532,7 @@
       </p:sp>
       <p:sp>
         <p:nvSpPr>
-          <p:cNvPr id="37" name="Text 34"/>
+          <p:cNvPr id="38" name="Text 34"/>
           <p:cNvSpPr/>
           <p:nvPr/>
         </p:nvSpPr>
@@ -21560,7 +21571,7 @@
       </p:sp>
       <p:sp>
         <p:nvSpPr>
-          <p:cNvPr id="38" name="Shape 35"/>
+          <p:cNvPr id="39" name="Shape 35"/>
           <p:cNvSpPr/>
           <p:nvPr/>
         </p:nvSpPr>
@@ -21582,7 +21593,7 @@
       </p:sp>
       <p:sp>
         <p:nvSpPr>
-          <p:cNvPr id="39" name="Shape 36"/>
+          <p:cNvPr id="40" name="Shape 36"/>
           <p:cNvSpPr/>
           <p:nvPr/>
         </p:nvSpPr>
@@ -21602,7 +21613,7 @@
       </p:sp>
       <p:sp>
         <p:nvSpPr>
-          <p:cNvPr id="40" name="Text 37"/>
+          <p:cNvPr id="41" name="Text 37"/>
           <p:cNvSpPr/>
           <p:nvPr/>
         </p:nvSpPr>
@@ -21641,7 +21652,7 @@
       </p:sp>
       <p:sp>
         <p:nvSpPr>
-          <p:cNvPr id="41" name="Text 38"/>
+          <p:cNvPr id="42" name="Text 38"/>
           <p:cNvSpPr/>
           <p:nvPr/>
         </p:nvSpPr>
@@ -21680,7 +21691,7 @@
       </p:sp>
       <p:sp>
         <p:nvSpPr>
-          <p:cNvPr id="42" name="Shape 39"/>
+          <p:cNvPr id="43" name="Shape 39"/>
           <p:cNvSpPr/>
           <p:nvPr/>
         </p:nvSpPr>
@@ -21707,7 +21718,7 @@
       </p:sp>
       <p:sp>
         <p:nvSpPr>
-          <p:cNvPr id="43" name="Shape 40"/>
+          <p:cNvPr id="44" name="Shape 40"/>
           <p:cNvSpPr/>
           <p:nvPr/>
         </p:nvSpPr>
@@ -21727,7 +21738,7 @@
       </p:sp>
       <p:sp>
         <p:nvSpPr>
-          <p:cNvPr id="44" name="Text 41"/>
+          <p:cNvPr id="45" name="Text 41"/>
           <p:cNvSpPr/>
           <p:nvPr/>
         </p:nvSpPr>
@@ -21766,7 +21777,7 @@
       </p:sp>
       <p:sp>
         <p:nvSpPr>
-          <p:cNvPr id="45" name="Text 42"/>
+          <p:cNvPr id="46" name="Text 42"/>
           <p:cNvSpPr/>
           <p:nvPr/>
         </p:nvSpPr>
@@ -21805,7 +21816,7 @@
       </p:sp>
       <p:sp>
         <p:nvSpPr>
-          <p:cNvPr id="46" name="Shape 43"/>
+          <p:cNvPr id="47" name="Shape 43"/>
           <p:cNvSpPr/>
           <p:nvPr/>
         </p:nvSpPr>
@@ -21832,7 +21843,7 @@
       </p:sp>
       <p:sp>
         <p:nvSpPr>
-          <p:cNvPr id="47" name="Shape 44"/>
+          <p:cNvPr id="48" name="Shape 44"/>
           <p:cNvSpPr/>
           <p:nvPr/>
         </p:nvSpPr>
@@ -21852,7 +21863,7 @@
       </p:sp>
       <p:sp>
         <p:nvSpPr>
-          <p:cNvPr id="48" name="Text 45"/>
+          <p:cNvPr id="49" name="Text 45"/>
           <p:cNvSpPr/>
           <p:nvPr/>
         </p:nvSpPr>
@@ -21891,7 +21902,7 @@
       </p:sp>
       <p:sp>
         <p:nvSpPr>
-          <p:cNvPr id="49" name="Text 46"/>
+          <p:cNvPr id="50" name="Text 46"/>
           <p:cNvSpPr/>
           <p:nvPr/>
         </p:nvSpPr>
@@ -21930,7 +21941,7 @@
       </p:sp>
       <p:sp>
         <p:nvSpPr>
-          <p:cNvPr id="50" name="Shape 47"/>
+          <p:cNvPr id="51" name="Shape 47"/>
           <p:cNvSpPr/>
           <p:nvPr/>
         </p:nvSpPr>
@@ -21957,7 +21968,7 @@
       </p:sp>
       <p:sp>
         <p:nvSpPr>
-          <p:cNvPr id="51" name="Text 48"/>
+          <p:cNvPr id="52" name="Text 48"/>
           <p:cNvSpPr/>
           <p:nvPr/>
         </p:nvSpPr>
@@ -22245,7 +22256,7 @@
       </p:pic>
       <p:sp>
         <p:nvSpPr>
-          <p:cNvPr id="7" name="Shape 4"/>
+          <p:cNvPr id="8" name="Shape 4"/>
           <p:cNvSpPr/>
           <p:nvPr/>
         </p:nvSpPr>
@@ -22272,7 +22283,7 @@
       </p:sp>
       <p:sp>
         <p:nvSpPr>
-          <p:cNvPr id="8" name="Text 5"/>
+          <p:cNvPr id="9" name="Text 5"/>
           <p:cNvSpPr/>
           <p:nvPr/>
         </p:nvSpPr>
@@ -22311,7 +22322,7 @@
       </p:sp>
       <p:sp>
         <p:nvSpPr>
-          <p:cNvPr id="9" name="Text 6"/>
+          <p:cNvPr id="10" name="Text 6"/>
           <p:cNvSpPr/>
           <p:nvPr/>
         </p:nvSpPr>
@@ -22353,7 +22364,7 @@
       </p:sp>
       <p:sp>
         <p:nvSpPr>
-          <p:cNvPr id="10" name="Shape 7"/>
+          <p:cNvPr id="11" name="Shape 7"/>
           <p:cNvSpPr/>
           <p:nvPr/>
         </p:nvSpPr>
@@ -22380,7 +22391,7 @@
       </p:sp>
       <p:sp>
         <p:nvSpPr>
-          <p:cNvPr id="11" name="Text 8"/>
+          <p:cNvPr id="12" name="Text 8"/>
           <p:cNvSpPr/>
           <p:nvPr/>
         </p:nvSpPr>
@@ -22419,7 +22430,7 @@
       </p:sp>
       <p:sp>
         <p:nvSpPr>
-          <p:cNvPr id="12" name="Text 9"/>
+          <p:cNvPr id="13" name="Text 9"/>
           <p:cNvSpPr/>
           <p:nvPr/>
         </p:nvSpPr>
@@ -22461,7 +22472,7 @@
       </p:sp>
       <p:sp>
         <p:nvSpPr>
-          <p:cNvPr id="13" name="Shape 10"/>
+          <p:cNvPr id="14" name="Shape 10"/>
           <p:cNvSpPr/>
           <p:nvPr/>
         </p:nvSpPr>
@@ -22488,7 +22499,7 @@
       </p:sp>
       <p:sp>
         <p:nvSpPr>
-          <p:cNvPr id="14" name="Text 11"/>
+          <p:cNvPr id="15" name="Text 11"/>
           <p:cNvSpPr/>
           <p:nvPr/>
         </p:nvSpPr>
@@ -22527,7 +22538,7 @@
       </p:sp>
       <p:sp>
         <p:nvSpPr>
-          <p:cNvPr id="15" name="Text 12"/>
+          <p:cNvPr id="16" name="Text 12"/>
           <p:cNvSpPr/>
           <p:nvPr/>
         </p:nvSpPr>
@@ -22569,7 +22580,7 @@
       </p:sp>
       <p:sp>
         <p:nvSpPr>
-          <p:cNvPr id="16" name="Shape 13"/>
+          <p:cNvPr id="17" name="Shape 13"/>
           <p:cNvSpPr/>
           <p:nvPr/>
         </p:nvSpPr>
@@ -22596,7 +22607,7 @@
       </p:sp>
       <p:sp>
         <p:nvSpPr>
-          <p:cNvPr id="17" name="Text 14"/>
+          <p:cNvPr id="18" name="Text 14"/>
           <p:cNvSpPr/>
           <p:nvPr/>
         </p:nvSpPr>
@@ -22635,7 +22646,7 @@
       </p:sp>
       <p:sp>
         <p:nvSpPr>
-          <p:cNvPr id="18" name="Text 15"/>
+          <p:cNvPr id="19" name="Text 15"/>
           <p:cNvSpPr/>
           <p:nvPr/>
         </p:nvSpPr>
@@ -22677,7 +22688,7 @@
       </p:sp>
       <p:sp>
         <p:nvSpPr>
-          <p:cNvPr id="19" name="Shape 16"/>
+          <p:cNvPr id="20" name="Shape 16"/>
           <p:cNvSpPr/>
           <p:nvPr/>
         </p:nvSpPr>
@@ -22704,7 +22715,7 @@
       </p:sp>
       <p:sp>
         <p:nvSpPr>
-          <p:cNvPr id="20" name="Text 17"/>
+          <p:cNvPr id="21" name="Text 17"/>
           <p:cNvSpPr/>
           <p:nvPr/>
         </p:nvSpPr>
@@ -22743,7 +22754,7 @@
       </p:sp>
       <p:sp>
         <p:nvSpPr>
-          <p:cNvPr id="21" name="Text 18"/>
+          <p:cNvPr id="22" name="Text 18"/>
           <p:cNvSpPr/>
           <p:nvPr/>
         </p:nvSpPr>
@@ -22785,7 +22796,7 @@
       </p:sp>
       <p:sp>
         <p:nvSpPr>
-          <p:cNvPr id="22" name="Shape 19"/>
+          <p:cNvPr id="23" name="Shape 19"/>
           <p:cNvSpPr/>
           <p:nvPr/>
         </p:nvSpPr>
@@ -22812,7 +22823,7 @@
       </p:sp>
       <p:sp>
         <p:nvSpPr>
-          <p:cNvPr id="23" name="Text 20"/>
+          <p:cNvPr id="24" name="Text 20"/>
           <p:cNvSpPr/>
           <p:nvPr/>
         </p:nvSpPr>
@@ -22851,7 +22862,7 @@
       </p:sp>
       <p:sp>
         <p:nvSpPr>
-          <p:cNvPr id="24" name="Text 21"/>
+          <p:cNvPr id="25" name="Text 21"/>
           <p:cNvSpPr/>
           <p:nvPr/>
         </p:nvSpPr>
@@ -22893,7 +22904,7 @@
       </p:sp>
       <p:sp>
         <p:nvSpPr>
-          <p:cNvPr id="25" name="Shape 22"/>
+          <p:cNvPr id="26" name="Shape 22"/>
           <p:cNvSpPr/>
           <p:nvPr/>
         </p:nvSpPr>
@@ -22920,7 +22931,7 @@
       </p:sp>
       <p:sp>
         <p:nvSpPr>
-          <p:cNvPr id="26" name="Text 23"/>
+          <p:cNvPr id="27" name="Text 23"/>
           <p:cNvSpPr/>
           <p:nvPr/>
         </p:nvSpPr>
@@ -22954,7 +22965,7 @@
                 <a:ea typeface="Montserrat" pitchFamily="34" charset="-122"/>
                 <a:cs typeface="Montserrat" pitchFamily="34" charset="-120"/>
               </a:rPr>
-              <a:t>Незнайоме слово — нормально: кожне розберемо на місці. Тут вони лише щоб не спотикатися по ходу.</a:t>
+              <a:t>Кожне розберемо на місці — тут лише щоб не спотикатися.</a:t>
             </a:r>
             <a:endParaRPr lang="en-US" sz="1300" dirty="0"/>
           </a:p>
@@ -23205,7 +23216,7 @@
       </p:pic>
       <p:sp>
         <p:nvSpPr>
-          <p:cNvPr id="7" name="Shape 4"/>
+          <p:cNvPr id="8" name="Shape 4"/>
           <p:cNvSpPr/>
           <p:nvPr/>
         </p:nvSpPr>
@@ -23227,7 +23238,7 @@
       </p:sp>
       <p:sp>
         <p:nvSpPr>
-          <p:cNvPr id="8" name="Text 5"/>
+          <p:cNvPr id="9" name="Text 5"/>
           <p:cNvSpPr/>
           <p:nvPr/>
         </p:nvSpPr>
@@ -23266,7 +23277,7 @@
       </p:sp>
       <p:sp>
         <p:nvSpPr>
-          <p:cNvPr id="9" name="Text 6"/>
+          <p:cNvPr id="10" name="Text 6"/>
           <p:cNvSpPr/>
           <p:nvPr/>
         </p:nvSpPr>
@@ -23305,7 +23316,7 @@
       </p:sp>
       <p:sp>
         <p:nvSpPr>
-          <p:cNvPr id="10" name="Shape 7"/>
+          <p:cNvPr id="11" name="Shape 7"/>
           <p:cNvSpPr/>
           <p:nvPr/>
         </p:nvSpPr>
@@ -23327,7 +23338,7 @@
       </p:sp>
       <p:sp>
         <p:nvSpPr>
-          <p:cNvPr id="11" name="Text 8"/>
+          <p:cNvPr id="12" name="Text 8"/>
           <p:cNvSpPr/>
           <p:nvPr/>
         </p:nvSpPr>
@@ -23366,7 +23377,7 @@
       </p:sp>
       <p:sp>
         <p:nvSpPr>
-          <p:cNvPr id="12" name="Text 9"/>
+          <p:cNvPr id="13" name="Text 9"/>
           <p:cNvSpPr/>
           <p:nvPr/>
         </p:nvSpPr>
@@ -23405,7 +23416,7 @@
       </p:sp>
       <p:sp>
         <p:nvSpPr>
-          <p:cNvPr id="13" name="Shape 10"/>
+          <p:cNvPr id="14" name="Shape 10"/>
           <p:cNvSpPr/>
           <p:nvPr/>
         </p:nvSpPr>
@@ -23432,7 +23443,7 @@
       </p:sp>
       <p:sp>
         <p:nvSpPr>
-          <p:cNvPr id="14" name="Shape 11"/>
+          <p:cNvPr id="15" name="Shape 11"/>
           <p:cNvSpPr/>
           <p:nvPr/>
         </p:nvSpPr>
@@ -23452,7 +23463,7 @@
       </p:sp>
       <p:sp>
         <p:nvSpPr>
-          <p:cNvPr id="15" name="Text 12"/>
+          <p:cNvPr id="16" name="Text 12"/>
           <p:cNvSpPr/>
           <p:nvPr/>
         </p:nvSpPr>
@@ -23491,7 +23502,7 @@
       </p:sp>
       <p:sp>
         <p:nvSpPr>
-          <p:cNvPr id="16" name="Text 13"/>
+          <p:cNvPr id="17" name="Text 13"/>
           <p:cNvSpPr/>
           <p:nvPr/>
         </p:nvSpPr>
@@ -23530,7 +23541,7 @@
       </p:sp>
       <p:sp>
         <p:nvSpPr>
-          <p:cNvPr id="17" name="Text 14"/>
+          <p:cNvPr id="18" name="Text 14"/>
           <p:cNvSpPr/>
           <p:nvPr/>
         </p:nvSpPr>
@@ -23572,7 +23583,7 @@
       </p:sp>
       <p:sp>
         <p:nvSpPr>
-          <p:cNvPr id="18" name="Shape 15"/>
+          <p:cNvPr id="19" name="Shape 15"/>
           <p:cNvSpPr/>
           <p:nvPr/>
         </p:nvSpPr>
@@ -23599,7 +23610,7 @@
       </p:sp>
       <p:sp>
         <p:nvSpPr>
-          <p:cNvPr id="19" name="Shape 16"/>
+          <p:cNvPr id="20" name="Shape 16"/>
           <p:cNvSpPr/>
           <p:nvPr/>
         </p:nvSpPr>
@@ -23619,7 +23630,7 @@
       </p:sp>
       <p:sp>
         <p:nvSpPr>
-          <p:cNvPr id="20" name="Text 17"/>
+          <p:cNvPr id="21" name="Text 17"/>
           <p:cNvSpPr/>
           <p:nvPr/>
         </p:nvSpPr>
@@ -23658,7 +23669,7 @@
       </p:sp>
       <p:sp>
         <p:nvSpPr>
-          <p:cNvPr id="21" name="Text 18"/>
+          <p:cNvPr id="22" name="Text 18"/>
           <p:cNvSpPr/>
           <p:nvPr/>
         </p:nvSpPr>
@@ -23697,7 +23708,7 @@
       </p:sp>
       <p:sp>
         <p:nvSpPr>
-          <p:cNvPr id="22" name="Text 19"/>
+          <p:cNvPr id="23" name="Text 19"/>
           <p:cNvSpPr/>
           <p:nvPr/>
         </p:nvSpPr>
@@ -23739,7 +23750,7 @@
       </p:sp>
       <p:sp>
         <p:nvSpPr>
-          <p:cNvPr id="23" name="Shape 20"/>
+          <p:cNvPr id="24" name="Shape 20"/>
           <p:cNvSpPr/>
           <p:nvPr/>
         </p:nvSpPr>
@@ -23766,7 +23777,7 @@
       </p:sp>
       <p:sp>
         <p:nvSpPr>
-          <p:cNvPr id="24" name="Shape 21"/>
+          <p:cNvPr id="25" name="Shape 21"/>
           <p:cNvSpPr/>
           <p:nvPr/>
         </p:nvSpPr>
@@ -23786,7 +23797,7 @@
       </p:sp>
       <p:sp>
         <p:nvSpPr>
-          <p:cNvPr id="25" name="Text 22"/>
+          <p:cNvPr id="26" name="Text 22"/>
           <p:cNvSpPr/>
           <p:nvPr/>
         </p:nvSpPr>
@@ -23825,7 +23836,7 @@
       </p:sp>
       <p:sp>
         <p:nvSpPr>
-          <p:cNvPr id="26" name="Text 23"/>
+          <p:cNvPr id="27" name="Text 23"/>
           <p:cNvSpPr/>
           <p:nvPr/>
         </p:nvSpPr>
@@ -23864,7 +23875,7 @@
       </p:sp>
       <p:sp>
         <p:nvSpPr>
-          <p:cNvPr id="27" name="Text 24"/>
+          <p:cNvPr id="28" name="Text 24"/>
           <p:cNvSpPr/>
           <p:nvPr/>
         </p:nvSpPr>
@@ -23906,7 +23917,7 @@
       </p:sp>
       <p:sp>
         <p:nvSpPr>
-          <p:cNvPr id="28" name="Shape 25"/>
+          <p:cNvPr id="29" name="Shape 25"/>
           <p:cNvSpPr/>
           <p:nvPr/>
         </p:nvSpPr>
@@ -23933,7 +23944,7 @@
       </p:sp>
       <p:sp>
         <p:nvSpPr>
-          <p:cNvPr id="29" name="Shape 26"/>
+          <p:cNvPr id="30" name="Shape 26"/>
           <p:cNvSpPr/>
           <p:nvPr/>
         </p:nvSpPr>
@@ -23953,7 +23964,7 @@
       </p:sp>
       <p:sp>
         <p:nvSpPr>
-          <p:cNvPr id="30" name="Text 27"/>
+          <p:cNvPr id="31" name="Text 27"/>
           <p:cNvSpPr/>
           <p:nvPr/>
         </p:nvSpPr>
@@ -23992,7 +24003,7 @@
       </p:sp>
       <p:sp>
         <p:nvSpPr>
-          <p:cNvPr id="31" name="Text 28"/>
+          <p:cNvPr id="32" name="Text 28"/>
           <p:cNvSpPr/>
           <p:nvPr/>
         </p:nvSpPr>
@@ -24031,7 +24042,7 @@
       </p:sp>
       <p:sp>
         <p:nvSpPr>
-          <p:cNvPr id="32" name="Text 29"/>
+          <p:cNvPr id="33" name="Text 29"/>
           <p:cNvSpPr/>
           <p:nvPr/>
         </p:nvSpPr>
@@ -24073,7 +24084,7 @@
       </p:sp>
       <p:sp>
         <p:nvSpPr>
-          <p:cNvPr id="33" name="Shape 30"/>
+          <p:cNvPr id="34" name="Shape 30"/>
           <p:cNvSpPr/>
           <p:nvPr/>
         </p:nvSpPr>
@@ -24095,7 +24106,7 @@
       </p:sp>
       <p:sp>
         <p:nvSpPr>
-          <p:cNvPr id="34" name="Text 31"/>
+          <p:cNvPr id="35" name="Text 31"/>
           <p:cNvSpPr/>
           <p:nvPr/>
         </p:nvSpPr>
@@ -24301,7 +24312,7 @@
         </p:nvSpPr>
         <p:spPr>
           <a:xfrm>
-            <a:off x="1280160" y="1024128"/>
+            <a:off x="1280160" y="1193140"/>
             <a:ext cx="777240" cy="256032"/>
           </a:xfrm>
           <a:prstGeom prst="roundRect">
@@ -24323,7 +24334,7 @@
         </p:nvSpPr>
         <p:spPr>
           <a:xfrm>
-            <a:off x="1280160" y="1024128"/>
+            <a:off x="1280160" y="1193140"/>
             <a:ext cx="777240" cy="256032"/>
           </a:xfrm>
           <a:prstGeom prst="rect">
@@ -24380,7 +24391,7 @@
       </p:pic>
       <p:sp>
         <p:nvSpPr>
-          <p:cNvPr id="7" name="Shape 4"/>
+          <p:cNvPr id="8" name="Shape 4"/>
           <p:cNvSpPr/>
           <p:nvPr/>
         </p:nvSpPr>
@@ -24402,7 +24413,7 @@
       </p:sp>
       <p:sp>
         <p:nvSpPr>
-          <p:cNvPr id="8" name="Shape 5"/>
+          <p:cNvPr id="9" name="Shape 5"/>
           <p:cNvSpPr/>
           <p:nvPr/>
         </p:nvSpPr>
@@ -24422,7 +24433,7 @@
       </p:sp>
       <p:sp>
         <p:nvSpPr>
-          <p:cNvPr id="9" name="Text 6"/>
+          <p:cNvPr id="10" name="Text 6"/>
           <p:cNvSpPr/>
           <p:nvPr/>
         </p:nvSpPr>
@@ -24461,7 +24472,7 @@
       </p:sp>
       <p:sp>
         <p:nvSpPr>
-          <p:cNvPr id="10" name="Text 7"/>
+          <p:cNvPr id="11" name="Text 7"/>
           <p:cNvSpPr/>
           <p:nvPr/>
         </p:nvSpPr>
@@ -24500,7 +24511,7 @@
       </p:sp>
       <p:sp>
         <p:nvSpPr>
-          <p:cNvPr id="11" name="Text 8"/>
+          <p:cNvPr id="12" name="Text 8"/>
           <p:cNvSpPr/>
           <p:nvPr/>
         </p:nvSpPr>
@@ -24542,7 +24553,7 @@
       </p:sp>
       <p:sp>
         <p:nvSpPr>
-          <p:cNvPr id="12" name="Shape 9"/>
+          <p:cNvPr id="13" name="Shape 9"/>
           <p:cNvSpPr/>
           <p:nvPr/>
         </p:nvSpPr>
@@ -24564,7 +24575,7 @@
       </p:sp>
       <p:sp>
         <p:nvSpPr>
-          <p:cNvPr id="13" name="Shape 10"/>
+          <p:cNvPr id="14" name="Shape 10"/>
           <p:cNvSpPr/>
           <p:nvPr/>
         </p:nvSpPr>
@@ -24584,7 +24595,7 @@
       </p:sp>
       <p:sp>
         <p:nvSpPr>
-          <p:cNvPr id="14" name="Text 11"/>
+          <p:cNvPr id="15" name="Text 11"/>
           <p:cNvSpPr/>
           <p:nvPr/>
         </p:nvSpPr>
@@ -24623,7 +24634,7 @@
       </p:sp>
       <p:sp>
         <p:nvSpPr>
-          <p:cNvPr id="15" name="Text 12"/>
+          <p:cNvPr id="16" name="Text 12"/>
           <p:cNvSpPr/>
           <p:nvPr/>
         </p:nvSpPr>
@@ -24662,7 +24673,7 @@
       </p:sp>
       <p:sp>
         <p:nvSpPr>
-          <p:cNvPr id="16" name="Text 13"/>
+          <p:cNvPr id="17" name="Text 13"/>
           <p:cNvSpPr/>
           <p:nvPr/>
         </p:nvSpPr>
@@ -24704,7 +24715,7 @@
       </p:sp>
       <p:sp>
         <p:nvSpPr>
-          <p:cNvPr id="17" name="Shape 14"/>
+          <p:cNvPr id="18" name="Shape 14"/>
           <p:cNvSpPr/>
           <p:nvPr/>
         </p:nvSpPr>
@@ -24726,7 +24737,7 @@
       </p:sp>
       <p:sp>
         <p:nvSpPr>
-          <p:cNvPr id="18" name="Shape 15"/>
+          <p:cNvPr id="19" name="Shape 15"/>
           <p:cNvSpPr/>
           <p:nvPr/>
         </p:nvSpPr>
@@ -24746,7 +24757,7 @@
       </p:sp>
       <p:sp>
         <p:nvSpPr>
-          <p:cNvPr id="19" name="Text 16"/>
+          <p:cNvPr id="20" name="Text 16"/>
           <p:cNvSpPr/>
           <p:nvPr/>
         </p:nvSpPr>
@@ -24785,7 +24796,7 @@
       </p:sp>
       <p:sp>
         <p:nvSpPr>
-          <p:cNvPr id="20" name="Text 17"/>
+          <p:cNvPr id="21" name="Text 17"/>
           <p:cNvSpPr/>
           <p:nvPr/>
         </p:nvSpPr>
@@ -24824,7 +24835,7 @@
       </p:sp>
       <p:sp>
         <p:nvSpPr>
-          <p:cNvPr id="21" name="Text 18"/>
+          <p:cNvPr id="22" name="Text 18"/>
           <p:cNvSpPr/>
           <p:nvPr/>
         </p:nvSpPr>
@@ -24866,7 +24877,7 @@
       </p:sp>
       <p:sp>
         <p:nvSpPr>
-          <p:cNvPr id="22" name="Shape 19"/>
+          <p:cNvPr id="23" name="Shape 19"/>
           <p:cNvSpPr/>
           <p:nvPr/>
         </p:nvSpPr>
@@ -24888,7 +24899,7 @@
       </p:sp>
       <p:sp>
         <p:nvSpPr>
-          <p:cNvPr id="23" name="Shape 20"/>
+          <p:cNvPr id="24" name="Shape 20"/>
           <p:cNvSpPr/>
           <p:nvPr/>
         </p:nvSpPr>
@@ -24908,7 +24919,7 @@
       </p:sp>
       <p:sp>
         <p:nvSpPr>
-          <p:cNvPr id="24" name="Text 21"/>
+          <p:cNvPr id="25" name="Text 21"/>
           <p:cNvSpPr/>
           <p:nvPr/>
         </p:nvSpPr>
@@ -24947,7 +24958,7 @@
       </p:sp>
       <p:sp>
         <p:nvSpPr>
-          <p:cNvPr id="25" name="Text 22"/>
+          <p:cNvPr id="26" name="Text 22"/>
           <p:cNvSpPr/>
           <p:nvPr/>
         </p:nvSpPr>
@@ -24986,7 +24997,7 @@
       </p:sp>
       <p:sp>
         <p:nvSpPr>
-          <p:cNvPr id="26" name="Text 23"/>
+          <p:cNvPr id="27" name="Text 23"/>
           <p:cNvSpPr/>
           <p:nvPr/>
         </p:nvSpPr>
@@ -25028,7 +25039,7 @@
       </p:sp>
       <p:sp>
         <p:nvSpPr>
-          <p:cNvPr id="27" name="Shape 24"/>
+          <p:cNvPr id="28" name="Shape 24"/>
           <p:cNvSpPr/>
           <p:nvPr/>
         </p:nvSpPr>
@@ -25055,7 +25066,7 @@
       </p:sp>
       <p:sp>
         <p:nvSpPr>
-          <p:cNvPr id="28" name="Text 25"/>
+          <p:cNvPr id="29" name="Text 25"/>
           <p:cNvSpPr/>
           <p:nvPr/>
         </p:nvSpPr>
@@ -25094,7 +25105,7 @@
       </p:sp>
       <p:sp>
         <p:nvSpPr>
-          <p:cNvPr id="29" name="Text 26"/>
+          <p:cNvPr id="30" name="Text 26"/>
           <p:cNvSpPr/>
           <p:nvPr/>
         </p:nvSpPr>
@@ -25128,7 +25139,7 @@
                 <a:ea typeface="Montserrat" pitchFamily="34" charset="-122"/>
                 <a:cs typeface="Montserrat" pitchFamily="34" charset="-120"/>
               </a:rPr>
-              <a:t>LLMOps — не про те, як покликати модель, а як експлуатувати її як production-сервіс: керувати вартістю, надійністю, якістю і видимістю.</a:t>
+              <a:t>LLMOps — це експлуатація моделі як production-сервісу.</a:t>
             </a:r>
             <a:endParaRPr lang="en-US" sz="1300" dirty="0"/>
           </a:p>
@@ -25136,7 +25147,7 @@
       </p:sp>
       <p:sp>
         <p:nvSpPr>
-          <p:cNvPr id="30" name="Shape 27"/>
+          <p:cNvPr id="31" name="Shape 27"/>
           <p:cNvSpPr/>
           <p:nvPr/>
         </p:nvSpPr>
@@ -25158,7 +25169,7 @@
       </p:sp>
       <p:sp>
         <p:nvSpPr>
-          <p:cNvPr id="31" name="Text 28"/>
+          <p:cNvPr id="32" name="Text 28"/>
           <p:cNvSpPr/>
           <p:nvPr/>
         </p:nvSpPr>
@@ -25197,7 +25208,7 @@
       </p:sp>
       <p:sp>
         <p:nvSpPr>
-          <p:cNvPr id="32" name="Shape 29"/>
+          <p:cNvPr id="33" name="Shape 29"/>
           <p:cNvSpPr/>
           <p:nvPr/>
         </p:nvSpPr>
@@ -25220,7 +25231,7 @@
       </p:sp>
       <p:sp>
         <p:nvSpPr>
-          <p:cNvPr id="33" name="Shape 30"/>
+          <p:cNvPr id="34" name="Shape 30"/>
           <p:cNvSpPr/>
           <p:nvPr/>
         </p:nvSpPr>
@@ -25240,7 +25251,7 @@
       </p:sp>
       <p:sp>
         <p:nvSpPr>
-          <p:cNvPr id="34" name="Shape 31"/>
+          <p:cNvPr id="35" name="Shape 31"/>
           <p:cNvSpPr/>
           <p:nvPr/>
         </p:nvSpPr>
@@ -25267,7 +25278,7 @@
       </p:sp>
       <p:sp>
         <p:nvSpPr>
-          <p:cNvPr id="35" name="Text 32"/>
+          <p:cNvPr id="36" name="Text 32"/>
           <p:cNvSpPr/>
           <p:nvPr/>
         </p:nvSpPr>
@@ -25306,7 +25317,7 @@
       </p:sp>
       <p:sp>
         <p:nvSpPr>
-          <p:cNvPr id="36" name="Shape 33"/>
+          <p:cNvPr id="37" name="Shape 33"/>
           <p:cNvSpPr/>
           <p:nvPr/>
         </p:nvSpPr>
@@ -25329,7 +25340,7 @@
       </p:sp>
       <p:sp>
         <p:nvSpPr>
-          <p:cNvPr id="37" name="Shape 34"/>
+          <p:cNvPr id="38" name="Shape 34"/>
           <p:cNvSpPr/>
           <p:nvPr/>
         </p:nvSpPr>
@@ -25349,7 +25360,7 @@
       </p:sp>
       <p:sp>
         <p:nvSpPr>
-          <p:cNvPr id="38" name="Shape 35"/>
+          <p:cNvPr id="39" name="Shape 35"/>
           <p:cNvSpPr/>
           <p:nvPr/>
         </p:nvSpPr>
@@ -25376,7 +25387,7 @@
       </p:sp>
       <p:sp>
         <p:nvSpPr>
-          <p:cNvPr id="39" name="Text 36"/>
+          <p:cNvPr id="40" name="Text 36"/>
           <p:cNvSpPr/>
           <p:nvPr/>
         </p:nvSpPr>
@@ -25415,7 +25426,7 @@
       </p:sp>
       <p:sp>
         <p:nvSpPr>
-          <p:cNvPr id="40" name="Shape 37"/>
+          <p:cNvPr id="41" name="Shape 37"/>
           <p:cNvSpPr/>
           <p:nvPr/>
         </p:nvSpPr>
@@ -25438,7 +25449,7 @@
       </p:sp>
       <p:sp>
         <p:nvSpPr>
-          <p:cNvPr id="41" name="Shape 38"/>
+          <p:cNvPr id="42" name="Shape 38"/>
           <p:cNvSpPr/>
           <p:nvPr/>
         </p:nvSpPr>
@@ -25458,7 +25469,7 @@
       </p:sp>
       <p:sp>
         <p:nvSpPr>
-          <p:cNvPr id="42" name="Shape 39"/>
+          <p:cNvPr id="43" name="Shape 39"/>
           <p:cNvSpPr/>
           <p:nvPr/>
         </p:nvSpPr>
@@ -25485,7 +25496,7 @@
       </p:sp>
       <p:sp>
         <p:nvSpPr>
-          <p:cNvPr id="43" name="Text 40"/>
+          <p:cNvPr id="44" name="Text 40"/>
           <p:cNvSpPr/>
           <p:nvPr/>
         </p:nvSpPr>
@@ -25524,7 +25535,7 @@
       </p:sp>
       <p:sp>
         <p:nvSpPr>
-          <p:cNvPr id="44" name="Shape 41"/>
+          <p:cNvPr id="45" name="Shape 41"/>
           <p:cNvSpPr/>
           <p:nvPr/>
         </p:nvSpPr>
@@ -25547,7 +25558,7 @@
       </p:sp>
       <p:sp>
         <p:nvSpPr>
-          <p:cNvPr id="45" name="Shape 42"/>
+          <p:cNvPr id="46" name="Shape 42"/>
           <p:cNvSpPr/>
           <p:nvPr/>
         </p:nvSpPr>
@@ -25567,7 +25578,7 @@
       </p:sp>
       <p:sp>
         <p:nvSpPr>
-          <p:cNvPr id="46" name="Shape 43"/>
+          <p:cNvPr id="47" name="Shape 43"/>
           <p:cNvSpPr/>
           <p:nvPr/>
         </p:nvSpPr>
@@ -25594,7 +25605,7 @@
       </p:sp>
       <p:sp>
         <p:nvSpPr>
-          <p:cNvPr id="47" name="Text 44"/>
+          <p:cNvPr id="48" name="Text 44"/>
           <p:cNvSpPr/>
           <p:nvPr/>
         </p:nvSpPr>
@@ -25633,7 +25644,7 @@
       </p:sp>
       <p:sp>
         <p:nvSpPr>
-          <p:cNvPr id="48" name="Shape 45"/>
+          <p:cNvPr id="49" name="Shape 45"/>
           <p:cNvSpPr/>
           <p:nvPr/>
         </p:nvSpPr>
@@ -25656,7 +25667,7 @@
       </p:sp>
       <p:sp>
         <p:nvSpPr>
-          <p:cNvPr id="49" name="Shape 46"/>
+          <p:cNvPr id="50" name="Shape 46"/>
           <p:cNvSpPr/>
           <p:nvPr/>
         </p:nvSpPr>
@@ -25676,7 +25687,7 @@
       </p:sp>
       <p:sp>
         <p:nvSpPr>
-          <p:cNvPr id="50" name="Shape 47"/>
+          <p:cNvPr id="51" name="Shape 47"/>
           <p:cNvSpPr/>
           <p:nvPr/>
         </p:nvSpPr>
@@ -25703,7 +25714,7 @@
       </p:sp>
       <p:sp>
         <p:nvSpPr>
-          <p:cNvPr id="51" name="Text 48"/>
+          <p:cNvPr id="52" name="Text 48"/>
           <p:cNvSpPr/>
           <p:nvPr/>
         </p:nvSpPr>
@@ -25742,7 +25753,7 @@
       </p:sp>
       <p:sp>
         <p:nvSpPr>
-          <p:cNvPr id="52" name="Text 49"/>
+          <p:cNvPr id="53" name="Text 49"/>
           <p:cNvSpPr/>
           <p:nvPr/>
         </p:nvSpPr>
@@ -25945,7 +25956,7 @@
         </p:nvSpPr>
         <p:spPr>
           <a:xfrm>
-            <a:off x="1280160" y="1024128"/>
+            <a:off x="1280160" y="1193140"/>
             <a:ext cx="777240" cy="256032"/>
           </a:xfrm>
           <a:prstGeom prst="roundRect">
@@ -25967,7 +25978,7 @@
         </p:nvSpPr>
         <p:spPr>
           <a:xfrm>
-            <a:off x="1280160" y="1024128"/>
+            <a:off x="1280160" y="1193140"/>
             <a:ext cx="777240" cy="256032"/>
           </a:xfrm>
           <a:prstGeom prst="rect">
@@ -26024,7 +26035,7 @@
       </p:pic>
       <p:sp>
         <p:nvSpPr>
-          <p:cNvPr id="7" name="Shape 4"/>
+          <p:cNvPr id="8" name="Shape 4"/>
           <p:cNvSpPr/>
           <p:nvPr/>
         </p:nvSpPr>
@@ -26051,7 +26062,7 @@
       </p:sp>
       <p:sp>
         <p:nvSpPr>
-          <p:cNvPr id="8" name="Text 5"/>
+          <p:cNvPr id="9" name="Text 5"/>
           <p:cNvSpPr/>
           <p:nvPr/>
         </p:nvSpPr>
@@ -26267,7 +26278,7 @@
       </p:sp>
       <p:sp>
         <p:nvSpPr>
-          <p:cNvPr id="9" name="Shape 6"/>
+          <p:cNvPr id="10" name="Shape 6"/>
           <p:cNvSpPr/>
           <p:nvPr/>
         </p:nvSpPr>
@@ -26289,7 +26300,7 @@
       </p:sp>
       <p:sp>
         <p:nvSpPr>
-          <p:cNvPr id="10" name="Text 7"/>
+          <p:cNvPr id="11" name="Text 7"/>
           <p:cNvSpPr/>
           <p:nvPr/>
         </p:nvSpPr>
@@ -26331,7 +26342,7 @@
       </p:sp>
       <p:sp>
         <p:nvSpPr>
-          <p:cNvPr id="11" name="Shape 8"/>
+          <p:cNvPr id="12" name="Shape 8"/>
           <p:cNvSpPr/>
           <p:nvPr/>
         </p:nvSpPr>
@@ -26353,7 +26364,7 @@
       </p:sp>
       <p:sp>
         <p:nvSpPr>
-          <p:cNvPr id="12" name="Text 9"/>
+          <p:cNvPr id="13" name="Text 9"/>
           <p:cNvSpPr/>
           <p:nvPr/>
         </p:nvSpPr>
@@ -26392,7 +26403,7 @@
       </p:sp>
       <p:sp>
         <p:nvSpPr>
-          <p:cNvPr id="13" name="Text 10"/>
+          <p:cNvPr id="14" name="Text 10"/>
           <p:cNvSpPr/>
           <p:nvPr/>
         </p:nvSpPr>
@@ -26431,7 +26442,7 @@
       </p:sp>
       <p:sp>
         <p:nvSpPr>
-          <p:cNvPr id="14" name="Shape 11"/>
+          <p:cNvPr id="15" name="Shape 11"/>
           <p:cNvSpPr/>
           <p:nvPr/>
         </p:nvSpPr>
@@ -26453,7 +26464,7 @@
       </p:sp>
       <p:sp>
         <p:nvSpPr>
-          <p:cNvPr id="15" name="Text 12"/>
+          <p:cNvPr id="16" name="Text 12"/>
           <p:cNvSpPr/>
           <p:nvPr/>
         </p:nvSpPr>
@@ -26492,7 +26503,7 @@
       </p:sp>
       <p:sp>
         <p:nvSpPr>
-          <p:cNvPr id="16" name="Text 13"/>
+          <p:cNvPr id="17" name="Text 13"/>
           <p:cNvSpPr/>
           <p:nvPr/>
         </p:nvSpPr>
@@ -26531,7 +26542,7 @@
       </p:sp>
       <p:sp>
         <p:nvSpPr>
-          <p:cNvPr id="17" name="Shape 14"/>
+          <p:cNvPr id="18" name="Shape 14"/>
           <p:cNvSpPr/>
           <p:nvPr/>
         </p:nvSpPr>
@@ -26553,7 +26564,7 @@
       </p:sp>
       <p:sp>
         <p:nvSpPr>
-          <p:cNvPr id="18" name="Text 15"/>
+          <p:cNvPr id="19" name="Text 15"/>
           <p:cNvSpPr/>
           <p:nvPr/>
         </p:nvSpPr>
@@ -26592,7 +26603,7 @@
       </p:sp>
       <p:sp>
         <p:nvSpPr>
-          <p:cNvPr id="19" name="Text 16"/>
+          <p:cNvPr id="20" name="Text 16"/>
           <p:cNvSpPr/>
           <p:nvPr/>
         </p:nvSpPr>
@@ -26631,7 +26642,7 @@
       </p:sp>
       <p:sp>
         <p:nvSpPr>
-          <p:cNvPr id="20" name="Text 17"/>
+          <p:cNvPr id="21" name="Text 17"/>
           <p:cNvSpPr/>
           <p:nvPr/>
         </p:nvSpPr>
@@ -27974,7 +27985,7 @@
       </p:graphicFrame>
       <p:sp>
         <p:nvSpPr>
-          <p:cNvPr id="8" name="Shape 4"/>
+          <p:cNvPr id="9" name="Shape 4"/>
           <p:cNvSpPr/>
           <p:nvPr/>
         </p:nvSpPr>
@@ -27996,7 +28007,7 @@
       </p:sp>
       <p:sp>
         <p:nvSpPr>
-          <p:cNvPr id="9" name="Text 5"/>
+          <p:cNvPr id="10" name="Text 5"/>
           <p:cNvSpPr/>
           <p:nvPr/>
         </p:nvSpPr>
@@ -28035,7 +28046,7 @@
       </p:sp>
       <p:sp>
         <p:nvSpPr>
-          <p:cNvPr id="10" name="Text 6"/>
+          <p:cNvPr id="11" name="Text 6"/>
           <p:cNvSpPr/>
           <p:nvPr/>
         </p:nvSpPr>
@@ -28077,7 +28088,7 @@
       </p:sp>
       <p:sp>
         <p:nvSpPr>
-          <p:cNvPr id="11" name="Shape 7"/>
+          <p:cNvPr id="12" name="Shape 7"/>
           <p:cNvSpPr/>
           <p:nvPr/>
         </p:nvSpPr>
@@ -28099,7 +28110,7 @@
       </p:sp>
       <p:sp>
         <p:nvSpPr>
-          <p:cNvPr id="12" name="Text 8"/>
+          <p:cNvPr id="13" name="Text 8"/>
           <p:cNvSpPr/>
           <p:nvPr/>
         </p:nvSpPr>
@@ -28138,7 +28149,7 @@
       </p:sp>
       <p:sp>
         <p:nvSpPr>
-          <p:cNvPr id="13" name="Text 9"/>
+          <p:cNvPr id="14" name="Text 9"/>
           <p:cNvSpPr/>
           <p:nvPr/>
         </p:nvSpPr>
@@ -28180,7 +28191,7 @@
       </p:sp>
       <p:sp>
         <p:nvSpPr>
-          <p:cNvPr id="14" name="Text 10"/>
+          <p:cNvPr id="15" name="Text 10"/>
           <p:cNvSpPr/>
           <p:nvPr/>
         </p:nvSpPr>
@@ -28462,7 +28473,7 @@
       </p:pic>
       <p:sp>
         <p:nvSpPr>
-          <p:cNvPr id="7" name="Shape 4"/>
+          <p:cNvPr id="8" name="Shape 4"/>
           <p:cNvSpPr/>
           <p:nvPr/>
         </p:nvSpPr>
@@ -28489,7 +28500,7 @@
       </p:sp>
       <p:sp>
         <p:nvSpPr>
-          <p:cNvPr id="8" name="Text 5"/>
+          <p:cNvPr id="9" name="Text 5"/>
           <p:cNvSpPr/>
           <p:nvPr/>
         </p:nvSpPr>
@@ -28528,7 +28539,7 @@
       </p:sp>
       <p:sp>
         <p:nvSpPr>
-          <p:cNvPr id="9" name="Text 6"/>
+          <p:cNvPr id="10" name="Text 6"/>
           <p:cNvSpPr/>
           <p:nvPr/>
         </p:nvSpPr>
@@ -28567,7 +28578,7 @@
       </p:sp>
       <p:sp>
         <p:nvSpPr>
-          <p:cNvPr id="10" name="Shape 7"/>
+          <p:cNvPr id="11" name="Shape 7"/>
           <p:cNvSpPr/>
           <p:nvPr/>
         </p:nvSpPr>
@@ -28589,7 +28600,7 @@
       </p:sp>
       <p:sp>
         <p:nvSpPr>
-          <p:cNvPr id="11" name="Text 8"/>
+          <p:cNvPr id="12" name="Text 8"/>
           <p:cNvSpPr/>
           <p:nvPr/>
         </p:nvSpPr>
@@ -28628,7 +28639,7 @@
       </p:sp>
       <p:sp>
         <p:nvSpPr>
-          <p:cNvPr id="12" name="Text 9"/>
+          <p:cNvPr id="13" name="Text 9"/>
           <p:cNvSpPr/>
           <p:nvPr/>
         </p:nvSpPr>
@@ -28667,7 +28678,7 @@
       </p:sp>
       <p:sp>
         <p:nvSpPr>
-          <p:cNvPr id="13" name="Text 10"/>
+          <p:cNvPr id="14" name="Text 10"/>
           <p:cNvSpPr/>
           <p:nvPr/>
         </p:nvSpPr>
@@ -28706,7 +28717,7 @@
       </p:sp>
       <p:sp>
         <p:nvSpPr>
-          <p:cNvPr id="14" name="Text 11"/>
+          <p:cNvPr id="15" name="Text 11"/>
           <p:cNvSpPr/>
           <p:nvPr/>
         </p:nvSpPr>
@@ -28745,7 +28756,7 @@
       </p:sp>
       <p:sp>
         <p:nvSpPr>
-          <p:cNvPr id="15" name="Shape 12"/>
+          <p:cNvPr id="16" name="Shape 12"/>
           <p:cNvSpPr/>
           <p:nvPr/>
         </p:nvSpPr>
@@ -28767,7 +28778,7 @@
       </p:sp>
       <p:sp>
         <p:nvSpPr>
-          <p:cNvPr id="16" name="Text 13"/>
+          <p:cNvPr id="17" name="Text 13"/>
           <p:cNvSpPr/>
           <p:nvPr/>
         </p:nvSpPr>
@@ -28806,7 +28817,7 @@
       </p:sp>
       <p:sp>
         <p:nvSpPr>
-          <p:cNvPr id="17" name="Text 14"/>
+          <p:cNvPr id="18" name="Text 14"/>
           <p:cNvSpPr/>
           <p:nvPr/>
         </p:nvSpPr>
@@ -28845,7 +28856,7 @@
       </p:sp>
       <p:sp>
         <p:nvSpPr>
-          <p:cNvPr id="18" name="Shape 15"/>
+          <p:cNvPr id="19" name="Shape 15"/>
           <p:cNvSpPr/>
           <p:nvPr/>
         </p:nvSpPr>
@@ -28867,7 +28878,7 @@
       </p:sp>
       <p:sp>
         <p:nvSpPr>
-          <p:cNvPr id="19" name="Text 16"/>
+          <p:cNvPr id="20" name="Text 16"/>
           <p:cNvSpPr/>
           <p:nvPr/>
         </p:nvSpPr>
@@ -28906,7 +28917,7 @@
       </p:sp>
       <p:sp>
         <p:nvSpPr>
-          <p:cNvPr id="20" name="Text 17"/>
+          <p:cNvPr id="21" name="Text 17"/>
           <p:cNvSpPr/>
           <p:nvPr/>
         </p:nvSpPr>
@@ -28945,7 +28956,7 @@
       </p:sp>
       <p:sp>
         <p:nvSpPr>
-          <p:cNvPr id="21" name="Shape 18"/>
+          <p:cNvPr id="22" name="Shape 18"/>
           <p:cNvSpPr/>
           <p:nvPr/>
         </p:nvSpPr>
@@ -28967,7 +28978,7 @@
       </p:sp>
       <p:sp>
         <p:nvSpPr>
-          <p:cNvPr id="22" name="Text 19"/>
+          <p:cNvPr id="23" name="Text 19"/>
           <p:cNvSpPr/>
           <p:nvPr/>
         </p:nvSpPr>
@@ -29006,7 +29017,7 @@
       </p:sp>
       <p:sp>
         <p:nvSpPr>
-          <p:cNvPr id="23" name="Text 20"/>
+          <p:cNvPr id="24" name="Text 20"/>
           <p:cNvSpPr/>
           <p:nvPr/>
         </p:nvSpPr>
@@ -29045,7 +29056,7 @@
       </p:sp>
       <p:sp>
         <p:nvSpPr>
-          <p:cNvPr id="24" name="Shape 21"/>
+          <p:cNvPr id="25" name="Shape 21"/>
           <p:cNvSpPr/>
           <p:nvPr/>
         </p:nvSpPr>
@@ -29067,7 +29078,7 @@
       </p:sp>
       <p:sp>
         <p:nvSpPr>
-          <p:cNvPr id="25" name="Text 22"/>
+          <p:cNvPr id="26" name="Text 22"/>
           <p:cNvSpPr/>
           <p:nvPr/>
         </p:nvSpPr>
@@ -29106,7 +29117,7 @@
       </p:sp>
       <p:sp>
         <p:nvSpPr>
-          <p:cNvPr id="26" name="Text 23"/>
+          <p:cNvPr id="27" name="Text 23"/>
           <p:cNvSpPr/>
           <p:nvPr/>
         </p:nvSpPr>
@@ -29140,7 +29151,7 @@
                 <a:ea typeface="Montserrat" pitchFamily="34" charset="-122"/>
                 <a:cs typeface="Montserrat" pitchFamily="34" charset="-120"/>
               </a:rPr>
-              <a:t>Вартість не виводиться з кількості запитів. Тому в лозі вхідні й вихідні токени стоять окремо — без них будь-яка цифра вартості вигадана.</a:t>
+              <a:t>Без окремих вхідних і вихідних токенів цифра вартості вигадана.</a:t>
             </a:r>
             <a:endParaRPr lang="en-US" sz="1300" dirty="0"/>
           </a:p>

--- a/docs/decks/L01.pptx
+++ b/docs/decks/L01.pptx
@@ -526,7 +526,7 @@
           <a:p>
             <a:r>
               <a:rPr lang="en-US" dirty="0"/>
-              <a:t>Вітаю на першому уроці курсу. Викликати модель — три рядки коду, і саме тому LLM-прототипи народжуються за день. Але між «API відповів 200» і системою, якою можна керувати, лежить весь цей курс. Сьогодні розберемо сам об'єкт керування: що фізично летить у модель і повертається назад, у чому міряється рахунок, чому та сама модель відповідає щоразу інакше і якими способами виклик ламається. Потім піднімемо каркас капстоуна однією командою — і чесно зламаємо його, щоб побачити, скільки роботи попереду. Курс триває шість тижнів, дванадцять уроків; кожен тиждень закриває одне операційне питання — механізмом, а не порадою. Це перший урок тижня «Основа + промпти».</a:t>
+              <a:t/>
             </a:r>
             <a:endParaRPr lang="en-US" dirty="0"/>
           </a:p>
@@ -614,7 +614,7 @@
           <a:p>
             <a:r>
               <a:rPr lang="en-US" dirty="0"/>
-              <a:t>Дві властивості з блока 01 варті окремого розтину, бо саме через них не працюють звичні тестування і моніторинг. Почнемо з недетермінізму. Модель на кожному кроці має розподіл ймовірностей наступного токена і обирає з нього; temperature керує тим, наскільки охоче вона відходить від найімовірнішого варіанта. Звідси природна думка: поставлю нуль — отримаю повторюваність. Це ілюзія, і покладатися на неї небезпечно. Навіть на нулі відповідь може відрізнятися між викликами, і на це три причини. Провайдер обробляє запити пакетами — і склад пакета впливає на арифметику. Обчислення з плаваючою точкою не асоціативні. А сама «модель» за незмінною назвою — це снапшот, який постачальник періодично оновлює. Звідси принцип: перевіряти LLM-відповідь порівнянням рядків не можна — ні в тестах, ні в кеші, ні в eval'ах. Перевіряються властивості: чи є в відповіді потрібне, чи немає забороненого, чи виконується формат, чи спрацював потрібний інструмент. Саме на цьому стоїть golden dataset уроку 10 — і саме тому там expect та forbid, а не «дорівнює». Практичний висновок: коли ви двічі напишете боту те саме і побачите інші слова — це не баг вашої системи. Баг — коли ви на це розраховували.</a:t>
+              <a:t/>
             </a:r>
             <a:endParaRPr lang="en-US" dirty="0"/>
           </a:p>
@@ -702,7 +702,7 @@
           <a:p>
             <a:r>
               <a:rPr lang="en-US" dirty="0"/>
-              <a:t>Друга властивість — природа латентності. Час LLM-виклику складається з двох частин: очікування першого токена, поки модель «читає» ваш вхід, і власне генерації, яка йде послідовно, токен за токеном. Тому виклик, що згенерував три абзаци, буде в рази повільніший за виклик з одним рядком — на тій самій моделі, при тому самому здоровому провайдері. Типова помилка — дивитися на p95 latency як на характеристику інфраструктури. P95 — це час, у який вкладаються 95 відсотків запитів; детально розберемо в уроці 9. У LLM-системі зростання p95 так само легко означає «відповіді стали довшими» — хтось змінив промпт або підняв max_tokens, — як і «провайдеру погано». Тому latency у лозі живе поряд із кількістю вихідних токенів: дві цифри разом відповідають на питання, на яке кожна окремо відповісти не може. Для інтерфейсів, де відповідь друкується на очах, окремо міряють час до першого токена — користувач суб'єктивно оцінює саме його. Стрімінгу в нашому контурі немає, це свідомо за межами курсу, але метрику варто знати на ім'я: time-to-first-token.</a:t>
+              <a:t/>
             </a:r>
             <a:endParaRPr lang="en-US" dirty="0"/>
           </a:p>
@@ -790,7 +790,7 @@
           <a:p>
             <a:r>
               <a:rPr lang="en-US" dirty="0"/>
-              <a:t>Останній шматок фундаменту — таксономія відмов. Вона потрібна вже сьогодні, бо визначає, які поля мають бути в лозі; детально кожен випадок закриваємо на тижні 4. Перші три категорії — видимі. Ліміт запитів: 429, вичерпано квоту — у сучасних API одразу по кількох осях: запити, токени, паралельні виклики. Збій провайдера: 5xx, інцидент на його боці. Таймаут або зависання: відповіді немає взагалі або вона приходить після того, як користувач пішов, — це моніторинг бачить частково. А тепер два рядки, заради яких існує цей курс. «Успішна, але непридатна»: HTTP 200 — і обрізана, порожня або не-JSON там, де чекали JSON. І «тиха деградація якості»: все «ок», але відповіді стали гіршими — змінився снапшот моделі або хтось правив промпт. Ці дві категорії не бачить жодна інфраструктурна метрика: щоб їх помітити, потрібні власний лог із версією промпта, перевірки якості та гейт, який не пускає регресію. Це рівно те, що ми будуємо шість тижнів. [Ведучому: веди курсором по рядках — це найдовший безкодовий відрізок, тримай динаміку.]</a:t>
+              <a:t/>
             </a:r>
             <a:endParaRPr lang="en-US" dirty="0"/>
           </a:p>
@@ -878,7 +878,7 @@
           <a:p>
             <a:r>
               <a:rPr lang="en-US" dirty="0"/>
-              <a:t>Переходимо від об'єкта керування до каркаса, в якому ви житимете шість тижнів. Одна команда docker compose up піднімає п'ять компонентів — і це ті самі ролі, які ви зустрінете в будь-якому проді, незалежно від інструментів. Шлях запиту: користувач пише в Chat UI, запит приходить у сервіс — це контур керування, де ухвалюються всі рішення. Сервіс звертається до gateway-адаптера — єдиного виходу до провайдерів, а той викликає модель; у нашому стеку це mock. Паралельно кожен запит лишає рядок лога в базі. Запам'ятайте цю стрічку — в лабораторній я попрошу вас відтворити її з пам'яті, а на співбесіді чи в проді ви впізнаєте ці самі ролі під іншими назвами.</a:t>
+              <a:t/>
             </a:r>
             <a:endParaRPr lang="en-US" dirty="0"/>
           </a:p>
@@ -966,7 +966,7 @@
           <a:p>
             <a:r>
               <a:rPr lang="en-US" dirty="0"/>
-              <a:t>Пройдімося по ролях. Chat UI з консоллю — обличчя системи: чат для користувача, панель для оператора. Ви ними користуєтесь, але не змінюєте. Сервіс — контур керування: усі рішення — яку модель, чи кеш, чи fallback, скільки коштувало. Тут уся ваша робота на шість тижнів. Gateway-адаптер — єдиний вихід до провайдерів: виконує виклик, згладжує їхні розбіжності, тримає ключі. Ви конфігуруєте список моделей. База — лог запитів, реєстр промптів, записи вартості: читаєте і розширюєте. І mock-провайдер — фейкова «модель» для розробки і CI, безкоштовна і керована: використовуєте для тестів і симуляції збоїв. Зверніть увагу на праву колонку: вона чесно ділить стек на те, що ви будуєте, і те, чим просто користуєтесь.</a:t>
+              <a:t/>
             </a:r>
             <a:endParaRPr lang="en-US" dirty="0"/>
           </a:p>
@@ -1054,7 +1054,7 @@
           <a:p>
             <a:r>
               <a:rPr lang="en-US" dirty="0"/>
-              <a:t>Головна межа архітектури проходить між двома словами: вирішує і виконує. Сервіс вирішує. Адаптер виконує. Уся цінність курсу живе на боці «вирішує» — тому ми й називаємо сервіс контуром керування, control plane. З практики великої агентної платформи, яку я супроводжую: там кредентіали провайдерів інжектяться в шарі інструментів під конкретного тенанта, а прикладний код їх не бачить взагалі — ні в конфізі, ні в змінних оточення свого процесу. Це те саме правило, доведене до продукту: чим менше шарів «знають» секрет, тим менше місць, звідки він може витекти в лог, у трейс або в чужий тенант. Звідси принцип: ключ провайдера живе тільки в gateway. Якщо секрет лежить у коді застосунку — контуру керування у вас ще немає, є розкидані виклики. Це найчастіша помилка на старті: ключ «тимчасово» кладуть у код, і він там лишається до першого витоку. І типова помилка з іншого боку: віддати рішення адаптеру. Він теж уміє і роутити, і фейлитись сам — через конфіг. Спокусливо, але тоді ви вчитеся клікати прапорці конкретного інструмента, а не будувати механізм. Рішення мають бути кодом, який ви розумієте, тестуєте і логуєте.</a:t>
+              <a:t/>
             </a:r>
             <a:endParaRPr lang="en-US" dirty="0"/>
           </a:p>
@@ -1142,7 +1142,7 @@
           <a:p>
             <a:r>
               <a:rPr lang="en-US" dirty="0"/>
-              <a:t>Кожен запит лишає в базі один рядок: request_id, model, prompt_version, latency_ms, prompt_tokens, completion_tokens, cost_usd, status. Текстів запиту і відповіді у рядку немає — і це навмисно, а не недоробка: чому їх не логують суцільно і як розслідувати «бот верзе дурниці» без них, детально розбере урок 9. Виглядає скромно. Але подивіться, що з цього рядка виростає — це буквально мапа курсу. Model — розподіл трафіку між моделями і доказ, що routing працює, тиждень 2. Prompt_version — розслідування «що зламалось учора о 19:40», уже наступний урок. Токени і cost_usd — облік вартості, бюджет, алерти, тиждень 2. Latency_ms і status — p95, error rate, сліди інцидентів, тижні 4–5. А весь рядок разом — метрики консолі й докази для гейтів якості, тижні 5–6. Сьогодні два поля порожні — prompt_version і cost_usd. Це не недоробка каркаса, це ваша робота на найближчі два тижні. З практики: на тій самій платформі одним із перших артефактів агентного рантайму став контракт метаданих виклику — окрема структура з моделлю, токенами, часом і статусом. Усе інше виросло поверх нього. Принцип: немає лога — немає операцій.</a:t>
+              <a:t/>
             </a:r>
             <a:endParaRPr lang="en-US" dirty="0"/>
           </a:p>
@@ -1230,7 +1230,7 @@
           <a:p>
             <a:r>
               <a:rPr lang="en-US" dirty="0"/>
-              <a:t>У стеку живе фейковий провайдер, сумісний за API зі справжніми: сервіс не відрізняє його від реального. У mock дві суперсили. Перша: він падає на замовлення. Напишіть у повідомленні маркер — і отримаєте керований інцидент. __fail_503 — провайдер лежить: на цьому будуємо fallback і деградацію на тижні 4. __fail_429 — вичерпані ліміти: розбираємо в уроці 7, чому спершу fallback, а retry — свідомо ні. __delay — стрибок latency: таймаути і p95. __garbage — беззмістовна відповідь: перевірки якості, ДЗ тижня 5. Надійність, яку тренують лише на реальних інцидентах, — це не інженерія, а сподівання. Mock робить кожен «інцидент» відтворюваним: у лабі, у ДЗ і в CI. Друга суперсила: mock реагує на промпт. Нормальні відповіді він віддає лише з правильним системним промптом; зіпсуєте промпт — відповіді стануть «не знаю». Навіщо так? Щоб регресію промпта можна було ловити автоматично: зламали — перевірки почервоніли. Ви побачите це наживо вже наступного уроку, а на тижні 5–6 цей механізм стане гейтом у CI. І чому це переноситься на прод: механіка контуру однакова для mock і реальної моделі — міняється лише «мозок» на іншому кінці дроту.</a:t>
+              <a:t/>
             </a:r>
             <a:endParaRPr lang="en-US" dirty="0"/>
           </a:p>
@@ -1318,7 +1318,7 @@
           <a:p>
             <a:r>
               <a:rPr lang="en-US" dirty="0"/>
-              <a:t>Це опційний блок — усе обов'язкове в курсі проходиться на mock, але дві можливості закладені з першого дня. Перша — реальний провайдер: скопіювати приклад env-файлу gateway, вписати ключ і підняти стек зі змінною MODEL. З реальним ключем зміниться справжня якість відповідей, багатоходовий діалог і цифри вартості; не зміниться — жоден механізм контуру. Радимо не вмикати це в перші тижні: на mock видно механіку, а не магію моделі. Друга — розширений профіль: advanced додає рівно один сервіс, Redis, — він знадобиться для semantic cache на тижні 3. Індустріальні дашборди, опційно на тижні 6, за бажання піднімете поруч самі: обов'язкова доріжка будує метрики всередині продукту, поверх власного лога. І лайфхак — перша операційна звичка курсу, ще до уроку про вартість: берете реальний ключ — одразу поставте ліміт витрат у кабінеті провайдера.</a:t>
+              <a:t/>
             </a:r>
             <a:endParaRPr lang="en-US" dirty="0"/>
           </a:p>
@@ -1406,7 +1406,7 @@
           <a:p>
             <a:r>
               <a:rPr lang="en-US" dirty="0"/>
-              <a:t>Перш ніж перейти до екрана — що саме ви зараз побачите і навіщо. Послідовність така: стек піднімається однією командою; чат відповідає на «Як скинути пароль?»; консоль оператора показує «—» у кожній плитці; у service/Program.cs знаходимо всі TODO(student) — мапу вашої роботи на шість тижнів; у таблиці requests з'являється рядок вашого запиту; і нарешті — чесний злам через __fail_503. Навіщо це все: зафіксувати точку А — стан системи до того, як ви почнете додавати шари керування. Порожня консоль і збій без плану Б — це не дефект демо, це і є предмет курсу. [Ведучому: перший запуск docker compose довгий — образи мають бути в кеші заздалегідь. Якщо перша відповідь у чаті — «Сервіс тимчасово недоступний», повторіть запит: gateway ще прогрівається після старту стека. До готовності gateway запити падають тихо — дочекайтеся health-ендпоінта або ~30 секунд після up.]</a:t>
+              <a:t/>
             </a:r>
             <a:endParaRPr lang="en-US" dirty="0"/>
           </a:p>
@@ -1494,7 +1494,7 @@
           <a:p>
             <a:r>
               <a:rPr lang="en-US" dirty="0"/>
-              <a:t>Домовимось про результат уроку — конкретними діями, а не «зрозуміти» чи «ознайомитись». Після сьогоднішнього заняття ви зможете: підняти стек капстоуна однією командою і оглянути обидві його половини — чат і консоль оператора; намалювати з пам'яті шлях запиту від UI через сервіс і адаптер до mock і лога; читати відповідь моделі як оператор — дивитися не лише на текст, а на finish_reason і usage; пояснити, чому temperature=0 не дає повторюваності і що з цього випливає для перевірки якості; назвати дві категорії відмов, яких HTTP-моніторинг не бачить у принципі; і знайти свій запит у таблиці requests, чесно відповівши, яких полів там бракує. Кожен пункт ви перевірите руками ще сьогодні — у лабораторній.</a:t>
+              <a:t/>
             </a:r>
             <a:endParaRPr lang="en-US" dirty="0"/>
           </a:p>
@@ -1582,7 +1582,7 @@
           <a:p>
             <a:r>
               <a:rPr lang="en-US" dirty="0"/>
-              <a:t>Крок перший: підняти стек. Docker compose up --build у корені проєкту; перший запуск довгий — тягне образи, далі швидко. Відкрити localhost:4200. Крок другий: оглянути обидві половини. Написати боту «Як скинути пароль?» — відповідь приходить. Якщо перша відповідь — «Сервіс тимчасово недоступний», повторіть: gateway ще прогрівається. Тепер консоль праворуч: «—» у кожній плитці. Запам'ятайте цю картинку — це точка А, з якою ви порівняєте себе на тижні 6. Крок третій: пройти шлях запиту в коді. Відкрити service/Program.cs і прочитати /chat згори вниз: звідки береться модель, як збирається запит до адаптера, куди пишеться лог. Знайти всі TODO(student, W#) — це мапа вашої роботи, підписана потижнево. Крок четвертий: знайти свій запит у лозі. Один раз на весь курс — команда повністю: docker compose exec postgres psql -U llmops -d llmops -c «SELECT * FROM requests ORDER BY created_at DESC LIMIT 5;» — далі в курсі SQL виконується так само. Знайти рядок свого повідомлення і чесно відповісти собі: які поля порожні і кому вони потрібні. Крок п'ятий: зламати. Написати в чат __fail_503. Бот скаже «сервіс недоступний» — жодного плану Б поки не існує. Це чесний стан системи до тижня 4. І опційний шостий: підняти профіль advanced, переконатися, що додався контейнер Redis, і погасити.</a:t>
+              <a:t/>
             </a:r>
             <a:endParaRPr lang="en-US" dirty="0"/>
           </a:p>
@@ -1670,7 +1670,7 @@
           <a:p>
             <a:r>
               <a:rPr lang="en-US" dirty="0"/>
-              <a:t>Зафіксуємо, що ми щойно побачили — і що це доводить. Перше: система жива і шлях запиту видно наскрізь — від чату через сервіс і адаптер до mock і рядка в базі. Ви можете намалювати його з пам'яті. Друге: консоль оператора показує «—» у кожній плитці, а в рядку лога порожні prompt_version і cost_usd. Це не недоробка каркаса — це ваша робота на найближчі два тижні. Курс влаштований так: лог з'являється першим, усе інше — надбудови над ним. Третє: на __fail_503 бот сказав «сервіс недоступний» — і все. Жодного плану Б: ні fallback, ні деградації, ні сліду в метриках. Це чесний стан системи до тижня 4. Разом ці три картинки — точка А вашого капстоуна. Точку Б ви збудуєте самі: реєстр промптів, маршрутизація, облік вартості, кеш, fallback, безпека, метрики, evals і CI-гейт — шар за шаром, тиждень за тижнем.</a:t>
+              <a:t/>
             </a:r>
             <a:endParaRPr lang="en-US" dirty="0"/>
           </a:p>
@@ -1758,7 +1758,7 @@
           <a:p>
             <a:r>
               <a:rPr lang="en-US" dirty="0"/>
-              <a:t>Перш ніж розійтися — чесна перевірка, без оцінок. Пройдіться по шести пунктах; де завагалися — туди і повертайтеся в матеріалі уроку. Стек піднявся, чат відповідає, консоль показує «—». Можете намалювати шлях запиту з пам'яті: UI, сервіс, адаптер, mock, лог. Бачили рядок свого запиту в requests і знаєте, яких полів бракує. Бачили, як система поводиться при збої провайдера — і чому це погано. Можете пояснити своїми словами, чому temperature=0 не дає повторюваності — і що з цього випливає для перевірки якості. І можете назвати дві категорії відмов, яких HTTP-моніторинг не бачить у принципі, і чому саме вони найдорожчі. Якщо всі шість пунктів — «так», ви готові до наступного уроку. Питання, які лишилися, — несіть у канал потоку або на Q&amp;A.</a:t>
+              <a:t/>
             </a:r>
             <a:endParaRPr lang="en-US" dirty="0"/>
           </a:p>
@@ -1846,7 +1846,7 @@
           <a:p>
             <a:r>
               <a:rPr lang="en-US" dirty="0"/>
-              <a:t>П'ять способів зіпсувати собі перший тиждень — усі перевірені чужими граблями. Ключ провайдера в коді застосунку: «потім перенесемо» — не перенесете; місце ключа визначається в перший день. Демо на одному запиті як доказ готовності: готовність — це відповіді на чотири питання з блока 01, а не один вдалий скріншот. «Логи подивимось, коли зламається»: коли зламається — дивитися буде нікуди; лог або є з першого дня, або його немає в потрібний момент. Почати з трьох провайдерів і оркестрації: спочатку один контур наскрізь — складність додається шарами, а не закладається наперед. І одразу взяти реальний ключ, «щоб по-справжньому»: на mock видно механіку, на реальній моделі перші тижні видно лише рахунок.</a:t>
+              <a:t/>
             </a:r>
             <a:endParaRPr lang="en-US" dirty="0"/>
           </a:p>
@@ -1934,7 +1934,7 @@
           <a:p>
             <a:r>
               <a:rPr lang="en-US" dirty="0"/>
-              <a:t>Обов'язково до наступного уроку — без здачі: пройти всі п'ять обов'язкових кроків лабораторної; витримати чек-лист «перевір себе»; і переглянути гайд для студента по діагоналі — щоб знати, де що шукати. Опційно: підняти розширений профіль стека і подивитися, що додається; якщо є свій ключ — поставити ліміт витрат у кабінеті провайдера, сам ключ поки не підключати. І про ДЗ тижня: воно здається після уроку 2. ДЗ тижня 1 — логування плюс prompt registry; тиждень здається одним PR у своєму репозиторії. Критерії приймання будуть у файлі ДЗ після наступного уроку.</a:t>
+              <a:t/>
             </a:r>
             <a:endParaRPr lang="en-US" dirty="0"/>
           </a:p>
@@ -2022,7 +2022,7 @@
           <a:p>
             <a:r>
               <a:rPr lang="en-US" dirty="0"/>
-              <a:t>Підсумуємо. 200 — це не «працює»: у production LLM-системи є чотири питання — гроші, надійність, якість, видимість, — і на них відповідає власний контур керування, а не HTTP-моніторинг. Контракт виклику один у всіх великих провайдерів: messages, три операційні параметри, finish_reason і usage. Перевіряти LLM-відповідь можна тільки за властивостями, а латентність читається лише разом із довжиною відповіді. В архітектурі сервіс вирішує, адаптер виконує, і ключ живе тільки в gateway. А unified log — це рядок, з якого виросте весь курс: сьогодні ви бачили його точку А. Наступний урок — prompt lifecycle. Сьогодні ваш системний промпт захардкоджений у коді, і це остання доба, коли це прийнятно. Розберемо, чому промпт — це production-артефакт з версіями, promote і rollback; що стається з якістю, коли «маленьку правку промпта» викочують без сліду; і як зробити відкат за секунди замість розкопок «а як там було вчора». До зустрічі.</a:t>
+              <a:t/>
             </a:r>
             <a:endParaRPr lang="en-US" dirty="0"/>
           </a:p>
@@ -2110,7 +2110,7 @@
           <a:p>
             <a:r>
               <a:rPr lang="en-US" dirty="0"/>
-              <a:t>Маршрут такий. Перша половина уроку — розтин об'єкта керування: чому 200 — це не «працює», контракт виклику, токени, недетермінізм із латентністю і таксономія відмов. Без цього фундаменту решта курсу перетворюється на набір рецептів. Друга половина — каркас капстоуна: архітектура з п'яти компонентів, unified log і mock-провайдер; окремим опційним блоком — реальний ключ. Потім лабораторна на п'ять кроків, антипатерни тижня і домашнє завдання. [Ведучому: блоки 01–05 — найдовший відрізок курсу без коду, ~10 хвилин на таблицях. На блоці токенів дай врізку живого екрана консолі з «—», на таксономії відмов веди курсором по рядках, інакше картинка «повисне».]</a:t>
+              <a:t/>
             </a:r>
             <a:endParaRPr lang="en-US" dirty="0"/>
           </a:p>
@@ -2198,7 +2198,7 @@
           <a:p>
             <a:r>
               <a:rPr lang="en-US" dirty="0"/>
-              <a:t>Перш ніж занурюватись, домовимось про шість слів, які сьогодні звучатимуть постійно. Токен — частинка тексту, якою модель міряє і вхід, і вихід; саме в токенах рахується рахунок, а не в запитах. Системний промпт — інструкція моделі, як поводитися; вона їде в кожному запиті і вже наступного уроку переїде в реєстр версій. finish_reason — поле відповіді, яке каже, чому модель зупинилася: сама завершила думку, вперлася в стелю довжини чи попросила інструмент. usage — блок із кількістю токенів входу й виходу, єдине джерело правди про гроші. Контур керування, англійською control plane, — це наш сервіс: шар, який ухвалює рішення, на відміну від шару, який виконує виклик. І mock-провайдер — фейкова модель, сумісна за API зі справжньою: вона вміє падати на замовлення і реагувати на промпт, тому весь курс проходиться без ключа. Якщо якесь із цих слів зараз незнайоме — нормально, кожне розберемо на місці; тут вони лише щоб не спотикатися.</a:t>
+              <a:t/>
             </a:r>
             <a:endParaRPr lang="en-US" dirty="0"/>
           </a:p>
@@ -2286,7 +2286,7 @@
           <a:p>
             <a:r>
               <a:rPr lang="en-US" dirty="0"/>
-              <a:t>Викликати модель — три рядки коду. Запит пішов, 200 повернувся, демо готове, всі задоволені. Саме тому LLM-прототипи народжуються за день — і саме тому більшість із них ніколи не доживає до проду. Ось чотири питання, на які ті три рядки не відповідають. Гроші: скільки ця фіча коштує на тиждень, на якій задачі бюджет згорає дарма, і хто це помітить — сьогодні чи в рахунку наприкінці місяця? Надійність: що станеться, коли провайдер ляже на 20 хвилин у робочий час, а коли поверне ліміт запитів у пік трафіку? Якість: хто помітить, що відповіді стали гіршими після «маленької» правки промпта? Промпт не проходить компіляцію — це «просто текст», який тихо змінює поведінку системи. І видимість: куди дивитися, коли користувач каже «бот верзе дурниці», а всі графіки зелені? Кожен тиждень курсу закриває одне з цих питань — механізмом, а не порадою.</a:t>
+              <a:t/>
             </a:r>
             <a:endParaRPr lang="en-US" dirty="0"/>
           </a:p>
@@ -2374,7 +2374,7 @@
           <a:p>
             <a:r>
               <a:rPr lang="en-US" dirty="0"/>
-              <a:t>LLM-система може бути «здоровою» за всіма HTTP-метриками — і при цьому брехати користувачам, палити бюджет і деградувати тижнями. Причина — у чотирьох властивостях, яких немає у звичайних сервісів. Недетермінізм: той самий вхід — різний вихід. Оплата за токен: вартість залежить від поведінки, а не від кількості запитів. Регресії без коміта: поведінку змінює правка промпта або оновлення моделі провайдером — жодного деплою. І чужа інфраструктура: ваш uptime залежить від чужого. Звідси теза курсу: LLMOps — не про те, як покликати модель. Це про те, як експлуатувати її як production-сервіс — керувати вартістю, надійністю, якістю і видимістю. І одразу про навантаження, щоб ви планували сили: читання в курсі рівне — кожен тиждень приблизно 45–49 хвилин. А от кодове навантаження нерівне: ДЗ тижня 1 — близько 60 рядків C# з нуля, ДЗ тижня 2 — переважно готовий код з уроку, а пік припадає на тиждень 4, де в одному PR збираються fallback і human-in-the-loop.</a:t>
+              <a:t/>
             </a:r>
             <a:endParaRPr lang="en-US" dirty="0"/>
           </a:p>
@@ -2462,7 +2462,7 @@
           <a:p>
             <a:r>
               <a:rPr lang="en-US" dirty="0"/>
-              <a:t>Перед тим як керувати, треба знати, чим саме керуємо. Виклик моделі — це звичайний HTTP POST з JSON, і в цьому JSON немає магії: є контракт, однаковий у всіх великих провайдерів. Кожен наступний урок додає рішення саме в цей контракт. Головне поле — messages: масив реплік, у кожної роль. System — інструкція, як поводитися: це і є той промпт, який наступного уроку переїде в реєстр. User — те, що написав користувач. Assistant — попередні відповіді моделі, якщо ведете діалог. Важливо: модель не має пам'яті. Історію щоразу привозите ви — і саме тому довгий діалог дорожчає лінійно. З параметрів для операцій важливі три. Temperature і top_p — наскільки «вільно» модель обирає наступний токен: вище — різноманітніше і менш передбачувано, для підтримки зазвичай тримають низьким. Max_tokens — стеля довжини відповіді, тобто стеля вартості одного виклику і найчастіша причина обрізаних відповідей. Response_format — вимога віддати строгий JSON за схемою: перетворює «розпарсимо як вийде» на контракт, який валідує провайдер.</a:t>
+              <a:t/>
             </a:r>
             <a:endParaRPr lang="en-US" dirty="0"/>
           </a:p>
@@ -2550,7 +2550,7 @@
           <a:p>
             <a:r>
               <a:rPr lang="en-US" dirty="0"/>
-              <a:t>Два поля вирішують долю вашої відповіді. Перше — сам текст: choices нуль, message, content. Друге, яке пропускають майже всі, — finish_reason: чому модель зупинилася. Stop — модель сама завершила думку, нормальний випадок. Length — вдарилася в max_tokens, відповідь обрізана: це помилка, а не відповідь — логувати, не кешувати, не показувати як є. Tool_calls — модель просить викликати інструмент, про це урок 6; текст може бути порожнім, і це не збій. Content_filter — відповідь зрізав фільтр провайдера: окрема категорія в метриках, не «помилка сервера». Типова помилка — читати лише content. Тоді обрізана на півслові відповідь виглядає цілком успішною: HTTP 200, текст є, метрики зелені. Користувач бачить фразу, що обривається, а ви — «модель почала дурити». Я витратив на такий випадок пів дня, поки не поставив у лог одне поле. Наш mock віддає лише stop і tool_calls — гілку length наш контур відтворити не може, тому її обробку перевіряють юніт-тестом; це опційна частина ДЗ тижня 1. І третє поле, потрібне весь курс, — usage: скільки токенів пішло на вхід, на вихід і скільки обслужив кеш провайдера.</a:t>
+              <a:t/>
             </a:r>
             <a:endParaRPr lang="en-US" dirty="0"/>
           </a:p>
@@ -2638,7 +2638,7 @@
           <a:p>
             <a:r>
               <a:rPr lang="en-US" dirty="0"/>
-              <a:t>Модель не бачить ні символів, ні слів — вона бачить токени, частинки тексту від токенізатора. Для англійської один токен — приблизно чотири символи, десь три чверті слова. Для української відчутно гірше: кирилиця гірше представлена у словниках токенізаторів, і слово легко розпадається на кілька токенів. Наслідок, який варто перевірити руками на власному тексті: той самий зміст українською коштує дорожче і швидше вибиває контекстне вікно. Це вже операційне рішення — якою мовою тримати системний промпт, що їде в кожному запиті. Друге: токени тарифікуються не однаково. Вхідні — ваш промпт та історія — найдешевші. Вихідні, які модель згенерувала, — типово в кілька разів дорожчі, бо генерація послідовна. А стабільний початок промпта, який провайдер уже бачив, може обслужитися з його кешу за різко нижчою ставкою. Три різні ціни в одному виклику. Звідси принцип: вартість LLM-фічі не виводиться з кількості запитів. Два запити «по тому самому прайсу» відрізняються в десятки разів, якщо один просив рядок відповіді, а другий тягнув історію на десять реплік і згенерував три абзаци. Тому в лозі вхідні й вихідні токени стоять окремо: без них будь-яка цифра вартості — вигадка.</a:t>
+              <a:t/>
             </a:r>
             <a:endParaRPr lang="en-US" dirty="0"/>
           </a:p>
@@ -3950,7 +3950,7 @@
       </p:pic>
       <p:sp>
         <p:nvSpPr>
-          <p:cNvPr id="8" name="Shape 4"/>
+          <p:cNvPr id="7" name="Shape 4"/>
           <p:cNvSpPr/>
           <p:nvPr/>
         </p:nvSpPr>
@@ -3977,7 +3977,7 @@
       </p:sp>
       <p:sp>
         <p:nvSpPr>
-          <p:cNvPr id="9" name="Shape 5"/>
+          <p:cNvPr id="8" name="Shape 5"/>
           <p:cNvSpPr/>
           <p:nvPr/>
         </p:nvSpPr>
@@ -3997,7 +3997,7 @@
       </p:sp>
       <p:sp>
         <p:nvSpPr>
-          <p:cNvPr id="10" name="Text 6"/>
+          <p:cNvPr id="9" name="Text 6"/>
           <p:cNvSpPr/>
           <p:nvPr/>
         </p:nvSpPr>
@@ -4036,7 +4036,7 @@
       </p:sp>
       <p:sp>
         <p:nvSpPr>
-          <p:cNvPr id="11" name="Text 7"/>
+          <p:cNvPr id="10" name="Text 7"/>
           <p:cNvSpPr/>
           <p:nvPr/>
         </p:nvSpPr>
@@ -4075,7 +4075,7 @@
       </p:sp>
       <p:sp>
         <p:nvSpPr>
-          <p:cNvPr id="12" name="Text 8"/>
+          <p:cNvPr id="11" name="Text 8"/>
           <p:cNvSpPr/>
           <p:nvPr/>
         </p:nvSpPr>
@@ -4117,7 +4117,7 @@
       </p:sp>
       <p:sp>
         <p:nvSpPr>
-          <p:cNvPr id="13" name="Shape 9"/>
+          <p:cNvPr id="12" name="Shape 9"/>
           <p:cNvSpPr/>
           <p:nvPr/>
         </p:nvSpPr>
@@ -4144,7 +4144,7 @@
       </p:sp>
       <p:sp>
         <p:nvSpPr>
-          <p:cNvPr id="14" name="Shape 10"/>
+          <p:cNvPr id="13" name="Shape 10"/>
           <p:cNvSpPr/>
           <p:nvPr/>
         </p:nvSpPr>
@@ -4164,7 +4164,7 @@
       </p:sp>
       <p:sp>
         <p:nvSpPr>
-          <p:cNvPr id="15" name="Text 11"/>
+          <p:cNvPr id="14" name="Text 11"/>
           <p:cNvSpPr/>
           <p:nvPr/>
         </p:nvSpPr>
@@ -4203,7 +4203,7 @@
       </p:sp>
       <p:sp>
         <p:nvSpPr>
-          <p:cNvPr id="16" name="Text 12"/>
+          <p:cNvPr id="15" name="Text 12"/>
           <p:cNvSpPr/>
           <p:nvPr/>
         </p:nvSpPr>
@@ -4242,7 +4242,7 @@
       </p:sp>
       <p:sp>
         <p:nvSpPr>
-          <p:cNvPr id="17" name="Text 13"/>
+          <p:cNvPr id="16" name="Text 13"/>
           <p:cNvSpPr/>
           <p:nvPr/>
         </p:nvSpPr>
@@ -4284,7 +4284,7 @@
       </p:sp>
       <p:sp>
         <p:nvSpPr>
-          <p:cNvPr id="18" name="Shape 14"/>
+          <p:cNvPr id="17" name="Shape 14"/>
           <p:cNvSpPr/>
           <p:nvPr/>
         </p:nvSpPr>
@@ -4311,7 +4311,7 @@
       </p:sp>
       <p:sp>
         <p:nvSpPr>
-          <p:cNvPr id="19" name="Shape 15"/>
+          <p:cNvPr id="18" name="Shape 15"/>
           <p:cNvSpPr/>
           <p:nvPr/>
         </p:nvSpPr>
@@ -4331,7 +4331,7 @@
       </p:sp>
       <p:sp>
         <p:nvSpPr>
-          <p:cNvPr id="20" name="Text 16"/>
+          <p:cNvPr id="19" name="Text 16"/>
           <p:cNvSpPr/>
           <p:nvPr/>
         </p:nvSpPr>
@@ -4370,7 +4370,7 @@
       </p:sp>
       <p:sp>
         <p:nvSpPr>
-          <p:cNvPr id="21" name="Text 17"/>
+          <p:cNvPr id="20" name="Text 17"/>
           <p:cNvSpPr/>
           <p:nvPr/>
         </p:nvSpPr>
@@ -4409,7 +4409,7 @@
       </p:sp>
       <p:sp>
         <p:nvSpPr>
-          <p:cNvPr id="22" name="Text 18"/>
+          <p:cNvPr id="21" name="Text 18"/>
           <p:cNvSpPr/>
           <p:nvPr/>
         </p:nvSpPr>
@@ -4451,7 +4451,7 @@
       </p:sp>
       <p:sp>
         <p:nvSpPr>
-          <p:cNvPr id="23" name="Shape 19"/>
+          <p:cNvPr id="22" name="Shape 19"/>
           <p:cNvSpPr/>
           <p:nvPr/>
         </p:nvSpPr>
@@ -4473,7 +4473,7 @@
       </p:sp>
       <p:sp>
         <p:nvSpPr>
-          <p:cNvPr id="24" name="Text 20"/>
+          <p:cNvPr id="23" name="Text 20"/>
           <p:cNvSpPr/>
           <p:nvPr/>
         </p:nvSpPr>
@@ -4512,7 +4512,7 @@
       </p:sp>
       <p:sp>
         <p:nvSpPr>
-          <p:cNvPr id="25" name="Shape 21"/>
+          <p:cNvPr id="24" name="Shape 21"/>
           <p:cNvSpPr/>
           <p:nvPr/>
         </p:nvSpPr>
@@ -4535,7 +4535,7 @@
       </p:sp>
       <p:sp>
         <p:nvSpPr>
-          <p:cNvPr id="26" name="Shape 22"/>
+          <p:cNvPr id="25" name="Shape 22"/>
           <p:cNvSpPr/>
           <p:nvPr/>
         </p:nvSpPr>
@@ -4555,7 +4555,7 @@
       </p:sp>
       <p:sp>
         <p:nvSpPr>
-          <p:cNvPr id="27" name="Shape 23"/>
+          <p:cNvPr id="26" name="Shape 23"/>
           <p:cNvSpPr/>
           <p:nvPr/>
         </p:nvSpPr>
@@ -4582,7 +4582,7 @@
       </p:sp>
       <p:sp>
         <p:nvSpPr>
-          <p:cNvPr id="28" name="Text 24"/>
+          <p:cNvPr id="27" name="Text 24"/>
           <p:cNvSpPr/>
           <p:nvPr/>
         </p:nvSpPr>
@@ -4621,7 +4621,7 @@
       </p:sp>
       <p:sp>
         <p:nvSpPr>
-          <p:cNvPr id="29" name="Shape 25"/>
+          <p:cNvPr id="28" name="Shape 25"/>
           <p:cNvSpPr/>
           <p:nvPr/>
         </p:nvSpPr>
@@ -4644,7 +4644,7 @@
       </p:sp>
       <p:sp>
         <p:nvSpPr>
-          <p:cNvPr id="30" name="Shape 26"/>
+          <p:cNvPr id="29" name="Shape 26"/>
           <p:cNvSpPr/>
           <p:nvPr/>
         </p:nvSpPr>
@@ -4664,7 +4664,7 @@
       </p:sp>
       <p:sp>
         <p:nvSpPr>
-          <p:cNvPr id="31" name="Shape 27"/>
+          <p:cNvPr id="30" name="Shape 27"/>
           <p:cNvSpPr/>
           <p:nvPr/>
         </p:nvSpPr>
@@ -4686,7 +4686,7 @@
       </p:sp>
       <p:sp>
         <p:nvSpPr>
-          <p:cNvPr id="32" name="Text 28"/>
+          <p:cNvPr id="31" name="Text 28"/>
           <p:cNvSpPr/>
           <p:nvPr/>
         </p:nvSpPr>
@@ -4725,7 +4725,7 @@
       </p:sp>
       <p:sp>
         <p:nvSpPr>
-          <p:cNvPr id="33" name="Shape 29"/>
+          <p:cNvPr id="32" name="Shape 29"/>
           <p:cNvSpPr/>
           <p:nvPr/>
         </p:nvSpPr>
@@ -4747,7 +4747,7 @@
       </p:sp>
       <p:sp>
         <p:nvSpPr>
-          <p:cNvPr id="34" name="Text 30"/>
+          <p:cNvPr id="33" name="Text 30"/>
           <p:cNvSpPr/>
           <p:nvPr/>
         </p:nvSpPr>
@@ -4786,7 +4786,7 @@
       </p:sp>
       <p:sp>
         <p:nvSpPr>
-          <p:cNvPr id="35" name="Text 31"/>
+          <p:cNvPr id="34" name="Text 31"/>
           <p:cNvSpPr/>
           <p:nvPr/>
         </p:nvSpPr>
@@ -5071,7 +5071,7 @@
       </p:pic>
       <p:sp>
         <p:nvSpPr>
-          <p:cNvPr id="8" name="Text 4"/>
+          <p:cNvPr id="7" name="Text 4"/>
           <p:cNvSpPr/>
           <p:nvPr/>
         </p:nvSpPr>
@@ -5110,7 +5110,7 @@
       </p:sp>
       <p:sp>
         <p:nvSpPr>
-          <p:cNvPr id="9" name="Shape 5"/>
+          <p:cNvPr id="8" name="Shape 5"/>
           <p:cNvSpPr/>
           <p:nvPr/>
         </p:nvSpPr>
@@ -5132,7 +5132,7 @@
       </p:sp>
       <p:sp>
         <p:nvSpPr>
-          <p:cNvPr id="10" name="Text 6"/>
+          <p:cNvPr id="9" name="Text 6"/>
           <p:cNvSpPr/>
           <p:nvPr/>
         </p:nvSpPr>
@@ -5171,7 +5171,7 @@
       </p:sp>
       <p:sp>
         <p:nvSpPr>
-          <p:cNvPr id="11" name="Shape 7"/>
+          <p:cNvPr id="10" name="Shape 7"/>
           <p:cNvSpPr/>
           <p:nvPr/>
         </p:nvSpPr>
@@ -5193,7 +5193,7 @@
       </p:sp>
       <p:sp>
         <p:nvSpPr>
-          <p:cNvPr id="12" name="Text 8"/>
+          <p:cNvPr id="11" name="Text 8"/>
           <p:cNvSpPr/>
           <p:nvPr/>
         </p:nvSpPr>
@@ -5232,7 +5232,7 @@
       </p:sp>
       <p:sp>
         <p:nvSpPr>
-          <p:cNvPr id="13" name="Text 9"/>
+          <p:cNvPr id="12" name="Text 9"/>
           <p:cNvSpPr/>
           <p:nvPr/>
         </p:nvSpPr>
@@ -5271,7 +5271,7 @@
       </p:sp>
       <p:sp>
         <p:nvSpPr>
-          <p:cNvPr id="14" name="Shape 10"/>
+          <p:cNvPr id="13" name="Shape 10"/>
           <p:cNvSpPr/>
           <p:nvPr/>
         </p:nvSpPr>
@@ -5293,7 +5293,7 @@
       </p:sp>
       <p:sp>
         <p:nvSpPr>
-          <p:cNvPr id="15" name="Text 11"/>
+          <p:cNvPr id="14" name="Text 11"/>
           <p:cNvSpPr/>
           <p:nvPr/>
         </p:nvSpPr>
@@ -5332,7 +5332,7 @@
       </p:sp>
       <p:sp>
         <p:nvSpPr>
-          <p:cNvPr id="16" name="Shape 12"/>
+          <p:cNvPr id="15" name="Shape 12"/>
           <p:cNvSpPr/>
           <p:nvPr/>
         </p:nvSpPr>
@@ -5354,7 +5354,7 @@
       </p:sp>
       <p:sp>
         <p:nvSpPr>
-          <p:cNvPr id="17" name="Text 13"/>
+          <p:cNvPr id="16" name="Text 13"/>
           <p:cNvSpPr/>
           <p:nvPr/>
         </p:nvSpPr>
@@ -5393,7 +5393,7 @@
       </p:sp>
       <p:sp>
         <p:nvSpPr>
-          <p:cNvPr id="18" name="Text 14"/>
+          <p:cNvPr id="17" name="Text 14"/>
           <p:cNvSpPr/>
           <p:nvPr/>
         </p:nvSpPr>
@@ -5432,7 +5432,7 @@
       </p:sp>
       <p:sp>
         <p:nvSpPr>
-          <p:cNvPr id="19" name="Shape 15"/>
+          <p:cNvPr id="18" name="Shape 15"/>
           <p:cNvSpPr/>
           <p:nvPr/>
         </p:nvSpPr>
@@ -5454,7 +5454,7 @@
       </p:sp>
       <p:sp>
         <p:nvSpPr>
-          <p:cNvPr id="20" name="Text 16"/>
+          <p:cNvPr id="19" name="Text 16"/>
           <p:cNvSpPr/>
           <p:nvPr/>
         </p:nvSpPr>
@@ -5493,7 +5493,7 @@
       </p:sp>
       <p:sp>
         <p:nvSpPr>
-          <p:cNvPr id="21" name="Text 17"/>
+          <p:cNvPr id="20" name="Text 17"/>
           <p:cNvSpPr/>
           <p:nvPr/>
         </p:nvSpPr>
@@ -5535,7 +5535,7 @@
       </p:sp>
       <p:sp>
         <p:nvSpPr>
-          <p:cNvPr id="22" name="Text 18"/>
+          <p:cNvPr id="21" name="Text 18"/>
           <p:cNvSpPr/>
           <p:nvPr/>
         </p:nvSpPr>
@@ -5831,7 +5831,7 @@
       </p:pic>
       <p:sp>
         <p:nvSpPr>
-          <p:cNvPr id="8" name="Shape 4"/>
+          <p:cNvPr id="7" name="Shape 4"/>
           <p:cNvSpPr/>
           <p:nvPr/>
         </p:nvSpPr>
@@ -5853,7 +5853,7 @@
       </p:sp>
       <p:sp>
         <p:nvSpPr>
-          <p:cNvPr id="9" name="Text 5"/>
+          <p:cNvPr id="8" name="Text 5"/>
           <p:cNvSpPr/>
           <p:nvPr/>
         </p:nvSpPr>
@@ -5892,7 +5892,7 @@
       </p:sp>
       <p:sp>
         <p:nvSpPr>
-          <p:cNvPr id="10" name="Shape 6"/>
+          <p:cNvPr id="9" name="Shape 6"/>
           <p:cNvSpPr/>
           <p:nvPr/>
         </p:nvSpPr>
@@ -5914,7 +5914,7 @@
       </p:sp>
       <p:sp>
         <p:nvSpPr>
-          <p:cNvPr id="11" name="Text 7"/>
+          <p:cNvPr id="10" name="Text 7"/>
           <p:cNvSpPr/>
           <p:nvPr/>
         </p:nvSpPr>
@@ -5953,7 +5953,7 @@
       </p:sp>
       <p:sp>
         <p:nvSpPr>
-          <p:cNvPr id="12" name="Text 8"/>
+          <p:cNvPr id="11" name="Text 8"/>
           <p:cNvSpPr/>
           <p:nvPr/>
         </p:nvSpPr>
@@ -5992,7 +5992,7 @@
       </p:sp>
       <p:sp>
         <p:nvSpPr>
-          <p:cNvPr id="13" name="Shape 9"/>
+          <p:cNvPr id="12" name="Shape 9"/>
           <p:cNvSpPr/>
           <p:nvPr/>
         </p:nvSpPr>
@@ -6014,7 +6014,7 @@
       </p:sp>
       <p:sp>
         <p:nvSpPr>
-          <p:cNvPr id="14" name="Text 10"/>
+          <p:cNvPr id="13" name="Text 10"/>
           <p:cNvSpPr/>
           <p:nvPr/>
         </p:nvSpPr>
@@ -6053,7 +6053,7 @@
       </p:sp>
       <p:sp>
         <p:nvSpPr>
-          <p:cNvPr id="15" name="Text 11"/>
+          <p:cNvPr id="14" name="Text 11"/>
           <p:cNvSpPr/>
           <p:nvPr/>
         </p:nvSpPr>
@@ -6092,7 +6092,7 @@
       </p:sp>
       <p:sp>
         <p:nvSpPr>
-          <p:cNvPr id="16" name="Shape 12"/>
+          <p:cNvPr id="15" name="Shape 12"/>
           <p:cNvSpPr/>
           <p:nvPr/>
         </p:nvSpPr>
@@ -6114,7 +6114,7 @@
       </p:sp>
       <p:sp>
         <p:nvSpPr>
-          <p:cNvPr id="17" name="Text 13"/>
+          <p:cNvPr id="16" name="Text 13"/>
           <p:cNvSpPr/>
           <p:nvPr/>
         </p:nvSpPr>
@@ -6153,7 +6153,7 @@
       </p:sp>
       <p:sp>
         <p:nvSpPr>
-          <p:cNvPr id="18" name="Text 14"/>
+          <p:cNvPr id="17" name="Text 14"/>
           <p:cNvSpPr/>
           <p:nvPr/>
         </p:nvSpPr>
@@ -6192,7 +6192,7 @@
       </p:sp>
       <p:sp>
         <p:nvSpPr>
-          <p:cNvPr id="19" name="Shape 15"/>
+          <p:cNvPr id="18" name="Shape 15"/>
           <p:cNvSpPr/>
           <p:nvPr/>
         </p:nvSpPr>
@@ -6214,7 +6214,7 @@
       </p:sp>
       <p:sp>
         <p:nvSpPr>
-          <p:cNvPr id="20" name="Text 16"/>
+          <p:cNvPr id="19" name="Text 16"/>
           <p:cNvSpPr/>
           <p:nvPr/>
         </p:nvSpPr>
@@ -6253,7 +6253,7 @@
       </p:sp>
       <p:sp>
         <p:nvSpPr>
-          <p:cNvPr id="21" name="Shape 17"/>
+          <p:cNvPr id="20" name="Shape 17"/>
           <p:cNvSpPr/>
           <p:nvPr/>
         </p:nvSpPr>
@@ -6275,7 +6275,7 @@
       </p:sp>
       <p:sp>
         <p:nvSpPr>
-          <p:cNvPr id="22" name="Text 18"/>
+          <p:cNvPr id="21" name="Text 18"/>
           <p:cNvSpPr/>
           <p:nvPr/>
         </p:nvSpPr>
@@ -6314,7 +6314,7 @@
       </p:sp>
       <p:sp>
         <p:nvSpPr>
-          <p:cNvPr id="23" name="Text 19"/>
+          <p:cNvPr id="22" name="Text 19"/>
           <p:cNvSpPr/>
           <p:nvPr/>
         </p:nvSpPr>
@@ -6353,7 +6353,7 @@
       </p:sp>
       <p:sp>
         <p:nvSpPr>
-          <p:cNvPr id="24" name="Shape 20"/>
+          <p:cNvPr id="23" name="Shape 20"/>
           <p:cNvSpPr/>
           <p:nvPr/>
         </p:nvSpPr>
@@ -6375,7 +6375,7 @@
       </p:sp>
       <p:sp>
         <p:nvSpPr>
-          <p:cNvPr id="25" name="Text 21"/>
+          <p:cNvPr id="24" name="Text 21"/>
           <p:cNvSpPr/>
           <p:nvPr/>
         </p:nvSpPr>
@@ -6414,7 +6414,7 @@
       </p:sp>
       <p:sp>
         <p:nvSpPr>
-          <p:cNvPr id="26" name="Text 22"/>
+          <p:cNvPr id="25" name="Text 22"/>
           <p:cNvSpPr/>
           <p:nvPr/>
         </p:nvSpPr>
@@ -6453,7 +6453,7 @@
       </p:sp>
       <p:sp>
         <p:nvSpPr>
-          <p:cNvPr id="27" name="Shape 23"/>
+          <p:cNvPr id="26" name="Shape 23"/>
           <p:cNvSpPr/>
           <p:nvPr/>
         </p:nvSpPr>
@@ -6480,7 +6480,7 @@
       </p:sp>
       <p:sp>
         <p:nvSpPr>
-          <p:cNvPr id="28" name="Text 24"/>
+          <p:cNvPr id="27" name="Text 24"/>
           <p:cNvSpPr/>
           <p:nvPr/>
         </p:nvSpPr>
@@ -6765,7 +6765,7 @@
       </p:pic>
       <p:sp>
         <p:nvSpPr>
-          <p:cNvPr id="8" name="Shape 4"/>
+          <p:cNvPr id="7" name="Shape 4"/>
           <p:cNvSpPr/>
           <p:nvPr/>
         </p:nvSpPr>
@@ -6792,7 +6792,7 @@
       </p:sp>
       <p:sp>
         <p:nvSpPr>
-          <p:cNvPr id="9" name="Text 5"/>
+          <p:cNvPr id="8" name="Text 5"/>
           <p:cNvSpPr/>
           <p:nvPr/>
         </p:nvSpPr>
@@ -6831,7 +6831,7 @@
       </p:sp>
       <p:sp>
         <p:nvSpPr>
-          <p:cNvPr id="10" name="Shape 6"/>
+          <p:cNvPr id="9" name="Shape 6"/>
           <p:cNvSpPr/>
           <p:nvPr/>
         </p:nvSpPr>
@@ -6854,7 +6854,7 @@
       </p:sp>
       <p:sp>
         <p:nvSpPr>
-          <p:cNvPr id="11" name="Shape 7"/>
+          <p:cNvPr id="10" name="Shape 7"/>
           <p:cNvSpPr/>
           <p:nvPr/>
         </p:nvSpPr>
@@ -6874,7 +6874,7 @@
       </p:sp>
       <p:sp>
         <p:nvSpPr>
-          <p:cNvPr id="12" name="Shape 8"/>
+          <p:cNvPr id="11" name="Shape 8"/>
           <p:cNvSpPr/>
           <p:nvPr/>
         </p:nvSpPr>
@@ -6901,7 +6901,7 @@
       </p:sp>
       <p:sp>
         <p:nvSpPr>
-          <p:cNvPr id="13" name="Text 9"/>
+          <p:cNvPr id="12" name="Text 9"/>
           <p:cNvSpPr/>
           <p:nvPr/>
         </p:nvSpPr>
@@ -6940,7 +6940,7 @@
       </p:sp>
       <p:sp>
         <p:nvSpPr>
-          <p:cNvPr id="14" name="Shape 10"/>
+          <p:cNvPr id="13" name="Shape 10"/>
           <p:cNvSpPr/>
           <p:nvPr/>
         </p:nvSpPr>
@@ -6963,7 +6963,7 @@
       </p:sp>
       <p:sp>
         <p:nvSpPr>
-          <p:cNvPr id="15" name="Shape 11"/>
+          <p:cNvPr id="14" name="Shape 11"/>
           <p:cNvSpPr/>
           <p:nvPr/>
         </p:nvSpPr>
@@ -6983,7 +6983,7 @@
       </p:sp>
       <p:sp>
         <p:nvSpPr>
-          <p:cNvPr id="16" name="Shape 12"/>
+          <p:cNvPr id="15" name="Shape 12"/>
           <p:cNvSpPr/>
           <p:nvPr/>
         </p:nvSpPr>
@@ -7005,7 +7005,7 @@
       </p:sp>
       <p:sp>
         <p:nvSpPr>
-          <p:cNvPr id="17" name="Text 13"/>
+          <p:cNvPr id="16" name="Text 13"/>
           <p:cNvSpPr/>
           <p:nvPr/>
         </p:nvSpPr>
@@ -7044,7 +7044,7 @@
       </p:sp>
       <p:sp>
         <p:nvSpPr>
-          <p:cNvPr id="18" name="Shape 14"/>
+          <p:cNvPr id="17" name="Shape 14"/>
           <p:cNvSpPr/>
           <p:nvPr/>
         </p:nvSpPr>
@@ -7067,7 +7067,7 @@
       </p:sp>
       <p:sp>
         <p:nvSpPr>
-          <p:cNvPr id="19" name="Shape 15"/>
+          <p:cNvPr id="18" name="Shape 15"/>
           <p:cNvSpPr/>
           <p:nvPr/>
         </p:nvSpPr>
@@ -7087,7 +7087,7 @@
       </p:sp>
       <p:sp>
         <p:nvSpPr>
-          <p:cNvPr id="20" name="Shape 16"/>
+          <p:cNvPr id="19" name="Shape 16"/>
           <p:cNvSpPr/>
           <p:nvPr/>
         </p:nvSpPr>
@@ -7114,7 +7114,7 @@
       </p:sp>
       <p:sp>
         <p:nvSpPr>
-          <p:cNvPr id="21" name="Text 17"/>
+          <p:cNvPr id="20" name="Text 17"/>
           <p:cNvSpPr/>
           <p:nvPr/>
         </p:nvSpPr>
@@ -7153,7 +7153,7 @@
       </p:sp>
       <p:sp>
         <p:nvSpPr>
-          <p:cNvPr id="22" name="Shape 18"/>
+          <p:cNvPr id="21" name="Shape 18"/>
           <p:cNvSpPr/>
           <p:nvPr/>
         </p:nvSpPr>
@@ -7176,7 +7176,7 @@
       </p:sp>
       <p:sp>
         <p:nvSpPr>
-          <p:cNvPr id="23" name="Shape 19"/>
+          <p:cNvPr id="22" name="Shape 19"/>
           <p:cNvSpPr/>
           <p:nvPr/>
         </p:nvSpPr>
@@ -7196,7 +7196,7 @@
       </p:sp>
       <p:sp>
         <p:nvSpPr>
-          <p:cNvPr id="24" name="Shape 20"/>
+          <p:cNvPr id="23" name="Shape 20"/>
           <p:cNvSpPr/>
           <p:nvPr/>
         </p:nvSpPr>
@@ -7223,7 +7223,7 @@
       </p:sp>
       <p:sp>
         <p:nvSpPr>
-          <p:cNvPr id="25" name="Text 21"/>
+          <p:cNvPr id="24" name="Text 21"/>
           <p:cNvSpPr/>
           <p:nvPr/>
         </p:nvSpPr>
@@ -7262,7 +7262,7 @@
       </p:sp>
       <p:sp>
         <p:nvSpPr>
-          <p:cNvPr id="26" name="Shape 22"/>
+          <p:cNvPr id="25" name="Shape 22"/>
           <p:cNvSpPr/>
           <p:nvPr/>
         </p:nvSpPr>
@@ -7285,7 +7285,7 @@
       </p:sp>
       <p:sp>
         <p:nvSpPr>
-          <p:cNvPr id="27" name="Shape 23"/>
+          <p:cNvPr id="26" name="Shape 23"/>
           <p:cNvSpPr/>
           <p:nvPr/>
         </p:nvSpPr>
@@ -7305,7 +7305,7 @@
       </p:sp>
       <p:sp>
         <p:nvSpPr>
-          <p:cNvPr id="28" name="Shape 24"/>
+          <p:cNvPr id="27" name="Shape 24"/>
           <p:cNvSpPr/>
           <p:nvPr/>
         </p:nvSpPr>
@@ -7327,7 +7327,7 @@
       </p:sp>
       <p:sp>
         <p:nvSpPr>
-          <p:cNvPr id="29" name="Text 25"/>
+          <p:cNvPr id="28" name="Text 25"/>
           <p:cNvSpPr/>
           <p:nvPr/>
         </p:nvSpPr>
@@ -7366,7 +7366,7 @@
       </p:sp>
       <p:sp>
         <p:nvSpPr>
-          <p:cNvPr id="30" name="Shape 26"/>
+          <p:cNvPr id="29" name="Shape 26"/>
           <p:cNvSpPr/>
           <p:nvPr/>
         </p:nvSpPr>
@@ -7393,7 +7393,7 @@
       </p:sp>
       <p:sp>
         <p:nvSpPr>
-          <p:cNvPr id="31" name="Text 27"/>
+          <p:cNvPr id="30" name="Text 27"/>
           <p:cNvSpPr/>
           <p:nvPr/>
         </p:nvSpPr>
@@ -7452,7 +7452,7 @@
       </p:sp>
       <p:sp>
         <p:nvSpPr>
-          <p:cNvPr id="32" name="Shape 28"/>
+          <p:cNvPr id="31" name="Shape 28"/>
           <p:cNvSpPr/>
           <p:nvPr/>
         </p:nvSpPr>
@@ -7479,7 +7479,7 @@
       </p:sp>
       <p:sp>
         <p:nvSpPr>
-          <p:cNvPr id="33" name="Text 29"/>
+          <p:cNvPr id="32" name="Text 29"/>
           <p:cNvSpPr/>
           <p:nvPr/>
         </p:nvSpPr>
@@ -7764,7 +7764,7 @@
       </p:pic>
       <p:sp>
         <p:nvSpPr>
-          <p:cNvPr id="8" name="Shape 4"/>
+          <p:cNvPr id="7" name="Shape 4"/>
           <p:cNvSpPr/>
           <p:nvPr/>
         </p:nvSpPr>
@@ -7791,7 +7791,7 @@
       </p:sp>
       <p:sp>
         <p:nvSpPr>
-          <p:cNvPr id="9" name="Text 5"/>
+          <p:cNvPr id="8" name="Text 5"/>
           <p:cNvSpPr/>
           <p:nvPr/>
         </p:nvSpPr>
@@ -7830,7 +7830,7 @@
       </p:sp>
       <p:sp>
         <p:nvSpPr>
-          <p:cNvPr id="10" name="Text 6"/>
+          <p:cNvPr id="9" name="Text 6"/>
           <p:cNvSpPr/>
           <p:nvPr/>
         </p:nvSpPr>
@@ -7869,7 +7869,7 @@
       </p:sp>
       <p:sp>
         <p:nvSpPr>
-          <p:cNvPr id="11" name="Shape 7"/>
+          <p:cNvPr id="10" name="Shape 7"/>
           <p:cNvSpPr/>
           <p:nvPr/>
         </p:nvSpPr>
@@ -7891,7 +7891,7 @@
       </p:sp>
       <p:sp>
         <p:nvSpPr>
-          <p:cNvPr id="12" name="Text 8"/>
+          <p:cNvPr id="11" name="Text 8"/>
           <p:cNvSpPr/>
           <p:nvPr/>
         </p:nvSpPr>
@@ -7930,7 +7930,7 @@
       </p:sp>
       <p:sp>
         <p:nvSpPr>
-          <p:cNvPr id="13" name="Text 9"/>
+          <p:cNvPr id="12" name="Text 9"/>
           <p:cNvSpPr/>
           <p:nvPr/>
         </p:nvSpPr>
@@ -7969,7 +7969,7 @@
       </p:sp>
       <p:sp>
         <p:nvSpPr>
-          <p:cNvPr id="14" name="Shape 10"/>
+          <p:cNvPr id="13" name="Shape 10"/>
           <p:cNvSpPr/>
           <p:nvPr/>
         </p:nvSpPr>
@@ -7996,7 +7996,7 @@
       </p:sp>
       <p:sp>
         <p:nvSpPr>
-          <p:cNvPr id="15" name="Text 11"/>
+          <p:cNvPr id="14" name="Text 11"/>
           <p:cNvSpPr/>
           <p:nvPr/>
         </p:nvSpPr>
@@ -8035,7 +8035,7 @@
       </p:sp>
       <p:sp>
         <p:nvSpPr>
-          <p:cNvPr id="16" name="Text 12"/>
+          <p:cNvPr id="15" name="Text 12"/>
           <p:cNvSpPr/>
           <p:nvPr/>
         </p:nvSpPr>
@@ -8074,7 +8074,7 @@
       </p:sp>
       <p:sp>
         <p:nvSpPr>
-          <p:cNvPr id="17" name="Shape 13"/>
+          <p:cNvPr id="16" name="Shape 13"/>
           <p:cNvSpPr/>
           <p:nvPr/>
         </p:nvSpPr>
@@ -8101,7 +8101,7 @@
       </p:sp>
       <p:sp>
         <p:nvSpPr>
-          <p:cNvPr id="18" name="Text 14"/>
+          <p:cNvPr id="17" name="Text 14"/>
           <p:cNvSpPr/>
           <p:nvPr/>
         </p:nvSpPr>
@@ -8140,7 +8140,7 @@
       </p:sp>
       <p:sp>
         <p:nvSpPr>
-          <p:cNvPr id="19" name="Text 15"/>
+          <p:cNvPr id="18" name="Text 15"/>
           <p:cNvSpPr/>
           <p:nvPr/>
         </p:nvSpPr>
@@ -8179,7 +8179,7 @@
       </p:sp>
       <p:sp>
         <p:nvSpPr>
-          <p:cNvPr id="20" name="Shape 16"/>
+          <p:cNvPr id="19" name="Shape 16"/>
           <p:cNvSpPr/>
           <p:nvPr/>
         </p:nvSpPr>
@@ -8206,7 +8206,7 @@
       </p:sp>
       <p:sp>
         <p:nvSpPr>
-          <p:cNvPr id="21" name="Text 17"/>
+          <p:cNvPr id="20" name="Text 17"/>
           <p:cNvSpPr/>
           <p:nvPr/>
         </p:nvSpPr>
@@ -8245,7 +8245,7 @@
       </p:sp>
       <p:sp>
         <p:nvSpPr>
-          <p:cNvPr id="22" name="Text 18"/>
+          <p:cNvPr id="21" name="Text 18"/>
           <p:cNvSpPr/>
           <p:nvPr/>
         </p:nvSpPr>
@@ -8284,7 +8284,7 @@
       </p:sp>
       <p:sp>
         <p:nvSpPr>
-          <p:cNvPr id="23" name="Shape 19"/>
+          <p:cNvPr id="22" name="Shape 19"/>
           <p:cNvSpPr/>
           <p:nvPr/>
         </p:nvSpPr>
@@ -8311,7 +8311,7 @@
       </p:sp>
       <p:sp>
         <p:nvSpPr>
-          <p:cNvPr id="24" name="Text 20"/>
+          <p:cNvPr id="23" name="Text 20"/>
           <p:cNvSpPr/>
           <p:nvPr/>
         </p:nvSpPr>
@@ -8596,7 +8596,7 @@
       </p:pic>
       <p:sp>
         <p:nvSpPr>
-          <p:cNvPr id="8" name="Shape 4"/>
+          <p:cNvPr id="7" name="Shape 4"/>
           <p:cNvSpPr/>
           <p:nvPr/>
         </p:nvSpPr>
@@ -8618,7 +8618,7 @@
       </p:sp>
       <p:sp>
         <p:nvSpPr>
-          <p:cNvPr id="9" name="Text 5"/>
+          <p:cNvPr id="8" name="Text 5"/>
           <p:cNvSpPr/>
           <p:nvPr/>
         </p:nvSpPr>
@@ -8657,7 +8657,7 @@
       </p:sp>
       <p:sp>
         <p:nvSpPr>
-          <p:cNvPr id="10" name="Text 6"/>
+          <p:cNvPr id="9" name="Text 6"/>
           <p:cNvSpPr/>
           <p:nvPr/>
         </p:nvSpPr>
@@ -8696,7 +8696,7 @@
       </p:sp>
       <p:sp>
         <p:nvSpPr>
-          <p:cNvPr id="11" name="Text 7"/>
+          <p:cNvPr id="10" name="Text 7"/>
           <p:cNvSpPr/>
           <p:nvPr/>
         </p:nvSpPr>
@@ -8735,7 +8735,7 @@
       </p:sp>
       <p:sp>
         <p:nvSpPr>
-          <p:cNvPr id="12" name="Shape 8"/>
+          <p:cNvPr id="11" name="Shape 8"/>
           <p:cNvSpPr/>
           <p:nvPr/>
         </p:nvSpPr>
@@ -8762,7 +8762,7 @@
       </p:sp>
       <p:sp>
         <p:nvSpPr>
-          <p:cNvPr id="13" name="Text 9"/>
+          <p:cNvPr id="12" name="Text 9"/>
           <p:cNvSpPr/>
           <p:nvPr/>
         </p:nvSpPr>
@@ -8801,7 +8801,7 @@
       </p:sp>
       <p:sp>
         <p:nvSpPr>
-          <p:cNvPr id="14" name="Text 10"/>
+          <p:cNvPr id="13" name="Text 10"/>
           <p:cNvSpPr/>
           <p:nvPr/>
         </p:nvSpPr>
@@ -8840,7 +8840,7 @@
       </p:sp>
       <p:sp>
         <p:nvSpPr>
-          <p:cNvPr id="15" name="Text 11"/>
+          <p:cNvPr id="14" name="Text 11"/>
           <p:cNvSpPr/>
           <p:nvPr/>
         </p:nvSpPr>
@@ -8879,7 +8879,7 @@
       </p:sp>
       <p:sp>
         <p:nvSpPr>
-          <p:cNvPr id="16" name="Shape 12"/>
+          <p:cNvPr id="15" name="Shape 12"/>
           <p:cNvSpPr/>
           <p:nvPr/>
         </p:nvSpPr>
@@ -8901,7 +8901,7 @@
       </p:sp>
       <p:sp>
         <p:nvSpPr>
-          <p:cNvPr id="17" name="Text 13"/>
+          <p:cNvPr id="16" name="Text 13"/>
           <p:cNvSpPr/>
           <p:nvPr/>
         </p:nvSpPr>
@@ -8940,7 +8940,7 @@
       </p:sp>
       <p:sp>
         <p:nvSpPr>
-          <p:cNvPr id="18" name="Text 14"/>
+          <p:cNvPr id="17" name="Text 14"/>
           <p:cNvSpPr/>
           <p:nvPr/>
         </p:nvSpPr>
@@ -8982,7 +8982,7 @@
       </p:sp>
       <p:sp>
         <p:nvSpPr>
-          <p:cNvPr id="19" name="Shape 15"/>
+          <p:cNvPr id="18" name="Shape 15"/>
           <p:cNvSpPr/>
           <p:nvPr/>
         </p:nvSpPr>
@@ -9004,7 +9004,7 @@
       </p:sp>
       <p:sp>
         <p:nvSpPr>
-          <p:cNvPr id="20" name="Text 16"/>
+          <p:cNvPr id="19" name="Text 16"/>
           <p:cNvSpPr/>
           <p:nvPr/>
         </p:nvSpPr>
@@ -9043,7 +9043,7 @@
       </p:sp>
       <p:sp>
         <p:nvSpPr>
-          <p:cNvPr id="21" name="Text 17"/>
+          <p:cNvPr id="20" name="Text 17"/>
           <p:cNvSpPr/>
           <p:nvPr/>
         </p:nvSpPr>
@@ -9085,7 +9085,7 @@
       </p:sp>
       <p:sp>
         <p:nvSpPr>
-          <p:cNvPr id="22" name="Text 18"/>
+          <p:cNvPr id="21" name="Text 18"/>
           <p:cNvSpPr/>
           <p:nvPr/>
         </p:nvSpPr>
@@ -9367,7 +9367,7 @@
       </p:pic>
       <p:sp>
         <p:nvSpPr>
-          <p:cNvPr id="8" name="Shape 4"/>
+          <p:cNvPr id="7" name="Shape 4"/>
           <p:cNvSpPr/>
           <p:nvPr/>
         </p:nvSpPr>
@@ -9394,7 +9394,7 @@
       </p:sp>
       <p:sp>
         <p:nvSpPr>
-          <p:cNvPr id="9" name="Text 5"/>
+          <p:cNvPr id="8" name="Text 5"/>
           <p:cNvSpPr/>
           <p:nvPr/>
         </p:nvSpPr>
@@ -9504,7 +9504,7 @@
       </p:sp>
       <p:sp>
         <p:nvSpPr>
-          <p:cNvPr id="10" name="Text 6"/>
+          <p:cNvPr id="9" name="Text 6"/>
           <p:cNvSpPr/>
           <p:nvPr/>
         </p:nvSpPr>
@@ -9543,7 +9543,7 @@
       </p:sp>
       <p:sp>
         <p:nvSpPr>
-          <p:cNvPr id="11" name="Text 7"/>
+          <p:cNvPr id="10" name="Text 7"/>
           <p:cNvSpPr/>
           <p:nvPr/>
         </p:nvSpPr>
@@ -9582,7 +9582,7 @@
       </p:sp>
       <p:sp>
         <p:nvSpPr>
-          <p:cNvPr id="12" name="Shape 8"/>
+          <p:cNvPr id="11" name="Shape 8"/>
           <p:cNvSpPr/>
           <p:nvPr/>
         </p:nvSpPr>
@@ -9605,7 +9605,7 @@
       </p:sp>
       <p:sp>
         <p:nvSpPr>
-          <p:cNvPr id="13" name="Shape 9"/>
+          <p:cNvPr id="12" name="Shape 9"/>
           <p:cNvSpPr/>
           <p:nvPr/>
         </p:nvSpPr>
@@ -9625,7 +9625,7 @@
       </p:sp>
       <p:sp>
         <p:nvSpPr>
-          <p:cNvPr id="14" name="Text 10"/>
+          <p:cNvPr id="13" name="Text 10"/>
           <p:cNvSpPr/>
           <p:nvPr/>
         </p:nvSpPr>
@@ -9664,7 +9664,7 @@
       </p:sp>
       <p:sp>
         <p:nvSpPr>
-          <p:cNvPr id="15" name="Shape 11"/>
+          <p:cNvPr id="14" name="Shape 11"/>
           <p:cNvSpPr/>
           <p:nvPr/>
         </p:nvSpPr>
@@ -9686,7 +9686,7 @@
       </p:sp>
       <p:sp>
         <p:nvSpPr>
-          <p:cNvPr id="16" name="Text 12"/>
+          <p:cNvPr id="15" name="Text 12"/>
           <p:cNvSpPr/>
           <p:nvPr/>
         </p:nvSpPr>
@@ -9725,7 +9725,7 @@
       </p:sp>
       <p:sp>
         <p:nvSpPr>
-          <p:cNvPr id="17" name="Text 13"/>
+          <p:cNvPr id="16" name="Text 13"/>
           <p:cNvSpPr/>
           <p:nvPr/>
         </p:nvSpPr>
@@ -9764,7 +9764,7 @@
       </p:sp>
       <p:sp>
         <p:nvSpPr>
-          <p:cNvPr id="18" name="Shape 14"/>
+          <p:cNvPr id="17" name="Shape 14"/>
           <p:cNvSpPr/>
           <p:nvPr/>
         </p:nvSpPr>
@@ -9787,7 +9787,7 @@
       </p:sp>
       <p:sp>
         <p:nvSpPr>
-          <p:cNvPr id="19" name="Shape 15"/>
+          <p:cNvPr id="18" name="Shape 15"/>
           <p:cNvSpPr/>
           <p:nvPr/>
         </p:nvSpPr>
@@ -9807,7 +9807,7 @@
       </p:sp>
       <p:sp>
         <p:nvSpPr>
-          <p:cNvPr id="20" name="Text 16"/>
+          <p:cNvPr id="19" name="Text 16"/>
           <p:cNvSpPr/>
           <p:nvPr/>
         </p:nvSpPr>
@@ -9846,7 +9846,7 @@
       </p:sp>
       <p:sp>
         <p:nvSpPr>
-          <p:cNvPr id="21" name="Shape 17"/>
+          <p:cNvPr id="20" name="Shape 17"/>
           <p:cNvSpPr/>
           <p:nvPr/>
         </p:nvSpPr>
@@ -9868,7 +9868,7 @@
       </p:sp>
       <p:sp>
         <p:nvSpPr>
-          <p:cNvPr id="22" name="Text 18"/>
+          <p:cNvPr id="21" name="Text 18"/>
           <p:cNvSpPr/>
           <p:nvPr/>
         </p:nvSpPr>
@@ -9907,7 +9907,7 @@
       </p:sp>
       <p:sp>
         <p:nvSpPr>
-          <p:cNvPr id="23" name="Text 19"/>
+          <p:cNvPr id="22" name="Text 19"/>
           <p:cNvSpPr/>
           <p:nvPr/>
         </p:nvSpPr>
@@ -9946,7 +9946,7 @@
       </p:sp>
       <p:sp>
         <p:nvSpPr>
-          <p:cNvPr id="24" name="Shape 20"/>
+          <p:cNvPr id="23" name="Shape 20"/>
           <p:cNvSpPr/>
           <p:nvPr/>
         </p:nvSpPr>
@@ -9969,7 +9969,7 @@
       </p:sp>
       <p:sp>
         <p:nvSpPr>
-          <p:cNvPr id="25" name="Shape 21"/>
+          <p:cNvPr id="24" name="Shape 21"/>
           <p:cNvSpPr/>
           <p:nvPr/>
         </p:nvSpPr>
@@ -9989,7 +9989,7 @@
       </p:sp>
       <p:sp>
         <p:nvSpPr>
-          <p:cNvPr id="26" name="Text 22"/>
+          <p:cNvPr id="25" name="Text 22"/>
           <p:cNvSpPr/>
           <p:nvPr/>
         </p:nvSpPr>
@@ -10028,7 +10028,7 @@
       </p:sp>
       <p:sp>
         <p:nvSpPr>
-          <p:cNvPr id="27" name="Shape 23"/>
+          <p:cNvPr id="26" name="Shape 23"/>
           <p:cNvSpPr/>
           <p:nvPr/>
         </p:nvSpPr>
@@ -10050,7 +10050,7 @@
       </p:sp>
       <p:sp>
         <p:nvSpPr>
-          <p:cNvPr id="28" name="Text 24"/>
+          <p:cNvPr id="27" name="Text 24"/>
           <p:cNvSpPr/>
           <p:nvPr/>
         </p:nvSpPr>
@@ -10089,7 +10089,7 @@
       </p:sp>
       <p:sp>
         <p:nvSpPr>
-          <p:cNvPr id="29" name="Text 25"/>
+          <p:cNvPr id="28" name="Text 25"/>
           <p:cNvSpPr/>
           <p:nvPr/>
         </p:nvSpPr>
@@ -10128,7 +10128,7 @@
       </p:sp>
       <p:sp>
         <p:nvSpPr>
-          <p:cNvPr id="30" name="Shape 26"/>
+          <p:cNvPr id="29" name="Shape 26"/>
           <p:cNvSpPr/>
           <p:nvPr/>
         </p:nvSpPr>
@@ -10151,7 +10151,7 @@
       </p:sp>
       <p:sp>
         <p:nvSpPr>
-          <p:cNvPr id="31" name="Shape 27"/>
+          <p:cNvPr id="30" name="Shape 27"/>
           <p:cNvSpPr/>
           <p:nvPr/>
         </p:nvSpPr>
@@ -10171,7 +10171,7 @@
       </p:sp>
       <p:sp>
         <p:nvSpPr>
-          <p:cNvPr id="32" name="Text 28"/>
+          <p:cNvPr id="31" name="Text 28"/>
           <p:cNvSpPr/>
           <p:nvPr/>
         </p:nvSpPr>
@@ -10210,7 +10210,7 @@
       </p:sp>
       <p:sp>
         <p:nvSpPr>
-          <p:cNvPr id="33" name="Shape 29"/>
+          <p:cNvPr id="32" name="Shape 29"/>
           <p:cNvSpPr/>
           <p:nvPr/>
         </p:nvSpPr>
@@ -10232,7 +10232,7 @@
       </p:sp>
       <p:sp>
         <p:nvSpPr>
-          <p:cNvPr id="34" name="Text 30"/>
+          <p:cNvPr id="33" name="Text 30"/>
           <p:cNvSpPr/>
           <p:nvPr/>
         </p:nvSpPr>
@@ -10271,7 +10271,7 @@
       </p:sp>
       <p:sp>
         <p:nvSpPr>
-          <p:cNvPr id="35" name="Text 31"/>
+          <p:cNvPr id="34" name="Text 31"/>
           <p:cNvSpPr/>
           <p:nvPr/>
         </p:nvSpPr>
@@ -10310,7 +10310,7 @@
       </p:sp>
       <p:sp>
         <p:nvSpPr>
-          <p:cNvPr id="36" name="Shape 32"/>
+          <p:cNvPr id="35" name="Shape 32"/>
           <p:cNvSpPr/>
           <p:nvPr/>
         </p:nvSpPr>
@@ -10333,7 +10333,7 @@
       </p:sp>
       <p:sp>
         <p:nvSpPr>
-          <p:cNvPr id="37" name="Shape 33"/>
+          <p:cNvPr id="36" name="Shape 33"/>
           <p:cNvSpPr/>
           <p:nvPr/>
         </p:nvSpPr>
@@ -10353,7 +10353,7 @@
       </p:sp>
       <p:sp>
         <p:nvSpPr>
-          <p:cNvPr id="38" name="Text 34"/>
+          <p:cNvPr id="37" name="Text 34"/>
           <p:cNvSpPr/>
           <p:nvPr/>
         </p:nvSpPr>
@@ -10392,7 +10392,7 @@
       </p:sp>
       <p:sp>
         <p:nvSpPr>
-          <p:cNvPr id="39" name="Shape 35"/>
+          <p:cNvPr id="38" name="Shape 35"/>
           <p:cNvSpPr/>
           <p:nvPr/>
         </p:nvSpPr>
@@ -10414,7 +10414,7 @@
       </p:sp>
       <p:sp>
         <p:nvSpPr>
-          <p:cNvPr id="40" name="Text 36"/>
+          <p:cNvPr id="39" name="Text 36"/>
           <p:cNvSpPr/>
           <p:nvPr/>
         </p:nvSpPr>
@@ -10453,7 +10453,7 @@
       </p:sp>
       <p:sp>
         <p:nvSpPr>
-          <p:cNvPr id="41" name="Shape 37"/>
+          <p:cNvPr id="40" name="Shape 37"/>
           <p:cNvSpPr/>
           <p:nvPr/>
         </p:nvSpPr>
@@ -10475,7 +10475,7 @@
       </p:sp>
       <p:sp>
         <p:nvSpPr>
-          <p:cNvPr id="42" name="Text 38"/>
+          <p:cNvPr id="41" name="Text 38"/>
           <p:cNvSpPr/>
           <p:nvPr/>
         </p:nvSpPr>
@@ -10760,7 +10760,7 @@
       </p:pic>
       <p:sp>
         <p:nvSpPr>
-          <p:cNvPr id="8" name="Text 4"/>
+          <p:cNvPr id="7" name="Text 4"/>
           <p:cNvSpPr/>
           <p:nvPr/>
         </p:nvSpPr>
@@ -10799,7 +10799,7 @@
       </p:sp>
       <p:sp>
         <p:nvSpPr>
-          <p:cNvPr id="9" name="Shape 5"/>
+          <p:cNvPr id="8" name="Shape 5"/>
           <p:cNvSpPr/>
           <p:nvPr/>
         </p:nvSpPr>
@@ -10821,7 +10821,7 @@
       </p:sp>
       <p:sp>
         <p:nvSpPr>
-          <p:cNvPr id="10" name="Text 6"/>
+          <p:cNvPr id="9" name="Text 6"/>
           <p:cNvSpPr/>
           <p:nvPr/>
         </p:nvSpPr>
@@ -10860,7 +10860,7 @@
       </p:sp>
       <p:sp>
         <p:nvSpPr>
-          <p:cNvPr id="11" name="Text 7"/>
+          <p:cNvPr id="10" name="Text 7"/>
           <p:cNvSpPr/>
           <p:nvPr/>
         </p:nvSpPr>
@@ -10899,7 +10899,7 @@
       </p:sp>
       <p:sp>
         <p:nvSpPr>
-          <p:cNvPr id="12" name="Text 8"/>
+          <p:cNvPr id="11" name="Text 8"/>
           <p:cNvSpPr/>
           <p:nvPr/>
         </p:nvSpPr>
@@ -10938,7 +10938,7 @@
       </p:sp>
       <p:sp>
         <p:nvSpPr>
-          <p:cNvPr id="13" name="Shape 9"/>
+          <p:cNvPr id="12" name="Shape 9"/>
           <p:cNvSpPr/>
           <p:nvPr/>
         </p:nvSpPr>
@@ -10960,7 +10960,7 @@
       </p:sp>
       <p:sp>
         <p:nvSpPr>
-          <p:cNvPr id="14" name="Text 10"/>
+          <p:cNvPr id="13" name="Text 10"/>
           <p:cNvSpPr/>
           <p:nvPr/>
         </p:nvSpPr>
@@ -10999,7 +10999,7 @@
       </p:sp>
       <p:sp>
         <p:nvSpPr>
-          <p:cNvPr id="15" name="Text 11"/>
+          <p:cNvPr id="14" name="Text 11"/>
           <p:cNvSpPr/>
           <p:nvPr/>
         </p:nvSpPr>
@@ -11038,7 +11038,7 @@
       </p:sp>
       <p:sp>
         <p:nvSpPr>
-          <p:cNvPr id="16" name="Text 12"/>
+          <p:cNvPr id="15" name="Text 12"/>
           <p:cNvSpPr/>
           <p:nvPr/>
         </p:nvSpPr>
@@ -11077,7 +11077,7 @@
       </p:sp>
       <p:sp>
         <p:nvSpPr>
-          <p:cNvPr id="17" name="Shape 13"/>
+          <p:cNvPr id="16" name="Shape 13"/>
           <p:cNvSpPr/>
           <p:nvPr/>
         </p:nvSpPr>
@@ -11099,7 +11099,7 @@
       </p:sp>
       <p:sp>
         <p:nvSpPr>
-          <p:cNvPr id="18" name="Text 14"/>
+          <p:cNvPr id="17" name="Text 14"/>
           <p:cNvSpPr/>
           <p:nvPr/>
         </p:nvSpPr>
@@ -11138,7 +11138,7 @@
       </p:sp>
       <p:sp>
         <p:nvSpPr>
-          <p:cNvPr id="19" name="Text 15"/>
+          <p:cNvPr id="18" name="Text 15"/>
           <p:cNvSpPr/>
           <p:nvPr/>
         </p:nvSpPr>
@@ -11177,7 +11177,7 @@
       </p:sp>
       <p:sp>
         <p:nvSpPr>
-          <p:cNvPr id="20" name="Text 16"/>
+          <p:cNvPr id="19" name="Text 16"/>
           <p:cNvSpPr/>
           <p:nvPr/>
         </p:nvSpPr>
@@ -11216,7 +11216,7 @@
       </p:sp>
       <p:sp>
         <p:nvSpPr>
-          <p:cNvPr id="21" name="Shape 17"/>
+          <p:cNvPr id="20" name="Shape 17"/>
           <p:cNvSpPr/>
           <p:nvPr/>
         </p:nvSpPr>
@@ -11238,7 +11238,7 @@
       </p:sp>
       <p:sp>
         <p:nvSpPr>
-          <p:cNvPr id="22" name="Text 18"/>
+          <p:cNvPr id="21" name="Text 18"/>
           <p:cNvSpPr/>
           <p:nvPr/>
         </p:nvSpPr>
@@ -11277,7 +11277,7 @@
       </p:sp>
       <p:sp>
         <p:nvSpPr>
-          <p:cNvPr id="23" name="Text 19"/>
+          <p:cNvPr id="22" name="Text 19"/>
           <p:cNvSpPr/>
           <p:nvPr/>
         </p:nvSpPr>
@@ -11316,7 +11316,7 @@
       </p:sp>
       <p:sp>
         <p:nvSpPr>
-          <p:cNvPr id="24" name="Text 20"/>
+          <p:cNvPr id="23" name="Text 20"/>
           <p:cNvSpPr/>
           <p:nvPr/>
         </p:nvSpPr>
@@ -11355,7 +11355,7 @@
       </p:sp>
       <p:sp>
         <p:nvSpPr>
-          <p:cNvPr id="25" name="Text 21"/>
+          <p:cNvPr id="24" name="Text 21"/>
           <p:cNvSpPr/>
           <p:nvPr/>
         </p:nvSpPr>
@@ -11394,7 +11394,7 @@
       </p:sp>
       <p:sp>
         <p:nvSpPr>
-          <p:cNvPr id="26" name="Text 22"/>
+          <p:cNvPr id="25" name="Text 22"/>
           <p:cNvSpPr/>
           <p:nvPr/>
         </p:nvSpPr>
@@ -11433,7 +11433,7 @@
       </p:sp>
       <p:sp>
         <p:nvSpPr>
-          <p:cNvPr id="27" name="Shape 23"/>
+          <p:cNvPr id="26" name="Shape 23"/>
           <p:cNvSpPr/>
           <p:nvPr/>
         </p:nvSpPr>
@@ -11455,7 +11455,7 @@
       </p:sp>
       <p:sp>
         <p:nvSpPr>
-          <p:cNvPr id="28" name="Text 24"/>
+          <p:cNvPr id="27" name="Text 24"/>
           <p:cNvSpPr/>
           <p:nvPr/>
         </p:nvSpPr>
@@ -11494,7 +11494,7 @@
       </p:sp>
       <p:sp>
         <p:nvSpPr>
-          <p:cNvPr id="29" name="Shape 25"/>
+          <p:cNvPr id="28" name="Shape 25"/>
           <p:cNvSpPr/>
           <p:nvPr/>
         </p:nvSpPr>
@@ -11517,7 +11517,7 @@
       </p:sp>
       <p:sp>
         <p:nvSpPr>
-          <p:cNvPr id="30" name="Shape 26"/>
+          <p:cNvPr id="29" name="Shape 26"/>
           <p:cNvSpPr/>
           <p:nvPr/>
         </p:nvSpPr>
@@ -11537,7 +11537,7 @@
       </p:sp>
       <p:sp>
         <p:nvSpPr>
-          <p:cNvPr id="31" name="Shape 27"/>
+          <p:cNvPr id="30" name="Shape 27"/>
           <p:cNvSpPr/>
           <p:nvPr/>
         </p:nvSpPr>
@@ -11564,7 +11564,7 @@
       </p:sp>
       <p:sp>
         <p:nvSpPr>
-          <p:cNvPr id="32" name="Text 28"/>
+          <p:cNvPr id="31" name="Text 28"/>
           <p:cNvSpPr/>
           <p:nvPr/>
         </p:nvSpPr>
@@ -11603,7 +11603,7 @@
       </p:sp>
       <p:sp>
         <p:nvSpPr>
-          <p:cNvPr id="33" name="Shape 29"/>
+          <p:cNvPr id="32" name="Shape 29"/>
           <p:cNvSpPr/>
           <p:nvPr/>
         </p:nvSpPr>
@@ -11625,7 +11625,7 @@
       </p:sp>
       <p:sp>
         <p:nvSpPr>
-          <p:cNvPr id="34" name="Text 30"/>
+          <p:cNvPr id="33" name="Text 30"/>
           <p:cNvSpPr/>
           <p:nvPr/>
         </p:nvSpPr>
@@ -11664,7 +11664,7 @@
       </p:sp>
       <p:sp>
         <p:nvSpPr>
-          <p:cNvPr id="35" name="Shape 31"/>
+          <p:cNvPr id="34" name="Shape 31"/>
           <p:cNvSpPr/>
           <p:nvPr/>
         </p:nvSpPr>
@@ -11687,7 +11687,7 @@
       </p:sp>
       <p:sp>
         <p:nvSpPr>
-          <p:cNvPr id="36" name="Shape 32"/>
+          <p:cNvPr id="35" name="Shape 32"/>
           <p:cNvSpPr/>
           <p:nvPr/>
         </p:nvSpPr>
@@ -11707,7 +11707,7 @@
       </p:sp>
       <p:sp>
         <p:nvSpPr>
-          <p:cNvPr id="37" name="Shape 33"/>
+          <p:cNvPr id="36" name="Shape 33"/>
           <p:cNvSpPr/>
           <p:nvPr/>
         </p:nvSpPr>
@@ -11734,7 +11734,7 @@
       </p:sp>
       <p:sp>
         <p:nvSpPr>
-          <p:cNvPr id="38" name="Text 34"/>
+          <p:cNvPr id="37" name="Text 34"/>
           <p:cNvSpPr/>
           <p:nvPr/>
         </p:nvSpPr>
@@ -11773,7 +11773,7 @@
       </p:sp>
       <p:sp>
         <p:nvSpPr>
-          <p:cNvPr id="39" name="Shape 35"/>
+          <p:cNvPr id="38" name="Shape 35"/>
           <p:cNvSpPr/>
           <p:nvPr/>
         </p:nvSpPr>
@@ -11795,7 +11795,7 @@
       </p:sp>
       <p:sp>
         <p:nvSpPr>
-          <p:cNvPr id="40" name="Text 36"/>
+          <p:cNvPr id="39" name="Text 36"/>
           <p:cNvSpPr/>
           <p:nvPr/>
         </p:nvSpPr>
@@ -11837,7 +11837,7 @@
       </p:sp>
       <p:sp>
         <p:nvSpPr>
-          <p:cNvPr id="41" name="Shape 37"/>
+          <p:cNvPr id="40" name="Shape 37"/>
           <p:cNvSpPr/>
           <p:nvPr/>
         </p:nvSpPr>
@@ -11864,7 +11864,7 @@
       </p:sp>
       <p:sp>
         <p:nvSpPr>
-          <p:cNvPr id="42" name="Text 38"/>
+          <p:cNvPr id="41" name="Text 38"/>
           <p:cNvSpPr/>
           <p:nvPr/>
         </p:nvSpPr>
@@ -11903,7 +11903,7 @@
       </p:sp>
       <p:sp>
         <p:nvSpPr>
-          <p:cNvPr id="43" name="Text 39"/>
+          <p:cNvPr id="42" name="Text 39"/>
           <p:cNvSpPr/>
           <p:nvPr/>
         </p:nvSpPr>
@@ -12249,7 +12249,7 @@
       </p:pic>
       <p:sp>
         <p:nvSpPr>
-          <p:cNvPr id="10" name="Shape 6"/>
+          <p:cNvPr id="9" name="Shape 6"/>
           <p:cNvSpPr/>
           <p:nvPr/>
         </p:nvSpPr>
@@ -12276,7 +12276,7 @@
       </p:sp>
       <p:sp>
         <p:nvSpPr>
-          <p:cNvPr id="11" name="Text 7"/>
+          <p:cNvPr id="10" name="Text 7"/>
           <p:cNvSpPr/>
           <p:nvPr/>
         </p:nvSpPr>
@@ -12409,7 +12409,7 @@
       </p:sp>
       <p:sp>
         <p:nvSpPr>
-          <p:cNvPr id="12" name="Shape 8"/>
+          <p:cNvPr id="11" name="Shape 8"/>
           <p:cNvSpPr/>
           <p:nvPr/>
         </p:nvSpPr>
@@ -12436,7 +12436,7 @@
       </p:sp>
       <p:sp>
         <p:nvSpPr>
-          <p:cNvPr id="13" name="Text 9"/>
+          <p:cNvPr id="12" name="Text 9"/>
           <p:cNvSpPr/>
           <p:nvPr/>
         </p:nvSpPr>
@@ -12475,7 +12475,7 @@
       </p:sp>
       <p:sp>
         <p:nvSpPr>
-          <p:cNvPr id="14" name="Text 10"/>
+          <p:cNvPr id="13" name="Text 10"/>
           <p:cNvSpPr/>
           <p:nvPr/>
         </p:nvSpPr>
@@ -12517,7 +12517,7 @@
       </p:sp>
       <p:sp>
         <p:nvSpPr>
-          <p:cNvPr id="15" name="Shape 11"/>
+          <p:cNvPr id="14" name="Shape 11"/>
           <p:cNvSpPr/>
           <p:nvPr/>
         </p:nvSpPr>
@@ -12539,7 +12539,7 @@
       </p:sp>
       <p:sp>
         <p:nvSpPr>
-          <p:cNvPr id="16" name="Text 12"/>
+          <p:cNvPr id="15" name="Text 12"/>
           <p:cNvSpPr/>
           <p:nvPr/>
         </p:nvSpPr>
@@ -12578,7 +12578,7 @@
       </p:sp>
       <p:sp>
         <p:nvSpPr>
-          <p:cNvPr id="17" name="Text 13"/>
+          <p:cNvPr id="16" name="Text 13"/>
           <p:cNvSpPr/>
           <p:nvPr/>
         </p:nvSpPr>
@@ -12620,7 +12620,7 @@
       </p:sp>
       <p:sp>
         <p:nvSpPr>
-          <p:cNvPr id="18" name="Shape 14"/>
+          <p:cNvPr id="17" name="Shape 14"/>
           <p:cNvSpPr/>
           <p:nvPr/>
         </p:nvSpPr>
@@ -12642,7 +12642,7 @@
       </p:sp>
       <p:sp>
         <p:nvSpPr>
-          <p:cNvPr id="19" name="Text 15"/>
+          <p:cNvPr id="18" name="Text 15"/>
           <p:cNvSpPr/>
           <p:nvPr/>
         </p:nvSpPr>
@@ -12681,7 +12681,7 @@
       </p:sp>
       <p:sp>
         <p:nvSpPr>
-          <p:cNvPr id="20" name="Text 16"/>
+          <p:cNvPr id="19" name="Text 16"/>
           <p:cNvSpPr/>
           <p:nvPr/>
         </p:nvSpPr>
@@ -12723,7 +12723,7 @@
       </p:sp>
       <p:sp>
         <p:nvSpPr>
-          <p:cNvPr id="21" name="Text 17"/>
+          <p:cNvPr id="20" name="Text 17"/>
           <p:cNvSpPr/>
           <p:nvPr/>
         </p:nvSpPr>
@@ -12966,7 +12966,7 @@
       </p:pic>
       <p:sp>
         <p:nvSpPr>
-          <p:cNvPr id="7" name="Shape 3"/>
+          <p:cNvPr id="6" name="Shape 3"/>
           <p:cNvSpPr/>
           <p:nvPr/>
         </p:nvSpPr>
@@ -12988,7 +12988,7 @@
       </p:sp>
       <p:sp>
         <p:nvSpPr>
-          <p:cNvPr id="8" name="Shape 4"/>
+          <p:cNvPr id="7" name="Shape 4"/>
           <p:cNvSpPr/>
           <p:nvPr/>
         </p:nvSpPr>
@@ -13008,7 +13008,7 @@
       </p:sp>
       <p:sp>
         <p:nvSpPr>
-          <p:cNvPr id="9" name="Text 5"/>
+          <p:cNvPr id="8" name="Text 5"/>
           <p:cNvSpPr/>
           <p:nvPr/>
         </p:nvSpPr>
@@ -13047,7 +13047,7 @@
       </p:sp>
       <p:sp>
         <p:nvSpPr>
-          <p:cNvPr id="10" name="Text 6"/>
+          <p:cNvPr id="9" name="Text 6"/>
           <p:cNvSpPr/>
           <p:nvPr/>
         </p:nvSpPr>
@@ -13086,7 +13086,7 @@
       </p:sp>
       <p:sp>
         <p:nvSpPr>
-          <p:cNvPr id="11" name="Text 7"/>
+          <p:cNvPr id="10" name="Text 7"/>
           <p:cNvSpPr/>
           <p:nvPr/>
         </p:nvSpPr>
@@ -13128,7 +13128,7 @@
       </p:sp>
       <p:sp>
         <p:nvSpPr>
-          <p:cNvPr id="12" name="Shape 8"/>
+          <p:cNvPr id="11" name="Shape 8"/>
           <p:cNvSpPr/>
           <p:nvPr/>
         </p:nvSpPr>
@@ -13150,7 +13150,7 @@
       </p:sp>
       <p:sp>
         <p:nvSpPr>
-          <p:cNvPr id="13" name="Shape 9"/>
+          <p:cNvPr id="12" name="Shape 9"/>
           <p:cNvSpPr/>
           <p:nvPr/>
         </p:nvSpPr>
@@ -13170,7 +13170,7 @@
       </p:sp>
       <p:sp>
         <p:nvSpPr>
-          <p:cNvPr id="14" name="Text 10"/>
+          <p:cNvPr id="13" name="Text 10"/>
           <p:cNvSpPr/>
           <p:nvPr/>
         </p:nvSpPr>
@@ -13209,7 +13209,7 @@
       </p:sp>
       <p:sp>
         <p:nvSpPr>
-          <p:cNvPr id="15" name="Text 11"/>
+          <p:cNvPr id="14" name="Text 11"/>
           <p:cNvSpPr/>
           <p:nvPr/>
         </p:nvSpPr>
@@ -13248,7 +13248,7 @@
       </p:sp>
       <p:sp>
         <p:nvSpPr>
-          <p:cNvPr id="16" name="Text 12"/>
+          <p:cNvPr id="15" name="Text 12"/>
           <p:cNvSpPr/>
           <p:nvPr/>
         </p:nvSpPr>
@@ -13290,7 +13290,7 @@
       </p:sp>
       <p:sp>
         <p:nvSpPr>
-          <p:cNvPr id="17" name="Shape 13"/>
+          <p:cNvPr id="16" name="Shape 13"/>
           <p:cNvSpPr/>
           <p:nvPr/>
         </p:nvSpPr>
@@ -13312,7 +13312,7 @@
       </p:sp>
       <p:sp>
         <p:nvSpPr>
-          <p:cNvPr id="18" name="Shape 14"/>
+          <p:cNvPr id="17" name="Shape 14"/>
           <p:cNvSpPr/>
           <p:nvPr/>
         </p:nvSpPr>
@@ -13332,7 +13332,7 @@
       </p:sp>
       <p:sp>
         <p:nvSpPr>
-          <p:cNvPr id="19" name="Text 15"/>
+          <p:cNvPr id="18" name="Text 15"/>
           <p:cNvSpPr/>
           <p:nvPr/>
         </p:nvSpPr>
@@ -13371,7 +13371,7 @@
       </p:sp>
       <p:sp>
         <p:nvSpPr>
-          <p:cNvPr id="20" name="Text 16"/>
+          <p:cNvPr id="19" name="Text 16"/>
           <p:cNvSpPr/>
           <p:nvPr/>
         </p:nvSpPr>
@@ -13410,7 +13410,7 @@
       </p:sp>
       <p:sp>
         <p:nvSpPr>
-          <p:cNvPr id="21" name="Text 17"/>
+          <p:cNvPr id="20" name="Text 17"/>
           <p:cNvSpPr/>
           <p:nvPr/>
         </p:nvSpPr>
@@ -13452,7 +13452,7 @@
       </p:sp>
       <p:sp>
         <p:nvSpPr>
-          <p:cNvPr id="22" name="Shape 18"/>
+          <p:cNvPr id="21" name="Shape 18"/>
           <p:cNvSpPr/>
           <p:nvPr/>
         </p:nvSpPr>
@@ -13474,7 +13474,7 @@
       </p:sp>
       <p:sp>
         <p:nvSpPr>
-          <p:cNvPr id="23" name="Shape 19"/>
+          <p:cNvPr id="22" name="Shape 19"/>
           <p:cNvSpPr/>
           <p:nvPr/>
         </p:nvSpPr>
@@ -13494,7 +13494,7 @@
       </p:sp>
       <p:sp>
         <p:nvSpPr>
-          <p:cNvPr id="24" name="Text 20"/>
+          <p:cNvPr id="23" name="Text 20"/>
           <p:cNvSpPr/>
           <p:nvPr/>
         </p:nvSpPr>
@@ -13533,7 +13533,7 @@
       </p:sp>
       <p:sp>
         <p:nvSpPr>
-          <p:cNvPr id="25" name="Text 21"/>
+          <p:cNvPr id="24" name="Text 21"/>
           <p:cNvSpPr/>
           <p:nvPr/>
         </p:nvSpPr>
@@ -13572,7 +13572,7 @@
       </p:sp>
       <p:sp>
         <p:nvSpPr>
-          <p:cNvPr id="26" name="Text 22"/>
+          <p:cNvPr id="25" name="Text 22"/>
           <p:cNvSpPr/>
           <p:nvPr/>
         </p:nvSpPr>
@@ -13614,7 +13614,7 @@
       </p:sp>
       <p:sp>
         <p:nvSpPr>
-          <p:cNvPr id="27" name="Shape 23"/>
+          <p:cNvPr id="26" name="Shape 23"/>
           <p:cNvSpPr/>
           <p:nvPr/>
         </p:nvSpPr>
@@ -13636,7 +13636,7 @@
       </p:sp>
       <p:sp>
         <p:nvSpPr>
-          <p:cNvPr id="28" name="Shape 24"/>
+          <p:cNvPr id="27" name="Shape 24"/>
           <p:cNvSpPr/>
           <p:nvPr/>
         </p:nvSpPr>
@@ -13656,7 +13656,7 @@
       </p:sp>
       <p:sp>
         <p:nvSpPr>
-          <p:cNvPr id="29" name="Text 25"/>
+          <p:cNvPr id="28" name="Text 25"/>
           <p:cNvSpPr/>
           <p:nvPr/>
         </p:nvSpPr>
@@ -13695,7 +13695,7 @@
       </p:sp>
       <p:sp>
         <p:nvSpPr>
-          <p:cNvPr id="30" name="Text 26"/>
+          <p:cNvPr id="29" name="Text 26"/>
           <p:cNvSpPr/>
           <p:nvPr/>
         </p:nvSpPr>
@@ -13734,7 +13734,7 @@
       </p:sp>
       <p:sp>
         <p:nvSpPr>
-          <p:cNvPr id="31" name="Text 27"/>
+          <p:cNvPr id="30" name="Text 27"/>
           <p:cNvSpPr/>
           <p:nvPr/>
         </p:nvSpPr>
@@ -13776,7 +13776,7 @@
       </p:sp>
       <p:sp>
         <p:nvSpPr>
-          <p:cNvPr id="32" name="Shape 28"/>
+          <p:cNvPr id="31" name="Shape 28"/>
           <p:cNvSpPr/>
           <p:nvPr/>
         </p:nvSpPr>
@@ -13798,7 +13798,7 @@
       </p:sp>
       <p:sp>
         <p:nvSpPr>
-          <p:cNvPr id="33" name="Shape 29"/>
+          <p:cNvPr id="32" name="Shape 29"/>
           <p:cNvSpPr/>
           <p:nvPr/>
         </p:nvSpPr>
@@ -13818,7 +13818,7 @@
       </p:sp>
       <p:sp>
         <p:nvSpPr>
-          <p:cNvPr id="34" name="Text 30"/>
+          <p:cNvPr id="33" name="Text 30"/>
           <p:cNvSpPr/>
           <p:nvPr/>
         </p:nvSpPr>
@@ -13857,7 +13857,7 @@
       </p:sp>
       <p:sp>
         <p:nvSpPr>
-          <p:cNvPr id="35" name="Text 31"/>
+          <p:cNvPr id="34" name="Text 31"/>
           <p:cNvSpPr/>
           <p:nvPr/>
         </p:nvSpPr>
@@ -13896,7 +13896,7 @@
       </p:sp>
       <p:sp>
         <p:nvSpPr>
-          <p:cNvPr id="36" name="Text 32"/>
+          <p:cNvPr id="35" name="Text 32"/>
           <p:cNvSpPr/>
           <p:nvPr/>
         </p:nvSpPr>
@@ -13938,7 +13938,7 @@
       </p:sp>
       <p:sp>
         <p:nvSpPr>
-          <p:cNvPr id="37" name="Shape 33"/>
+          <p:cNvPr id="36" name="Shape 33"/>
           <p:cNvSpPr/>
           <p:nvPr/>
         </p:nvSpPr>
@@ -13960,7 +13960,7 @@
       </p:sp>
       <p:sp>
         <p:nvSpPr>
-          <p:cNvPr id="38" name="Text 34"/>
+          <p:cNvPr id="37" name="Text 34"/>
           <p:cNvSpPr/>
           <p:nvPr/>
         </p:nvSpPr>
@@ -13999,7 +13999,7 @@
       </p:sp>
       <p:sp>
         <p:nvSpPr>
-          <p:cNvPr id="39" name="Text 35"/>
+          <p:cNvPr id="38" name="Text 35"/>
           <p:cNvSpPr/>
           <p:nvPr/>
         </p:nvSpPr>
@@ -14287,7 +14287,7 @@
       </p:pic>
       <p:sp>
         <p:nvSpPr>
-          <p:cNvPr id="8" name="Shape 4"/>
+          <p:cNvPr id="7" name="Shape 4"/>
           <p:cNvSpPr/>
           <p:nvPr/>
         </p:nvSpPr>
@@ -14314,7 +14314,7 @@
       </p:sp>
       <p:sp>
         <p:nvSpPr>
-          <p:cNvPr id="9" name="Shape 5"/>
+          <p:cNvPr id="8" name="Shape 5"/>
           <p:cNvSpPr/>
           <p:nvPr/>
         </p:nvSpPr>
@@ -14334,7 +14334,7 @@
       </p:sp>
       <p:sp>
         <p:nvSpPr>
-          <p:cNvPr id="10" name="Text 6"/>
+          <p:cNvPr id="9" name="Text 6"/>
           <p:cNvSpPr/>
           <p:nvPr/>
         </p:nvSpPr>
@@ -14373,7 +14373,7 @@
       </p:sp>
       <p:sp>
         <p:nvSpPr>
-          <p:cNvPr id="11" name="Text 7"/>
+          <p:cNvPr id="10" name="Text 7"/>
           <p:cNvSpPr/>
           <p:nvPr/>
         </p:nvSpPr>
@@ -14412,7 +14412,7 @@
       </p:sp>
       <p:sp>
         <p:nvSpPr>
-          <p:cNvPr id="12" name="Text 8"/>
+          <p:cNvPr id="11" name="Text 8"/>
           <p:cNvSpPr/>
           <p:nvPr/>
         </p:nvSpPr>
@@ -14454,7 +14454,7 @@
       </p:sp>
       <p:sp>
         <p:nvSpPr>
-          <p:cNvPr id="13" name="Shape 9"/>
+          <p:cNvPr id="12" name="Shape 9"/>
           <p:cNvSpPr/>
           <p:nvPr/>
         </p:nvSpPr>
@@ -14481,7 +14481,7 @@
       </p:sp>
       <p:sp>
         <p:nvSpPr>
-          <p:cNvPr id="14" name="Shape 10"/>
+          <p:cNvPr id="13" name="Shape 10"/>
           <p:cNvSpPr/>
           <p:nvPr/>
         </p:nvSpPr>
@@ -14501,7 +14501,7 @@
       </p:sp>
       <p:sp>
         <p:nvSpPr>
-          <p:cNvPr id="15" name="Text 11"/>
+          <p:cNvPr id="14" name="Text 11"/>
           <p:cNvSpPr/>
           <p:nvPr/>
         </p:nvSpPr>
@@ -14540,7 +14540,7 @@
       </p:sp>
       <p:sp>
         <p:nvSpPr>
-          <p:cNvPr id="16" name="Text 12"/>
+          <p:cNvPr id="15" name="Text 12"/>
           <p:cNvSpPr/>
           <p:nvPr/>
         </p:nvSpPr>
@@ -14579,7 +14579,7 @@
       </p:sp>
       <p:sp>
         <p:nvSpPr>
-          <p:cNvPr id="17" name="Text 13"/>
+          <p:cNvPr id="16" name="Text 13"/>
           <p:cNvSpPr/>
           <p:nvPr/>
         </p:nvSpPr>
@@ -14621,7 +14621,7 @@
       </p:sp>
       <p:sp>
         <p:nvSpPr>
-          <p:cNvPr id="18" name="Shape 14"/>
+          <p:cNvPr id="17" name="Shape 14"/>
           <p:cNvSpPr/>
           <p:nvPr/>
         </p:nvSpPr>
@@ -14648,7 +14648,7 @@
       </p:sp>
       <p:sp>
         <p:nvSpPr>
-          <p:cNvPr id="19" name="Shape 15"/>
+          <p:cNvPr id="18" name="Shape 15"/>
           <p:cNvSpPr/>
           <p:nvPr/>
         </p:nvSpPr>
@@ -14668,7 +14668,7 @@
       </p:sp>
       <p:sp>
         <p:nvSpPr>
-          <p:cNvPr id="20" name="Text 16"/>
+          <p:cNvPr id="19" name="Text 16"/>
           <p:cNvSpPr/>
           <p:nvPr/>
         </p:nvSpPr>
@@ -14707,7 +14707,7 @@
       </p:sp>
       <p:sp>
         <p:nvSpPr>
-          <p:cNvPr id="21" name="Text 17"/>
+          <p:cNvPr id="20" name="Text 17"/>
           <p:cNvSpPr/>
           <p:nvPr/>
         </p:nvSpPr>
@@ -14746,7 +14746,7 @@
       </p:sp>
       <p:sp>
         <p:nvSpPr>
-          <p:cNvPr id="22" name="Text 18"/>
+          <p:cNvPr id="21" name="Text 18"/>
           <p:cNvSpPr/>
           <p:nvPr/>
         </p:nvSpPr>
@@ -14788,7 +14788,7 @@
       </p:sp>
       <p:sp>
         <p:nvSpPr>
-          <p:cNvPr id="23" name="Shape 19"/>
+          <p:cNvPr id="22" name="Shape 19"/>
           <p:cNvSpPr/>
           <p:nvPr/>
         </p:nvSpPr>
@@ -14815,7 +14815,7 @@
       </p:sp>
       <p:sp>
         <p:nvSpPr>
-          <p:cNvPr id="24" name="Shape 20"/>
+          <p:cNvPr id="23" name="Shape 20"/>
           <p:cNvSpPr/>
           <p:nvPr/>
         </p:nvSpPr>
@@ -14835,7 +14835,7 @@
       </p:sp>
       <p:sp>
         <p:nvSpPr>
-          <p:cNvPr id="25" name="Text 21"/>
+          <p:cNvPr id="24" name="Text 21"/>
           <p:cNvSpPr/>
           <p:nvPr/>
         </p:nvSpPr>
@@ -14874,7 +14874,7 @@
       </p:sp>
       <p:sp>
         <p:nvSpPr>
-          <p:cNvPr id="26" name="Text 22"/>
+          <p:cNvPr id="25" name="Text 22"/>
           <p:cNvSpPr/>
           <p:nvPr/>
         </p:nvSpPr>
@@ -14913,7 +14913,7 @@
       </p:sp>
       <p:sp>
         <p:nvSpPr>
-          <p:cNvPr id="27" name="Text 23"/>
+          <p:cNvPr id="26" name="Text 23"/>
           <p:cNvSpPr/>
           <p:nvPr/>
         </p:nvSpPr>
@@ -14955,7 +14955,7 @@
       </p:sp>
       <p:sp>
         <p:nvSpPr>
-          <p:cNvPr id="28" name="Shape 24"/>
+          <p:cNvPr id="27" name="Shape 24"/>
           <p:cNvSpPr/>
           <p:nvPr/>
         </p:nvSpPr>
@@ -14982,7 +14982,7 @@
       </p:sp>
       <p:sp>
         <p:nvSpPr>
-          <p:cNvPr id="29" name="Shape 25"/>
+          <p:cNvPr id="28" name="Shape 25"/>
           <p:cNvSpPr/>
           <p:nvPr/>
         </p:nvSpPr>
@@ -15002,7 +15002,7 @@
       </p:sp>
       <p:sp>
         <p:nvSpPr>
-          <p:cNvPr id="30" name="Text 26"/>
+          <p:cNvPr id="29" name="Text 26"/>
           <p:cNvSpPr/>
           <p:nvPr/>
         </p:nvSpPr>
@@ -15041,7 +15041,7 @@
       </p:sp>
       <p:sp>
         <p:nvSpPr>
-          <p:cNvPr id="31" name="Text 27"/>
+          <p:cNvPr id="30" name="Text 27"/>
           <p:cNvSpPr/>
           <p:nvPr/>
         </p:nvSpPr>
@@ -15080,7 +15080,7 @@
       </p:sp>
       <p:sp>
         <p:nvSpPr>
-          <p:cNvPr id="32" name="Text 28"/>
+          <p:cNvPr id="31" name="Text 28"/>
           <p:cNvSpPr/>
           <p:nvPr/>
         </p:nvSpPr>
@@ -15122,7 +15122,7 @@
       </p:sp>
       <p:sp>
         <p:nvSpPr>
-          <p:cNvPr id="33" name="Shape 29"/>
+          <p:cNvPr id="32" name="Shape 29"/>
           <p:cNvSpPr/>
           <p:nvPr/>
         </p:nvSpPr>
@@ -15149,7 +15149,7 @@
       </p:sp>
       <p:sp>
         <p:nvSpPr>
-          <p:cNvPr id="34" name="Shape 30"/>
+          <p:cNvPr id="33" name="Shape 30"/>
           <p:cNvSpPr/>
           <p:nvPr/>
         </p:nvSpPr>
@@ -15169,7 +15169,7 @@
       </p:sp>
       <p:sp>
         <p:nvSpPr>
-          <p:cNvPr id="35" name="Text 31"/>
+          <p:cNvPr id="34" name="Text 31"/>
           <p:cNvSpPr/>
           <p:nvPr/>
         </p:nvSpPr>
@@ -15208,7 +15208,7 @@
       </p:sp>
       <p:sp>
         <p:nvSpPr>
-          <p:cNvPr id="36" name="Text 32"/>
+          <p:cNvPr id="35" name="Text 32"/>
           <p:cNvSpPr/>
           <p:nvPr/>
         </p:nvSpPr>
@@ -15247,7 +15247,7 @@
       </p:sp>
       <p:sp>
         <p:nvSpPr>
-          <p:cNvPr id="37" name="Text 33"/>
+          <p:cNvPr id="36" name="Text 33"/>
           <p:cNvSpPr/>
           <p:nvPr/>
         </p:nvSpPr>
@@ -15493,7 +15493,7 @@
       </p:pic>
       <p:sp>
         <p:nvSpPr>
-          <p:cNvPr id="7" name="Shape 3"/>
+          <p:cNvPr id="6" name="Shape 3"/>
           <p:cNvSpPr/>
           <p:nvPr/>
         </p:nvSpPr>
@@ -15513,7 +15513,7 @@
       </p:sp>
       <p:sp>
         <p:nvSpPr>
-          <p:cNvPr id="8" name="Text 4"/>
+          <p:cNvPr id="7" name="Text 4"/>
           <p:cNvSpPr/>
           <p:nvPr/>
         </p:nvSpPr>
@@ -15552,7 +15552,7 @@
       </p:sp>
       <p:sp>
         <p:nvSpPr>
-          <p:cNvPr id="9" name="Text 5"/>
+          <p:cNvPr id="8" name="Text 5"/>
           <p:cNvSpPr/>
           <p:nvPr/>
         </p:nvSpPr>
@@ -15605,7 +15605,7 @@
       </p:sp>
       <p:sp>
         <p:nvSpPr>
-          <p:cNvPr id="10" name="Shape 6"/>
+          <p:cNvPr id="9" name="Shape 6"/>
           <p:cNvSpPr/>
           <p:nvPr/>
         </p:nvSpPr>
@@ -15625,7 +15625,7 @@
       </p:sp>
       <p:sp>
         <p:nvSpPr>
-          <p:cNvPr id="11" name="Text 7"/>
+          <p:cNvPr id="10" name="Text 7"/>
           <p:cNvSpPr/>
           <p:nvPr/>
         </p:nvSpPr>
@@ -15664,7 +15664,7 @@
       </p:sp>
       <p:sp>
         <p:nvSpPr>
-          <p:cNvPr id="12" name="Text 8"/>
+          <p:cNvPr id="11" name="Text 8"/>
           <p:cNvSpPr/>
           <p:nvPr/>
         </p:nvSpPr>
@@ -15717,7 +15717,7 @@
       </p:sp>
       <p:sp>
         <p:nvSpPr>
-          <p:cNvPr id="13" name="Shape 9"/>
+          <p:cNvPr id="12" name="Shape 9"/>
           <p:cNvSpPr/>
           <p:nvPr/>
         </p:nvSpPr>
@@ -15737,7 +15737,7 @@
       </p:sp>
       <p:sp>
         <p:nvSpPr>
-          <p:cNvPr id="14" name="Text 10"/>
+          <p:cNvPr id="13" name="Text 10"/>
           <p:cNvSpPr/>
           <p:nvPr/>
         </p:nvSpPr>
@@ -15776,7 +15776,7 @@
       </p:sp>
       <p:sp>
         <p:nvSpPr>
-          <p:cNvPr id="15" name="Text 11"/>
+          <p:cNvPr id="14" name="Text 11"/>
           <p:cNvSpPr/>
           <p:nvPr/>
         </p:nvSpPr>
@@ -15829,7 +15829,7 @@
       </p:sp>
       <p:sp>
         <p:nvSpPr>
-          <p:cNvPr id="16" name="Shape 12"/>
+          <p:cNvPr id="15" name="Shape 12"/>
           <p:cNvSpPr/>
           <p:nvPr/>
         </p:nvSpPr>
@@ -15849,7 +15849,7 @@
       </p:sp>
       <p:sp>
         <p:nvSpPr>
-          <p:cNvPr id="17" name="Text 13"/>
+          <p:cNvPr id="16" name="Text 13"/>
           <p:cNvSpPr/>
           <p:nvPr/>
         </p:nvSpPr>
@@ -15888,7 +15888,7 @@
       </p:sp>
       <p:sp>
         <p:nvSpPr>
-          <p:cNvPr id="18" name="Text 14"/>
+          <p:cNvPr id="17" name="Text 14"/>
           <p:cNvSpPr/>
           <p:nvPr/>
         </p:nvSpPr>
@@ -15941,7 +15941,7 @@
       </p:sp>
       <p:sp>
         <p:nvSpPr>
-          <p:cNvPr id="19" name="Shape 15"/>
+          <p:cNvPr id="18" name="Shape 15"/>
           <p:cNvSpPr/>
           <p:nvPr/>
         </p:nvSpPr>
@@ -15961,7 +15961,7 @@
       </p:sp>
       <p:sp>
         <p:nvSpPr>
-          <p:cNvPr id="20" name="Text 16"/>
+          <p:cNvPr id="19" name="Text 16"/>
           <p:cNvSpPr/>
           <p:nvPr/>
         </p:nvSpPr>
@@ -16000,7 +16000,7 @@
       </p:sp>
       <p:sp>
         <p:nvSpPr>
-          <p:cNvPr id="21" name="Text 17"/>
+          <p:cNvPr id="20" name="Text 17"/>
           <p:cNvSpPr/>
           <p:nvPr/>
         </p:nvSpPr>
@@ -16053,7 +16053,7 @@
       </p:sp>
       <p:sp>
         <p:nvSpPr>
-          <p:cNvPr id="22" name="Shape 18"/>
+          <p:cNvPr id="21" name="Shape 18"/>
           <p:cNvSpPr/>
           <p:nvPr/>
         </p:nvSpPr>
@@ -16073,7 +16073,7 @@
       </p:sp>
       <p:sp>
         <p:nvSpPr>
-          <p:cNvPr id="23" name="Text 19"/>
+          <p:cNvPr id="22" name="Text 19"/>
           <p:cNvSpPr/>
           <p:nvPr/>
         </p:nvSpPr>
@@ -16112,7 +16112,7 @@
       </p:sp>
       <p:sp>
         <p:nvSpPr>
-          <p:cNvPr id="24" name="Text 20"/>
+          <p:cNvPr id="23" name="Text 20"/>
           <p:cNvSpPr/>
           <p:nvPr/>
         </p:nvSpPr>
@@ -16369,7 +16369,7 @@
       </p:pic>
       <p:sp>
         <p:nvSpPr>
-          <p:cNvPr id="7" name="Shape 3"/>
+          <p:cNvPr id="6" name="Shape 3"/>
           <p:cNvSpPr/>
           <p:nvPr/>
         </p:nvSpPr>
@@ -16391,7 +16391,7 @@
       </p:sp>
       <p:sp>
         <p:nvSpPr>
-          <p:cNvPr id="8" name="Text 4"/>
+          <p:cNvPr id="7" name="Text 4"/>
           <p:cNvSpPr/>
           <p:nvPr/>
         </p:nvSpPr>
@@ -16430,7 +16430,7 @@
       </p:sp>
       <p:sp>
         <p:nvSpPr>
-          <p:cNvPr id="9" name="Text 5"/>
+          <p:cNvPr id="8" name="Text 5"/>
           <p:cNvSpPr/>
           <p:nvPr/>
         </p:nvSpPr>
@@ -16472,7 +16472,7 @@
       </p:sp>
       <p:sp>
         <p:nvSpPr>
-          <p:cNvPr id="10" name="Shape 6"/>
+          <p:cNvPr id="9" name="Shape 6"/>
           <p:cNvSpPr/>
           <p:nvPr/>
         </p:nvSpPr>
@@ -16494,7 +16494,7 @@
       </p:sp>
       <p:sp>
         <p:nvSpPr>
-          <p:cNvPr id="11" name="Text 7"/>
+          <p:cNvPr id="10" name="Text 7"/>
           <p:cNvSpPr/>
           <p:nvPr/>
         </p:nvSpPr>
@@ -16533,7 +16533,7 @@
       </p:sp>
       <p:sp>
         <p:nvSpPr>
-          <p:cNvPr id="12" name="Text 8"/>
+          <p:cNvPr id="11" name="Text 8"/>
           <p:cNvSpPr/>
           <p:nvPr/>
         </p:nvSpPr>
@@ -16575,7 +16575,7 @@
       </p:sp>
       <p:sp>
         <p:nvSpPr>
-          <p:cNvPr id="13" name="Shape 9"/>
+          <p:cNvPr id="12" name="Shape 9"/>
           <p:cNvSpPr/>
           <p:nvPr/>
         </p:nvSpPr>
@@ -16597,7 +16597,7 @@
       </p:sp>
       <p:sp>
         <p:nvSpPr>
-          <p:cNvPr id="14" name="Text 10"/>
+          <p:cNvPr id="13" name="Text 10"/>
           <p:cNvSpPr/>
           <p:nvPr/>
         </p:nvSpPr>
@@ -16636,7 +16636,7 @@
       </p:sp>
       <p:sp>
         <p:nvSpPr>
-          <p:cNvPr id="15" name="Text 11"/>
+          <p:cNvPr id="14" name="Text 11"/>
           <p:cNvSpPr/>
           <p:nvPr/>
         </p:nvSpPr>
@@ -16678,7 +16678,7 @@
       </p:sp>
       <p:sp>
         <p:nvSpPr>
-          <p:cNvPr id="16" name="Shape 12"/>
+          <p:cNvPr id="15" name="Shape 12"/>
           <p:cNvSpPr/>
           <p:nvPr/>
         </p:nvSpPr>
@@ -16700,7 +16700,7 @@
       </p:sp>
       <p:sp>
         <p:nvSpPr>
-          <p:cNvPr id="17" name="Text 13"/>
+          <p:cNvPr id="16" name="Text 13"/>
           <p:cNvSpPr/>
           <p:nvPr/>
         </p:nvSpPr>
@@ -16739,7 +16739,7 @@
       </p:sp>
       <p:sp>
         <p:nvSpPr>
-          <p:cNvPr id="18" name="Shape 14"/>
+          <p:cNvPr id="17" name="Shape 14"/>
           <p:cNvSpPr/>
           <p:nvPr/>
         </p:nvSpPr>
@@ -16762,7 +16762,7 @@
       </p:sp>
       <p:sp>
         <p:nvSpPr>
-          <p:cNvPr id="19" name="Shape 15"/>
+          <p:cNvPr id="18" name="Shape 15"/>
           <p:cNvSpPr/>
           <p:nvPr/>
         </p:nvSpPr>
@@ -16782,7 +16782,7 @@
       </p:sp>
       <p:sp>
         <p:nvSpPr>
-          <p:cNvPr id="20" name="Shape 16"/>
+          <p:cNvPr id="19" name="Shape 16"/>
           <p:cNvSpPr/>
           <p:nvPr/>
         </p:nvSpPr>
@@ -16809,7 +16809,7 @@
       </p:sp>
       <p:sp>
         <p:nvSpPr>
-          <p:cNvPr id="21" name="Text 17"/>
+          <p:cNvPr id="20" name="Text 17"/>
           <p:cNvSpPr/>
           <p:nvPr/>
         </p:nvSpPr>
@@ -16848,7 +16848,7 @@
       </p:sp>
       <p:sp>
         <p:nvSpPr>
-          <p:cNvPr id="22" name="Shape 18"/>
+          <p:cNvPr id="21" name="Shape 18"/>
           <p:cNvSpPr/>
           <p:nvPr/>
         </p:nvSpPr>
@@ -16871,7 +16871,7 @@
       </p:sp>
       <p:sp>
         <p:nvSpPr>
-          <p:cNvPr id="23" name="Shape 19"/>
+          <p:cNvPr id="22" name="Shape 19"/>
           <p:cNvSpPr/>
           <p:nvPr/>
         </p:nvSpPr>
@@ -16891,7 +16891,7 @@
       </p:sp>
       <p:sp>
         <p:nvSpPr>
-          <p:cNvPr id="24" name="Shape 20"/>
+          <p:cNvPr id="23" name="Shape 20"/>
           <p:cNvSpPr/>
           <p:nvPr/>
         </p:nvSpPr>
@@ -16918,7 +16918,7 @@
       </p:sp>
       <p:sp>
         <p:nvSpPr>
-          <p:cNvPr id="25" name="Text 21"/>
+          <p:cNvPr id="24" name="Text 21"/>
           <p:cNvSpPr/>
           <p:nvPr/>
         </p:nvSpPr>
@@ -16957,7 +16957,7 @@
       </p:sp>
       <p:sp>
         <p:nvSpPr>
-          <p:cNvPr id="26" name="Shape 22"/>
+          <p:cNvPr id="25" name="Shape 22"/>
           <p:cNvSpPr/>
           <p:nvPr/>
         </p:nvSpPr>
@@ -16980,7 +16980,7 @@
       </p:sp>
       <p:sp>
         <p:nvSpPr>
-          <p:cNvPr id="27" name="Shape 23"/>
+          <p:cNvPr id="26" name="Shape 23"/>
           <p:cNvSpPr/>
           <p:nvPr/>
         </p:nvSpPr>
@@ -17000,7 +17000,7 @@
       </p:sp>
       <p:sp>
         <p:nvSpPr>
-          <p:cNvPr id="28" name="Shape 24"/>
+          <p:cNvPr id="27" name="Shape 24"/>
           <p:cNvSpPr/>
           <p:nvPr/>
         </p:nvSpPr>
@@ -17027,7 +17027,7 @@
       </p:sp>
       <p:sp>
         <p:nvSpPr>
-          <p:cNvPr id="29" name="Text 25"/>
+          <p:cNvPr id="28" name="Text 25"/>
           <p:cNvSpPr/>
           <p:nvPr/>
         </p:nvSpPr>
@@ -17066,7 +17066,7 @@
       </p:sp>
       <p:sp>
         <p:nvSpPr>
-          <p:cNvPr id="30" name="Shape 26"/>
+          <p:cNvPr id="29" name="Shape 26"/>
           <p:cNvSpPr/>
           <p:nvPr/>
         </p:nvSpPr>
@@ -17089,7 +17089,7 @@
       </p:sp>
       <p:sp>
         <p:nvSpPr>
-          <p:cNvPr id="31" name="Shape 27"/>
+          <p:cNvPr id="30" name="Shape 27"/>
           <p:cNvSpPr/>
           <p:nvPr/>
         </p:nvSpPr>
@@ -17109,7 +17109,7 @@
       </p:sp>
       <p:sp>
         <p:nvSpPr>
-          <p:cNvPr id="32" name="Shape 28"/>
+          <p:cNvPr id="31" name="Shape 28"/>
           <p:cNvSpPr/>
           <p:nvPr/>
         </p:nvSpPr>
@@ -17136,7 +17136,7 @@
       </p:sp>
       <p:sp>
         <p:nvSpPr>
-          <p:cNvPr id="33" name="Text 29"/>
+          <p:cNvPr id="32" name="Text 29"/>
           <p:cNvSpPr/>
           <p:nvPr/>
         </p:nvSpPr>
@@ -17175,7 +17175,7 @@
       </p:sp>
       <p:sp>
         <p:nvSpPr>
-          <p:cNvPr id="34" name="Shape 30"/>
+          <p:cNvPr id="33" name="Shape 30"/>
           <p:cNvSpPr/>
           <p:nvPr/>
         </p:nvSpPr>
@@ -17198,7 +17198,7 @@
       </p:sp>
       <p:sp>
         <p:nvSpPr>
-          <p:cNvPr id="35" name="Shape 31"/>
+          <p:cNvPr id="34" name="Shape 31"/>
           <p:cNvSpPr/>
           <p:nvPr/>
         </p:nvSpPr>
@@ -17218,7 +17218,7 @@
       </p:sp>
       <p:sp>
         <p:nvSpPr>
-          <p:cNvPr id="36" name="Shape 32"/>
+          <p:cNvPr id="35" name="Shape 32"/>
           <p:cNvSpPr/>
           <p:nvPr/>
         </p:nvSpPr>
@@ -17245,7 +17245,7 @@
       </p:sp>
       <p:sp>
         <p:nvSpPr>
-          <p:cNvPr id="37" name="Text 33"/>
+          <p:cNvPr id="36" name="Text 33"/>
           <p:cNvSpPr/>
           <p:nvPr/>
         </p:nvSpPr>
@@ -17284,7 +17284,7 @@
       </p:sp>
       <p:sp>
         <p:nvSpPr>
-          <p:cNvPr id="38" name="Shape 34"/>
+          <p:cNvPr id="37" name="Shape 34"/>
           <p:cNvSpPr/>
           <p:nvPr/>
         </p:nvSpPr>
@@ -17307,7 +17307,7 @@
       </p:sp>
       <p:sp>
         <p:nvSpPr>
-          <p:cNvPr id="39" name="Shape 35"/>
+          <p:cNvPr id="38" name="Shape 35"/>
           <p:cNvSpPr/>
           <p:nvPr/>
         </p:nvSpPr>
@@ -17327,7 +17327,7 @@
       </p:sp>
       <p:sp>
         <p:nvSpPr>
-          <p:cNvPr id="40" name="Shape 36"/>
+          <p:cNvPr id="39" name="Shape 36"/>
           <p:cNvSpPr/>
           <p:nvPr/>
         </p:nvSpPr>
@@ -17349,7 +17349,7 @@
       </p:sp>
       <p:sp>
         <p:nvSpPr>
-          <p:cNvPr id="41" name="Text 37"/>
+          <p:cNvPr id="40" name="Text 37"/>
           <p:cNvSpPr/>
           <p:nvPr/>
         </p:nvSpPr>
@@ -17388,7 +17388,7 @@
       </p:sp>
       <p:sp>
         <p:nvSpPr>
-          <p:cNvPr id="42" name="Shape 38"/>
+          <p:cNvPr id="41" name="Shape 38"/>
           <p:cNvSpPr/>
           <p:nvPr/>
         </p:nvSpPr>
@@ -17410,7 +17410,7 @@
       </p:sp>
       <p:sp>
         <p:nvSpPr>
-          <p:cNvPr id="43" name="Text 39"/>
+          <p:cNvPr id="42" name="Text 39"/>
           <p:cNvSpPr/>
           <p:nvPr/>
         </p:nvSpPr>
@@ -17656,7 +17656,7 @@
       </p:pic>
       <p:sp>
         <p:nvSpPr>
-          <p:cNvPr id="7" name="Shape 3"/>
+          <p:cNvPr id="6" name="Shape 3"/>
           <p:cNvSpPr/>
           <p:nvPr/>
         </p:nvSpPr>
@@ -17683,7 +17683,7 @@
       </p:sp>
       <p:sp>
         <p:nvSpPr>
-          <p:cNvPr id="8" name="Shape 4"/>
+          <p:cNvPr id="7" name="Shape 4"/>
           <p:cNvSpPr/>
           <p:nvPr/>
         </p:nvSpPr>
@@ -17710,7 +17710,7 @@
       </p:sp>
       <p:sp>
         <p:nvSpPr>
-          <p:cNvPr id="9" name="Shape 5"/>
+          <p:cNvPr id="8" name="Shape 5"/>
           <p:cNvSpPr/>
           <p:nvPr/>
         </p:nvSpPr>
@@ -17730,7 +17730,7 @@
       </p:sp>
       <p:sp>
         <p:nvSpPr>
-          <p:cNvPr id="10" name="Shape 6"/>
+          <p:cNvPr id="9" name="Shape 6"/>
           <p:cNvSpPr/>
           <p:nvPr/>
         </p:nvSpPr>
@@ -17750,7 +17750,7 @@
       </p:sp>
       <p:sp>
         <p:nvSpPr>
-          <p:cNvPr id="11" name="Text 7"/>
+          <p:cNvPr id="10" name="Text 7"/>
           <p:cNvSpPr/>
           <p:nvPr/>
         </p:nvSpPr>
@@ -17789,7 +17789,7 @@
       </p:sp>
       <p:sp>
         <p:nvSpPr>
-          <p:cNvPr id="12" name="Shape 8"/>
+          <p:cNvPr id="11" name="Shape 8"/>
           <p:cNvSpPr/>
           <p:nvPr/>
         </p:nvSpPr>
@@ -17816,7 +17816,7 @@
       </p:sp>
       <p:sp>
         <p:nvSpPr>
-          <p:cNvPr id="13" name="Shape 9"/>
+          <p:cNvPr id="12" name="Shape 9"/>
           <p:cNvSpPr/>
           <p:nvPr/>
         </p:nvSpPr>
@@ -17836,7 +17836,7 @@
       </p:sp>
       <p:sp>
         <p:nvSpPr>
-          <p:cNvPr id="14" name="Shape 10"/>
+          <p:cNvPr id="13" name="Shape 10"/>
           <p:cNvSpPr/>
           <p:nvPr/>
         </p:nvSpPr>
@@ -17856,7 +17856,7 @@
       </p:sp>
       <p:sp>
         <p:nvSpPr>
-          <p:cNvPr id="15" name="Text 11"/>
+          <p:cNvPr id="14" name="Text 11"/>
           <p:cNvSpPr/>
           <p:nvPr/>
         </p:nvSpPr>
@@ -17895,7 +17895,7 @@
       </p:sp>
       <p:sp>
         <p:nvSpPr>
-          <p:cNvPr id="16" name="Shape 12"/>
+          <p:cNvPr id="15" name="Shape 12"/>
           <p:cNvSpPr/>
           <p:nvPr/>
         </p:nvSpPr>
@@ -17922,7 +17922,7 @@
       </p:sp>
       <p:sp>
         <p:nvSpPr>
-          <p:cNvPr id="17" name="Shape 13"/>
+          <p:cNvPr id="16" name="Shape 13"/>
           <p:cNvSpPr/>
           <p:nvPr/>
         </p:nvSpPr>
@@ -17942,7 +17942,7 @@
       </p:sp>
       <p:sp>
         <p:nvSpPr>
-          <p:cNvPr id="18" name="Shape 14"/>
+          <p:cNvPr id="17" name="Shape 14"/>
           <p:cNvSpPr/>
           <p:nvPr/>
         </p:nvSpPr>
@@ -17962,7 +17962,7 @@
       </p:sp>
       <p:sp>
         <p:nvSpPr>
-          <p:cNvPr id="19" name="Text 15"/>
+          <p:cNvPr id="18" name="Text 15"/>
           <p:cNvSpPr/>
           <p:nvPr/>
         </p:nvSpPr>
@@ -18001,7 +18001,7 @@
       </p:sp>
       <p:sp>
         <p:nvSpPr>
-          <p:cNvPr id="20" name="Shape 16"/>
+          <p:cNvPr id="19" name="Shape 16"/>
           <p:cNvSpPr/>
           <p:nvPr/>
         </p:nvSpPr>
@@ -18028,7 +18028,7 @@
       </p:sp>
       <p:sp>
         <p:nvSpPr>
-          <p:cNvPr id="21" name="Shape 17"/>
+          <p:cNvPr id="20" name="Shape 17"/>
           <p:cNvSpPr/>
           <p:nvPr/>
         </p:nvSpPr>
@@ -18048,7 +18048,7 @@
       </p:sp>
       <p:sp>
         <p:nvSpPr>
-          <p:cNvPr id="22" name="Shape 18"/>
+          <p:cNvPr id="21" name="Shape 18"/>
           <p:cNvSpPr/>
           <p:nvPr/>
         </p:nvSpPr>
@@ -18068,7 +18068,7 @@
       </p:sp>
       <p:sp>
         <p:nvSpPr>
-          <p:cNvPr id="23" name="Text 19"/>
+          <p:cNvPr id="22" name="Text 19"/>
           <p:cNvSpPr/>
           <p:nvPr/>
         </p:nvSpPr>
@@ -18107,7 +18107,7 @@
       </p:sp>
       <p:sp>
         <p:nvSpPr>
-          <p:cNvPr id="24" name="Shape 20"/>
+          <p:cNvPr id="23" name="Shape 20"/>
           <p:cNvSpPr/>
           <p:nvPr/>
         </p:nvSpPr>
@@ -18134,7 +18134,7 @@
       </p:sp>
       <p:sp>
         <p:nvSpPr>
-          <p:cNvPr id="25" name="Shape 21"/>
+          <p:cNvPr id="24" name="Shape 21"/>
           <p:cNvSpPr/>
           <p:nvPr/>
         </p:nvSpPr>
@@ -18154,7 +18154,7 @@
       </p:sp>
       <p:sp>
         <p:nvSpPr>
-          <p:cNvPr id="26" name="Shape 22"/>
+          <p:cNvPr id="25" name="Shape 22"/>
           <p:cNvSpPr/>
           <p:nvPr/>
         </p:nvSpPr>
@@ -18174,7 +18174,7 @@
       </p:sp>
       <p:sp>
         <p:nvSpPr>
-          <p:cNvPr id="27" name="Text 23"/>
+          <p:cNvPr id="26" name="Text 23"/>
           <p:cNvSpPr/>
           <p:nvPr/>
         </p:nvSpPr>
@@ -18213,7 +18213,7 @@
       </p:sp>
       <p:sp>
         <p:nvSpPr>
-          <p:cNvPr id="28" name="Shape 24"/>
+          <p:cNvPr id="27" name="Shape 24"/>
           <p:cNvSpPr/>
           <p:nvPr/>
         </p:nvSpPr>
@@ -18240,7 +18240,7 @@
       </p:sp>
       <p:sp>
         <p:nvSpPr>
-          <p:cNvPr id="29" name="Shape 25"/>
+          <p:cNvPr id="28" name="Shape 25"/>
           <p:cNvSpPr/>
           <p:nvPr/>
         </p:nvSpPr>
@@ -18260,7 +18260,7 @@
       </p:sp>
       <p:sp>
         <p:nvSpPr>
-          <p:cNvPr id="30" name="Shape 26"/>
+          <p:cNvPr id="29" name="Shape 26"/>
           <p:cNvSpPr/>
           <p:nvPr/>
         </p:nvSpPr>
@@ -18280,7 +18280,7 @@
       </p:sp>
       <p:sp>
         <p:nvSpPr>
-          <p:cNvPr id="31" name="Text 27"/>
+          <p:cNvPr id="30" name="Text 27"/>
           <p:cNvSpPr/>
           <p:nvPr/>
         </p:nvSpPr>
@@ -18319,7 +18319,7 @@
       </p:sp>
       <p:sp>
         <p:nvSpPr>
-          <p:cNvPr id="32" name="Text 28"/>
+          <p:cNvPr id="31" name="Text 28"/>
           <p:cNvSpPr/>
           <p:nvPr/>
         </p:nvSpPr>
@@ -18562,7 +18562,7 @@
       </p:pic>
       <p:sp>
         <p:nvSpPr>
-          <p:cNvPr id="7" name="Shape 3"/>
+          <p:cNvPr id="6" name="Shape 3"/>
           <p:cNvSpPr/>
           <p:nvPr/>
         </p:nvSpPr>
@@ -18589,7 +18589,7 @@
       </p:sp>
       <p:sp>
         <p:nvSpPr>
-          <p:cNvPr id="8" name="Shape 4"/>
+          <p:cNvPr id="7" name="Shape 4"/>
           <p:cNvSpPr/>
           <p:nvPr/>
         </p:nvSpPr>
@@ -18609,7 +18609,7 @@
       </p:sp>
       <p:sp>
         <p:nvSpPr>
-          <p:cNvPr id="9" name="Shape 5"/>
+          <p:cNvPr id="8" name="Shape 5"/>
           <p:cNvSpPr/>
           <p:nvPr/>
         </p:nvSpPr>
@@ -18629,7 +18629,7 @@
       </p:sp>
       <p:sp>
         <p:nvSpPr>
-          <p:cNvPr id="10" name="Shape 6"/>
+          <p:cNvPr id="9" name="Shape 6"/>
           <p:cNvSpPr/>
           <p:nvPr/>
         </p:nvSpPr>
@@ -18649,7 +18649,7 @@
       </p:sp>
       <p:sp>
         <p:nvSpPr>
-          <p:cNvPr id="11" name="Text 7"/>
+          <p:cNvPr id="10" name="Text 7"/>
           <p:cNvSpPr/>
           <p:nvPr/>
         </p:nvSpPr>
@@ -18702,7 +18702,7 @@
       </p:sp>
       <p:sp>
         <p:nvSpPr>
-          <p:cNvPr id="12" name="Shape 8"/>
+          <p:cNvPr id="11" name="Shape 8"/>
           <p:cNvSpPr/>
           <p:nvPr/>
         </p:nvSpPr>
@@ -18729,7 +18729,7 @@
       </p:sp>
       <p:sp>
         <p:nvSpPr>
-          <p:cNvPr id="13" name="Shape 9"/>
+          <p:cNvPr id="12" name="Shape 9"/>
           <p:cNvSpPr/>
           <p:nvPr/>
         </p:nvSpPr>
@@ -18749,7 +18749,7 @@
       </p:sp>
       <p:sp>
         <p:nvSpPr>
-          <p:cNvPr id="14" name="Shape 10"/>
+          <p:cNvPr id="13" name="Shape 10"/>
           <p:cNvSpPr/>
           <p:nvPr/>
         </p:nvSpPr>
@@ -18769,7 +18769,7 @@
       </p:sp>
       <p:sp>
         <p:nvSpPr>
-          <p:cNvPr id="15" name="Shape 11"/>
+          <p:cNvPr id="14" name="Shape 11"/>
           <p:cNvSpPr/>
           <p:nvPr/>
         </p:nvSpPr>
@@ -18789,7 +18789,7 @@
       </p:sp>
       <p:sp>
         <p:nvSpPr>
-          <p:cNvPr id="16" name="Text 12"/>
+          <p:cNvPr id="15" name="Text 12"/>
           <p:cNvSpPr/>
           <p:nvPr/>
         </p:nvSpPr>
@@ -18842,7 +18842,7 @@
       </p:sp>
       <p:sp>
         <p:nvSpPr>
-          <p:cNvPr id="17" name="Shape 13"/>
+          <p:cNvPr id="16" name="Shape 13"/>
           <p:cNvSpPr/>
           <p:nvPr/>
         </p:nvSpPr>
@@ -18869,7 +18869,7 @@
       </p:sp>
       <p:sp>
         <p:nvSpPr>
-          <p:cNvPr id="18" name="Shape 14"/>
+          <p:cNvPr id="17" name="Shape 14"/>
           <p:cNvSpPr/>
           <p:nvPr/>
         </p:nvSpPr>
@@ -18889,7 +18889,7 @@
       </p:sp>
       <p:sp>
         <p:nvSpPr>
-          <p:cNvPr id="19" name="Shape 15"/>
+          <p:cNvPr id="18" name="Shape 15"/>
           <p:cNvSpPr/>
           <p:nvPr/>
         </p:nvSpPr>
@@ -18909,7 +18909,7 @@
       </p:sp>
       <p:sp>
         <p:nvSpPr>
-          <p:cNvPr id="20" name="Shape 16"/>
+          <p:cNvPr id="19" name="Shape 16"/>
           <p:cNvSpPr/>
           <p:nvPr/>
         </p:nvSpPr>
@@ -18929,7 +18929,7 @@
       </p:sp>
       <p:sp>
         <p:nvSpPr>
-          <p:cNvPr id="21" name="Text 17"/>
+          <p:cNvPr id="20" name="Text 17"/>
           <p:cNvSpPr/>
           <p:nvPr/>
         </p:nvSpPr>
@@ -18982,7 +18982,7 @@
       </p:sp>
       <p:sp>
         <p:nvSpPr>
-          <p:cNvPr id="22" name="Shape 18"/>
+          <p:cNvPr id="21" name="Shape 18"/>
           <p:cNvSpPr/>
           <p:nvPr/>
         </p:nvSpPr>
@@ -19009,7 +19009,7 @@
       </p:sp>
       <p:sp>
         <p:nvSpPr>
-          <p:cNvPr id="23" name="Shape 19"/>
+          <p:cNvPr id="22" name="Shape 19"/>
           <p:cNvSpPr/>
           <p:nvPr/>
         </p:nvSpPr>
@@ -19029,7 +19029,7 @@
       </p:sp>
       <p:sp>
         <p:nvSpPr>
-          <p:cNvPr id="24" name="Shape 20"/>
+          <p:cNvPr id="23" name="Shape 20"/>
           <p:cNvSpPr/>
           <p:nvPr/>
         </p:nvSpPr>
@@ -19049,7 +19049,7 @@
       </p:sp>
       <p:sp>
         <p:nvSpPr>
-          <p:cNvPr id="25" name="Shape 21"/>
+          <p:cNvPr id="24" name="Shape 21"/>
           <p:cNvSpPr/>
           <p:nvPr/>
         </p:nvSpPr>
@@ -19069,7 +19069,7 @@
       </p:sp>
       <p:sp>
         <p:nvSpPr>
-          <p:cNvPr id="26" name="Text 22"/>
+          <p:cNvPr id="25" name="Text 22"/>
           <p:cNvSpPr/>
           <p:nvPr/>
         </p:nvSpPr>
@@ -19122,7 +19122,7 @@
       </p:sp>
       <p:sp>
         <p:nvSpPr>
-          <p:cNvPr id="27" name="Shape 23"/>
+          <p:cNvPr id="26" name="Shape 23"/>
           <p:cNvSpPr/>
           <p:nvPr/>
         </p:nvSpPr>
@@ -19149,7 +19149,7 @@
       </p:sp>
       <p:sp>
         <p:nvSpPr>
-          <p:cNvPr id="28" name="Shape 24"/>
+          <p:cNvPr id="27" name="Shape 24"/>
           <p:cNvSpPr/>
           <p:nvPr/>
         </p:nvSpPr>
@@ -19169,7 +19169,7 @@
       </p:sp>
       <p:sp>
         <p:nvSpPr>
-          <p:cNvPr id="29" name="Shape 25"/>
+          <p:cNvPr id="28" name="Shape 25"/>
           <p:cNvSpPr/>
           <p:nvPr/>
         </p:nvSpPr>
@@ -19189,7 +19189,7 @@
       </p:sp>
       <p:sp>
         <p:nvSpPr>
-          <p:cNvPr id="30" name="Shape 26"/>
+          <p:cNvPr id="29" name="Shape 26"/>
           <p:cNvSpPr/>
           <p:nvPr/>
         </p:nvSpPr>
@@ -19209,7 +19209,7 @@
       </p:sp>
       <p:sp>
         <p:nvSpPr>
-          <p:cNvPr id="31" name="Text 27"/>
+          <p:cNvPr id="30" name="Text 27"/>
           <p:cNvSpPr/>
           <p:nvPr/>
         </p:nvSpPr>
@@ -19466,7 +19466,7 @@
       </p:pic>
       <p:sp>
         <p:nvSpPr>
-          <p:cNvPr id="7" name="Shape 3"/>
+          <p:cNvPr id="6" name="Shape 3"/>
           <p:cNvSpPr/>
           <p:nvPr/>
         </p:nvSpPr>
@@ -19493,7 +19493,7 @@
       </p:sp>
       <p:sp>
         <p:nvSpPr>
-          <p:cNvPr id="8" name="Text 4"/>
+          <p:cNvPr id="7" name="Text 4"/>
           <p:cNvSpPr/>
           <p:nvPr/>
         </p:nvSpPr>
@@ -19532,7 +19532,7 @@
       </p:sp>
       <p:sp>
         <p:nvSpPr>
-          <p:cNvPr id="9" name="Text 5"/>
+          <p:cNvPr id="8" name="Text 5"/>
           <p:cNvSpPr/>
           <p:nvPr/>
         </p:nvSpPr>
@@ -19632,7 +19632,7 @@
       </p:sp>
       <p:sp>
         <p:nvSpPr>
-          <p:cNvPr id="10" name="Shape 6"/>
+          <p:cNvPr id="9" name="Shape 6"/>
           <p:cNvSpPr/>
           <p:nvPr/>
         </p:nvSpPr>
@@ -19654,7 +19654,7 @@
       </p:sp>
       <p:sp>
         <p:nvSpPr>
-          <p:cNvPr id="11" name="Text 7"/>
+          <p:cNvPr id="10" name="Text 7"/>
           <p:cNvSpPr/>
           <p:nvPr/>
         </p:nvSpPr>
@@ -19693,7 +19693,7 @@
       </p:sp>
       <p:sp>
         <p:nvSpPr>
-          <p:cNvPr id="12" name="Text 8"/>
+          <p:cNvPr id="11" name="Text 8"/>
           <p:cNvSpPr/>
           <p:nvPr/>
         </p:nvSpPr>
@@ -19764,7 +19764,7 @@
       </p:sp>
       <p:sp>
         <p:nvSpPr>
-          <p:cNvPr id="13" name="Shape 9"/>
+          <p:cNvPr id="12" name="Shape 9"/>
           <p:cNvSpPr/>
           <p:nvPr/>
         </p:nvSpPr>
@@ -19791,7 +19791,7 @@
       </p:sp>
       <p:sp>
         <p:nvSpPr>
-          <p:cNvPr id="14" name="Text 10"/>
+          <p:cNvPr id="13" name="Text 10"/>
           <p:cNvSpPr/>
           <p:nvPr/>
         </p:nvSpPr>
@@ -19830,7 +19830,7 @@
       </p:sp>
       <p:sp>
         <p:nvSpPr>
-          <p:cNvPr id="15" name="Text 11"/>
+          <p:cNvPr id="14" name="Text 11"/>
           <p:cNvSpPr/>
           <p:nvPr/>
         </p:nvSpPr>
@@ -20596,613 +20596,13 @@
       </p:pic>
       <p:sp>
         <p:nvSpPr>
-          <p:cNvPr id="7" name="Shape 3"/>
+          <p:cNvPr id="6" name="Shape 3"/>
           <p:cNvSpPr/>
           <p:nvPr/>
         </p:nvSpPr>
         <p:spPr>
           <a:xfrm>
             <a:off x="566928" y="1645920"/>
-            <a:ext cx="3520440" cy="868680"/>
-          </a:xfrm>
-          <a:prstGeom prst="roundRect">
-            <a:avLst>
-              <a:gd name="adj" fmla="val 12632"/>
-            </a:avLst>
-          </a:prstGeom>
-          <a:solidFill>
-            <a:srgbClr val="EFEAFE"/>
-          </a:solidFill>
-          <a:ln/>
-        </p:spPr>
-      </p:sp>
-      <p:sp>
-        <p:nvSpPr>
-          <p:cNvPr id="8" name="Shape 4"/>
-          <p:cNvSpPr/>
-          <p:nvPr/>
-        </p:nvSpPr>
-        <p:spPr>
-          <a:xfrm>
-            <a:off x="768096" y="1828800"/>
-            <a:ext cx="384048" cy="384048"/>
-          </a:xfrm>
-          <a:prstGeom prst="ellipse">
-            <a:avLst/>
-          </a:prstGeom>
-          <a:solidFill>
-            <a:srgbClr val="5A05F4"/>
-          </a:solidFill>
-          <a:ln/>
-        </p:spPr>
-      </p:sp>
-      <p:sp>
-        <p:nvSpPr>
-          <p:cNvPr id="9" name="Text 5"/>
-          <p:cNvSpPr/>
-          <p:nvPr/>
-        </p:nvSpPr>
-        <p:spPr>
-          <a:xfrm>
-            <a:off x="768096" y="1828800"/>
-            <a:ext cx="384048" cy="384048"/>
-          </a:xfrm>
-          <a:prstGeom prst="rect">
-            <a:avLst/>
-          </a:prstGeom>
-          <a:noFill/>
-          <a:ln/>
-        </p:spPr>
-        <p:txBody>
-          <a:bodyPr wrap="square" lIns="0" tIns="0" rIns="0" bIns="0" rtlCol="0" anchor="ctr"/>
-          <a:lstStyle/>
-          <a:p>
-            <a:pPr algn="ctr" indent="0" marL="0">
-              <a:buNone/>
-            </a:pPr>
-            <a:r>
-              <a:rPr lang="en-US" sz="1200" b="1" dirty="0">
-                <a:solidFill>
-                  <a:srgbClr val="EFEAFE"/>
-                </a:solidFill>
-                <a:latin typeface="Courier New" pitchFamily="34" charset="0"/>
-                <a:ea typeface="Courier New" pitchFamily="34" charset="-122"/>
-                <a:cs typeface="Courier New" pitchFamily="34" charset="-120"/>
-              </a:rPr>
-              <a:t>01</a:t>
-            </a:r>
-            <a:endParaRPr lang="en-US" sz="1200" dirty="0"/>
-          </a:p>
-        </p:txBody>
-      </p:sp>
-      <p:sp>
-        <p:nvSpPr>
-          <p:cNvPr id="10" name="Text 6"/>
-          <p:cNvSpPr/>
-          <p:nvPr/>
-        </p:nvSpPr>
-        <p:spPr>
-          <a:xfrm>
-            <a:off x="1280160" y="1801368"/>
-            <a:ext cx="2606040" cy="438912"/>
-          </a:xfrm>
-          <a:prstGeom prst="rect">
-            <a:avLst/>
-          </a:prstGeom>
-          <a:noFill/>
-          <a:ln/>
-        </p:spPr>
-        <p:txBody>
-          <a:bodyPr wrap="square" lIns="0" tIns="0" rIns="0" bIns="0" rtlCol="0" anchor="ctr"/>
-          <a:lstStyle/>
-          <a:p>
-            <a:pPr indent="0" marL="0">
-              <a:buNone/>
-            </a:pPr>
-            <a:r>
-              <a:rPr lang="en-US" sz="1450" b="1" dirty="0">
-                <a:solidFill>
-                  <a:srgbClr val="5A05F4"/>
-                </a:solidFill>
-                <a:latin typeface="Montserrat" pitchFamily="34" charset="0"/>
-                <a:ea typeface="Montserrat" pitchFamily="34" charset="-122"/>
-                <a:cs typeface="Montserrat" pitchFamily="34" charset="-120"/>
-              </a:rPr>
-              <a:t>200 ≠ production</a:t>
-            </a:r>
-            <a:endParaRPr lang="en-US" sz="1450" dirty="0"/>
-          </a:p>
-        </p:txBody>
-      </p:sp>
-      <p:sp>
-        <p:nvSpPr>
-          <p:cNvPr id="11" name="Shape 7"/>
-          <p:cNvSpPr/>
-          <p:nvPr/>
-        </p:nvSpPr>
-        <p:spPr>
-          <a:xfrm>
-            <a:off x="4270248" y="1645920"/>
-            <a:ext cx="3520440" cy="868680"/>
-          </a:xfrm>
-          <a:prstGeom prst="roundRect">
-            <a:avLst>
-              <a:gd name="adj" fmla="val 12632"/>
-            </a:avLst>
-          </a:prstGeom>
-          <a:solidFill>
-            <a:srgbClr val="EFEAFE"/>
-          </a:solidFill>
-          <a:ln/>
-        </p:spPr>
-      </p:sp>
-      <p:sp>
-        <p:nvSpPr>
-          <p:cNvPr id="12" name="Shape 8"/>
-          <p:cNvSpPr/>
-          <p:nvPr/>
-        </p:nvSpPr>
-        <p:spPr>
-          <a:xfrm>
-            <a:off x="4471416" y="1828800"/>
-            <a:ext cx="384048" cy="384048"/>
-          </a:xfrm>
-          <a:prstGeom prst="ellipse">
-            <a:avLst/>
-          </a:prstGeom>
-          <a:solidFill>
-            <a:srgbClr val="5A05F4"/>
-          </a:solidFill>
-          <a:ln/>
-        </p:spPr>
-      </p:sp>
-      <p:sp>
-        <p:nvSpPr>
-          <p:cNvPr id="13" name="Text 9"/>
-          <p:cNvSpPr/>
-          <p:nvPr/>
-        </p:nvSpPr>
-        <p:spPr>
-          <a:xfrm>
-            <a:off x="4471416" y="1828800"/>
-            <a:ext cx="384048" cy="384048"/>
-          </a:xfrm>
-          <a:prstGeom prst="rect">
-            <a:avLst/>
-          </a:prstGeom>
-          <a:noFill/>
-          <a:ln/>
-        </p:spPr>
-        <p:txBody>
-          <a:bodyPr wrap="square" lIns="0" tIns="0" rIns="0" bIns="0" rtlCol="0" anchor="ctr"/>
-          <a:lstStyle/>
-          <a:p>
-            <a:pPr algn="ctr" indent="0" marL="0">
-              <a:buNone/>
-            </a:pPr>
-            <a:r>
-              <a:rPr lang="en-US" sz="1200" b="1" dirty="0">
-                <a:solidFill>
-                  <a:srgbClr val="EFEAFE"/>
-                </a:solidFill>
-                <a:latin typeface="Courier New" pitchFamily="34" charset="0"/>
-                <a:ea typeface="Courier New" pitchFamily="34" charset="-122"/>
-                <a:cs typeface="Courier New" pitchFamily="34" charset="-120"/>
-              </a:rPr>
-              <a:t>02</a:t>
-            </a:r>
-            <a:endParaRPr lang="en-US" sz="1200" dirty="0"/>
-          </a:p>
-        </p:txBody>
-      </p:sp>
-      <p:sp>
-        <p:nvSpPr>
-          <p:cNvPr id="14" name="Text 10"/>
-          <p:cNvSpPr/>
-          <p:nvPr/>
-        </p:nvSpPr>
-        <p:spPr>
-          <a:xfrm>
-            <a:off x="4983480" y="1801368"/>
-            <a:ext cx="2606040" cy="438912"/>
-          </a:xfrm>
-          <a:prstGeom prst="rect">
-            <a:avLst/>
-          </a:prstGeom>
-          <a:noFill/>
-          <a:ln/>
-        </p:spPr>
-        <p:txBody>
-          <a:bodyPr wrap="square" lIns="0" tIns="0" rIns="0" bIns="0" rtlCol="0" anchor="ctr"/>
-          <a:lstStyle/>
-          <a:p>
-            <a:pPr indent="0" marL="0">
-              <a:buNone/>
-            </a:pPr>
-            <a:r>
-              <a:rPr lang="en-US" sz="1450" b="1" dirty="0">
-                <a:solidFill>
-                  <a:srgbClr val="5A05F4"/>
-                </a:solidFill>
-                <a:latin typeface="Montserrat" pitchFamily="34" charset="0"/>
-                <a:ea typeface="Montserrat" pitchFamily="34" charset="-122"/>
-                <a:cs typeface="Montserrat" pitchFamily="34" charset="-120"/>
-              </a:rPr>
-              <a:t>Анатомія виклику</a:t>
-            </a:r>
-            <a:endParaRPr lang="en-US" sz="1450" dirty="0"/>
-          </a:p>
-        </p:txBody>
-      </p:sp>
-      <p:sp>
-        <p:nvSpPr>
-          <p:cNvPr id="15" name="Shape 11"/>
-          <p:cNvSpPr/>
-          <p:nvPr/>
-        </p:nvSpPr>
-        <p:spPr>
-          <a:xfrm>
-            <a:off x="7973568" y="1645920"/>
-            <a:ext cx="3520440" cy="868680"/>
-          </a:xfrm>
-          <a:prstGeom prst="roundRect">
-            <a:avLst>
-              <a:gd name="adj" fmla="val 12632"/>
-            </a:avLst>
-          </a:prstGeom>
-          <a:solidFill>
-            <a:srgbClr val="EFEAFE"/>
-          </a:solidFill>
-          <a:ln/>
-        </p:spPr>
-      </p:sp>
-      <p:sp>
-        <p:nvSpPr>
-          <p:cNvPr id="16" name="Shape 12"/>
-          <p:cNvSpPr/>
-          <p:nvPr/>
-        </p:nvSpPr>
-        <p:spPr>
-          <a:xfrm>
-            <a:off x="8174736" y="1828800"/>
-            <a:ext cx="384048" cy="384048"/>
-          </a:xfrm>
-          <a:prstGeom prst="ellipse">
-            <a:avLst/>
-          </a:prstGeom>
-          <a:solidFill>
-            <a:srgbClr val="5A05F4"/>
-          </a:solidFill>
-          <a:ln/>
-        </p:spPr>
-      </p:sp>
-      <p:sp>
-        <p:nvSpPr>
-          <p:cNvPr id="17" name="Text 13"/>
-          <p:cNvSpPr/>
-          <p:nvPr/>
-        </p:nvSpPr>
-        <p:spPr>
-          <a:xfrm>
-            <a:off x="8174736" y="1828800"/>
-            <a:ext cx="384048" cy="384048"/>
-          </a:xfrm>
-          <a:prstGeom prst="rect">
-            <a:avLst/>
-          </a:prstGeom>
-          <a:noFill/>
-          <a:ln/>
-        </p:spPr>
-        <p:txBody>
-          <a:bodyPr wrap="square" lIns="0" tIns="0" rIns="0" bIns="0" rtlCol="0" anchor="ctr"/>
-          <a:lstStyle/>
-          <a:p>
-            <a:pPr algn="ctr" indent="0" marL="0">
-              <a:buNone/>
-            </a:pPr>
-            <a:r>
-              <a:rPr lang="en-US" sz="1200" b="1" dirty="0">
-                <a:solidFill>
-                  <a:srgbClr val="EFEAFE"/>
-                </a:solidFill>
-                <a:latin typeface="Courier New" pitchFamily="34" charset="0"/>
-                <a:ea typeface="Courier New" pitchFamily="34" charset="-122"/>
-                <a:cs typeface="Courier New" pitchFamily="34" charset="-120"/>
-              </a:rPr>
-              <a:t>03</a:t>
-            </a:r>
-            <a:endParaRPr lang="en-US" sz="1200" dirty="0"/>
-          </a:p>
-        </p:txBody>
-      </p:sp>
-      <p:sp>
-        <p:nvSpPr>
-          <p:cNvPr id="18" name="Text 14"/>
-          <p:cNvSpPr/>
-          <p:nvPr/>
-        </p:nvSpPr>
-        <p:spPr>
-          <a:xfrm>
-            <a:off x="8686800" y="1801368"/>
-            <a:ext cx="2606040" cy="438912"/>
-          </a:xfrm>
-          <a:prstGeom prst="rect">
-            <a:avLst/>
-          </a:prstGeom>
-          <a:noFill/>
-          <a:ln/>
-        </p:spPr>
-        <p:txBody>
-          <a:bodyPr wrap="square" lIns="0" tIns="0" rIns="0" bIns="0" rtlCol="0" anchor="ctr"/>
-          <a:lstStyle/>
-          <a:p>
-            <a:pPr indent="0" marL="0">
-              <a:buNone/>
-            </a:pPr>
-            <a:r>
-              <a:rPr lang="en-US" sz="1450" b="1" dirty="0">
-                <a:solidFill>
-                  <a:srgbClr val="5A05F4"/>
-                </a:solidFill>
-                <a:latin typeface="Montserrat" pitchFamily="34" charset="0"/>
-                <a:ea typeface="Montserrat" pitchFamily="34" charset="-122"/>
-                <a:cs typeface="Montserrat" pitchFamily="34" charset="-120"/>
-              </a:rPr>
-              <a:t>Токени і три ціни</a:t>
-            </a:r>
-            <a:endParaRPr lang="en-US" sz="1450" dirty="0"/>
-          </a:p>
-        </p:txBody>
-      </p:sp>
-      <p:sp>
-        <p:nvSpPr>
-          <p:cNvPr id="19" name="Shape 15"/>
-          <p:cNvSpPr/>
-          <p:nvPr/>
-        </p:nvSpPr>
-        <p:spPr>
-          <a:xfrm>
-            <a:off x="566928" y="2697480"/>
-            <a:ext cx="3520440" cy="868680"/>
-          </a:xfrm>
-          <a:prstGeom prst="roundRect">
-            <a:avLst>
-              <a:gd name="adj" fmla="val 12632"/>
-            </a:avLst>
-          </a:prstGeom>
-          <a:solidFill>
-            <a:srgbClr val="EFEAFE"/>
-          </a:solidFill>
-          <a:ln/>
-        </p:spPr>
-      </p:sp>
-      <p:sp>
-        <p:nvSpPr>
-          <p:cNvPr id="20" name="Shape 16"/>
-          <p:cNvSpPr/>
-          <p:nvPr/>
-        </p:nvSpPr>
-        <p:spPr>
-          <a:xfrm>
-            <a:off x="768096" y="2880360"/>
-            <a:ext cx="384048" cy="384048"/>
-          </a:xfrm>
-          <a:prstGeom prst="ellipse">
-            <a:avLst/>
-          </a:prstGeom>
-          <a:solidFill>
-            <a:srgbClr val="5A05F4"/>
-          </a:solidFill>
-          <a:ln/>
-        </p:spPr>
-      </p:sp>
-      <p:sp>
-        <p:nvSpPr>
-          <p:cNvPr id="21" name="Text 17"/>
-          <p:cNvSpPr/>
-          <p:nvPr/>
-        </p:nvSpPr>
-        <p:spPr>
-          <a:xfrm>
-            <a:off x="768096" y="2880360"/>
-            <a:ext cx="384048" cy="384048"/>
-          </a:xfrm>
-          <a:prstGeom prst="rect">
-            <a:avLst/>
-          </a:prstGeom>
-          <a:noFill/>
-          <a:ln/>
-        </p:spPr>
-        <p:txBody>
-          <a:bodyPr wrap="square" lIns="0" tIns="0" rIns="0" bIns="0" rtlCol="0" anchor="ctr"/>
-          <a:lstStyle/>
-          <a:p>
-            <a:pPr algn="ctr" indent="0" marL="0">
-              <a:buNone/>
-            </a:pPr>
-            <a:r>
-              <a:rPr lang="en-US" sz="1200" b="1" dirty="0">
-                <a:solidFill>
-                  <a:srgbClr val="EFEAFE"/>
-                </a:solidFill>
-                <a:latin typeface="Courier New" pitchFamily="34" charset="0"/>
-                <a:ea typeface="Courier New" pitchFamily="34" charset="-122"/>
-                <a:cs typeface="Courier New" pitchFamily="34" charset="-120"/>
-              </a:rPr>
-              <a:t>04</a:t>
-            </a:r>
-            <a:endParaRPr lang="en-US" sz="1200" dirty="0"/>
-          </a:p>
-        </p:txBody>
-      </p:sp>
-      <p:sp>
-        <p:nvSpPr>
-          <p:cNvPr id="22" name="Text 18"/>
-          <p:cNvSpPr/>
-          <p:nvPr/>
-        </p:nvSpPr>
-        <p:spPr>
-          <a:xfrm>
-            <a:off x="1280160" y="2852928"/>
-            <a:ext cx="2606040" cy="438912"/>
-          </a:xfrm>
-          <a:prstGeom prst="rect">
-            <a:avLst/>
-          </a:prstGeom>
-          <a:noFill/>
-          <a:ln/>
-        </p:spPr>
-        <p:txBody>
-          <a:bodyPr wrap="square" lIns="0" tIns="0" rIns="0" bIns="0" rtlCol="0" anchor="ctr"/>
-          <a:lstStyle/>
-          <a:p>
-            <a:pPr indent="0" marL="0">
-              <a:buNone/>
-            </a:pPr>
-            <a:r>
-              <a:rPr lang="en-US" sz="1450" b="1" dirty="0">
-                <a:solidFill>
-                  <a:srgbClr val="5A05F4"/>
-                </a:solidFill>
-                <a:latin typeface="Montserrat" pitchFamily="34" charset="0"/>
-                <a:ea typeface="Montserrat" pitchFamily="34" charset="-122"/>
-                <a:cs typeface="Montserrat" pitchFamily="34" charset="-120"/>
-              </a:rPr>
-              <a:t>Недетермінізм і латентність</a:t>
-            </a:r>
-            <a:endParaRPr lang="en-US" sz="1450" dirty="0"/>
-          </a:p>
-        </p:txBody>
-      </p:sp>
-      <p:sp>
-        <p:nvSpPr>
-          <p:cNvPr id="23" name="Shape 19"/>
-          <p:cNvSpPr/>
-          <p:nvPr/>
-        </p:nvSpPr>
-        <p:spPr>
-          <a:xfrm>
-            <a:off x="4270248" y="2697480"/>
-            <a:ext cx="3520440" cy="868680"/>
-          </a:xfrm>
-          <a:prstGeom prst="roundRect">
-            <a:avLst>
-              <a:gd name="adj" fmla="val 12632"/>
-            </a:avLst>
-          </a:prstGeom>
-          <a:solidFill>
-            <a:srgbClr val="EFEAFE"/>
-          </a:solidFill>
-          <a:ln/>
-        </p:spPr>
-      </p:sp>
-      <p:sp>
-        <p:nvSpPr>
-          <p:cNvPr id="24" name="Shape 20"/>
-          <p:cNvSpPr/>
-          <p:nvPr/>
-        </p:nvSpPr>
-        <p:spPr>
-          <a:xfrm>
-            <a:off x="4471416" y="2880360"/>
-            <a:ext cx="384048" cy="384048"/>
-          </a:xfrm>
-          <a:prstGeom prst="ellipse">
-            <a:avLst/>
-          </a:prstGeom>
-          <a:solidFill>
-            <a:srgbClr val="5A05F4"/>
-          </a:solidFill>
-          <a:ln/>
-        </p:spPr>
-      </p:sp>
-      <p:sp>
-        <p:nvSpPr>
-          <p:cNvPr id="25" name="Text 21"/>
-          <p:cNvSpPr/>
-          <p:nvPr/>
-        </p:nvSpPr>
-        <p:spPr>
-          <a:xfrm>
-            <a:off x="4471416" y="2880360"/>
-            <a:ext cx="384048" cy="384048"/>
-          </a:xfrm>
-          <a:prstGeom prst="rect">
-            <a:avLst/>
-          </a:prstGeom>
-          <a:noFill/>
-          <a:ln/>
-        </p:spPr>
-        <p:txBody>
-          <a:bodyPr wrap="square" lIns="0" tIns="0" rIns="0" bIns="0" rtlCol="0" anchor="ctr"/>
-          <a:lstStyle/>
-          <a:p>
-            <a:pPr algn="ctr" indent="0" marL="0">
-              <a:buNone/>
-            </a:pPr>
-            <a:r>
-              <a:rPr lang="en-US" sz="1200" b="1" dirty="0">
-                <a:solidFill>
-                  <a:srgbClr val="EFEAFE"/>
-                </a:solidFill>
-                <a:latin typeface="Courier New" pitchFamily="34" charset="0"/>
-                <a:ea typeface="Courier New" pitchFamily="34" charset="-122"/>
-                <a:cs typeface="Courier New" pitchFamily="34" charset="-120"/>
-              </a:rPr>
-              <a:t>05</a:t>
-            </a:r>
-            <a:endParaRPr lang="en-US" sz="1200" dirty="0"/>
-          </a:p>
-        </p:txBody>
-      </p:sp>
-      <p:sp>
-        <p:nvSpPr>
-          <p:cNvPr id="26" name="Text 22"/>
-          <p:cNvSpPr/>
-          <p:nvPr/>
-        </p:nvSpPr>
-        <p:spPr>
-          <a:xfrm>
-            <a:off x="4983480" y="2852928"/>
-            <a:ext cx="2606040" cy="438912"/>
-          </a:xfrm>
-          <a:prstGeom prst="rect">
-            <a:avLst/>
-          </a:prstGeom>
-          <a:noFill/>
-          <a:ln/>
-        </p:spPr>
-        <p:txBody>
-          <a:bodyPr wrap="square" lIns="0" tIns="0" rIns="0" bIns="0" rtlCol="0" anchor="ctr"/>
-          <a:lstStyle/>
-          <a:p>
-            <a:pPr indent="0" marL="0">
-              <a:buNone/>
-            </a:pPr>
-            <a:r>
-              <a:rPr lang="en-US" sz="1450" b="1" dirty="0">
-                <a:solidFill>
-                  <a:srgbClr val="5A05F4"/>
-                </a:solidFill>
-                <a:latin typeface="Montserrat" pitchFamily="34" charset="0"/>
-                <a:ea typeface="Montserrat" pitchFamily="34" charset="-122"/>
-                <a:cs typeface="Montserrat" pitchFamily="34" charset="-120"/>
-              </a:rPr>
-              <a:t>П'ять способів зламатися</a:t>
-            </a:r>
-            <a:endParaRPr lang="en-US" sz="1450" dirty="0"/>
-          </a:p>
-        </p:txBody>
-      </p:sp>
-      <p:sp>
-        <p:nvSpPr>
-          <p:cNvPr id="27" name="Shape 23"/>
-          <p:cNvSpPr/>
-          <p:nvPr/>
-        </p:nvSpPr>
-        <p:spPr>
-          <a:xfrm>
-            <a:off x="7973568" y="2697480"/>
             <a:ext cx="3520440" cy="868680"/>
           </a:xfrm>
           <a:prstGeom prst="roundRect">
@@ -21223,13 +20623,13 @@
       </p:sp>
       <p:sp>
         <p:nvSpPr>
-          <p:cNvPr id="28" name="Shape 24"/>
-          <p:cNvSpPr/>
-          <p:nvPr/>
-        </p:nvSpPr>
-        <p:spPr>
-          <a:xfrm>
-            <a:off x="8174736" y="2880360"/>
+          <p:cNvPr id="7" name="Shape 4"/>
+          <p:cNvSpPr/>
+          <p:nvPr/>
+        </p:nvSpPr>
+        <p:spPr>
+          <a:xfrm>
+            <a:off x="768096" y="1828800"/>
             <a:ext cx="384048" cy="384048"/>
           </a:xfrm>
           <a:prstGeom prst="ellipse">
@@ -21243,13 +20643,13 @@
       </p:sp>
       <p:sp>
         <p:nvSpPr>
-          <p:cNvPr id="29" name="Text 25"/>
-          <p:cNvSpPr/>
-          <p:nvPr/>
-        </p:nvSpPr>
-        <p:spPr>
-          <a:xfrm>
-            <a:off x="8174736" y="2880360"/>
+          <p:cNvPr id="8" name="Text 5"/>
+          <p:cNvSpPr/>
+          <p:nvPr/>
+        </p:nvSpPr>
+        <p:spPr>
+          <a:xfrm>
+            <a:off x="768096" y="1828800"/>
             <a:ext cx="384048" cy="384048"/>
           </a:xfrm>
           <a:prstGeom prst="rect">
@@ -21274,7 +20674,7 @@
                 <a:ea typeface="Courier New" pitchFamily="34" charset="-122"/>
                 <a:cs typeface="Courier New" pitchFamily="34" charset="-120"/>
               </a:rPr>
-              <a:t>06</a:t>
+              <a:t>01</a:t>
             </a:r>
             <a:endParaRPr lang="en-US" sz="1200" dirty="0"/>
           </a:p>
@@ -21282,13 +20682,13 @@
       </p:sp>
       <p:sp>
         <p:nvSpPr>
-          <p:cNvPr id="30" name="Text 26"/>
-          <p:cNvSpPr/>
-          <p:nvPr/>
-        </p:nvSpPr>
-        <p:spPr>
-          <a:xfrm>
-            <a:off x="8686800" y="2852928"/>
+          <p:cNvPr id="9" name="Text 6"/>
+          <p:cNvSpPr/>
+          <p:nvPr/>
+        </p:nvSpPr>
+        <p:spPr>
+          <a:xfrm>
+            <a:off x="1280160" y="1801368"/>
             <a:ext cx="2606040" cy="438912"/>
           </a:xfrm>
           <a:prstGeom prst="rect">
@@ -21313,7 +20713,7 @@
                 <a:ea typeface="Montserrat" pitchFamily="34" charset="-122"/>
                 <a:cs typeface="Montserrat" pitchFamily="34" charset="-120"/>
               </a:rPr>
-              <a:t>Стек: вирішує vs виконує</a:t>
+              <a:t>200 ≠ production</a:t>
             </a:r>
             <a:endParaRPr lang="en-US" sz="1450" dirty="0"/>
           </a:p>
@@ -21321,13 +20721,13 @@
       </p:sp>
       <p:sp>
         <p:nvSpPr>
-          <p:cNvPr id="31" name="Shape 27"/>
-          <p:cNvSpPr/>
-          <p:nvPr/>
-        </p:nvSpPr>
-        <p:spPr>
-          <a:xfrm>
-            <a:off x="566928" y="3749040"/>
+          <p:cNvPr id="10" name="Shape 7"/>
+          <p:cNvSpPr/>
+          <p:nvPr/>
+        </p:nvSpPr>
+        <p:spPr>
+          <a:xfrm>
+            <a:off x="4270248" y="1645920"/>
             <a:ext cx="3520440" cy="868680"/>
           </a:xfrm>
           <a:prstGeom prst="roundRect">
@@ -21348,13 +20748,13 @@
       </p:sp>
       <p:sp>
         <p:nvSpPr>
-          <p:cNvPr id="32" name="Shape 28"/>
-          <p:cNvSpPr/>
-          <p:nvPr/>
-        </p:nvSpPr>
-        <p:spPr>
-          <a:xfrm>
-            <a:off x="768096" y="3931920"/>
+          <p:cNvPr id="11" name="Shape 8"/>
+          <p:cNvSpPr/>
+          <p:nvPr/>
+        </p:nvSpPr>
+        <p:spPr>
+          <a:xfrm>
+            <a:off x="4471416" y="1828800"/>
             <a:ext cx="384048" cy="384048"/>
           </a:xfrm>
           <a:prstGeom prst="ellipse">
@@ -21368,13 +20768,13 @@
       </p:sp>
       <p:sp>
         <p:nvSpPr>
-          <p:cNvPr id="33" name="Text 29"/>
-          <p:cNvSpPr/>
-          <p:nvPr/>
-        </p:nvSpPr>
-        <p:spPr>
-          <a:xfrm>
-            <a:off x="768096" y="3931920"/>
+          <p:cNvPr id="12" name="Text 9"/>
+          <p:cNvSpPr/>
+          <p:nvPr/>
+        </p:nvSpPr>
+        <p:spPr>
+          <a:xfrm>
+            <a:off x="4471416" y="1828800"/>
             <a:ext cx="384048" cy="384048"/>
           </a:xfrm>
           <a:prstGeom prst="rect">
@@ -21399,7 +20799,7 @@
                 <a:ea typeface="Courier New" pitchFamily="34" charset="-122"/>
                 <a:cs typeface="Courier New" pitchFamily="34" charset="-120"/>
               </a:rPr>
-              <a:t>07</a:t>
+              <a:t>02</a:t>
             </a:r>
             <a:endParaRPr lang="en-US" sz="1200" dirty="0"/>
           </a:p>
@@ -21407,13 +20807,13 @@
       </p:sp>
       <p:sp>
         <p:nvSpPr>
-          <p:cNvPr id="34" name="Text 30"/>
-          <p:cNvSpPr/>
-          <p:nvPr/>
-        </p:nvSpPr>
-        <p:spPr>
-          <a:xfrm>
-            <a:off x="1280160" y="3904488"/>
+          <p:cNvPr id="13" name="Text 10"/>
+          <p:cNvSpPr/>
+          <p:nvPr/>
+        </p:nvSpPr>
+        <p:spPr>
+          <a:xfrm>
+            <a:off x="4983480" y="1801368"/>
             <a:ext cx="2606040" cy="438912"/>
           </a:xfrm>
           <a:prstGeom prst="rect">
@@ -21438,7 +20838,7 @@
                 <a:ea typeface="Montserrat" pitchFamily="34" charset="-122"/>
                 <a:cs typeface="Montserrat" pitchFamily="34" charset="-120"/>
               </a:rPr>
-              <a:t>Unified log</a:t>
+              <a:t>Анатомія виклику</a:t>
             </a:r>
             <a:endParaRPr lang="en-US" sz="1450" dirty="0"/>
           </a:p>
@@ -21446,13 +20846,13 @@
       </p:sp>
       <p:sp>
         <p:nvSpPr>
-          <p:cNvPr id="35" name="Shape 31"/>
-          <p:cNvSpPr/>
-          <p:nvPr/>
-        </p:nvSpPr>
-        <p:spPr>
-          <a:xfrm>
-            <a:off x="4270248" y="3749040"/>
+          <p:cNvPr id="14" name="Shape 11"/>
+          <p:cNvSpPr/>
+          <p:nvPr/>
+        </p:nvSpPr>
+        <p:spPr>
+          <a:xfrm>
+            <a:off x="7973568" y="1645920"/>
             <a:ext cx="3520440" cy="868680"/>
           </a:xfrm>
           <a:prstGeom prst="roundRect">
@@ -21473,13 +20873,13 @@
       </p:sp>
       <p:sp>
         <p:nvSpPr>
-          <p:cNvPr id="36" name="Shape 32"/>
-          <p:cNvSpPr/>
-          <p:nvPr/>
-        </p:nvSpPr>
-        <p:spPr>
-          <a:xfrm>
-            <a:off x="4471416" y="3931920"/>
+          <p:cNvPr id="15" name="Shape 12"/>
+          <p:cNvSpPr/>
+          <p:nvPr/>
+        </p:nvSpPr>
+        <p:spPr>
+          <a:xfrm>
+            <a:off x="8174736" y="1828800"/>
             <a:ext cx="384048" cy="384048"/>
           </a:xfrm>
           <a:prstGeom prst="ellipse">
@@ -21493,13 +20893,13 @@
       </p:sp>
       <p:sp>
         <p:nvSpPr>
-          <p:cNvPr id="37" name="Text 33"/>
-          <p:cNvSpPr/>
-          <p:nvPr/>
-        </p:nvSpPr>
-        <p:spPr>
-          <a:xfrm>
-            <a:off x="4471416" y="3931920"/>
+          <p:cNvPr id="16" name="Text 13"/>
+          <p:cNvSpPr/>
+          <p:nvPr/>
+        </p:nvSpPr>
+        <p:spPr>
+          <a:xfrm>
+            <a:off x="8174736" y="1828800"/>
             <a:ext cx="384048" cy="384048"/>
           </a:xfrm>
           <a:prstGeom prst="rect">
@@ -21524,7 +20924,7 @@
                 <a:ea typeface="Courier New" pitchFamily="34" charset="-122"/>
                 <a:cs typeface="Courier New" pitchFamily="34" charset="-120"/>
               </a:rPr>
-              <a:t>08</a:t>
+              <a:t>03</a:t>
             </a:r>
             <a:endParaRPr lang="en-US" sz="1200" dirty="0"/>
           </a:p>
@@ -21532,13 +20932,13 @@
       </p:sp>
       <p:sp>
         <p:nvSpPr>
-          <p:cNvPr id="38" name="Text 34"/>
-          <p:cNvSpPr/>
-          <p:nvPr/>
-        </p:nvSpPr>
-        <p:spPr>
-          <a:xfrm>
-            <a:off x="4983480" y="3904488"/>
+          <p:cNvPr id="17" name="Text 14"/>
+          <p:cNvSpPr/>
+          <p:nvPr/>
+        </p:nvSpPr>
+        <p:spPr>
+          <a:xfrm>
+            <a:off x="8686800" y="1801368"/>
             <a:ext cx="2606040" cy="438912"/>
           </a:xfrm>
           <a:prstGeom prst="rect">
@@ -21563,7 +20963,7 @@
                 <a:ea typeface="Montserrat" pitchFamily="34" charset="-122"/>
                 <a:cs typeface="Montserrat" pitchFamily="34" charset="-120"/>
               </a:rPr>
-              <a:t>Mock-провайдер</a:t>
+              <a:t>Токени і три ціни</a:t>
             </a:r>
             <a:endParaRPr lang="en-US" sz="1450" dirty="0"/>
           </a:p>
@@ -21571,133 +20971,13 @@
       </p:sp>
       <p:sp>
         <p:nvSpPr>
-          <p:cNvPr id="39" name="Shape 35"/>
-          <p:cNvSpPr/>
-          <p:nvPr/>
-        </p:nvSpPr>
-        <p:spPr>
-          <a:xfrm>
-            <a:off x="7973568" y="3749040"/>
-            <a:ext cx="3520440" cy="868680"/>
-          </a:xfrm>
-          <a:prstGeom prst="roundRect">
-            <a:avLst>
-              <a:gd name="adj" fmla="val 12632"/>
-            </a:avLst>
-          </a:prstGeom>
-          <a:solidFill>
-            <a:srgbClr val="F8F0E2"/>
-          </a:solidFill>
-          <a:ln/>
-        </p:spPr>
-      </p:sp>
-      <p:sp>
-        <p:nvSpPr>
-          <p:cNvPr id="40" name="Shape 36"/>
-          <p:cNvSpPr/>
-          <p:nvPr/>
-        </p:nvSpPr>
-        <p:spPr>
-          <a:xfrm>
-            <a:off x="8174736" y="3931920"/>
-            <a:ext cx="384048" cy="384048"/>
-          </a:xfrm>
-          <a:prstGeom prst="ellipse">
-            <a:avLst/>
-          </a:prstGeom>
-          <a:solidFill>
-            <a:srgbClr val="9A5B12"/>
-          </a:solidFill>
-          <a:ln/>
-        </p:spPr>
-      </p:sp>
-      <p:sp>
-        <p:nvSpPr>
-          <p:cNvPr id="41" name="Text 37"/>
-          <p:cNvSpPr/>
-          <p:nvPr/>
-        </p:nvSpPr>
-        <p:spPr>
-          <a:xfrm>
-            <a:off x="8174736" y="3931920"/>
-            <a:ext cx="384048" cy="384048"/>
-          </a:xfrm>
-          <a:prstGeom prst="rect">
-            <a:avLst/>
-          </a:prstGeom>
-          <a:noFill/>
-          <a:ln/>
-        </p:spPr>
-        <p:txBody>
-          <a:bodyPr wrap="square" lIns="0" tIns="0" rIns="0" bIns="0" rtlCol="0" anchor="ctr"/>
-          <a:lstStyle/>
-          <a:p>
-            <a:pPr algn="ctr" indent="0" marL="0">
-              <a:buNone/>
-            </a:pPr>
-            <a:r>
-              <a:rPr lang="en-US" sz="1200" b="1" dirty="0">
-                <a:solidFill>
-                  <a:srgbClr val="F8F0E2"/>
-                </a:solidFill>
-                <a:latin typeface="Courier New" pitchFamily="34" charset="0"/>
-                <a:ea typeface="Courier New" pitchFamily="34" charset="-122"/>
-                <a:cs typeface="Courier New" pitchFamily="34" charset="-120"/>
-              </a:rPr>
-              <a:t>09</a:t>
-            </a:r>
-            <a:endParaRPr lang="en-US" sz="1200" dirty="0"/>
-          </a:p>
-        </p:txBody>
-      </p:sp>
-      <p:sp>
-        <p:nvSpPr>
-          <p:cNvPr id="42" name="Text 38"/>
-          <p:cNvSpPr/>
-          <p:nvPr/>
-        </p:nvSpPr>
-        <p:spPr>
-          <a:xfrm>
-            <a:off x="8686800" y="3904488"/>
-            <a:ext cx="2606040" cy="438912"/>
-          </a:xfrm>
-          <a:prstGeom prst="rect">
-            <a:avLst/>
-          </a:prstGeom>
-          <a:noFill/>
-          <a:ln/>
-        </p:spPr>
-        <p:txBody>
-          <a:bodyPr wrap="square" lIns="0" tIns="0" rIns="0" bIns="0" rtlCol="0" anchor="ctr"/>
-          <a:lstStyle/>
-          <a:p>
-            <a:pPr indent="0" marL="0">
-              <a:buNone/>
-            </a:pPr>
-            <a:r>
-              <a:rPr lang="en-US" sz="1450" b="1" dirty="0">
-                <a:solidFill>
-                  <a:srgbClr val="9A5B12"/>
-                </a:solidFill>
-                <a:latin typeface="Montserrat" pitchFamily="34" charset="0"/>
-                <a:ea typeface="Montserrat" pitchFamily="34" charset="-122"/>
-                <a:cs typeface="Montserrat" pitchFamily="34" charset="-120"/>
-              </a:rPr>
-              <a:t>Реальний ключ · опційно</a:t>
-            </a:r>
-            <a:endParaRPr lang="en-US" sz="1450" dirty="0"/>
-          </a:p>
-        </p:txBody>
-      </p:sp>
-      <p:sp>
-        <p:nvSpPr>
-          <p:cNvPr id="43" name="Shape 39"/>
-          <p:cNvSpPr/>
-          <p:nvPr/>
-        </p:nvSpPr>
-        <p:spPr>
-          <a:xfrm>
-            <a:off x="566928" y="4800600"/>
+          <p:cNvPr id="18" name="Shape 15"/>
+          <p:cNvSpPr/>
+          <p:nvPr/>
+        </p:nvSpPr>
+        <p:spPr>
+          <a:xfrm>
+            <a:off x="566928" y="2697480"/>
             <a:ext cx="3520440" cy="868680"/>
           </a:xfrm>
           <a:prstGeom prst="roundRect">
@@ -21718,13 +20998,13 @@
       </p:sp>
       <p:sp>
         <p:nvSpPr>
-          <p:cNvPr id="44" name="Shape 40"/>
-          <p:cNvSpPr/>
-          <p:nvPr/>
-        </p:nvSpPr>
-        <p:spPr>
-          <a:xfrm>
-            <a:off x="768096" y="4983480"/>
+          <p:cNvPr id="19" name="Shape 16"/>
+          <p:cNvSpPr/>
+          <p:nvPr/>
+        </p:nvSpPr>
+        <p:spPr>
+          <a:xfrm>
+            <a:off x="768096" y="2880360"/>
             <a:ext cx="384048" cy="384048"/>
           </a:xfrm>
           <a:prstGeom prst="ellipse">
@@ -21738,13 +21018,13 @@
       </p:sp>
       <p:sp>
         <p:nvSpPr>
-          <p:cNvPr id="45" name="Text 41"/>
-          <p:cNvSpPr/>
-          <p:nvPr/>
-        </p:nvSpPr>
-        <p:spPr>
-          <a:xfrm>
-            <a:off x="768096" y="4983480"/>
+          <p:cNvPr id="20" name="Text 17"/>
+          <p:cNvSpPr/>
+          <p:nvPr/>
+        </p:nvSpPr>
+        <p:spPr>
+          <a:xfrm>
+            <a:off x="768096" y="2880360"/>
             <a:ext cx="384048" cy="384048"/>
           </a:xfrm>
           <a:prstGeom prst="rect">
@@ -21769,7 +21049,7 @@
                 <a:ea typeface="Courier New" pitchFamily="34" charset="-122"/>
                 <a:cs typeface="Courier New" pitchFamily="34" charset="-120"/>
               </a:rPr>
-              <a:t>10</a:t>
+              <a:t>04</a:t>
             </a:r>
             <a:endParaRPr lang="en-US" sz="1200" dirty="0"/>
           </a:p>
@@ -21777,13 +21057,13 @@
       </p:sp>
       <p:sp>
         <p:nvSpPr>
-          <p:cNvPr id="46" name="Text 42"/>
-          <p:cNvSpPr/>
-          <p:nvPr/>
-        </p:nvSpPr>
-        <p:spPr>
-          <a:xfrm>
-            <a:off x="1280160" y="4956048"/>
+          <p:cNvPr id="21" name="Text 18"/>
+          <p:cNvSpPr/>
+          <p:nvPr/>
+        </p:nvSpPr>
+        <p:spPr>
+          <a:xfrm>
+            <a:off x="1280160" y="2852928"/>
             <a:ext cx="2606040" cy="438912"/>
           </a:xfrm>
           <a:prstGeom prst="rect">
@@ -21808,7 +21088,7 @@
                 <a:ea typeface="Montserrat" pitchFamily="34" charset="-122"/>
                 <a:cs typeface="Montserrat" pitchFamily="34" charset="-120"/>
               </a:rPr>
-              <a:t>Лабораторна</a:t>
+              <a:t>Недетермінізм і латентність</a:t>
             </a:r>
             <a:endParaRPr lang="en-US" sz="1450" dirty="0"/>
           </a:p>
@@ -21816,13 +21096,13 @@
       </p:sp>
       <p:sp>
         <p:nvSpPr>
-          <p:cNvPr id="47" name="Shape 43"/>
-          <p:cNvSpPr/>
-          <p:nvPr/>
-        </p:nvSpPr>
-        <p:spPr>
-          <a:xfrm>
-            <a:off x="4270248" y="4800600"/>
+          <p:cNvPr id="22" name="Shape 19"/>
+          <p:cNvSpPr/>
+          <p:nvPr/>
+        </p:nvSpPr>
+        <p:spPr>
+          <a:xfrm>
+            <a:off x="4270248" y="2697480"/>
             <a:ext cx="3520440" cy="868680"/>
           </a:xfrm>
           <a:prstGeom prst="roundRect">
@@ -21843,13 +21123,13 @@
       </p:sp>
       <p:sp>
         <p:nvSpPr>
-          <p:cNvPr id="48" name="Shape 44"/>
-          <p:cNvSpPr/>
-          <p:nvPr/>
-        </p:nvSpPr>
-        <p:spPr>
-          <a:xfrm>
-            <a:off x="4471416" y="4983480"/>
+          <p:cNvPr id="23" name="Shape 20"/>
+          <p:cNvSpPr/>
+          <p:nvPr/>
+        </p:nvSpPr>
+        <p:spPr>
+          <a:xfrm>
+            <a:off x="4471416" y="2880360"/>
             <a:ext cx="384048" cy="384048"/>
           </a:xfrm>
           <a:prstGeom prst="ellipse">
@@ -21863,13 +21143,13 @@
       </p:sp>
       <p:sp>
         <p:nvSpPr>
-          <p:cNvPr id="49" name="Text 45"/>
-          <p:cNvSpPr/>
-          <p:nvPr/>
-        </p:nvSpPr>
-        <p:spPr>
-          <a:xfrm>
-            <a:off x="4471416" y="4983480"/>
+          <p:cNvPr id="24" name="Text 21"/>
+          <p:cNvSpPr/>
+          <p:nvPr/>
+        </p:nvSpPr>
+        <p:spPr>
+          <a:xfrm>
+            <a:off x="4471416" y="2880360"/>
             <a:ext cx="384048" cy="384048"/>
           </a:xfrm>
           <a:prstGeom prst="rect">
@@ -21894,7 +21174,7 @@
                 <a:ea typeface="Courier New" pitchFamily="34" charset="-122"/>
                 <a:cs typeface="Courier New" pitchFamily="34" charset="-120"/>
               </a:rPr>
-              <a:t>11</a:t>
+              <a:t>05</a:t>
             </a:r>
             <a:endParaRPr lang="en-US" sz="1200" dirty="0"/>
           </a:p>
@@ -21902,13 +21182,13 @@
       </p:sp>
       <p:sp>
         <p:nvSpPr>
-          <p:cNvPr id="50" name="Text 46"/>
-          <p:cNvSpPr/>
-          <p:nvPr/>
-        </p:nvSpPr>
-        <p:spPr>
-          <a:xfrm>
-            <a:off x="4983480" y="4956048"/>
+          <p:cNvPr id="25" name="Text 22"/>
+          <p:cNvSpPr/>
+          <p:nvPr/>
+        </p:nvSpPr>
+        <p:spPr>
+          <a:xfrm>
+            <a:off x="4983480" y="2852928"/>
             <a:ext cx="2606040" cy="438912"/>
           </a:xfrm>
           <a:prstGeom prst="rect">
@@ -21933,7 +21213,7 @@
                 <a:ea typeface="Montserrat" pitchFamily="34" charset="-122"/>
                 <a:cs typeface="Montserrat" pitchFamily="34" charset="-120"/>
               </a:rPr>
-              <a:t>Антипатерни</a:t>
+              <a:t>П'ять способів зламатися</a:t>
             </a:r>
             <a:endParaRPr lang="en-US" sz="1450" dirty="0"/>
           </a:p>
@@ -21941,18 +21221,18 @@
       </p:sp>
       <p:sp>
         <p:nvSpPr>
-          <p:cNvPr id="51" name="Shape 47"/>
-          <p:cNvSpPr/>
-          <p:nvPr/>
-        </p:nvSpPr>
-        <p:spPr>
-          <a:xfrm>
-            <a:off x="566928" y="5779008"/>
-            <a:ext cx="11064240" cy="402336"/>
+          <p:cNvPr id="26" name="Shape 23"/>
+          <p:cNvSpPr/>
+          <p:nvPr/>
+        </p:nvSpPr>
+        <p:spPr>
+          <a:xfrm>
+            <a:off x="7973568" y="2697480"/>
+            <a:ext cx="3520440" cy="868680"/>
           </a:xfrm>
           <a:prstGeom prst="roundRect">
             <a:avLst>
-              <a:gd name="adj" fmla="val 27273"/>
+              <a:gd name="adj" fmla="val 12632"/>
             </a:avLst>
           </a:prstGeom>
           <a:solidFill>
@@ -21968,7 +21248,752 @@
       </p:sp>
       <p:sp>
         <p:nvSpPr>
-          <p:cNvPr id="52" name="Text 48"/>
+          <p:cNvPr id="27" name="Shape 24"/>
+          <p:cNvSpPr/>
+          <p:nvPr/>
+        </p:nvSpPr>
+        <p:spPr>
+          <a:xfrm>
+            <a:off x="8174736" y="2880360"/>
+            <a:ext cx="384048" cy="384048"/>
+          </a:xfrm>
+          <a:prstGeom prst="ellipse">
+            <a:avLst/>
+          </a:prstGeom>
+          <a:solidFill>
+            <a:srgbClr val="5A05F4"/>
+          </a:solidFill>
+          <a:ln/>
+        </p:spPr>
+      </p:sp>
+      <p:sp>
+        <p:nvSpPr>
+          <p:cNvPr id="28" name="Text 25"/>
+          <p:cNvSpPr/>
+          <p:nvPr/>
+        </p:nvSpPr>
+        <p:spPr>
+          <a:xfrm>
+            <a:off x="8174736" y="2880360"/>
+            <a:ext cx="384048" cy="384048"/>
+          </a:xfrm>
+          <a:prstGeom prst="rect">
+            <a:avLst/>
+          </a:prstGeom>
+          <a:noFill/>
+          <a:ln/>
+        </p:spPr>
+        <p:txBody>
+          <a:bodyPr wrap="square" lIns="0" tIns="0" rIns="0" bIns="0" rtlCol="0" anchor="ctr"/>
+          <a:lstStyle/>
+          <a:p>
+            <a:pPr algn="ctr" indent="0" marL="0">
+              <a:buNone/>
+            </a:pPr>
+            <a:r>
+              <a:rPr lang="en-US" sz="1200" b="1" dirty="0">
+                <a:solidFill>
+                  <a:srgbClr val="FFFFFF"/>
+                </a:solidFill>
+                <a:latin typeface="Courier New" pitchFamily="34" charset="0"/>
+                <a:ea typeface="Courier New" pitchFamily="34" charset="-122"/>
+                <a:cs typeface="Courier New" pitchFamily="34" charset="-120"/>
+              </a:rPr>
+              <a:t>06</a:t>
+            </a:r>
+            <a:endParaRPr lang="en-US" sz="1200" dirty="0"/>
+          </a:p>
+        </p:txBody>
+      </p:sp>
+      <p:sp>
+        <p:nvSpPr>
+          <p:cNvPr id="29" name="Text 26"/>
+          <p:cNvSpPr/>
+          <p:nvPr/>
+        </p:nvSpPr>
+        <p:spPr>
+          <a:xfrm>
+            <a:off x="8686800" y="2852928"/>
+            <a:ext cx="2606040" cy="438912"/>
+          </a:xfrm>
+          <a:prstGeom prst="rect">
+            <a:avLst/>
+          </a:prstGeom>
+          <a:noFill/>
+          <a:ln/>
+        </p:spPr>
+        <p:txBody>
+          <a:bodyPr wrap="square" lIns="0" tIns="0" rIns="0" bIns="0" rtlCol="0" anchor="ctr"/>
+          <a:lstStyle/>
+          <a:p>
+            <a:pPr indent="0" marL="0">
+              <a:buNone/>
+            </a:pPr>
+            <a:r>
+              <a:rPr lang="en-US" sz="1450" b="1" dirty="0">
+                <a:solidFill>
+                  <a:srgbClr val="111318"/>
+                </a:solidFill>
+                <a:latin typeface="Montserrat" pitchFamily="34" charset="0"/>
+                <a:ea typeface="Montserrat" pitchFamily="34" charset="-122"/>
+                <a:cs typeface="Montserrat" pitchFamily="34" charset="-120"/>
+              </a:rPr>
+              <a:t>Стек: вирішує vs виконує</a:t>
+            </a:r>
+            <a:endParaRPr lang="en-US" sz="1450" dirty="0"/>
+          </a:p>
+        </p:txBody>
+      </p:sp>
+      <p:sp>
+        <p:nvSpPr>
+          <p:cNvPr id="30" name="Shape 27"/>
+          <p:cNvSpPr/>
+          <p:nvPr/>
+        </p:nvSpPr>
+        <p:spPr>
+          <a:xfrm>
+            <a:off x="566928" y="3749040"/>
+            <a:ext cx="3520440" cy="868680"/>
+          </a:xfrm>
+          <a:prstGeom prst="roundRect">
+            <a:avLst>
+              <a:gd name="adj" fmla="val 12632"/>
+            </a:avLst>
+          </a:prstGeom>
+          <a:solidFill>
+            <a:srgbClr val="FFFFFF"/>
+          </a:solidFill>
+          <a:ln w="12700">
+            <a:solidFill>
+              <a:srgbClr val="E6E7EC"/>
+            </a:solidFill>
+            <a:prstDash val="solid"/>
+          </a:ln>
+        </p:spPr>
+      </p:sp>
+      <p:sp>
+        <p:nvSpPr>
+          <p:cNvPr id="31" name="Shape 28"/>
+          <p:cNvSpPr/>
+          <p:nvPr/>
+        </p:nvSpPr>
+        <p:spPr>
+          <a:xfrm>
+            <a:off x="768096" y="3931920"/>
+            <a:ext cx="384048" cy="384048"/>
+          </a:xfrm>
+          <a:prstGeom prst="ellipse">
+            <a:avLst/>
+          </a:prstGeom>
+          <a:solidFill>
+            <a:srgbClr val="5A05F4"/>
+          </a:solidFill>
+          <a:ln/>
+        </p:spPr>
+      </p:sp>
+      <p:sp>
+        <p:nvSpPr>
+          <p:cNvPr id="32" name="Text 29"/>
+          <p:cNvSpPr/>
+          <p:nvPr/>
+        </p:nvSpPr>
+        <p:spPr>
+          <a:xfrm>
+            <a:off x="768096" y="3931920"/>
+            <a:ext cx="384048" cy="384048"/>
+          </a:xfrm>
+          <a:prstGeom prst="rect">
+            <a:avLst/>
+          </a:prstGeom>
+          <a:noFill/>
+          <a:ln/>
+        </p:spPr>
+        <p:txBody>
+          <a:bodyPr wrap="square" lIns="0" tIns="0" rIns="0" bIns="0" rtlCol="0" anchor="ctr"/>
+          <a:lstStyle/>
+          <a:p>
+            <a:pPr algn="ctr" indent="0" marL="0">
+              <a:buNone/>
+            </a:pPr>
+            <a:r>
+              <a:rPr lang="en-US" sz="1200" b="1" dirty="0">
+                <a:solidFill>
+                  <a:srgbClr val="FFFFFF"/>
+                </a:solidFill>
+                <a:latin typeface="Courier New" pitchFamily="34" charset="0"/>
+                <a:ea typeface="Courier New" pitchFamily="34" charset="-122"/>
+                <a:cs typeface="Courier New" pitchFamily="34" charset="-120"/>
+              </a:rPr>
+              <a:t>07</a:t>
+            </a:r>
+            <a:endParaRPr lang="en-US" sz="1200" dirty="0"/>
+          </a:p>
+        </p:txBody>
+      </p:sp>
+      <p:sp>
+        <p:nvSpPr>
+          <p:cNvPr id="33" name="Text 30"/>
+          <p:cNvSpPr/>
+          <p:nvPr/>
+        </p:nvSpPr>
+        <p:spPr>
+          <a:xfrm>
+            <a:off x="1280160" y="3904488"/>
+            <a:ext cx="2606040" cy="438912"/>
+          </a:xfrm>
+          <a:prstGeom prst="rect">
+            <a:avLst/>
+          </a:prstGeom>
+          <a:noFill/>
+          <a:ln/>
+        </p:spPr>
+        <p:txBody>
+          <a:bodyPr wrap="square" lIns="0" tIns="0" rIns="0" bIns="0" rtlCol="0" anchor="ctr"/>
+          <a:lstStyle/>
+          <a:p>
+            <a:pPr indent="0" marL="0">
+              <a:buNone/>
+            </a:pPr>
+            <a:r>
+              <a:rPr lang="en-US" sz="1450" b="1" dirty="0">
+                <a:solidFill>
+                  <a:srgbClr val="111318"/>
+                </a:solidFill>
+                <a:latin typeface="Montserrat" pitchFamily="34" charset="0"/>
+                <a:ea typeface="Montserrat" pitchFamily="34" charset="-122"/>
+                <a:cs typeface="Montserrat" pitchFamily="34" charset="-120"/>
+              </a:rPr>
+              <a:t>Unified log</a:t>
+            </a:r>
+            <a:endParaRPr lang="en-US" sz="1450" dirty="0"/>
+          </a:p>
+        </p:txBody>
+      </p:sp>
+      <p:sp>
+        <p:nvSpPr>
+          <p:cNvPr id="34" name="Shape 31"/>
+          <p:cNvSpPr/>
+          <p:nvPr/>
+        </p:nvSpPr>
+        <p:spPr>
+          <a:xfrm>
+            <a:off x="4270248" y="3749040"/>
+            <a:ext cx="3520440" cy="868680"/>
+          </a:xfrm>
+          <a:prstGeom prst="roundRect">
+            <a:avLst>
+              <a:gd name="adj" fmla="val 12632"/>
+            </a:avLst>
+          </a:prstGeom>
+          <a:solidFill>
+            <a:srgbClr val="FFFFFF"/>
+          </a:solidFill>
+          <a:ln w="12700">
+            <a:solidFill>
+              <a:srgbClr val="E6E7EC"/>
+            </a:solidFill>
+            <a:prstDash val="solid"/>
+          </a:ln>
+        </p:spPr>
+      </p:sp>
+      <p:sp>
+        <p:nvSpPr>
+          <p:cNvPr id="35" name="Shape 32"/>
+          <p:cNvSpPr/>
+          <p:nvPr/>
+        </p:nvSpPr>
+        <p:spPr>
+          <a:xfrm>
+            <a:off x="4471416" y="3931920"/>
+            <a:ext cx="384048" cy="384048"/>
+          </a:xfrm>
+          <a:prstGeom prst="ellipse">
+            <a:avLst/>
+          </a:prstGeom>
+          <a:solidFill>
+            <a:srgbClr val="5A05F4"/>
+          </a:solidFill>
+          <a:ln/>
+        </p:spPr>
+      </p:sp>
+      <p:sp>
+        <p:nvSpPr>
+          <p:cNvPr id="36" name="Text 33"/>
+          <p:cNvSpPr/>
+          <p:nvPr/>
+        </p:nvSpPr>
+        <p:spPr>
+          <a:xfrm>
+            <a:off x="4471416" y="3931920"/>
+            <a:ext cx="384048" cy="384048"/>
+          </a:xfrm>
+          <a:prstGeom prst="rect">
+            <a:avLst/>
+          </a:prstGeom>
+          <a:noFill/>
+          <a:ln/>
+        </p:spPr>
+        <p:txBody>
+          <a:bodyPr wrap="square" lIns="0" tIns="0" rIns="0" bIns="0" rtlCol="0" anchor="ctr"/>
+          <a:lstStyle/>
+          <a:p>
+            <a:pPr algn="ctr" indent="0" marL="0">
+              <a:buNone/>
+            </a:pPr>
+            <a:r>
+              <a:rPr lang="en-US" sz="1200" b="1" dirty="0">
+                <a:solidFill>
+                  <a:srgbClr val="FFFFFF"/>
+                </a:solidFill>
+                <a:latin typeface="Courier New" pitchFamily="34" charset="0"/>
+                <a:ea typeface="Courier New" pitchFamily="34" charset="-122"/>
+                <a:cs typeface="Courier New" pitchFamily="34" charset="-120"/>
+              </a:rPr>
+              <a:t>08</a:t>
+            </a:r>
+            <a:endParaRPr lang="en-US" sz="1200" dirty="0"/>
+          </a:p>
+        </p:txBody>
+      </p:sp>
+      <p:sp>
+        <p:nvSpPr>
+          <p:cNvPr id="37" name="Text 34"/>
+          <p:cNvSpPr/>
+          <p:nvPr/>
+        </p:nvSpPr>
+        <p:spPr>
+          <a:xfrm>
+            <a:off x="4983480" y="3904488"/>
+            <a:ext cx="2606040" cy="438912"/>
+          </a:xfrm>
+          <a:prstGeom prst="rect">
+            <a:avLst/>
+          </a:prstGeom>
+          <a:noFill/>
+          <a:ln/>
+        </p:spPr>
+        <p:txBody>
+          <a:bodyPr wrap="square" lIns="0" tIns="0" rIns="0" bIns="0" rtlCol="0" anchor="ctr"/>
+          <a:lstStyle/>
+          <a:p>
+            <a:pPr indent="0" marL="0">
+              <a:buNone/>
+            </a:pPr>
+            <a:r>
+              <a:rPr lang="en-US" sz="1450" b="1" dirty="0">
+                <a:solidFill>
+                  <a:srgbClr val="111318"/>
+                </a:solidFill>
+                <a:latin typeface="Montserrat" pitchFamily="34" charset="0"/>
+                <a:ea typeface="Montserrat" pitchFamily="34" charset="-122"/>
+                <a:cs typeface="Montserrat" pitchFamily="34" charset="-120"/>
+              </a:rPr>
+              <a:t>Mock-провайдер</a:t>
+            </a:r>
+            <a:endParaRPr lang="en-US" sz="1450" dirty="0"/>
+          </a:p>
+        </p:txBody>
+      </p:sp>
+      <p:sp>
+        <p:nvSpPr>
+          <p:cNvPr id="38" name="Shape 35"/>
+          <p:cNvSpPr/>
+          <p:nvPr/>
+        </p:nvSpPr>
+        <p:spPr>
+          <a:xfrm>
+            <a:off x="7973568" y="3749040"/>
+            <a:ext cx="3520440" cy="868680"/>
+          </a:xfrm>
+          <a:prstGeom prst="roundRect">
+            <a:avLst>
+              <a:gd name="adj" fmla="val 12632"/>
+            </a:avLst>
+          </a:prstGeom>
+          <a:solidFill>
+            <a:srgbClr val="F8F0E2"/>
+          </a:solidFill>
+          <a:ln/>
+        </p:spPr>
+      </p:sp>
+      <p:sp>
+        <p:nvSpPr>
+          <p:cNvPr id="39" name="Shape 36"/>
+          <p:cNvSpPr/>
+          <p:nvPr/>
+        </p:nvSpPr>
+        <p:spPr>
+          <a:xfrm>
+            <a:off x="8174736" y="3931920"/>
+            <a:ext cx="384048" cy="384048"/>
+          </a:xfrm>
+          <a:prstGeom prst="ellipse">
+            <a:avLst/>
+          </a:prstGeom>
+          <a:solidFill>
+            <a:srgbClr val="9A5B12"/>
+          </a:solidFill>
+          <a:ln/>
+        </p:spPr>
+      </p:sp>
+      <p:sp>
+        <p:nvSpPr>
+          <p:cNvPr id="40" name="Text 37"/>
+          <p:cNvSpPr/>
+          <p:nvPr/>
+        </p:nvSpPr>
+        <p:spPr>
+          <a:xfrm>
+            <a:off x="8174736" y="3931920"/>
+            <a:ext cx="384048" cy="384048"/>
+          </a:xfrm>
+          <a:prstGeom prst="rect">
+            <a:avLst/>
+          </a:prstGeom>
+          <a:noFill/>
+          <a:ln/>
+        </p:spPr>
+        <p:txBody>
+          <a:bodyPr wrap="square" lIns="0" tIns="0" rIns="0" bIns="0" rtlCol="0" anchor="ctr"/>
+          <a:lstStyle/>
+          <a:p>
+            <a:pPr algn="ctr" indent="0" marL="0">
+              <a:buNone/>
+            </a:pPr>
+            <a:r>
+              <a:rPr lang="en-US" sz="1200" b="1" dirty="0">
+                <a:solidFill>
+                  <a:srgbClr val="F8F0E2"/>
+                </a:solidFill>
+                <a:latin typeface="Courier New" pitchFamily="34" charset="0"/>
+                <a:ea typeface="Courier New" pitchFamily="34" charset="-122"/>
+                <a:cs typeface="Courier New" pitchFamily="34" charset="-120"/>
+              </a:rPr>
+              <a:t>09</a:t>
+            </a:r>
+            <a:endParaRPr lang="en-US" sz="1200" dirty="0"/>
+          </a:p>
+        </p:txBody>
+      </p:sp>
+      <p:sp>
+        <p:nvSpPr>
+          <p:cNvPr id="41" name="Text 38"/>
+          <p:cNvSpPr/>
+          <p:nvPr/>
+        </p:nvSpPr>
+        <p:spPr>
+          <a:xfrm>
+            <a:off x="8686800" y="3904488"/>
+            <a:ext cx="2606040" cy="438912"/>
+          </a:xfrm>
+          <a:prstGeom prst="rect">
+            <a:avLst/>
+          </a:prstGeom>
+          <a:noFill/>
+          <a:ln/>
+        </p:spPr>
+        <p:txBody>
+          <a:bodyPr wrap="square" lIns="0" tIns="0" rIns="0" bIns="0" rtlCol="0" anchor="ctr"/>
+          <a:lstStyle/>
+          <a:p>
+            <a:pPr indent="0" marL="0">
+              <a:buNone/>
+            </a:pPr>
+            <a:r>
+              <a:rPr lang="en-US" sz="1450" b="1" dirty="0">
+                <a:solidFill>
+                  <a:srgbClr val="9A5B12"/>
+                </a:solidFill>
+                <a:latin typeface="Montserrat" pitchFamily="34" charset="0"/>
+                <a:ea typeface="Montserrat" pitchFamily="34" charset="-122"/>
+                <a:cs typeface="Montserrat" pitchFamily="34" charset="-120"/>
+              </a:rPr>
+              <a:t>Реальний ключ · опційно</a:t>
+            </a:r>
+            <a:endParaRPr lang="en-US" sz="1450" dirty="0"/>
+          </a:p>
+        </p:txBody>
+      </p:sp>
+      <p:sp>
+        <p:nvSpPr>
+          <p:cNvPr id="42" name="Shape 39"/>
+          <p:cNvSpPr/>
+          <p:nvPr/>
+        </p:nvSpPr>
+        <p:spPr>
+          <a:xfrm>
+            <a:off x="566928" y="4800600"/>
+            <a:ext cx="3520440" cy="868680"/>
+          </a:xfrm>
+          <a:prstGeom prst="roundRect">
+            <a:avLst>
+              <a:gd name="adj" fmla="val 12632"/>
+            </a:avLst>
+          </a:prstGeom>
+          <a:solidFill>
+            <a:srgbClr val="FFFFFF"/>
+          </a:solidFill>
+          <a:ln w="12700">
+            <a:solidFill>
+              <a:srgbClr val="E6E7EC"/>
+            </a:solidFill>
+            <a:prstDash val="solid"/>
+          </a:ln>
+        </p:spPr>
+      </p:sp>
+      <p:sp>
+        <p:nvSpPr>
+          <p:cNvPr id="43" name="Shape 40"/>
+          <p:cNvSpPr/>
+          <p:nvPr/>
+        </p:nvSpPr>
+        <p:spPr>
+          <a:xfrm>
+            <a:off x="768096" y="4983480"/>
+            <a:ext cx="384048" cy="384048"/>
+          </a:xfrm>
+          <a:prstGeom prst="ellipse">
+            <a:avLst/>
+          </a:prstGeom>
+          <a:solidFill>
+            <a:srgbClr val="5A05F4"/>
+          </a:solidFill>
+          <a:ln/>
+        </p:spPr>
+      </p:sp>
+      <p:sp>
+        <p:nvSpPr>
+          <p:cNvPr id="44" name="Text 41"/>
+          <p:cNvSpPr/>
+          <p:nvPr/>
+        </p:nvSpPr>
+        <p:spPr>
+          <a:xfrm>
+            <a:off x="768096" y="4983480"/>
+            <a:ext cx="384048" cy="384048"/>
+          </a:xfrm>
+          <a:prstGeom prst="rect">
+            <a:avLst/>
+          </a:prstGeom>
+          <a:noFill/>
+          <a:ln/>
+        </p:spPr>
+        <p:txBody>
+          <a:bodyPr wrap="square" lIns="0" tIns="0" rIns="0" bIns="0" rtlCol="0" anchor="ctr"/>
+          <a:lstStyle/>
+          <a:p>
+            <a:pPr algn="ctr" indent="0" marL="0">
+              <a:buNone/>
+            </a:pPr>
+            <a:r>
+              <a:rPr lang="en-US" sz="1200" b="1" dirty="0">
+                <a:solidFill>
+                  <a:srgbClr val="FFFFFF"/>
+                </a:solidFill>
+                <a:latin typeface="Courier New" pitchFamily="34" charset="0"/>
+                <a:ea typeface="Courier New" pitchFamily="34" charset="-122"/>
+                <a:cs typeface="Courier New" pitchFamily="34" charset="-120"/>
+              </a:rPr>
+              <a:t>10</a:t>
+            </a:r>
+            <a:endParaRPr lang="en-US" sz="1200" dirty="0"/>
+          </a:p>
+        </p:txBody>
+      </p:sp>
+      <p:sp>
+        <p:nvSpPr>
+          <p:cNvPr id="45" name="Text 42"/>
+          <p:cNvSpPr/>
+          <p:nvPr/>
+        </p:nvSpPr>
+        <p:spPr>
+          <a:xfrm>
+            <a:off x="1280160" y="4956048"/>
+            <a:ext cx="2606040" cy="438912"/>
+          </a:xfrm>
+          <a:prstGeom prst="rect">
+            <a:avLst/>
+          </a:prstGeom>
+          <a:noFill/>
+          <a:ln/>
+        </p:spPr>
+        <p:txBody>
+          <a:bodyPr wrap="square" lIns="0" tIns="0" rIns="0" bIns="0" rtlCol="0" anchor="ctr"/>
+          <a:lstStyle/>
+          <a:p>
+            <a:pPr indent="0" marL="0">
+              <a:buNone/>
+            </a:pPr>
+            <a:r>
+              <a:rPr lang="en-US" sz="1450" b="1" dirty="0">
+                <a:solidFill>
+                  <a:srgbClr val="111318"/>
+                </a:solidFill>
+                <a:latin typeface="Montserrat" pitchFamily="34" charset="0"/>
+                <a:ea typeface="Montserrat" pitchFamily="34" charset="-122"/>
+                <a:cs typeface="Montserrat" pitchFamily="34" charset="-120"/>
+              </a:rPr>
+              <a:t>Лабораторна</a:t>
+            </a:r>
+            <a:endParaRPr lang="en-US" sz="1450" dirty="0"/>
+          </a:p>
+        </p:txBody>
+      </p:sp>
+      <p:sp>
+        <p:nvSpPr>
+          <p:cNvPr id="46" name="Shape 43"/>
+          <p:cNvSpPr/>
+          <p:nvPr/>
+        </p:nvSpPr>
+        <p:spPr>
+          <a:xfrm>
+            <a:off x="4270248" y="4800600"/>
+            <a:ext cx="3520440" cy="868680"/>
+          </a:xfrm>
+          <a:prstGeom prst="roundRect">
+            <a:avLst>
+              <a:gd name="adj" fmla="val 12632"/>
+            </a:avLst>
+          </a:prstGeom>
+          <a:solidFill>
+            <a:srgbClr val="FFFFFF"/>
+          </a:solidFill>
+          <a:ln w="12700">
+            <a:solidFill>
+              <a:srgbClr val="E6E7EC"/>
+            </a:solidFill>
+            <a:prstDash val="solid"/>
+          </a:ln>
+        </p:spPr>
+      </p:sp>
+      <p:sp>
+        <p:nvSpPr>
+          <p:cNvPr id="47" name="Shape 44"/>
+          <p:cNvSpPr/>
+          <p:nvPr/>
+        </p:nvSpPr>
+        <p:spPr>
+          <a:xfrm>
+            <a:off x="4471416" y="4983480"/>
+            <a:ext cx="384048" cy="384048"/>
+          </a:xfrm>
+          <a:prstGeom prst="ellipse">
+            <a:avLst/>
+          </a:prstGeom>
+          <a:solidFill>
+            <a:srgbClr val="5A05F4"/>
+          </a:solidFill>
+          <a:ln/>
+        </p:spPr>
+      </p:sp>
+      <p:sp>
+        <p:nvSpPr>
+          <p:cNvPr id="48" name="Text 45"/>
+          <p:cNvSpPr/>
+          <p:nvPr/>
+        </p:nvSpPr>
+        <p:spPr>
+          <a:xfrm>
+            <a:off x="4471416" y="4983480"/>
+            <a:ext cx="384048" cy="384048"/>
+          </a:xfrm>
+          <a:prstGeom prst="rect">
+            <a:avLst/>
+          </a:prstGeom>
+          <a:noFill/>
+          <a:ln/>
+        </p:spPr>
+        <p:txBody>
+          <a:bodyPr wrap="square" lIns="0" tIns="0" rIns="0" bIns="0" rtlCol="0" anchor="ctr"/>
+          <a:lstStyle/>
+          <a:p>
+            <a:pPr algn="ctr" indent="0" marL="0">
+              <a:buNone/>
+            </a:pPr>
+            <a:r>
+              <a:rPr lang="en-US" sz="1200" b="1" dirty="0">
+                <a:solidFill>
+                  <a:srgbClr val="FFFFFF"/>
+                </a:solidFill>
+                <a:latin typeface="Courier New" pitchFamily="34" charset="0"/>
+                <a:ea typeface="Courier New" pitchFamily="34" charset="-122"/>
+                <a:cs typeface="Courier New" pitchFamily="34" charset="-120"/>
+              </a:rPr>
+              <a:t>11</a:t>
+            </a:r>
+            <a:endParaRPr lang="en-US" sz="1200" dirty="0"/>
+          </a:p>
+        </p:txBody>
+      </p:sp>
+      <p:sp>
+        <p:nvSpPr>
+          <p:cNvPr id="49" name="Text 46"/>
+          <p:cNvSpPr/>
+          <p:nvPr/>
+        </p:nvSpPr>
+        <p:spPr>
+          <a:xfrm>
+            <a:off x="4983480" y="4956048"/>
+            <a:ext cx="2606040" cy="438912"/>
+          </a:xfrm>
+          <a:prstGeom prst="rect">
+            <a:avLst/>
+          </a:prstGeom>
+          <a:noFill/>
+          <a:ln/>
+        </p:spPr>
+        <p:txBody>
+          <a:bodyPr wrap="square" lIns="0" tIns="0" rIns="0" bIns="0" rtlCol="0" anchor="ctr"/>
+          <a:lstStyle/>
+          <a:p>
+            <a:pPr indent="0" marL="0">
+              <a:buNone/>
+            </a:pPr>
+            <a:r>
+              <a:rPr lang="en-US" sz="1450" b="1" dirty="0">
+                <a:solidFill>
+                  <a:srgbClr val="111318"/>
+                </a:solidFill>
+                <a:latin typeface="Montserrat" pitchFamily="34" charset="0"/>
+                <a:ea typeface="Montserrat" pitchFamily="34" charset="-122"/>
+                <a:cs typeface="Montserrat" pitchFamily="34" charset="-120"/>
+              </a:rPr>
+              <a:t>Антипатерни</a:t>
+            </a:r>
+            <a:endParaRPr lang="en-US" sz="1450" dirty="0"/>
+          </a:p>
+        </p:txBody>
+      </p:sp>
+      <p:sp>
+        <p:nvSpPr>
+          <p:cNvPr id="50" name="Shape 47"/>
+          <p:cNvSpPr/>
+          <p:nvPr/>
+        </p:nvSpPr>
+        <p:spPr>
+          <a:xfrm>
+            <a:off x="566928" y="5779008"/>
+            <a:ext cx="11064240" cy="402336"/>
+          </a:xfrm>
+          <a:prstGeom prst="roundRect">
+            <a:avLst>
+              <a:gd name="adj" fmla="val 27273"/>
+            </a:avLst>
+          </a:prstGeom>
+          <a:solidFill>
+            <a:srgbClr val="FFFFFF"/>
+          </a:solidFill>
+          <a:ln w="12700">
+            <a:solidFill>
+              <a:srgbClr val="E6E7EC"/>
+            </a:solidFill>
+            <a:prstDash val="solid"/>
+          </a:ln>
+        </p:spPr>
+      </p:sp>
+      <p:sp>
+        <p:nvSpPr>
+          <p:cNvPr id="51" name="Text 48"/>
           <p:cNvSpPr/>
           <p:nvPr/>
         </p:nvSpPr>
@@ -22256,7 +22281,7 @@
       </p:pic>
       <p:sp>
         <p:nvSpPr>
-          <p:cNvPr id="8" name="Shape 4"/>
+          <p:cNvPr id="7" name="Shape 4"/>
           <p:cNvSpPr/>
           <p:nvPr/>
         </p:nvSpPr>
@@ -22283,7 +22308,7 @@
       </p:sp>
       <p:sp>
         <p:nvSpPr>
-          <p:cNvPr id="9" name="Text 5"/>
+          <p:cNvPr id="8" name="Text 5"/>
           <p:cNvSpPr/>
           <p:nvPr/>
         </p:nvSpPr>
@@ -22322,7 +22347,7 @@
       </p:sp>
       <p:sp>
         <p:nvSpPr>
-          <p:cNvPr id="10" name="Text 6"/>
+          <p:cNvPr id="9" name="Text 6"/>
           <p:cNvSpPr/>
           <p:nvPr/>
         </p:nvSpPr>
@@ -22364,7 +22389,7 @@
       </p:sp>
       <p:sp>
         <p:nvSpPr>
-          <p:cNvPr id="11" name="Shape 7"/>
+          <p:cNvPr id="10" name="Shape 7"/>
           <p:cNvSpPr/>
           <p:nvPr/>
         </p:nvSpPr>
@@ -22391,7 +22416,7 @@
       </p:sp>
       <p:sp>
         <p:nvSpPr>
-          <p:cNvPr id="12" name="Text 8"/>
+          <p:cNvPr id="11" name="Text 8"/>
           <p:cNvSpPr/>
           <p:nvPr/>
         </p:nvSpPr>
@@ -22430,7 +22455,7 @@
       </p:sp>
       <p:sp>
         <p:nvSpPr>
-          <p:cNvPr id="13" name="Text 9"/>
+          <p:cNvPr id="12" name="Text 9"/>
           <p:cNvSpPr/>
           <p:nvPr/>
         </p:nvSpPr>
@@ -22472,7 +22497,7 @@
       </p:sp>
       <p:sp>
         <p:nvSpPr>
-          <p:cNvPr id="14" name="Shape 10"/>
+          <p:cNvPr id="13" name="Shape 10"/>
           <p:cNvSpPr/>
           <p:nvPr/>
         </p:nvSpPr>
@@ -22499,7 +22524,7 @@
       </p:sp>
       <p:sp>
         <p:nvSpPr>
-          <p:cNvPr id="15" name="Text 11"/>
+          <p:cNvPr id="14" name="Text 11"/>
           <p:cNvSpPr/>
           <p:nvPr/>
         </p:nvSpPr>
@@ -22538,7 +22563,7 @@
       </p:sp>
       <p:sp>
         <p:nvSpPr>
-          <p:cNvPr id="16" name="Text 12"/>
+          <p:cNvPr id="15" name="Text 12"/>
           <p:cNvSpPr/>
           <p:nvPr/>
         </p:nvSpPr>
@@ -22580,7 +22605,7 @@
       </p:sp>
       <p:sp>
         <p:nvSpPr>
-          <p:cNvPr id="17" name="Shape 13"/>
+          <p:cNvPr id="16" name="Shape 13"/>
           <p:cNvSpPr/>
           <p:nvPr/>
         </p:nvSpPr>
@@ -22607,7 +22632,7 @@
       </p:sp>
       <p:sp>
         <p:nvSpPr>
-          <p:cNvPr id="18" name="Text 14"/>
+          <p:cNvPr id="17" name="Text 14"/>
           <p:cNvSpPr/>
           <p:nvPr/>
         </p:nvSpPr>
@@ -22646,7 +22671,7 @@
       </p:sp>
       <p:sp>
         <p:nvSpPr>
-          <p:cNvPr id="19" name="Text 15"/>
+          <p:cNvPr id="18" name="Text 15"/>
           <p:cNvSpPr/>
           <p:nvPr/>
         </p:nvSpPr>
@@ -22688,7 +22713,7 @@
       </p:sp>
       <p:sp>
         <p:nvSpPr>
-          <p:cNvPr id="20" name="Shape 16"/>
+          <p:cNvPr id="19" name="Shape 16"/>
           <p:cNvSpPr/>
           <p:nvPr/>
         </p:nvSpPr>
@@ -22715,7 +22740,7 @@
       </p:sp>
       <p:sp>
         <p:nvSpPr>
-          <p:cNvPr id="21" name="Text 17"/>
+          <p:cNvPr id="20" name="Text 17"/>
           <p:cNvSpPr/>
           <p:nvPr/>
         </p:nvSpPr>
@@ -22754,7 +22779,7 @@
       </p:sp>
       <p:sp>
         <p:nvSpPr>
-          <p:cNvPr id="22" name="Text 18"/>
+          <p:cNvPr id="21" name="Text 18"/>
           <p:cNvSpPr/>
           <p:nvPr/>
         </p:nvSpPr>
@@ -22796,7 +22821,7 @@
       </p:sp>
       <p:sp>
         <p:nvSpPr>
-          <p:cNvPr id="23" name="Shape 19"/>
+          <p:cNvPr id="22" name="Shape 19"/>
           <p:cNvSpPr/>
           <p:nvPr/>
         </p:nvSpPr>
@@ -22823,7 +22848,7 @@
       </p:sp>
       <p:sp>
         <p:nvSpPr>
-          <p:cNvPr id="24" name="Text 20"/>
+          <p:cNvPr id="23" name="Text 20"/>
           <p:cNvSpPr/>
           <p:nvPr/>
         </p:nvSpPr>
@@ -22862,7 +22887,7 @@
       </p:sp>
       <p:sp>
         <p:nvSpPr>
-          <p:cNvPr id="25" name="Text 21"/>
+          <p:cNvPr id="24" name="Text 21"/>
           <p:cNvSpPr/>
           <p:nvPr/>
         </p:nvSpPr>
@@ -22904,7 +22929,7 @@
       </p:sp>
       <p:sp>
         <p:nvSpPr>
-          <p:cNvPr id="26" name="Shape 22"/>
+          <p:cNvPr id="25" name="Shape 22"/>
           <p:cNvSpPr/>
           <p:nvPr/>
         </p:nvSpPr>
@@ -22931,7 +22956,7 @@
       </p:sp>
       <p:sp>
         <p:nvSpPr>
-          <p:cNvPr id="27" name="Text 23"/>
+          <p:cNvPr id="26" name="Text 23"/>
           <p:cNvSpPr/>
           <p:nvPr/>
         </p:nvSpPr>
@@ -23216,7 +23241,7 @@
       </p:pic>
       <p:sp>
         <p:nvSpPr>
-          <p:cNvPr id="8" name="Shape 4"/>
+          <p:cNvPr id="7" name="Shape 4"/>
           <p:cNvSpPr/>
           <p:nvPr/>
         </p:nvSpPr>
@@ -23238,7 +23263,7 @@
       </p:sp>
       <p:sp>
         <p:nvSpPr>
-          <p:cNvPr id="9" name="Text 5"/>
+          <p:cNvPr id="8" name="Text 5"/>
           <p:cNvSpPr/>
           <p:nvPr/>
         </p:nvSpPr>
@@ -23277,7 +23302,7 @@
       </p:sp>
       <p:sp>
         <p:nvSpPr>
-          <p:cNvPr id="10" name="Text 6"/>
+          <p:cNvPr id="9" name="Text 6"/>
           <p:cNvSpPr/>
           <p:nvPr/>
         </p:nvSpPr>
@@ -23316,7 +23341,7 @@
       </p:sp>
       <p:sp>
         <p:nvSpPr>
-          <p:cNvPr id="11" name="Shape 7"/>
+          <p:cNvPr id="10" name="Shape 7"/>
           <p:cNvSpPr/>
           <p:nvPr/>
         </p:nvSpPr>
@@ -23338,7 +23363,7 @@
       </p:sp>
       <p:sp>
         <p:nvSpPr>
-          <p:cNvPr id="12" name="Text 8"/>
+          <p:cNvPr id="11" name="Text 8"/>
           <p:cNvSpPr/>
           <p:nvPr/>
         </p:nvSpPr>
@@ -23377,7 +23402,7 @@
       </p:sp>
       <p:sp>
         <p:nvSpPr>
-          <p:cNvPr id="13" name="Text 9"/>
+          <p:cNvPr id="12" name="Text 9"/>
           <p:cNvSpPr/>
           <p:nvPr/>
         </p:nvSpPr>
@@ -23416,7 +23441,7 @@
       </p:sp>
       <p:sp>
         <p:nvSpPr>
-          <p:cNvPr id="14" name="Shape 10"/>
+          <p:cNvPr id="13" name="Shape 10"/>
           <p:cNvSpPr/>
           <p:nvPr/>
         </p:nvSpPr>
@@ -23443,7 +23468,7 @@
       </p:sp>
       <p:sp>
         <p:nvSpPr>
-          <p:cNvPr id="15" name="Shape 11"/>
+          <p:cNvPr id="14" name="Shape 11"/>
           <p:cNvSpPr/>
           <p:nvPr/>
         </p:nvSpPr>
@@ -23463,7 +23488,7 @@
       </p:sp>
       <p:sp>
         <p:nvSpPr>
-          <p:cNvPr id="16" name="Text 12"/>
+          <p:cNvPr id="15" name="Text 12"/>
           <p:cNvSpPr/>
           <p:nvPr/>
         </p:nvSpPr>
@@ -23502,7 +23527,7 @@
       </p:sp>
       <p:sp>
         <p:nvSpPr>
-          <p:cNvPr id="17" name="Text 13"/>
+          <p:cNvPr id="16" name="Text 13"/>
           <p:cNvSpPr/>
           <p:nvPr/>
         </p:nvSpPr>
@@ -23541,7 +23566,7 @@
       </p:sp>
       <p:sp>
         <p:nvSpPr>
-          <p:cNvPr id="18" name="Text 14"/>
+          <p:cNvPr id="17" name="Text 14"/>
           <p:cNvSpPr/>
           <p:nvPr/>
         </p:nvSpPr>
@@ -23583,7 +23608,7 @@
       </p:sp>
       <p:sp>
         <p:nvSpPr>
-          <p:cNvPr id="19" name="Shape 15"/>
+          <p:cNvPr id="18" name="Shape 15"/>
           <p:cNvSpPr/>
           <p:nvPr/>
         </p:nvSpPr>
@@ -23610,7 +23635,7 @@
       </p:sp>
       <p:sp>
         <p:nvSpPr>
-          <p:cNvPr id="20" name="Shape 16"/>
+          <p:cNvPr id="19" name="Shape 16"/>
           <p:cNvSpPr/>
           <p:nvPr/>
         </p:nvSpPr>
@@ -23630,7 +23655,7 @@
       </p:sp>
       <p:sp>
         <p:nvSpPr>
-          <p:cNvPr id="21" name="Text 17"/>
+          <p:cNvPr id="20" name="Text 17"/>
           <p:cNvSpPr/>
           <p:nvPr/>
         </p:nvSpPr>
@@ -23669,7 +23694,7 @@
       </p:sp>
       <p:sp>
         <p:nvSpPr>
-          <p:cNvPr id="22" name="Text 18"/>
+          <p:cNvPr id="21" name="Text 18"/>
           <p:cNvSpPr/>
           <p:nvPr/>
         </p:nvSpPr>
@@ -23708,7 +23733,7 @@
       </p:sp>
       <p:sp>
         <p:nvSpPr>
-          <p:cNvPr id="23" name="Text 19"/>
+          <p:cNvPr id="22" name="Text 19"/>
           <p:cNvSpPr/>
           <p:nvPr/>
         </p:nvSpPr>
@@ -23750,7 +23775,7 @@
       </p:sp>
       <p:sp>
         <p:nvSpPr>
-          <p:cNvPr id="24" name="Shape 20"/>
+          <p:cNvPr id="23" name="Shape 20"/>
           <p:cNvSpPr/>
           <p:nvPr/>
         </p:nvSpPr>
@@ -23777,7 +23802,7 @@
       </p:sp>
       <p:sp>
         <p:nvSpPr>
-          <p:cNvPr id="25" name="Shape 21"/>
+          <p:cNvPr id="24" name="Shape 21"/>
           <p:cNvSpPr/>
           <p:nvPr/>
         </p:nvSpPr>
@@ -23797,7 +23822,7 @@
       </p:sp>
       <p:sp>
         <p:nvSpPr>
-          <p:cNvPr id="26" name="Text 22"/>
+          <p:cNvPr id="25" name="Text 22"/>
           <p:cNvSpPr/>
           <p:nvPr/>
         </p:nvSpPr>
@@ -23836,7 +23861,7 @@
       </p:sp>
       <p:sp>
         <p:nvSpPr>
-          <p:cNvPr id="27" name="Text 23"/>
+          <p:cNvPr id="26" name="Text 23"/>
           <p:cNvSpPr/>
           <p:nvPr/>
         </p:nvSpPr>
@@ -23875,7 +23900,7 @@
       </p:sp>
       <p:sp>
         <p:nvSpPr>
-          <p:cNvPr id="28" name="Text 24"/>
+          <p:cNvPr id="27" name="Text 24"/>
           <p:cNvSpPr/>
           <p:nvPr/>
         </p:nvSpPr>
@@ -23917,7 +23942,7 @@
       </p:sp>
       <p:sp>
         <p:nvSpPr>
-          <p:cNvPr id="29" name="Shape 25"/>
+          <p:cNvPr id="28" name="Shape 25"/>
           <p:cNvSpPr/>
           <p:nvPr/>
         </p:nvSpPr>
@@ -23944,7 +23969,7 @@
       </p:sp>
       <p:sp>
         <p:nvSpPr>
-          <p:cNvPr id="30" name="Shape 26"/>
+          <p:cNvPr id="29" name="Shape 26"/>
           <p:cNvSpPr/>
           <p:nvPr/>
         </p:nvSpPr>
@@ -23964,7 +23989,7 @@
       </p:sp>
       <p:sp>
         <p:nvSpPr>
-          <p:cNvPr id="31" name="Text 27"/>
+          <p:cNvPr id="30" name="Text 27"/>
           <p:cNvSpPr/>
           <p:nvPr/>
         </p:nvSpPr>
@@ -24003,7 +24028,7 @@
       </p:sp>
       <p:sp>
         <p:nvSpPr>
-          <p:cNvPr id="32" name="Text 28"/>
+          <p:cNvPr id="31" name="Text 28"/>
           <p:cNvSpPr/>
           <p:nvPr/>
         </p:nvSpPr>
@@ -24042,7 +24067,7 @@
       </p:sp>
       <p:sp>
         <p:nvSpPr>
-          <p:cNvPr id="33" name="Text 29"/>
+          <p:cNvPr id="32" name="Text 29"/>
           <p:cNvSpPr/>
           <p:nvPr/>
         </p:nvSpPr>
@@ -24084,7 +24109,7 @@
       </p:sp>
       <p:sp>
         <p:nvSpPr>
-          <p:cNvPr id="34" name="Shape 30"/>
+          <p:cNvPr id="33" name="Shape 30"/>
           <p:cNvSpPr/>
           <p:nvPr/>
         </p:nvSpPr>
@@ -24106,7 +24131,7 @@
       </p:sp>
       <p:sp>
         <p:nvSpPr>
-          <p:cNvPr id="35" name="Text 31"/>
+          <p:cNvPr id="34" name="Text 31"/>
           <p:cNvSpPr/>
           <p:nvPr/>
         </p:nvSpPr>
@@ -24391,7 +24416,7 @@
       </p:pic>
       <p:sp>
         <p:nvSpPr>
-          <p:cNvPr id="8" name="Shape 4"/>
+          <p:cNvPr id="7" name="Shape 4"/>
           <p:cNvSpPr/>
           <p:nvPr/>
         </p:nvSpPr>
@@ -24413,7 +24438,7 @@
       </p:sp>
       <p:sp>
         <p:nvSpPr>
-          <p:cNvPr id="9" name="Shape 5"/>
+          <p:cNvPr id="8" name="Shape 5"/>
           <p:cNvSpPr/>
           <p:nvPr/>
         </p:nvSpPr>
@@ -24433,7 +24458,7 @@
       </p:sp>
       <p:sp>
         <p:nvSpPr>
-          <p:cNvPr id="10" name="Text 6"/>
+          <p:cNvPr id="9" name="Text 6"/>
           <p:cNvSpPr/>
           <p:nvPr/>
         </p:nvSpPr>
@@ -24472,7 +24497,7 @@
       </p:sp>
       <p:sp>
         <p:nvSpPr>
-          <p:cNvPr id="11" name="Text 7"/>
+          <p:cNvPr id="10" name="Text 7"/>
           <p:cNvSpPr/>
           <p:nvPr/>
         </p:nvSpPr>
@@ -24511,7 +24536,7 @@
       </p:sp>
       <p:sp>
         <p:nvSpPr>
-          <p:cNvPr id="12" name="Text 8"/>
+          <p:cNvPr id="11" name="Text 8"/>
           <p:cNvSpPr/>
           <p:nvPr/>
         </p:nvSpPr>
@@ -24553,7 +24578,7 @@
       </p:sp>
       <p:sp>
         <p:nvSpPr>
-          <p:cNvPr id="13" name="Shape 9"/>
+          <p:cNvPr id="12" name="Shape 9"/>
           <p:cNvSpPr/>
           <p:nvPr/>
         </p:nvSpPr>
@@ -24575,7 +24600,7 @@
       </p:sp>
       <p:sp>
         <p:nvSpPr>
-          <p:cNvPr id="14" name="Shape 10"/>
+          <p:cNvPr id="13" name="Shape 10"/>
           <p:cNvSpPr/>
           <p:nvPr/>
         </p:nvSpPr>
@@ -24595,7 +24620,7 @@
       </p:sp>
       <p:sp>
         <p:nvSpPr>
-          <p:cNvPr id="15" name="Text 11"/>
+          <p:cNvPr id="14" name="Text 11"/>
           <p:cNvSpPr/>
           <p:nvPr/>
         </p:nvSpPr>
@@ -24634,7 +24659,7 @@
       </p:sp>
       <p:sp>
         <p:nvSpPr>
-          <p:cNvPr id="16" name="Text 12"/>
+          <p:cNvPr id="15" name="Text 12"/>
           <p:cNvSpPr/>
           <p:nvPr/>
         </p:nvSpPr>
@@ -24673,7 +24698,7 @@
       </p:sp>
       <p:sp>
         <p:nvSpPr>
-          <p:cNvPr id="17" name="Text 13"/>
+          <p:cNvPr id="16" name="Text 13"/>
           <p:cNvSpPr/>
           <p:nvPr/>
         </p:nvSpPr>
@@ -24715,7 +24740,7 @@
       </p:sp>
       <p:sp>
         <p:nvSpPr>
-          <p:cNvPr id="18" name="Shape 14"/>
+          <p:cNvPr id="17" name="Shape 14"/>
           <p:cNvSpPr/>
           <p:nvPr/>
         </p:nvSpPr>
@@ -24737,7 +24762,7 @@
       </p:sp>
       <p:sp>
         <p:nvSpPr>
-          <p:cNvPr id="19" name="Shape 15"/>
+          <p:cNvPr id="18" name="Shape 15"/>
           <p:cNvSpPr/>
           <p:nvPr/>
         </p:nvSpPr>
@@ -24757,7 +24782,7 @@
       </p:sp>
       <p:sp>
         <p:nvSpPr>
-          <p:cNvPr id="20" name="Text 16"/>
+          <p:cNvPr id="19" name="Text 16"/>
           <p:cNvSpPr/>
           <p:nvPr/>
         </p:nvSpPr>
@@ -24796,7 +24821,7 @@
       </p:sp>
       <p:sp>
         <p:nvSpPr>
-          <p:cNvPr id="21" name="Text 17"/>
+          <p:cNvPr id="20" name="Text 17"/>
           <p:cNvSpPr/>
           <p:nvPr/>
         </p:nvSpPr>
@@ -24835,7 +24860,7 @@
       </p:sp>
       <p:sp>
         <p:nvSpPr>
-          <p:cNvPr id="22" name="Text 18"/>
+          <p:cNvPr id="21" name="Text 18"/>
           <p:cNvSpPr/>
           <p:nvPr/>
         </p:nvSpPr>
@@ -24877,7 +24902,7 @@
       </p:sp>
       <p:sp>
         <p:nvSpPr>
-          <p:cNvPr id="23" name="Shape 19"/>
+          <p:cNvPr id="22" name="Shape 19"/>
           <p:cNvSpPr/>
           <p:nvPr/>
         </p:nvSpPr>
@@ -24899,7 +24924,7 @@
       </p:sp>
       <p:sp>
         <p:nvSpPr>
-          <p:cNvPr id="24" name="Shape 20"/>
+          <p:cNvPr id="23" name="Shape 20"/>
           <p:cNvSpPr/>
           <p:nvPr/>
         </p:nvSpPr>
@@ -24919,7 +24944,7 @@
       </p:sp>
       <p:sp>
         <p:nvSpPr>
-          <p:cNvPr id="25" name="Text 21"/>
+          <p:cNvPr id="24" name="Text 21"/>
           <p:cNvSpPr/>
           <p:nvPr/>
         </p:nvSpPr>
@@ -24958,7 +24983,7 @@
       </p:sp>
       <p:sp>
         <p:nvSpPr>
-          <p:cNvPr id="26" name="Text 22"/>
+          <p:cNvPr id="25" name="Text 22"/>
           <p:cNvSpPr/>
           <p:nvPr/>
         </p:nvSpPr>
@@ -24997,7 +25022,7 @@
       </p:sp>
       <p:sp>
         <p:nvSpPr>
-          <p:cNvPr id="27" name="Text 23"/>
+          <p:cNvPr id="26" name="Text 23"/>
           <p:cNvSpPr/>
           <p:nvPr/>
         </p:nvSpPr>
@@ -25039,7 +25064,7 @@
       </p:sp>
       <p:sp>
         <p:nvSpPr>
-          <p:cNvPr id="28" name="Shape 24"/>
+          <p:cNvPr id="27" name="Shape 24"/>
           <p:cNvSpPr/>
           <p:nvPr/>
         </p:nvSpPr>
@@ -25066,7 +25091,7 @@
       </p:sp>
       <p:sp>
         <p:nvSpPr>
-          <p:cNvPr id="29" name="Text 25"/>
+          <p:cNvPr id="28" name="Text 25"/>
           <p:cNvSpPr/>
           <p:nvPr/>
         </p:nvSpPr>
@@ -25105,7 +25130,7 @@
       </p:sp>
       <p:sp>
         <p:nvSpPr>
-          <p:cNvPr id="30" name="Text 26"/>
+          <p:cNvPr id="29" name="Text 26"/>
           <p:cNvSpPr/>
           <p:nvPr/>
         </p:nvSpPr>
@@ -25147,7 +25172,7 @@
       </p:sp>
       <p:sp>
         <p:nvSpPr>
-          <p:cNvPr id="31" name="Shape 27"/>
+          <p:cNvPr id="30" name="Shape 27"/>
           <p:cNvSpPr/>
           <p:nvPr/>
         </p:nvSpPr>
@@ -25169,7 +25194,7 @@
       </p:sp>
       <p:sp>
         <p:nvSpPr>
-          <p:cNvPr id="32" name="Text 28"/>
+          <p:cNvPr id="31" name="Text 28"/>
           <p:cNvSpPr/>
           <p:nvPr/>
         </p:nvSpPr>
@@ -25208,7 +25233,7 @@
       </p:sp>
       <p:sp>
         <p:nvSpPr>
-          <p:cNvPr id="33" name="Shape 29"/>
+          <p:cNvPr id="32" name="Shape 29"/>
           <p:cNvSpPr/>
           <p:nvPr/>
         </p:nvSpPr>
@@ -25231,7 +25256,7 @@
       </p:sp>
       <p:sp>
         <p:nvSpPr>
-          <p:cNvPr id="34" name="Shape 30"/>
+          <p:cNvPr id="33" name="Shape 30"/>
           <p:cNvSpPr/>
           <p:nvPr/>
         </p:nvSpPr>
@@ -25251,7 +25276,7 @@
       </p:sp>
       <p:sp>
         <p:nvSpPr>
-          <p:cNvPr id="35" name="Shape 31"/>
+          <p:cNvPr id="34" name="Shape 31"/>
           <p:cNvSpPr/>
           <p:nvPr/>
         </p:nvSpPr>
@@ -25278,7 +25303,7 @@
       </p:sp>
       <p:sp>
         <p:nvSpPr>
-          <p:cNvPr id="36" name="Text 32"/>
+          <p:cNvPr id="35" name="Text 32"/>
           <p:cNvSpPr/>
           <p:nvPr/>
         </p:nvSpPr>
@@ -25317,7 +25342,7 @@
       </p:sp>
       <p:sp>
         <p:nvSpPr>
-          <p:cNvPr id="37" name="Shape 33"/>
+          <p:cNvPr id="36" name="Shape 33"/>
           <p:cNvSpPr/>
           <p:nvPr/>
         </p:nvSpPr>
@@ -25340,7 +25365,7 @@
       </p:sp>
       <p:sp>
         <p:nvSpPr>
-          <p:cNvPr id="38" name="Shape 34"/>
+          <p:cNvPr id="37" name="Shape 34"/>
           <p:cNvSpPr/>
           <p:nvPr/>
         </p:nvSpPr>
@@ -25360,7 +25385,7 @@
       </p:sp>
       <p:sp>
         <p:nvSpPr>
-          <p:cNvPr id="39" name="Shape 35"/>
+          <p:cNvPr id="38" name="Shape 35"/>
           <p:cNvSpPr/>
           <p:nvPr/>
         </p:nvSpPr>
@@ -25387,7 +25412,7 @@
       </p:sp>
       <p:sp>
         <p:nvSpPr>
-          <p:cNvPr id="40" name="Text 36"/>
+          <p:cNvPr id="39" name="Text 36"/>
           <p:cNvSpPr/>
           <p:nvPr/>
         </p:nvSpPr>
@@ -25426,7 +25451,7 @@
       </p:sp>
       <p:sp>
         <p:nvSpPr>
-          <p:cNvPr id="41" name="Shape 37"/>
+          <p:cNvPr id="40" name="Shape 37"/>
           <p:cNvSpPr/>
           <p:nvPr/>
         </p:nvSpPr>
@@ -25449,7 +25474,7 @@
       </p:sp>
       <p:sp>
         <p:nvSpPr>
-          <p:cNvPr id="42" name="Shape 38"/>
+          <p:cNvPr id="41" name="Shape 38"/>
           <p:cNvSpPr/>
           <p:nvPr/>
         </p:nvSpPr>
@@ -25469,7 +25494,7 @@
       </p:sp>
       <p:sp>
         <p:nvSpPr>
-          <p:cNvPr id="43" name="Shape 39"/>
+          <p:cNvPr id="42" name="Shape 39"/>
           <p:cNvSpPr/>
           <p:nvPr/>
         </p:nvSpPr>
@@ -25496,7 +25521,7 @@
       </p:sp>
       <p:sp>
         <p:nvSpPr>
-          <p:cNvPr id="44" name="Text 40"/>
+          <p:cNvPr id="43" name="Text 40"/>
           <p:cNvSpPr/>
           <p:nvPr/>
         </p:nvSpPr>
@@ -25535,7 +25560,7 @@
       </p:sp>
       <p:sp>
         <p:nvSpPr>
-          <p:cNvPr id="45" name="Shape 41"/>
+          <p:cNvPr id="44" name="Shape 41"/>
           <p:cNvSpPr/>
           <p:nvPr/>
         </p:nvSpPr>
@@ -25558,7 +25583,7 @@
       </p:sp>
       <p:sp>
         <p:nvSpPr>
-          <p:cNvPr id="46" name="Shape 42"/>
+          <p:cNvPr id="45" name="Shape 42"/>
           <p:cNvSpPr/>
           <p:nvPr/>
         </p:nvSpPr>
@@ -25578,7 +25603,7 @@
       </p:sp>
       <p:sp>
         <p:nvSpPr>
-          <p:cNvPr id="47" name="Shape 43"/>
+          <p:cNvPr id="46" name="Shape 43"/>
           <p:cNvSpPr/>
           <p:nvPr/>
         </p:nvSpPr>
@@ -25605,7 +25630,7 @@
       </p:sp>
       <p:sp>
         <p:nvSpPr>
-          <p:cNvPr id="48" name="Text 44"/>
+          <p:cNvPr id="47" name="Text 44"/>
           <p:cNvSpPr/>
           <p:nvPr/>
         </p:nvSpPr>
@@ -25644,7 +25669,7 @@
       </p:sp>
       <p:sp>
         <p:nvSpPr>
-          <p:cNvPr id="49" name="Shape 45"/>
+          <p:cNvPr id="48" name="Shape 45"/>
           <p:cNvSpPr/>
           <p:nvPr/>
         </p:nvSpPr>
@@ -25667,7 +25692,7 @@
       </p:sp>
       <p:sp>
         <p:nvSpPr>
-          <p:cNvPr id="50" name="Shape 46"/>
+          <p:cNvPr id="49" name="Shape 46"/>
           <p:cNvSpPr/>
           <p:nvPr/>
         </p:nvSpPr>
@@ -25687,7 +25712,7 @@
       </p:sp>
       <p:sp>
         <p:nvSpPr>
-          <p:cNvPr id="51" name="Shape 47"/>
+          <p:cNvPr id="50" name="Shape 47"/>
           <p:cNvSpPr/>
           <p:nvPr/>
         </p:nvSpPr>
@@ -25714,7 +25739,7 @@
       </p:sp>
       <p:sp>
         <p:nvSpPr>
-          <p:cNvPr id="52" name="Text 48"/>
+          <p:cNvPr id="51" name="Text 48"/>
           <p:cNvSpPr/>
           <p:nvPr/>
         </p:nvSpPr>
@@ -25753,7 +25778,7 @@
       </p:sp>
       <p:sp>
         <p:nvSpPr>
-          <p:cNvPr id="53" name="Text 49"/>
+          <p:cNvPr id="52" name="Text 49"/>
           <p:cNvSpPr/>
           <p:nvPr/>
         </p:nvSpPr>
@@ -26035,7 +26060,7 @@
       </p:pic>
       <p:sp>
         <p:nvSpPr>
-          <p:cNvPr id="8" name="Shape 4"/>
+          <p:cNvPr id="7" name="Shape 4"/>
           <p:cNvSpPr/>
           <p:nvPr/>
         </p:nvSpPr>
@@ -26062,7 +26087,7 @@
       </p:sp>
       <p:sp>
         <p:nvSpPr>
-          <p:cNvPr id="9" name="Text 5"/>
+          <p:cNvPr id="8" name="Text 5"/>
           <p:cNvSpPr/>
           <p:nvPr/>
         </p:nvSpPr>
@@ -26278,7 +26303,7 @@
       </p:sp>
       <p:sp>
         <p:nvSpPr>
-          <p:cNvPr id="10" name="Shape 6"/>
+          <p:cNvPr id="9" name="Shape 6"/>
           <p:cNvSpPr/>
           <p:nvPr/>
         </p:nvSpPr>
@@ -26300,7 +26325,7 @@
       </p:sp>
       <p:sp>
         <p:nvSpPr>
-          <p:cNvPr id="11" name="Text 7"/>
+          <p:cNvPr id="10" name="Text 7"/>
           <p:cNvSpPr/>
           <p:nvPr/>
         </p:nvSpPr>
@@ -26342,7 +26367,7 @@
       </p:sp>
       <p:sp>
         <p:nvSpPr>
-          <p:cNvPr id="12" name="Shape 8"/>
+          <p:cNvPr id="11" name="Shape 8"/>
           <p:cNvSpPr/>
           <p:nvPr/>
         </p:nvSpPr>
@@ -26364,7 +26389,7 @@
       </p:sp>
       <p:sp>
         <p:nvSpPr>
-          <p:cNvPr id="13" name="Text 9"/>
+          <p:cNvPr id="12" name="Text 9"/>
           <p:cNvSpPr/>
           <p:nvPr/>
         </p:nvSpPr>
@@ -26403,7 +26428,7 @@
       </p:sp>
       <p:sp>
         <p:nvSpPr>
-          <p:cNvPr id="14" name="Text 10"/>
+          <p:cNvPr id="13" name="Text 10"/>
           <p:cNvSpPr/>
           <p:nvPr/>
         </p:nvSpPr>
@@ -26442,7 +26467,7 @@
       </p:sp>
       <p:sp>
         <p:nvSpPr>
-          <p:cNvPr id="15" name="Shape 11"/>
+          <p:cNvPr id="14" name="Shape 11"/>
           <p:cNvSpPr/>
           <p:nvPr/>
         </p:nvSpPr>
@@ -26464,7 +26489,7 @@
       </p:sp>
       <p:sp>
         <p:nvSpPr>
-          <p:cNvPr id="16" name="Text 12"/>
+          <p:cNvPr id="15" name="Text 12"/>
           <p:cNvSpPr/>
           <p:nvPr/>
         </p:nvSpPr>
@@ -26503,7 +26528,7 @@
       </p:sp>
       <p:sp>
         <p:nvSpPr>
-          <p:cNvPr id="17" name="Text 13"/>
+          <p:cNvPr id="16" name="Text 13"/>
           <p:cNvSpPr/>
           <p:nvPr/>
         </p:nvSpPr>
@@ -26542,7 +26567,7 @@
       </p:sp>
       <p:sp>
         <p:nvSpPr>
-          <p:cNvPr id="18" name="Shape 14"/>
+          <p:cNvPr id="17" name="Shape 14"/>
           <p:cNvSpPr/>
           <p:nvPr/>
         </p:nvSpPr>
@@ -26564,7 +26589,7 @@
       </p:sp>
       <p:sp>
         <p:nvSpPr>
-          <p:cNvPr id="19" name="Text 15"/>
+          <p:cNvPr id="18" name="Text 15"/>
           <p:cNvSpPr/>
           <p:nvPr/>
         </p:nvSpPr>
@@ -26603,7 +26628,7 @@
       </p:sp>
       <p:sp>
         <p:nvSpPr>
-          <p:cNvPr id="20" name="Text 16"/>
+          <p:cNvPr id="19" name="Text 16"/>
           <p:cNvSpPr/>
           <p:nvPr/>
         </p:nvSpPr>
@@ -26642,7 +26667,7 @@
       </p:sp>
       <p:sp>
         <p:nvSpPr>
-          <p:cNvPr id="21" name="Text 17"/>
+          <p:cNvPr id="20" name="Text 17"/>
           <p:cNvSpPr/>
           <p:nvPr/>
         </p:nvSpPr>
@@ -27985,7 +28010,7 @@
       </p:graphicFrame>
       <p:sp>
         <p:nvSpPr>
-          <p:cNvPr id="9" name="Shape 4"/>
+          <p:cNvPr id="8" name="Shape 4"/>
           <p:cNvSpPr/>
           <p:nvPr/>
         </p:nvSpPr>
@@ -28007,7 +28032,7 @@
       </p:sp>
       <p:sp>
         <p:nvSpPr>
-          <p:cNvPr id="10" name="Text 5"/>
+          <p:cNvPr id="9" name="Text 5"/>
           <p:cNvSpPr/>
           <p:nvPr/>
         </p:nvSpPr>
@@ -28046,7 +28071,7 @@
       </p:sp>
       <p:sp>
         <p:nvSpPr>
-          <p:cNvPr id="11" name="Text 6"/>
+          <p:cNvPr id="10" name="Text 6"/>
           <p:cNvSpPr/>
           <p:nvPr/>
         </p:nvSpPr>
@@ -28088,7 +28113,7 @@
       </p:sp>
       <p:sp>
         <p:nvSpPr>
-          <p:cNvPr id="12" name="Shape 7"/>
+          <p:cNvPr id="11" name="Shape 7"/>
           <p:cNvSpPr/>
           <p:nvPr/>
         </p:nvSpPr>
@@ -28110,7 +28135,7 @@
       </p:sp>
       <p:sp>
         <p:nvSpPr>
-          <p:cNvPr id="13" name="Text 8"/>
+          <p:cNvPr id="12" name="Text 8"/>
           <p:cNvSpPr/>
           <p:nvPr/>
         </p:nvSpPr>
@@ -28149,7 +28174,7 @@
       </p:sp>
       <p:sp>
         <p:nvSpPr>
-          <p:cNvPr id="14" name="Text 9"/>
+          <p:cNvPr id="13" name="Text 9"/>
           <p:cNvSpPr/>
           <p:nvPr/>
         </p:nvSpPr>
@@ -28191,7 +28216,7 @@
       </p:sp>
       <p:sp>
         <p:nvSpPr>
-          <p:cNvPr id="15" name="Text 10"/>
+          <p:cNvPr id="14" name="Text 10"/>
           <p:cNvSpPr/>
           <p:nvPr/>
         </p:nvSpPr>
@@ -28473,7 +28498,7 @@
       </p:pic>
       <p:sp>
         <p:nvSpPr>
-          <p:cNvPr id="8" name="Shape 4"/>
+          <p:cNvPr id="7" name="Shape 4"/>
           <p:cNvSpPr/>
           <p:nvPr/>
         </p:nvSpPr>
@@ -28500,7 +28525,7 @@
       </p:sp>
       <p:sp>
         <p:nvSpPr>
-          <p:cNvPr id="9" name="Text 5"/>
+          <p:cNvPr id="8" name="Text 5"/>
           <p:cNvSpPr/>
           <p:nvPr/>
         </p:nvSpPr>
@@ -28539,7 +28564,7 @@
       </p:sp>
       <p:sp>
         <p:nvSpPr>
-          <p:cNvPr id="10" name="Text 6"/>
+          <p:cNvPr id="9" name="Text 6"/>
           <p:cNvSpPr/>
           <p:nvPr/>
         </p:nvSpPr>
@@ -28578,7 +28603,7 @@
       </p:sp>
       <p:sp>
         <p:nvSpPr>
-          <p:cNvPr id="11" name="Shape 7"/>
+          <p:cNvPr id="10" name="Shape 7"/>
           <p:cNvSpPr/>
           <p:nvPr/>
         </p:nvSpPr>
@@ -28600,7 +28625,7 @@
       </p:sp>
       <p:sp>
         <p:nvSpPr>
-          <p:cNvPr id="12" name="Text 8"/>
+          <p:cNvPr id="11" name="Text 8"/>
           <p:cNvSpPr/>
           <p:nvPr/>
         </p:nvSpPr>
@@ -28639,7 +28664,7 @@
       </p:sp>
       <p:sp>
         <p:nvSpPr>
-          <p:cNvPr id="13" name="Text 9"/>
+          <p:cNvPr id="12" name="Text 9"/>
           <p:cNvSpPr/>
           <p:nvPr/>
         </p:nvSpPr>
@@ -28678,7 +28703,7 @@
       </p:sp>
       <p:sp>
         <p:nvSpPr>
-          <p:cNvPr id="14" name="Text 10"/>
+          <p:cNvPr id="13" name="Text 10"/>
           <p:cNvSpPr/>
           <p:nvPr/>
         </p:nvSpPr>
@@ -28717,7 +28742,7 @@
       </p:sp>
       <p:sp>
         <p:nvSpPr>
-          <p:cNvPr id="15" name="Text 11"/>
+          <p:cNvPr id="14" name="Text 11"/>
           <p:cNvSpPr/>
           <p:nvPr/>
         </p:nvSpPr>
@@ -28756,7 +28781,7 @@
       </p:sp>
       <p:sp>
         <p:nvSpPr>
-          <p:cNvPr id="16" name="Shape 12"/>
+          <p:cNvPr id="15" name="Shape 12"/>
           <p:cNvSpPr/>
           <p:nvPr/>
         </p:nvSpPr>
@@ -28778,7 +28803,7 @@
       </p:sp>
       <p:sp>
         <p:nvSpPr>
-          <p:cNvPr id="17" name="Text 13"/>
+          <p:cNvPr id="16" name="Text 13"/>
           <p:cNvSpPr/>
           <p:nvPr/>
         </p:nvSpPr>
@@ -28817,7 +28842,7 @@
       </p:sp>
       <p:sp>
         <p:nvSpPr>
-          <p:cNvPr id="18" name="Text 14"/>
+          <p:cNvPr id="17" name="Text 14"/>
           <p:cNvSpPr/>
           <p:nvPr/>
         </p:nvSpPr>
@@ -28856,7 +28881,7 @@
       </p:sp>
       <p:sp>
         <p:nvSpPr>
-          <p:cNvPr id="19" name="Shape 15"/>
+          <p:cNvPr id="18" name="Shape 15"/>
           <p:cNvSpPr/>
           <p:nvPr/>
         </p:nvSpPr>
@@ -28878,7 +28903,7 @@
       </p:sp>
       <p:sp>
         <p:nvSpPr>
-          <p:cNvPr id="20" name="Text 16"/>
+          <p:cNvPr id="19" name="Text 16"/>
           <p:cNvSpPr/>
           <p:nvPr/>
         </p:nvSpPr>
@@ -28917,7 +28942,7 @@
       </p:sp>
       <p:sp>
         <p:nvSpPr>
-          <p:cNvPr id="21" name="Text 17"/>
+          <p:cNvPr id="20" name="Text 17"/>
           <p:cNvSpPr/>
           <p:nvPr/>
         </p:nvSpPr>
@@ -28956,7 +28981,7 @@
       </p:sp>
       <p:sp>
         <p:nvSpPr>
-          <p:cNvPr id="22" name="Shape 18"/>
+          <p:cNvPr id="21" name="Shape 18"/>
           <p:cNvSpPr/>
           <p:nvPr/>
         </p:nvSpPr>
@@ -28978,7 +29003,7 @@
       </p:sp>
       <p:sp>
         <p:nvSpPr>
-          <p:cNvPr id="23" name="Text 19"/>
+          <p:cNvPr id="22" name="Text 19"/>
           <p:cNvSpPr/>
           <p:nvPr/>
         </p:nvSpPr>
@@ -29017,7 +29042,7 @@
       </p:sp>
       <p:sp>
         <p:nvSpPr>
-          <p:cNvPr id="24" name="Text 20"/>
+          <p:cNvPr id="23" name="Text 20"/>
           <p:cNvSpPr/>
           <p:nvPr/>
         </p:nvSpPr>
@@ -29056,7 +29081,7 @@
       </p:sp>
       <p:sp>
         <p:nvSpPr>
-          <p:cNvPr id="25" name="Shape 21"/>
+          <p:cNvPr id="24" name="Shape 21"/>
           <p:cNvSpPr/>
           <p:nvPr/>
         </p:nvSpPr>
@@ -29078,7 +29103,7 @@
       </p:sp>
       <p:sp>
         <p:nvSpPr>
-          <p:cNvPr id="26" name="Text 22"/>
+          <p:cNvPr id="25" name="Text 22"/>
           <p:cNvSpPr/>
           <p:nvPr/>
         </p:nvSpPr>
@@ -29117,7 +29142,7 @@
       </p:sp>
       <p:sp>
         <p:nvSpPr>
-          <p:cNvPr id="27" name="Text 23"/>
+          <p:cNvPr id="26" name="Text 23"/>
           <p:cNvSpPr/>
           <p:nvPr/>
         </p:nvSpPr>

--- a/docs/decks/L01.pptx
+++ b/docs/decks/L01.pptx
@@ -2714,7 +2714,7 @@
         </p:nvSpPr>
         <p:spPr>
           <a:xfrm>
-            <a:off x="11368735" y="6437376"/>
+            <a:off x="11368735" y="6327648"/>
             <a:ext cx="365760" cy="274320"/>
           </a:xfrm>
           <a:prstGeom prst="rect">
@@ -2750,6 +2750,62 @@
           </a:p>
         </p:txBody>
       </p:sp>
+    </p:spTree>
+  </p:cSld>
+  <p:clrMapOvr>
+    <a:masterClrMapping/>
+  </p:clrMapOvr>
+</p:sldLayout>
+</file>
+
+<file path=ppt/slideLayouts/slideLayout2.xml><?xml version="1.0" encoding="utf-8"?>
+<p:sldLayout xmlns:a="http://schemas.openxmlformats.org/drawingml/2006/main" xmlns:r="http://schemas.openxmlformats.org/officeDocument/2006/relationships" xmlns:p="http://schemas.openxmlformats.org/presentationml/2006/main" preserve="1">
+  <p:cSld name="NEO">
+    <p:bg>
+      <p:bgPr>
+        <a:solidFill>
+          <a:srgbClr val="000000"/>
+        </a:solidFill>
+      </p:bgPr>
+    </p:bg>
+    <p:spTree>
+      <p:nvGrpSpPr>
+        <p:cNvPr id="1" name=""/>
+        <p:cNvGrpSpPr/>
+        <p:nvPr/>
+      </p:nvGrpSpPr>
+      <p:grpSpPr>
+        <a:xfrm>
+          <a:off x="0" y="0"/>
+          <a:ext cx="0" cy="0"/>
+          <a:chOff x="0" y="0"/>
+          <a:chExt cx="0" cy="0"/>
+        </a:xfrm>
+      </p:grpSpPr>
+      <p:pic>
+        <p:nvPicPr>
+          <p:cNvPr id="2" name="Image 0" descr="preencoded.png">    </p:cNvPr>
+          <p:cNvPicPr>
+            <a:picLocks noChangeAspect="1"/>
+          </p:cNvPicPr>
+          <p:nvPr/>
+        </p:nvPicPr>
+        <p:blipFill>
+          <a:blip r:embed="rId1"/>
+          <a:stretch>
+            <a:fillRect/>
+          </a:stretch>
+        </p:blipFill>
+        <p:spPr>
+          <a:xfrm>
+            <a:off x="0" y="0"/>
+            <a:ext cx="12191695" cy="6858000"/>
+          </a:xfrm>
+          <a:prstGeom prst="rect">
+            <a:avLst/>
+          </a:prstGeom>
+        </p:spPr>
+      </p:pic>
     </p:spTree>
   </p:cSld>
   <p:clrMapOvr>
@@ -2787,7 +2843,7 @@
         </p:nvSpPr>
         <p:spPr>
           <a:xfrm>
-            <a:off x="11368735" y="6437376"/>
+            <a:off x="11368735" y="6327648"/>
             <a:ext cx="365760" cy="274320"/>
           </a:xfrm>
           <a:prstGeom prst="rect">
@@ -2828,6 +2884,7 @@
   <p:clrMap bg1="lt1" tx1="dk1" bg2="lt2" tx2="dk2" accent1="accent1" accent2="accent2" accent3="accent3" accent4="accent4" accent5="accent5" accent6="accent6" hlink="hlink" folHlink="folHlink"/>
   <p:sldLayoutIdLst>
     <p:sldLayoutId id="2147483649" r:id="rId1"/>
+    <p:sldLayoutId id="2147483650" r:id="rId2"/>
   </p:sldLayoutIdLst>
   <p:hf sldNum="0" hdr="0" ftr="0" dt="0"/>
   <p:txStyles>
@@ -3086,13 +3143,6 @@
 <file path=ppt/slides/slide1.xml><?xml version="1.0" encoding="utf-8"?>
 <p:sld xmlns:a="http://schemas.openxmlformats.org/drawingml/2006/main" xmlns:r="http://schemas.openxmlformats.org/officeDocument/2006/relationships" xmlns:p="http://schemas.openxmlformats.org/presentationml/2006/main">
   <p:cSld name="Slide 1">
-    <p:bg>
-      <p:bgPr>
-        <a:solidFill>
-          <a:srgbClr val="1B0942"/>
-        </a:solidFill>
-      </p:bgPr>
-    </p:bg>
     <p:spTree>
       <p:nvGrpSpPr>
         <p:cNvPr id="1" name=""/>
@@ -3764,13 +3814,6 @@
 <file path=ppt/slides/slide10.xml><?xml version="1.0" encoding="utf-8"?>
 <p:sld xmlns:a="http://schemas.openxmlformats.org/drawingml/2006/main" xmlns:r="http://schemas.openxmlformats.org/officeDocument/2006/relationships" xmlns:p="http://schemas.openxmlformats.org/presentationml/2006/main">
   <p:cSld name="Slide 10">
-    <p:bg>
-      <p:bgPr>
-        <a:solidFill>
-          <a:srgbClr val="FFFFFF"/>
-        </a:solidFill>
-      </p:bgPr>
-    </p:bg>
     <p:spTree>
       <p:nvGrpSpPr>
         <p:cNvPr id="1" name=""/>
@@ -3787,7 +3830,29 @@
       </p:grpSpPr>
       <p:sp>
         <p:nvSpPr>
-          <p:cNvPr id="2" name="Text 0"/>
+          <p:cNvPr id="2" name="Shape 0"/>
+          <p:cNvSpPr/>
+          <p:nvPr/>
+        </p:nvSpPr>
+        <p:spPr>
+          <a:xfrm>
+            <a:off x="231343" y="194767"/>
+            <a:ext cx="11716207" cy="6473952"/>
+          </a:xfrm>
+          <a:prstGeom prst="roundRect">
+            <a:avLst>
+              <a:gd name="adj" fmla="val 3107"/>
+            </a:avLst>
+          </a:prstGeom>
+          <a:solidFill>
+            <a:srgbClr val="FFFFFF"/>
+          </a:solidFill>
+          <a:ln/>
+        </p:spPr>
+      </p:sp>
+      <p:sp>
+        <p:nvSpPr>
+          <p:cNvPr id="3" name="Text 1"/>
           <p:cNvSpPr/>
           <p:nvPr/>
         </p:nvSpPr>
@@ -3826,7 +3891,7 @@
       </p:sp>
       <p:sp>
         <p:nvSpPr>
-          <p:cNvPr id="3" name="Text 1"/>
+          <p:cNvPr id="4" name="Text 2"/>
           <p:cNvSpPr/>
           <p:nvPr/>
         </p:nvSpPr>
@@ -3865,7 +3930,7 @@
       </p:sp>
       <p:sp>
         <p:nvSpPr>
-          <p:cNvPr id="4" name="Shape 2"/>
+          <p:cNvPr id="5" name="Shape 3"/>
           <p:cNvSpPr/>
           <p:nvPr/>
         </p:nvSpPr>
@@ -3887,7 +3952,7 @@
       </p:sp>
       <p:sp>
         <p:nvSpPr>
-          <p:cNvPr id="5" name="Text 3"/>
+          <p:cNvPr id="6" name="Text 4"/>
           <p:cNvSpPr/>
           <p:nvPr/>
         </p:nvSpPr>
@@ -3926,7 +3991,7 @@
       </p:sp>
       <p:pic>
         <p:nvPicPr>
-          <p:cNvPr id="6" name="Image 0" descr="preencoded.png">    </p:cNvPr>
+          <p:cNvPr id="7" name="Image 0" descr="preencoded.png">    </p:cNvPr>
           <p:cNvPicPr>
             <a:picLocks noChangeAspect="1"/>
           </p:cNvPicPr>
@@ -3940,7 +4005,7 @@
         </p:blipFill>
         <p:spPr>
           <a:xfrm>
-            <a:off x="566928" y="6254496"/>
+            <a:off x="566928" y="6126480"/>
             <a:ext cx="1481328" cy="457200"/>
           </a:xfrm>
           <a:prstGeom prst="rect">
@@ -3950,7 +4015,7 @@
       </p:pic>
       <p:sp>
         <p:nvSpPr>
-          <p:cNvPr id="7" name="Shape 4"/>
+          <p:cNvPr id="8" name="Shape 5"/>
           <p:cNvSpPr/>
           <p:nvPr/>
         </p:nvSpPr>
@@ -3977,7 +4042,7 @@
       </p:sp>
       <p:sp>
         <p:nvSpPr>
-          <p:cNvPr id="8" name="Shape 5"/>
+          <p:cNvPr id="9" name="Shape 6"/>
           <p:cNvSpPr/>
           <p:nvPr/>
         </p:nvSpPr>
@@ -3997,7 +4062,7 @@
       </p:sp>
       <p:sp>
         <p:nvSpPr>
-          <p:cNvPr id="9" name="Text 6"/>
+          <p:cNvPr id="10" name="Text 7"/>
           <p:cNvSpPr/>
           <p:nvPr/>
         </p:nvSpPr>
@@ -4036,7 +4101,7 @@
       </p:sp>
       <p:sp>
         <p:nvSpPr>
-          <p:cNvPr id="10" name="Text 7"/>
+          <p:cNvPr id="11" name="Text 8"/>
           <p:cNvSpPr/>
           <p:nvPr/>
         </p:nvSpPr>
@@ -4075,7 +4140,7 @@
       </p:sp>
       <p:sp>
         <p:nvSpPr>
-          <p:cNvPr id="11" name="Text 8"/>
+          <p:cNvPr id="12" name="Text 9"/>
           <p:cNvSpPr/>
           <p:nvPr/>
         </p:nvSpPr>
@@ -4117,7 +4182,7 @@
       </p:sp>
       <p:sp>
         <p:nvSpPr>
-          <p:cNvPr id="12" name="Shape 9"/>
+          <p:cNvPr id="13" name="Shape 10"/>
           <p:cNvSpPr/>
           <p:nvPr/>
         </p:nvSpPr>
@@ -4144,7 +4209,7 @@
       </p:sp>
       <p:sp>
         <p:nvSpPr>
-          <p:cNvPr id="13" name="Shape 10"/>
+          <p:cNvPr id="14" name="Shape 11"/>
           <p:cNvSpPr/>
           <p:nvPr/>
         </p:nvSpPr>
@@ -4164,7 +4229,7 @@
       </p:sp>
       <p:sp>
         <p:nvSpPr>
-          <p:cNvPr id="14" name="Text 11"/>
+          <p:cNvPr id="15" name="Text 12"/>
           <p:cNvSpPr/>
           <p:nvPr/>
         </p:nvSpPr>
@@ -4203,7 +4268,7 @@
       </p:sp>
       <p:sp>
         <p:nvSpPr>
-          <p:cNvPr id="15" name="Text 12"/>
+          <p:cNvPr id="16" name="Text 13"/>
           <p:cNvSpPr/>
           <p:nvPr/>
         </p:nvSpPr>
@@ -4242,7 +4307,7 @@
       </p:sp>
       <p:sp>
         <p:nvSpPr>
-          <p:cNvPr id="16" name="Text 13"/>
+          <p:cNvPr id="17" name="Text 14"/>
           <p:cNvSpPr/>
           <p:nvPr/>
         </p:nvSpPr>
@@ -4284,7 +4349,7 @@
       </p:sp>
       <p:sp>
         <p:nvSpPr>
-          <p:cNvPr id="17" name="Shape 14"/>
+          <p:cNvPr id="18" name="Shape 15"/>
           <p:cNvSpPr/>
           <p:nvPr/>
         </p:nvSpPr>
@@ -4311,7 +4376,7 @@
       </p:sp>
       <p:sp>
         <p:nvSpPr>
-          <p:cNvPr id="18" name="Shape 15"/>
+          <p:cNvPr id="19" name="Shape 16"/>
           <p:cNvSpPr/>
           <p:nvPr/>
         </p:nvSpPr>
@@ -4331,7 +4396,7 @@
       </p:sp>
       <p:sp>
         <p:nvSpPr>
-          <p:cNvPr id="19" name="Text 16"/>
+          <p:cNvPr id="20" name="Text 17"/>
           <p:cNvSpPr/>
           <p:nvPr/>
         </p:nvSpPr>
@@ -4370,7 +4435,7 @@
       </p:sp>
       <p:sp>
         <p:nvSpPr>
-          <p:cNvPr id="20" name="Text 17"/>
+          <p:cNvPr id="21" name="Text 18"/>
           <p:cNvSpPr/>
           <p:nvPr/>
         </p:nvSpPr>
@@ -4409,7 +4474,7 @@
       </p:sp>
       <p:sp>
         <p:nvSpPr>
-          <p:cNvPr id="21" name="Text 18"/>
+          <p:cNvPr id="22" name="Text 19"/>
           <p:cNvSpPr/>
           <p:nvPr/>
         </p:nvSpPr>
@@ -4451,7 +4516,7 @@
       </p:sp>
       <p:sp>
         <p:nvSpPr>
-          <p:cNvPr id="22" name="Shape 19"/>
+          <p:cNvPr id="23" name="Shape 20"/>
           <p:cNvSpPr/>
           <p:nvPr/>
         </p:nvSpPr>
@@ -4473,7 +4538,7 @@
       </p:sp>
       <p:sp>
         <p:nvSpPr>
-          <p:cNvPr id="23" name="Text 20"/>
+          <p:cNvPr id="24" name="Text 21"/>
           <p:cNvSpPr/>
           <p:nvPr/>
         </p:nvSpPr>
@@ -4512,7 +4577,7 @@
       </p:sp>
       <p:sp>
         <p:nvSpPr>
-          <p:cNvPr id="24" name="Shape 21"/>
+          <p:cNvPr id="25" name="Shape 22"/>
           <p:cNvSpPr/>
           <p:nvPr/>
         </p:nvSpPr>
@@ -4535,7 +4600,7 @@
       </p:sp>
       <p:sp>
         <p:nvSpPr>
-          <p:cNvPr id="25" name="Shape 22"/>
+          <p:cNvPr id="26" name="Shape 23"/>
           <p:cNvSpPr/>
           <p:nvPr/>
         </p:nvSpPr>
@@ -4555,7 +4620,7 @@
       </p:sp>
       <p:sp>
         <p:nvSpPr>
-          <p:cNvPr id="26" name="Shape 23"/>
+          <p:cNvPr id="27" name="Shape 24"/>
           <p:cNvSpPr/>
           <p:nvPr/>
         </p:nvSpPr>
@@ -4582,7 +4647,7 @@
       </p:sp>
       <p:sp>
         <p:nvSpPr>
-          <p:cNvPr id="27" name="Text 24"/>
+          <p:cNvPr id="28" name="Text 25"/>
           <p:cNvSpPr/>
           <p:nvPr/>
         </p:nvSpPr>
@@ -4621,7 +4686,7 @@
       </p:sp>
       <p:sp>
         <p:nvSpPr>
-          <p:cNvPr id="28" name="Shape 25"/>
+          <p:cNvPr id="29" name="Shape 26"/>
           <p:cNvSpPr/>
           <p:nvPr/>
         </p:nvSpPr>
@@ -4644,7 +4709,7 @@
       </p:sp>
       <p:sp>
         <p:nvSpPr>
-          <p:cNvPr id="29" name="Shape 26"/>
+          <p:cNvPr id="30" name="Shape 27"/>
           <p:cNvSpPr/>
           <p:nvPr/>
         </p:nvSpPr>
@@ -4664,7 +4729,7 @@
       </p:sp>
       <p:sp>
         <p:nvSpPr>
-          <p:cNvPr id="30" name="Shape 27"/>
+          <p:cNvPr id="31" name="Shape 28"/>
           <p:cNvSpPr/>
           <p:nvPr/>
         </p:nvSpPr>
@@ -4686,7 +4751,7 @@
       </p:sp>
       <p:sp>
         <p:nvSpPr>
-          <p:cNvPr id="31" name="Text 28"/>
+          <p:cNvPr id="32" name="Text 29"/>
           <p:cNvSpPr/>
           <p:nvPr/>
         </p:nvSpPr>
@@ -4725,7 +4790,7 @@
       </p:sp>
       <p:sp>
         <p:nvSpPr>
-          <p:cNvPr id="32" name="Shape 29"/>
+          <p:cNvPr id="33" name="Shape 30"/>
           <p:cNvSpPr/>
           <p:nvPr/>
         </p:nvSpPr>
@@ -4747,7 +4812,7 @@
       </p:sp>
       <p:sp>
         <p:nvSpPr>
-          <p:cNvPr id="33" name="Text 30"/>
+          <p:cNvPr id="34" name="Text 31"/>
           <p:cNvSpPr/>
           <p:nvPr/>
         </p:nvSpPr>
@@ -4786,7 +4851,7 @@
       </p:sp>
       <p:sp>
         <p:nvSpPr>
-          <p:cNvPr id="34" name="Text 31"/>
+          <p:cNvPr id="35" name="Text 32"/>
           <p:cNvSpPr/>
           <p:nvPr/>
         </p:nvSpPr>
@@ -4838,7 +4903,7 @@
         </p:nvSpPr>
         <p:spPr>
           <a:xfrm>
-            <a:off x="11368735" y="6437376"/>
+            <a:off x="11368735" y="6327648"/>
             <a:ext cx="365760" cy="274320"/>
           </a:xfrm>
           <a:prstGeom prst="rect">
@@ -4885,13 +4950,6 @@
 <file path=ppt/slides/slide11.xml><?xml version="1.0" encoding="utf-8"?>
 <p:sld xmlns:a="http://schemas.openxmlformats.org/drawingml/2006/main" xmlns:r="http://schemas.openxmlformats.org/officeDocument/2006/relationships" xmlns:p="http://schemas.openxmlformats.org/presentationml/2006/main">
   <p:cSld name="Slide 11">
-    <p:bg>
-      <p:bgPr>
-        <a:solidFill>
-          <a:srgbClr val="FFFFFF"/>
-        </a:solidFill>
-      </p:bgPr>
-    </p:bg>
     <p:spTree>
       <p:nvGrpSpPr>
         <p:cNvPr id="1" name=""/>
@@ -4908,7 +4966,29 @@
       </p:grpSpPr>
       <p:sp>
         <p:nvSpPr>
-          <p:cNvPr id="2" name="Text 0"/>
+          <p:cNvPr id="2" name="Shape 0"/>
+          <p:cNvSpPr/>
+          <p:nvPr/>
+        </p:nvSpPr>
+        <p:spPr>
+          <a:xfrm>
+            <a:off x="231343" y="194767"/>
+            <a:ext cx="11716207" cy="6473952"/>
+          </a:xfrm>
+          <a:prstGeom prst="roundRect">
+            <a:avLst>
+              <a:gd name="adj" fmla="val 3107"/>
+            </a:avLst>
+          </a:prstGeom>
+          <a:solidFill>
+            <a:srgbClr val="FFFFFF"/>
+          </a:solidFill>
+          <a:ln/>
+        </p:spPr>
+      </p:sp>
+      <p:sp>
+        <p:nvSpPr>
+          <p:cNvPr id="3" name="Text 1"/>
           <p:cNvSpPr/>
           <p:nvPr/>
         </p:nvSpPr>
@@ -4947,7 +5027,7 @@
       </p:sp>
       <p:sp>
         <p:nvSpPr>
-          <p:cNvPr id="3" name="Text 1"/>
+          <p:cNvPr id="4" name="Text 2"/>
           <p:cNvSpPr/>
           <p:nvPr/>
         </p:nvSpPr>
@@ -4986,7 +5066,7 @@
       </p:sp>
       <p:sp>
         <p:nvSpPr>
-          <p:cNvPr id="4" name="Shape 2"/>
+          <p:cNvPr id="5" name="Shape 3"/>
           <p:cNvSpPr/>
           <p:nvPr/>
         </p:nvSpPr>
@@ -5008,7 +5088,7 @@
       </p:sp>
       <p:sp>
         <p:nvSpPr>
-          <p:cNvPr id="5" name="Text 3"/>
+          <p:cNvPr id="6" name="Text 4"/>
           <p:cNvSpPr/>
           <p:nvPr/>
         </p:nvSpPr>
@@ -5047,7 +5127,7 @@
       </p:sp>
       <p:pic>
         <p:nvPicPr>
-          <p:cNvPr id="6" name="Image 0" descr="preencoded.png">    </p:cNvPr>
+          <p:cNvPr id="7" name="Image 0" descr="preencoded.png">    </p:cNvPr>
           <p:cNvPicPr>
             <a:picLocks noChangeAspect="1"/>
           </p:cNvPicPr>
@@ -5061,7 +5141,7 @@
         </p:blipFill>
         <p:spPr>
           <a:xfrm>
-            <a:off x="566928" y="6254496"/>
+            <a:off x="566928" y="6126480"/>
             <a:ext cx="1481328" cy="457200"/>
           </a:xfrm>
           <a:prstGeom prst="rect">
@@ -5071,7 +5151,7 @@
       </p:pic>
       <p:sp>
         <p:nvSpPr>
-          <p:cNvPr id="7" name="Text 4"/>
+          <p:cNvPr id="8" name="Text 5"/>
           <p:cNvSpPr/>
           <p:nvPr/>
         </p:nvSpPr>
@@ -5110,7 +5190,7 @@
       </p:sp>
       <p:sp>
         <p:nvSpPr>
-          <p:cNvPr id="8" name="Shape 5"/>
+          <p:cNvPr id="9" name="Shape 6"/>
           <p:cNvSpPr/>
           <p:nvPr/>
         </p:nvSpPr>
@@ -5132,7 +5212,7 @@
       </p:sp>
       <p:sp>
         <p:nvSpPr>
-          <p:cNvPr id="9" name="Text 6"/>
+          <p:cNvPr id="10" name="Text 7"/>
           <p:cNvSpPr/>
           <p:nvPr/>
         </p:nvSpPr>
@@ -5171,7 +5251,7 @@
       </p:sp>
       <p:sp>
         <p:nvSpPr>
-          <p:cNvPr id="10" name="Shape 7"/>
+          <p:cNvPr id="11" name="Shape 8"/>
           <p:cNvSpPr/>
           <p:nvPr/>
         </p:nvSpPr>
@@ -5193,7 +5273,7 @@
       </p:sp>
       <p:sp>
         <p:nvSpPr>
-          <p:cNvPr id="11" name="Text 8"/>
+          <p:cNvPr id="12" name="Text 9"/>
           <p:cNvSpPr/>
           <p:nvPr/>
         </p:nvSpPr>
@@ -5232,7 +5312,7 @@
       </p:sp>
       <p:sp>
         <p:nvSpPr>
-          <p:cNvPr id="12" name="Text 9"/>
+          <p:cNvPr id="13" name="Text 10"/>
           <p:cNvSpPr/>
           <p:nvPr/>
         </p:nvSpPr>
@@ -5271,7 +5351,7 @@
       </p:sp>
       <p:sp>
         <p:nvSpPr>
-          <p:cNvPr id="13" name="Shape 10"/>
+          <p:cNvPr id="14" name="Shape 11"/>
           <p:cNvSpPr/>
           <p:nvPr/>
         </p:nvSpPr>
@@ -5293,7 +5373,7 @@
       </p:sp>
       <p:sp>
         <p:nvSpPr>
-          <p:cNvPr id="14" name="Text 11"/>
+          <p:cNvPr id="15" name="Text 12"/>
           <p:cNvSpPr/>
           <p:nvPr/>
         </p:nvSpPr>
@@ -5332,7 +5412,7 @@
       </p:sp>
       <p:sp>
         <p:nvSpPr>
-          <p:cNvPr id="15" name="Shape 12"/>
+          <p:cNvPr id="16" name="Shape 13"/>
           <p:cNvSpPr/>
           <p:nvPr/>
         </p:nvSpPr>
@@ -5354,7 +5434,7 @@
       </p:sp>
       <p:sp>
         <p:nvSpPr>
-          <p:cNvPr id="16" name="Text 13"/>
+          <p:cNvPr id="17" name="Text 14"/>
           <p:cNvSpPr/>
           <p:nvPr/>
         </p:nvSpPr>
@@ -5393,7 +5473,7 @@
       </p:sp>
       <p:sp>
         <p:nvSpPr>
-          <p:cNvPr id="17" name="Text 14"/>
+          <p:cNvPr id="18" name="Text 15"/>
           <p:cNvSpPr/>
           <p:nvPr/>
         </p:nvSpPr>
@@ -5432,7 +5512,7 @@
       </p:sp>
       <p:sp>
         <p:nvSpPr>
-          <p:cNvPr id="18" name="Shape 15"/>
+          <p:cNvPr id="19" name="Shape 16"/>
           <p:cNvSpPr/>
           <p:nvPr/>
         </p:nvSpPr>
@@ -5454,7 +5534,7 @@
       </p:sp>
       <p:sp>
         <p:nvSpPr>
-          <p:cNvPr id="19" name="Text 16"/>
+          <p:cNvPr id="20" name="Text 17"/>
           <p:cNvSpPr/>
           <p:nvPr/>
         </p:nvSpPr>
@@ -5493,7 +5573,7 @@
       </p:sp>
       <p:sp>
         <p:nvSpPr>
-          <p:cNvPr id="20" name="Text 17"/>
+          <p:cNvPr id="21" name="Text 18"/>
           <p:cNvSpPr/>
           <p:nvPr/>
         </p:nvSpPr>
@@ -5535,7 +5615,7 @@
       </p:sp>
       <p:sp>
         <p:nvSpPr>
-          <p:cNvPr id="21" name="Text 18"/>
+          <p:cNvPr id="22" name="Text 19"/>
           <p:cNvSpPr/>
           <p:nvPr/>
         </p:nvSpPr>
@@ -5598,7 +5678,7 @@
         </p:nvSpPr>
         <p:spPr>
           <a:xfrm>
-            <a:off x="11368735" y="6437376"/>
+            <a:off x="11368735" y="6327648"/>
             <a:ext cx="365760" cy="274320"/>
           </a:xfrm>
           <a:prstGeom prst="rect">
@@ -5645,13 +5725,6 @@
 <file path=ppt/slides/slide12.xml><?xml version="1.0" encoding="utf-8"?>
 <p:sld xmlns:a="http://schemas.openxmlformats.org/drawingml/2006/main" xmlns:r="http://schemas.openxmlformats.org/officeDocument/2006/relationships" xmlns:p="http://schemas.openxmlformats.org/presentationml/2006/main">
   <p:cSld name="Slide 12">
-    <p:bg>
-      <p:bgPr>
-        <a:solidFill>
-          <a:srgbClr val="FFFFFF"/>
-        </a:solidFill>
-      </p:bgPr>
-    </p:bg>
     <p:spTree>
       <p:nvGrpSpPr>
         <p:cNvPr id="1" name=""/>
@@ -5668,7 +5741,29 @@
       </p:grpSpPr>
       <p:sp>
         <p:nvSpPr>
-          <p:cNvPr id="2" name="Text 0"/>
+          <p:cNvPr id="2" name="Shape 0"/>
+          <p:cNvSpPr/>
+          <p:nvPr/>
+        </p:nvSpPr>
+        <p:spPr>
+          <a:xfrm>
+            <a:off x="231343" y="194767"/>
+            <a:ext cx="11716207" cy="6473952"/>
+          </a:xfrm>
+          <a:prstGeom prst="roundRect">
+            <a:avLst>
+              <a:gd name="adj" fmla="val 3107"/>
+            </a:avLst>
+          </a:prstGeom>
+          <a:solidFill>
+            <a:srgbClr val="FFFFFF"/>
+          </a:solidFill>
+          <a:ln/>
+        </p:spPr>
+      </p:sp>
+      <p:sp>
+        <p:nvSpPr>
+          <p:cNvPr id="3" name="Text 1"/>
           <p:cNvSpPr/>
           <p:nvPr/>
         </p:nvSpPr>
@@ -5707,7 +5802,7 @@
       </p:sp>
       <p:sp>
         <p:nvSpPr>
-          <p:cNvPr id="3" name="Text 1"/>
+          <p:cNvPr id="4" name="Text 2"/>
           <p:cNvSpPr/>
           <p:nvPr/>
         </p:nvSpPr>
@@ -5746,7 +5841,7 @@
       </p:sp>
       <p:sp>
         <p:nvSpPr>
-          <p:cNvPr id="4" name="Shape 2"/>
+          <p:cNvPr id="5" name="Shape 3"/>
           <p:cNvSpPr/>
           <p:nvPr/>
         </p:nvSpPr>
@@ -5768,7 +5863,7 @@
       </p:sp>
       <p:sp>
         <p:nvSpPr>
-          <p:cNvPr id="5" name="Text 3"/>
+          <p:cNvPr id="6" name="Text 4"/>
           <p:cNvSpPr/>
           <p:nvPr/>
         </p:nvSpPr>
@@ -5807,7 +5902,7 @@
       </p:sp>
       <p:pic>
         <p:nvPicPr>
-          <p:cNvPr id="6" name="Image 0" descr="preencoded.png">    </p:cNvPr>
+          <p:cNvPr id="7" name="Image 0" descr="preencoded.png">    </p:cNvPr>
           <p:cNvPicPr>
             <a:picLocks noChangeAspect="1"/>
           </p:cNvPicPr>
@@ -5821,7 +5916,7 @@
         </p:blipFill>
         <p:spPr>
           <a:xfrm>
-            <a:off x="566928" y="6254496"/>
+            <a:off x="566928" y="6126480"/>
             <a:ext cx="1481328" cy="457200"/>
           </a:xfrm>
           <a:prstGeom prst="rect">
@@ -5831,7 +5926,7 @@
       </p:pic>
       <p:sp>
         <p:nvSpPr>
-          <p:cNvPr id="7" name="Shape 4"/>
+          <p:cNvPr id="8" name="Shape 5"/>
           <p:cNvSpPr/>
           <p:nvPr/>
         </p:nvSpPr>
@@ -5853,7 +5948,7 @@
       </p:sp>
       <p:sp>
         <p:nvSpPr>
-          <p:cNvPr id="8" name="Text 5"/>
+          <p:cNvPr id="9" name="Text 6"/>
           <p:cNvSpPr/>
           <p:nvPr/>
         </p:nvSpPr>
@@ -5892,7 +5987,7 @@
       </p:sp>
       <p:sp>
         <p:nvSpPr>
-          <p:cNvPr id="9" name="Shape 6"/>
+          <p:cNvPr id="10" name="Shape 7"/>
           <p:cNvSpPr/>
           <p:nvPr/>
         </p:nvSpPr>
@@ -5914,7 +6009,7 @@
       </p:sp>
       <p:sp>
         <p:nvSpPr>
-          <p:cNvPr id="10" name="Text 7"/>
+          <p:cNvPr id="11" name="Text 8"/>
           <p:cNvSpPr/>
           <p:nvPr/>
         </p:nvSpPr>
@@ -5953,7 +6048,7 @@
       </p:sp>
       <p:sp>
         <p:nvSpPr>
-          <p:cNvPr id="11" name="Text 8"/>
+          <p:cNvPr id="12" name="Text 9"/>
           <p:cNvSpPr/>
           <p:nvPr/>
         </p:nvSpPr>
@@ -5992,7 +6087,7 @@
       </p:sp>
       <p:sp>
         <p:nvSpPr>
-          <p:cNvPr id="12" name="Shape 9"/>
+          <p:cNvPr id="13" name="Shape 10"/>
           <p:cNvSpPr/>
           <p:nvPr/>
         </p:nvSpPr>
@@ -6014,7 +6109,7 @@
       </p:sp>
       <p:sp>
         <p:nvSpPr>
-          <p:cNvPr id="13" name="Text 10"/>
+          <p:cNvPr id="14" name="Text 11"/>
           <p:cNvSpPr/>
           <p:nvPr/>
         </p:nvSpPr>
@@ -6053,7 +6148,7 @@
       </p:sp>
       <p:sp>
         <p:nvSpPr>
-          <p:cNvPr id="14" name="Text 11"/>
+          <p:cNvPr id="15" name="Text 12"/>
           <p:cNvSpPr/>
           <p:nvPr/>
         </p:nvSpPr>
@@ -6092,7 +6187,7 @@
       </p:sp>
       <p:sp>
         <p:nvSpPr>
-          <p:cNvPr id="15" name="Shape 12"/>
+          <p:cNvPr id="16" name="Shape 13"/>
           <p:cNvSpPr/>
           <p:nvPr/>
         </p:nvSpPr>
@@ -6114,7 +6209,7 @@
       </p:sp>
       <p:sp>
         <p:nvSpPr>
-          <p:cNvPr id="16" name="Text 13"/>
+          <p:cNvPr id="17" name="Text 14"/>
           <p:cNvSpPr/>
           <p:nvPr/>
         </p:nvSpPr>
@@ -6153,7 +6248,7 @@
       </p:sp>
       <p:sp>
         <p:nvSpPr>
-          <p:cNvPr id="17" name="Text 14"/>
+          <p:cNvPr id="18" name="Text 15"/>
           <p:cNvSpPr/>
           <p:nvPr/>
         </p:nvSpPr>
@@ -6192,7 +6287,7 @@
       </p:sp>
       <p:sp>
         <p:nvSpPr>
-          <p:cNvPr id="18" name="Shape 15"/>
+          <p:cNvPr id="19" name="Shape 16"/>
           <p:cNvSpPr/>
           <p:nvPr/>
         </p:nvSpPr>
@@ -6214,7 +6309,7 @@
       </p:sp>
       <p:sp>
         <p:nvSpPr>
-          <p:cNvPr id="19" name="Text 16"/>
+          <p:cNvPr id="20" name="Text 17"/>
           <p:cNvSpPr/>
           <p:nvPr/>
         </p:nvSpPr>
@@ -6253,7 +6348,7 @@
       </p:sp>
       <p:sp>
         <p:nvSpPr>
-          <p:cNvPr id="20" name="Shape 17"/>
+          <p:cNvPr id="21" name="Shape 18"/>
           <p:cNvSpPr/>
           <p:nvPr/>
         </p:nvSpPr>
@@ -6275,7 +6370,7 @@
       </p:sp>
       <p:sp>
         <p:nvSpPr>
-          <p:cNvPr id="21" name="Text 18"/>
+          <p:cNvPr id="22" name="Text 19"/>
           <p:cNvSpPr/>
           <p:nvPr/>
         </p:nvSpPr>
@@ -6314,7 +6409,7 @@
       </p:sp>
       <p:sp>
         <p:nvSpPr>
-          <p:cNvPr id="22" name="Text 19"/>
+          <p:cNvPr id="23" name="Text 20"/>
           <p:cNvSpPr/>
           <p:nvPr/>
         </p:nvSpPr>
@@ -6353,7 +6448,7 @@
       </p:sp>
       <p:sp>
         <p:nvSpPr>
-          <p:cNvPr id="23" name="Shape 20"/>
+          <p:cNvPr id="24" name="Shape 21"/>
           <p:cNvSpPr/>
           <p:nvPr/>
         </p:nvSpPr>
@@ -6375,7 +6470,7 @@
       </p:sp>
       <p:sp>
         <p:nvSpPr>
-          <p:cNvPr id="24" name="Text 21"/>
+          <p:cNvPr id="25" name="Text 22"/>
           <p:cNvSpPr/>
           <p:nvPr/>
         </p:nvSpPr>
@@ -6414,7 +6509,7 @@
       </p:sp>
       <p:sp>
         <p:nvSpPr>
-          <p:cNvPr id="25" name="Text 22"/>
+          <p:cNvPr id="26" name="Text 23"/>
           <p:cNvSpPr/>
           <p:nvPr/>
         </p:nvSpPr>
@@ -6453,7 +6548,7 @@
       </p:sp>
       <p:sp>
         <p:nvSpPr>
-          <p:cNvPr id="26" name="Shape 23"/>
+          <p:cNvPr id="27" name="Shape 24"/>
           <p:cNvSpPr/>
           <p:nvPr/>
         </p:nvSpPr>
@@ -6480,7 +6575,7 @@
       </p:sp>
       <p:sp>
         <p:nvSpPr>
-          <p:cNvPr id="27" name="Text 24"/>
+          <p:cNvPr id="28" name="Text 25"/>
           <p:cNvSpPr/>
           <p:nvPr/>
         </p:nvSpPr>
@@ -6532,7 +6627,7 @@
         </p:nvSpPr>
         <p:spPr>
           <a:xfrm>
-            <a:off x="11368735" y="6437376"/>
+            <a:off x="11368735" y="6327648"/>
             <a:ext cx="365760" cy="274320"/>
           </a:xfrm>
           <a:prstGeom prst="rect">
@@ -6579,13 +6674,6 @@
 <file path=ppt/slides/slide13.xml><?xml version="1.0" encoding="utf-8"?>
 <p:sld xmlns:a="http://schemas.openxmlformats.org/drawingml/2006/main" xmlns:r="http://schemas.openxmlformats.org/officeDocument/2006/relationships" xmlns:p="http://schemas.openxmlformats.org/presentationml/2006/main">
   <p:cSld name="Slide 13">
-    <p:bg>
-      <p:bgPr>
-        <a:solidFill>
-          <a:srgbClr val="FFFFFF"/>
-        </a:solidFill>
-      </p:bgPr>
-    </p:bg>
     <p:spTree>
       <p:nvGrpSpPr>
         <p:cNvPr id="1" name=""/>
@@ -6602,7 +6690,29 @@
       </p:grpSpPr>
       <p:sp>
         <p:nvSpPr>
-          <p:cNvPr id="2" name="Text 0"/>
+          <p:cNvPr id="2" name="Shape 0"/>
+          <p:cNvSpPr/>
+          <p:nvPr/>
+        </p:nvSpPr>
+        <p:spPr>
+          <a:xfrm>
+            <a:off x="231343" y="194767"/>
+            <a:ext cx="11716207" cy="6473952"/>
+          </a:xfrm>
+          <a:prstGeom prst="roundRect">
+            <a:avLst>
+              <a:gd name="adj" fmla="val 3107"/>
+            </a:avLst>
+          </a:prstGeom>
+          <a:solidFill>
+            <a:srgbClr val="FFFFFF"/>
+          </a:solidFill>
+          <a:ln/>
+        </p:spPr>
+      </p:sp>
+      <p:sp>
+        <p:nvSpPr>
+          <p:cNvPr id="3" name="Text 1"/>
           <p:cNvSpPr/>
           <p:nvPr/>
         </p:nvSpPr>
@@ -6641,7 +6751,7 @@
       </p:sp>
       <p:sp>
         <p:nvSpPr>
-          <p:cNvPr id="3" name="Text 1"/>
+          <p:cNvPr id="4" name="Text 2"/>
           <p:cNvSpPr/>
           <p:nvPr/>
         </p:nvSpPr>
@@ -6680,7 +6790,7 @@
       </p:sp>
       <p:sp>
         <p:nvSpPr>
-          <p:cNvPr id="4" name="Shape 2"/>
+          <p:cNvPr id="5" name="Shape 3"/>
           <p:cNvSpPr/>
           <p:nvPr/>
         </p:nvSpPr>
@@ -6702,7 +6812,7 @@
       </p:sp>
       <p:sp>
         <p:nvSpPr>
-          <p:cNvPr id="5" name="Text 3"/>
+          <p:cNvPr id="6" name="Text 4"/>
           <p:cNvSpPr/>
           <p:nvPr/>
         </p:nvSpPr>
@@ -6741,7 +6851,7 @@
       </p:sp>
       <p:pic>
         <p:nvPicPr>
-          <p:cNvPr id="6" name="Image 0" descr="preencoded.png">    </p:cNvPr>
+          <p:cNvPr id="7" name="Image 0" descr="preencoded.png">    </p:cNvPr>
           <p:cNvPicPr>
             <a:picLocks noChangeAspect="1"/>
           </p:cNvPicPr>
@@ -6755,7 +6865,7 @@
         </p:blipFill>
         <p:spPr>
           <a:xfrm>
-            <a:off x="566928" y="6254496"/>
+            <a:off x="566928" y="6126480"/>
             <a:ext cx="1481328" cy="457200"/>
           </a:xfrm>
           <a:prstGeom prst="rect">
@@ -6765,7 +6875,7 @@
       </p:pic>
       <p:sp>
         <p:nvSpPr>
-          <p:cNvPr id="7" name="Shape 4"/>
+          <p:cNvPr id="8" name="Shape 5"/>
           <p:cNvSpPr/>
           <p:nvPr/>
         </p:nvSpPr>
@@ -6792,7 +6902,7 @@
       </p:sp>
       <p:sp>
         <p:nvSpPr>
-          <p:cNvPr id="8" name="Text 5"/>
+          <p:cNvPr id="9" name="Text 6"/>
           <p:cNvSpPr/>
           <p:nvPr/>
         </p:nvSpPr>
@@ -6831,7 +6941,7 @@
       </p:sp>
       <p:sp>
         <p:nvSpPr>
-          <p:cNvPr id="9" name="Shape 6"/>
+          <p:cNvPr id="10" name="Shape 7"/>
           <p:cNvSpPr/>
           <p:nvPr/>
         </p:nvSpPr>
@@ -6854,7 +6964,7 @@
       </p:sp>
       <p:sp>
         <p:nvSpPr>
-          <p:cNvPr id="10" name="Shape 7"/>
+          <p:cNvPr id="11" name="Shape 8"/>
           <p:cNvSpPr/>
           <p:nvPr/>
         </p:nvSpPr>
@@ -6874,7 +6984,7 @@
       </p:sp>
       <p:sp>
         <p:nvSpPr>
-          <p:cNvPr id="11" name="Shape 8"/>
+          <p:cNvPr id="12" name="Shape 9"/>
           <p:cNvSpPr/>
           <p:nvPr/>
         </p:nvSpPr>
@@ -6901,7 +7011,7 @@
       </p:sp>
       <p:sp>
         <p:nvSpPr>
-          <p:cNvPr id="12" name="Text 9"/>
+          <p:cNvPr id="13" name="Text 10"/>
           <p:cNvSpPr/>
           <p:nvPr/>
         </p:nvSpPr>
@@ -6940,7 +7050,7 @@
       </p:sp>
       <p:sp>
         <p:nvSpPr>
-          <p:cNvPr id="13" name="Shape 10"/>
+          <p:cNvPr id="14" name="Shape 11"/>
           <p:cNvSpPr/>
           <p:nvPr/>
         </p:nvSpPr>
@@ -6963,7 +7073,7 @@
       </p:sp>
       <p:sp>
         <p:nvSpPr>
-          <p:cNvPr id="14" name="Shape 11"/>
+          <p:cNvPr id="15" name="Shape 12"/>
           <p:cNvSpPr/>
           <p:nvPr/>
         </p:nvSpPr>
@@ -6983,7 +7093,7 @@
       </p:sp>
       <p:sp>
         <p:nvSpPr>
-          <p:cNvPr id="15" name="Shape 12"/>
+          <p:cNvPr id="16" name="Shape 13"/>
           <p:cNvSpPr/>
           <p:nvPr/>
         </p:nvSpPr>
@@ -7005,7 +7115,7 @@
       </p:sp>
       <p:sp>
         <p:nvSpPr>
-          <p:cNvPr id="16" name="Text 13"/>
+          <p:cNvPr id="17" name="Text 14"/>
           <p:cNvSpPr/>
           <p:nvPr/>
         </p:nvSpPr>
@@ -7044,7 +7154,7 @@
       </p:sp>
       <p:sp>
         <p:nvSpPr>
-          <p:cNvPr id="17" name="Shape 14"/>
+          <p:cNvPr id="18" name="Shape 15"/>
           <p:cNvSpPr/>
           <p:nvPr/>
         </p:nvSpPr>
@@ -7067,7 +7177,7 @@
       </p:sp>
       <p:sp>
         <p:nvSpPr>
-          <p:cNvPr id="18" name="Shape 15"/>
+          <p:cNvPr id="19" name="Shape 16"/>
           <p:cNvSpPr/>
           <p:nvPr/>
         </p:nvSpPr>
@@ -7087,7 +7197,7 @@
       </p:sp>
       <p:sp>
         <p:nvSpPr>
-          <p:cNvPr id="19" name="Shape 16"/>
+          <p:cNvPr id="20" name="Shape 17"/>
           <p:cNvSpPr/>
           <p:nvPr/>
         </p:nvSpPr>
@@ -7114,7 +7224,7 @@
       </p:sp>
       <p:sp>
         <p:nvSpPr>
-          <p:cNvPr id="20" name="Text 17"/>
+          <p:cNvPr id="21" name="Text 18"/>
           <p:cNvSpPr/>
           <p:nvPr/>
         </p:nvSpPr>
@@ -7153,7 +7263,7 @@
       </p:sp>
       <p:sp>
         <p:nvSpPr>
-          <p:cNvPr id="21" name="Shape 18"/>
+          <p:cNvPr id="22" name="Shape 19"/>
           <p:cNvSpPr/>
           <p:nvPr/>
         </p:nvSpPr>
@@ -7176,7 +7286,7 @@
       </p:sp>
       <p:sp>
         <p:nvSpPr>
-          <p:cNvPr id="22" name="Shape 19"/>
+          <p:cNvPr id="23" name="Shape 20"/>
           <p:cNvSpPr/>
           <p:nvPr/>
         </p:nvSpPr>
@@ -7196,7 +7306,7 @@
       </p:sp>
       <p:sp>
         <p:nvSpPr>
-          <p:cNvPr id="23" name="Shape 20"/>
+          <p:cNvPr id="24" name="Shape 21"/>
           <p:cNvSpPr/>
           <p:nvPr/>
         </p:nvSpPr>
@@ -7223,7 +7333,7 @@
       </p:sp>
       <p:sp>
         <p:nvSpPr>
-          <p:cNvPr id="24" name="Text 21"/>
+          <p:cNvPr id="25" name="Text 22"/>
           <p:cNvSpPr/>
           <p:nvPr/>
         </p:nvSpPr>
@@ -7262,7 +7372,7 @@
       </p:sp>
       <p:sp>
         <p:nvSpPr>
-          <p:cNvPr id="25" name="Shape 22"/>
+          <p:cNvPr id="26" name="Shape 23"/>
           <p:cNvSpPr/>
           <p:nvPr/>
         </p:nvSpPr>
@@ -7285,7 +7395,7 @@
       </p:sp>
       <p:sp>
         <p:nvSpPr>
-          <p:cNvPr id="26" name="Shape 23"/>
+          <p:cNvPr id="27" name="Shape 24"/>
           <p:cNvSpPr/>
           <p:nvPr/>
         </p:nvSpPr>
@@ -7305,7 +7415,7 @@
       </p:sp>
       <p:sp>
         <p:nvSpPr>
-          <p:cNvPr id="27" name="Shape 24"/>
+          <p:cNvPr id="28" name="Shape 25"/>
           <p:cNvSpPr/>
           <p:nvPr/>
         </p:nvSpPr>
@@ -7327,7 +7437,7 @@
       </p:sp>
       <p:sp>
         <p:nvSpPr>
-          <p:cNvPr id="28" name="Text 25"/>
+          <p:cNvPr id="29" name="Text 26"/>
           <p:cNvSpPr/>
           <p:nvPr/>
         </p:nvSpPr>
@@ -7366,7 +7476,7 @@
       </p:sp>
       <p:sp>
         <p:nvSpPr>
-          <p:cNvPr id="29" name="Shape 26"/>
+          <p:cNvPr id="30" name="Shape 27"/>
           <p:cNvSpPr/>
           <p:nvPr/>
         </p:nvSpPr>
@@ -7393,7 +7503,7 @@
       </p:sp>
       <p:sp>
         <p:nvSpPr>
-          <p:cNvPr id="30" name="Text 27"/>
+          <p:cNvPr id="31" name="Text 28"/>
           <p:cNvSpPr/>
           <p:nvPr/>
         </p:nvSpPr>
@@ -7452,7 +7562,7 @@
       </p:sp>
       <p:sp>
         <p:nvSpPr>
-          <p:cNvPr id="31" name="Shape 28"/>
+          <p:cNvPr id="32" name="Shape 29"/>
           <p:cNvSpPr/>
           <p:nvPr/>
         </p:nvSpPr>
@@ -7479,7 +7589,7 @@
       </p:sp>
       <p:sp>
         <p:nvSpPr>
-          <p:cNvPr id="32" name="Text 29"/>
+          <p:cNvPr id="33" name="Text 30"/>
           <p:cNvSpPr/>
           <p:nvPr/>
         </p:nvSpPr>
@@ -7531,7 +7641,7 @@
         </p:nvSpPr>
         <p:spPr>
           <a:xfrm>
-            <a:off x="11368735" y="6437376"/>
+            <a:off x="11368735" y="6327648"/>
             <a:ext cx="365760" cy="274320"/>
           </a:xfrm>
           <a:prstGeom prst="rect">
@@ -7578,13 +7688,6 @@
 <file path=ppt/slides/slide14.xml><?xml version="1.0" encoding="utf-8"?>
 <p:sld xmlns:a="http://schemas.openxmlformats.org/drawingml/2006/main" xmlns:r="http://schemas.openxmlformats.org/officeDocument/2006/relationships" xmlns:p="http://schemas.openxmlformats.org/presentationml/2006/main">
   <p:cSld name="Slide 14">
-    <p:bg>
-      <p:bgPr>
-        <a:solidFill>
-          <a:srgbClr val="FFFFFF"/>
-        </a:solidFill>
-      </p:bgPr>
-    </p:bg>
     <p:spTree>
       <p:nvGrpSpPr>
         <p:cNvPr id="1" name=""/>
@@ -7601,7 +7704,29 @@
       </p:grpSpPr>
       <p:sp>
         <p:nvSpPr>
-          <p:cNvPr id="2" name="Text 0"/>
+          <p:cNvPr id="2" name="Shape 0"/>
+          <p:cNvSpPr/>
+          <p:nvPr/>
+        </p:nvSpPr>
+        <p:spPr>
+          <a:xfrm>
+            <a:off x="231343" y="194767"/>
+            <a:ext cx="11716207" cy="6473952"/>
+          </a:xfrm>
+          <a:prstGeom prst="roundRect">
+            <a:avLst>
+              <a:gd name="adj" fmla="val 3107"/>
+            </a:avLst>
+          </a:prstGeom>
+          <a:solidFill>
+            <a:srgbClr val="FFFFFF"/>
+          </a:solidFill>
+          <a:ln/>
+        </p:spPr>
+      </p:sp>
+      <p:sp>
+        <p:nvSpPr>
+          <p:cNvPr id="3" name="Text 1"/>
           <p:cNvSpPr/>
           <p:nvPr/>
         </p:nvSpPr>
@@ -7640,7 +7765,7 @@
       </p:sp>
       <p:sp>
         <p:nvSpPr>
-          <p:cNvPr id="3" name="Text 1"/>
+          <p:cNvPr id="4" name="Text 2"/>
           <p:cNvSpPr/>
           <p:nvPr/>
         </p:nvSpPr>
@@ -7679,7 +7804,7 @@
       </p:sp>
       <p:sp>
         <p:nvSpPr>
-          <p:cNvPr id="4" name="Shape 2"/>
+          <p:cNvPr id="5" name="Shape 3"/>
           <p:cNvSpPr/>
           <p:nvPr/>
         </p:nvSpPr>
@@ -7701,7 +7826,7 @@
       </p:sp>
       <p:sp>
         <p:nvSpPr>
-          <p:cNvPr id="5" name="Text 3"/>
+          <p:cNvPr id="6" name="Text 4"/>
           <p:cNvSpPr/>
           <p:nvPr/>
         </p:nvSpPr>
@@ -7740,7 +7865,7 @@
       </p:sp>
       <p:pic>
         <p:nvPicPr>
-          <p:cNvPr id="6" name="Image 0" descr="preencoded.png">    </p:cNvPr>
+          <p:cNvPr id="7" name="Image 0" descr="preencoded.png">    </p:cNvPr>
           <p:cNvPicPr>
             <a:picLocks noChangeAspect="1"/>
           </p:cNvPicPr>
@@ -7754,7 +7879,7 @@
         </p:blipFill>
         <p:spPr>
           <a:xfrm>
-            <a:off x="566928" y="6254496"/>
+            <a:off x="566928" y="6126480"/>
             <a:ext cx="1481328" cy="457200"/>
           </a:xfrm>
           <a:prstGeom prst="rect">
@@ -7764,7 +7889,7 @@
       </p:pic>
       <p:sp>
         <p:nvSpPr>
-          <p:cNvPr id="7" name="Shape 4"/>
+          <p:cNvPr id="8" name="Shape 5"/>
           <p:cNvSpPr/>
           <p:nvPr/>
         </p:nvSpPr>
@@ -7791,7 +7916,7 @@
       </p:sp>
       <p:sp>
         <p:nvSpPr>
-          <p:cNvPr id="8" name="Text 5"/>
+          <p:cNvPr id="9" name="Text 6"/>
           <p:cNvSpPr/>
           <p:nvPr/>
         </p:nvSpPr>
@@ -7830,7 +7955,7 @@
       </p:sp>
       <p:sp>
         <p:nvSpPr>
-          <p:cNvPr id="9" name="Text 6"/>
+          <p:cNvPr id="10" name="Text 7"/>
           <p:cNvSpPr/>
           <p:nvPr/>
         </p:nvSpPr>
@@ -7869,7 +7994,7 @@
       </p:sp>
       <p:sp>
         <p:nvSpPr>
-          <p:cNvPr id="10" name="Shape 7"/>
+          <p:cNvPr id="11" name="Shape 8"/>
           <p:cNvSpPr/>
           <p:nvPr/>
         </p:nvSpPr>
@@ -7891,7 +8016,7 @@
       </p:sp>
       <p:sp>
         <p:nvSpPr>
-          <p:cNvPr id="11" name="Text 8"/>
+          <p:cNvPr id="12" name="Text 9"/>
           <p:cNvSpPr/>
           <p:nvPr/>
         </p:nvSpPr>
@@ -7930,7 +8055,7 @@
       </p:sp>
       <p:sp>
         <p:nvSpPr>
-          <p:cNvPr id="12" name="Text 9"/>
+          <p:cNvPr id="13" name="Text 10"/>
           <p:cNvSpPr/>
           <p:nvPr/>
         </p:nvSpPr>
@@ -7969,7 +8094,7 @@
       </p:sp>
       <p:sp>
         <p:nvSpPr>
-          <p:cNvPr id="13" name="Shape 10"/>
+          <p:cNvPr id="14" name="Shape 11"/>
           <p:cNvSpPr/>
           <p:nvPr/>
         </p:nvSpPr>
@@ -7996,7 +8121,7 @@
       </p:sp>
       <p:sp>
         <p:nvSpPr>
-          <p:cNvPr id="14" name="Text 11"/>
+          <p:cNvPr id="15" name="Text 12"/>
           <p:cNvSpPr/>
           <p:nvPr/>
         </p:nvSpPr>
@@ -8035,7 +8160,7 @@
       </p:sp>
       <p:sp>
         <p:nvSpPr>
-          <p:cNvPr id="15" name="Text 12"/>
+          <p:cNvPr id="16" name="Text 13"/>
           <p:cNvSpPr/>
           <p:nvPr/>
         </p:nvSpPr>
@@ -8074,7 +8199,7 @@
       </p:sp>
       <p:sp>
         <p:nvSpPr>
-          <p:cNvPr id="16" name="Shape 13"/>
+          <p:cNvPr id="17" name="Shape 14"/>
           <p:cNvSpPr/>
           <p:nvPr/>
         </p:nvSpPr>
@@ -8101,7 +8226,7 @@
       </p:sp>
       <p:sp>
         <p:nvSpPr>
-          <p:cNvPr id="17" name="Text 14"/>
+          <p:cNvPr id="18" name="Text 15"/>
           <p:cNvSpPr/>
           <p:nvPr/>
         </p:nvSpPr>
@@ -8140,7 +8265,7 @@
       </p:sp>
       <p:sp>
         <p:nvSpPr>
-          <p:cNvPr id="18" name="Text 15"/>
+          <p:cNvPr id="19" name="Text 16"/>
           <p:cNvSpPr/>
           <p:nvPr/>
         </p:nvSpPr>
@@ -8179,7 +8304,7 @@
       </p:sp>
       <p:sp>
         <p:nvSpPr>
-          <p:cNvPr id="19" name="Shape 16"/>
+          <p:cNvPr id="20" name="Shape 17"/>
           <p:cNvSpPr/>
           <p:nvPr/>
         </p:nvSpPr>
@@ -8206,7 +8331,7 @@
       </p:sp>
       <p:sp>
         <p:nvSpPr>
-          <p:cNvPr id="20" name="Text 17"/>
+          <p:cNvPr id="21" name="Text 18"/>
           <p:cNvSpPr/>
           <p:nvPr/>
         </p:nvSpPr>
@@ -8245,7 +8370,7 @@
       </p:sp>
       <p:sp>
         <p:nvSpPr>
-          <p:cNvPr id="21" name="Text 18"/>
+          <p:cNvPr id="22" name="Text 19"/>
           <p:cNvSpPr/>
           <p:nvPr/>
         </p:nvSpPr>
@@ -8284,7 +8409,7 @@
       </p:sp>
       <p:sp>
         <p:nvSpPr>
-          <p:cNvPr id="22" name="Shape 19"/>
+          <p:cNvPr id="23" name="Shape 20"/>
           <p:cNvSpPr/>
           <p:nvPr/>
         </p:nvSpPr>
@@ -8311,7 +8436,7 @@
       </p:sp>
       <p:sp>
         <p:nvSpPr>
-          <p:cNvPr id="23" name="Text 20"/>
+          <p:cNvPr id="24" name="Text 21"/>
           <p:cNvSpPr/>
           <p:nvPr/>
         </p:nvSpPr>
@@ -8363,7 +8488,7 @@
         </p:nvSpPr>
         <p:spPr>
           <a:xfrm>
-            <a:off x="11368735" y="6437376"/>
+            <a:off x="11368735" y="6327648"/>
             <a:ext cx="365760" cy="274320"/>
           </a:xfrm>
           <a:prstGeom prst="rect">
@@ -8410,13 +8535,6 @@
 <file path=ppt/slides/slide15.xml><?xml version="1.0" encoding="utf-8"?>
 <p:sld xmlns:a="http://schemas.openxmlformats.org/drawingml/2006/main" xmlns:r="http://schemas.openxmlformats.org/officeDocument/2006/relationships" xmlns:p="http://schemas.openxmlformats.org/presentationml/2006/main">
   <p:cSld name="Slide 15">
-    <p:bg>
-      <p:bgPr>
-        <a:solidFill>
-          <a:srgbClr val="FFFFFF"/>
-        </a:solidFill>
-      </p:bgPr>
-    </p:bg>
     <p:spTree>
       <p:nvGrpSpPr>
         <p:cNvPr id="1" name=""/>
@@ -8433,7 +8551,29 @@
       </p:grpSpPr>
       <p:sp>
         <p:nvSpPr>
-          <p:cNvPr id="2" name="Text 0"/>
+          <p:cNvPr id="2" name="Shape 0"/>
+          <p:cNvSpPr/>
+          <p:nvPr/>
+        </p:nvSpPr>
+        <p:spPr>
+          <a:xfrm>
+            <a:off x="231343" y="194767"/>
+            <a:ext cx="11716207" cy="6473952"/>
+          </a:xfrm>
+          <a:prstGeom prst="roundRect">
+            <a:avLst>
+              <a:gd name="adj" fmla="val 3107"/>
+            </a:avLst>
+          </a:prstGeom>
+          <a:solidFill>
+            <a:srgbClr val="FFFFFF"/>
+          </a:solidFill>
+          <a:ln/>
+        </p:spPr>
+      </p:sp>
+      <p:sp>
+        <p:nvSpPr>
+          <p:cNvPr id="3" name="Text 1"/>
           <p:cNvSpPr/>
           <p:nvPr/>
         </p:nvSpPr>
@@ -8472,7 +8612,7 @@
       </p:sp>
       <p:sp>
         <p:nvSpPr>
-          <p:cNvPr id="3" name="Text 1"/>
+          <p:cNvPr id="4" name="Text 2"/>
           <p:cNvSpPr/>
           <p:nvPr/>
         </p:nvSpPr>
@@ -8511,7 +8651,7 @@
       </p:sp>
       <p:sp>
         <p:nvSpPr>
-          <p:cNvPr id="4" name="Shape 2"/>
+          <p:cNvPr id="5" name="Shape 3"/>
           <p:cNvSpPr/>
           <p:nvPr/>
         </p:nvSpPr>
@@ -8533,7 +8673,7 @@
       </p:sp>
       <p:sp>
         <p:nvSpPr>
-          <p:cNvPr id="5" name="Text 3"/>
+          <p:cNvPr id="6" name="Text 4"/>
           <p:cNvSpPr/>
           <p:nvPr/>
         </p:nvSpPr>
@@ -8572,7 +8712,7 @@
       </p:sp>
       <p:pic>
         <p:nvPicPr>
-          <p:cNvPr id="6" name="Image 0" descr="preencoded.png">    </p:cNvPr>
+          <p:cNvPr id="7" name="Image 0" descr="preencoded.png">    </p:cNvPr>
           <p:cNvPicPr>
             <a:picLocks noChangeAspect="1"/>
           </p:cNvPicPr>
@@ -8586,7 +8726,7 @@
         </p:blipFill>
         <p:spPr>
           <a:xfrm>
-            <a:off x="566928" y="6254496"/>
+            <a:off x="566928" y="6126480"/>
             <a:ext cx="1481328" cy="457200"/>
           </a:xfrm>
           <a:prstGeom prst="rect">
@@ -8596,7 +8736,7 @@
       </p:pic>
       <p:sp>
         <p:nvSpPr>
-          <p:cNvPr id="7" name="Shape 4"/>
+          <p:cNvPr id="8" name="Shape 5"/>
           <p:cNvSpPr/>
           <p:nvPr/>
         </p:nvSpPr>
@@ -8618,7 +8758,7 @@
       </p:sp>
       <p:sp>
         <p:nvSpPr>
-          <p:cNvPr id="8" name="Text 5"/>
+          <p:cNvPr id="9" name="Text 6"/>
           <p:cNvSpPr/>
           <p:nvPr/>
         </p:nvSpPr>
@@ -8657,7 +8797,7 @@
       </p:sp>
       <p:sp>
         <p:nvSpPr>
-          <p:cNvPr id="9" name="Text 6"/>
+          <p:cNvPr id="10" name="Text 7"/>
           <p:cNvSpPr/>
           <p:nvPr/>
         </p:nvSpPr>
@@ -8696,7 +8836,7 @@
       </p:sp>
       <p:sp>
         <p:nvSpPr>
-          <p:cNvPr id="10" name="Text 7"/>
+          <p:cNvPr id="11" name="Text 8"/>
           <p:cNvSpPr/>
           <p:nvPr/>
         </p:nvSpPr>
@@ -8735,7 +8875,7 @@
       </p:sp>
       <p:sp>
         <p:nvSpPr>
-          <p:cNvPr id="11" name="Shape 8"/>
+          <p:cNvPr id="12" name="Shape 9"/>
           <p:cNvSpPr/>
           <p:nvPr/>
         </p:nvSpPr>
@@ -8762,7 +8902,7 @@
       </p:sp>
       <p:sp>
         <p:nvSpPr>
-          <p:cNvPr id="12" name="Text 9"/>
+          <p:cNvPr id="13" name="Text 10"/>
           <p:cNvSpPr/>
           <p:nvPr/>
         </p:nvSpPr>
@@ -8801,7 +8941,7 @@
       </p:sp>
       <p:sp>
         <p:nvSpPr>
-          <p:cNvPr id="13" name="Text 10"/>
+          <p:cNvPr id="14" name="Text 11"/>
           <p:cNvSpPr/>
           <p:nvPr/>
         </p:nvSpPr>
@@ -8840,7 +8980,7 @@
       </p:sp>
       <p:sp>
         <p:nvSpPr>
-          <p:cNvPr id="14" name="Text 11"/>
+          <p:cNvPr id="15" name="Text 12"/>
           <p:cNvSpPr/>
           <p:nvPr/>
         </p:nvSpPr>
@@ -8879,7 +9019,7 @@
       </p:sp>
       <p:sp>
         <p:nvSpPr>
-          <p:cNvPr id="15" name="Shape 12"/>
+          <p:cNvPr id="16" name="Shape 13"/>
           <p:cNvSpPr/>
           <p:nvPr/>
         </p:nvSpPr>
@@ -8901,7 +9041,7 @@
       </p:sp>
       <p:sp>
         <p:nvSpPr>
-          <p:cNvPr id="16" name="Text 13"/>
+          <p:cNvPr id="17" name="Text 14"/>
           <p:cNvSpPr/>
           <p:nvPr/>
         </p:nvSpPr>
@@ -8940,7 +9080,7 @@
       </p:sp>
       <p:sp>
         <p:nvSpPr>
-          <p:cNvPr id="17" name="Text 14"/>
+          <p:cNvPr id="18" name="Text 15"/>
           <p:cNvSpPr/>
           <p:nvPr/>
         </p:nvSpPr>
@@ -8982,7 +9122,7 @@
       </p:sp>
       <p:sp>
         <p:nvSpPr>
-          <p:cNvPr id="18" name="Shape 15"/>
+          <p:cNvPr id="19" name="Shape 16"/>
           <p:cNvSpPr/>
           <p:nvPr/>
         </p:nvSpPr>
@@ -9004,7 +9144,7 @@
       </p:sp>
       <p:sp>
         <p:nvSpPr>
-          <p:cNvPr id="19" name="Text 16"/>
+          <p:cNvPr id="20" name="Text 17"/>
           <p:cNvSpPr/>
           <p:nvPr/>
         </p:nvSpPr>
@@ -9043,7 +9183,7 @@
       </p:sp>
       <p:sp>
         <p:nvSpPr>
-          <p:cNvPr id="20" name="Text 17"/>
+          <p:cNvPr id="21" name="Text 18"/>
           <p:cNvSpPr/>
           <p:nvPr/>
         </p:nvSpPr>
@@ -9085,7 +9225,7 @@
       </p:sp>
       <p:sp>
         <p:nvSpPr>
-          <p:cNvPr id="21" name="Text 18"/>
+          <p:cNvPr id="22" name="Text 19"/>
           <p:cNvSpPr/>
           <p:nvPr/>
         </p:nvSpPr>
@@ -9134,7 +9274,7 @@
         </p:nvSpPr>
         <p:spPr>
           <a:xfrm>
-            <a:off x="11368735" y="6437376"/>
+            <a:off x="11368735" y="6327648"/>
             <a:ext cx="365760" cy="274320"/>
           </a:xfrm>
           <a:prstGeom prst="rect">
@@ -9181,13 +9321,6 @@
 <file path=ppt/slides/slide16.xml><?xml version="1.0" encoding="utf-8"?>
 <p:sld xmlns:a="http://schemas.openxmlformats.org/drawingml/2006/main" xmlns:r="http://schemas.openxmlformats.org/officeDocument/2006/relationships" xmlns:p="http://schemas.openxmlformats.org/presentationml/2006/main">
   <p:cSld name="Slide 16">
-    <p:bg>
-      <p:bgPr>
-        <a:solidFill>
-          <a:srgbClr val="FFFFFF"/>
-        </a:solidFill>
-      </p:bgPr>
-    </p:bg>
     <p:spTree>
       <p:nvGrpSpPr>
         <p:cNvPr id="1" name=""/>
@@ -9204,7 +9337,29 @@
       </p:grpSpPr>
       <p:sp>
         <p:nvSpPr>
-          <p:cNvPr id="2" name="Text 0"/>
+          <p:cNvPr id="2" name="Shape 0"/>
+          <p:cNvSpPr/>
+          <p:nvPr/>
+        </p:nvSpPr>
+        <p:spPr>
+          <a:xfrm>
+            <a:off x="231343" y="194767"/>
+            <a:ext cx="11716207" cy="6473952"/>
+          </a:xfrm>
+          <a:prstGeom prst="roundRect">
+            <a:avLst>
+              <a:gd name="adj" fmla="val 3107"/>
+            </a:avLst>
+          </a:prstGeom>
+          <a:solidFill>
+            <a:srgbClr val="FFFFFF"/>
+          </a:solidFill>
+          <a:ln/>
+        </p:spPr>
+      </p:sp>
+      <p:sp>
+        <p:nvSpPr>
+          <p:cNvPr id="3" name="Text 1"/>
           <p:cNvSpPr/>
           <p:nvPr/>
         </p:nvSpPr>
@@ -9243,7 +9398,7 @@
       </p:sp>
       <p:sp>
         <p:nvSpPr>
-          <p:cNvPr id="3" name="Text 1"/>
+          <p:cNvPr id="4" name="Text 2"/>
           <p:cNvSpPr/>
           <p:nvPr/>
         </p:nvSpPr>
@@ -9282,7 +9437,7 @@
       </p:sp>
       <p:sp>
         <p:nvSpPr>
-          <p:cNvPr id="4" name="Shape 2"/>
+          <p:cNvPr id="5" name="Shape 3"/>
           <p:cNvSpPr/>
           <p:nvPr/>
         </p:nvSpPr>
@@ -9304,7 +9459,7 @@
       </p:sp>
       <p:sp>
         <p:nvSpPr>
-          <p:cNvPr id="5" name="Text 3"/>
+          <p:cNvPr id="6" name="Text 4"/>
           <p:cNvSpPr/>
           <p:nvPr/>
         </p:nvSpPr>
@@ -9343,7 +9498,7 @@
       </p:sp>
       <p:pic>
         <p:nvPicPr>
-          <p:cNvPr id="6" name="Image 0" descr="preencoded.png">    </p:cNvPr>
+          <p:cNvPr id="7" name="Image 0" descr="preencoded.png">    </p:cNvPr>
           <p:cNvPicPr>
             <a:picLocks noChangeAspect="1"/>
           </p:cNvPicPr>
@@ -9357,7 +9512,7 @@
         </p:blipFill>
         <p:spPr>
           <a:xfrm>
-            <a:off x="566928" y="6254496"/>
+            <a:off x="566928" y="6126480"/>
             <a:ext cx="1481328" cy="457200"/>
           </a:xfrm>
           <a:prstGeom prst="rect">
@@ -9367,7 +9522,7 @@
       </p:pic>
       <p:sp>
         <p:nvSpPr>
-          <p:cNvPr id="7" name="Shape 4"/>
+          <p:cNvPr id="8" name="Shape 5"/>
           <p:cNvSpPr/>
           <p:nvPr/>
         </p:nvSpPr>
@@ -9394,7 +9549,7 @@
       </p:sp>
       <p:sp>
         <p:nvSpPr>
-          <p:cNvPr id="8" name="Text 5"/>
+          <p:cNvPr id="9" name="Text 6"/>
           <p:cNvSpPr/>
           <p:nvPr/>
         </p:nvSpPr>
@@ -9504,7 +9659,7 @@
       </p:sp>
       <p:sp>
         <p:nvSpPr>
-          <p:cNvPr id="9" name="Text 6"/>
+          <p:cNvPr id="10" name="Text 7"/>
           <p:cNvSpPr/>
           <p:nvPr/>
         </p:nvSpPr>
@@ -9543,7 +9698,7 @@
       </p:sp>
       <p:sp>
         <p:nvSpPr>
-          <p:cNvPr id="10" name="Text 7"/>
+          <p:cNvPr id="11" name="Text 8"/>
           <p:cNvSpPr/>
           <p:nvPr/>
         </p:nvSpPr>
@@ -9582,7 +9737,7 @@
       </p:sp>
       <p:sp>
         <p:nvSpPr>
-          <p:cNvPr id="11" name="Shape 8"/>
+          <p:cNvPr id="12" name="Shape 9"/>
           <p:cNvSpPr/>
           <p:nvPr/>
         </p:nvSpPr>
@@ -9605,7 +9760,7 @@
       </p:sp>
       <p:sp>
         <p:nvSpPr>
-          <p:cNvPr id="12" name="Shape 9"/>
+          <p:cNvPr id="13" name="Shape 10"/>
           <p:cNvSpPr/>
           <p:nvPr/>
         </p:nvSpPr>
@@ -9625,7 +9780,7 @@
       </p:sp>
       <p:sp>
         <p:nvSpPr>
-          <p:cNvPr id="13" name="Text 10"/>
+          <p:cNvPr id="14" name="Text 11"/>
           <p:cNvSpPr/>
           <p:nvPr/>
         </p:nvSpPr>
@@ -9664,7 +9819,7 @@
       </p:sp>
       <p:sp>
         <p:nvSpPr>
-          <p:cNvPr id="14" name="Shape 11"/>
+          <p:cNvPr id="15" name="Shape 12"/>
           <p:cNvSpPr/>
           <p:nvPr/>
         </p:nvSpPr>
@@ -9686,7 +9841,7 @@
       </p:sp>
       <p:sp>
         <p:nvSpPr>
-          <p:cNvPr id="15" name="Text 12"/>
+          <p:cNvPr id="16" name="Text 13"/>
           <p:cNvSpPr/>
           <p:nvPr/>
         </p:nvSpPr>
@@ -9725,7 +9880,7 @@
       </p:sp>
       <p:sp>
         <p:nvSpPr>
-          <p:cNvPr id="16" name="Text 13"/>
+          <p:cNvPr id="17" name="Text 14"/>
           <p:cNvSpPr/>
           <p:nvPr/>
         </p:nvSpPr>
@@ -9764,7 +9919,7 @@
       </p:sp>
       <p:sp>
         <p:nvSpPr>
-          <p:cNvPr id="17" name="Shape 14"/>
+          <p:cNvPr id="18" name="Shape 15"/>
           <p:cNvSpPr/>
           <p:nvPr/>
         </p:nvSpPr>
@@ -9787,7 +9942,7 @@
       </p:sp>
       <p:sp>
         <p:nvSpPr>
-          <p:cNvPr id="18" name="Shape 15"/>
+          <p:cNvPr id="19" name="Shape 16"/>
           <p:cNvSpPr/>
           <p:nvPr/>
         </p:nvSpPr>
@@ -9807,7 +9962,7 @@
       </p:sp>
       <p:sp>
         <p:nvSpPr>
-          <p:cNvPr id="19" name="Text 16"/>
+          <p:cNvPr id="20" name="Text 17"/>
           <p:cNvSpPr/>
           <p:nvPr/>
         </p:nvSpPr>
@@ -9846,7 +10001,7 @@
       </p:sp>
       <p:sp>
         <p:nvSpPr>
-          <p:cNvPr id="20" name="Shape 17"/>
+          <p:cNvPr id="21" name="Shape 18"/>
           <p:cNvSpPr/>
           <p:nvPr/>
         </p:nvSpPr>
@@ -9868,7 +10023,7 @@
       </p:sp>
       <p:sp>
         <p:nvSpPr>
-          <p:cNvPr id="21" name="Text 18"/>
+          <p:cNvPr id="22" name="Text 19"/>
           <p:cNvSpPr/>
           <p:nvPr/>
         </p:nvSpPr>
@@ -9907,7 +10062,7 @@
       </p:sp>
       <p:sp>
         <p:nvSpPr>
-          <p:cNvPr id="22" name="Text 19"/>
+          <p:cNvPr id="23" name="Text 20"/>
           <p:cNvSpPr/>
           <p:nvPr/>
         </p:nvSpPr>
@@ -9946,7 +10101,7 @@
       </p:sp>
       <p:sp>
         <p:nvSpPr>
-          <p:cNvPr id="23" name="Shape 20"/>
+          <p:cNvPr id="24" name="Shape 21"/>
           <p:cNvSpPr/>
           <p:nvPr/>
         </p:nvSpPr>
@@ -9969,7 +10124,7 @@
       </p:sp>
       <p:sp>
         <p:nvSpPr>
-          <p:cNvPr id="24" name="Shape 21"/>
+          <p:cNvPr id="25" name="Shape 22"/>
           <p:cNvSpPr/>
           <p:nvPr/>
         </p:nvSpPr>
@@ -9989,7 +10144,7 @@
       </p:sp>
       <p:sp>
         <p:nvSpPr>
-          <p:cNvPr id="25" name="Text 22"/>
+          <p:cNvPr id="26" name="Text 23"/>
           <p:cNvSpPr/>
           <p:nvPr/>
         </p:nvSpPr>
@@ -10028,7 +10183,7 @@
       </p:sp>
       <p:sp>
         <p:nvSpPr>
-          <p:cNvPr id="26" name="Shape 23"/>
+          <p:cNvPr id="27" name="Shape 24"/>
           <p:cNvSpPr/>
           <p:nvPr/>
         </p:nvSpPr>
@@ -10050,7 +10205,7 @@
       </p:sp>
       <p:sp>
         <p:nvSpPr>
-          <p:cNvPr id="27" name="Text 24"/>
+          <p:cNvPr id="28" name="Text 25"/>
           <p:cNvSpPr/>
           <p:nvPr/>
         </p:nvSpPr>
@@ -10089,7 +10244,7 @@
       </p:sp>
       <p:sp>
         <p:nvSpPr>
-          <p:cNvPr id="28" name="Text 25"/>
+          <p:cNvPr id="29" name="Text 26"/>
           <p:cNvSpPr/>
           <p:nvPr/>
         </p:nvSpPr>
@@ -10128,7 +10283,7 @@
       </p:sp>
       <p:sp>
         <p:nvSpPr>
-          <p:cNvPr id="29" name="Shape 26"/>
+          <p:cNvPr id="30" name="Shape 27"/>
           <p:cNvSpPr/>
           <p:nvPr/>
         </p:nvSpPr>
@@ -10151,7 +10306,7 @@
       </p:sp>
       <p:sp>
         <p:nvSpPr>
-          <p:cNvPr id="30" name="Shape 27"/>
+          <p:cNvPr id="31" name="Shape 28"/>
           <p:cNvSpPr/>
           <p:nvPr/>
         </p:nvSpPr>
@@ -10171,7 +10326,7 @@
       </p:sp>
       <p:sp>
         <p:nvSpPr>
-          <p:cNvPr id="31" name="Text 28"/>
+          <p:cNvPr id="32" name="Text 29"/>
           <p:cNvSpPr/>
           <p:nvPr/>
         </p:nvSpPr>
@@ -10210,7 +10365,7 @@
       </p:sp>
       <p:sp>
         <p:nvSpPr>
-          <p:cNvPr id="32" name="Shape 29"/>
+          <p:cNvPr id="33" name="Shape 30"/>
           <p:cNvSpPr/>
           <p:nvPr/>
         </p:nvSpPr>
@@ -10232,7 +10387,7 @@
       </p:sp>
       <p:sp>
         <p:nvSpPr>
-          <p:cNvPr id="33" name="Text 30"/>
+          <p:cNvPr id="34" name="Text 31"/>
           <p:cNvSpPr/>
           <p:nvPr/>
         </p:nvSpPr>
@@ -10271,7 +10426,7 @@
       </p:sp>
       <p:sp>
         <p:nvSpPr>
-          <p:cNvPr id="34" name="Text 31"/>
+          <p:cNvPr id="35" name="Text 32"/>
           <p:cNvSpPr/>
           <p:nvPr/>
         </p:nvSpPr>
@@ -10310,7 +10465,7 @@
       </p:sp>
       <p:sp>
         <p:nvSpPr>
-          <p:cNvPr id="35" name="Shape 32"/>
+          <p:cNvPr id="36" name="Shape 33"/>
           <p:cNvSpPr/>
           <p:nvPr/>
         </p:nvSpPr>
@@ -10333,7 +10488,7 @@
       </p:sp>
       <p:sp>
         <p:nvSpPr>
-          <p:cNvPr id="36" name="Shape 33"/>
+          <p:cNvPr id="37" name="Shape 34"/>
           <p:cNvSpPr/>
           <p:nvPr/>
         </p:nvSpPr>
@@ -10353,7 +10508,7 @@
       </p:sp>
       <p:sp>
         <p:nvSpPr>
-          <p:cNvPr id="37" name="Text 34"/>
+          <p:cNvPr id="38" name="Text 35"/>
           <p:cNvSpPr/>
           <p:nvPr/>
         </p:nvSpPr>
@@ -10392,7 +10547,7 @@
       </p:sp>
       <p:sp>
         <p:nvSpPr>
-          <p:cNvPr id="38" name="Shape 35"/>
+          <p:cNvPr id="39" name="Shape 36"/>
           <p:cNvSpPr/>
           <p:nvPr/>
         </p:nvSpPr>
@@ -10414,7 +10569,7 @@
       </p:sp>
       <p:sp>
         <p:nvSpPr>
-          <p:cNvPr id="39" name="Text 36"/>
+          <p:cNvPr id="40" name="Text 37"/>
           <p:cNvSpPr/>
           <p:nvPr/>
         </p:nvSpPr>
@@ -10453,7 +10608,7 @@
       </p:sp>
       <p:sp>
         <p:nvSpPr>
-          <p:cNvPr id="40" name="Shape 37"/>
+          <p:cNvPr id="41" name="Shape 38"/>
           <p:cNvSpPr/>
           <p:nvPr/>
         </p:nvSpPr>
@@ -10475,7 +10630,7 @@
       </p:sp>
       <p:sp>
         <p:nvSpPr>
-          <p:cNvPr id="41" name="Text 38"/>
+          <p:cNvPr id="42" name="Text 39"/>
           <p:cNvSpPr/>
           <p:nvPr/>
         </p:nvSpPr>
@@ -10527,7 +10682,7 @@
         </p:nvSpPr>
         <p:spPr>
           <a:xfrm>
-            <a:off x="11368735" y="6437376"/>
+            <a:off x="11368735" y="6327648"/>
             <a:ext cx="365760" cy="274320"/>
           </a:xfrm>
           <a:prstGeom prst="rect">
@@ -10574,13 +10729,6 @@
 <file path=ppt/slides/slide17.xml><?xml version="1.0" encoding="utf-8"?>
 <p:sld xmlns:a="http://schemas.openxmlformats.org/drawingml/2006/main" xmlns:r="http://schemas.openxmlformats.org/officeDocument/2006/relationships" xmlns:p="http://schemas.openxmlformats.org/presentationml/2006/main">
   <p:cSld name="Slide 17">
-    <p:bg>
-      <p:bgPr>
-        <a:solidFill>
-          <a:srgbClr val="FFFFFF"/>
-        </a:solidFill>
-      </p:bgPr>
-    </p:bg>
     <p:spTree>
       <p:nvGrpSpPr>
         <p:cNvPr id="1" name=""/>
@@ -10597,7 +10745,29 @@
       </p:grpSpPr>
       <p:sp>
         <p:nvSpPr>
-          <p:cNvPr id="2" name="Text 0"/>
+          <p:cNvPr id="2" name="Shape 0"/>
+          <p:cNvSpPr/>
+          <p:nvPr/>
+        </p:nvSpPr>
+        <p:spPr>
+          <a:xfrm>
+            <a:off x="231343" y="194767"/>
+            <a:ext cx="11716207" cy="6473952"/>
+          </a:xfrm>
+          <a:prstGeom prst="roundRect">
+            <a:avLst>
+              <a:gd name="adj" fmla="val 3107"/>
+            </a:avLst>
+          </a:prstGeom>
+          <a:solidFill>
+            <a:srgbClr val="FFFFFF"/>
+          </a:solidFill>
+          <a:ln/>
+        </p:spPr>
+      </p:sp>
+      <p:sp>
+        <p:nvSpPr>
+          <p:cNvPr id="3" name="Text 1"/>
           <p:cNvSpPr/>
           <p:nvPr/>
         </p:nvSpPr>
@@ -10636,7 +10806,7 @@
       </p:sp>
       <p:sp>
         <p:nvSpPr>
-          <p:cNvPr id="3" name="Text 1"/>
+          <p:cNvPr id="4" name="Text 2"/>
           <p:cNvSpPr/>
           <p:nvPr/>
         </p:nvSpPr>
@@ -10675,7 +10845,7 @@
       </p:sp>
       <p:sp>
         <p:nvSpPr>
-          <p:cNvPr id="4" name="Shape 2"/>
+          <p:cNvPr id="5" name="Shape 3"/>
           <p:cNvSpPr/>
           <p:nvPr/>
         </p:nvSpPr>
@@ -10697,7 +10867,7 @@
       </p:sp>
       <p:sp>
         <p:nvSpPr>
-          <p:cNvPr id="5" name="Text 3"/>
+          <p:cNvPr id="6" name="Text 4"/>
           <p:cNvSpPr/>
           <p:nvPr/>
         </p:nvSpPr>
@@ -10736,7 +10906,7 @@
       </p:sp>
       <p:pic>
         <p:nvPicPr>
-          <p:cNvPr id="6" name="Image 0" descr="preencoded.png">    </p:cNvPr>
+          <p:cNvPr id="7" name="Image 0" descr="preencoded.png">    </p:cNvPr>
           <p:cNvPicPr>
             <a:picLocks noChangeAspect="1"/>
           </p:cNvPicPr>
@@ -10750,7 +10920,7 @@
         </p:blipFill>
         <p:spPr>
           <a:xfrm>
-            <a:off x="566928" y="6254496"/>
+            <a:off x="566928" y="6126480"/>
             <a:ext cx="1481328" cy="457200"/>
           </a:xfrm>
           <a:prstGeom prst="rect">
@@ -10760,7 +10930,7 @@
       </p:pic>
       <p:sp>
         <p:nvSpPr>
-          <p:cNvPr id="7" name="Text 4"/>
+          <p:cNvPr id="8" name="Text 5"/>
           <p:cNvSpPr/>
           <p:nvPr/>
         </p:nvSpPr>
@@ -10799,7 +10969,7 @@
       </p:sp>
       <p:sp>
         <p:nvSpPr>
-          <p:cNvPr id="8" name="Shape 5"/>
+          <p:cNvPr id="9" name="Shape 6"/>
           <p:cNvSpPr/>
           <p:nvPr/>
         </p:nvSpPr>
@@ -10821,7 +10991,7 @@
       </p:sp>
       <p:sp>
         <p:nvSpPr>
-          <p:cNvPr id="9" name="Text 6"/>
+          <p:cNvPr id="10" name="Text 7"/>
           <p:cNvSpPr/>
           <p:nvPr/>
         </p:nvSpPr>
@@ -10860,7 +11030,7 @@
       </p:sp>
       <p:sp>
         <p:nvSpPr>
-          <p:cNvPr id="10" name="Text 7"/>
+          <p:cNvPr id="11" name="Text 8"/>
           <p:cNvSpPr/>
           <p:nvPr/>
         </p:nvSpPr>
@@ -10899,7 +11069,7 @@
       </p:sp>
       <p:sp>
         <p:nvSpPr>
-          <p:cNvPr id="11" name="Text 8"/>
+          <p:cNvPr id="12" name="Text 9"/>
           <p:cNvSpPr/>
           <p:nvPr/>
         </p:nvSpPr>
@@ -10938,7 +11108,7 @@
       </p:sp>
       <p:sp>
         <p:nvSpPr>
-          <p:cNvPr id="12" name="Shape 9"/>
+          <p:cNvPr id="13" name="Shape 10"/>
           <p:cNvSpPr/>
           <p:nvPr/>
         </p:nvSpPr>
@@ -10960,7 +11130,7 @@
       </p:sp>
       <p:sp>
         <p:nvSpPr>
-          <p:cNvPr id="13" name="Text 10"/>
+          <p:cNvPr id="14" name="Text 11"/>
           <p:cNvSpPr/>
           <p:nvPr/>
         </p:nvSpPr>
@@ -10999,7 +11169,7 @@
       </p:sp>
       <p:sp>
         <p:nvSpPr>
-          <p:cNvPr id="14" name="Text 11"/>
+          <p:cNvPr id="15" name="Text 12"/>
           <p:cNvSpPr/>
           <p:nvPr/>
         </p:nvSpPr>
@@ -11038,7 +11208,7 @@
       </p:sp>
       <p:sp>
         <p:nvSpPr>
-          <p:cNvPr id="15" name="Text 12"/>
+          <p:cNvPr id="16" name="Text 13"/>
           <p:cNvSpPr/>
           <p:nvPr/>
         </p:nvSpPr>
@@ -11077,7 +11247,7 @@
       </p:sp>
       <p:sp>
         <p:nvSpPr>
-          <p:cNvPr id="16" name="Shape 13"/>
+          <p:cNvPr id="17" name="Shape 14"/>
           <p:cNvSpPr/>
           <p:nvPr/>
         </p:nvSpPr>
@@ -11099,7 +11269,7 @@
       </p:sp>
       <p:sp>
         <p:nvSpPr>
-          <p:cNvPr id="17" name="Text 14"/>
+          <p:cNvPr id="18" name="Text 15"/>
           <p:cNvSpPr/>
           <p:nvPr/>
         </p:nvSpPr>
@@ -11138,7 +11308,7 @@
       </p:sp>
       <p:sp>
         <p:nvSpPr>
-          <p:cNvPr id="18" name="Text 15"/>
+          <p:cNvPr id="19" name="Text 16"/>
           <p:cNvSpPr/>
           <p:nvPr/>
         </p:nvSpPr>
@@ -11177,7 +11347,7 @@
       </p:sp>
       <p:sp>
         <p:nvSpPr>
-          <p:cNvPr id="19" name="Text 16"/>
+          <p:cNvPr id="20" name="Text 17"/>
           <p:cNvSpPr/>
           <p:nvPr/>
         </p:nvSpPr>
@@ -11216,7 +11386,7 @@
       </p:sp>
       <p:sp>
         <p:nvSpPr>
-          <p:cNvPr id="20" name="Shape 17"/>
+          <p:cNvPr id="21" name="Shape 18"/>
           <p:cNvSpPr/>
           <p:nvPr/>
         </p:nvSpPr>
@@ -11238,7 +11408,7 @@
       </p:sp>
       <p:sp>
         <p:nvSpPr>
-          <p:cNvPr id="21" name="Text 18"/>
+          <p:cNvPr id="22" name="Text 19"/>
           <p:cNvSpPr/>
           <p:nvPr/>
         </p:nvSpPr>
@@ -11277,7 +11447,7 @@
       </p:sp>
       <p:sp>
         <p:nvSpPr>
-          <p:cNvPr id="22" name="Text 19"/>
+          <p:cNvPr id="23" name="Text 20"/>
           <p:cNvSpPr/>
           <p:nvPr/>
         </p:nvSpPr>
@@ -11316,7 +11486,7 @@
       </p:sp>
       <p:sp>
         <p:nvSpPr>
-          <p:cNvPr id="23" name="Text 20"/>
+          <p:cNvPr id="24" name="Text 21"/>
           <p:cNvSpPr/>
           <p:nvPr/>
         </p:nvSpPr>
@@ -11355,7 +11525,7 @@
       </p:sp>
       <p:sp>
         <p:nvSpPr>
-          <p:cNvPr id="24" name="Text 21"/>
+          <p:cNvPr id="25" name="Text 22"/>
           <p:cNvSpPr/>
           <p:nvPr/>
         </p:nvSpPr>
@@ -11394,7 +11564,7 @@
       </p:sp>
       <p:sp>
         <p:nvSpPr>
-          <p:cNvPr id="25" name="Text 22"/>
+          <p:cNvPr id="26" name="Text 23"/>
           <p:cNvSpPr/>
           <p:nvPr/>
         </p:nvSpPr>
@@ -11433,7 +11603,7 @@
       </p:sp>
       <p:sp>
         <p:nvSpPr>
-          <p:cNvPr id="26" name="Shape 23"/>
+          <p:cNvPr id="27" name="Shape 24"/>
           <p:cNvSpPr/>
           <p:nvPr/>
         </p:nvSpPr>
@@ -11455,7 +11625,7 @@
       </p:sp>
       <p:sp>
         <p:nvSpPr>
-          <p:cNvPr id="27" name="Text 24"/>
+          <p:cNvPr id="28" name="Text 25"/>
           <p:cNvSpPr/>
           <p:nvPr/>
         </p:nvSpPr>
@@ -11494,7 +11664,7 @@
       </p:sp>
       <p:sp>
         <p:nvSpPr>
-          <p:cNvPr id="28" name="Shape 25"/>
+          <p:cNvPr id="29" name="Shape 26"/>
           <p:cNvSpPr/>
           <p:nvPr/>
         </p:nvSpPr>
@@ -11517,7 +11687,7 @@
       </p:sp>
       <p:sp>
         <p:nvSpPr>
-          <p:cNvPr id="29" name="Shape 26"/>
+          <p:cNvPr id="30" name="Shape 27"/>
           <p:cNvSpPr/>
           <p:nvPr/>
         </p:nvSpPr>
@@ -11537,7 +11707,7 @@
       </p:sp>
       <p:sp>
         <p:nvSpPr>
-          <p:cNvPr id="30" name="Shape 27"/>
+          <p:cNvPr id="31" name="Shape 28"/>
           <p:cNvSpPr/>
           <p:nvPr/>
         </p:nvSpPr>
@@ -11564,7 +11734,7 @@
       </p:sp>
       <p:sp>
         <p:nvSpPr>
-          <p:cNvPr id="31" name="Text 28"/>
+          <p:cNvPr id="32" name="Text 29"/>
           <p:cNvSpPr/>
           <p:nvPr/>
         </p:nvSpPr>
@@ -11603,7 +11773,7 @@
       </p:sp>
       <p:sp>
         <p:nvSpPr>
-          <p:cNvPr id="32" name="Shape 29"/>
+          <p:cNvPr id="33" name="Shape 30"/>
           <p:cNvSpPr/>
           <p:nvPr/>
         </p:nvSpPr>
@@ -11625,7 +11795,7 @@
       </p:sp>
       <p:sp>
         <p:nvSpPr>
-          <p:cNvPr id="33" name="Text 30"/>
+          <p:cNvPr id="34" name="Text 31"/>
           <p:cNvSpPr/>
           <p:nvPr/>
         </p:nvSpPr>
@@ -11664,7 +11834,7 @@
       </p:sp>
       <p:sp>
         <p:nvSpPr>
-          <p:cNvPr id="34" name="Shape 31"/>
+          <p:cNvPr id="35" name="Shape 32"/>
           <p:cNvSpPr/>
           <p:nvPr/>
         </p:nvSpPr>
@@ -11687,7 +11857,7 @@
       </p:sp>
       <p:sp>
         <p:nvSpPr>
-          <p:cNvPr id="35" name="Shape 32"/>
+          <p:cNvPr id="36" name="Shape 33"/>
           <p:cNvSpPr/>
           <p:nvPr/>
         </p:nvSpPr>
@@ -11707,7 +11877,7 @@
       </p:sp>
       <p:sp>
         <p:nvSpPr>
-          <p:cNvPr id="36" name="Shape 33"/>
+          <p:cNvPr id="37" name="Shape 34"/>
           <p:cNvSpPr/>
           <p:nvPr/>
         </p:nvSpPr>
@@ -11734,7 +11904,7 @@
       </p:sp>
       <p:sp>
         <p:nvSpPr>
-          <p:cNvPr id="37" name="Text 34"/>
+          <p:cNvPr id="38" name="Text 35"/>
           <p:cNvSpPr/>
           <p:nvPr/>
         </p:nvSpPr>
@@ -11773,7 +11943,7 @@
       </p:sp>
       <p:sp>
         <p:nvSpPr>
-          <p:cNvPr id="38" name="Shape 35"/>
+          <p:cNvPr id="39" name="Shape 36"/>
           <p:cNvSpPr/>
           <p:nvPr/>
         </p:nvSpPr>
@@ -11795,7 +11965,7 @@
       </p:sp>
       <p:sp>
         <p:nvSpPr>
-          <p:cNvPr id="39" name="Text 36"/>
+          <p:cNvPr id="40" name="Text 37"/>
           <p:cNvSpPr/>
           <p:nvPr/>
         </p:nvSpPr>
@@ -11837,7 +12007,7 @@
       </p:sp>
       <p:sp>
         <p:nvSpPr>
-          <p:cNvPr id="40" name="Shape 37"/>
+          <p:cNvPr id="41" name="Shape 38"/>
           <p:cNvSpPr/>
           <p:nvPr/>
         </p:nvSpPr>
@@ -11864,7 +12034,7 @@
       </p:sp>
       <p:sp>
         <p:nvSpPr>
-          <p:cNvPr id="41" name="Text 38"/>
+          <p:cNvPr id="42" name="Text 39"/>
           <p:cNvSpPr/>
           <p:nvPr/>
         </p:nvSpPr>
@@ -11903,7 +12073,7 @@
       </p:sp>
       <p:sp>
         <p:nvSpPr>
-          <p:cNvPr id="42" name="Text 39"/>
+          <p:cNvPr id="43" name="Text 40"/>
           <p:cNvSpPr/>
           <p:nvPr/>
         </p:nvSpPr>
@@ -11955,7 +12125,7 @@
         </p:nvSpPr>
         <p:spPr>
           <a:xfrm>
-            <a:off x="11368735" y="6437376"/>
+            <a:off x="11368735" y="6327648"/>
             <a:ext cx="365760" cy="274320"/>
           </a:xfrm>
           <a:prstGeom prst="rect">
@@ -12002,13 +12172,6 @@
 <file path=ppt/slides/slide18.xml><?xml version="1.0" encoding="utf-8"?>
 <p:sld xmlns:a="http://schemas.openxmlformats.org/drawingml/2006/main" xmlns:r="http://schemas.openxmlformats.org/officeDocument/2006/relationships" xmlns:p="http://schemas.openxmlformats.org/presentationml/2006/main">
   <p:cSld name="Slide 18">
-    <p:bg>
-      <p:bgPr>
-        <a:solidFill>
-          <a:srgbClr val="FFFFFF"/>
-        </a:solidFill>
-      </p:bgPr>
-    </p:bg>
     <p:spTree>
       <p:nvGrpSpPr>
         <p:cNvPr id="1" name=""/>
@@ -12025,7 +12188,29 @@
       </p:grpSpPr>
       <p:sp>
         <p:nvSpPr>
-          <p:cNvPr id="2" name="Text 0"/>
+          <p:cNvPr id="2" name="Shape 0"/>
+          <p:cNvSpPr/>
+          <p:nvPr/>
+        </p:nvSpPr>
+        <p:spPr>
+          <a:xfrm>
+            <a:off x="231343" y="194767"/>
+            <a:ext cx="11716207" cy="6473952"/>
+          </a:xfrm>
+          <a:prstGeom prst="roundRect">
+            <a:avLst>
+              <a:gd name="adj" fmla="val 3107"/>
+            </a:avLst>
+          </a:prstGeom>
+          <a:solidFill>
+            <a:srgbClr val="FFFFFF"/>
+          </a:solidFill>
+          <a:ln/>
+        </p:spPr>
+      </p:sp>
+      <p:sp>
+        <p:nvSpPr>
+          <p:cNvPr id="3" name="Text 1"/>
           <p:cNvSpPr/>
           <p:nvPr/>
         </p:nvSpPr>
@@ -12064,7 +12249,7 @@
       </p:sp>
       <p:sp>
         <p:nvSpPr>
-          <p:cNvPr id="3" name="Text 1"/>
+          <p:cNvPr id="4" name="Text 2"/>
           <p:cNvSpPr/>
           <p:nvPr/>
         </p:nvSpPr>
@@ -12103,7 +12288,7 @@
       </p:sp>
       <p:sp>
         <p:nvSpPr>
-          <p:cNvPr id="4" name="Shape 2"/>
+          <p:cNvPr id="5" name="Shape 3"/>
           <p:cNvSpPr/>
           <p:nvPr/>
         </p:nvSpPr>
@@ -12125,7 +12310,7 @@
       </p:sp>
       <p:sp>
         <p:nvSpPr>
-          <p:cNvPr id="5" name="Text 3"/>
+          <p:cNvPr id="6" name="Text 4"/>
           <p:cNvSpPr/>
           <p:nvPr/>
         </p:nvSpPr>
@@ -12164,7 +12349,7 @@
       </p:sp>
       <p:sp>
         <p:nvSpPr>
-          <p:cNvPr id="6" name="Shape 4"/>
+          <p:cNvPr id="7" name="Shape 5"/>
           <p:cNvSpPr/>
           <p:nvPr/>
         </p:nvSpPr>
@@ -12186,7 +12371,7 @@
       </p:sp>
       <p:sp>
         <p:nvSpPr>
-          <p:cNvPr id="7" name="Text 5"/>
+          <p:cNvPr id="8" name="Text 6"/>
           <p:cNvSpPr/>
           <p:nvPr/>
         </p:nvSpPr>
@@ -12225,7 +12410,7 @@
       </p:sp>
       <p:pic>
         <p:nvPicPr>
-          <p:cNvPr id="8" name="Image 0" descr="preencoded.png">    </p:cNvPr>
+          <p:cNvPr id="9" name="Image 0" descr="preencoded.png">    </p:cNvPr>
           <p:cNvPicPr>
             <a:picLocks noChangeAspect="1"/>
           </p:cNvPicPr>
@@ -12239,7 +12424,7 @@
         </p:blipFill>
         <p:spPr>
           <a:xfrm>
-            <a:off x="566928" y="6254496"/>
+            <a:off x="566928" y="6126480"/>
             <a:ext cx="1481328" cy="457200"/>
           </a:xfrm>
           <a:prstGeom prst="rect">
@@ -12249,7 +12434,7 @@
       </p:pic>
       <p:sp>
         <p:nvSpPr>
-          <p:cNvPr id="9" name="Shape 6"/>
+          <p:cNvPr id="10" name="Shape 7"/>
           <p:cNvSpPr/>
           <p:nvPr/>
         </p:nvSpPr>
@@ -12276,7 +12461,7 @@
       </p:sp>
       <p:sp>
         <p:nvSpPr>
-          <p:cNvPr id="10" name="Text 7"/>
+          <p:cNvPr id="11" name="Text 8"/>
           <p:cNvSpPr/>
           <p:nvPr/>
         </p:nvSpPr>
@@ -12409,7 +12594,7 @@
       </p:sp>
       <p:sp>
         <p:nvSpPr>
-          <p:cNvPr id="11" name="Shape 8"/>
+          <p:cNvPr id="12" name="Shape 9"/>
           <p:cNvSpPr/>
           <p:nvPr/>
         </p:nvSpPr>
@@ -12436,7 +12621,7 @@
       </p:sp>
       <p:sp>
         <p:nvSpPr>
-          <p:cNvPr id="12" name="Text 9"/>
+          <p:cNvPr id="13" name="Text 10"/>
           <p:cNvSpPr/>
           <p:nvPr/>
         </p:nvSpPr>
@@ -12475,7 +12660,7 @@
       </p:sp>
       <p:sp>
         <p:nvSpPr>
-          <p:cNvPr id="13" name="Text 10"/>
+          <p:cNvPr id="14" name="Text 11"/>
           <p:cNvSpPr/>
           <p:nvPr/>
         </p:nvSpPr>
@@ -12517,7 +12702,7 @@
       </p:sp>
       <p:sp>
         <p:nvSpPr>
-          <p:cNvPr id="14" name="Shape 11"/>
+          <p:cNvPr id="15" name="Shape 12"/>
           <p:cNvSpPr/>
           <p:nvPr/>
         </p:nvSpPr>
@@ -12539,7 +12724,7 @@
       </p:sp>
       <p:sp>
         <p:nvSpPr>
-          <p:cNvPr id="15" name="Text 12"/>
+          <p:cNvPr id="16" name="Text 13"/>
           <p:cNvSpPr/>
           <p:nvPr/>
         </p:nvSpPr>
@@ -12578,7 +12763,7 @@
       </p:sp>
       <p:sp>
         <p:nvSpPr>
-          <p:cNvPr id="16" name="Text 13"/>
+          <p:cNvPr id="17" name="Text 14"/>
           <p:cNvSpPr/>
           <p:nvPr/>
         </p:nvSpPr>
@@ -12620,7 +12805,7 @@
       </p:sp>
       <p:sp>
         <p:nvSpPr>
-          <p:cNvPr id="17" name="Shape 14"/>
+          <p:cNvPr id="18" name="Shape 15"/>
           <p:cNvSpPr/>
           <p:nvPr/>
         </p:nvSpPr>
@@ -12642,7 +12827,7 @@
       </p:sp>
       <p:sp>
         <p:nvSpPr>
-          <p:cNvPr id="18" name="Text 15"/>
+          <p:cNvPr id="19" name="Text 16"/>
           <p:cNvSpPr/>
           <p:nvPr/>
         </p:nvSpPr>
@@ -12681,7 +12866,7 @@
       </p:sp>
       <p:sp>
         <p:nvSpPr>
-          <p:cNvPr id="19" name="Text 16"/>
+          <p:cNvPr id="20" name="Text 17"/>
           <p:cNvSpPr/>
           <p:nvPr/>
         </p:nvSpPr>
@@ -12723,7 +12908,7 @@
       </p:sp>
       <p:sp>
         <p:nvSpPr>
-          <p:cNvPr id="20" name="Text 17"/>
+          <p:cNvPr id="21" name="Text 18"/>
           <p:cNvSpPr/>
           <p:nvPr/>
         </p:nvSpPr>
@@ -12772,7 +12957,7 @@
         </p:nvSpPr>
         <p:spPr>
           <a:xfrm>
-            <a:off x="11368735" y="6437376"/>
+            <a:off x="11368735" y="6327648"/>
             <a:ext cx="365760" cy="274320"/>
           </a:xfrm>
           <a:prstGeom prst="rect">
@@ -12819,13 +13004,6 @@
 <file path=ppt/slides/slide19.xml><?xml version="1.0" encoding="utf-8"?>
 <p:sld xmlns:a="http://schemas.openxmlformats.org/drawingml/2006/main" xmlns:r="http://schemas.openxmlformats.org/officeDocument/2006/relationships" xmlns:p="http://schemas.openxmlformats.org/presentationml/2006/main">
   <p:cSld name="Slide 19">
-    <p:bg>
-      <p:bgPr>
-        <a:solidFill>
-          <a:srgbClr val="FFFFFF"/>
-        </a:solidFill>
-      </p:bgPr>
-    </p:bg>
     <p:spTree>
       <p:nvGrpSpPr>
         <p:cNvPr id="1" name=""/>
@@ -12842,7 +13020,29 @@
       </p:grpSpPr>
       <p:sp>
         <p:nvSpPr>
-          <p:cNvPr id="2" name="Text 0"/>
+          <p:cNvPr id="2" name="Shape 0"/>
+          <p:cNvSpPr/>
+          <p:nvPr/>
+        </p:nvSpPr>
+        <p:spPr>
+          <a:xfrm>
+            <a:off x="231343" y="194767"/>
+            <a:ext cx="11716207" cy="6473952"/>
+          </a:xfrm>
+          <a:prstGeom prst="roundRect">
+            <a:avLst>
+              <a:gd name="adj" fmla="val 3107"/>
+            </a:avLst>
+          </a:prstGeom>
+          <a:solidFill>
+            <a:srgbClr val="FFFFFF"/>
+          </a:solidFill>
+          <a:ln/>
+        </p:spPr>
+      </p:sp>
+      <p:sp>
+        <p:nvSpPr>
+          <p:cNvPr id="3" name="Text 1"/>
           <p:cNvSpPr/>
           <p:nvPr/>
         </p:nvSpPr>
@@ -12881,7 +13081,7 @@
       </p:sp>
       <p:sp>
         <p:nvSpPr>
-          <p:cNvPr id="3" name="Shape 1"/>
+          <p:cNvPr id="4" name="Shape 2"/>
           <p:cNvSpPr/>
           <p:nvPr/>
         </p:nvSpPr>
@@ -12903,7 +13103,7 @@
       </p:sp>
       <p:sp>
         <p:nvSpPr>
-          <p:cNvPr id="4" name="Text 2"/>
+          <p:cNvPr id="5" name="Text 3"/>
           <p:cNvSpPr/>
           <p:nvPr/>
         </p:nvSpPr>
@@ -12942,7 +13142,7 @@
       </p:sp>
       <p:pic>
         <p:nvPicPr>
-          <p:cNvPr id="5" name="Image 0" descr="preencoded.png">    </p:cNvPr>
+          <p:cNvPr id="6" name="Image 0" descr="preencoded.png">    </p:cNvPr>
           <p:cNvPicPr>
             <a:picLocks noChangeAspect="1"/>
           </p:cNvPicPr>
@@ -12956,7 +13156,7 @@
         </p:blipFill>
         <p:spPr>
           <a:xfrm>
-            <a:off x="566928" y="6254496"/>
+            <a:off x="566928" y="6126480"/>
             <a:ext cx="1481328" cy="457200"/>
           </a:xfrm>
           <a:prstGeom prst="rect">
@@ -12966,7 +13166,7 @@
       </p:pic>
       <p:sp>
         <p:nvSpPr>
-          <p:cNvPr id="6" name="Shape 3"/>
+          <p:cNvPr id="7" name="Shape 4"/>
           <p:cNvSpPr/>
           <p:nvPr/>
         </p:nvSpPr>
@@ -12988,7 +13188,7 @@
       </p:sp>
       <p:sp>
         <p:nvSpPr>
-          <p:cNvPr id="7" name="Shape 4"/>
+          <p:cNvPr id="8" name="Shape 5"/>
           <p:cNvSpPr/>
           <p:nvPr/>
         </p:nvSpPr>
@@ -13008,7 +13208,7 @@
       </p:sp>
       <p:sp>
         <p:nvSpPr>
-          <p:cNvPr id="8" name="Text 5"/>
+          <p:cNvPr id="9" name="Text 6"/>
           <p:cNvSpPr/>
           <p:nvPr/>
         </p:nvSpPr>
@@ -13047,7 +13247,7 @@
       </p:sp>
       <p:sp>
         <p:nvSpPr>
-          <p:cNvPr id="9" name="Text 6"/>
+          <p:cNvPr id="10" name="Text 7"/>
           <p:cNvSpPr/>
           <p:nvPr/>
         </p:nvSpPr>
@@ -13086,7 +13286,7 @@
       </p:sp>
       <p:sp>
         <p:nvSpPr>
-          <p:cNvPr id="10" name="Text 7"/>
+          <p:cNvPr id="11" name="Text 8"/>
           <p:cNvSpPr/>
           <p:nvPr/>
         </p:nvSpPr>
@@ -13128,7 +13328,7 @@
       </p:sp>
       <p:sp>
         <p:nvSpPr>
-          <p:cNvPr id="11" name="Shape 8"/>
+          <p:cNvPr id="12" name="Shape 9"/>
           <p:cNvSpPr/>
           <p:nvPr/>
         </p:nvSpPr>
@@ -13150,7 +13350,7 @@
       </p:sp>
       <p:sp>
         <p:nvSpPr>
-          <p:cNvPr id="12" name="Shape 9"/>
+          <p:cNvPr id="13" name="Shape 10"/>
           <p:cNvSpPr/>
           <p:nvPr/>
         </p:nvSpPr>
@@ -13170,7 +13370,7 @@
       </p:sp>
       <p:sp>
         <p:nvSpPr>
-          <p:cNvPr id="13" name="Text 10"/>
+          <p:cNvPr id="14" name="Text 11"/>
           <p:cNvSpPr/>
           <p:nvPr/>
         </p:nvSpPr>
@@ -13209,7 +13409,7 @@
       </p:sp>
       <p:sp>
         <p:nvSpPr>
-          <p:cNvPr id="14" name="Text 11"/>
+          <p:cNvPr id="15" name="Text 12"/>
           <p:cNvSpPr/>
           <p:nvPr/>
         </p:nvSpPr>
@@ -13248,7 +13448,7 @@
       </p:sp>
       <p:sp>
         <p:nvSpPr>
-          <p:cNvPr id="15" name="Text 12"/>
+          <p:cNvPr id="16" name="Text 13"/>
           <p:cNvSpPr/>
           <p:nvPr/>
         </p:nvSpPr>
@@ -13290,7 +13490,7 @@
       </p:sp>
       <p:sp>
         <p:nvSpPr>
-          <p:cNvPr id="16" name="Shape 13"/>
+          <p:cNvPr id="17" name="Shape 14"/>
           <p:cNvSpPr/>
           <p:nvPr/>
         </p:nvSpPr>
@@ -13312,7 +13512,7 @@
       </p:sp>
       <p:sp>
         <p:nvSpPr>
-          <p:cNvPr id="17" name="Shape 14"/>
+          <p:cNvPr id="18" name="Shape 15"/>
           <p:cNvSpPr/>
           <p:nvPr/>
         </p:nvSpPr>
@@ -13332,7 +13532,7 @@
       </p:sp>
       <p:sp>
         <p:nvSpPr>
-          <p:cNvPr id="18" name="Text 15"/>
+          <p:cNvPr id="19" name="Text 16"/>
           <p:cNvSpPr/>
           <p:nvPr/>
         </p:nvSpPr>
@@ -13371,7 +13571,7 @@
       </p:sp>
       <p:sp>
         <p:nvSpPr>
-          <p:cNvPr id="19" name="Text 16"/>
+          <p:cNvPr id="20" name="Text 17"/>
           <p:cNvSpPr/>
           <p:nvPr/>
         </p:nvSpPr>
@@ -13410,7 +13610,7 @@
       </p:sp>
       <p:sp>
         <p:nvSpPr>
-          <p:cNvPr id="20" name="Text 17"/>
+          <p:cNvPr id="21" name="Text 18"/>
           <p:cNvSpPr/>
           <p:nvPr/>
         </p:nvSpPr>
@@ -13452,7 +13652,7 @@
       </p:sp>
       <p:sp>
         <p:nvSpPr>
-          <p:cNvPr id="21" name="Shape 18"/>
+          <p:cNvPr id="22" name="Shape 19"/>
           <p:cNvSpPr/>
           <p:nvPr/>
         </p:nvSpPr>
@@ -13474,7 +13674,7 @@
       </p:sp>
       <p:sp>
         <p:nvSpPr>
-          <p:cNvPr id="22" name="Shape 19"/>
+          <p:cNvPr id="23" name="Shape 20"/>
           <p:cNvSpPr/>
           <p:nvPr/>
         </p:nvSpPr>
@@ -13494,7 +13694,7 @@
       </p:sp>
       <p:sp>
         <p:nvSpPr>
-          <p:cNvPr id="23" name="Text 20"/>
+          <p:cNvPr id="24" name="Text 21"/>
           <p:cNvSpPr/>
           <p:nvPr/>
         </p:nvSpPr>
@@ -13533,7 +13733,7 @@
       </p:sp>
       <p:sp>
         <p:nvSpPr>
-          <p:cNvPr id="24" name="Text 21"/>
+          <p:cNvPr id="25" name="Text 22"/>
           <p:cNvSpPr/>
           <p:nvPr/>
         </p:nvSpPr>
@@ -13572,7 +13772,7 @@
       </p:sp>
       <p:sp>
         <p:nvSpPr>
-          <p:cNvPr id="25" name="Text 22"/>
+          <p:cNvPr id="26" name="Text 23"/>
           <p:cNvSpPr/>
           <p:nvPr/>
         </p:nvSpPr>
@@ -13614,7 +13814,7 @@
       </p:sp>
       <p:sp>
         <p:nvSpPr>
-          <p:cNvPr id="26" name="Shape 23"/>
+          <p:cNvPr id="27" name="Shape 24"/>
           <p:cNvSpPr/>
           <p:nvPr/>
         </p:nvSpPr>
@@ -13636,7 +13836,7 @@
       </p:sp>
       <p:sp>
         <p:nvSpPr>
-          <p:cNvPr id="27" name="Shape 24"/>
+          <p:cNvPr id="28" name="Shape 25"/>
           <p:cNvSpPr/>
           <p:nvPr/>
         </p:nvSpPr>
@@ -13656,7 +13856,7 @@
       </p:sp>
       <p:sp>
         <p:nvSpPr>
-          <p:cNvPr id="28" name="Text 25"/>
+          <p:cNvPr id="29" name="Text 26"/>
           <p:cNvSpPr/>
           <p:nvPr/>
         </p:nvSpPr>
@@ -13695,7 +13895,7 @@
       </p:sp>
       <p:sp>
         <p:nvSpPr>
-          <p:cNvPr id="29" name="Text 26"/>
+          <p:cNvPr id="30" name="Text 27"/>
           <p:cNvSpPr/>
           <p:nvPr/>
         </p:nvSpPr>
@@ -13734,7 +13934,7 @@
       </p:sp>
       <p:sp>
         <p:nvSpPr>
-          <p:cNvPr id="30" name="Text 27"/>
+          <p:cNvPr id="31" name="Text 28"/>
           <p:cNvSpPr/>
           <p:nvPr/>
         </p:nvSpPr>
@@ -13776,7 +13976,7 @@
       </p:sp>
       <p:sp>
         <p:nvSpPr>
-          <p:cNvPr id="31" name="Shape 28"/>
+          <p:cNvPr id="32" name="Shape 29"/>
           <p:cNvSpPr/>
           <p:nvPr/>
         </p:nvSpPr>
@@ -13798,7 +13998,7 @@
       </p:sp>
       <p:sp>
         <p:nvSpPr>
-          <p:cNvPr id="32" name="Shape 29"/>
+          <p:cNvPr id="33" name="Shape 30"/>
           <p:cNvSpPr/>
           <p:nvPr/>
         </p:nvSpPr>
@@ -13818,7 +14018,7 @@
       </p:sp>
       <p:sp>
         <p:nvSpPr>
-          <p:cNvPr id="33" name="Text 30"/>
+          <p:cNvPr id="34" name="Text 31"/>
           <p:cNvSpPr/>
           <p:nvPr/>
         </p:nvSpPr>
@@ -13857,7 +14057,7 @@
       </p:sp>
       <p:sp>
         <p:nvSpPr>
-          <p:cNvPr id="34" name="Text 31"/>
+          <p:cNvPr id="35" name="Text 32"/>
           <p:cNvSpPr/>
           <p:nvPr/>
         </p:nvSpPr>
@@ -13896,7 +14096,7 @@
       </p:sp>
       <p:sp>
         <p:nvSpPr>
-          <p:cNvPr id="35" name="Text 32"/>
+          <p:cNvPr id="36" name="Text 33"/>
           <p:cNvSpPr/>
           <p:nvPr/>
         </p:nvSpPr>
@@ -13938,7 +14138,7 @@
       </p:sp>
       <p:sp>
         <p:nvSpPr>
-          <p:cNvPr id="36" name="Shape 33"/>
+          <p:cNvPr id="37" name="Shape 34"/>
           <p:cNvSpPr/>
           <p:nvPr/>
         </p:nvSpPr>
@@ -13960,7 +14160,7 @@
       </p:sp>
       <p:sp>
         <p:nvSpPr>
-          <p:cNvPr id="37" name="Text 34"/>
+          <p:cNvPr id="38" name="Text 35"/>
           <p:cNvSpPr/>
           <p:nvPr/>
         </p:nvSpPr>
@@ -13999,7 +14199,7 @@
       </p:sp>
       <p:sp>
         <p:nvSpPr>
-          <p:cNvPr id="38" name="Text 35"/>
+          <p:cNvPr id="39" name="Text 36"/>
           <p:cNvSpPr/>
           <p:nvPr/>
         </p:nvSpPr>
@@ -14051,7 +14251,7 @@
         </p:nvSpPr>
         <p:spPr>
           <a:xfrm>
-            <a:off x="11368735" y="6437376"/>
+            <a:off x="11368735" y="6327648"/>
             <a:ext cx="365760" cy="274320"/>
           </a:xfrm>
           <a:prstGeom prst="rect">
@@ -14098,13 +14298,6 @@
 <file path=ppt/slides/slide2.xml><?xml version="1.0" encoding="utf-8"?>
 <p:sld xmlns:a="http://schemas.openxmlformats.org/drawingml/2006/main" xmlns:r="http://schemas.openxmlformats.org/officeDocument/2006/relationships" xmlns:p="http://schemas.openxmlformats.org/presentationml/2006/main">
   <p:cSld name="Slide 2">
-    <p:bg>
-      <p:bgPr>
-        <a:solidFill>
-          <a:srgbClr val="FFFFFF"/>
-        </a:solidFill>
-      </p:bgPr>
-    </p:bg>
     <p:spTree>
       <p:nvGrpSpPr>
         <p:cNvPr id="1" name=""/>
@@ -14121,7 +14314,29 @@
       </p:grpSpPr>
       <p:sp>
         <p:nvSpPr>
-          <p:cNvPr id="2" name="Text 0"/>
+          <p:cNvPr id="2" name="Shape 0"/>
+          <p:cNvSpPr/>
+          <p:nvPr/>
+        </p:nvSpPr>
+        <p:spPr>
+          <a:xfrm>
+            <a:off x="231343" y="194767"/>
+            <a:ext cx="11716207" cy="6473952"/>
+          </a:xfrm>
+          <a:prstGeom prst="roundRect">
+            <a:avLst>
+              <a:gd name="adj" fmla="val 3107"/>
+            </a:avLst>
+          </a:prstGeom>
+          <a:solidFill>
+            <a:srgbClr val="FFFFFF"/>
+          </a:solidFill>
+          <a:ln/>
+        </p:spPr>
+      </p:sp>
+      <p:sp>
+        <p:nvSpPr>
+          <p:cNvPr id="3" name="Text 1"/>
           <p:cNvSpPr/>
           <p:nvPr/>
         </p:nvSpPr>
@@ -14160,7 +14375,7 @@
       </p:sp>
       <p:sp>
         <p:nvSpPr>
-          <p:cNvPr id="3" name="Text 1"/>
+          <p:cNvPr id="4" name="Text 2"/>
           <p:cNvSpPr/>
           <p:nvPr/>
         </p:nvSpPr>
@@ -14202,7 +14417,7 @@
       </p:sp>
       <p:sp>
         <p:nvSpPr>
-          <p:cNvPr id="4" name="Shape 2"/>
+          <p:cNvPr id="5" name="Shape 3"/>
           <p:cNvSpPr/>
           <p:nvPr/>
         </p:nvSpPr>
@@ -14224,7 +14439,7 @@
       </p:sp>
       <p:sp>
         <p:nvSpPr>
-          <p:cNvPr id="5" name="Text 3"/>
+          <p:cNvPr id="6" name="Text 4"/>
           <p:cNvSpPr/>
           <p:nvPr/>
         </p:nvSpPr>
@@ -14263,7 +14478,7 @@
       </p:sp>
       <p:pic>
         <p:nvPicPr>
-          <p:cNvPr id="6" name="Image 0" descr="preencoded.png">    </p:cNvPr>
+          <p:cNvPr id="7" name="Image 0" descr="preencoded.png">    </p:cNvPr>
           <p:cNvPicPr>
             <a:picLocks noChangeAspect="1"/>
           </p:cNvPicPr>
@@ -14277,7 +14492,7 @@
         </p:blipFill>
         <p:spPr>
           <a:xfrm>
-            <a:off x="566928" y="6254496"/>
+            <a:off x="566928" y="6126480"/>
             <a:ext cx="1481328" cy="457200"/>
           </a:xfrm>
           <a:prstGeom prst="rect">
@@ -14287,7 +14502,7 @@
       </p:pic>
       <p:sp>
         <p:nvSpPr>
-          <p:cNvPr id="7" name="Shape 4"/>
+          <p:cNvPr id="8" name="Shape 5"/>
           <p:cNvSpPr/>
           <p:nvPr/>
         </p:nvSpPr>
@@ -14314,7 +14529,7 @@
       </p:sp>
       <p:sp>
         <p:nvSpPr>
-          <p:cNvPr id="8" name="Shape 5"/>
+          <p:cNvPr id="9" name="Shape 6"/>
           <p:cNvSpPr/>
           <p:nvPr/>
         </p:nvSpPr>
@@ -14334,7 +14549,7 @@
       </p:sp>
       <p:sp>
         <p:nvSpPr>
-          <p:cNvPr id="9" name="Text 6"/>
+          <p:cNvPr id="10" name="Text 7"/>
           <p:cNvSpPr/>
           <p:nvPr/>
         </p:nvSpPr>
@@ -14373,7 +14588,7 @@
       </p:sp>
       <p:sp>
         <p:nvSpPr>
-          <p:cNvPr id="10" name="Text 7"/>
+          <p:cNvPr id="11" name="Text 8"/>
           <p:cNvSpPr/>
           <p:nvPr/>
         </p:nvSpPr>
@@ -14412,7 +14627,7 @@
       </p:sp>
       <p:sp>
         <p:nvSpPr>
-          <p:cNvPr id="11" name="Text 8"/>
+          <p:cNvPr id="12" name="Text 9"/>
           <p:cNvSpPr/>
           <p:nvPr/>
         </p:nvSpPr>
@@ -14454,7 +14669,7 @@
       </p:sp>
       <p:sp>
         <p:nvSpPr>
-          <p:cNvPr id="12" name="Shape 9"/>
+          <p:cNvPr id="13" name="Shape 10"/>
           <p:cNvSpPr/>
           <p:nvPr/>
         </p:nvSpPr>
@@ -14481,7 +14696,7 @@
       </p:sp>
       <p:sp>
         <p:nvSpPr>
-          <p:cNvPr id="13" name="Shape 10"/>
+          <p:cNvPr id="14" name="Shape 11"/>
           <p:cNvSpPr/>
           <p:nvPr/>
         </p:nvSpPr>
@@ -14501,7 +14716,7 @@
       </p:sp>
       <p:sp>
         <p:nvSpPr>
-          <p:cNvPr id="14" name="Text 11"/>
+          <p:cNvPr id="15" name="Text 12"/>
           <p:cNvSpPr/>
           <p:nvPr/>
         </p:nvSpPr>
@@ -14540,7 +14755,7 @@
       </p:sp>
       <p:sp>
         <p:nvSpPr>
-          <p:cNvPr id="15" name="Text 12"/>
+          <p:cNvPr id="16" name="Text 13"/>
           <p:cNvSpPr/>
           <p:nvPr/>
         </p:nvSpPr>
@@ -14579,7 +14794,7 @@
       </p:sp>
       <p:sp>
         <p:nvSpPr>
-          <p:cNvPr id="16" name="Text 13"/>
+          <p:cNvPr id="17" name="Text 14"/>
           <p:cNvSpPr/>
           <p:nvPr/>
         </p:nvSpPr>
@@ -14621,7 +14836,7 @@
       </p:sp>
       <p:sp>
         <p:nvSpPr>
-          <p:cNvPr id="17" name="Shape 14"/>
+          <p:cNvPr id="18" name="Shape 15"/>
           <p:cNvSpPr/>
           <p:nvPr/>
         </p:nvSpPr>
@@ -14648,7 +14863,7 @@
       </p:sp>
       <p:sp>
         <p:nvSpPr>
-          <p:cNvPr id="18" name="Shape 15"/>
+          <p:cNvPr id="19" name="Shape 16"/>
           <p:cNvSpPr/>
           <p:nvPr/>
         </p:nvSpPr>
@@ -14668,7 +14883,7 @@
       </p:sp>
       <p:sp>
         <p:nvSpPr>
-          <p:cNvPr id="19" name="Text 16"/>
+          <p:cNvPr id="20" name="Text 17"/>
           <p:cNvSpPr/>
           <p:nvPr/>
         </p:nvSpPr>
@@ -14707,7 +14922,7 @@
       </p:sp>
       <p:sp>
         <p:nvSpPr>
-          <p:cNvPr id="20" name="Text 17"/>
+          <p:cNvPr id="21" name="Text 18"/>
           <p:cNvSpPr/>
           <p:nvPr/>
         </p:nvSpPr>
@@ -14746,7 +14961,7 @@
       </p:sp>
       <p:sp>
         <p:nvSpPr>
-          <p:cNvPr id="21" name="Text 18"/>
+          <p:cNvPr id="22" name="Text 19"/>
           <p:cNvSpPr/>
           <p:nvPr/>
         </p:nvSpPr>
@@ -14788,7 +15003,7 @@
       </p:sp>
       <p:sp>
         <p:nvSpPr>
-          <p:cNvPr id="22" name="Shape 19"/>
+          <p:cNvPr id="23" name="Shape 20"/>
           <p:cNvSpPr/>
           <p:nvPr/>
         </p:nvSpPr>
@@ -14815,7 +15030,7 @@
       </p:sp>
       <p:sp>
         <p:nvSpPr>
-          <p:cNvPr id="23" name="Shape 20"/>
+          <p:cNvPr id="24" name="Shape 21"/>
           <p:cNvSpPr/>
           <p:nvPr/>
         </p:nvSpPr>
@@ -14835,7 +15050,7 @@
       </p:sp>
       <p:sp>
         <p:nvSpPr>
-          <p:cNvPr id="24" name="Text 21"/>
+          <p:cNvPr id="25" name="Text 22"/>
           <p:cNvSpPr/>
           <p:nvPr/>
         </p:nvSpPr>
@@ -14874,7 +15089,7 @@
       </p:sp>
       <p:sp>
         <p:nvSpPr>
-          <p:cNvPr id="25" name="Text 22"/>
+          <p:cNvPr id="26" name="Text 23"/>
           <p:cNvSpPr/>
           <p:nvPr/>
         </p:nvSpPr>
@@ -14913,7 +15128,7 @@
       </p:sp>
       <p:sp>
         <p:nvSpPr>
-          <p:cNvPr id="26" name="Text 23"/>
+          <p:cNvPr id="27" name="Text 24"/>
           <p:cNvSpPr/>
           <p:nvPr/>
         </p:nvSpPr>
@@ -14955,7 +15170,7 @@
       </p:sp>
       <p:sp>
         <p:nvSpPr>
-          <p:cNvPr id="27" name="Shape 24"/>
+          <p:cNvPr id="28" name="Shape 25"/>
           <p:cNvSpPr/>
           <p:nvPr/>
         </p:nvSpPr>
@@ -14982,7 +15197,7 @@
       </p:sp>
       <p:sp>
         <p:nvSpPr>
-          <p:cNvPr id="28" name="Shape 25"/>
+          <p:cNvPr id="29" name="Shape 26"/>
           <p:cNvSpPr/>
           <p:nvPr/>
         </p:nvSpPr>
@@ -15002,7 +15217,7 @@
       </p:sp>
       <p:sp>
         <p:nvSpPr>
-          <p:cNvPr id="29" name="Text 26"/>
+          <p:cNvPr id="30" name="Text 27"/>
           <p:cNvSpPr/>
           <p:nvPr/>
         </p:nvSpPr>
@@ -15041,7 +15256,7 @@
       </p:sp>
       <p:sp>
         <p:nvSpPr>
-          <p:cNvPr id="30" name="Text 27"/>
+          <p:cNvPr id="31" name="Text 28"/>
           <p:cNvSpPr/>
           <p:nvPr/>
         </p:nvSpPr>
@@ -15080,7 +15295,7 @@
       </p:sp>
       <p:sp>
         <p:nvSpPr>
-          <p:cNvPr id="31" name="Text 28"/>
+          <p:cNvPr id="32" name="Text 29"/>
           <p:cNvSpPr/>
           <p:nvPr/>
         </p:nvSpPr>
@@ -15122,7 +15337,7 @@
       </p:sp>
       <p:sp>
         <p:nvSpPr>
-          <p:cNvPr id="32" name="Shape 29"/>
+          <p:cNvPr id="33" name="Shape 30"/>
           <p:cNvSpPr/>
           <p:nvPr/>
         </p:nvSpPr>
@@ -15149,7 +15364,7 @@
       </p:sp>
       <p:sp>
         <p:nvSpPr>
-          <p:cNvPr id="33" name="Shape 30"/>
+          <p:cNvPr id="34" name="Shape 31"/>
           <p:cNvSpPr/>
           <p:nvPr/>
         </p:nvSpPr>
@@ -15169,7 +15384,7 @@
       </p:sp>
       <p:sp>
         <p:nvSpPr>
-          <p:cNvPr id="34" name="Text 31"/>
+          <p:cNvPr id="35" name="Text 32"/>
           <p:cNvSpPr/>
           <p:nvPr/>
         </p:nvSpPr>
@@ -15208,7 +15423,7 @@
       </p:sp>
       <p:sp>
         <p:nvSpPr>
-          <p:cNvPr id="35" name="Text 32"/>
+          <p:cNvPr id="36" name="Text 33"/>
           <p:cNvSpPr/>
           <p:nvPr/>
         </p:nvSpPr>
@@ -15247,7 +15462,7 @@
       </p:sp>
       <p:sp>
         <p:nvSpPr>
-          <p:cNvPr id="36" name="Text 33"/>
+          <p:cNvPr id="37" name="Text 34"/>
           <p:cNvSpPr/>
           <p:nvPr/>
         </p:nvSpPr>
@@ -15299,7 +15514,7 @@
         </p:nvSpPr>
         <p:spPr>
           <a:xfrm>
-            <a:off x="11368735" y="6437376"/>
+            <a:off x="11368735" y="6327648"/>
             <a:ext cx="365760" cy="274320"/>
           </a:xfrm>
           <a:prstGeom prst="rect">
@@ -15346,13 +15561,6 @@
 <file path=ppt/slides/slide20.xml><?xml version="1.0" encoding="utf-8"?>
 <p:sld xmlns:a="http://schemas.openxmlformats.org/drawingml/2006/main" xmlns:r="http://schemas.openxmlformats.org/officeDocument/2006/relationships" xmlns:p="http://schemas.openxmlformats.org/presentationml/2006/main">
   <p:cSld name="Slide 20">
-    <p:bg>
-      <p:bgPr>
-        <a:solidFill>
-          <a:srgbClr val="FFFFFF"/>
-        </a:solidFill>
-      </p:bgPr>
-    </p:bg>
     <p:spTree>
       <p:nvGrpSpPr>
         <p:cNvPr id="1" name=""/>
@@ -15369,7 +15577,29 @@
       </p:grpSpPr>
       <p:sp>
         <p:nvSpPr>
-          <p:cNvPr id="2" name="Text 0"/>
+          <p:cNvPr id="2" name="Shape 0"/>
+          <p:cNvSpPr/>
+          <p:nvPr/>
+        </p:nvSpPr>
+        <p:spPr>
+          <a:xfrm>
+            <a:off x="231343" y="194767"/>
+            <a:ext cx="11716207" cy="6473952"/>
+          </a:xfrm>
+          <a:prstGeom prst="roundRect">
+            <a:avLst>
+              <a:gd name="adj" fmla="val 3107"/>
+            </a:avLst>
+          </a:prstGeom>
+          <a:solidFill>
+            <a:srgbClr val="FFFFFF"/>
+          </a:solidFill>
+          <a:ln/>
+        </p:spPr>
+      </p:sp>
+      <p:sp>
+        <p:nvSpPr>
+          <p:cNvPr id="3" name="Text 1"/>
           <p:cNvSpPr/>
           <p:nvPr/>
         </p:nvSpPr>
@@ -15408,7 +15638,7 @@
       </p:sp>
       <p:sp>
         <p:nvSpPr>
-          <p:cNvPr id="3" name="Shape 1"/>
+          <p:cNvPr id="4" name="Shape 2"/>
           <p:cNvSpPr/>
           <p:nvPr/>
         </p:nvSpPr>
@@ -15430,7 +15660,7 @@
       </p:sp>
       <p:sp>
         <p:nvSpPr>
-          <p:cNvPr id="4" name="Text 2"/>
+          <p:cNvPr id="5" name="Text 3"/>
           <p:cNvSpPr/>
           <p:nvPr/>
         </p:nvSpPr>
@@ -15469,7 +15699,7 @@
       </p:sp>
       <p:pic>
         <p:nvPicPr>
-          <p:cNvPr id="5" name="Image 0" descr="preencoded.png">    </p:cNvPr>
+          <p:cNvPr id="6" name="Image 0" descr="preencoded.png">    </p:cNvPr>
           <p:cNvPicPr>
             <a:picLocks noChangeAspect="1"/>
           </p:cNvPicPr>
@@ -15483,7 +15713,7 @@
         </p:blipFill>
         <p:spPr>
           <a:xfrm>
-            <a:off x="566928" y="6254496"/>
+            <a:off x="566928" y="6126480"/>
             <a:ext cx="1481328" cy="457200"/>
           </a:xfrm>
           <a:prstGeom prst="rect">
@@ -15493,7 +15723,7 @@
       </p:pic>
       <p:sp>
         <p:nvSpPr>
-          <p:cNvPr id="6" name="Shape 3"/>
+          <p:cNvPr id="7" name="Shape 4"/>
           <p:cNvSpPr/>
           <p:nvPr/>
         </p:nvSpPr>
@@ -15513,7 +15743,7 @@
       </p:sp>
       <p:sp>
         <p:nvSpPr>
-          <p:cNvPr id="7" name="Text 4"/>
+          <p:cNvPr id="8" name="Text 5"/>
           <p:cNvSpPr/>
           <p:nvPr/>
         </p:nvSpPr>
@@ -15552,7 +15782,7 @@
       </p:sp>
       <p:sp>
         <p:nvSpPr>
-          <p:cNvPr id="8" name="Text 5"/>
+          <p:cNvPr id="9" name="Text 6"/>
           <p:cNvSpPr/>
           <p:nvPr/>
         </p:nvSpPr>
@@ -15605,7 +15835,7 @@
       </p:sp>
       <p:sp>
         <p:nvSpPr>
-          <p:cNvPr id="9" name="Shape 6"/>
+          <p:cNvPr id="10" name="Shape 7"/>
           <p:cNvSpPr/>
           <p:nvPr/>
         </p:nvSpPr>
@@ -15625,7 +15855,7 @@
       </p:sp>
       <p:sp>
         <p:nvSpPr>
-          <p:cNvPr id="10" name="Text 7"/>
+          <p:cNvPr id="11" name="Text 8"/>
           <p:cNvSpPr/>
           <p:nvPr/>
         </p:nvSpPr>
@@ -15664,7 +15894,7 @@
       </p:sp>
       <p:sp>
         <p:nvSpPr>
-          <p:cNvPr id="11" name="Text 8"/>
+          <p:cNvPr id="12" name="Text 9"/>
           <p:cNvSpPr/>
           <p:nvPr/>
         </p:nvSpPr>
@@ -15717,7 +15947,7 @@
       </p:sp>
       <p:sp>
         <p:nvSpPr>
-          <p:cNvPr id="12" name="Shape 9"/>
+          <p:cNvPr id="13" name="Shape 10"/>
           <p:cNvSpPr/>
           <p:nvPr/>
         </p:nvSpPr>
@@ -15737,7 +15967,7 @@
       </p:sp>
       <p:sp>
         <p:nvSpPr>
-          <p:cNvPr id="13" name="Text 10"/>
+          <p:cNvPr id="14" name="Text 11"/>
           <p:cNvSpPr/>
           <p:nvPr/>
         </p:nvSpPr>
@@ -15776,7 +16006,7 @@
       </p:sp>
       <p:sp>
         <p:nvSpPr>
-          <p:cNvPr id="14" name="Text 11"/>
+          <p:cNvPr id="15" name="Text 12"/>
           <p:cNvSpPr/>
           <p:nvPr/>
         </p:nvSpPr>
@@ -15829,7 +16059,7 @@
       </p:sp>
       <p:sp>
         <p:nvSpPr>
-          <p:cNvPr id="15" name="Shape 12"/>
+          <p:cNvPr id="16" name="Shape 13"/>
           <p:cNvSpPr/>
           <p:nvPr/>
         </p:nvSpPr>
@@ -15849,7 +16079,7 @@
       </p:sp>
       <p:sp>
         <p:nvSpPr>
-          <p:cNvPr id="16" name="Text 13"/>
+          <p:cNvPr id="17" name="Text 14"/>
           <p:cNvSpPr/>
           <p:nvPr/>
         </p:nvSpPr>
@@ -15888,7 +16118,7 @@
       </p:sp>
       <p:sp>
         <p:nvSpPr>
-          <p:cNvPr id="17" name="Text 14"/>
+          <p:cNvPr id="18" name="Text 15"/>
           <p:cNvSpPr/>
           <p:nvPr/>
         </p:nvSpPr>
@@ -15941,7 +16171,7 @@
       </p:sp>
       <p:sp>
         <p:nvSpPr>
-          <p:cNvPr id="18" name="Shape 15"/>
+          <p:cNvPr id="19" name="Shape 16"/>
           <p:cNvSpPr/>
           <p:nvPr/>
         </p:nvSpPr>
@@ -15961,7 +16191,7 @@
       </p:sp>
       <p:sp>
         <p:nvSpPr>
-          <p:cNvPr id="19" name="Text 16"/>
+          <p:cNvPr id="20" name="Text 17"/>
           <p:cNvSpPr/>
           <p:nvPr/>
         </p:nvSpPr>
@@ -16000,7 +16230,7 @@
       </p:sp>
       <p:sp>
         <p:nvSpPr>
-          <p:cNvPr id="20" name="Text 17"/>
+          <p:cNvPr id="21" name="Text 18"/>
           <p:cNvSpPr/>
           <p:nvPr/>
         </p:nvSpPr>
@@ -16053,7 +16283,7 @@
       </p:sp>
       <p:sp>
         <p:nvSpPr>
-          <p:cNvPr id="21" name="Shape 18"/>
+          <p:cNvPr id="22" name="Shape 19"/>
           <p:cNvSpPr/>
           <p:nvPr/>
         </p:nvSpPr>
@@ -16073,7 +16303,7 @@
       </p:sp>
       <p:sp>
         <p:nvSpPr>
-          <p:cNvPr id="22" name="Text 19"/>
+          <p:cNvPr id="23" name="Text 20"/>
           <p:cNvSpPr/>
           <p:nvPr/>
         </p:nvSpPr>
@@ -16112,7 +16342,7 @@
       </p:sp>
       <p:sp>
         <p:nvSpPr>
-          <p:cNvPr id="23" name="Text 20"/>
+          <p:cNvPr id="24" name="Text 21"/>
           <p:cNvSpPr/>
           <p:nvPr/>
         </p:nvSpPr>
@@ -16175,7 +16405,7 @@
         </p:nvSpPr>
         <p:spPr>
           <a:xfrm>
-            <a:off x="11368735" y="6437376"/>
+            <a:off x="11368735" y="6327648"/>
             <a:ext cx="365760" cy="274320"/>
           </a:xfrm>
           <a:prstGeom prst="rect">
@@ -16222,13 +16452,6 @@
 <file path=ppt/slides/slide21.xml><?xml version="1.0" encoding="utf-8"?>
 <p:sld xmlns:a="http://schemas.openxmlformats.org/drawingml/2006/main" xmlns:r="http://schemas.openxmlformats.org/officeDocument/2006/relationships" xmlns:p="http://schemas.openxmlformats.org/presentationml/2006/main">
   <p:cSld name="Slide 21">
-    <p:bg>
-      <p:bgPr>
-        <a:solidFill>
-          <a:srgbClr val="FFFFFF"/>
-        </a:solidFill>
-      </p:bgPr>
-    </p:bg>
     <p:spTree>
       <p:nvGrpSpPr>
         <p:cNvPr id="1" name=""/>
@@ -16245,7 +16468,29 @@
       </p:grpSpPr>
       <p:sp>
         <p:nvSpPr>
-          <p:cNvPr id="2" name="Text 0"/>
+          <p:cNvPr id="2" name="Shape 0"/>
+          <p:cNvSpPr/>
+          <p:nvPr/>
+        </p:nvSpPr>
+        <p:spPr>
+          <a:xfrm>
+            <a:off x="231343" y="194767"/>
+            <a:ext cx="11716207" cy="6473952"/>
+          </a:xfrm>
+          <a:prstGeom prst="roundRect">
+            <a:avLst>
+              <a:gd name="adj" fmla="val 3107"/>
+            </a:avLst>
+          </a:prstGeom>
+          <a:solidFill>
+            <a:srgbClr val="FFFFFF"/>
+          </a:solidFill>
+          <a:ln/>
+        </p:spPr>
+      </p:sp>
+      <p:sp>
+        <p:nvSpPr>
+          <p:cNvPr id="3" name="Text 1"/>
           <p:cNvSpPr/>
           <p:nvPr/>
         </p:nvSpPr>
@@ -16284,7 +16529,7 @@
       </p:sp>
       <p:sp>
         <p:nvSpPr>
-          <p:cNvPr id="3" name="Shape 1"/>
+          <p:cNvPr id="4" name="Shape 2"/>
           <p:cNvSpPr/>
           <p:nvPr/>
         </p:nvSpPr>
@@ -16306,7 +16551,7 @@
       </p:sp>
       <p:sp>
         <p:nvSpPr>
-          <p:cNvPr id="4" name="Text 2"/>
+          <p:cNvPr id="5" name="Text 3"/>
           <p:cNvSpPr/>
           <p:nvPr/>
         </p:nvSpPr>
@@ -16345,7 +16590,7 @@
       </p:sp>
       <p:pic>
         <p:nvPicPr>
-          <p:cNvPr id="5" name="Image 0" descr="preencoded.png">    </p:cNvPr>
+          <p:cNvPr id="6" name="Image 0" descr="preencoded.png">    </p:cNvPr>
           <p:cNvPicPr>
             <a:picLocks noChangeAspect="1"/>
           </p:cNvPicPr>
@@ -16359,7 +16604,7 @@
         </p:blipFill>
         <p:spPr>
           <a:xfrm>
-            <a:off x="566928" y="6254496"/>
+            <a:off x="566928" y="6126480"/>
             <a:ext cx="1481328" cy="457200"/>
           </a:xfrm>
           <a:prstGeom prst="rect">
@@ -16369,7 +16614,7 @@
       </p:pic>
       <p:sp>
         <p:nvSpPr>
-          <p:cNvPr id="6" name="Shape 3"/>
+          <p:cNvPr id="7" name="Shape 4"/>
           <p:cNvSpPr/>
           <p:nvPr/>
         </p:nvSpPr>
@@ -16391,7 +16636,7 @@
       </p:sp>
       <p:sp>
         <p:nvSpPr>
-          <p:cNvPr id="7" name="Text 4"/>
+          <p:cNvPr id="8" name="Text 5"/>
           <p:cNvSpPr/>
           <p:nvPr/>
         </p:nvSpPr>
@@ -16430,7 +16675,7 @@
       </p:sp>
       <p:sp>
         <p:nvSpPr>
-          <p:cNvPr id="8" name="Text 5"/>
+          <p:cNvPr id="9" name="Text 6"/>
           <p:cNvSpPr/>
           <p:nvPr/>
         </p:nvSpPr>
@@ -16472,7 +16717,7 @@
       </p:sp>
       <p:sp>
         <p:nvSpPr>
-          <p:cNvPr id="9" name="Shape 6"/>
+          <p:cNvPr id="10" name="Shape 7"/>
           <p:cNvSpPr/>
           <p:nvPr/>
         </p:nvSpPr>
@@ -16494,7 +16739,7 @@
       </p:sp>
       <p:sp>
         <p:nvSpPr>
-          <p:cNvPr id="10" name="Text 7"/>
+          <p:cNvPr id="11" name="Text 8"/>
           <p:cNvSpPr/>
           <p:nvPr/>
         </p:nvSpPr>
@@ -16533,7 +16778,7 @@
       </p:sp>
       <p:sp>
         <p:nvSpPr>
-          <p:cNvPr id="11" name="Text 8"/>
+          <p:cNvPr id="12" name="Text 9"/>
           <p:cNvSpPr/>
           <p:nvPr/>
         </p:nvSpPr>
@@ -16575,7 +16820,7 @@
       </p:sp>
       <p:sp>
         <p:nvSpPr>
-          <p:cNvPr id="12" name="Shape 9"/>
+          <p:cNvPr id="13" name="Shape 10"/>
           <p:cNvSpPr/>
           <p:nvPr/>
         </p:nvSpPr>
@@ -16597,7 +16842,7 @@
       </p:sp>
       <p:sp>
         <p:nvSpPr>
-          <p:cNvPr id="13" name="Text 10"/>
+          <p:cNvPr id="14" name="Text 11"/>
           <p:cNvSpPr/>
           <p:nvPr/>
         </p:nvSpPr>
@@ -16636,7 +16881,7 @@
       </p:sp>
       <p:sp>
         <p:nvSpPr>
-          <p:cNvPr id="14" name="Text 11"/>
+          <p:cNvPr id="15" name="Text 12"/>
           <p:cNvSpPr/>
           <p:nvPr/>
         </p:nvSpPr>
@@ -16678,7 +16923,7 @@
       </p:sp>
       <p:sp>
         <p:nvSpPr>
-          <p:cNvPr id="15" name="Shape 12"/>
+          <p:cNvPr id="16" name="Shape 13"/>
           <p:cNvSpPr/>
           <p:nvPr/>
         </p:nvSpPr>
@@ -16700,7 +16945,7 @@
       </p:sp>
       <p:sp>
         <p:nvSpPr>
-          <p:cNvPr id="16" name="Text 13"/>
+          <p:cNvPr id="17" name="Text 14"/>
           <p:cNvSpPr/>
           <p:nvPr/>
         </p:nvSpPr>
@@ -16739,7 +16984,7 @@
       </p:sp>
       <p:sp>
         <p:nvSpPr>
-          <p:cNvPr id="17" name="Shape 14"/>
+          <p:cNvPr id="18" name="Shape 15"/>
           <p:cNvSpPr/>
           <p:nvPr/>
         </p:nvSpPr>
@@ -16762,7 +17007,7 @@
       </p:sp>
       <p:sp>
         <p:nvSpPr>
-          <p:cNvPr id="18" name="Shape 15"/>
+          <p:cNvPr id="19" name="Shape 16"/>
           <p:cNvSpPr/>
           <p:nvPr/>
         </p:nvSpPr>
@@ -16782,7 +17027,7 @@
       </p:sp>
       <p:sp>
         <p:nvSpPr>
-          <p:cNvPr id="19" name="Shape 16"/>
+          <p:cNvPr id="20" name="Shape 17"/>
           <p:cNvSpPr/>
           <p:nvPr/>
         </p:nvSpPr>
@@ -16809,7 +17054,7 @@
       </p:sp>
       <p:sp>
         <p:nvSpPr>
-          <p:cNvPr id="20" name="Text 17"/>
+          <p:cNvPr id="21" name="Text 18"/>
           <p:cNvSpPr/>
           <p:nvPr/>
         </p:nvSpPr>
@@ -16848,7 +17093,7 @@
       </p:sp>
       <p:sp>
         <p:nvSpPr>
-          <p:cNvPr id="21" name="Shape 18"/>
+          <p:cNvPr id="22" name="Shape 19"/>
           <p:cNvSpPr/>
           <p:nvPr/>
         </p:nvSpPr>
@@ -16871,7 +17116,7 @@
       </p:sp>
       <p:sp>
         <p:nvSpPr>
-          <p:cNvPr id="22" name="Shape 19"/>
+          <p:cNvPr id="23" name="Shape 20"/>
           <p:cNvSpPr/>
           <p:nvPr/>
         </p:nvSpPr>
@@ -16891,7 +17136,7 @@
       </p:sp>
       <p:sp>
         <p:nvSpPr>
-          <p:cNvPr id="23" name="Shape 20"/>
+          <p:cNvPr id="24" name="Shape 21"/>
           <p:cNvSpPr/>
           <p:nvPr/>
         </p:nvSpPr>
@@ -16918,7 +17163,7 @@
       </p:sp>
       <p:sp>
         <p:nvSpPr>
-          <p:cNvPr id="24" name="Text 21"/>
+          <p:cNvPr id="25" name="Text 22"/>
           <p:cNvSpPr/>
           <p:nvPr/>
         </p:nvSpPr>
@@ -16957,7 +17202,7 @@
       </p:sp>
       <p:sp>
         <p:nvSpPr>
-          <p:cNvPr id="25" name="Shape 22"/>
+          <p:cNvPr id="26" name="Shape 23"/>
           <p:cNvSpPr/>
           <p:nvPr/>
         </p:nvSpPr>
@@ -16980,7 +17225,7 @@
       </p:sp>
       <p:sp>
         <p:nvSpPr>
-          <p:cNvPr id="26" name="Shape 23"/>
+          <p:cNvPr id="27" name="Shape 24"/>
           <p:cNvSpPr/>
           <p:nvPr/>
         </p:nvSpPr>
@@ -17000,7 +17245,7 @@
       </p:sp>
       <p:sp>
         <p:nvSpPr>
-          <p:cNvPr id="27" name="Shape 24"/>
+          <p:cNvPr id="28" name="Shape 25"/>
           <p:cNvSpPr/>
           <p:nvPr/>
         </p:nvSpPr>
@@ -17027,7 +17272,7 @@
       </p:sp>
       <p:sp>
         <p:nvSpPr>
-          <p:cNvPr id="28" name="Text 25"/>
+          <p:cNvPr id="29" name="Text 26"/>
           <p:cNvSpPr/>
           <p:nvPr/>
         </p:nvSpPr>
@@ -17066,7 +17311,7 @@
       </p:sp>
       <p:sp>
         <p:nvSpPr>
-          <p:cNvPr id="29" name="Shape 26"/>
+          <p:cNvPr id="30" name="Shape 27"/>
           <p:cNvSpPr/>
           <p:nvPr/>
         </p:nvSpPr>
@@ -17089,7 +17334,7 @@
       </p:sp>
       <p:sp>
         <p:nvSpPr>
-          <p:cNvPr id="30" name="Shape 27"/>
+          <p:cNvPr id="31" name="Shape 28"/>
           <p:cNvSpPr/>
           <p:nvPr/>
         </p:nvSpPr>
@@ -17109,7 +17354,7 @@
       </p:sp>
       <p:sp>
         <p:nvSpPr>
-          <p:cNvPr id="31" name="Shape 28"/>
+          <p:cNvPr id="32" name="Shape 29"/>
           <p:cNvSpPr/>
           <p:nvPr/>
         </p:nvSpPr>
@@ -17136,7 +17381,7 @@
       </p:sp>
       <p:sp>
         <p:nvSpPr>
-          <p:cNvPr id="32" name="Text 29"/>
+          <p:cNvPr id="33" name="Text 30"/>
           <p:cNvSpPr/>
           <p:nvPr/>
         </p:nvSpPr>
@@ -17175,7 +17420,7 @@
       </p:sp>
       <p:sp>
         <p:nvSpPr>
-          <p:cNvPr id="33" name="Shape 30"/>
+          <p:cNvPr id="34" name="Shape 31"/>
           <p:cNvSpPr/>
           <p:nvPr/>
         </p:nvSpPr>
@@ -17198,7 +17443,7 @@
       </p:sp>
       <p:sp>
         <p:nvSpPr>
-          <p:cNvPr id="34" name="Shape 31"/>
+          <p:cNvPr id="35" name="Shape 32"/>
           <p:cNvSpPr/>
           <p:nvPr/>
         </p:nvSpPr>
@@ -17218,7 +17463,7 @@
       </p:sp>
       <p:sp>
         <p:nvSpPr>
-          <p:cNvPr id="35" name="Shape 32"/>
+          <p:cNvPr id="36" name="Shape 33"/>
           <p:cNvSpPr/>
           <p:nvPr/>
         </p:nvSpPr>
@@ -17245,7 +17490,7 @@
       </p:sp>
       <p:sp>
         <p:nvSpPr>
-          <p:cNvPr id="36" name="Text 33"/>
+          <p:cNvPr id="37" name="Text 34"/>
           <p:cNvSpPr/>
           <p:nvPr/>
         </p:nvSpPr>
@@ -17284,7 +17529,7 @@
       </p:sp>
       <p:sp>
         <p:nvSpPr>
-          <p:cNvPr id="37" name="Shape 34"/>
+          <p:cNvPr id="38" name="Shape 35"/>
           <p:cNvSpPr/>
           <p:nvPr/>
         </p:nvSpPr>
@@ -17307,7 +17552,7 @@
       </p:sp>
       <p:sp>
         <p:nvSpPr>
-          <p:cNvPr id="38" name="Shape 35"/>
+          <p:cNvPr id="39" name="Shape 36"/>
           <p:cNvSpPr/>
           <p:nvPr/>
         </p:nvSpPr>
@@ -17327,7 +17572,7 @@
       </p:sp>
       <p:sp>
         <p:nvSpPr>
-          <p:cNvPr id="39" name="Shape 36"/>
+          <p:cNvPr id="40" name="Shape 37"/>
           <p:cNvSpPr/>
           <p:nvPr/>
         </p:nvSpPr>
@@ -17349,7 +17594,7 @@
       </p:sp>
       <p:sp>
         <p:nvSpPr>
-          <p:cNvPr id="40" name="Text 37"/>
+          <p:cNvPr id="41" name="Text 38"/>
           <p:cNvSpPr/>
           <p:nvPr/>
         </p:nvSpPr>
@@ -17388,7 +17633,7 @@
       </p:sp>
       <p:sp>
         <p:nvSpPr>
-          <p:cNvPr id="41" name="Shape 38"/>
+          <p:cNvPr id="42" name="Shape 39"/>
           <p:cNvSpPr/>
           <p:nvPr/>
         </p:nvSpPr>
@@ -17410,7 +17655,7 @@
       </p:sp>
       <p:sp>
         <p:nvSpPr>
-          <p:cNvPr id="42" name="Text 39"/>
+          <p:cNvPr id="43" name="Text 40"/>
           <p:cNvSpPr/>
           <p:nvPr/>
         </p:nvSpPr>
@@ -17462,7 +17707,7 @@
         </p:nvSpPr>
         <p:spPr>
           <a:xfrm>
-            <a:off x="11368735" y="6437376"/>
+            <a:off x="11368735" y="6327648"/>
             <a:ext cx="365760" cy="274320"/>
           </a:xfrm>
           <a:prstGeom prst="rect">
@@ -17509,13 +17754,6 @@
 <file path=ppt/slides/slide22.xml><?xml version="1.0" encoding="utf-8"?>
 <p:sld xmlns:a="http://schemas.openxmlformats.org/drawingml/2006/main" xmlns:r="http://schemas.openxmlformats.org/officeDocument/2006/relationships" xmlns:p="http://schemas.openxmlformats.org/presentationml/2006/main">
   <p:cSld name="Slide 22">
-    <p:bg>
-      <p:bgPr>
-        <a:solidFill>
-          <a:srgbClr val="FFFFFF"/>
-        </a:solidFill>
-      </p:bgPr>
-    </p:bg>
     <p:spTree>
       <p:nvGrpSpPr>
         <p:cNvPr id="1" name=""/>
@@ -17532,7 +17770,29 @@
       </p:grpSpPr>
       <p:sp>
         <p:nvSpPr>
-          <p:cNvPr id="2" name="Text 0"/>
+          <p:cNvPr id="2" name="Shape 0"/>
+          <p:cNvSpPr/>
+          <p:nvPr/>
+        </p:nvSpPr>
+        <p:spPr>
+          <a:xfrm>
+            <a:off x="231343" y="194767"/>
+            <a:ext cx="11716207" cy="6473952"/>
+          </a:xfrm>
+          <a:prstGeom prst="roundRect">
+            <a:avLst>
+              <a:gd name="adj" fmla="val 3107"/>
+            </a:avLst>
+          </a:prstGeom>
+          <a:solidFill>
+            <a:srgbClr val="FFFFFF"/>
+          </a:solidFill>
+          <a:ln/>
+        </p:spPr>
+      </p:sp>
+      <p:sp>
+        <p:nvSpPr>
+          <p:cNvPr id="3" name="Text 1"/>
           <p:cNvSpPr/>
           <p:nvPr/>
         </p:nvSpPr>
@@ -17571,7 +17831,7 @@
       </p:sp>
       <p:sp>
         <p:nvSpPr>
-          <p:cNvPr id="3" name="Shape 1"/>
+          <p:cNvPr id="4" name="Shape 2"/>
           <p:cNvSpPr/>
           <p:nvPr/>
         </p:nvSpPr>
@@ -17593,7 +17853,7 @@
       </p:sp>
       <p:sp>
         <p:nvSpPr>
-          <p:cNvPr id="4" name="Text 2"/>
+          <p:cNvPr id="5" name="Text 3"/>
           <p:cNvSpPr/>
           <p:nvPr/>
         </p:nvSpPr>
@@ -17632,7 +17892,7 @@
       </p:sp>
       <p:pic>
         <p:nvPicPr>
-          <p:cNvPr id="5" name="Image 0" descr="preencoded.png">    </p:cNvPr>
+          <p:cNvPr id="6" name="Image 0" descr="preencoded.png">    </p:cNvPr>
           <p:cNvPicPr>
             <a:picLocks noChangeAspect="1"/>
           </p:cNvPicPr>
@@ -17646,7 +17906,7 @@
         </p:blipFill>
         <p:spPr>
           <a:xfrm>
-            <a:off x="566928" y="6254496"/>
+            <a:off x="566928" y="6126480"/>
             <a:ext cx="1481328" cy="457200"/>
           </a:xfrm>
           <a:prstGeom prst="rect">
@@ -17656,7 +17916,7 @@
       </p:pic>
       <p:sp>
         <p:nvSpPr>
-          <p:cNvPr id="6" name="Shape 3"/>
+          <p:cNvPr id="7" name="Shape 4"/>
           <p:cNvSpPr/>
           <p:nvPr/>
         </p:nvSpPr>
@@ -17683,7 +17943,7 @@
       </p:sp>
       <p:sp>
         <p:nvSpPr>
-          <p:cNvPr id="7" name="Shape 4"/>
+          <p:cNvPr id="8" name="Shape 5"/>
           <p:cNvSpPr/>
           <p:nvPr/>
         </p:nvSpPr>
@@ -17710,7 +17970,7 @@
       </p:sp>
       <p:sp>
         <p:nvSpPr>
-          <p:cNvPr id="8" name="Shape 5"/>
+          <p:cNvPr id="9" name="Shape 6"/>
           <p:cNvSpPr/>
           <p:nvPr/>
         </p:nvSpPr>
@@ -17730,7 +17990,7 @@
       </p:sp>
       <p:sp>
         <p:nvSpPr>
-          <p:cNvPr id="9" name="Shape 6"/>
+          <p:cNvPr id="10" name="Shape 7"/>
           <p:cNvSpPr/>
           <p:nvPr/>
         </p:nvSpPr>
@@ -17750,7 +18010,7 @@
       </p:sp>
       <p:sp>
         <p:nvSpPr>
-          <p:cNvPr id="10" name="Text 7"/>
+          <p:cNvPr id="11" name="Text 8"/>
           <p:cNvSpPr/>
           <p:nvPr/>
         </p:nvSpPr>
@@ -17789,7 +18049,7 @@
       </p:sp>
       <p:sp>
         <p:nvSpPr>
-          <p:cNvPr id="11" name="Shape 8"/>
+          <p:cNvPr id="12" name="Shape 9"/>
           <p:cNvSpPr/>
           <p:nvPr/>
         </p:nvSpPr>
@@ -17816,7 +18076,7 @@
       </p:sp>
       <p:sp>
         <p:nvSpPr>
-          <p:cNvPr id="12" name="Shape 9"/>
+          <p:cNvPr id="13" name="Shape 10"/>
           <p:cNvSpPr/>
           <p:nvPr/>
         </p:nvSpPr>
@@ -17836,7 +18096,7 @@
       </p:sp>
       <p:sp>
         <p:nvSpPr>
-          <p:cNvPr id="13" name="Shape 10"/>
+          <p:cNvPr id="14" name="Shape 11"/>
           <p:cNvSpPr/>
           <p:nvPr/>
         </p:nvSpPr>
@@ -17856,7 +18116,7 @@
       </p:sp>
       <p:sp>
         <p:nvSpPr>
-          <p:cNvPr id="14" name="Text 11"/>
+          <p:cNvPr id="15" name="Text 12"/>
           <p:cNvSpPr/>
           <p:nvPr/>
         </p:nvSpPr>
@@ -17895,7 +18155,7 @@
       </p:sp>
       <p:sp>
         <p:nvSpPr>
-          <p:cNvPr id="15" name="Shape 12"/>
+          <p:cNvPr id="16" name="Shape 13"/>
           <p:cNvSpPr/>
           <p:nvPr/>
         </p:nvSpPr>
@@ -17922,7 +18182,7 @@
       </p:sp>
       <p:sp>
         <p:nvSpPr>
-          <p:cNvPr id="16" name="Shape 13"/>
+          <p:cNvPr id="17" name="Shape 14"/>
           <p:cNvSpPr/>
           <p:nvPr/>
         </p:nvSpPr>
@@ -17942,7 +18202,7 @@
       </p:sp>
       <p:sp>
         <p:nvSpPr>
-          <p:cNvPr id="17" name="Shape 14"/>
+          <p:cNvPr id="18" name="Shape 15"/>
           <p:cNvSpPr/>
           <p:nvPr/>
         </p:nvSpPr>
@@ -17962,7 +18222,7 @@
       </p:sp>
       <p:sp>
         <p:nvSpPr>
-          <p:cNvPr id="18" name="Text 15"/>
+          <p:cNvPr id="19" name="Text 16"/>
           <p:cNvSpPr/>
           <p:nvPr/>
         </p:nvSpPr>
@@ -18001,7 +18261,7 @@
       </p:sp>
       <p:sp>
         <p:nvSpPr>
-          <p:cNvPr id="19" name="Shape 16"/>
+          <p:cNvPr id="20" name="Shape 17"/>
           <p:cNvSpPr/>
           <p:nvPr/>
         </p:nvSpPr>
@@ -18028,7 +18288,7 @@
       </p:sp>
       <p:sp>
         <p:nvSpPr>
-          <p:cNvPr id="20" name="Shape 17"/>
+          <p:cNvPr id="21" name="Shape 18"/>
           <p:cNvSpPr/>
           <p:nvPr/>
         </p:nvSpPr>
@@ -18048,7 +18308,7 @@
       </p:sp>
       <p:sp>
         <p:nvSpPr>
-          <p:cNvPr id="21" name="Shape 18"/>
+          <p:cNvPr id="22" name="Shape 19"/>
           <p:cNvSpPr/>
           <p:nvPr/>
         </p:nvSpPr>
@@ -18068,7 +18328,7 @@
       </p:sp>
       <p:sp>
         <p:nvSpPr>
-          <p:cNvPr id="22" name="Text 19"/>
+          <p:cNvPr id="23" name="Text 20"/>
           <p:cNvSpPr/>
           <p:nvPr/>
         </p:nvSpPr>
@@ -18107,7 +18367,7 @@
       </p:sp>
       <p:sp>
         <p:nvSpPr>
-          <p:cNvPr id="23" name="Shape 20"/>
+          <p:cNvPr id="24" name="Shape 21"/>
           <p:cNvSpPr/>
           <p:nvPr/>
         </p:nvSpPr>
@@ -18134,7 +18394,7 @@
       </p:sp>
       <p:sp>
         <p:nvSpPr>
-          <p:cNvPr id="24" name="Shape 21"/>
+          <p:cNvPr id="25" name="Shape 22"/>
           <p:cNvSpPr/>
           <p:nvPr/>
         </p:nvSpPr>
@@ -18154,7 +18414,7 @@
       </p:sp>
       <p:sp>
         <p:nvSpPr>
-          <p:cNvPr id="25" name="Shape 22"/>
+          <p:cNvPr id="26" name="Shape 23"/>
           <p:cNvSpPr/>
           <p:nvPr/>
         </p:nvSpPr>
@@ -18174,7 +18434,7 @@
       </p:sp>
       <p:sp>
         <p:nvSpPr>
-          <p:cNvPr id="26" name="Text 23"/>
+          <p:cNvPr id="27" name="Text 24"/>
           <p:cNvSpPr/>
           <p:nvPr/>
         </p:nvSpPr>
@@ -18213,7 +18473,7 @@
       </p:sp>
       <p:sp>
         <p:nvSpPr>
-          <p:cNvPr id="27" name="Shape 24"/>
+          <p:cNvPr id="28" name="Shape 25"/>
           <p:cNvSpPr/>
           <p:nvPr/>
         </p:nvSpPr>
@@ -18240,7 +18500,7 @@
       </p:sp>
       <p:sp>
         <p:nvSpPr>
-          <p:cNvPr id="28" name="Shape 25"/>
+          <p:cNvPr id="29" name="Shape 26"/>
           <p:cNvSpPr/>
           <p:nvPr/>
         </p:nvSpPr>
@@ -18260,7 +18520,7 @@
       </p:sp>
       <p:sp>
         <p:nvSpPr>
-          <p:cNvPr id="29" name="Shape 26"/>
+          <p:cNvPr id="30" name="Shape 27"/>
           <p:cNvSpPr/>
           <p:nvPr/>
         </p:nvSpPr>
@@ -18280,7 +18540,7 @@
       </p:sp>
       <p:sp>
         <p:nvSpPr>
-          <p:cNvPr id="30" name="Text 27"/>
+          <p:cNvPr id="31" name="Text 28"/>
           <p:cNvSpPr/>
           <p:nvPr/>
         </p:nvSpPr>
@@ -18319,7 +18579,7 @@
       </p:sp>
       <p:sp>
         <p:nvSpPr>
-          <p:cNvPr id="31" name="Text 28"/>
+          <p:cNvPr id="32" name="Text 29"/>
           <p:cNvSpPr/>
           <p:nvPr/>
         </p:nvSpPr>
@@ -18368,7 +18628,7 @@
         </p:nvSpPr>
         <p:spPr>
           <a:xfrm>
-            <a:off x="11368735" y="6437376"/>
+            <a:off x="11368735" y="6327648"/>
             <a:ext cx="365760" cy="274320"/>
           </a:xfrm>
           <a:prstGeom prst="rect">
@@ -18415,13 +18675,6 @@
 <file path=ppt/slides/slide23.xml><?xml version="1.0" encoding="utf-8"?>
 <p:sld xmlns:a="http://schemas.openxmlformats.org/drawingml/2006/main" xmlns:r="http://schemas.openxmlformats.org/officeDocument/2006/relationships" xmlns:p="http://schemas.openxmlformats.org/presentationml/2006/main">
   <p:cSld name="Slide 23">
-    <p:bg>
-      <p:bgPr>
-        <a:solidFill>
-          <a:srgbClr val="FFFFFF"/>
-        </a:solidFill>
-      </p:bgPr>
-    </p:bg>
     <p:spTree>
       <p:nvGrpSpPr>
         <p:cNvPr id="1" name=""/>
@@ -18438,7 +18691,29 @@
       </p:grpSpPr>
       <p:sp>
         <p:nvSpPr>
-          <p:cNvPr id="2" name="Text 0"/>
+          <p:cNvPr id="2" name="Shape 0"/>
+          <p:cNvSpPr/>
+          <p:nvPr/>
+        </p:nvSpPr>
+        <p:spPr>
+          <a:xfrm>
+            <a:off x="231343" y="194767"/>
+            <a:ext cx="11716207" cy="6473952"/>
+          </a:xfrm>
+          <a:prstGeom prst="roundRect">
+            <a:avLst>
+              <a:gd name="adj" fmla="val 3107"/>
+            </a:avLst>
+          </a:prstGeom>
+          <a:solidFill>
+            <a:srgbClr val="FFFFFF"/>
+          </a:solidFill>
+          <a:ln/>
+        </p:spPr>
+      </p:sp>
+      <p:sp>
+        <p:nvSpPr>
+          <p:cNvPr id="3" name="Text 1"/>
           <p:cNvSpPr/>
           <p:nvPr/>
         </p:nvSpPr>
@@ -18477,7 +18752,7 @@
       </p:sp>
       <p:sp>
         <p:nvSpPr>
-          <p:cNvPr id="3" name="Shape 1"/>
+          <p:cNvPr id="4" name="Shape 2"/>
           <p:cNvSpPr/>
           <p:nvPr/>
         </p:nvSpPr>
@@ -18499,7 +18774,7 @@
       </p:sp>
       <p:sp>
         <p:nvSpPr>
-          <p:cNvPr id="4" name="Text 2"/>
+          <p:cNvPr id="5" name="Text 3"/>
           <p:cNvSpPr/>
           <p:nvPr/>
         </p:nvSpPr>
@@ -18538,7 +18813,7 @@
       </p:sp>
       <p:pic>
         <p:nvPicPr>
-          <p:cNvPr id="5" name="Image 0" descr="preencoded.png">    </p:cNvPr>
+          <p:cNvPr id="6" name="Image 0" descr="preencoded.png">    </p:cNvPr>
           <p:cNvPicPr>
             <a:picLocks noChangeAspect="1"/>
           </p:cNvPicPr>
@@ -18552,7 +18827,7 @@
         </p:blipFill>
         <p:spPr>
           <a:xfrm>
-            <a:off x="566928" y="6254496"/>
+            <a:off x="566928" y="6126480"/>
             <a:ext cx="1481328" cy="457200"/>
           </a:xfrm>
           <a:prstGeom prst="rect">
@@ -18562,7 +18837,7 @@
       </p:pic>
       <p:sp>
         <p:nvSpPr>
-          <p:cNvPr id="6" name="Shape 3"/>
+          <p:cNvPr id="7" name="Shape 4"/>
           <p:cNvSpPr/>
           <p:nvPr/>
         </p:nvSpPr>
@@ -18589,7 +18864,7 @@
       </p:sp>
       <p:sp>
         <p:nvSpPr>
-          <p:cNvPr id="7" name="Shape 4"/>
+          <p:cNvPr id="8" name="Shape 5"/>
           <p:cNvSpPr/>
           <p:nvPr/>
         </p:nvSpPr>
@@ -18609,7 +18884,7 @@
       </p:sp>
       <p:sp>
         <p:nvSpPr>
-          <p:cNvPr id="8" name="Shape 5"/>
+          <p:cNvPr id="9" name="Shape 6"/>
           <p:cNvSpPr/>
           <p:nvPr/>
         </p:nvSpPr>
@@ -18629,7 +18904,7 @@
       </p:sp>
       <p:sp>
         <p:nvSpPr>
-          <p:cNvPr id="9" name="Shape 6"/>
+          <p:cNvPr id="10" name="Shape 7"/>
           <p:cNvSpPr/>
           <p:nvPr/>
         </p:nvSpPr>
@@ -18649,7 +18924,7 @@
       </p:sp>
       <p:sp>
         <p:nvSpPr>
-          <p:cNvPr id="10" name="Text 7"/>
+          <p:cNvPr id="11" name="Text 8"/>
           <p:cNvSpPr/>
           <p:nvPr/>
         </p:nvSpPr>
@@ -18702,7 +18977,7 @@
       </p:sp>
       <p:sp>
         <p:nvSpPr>
-          <p:cNvPr id="11" name="Shape 8"/>
+          <p:cNvPr id="12" name="Shape 9"/>
           <p:cNvSpPr/>
           <p:nvPr/>
         </p:nvSpPr>
@@ -18729,7 +19004,7 @@
       </p:sp>
       <p:sp>
         <p:nvSpPr>
-          <p:cNvPr id="12" name="Shape 9"/>
+          <p:cNvPr id="13" name="Shape 10"/>
           <p:cNvSpPr/>
           <p:nvPr/>
         </p:nvSpPr>
@@ -18749,7 +19024,7 @@
       </p:sp>
       <p:sp>
         <p:nvSpPr>
-          <p:cNvPr id="13" name="Shape 10"/>
+          <p:cNvPr id="14" name="Shape 11"/>
           <p:cNvSpPr/>
           <p:nvPr/>
         </p:nvSpPr>
@@ -18769,7 +19044,7 @@
       </p:sp>
       <p:sp>
         <p:nvSpPr>
-          <p:cNvPr id="14" name="Shape 11"/>
+          <p:cNvPr id="15" name="Shape 12"/>
           <p:cNvSpPr/>
           <p:nvPr/>
         </p:nvSpPr>
@@ -18789,7 +19064,7 @@
       </p:sp>
       <p:sp>
         <p:nvSpPr>
-          <p:cNvPr id="15" name="Text 12"/>
+          <p:cNvPr id="16" name="Text 13"/>
           <p:cNvSpPr/>
           <p:nvPr/>
         </p:nvSpPr>
@@ -18842,7 +19117,7 @@
       </p:sp>
       <p:sp>
         <p:nvSpPr>
-          <p:cNvPr id="16" name="Shape 13"/>
+          <p:cNvPr id="17" name="Shape 14"/>
           <p:cNvSpPr/>
           <p:nvPr/>
         </p:nvSpPr>
@@ -18869,7 +19144,7 @@
       </p:sp>
       <p:sp>
         <p:nvSpPr>
-          <p:cNvPr id="17" name="Shape 14"/>
+          <p:cNvPr id="18" name="Shape 15"/>
           <p:cNvSpPr/>
           <p:nvPr/>
         </p:nvSpPr>
@@ -18889,7 +19164,7 @@
       </p:sp>
       <p:sp>
         <p:nvSpPr>
-          <p:cNvPr id="18" name="Shape 15"/>
+          <p:cNvPr id="19" name="Shape 16"/>
           <p:cNvSpPr/>
           <p:nvPr/>
         </p:nvSpPr>
@@ -18909,7 +19184,7 @@
       </p:sp>
       <p:sp>
         <p:nvSpPr>
-          <p:cNvPr id="19" name="Shape 16"/>
+          <p:cNvPr id="20" name="Shape 17"/>
           <p:cNvSpPr/>
           <p:nvPr/>
         </p:nvSpPr>
@@ -18929,7 +19204,7 @@
       </p:sp>
       <p:sp>
         <p:nvSpPr>
-          <p:cNvPr id="20" name="Text 17"/>
+          <p:cNvPr id="21" name="Text 18"/>
           <p:cNvSpPr/>
           <p:nvPr/>
         </p:nvSpPr>
@@ -18982,7 +19257,7 @@
       </p:sp>
       <p:sp>
         <p:nvSpPr>
-          <p:cNvPr id="21" name="Shape 18"/>
+          <p:cNvPr id="22" name="Shape 19"/>
           <p:cNvSpPr/>
           <p:nvPr/>
         </p:nvSpPr>
@@ -19009,7 +19284,7 @@
       </p:sp>
       <p:sp>
         <p:nvSpPr>
-          <p:cNvPr id="22" name="Shape 19"/>
+          <p:cNvPr id="23" name="Shape 20"/>
           <p:cNvSpPr/>
           <p:nvPr/>
         </p:nvSpPr>
@@ -19029,7 +19304,7 @@
       </p:sp>
       <p:sp>
         <p:nvSpPr>
-          <p:cNvPr id="23" name="Shape 20"/>
+          <p:cNvPr id="24" name="Shape 21"/>
           <p:cNvSpPr/>
           <p:nvPr/>
         </p:nvSpPr>
@@ -19049,7 +19324,7 @@
       </p:sp>
       <p:sp>
         <p:nvSpPr>
-          <p:cNvPr id="24" name="Shape 21"/>
+          <p:cNvPr id="25" name="Shape 22"/>
           <p:cNvSpPr/>
           <p:nvPr/>
         </p:nvSpPr>
@@ -19069,7 +19344,7 @@
       </p:sp>
       <p:sp>
         <p:nvSpPr>
-          <p:cNvPr id="25" name="Text 22"/>
+          <p:cNvPr id="26" name="Text 23"/>
           <p:cNvSpPr/>
           <p:nvPr/>
         </p:nvSpPr>
@@ -19122,7 +19397,7 @@
       </p:sp>
       <p:sp>
         <p:nvSpPr>
-          <p:cNvPr id="26" name="Shape 23"/>
+          <p:cNvPr id="27" name="Shape 24"/>
           <p:cNvSpPr/>
           <p:nvPr/>
         </p:nvSpPr>
@@ -19149,7 +19424,7 @@
       </p:sp>
       <p:sp>
         <p:nvSpPr>
-          <p:cNvPr id="27" name="Shape 24"/>
+          <p:cNvPr id="28" name="Shape 25"/>
           <p:cNvSpPr/>
           <p:nvPr/>
         </p:nvSpPr>
@@ -19169,7 +19444,7 @@
       </p:sp>
       <p:sp>
         <p:nvSpPr>
-          <p:cNvPr id="28" name="Shape 25"/>
+          <p:cNvPr id="29" name="Shape 26"/>
           <p:cNvSpPr/>
           <p:nvPr/>
         </p:nvSpPr>
@@ -19189,7 +19464,7 @@
       </p:sp>
       <p:sp>
         <p:nvSpPr>
-          <p:cNvPr id="29" name="Shape 26"/>
+          <p:cNvPr id="30" name="Shape 27"/>
           <p:cNvSpPr/>
           <p:nvPr/>
         </p:nvSpPr>
@@ -19209,7 +19484,7 @@
       </p:sp>
       <p:sp>
         <p:nvSpPr>
-          <p:cNvPr id="30" name="Text 27"/>
+          <p:cNvPr id="31" name="Text 28"/>
           <p:cNvSpPr/>
           <p:nvPr/>
         </p:nvSpPr>
@@ -19272,7 +19547,7 @@
         </p:nvSpPr>
         <p:spPr>
           <a:xfrm>
-            <a:off x="11368735" y="6437376"/>
+            <a:off x="11368735" y="6327648"/>
             <a:ext cx="365760" cy="274320"/>
           </a:xfrm>
           <a:prstGeom prst="rect">
@@ -19319,13 +19594,6 @@
 <file path=ppt/slides/slide24.xml><?xml version="1.0" encoding="utf-8"?>
 <p:sld xmlns:a="http://schemas.openxmlformats.org/drawingml/2006/main" xmlns:r="http://schemas.openxmlformats.org/officeDocument/2006/relationships" xmlns:p="http://schemas.openxmlformats.org/presentationml/2006/main">
   <p:cSld name="Slide 24">
-    <p:bg>
-      <p:bgPr>
-        <a:solidFill>
-          <a:srgbClr val="FFFFFF"/>
-        </a:solidFill>
-      </p:bgPr>
-    </p:bg>
     <p:spTree>
       <p:nvGrpSpPr>
         <p:cNvPr id="1" name=""/>
@@ -19342,7 +19610,29 @@
       </p:grpSpPr>
       <p:sp>
         <p:nvSpPr>
-          <p:cNvPr id="2" name="Text 0"/>
+          <p:cNvPr id="2" name="Shape 0"/>
+          <p:cNvSpPr/>
+          <p:nvPr/>
+        </p:nvSpPr>
+        <p:spPr>
+          <a:xfrm>
+            <a:off x="231343" y="194767"/>
+            <a:ext cx="11716207" cy="6473952"/>
+          </a:xfrm>
+          <a:prstGeom prst="roundRect">
+            <a:avLst>
+              <a:gd name="adj" fmla="val 3107"/>
+            </a:avLst>
+          </a:prstGeom>
+          <a:solidFill>
+            <a:srgbClr val="FFFFFF"/>
+          </a:solidFill>
+          <a:ln/>
+        </p:spPr>
+      </p:sp>
+      <p:sp>
+        <p:nvSpPr>
+          <p:cNvPr id="3" name="Text 1"/>
           <p:cNvSpPr/>
           <p:nvPr/>
         </p:nvSpPr>
@@ -19381,7 +19671,7 @@
       </p:sp>
       <p:sp>
         <p:nvSpPr>
-          <p:cNvPr id="3" name="Shape 1"/>
+          <p:cNvPr id="4" name="Shape 2"/>
           <p:cNvSpPr/>
           <p:nvPr/>
         </p:nvSpPr>
@@ -19403,7 +19693,7 @@
       </p:sp>
       <p:sp>
         <p:nvSpPr>
-          <p:cNvPr id="4" name="Text 2"/>
+          <p:cNvPr id="5" name="Text 3"/>
           <p:cNvSpPr/>
           <p:nvPr/>
         </p:nvSpPr>
@@ -19442,7 +19732,7 @@
       </p:sp>
       <p:pic>
         <p:nvPicPr>
-          <p:cNvPr id="5" name="Image 0" descr="preencoded.png">    </p:cNvPr>
+          <p:cNvPr id="6" name="Image 0" descr="preencoded.png">    </p:cNvPr>
           <p:cNvPicPr>
             <a:picLocks noChangeAspect="1"/>
           </p:cNvPicPr>
@@ -19456,7 +19746,7 @@
         </p:blipFill>
         <p:spPr>
           <a:xfrm>
-            <a:off x="566928" y="6254496"/>
+            <a:off x="566928" y="6126480"/>
             <a:ext cx="1481328" cy="457200"/>
           </a:xfrm>
           <a:prstGeom prst="rect">
@@ -19466,7 +19756,7 @@
       </p:pic>
       <p:sp>
         <p:nvSpPr>
-          <p:cNvPr id="6" name="Shape 3"/>
+          <p:cNvPr id="7" name="Shape 4"/>
           <p:cNvSpPr/>
           <p:nvPr/>
         </p:nvSpPr>
@@ -19493,7 +19783,7 @@
       </p:sp>
       <p:sp>
         <p:nvSpPr>
-          <p:cNvPr id="7" name="Text 4"/>
+          <p:cNvPr id="8" name="Text 5"/>
           <p:cNvSpPr/>
           <p:nvPr/>
         </p:nvSpPr>
@@ -19532,7 +19822,7 @@
       </p:sp>
       <p:sp>
         <p:nvSpPr>
-          <p:cNvPr id="8" name="Text 5"/>
+          <p:cNvPr id="9" name="Text 6"/>
           <p:cNvSpPr/>
           <p:nvPr/>
         </p:nvSpPr>
@@ -19632,7 +19922,7 @@
       </p:sp>
       <p:sp>
         <p:nvSpPr>
-          <p:cNvPr id="9" name="Shape 6"/>
+          <p:cNvPr id="10" name="Shape 7"/>
           <p:cNvSpPr/>
           <p:nvPr/>
         </p:nvSpPr>
@@ -19654,7 +19944,7 @@
       </p:sp>
       <p:sp>
         <p:nvSpPr>
-          <p:cNvPr id="10" name="Text 7"/>
+          <p:cNvPr id="11" name="Text 8"/>
           <p:cNvSpPr/>
           <p:nvPr/>
         </p:nvSpPr>
@@ -19693,7 +19983,7 @@
       </p:sp>
       <p:sp>
         <p:nvSpPr>
-          <p:cNvPr id="11" name="Text 8"/>
+          <p:cNvPr id="12" name="Text 9"/>
           <p:cNvSpPr/>
           <p:nvPr/>
         </p:nvSpPr>
@@ -19764,7 +20054,7 @@
       </p:sp>
       <p:sp>
         <p:nvSpPr>
-          <p:cNvPr id="12" name="Shape 9"/>
+          <p:cNvPr id="13" name="Shape 10"/>
           <p:cNvSpPr/>
           <p:nvPr/>
         </p:nvSpPr>
@@ -19791,7 +20081,7 @@
       </p:sp>
       <p:sp>
         <p:nvSpPr>
-          <p:cNvPr id="13" name="Text 10"/>
+          <p:cNvPr id="14" name="Text 11"/>
           <p:cNvSpPr/>
           <p:nvPr/>
         </p:nvSpPr>
@@ -19830,7 +20120,7 @@
       </p:sp>
       <p:sp>
         <p:nvSpPr>
-          <p:cNvPr id="14" name="Text 11"/>
+          <p:cNvPr id="15" name="Text 12"/>
           <p:cNvSpPr/>
           <p:nvPr/>
         </p:nvSpPr>
@@ -19879,7 +20169,7 @@
         </p:nvSpPr>
         <p:spPr>
           <a:xfrm>
-            <a:off x="11368735" y="6437376"/>
+            <a:off x="11368735" y="6327648"/>
             <a:ext cx="365760" cy="274320"/>
           </a:xfrm>
           <a:prstGeom prst="rect">
@@ -19926,13 +20216,6 @@
 <file path=ppt/slides/slide25.xml><?xml version="1.0" encoding="utf-8"?>
 <p:sld xmlns:a="http://schemas.openxmlformats.org/drawingml/2006/main" xmlns:r="http://schemas.openxmlformats.org/officeDocument/2006/relationships" xmlns:p="http://schemas.openxmlformats.org/presentationml/2006/main">
   <p:cSld name="Slide 25">
-    <p:bg>
-      <p:bgPr>
-        <a:solidFill>
-          <a:srgbClr val="1B0942"/>
-        </a:solidFill>
-      </p:bgPr>
-    </p:bg>
     <p:spTree>
       <p:nvGrpSpPr>
         <p:cNvPr id="1" name=""/>
@@ -20449,13 +20732,6 @@
 <file path=ppt/slides/slide3.xml><?xml version="1.0" encoding="utf-8"?>
 <p:sld xmlns:a="http://schemas.openxmlformats.org/drawingml/2006/main" xmlns:r="http://schemas.openxmlformats.org/officeDocument/2006/relationships" xmlns:p="http://schemas.openxmlformats.org/presentationml/2006/main">
   <p:cSld name="Slide 3">
-    <p:bg>
-      <p:bgPr>
-        <a:solidFill>
-          <a:srgbClr val="FFFFFF"/>
-        </a:solidFill>
-      </p:bgPr>
-    </p:bg>
     <p:spTree>
       <p:nvGrpSpPr>
         <p:cNvPr id="1" name=""/>
@@ -20472,7 +20748,29 @@
       </p:grpSpPr>
       <p:sp>
         <p:nvSpPr>
-          <p:cNvPr id="2" name="Text 0"/>
+          <p:cNvPr id="2" name="Shape 0"/>
+          <p:cNvSpPr/>
+          <p:nvPr/>
+        </p:nvSpPr>
+        <p:spPr>
+          <a:xfrm>
+            <a:off x="231343" y="194767"/>
+            <a:ext cx="11716207" cy="6473952"/>
+          </a:xfrm>
+          <a:prstGeom prst="roundRect">
+            <a:avLst>
+              <a:gd name="adj" fmla="val 3107"/>
+            </a:avLst>
+          </a:prstGeom>
+          <a:solidFill>
+            <a:srgbClr val="FFFFFF"/>
+          </a:solidFill>
+          <a:ln/>
+        </p:spPr>
+      </p:sp>
+      <p:sp>
+        <p:nvSpPr>
+          <p:cNvPr id="3" name="Text 1"/>
           <p:cNvSpPr/>
           <p:nvPr/>
         </p:nvSpPr>
@@ -20511,7 +20809,7 @@
       </p:sp>
       <p:sp>
         <p:nvSpPr>
-          <p:cNvPr id="3" name="Shape 1"/>
+          <p:cNvPr id="4" name="Shape 2"/>
           <p:cNvSpPr/>
           <p:nvPr/>
         </p:nvSpPr>
@@ -20533,7 +20831,7 @@
       </p:sp>
       <p:sp>
         <p:nvSpPr>
-          <p:cNvPr id="4" name="Text 2"/>
+          <p:cNvPr id="5" name="Text 3"/>
           <p:cNvSpPr/>
           <p:nvPr/>
         </p:nvSpPr>
@@ -20572,7 +20870,7 @@
       </p:sp>
       <p:pic>
         <p:nvPicPr>
-          <p:cNvPr id="5" name="Image 0" descr="preencoded.png">    </p:cNvPr>
+          <p:cNvPr id="6" name="Image 0" descr="preencoded.png">    </p:cNvPr>
           <p:cNvPicPr>
             <a:picLocks noChangeAspect="1"/>
           </p:cNvPicPr>
@@ -20586,7 +20884,7 @@
         </p:blipFill>
         <p:spPr>
           <a:xfrm>
-            <a:off x="566928" y="6254496"/>
+            <a:off x="566928" y="6126480"/>
             <a:ext cx="1481328" cy="457200"/>
           </a:xfrm>
           <a:prstGeom prst="rect">
@@ -20596,7 +20894,7 @@
       </p:pic>
       <p:sp>
         <p:nvSpPr>
-          <p:cNvPr id="6" name="Shape 3"/>
+          <p:cNvPr id="7" name="Shape 4"/>
           <p:cNvSpPr/>
           <p:nvPr/>
         </p:nvSpPr>
@@ -20623,7 +20921,7 @@
       </p:sp>
       <p:sp>
         <p:nvSpPr>
-          <p:cNvPr id="7" name="Shape 4"/>
+          <p:cNvPr id="8" name="Shape 5"/>
           <p:cNvSpPr/>
           <p:nvPr/>
         </p:nvSpPr>
@@ -20643,7 +20941,7 @@
       </p:sp>
       <p:sp>
         <p:nvSpPr>
-          <p:cNvPr id="8" name="Text 5"/>
+          <p:cNvPr id="9" name="Text 6"/>
           <p:cNvSpPr/>
           <p:nvPr/>
         </p:nvSpPr>
@@ -20682,7 +20980,7 @@
       </p:sp>
       <p:sp>
         <p:nvSpPr>
-          <p:cNvPr id="9" name="Text 6"/>
+          <p:cNvPr id="10" name="Text 7"/>
           <p:cNvSpPr/>
           <p:nvPr/>
         </p:nvSpPr>
@@ -20721,7 +21019,7 @@
       </p:sp>
       <p:sp>
         <p:nvSpPr>
-          <p:cNvPr id="10" name="Shape 7"/>
+          <p:cNvPr id="11" name="Shape 8"/>
           <p:cNvSpPr/>
           <p:nvPr/>
         </p:nvSpPr>
@@ -20748,7 +21046,7 @@
       </p:sp>
       <p:sp>
         <p:nvSpPr>
-          <p:cNvPr id="11" name="Shape 8"/>
+          <p:cNvPr id="12" name="Shape 9"/>
           <p:cNvSpPr/>
           <p:nvPr/>
         </p:nvSpPr>
@@ -20768,7 +21066,7 @@
       </p:sp>
       <p:sp>
         <p:nvSpPr>
-          <p:cNvPr id="12" name="Text 9"/>
+          <p:cNvPr id="13" name="Text 10"/>
           <p:cNvSpPr/>
           <p:nvPr/>
         </p:nvSpPr>
@@ -20807,7 +21105,7 @@
       </p:sp>
       <p:sp>
         <p:nvSpPr>
-          <p:cNvPr id="13" name="Text 10"/>
+          <p:cNvPr id="14" name="Text 11"/>
           <p:cNvSpPr/>
           <p:nvPr/>
         </p:nvSpPr>
@@ -20846,7 +21144,7 @@
       </p:sp>
       <p:sp>
         <p:nvSpPr>
-          <p:cNvPr id="14" name="Shape 11"/>
+          <p:cNvPr id="15" name="Shape 12"/>
           <p:cNvSpPr/>
           <p:nvPr/>
         </p:nvSpPr>
@@ -20873,7 +21171,7 @@
       </p:sp>
       <p:sp>
         <p:nvSpPr>
-          <p:cNvPr id="15" name="Shape 12"/>
+          <p:cNvPr id="16" name="Shape 13"/>
           <p:cNvSpPr/>
           <p:nvPr/>
         </p:nvSpPr>
@@ -20893,7 +21191,7 @@
       </p:sp>
       <p:sp>
         <p:nvSpPr>
-          <p:cNvPr id="16" name="Text 13"/>
+          <p:cNvPr id="17" name="Text 14"/>
           <p:cNvSpPr/>
           <p:nvPr/>
         </p:nvSpPr>
@@ -20932,7 +21230,7 @@
       </p:sp>
       <p:sp>
         <p:nvSpPr>
-          <p:cNvPr id="17" name="Text 14"/>
+          <p:cNvPr id="18" name="Text 15"/>
           <p:cNvSpPr/>
           <p:nvPr/>
         </p:nvSpPr>
@@ -20971,7 +21269,7 @@
       </p:sp>
       <p:sp>
         <p:nvSpPr>
-          <p:cNvPr id="18" name="Shape 15"/>
+          <p:cNvPr id="19" name="Shape 16"/>
           <p:cNvSpPr/>
           <p:nvPr/>
         </p:nvSpPr>
@@ -20998,7 +21296,7 @@
       </p:sp>
       <p:sp>
         <p:nvSpPr>
-          <p:cNvPr id="19" name="Shape 16"/>
+          <p:cNvPr id="20" name="Shape 17"/>
           <p:cNvSpPr/>
           <p:nvPr/>
         </p:nvSpPr>
@@ -21018,7 +21316,7 @@
       </p:sp>
       <p:sp>
         <p:nvSpPr>
-          <p:cNvPr id="20" name="Text 17"/>
+          <p:cNvPr id="21" name="Text 18"/>
           <p:cNvSpPr/>
           <p:nvPr/>
         </p:nvSpPr>
@@ -21057,7 +21355,7 @@
       </p:sp>
       <p:sp>
         <p:nvSpPr>
-          <p:cNvPr id="21" name="Text 18"/>
+          <p:cNvPr id="22" name="Text 19"/>
           <p:cNvSpPr/>
           <p:nvPr/>
         </p:nvSpPr>
@@ -21096,7 +21394,7 @@
       </p:sp>
       <p:sp>
         <p:nvSpPr>
-          <p:cNvPr id="22" name="Shape 19"/>
+          <p:cNvPr id="23" name="Shape 20"/>
           <p:cNvSpPr/>
           <p:nvPr/>
         </p:nvSpPr>
@@ -21123,7 +21421,7 @@
       </p:sp>
       <p:sp>
         <p:nvSpPr>
-          <p:cNvPr id="23" name="Shape 20"/>
+          <p:cNvPr id="24" name="Shape 21"/>
           <p:cNvSpPr/>
           <p:nvPr/>
         </p:nvSpPr>
@@ -21143,7 +21441,7 @@
       </p:sp>
       <p:sp>
         <p:nvSpPr>
-          <p:cNvPr id="24" name="Text 21"/>
+          <p:cNvPr id="25" name="Text 22"/>
           <p:cNvSpPr/>
           <p:nvPr/>
         </p:nvSpPr>
@@ -21182,7 +21480,7 @@
       </p:sp>
       <p:sp>
         <p:nvSpPr>
-          <p:cNvPr id="25" name="Text 22"/>
+          <p:cNvPr id="26" name="Text 23"/>
           <p:cNvSpPr/>
           <p:nvPr/>
         </p:nvSpPr>
@@ -21221,7 +21519,7 @@
       </p:sp>
       <p:sp>
         <p:nvSpPr>
-          <p:cNvPr id="26" name="Shape 23"/>
+          <p:cNvPr id="27" name="Shape 24"/>
           <p:cNvSpPr/>
           <p:nvPr/>
         </p:nvSpPr>
@@ -21248,7 +21546,7 @@
       </p:sp>
       <p:sp>
         <p:nvSpPr>
-          <p:cNvPr id="27" name="Shape 24"/>
+          <p:cNvPr id="28" name="Shape 25"/>
           <p:cNvSpPr/>
           <p:nvPr/>
         </p:nvSpPr>
@@ -21268,7 +21566,7 @@
       </p:sp>
       <p:sp>
         <p:nvSpPr>
-          <p:cNvPr id="28" name="Text 25"/>
+          <p:cNvPr id="29" name="Text 26"/>
           <p:cNvSpPr/>
           <p:nvPr/>
         </p:nvSpPr>
@@ -21307,7 +21605,7 @@
       </p:sp>
       <p:sp>
         <p:nvSpPr>
-          <p:cNvPr id="29" name="Text 26"/>
+          <p:cNvPr id="30" name="Text 27"/>
           <p:cNvSpPr/>
           <p:nvPr/>
         </p:nvSpPr>
@@ -21346,7 +21644,7 @@
       </p:sp>
       <p:sp>
         <p:nvSpPr>
-          <p:cNvPr id="30" name="Shape 27"/>
+          <p:cNvPr id="31" name="Shape 28"/>
           <p:cNvSpPr/>
           <p:nvPr/>
         </p:nvSpPr>
@@ -21373,7 +21671,7 @@
       </p:sp>
       <p:sp>
         <p:nvSpPr>
-          <p:cNvPr id="31" name="Shape 28"/>
+          <p:cNvPr id="32" name="Shape 29"/>
           <p:cNvSpPr/>
           <p:nvPr/>
         </p:nvSpPr>
@@ -21393,7 +21691,7 @@
       </p:sp>
       <p:sp>
         <p:nvSpPr>
-          <p:cNvPr id="32" name="Text 29"/>
+          <p:cNvPr id="33" name="Text 30"/>
           <p:cNvSpPr/>
           <p:nvPr/>
         </p:nvSpPr>
@@ -21432,7 +21730,7 @@
       </p:sp>
       <p:sp>
         <p:nvSpPr>
-          <p:cNvPr id="33" name="Text 30"/>
+          <p:cNvPr id="34" name="Text 31"/>
           <p:cNvSpPr/>
           <p:nvPr/>
         </p:nvSpPr>
@@ -21471,7 +21769,7 @@
       </p:sp>
       <p:sp>
         <p:nvSpPr>
-          <p:cNvPr id="34" name="Shape 31"/>
+          <p:cNvPr id="35" name="Shape 32"/>
           <p:cNvSpPr/>
           <p:nvPr/>
         </p:nvSpPr>
@@ -21498,7 +21796,7 @@
       </p:sp>
       <p:sp>
         <p:nvSpPr>
-          <p:cNvPr id="35" name="Shape 32"/>
+          <p:cNvPr id="36" name="Shape 33"/>
           <p:cNvSpPr/>
           <p:nvPr/>
         </p:nvSpPr>
@@ -21518,7 +21816,7 @@
       </p:sp>
       <p:sp>
         <p:nvSpPr>
-          <p:cNvPr id="36" name="Text 33"/>
+          <p:cNvPr id="37" name="Text 34"/>
           <p:cNvSpPr/>
           <p:nvPr/>
         </p:nvSpPr>
@@ -21557,7 +21855,7 @@
       </p:sp>
       <p:sp>
         <p:nvSpPr>
-          <p:cNvPr id="37" name="Text 34"/>
+          <p:cNvPr id="38" name="Text 35"/>
           <p:cNvSpPr/>
           <p:nvPr/>
         </p:nvSpPr>
@@ -21596,7 +21894,7 @@
       </p:sp>
       <p:sp>
         <p:nvSpPr>
-          <p:cNvPr id="38" name="Shape 35"/>
+          <p:cNvPr id="39" name="Shape 36"/>
           <p:cNvSpPr/>
           <p:nvPr/>
         </p:nvSpPr>
@@ -21618,7 +21916,7 @@
       </p:sp>
       <p:sp>
         <p:nvSpPr>
-          <p:cNvPr id="39" name="Shape 36"/>
+          <p:cNvPr id="40" name="Shape 37"/>
           <p:cNvSpPr/>
           <p:nvPr/>
         </p:nvSpPr>
@@ -21638,7 +21936,7 @@
       </p:sp>
       <p:sp>
         <p:nvSpPr>
-          <p:cNvPr id="40" name="Text 37"/>
+          <p:cNvPr id="41" name="Text 38"/>
           <p:cNvSpPr/>
           <p:nvPr/>
         </p:nvSpPr>
@@ -21677,7 +21975,7 @@
       </p:sp>
       <p:sp>
         <p:nvSpPr>
-          <p:cNvPr id="41" name="Text 38"/>
+          <p:cNvPr id="42" name="Text 39"/>
           <p:cNvSpPr/>
           <p:nvPr/>
         </p:nvSpPr>
@@ -21716,7 +22014,7 @@
       </p:sp>
       <p:sp>
         <p:nvSpPr>
-          <p:cNvPr id="42" name="Shape 39"/>
+          <p:cNvPr id="43" name="Shape 40"/>
           <p:cNvSpPr/>
           <p:nvPr/>
         </p:nvSpPr>
@@ -21743,7 +22041,7 @@
       </p:sp>
       <p:sp>
         <p:nvSpPr>
-          <p:cNvPr id="43" name="Shape 40"/>
+          <p:cNvPr id="44" name="Shape 41"/>
           <p:cNvSpPr/>
           <p:nvPr/>
         </p:nvSpPr>
@@ -21763,7 +22061,7 @@
       </p:sp>
       <p:sp>
         <p:nvSpPr>
-          <p:cNvPr id="44" name="Text 41"/>
+          <p:cNvPr id="45" name="Text 42"/>
           <p:cNvSpPr/>
           <p:nvPr/>
         </p:nvSpPr>
@@ -21802,7 +22100,7 @@
       </p:sp>
       <p:sp>
         <p:nvSpPr>
-          <p:cNvPr id="45" name="Text 42"/>
+          <p:cNvPr id="46" name="Text 43"/>
           <p:cNvSpPr/>
           <p:nvPr/>
         </p:nvSpPr>
@@ -21841,7 +22139,7 @@
       </p:sp>
       <p:sp>
         <p:nvSpPr>
-          <p:cNvPr id="46" name="Shape 43"/>
+          <p:cNvPr id="47" name="Shape 44"/>
           <p:cNvSpPr/>
           <p:nvPr/>
         </p:nvSpPr>
@@ -21868,7 +22166,7 @@
       </p:sp>
       <p:sp>
         <p:nvSpPr>
-          <p:cNvPr id="47" name="Shape 44"/>
+          <p:cNvPr id="48" name="Shape 45"/>
           <p:cNvSpPr/>
           <p:nvPr/>
         </p:nvSpPr>
@@ -21888,7 +22186,7 @@
       </p:sp>
       <p:sp>
         <p:nvSpPr>
-          <p:cNvPr id="48" name="Text 45"/>
+          <p:cNvPr id="49" name="Text 46"/>
           <p:cNvSpPr/>
           <p:nvPr/>
         </p:nvSpPr>
@@ -21927,7 +22225,7 @@
       </p:sp>
       <p:sp>
         <p:nvSpPr>
-          <p:cNvPr id="49" name="Text 46"/>
+          <p:cNvPr id="50" name="Text 47"/>
           <p:cNvSpPr/>
           <p:nvPr/>
         </p:nvSpPr>
@@ -21966,7 +22264,7 @@
       </p:sp>
       <p:sp>
         <p:nvSpPr>
-          <p:cNvPr id="50" name="Shape 47"/>
+          <p:cNvPr id="51" name="Shape 48"/>
           <p:cNvSpPr/>
           <p:nvPr/>
         </p:nvSpPr>
@@ -21993,7 +22291,7 @@
       </p:sp>
       <p:sp>
         <p:nvSpPr>
-          <p:cNvPr id="51" name="Text 48"/>
+          <p:cNvPr id="52" name="Text 49"/>
           <p:cNvSpPr/>
           <p:nvPr/>
         </p:nvSpPr>
@@ -22045,7 +22343,7 @@
         </p:nvSpPr>
         <p:spPr>
           <a:xfrm>
-            <a:off x="11368735" y="6437376"/>
+            <a:off x="11368735" y="6327648"/>
             <a:ext cx="365760" cy="274320"/>
           </a:xfrm>
           <a:prstGeom prst="rect">
@@ -22092,13 +22390,6 @@
 <file path=ppt/slides/slide4.xml><?xml version="1.0" encoding="utf-8"?>
 <p:sld xmlns:a="http://schemas.openxmlformats.org/drawingml/2006/main" xmlns:r="http://schemas.openxmlformats.org/officeDocument/2006/relationships" xmlns:p="http://schemas.openxmlformats.org/presentationml/2006/main">
   <p:cSld name="Slide 4">
-    <p:bg>
-      <p:bgPr>
-        <a:solidFill>
-          <a:srgbClr val="FFFFFF"/>
-        </a:solidFill>
-      </p:bgPr>
-    </p:bg>
     <p:spTree>
       <p:nvGrpSpPr>
         <p:cNvPr id="1" name=""/>
@@ -22115,7 +22406,29 @@
       </p:grpSpPr>
       <p:sp>
         <p:nvSpPr>
-          <p:cNvPr id="2" name="Text 0"/>
+          <p:cNvPr id="2" name="Shape 0"/>
+          <p:cNvSpPr/>
+          <p:nvPr/>
+        </p:nvSpPr>
+        <p:spPr>
+          <a:xfrm>
+            <a:off x="231343" y="194767"/>
+            <a:ext cx="11716207" cy="6473952"/>
+          </a:xfrm>
+          <a:prstGeom prst="roundRect">
+            <a:avLst>
+              <a:gd name="adj" fmla="val 3107"/>
+            </a:avLst>
+          </a:prstGeom>
+          <a:solidFill>
+            <a:srgbClr val="FFFFFF"/>
+          </a:solidFill>
+          <a:ln/>
+        </p:spPr>
+      </p:sp>
+      <p:sp>
+        <p:nvSpPr>
+          <p:cNvPr id="3" name="Text 1"/>
           <p:cNvSpPr/>
           <p:nvPr/>
         </p:nvSpPr>
@@ -22154,7 +22467,7 @@
       </p:sp>
       <p:sp>
         <p:nvSpPr>
-          <p:cNvPr id="3" name="Text 1"/>
+          <p:cNvPr id="4" name="Text 2"/>
           <p:cNvSpPr/>
           <p:nvPr/>
         </p:nvSpPr>
@@ -22196,7 +22509,7 @@
       </p:sp>
       <p:sp>
         <p:nvSpPr>
-          <p:cNvPr id="4" name="Shape 2"/>
+          <p:cNvPr id="5" name="Shape 3"/>
           <p:cNvSpPr/>
           <p:nvPr/>
         </p:nvSpPr>
@@ -22218,7 +22531,7 @@
       </p:sp>
       <p:sp>
         <p:nvSpPr>
-          <p:cNvPr id="5" name="Text 3"/>
+          <p:cNvPr id="6" name="Text 4"/>
           <p:cNvSpPr/>
           <p:nvPr/>
         </p:nvSpPr>
@@ -22257,7 +22570,7 @@
       </p:sp>
       <p:pic>
         <p:nvPicPr>
-          <p:cNvPr id="6" name="Image 0" descr="preencoded.png">    </p:cNvPr>
+          <p:cNvPr id="7" name="Image 0" descr="preencoded.png">    </p:cNvPr>
           <p:cNvPicPr>
             <a:picLocks noChangeAspect="1"/>
           </p:cNvPicPr>
@@ -22271,7 +22584,7 @@
         </p:blipFill>
         <p:spPr>
           <a:xfrm>
-            <a:off x="566928" y="6254496"/>
+            <a:off x="566928" y="6126480"/>
             <a:ext cx="1481328" cy="457200"/>
           </a:xfrm>
           <a:prstGeom prst="rect">
@@ -22281,7 +22594,7 @@
       </p:pic>
       <p:sp>
         <p:nvSpPr>
-          <p:cNvPr id="7" name="Shape 4"/>
+          <p:cNvPr id="8" name="Shape 5"/>
           <p:cNvSpPr/>
           <p:nvPr/>
         </p:nvSpPr>
@@ -22308,7 +22621,7 @@
       </p:sp>
       <p:sp>
         <p:nvSpPr>
-          <p:cNvPr id="8" name="Text 5"/>
+          <p:cNvPr id="9" name="Text 6"/>
           <p:cNvSpPr/>
           <p:nvPr/>
         </p:nvSpPr>
@@ -22347,7 +22660,7 @@
       </p:sp>
       <p:sp>
         <p:nvSpPr>
-          <p:cNvPr id="9" name="Text 6"/>
+          <p:cNvPr id="10" name="Text 7"/>
           <p:cNvSpPr/>
           <p:nvPr/>
         </p:nvSpPr>
@@ -22389,7 +22702,7 @@
       </p:sp>
       <p:sp>
         <p:nvSpPr>
-          <p:cNvPr id="10" name="Shape 7"/>
+          <p:cNvPr id="11" name="Shape 8"/>
           <p:cNvSpPr/>
           <p:nvPr/>
         </p:nvSpPr>
@@ -22416,7 +22729,7 @@
       </p:sp>
       <p:sp>
         <p:nvSpPr>
-          <p:cNvPr id="11" name="Text 8"/>
+          <p:cNvPr id="12" name="Text 9"/>
           <p:cNvSpPr/>
           <p:nvPr/>
         </p:nvSpPr>
@@ -22455,7 +22768,7 @@
       </p:sp>
       <p:sp>
         <p:nvSpPr>
-          <p:cNvPr id="12" name="Text 9"/>
+          <p:cNvPr id="13" name="Text 10"/>
           <p:cNvSpPr/>
           <p:nvPr/>
         </p:nvSpPr>
@@ -22497,7 +22810,7 @@
       </p:sp>
       <p:sp>
         <p:nvSpPr>
-          <p:cNvPr id="13" name="Shape 10"/>
+          <p:cNvPr id="14" name="Shape 11"/>
           <p:cNvSpPr/>
           <p:nvPr/>
         </p:nvSpPr>
@@ -22524,7 +22837,7 @@
       </p:sp>
       <p:sp>
         <p:nvSpPr>
-          <p:cNvPr id="14" name="Text 11"/>
+          <p:cNvPr id="15" name="Text 12"/>
           <p:cNvSpPr/>
           <p:nvPr/>
         </p:nvSpPr>
@@ -22563,7 +22876,7 @@
       </p:sp>
       <p:sp>
         <p:nvSpPr>
-          <p:cNvPr id="15" name="Text 12"/>
+          <p:cNvPr id="16" name="Text 13"/>
           <p:cNvSpPr/>
           <p:nvPr/>
         </p:nvSpPr>
@@ -22605,7 +22918,7 @@
       </p:sp>
       <p:sp>
         <p:nvSpPr>
-          <p:cNvPr id="16" name="Shape 13"/>
+          <p:cNvPr id="17" name="Shape 14"/>
           <p:cNvSpPr/>
           <p:nvPr/>
         </p:nvSpPr>
@@ -22632,7 +22945,7 @@
       </p:sp>
       <p:sp>
         <p:nvSpPr>
-          <p:cNvPr id="17" name="Text 14"/>
+          <p:cNvPr id="18" name="Text 15"/>
           <p:cNvSpPr/>
           <p:nvPr/>
         </p:nvSpPr>
@@ -22671,7 +22984,7 @@
       </p:sp>
       <p:sp>
         <p:nvSpPr>
-          <p:cNvPr id="18" name="Text 15"/>
+          <p:cNvPr id="19" name="Text 16"/>
           <p:cNvSpPr/>
           <p:nvPr/>
         </p:nvSpPr>
@@ -22713,7 +23026,7 @@
       </p:sp>
       <p:sp>
         <p:nvSpPr>
-          <p:cNvPr id="19" name="Shape 16"/>
+          <p:cNvPr id="20" name="Shape 17"/>
           <p:cNvSpPr/>
           <p:nvPr/>
         </p:nvSpPr>
@@ -22740,7 +23053,7 @@
       </p:sp>
       <p:sp>
         <p:nvSpPr>
-          <p:cNvPr id="20" name="Text 17"/>
+          <p:cNvPr id="21" name="Text 18"/>
           <p:cNvSpPr/>
           <p:nvPr/>
         </p:nvSpPr>
@@ -22779,7 +23092,7 @@
       </p:sp>
       <p:sp>
         <p:nvSpPr>
-          <p:cNvPr id="21" name="Text 18"/>
+          <p:cNvPr id="22" name="Text 19"/>
           <p:cNvSpPr/>
           <p:nvPr/>
         </p:nvSpPr>
@@ -22821,7 +23134,7 @@
       </p:sp>
       <p:sp>
         <p:nvSpPr>
-          <p:cNvPr id="22" name="Shape 19"/>
+          <p:cNvPr id="23" name="Shape 20"/>
           <p:cNvSpPr/>
           <p:nvPr/>
         </p:nvSpPr>
@@ -22848,7 +23161,7 @@
       </p:sp>
       <p:sp>
         <p:nvSpPr>
-          <p:cNvPr id="23" name="Text 20"/>
+          <p:cNvPr id="24" name="Text 21"/>
           <p:cNvSpPr/>
           <p:nvPr/>
         </p:nvSpPr>
@@ -22887,7 +23200,7 @@
       </p:sp>
       <p:sp>
         <p:nvSpPr>
-          <p:cNvPr id="24" name="Text 21"/>
+          <p:cNvPr id="25" name="Text 22"/>
           <p:cNvSpPr/>
           <p:nvPr/>
         </p:nvSpPr>
@@ -22929,7 +23242,7 @@
       </p:sp>
       <p:sp>
         <p:nvSpPr>
-          <p:cNvPr id="25" name="Shape 22"/>
+          <p:cNvPr id="26" name="Shape 23"/>
           <p:cNvSpPr/>
           <p:nvPr/>
         </p:nvSpPr>
@@ -22956,7 +23269,7 @@
       </p:sp>
       <p:sp>
         <p:nvSpPr>
-          <p:cNvPr id="26" name="Text 23"/>
+          <p:cNvPr id="27" name="Text 24"/>
           <p:cNvSpPr/>
           <p:nvPr/>
         </p:nvSpPr>
@@ -23008,7 +23321,7 @@
         </p:nvSpPr>
         <p:spPr>
           <a:xfrm>
-            <a:off x="11368735" y="6437376"/>
+            <a:off x="11368735" y="6327648"/>
             <a:ext cx="365760" cy="274320"/>
           </a:xfrm>
           <a:prstGeom prst="rect">
@@ -23055,13 +23368,6 @@
 <file path=ppt/slides/slide5.xml><?xml version="1.0" encoding="utf-8"?>
 <p:sld xmlns:a="http://schemas.openxmlformats.org/drawingml/2006/main" xmlns:r="http://schemas.openxmlformats.org/officeDocument/2006/relationships" xmlns:p="http://schemas.openxmlformats.org/presentationml/2006/main">
   <p:cSld name="Slide 5">
-    <p:bg>
-      <p:bgPr>
-        <a:solidFill>
-          <a:srgbClr val="FFFFFF"/>
-        </a:solidFill>
-      </p:bgPr>
-    </p:bg>
     <p:spTree>
       <p:nvGrpSpPr>
         <p:cNvPr id="1" name=""/>
@@ -23078,7 +23384,29 @@
       </p:grpSpPr>
       <p:sp>
         <p:nvSpPr>
-          <p:cNvPr id="2" name="Text 0"/>
+          <p:cNvPr id="2" name="Shape 0"/>
+          <p:cNvSpPr/>
+          <p:nvPr/>
+        </p:nvSpPr>
+        <p:spPr>
+          <a:xfrm>
+            <a:off x="231343" y="194767"/>
+            <a:ext cx="11716207" cy="6473952"/>
+          </a:xfrm>
+          <a:prstGeom prst="roundRect">
+            <a:avLst>
+              <a:gd name="adj" fmla="val 3107"/>
+            </a:avLst>
+          </a:prstGeom>
+          <a:solidFill>
+            <a:srgbClr val="FFFFFF"/>
+          </a:solidFill>
+          <a:ln/>
+        </p:spPr>
+      </p:sp>
+      <p:sp>
+        <p:nvSpPr>
+          <p:cNvPr id="3" name="Text 1"/>
           <p:cNvSpPr/>
           <p:nvPr/>
         </p:nvSpPr>
@@ -23117,7 +23445,7 @@
       </p:sp>
       <p:sp>
         <p:nvSpPr>
-          <p:cNvPr id="3" name="Text 1"/>
+          <p:cNvPr id="4" name="Text 2"/>
           <p:cNvSpPr/>
           <p:nvPr/>
         </p:nvSpPr>
@@ -23156,7 +23484,7 @@
       </p:sp>
       <p:sp>
         <p:nvSpPr>
-          <p:cNvPr id="4" name="Shape 2"/>
+          <p:cNvPr id="5" name="Shape 3"/>
           <p:cNvSpPr/>
           <p:nvPr/>
         </p:nvSpPr>
@@ -23178,7 +23506,7 @@
       </p:sp>
       <p:sp>
         <p:nvSpPr>
-          <p:cNvPr id="5" name="Text 3"/>
+          <p:cNvPr id="6" name="Text 4"/>
           <p:cNvSpPr/>
           <p:nvPr/>
         </p:nvSpPr>
@@ -23217,7 +23545,7 @@
       </p:sp>
       <p:pic>
         <p:nvPicPr>
-          <p:cNvPr id="6" name="Image 0" descr="preencoded.png">    </p:cNvPr>
+          <p:cNvPr id="7" name="Image 0" descr="preencoded.png">    </p:cNvPr>
           <p:cNvPicPr>
             <a:picLocks noChangeAspect="1"/>
           </p:cNvPicPr>
@@ -23231,7 +23559,7 @@
         </p:blipFill>
         <p:spPr>
           <a:xfrm>
-            <a:off x="566928" y="6254496"/>
+            <a:off x="566928" y="6126480"/>
             <a:ext cx="1481328" cy="457200"/>
           </a:xfrm>
           <a:prstGeom prst="rect">
@@ -23241,7 +23569,7 @@
       </p:pic>
       <p:sp>
         <p:nvSpPr>
-          <p:cNvPr id="7" name="Shape 4"/>
+          <p:cNvPr id="8" name="Shape 5"/>
           <p:cNvSpPr/>
           <p:nvPr/>
         </p:nvSpPr>
@@ -23263,7 +23591,7 @@
       </p:sp>
       <p:sp>
         <p:nvSpPr>
-          <p:cNvPr id="8" name="Text 5"/>
+          <p:cNvPr id="9" name="Text 6"/>
           <p:cNvSpPr/>
           <p:nvPr/>
         </p:nvSpPr>
@@ -23302,7 +23630,7 @@
       </p:sp>
       <p:sp>
         <p:nvSpPr>
-          <p:cNvPr id="9" name="Text 6"/>
+          <p:cNvPr id="10" name="Text 7"/>
           <p:cNvSpPr/>
           <p:nvPr/>
         </p:nvSpPr>
@@ -23341,7 +23669,7 @@
       </p:sp>
       <p:sp>
         <p:nvSpPr>
-          <p:cNvPr id="10" name="Shape 7"/>
+          <p:cNvPr id="11" name="Shape 8"/>
           <p:cNvSpPr/>
           <p:nvPr/>
         </p:nvSpPr>
@@ -23363,7 +23691,7 @@
       </p:sp>
       <p:sp>
         <p:nvSpPr>
-          <p:cNvPr id="11" name="Text 8"/>
+          <p:cNvPr id="12" name="Text 9"/>
           <p:cNvSpPr/>
           <p:nvPr/>
         </p:nvSpPr>
@@ -23402,7 +23730,7 @@
       </p:sp>
       <p:sp>
         <p:nvSpPr>
-          <p:cNvPr id="12" name="Text 9"/>
+          <p:cNvPr id="13" name="Text 10"/>
           <p:cNvSpPr/>
           <p:nvPr/>
         </p:nvSpPr>
@@ -23441,7 +23769,7 @@
       </p:sp>
       <p:sp>
         <p:nvSpPr>
-          <p:cNvPr id="13" name="Shape 10"/>
+          <p:cNvPr id="14" name="Shape 11"/>
           <p:cNvSpPr/>
           <p:nvPr/>
         </p:nvSpPr>
@@ -23468,7 +23796,7 @@
       </p:sp>
       <p:sp>
         <p:nvSpPr>
-          <p:cNvPr id="14" name="Shape 11"/>
+          <p:cNvPr id="15" name="Shape 12"/>
           <p:cNvSpPr/>
           <p:nvPr/>
         </p:nvSpPr>
@@ -23488,7 +23816,7 @@
       </p:sp>
       <p:sp>
         <p:nvSpPr>
-          <p:cNvPr id="15" name="Text 12"/>
+          <p:cNvPr id="16" name="Text 13"/>
           <p:cNvSpPr/>
           <p:nvPr/>
         </p:nvSpPr>
@@ -23527,7 +23855,7 @@
       </p:sp>
       <p:sp>
         <p:nvSpPr>
-          <p:cNvPr id="16" name="Text 13"/>
+          <p:cNvPr id="17" name="Text 14"/>
           <p:cNvSpPr/>
           <p:nvPr/>
         </p:nvSpPr>
@@ -23566,7 +23894,7 @@
       </p:sp>
       <p:sp>
         <p:nvSpPr>
-          <p:cNvPr id="17" name="Text 14"/>
+          <p:cNvPr id="18" name="Text 15"/>
           <p:cNvSpPr/>
           <p:nvPr/>
         </p:nvSpPr>
@@ -23608,7 +23936,7 @@
       </p:sp>
       <p:sp>
         <p:nvSpPr>
-          <p:cNvPr id="18" name="Shape 15"/>
+          <p:cNvPr id="19" name="Shape 16"/>
           <p:cNvSpPr/>
           <p:nvPr/>
         </p:nvSpPr>
@@ -23635,7 +23963,7 @@
       </p:sp>
       <p:sp>
         <p:nvSpPr>
-          <p:cNvPr id="19" name="Shape 16"/>
+          <p:cNvPr id="20" name="Shape 17"/>
           <p:cNvSpPr/>
           <p:nvPr/>
         </p:nvSpPr>
@@ -23655,7 +23983,7 @@
       </p:sp>
       <p:sp>
         <p:nvSpPr>
-          <p:cNvPr id="20" name="Text 17"/>
+          <p:cNvPr id="21" name="Text 18"/>
           <p:cNvSpPr/>
           <p:nvPr/>
         </p:nvSpPr>
@@ -23694,7 +24022,7 @@
       </p:sp>
       <p:sp>
         <p:nvSpPr>
-          <p:cNvPr id="21" name="Text 18"/>
+          <p:cNvPr id="22" name="Text 19"/>
           <p:cNvSpPr/>
           <p:nvPr/>
         </p:nvSpPr>
@@ -23733,7 +24061,7 @@
       </p:sp>
       <p:sp>
         <p:nvSpPr>
-          <p:cNvPr id="22" name="Text 19"/>
+          <p:cNvPr id="23" name="Text 20"/>
           <p:cNvSpPr/>
           <p:nvPr/>
         </p:nvSpPr>
@@ -23775,7 +24103,7 @@
       </p:sp>
       <p:sp>
         <p:nvSpPr>
-          <p:cNvPr id="23" name="Shape 20"/>
+          <p:cNvPr id="24" name="Shape 21"/>
           <p:cNvSpPr/>
           <p:nvPr/>
         </p:nvSpPr>
@@ -23802,7 +24130,7 @@
       </p:sp>
       <p:sp>
         <p:nvSpPr>
-          <p:cNvPr id="24" name="Shape 21"/>
+          <p:cNvPr id="25" name="Shape 22"/>
           <p:cNvSpPr/>
           <p:nvPr/>
         </p:nvSpPr>
@@ -23822,7 +24150,7 @@
       </p:sp>
       <p:sp>
         <p:nvSpPr>
-          <p:cNvPr id="25" name="Text 22"/>
+          <p:cNvPr id="26" name="Text 23"/>
           <p:cNvSpPr/>
           <p:nvPr/>
         </p:nvSpPr>
@@ -23861,7 +24189,7 @@
       </p:sp>
       <p:sp>
         <p:nvSpPr>
-          <p:cNvPr id="26" name="Text 23"/>
+          <p:cNvPr id="27" name="Text 24"/>
           <p:cNvSpPr/>
           <p:nvPr/>
         </p:nvSpPr>
@@ -23900,7 +24228,7 @@
       </p:sp>
       <p:sp>
         <p:nvSpPr>
-          <p:cNvPr id="27" name="Text 24"/>
+          <p:cNvPr id="28" name="Text 25"/>
           <p:cNvSpPr/>
           <p:nvPr/>
         </p:nvSpPr>
@@ -23942,7 +24270,7 @@
       </p:sp>
       <p:sp>
         <p:nvSpPr>
-          <p:cNvPr id="28" name="Shape 25"/>
+          <p:cNvPr id="29" name="Shape 26"/>
           <p:cNvSpPr/>
           <p:nvPr/>
         </p:nvSpPr>
@@ -23969,7 +24297,7 @@
       </p:sp>
       <p:sp>
         <p:nvSpPr>
-          <p:cNvPr id="29" name="Shape 26"/>
+          <p:cNvPr id="30" name="Shape 27"/>
           <p:cNvSpPr/>
           <p:nvPr/>
         </p:nvSpPr>
@@ -23989,7 +24317,7 @@
       </p:sp>
       <p:sp>
         <p:nvSpPr>
-          <p:cNvPr id="30" name="Text 27"/>
+          <p:cNvPr id="31" name="Text 28"/>
           <p:cNvSpPr/>
           <p:nvPr/>
         </p:nvSpPr>
@@ -24028,7 +24356,7 @@
       </p:sp>
       <p:sp>
         <p:nvSpPr>
-          <p:cNvPr id="31" name="Text 28"/>
+          <p:cNvPr id="32" name="Text 29"/>
           <p:cNvSpPr/>
           <p:nvPr/>
         </p:nvSpPr>
@@ -24067,7 +24395,7 @@
       </p:sp>
       <p:sp>
         <p:nvSpPr>
-          <p:cNvPr id="32" name="Text 29"/>
+          <p:cNvPr id="33" name="Text 30"/>
           <p:cNvSpPr/>
           <p:nvPr/>
         </p:nvSpPr>
@@ -24109,7 +24437,7 @@
       </p:sp>
       <p:sp>
         <p:nvSpPr>
-          <p:cNvPr id="33" name="Shape 30"/>
+          <p:cNvPr id="34" name="Shape 31"/>
           <p:cNvSpPr/>
           <p:nvPr/>
         </p:nvSpPr>
@@ -24131,7 +24459,7 @@
       </p:sp>
       <p:sp>
         <p:nvSpPr>
-          <p:cNvPr id="34" name="Text 31"/>
+          <p:cNvPr id="35" name="Text 32"/>
           <p:cNvSpPr/>
           <p:nvPr/>
         </p:nvSpPr>
@@ -24183,7 +24511,7 @@
         </p:nvSpPr>
         <p:spPr>
           <a:xfrm>
-            <a:off x="11368735" y="6437376"/>
+            <a:off x="11368735" y="6327648"/>
             <a:ext cx="365760" cy="274320"/>
           </a:xfrm>
           <a:prstGeom prst="rect">
@@ -24230,13 +24558,6 @@
 <file path=ppt/slides/slide6.xml><?xml version="1.0" encoding="utf-8"?>
 <p:sld xmlns:a="http://schemas.openxmlformats.org/drawingml/2006/main" xmlns:r="http://schemas.openxmlformats.org/officeDocument/2006/relationships" xmlns:p="http://schemas.openxmlformats.org/presentationml/2006/main">
   <p:cSld name="Slide 6">
-    <p:bg>
-      <p:bgPr>
-        <a:solidFill>
-          <a:srgbClr val="FFFFFF"/>
-        </a:solidFill>
-      </p:bgPr>
-    </p:bg>
     <p:spTree>
       <p:nvGrpSpPr>
         <p:cNvPr id="1" name=""/>
@@ -24253,7 +24574,29 @@
       </p:grpSpPr>
       <p:sp>
         <p:nvSpPr>
-          <p:cNvPr id="2" name="Text 0"/>
+          <p:cNvPr id="2" name="Shape 0"/>
+          <p:cNvSpPr/>
+          <p:nvPr/>
+        </p:nvSpPr>
+        <p:spPr>
+          <a:xfrm>
+            <a:off x="231343" y="194767"/>
+            <a:ext cx="11716207" cy="6473952"/>
+          </a:xfrm>
+          <a:prstGeom prst="roundRect">
+            <a:avLst>
+              <a:gd name="adj" fmla="val 3107"/>
+            </a:avLst>
+          </a:prstGeom>
+          <a:solidFill>
+            <a:srgbClr val="FFFFFF"/>
+          </a:solidFill>
+          <a:ln/>
+        </p:spPr>
+      </p:sp>
+      <p:sp>
+        <p:nvSpPr>
+          <p:cNvPr id="3" name="Text 1"/>
           <p:cNvSpPr/>
           <p:nvPr/>
         </p:nvSpPr>
@@ -24292,7 +24635,7 @@
       </p:sp>
       <p:sp>
         <p:nvSpPr>
-          <p:cNvPr id="3" name="Text 1"/>
+          <p:cNvPr id="4" name="Text 2"/>
           <p:cNvSpPr/>
           <p:nvPr/>
         </p:nvSpPr>
@@ -24331,7 +24674,7 @@
       </p:sp>
       <p:sp>
         <p:nvSpPr>
-          <p:cNvPr id="4" name="Shape 2"/>
+          <p:cNvPr id="5" name="Shape 3"/>
           <p:cNvSpPr/>
           <p:nvPr/>
         </p:nvSpPr>
@@ -24353,7 +24696,7 @@
       </p:sp>
       <p:sp>
         <p:nvSpPr>
-          <p:cNvPr id="5" name="Text 3"/>
+          <p:cNvPr id="6" name="Text 4"/>
           <p:cNvSpPr/>
           <p:nvPr/>
         </p:nvSpPr>
@@ -24392,7 +24735,7 @@
       </p:sp>
       <p:pic>
         <p:nvPicPr>
-          <p:cNvPr id="6" name="Image 0" descr="preencoded.png">    </p:cNvPr>
+          <p:cNvPr id="7" name="Image 0" descr="preencoded.png">    </p:cNvPr>
           <p:cNvPicPr>
             <a:picLocks noChangeAspect="1"/>
           </p:cNvPicPr>
@@ -24406,7 +24749,7 @@
         </p:blipFill>
         <p:spPr>
           <a:xfrm>
-            <a:off x="566928" y="6254496"/>
+            <a:off x="566928" y="6126480"/>
             <a:ext cx="1481328" cy="457200"/>
           </a:xfrm>
           <a:prstGeom prst="rect">
@@ -24416,7 +24759,7 @@
       </p:pic>
       <p:sp>
         <p:nvSpPr>
-          <p:cNvPr id="7" name="Shape 4"/>
+          <p:cNvPr id="8" name="Shape 5"/>
           <p:cNvSpPr/>
           <p:nvPr/>
         </p:nvSpPr>
@@ -24438,7 +24781,7 @@
       </p:sp>
       <p:sp>
         <p:nvSpPr>
-          <p:cNvPr id="8" name="Shape 5"/>
+          <p:cNvPr id="9" name="Shape 6"/>
           <p:cNvSpPr/>
           <p:nvPr/>
         </p:nvSpPr>
@@ -24458,7 +24801,7 @@
       </p:sp>
       <p:sp>
         <p:nvSpPr>
-          <p:cNvPr id="9" name="Text 6"/>
+          <p:cNvPr id="10" name="Text 7"/>
           <p:cNvSpPr/>
           <p:nvPr/>
         </p:nvSpPr>
@@ -24497,7 +24840,7 @@
       </p:sp>
       <p:sp>
         <p:nvSpPr>
-          <p:cNvPr id="10" name="Text 7"/>
+          <p:cNvPr id="11" name="Text 8"/>
           <p:cNvSpPr/>
           <p:nvPr/>
         </p:nvSpPr>
@@ -24536,7 +24879,7 @@
       </p:sp>
       <p:sp>
         <p:nvSpPr>
-          <p:cNvPr id="11" name="Text 8"/>
+          <p:cNvPr id="12" name="Text 9"/>
           <p:cNvSpPr/>
           <p:nvPr/>
         </p:nvSpPr>
@@ -24578,7 +24921,7 @@
       </p:sp>
       <p:sp>
         <p:nvSpPr>
-          <p:cNvPr id="12" name="Shape 9"/>
+          <p:cNvPr id="13" name="Shape 10"/>
           <p:cNvSpPr/>
           <p:nvPr/>
         </p:nvSpPr>
@@ -24600,7 +24943,7 @@
       </p:sp>
       <p:sp>
         <p:nvSpPr>
-          <p:cNvPr id="13" name="Shape 10"/>
+          <p:cNvPr id="14" name="Shape 11"/>
           <p:cNvSpPr/>
           <p:nvPr/>
         </p:nvSpPr>
@@ -24620,7 +24963,7 @@
       </p:sp>
       <p:sp>
         <p:nvSpPr>
-          <p:cNvPr id="14" name="Text 11"/>
+          <p:cNvPr id="15" name="Text 12"/>
           <p:cNvSpPr/>
           <p:nvPr/>
         </p:nvSpPr>
@@ -24659,7 +25002,7 @@
       </p:sp>
       <p:sp>
         <p:nvSpPr>
-          <p:cNvPr id="15" name="Text 12"/>
+          <p:cNvPr id="16" name="Text 13"/>
           <p:cNvSpPr/>
           <p:nvPr/>
         </p:nvSpPr>
@@ -24698,7 +25041,7 @@
       </p:sp>
       <p:sp>
         <p:nvSpPr>
-          <p:cNvPr id="16" name="Text 13"/>
+          <p:cNvPr id="17" name="Text 14"/>
           <p:cNvSpPr/>
           <p:nvPr/>
         </p:nvSpPr>
@@ -24740,7 +25083,7 @@
       </p:sp>
       <p:sp>
         <p:nvSpPr>
-          <p:cNvPr id="17" name="Shape 14"/>
+          <p:cNvPr id="18" name="Shape 15"/>
           <p:cNvSpPr/>
           <p:nvPr/>
         </p:nvSpPr>
@@ -24762,7 +25105,7 @@
       </p:sp>
       <p:sp>
         <p:nvSpPr>
-          <p:cNvPr id="18" name="Shape 15"/>
+          <p:cNvPr id="19" name="Shape 16"/>
           <p:cNvSpPr/>
           <p:nvPr/>
         </p:nvSpPr>
@@ -24782,7 +25125,7 @@
       </p:sp>
       <p:sp>
         <p:nvSpPr>
-          <p:cNvPr id="19" name="Text 16"/>
+          <p:cNvPr id="20" name="Text 17"/>
           <p:cNvSpPr/>
           <p:nvPr/>
         </p:nvSpPr>
@@ -24821,7 +25164,7 @@
       </p:sp>
       <p:sp>
         <p:nvSpPr>
-          <p:cNvPr id="20" name="Text 17"/>
+          <p:cNvPr id="21" name="Text 18"/>
           <p:cNvSpPr/>
           <p:nvPr/>
         </p:nvSpPr>
@@ -24860,7 +25203,7 @@
       </p:sp>
       <p:sp>
         <p:nvSpPr>
-          <p:cNvPr id="21" name="Text 18"/>
+          <p:cNvPr id="22" name="Text 19"/>
           <p:cNvSpPr/>
           <p:nvPr/>
         </p:nvSpPr>
@@ -24902,7 +25245,7 @@
       </p:sp>
       <p:sp>
         <p:nvSpPr>
-          <p:cNvPr id="22" name="Shape 19"/>
+          <p:cNvPr id="23" name="Shape 20"/>
           <p:cNvSpPr/>
           <p:nvPr/>
         </p:nvSpPr>
@@ -24924,7 +25267,7 @@
       </p:sp>
       <p:sp>
         <p:nvSpPr>
-          <p:cNvPr id="23" name="Shape 20"/>
+          <p:cNvPr id="24" name="Shape 21"/>
           <p:cNvSpPr/>
           <p:nvPr/>
         </p:nvSpPr>
@@ -24944,7 +25287,7 @@
       </p:sp>
       <p:sp>
         <p:nvSpPr>
-          <p:cNvPr id="24" name="Text 21"/>
+          <p:cNvPr id="25" name="Text 22"/>
           <p:cNvSpPr/>
           <p:nvPr/>
         </p:nvSpPr>
@@ -24983,7 +25326,7 @@
       </p:sp>
       <p:sp>
         <p:nvSpPr>
-          <p:cNvPr id="25" name="Text 22"/>
+          <p:cNvPr id="26" name="Text 23"/>
           <p:cNvSpPr/>
           <p:nvPr/>
         </p:nvSpPr>
@@ -25022,7 +25365,7 @@
       </p:sp>
       <p:sp>
         <p:nvSpPr>
-          <p:cNvPr id="26" name="Text 23"/>
+          <p:cNvPr id="27" name="Text 24"/>
           <p:cNvSpPr/>
           <p:nvPr/>
         </p:nvSpPr>
@@ -25064,7 +25407,7 @@
       </p:sp>
       <p:sp>
         <p:nvSpPr>
-          <p:cNvPr id="27" name="Shape 24"/>
+          <p:cNvPr id="28" name="Shape 25"/>
           <p:cNvSpPr/>
           <p:nvPr/>
         </p:nvSpPr>
@@ -25091,7 +25434,7 @@
       </p:sp>
       <p:sp>
         <p:nvSpPr>
-          <p:cNvPr id="28" name="Text 25"/>
+          <p:cNvPr id="29" name="Text 26"/>
           <p:cNvSpPr/>
           <p:nvPr/>
         </p:nvSpPr>
@@ -25130,7 +25473,7 @@
       </p:sp>
       <p:sp>
         <p:nvSpPr>
-          <p:cNvPr id="29" name="Text 26"/>
+          <p:cNvPr id="30" name="Text 27"/>
           <p:cNvSpPr/>
           <p:nvPr/>
         </p:nvSpPr>
@@ -25172,7 +25515,7 @@
       </p:sp>
       <p:sp>
         <p:nvSpPr>
-          <p:cNvPr id="30" name="Shape 27"/>
+          <p:cNvPr id="31" name="Shape 28"/>
           <p:cNvSpPr/>
           <p:nvPr/>
         </p:nvSpPr>
@@ -25194,7 +25537,7 @@
       </p:sp>
       <p:sp>
         <p:nvSpPr>
-          <p:cNvPr id="31" name="Text 28"/>
+          <p:cNvPr id="32" name="Text 29"/>
           <p:cNvSpPr/>
           <p:nvPr/>
         </p:nvSpPr>
@@ -25233,7 +25576,7 @@
       </p:sp>
       <p:sp>
         <p:nvSpPr>
-          <p:cNvPr id="32" name="Shape 29"/>
+          <p:cNvPr id="33" name="Shape 30"/>
           <p:cNvSpPr/>
           <p:nvPr/>
         </p:nvSpPr>
@@ -25256,7 +25599,7 @@
       </p:sp>
       <p:sp>
         <p:nvSpPr>
-          <p:cNvPr id="33" name="Shape 30"/>
+          <p:cNvPr id="34" name="Shape 31"/>
           <p:cNvSpPr/>
           <p:nvPr/>
         </p:nvSpPr>
@@ -25276,7 +25619,7 @@
       </p:sp>
       <p:sp>
         <p:nvSpPr>
-          <p:cNvPr id="34" name="Shape 31"/>
+          <p:cNvPr id="35" name="Shape 32"/>
           <p:cNvSpPr/>
           <p:nvPr/>
         </p:nvSpPr>
@@ -25303,7 +25646,7 @@
       </p:sp>
       <p:sp>
         <p:nvSpPr>
-          <p:cNvPr id="35" name="Text 32"/>
+          <p:cNvPr id="36" name="Text 33"/>
           <p:cNvSpPr/>
           <p:nvPr/>
         </p:nvSpPr>
@@ -25342,7 +25685,7 @@
       </p:sp>
       <p:sp>
         <p:nvSpPr>
-          <p:cNvPr id="36" name="Shape 33"/>
+          <p:cNvPr id="37" name="Shape 34"/>
           <p:cNvSpPr/>
           <p:nvPr/>
         </p:nvSpPr>
@@ -25365,7 +25708,7 @@
       </p:sp>
       <p:sp>
         <p:nvSpPr>
-          <p:cNvPr id="37" name="Shape 34"/>
+          <p:cNvPr id="38" name="Shape 35"/>
           <p:cNvSpPr/>
           <p:nvPr/>
         </p:nvSpPr>
@@ -25385,7 +25728,7 @@
       </p:sp>
       <p:sp>
         <p:nvSpPr>
-          <p:cNvPr id="38" name="Shape 35"/>
+          <p:cNvPr id="39" name="Shape 36"/>
           <p:cNvSpPr/>
           <p:nvPr/>
         </p:nvSpPr>
@@ -25412,7 +25755,7 @@
       </p:sp>
       <p:sp>
         <p:nvSpPr>
-          <p:cNvPr id="39" name="Text 36"/>
+          <p:cNvPr id="40" name="Text 37"/>
           <p:cNvSpPr/>
           <p:nvPr/>
         </p:nvSpPr>
@@ -25451,7 +25794,7 @@
       </p:sp>
       <p:sp>
         <p:nvSpPr>
-          <p:cNvPr id="40" name="Shape 37"/>
+          <p:cNvPr id="41" name="Shape 38"/>
           <p:cNvSpPr/>
           <p:nvPr/>
         </p:nvSpPr>
@@ -25474,7 +25817,7 @@
       </p:sp>
       <p:sp>
         <p:nvSpPr>
-          <p:cNvPr id="41" name="Shape 38"/>
+          <p:cNvPr id="42" name="Shape 39"/>
           <p:cNvSpPr/>
           <p:nvPr/>
         </p:nvSpPr>
@@ -25494,7 +25837,7 @@
       </p:sp>
       <p:sp>
         <p:nvSpPr>
-          <p:cNvPr id="42" name="Shape 39"/>
+          <p:cNvPr id="43" name="Shape 40"/>
           <p:cNvSpPr/>
           <p:nvPr/>
         </p:nvSpPr>
@@ -25521,7 +25864,7 @@
       </p:sp>
       <p:sp>
         <p:nvSpPr>
-          <p:cNvPr id="43" name="Text 40"/>
+          <p:cNvPr id="44" name="Text 41"/>
           <p:cNvSpPr/>
           <p:nvPr/>
         </p:nvSpPr>
@@ -25560,7 +25903,7 @@
       </p:sp>
       <p:sp>
         <p:nvSpPr>
-          <p:cNvPr id="44" name="Shape 41"/>
+          <p:cNvPr id="45" name="Shape 42"/>
           <p:cNvSpPr/>
           <p:nvPr/>
         </p:nvSpPr>
@@ -25583,7 +25926,7 @@
       </p:sp>
       <p:sp>
         <p:nvSpPr>
-          <p:cNvPr id="45" name="Shape 42"/>
+          <p:cNvPr id="46" name="Shape 43"/>
           <p:cNvSpPr/>
           <p:nvPr/>
         </p:nvSpPr>
@@ -25603,7 +25946,7 @@
       </p:sp>
       <p:sp>
         <p:nvSpPr>
-          <p:cNvPr id="46" name="Shape 43"/>
+          <p:cNvPr id="47" name="Shape 44"/>
           <p:cNvSpPr/>
           <p:nvPr/>
         </p:nvSpPr>
@@ -25630,7 +25973,7 @@
       </p:sp>
       <p:sp>
         <p:nvSpPr>
-          <p:cNvPr id="47" name="Text 44"/>
+          <p:cNvPr id="48" name="Text 45"/>
           <p:cNvSpPr/>
           <p:nvPr/>
         </p:nvSpPr>
@@ -25669,7 +26012,7 @@
       </p:sp>
       <p:sp>
         <p:nvSpPr>
-          <p:cNvPr id="48" name="Shape 45"/>
+          <p:cNvPr id="49" name="Shape 46"/>
           <p:cNvSpPr/>
           <p:nvPr/>
         </p:nvSpPr>
@@ -25692,7 +26035,7 @@
       </p:sp>
       <p:sp>
         <p:nvSpPr>
-          <p:cNvPr id="49" name="Shape 46"/>
+          <p:cNvPr id="50" name="Shape 47"/>
           <p:cNvSpPr/>
           <p:nvPr/>
         </p:nvSpPr>
@@ -25712,7 +26055,7 @@
       </p:sp>
       <p:sp>
         <p:nvSpPr>
-          <p:cNvPr id="50" name="Shape 47"/>
+          <p:cNvPr id="51" name="Shape 48"/>
           <p:cNvSpPr/>
           <p:nvPr/>
         </p:nvSpPr>
@@ -25739,7 +26082,7 @@
       </p:sp>
       <p:sp>
         <p:nvSpPr>
-          <p:cNvPr id="51" name="Text 48"/>
+          <p:cNvPr id="52" name="Text 49"/>
           <p:cNvSpPr/>
           <p:nvPr/>
         </p:nvSpPr>
@@ -25778,7 +26121,7 @@
       </p:sp>
       <p:sp>
         <p:nvSpPr>
-          <p:cNvPr id="52" name="Text 49"/>
+          <p:cNvPr id="53" name="Text 50"/>
           <p:cNvSpPr/>
           <p:nvPr/>
         </p:nvSpPr>
@@ -25827,7 +26170,7 @@
         </p:nvSpPr>
         <p:spPr>
           <a:xfrm>
-            <a:off x="11368735" y="6437376"/>
+            <a:off x="11368735" y="6327648"/>
             <a:ext cx="365760" cy="274320"/>
           </a:xfrm>
           <a:prstGeom prst="rect">
@@ -25874,13 +26217,6 @@
 <file path=ppt/slides/slide7.xml><?xml version="1.0" encoding="utf-8"?>
 <p:sld xmlns:a="http://schemas.openxmlformats.org/drawingml/2006/main" xmlns:r="http://schemas.openxmlformats.org/officeDocument/2006/relationships" xmlns:p="http://schemas.openxmlformats.org/presentationml/2006/main">
   <p:cSld name="Slide 7">
-    <p:bg>
-      <p:bgPr>
-        <a:solidFill>
-          <a:srgbClr val="FFFFFF"/>
-        </a:solidFill>
-      </p:bgPr>
-    </p:bg>
     <p:spTree>
       <p:nvGrpSpPr>
         <p:cNvPr id="1" name=""/>
@@ -25897,7 +26233,29 @@
       </p:grpSpPr>
       <p:sp>
         <p:nvSpPr>
-          <p:cNvPr id="2" name="Text 0"/>
+          <p:cNvPr id="2" name="Shape 0"/>
+          <p:cNvSpPr/>
+          <p:nvPr/>
+        </p:nvSpPr>
+        <p:spPr>
+          <a:xfrm>
+            <a:off x="231343" y="194767"/>
+            <a:ext cx="11716207" cy="6473952"/>
+          </a:xfrm>
+          <a:prstGeom prst="roundRect">
+            <a:avLst>
+              <a:gd name="adj" fmla="val 3107"/>
+            </a:avLst>
+          </a:prstGeom>
+          <a:solidFill>
+            <a:srgbClr val="FFFFFF"/>
+          </a:solidFill>
+          <a:ln/>
+        </p:spPr>
+      </p:sp>
+      <p:sp>
+        <p:nvSpPr>
+          <p:cNvPr id="3" name="Text 1"/>
           <p:cNvSpPr/>
           <p:nvPr/>
         </p:nvSpPr>
@@ -25936,7 +26294,7 @@
       </p:sp>
       <p:sp>
         <p:nvSpPr>
-          <p:cNvPr id="3" name="Text 1"/>
+          <p:cNvPr id="4" name="Text 2"/>
           <p:cNvSpPr/>
           <p:nvPr/>
         </p:nvSpPr>
@@ -25975,7 +26333,7 @@
       </p:sp>
       <p:sp>
         <p:nvSpPr>
-          <p:cNvPr id="4" name="Shape 2"/>
+          <p:cNvPr id="5" name="Shape 3"/>
           <p:cNvSpPr/>
           <p:nvPr/>
         </p:nvSpPr>
@@ -25997,7 +26355,7 @@
       </p:sp>
       <p:sp>
         <p:nvSpPr>
-          <p:cNvPr id="5" name="Text 3"/>
+          <p:cNvPr id="6" name="Text 4"/>
           <p:cNvSpPr/>
           <p:nvPr/>
         </p:nvSpPr>
@@ -26036,7 +26394,7 @@
       </p:sp>
       <p:pic>
         <p:nvPicPr>
-          <p:cNvPr id="6" name="Image 0" descr="preencoded.png">    </p:cNvPr>
+          <p:cNvPr id="7" name="Image 0" descr="preencoded.png">    </p:cNvPr>
           <p:cNvPicPr>
             <a:picLocks noChangeAspect="1"/>
           </p:cNvPicPr>
@@ -26050,7 +26408,7 @@
         </p:blipFill>
         <p:spPr>
           <a:xfrm>
-            <a:off x="566928" y="6254496"/>
+            <a:off x="566928" y="6126480"/>
             <a:ext cx="1481328" cy="457200"/>
           </a:xfrm>
           <a:prstGeom prst="rect">
@@ -26060,7 +26418,7 @@
       </p:pic>
       <p:sp>
         <p:nvSpPr>
-          <p:cNvPr id="7" name="Shape 4"/>
+          <p:cNvPr id="8" name="Shape 5"/>
           <p:cNvSpPr/>
           <p:nvPr/>
         </p:nvSpPr>
@@ -26087,7 +26445,7 @@
       </p:sp>
       <p:sp>
         <p:nvSpPr>
-          <p:cNvPr id="8" name="Text 5"/>
+          <p:cNvPr id="9" name="Text 6"/>
           <p:cNvSpPr/>
           <p:nvPr/>
         </p:nvSpPr>
@@ -26303,7 +26661,7 @@
       </p:sp>
       <p:sp>
         <p:nvSpPr>
-          <p:cNvPr id="9" name="Shape 6"/>
+          <p:cNvPr id="10" name="Shape 7"/>
           <p:cNvSpPr/>
           <p:nvPr/>
         </p:nvSpPr>
@@ -26325,7 +26683,7 @@
       </p:sp>
       <p:sp>
         <p:nvSpPr>
-          <p:cNvPr id="10" name="Text 7"/>
+          <p:cNvPr id="11" name="Text 8"/>
           <p:cNvSpPr/>
           <p:nvPr/>
         </p:nvSpPr>
@@ -26367,7 +26725,7 @@
       </p:sp>
       <p:sp>
         <p:nvSpPr>
-          <p:cNvPr id="11" name="Shape 8"/>
+          <p:cNvPr id="12" name="Shape 9"/>
           <p:cNvSpPr/>
           <p:nvPr/>
         </p:nvSpPr>
@@ -26389,7 +26747,7 @@
       </p:sp>
       <p:sp>
         <p:nvSpPr>
-          <p:cNvPr id="12" name="Text 9"/>
+          <p:cNvPr id="13" name="Text 10"/>
           <p:cNvSpPr/>
           <p:nvPr/>
         </p:nvSpPr>
@@ -26428,7 +26786,7 @@
       </p:sp>
       <p:sp>
         <p:nvSpPr>
-          <p:cNvPr id="13" name="Text 10"/>
+          <p:cNvPr id="14" name="Text 11"/>
           <p:cNvSpPr/>
           <p:nvPr/>
         </p:nvSpPr>
@@ -26467,7 +26825,7 @@
       </p:sp>
       <p:sp>
         <p:nvSpPr>
-          <p:cNvPr id="14" name="Shape 11"/>
+          <p:cNvPr id="15" name="Shape 12"/>
           <p:cNvSpPr/>
           <p:nvPr/>
         </p:nvSpPr>
@@ -26489,7 +26847,7 @@
       </p:sp>
       <p:sp>
         <p:nvSpPr>
-          <p:cNvPr id="15" name="Text 12"/>
+          <p:cNvPr id="16" name="Text 13"/>
           <p:cNvSpPr/>
           <p:nvPr/>
         </p:nvSpPr>
@@ -26528,7 +26886,7 @@
       </p:sp>
       <p:sp>
         <p:nvSpPr>
-          <p:cNvPr id="16" name="Text 13"/>
+          <p:cNvPr id="17" name="Text 14"/>
           <p:cNvSpPr/>
           <p:nvPr/>
         </p:nvSpPr>
@@ -26567,7 +26925,7 @@
       </p:sp>
       <p:sp>
         <p:nvSpPr>
-          <p:cNvPr id="17" name="Shape 14"/>
+          <p:cNvPr id="18" name="Shape 15"/>
           <p:cNvSpPr/>
           <p:nvPr/>
         </p:nvSpPr>
@@ -26589,7 +26947,7 @@
       </p:sp>
       <p:sp>
         <p:nvSpPr>
-          <p:cNvPr id="18" name="Text 15"/>
+          <p:cNvPr id="19" name="Text 16"/>
           <p:cNvSpPr/>
           <p:nvPr/>
         </p:nvSpPr>
@@ -26628,7 +26986,7 @@
       </p:sp>
       <p:sp>
         <p:nvSpPr>
-          <p:cNvPr id="19" name="Text 16"/>
+          <p:cNvPr id="20" name="Text 17"/>
           <p:cNvSpPr/>
           <p:nvPr/>
         </p:nvSpPr>
@@ -26667,7 +27025,7 @@
       </p:sp>
       <p:sp>
         <p:nvSpPr>
-          <p:cNvPr id="20" name="Text 17"/>
+          <p:cNvPr id="21" name="Text 18"/>
           <p:cNvSpPr/>
           <p:nvPr/>
         </p:nvSpPr>
@@ -26716,7 +27074,7 @@
         </p:nvSpPr>
         <p:spPr>
           <a:xfrm>
-            <a:off x="11368735" y="6437376"/>
+            <a:off x="11368735" y="6327648"/>
             <a:ext cx="365760" cy="274320"/>
           </a:xfrm>
           <a:prstGeom prst="rect">
@@ -26763,13 +27121,6 @@
 <file path=ppt/slides/slide8.xml><?xml version="1.0" encoding="utf-8"?>
 <p:sld xmlns:a="http://schemas.openxmlformats.org/drawingml/2006/main" xmlns:r="http://schemas.openxmlformats.org/officeDocument/2006/relationships" xmlns:p="http://schemas.openxmlformats.org/presentationml/2006/main">
   <p:cSld name="Slide 8">
-    <p:bg>
-      <p:bgPr>
-        <a:solidFill>
-          <a:srgbClr val="FFFFFF"/>
-        </a:solidFill>
-      </p:bgPr>
-    </p:bg>
     <p:spTree>
       <p:nvGrpSpPr>
         <p:cNvPr id="1" name=""/>
@@ -26786,7 +27137,29 @@
       </p:grpSpPr>
       <p:sp>
         <p:nvSpPr>
-          <p:cNvPr id="2" name="Text 0"/>
+          <p:cNvPr id="2" name="Shape 0"/>
+          <p:cNvSpPr/>
+          <p:nvPr/>
+        </p:nvSpPr>
+        <p:spPr>
+          <a:xfrm>
+            <a:off x="231343" y="194767"/>
+            <a:ext cx="11716207" cy="6473952"/>
+          </a:xfrm>
+          <a:prstGeom prst="roundRect">
+            <a:avLst>
+              <a:gd name="adj" fmla="val 3107"/>
+            </a:avLst>
+          </a:prstGeom>
+          <a:solidFill>
+            <a:srgbClr val="FFFFFF"/>
+          </a:solidFill>
+          <a:ln/>
+        </p:spPr>
+      </p:sp>
+      <p:sp>
+        <p:nvSpPr>
+          <p:cNvPr id="3" name="Text 1"/>
           <p:cNvSpPr/>
           <p:nvPr/>
         </p:nvSpPr>
@@ -26825,7 +27198,7 @@
       </p:sp>
       <p:sp>
         <p:nvSpPr>
-          <p:cNvPr id="3" name="Text 1"/>
+          <p:cNvPr id="4" name="Text 2"/>
           <p:cNvSpPr/>
           <p:nvPr/>
         </p:nvSpPr>
@@ -26864,7 +27237,7 @@
       </p:sp>
       <p:sp>
         <p:nvSpPr>
-          <p:cNvPr id="4" name="Shape 2"/>
+          <p:cNvPr id="5" name="Shape 3"/>
           <p:cNvSpPr/>
           <p:nvPr/>
         </p:nvSpPr>
@@ -26886,7 +27259,7 @@
       </p:sp>
       <p:sp>
         <p:nvSpPr>
-          <p:cNvPr id="5" name="Text 3"/>
+          <p:cNvPr id="6" name="Text 4"/>
           <p:cNvSpPr/>
           <p:nvPr/>
         </p:nvSpPr>
@@ -26925,7 +27298,7 @@
       </p:sp>
       <p:pic>
         <p:nvPicPr>
-          <p:cNvPr id="6" name="Image 0" descr="preencoded.png">    </p:cNvPr>
+          <p:cNvPr id="7" name="Image 0" descr="preencoded.png">    </p:cNvPr>
           <p:cNvPicPr>
             <a:picLocks noChangeAspect="1"/>
           </p:cNvPicPr>
@@ -26939,7 +27312,7 @@
         </p:blipFill>
         <p:spPr>
           <a:xfrm>
-            <a:off x="566928" y="6254496"/>
+            <a:off x="566928" y="6126480"/>
             <a:ext cx="1481328" cy="457200"/>
           </a:xfrm>
           <a:prstGeom prst="rect">
@@ -28010,7 +28383,7 @@
       </p:graphicFrame>
       <p:sp>
         <p:nvSpPr>
-          <p:cNvPr id="8" name="Shape 4"/>
+          <p:cNvPr id="9" name="Shape 5"/>
           <p:cNvSpPr/>
           <p:nvPr/>
         </p:nvSpPr>
@@ -28032,7 +28405,7 @@
       </p:sp>
       <p:sp>
         <p:nvSpPr>
-          <p:cNvPr id="9" name="Text 5"/>
+          <p:cNvPr id="10" name="Text 6"/>
           <p:cNvSpPr/>
           <p:nvPr/>
         </p:nvSpPr>
@@ -28071,7 +28444,7 @@
       </p:sp>
       <p:sp>
         <p:nvSpPr>
-          <p:cNvPr id="10" name="Text 6"/>
+          <p:cNvPr id="11" name="Text 7"/>
           <p:cNvSpPr/>
           <p:nvPr/>
         </p:nvSpPr>
@@ -28113,7 +28486,7 @@
       </p:sp>
       <p:sp>
         <p:nvSpPr>
-          <p:cNvPr id="11" name="Shape 7"/>
+          <p:cNvPr id="12" name="Shape 8"/>
           <p:cNvSpPr/>
           <p:nvPr/>
         </p:nvSpPr>
@@ -28135,7 +28508,7 @@
       </p:sp>
       <p:sp>
         <p:nvSpPr>
-          <p:cNvPr id="12" name="Text 8"/>
+          <p:cNvPr id="13" name="Text 9"/>
           <p:cNvSpPr/>
           <p:nvPr/>
         </p:nvSpPr>
@@ -28174,7 +28547,7 @@
       </p:sp>
       <p:sp>
         <p:nvSpPr>
-          <p:cNvPr id="13" name="Text 9"/>
+          <p:cNvPr id="14" name="Text 10"/>
           <p:cNvSpPr/>
           <p:nvPr/>
         </p:nvSpPr>
@@ -28216,7 +28589,7 @@
       </p:sp>
       <p:sp>
         <p:nvSpPr>
-          <p:cNvPr id="14" name="Text 10"/>
+          <p:cNvPr id="15" name="Text 11"/>
           <p:cNvSpPr/>
           <p:nvPr/>
         </p:nvSpPr>
@@ -28265,7 +28638,7 @@
         </p:nvSpPr>
         <p:spPr>
           <a:xfrm>
-            <a:off x="11368735" y="6437376"/>
+            <a:off x="11368735" y="6327648"/>
             <a:ext cx="365760" cy="274320"/>
           </a:xfrm>
           <a:prstGeom prst="rect">
@@ -28312,13 +28685,6 @@
 <file path=ppt/slides/slide9.xml><?xml version="1.0" encoding="utf-8"?>
 <p:sld xmlns:a="http://schemas.openxmlformats.org/drawingml/2006/main" xmlns:r="http://schemas.openxmlformats.org/officeDocument/2006/relationships" xmlns:p="http://schemas.openxmlformats.org/presentationml/2006/main">
   <p:cSld name="Slide 9">
-    <p:bg>
-      <p:bgPr>
-        <a:solidFill>
-          <a:srgbClr val="FFFFFF"/>
-        </a:solidFill>
-      </p:bgPr>
-    </p:bg>
     <p:spTree>
       <p:nvGrpSpPr>
         <p:cNvPr id="1" name=""/>
@@ -28335,7 +28701,29 @@
       </p:grpSpPr>
       <p:sp>
         <p:nvSpPr>
-          <p:cNvPr id="2" name="Text 0"/>
+          <p:cNvPr id="2" name="Shape 0"/>
+          <p:cNvSpPr/>
+          <p:nvPr/>
+        </p:nvSpPr>
+        <p:spPr>
+          <a:xfrm>
+            <a:off x="231343" y="194767"/>
+            <a:ext cx="11716207" cy="6473952"/>
+          </a:xfrm>
+          <a:prstGeom prst="roundRect">
+            <a:avLst>
+              <a:gd name="adj" fmla="val 3107"/>
+            </a:avLst>
+          </a:prstGeom>
+          <a:solidFill>
+            <a:srgbClr val="FFFFFF"/>
+          </a:solidFill>
+          <a:ln/>
+        </p:spPr>
+      </p:sp>
+      <p:sp>
+        <p:nvSpPr>
+          <p:cNvPr id="3" name="Text 1"/>
           <p:cNvSpPr/>
           <p:nvPr/>
         </p:nvSpPr>
@@ -28374,7 +28762,7 @@
       </p:sp>
       <p:sp>
         <p:nvSpPr>
-          <p:cNvPr id="3" name="Text 1"/>
+          <p:cNvPr id="4" name="Text 2"/>
           <p:cNvSpPr/>
           <p:nvPr/>
         </p:nvSpPr>
@@ -28413,7 +28801,7 @@
       </p:sp>
       <p:sp>
         <p:nvSpPr>
-          <p:cNvPr id="4" name="Shape 2"/>
+          <p:cNvPr id="5" name="Shape 3"/>
           <p:cNvSpPr/>
           <p:nvPr/>
         </p:nvSpPr>
@@ -28435,7 +28823,7 @@
       </p:sp>
       <p:sp>
         <p:nvSpPr>
-          <p:cNvPr id="5" name="Text 3"/>
+          <p:cNvPr id="6" name="Text 4"/>
           <p:cNvSpPr/>
           <p:nvPr/>
         </p:nvSpPr>
@@ -28474,7 +28862,7 @@
       </p:sp>
       <p:pic>
         <p:nvPicPr>
-          <p:cNvPr id="6" name="Image 0" descr="preencoded.png">    </p:cNvPr>
+          <p:cNvPr id="7" name="Image 0" descr="preencoded.png">    </p:cNvPr>
           <p:cNvPicPr>
             <a:picLocks noChangeAspect="1"/>
           </p:cNvPicPr>
@@ -28488,7 +28876,7 @@
         </p:blipFill>
         <p:spPr>
           <a:xfrm>
-            <a:off x="566928" y="6254496"/>
+            <a:off x="566928" y="6126480"/>
             <a:ext cx="1481328" cy="457200"/>
           </a:xfrm>
           <a:prstGeom prst="rect">
@@ -28498,7 +28886,7 @@
       </p:pic>
       <p:sp>
         <p:nvSpPr>
-          <p:cNvPr id="7" name="Shape 4"/>
+          <p:cNvPr id="8" name="Shape 5"/>
           <p:cNvSpPr/>
           <p:nvPr/>
         </p:nvSpPr>
@@ -28525,7 +28913,7 @@
       </p:sp>
       <p:sp>
         <p:nvSpPr>
-          <p:cNvPr id="8" name="Text 5"/>
+          <p:cNvPr id="9" name="Text 6"/>
           <p:cNvSpPr/>
           <p:nvPr/>
         </p:nvSpPr>
@@ -28564,7 +28952,7 @@
       </p:sp>
       <p:sp>
         <p:nvSpPr>
-          <p:cNvPr id="9" name="Text 6"/>
+          <p:cNvPr id="10" name="Text 7"/>
           <p:cNvSpPr/>
           <p:nvPr/>
         </p:nvSpPr>
@@ -28603,7 +28991,7 @@
       </p:sp>
       <p:sp>
         <p:nvSpPr>
-          <p:cNvPr id="10" name="Shape 7"/>
+          <p:cNvPr id="11" name="Shape 8"/>
           <p:cNvSpPr/>
           <p:nvPr/>
         </p:nvSpPr>
@@ -28625,7 +29013,7 @@
       </p:sp>
       <p:sp>
         <p:nvSpPr>
-          <p:cNvPr id="11" name="Text 8"/>
+          <p:cNvPr id="12" name="Text 9"/>
           <p:cNvSpPr/>
           <p:nvPr/>
         </p:nvSpPr>
@@ -28664,7 +29052,7 @@
       </p:sp>
       <p:sp>
         <p:nvSpPr>
-          <p:cNvPr id="12" name="Text 9"/>
+          <p:cNvPr id="13" name="Text 10"/>
           <p:cNvSpPr/>
           <p:nvPr/>
         </p:nvSpPr>
@@ -28703,7 +29091,7 @@
       </p:sp>
       <p:sp>
         <p:nvSpPr>
-          <p:cNvPr id="13" name="Text 10"/>
+          <p:cNvPr id="14" name="Text 11"/>
           <p:cNvSpPr/>
           <p:nvPr/>
         </p:nvSpPr>
@@ -28742,7 +29130,7 @@
       </p:sp>
       <p:sp>
         <p:nvSpPr>
-          <p:cNvPr id="14" name="Text 11"/>
+          <p:cNvPr id="15" name="Text 12"/>
           <p:cNvSpPr/>
           <p:nvPr/>
         </p:nvSpPr>
@@ -28781,7 +29169,7 @@
       </p:sp>
       <p:sp>
         <p:nvSpPr>
-          <p:cNvPr id="15" name="Shape 12"/>
+          <p:cNvPr id="16" name="Shape 13"/>
           <p:cNvSpPr/>
           <p:nvPr/>
         </p:nvSpPr>
@@ -28803,7 +29191,7 @@
       </p:sp>
       <p:sp>
         <p:nvSpPr>
-          <p:cNvPr id="16" name="Text 13"/>
+          <p:cNvPr id="17" name="Text 14"/>
           <p:cNvSpPr/>
           <p:nvPr/>
         </p:nvSpPr>
@@ -28842,7 +29230,7 @@
       </p:sp>
       <p:sp>
         <p:nvSpPr>
-          <p:cNvPr id="17" name="Text 14"/>
+          <p:cNvPr id="18" name="Text 15"/>
           <p:cNvSpPr/>
           <p:nvPr/>
         </p:nvSpPr>
@@ -28881,7 +29269,7 @@
       </p:sp>
       <p:sp>
         <p:nvSpPr>
-          <p:cNvPr id="18" name="Shape 15"/>
+          <p:cNvPr id="19" name="Shape 16"/>
           <p:cNvSpPr/>
           <p:nvPr/>
         </p:nvSpPr>
@@ -28903,7 +29291,7 @@
       </p:sp>
       <p:sp>
         <p:nvSpPr>
-          <p:cNvPr id="19" name="Text 16"/>
+          <p:cNvPr id="20" name="Text 17"/>
           <p:cNvSpPr/>
           <p:nvPr/>
         </p:nvSpPr>
@@ -28942,7 +29330,7 @@
       </p:sp>
       <p:sp>
         <p:nvSpPr>
-          <p:cNvPr id="20" name="Text 17"/>
+          <p:cNvPr id="21" name="Text 18"/>
           <p:cNvSpPr/>
           <p:nvPr/>
         </p:nvSpPr>
@@ -28981,7 +29369,7 @@
       </p:sp>
       <p:sp>
         <p:nvSpPr>
-          <p:cNvPr id="21" name="Shape 18"/>
+          <p:cNvPr id="22" name="Shape 19"/>
           <p:cNvSpPr/>
           <p:nvPr/>
         </p:nvSpPr>
@@ -29003,7 +29391,7 @@
       </p:sp>
       <p:sp>
         <p:nvSpPr>
-          <p:cNvPr id="22" name="Text 19"/>
+          <p:cNvPr id="23" name="Text 20"/>
           <p:cNvSpPr/>
           <p:nvPr/>
         </p:nvSpPr>
@@ -29042,7 +29430,7 @@
       </p:sp>
       <p:sp>
         <p:nvSpPr>
-          <p:cNvPr id="23" name="Text 20"/>
+          <p:cNvPr id="24" name="Text 21"/>
           <p:cNvSpPr/>
           <p:nvPr/>
         </p:nvSpPr>
@@ -29081,7 +29469,7 @@
       </p:sp>
       <p:sp>
         <p:nvSpPr>
-          <p:cNvPr id="24" name="Shape 21"/>
+          <p:cNvPr id="25" name="Shape 22"/>
           <p:cNvSpPr/>
           <p:nvPr/>
         </p:nvSpPr>
@@ -29103,7 +29491,7 @@
       </p:sp>
       <p:sp>
         <p:nvSpPr>
-          <p:cNvPr id="25" name="Text 22"/>
+          <p:cNvPr id="26" name="Text 23"/>
           <p:cNvSpPr/>
           <p:nvPr/>
         </p:nvSpPr>
@@ -29142,7 +29530,7 @@
       </p:sp>
       <p:sp>
         <p:nvSpPr>
-          <p:cNvPr id="26" name="Text 23"/>
+          <p:cNvPr id="27" name="Text 24"/>
           <p:cNvSpPr/>
           <p:nvPr/>
         </p:nvSpPr>
@@ -29194,7 +29582,7 @@
         </p:nvSpPr>
         <p:spPr>
           <a:xfrm>
-            <a:off x="11368735" y="6437376"/>
+            <a:off x="11368735" y="6327648"/>
             <a:ext cx="365760" cy="274320"/>
           </a:xfrm>
           <a:prstGeom prst="rect">

--- a/docs/decks/L01.pptx
+++ b/docs/decks/L01.pptx
@@ -2714,7 +2714,7 @@
         </p:nvSpPr>
         <p:spPr>
           <a:xfrm>
-            <a:off x="11368735" y="6327648"/>
+            <a:off x="11368735" y="6437376"/>
             <a:ext cx="365760" cy="274320"/>
           </a:xfrm>
           <a:prstGeom prst="rect">
@@ -2843,7 +2843,7 @@
         </p:nvSpPr>
         <p:spPr>
           <a:xfrm>
-            <a:off x="11368735" y="6327648"/>
+            <a:off x="11368735" y="6437376"/>
             <a:ext cx="365760" cy="274320"/>
           </a:xfrm>
           <a:prstGeom prst="rect">
@@ -3983,7 +3983,7 @@
         </p:blipFill>
         <p:spPr>
           <a:xfrm>
-            <a:off x="566928" y="6126480"/>
+            <a:off x="566928" y="6254496"/>
             <a:ext cx="1481328" cy="457200"/>
           </a:xfrm>
           <a:prstGeom prst="rect">
@@ -4881,7 +4881,7 @@
         </p:nvSpPr>
         <p:spPr>
           <a:xfrm>
-            <a:off x="11368735" y="6327648"/>
+            <a:off x="11368735" y="6437376"/>
             <a:ext cx="365760" cy="274320"/>
           </a:xfrm>
           <a:prstGeom prst="rect">
@@ -5097,7 +5097,7 @@
         </p:blipFill>
         <p:spPr>
           <a:xfrm>
-            <a:off x="566928" y="6126480"/>
+            <a:off x="566928" y="6254496"/>
             <a:ext cx="1481328" cy="457200"/>
           </a:xfrm>
           <a:prstGeom prst="rect">
@@ -5634,7 +5634,7 @@
         </p:nvSpPr>
         <p:spPr>
           <a:xfrm>
-            <a:off x="11368735" y="6327648"/>
+            <a:off x="11368735" y="6437376"/>
             <a:ext cx="365760" cy="274320"/>
           </a:xfrm>
           <a:prstGeom prst="rect">
@@ -5850,7 +5850,7 @@
         </p:blipFill>
         <p:spPr>
           <a:xfrm>
-            <a:off x="566928" y="6126480"/>
+            <a:off x="566928" y="6254496"/>
             <a:ext cx="1481328" cy="457200"/>
           </a:xfrm>
           <a:prstGeom prst="rect">
@@ -6561,7 +6561,7 @@
         </p:nvSpPr>
         <p:spPr>
           <a:xfrm>
-            <a:off x="11368735" y="6327648"/>
+            <a:off x="11368735" y="6437376"/>
             <a:ext cx="365760" cy="274320"/>
           </a:xfrm>
           <a:prstGeom prst="rect">
@@ -6777,7 +6777,7 @@
         </p:blipFill>
         <p:spPr>
           <a:xfrm>
-            <a:off x="566928" y="6126480"/>
+            <a:off x="566928" y="6254496"/>
             <a:ext cx="1481328" cy="457200"/>
           </a:xfrm>
           <a:prstGeom prst="rect">
@@ -7553,7 +7553,7 @@
         </p:nvSpPr>
         <p:spPr>
           <a:xfrm>
-            <a:off x="11368735" y="6327648"/>
+            <a:off x="11368735" y="6437376"/>
             <a:ext cx="365760" cy="274320"/>
           </a:xfrm>
           <a:prstGeom prst="rect">
@@ -7769,7 +7769,7 @@
         </p:blipFill>
         <p:spPr>
           <a:xfrm>
-            <a:off x="566928" y="6126480"/>
+            <a:off x="566928" y="6254496"/>
             <a:ext cx="1481328" cy="457200"/>
           </a:xfrm>
           <a:prstGeom prst="rect">
@@ -8378,7 +8378,7 @@
         </p:nvSpPr>
         <p:spPr>
           <a:xfrm>
-            <a:off x="11368735" y="6327648"/>
+            <a:off x="11368735" y="6437376"/>
             <a:ext cx="365760" cy="274320"/>
           </a:xfrm>
           <a:prstGeom prst="rect">
@@ -8594,7 +8594,7 @@
         </p:blipFill>
         <p:spPr>
           <a:xfrm>
-            <a:off x="566928" y="6126480"/>
+            <a:off x="566928" y="6254496"/>
             <a:ext cx="1481328" cy="457200"/>
           </a:xfrm>
           <a:prstGeom prst="rect">
@@ -9142,7 +9142,7 @@
         </p:nvSpPr>
         <p:spPr>
           <a:xfrm>
-            <a:off x="11368735" y="6327648"/>
+            <a:off x="11368735" y="6437376"/>
             <a:ext cx="365760" cy="274320"/>
           </a:xfrm>
           <a:prstGeom prst="rect">
@@ -9358,7 +9358,7 @@
         </p:blipFill>
         <p:spPr>
           <a:xfrm>
-            <a:off x="566928" y="6126480"/>
+            <a:off x="566928" y="6254496"/>
             <a:ext cx="1481328" cy="457200"/>
           </a:xfrm>
           <a:prstGeom prst="rect">
@@ -10460,12 +10460,12 @@
         </p:nvSpPr>
         <p:spPr>
           <a:xfrm>
-            <a:off x="566928" y="5852160"/>
-            <a:ext cx="11064240" cy="475488"/>
+            <a:off x="566928" y="5779008"/>
+            <a:ext cx="11064240" cy="402336"/>
           </a:xfrm>
           <a:prstGeom prst="roundRect">
             <a:avLst>
-              <a:gd name="adj" fmla="val 23077"/>
+              <a:gd name="adj" fmla="val 27273"/>
             </a:avLst>
           </a:prstGeom>
           <a:solidFill>
@@ -10482,8 +10482,8 @@
         </p:nvSpPr>
         <p:spPr>
           <a:xfrm>
-            <a:off x="786384" y="5998464"/>
-            <a:ext cx="10625328" cy="182880"/>
+            <a:off x="786384" y="5925312"/>
+            <a:ext cx="10625328" cy="109728"/>
           </a:xfrm>
           <a:prstGeom prst="rect">
             <a:avLst/>
@@ -10528,7 +10528,7 @@
         </p:nvSpPr>
         <p:spPr>
           <a:xfrm>
-            <a:off x="11368735" y="6327648"/>
+            <a:off x="11368735" y="6437376"/>
             <a:ext cx="365760" cy="274320"/>
           </a:xfrm>
           <a:prstGeom prst="rect">
@@ -10744,7 +10744,7 @@
         </p:blipFill>
         <p:spPr>
           <a:xfrm>
-            <a:off x="566928" y="6126480"/>
+            <a:off x="566928" y="6254496"/>
             <a:ext cx="1481328" cy="457200"/>
           </a:xfrm>
           <a:prstGeom prst="rect">
@@ -11949,7 +11949,7 @@
         </p:nvSpPr>
         <p:spPr>
           <a:xfrm>
-            <a:off x="11368735" y="6327648"/>
+            <a:off x="11368735" y="6437376"/>
             <a:ext cx="365760" cy="274320"/>
           </a:xfrm>
           <a:prstGeom prst="rect">
@@ -12226,7 +12226,7 @@
         </p:blipFill>
         <p:spPr>
           <a:xfrm>
-            <a:off x="566928" y="6126480"/>
+            <a:off x="566928" y="6254496"/>
             <a:ext cx="1481328" cy="457200"/>
           </a:xfrm>
           <a:prstGeom prst="rect">
@@ -12759,7 +12759,7 @@
         </p:nvSpPr>
         <p:spPr>
           <a:xfrm>
-            <a:off x="11368735" y="6327648"/>
+            <a:off x="11368735" y="6437376"/>
             <a:ext cx="365760" cy="274320"/>
           </a:xfrm>
           <a:prstGeom prst="rect">
@@ -12936,7 +12936,7 @@
         </p:blipFill>
         <p:spPr>
           <a:xfrm>
-            <a:off x="566928" y="6126480"/>
+            <a:off x="566928" y="6254496"/>
             <a:ext cx="1481328" cy="457200"/>
           </a:xfrm>
           <a:prstGeom prst="rect">
@@ -14031,7 +14031,7 @@
         </p:nvSpPr>
         <p:spPr>
           <a:xfrm>
-            <a:off x="11368735" y="6327648"/>
+            <a:off x="11368735" y="6437376"/>
             <a:ext cx="365760" cy="274320"/>
           </a:xfrm>
           <a:prstGeom prst="rect">
@@ -14250,7 +14250,7 @@
         </p:blipFill>
         <p:spPr>
           <a:xfrm>
-            <a:off x="566928" y="6126480"/>
+            <a:off x="566928" y="6254496"/>
             <a:ext cx="1481328" cy="457200"/>
           </a:xfrm>
           <a:prstGeom prst="rect">
@@ -15272,7 +15272,7 @@
         </p:nvSpPr>
         <p:spPr>
           <a:xfrm>
-            <a:off x="11368735" y="6327648"/>
+            <a:off x="11368735" y="6437376"/>
             <a:ext cx="365760" cy="274320"/>
           </a:xfrm>
           <a:prstGeom prst="rect">
@@ -15449,7 +15449,7 @@
         </p:blipFill>
         <p:spPr>
           <a:xfrm>
-            <a:off x="566928" y="6126480"/>
+            <a:off x="566928" y="6254496"/>
             <a:ext cx="1481328" cy="457200"/>
           </a:xfrm>
           <a:prstGeom prst="rect">
@@ -16141,7 +16141,7 @@
         </p:nvSpPr>
         <p:spPr>
           <a:xfrm>
-            <a:off x="11368735" y="6327648"/>
+            <a:off x="11368735" y="6437376"/>
             <a:ext cx="365760" cy="274320"/>
           </a:xfrm>
           <a:prstGeom prst="rect">
@@ -16318,7 +16318,7 @@
         </p:blipFill>
         <p:spPr>
           <a:xfrm>
-            <a:off x="566928" y="6126480"/>
+            <a:off x="566928" y="6254496"/>
             <a:ext cx="1481328" cy="457200"/>
           </a:xfrm>
           <a:prstGeom prst="rect">
@@ -17421,7 +17421,7 @@
         </p:nvSpPr>
         <p:spPr>
           <a:xfrm>
-            <a:off x="11368735" y="6327648"/>
+            <a:off x="11368735" y="6437376"/>
             <a:ext cx="365760" cy="274320"/>
           </a:xfrm>
           <a:prstGeom prst="rect">
@@ -17598,7 +17598,7 @@
         </p:blipFill>
         <p:spPr>
           <a:xfrm>
-            <a:off x="566928" y="6126480"/>
+            <a:off x="566928" y="6254496"/>
             <a:ext cx="1481328" cy="457200"/>
           </a:xfrm>
           <a:prstGeom prst="rect">
@@ -18320,7 +18320,7 @@
         </p:nvSpPr>
         <p:spPr>
           <a:xfrm>
-            <a:off x="11368735" y="6327648"/>
+            <a:off x="11368735" y="6437376"/>
             <a:ext cx="365760" cy="274320"/>
           </a:xfrm>
           <a:prstGeom prst="rect">
@@ -18497,7 +18497,7 @@
         </p:blipFill>
         <p:spPr>
           <a:xfrm>
-            <a:off x="566928" y="6126480"/>
+            <a:off x="566928" y="6254496"/>
             <a:ext cx="1481328" cy="457200"/>
           </a:xfrm>
           <a:prstGeom prst="rect">
@@ -19217,7 +19217,7 @@
         </p:nvSpPr>
         <p:spPr>
           <a:xfrm>
-            <a:off x="11368735" y="6327648"/>
+            <a:off x="11368735" y="6437376"/>
             <a:ext cx="365760" cy="274320"/>
           </a:xfrm>
           <a:prstGeom prst="rect">
@@ -19394,7 +19394,7 @@
         </p:blipFill>
         <p:spPr>
           <a:xfrm>
-            <a:off x="566928" y="6126480"/>
+            <a:off x="566928" y="6254496"/>
             <a:ext cx="1481328" cy="457200"/>
           </a:xfrm>
           <a:prstGeom prst="rect">
@@ -19817,7 +19817,7 @@
         </p:nvSpPr>
         <p:spPr>
           <a:xfrm>
-            <a:off x="11368735" y="6327648"/>
+            <a:off x="11368735" y="6437376"/>
             <a:ext cx="365760" cy="274320"/>
           </a:xfrm>
           <a:prstGeom prst="rect">
@@ -20515,7 +20515,7 @@
         </p:blipFill>
         <p:spPr>
           <a:xfrm>
-            <a:off x="566928" y="6126480"/>
+            <a:off x="566928" y="6254496"/>
             <a:ext cx="1481328" cy="457200"/>
           </a:xfrm>
           <a:prstGeom prst="rect">
@@ -21974,7 +21974,7 @@
         </p:nvSpPr>
         <p:spPr>
           <a:xfrm>
-            <a:off x="11368735" y="6327648"/>
+            <a:off x="11368735" y="6437376"/>
             <a:ext cx="365760" cy="274320"/>
           </a:xfrm>
           <a:prstGeom prst="rect">
@@ -22193,7 +22193,7 @@
         </p:blipFill>
         <p:spPr>
           <a:xfrm>
-            <a:off x="566928" y="6126480"/>
+            <a:off x="566928" y="6254496"/>
             <a:ext cx="1481328" cy="457200"/>
           </a:xfrm>
           <a:prstGeom prst="rect">
@@ -22930,7 +22930,7 @@
         </p:nvSpPr>
         <p:spPr>
           <a:xfrm>
-            <a:off x="11368735" y="6327648"/>
+            <a:off x="11368735" y="6437376"/>
             <a:ext cx="365760" cy="274320"/>
           </a:xfrm>
           <a:prstGeom prst="rect">
@@ -23146,7 +23146,7 @@
         </p:blipFill>
         <p:spPr>
           <a:xfrm>
-            <a:off x="566928" y="6126480"/>
+            <a:off x="566928" y="6254496"/>
             <a:ext cx="1481328" cy="457200"/>
           </a:xfrm>
           <a:prstGeom prst="rect">
@@ -24098,7 +24098,7 @@
         </p:nvSpPr>
         <p:spPr>
           <a:xfrm>
-            <a:off x="11368735" y="6327648"/>
+            <a:off x="11368735" y="6437376"/>
             <a:ext cx="365760" cy="274320"/>
           </a:xfrm>
           <a:prstGeom prst="rect">
@@ -24314,7 +24314,7 @@
         </p:blipFill>
         <p:spPr>
           <a:xfrm>
-            <a:off x="566928" y="6126480"/>
+            <a:off x="566928" y="6254496"/>
             <a:ext cx="1481328" cy="457200"/>
           </a:xfrm>
           <a:prstGeom prst="rect">
@@ -25735,7 +25735,7 @@
         </p:nvSpPr>
         <p:spPr>
           <a:xfrm>
-            <a:off x="11368735" y="6327648"/>
+            <a:off x="11368735" y="6437376"/>
             <a:ext cx="365760" cy="274320"/>
           </a:xfrm>
           <a:prstGeom prst="rect">
@@ -25951,7 +25951,7 @@
         </p:blipFill>
         <p:spPr>
           <a:xfrm>
-            <a:off x="566928" y="6126480"/>
+            <a:off x="566928" y="6254496"/>
             <a:ext cx="1481328" cy="457200"/>
           </a:xfrm>
           <a:prstGeom prst="rect">
@@ -26617,7 +26617,7 @@
         </p:nvSpPr>
         <p:spPr>
           <a:xfrm>
-            <a:off x="11368735" y="6327648"/>
+            <a:off x="11368735" y="6437376"/>
             <a:ext cx="365760" cy="274320"/>
           </a:xfrm>
           <a:prstGeom prst="rect">
@@ -26833,7 +26833,7 @@
         </p:blipFill>
         <p:spPr>
           <a:xfrm>
-            <a:off x="566928" y="6126480"/>
+            <a:off x="566928" y="6254496"/>
             <a:ext cx="1481328" cy="457200"/>
           </a:xfrm>
           <a:prstGeom prst="rect">
@@ -28159,7 +28159,7 @@
         </p:nvSpPr>
         <p:spPr>
           <a:xfrm>
-            <a:off x="11368735" y="6327648"/>
+            <a:off x="11368735" y="6437376"/>
             <a:ext cx="365760" cy="274320"/>
           </a:xfrm>
           <a:prstGeom prst="rect">
@@ -28375,7 +28375,7 @@
         </p:blipFill>
         <p:spPr>
           <a:xfrm>
-            <a:off x="566928" y="6126480"/>
+            <a:off x="566928" y="6254496"/>
             <a:ext cx="1481328" cy="457200"/>
           </a:xfrm>
           <a:prstGeom prst="rect">
@@ -29081,7 +29081,7 @@
         </p:nvSpPr>
         <p:spPr>
           <a:xfrm>
-            <a:off x="11368735" y="6327648"/>
+            <a:off x="11368735" y="6437376"/>
             <a:ext cx="365760" cy="274320"/>
           </a:xfrm>
           <a:prstGeom prst="rect">

--- a/docs/decks/L01.pptx
+++ b/docs/decks/L01.pptx
@@ -9536,7 +9536,7 @@
                 <a:ea typeface="Montserrat" pitchFamily="34" charset="-122"/>
                 <a:cs typeface="Montserrat" pitchFamily="34" charset="-120"/>
               </a:rPr>
-              <a:t>помаранчеві поля сьогодні порожні — це ваша робота на два тижні</a:t>
+              <a:t>підсвічені поля сьогодні порожні — це ваша робота на два тижні</a:t>
             </a:r>
             <a:endParaRPr lang="en-US" sz="1150" dirty="0"/>
           </a:p>
@@ -9575,7 +9575,7 @@
                 <a:ea typeface="Courier New" pitchFamily="34" charset="-122"/>
                 <a:cs typeface="Courier New" pitchFamily="34" charset="-120"/>
               </a:rPr>
-              <a:t>model</a:t>
+              <a:t>prompt_version</a:t>
             </a:r>
             <a:endParaRPr lang="en-US" sz="1100" dirty="0"/>
           </a:p>
@@ -9657,7 +9657,7 @@
                 <a:ea typeface="Montserrat" pitchFamily="34" charset="-122"/>
                 <a:cs typeface="Montserrat" pitchFamily="34" charset="-120"/>
               </a:rPr>
-              <a:t>розподіл трафіку, доказ routing</a:t>
+              <a:t>«що зламалось учора о 19:40»</a:t>
             </a:r>
             <a:endParaRPr lang="en-US" sz="1250" dirty="0"/>
           </a:p>
@@ -9718,7 +9718,7 @@
                 <a:ea typeface="Courier New" pitchFamily="34" charset="-122"/>
                 <a:cs typeface="Courier New" pitchFamily="34" charset="-120"/>
               </a:rPr>
-              <a:t>W2</a:t>
+              <a:t>W1</a:t>
             </a:r>
             <a:endParaRPr lang="en-US" sz="900" dirty="0"/>
           </a:p>
@@ -9757,7 +9757,7 @@
                 <a:ea typeface="Courier New" pitchFamily="34" charset="-122"/>
                 <a:cs typeface="Courier New" pitchFamily="34" charset="-120"/>
               </a:rPr>
-              <a:t>prompt_version</a:t>
+              <a:t>model</a:t>
             </a:r>
             <a:endParaRPr lang="en-US" sz="1100" dirty="0"/>
           </a:p>
@@ -9839,7 +9839,7 @@
                 <a:ea typeface="Montserrat" pitchFamily="34" charset="-122"/>
                 <a:cs typeface="Montserrat" pitchFamily="34" charset="-120"/>
               </a:rPr>
-              <a:t>«що зламалось учора о 19:40»</a:t>
+              <a:t>розподіл трафіку, доказ routing</a:t>
             </a:r>
             <a:endParaRPr lang="en-US" sz="1250" dirty="0"/>
           </a:p>
@@ -9900,7 +9900,7 @@
                 <a:ea typeface="Courier New" pitchFamily="34" charset="-122"/>
                 <a:cs typeface="Courier New" pitchFamily="34" charset="-120"/>
               </a:rPr>
-              <a:t>W1</a:t>
+              <a:t>W2</a:t>
             </a:r>
             <a:endParaRPr lang="en-US" sz="900" dirty="0"/>
           </a:p>
@@ -28648,7 +28648,7 @@
           <a:bodyPr wrap="square" lIns="0" tIns="0" rIns="0" bIns="0" rtlCol="0" anchor="ctr"/>
           <a:lstStyle/>
           <a:p>
-            <a:pPr algn="r" indent="0" marL="0">
+            <a:pPr algn="l" indent="0" marL="0">
               <a:buNone/>
             </a:pPr>
             <a:r>
@@ -28748,7 +28748,7 @@
           <a:bodyPr wrap="square" lIns="0" tIns="0" rIns="0" bIns="0" rtlCol="0" anchor="ctr"/>
           <a:lstStyle/>
           <a:p>
-            <a:pPr algn="r" indent="0" marL="0">
+            <a:pPr algn="l" indent="0" marL="0">
               <a:buNone/>
             </a:pPr>
             <a:r>
@@ -28848,7 +28848,7 @@
           <a:bodyPr wrap="square" lIns="0" tIns="0" rIns="0" bIns="0" rtlCol="0" anchor="ctr"/>
           <a:lstStyle/>
           <a:p>
-            <a:pPr algn="r" indent="0" marL="0">
+            <a:pPr algn="l" indent="0" marL="0">
               <a:buNone/>
             </a:pPr>
             <a:r>

--- a/docs/decks/L01.pptx
+++ b/docs/decks/L01.pptx
@@ -3341,17 +3341,17 @@
               <a:buNone/>
             </a:pPr>
             <a:r>
-              <a:rPr lang="en-US" sz="4000" b="1" dirty="0">
+              <a:rPr lang="en-US" sz="3600" dirty="0">
                 <a:solidFill>
                   <a:srgbClr val="FFFFFF"/>
                 </a:solidFill>
-                <a:latin typeface="Montserrat" pitchFamily="34" charset="0"/>
-                <a:ea typeface="Montserrat" pitchFamily="34" charset="-122"/>
-                <a:cs typeface="Montserrat" pitchFamily="34" charset="-120"/>
+                <a:latin typeface="Unbounded" pitchFamily="34" charset="0"/>
+                <a:ea typeface="Unbounded" pitchFamily="34" charset="-122"/>
+                <a:cs typeface="Unbounded" pitchFamily="34" charset="-120"/>
               </a:rPr>
               <a:t>LLMOps і архітектура</a:t>
             </a:r>
-            <a:endParaRPr lang="en-US" sz="4000" dirty="0"/>
+            <a:endParaRPr lang="en-US" sz="3600" dirty="0"/>
           </a:p>
           <a:p>
             <a:pPr indent="0" marL="0">
@@ -3361,17 +3361,17 @@
               <a:buNone/>
             </a:pPr>
             <a:r>
-              <a:rPr lang="en-US" sz="4000" b="1" dirty="0">
+              <a:rPr lang="en-US" sz="3600" dirty="0">
                 <a:solidFill>
                   <a:srgbClr val="FFFFFF"/>
                 </a:solidFill>
-                <a:latin typeface="Montserrat" pitchFamily="34" charset="0"/>
-                <a:ea typeface="Montserrat" pitchFamily="34" charset="-122"/>
-                <a:cs typeface="Montserrat" pitchFamily="34" charset="-120"/>
+                <a:latin typeface="Unbounded" pitchFamily="34" charset="0"/>
+                <a:ea typeface="Unbounded" pitchFamily="34" charset="-122"/>
+                <a:cs typeface="Unbounded" pitchFamily="34" charset="-120"/>
               </a:rPr>
               <a:t>production LLM-системи</a:t>
             </a:r>
-            <a:endParaRPr lang="en-US" sz="4000" dirty="0"/>
+            <a:endParaRPr lang="en-US" sz="3600" dirty="0"/>
           </a:p>
         </p:txBody>
       </p:sp>
@@ -3892,13 +3892,13 @@
               <a:buNone/>
             </a:pPr>
             <a:r>
-              <a:rPr lang="en-US" sz="2400" b="1" dirty="0">
+              <a:rPr lang="en-US" sz="2400" dirty="0">
                 <a:solidFill>
                   <a:srgbClr val="FFFFFF"/>
                 </a:solidFill>
-                <a:latin typeface="Montserrat" pitchFamily="34" charset="0"/>
-                <a:ea typeface="Montserrat" pitchFamily="34" charset="-122"/>
-                <a:cs typeface="Montserrat" pitchFamily="34" charset="-120"/>
+                <a:latin typeface="Unbounded" pitchFamily="34" charset="0"/>
+                <a:ea typeface="Unbounded" pitchFamily="34" charset="-122"/>
+                <a:cs typeface="Unbounded" pitchFamily="34" charset="-120"/>
               </a:rPr>
               <a:t>temperature = 0 — це не детермінізм</a:t>
             </a:r>
@@ -3914,7 +3914,7 @@
         </p:nvSpPr>
         <p:spPr>
           <a:xfrm>
-            <a:off x="1280160" y="1024128"/>
+            <a:off x="1280160" y="1218895"/>
             <a:ext cx="777240" cy="256032"/>
           </a:xfrm>
           <a:prstGeom prst="roundRect">
@@ -3936,7 +3936,7 @@
         </p:nvSpPr>
         <p:spPr>
           <a:xfrm>
-            <a:off x="1280160" y="1024128"/>
+            <a:off x="1280160" y="1218895"/>
             <a:ext cx="777240" cy="256032"/>
           </a:xfrm>
           <a:prstGeom prst="rect">
@@ -5006,13 +5006,13 @@
               <a:buNone/>
             </a:pPr>
             <a:r>
-              <a:rPr lang="en-US" sz="2400" b="1" dirty="0">
+              <a:rPr lang="en-US" sz="2400" dirty="0">
                 <a:solidFill>
                   <a:srgbClr val="FFFFFF"/>
                 </a:solidFill>
-                <a:latin typeface="Montserrat" pitchFamily="34" charset="0"/>
-                <a:ea typeface="Montserrat" pitchFamily="34" charset="-122"/>
-                <a:cs typeface="Montserrat" pitchFamily="34" charset="-120"/>
+                <a:latin typeface="Unbounded" pitchFamily="34" charset="0"/>
+                <a:ea typeface="Unbounded" pitchFamily="34" charset="-122"/>
+                <a:cs typeface="Unbounded" pitchFamily="34" charset="-120"/>
               </a:rPr>
               <a:t>Латентність: час залежить від довжини відповіді</a:t>
             </a:r>
@@ -5028,7 +5028,7 @@
         </p:nvSpPr>
         <p:spPr>
           <a:xfrm>
-            <a:off x="1280160" y="1193140"/>
+            <a:off x="1280160" y="1218895"/>
             <a:ext cx="777240" cy="256032"/>
           </a:xfrm>
           <a:prstGeom prst="roundRect">
@@ -5050,7 +5050,7 @@
         </p:nvSpPr>
         <p:spPr>
           <a:xfrm>
-            <a:off x="1280160" y="1193140"/>
+            <a:off x="1280160" y="1218895"/>
             <a:ext cx="777240" cy="256032"/>
           </a:xfrm>
           <a:prstGeom prst="rect">
@@ -5759,13 +5759,13 @@
               <a:buNone/>
             </a:pPr>
             <a:r>
-              <a:rPr lang="en-US" sz="2400" b="1" dirty="0">
+              <a:rPr lang="en-US" sz="2400" dirty="0">
                 <a:solidFill>
                   <a:srgbClr val="FFFFFF"/>
                 </a:solidFill>
-                <a:latin typeface="Montserrat" pitchFamily="34" charset="0"/>
-                <a:ea typeface="Montserrat" pitchFamily="34" charset="-122"/>
-                <a:cs typeface="Montserrat" pitchFamily="34" charset="-120"/>
+                <a:latin typeface="Unbounded" pitchFamily="34" charset="0"/>
+                <a:ea typeface="Unbounded" pitchFamily="34" charset="-122"/>
+                <a:cs typeface="Unbounded" pitchFamily="34" charset="-120"/>
               </a:rPr>
               <a:t>П'ять способів зламатися — і сліпа зона моніторингу</a:t>
             </a:r>
@@ -5781,7 +5781,7 @@
         </p:nvSpPr>
         <p:spPr>
           <a:xfrm>
-            <a:off x="1280160" y="1193140"/>
+            <a:off x="1280160" y="1218895"/>
             <a:ext cx="777240" cy="256032"/>
           </a:xfrm>
           <a:prstGeom prst="roundRect">
@@ -5803,7 +5803,7 @@
         </p:nvSpPr>
         <p:spPr>
           <a:xfrm>
-            <a:off x="1280160" y="1193140"/>
+            <a:off x="1280160" y="1218895"/>
             <a:ext cx="777240" cy="256032"/>
           </a:xfrm>
           <a:prstGeom prst="rect">
@@ -6686,13 +6686,13 @@
               <a:buNone/>
             </a:pPr>
             <a:r>
-              <a:rPr lang="en-US" sz="2400" b="1" dirty="0">
+              <a:rPr lang="en-US" sz="2400" dirty="0">
                 <a:solidFill>
                   <a:srgbClr val="FFFFFF"/>
                 </a:solidFill>
-                <a:latin typeface="Montserrat" pitchFamily="34" charset="0"/>
-                <a:ea typeface="Montserrat" pitchFamily="34" charset="-122"/>
-                <a:cs typeface="Montserrat" pitchFamily="34" charset="-120"/>
+                <a:latin typeface="Unbounded" pitchFamily="34" charset="0"/>
+                <a:ea typeface="Unbounded" pitchFamily="34" charset="-122"/>
+                <a:cs typeface="Unbounded" pitchFamily="34" charset="-120"/>
               </a:rPr>
               <a:t>Стек капстоуна: шлях запиту</a:t>
             </a:r>
@@ -7678,13 +7678,13 @@
               <a:buNone/>
             </a:pPr>
             <a:r>
-              <a:rPr lang="en-US" sz="2400" b="1" dirty="0">
+              <a:rPr lang="en-US" sz="2400" dirty="0">
                 <a:solidFill>
                   <a:srgbClr val="FFFFFF"/>
                 </a:solidFill>
-                <a:latin typeface="Montserrat" pitchFamily="34" charset="0"/>
-                <a:ea typeface="Montserrat" pitchFamily="34" charset="-122"/>
-                <a:cs typeface="Montserrat" pitchFamily="34" charset="-120"/>
+                <a:latin typeface="Unbounded" pitchFamily="34" charset="0"/>
+                <a:ea typeface="Unbounded" pitchFamily="34" charset="-122"/>
+                <a:cs typeface="Unbounded" pitchFamily="34" charset="-120"/>
               </a:rPr>
               <a:t>П'ять компонентів — і ваші стосунки з ними</a:t>
             </a:r>
@@ -7700,7 +7700,7 @@
         </p:nvSpPr>
         <p:spPr>
           <a:xfrm>
-            <a:off x="1280160" y="1193140"/>
+            <a:off x="1280160" y="1218895"/>
             <a:ext cx="777240" cy="256032"/>
           </a:xfrm>
           <a:prstGeom prst="roundRect">
@@ -7722,7 +7722,7 @@
         </p:nvSpPr>
         <p:spPr>
           <a:xfrm>
-            <a:off x="1280160" y="1193140"/>
+            <a:off x="1280160" y="1218895"/>
             <a:ext cx="777240" cy="256032"/>
           </a:xfrm>
           <a:prstGeom prst="rect">
@@ -8503,13 +8503,13 @@
               <a:buNone/>
             </a:pPr>
             <a:r>
-              <a:rPr lang="en-US" sz="2400" b="1" dirty="0">
+              <a:rPr lang="en-US" sz="2400" dirty="0">
                 <a:solidFill>
                   <a:srgbClr val="FFFFFF"/>
                 </a:solidFill>
-                <a:latin typeface="Montserrat" pitchFamily="34" charset="0"/>
-                <a:ea typeface="Montserrat" pitchFamily="34" charset="-122"/>
-                <a:cs typeface="Montserrat" pitchFamily="34" charset="-120"/>
+                <a:latin typeface="Unbounded" pitchFamily="34" charset="0"/>
+                <a:ea typeface="Unbounded" pitchFamily="34" charset="-122"/>
+                <a:cs typeface="Unbounded" pitchFamily="34" charset="-120"/>
               </a:rPr>
               <a:t>Сервіс вирішує. Адаптер виконує.</a:t>
             </a:r>
@@ -8525,7 +8525,7 @@
         </p:nvSpPr>
         <p:spPr>
           <a:xfrm>
-            <a:off x="1280160" y="1024128"/>
+            <a:off x="1280160" y="1218895"/>
             <a:ext cx="777240" cy="256032"/>
           </a:xfrm>
           <a:prstGeom prst="roundRect">
@@ -8547,7 +8547,7 @@
         </p:nvSpPr>
         <p:spPr>
           <a:xfrm>
-            <a:off x="1280160" y="1024128"/>
+            <a:off x="1280160" y="1218895"/>
             <a:ext cx="777240" cy="256032"/>
           </a:xfrm>
           <a:prstGeom prst="rect">
@@ -9267,13 +9267,13 @@
               <a:buNone/>
             </a:pPr>
             <a:r>
-              <a:rPr lang="en-US" sz="2400" b="1" dirty="0">
+              <a:rPr lang="en-US" sz="2400" dirty="0">
                 <a:solidFill>
                   <a:srgbClr val="FFFFFF"/>
                 </a:solidFill>
-                <a:latin typeface="Montserrat" pitchFamily="34" charset="0"/>
-                <a:ea typeface="Montserrat" pitchFamily="34" charset="-122"/>
-                <a:cs typeface="Montserrat" pitchFamily="34" charset="-120"/>
+                <a:latin typeface="Unbounded" pitchFamily="34" charset="0"/>
+                <a:ea typeface="Unbounded" pitchFamily="34" charset="-122"/>
+                <a:cs typeface="Unbounded" pitchFamily="34" charset="-120"/>
               </a:rPr>
               <a:t>Unified log: рядок, з якого виростає весь курс</a:t>
             </a:r>
@@ -9289,7 +9289,7 @@
         </p:nvSpPr>
         <p:spPr>
           <a:xfrm>
-            <a:off x="1280160" y="1193140"/>
+            <a:off x="1280160" y="1218895"/>
             <a:ext cx="777240" cy="256032"/>
           </a:xfrm>
           <a:prstGeom prst="roundRect">
@@ -9311,7 +9311,7 @@
         </p:nvSpPr>
         <p:spPr>
           <a:xfrm>
-            <a:off x="1280160" y="1193140"/>
+            <a:off x="1280160" y="1218895"/>
             <a:ext cx="777240" cy="256032"/>
           </a:xfrm>
           <a:prstGeom prst="rect">
@@ -10653,13 +10653,13 @@
               <a:buNone/>
             </a:pPr>
             <a:r>
-              <a:rPr lang="en-US" sz="2400" b="1" dirty="0">
+              <a:rPr lang="en-US" sz="2400" dirty="0">
                 <a:solidFill>
                   <a:srgbClr val="FFFFFF"/>
                 </a:solidFill>
-                <a:latin typeface="Montserrat" pitchFamily="34" charset="0"/>
-                <a:ea typeface="Montserrat" pitchFamily="34" charset="-122"/>
-                <a:cs typeface="Montserrat" pitchFamily="34" charset="-120"/>
+                <a:latin typeface="Unbounded" pitchFamily="34" charset="0"/>
+                <a:ea typeface="Unbounded" pitchFamily="34" charset="-122"/>
+                <a:cs typeface="Unbounded" pitchFamily="34" charset="-120"/>
               </a:rPr>
               <a:t>Mock: керовані збої + чутливість до промпта</a:t>
             </a:r>
@@ -10675,7 +10675,7 @@
         </p:nvSpPr>
         <p:spPr>
           <a:xfrm>
-            <a:off x="1280160" y="1193140"/>
+            <a:off x="1280160" y="1218895"/>
             <a:ext cx="777240" cy="256032"/>
           </a:xfrm>
           <a:prstGeom prst="roundRect">
@@ -10697,7 +10697,7 @@
         </p:nvSpPr>
         <p:spPr>
           <a:xfrm>
-            <a:off x="1280160" y="1193140"/>
+            <a:off x="1280160" y="1218895"/>
             <a:ext cx="777240" cy="256032"/>
           </a:xfrm>
           <a:prstGeom prst="rect">
@@ -12074,13 +12074,13 @@
               <a:buNone/>
             </a:pPr>
             <a:r>
-              <a:rPr lang="en-US" sz="2400" b="1" dirty="0">
+              <a:rPr lang="en-US" sz="2400" dirty="0">
                 <a:solidFill>
                   <a:srgbClr val="FFFFFF"/>
                 </a:solidFill>
-                <a:latin typeface="Montserrat" pitchFamily="34" charset="0"/>
-                <a:ea typeface="Montserrat" pitchFamily="34" charset="-122"/>
-                <a:cs typeface="Montserrat" pitchFamily="34" charset="-120"/>
+                <a:latin typeface="Unbounded" pitchFamily="34" charset="0"/>
+                <a:ea typeface="Unbounded" pitchFamily="34" charset="-122"/>
+                <a:cs typeface="Unbounded" pitchFamily="34" charset="-120"/>
               </a:rPr>
               <a:t>Реальний ключ і розширений стек</a:t>
             </a:r>
@@ -12096,7 +12096,7 @@
         </p:nvSpPr>
         <p:spPr>
           <a:xfrm>
-            <a:off x="1280160" y="1024128"/>
+            <a:off x="1280160" y="1218895"/>
             <a:ext cx="777240" cy="256032"/>
           </a:xfrm>
           <a:prstGeom prst="roundRect">
@@ -12118,7 +12118,7 @@
         </p:nvSpPr>
         <p:spPr>
           <a:xfrm>
-            <a:off x="1280160" y="1024128"/>
+            <a:off x="1280160" y="1218895"/>
             <a:ext cx="777240" cy="256032"/>
           </a:xfrm>
           <a:prstGeom prst="rect">
@@ -12157,7 +12157,7 @@
         </p:nvSpPr>
         <p:spPr>
           <a:xfrm>
-            <a:off x="2167128" y="1024128"/>
+            <a:off x="2167128" y="1218895"/>
             <a:ext cx="864108" cy="256032"/>
           </a:xfrm>
           <a:prstGeom prst="roundRect">
@@ -12179,7 +12179,7 @@
         </p:nvSpPr>
         <p:spPr>
           <a:xfrm>
-            <a:off x="2167128" y="1024128"/>
+            <a:off x="2167128" y="1218895"/>
             <a:ext cx="864108" cy="256032"/>
           </a:xfrm>
           <a:prstGeom prst="rect">
@@ -12845,13 +12845,13 @@
               <a:buNone/>
             </a:pPr>
             <a:r>
-              <a:rPr lang="en-US" sz="2400" b="1" dirty="0">
+              <a:rPr lang="en-US" sz="2400" dirty="0">
                 <a:solidFill>
                   <a:srgbClr val="FFFFFF"/>
                 </a:solidFill>
-                <a:latin typeface="Montserrat" pitchFamily="34" charset="0"/>
-                <a:ea typeface="Montserrat" pitchFamily="34" charset="-122"/>
-                <a:cs typeface="Montserrat" pitchFamily="34" charset="-120"/>
+                <a:latin typeface="Unbounded" pitchFamily="34" charset="0"/>
+                <a:ea typeface="Unbounded" pitchFamily="34" charset="-122"/>
+                <a:cs typeface="Unbounded" pitchFamily="34" charset="-120"/>
               </a:rPr>
               <a:t>Зараз ви побачите — і навіщо</a:t>
             </a:r>
@@ -14117,13 +14117,13 @@
               <a:buNone/>
             </a:pPr>
             <a:r>
-              <a:rPr lang="en-US" sz="2400" b="1" dirty="0">
+              <a:rPr lang="en-US" sz="2400" dirty="0">
                 <a:solidFill>
                   <a:srgbClr val="FFFFFF"/>
                 </a:solidFill>
-                <a:latin typeface="Montserrat" pitchFamily="34" charset="0"/>
-                <a:ea typeface="Montserrat" pitchFamily="34" charset="-122"/>
-                <a:cs typeface="Montserrat" pitchFamily="34" charset="-120"/>
+                <a:latin typeface="Unbounded" pitchFamily="34" charset="0"/>
+                <a:ea typeface="Unbounded" pitchFamily="34" charset="-122"/>
+                <a:cs typeface="Unbounded" pitchFamily="34" charset="-120"/>
               </a:rPr>
               <a:t>Що ви зможете після уроку</a:t>
             </a:r>
@@ -15358,13 +15358,13 @@
               <a:buNone/>
             </a:pPr>
             <a:r>
-              <a:rPr lang="en-US" sz="2400" b="1" dirty="0">
+              <a:rPr lang="en-US" sz="2400" dirty="0">
                 <a:solidFill>
                   <a:srgbClr val="FFFFFF"/>
                 </a:solidFill>
-                <a:latin typeface="Montserrat" pitchFamily="34" charset="0"/>
-                <a:ea typeface="Montserrat" pitchFamily="34" charset="-122"/>
-                <a:cs typeface="Montserrat" pitchFamily="34" charset="-120"/>
+                <a:latin typeface="Unbounded" pitchFamily="34" charset="0"/>
+                <a:ea typeface="Unbounded" pitchFamily="34" charset="-122"/>
+                <a:cs typeface="Unbounded" pitchFamily="34" charset="-120"/>
               </a:rPr>
               <a:t>Лабораторна: п'ять кроків + один опційний</a:t>
             </a:r>
@@ -15380,7 +15380,7 @@
         </p:nvSpPr>
         <p:spPr>
           <a:xfrm>
-            <a:off x="566928" y="1193140"/>
+            <a:off x="566928" y="1218895"/>
             <a:ext cx="950976" cy="256032"/>
           </a:xfrm>
           <a:prstGeom prst="roundRect">
@@ -15402,7 +15402,7 @@
         </p:nvSpPr>
         <p:spPr>
           <a:xfrm>
-            <a:off x="566928" y="1193140"/>
+            <a:off x="566928" y="1218895"/>
             <a:ext cx="950976" cy="256032"/>
           </a:xfrm>
           <a:prstGeom prst="rect">
@@ -16227,13 +16227,13 @@
               <a:buNone/>
             </a:pPr>
             <a:r>
-              <a:rPr lang="en-US" sz="2400" b="1" dirty="0">
+              <a:rPr lang="en-US" sz="2400" dirty="0">
                 <a:solidFill>
                   <a:srgbClr val="FFFFFF"/>
                 </a:solidFill>
-                <a:latin typeface="Montserrat" pitchFamily="34" charset="0"/>
-                <a:ea typeface="Montserrat" pitchFamily="34" charset="-122"/>
-                <a:cs typeface="Montserrat" pitchFamily="34" charset="-120"/>
+                <a:latin typeface="Unbounded" pitchFamily="34" charset="0"/>
+                <a:ea typeface="Unbounded" pitchFamily="34" charset="-122"/>
+                <a:cs typeface="Unbounded" pitchFamily="34" charset="-120"/>
               </a:rPr>
               <a:t>Що це довело</a:t>
             </a:r>
@@ -17507,13 +17507,13 @@
               <a:buNone/>
             </a:pPr>
             <a:r>
-              <a:rPr lang="en-US" sz="2400" b="1" dirty="0">
+              <a:rPr lang="en-US" sz="2400" dirty="0">
                 <a:solidFill>
                   <a:srgbClr val="FFFFFF"/>
                 </a:solidFill>
-                <a:latin typeface="Montserrat" pitchFamily="34" charset="0"/>
-                <a:ea typeface="Montserrat" pitchFamily="34" charset="-122"/>
-                <a:cs typeface="Montserrat" pitchFamily="34" charset="-120"/>
+                <a:latin typeface="Unbounded" pitchFamily="34" charset="0"/>
+                <a:ea typeface="Unbounded" pitchFamily="34" charset="-122"/>
+                <a:cs typeface="Unbounded" pitchFamily="34" charset="-120"/>
               </a:rPr>
               <a:t>Перевір себе</a:t>
             </a:r>
@@ -18406,13 +18406,13 @@
               <a:buNone/>
             </a:pPr>
             <a:r>
-              <a:rPr lang="en-US" sz="2400" b="1" dirty="0">
+              <a:rPr lang="en-US" sz="2400" dirty="0">
                 <a:solidFill>
                   <a:srgbClr val="FFFFFF"/>
                 </a:solidFill>
-                <a:latin typeface="Montserrat" pitchFamily="34" charset="0"/>
-                <a:ea typeface="Montserrat" pitchFamily="34" charset="-122"/>
-                <a:cs typeface="Montserrat" pitchFamily="34" charset="-120"/>
+                <a:latin typeface="Unbounded" pitchFamily="34" charset="0"/>
+                <a:ea typeface="Unbounded" pitchFamily="34" charset="-122"/>
+                <a:cs typeface="Unbounded" pitchFamily="34" charset="-120"/>
               </a:rPr>
               <a:t>Антипатерни тижня</a:t>
             </a:r>
@@ -19303,13 +19303,13 @@
               <a:buNone/>
             </a:pPr>
             <a:r>
-              <a:rPr lang="en-US" sz="2400" b="1" dirty="0">
+              <a:rPr lang="en-US" sz="2400" dirty="0">
                 <a:solidFill>
                   <a:srgbClr val="FFFFFF"/>
                 </a:solidFill>
-                <a:latin typeface="Montserrat" pitchFamily="34" charset="0"/>
-                <a:ea typeface="Montserrat" pitchFamily="34" charset="-122"/>
-                <a:cs typeface="Montserrat" pitchFamily="34" charset="-120"/>
+                <a:latin typeface="Unbounded" pitchFamily="34" charset="0"/>
+                <a:ea typeface="Unbounded" pitchFamily="34" charset="-122"/>
+                <a:cs typeface="Unbounded" pitchFamily="34" charset="-120"/>
               </a:rPr>
               <a:t>Домашнє завдання</a:t>
             </a:r>
@@ -20424,13 +20424,13 @@
               <a:buNone/>
             </a:pPr>
             <a:r>
-              <a:rPr lang="en-US" sz="2400" b="1" dirty="0">
+              <a:rPr lang="en-US" sz="2400" dirty="0">
                 <a:solidFill>
                   <a:srgbClr val="FFFFFF"/>
                 </a:solidFill>
-                <a:latin typeface="Montserrat" pitchFamily="34" charset="0"/>
-                <a:ea typeface="Montserrat" pitchFamily="34" charset="-122"/>
-                <a:cs typeface="Montserrat" pitchFamily="34" charset="-120"/>
+                <a:latin typeface="Unbounded" pitchFamily="34" charset="0"/>
+                <a:ea typeface="Unbounded" pitchFamily="34" charset="-122"/>
+                <a:cs typeface="Unbounded" pitchFamily="34" charset="-120"/>
               </a:rPr>
               <a:t>Маршрут на сьогодні</a:t>
             </a:r>
@@ -22060,13 +22060,13 @@
               <a:buNone/>
             </a:pPr>
             <a:r>
-              <a:rPr lang="en-US" sz="2400" b="1" dirty="0">
+              <a:rPr lang="en-US" sz="2400" dirty="0">
                 <a:solidFill>
                   <a:srgbClr val="FFFFFF"/>
                 </a:solidFill>
-                <a:latin typeface="Montserrat" pitchFamily="34" charset="0"/>
-                <a:ea typeface="Montserrat" pitchFamily="34" charset="-122"/>
-                <a:cs typeface="Montserrat" pitchFamily="34" charset="-120"/>
+                <a:latin typeface="Unbounded" pitchFamily="34" charset="0"/>
+                <a:ea typeface="Unbounded" pitchFamily="34" charset="-122"/>
+                <a:cs typeface="Unbounded" pitchFamily="34" charset="-120"/>
               </a:rPr>
               <a:t>Терміни, якими користуватимемось</a:t>
             </a:r>
@@ -22082,7 +22082,7 @@
         </p:nvSpPr>
         <p:spPr>
           <a:xfrm>
-            <a:off x="566928" y="1005840"/>
+            <a:off x="566928" y="1200607"/>
             <a:ext cx="6839712" cy="256032"/>
           </a:xfrm>
           <a:prstGeom prst="rect">
@@ -22124,7 +22124,7 @@
         </p:nvSpPr>
         <p:spPr>
           <a:xfrm>
-            <a:off x="566928" y="1271016"/>
+            <a:off x="566928" y="1465783"/>
             <a:ext cx="777240" cy="256032"/>
           </a:xfrm>
           <a:prstGeom prst="roundRect">
@@ -22146,7 +22146,7 @@
         </p:nvSpPr>
         <p:spPr>
           <a:xfrm>
-            <a:off x="566928" y="1271016"/>
+            <a:off x="566928" y="1465783"/>
             <a:ext cx="777240" cy="256032"/>
           </a:xfrm>
           <a:prstGeom prst="rect">
@@ -23055,13 +23055,13 @@
               <a:buNone/>
             </a:pPr>
             <a:r>
-              <a:rPr lang="en-US" sz="2400" b="1" dirty="0">
+              <a:rPr lang="en-US" sz="2400" dirty="0">
                 <a:solidFill>
                   <a:srgbClr val="FFFFFF"/>
                 </a:solidFill>
-                <a:latin typeface="Montserrat" pitchFamily="34" charset="0"/>
-                <a:ea typeface="Montserrat" pitchFamily="34" charset="-122"/>
-                <a:cs typeface="Montserrat" pitchFamily="34" charset="-120"/>
+                <a:latin typeface="Unbounded" pitchFamily="34" charset="0"/>
+                <a:ea typeface="Unbounded" pitchFamily="34" charset="-122"/>
+                <a:cs typeface="Unbounded" pitchFamily="34" charset="-120"/>
               </a:rPr>
               <a:t>Чому демо за день — а прод ніколи?</a:t>
             </a:r>
@@ -23077,7 +23077,7 @@
         </p:nvSpPr>
         <p:spPr>
           <a:xfrm>
-            <a:off x="1280160" y="1024128"/>
+            <a:off x="1280160" y="1218895"/>
             <a:ext cx="777240" cy="256032"/>
           </a:xfrm>
           <a:prstGeom prst="roundRect">
@@ -23099,7 +23099,7 @@
         </p:nvSpPr>
         <p:spPr>
           <a:xfrm>
-            <a:off x="1280160" y="1024128"/>
+            <a:off x="1280160" y="1218895"/>
             <a:ext cx="777240" cy="256032"/>
           </a:xfrm>
           <a:prstGeom prst="rect">
@@ -24223,13 +24223,13 @@
               <a:buNone/>
             </a:pPr>
             <a:r>
-              <a:rPr lang="en-US" sz="2400" b="1" dirty="0">
+              <a:rPr lang="en-US" sz="2400" dirty="0">
                 <a:solidFill>
                   <a:srgbClr val="FFFFFF"/>
                 </a:solidFill>
-                <a:latin typeface="Montserrat" pitchFamily="34" charset="0"/>
-                <a:ea typeface="Montserrat" pitchFamily="34" charset="-122"/>
-                <a:cs typeface="Montserrat" pitchFamily="34" charset="-120"/>
+                <a:latin typeface="Unbounded" pitchFamily="34" charset="0"/>
+                <a:ea typeface="Unbounded" pitchFamily="34" charset="-122"/>
+                <a:cs typeface="Unbounded" pitchFamily="34" charset="-120"/>
               </a:rPr>
               <a:t>Чотири властивості, яких немає у звичайних сервісів</a:t>
             </a:r>
@@ -24245,7 +24245,7 @@
         </p:nvSpPr>
         <p:spPr>
           <a:xfrm>
-            <a:off x="1280160" y="1193140"/>
+            <a:off x="1280160" y="1218895"/>
             <a:ext cx="777240" cy="256032"/>
           </a:xfrm>
           <a:prstGeom prst="roundRect">
@@ -24267,7 +24267,7 @@
         </p:nvSpPr>
         <p:spPr>
           <a:xfrm>
-            <a:off x="1280160" y="1193140"/>
+            <a:off x="1280160" y="1218895"/>
             <a:ext cx="777240" cy="256032"/>
           </a:xfrm>
           <a:prstGeom prst="rect">
@@ -25860,13 +25860,13 @@
               <a:buNone/>
             </a:pPr>
             <a:r>
-              <a:rPr lang="en-US" sz="2400" b="1" dirty="0">
+              <a:rPr lang="en-US" sz="2400" dirty="0">
                 <a:solidFill>
                   <a:srgbClr val="FFFFFF"/>
                 </a:solidFill>
-                <a:latin typeface="Montserrat" pitchFamily="34" charset="0"/>
-                <a:ea typeface="Montserrat" pitchFamily="34" charset="-122"/>
-                <a:cs typeface="Montserrat" pitchFamily="34" charset="-120"/>
+                <a:latin typeface="Unbounded" pitchFamily="34" charset="0"/>
+                <a:ea typeface="Unbounded" pitchFamily="34" charset="-122"/>
+                <a:cs typeface="Unbounded" pitchFamily="34" charset="-120"/>
               </a:rPr>
               <a:t>Анатомія виклику: що летить у модель</a:t>
             </a:r>
@@ -25882,7 +25882,7 @@
         </p:nvSpPr>
         <p:spPr>
           <a:xfrm>
-            <a:off x="1280160" y="1193140"/>
+            <a:off x="1280160" y="1218895"/>
             <a:ext cx="777240" cy="256032"/>
           </a:xfrm>
           <a:prstGeom prst="roundRect">
@@ -25904,7 +25904,7 @@
         </p:nvSpPr>
         <p:spPr>
           <a:xfrm>
-            <a:off x="1280160" y="1193140"/>
+            <a:off x="1280160" y="1218895"/>
             <a:ext cx="777240" cy="256032"/>
           </a:xfrm>
           <a:prstGeom prst="rect">
@@ -26742,13 +26742,13 @@
               <a:buNone/>
             </a:pPr>
             <a:r>
-              <a:rPr lang="en-US" sz="2400" b="1" dirty="0">
+              <a:rPr lang="en-US" sz="2400" dirty="0">
                 <a:solidFill>
                   <a:srgbClr val="FFFFFF"/>
                 </a:solidFill>
-                <a:latin typeface="Montserrat" pitchFamily="34" charset="0"/>
-                <a:ea typeface="Montserrat" pitchFamily="34" charset="-122"/>
-                <a:cs typeface="Montserrat" pitchFamily="34" charset="-120"/>
+                <a:latin typeface="Unbounded" pitchFamily="34" charset="0"/>
+                <a:ea typeface="Unbounded" pitchFamily="34" charset="-122"/>
+                <a:cs typeface="Unbounded" pitchFamily="34" charset="-120"/>
               </a:rPr>
               <a:t>Що повертається: не тільки текст</a:t>
             </a:r>
@@ -26764,7 +26764,7 @@
         </p:nvSpPr>
         <p:spPr>
           <a:xfrm>
-            <a:off x="1280160" y="1024128"/>
+            <a:off x="1280160" y="1218895"/>
             <a:ext cx="777240" cy="256032"/>
           </a:xfrm>
           <a:prstGeom prst="roundRect">
@@ -26786,7 +26786,7 @@
         </p:nvSpPr>
         <p:spPr>
           <a:xfrm>
-            <a:off x="1280160" y="1024128"/>
+            <a:off x="1280160" y="1218895"/>
             <a:ext cx="777240" cy="256032"/>
           </a:xfrm>
           <a:prstGeom prst="rect">
@@ -28284,13 +28284,13 @@
               <a:buNone/>
             </a:pPr>
             <a:r>
-              <a:rPr lang="en-US" sz="2400" b="1" dirty="0">
+              <a:rPr lang="en-US" sz="2400" dirty="0">
                 <a:solidFill>
                   <a:srgbClr val="FFFFFF"/>
                 </a:solidFill>
-                <a:latin typeface="Montserrat" pitchFamily="34" charset="0"/>
-                <a:ea typeface="Montserrat" pitchFamily="34" charset="-122"/>
-                <a:cs typeface="Montserrat" pitchFamily="34" charset="-120"/>
+                <a:latin typeface="Unbounded" pitchFamily="34" charset="0"/>
+                <a:ea typeface="Unbounded" pitchFamily="34" charset="-122"/>
+                <a:cs typeface="Unbounded" pitchFamily="34" charset="-120"/>
               </a:rPr>
               <a:t>Три ціни в одному виклику</a:t>
             </a:r>

--- a/docs/decks/L01.pptx
+++ b/docs/decks/L01.pptx
@@ -2732,7 +2732,7 @@
             <a:lvl1pPr>
               <a:defRPr sz="850">
                 <a:solidFill>
-                  <a:srgbClr val="8A82A0"/>
+                  <a:srgbClr val="9A94AA"/>
                 </a:solidFill>
                 <a:latin typeface="Courier New"/>
                 <a:ea typeface="Courier New"/>
@@ -2814,6 +2814,62 @@
 </p:sldLayout>
 </file>
 
+<file path=ppt/slideLayouts/slideLayout3.xml><?xml version="1.0" encoding="utf-8"?>
+<p:sldLayout xmlns:a="http://schemas.openxmlformats.org/drawingml/2006/main" xmlns:r="http://schemas.openxmlformats.org/officeDocument/2006/relationships" xmlns:p="http://schemas.openxmlformats.org/presentationml/2006/main" preserve="1">
+  <p:cSld name="NEO_COVER">
+    <p:bg>
+      <p:bgPr>
+        <a:solidFill>
+          <a:srgbClr val="000000"/>
+        </a:solidFill>
+      </p:bgPr>
+    </p:bg>
+    <p:spTree>
+      <p:nvGrpSpPr>
+        <p:cNvPr id="1" name=""/>
+        <p:cNvGrpSpPr/>
+        <p:nvPr/>
+      </p:nvGrpSpPr>
+      <p:grpSpPr>
+        <a:xfrm>
+          <a:off x="0" y="0"/>
+          <a:ext cx="0" cy="0"/>
+          <a:chOff x="0" y="0"/>
+          <a:chExt cx="0" cy="0"/>
+        </a:xfrm>
+      </p:grpSpPr>
+      <p:pic>
+        <p:nvPicPr>
+          <p:cNvPr id="2" name="Image 0" descr="preencoded.png">    </p:cNvPr>
+          <p:cNvPicPr>
+            <a:picLocks noChangeAspect="1"/>
+          </p:cNvPicPr>
+          <p:nvPr/>
+        </p:nvPicPr>
+        <p:blipFill>
+          <a:blip r:embed="rId1"/>
+          <a:stretch>
+            <a:fillRect/>
+          </a:stretch>
+        </p:blipFill>
+        <p:spPr>
+          <a:xfrm>
+            <a:off x="0" y="0"/>
+            <a:ext cx="12191695" cy="6858000"/>
+          </a:xfrm>
+          <a:prstGeom prst="rect">
+            <a:avLst/>
+          </a:prstGeom>
+        </p:spPr>
+      </p:pic>
+    </p:spTree>
+  </p:cSld>
+  <p:clrMapOvr>
+    <a:masterClrMapping/>
+  </p:clrMapOvr>
+</p:sldLayout>
+</file>
+
 <file path=ppt/slideMasters/slideMaster1.xml><?xml version="1.0" encoding="utf-8"?>
 <p:sldMaster xmlns:a="http://schemas.openxmlformats.org/drawingml/2006/main" xmlns:r="http://schemas.openxmlformats.org/officeDocument/2006/relationships" xmlns:p="http://schemas.openxmlformats.org/presentationml/2006/main">
   <p:cSld>
@@ -2861,7 +2917,7 @@
             <a:lvl1pPr>
               <a:defRPr sz="850">
                 <a:solidFill>
-                  <a:srgbClr val="8A82A0"/>
+                  <a:srgbClr val="9A94AA"/>
                 </a:solidFill>
                 <a:latin typeface="Courier New"/>
                 <a:ea typeface="Courier New"/>
@@ -2885,6 +2941,7 @@
   <p:sldLayoutIdLst>
     <p:sldLayoutId id="2147483649" r:id="rId1"/>
     <p:sldLayoutId id="2147483650" r:id="rId2"/>
+    <p:sldLayoutId id="2147483651" r:id="rId3"/>
   </p:sldLayoutIdLst>
   <p:hf sldNum="0" hdr="0" ftr="0" dt="0"/>
   <p:txStyles>
@@ -3214,7 +3271,7 @@
           </a:prstGeom>
           <a:ln w="12700">
             <a:solidFill>
-              <a:srgbClr val="9B7BE8">
+              <a:srgbClr val="8F72E6">
                 <a:alpha val="24000"/>
               </a:srgbClr>
             </a:solidFill>
@@ -3240,7 +3297,7 @@
           </a:prstGeom>
           <a:ln w="12700">
             <a:solidFill>
-              <a:srgbClr val="9B7BE8">
+              <a:srgbClr val="8F72E6">
                 <a:alpha val="42000"/>
               </a:srgbClr>
             </a:solidFill>
@@ -3266,7 +3323,7 @@
           </a:prstGeom>
           <a:ln w="12700">
             <a:solidFill>
-              <a:srgbClr val="9B7BE8">
+              <a:srgbClr val="8F72E6">
                 <a:alpha val="66000"/>
               </a:srgbClr>
             </a:solidFill>
@@ -3301,7 +3358,7 @@
             <a:r>
               <a:rPr lang="en-US" sz="1200" b="1" spc="300" kern="0" dirty="0">
                 <a:solidFill>
-                  <a:srgbClr val="C9B8FB"/>
+                  <a:srgbClr val="C4B3F5"/>
                 </a:solidFill>
                 <a:latin typeface="Courier New" pitchFamily="34" charset="0"/>
                 <a:ea typeface="Courier New" pitchFamily="34" charset="-122"/>
@@ -3405,7 +3462,7 @@
             <a:r>
               <a:rPr lang="en-US" sz="1500" dirty="0">
                 <a:solidFill>
-                  <a:srgbClr val="C9B8FB"/>
+                  <a:srgbClr val="C4B3F5"/>
                 </a:solidFill>
                 <a:latin typeface="Montserrat" pitchFamily="34" charset="0"/>
                 <a:ea typeface="Montserrat" pitchFamily="34" charset="-122"/>
@@ -3496,7 +3553,7 @@
           </a:prstGeom>
           <a:ln w="12700">
             <a:solidFill>
-              <a:srgbClr val="9B7BE8">
+              <a:srgbClr val="8F72E6">
                 <a:alpha val="60000"/>
               </a:srgbClr>
             </a:solidFill>
@@ -3531,7 +3588,7 @@
             <a:r>
               <a:rPr lang="en-US" sz="900" dirty="0">
                 <a:solidFill>
-                  <a:srgbClr val="C9B8FB"/>
+                  <a:srgbClr val="C4B3F5"/>
                 </a:solidFill>
                 <a:latin typeface="Courier New" pitchFamily="34" charset="0"/>
                 <a:ea typeface="Courier New" pitchFamily="34" charset="-122"/>
@@ -3561,7 +3618,7 @@
           </a:prstGeom>
           <a:ln w="12700">
             <a:solidFill>
-              <a:srgbClr val="9B7BE8">
+              <a:srgbClr val="8F72E6">
                 <a:alpha val="60000"/>
               </a:srgbClr>
             </a:solidFill>
@@ -3596,7 +3653,7 @@
             <a:r>
               <a:rPr lang="en-US" sz="900" dirty="0">
                 <a:solidFill>
-                  <a:srgbClr val="C9B8FB"/>
+                  <a:srgbClr val="C4B3F5"/>
                 </a:solidFill>
                 <a:latin typeface="Courier New" pitchFamily="34" charset="0"/>
                 <a:ea typeface="Courier New" pitchFamily="34" charset="-122"/>
@@ -3626,7 +3683,7 @@
           </a:prstGeom>
           <a:ln w="12700">
             <a:solidFill>
-              <a:srgbClr val="9B7BE8">
+              <a:srgbClr val="8F72E6">
                 <a:alpha val="60000"/>
               </a:srgbClr>
             </a:solidFill>
@@ -3661,7 +3718,7 @@
             <a:r>
               <a:rPr lang="en-US" sz="900" dirty="0">
                 <a:solidFill>
-                  <a:srgbClr val="C9B8FB"/>
+                  <a:srgbClr val="C4B3F5"/>
                 </a:solidFill>
                 <a:latin typeface="Courier New" pitchFamily="34" charset="0"/>
                 <a:ea typeface="Courier New" pitchFamily="34" charset="-122"/>
@@ -3691,7 +3748,7 @@
           </a:prstGeom>
           <a:ln w="12700">
             <a:solidFill>
-              <a:srgbClr val="9B7BE8">
+              <a:srgbClr val="8F72E6">
                 <a:alpha val="60000"/>
               </a:srgbClr>
             </a:solidFill>
@@ -3726,7 +3783,7 @@
             <a:r>
               <a:rPr lang="en-US" sz="900" dirty="0">
                 <a:solidFill>
-                  <a:srgbClr val="C9B8FB"/>
+                  <a:srgbClr val="C4B3F5"/>
                 </a:solidFill>
                 <a:latin typeface="Courier New" pitchFamily="34" charset="0"/>
                 <a:ea typeface="Courier New" pitchFamily="34" charset="-122"/>
@@ -3756,7 +3813,7 @@
           </a:prstGeom>
           <a:ln w="12700">
             <a:solidFill>
-              <a:srgbClr val="9B7BE8">
+              <a:srgbClr val="8F72E6">
                 <a:alpha val="60000"/>
               </a:srgbClr>
             </a:solidFill>
@@ -3791,7 +3848,7 @@
             <a:r>
               <a:rPr lang="en-US" sz="900" dirty="0">
                 <a:solidFill>
-                  <a:srgbClr val="C9B8FB"/>
+                  <a:srgbClr val="C4B3F5"/>
                 </a:solidFill>
                 <a:latin typeface="Courier New" pitchFamily="34" charset="0"/>
                 <a:ea typeface="Courier New" pitchFamily="34" charset="-122"/>
@@ -3855,7 +3912,7 @@
             <a:r>
               <a:rPr lang="en-US" sz="2600" b="1" dirty="0">
                 <a:solidFill>
-                  <a:srgbClr val="C9A6FF"/>
+                  <a:srgbClr val="A98BFF"/>
                 </a:solidFill>
                 <a:latin typeface="Courier New" pitchFamily="34" charset="0"/>
                 <a:ea typeface="Courier New" pitchFamily="34" charset="-122"/>
@@ -3923,9 +3980,14 @@
             </a:avLst>
           </a:prstGeom>
           <a:solidFill>
-            <a:srgbClr val="C9A6FF"/>
+            <a:srgbClr val="1A0B3D"/>
           </a:solidFill>
-          <a:ln/>
+          <a:ln w="12700">
+            <a:solidFill>
+              <a:srgbClr val="5A05F4"/>
+            </a:solidFill>
+            <a:prstDash val="solid"/>
+          </a:ln>
         </p:spPr>
       </p:sp>
       <p:sp>
@@ -3955,7 +4017,7 @@
             <a:r>
               <a:rPr lang="en-US" sz="900" b="1" spc="100" kern="0" dirty="0">
                 <a:solidFill>
-                  <a:srgbClr val="1C1140"/>
+                  <a:srgbClr val="A98BFF"/>
                 </a:solidFill>
                 <a:latin typeface="Courier New" pitchFamily="34" charset="0"/>
                 <a:ea typeface="Courier New" pitchFamily="34" charset="-122"/>
@@ -4008,11 +4070,11 @@
             </a:avLst>
           </a:prstGeom>
           <a:solidFill>
-            <a:srgbClr val="17141F"/>
+            <a:srgbClr val="000000"/>
           </a:solidFill>
           <a:ln w="12700">
             <a:solidFill>
-              <a:srgbClr val="2E2A3A"/>
+              <a:srgbClr val="5E4F85"/>
             </a:solidFill>
             <a:prstDash val="solid"/>
           </a:ln>
@@ -4146,7 +4208,7 @@
             <a:r>
               <a:rPr lang="en-US" sz="1200" dirty="0">
                 <a:solidFill>
-                  <a:srgbClr val="AFA9BE"/>
+                  <a:srgbClr val="C9C4D6"/>
                 </a:solidFill>
                 <a:latin typeface="Montserrat" pitchFamily="34" charset="0"/>
                 <a:ea typeface="Montserrat" pitchFamily="34" charset="-122"/>
@@ -4175,11 +4237,11 @@
             </a:avLst>
           </a:prstGeom>
           <a:solidFill>
-            <a:srgbClr val="17141F"/>
+            <a:srgbClr val="000000"/>
           </a:solidFill>
           <a:ln w="12700">
             <a:solidFill>
-              <a:srgbClr val="2E2A3A"/>
+              <a:srgbClr val="5E4F85"/>
             </a:solidFill>
             <a:prstDash val="solid"/>
           </a:ln>
@@ -4313,7 +4375,7 @@
             <a:r>
               <a:rPr lang="en-US" sz="1200" dirty="0">
                 <a:solidFill>
-                  <a:srgbClr val="AFA9BE"/>
+                  <a:srgbClr val="C9C4D6"/>
                 </a:solidFill>
                 <a:latin typeface="Montserrat" pitchFamily="34" charset="0"/>
                 <a:ea typeface="Montserrat" pitchFamily="34" charset="-122"/>
@@ -4342,11 +4404,11 @@
             </a:avLst>
           </a:prstGeom>
           <a:solidFill>
-            <a:srgbClr val="17141F"/>
+            <a:srgbClr val="000000"/>
           </a:solidFill>
           <a:ln w="12700">
             <a:solidFill>
-              <a:srgbClr val="2E2A3A"/>
+              <a:srgbClr val="5E4F85"/>
             </a:solidFill>
             <a:prstDash val="solid"/>
           </a:ln>
@@ -4480,7 +4542,7 @@
             <a:r>
               <a:rPr lang="en-US" sz="1200" dirty="0">
                 <a:solidFill>
-                  <a:srgbClr val="AFA9BE"/>
+                  <a:srgbClr val="C9C4D6"/>
                 </a:solidFill>
                 <a:latin typeface="Montserrat" pitchFamily="34" charset="0"/>
                 <a:ea typeface="Montserrat" pitchFamily="34" charset="-122"/>
@@ -4509,9 +4571,14 @@
             </a:avLst>
           </a:prstGeom>
           <a:solidFill>
-            <a:srgbClr val="1C1140"/>
+            <a:srgbClr val="1A0B3D"/>
           </a:solidFill>
-          <a:ln/>
+          <a:ln w="12700">
+            <a:solidFill>
+              <a:srgbClr val="5A05F4"/>
+            </a:solidFill>
+            <a:prstDash val="solid"/>
+          </a:ln>
         </p:spPr>
       </p:sp>
       <p:sp>
@@ -4541,7 +4608,7 @@
             <a:r>
               <a:rPr lang="en-US" sz="1150" b="1" dirty="0">
                 <a:solidFill>
-                  <a:srgbClr val="C9A6FF"/>
+                  <a:srgbClr val="A98BFF"/>
                 </a:solidFill>
                 <a:latin typeface="Courier New" pitchFamily="34" charset="0"/>
                 <a:ea typeface="Courier New" pitchFamily="34" charset="-122"/>
@@ -4570,7 +4637,7 @@
           <a:noFill/>
           <a:ln w="15875">
             <a:solidFill>
-              <a:srgbClr val="9B7BE8"/>
+              <a:srgbClr val="8F72E6"/>
             </a:solidFill>
             <a:prstDash val="solid"/>
           </a:ln>
@@ -4591,7 +4658,7 @@
             <a:avLst/>
           </a:prstGeom>
           <a:solidFill>
-            <a:srgbClr val="9B7BE8"/>
+            <a:srgbClr val="8F72E6"/>
           </a:solidFill>
           <a:ln/>
         </p:spPr>
@@ -4613,11 +4680,11 @@
             </a:avLst>
           </a:prstGeom>
           <a:solidFill>
-            <a:srgbClr val="17141F"/>
+            <a:srgbClr val="000000"/>
           </a:solidFill>
           <a:ln w="12700">
             <a:solidFill>
-              <a:srgbClr val="2E2A3A"/>
+              <a:srgbClr val="5E4F85"/>
             </a:solidFill>
             <a:prstDash val="solid"/>
           </a:ln>
@@ -4679,7 +4746,7 @@
           <a:noFill/>
           <a:ln w="15875">
             <a:solidFill>
-              <a:srgbClr val="9B7BE8"/>
+              <a:srgbClr val="8F72E6"/>
             </a:solidFill>
             <a:prstDash val="solid"/>
           </a:ln>
@@ -4700,7 +4767,7 @@
             <a:avLst/>
           </a:prstGeom>
           <a:solidFill>
-            <a:srgbClr val="9B7BE8"/>
+            <a:srgbClr val="8F72E6"/>
           </a:solidFill>
           <a:ln/>
         </p:spPr>
@@ -4722,9 +4789,14 @@
             </a:avLst>
           </a:prstGeom>
           <a:solidFill>
-            <a:srgbClr val="2E1418"/>
+            <a:srgbClr val="1A0808"/>
           </a:solidFill>
-          <a:ln/>
+          <a:ln w="12700">
+            <a:solidFill>
+              <a:srgbClr val="FF6B6B"/>
+            </a:solidFill>
+            <a:prstDash val="solid"/>
+          </a:ln>
         </p:spPr>
       </p:sp>
       <p:sp>
@@ -4754,7 +4826,7 @@
             <a:r>
               <a:rPr lang="en-US" sz="1150" b="1" dirty="0">
                 <a:solidFill>
-                  <a:srgbClr val="FF7B7B"/>
+                  <a:srgbClr val="FF6B6B"/>
                 </a:solidFill>
                 <a:latin typeface="Courier New" pitchFamily="34" charset="0"/>
                 <a:ea typeface="Courier New" pitchFamily="34" charset="-122"/>
@@ -4783,9 +4855,14 @@
             </a:avLst>
           </a:prstGeom>
           <a:solidFill>
-            <a:srgbClr val="102A20"/>
+            <a:srgbClr val="06180F"/>
           </a:solidFill>
-          <a:ln/>
+          <a:ln w="12700">
+            <a:solidFill>
+              <a:srgbClr val="3FCF8E"/>
+            </a:solidFill>
+            <a:prstDash val="solid"/>
+          </a:ln>
         </p:spPr>
       </p:sp>
       <p:sp>
@@ -4815,7 +4892,7 @@
             <a:r>
               <a:rPr lang="en-US" sz="950" b="1" spc="150" kern="0" dirty="0">
                 <a:solidFill>
-                  <a:srgbClr val="5FD6A0"/>
+                  <a:srgbClr val="3FCF8E"/>
                 </a:solidFill>
                 <a:latin typeface="Courier New" pitchFamily="34" charset="0"/>
                 <a:ea typeface="Courier New" pitchFamily="34" charset="-122"/>
@@ -4899,7 +4976,7 @@
             <a:lvl1pPr>
               <a:defRPr sz="850">
                 <a:solidFill>
-                  <a:srgbClr val="8A82A0"/>
+                  <a:srgbClr val="9A94AA"/>
                 </a:solidFill>
                 <a:latin typeface="Courier New"/>
                 <a:ea typeface="Courier New"/>
@@ -4969,7 +5046,7 @@
             <a:r>
               <a:rPr lang="en-US" sz="2600" b="1" dirty="0">
                 <a:solidFill>
-                  <a:srgbClr val="C9A6FF"/>
+                  <a:srgbClr val="A98BFF"/>
                 </a:solidFill>
                 <a:latin typeface="Courier New" pitchFamily="34" charset="0"/>
                 <a:ea typeface="Courier New" pitchFamily="34" charset="-122"/>
@@ -5037,9 +5114,14 @@
             </a:avLst>
           </a:prstGeom>
           <a:solidFill>
-            <a:srgbClr val="C9A6FF"/>
+            <a:srgbClr val="1A0B3D"/>
           </a:solidFill>
-          <a:ln/>
+          <a:ln w="12700">
+            <a:solidFill>
+              <a:srgbClr val="5A05F4"/>
+            </a:solidFill>
+            <a:prstDash val="solid"/>
+          </a:ln>
         </p:spPr>
       </p:sp>
       <p:sp>
@@ -5069,7 +5151,7 @@
             <a:r>
               <a:rPr lang="en-US" sz="900" b="1" spc="100" kern="0" dirty="0">
                 <a:solidFill>
-                  <a:srgbClr val="1C1140"/>
+                  <a:srgbClr val="A98BFF"/>
                 </a:solidFill>
                 <a:latin typeface="Courier New" pitchFamily="34" charset="0"/>
                 <a:ea typeface="Courier New" pitchFamily="34" charset="-122"/>
@@ -5132,7 +5214,7 @@
             <a:r>
               <a:rPr lang="en-US" sz="950" b="1" spc="100" kern="0" dirty="0">
                 <a:solidFill>
-                  <a:srgbClr val="8A82A0"/>
+                  <a:srgbClr val="9A94AA"/>
                 </a:solidFill>
                 <a:latin typeface="Courier New" pitchFamily="34" charset="0"/>
                 <a:ea typeface="Courier New" pitchFamily="34" charset="-122"/>
@@ -5161,7 +5243,7 @@
             </a:avLst>
           </a:prstGeom>
           <a:solidFill>
-            <a:srgbClr val="1C1140"/>
+            <a:srgbClr val="1A0B3D"/>
           </a:solidFill>
           <a:ln/>
         </p:spPr>
@@ -5193,7 +5275,7 @@
             <a:r>
               <a:rPr lang="en-US" sz="1050" dirty="0">
                 <a:solidFill>
-                  <a:srgbClr val="C9A6FF"/>
+                  <a:srgbClr val="A98BFF"/>
                 </a:solidFill>
                 <a:latin typeface="Montserrat" pitchFamily="34" charset="0"/>
                 <a:ea typeface="Montserrat" pitchFamily="34" charset="-122"/>
@@ -5293,7 +5375,7 @@
             <a:r>
               <a:rPr lang="en-US" sz="950" b="1" spc="100" kern="0" dirty="0">
                 <a:solidFill>
-                  <a:srgbClr val="8A82A0"/>
+                  <a:srgbClr val="9A94AA"/>
                 </a:solidFill>
                 <a:latin typeface="Courier New" pitchFamily="34" charset="0"/>
                 <a:ea typeface="Courier New" pitchFamily="34" charset="-122"/>
@@ -5322,7 +5404,7 @@
             </a:avLst>
           </a:prstGeom>
           <a:solidFill>
-            <a:srgbClr val="1C1140"/>
+            <a:srgbClr val="1A0B3D"/>
           </a:solidFill>
           <a:ln/>
         </p:spPr>
@@ -5354,7 +5436,7 @@
             <a:r>
               <a:rPr lang="en-US" sz="1050" dirty="0">
                 <a:solidFill>
-                  <a:srgbClr val="C9A6FF"/>
+                  <a:srgbClr val="A98BFF"/>
                 </a:solidFill>
                 <a:latin typeface="Montserrat" pitchFamily="34" charset="0"/>
                 <a:ea typeface="Montserrat" pitchFamily="34" charset="-122"/>
@@ -5454,7 +5536,7 @@
             <a:r>
               <a:rPr lang="en-US" sz="1050" i="1" dirty="0">
                 <a:solidFill>
-                  <a:srgbClr val="8A82A0"/>
+                  <a:srgbClr val="9A94AA"/>
                 </a:solidFill>
                 <a:latin typeface="Montserrat" pitchFamily="34" charset="0"/>
                 <a:ea typeface="Montserrat" pitchFamily="34" charset="-122"/>
@@ -5483,9 +5565,14 @@
             </a:avLst>
           </a:prstGeom>
           <a:solidFill>
-            <a:srgbClr val="2E1418"/>
+            <a:srgbClr val="1A0808"/>
           </a:solidFill>
-          <a:ln/>
+          <a:ln w="12700">
+            <a:solidFill>
+              <a:srgbClr val="FF6B6B"/>
+            </a:solidFill>
+            <a:prstDash val="solid"/>
+          </a:ln>
         </p:spPr>
       </p:sp>
       <p:sp>
@@ -5515,7 +5602,7 @@
             <a:r>
               <a:rPr lang="en-US" sz="950" b="1" spc="150" kern="0" dirty="0">
                 <a:solidFill>
-                  <a:srgbClr val="FF7B7B"/>
+                  <a:srgbClr val="FF6B6B"/>
                 </a:solidFill>
                 <a:latin typeface="Courier New" pitchFamily="34" charset="0"/>
                 <a:ea typeface="Courier New" pitchFamily="34" charset="-122"/>
@@ -5596,7 +5683,7 @@
             <a:r>
               <a:rPr lang="en-US" sz="1200" b="1" dirty="0">
                 <a:solidFill>
-                  <a:srgbClr val="C9A6FF"/>
+                  <a:srgbClr val="A98BFF"/>
                 </a:solidFill>
                 <a:latin typeface="Courier New" pitchFamily="34" charset="0"/>
                 <a:ea typeface="Courier New" pitchFamily="34" charset="-122"/>
@@ -5610,7 +5697,7 @@
             <a:r>
               <a:rPr lang="en-US" sz="1200" dirty="0">
                 <a:solidFill>
-                  <a:srgbClr val="AFA9BE"/>
+                  <a:srgbClr val="C9C4D6"/>
                 </a:solidFill>
                 <a:latin typeface="Montserrat" pitchFamily="34" charset="0"/>
                 <a:ea typeface="Montserrat" pitchFamily="34" charset="-122"/>
@@ -5652,7 +5739,7 @@
             <a:lvl1pPr>
               <a:defRPr sz="850">
                 <a:solidFill>
-                  <a:srgbClr val="8A82A0"/>
+                  <a:srgbClr val="9A94AA"/>
                 </a:solidFill>
                 <a:latin typeface="Courier New"/>
                 <a:ea typeface="Courier New"/>
@@ -5722,7 +5809,7 @@
             <a:r>
               <a:rPr lang="en-US" sz="2600" b="1" dirty="0">
                 <a:solidFill>
-                  <a:srgbClr val="C9A6FF"/>
+                  <a:srgbClr val="A98BFF"/>
                 </a:solidFill>
                 <a:latin typeface="Courier New" pitchFamily="34" charset="0"/>
                 <a:ea typeface="Courier New" pitchFamily="34" charset="-122"/>
@@ -5790,9 +5877,14 @@
             </a:avLst>
           </a:prstGeom>
           <a:solidFill>
-            <a:srgbClr val="C9A6FF"/>
+            <a:srgbClr val="1A0B3D"/>
           </a:solidFill>
-          <a:ln/>
+          <a:ln w="12700">
+            <a:solidFill>
+              <a:srgbClr val="5A05F4"/>
+            </a:solidFill>
+            <a:prstDash val="solid"/>
+          </a:ln>
         </p:spPr>
       </p:sp>
       <p:sp>
@@ -5822,7 +5914,7 @@
             <a:r>
               <a:rPr lang="en-US" sz="900" b="1" spc="100" kern="0" dirty="0">
                 <a:solidFill>
-                  <a:srgbClr val="1C1140"/>
+                  <a:srgbClr val="A98BFF"/>
                 </a:solidFill>
                 <a:latin typeface="Courier New" pitchFamily="34" charset="0"/>
                 <a:ea typeface="Courier New" pitchFamily="34" charset="-122"/>
@@ -5875,7 +5967,7 @@
             </a:avLst>
           </a:prstGeom>
           <a:solidFill>
-            <a:srgbClr val="102A20"/>
+            <a:srgbClr val="06180F"/>
           </a:solidFill>
           <a:ln/>
         </p:spPr>
@@ -5907,7 +5999,7 @@
             <a:r>
               <a:rPr lang="en-US" sz="1000" b="1" spc="150" kern="0" dirty="0">
                 <a:solidFill>
-                  <a:srgbClr val="5FD6A0"/>
+                  <a:srgbClr val="3FCF8E"/>
                 </a:solidFill>
                 <a:latin typeface="Courier New" pitchFamily="34" charset="0"/>
                 <a:ea typeface="Courier New" pitchFamily="34" charset="-122"/>
@@ -5936,7 +6028,7 @@
             </a:avLst>
           </a:prstGeom>
           <a:solidFill>
-            <a:srgbClr val="17141F"/>
+            <a:srgbClr val="000000"/>
           </a:solidFill>
           <a:ln/>
         </p:spPr>
@@ -5968,7 +6060,7 @@
             <a:r>
               <a:rPr lang="en-US" sz="1150" b="1" dirty="0">
                 <a:solidFill>
-                  <a:srgbClr val="5FD6A0"/>
+                  <a:srgbClr val="3FCF8E"/>
                 </a:solidFill>
                 <a:latin typeface="Courier New" pitchFamily="34" charset="0"/>
                 <a:ea typeface="Courier New" pitchFamily="34" charset="-122"/>
@@ -6036,7 +6128,7 @@
             </a:avLst>
           </a:prstGeom>
           <a:solidFill>
-            <a:srgbClr val="17141F"/>
+            <a:srgbClr val="000000"/>
           </a:solidFill>
           <a:ln/>
         </p:spPr>
@@ -6068,7 +6160,7 @@
             <a:r>
               <a:rPr lang="en-US" sz="1150" b="1" dirty="0">
                 <a:solidFill>
-                  <a:srgbClr val="5FD6A0"/>
+                  <a:srgbClr val="3FCF8E"/>
                 </a:solidFill>
                 <a:latin typeface="Courier New" pitchFamily="34" charset="0"/>
                 <a:ea typeface="Courier New" pitchFamily="34" charset="-122"/>
@@ -6136,7 +6228,7 @@
             </a:avLst>
           </a:prstGeom>
           <a:solidFill>
-            <a:srgbClr val="17141F"/>
+            <a:srgbClr val="000000"/>
           </a:solidFill>
           <a:ln/>
         </p:spPr>
@@ -6168,7 +6260,7 @@
             <a:r>
               <a:rPr lang="en-US" sz="1150" b="1" dirty="0">
                 <a:solidFill>
-                  <a:srgbClr val="5FD6A0"/>
+                  <a:srgbClr val="3FCF8E"/>
                 </a:solidFill>
                 <a:latin typeface="Courier New" pitchFamily="34" charset="0"/>
                 <a:ea typeface="Courier New" pitchFamily="34" charset="-122"/>
@@ -6236,7 +6328,7 @@
             </a:avLst>
           </a:prstGeom>
           <a:solidFill>
-            <a:srgbClr val="2E1418"/>
+            <a:srgbClr val="1A0808"/>
           </a:solidFill>
           <a:ln/>
         </p:spPr>
@@ -6268,7 +6360,7 @@
             <a:r>
               <a:rPr lang="en-US" sz="1000" b="1" spc="150" kern="0" dirty="0">
                 <a:solidFill>
-                  <a:srgbClr val="FF7B7B"/>
+                  <a:srgbClr val="FF6B6B"/>
                 </a:solidFill>
                 <a:latin typeface="Courier New" pitchFamily="34" charset="0"/>
                 <a:ea typeface="Courier New" pitchFamily="34" charset="-122"/>
@@ -6297,7 +6389,7 @@
             </a:avLst>
           </a:prstGeom>
           <a:solidFill>
-            <a:srgbClr val="17141F"/>
+            <a:srgbClr val="000000"/>
           </a:solidFill>
           <a:ln/>
         </p:spPr>
@@ -6329,7 +6421,7 @@
             <a:r>
               <a:rPr lang="en-US" sz="1500" b="1" dirty="0">
                 <a:solidFill>
-                  <a:srgbClr val="FF7B7B"/>
+                  <a:srgbClr val="FF6B6B"/>
                 </a:solidFill>
                 <a:latin typeface="Montserrat" pitchFamily="34" charset="0"/>
                 <a:ea typeface="Montserrat" pitchFamily="34" charset="-122"/>
@@ -6368,7 +6460,7 @@
             <a:r>
               <a:rPr lang="en-US" sz="1200" dirty="0">
                 <a:solidFill>
-                  <a:srgbClr val="AFA9BE"/>
+                  <a:srgbClr val="C9C4D6"/>
                 </a:solidFill>
                 <a:latin typeface="Montserrat" pitchFamily="34" charset="0"/>
                 <a:ea typeface="Montserrat" pitchFamily="34" charset="-122"/>
@@ -6397,7 +6489,7 @@
             </a:avLst>
           </a:prstGeom>
           <a:solidFill>
-            <a:srgbClr val="17141F"/>
+            <a:srgbClr val="000000"/>
           </a:solidFill>
           <a:ln/>
         </p:spPr>
@@ -6429,7 +6521,7 @@
             <a:r>
               <a:rPr lang="en-US" sz="1500" b="1" dirty="0">
                 <a:solidFill>
-                  <a:srgbClr val="FF7B7B"/>
+                  <a:srgbClr val="FF6B6B"/>
                 </a:solidFill>
                 <a:latin typeface="Montserrat" pitchFamily="34" charset="0"/>
                 <a:ea typeface="Montserrat" pitchFamily="34" charset="-122"/>
@@ -6468,7 +6560,7 @@
             <a:r>
               <a:rPr lang="en-US" sz="1200" dirty="0">
                 <a:solidFill>
-                  <a:srgbClr val="AFA9BE"/>
+                  <a:srgbClr val="C9C4D6"/>
                 </a:solidFill>
                 <a:latin typeface="Montserrat" pitchFamily="34" charset="0"/>
                 <a:ea typeface="Montserrat" pitchFamily="34" charset="-122"/>
@@ -6497,11 +6589,11 @@
             </a:avLst>
           </a:prstGeom>
           <a:solidFill>
-            <a:srgbClr val="17141F"/>
+            <a:srgbClr val="000000"/>
           </a:solidFill>
           <a:ln w="12700">
             <a:solidFill>
-              <a:srgbClr val="2E2A3A"/>
+              <a:srgbClr val="5E4F85"/>
             </a:solidFill>
             <a:prstDash val="solid"/>
           </a:ln>
@@ -6579,7 +6671,7 @@
             <a:lvl1pPr>
               <a:defRPr sz="850">
                 <a:solidFill>
-                  <a:srgbClr val="8A82A0"/>
+                  <a:srgbClr val="9A94AA"/>
                 </a:solidFill>
                 <a:latin typeface="Courier New"/>
                 <a:ea typeface="Courier New"/>
@@ -6649,7 +6741,7 @@
             <a:r>
               <a:rPr lang="en-US" sz="2600" b="1" dirty="0">
                 <a:solidFill>
-                  <a:srgbClr val="C9A6FF"/>
+                  <a:srgbClr val="A98BFF"/>
                 </a:solidFill>
                 <a:latin typeface="Courier New" pitchFamily="34" charset="0"/>
                 <a:ea typeface="Courier New" pitchFamily="34" charset="-122"/>
@@ -6717,9 +6809,14 @@
             </a:avLst>
           </a:prstGeom>
           <a:solidFill>
-            <a:srgbClr val="C9A6FF"/>
+            <a:srgbClr val="1A0B3D"/>
           </a:solidFill>
-          <a:ln/>
+          <a:ln w="12700">
+            <a:solidFill>
+              <a:srgbClr val="5A05F4"/>
+            </a:solidFill>
+            <a:prstDash val="solid"/>
+          </a:ln>
         </p:spPr>
       </p:sp>
       <p:sp>
@@ -6749,7 +6846,7 @@
             <a:r>
               <a:rPr lang="en-US" sz="900" b="1" spc="100" kern="0" dirty="0">
                 <a:solidFill>
-                  <a:srgbClr val="1C1140"/>
+                  <a:srgbClr val="A98BFF"/>
                 </a:solidFill>
                 <a:latin typeface="Courier New" pitchFamily="34" charset="0"/>
                 <a:ea typeface="Courier New" pitchFamily="34" charset="-122"/>
@@ -6802,11 +6899,11 @@
             </a:avLst>
           </a:prstGeom>
           <a:solidFill>
-            <a:srgbClr val="17141F"/>
+            <a:srgbClr val="000000"/>
           </a:solidFill>
           <a:ln w="12700">
             <a:solidFill>
-              <a:srgbClr val="2E2A3A"/>
+              <a:srgbClr val="5E4F85"/>
             </a:solidFill>
             <a:prstDash val="solid"/>
           </a:ln>
@@ -6868,7 +6965,7 @@
           <a:noFill/>
           <a:ln w="15875">
             <a:solidFill>
-              <a:srgbClr val="9B7BE8"/>
+              <a:srgbClr val="8F72E6"/>
             </a:solidFill>
             <a:prstDash val="solid"/>
           </a:ln>
@@ -6889,7 +6986,7 @@
             <a:avLst/>
           </a:prstGeom>
           <a:solidFill>
-            <a:srgbClr val="9B7BE8"/>
+            <a:srgbClr val="8F72E6"/>
           </a:solidFill>
           <a:ln/>
         </p:spPr>
@@ -6911,11 +7008,11 @@
             </a:avLst>
           </a:prstGeom>
           <a:solidFill>
-            <a:srgbClr val="17141F"/>
+            <a:srgbClr val="000000"/>
           </a:solidFill>
           <a:ln w="12700">
             <a:solidFill>
-              <a:srgbClr val="2E2A3A"/>
+              <a:srgbClr val="5E4F85"/>
             </a:solidFill>
             <a:prstDash val="solid"/>
           </a:ln>
@@ -6977,7 +7074,7 @@
           <a:noFill/>
           <a:ln w="15875">
             <a:solidFill>
-              <a:srgbClr val="9B7BE8"/>
+              <a:srgbClr val="8F72E6"/>
             </a:solidFill>
             <a:prstDash val="solid"/>
           </a:ln>
@@ -6998,7 +7095,7 @@
             <a:avLst/>
           </a:prstGeom>
           <a:solidFill>
-            <a:srgbClr val="9B7BE8"/>
+            <a:srgbClr val="8F72E6"/>
           </a:solidFill>
           <a:ln/>
         </p:spPr>
@@ -7020,9 +7117,14 @@
             </a:avLst>
           </a:prstGeom>
           <a:solidFill>
-            <a:srgbClr val="1C1140"/>
+            <a:srgbClr val="1A0B3D"/>
           </a:solidFill>
-          <a:ln/>
+          <a:ln w="12700">
+            <a:solidFill>
+              <a:srgbClr val="5A05F4"/>
+            </a:solidFill>
+            <a:prstDash val="solid"/>
+          </a:ln>
         </p:spPr>
       </p:sp>
       <p:sp>
@@ -7052,7 +7154,7 @@
             <a:r>
               <a:rPr lang="en-US" sz="1150" b="1" dirty="0">
                 <a:solidFill>
-                  <a:srgbClr val="C9A6FF"/>
+                  <a:srgbClr val="A98BFF"/>
                 </a:solidFill>
                 <a:latin typeface="Courier New" pitchFamily="34" charset="0"/>
                 <a:ea typeface="Courier New" pitchFamily="34" charset="-122"/>
@@ -7081,7 +7183,7 @@
           <a:noFill/>
           <a:ln w="15875">
             <a:solidFill>
-              <a:srgbClr val="9B7BE8"/>
+              <a:srgbClr val="8F72E6"/>
             </a:solidFill>
             <a:prstDash val="solid"/>
           </a:ln>
@@ -7102,7 +7204,7 @@
             <a:avLst/>
           </a:prstGeom>
           <a:solidFill>
-            <a:srgbClr val="9B7BE8"/>
+            <a:srgbClr val="8F72E6"/>
           </a:solidFill>
           <a:ln/>
         </p:spPr>
@@ -7124,11 +7226,11 @@
             </a:avLst>
           </a:prstGeom>
           <a:solidFill>
-            <a:srgbClr val="17141F"/>
+            <a:srgbClr val="000000"/>
           </a:solidFill>
           <a:ln w="12700">
             <a:solidFill>
-              <a:srgbClr val="2E2A3A"/>
+              <a:srgbClr val="5E4F85"/>
             </a:solidFill>
             <a:prstDash val="solid"/>
           </a:ln>
@@ -7190,7 +7292,7 @@
           <a:noFill/>
           <a:ln w="15875">
             <a:solidFill>
-              <a:srgbClr val="9B7BE8"/>
+              <a:srgbClr val="8F72E6"/>
             </a:solidFill>
             <a:prstDash val="solid"/>
           </a:ln>
@@ -7211,7 +7313,7 @@
             <a:avLst/>
           </a:prstGeom>
           <a:solidFill>
-            <a:srgbClr val="9B7BE8"/>
+            <a:srgbClr val="8F72E6"/>
           </a:solidFill>
           <a:ln/>
         </p:spPr>
@@ -7233,11 +7335,11 @@
             </a:avLst>
           </a:prstGeom>
           <a:solidFill>
-            <a:srgbClr val="17141F"/>
+            <a:srgbClr val="000000"/>
           </a:solidFill>
           <a:ln w="12700">
             <a:solidFill>
-              <a:srgbClr val="2E2A3A"/>
+              <a:srgbClr val="5E4F85"/>
             </a:solidFill>
             <a:prstDash val="solid"/>
           </a:ln>
@@ -7299,7 +7401,7 @@
           <a:noFill/>
           <a:ln w="15875">
             <a:solidFill>
-              <a:srgbClr val="5FD6A0"/>
+              <a:srgbClr val="3FCF8E"/>
             </a:solidFill>
             <a:prstDash val="dash"/>
           </a:ln>
@@ -7320,7 +7422,7 @@
             <a:avLst/>
           </a:prstGeom>
           <a:solidFill>
-            <a:srgbClr val="5FD6A0"/>
+            <a:srgbClr val="3FCF8E"/>
           </a:solidFill>
           <a:ln/>
         </p:spPr>
@@ -7342,7 +7444,7 @@
             </a:avLst>
           </a:prstGeom>
           <a:solidFill>
-            <a:srgbClr val="102A20"/>
+            <a:srgbClr val="06180F"/>
           </a:solidFill>
           <a:ln/>
         </p:spPr>
@@ -7374,7 +7476,7 @@
             <a:r>
               <a:rPr lang="en-US" sz="1200" b="1" dirty="0">
                 <a:solidFill>
-                  <a:srgbClr val="5FD6A0"/>
+                  <a:srgbClr val="3FCF8E"/>
                 </a:solidFill>
                 <a:latin typeface="Courier New" pitchFamily="34" charset="0"/>
                 <a:ea typeface="Courier New" pitchFamily="34" charset="-122"/>
@@ -7403,11 +7505,11 @@
             </a:avLst>
           </a:prstGeom>
           <a:solidFill>
-            <a:srgbClr val="12101A"/>
+            <a:srgbClr val="07060C"/>
           </a:solidFill>
           <a:ln w="12700">
             <a:solidFill>
-              <a:srgbClr val="2E2A3A"/>
+              <a:srgbClr val="5E4F85"/>
             </a:solidFill>
             <a:prstDash val="solid"/>
           </a:ln>
@@ -7443,7 +7545,7 @@
             <a:r>
               <a:rPr lang="en-US" sz="1300" dirty="0">
                 <a:solidFill>
-                  <a:srgbClr val="7FD9A6"/>
+                  <a:srgbClr val="6BA0F8"/>
                 </a:solidFill>
                 <a:latin typeface="Courier New" pitchFamily="34" charset="0"/>
                 <a:ea typeface="Courier New" pitchFamily="34" charset="-122"/>
@@ -7460,7 +7562,7 @@
             <a:r>
               <a:rPr lang="en-US" sz="1300" dirty="0">
                 <a:solidFill>
-                  <a:srgbClr val="8A82A0"/>
+                  <a:srgbClr val="9A94AA"/>
                 </a:solidFill>
                 <a:latin typeface="Courier New" pitchFamily="34" charset="0"/>
                 <a:ea typeface="Courier New" pitchFamily="34" charset="-122"/>
@@ -7489,11 +7591,11 @@
             </a:avLst>
           </a:prstGeom>
           <a:solidFill>
-            <a:srgbClr val="17141F"/>
+            <a:srgbClr val="000000"/>
           </a:solidFill>
           <a:ln w="12700">
             <a:solidFill>
-              <a:srgbClr val="2E2A3A"/>
+              <a:srgbClr val="5E4F85"/>
             </a:solidFill>
             <a:prstDash val="solid"/>
           </a:ln>
@@ -7571,7 +7673,7 @@
             <a:lvl1pPr>
               <a:defRPr sz="850">
                 <a:solidFill>
-                  <a:srgbClr val="8A82A0"/>
+                  <a:srgbClr val="9A94AA"/>
                 </a:solidFill>
                 <a:latin typeface="Courier New"/>
                 <a:ea typeface="Courier New"/>
@@ -7641,7 +7743,7 @@
             <a:r>
               <a:rPr lang="en-US" sz="2600" b="1" dirty="0">
                 <a:solidFill>
-                  <a:srgbClr val="C9A6FF"/>
+                  <a:srgbClr val="A98BFF"/>
                 </a:solidFill>
                 <a:latin typeface="Courier New" pitchFamily="34" charset="0"/>
                 <a:ea typeface="Courier New" pitchFamily="34" charset="-122"/>
@@ -7709,9 +7811,14 @@
             </a:avLst>
           </a:prstGeom>
           <a:solidFill>
-            <a:srgbClr val="C9A6FF"/>
+            <a:srgbClr val="1A0B3D"/>
           </a:solidFill>
-          <a:ln/>
+          <a:ln w="12700">
+            <a:solidFill>
+              <a:srgbClr val="5A05F4"/>
+            </a:solidFill>
+            <a:prstDash val="solid"/>
+          </a:ln>
         </p:spPr>
       </p:sp>
       <p:sp>
@@ -7741,7 +7848,7 @@
             <a:r>
               <a:rPr lang="en-US" sz="900" b="1" spc="100" kern="0" dirty="0">
                 <a:solidFill>
-                  <a:srgbClr val="1C1140"/>
+                  <a:srgbClr val="A98BFF"/>
                 </a:solidFill>
                 <a:latin typeface="Courier New" pitchFamily="34" charset="0"/>
                 <a:ea typeface="Courier New" pitchFamily="34" charset="-122"/>
@@ -7794,11 +7901,11 @@
             </a:avLst>
           </a:prstGeom>
           <a:solidFill>
-            <a:srgbClr val="17141F"/>
+            <a:srgbClr val="000000"/>
           </a:solidFill>
           <a:ln w="12700">
             <a:solidFill>
-              <a:srgbClr val="2E2A3A"/>
+              <a:srgbClr val="5E4F85"/>
             </a:solidFill>
             <a:prstDash val="solid"/>
           </a:ln>
@@ -7870,7 +7977,7 @@
             <a:r>
               <a:rPr lang="en-US" sz="1150" dirty="0">
                 <a:solidFill>
-                  <a:srgbClr val="AFA9BE"/>
+                  <a:srgbClr val="C9C4D6"/>
                 </a:solidFill>
                 <a:latin typeface="Montserrat" pitchFamily="34" charset="0"/>
                 <a:ea typeface="Montserrat" pitchFamily="34" charset="-122"/>
@@ -7899,9 +8006,14 @@
             </a:avLst>
           </a:prstGeom>
           <a:solidFill>
-            <a:srgbClr val="1C1140"/>
+            <a:srgbClr val="1A0B3D"/>
           </a:solidFill>
-          <a:ln/>
+          <a:ln w="12700">
+            <a:solidFill>
+              <a:srgbClr val="5A05F4"/>
+            </a:solidFill>
+            <a:prstDash val="solid"/>
+          </a:ln>
         </p:spPr>
       </p:sp>
       <p:sp>
@@ -7931,7 +8043,7 @@
             <a:r>
               <a:rPr lang="en-US" sz="1350" b="1" dirty="0">
                 <a:solidFill>
-                  <a:srgbClr val="C9A6FF"/>
+                  <a:srgbClr val="A98BFF"/>
                 </a:solidFill>
                 <a:latin typeface="Montserrat" pitchFamily="34" charset="0"/>
                 <a:ea typeface="Montserrat" pitchFamily="34" charset="-122"/>
@@ -7970,7 +8082,7 @@
             <a:r>
               <a:rPr lang="en-US" sz="1150" dirty="0">
                 <a:solidFill>
-                  <a:srgbClr val="FFFFFF"/>
+                  <a:srgbClr val="C9C4D6"/>
                 </a:solidFill>
                 <a:latin typeface="Montserrat" pitchFamily="34" charset="0"/>
                 <a:ea typeface="Montserrat" pitchFamily="34" charset="-122"/>
@@ -7999,11 +8111,11 @@
             </a:avLst>
           </a:prstGeom>
           <a:solidFill>
-            <a:srgbClr val="17141F"/>
+            <a:srgbClr val="000000"/>
           </a:solidFill>
           <a:ln w="12700">
             <a:solidFill>
-              <a:srgbClr val="2E2A3A"/>
+              <a:srgbClr val="5E4F85"/>
             </a:solidFill>
             <a:prstDash val="solid"/>
           </a:ln>
@@ -8075,7 +8187,7 @@
             <a:r>
               <a:rPr lang="en-US" sz="1150" dirty="0">
                 <a:solidFill>
-                  <a:srgbClr val="AFA9BE"/>
+                  <a:srgbClr val="C9C4D6"/>
                 </a:solidFill>
                 <a:latin typeface="Montserrat" pitchFamily="34" charset="0"/>
                 <a:ea typeface="Montserrat" pitchFamily="34" charset="-122"/>
@@ -8104,11 +8216,11 @@
             </a:avLst>
           </a:prstGeom>
           <a:solidFill>
-            <a:srgbClr val="17141F"/>
+            <a:srgbClr val="000000"/>
           </a:solidFill>
           <a:ln w="12700">
             <a:solidFill>
-              <a:srgbClr val="2E2A3A"/>
+              <a:srgbClr val="5E4F85"/>
             </a:solidFill>
             <a:prstDash val="solid"/>
           </a:ln>
@@ -8180,7 +8292,7 @@
             <a:r>
               <a:rPr lang="en-US" sz="1150" dirty="0">
                 <a:solidFill>
-                  <a:srgbClr val="AFA9BE"/>
+                  <a:srgbClr val="C9C4D6"/>
                 </a:solidFill>
                 <a:latin typeface="Montserrat" pitchFamily="34" charset="0"/>
                 <a:ea typeface="Montserrat" pitchFamily="34" charset="-122"/>
@@ -8209,11 +8321,11 @@
             </a:avLst>
           </a:prstGeom>
           <a:solidFill>
-            <a:srgbClr val="17141F"/>
+            <a:srgbClr val="000000"/>
           </a:solidFill>
           <a:ln w="12700">
             <a:solidFill>
-              <a:srgbClr val="2E2A3A"/>
+              <a:srgbClr val="5E4F85"/>
             </a:solidFill>
             <a:prstDash val="solid"/>
           </a:ln>
@@ -8285,7 +8397,7 @@
             <a:r>
               <a:rPr lang="en-US" sz="1150" dirty="0">
                 <a:solidFill>
-                  <a:srgbClr val="AFA9BE"/>
+                  <a:srgbClr val="C9C4D6"/>
                 </a:solidFill>
                 <a:latin typeface="Montserrat" pitchFamily="34" charset="0"/>
                 <a:ea typeface="Montserrat" pitchFamily="34" charset="-122"/>
@@ -8314,11 +8426,11 @@
             </a:avLst>
           </a:prstGeom>
           <a:solidFill>
-            <a:srgbClr val="17141F"/>
+            <a:srgbClr val="000000"/>
           </a:solidFill>
           <a:ln w="12700">
             <a:solidFill>
-              <a:srgbClr val="2E2A3A"/>
+              <a:srgbClr val="5E4F85"/>
             </a:solidFill>
             <a:prstDash val="solid"/>
           </a:ln>
@@ -8396,7 +8508,7 @@
             <a:lvl1pPr>
               <a:defRPr sz="850">
                 <a:solidFill>
-                  <a:srgbClr val="8A82A0"/>
+                  <a:srgbClr val="9A94AA"/>
                 </a:solidFill>
                 <a:latin typeface="Courier New"/>
                 <a:ea typeface="Courier New"/>
@@ -8466,7 +8578,7 @@
             <a:r>
               <a:rPr lang="en-US" sz="2600" b="1" dirty="0">
                 <a:solidFill>
-                  <a:srgbClr val="C9A6FF"/>
+                  <a:srgbClr val="A98BFF"/>
                 </a:solidFill>
                 <a:latin typeface="Courier New" pitchFamily="34" charset="0"/>
                 <a:ea typeface="Courier New" pitchFamily="34" charset="-122"/>
@@ -8534,9 +8646,14 @@
             </a:avLst>
           </a:prstGeom>
           <a:solidFill>
-            <a:srgbClr val="C9A6FF"/>
+            <a:srgbClr val="1A0B3D"/>
           </a:solidFill>
-          <a:ln/>
+          <a:ln w="12700">
+            <a:solidFill>
+              <a:srgbClr val="5A05F4"/>
+            </a:solidFill>
+            <a:prstDash val="solid"/>
+          </a:ln>
         </p:spPr>
       </p:sp>
       <p:sp>
@@ -8566,7 +8683,7 @@
             <a:r>
               <a:rPr lang="en-US" sz="900" b="1" spc="100" kern="0" dirty="0">
                 <a:solidFill>
-                  <a:srgbClr val="1C1140"/>
+                  <a:srgbClr val="A98BFF"/>
                 </a:solidFill>
                 <a:latin typeface="Courier New" pitchFamily="34" charset="0"/>
                 <a:ea typeface="Courier New" pitchFamily="34" charset="-122"/>
@@ -8758,11 +8875,11 @@
             </a:avLst>
           </a:prstGeom>
           <a:solidFill>
-            <a:srgbClr val="17141F"/>
+            <a:srgbClr val="000000"/>
           </a:solidFill>
           <a:ln w="12700">
             <a:solidFill>
-              <a:srgbClr val="2E2A3A"/>
+              <a:srgbClr val="5E4F85"/>
             </a:solidFill>
             <a:prstDash val="solid"/>
           </a:ln>
@@ -8795,7 +8912,7 @@
             <a:r>
               <a:rPr lang="en-US" sz="1100" b="1" spc="200" kern="0" dirty="0">
                 <a:solidFill>
-                  <a:srgbClr val="8A82A0"/>
+                  <a:srgbClr val="9A94AA"/>
                 </a:solidFill>
                 <a:latin typeface="Courier New" pitchFamily="34" charset="0"/>
                 <a:ea typeface="Courier New" pitchFamily="34" charset="-122"/>
@@ -8873,7 +8990,7 @@
             <a:r>
               <a:rPr lang="en-US" sz="1250" dirty="0">
                 <a:solidFill>
-                  <a:srgbClr val="AFA9BE"/>
+                  <a:srgbClr val="C9C4D6"/>
                 </a:solidFill>
                 <a:latin typeface="Montserrat" pitchFamily="34" charset="0"/>
                 <a:ea typeface="Montserrat" pitchFamily="34" charset="-122"/>
@@ -8902,9 +9019,14 @@
             </a:avLst>
           </a:prstGeom>
           <a:solidFill>
-            <a:srgbClr val="102A20"/>
+            <a:srgbClr val="06180F"/>
           </a:solidFill>
-          <a:ln/>
+          <a:ln w="12700">
+            <a:solidFill>
+              <a:srgbClr val="3FCF8E"/>
+            </a:solidFill>
+            <a:prstDash val="solid"/>
+          </a:ln>
         </p:spPr>
       </p:sp>
       <p:sp>
@@ -8934,7 +9056,7 @@
             <a:r>
               <a:rPr lang="en-US" sz="950" b="1" spc="150" kern="0" dirty="0">
                 <a:solidFill>
-                  <a:srgbClr val="5FD6A0"/>
+                  <a:srgbClr val="3FCF8E"/>
                 </a:solidFill>
                 <a:latin typeface="Courier New" pitchFamily="34" charset="0"/>
                 <a:ea typeface="Courier New" pitchFamily="34" charset="-122"/>
@@ -9005,9 +9127,14 @@
             </a:avLst>
           </a:prstGeom>
           <a:solidFill>
-            <a:srgbClr val="2E1418"/>
+            <a:srgbClr val="1A0808"/>
           </a:solidFill>
-          <a:ln/>
+          <a:ln w="12700">
+            <a:solidFill>
+              <a:srgbClr val="FF6B6B"/>
+            </a:solidFill>
+            <a:prstDash val="solid"/>
+          </a:ln>
         </p:spPr>
       </p:sp>
       <p:sp>
@@ -9037,7 +9164,7 @@
             <a:r>
               <a:rPr lang="en-US" sz="950" b="1" spc="150" kern="0" dirty="0">
                 <a:solidFill>
-                  <a:srgbClr val="FF7B7B"/>
+                  <a:srgbClr val="FF6B6B"/>
                 </a:solidFill>
                 <a:latin typeface="Courier New" pitchFamily="34" charset="0"/>
                 <a:ea typeface="Courier New" pitchFamily="34" charset="-122"/>
@@ -9160,7 +9287,7 @@
             <a:lvl1pPr>
               <a:defRPr sz="850">
                 <a:solidFill>
-                  <a:srgbClr val="8A82A0"/>
+                  <a:srgbClr val="9A94AA"/>
                 </a:solidFill>
                 <a:latin typeface="Courier New"/>
                 <a:ea typeface="Courier New"/>
@@ -9230,7 +9357,7 @@
             <a:r>
               <a:rPr lang="en-US" sz="2600" b="1" dirty="0">
                 <a:solidFill>
-                  <a:srgbClr val="C9A6FF"/>
+                  <a:srgbClr val="A98BFF"/>
                 </a:solidFill>
                 <a:latin typeface="Courier New" pitchFamily="34" charset="0"/>
                 <a:ea typeface="Courier New" pitchFamily="34" charset="-122"/>
@@ -9298,9 +9425,14 @@
             </a:avLst>
           </a:prstGeom>
           <a:solidFill>
-            <a:srgbClr val="C9A6FF"/>
+            <a:srgbClr val="1A0B3D"/>
           </a:solidFill>
-          <a:ln/>
+          <a:ln w="12700">
+            <a:solidFill>
+              <a:srgbClr val="5A05F4"/>
+            </a:solidFill>
+            <a:prstDash val="solid"/>
+          </a:ln>
         </p:spPr>
       </p:sp>
       <p:sp>
@@ -9330,7 +9462,7 @@
             <a:r>
               <a:rPr lang="en-US" sz="900" b="1" spc="100" kern="0" dirty="0">
                 <a:solidFill>
-                  <a:srgbClr val="1C1140"/>
+                  <a:srgbClr val="A98BFF"/>
                 </a:solidFill>
                 <a:latin typeface="Courier New" pitchFamily="34" charset="0"/>
                 <a:ea typeface="Courier New" pitchFamily="34" charset="-122"/>
@@ -9383,11 +9515,11 @@
             </a:avLst>
           </a:prstGeom>
           <a:solidFill>
-            <a:srgbClr val="12101A"/>
+            <a:srgbClr val="07060C"/>
           </a:solidFill>
           <a:ln w="12700">
             <a:solidFill>
-              <a:srgbClr val="2E2A3A"/>
+              <a:srgbClr val="5E4F85"/>
             </a:solidFill>
             <a:prstDash val="solid"/>
           </a:ln>
@@ -9440,7 +9572,7 @@
             <a:r>
               <a:rPr lang="en-US" sz="1300" dirty="0">
                 <a:solidFill>
-                  <a:srgbClr val="F0B36B"/>
+                  <a:srgbClr val="C9C4D6"/>
                 </a:solidFill>
                 <a:latin typeface="Courier New" pitchFamily="34" charset="0"/>
                 <a:ea typeface="Courier New" pitchFamily="34" charset="-122"/>
@@ -9474,7 +9606,7 @@
             <a:r>
               <a:rPr lang="en-US" sz="1300" dirty="0">
                 <a:solidFill>
-                  <a:srgbClr val="F0B36B"/>
+                  <a:srgbClr val="C9C4D6"/>
                 </a:solidFill>
                 <a:latin typeface="Courier New" pitchFamily="34" charset="0"/>
                 <a:ea typeface="Courier New" pitchFamily="34" charset="-122"/>
@@ -9530,7 +9662,7 @@
             <a:r>
               <a:rPr lang="en-US" sz="1150" i="1" dirty="0">
                 <a:solidFill>
-                  <a:srgbClr val="8A82A0"/>
+                  <a:srgbClr val="9A94AA"/>
                 </a:solidFill>
                 <a:latin typeface="Montserrat" pitchFamily="34" charset="0"/>
                 <a:ea typeface="Montserrat" pitchFamily="34" charset="-122"/>
@@ -9569,7 +9701,7 @@
             <a:r>
               <a:rPr lang="en-US" sz="1100" b="1" dirty="0">
                 <a:solidFill>
-                  <a:srgbClr val="C9A6FF"/>
+                  <a:srgbClr val="A98BFF"/>
                 </a:solidFill>
                 <a:latin typeface="Courier New" pitchFamily="34" charset="0"/>
                 <a:ea typeface="Courier New" pitchFamily="34" charset="-122"/>
@@ -9598,7 +9730,7 @@
           <a:noFill/>
           <a:ln w="15875">
             <a:solidFill>
-              <a:srgbClr val="9B7BE8"/>
+              <a:srgbClr val="8F72E6"/>
             </a:solidFill>
             <a:prstDash val="solid"/>
           </a:ln>
@@ -9619,7 +9751,7 @@
             <a:avLst/>
           </a:prstGeom>
           <a:solidFill>
-            <a:srgbClr val="9B7BE8"/>
+            <a:srgbClr val="8F72E6"/>
           </a:solidFill>
           <a:ln/>
         </p:spPr>
@@ -9680,7 +9812,7 @@
             </a:avLst>
           </a:prstGeom>
           <a:solidFill>
-            <a:srgbClr val="1C1140"/>
+            <a:srgbClr val="1A0B3D"/>
           </a:solidFill>
           <a:ln/>
         </p:spPr>
@@ -9712,7 +9844,7 @@
             <a:r>
               <a:rPr lang="en-US" sz="900" b="1" dirty="0">
                 <a:solidFill>
-                  <a:srgbClr val="C9A6FF"/>
+                  <a:srgbClr val="A98BFF"/>
                 </a:solidFill>
                 <a:latin typeface="Courier New" pitchFamily="34" charset="0"/>
                 <a:ea typeface="Courier New" pitchFamily="34" charset="-122"/>
@@ -9751,7 +9883,7 @@
             <a:r>
               <a:rPr lang="en-US" sz="1100" b="1" dirty="0">
                 <a:solidFill>
-                  <a:srgbClr val="C9A6FF"/>
+                  <a:srgbClr val="A98BFF"/>
                 </a:solidFill>
                 <a:latin typeface="Courier New" pitchFamily="34" charset="0"/>
                 <a:ea typeface="Courier New" pitchFamily="34" charset="-122"/>
@@ -9780,7 +9912,7 @@
           <a:noFill/>
           <a:ln w="15875">
             <a:solidFill>
-              <a:srgbClr val="9B7BE8"/>
+              <a:srgbClr val="8F72E6"/>
             </a:solidFill>
             <a:prstDash val="solid"/>
           </a:ln>
@@ -9801,7 +9933,7 @@
             <a:avLst/>
           </a:prstGeom>
           <a:solidFill>
-            <a:srgbClr val="9B7BE8"/>
+            <a:srgbClr val="8F72E6"/>
           </a:solidFill>
           <a:ln/>
         </p:spPr>
@@ -9862,7 +9994,7 @@
             </a:avLst>
           </a:prstGeom>
           <a:solidFill>
-            <a:srgbClr val="1C1140"/>
+            <a:srgbClr val="1A0B3D"/>
           </a:solidFill>
           <a:ln/>
         </p:spPr>
@@ -9894,7 +10026,7 @@
             <a:r>
               <a:rPr lang="en-US" sz="900" b="1" dirty="0">
                 <a:solidFill>
-                  <a:srgbClr val="C9A6FF"/>
+                  <a:srgbClr val="A98BFF"/>
                 </a:solidFill>
                 <a:latin typeface="Courier New" pitchFamily="34" charset="0"/>
                 <a:ea typeface="Courier New" pitchFamily="34" charset="-122"/>
@@ -9933,7 +10065,7 @@
             <a:r>
               <a:rPr lang="en-US" sz="1100" b="1" dirty="0">
                 <a:solidFill>
-                  <a:srgbClr val="C9A6FF"/>
+                  <a:srgbClr val="A98BFF"/>
                 </a:solidFill>
                 <a:latin typeface="Courier New" pitchFamily="34" charset="0"/>
                 <a:ea typeface="Courier New" pitchFamily="34" charset="-122"/>
@@ -9962,7 +10094,7 @@
           <a:noFill/>
           <a:ln w="15875">
             <a:solidFill>
-              <a:srgbClr val="9B7BE8"/>
+              <a:srgbClr val="8F72E6"/>
             </a:solidFill>
             <a:prstDash val="solid"/>
           </a:ln>
@@ -9983,7 +10115,7 @@
             <a:avLst/>
           </a:prstGeom>
           <a:solidFill>
-            <a:srgbClr val="9B7BE8"/>
+            <a:srgbClr val="8F72E6"/>
           </a:solidFill>
           <a:ln/>
         </p:spPr>
@@ -10044,7 +10176,7 @@
             </a:avLst>
           </a:prstGeom>
           <a:solidFill>
-            <a:srgbClr val="1C1140"/>
+            <a:srgbClr val="1A0B3D"/>
           </a:solidFill>
           <a:ln/>
         </p:spPr>
@@ -10076,7 +10208,7 @@
             <a:r>
               <a:rPr lang="en-US" sz="900" b="1" dirty="0">
                 <a:solidFill>
-                  <a:srgbClr val="C9A6FF"/>
+                  <a:srgbClr val="A98BFF"/>
                 </a:solidFill>
                 <a:latin typeface="Courier New" pitchFamily="34" charset="0"/>
                 <a:ea typeface="Courier New" pitchFamily="34" charset="-122"/>
@@ -10115,7 +10247,7 @@
             <a:r>
               <a:rPr lang="en-US" sz="1100" b="1" dirty="0">
                 <a:solidFill>
-                  <a:srgbClr val="C9A6FF"/>
+                  <a:srgbClr val="A98BFF"/>
                 </a:solidFill>
                 <a:latin typeface="Courier New" pitchFamily="34" charset="0"/>
                 <a:ea typeface="Courier New" pitchFamily="34" charset="-122"/>
@@ -10144,7 +10276,7 @@
           <a:noFill/>
           <a:ln w="15875">
             <a:solidFill>
-              <a:srgbClr val="9B7BE8"/>
+              <a:srgbClr val="8F72E6"/>
             </a:solidFill>
             <a:prstDash val="solid"/>
           </a:ln>
@@ -10165,7 +10297,7 @@
             <a:avLst/>
           </a:prstGeom>
           <a:solidFill>
-            <a:srgbClr val="9B7BE8"/>
+            <a:srgbClr val="8F72E6"/>
           </a:solidFill>
           <a:ln/>
         </p:spPr>
@@ -10226,7 +10358,7 @@
             </a:avLst>
           </a:prstGeom>
           <a:solidFill>
-            <a:srgbClr val="1C1140"/>
+            <a:srgbClr val="1A0B3D"/>
           </a:solidFill>
           <a:ln/>
         </p:spPr>
@@ -10258,7 +10390,7 @@
             <a:r>
               <a:rPr lang="en-US" sz="900" b="1" dirty="0">
                 <a:solidFill>
-                  <a:srgbClr val="C9A6FF"/>
+                  <a:srgbClr val="A98BFF"/>
                 </a:solidFill>
                 <a:latin typeface="Courier New" pitchFamily="34" charset="0"/>
                 <a:ea typeface="Courier New" pitchFamily="34" charset="-122"/>
@@ -10297,7 +10429,7 @@
             <a:r>
               <a:rPr lang="en-US" sz="1100" b="1" dirty="0">
                 <a:solidFill>
-                  <a:srgbClr val="C9A6FF"/>
+                  <a:srgbClr val="A98BFF"/>
                 </a:solidFill>
                 <a:latin typeface="Courier New" pitchFamily="34" charset="0"/>
                 <a:ea typeface="Courier New" pitchFamily="34" charset="-122"/>
@@ -10326,7 +10458,7 @@
           <a:noFill/>
           <a:ln w="15875">
             <a:solidFill>
-              <a:srgbClr val="9B7BE8"/>
+              <a:srgbClr val="8F72E6"/>
             </a:solidFill>
             <a:prstDash val="solid"/>
           </a:ln>
@@ -10347,7 +10479,7 @@
             <a:avLst/>
           </a:prstGeom>
           <a:solidFill>
-            <a:srgbClr val="9B7BE8"/>
+            <a:srgbClr val="8F72E6"/>
           </a:solidFill>
           <a:ln/>
         </p:spPr>
@@ -10408,7 +10540,7 @@
             </a:avLst>
           </a:prstGeom>
           <a:solidFill>
-            <a:srgbClr val="1C1140"/>
+            <a:srgbClr val="1A0B3D"/>
           </a:solidFill>
           <a:ln/>
         </p:spPr>
@@ -10440,7 +10572,7 @@
             <a:r>
               <a:rPr lang="en-US" sz="900" b="1" dirty="0">
                 <a:solidFill>
-                  <a:srgbClr val="C9A6FF"/>
+                  <a:srgbClr val="A98BFF"/>
                 </a:solidFill>
                 <a:latin typeface="Courier New" pitchFamily="34" charset="0"/>
                 <a:ea typeface="Courier New" pitchFamily="34" charset="-122"/>
@@ -10469,9 +10601,14 @@
             </a:avLst>
           </a:prstGeom>
           <a:solidFill>
-            <a:srgbClr val="102A20"/>
+            <a:srgbClr val="06180F"/>
           </a:solidFill>
-          <a:ln/>
+          <a:ln w="12700">
+            <a:solidFill>
+              <a:srgbClr val="3FCF8E"/>
+            </a:solidFill>
+            <a:prstDash val="solid"/>
+          </a:ln>
         </p:spPr>
       </p:sp>
       <p:sp>
@@ -10546,7 +10683,7 @@
             <a:lvl1pPr>
               <a:defRPr sz="850">
                 <a:solidFill>
-                  <a:srgbClr val="8A82A0"/>
+                  <a:srgbClr val="9A94AA"/>
                 </a:solidFill>
                 <a:latin typeface="Courier New"/>
                 <a:ea typeface="Courier New"/>
@@ -10616,7 +10753,7 @@
             <a:r>
               <a:rPr lang="en-US" sz="2600" b="1" dirty="0">
                 <a:solidFill>
-                  <a:srgbClr val="C9A6FF"/>
+                  <a:srgbClr val="A98BFF"/>
                 </a:solidFill>
                 <a:latin typeface="Courier New" pitchFamily="34" charset="0"/>
                 <a:ea typeface="Courier New" pitchFamily="34" charset="-122"/>
@@ -10684,9 +10821,14 @@
             </a:avLst>
           </a:prstGeom>
           <a:solidFill>
-            <a:srgbClr val="C9A6FF"/>
+            <a:srgbClr val="1A0B3D"/>
           </a:solidFill>
-          <a:ln/>
+          <a:ln w="12700">
+            <a:solidFill>
+              <a:srgbClr val="5A05F4"/>
+            </a:solidFill>
+            <a:prstDash val="solid"/>
+          </a:ln>
         </p:spPr>
       </p:sp>
       <p:sp>
@@ -10716,7 +10858,7 @@
             <a:r>
               <a:rPr lang="en-US" sz="900" b="1" spc="100" kern="0" dirty="0">
                 <a:solidFill>
-                  <a:srgbClr val="1C1140"/>
+                  <a:srgbClr val="A98BFF"/>
                 </a:solidFill>
                 <a:latin typeface="Courier New" pitchFamily="34" charset="0"/>
                 <a:ea typeface="Courier New" pitchFamily="34" charset="-122"/>
@@ -10779,7 +10921,7 @@
             <a:r>
               <a:rPr lang="en-US" sz="1000" b="1" spc="150" kern="0" dirty="0">
                 <a:solidFill>
-                  <a:srgbClr val="8A82A0"/>
+                  <a:srgbClr val="9A94AA"/>
                 </a:solidFill>
                 <a:latin typeface="Courier New" pitchFamily="34" charset="0"/>
                 <a:ea typeface="Courier New" pitchFamily="34" charset="-122"/>
@@ -10808,7 +10950,7 @@
             </a:avLst>
           </a:prstGeom>
           <a:solidFill>
-            <a:srgbClr val="2E1418"/>
+            <a:srgbClr val="1A0808"/>
           </a:solidFill>
           <a:ln/>
         </p:spPr>
@@ -10840,7 +10982,7 @@
             <a:r>
               <a:rPr lang="en-US" sz="1100" b="1" dirty="0">
                 <a:solidFill>
-                  <a:srgbClr val="FF7B7B"/>
+                  <a:srgbClr val="FF6B6B"/>
                 </a:solidFill>
                 <a:latin typeface="Courier New" pitchFamily="34" charset="0"/>
                 <a:ea typeface="Courier New" pitchFamily="34" charset="-122"/>
@@ -10918,7 +11060,7 @@
             <a:r>
               <a:rPr lang="en-US" sz="1000" dirty="0">
                 <a:solidFill>
-                  <a:srgbClr val="8A82A0"/>
+                  <a:srgbClr val="9A94AA"/>
                 </a:solidFill>
                 <a:latin typeface="Courier New" pitchFamily="34" charset="0"/>
                 <a:ea typeface="Courier New" pitchFamily="34" charset="-122"/>
@@ -10947,7 +11089,7 @@
             </a:avLst>
           </a:prstGeom>
           <a:solidFill>
-            <a:srgbClr val="2E1418"/>
+            <a:srgbClr val="1A0808"/>
           </a:solidFill>
           <a:ln/>
         </p:spPr>
@@ -10979,7 +11121,7 @@
             <a:r>
               <a:rPr lang="en-US" sz="1100" b="1" dirty="0">
                 <a:solidFill>
-                  <a:srgbClr val="FF7B7B"/>
+                  <a:srgbClr val="FF6B6B"/>
                 </a:solidFill>
                 <a:latin typeface="Courier New" pitchFamily="34" charset="0"/>
                 <a:ea typeface="Courier New" pitchFamily="34" charset="-122"/>
@@ -11057,7 +11199,7 @@
             <a:r>
               <a:rPr lang="en-US" sz="1000" dirty="0">
                 <a:solidFill>
-                  <a:srgbClr val="8A82A0"/>
+                  <a:srgbClr val="9A94AA"/>
                 </a:solidFill>
                 <a:latin typeface="Courier New" pitchFamily="34" charset="0"/>
                 <a:ea typeface="Courier New" pitchFamily="34" charset="-122"/>
@@ -11086,7 +11228,7 @@
             </a:avLst>
           </a:prstGeom>
           <a:solidFill>
-            <a:srgbClr val="2A2010"/>
+            <a:srgbClr val="0B1A38"/>
           </a:solidFill>
           <a:ln/>
         </p:spPr>
@@ -11118,7 +11260,7 @@
             <a:r>
               <a:rPr lang="en-US" sz="1100" b="1" dirty="0">
                 <a:solidFill>
-                  <a:srgbClr val="E8A857"/>
+                  <a:srgbClr val="6BA0F8"/>
                 </a:solidFill>
                 <a:latin typeface="Courier New" pitchFamily="34" charset="0"/>
                 <a:ea typeface="Courier New" pitchFamily="34" charset="-122"/>
@@ -11196,7 +11338,7 @@
             <a:r>
               <a:rPr lang="en-US" sz="1000" dirty="0">
                 <a:solidFill>
-                  <a:srgbClr val="8A82A0"/>
+                  <a:srgbClr val="9A94AA"/>
                 </a:solidFill>
                 <a:latin typeface="Courier New" pitchFamily="34" charset="0"/>
                 <a:ea typeface="Courier New" pitchFamily="34" charset="-122"/>
@@ -11225,7 +11367,7 @@
             </a:avLst>
           </a:prstGeom>
           <a:solidFill>
-            <a:srgbClr val="2A2010"/>
+            <a:srgbClr val="0B1A38"/>
           </a:solidFill>
           <a:ln/>
         </p:spPr>
@@ -11257,7 +11399,7 @@
             <a:r>
               <a:rPr lang="en-US" sz="1100" b="1" dirty="0">
                 <a:solidFill>
-                  <a:srgbClr val="E8A857"/>
+                  <a:srgbClr val="6BA0F8"/>
                 </a:solidFill>
                 <a:latin typeface="Courier New" pitchFamily="34" charset="0"/>
                 <a:ea typeface="Courier New" pitchFamily="34" charset="-122"/>
@@ -11335,7 +11477,7 @@
             <a:r>
               <a:rPr lang="en-US" sz="1000" dirty="0">
                 <a:solidFill>
-                  <a:srgbClr val="8A82A0"/>
+                  <a:srgbClr val="9A94AA"/>
                 </a:solidFill>
                 <a:latin typeface="Courier New" pitchFamily="34" charset="0"/>
                 <a:ea typeface="Courier New" pitchFamily="34" charset="-122"/>
@@ -11374,7 +11516,7 @@
             <a:r>
               <a:rPr lang="en-US" sz="1200" i="1" dirty="0">
                 <a:solidFill>
-                  <a:srgbClr val="AFA9BE"/>
+                  <a:srgbClr val="C9C4D6"/>
                 </a:solidFill>
                 <a:latin typeface="Montserrat" pitchFamily="34" charset="0"/>
                 <a:ea typeface="Montserrat" pitchFamily="34" charset="-122"/>
@@ -11413,7 +11555,7 @@
             <a:r>
               <a:rPr lang="en-US" sz="1000" b="1" spc="150" kern="0" dirty="0">
                 <a:solidFill>
-                  <a:srgbClr val="8A82A0"/>
+                  <a:srgbClr val="9A94AA"/>
                 </a:solidFill>
                 <a:latin typeface="Courier New" pitchFamily="34" charset="0"/>
                 <a:ea typeface="Courier New" pitchFamily="34" charset="-122"/>
@@ -11442,9 +11584,14 @@
             </a:avLst>
           </a:prstGeom>
           <a:solidFill>
-            <a:srgbClr val="102A20"/>
+            <a:srgbClr val="06180F"/>
           </a:solidFill>
-          <a:ln/>
+          <a:ln w="12700">
+            <a:solidFill>
+              <a:srgbClr val="3FCF8E"/>
+            </a:solidFill>
+            <a:prstDash val="solid"/>
+          </a:ln>
         </p:spPr>
       </p:sp>
       <p:sp>
@@ -11474,7 +11621,7 @@
             <a:r>
               <a:rPr lang="en-US" sz="1100" b="1" dirty="0">
                 <a:solidFill>
-                  <a:srgbClr val="5FD6A0"/>
+                  <a:srgbClr val="3FCF8E"/>
                 </a:solidFill>
                 <a:latin typeface="Courier New" pitchFamily="34" charset="0"/>
                 <a:ea typeface="Courier New" pitchFamily="34" charset="-122"/>
@@ -11503,7 +11650,7 @@
           <a:noFill/>
           <a:ln w="15875">
             <a:solidFill>
-              <a:srgbClr val="9B7BE8"/>
+              <a:srgbClr val="8F72E6"/>
             </a:solidFill>
             <a:prstDash val="solid"/>
           </a:ln>
@@ -11524,7 +11671,7 @@
             <a:avLst/>
           </a:prstGeom>
           <a:solidFill>
-            <a:srgbClr val="9B7BE8"/>
+            <a:srgbClr val="8F72E6"/>
           </a:solidFill>
           <a:ln/>
         </p:spPr>
@@ -11546,11 +11693,11 @@
             </a:avLst>
           </a:prstGeom>
           <a:solidFill>
-            <a:srgbClr val="17141F"/>
+            <a:srgbClr val="000000"/>
           </a:solidFill>
           <a:ln w="12700">
             <a:solidFill>
-              <a:srgbClr val="2E2A3A"/>
+              <a:srgbClr val="5E4F85"/>
             </a:solidFill>
             <a:prstDash val="solid"/>
           </a:ln>
@@ -11612,9 +11759,14 @@
             </a:avLst>
           </a:prstGeom>
           <a:solidFill>
-            <a:srgbClr val="2E1418"/>
+            <a:srgbClr val="1A0808"/>
           </a:solidFill>
-          <a:ln/>
+          <a:ln w="12700">
+            <a:solidFill>
+              <a:srgbClr val="FF6B6B"/>
+            </a:solidFill>
+            <a:prstDash val="solid"/>
+          </a:ln>
         </p:spPr>
       </p:sp>
       <p:sp>
@@ -11644,7 +11796,7 @@
             <a:r>
               <a:rPr lang="en-US" sz="1100" b="1" dirty="0">
                 <a:solidFill>
-                  <a:srgbClr val="FF7B7B"/>
+                  <a:srgbClr val="FF6B6B"/>
                 </a:solidFill>
                 <a:latin typeface="Courier New" pitchFamily="34" charset="0"/>
                 <a:ea typeface="Courier New" pitchFamily="34" charset="-122"/>
@@ -11673,7 +11825,7 @@
           <a:noFill/>
           <a:ln w="15875">
             <a:solidFill>
-              <a:srgbClr val="9B7BE8"/>
+              <a:srgbClr val="8F72E6"/>
             </a:solidFill>
             <a:prstDash val="solid"/>
           </a:ln>
@@ -11694,7 +11846,7 @@
             <a:avLst/>
           </a:prstGeom>
           <a:solidFill>
-            <a:srgbClr val="9B7BE8"/>
+            <a:srgbClr val="8F72E6"/>
           </a:solidFill>
           <a:ln/>
         </p:spPr>
@@ -11716,11 +11868,11 @@
             </a:avLst>
           </a:prstGeom>
           <a:solidFill>
-            <a:srgbClr val="17141F"/>
+            <a:srgbClr val="000000"/>
           </a:solidFill>
           <a:ln w="12700">
             <a:solidFill>
-              <a:srgbClr val="2E2A3A"/>
+              <a:srgbClr val="5E4F85"/>
             </a:solidFill>
             <a:prstDash val="solid"/>
           </a:ln>
@@ -11846,11 +11998,11 @@
             </a:avLst>
           </a:prstGeom>
           <a:solidFill>
-            <a:srgbClr val="17141F"/>
+            <a:srgbClr val="000000"/>
           </a:solidFill>
           <a:ln w="12700">
             <a:solidFill>
-              <a:srgbClr val="2E2A3A"/>
+              <a:srgbClr val="5E4F85"/>
             </a:solidFill>
             <a:prstDash val="solid"/>
           </a:ln>
@@ -11967,7 +12119,7 @@
             <a:lvl1pPr>
               <a:defRPr sz="850">
                 <a:solidFill>
-                  <a:srgbClr val="8A82A0"/>
+                  <a:srgbClr val="9A94AA"/>
                 </a:solidFill>
                 <a:latin typeface="Courier New"/>
                 <a:ea typeface="Courier New"/>
@@ -12037,7 +12189,7 @@
             <a:r>
               <a:rPr lang="en-US" sz="2600" b="1" dirty="0">
                 <a:solidFill>
-                  <a:srgbClr val="C9A6FF"/>
+                  <a:srgbClr val="A98BFF"/>
                 </a:solidFill>
                 <a:latin typeface="Courier New" pitchFamily="34" charset="0"/>
                 <a:ea typeface="Courier New" pitchFamily="34" charset="-122"/>
@@ -12105,9 +12257,14 @@
             </a:avLst>
           </a:prstGeom>
           <a:solidFill>
-            <a:srgbClr val="C9A6FF"/>
+            <a:srgbClr val="1A0B3D"/>
           </a:solidFill>
-          <a:ln/>
+          <a:ln w="12700">
+            <a:solidFill>
+              <a:srgbClr val="5A05F4"/>
+            </a:solidFill>
+            <a:prstDash val="solid"/>
+          </a:ln>
         </p:spPr>
       </p:sp>
       <p:sp>
@@ -12137,7 +12294,7 @@
             <a:r>
               <a:rPr lang="en-US" sz="900" b="1" spc="100" kern="0" dirty="0">
                 <a:solidFill>
-                  <a:srgbClr val="1C1140"/>
+                  <a:srgbClr val="A98BFF"/>
                 </a:solidFill>
                 <a:latin typeface="Courier New" pitchFamily="34" charset="0"/>
                 <a:ea typeface="Courier New" pitchFamily="34" charset="-122"/>
@@ -12166,9 +12323,14 @@
             </a:avLst>
           </a:prstGeom>
           <a:solidFill>
-            <a:srgbClr val="2A2010"/>
+            <a:srgbClr val="000000"/>
           </a:solidFill>
-          <a:ln/>
+          <a:ln w="12700">
+            <a:solidFill>
+              <a:srgbClr val="5E4F85"/>
+            </a:solidFill>
+            <a:prstDash val="solid"/>
+          </a:ln>
         </p:spPr>
       </p:sp>
       <p:sp>
@@ -12198,7 +12360,7 @@
             <a:r>
               <a:rPr lang="en-US" sz="900" b="1" spc="100" kern="0" dirty="0">
                 <a:solidFill>
-                  <a:srgbClr val="E8A857"/>
+                  <a:srgbClr val="C9C4D6"/>
                 </a:solidFill>
                 <a:latin typeface="Courier New" pitchFamily="34" charset="0"/>
                 <a:ea typeface="Courier New" pitchFamily="34" charset="-122"/>
@@ -12251,11 +12413,11 @@
             </a:avLst>
           </a:prstGeom>
           <a:solidFill>
-            <a:srgbClr val="12101A"/>
+            <a:srgbClr val="07060C"/>
           </a:solidFill>
           <a:ln w="12700">
             <a:solidFill>
-              <a:srgbClr val="2E2A3A"/>
+              <a:srgbClr val="5E4F85"/>
             </a:solidFill>
             <a:prstDash val="solid"/>
           </a:ln>
@@ -12291,7 +12453,7 @@
             <a:r>
               <a:rPr lang="en-US" sz="1250" dirty="0">
                 <a:solidFill>
-                  <a:srgbClr val="7FD9A6"/>
+                  <a:srgbClr val="6BA0F8"/>
                 </a:solidFill>
                 <a:latin typeface="Courier New" pitchFamily="34" charset="0"/>
                 <a:ea typeface="Courier New" pitchFamily="34" charset="-122"/>
@@ -12308,7 +12470,7 @@
             <a:r>
               <a:rPr lang="en-US" sz="1250" dirty="0">
                 <a:solidFill>
-                  <a:srgbClr val="8A82A0"/>
+                  <a:srgbClr val="9A94AA"/>
                 </a:solidFill>
                 <a:latin typeface="Courier New" pitchFamily="34" charset="0"/>
                 <a:ea typeface="Courier New" pitchFamily="34" charset="-122"/>
@@ -12328,7 +12490,7 @@
             <a:r>
               <a:rPr lang="en-US" sz="1250" dirty="0">
                 <a:solidFill>
-                  <a:srgbClr val="7FD9A6"/>
+                  <a:srgbClr val="6BA0F8"/>
                 </a:solidFill>
                 <a:latin typeface="Courier New" pitchFamily="34" charset="0"/>
                 <a:ea typeface="Courier New" pitchFamily="34" charset="-122"/>
@@ -12345,7 +12507,7 @@
             <a:r>
               <a:rPr lang="en-US" sz="1250" dirty="0">
                 <a:solidFill>
-                  <a:srgbClr val="8A82A0"/>
+                  <a:srgbClr val="9A94AA"/>
                 </a:solidFill>
                 <a:latin typeface="Courier New" pitchFamily="34" charset="0"/>
                 <a:ea typeface="Courier New" pitchFamily="34" charset="-122"/>
@@ -12365,7 +12527,7 @@
             <a:r>
               <a:rPr lang="en-US" sz="1250" dirty="0">
                 <a:solidFill>
-                  <a:srgbClr val="7FD9A6"/>
+                  <a:srgbClr val="6BA0F8"/>
                 </a:solidFill>
                 <a:latin typeface="Courier New" pitchFamily="34" charset="0"/>
                 <a:ea typeface="Courier New" pitchFamily="34" charset="-122"/>
@@ -12382,7 +12544,7 @@
             <a:r>
               <a:rPr lang="en-US" sz="1250" dirty="0">
                 <a:solidFill>
-                  <a:srgbClr val="8A82A0"/>
+                  <a:srgbClr val="9A94AA"/>
                 </a:solidFill>
                 <a:latin typeface="Courier New" pitchFamily="34" charset="0"/>
                 <a:ea typeface="Courier New" pitchFamily="34" charset="-122"/>
@@ -12411,11 +12573,11 @@
             </a:avLst>
           </a:prstGeom>
           <a:solidFill>
-            <a:srgbClr val="17141F"/>
+            <a:srgbClr val="000000"/>
           </a:solidFill>
           <a:ln w="12700">
             <a:solidFill>
-              <a:srgbClr val="2E2A3A"/>
+              <a:srgbClr val="5E4F85"/>
             </a:solidFill>
             <a:prstDash val="solid"/>
           </a:ln>
@@ -12490,7 +12652,7 @@
             <a:r>
               <a:rPr lang="en-US" sz="1200" dirty="0">
                 <a:solidFill>
-                  <a:srgbClr val="AFA9BE"/>
+                  <a:srgbClr val="C9C4D6"/>
                 </a:solidFill>
                 <a:latin typeface="Montserrat" pitchFamily="34" charset="0"/>
                 <a:ea typeface="Montserrat" pitchFamily="34" charset="-122"/>
@@ -12519,9 +12681,14 @@
             </a:avLst>
           </a:prstGeom>
           <a:solidFill>
-            <a:srgbClr val="1C1140"/>
+            <a:srgbClr val="1A0B3D"/>
           </a:solidFill>
-          <a:ln/>
+          <a:ln w="12700">
+            <a:solidFill>
+              <a:srgbClr val="5A05F4"/>
+            </a:solidFill>
+            <a:prstDash val="solid"/>
+          </a:ln>
         </p:spPr>
       </p:sp>
       <p:sp>
@@ -12551,7 +12718,7 @@
             <a:r>
               <a:rPr lang="en-US" sz="1450" b="1" dirty="0">
                 <a:solidFill>
-                  <a:srgbClr val="C9A6FF"/>
+                  <a:srgbClr val="A98BFF"/>
                 </a:solidFill>
                 <a:latin typeface="Montserrat" pitchFamily="34" charset="0"/>
                 <a:ea typeface="Montserrat" pitchFamily="34" charset="-122"/>
@@ -12593,7 +12760,7 @@
             <a:r>
               <a:rPr lang="en-US" sz="1200" dirty="0">
                 <a:solidFill>
-                  <a:srgbClr val="FFFFFF"/>
+                  <a:srgbClr val="C9C4D6"/>
                 </a:solidFill>
                 <a:latin typeface="Montserrat" pitchFamily="34" charset="0"/>
                 <a:ea typeface="Montserrat" pitchFamily="34" charset="-122"/>
@@ -12622,9 +12789,14 @@
             </a:avLst>
           </a:prstGeom>
           <a:solidFill>
-            <a:srgbClr val="2A2010"/>
+            <a:srgbClr val="0B1A38"/>
           </a:solidFill>
-          <a:ln/>
+          <a:ln w="12700">
+            <a:solidFill>
+              <a:srgbClr val="6BA0F8"/>
+            </a:solidFill>
+            <a:prstDash val="solid"/>
+          </a:ln>
         </p:spPr>
       </p:sp>
       <p:sp>
@@ -12654,7 +12826,7 @@
             <a:r>
               <a:rPr lang="en-US" sz="950" b="1" spc="150" kern="0" dirty="0">
                 <a:solidFill>
-                  <a:srgbClr val="E8A857"/>
+                  <a:srgbClr val="6BA0F8"/>
                 </a:solidFill>
                 <a:latin typeface="Courier New" pitchFamily="34" charset="0"/>
                 <a:ea typeface="Courier New" pitchFamily="34" charset="-122"/>
@@ -12735,7 +12907,7 @@
             <a:r>
               <a:rPr lang="en-US" sz="1200" i="1" dirty="0">
                 <a:solidFill>
-                  <a:srgbClr val="AFA9BE"/>
+                  <a:srgbClr val="C9C4D6"/>
                 </a:solidFill>
                 <a:latin typeface="Montserrat" pitchFamily="34" charset="0"/>
                 <a:ea typeface="Montserrat" pitchFamily="34" charset="-122"/>
@@ -12777,7 +12949,7 @@
             <a:lvl1pPr>
               <a:defRPr sz="850">
                 <a:solidFill>
-                  <a:srgbClr val="8A82A0"/>
+                  <a:srgbClr val="9A94AA"/>
                 </a:solidFill>
                 <a:latin typeface="Courier New"/>
                 <a:ea typeface="Courier New"/>
@@ -12876,7 +13048,7 @@
             </a:avLst>
           </a:prstGeom>
           <a:solidFill>
-            <a:srgbClr val="5FD6A0"/>
+            <a:srgbClr val="5A05F4"/>
           </a:solidFill>
           <a:ln/>
         </p:spPr>
@@ -12908,7 +13080,7 @@
             <a:r>
               <a:rPr lang="en-US" sz="900" b="1" spc="100" kern="0" dirty="0">
                 <a:solidFill>
-                  <a:srgbClr val="102A20"/>
+                  <a:srgbClr val="FFFFFF"/>
                 </a:solidFill>
                 <a:latin typeface="Courier New" pitchFamily="34" charset="0"/>
                 <a:ea typeface="Courier New" pitchFamily="34" charset="-122"/>
@@ -12961,9 +13133,14 @@
             </a:avLst>
           </a:prstGeom>
           <a:solidFill>
-            <a:srgbClr val="102A20"/>
+            <a:srgbClr val="06180F"/>
           </a:solidFill>
-          <a:ln/>
+          <a:ln w="12700">
+            <a:solidFill>
+              <a:srgbClr val="3FCF8E"/>
+            </a:solidFill>
+            <a:prstDash val="solid"/>
+          </a:ln>
         </p:spPr>
       </p:sp>
       <p:sp>
@@ -12981,7 +13158,7 @@
             <a:avLst/>
           </a:prstGeom>
           <a:solidFill>
-            <a:srgbClr val="5FD6A0"/>
+            <a:srgbClr val="5A05F4"/>
           </a:solidFill>
           <a:ln/>
         </p:spPr>
@@ -13013,7 +13190,7 @@
             <a:r>
               <a:rPr lang="en-US" sz="1200" b="1" dirty="0">
                 <a:solidFill>
-                  <a:srgbClr val="102A20"/>
+                  <a:srgbClr val="FFFFFF"/>
                 </a:solidFill>
                 <a:latin typeface="Courier New" pitchFamily="34" charset="0"/>
                 <a:ea typeface="Courier New" pitchFamily="34" charset="-122"/>
@@ -13052,7 +13229,7 @@
             <a:r>
               <a:rPr lang="en-US" sz="1450" b="1" dirty="0">
                 <a:solidFill>
-                  <a:srgbClr val="5FD6A0"/>
+                  <a:srgbClr val="3FCF8E"/>
                 </a:solidFill>
                 <a:latin typeface="Montserrat" pitchFamily="34" charset="0"/>
                 <a:ea typeface="Montserrat" pitchFamily="34" charset="-122"/>
@@ -13094,7 +13271,7 @@
             <a:r>
               <a:rPr lang="en-US" sz="1200" dirty="0">
                 <a:solidFill>
-                  <a:srgbClr val="FFFFFF"/>
+                  <a:srgbClr val="C9C4D6"/>
                 </a:solidFill>
                 <a:latin typeface="Montserrat" pitchFamily="34" charset="0"/>
                 <a:ea typeface="Montserrat" pitchFamily="34" charset="-122"/>
@@ -13123,9 +13300,14 @@
             </a:avLst>
           </a:prstGeom>
           <a:solidFill>
-            <a:srgbClr val="102A20"/>
+            <a:srgbClr val="06180F"/>
           </a:solidFill>
-          <a:ln/>
+          <a:ln w="12700">
+            <a:solidFill>
+              <a:srgbClr val="3FCF8E"/>
+            </a:solidFill>
+            <a:prstDash val="solid"/>
+          </a:ln>
         </p:spPr>
       </p:sp>
       <p:sp>
@@ -13143,7 +13325,7 @@
             <a:avLst/>
           </a:prstGeom>
           <a:solidFill>
-            <a:srgbClr val="5FD6A0"/>
+            <a:srgbClr val="5A05F4"/>
           </a:solidFill>
           <a:ln/>
         </p:spPr>
@@ -13175,7 +13357,7 @@
             <a:r>
               <a:rPr lang="en-US" sz="1200" b="1" dirty="0">
                 <a:solidFill>
-                  <a:srgbClr val="102A20"/>
+                  <a:srgbClr val="FFFFFF"/>
                 </a:solidFill>
                 <a:latin typeface="Courier New" pitchFamily="34" charset="0"/>
                 <a:ea typeface="Courier New" pitchFamily="34" charset="-122"/>
@@ -13214,7 +13396,7 @@
             <a:r>
               <a:rPr lang="en-US" sz="1450" b="1" dirty="0">
                 <a:solidFill>
-                  <a:srgbClr val="5FD6A0"/>
+                  <a:srgbClr val="3FCF8E"/>
                 </a:solidFill>
                 <a:latin typeface="Montserrat" pitchFamily="34" charset="0"/>
                 <a:ea typeface="Montserrat" pitchFamily="34" charset="-122"/>
@@ -13256,7 +13438,7 @@
             <a:r>
               <a:rPr lang="en-US" sz="1200" dirty="0">
                 <a:solidFill>
-                  <a:srgbClr val="FFFFFF"/>
+                  <a:srgbClr val="C9C4D6"/>
                 </a:solidFill>
                 <a:latin typeface="Montserrat" pitchFamily="34" charset="0"/>
                 <a:ea typeface="Montserrat" pitchFamily="34" charset="-122"/>
@@ -13285,9 +13467,14 @@
             </a:avLst>
           </a:prstGeom>
           <a:solidFill>
-            <a:srgbClr val="102A20"/>
+            <a:srgbClr val="06180F"/>
           </a:solidFill>
-          <a:ln/>
+          <a:ln w="12700">
+            <a:solidFill>
+              <a:srgbClr val="3FCF8E"/>
+            </a:solidFill>
+            <a:prstDash val="solid"/>
+          </a:ln>
         </p:spPr>
       </p:sp>
       <p:sp>
@@ -13305,7 +13492,7 @@
             <a:avLst/>
           </a:prstGeom>
           <a:solidFill>
-            <a:srgbClr val="5FD6A0"/>
+            <a:srgbClr val="5A05F4"/>
           </a:solidFill>
           <a:ln/>
         </p:spPr>
@@ -13337,7 +13524,7 @@
             <a:r>
               <a:rPr lang="en-US" sz="1200" b="1" dirty="0">
                 <a:solidFill>
-                  <a:srgbClr val="102A20"/>
+                  <a:srgbClr val="FFFFFF"/>
                 </a:solidFill>
                 <a:latin typeface="Courier New" pitchFamily="34" charset="0"/>
                 <a:ea typeface="Courier New" pitchFamily="34" charset="-122"/>
@@ -13376,7 +13563,7 @@
             <a:r>
               <a:rPr lang="en-US" sz="1450" b="1" dirty="0">
                 <a:solidFill>
-                  <a:srgbClr val="5FD6A0"/>
+                  <a:srgbClr val="3FCF8E"/>
                 </a:solidFill>
                 <a:latin typeface="Montserrat" pitchFamily="34" charset="0"/>
                 <a:ea typeface="Montserrat" pitchFamily="34" charset="-122"/>
@@ -13418,7 +13605,7 @@
             <a:r>
               <a:rPr lang="en-US" sz="1200" dirty="0">
                 <a:solidFill>
-                  <a:srgbClr val="FFFFFF"/>
+                  <a:srgbClr val="C9C4D6"/>
                 </a:solidFill>
                 <a:latin typeface="Montserrat" pitchFamily="34" charset="0"/>
                 <a:ea typeface="Montserrat" pitchFamily="34" charset="-122"/>
@@ -13447,9 +13634,14 @@
             </a:avLst>
           </a:prstGeom>
           <a:solidFill>
-            <a:srgbClr val="102A20"/>
+            <a:srgbClr val="06180F"/>
           </a:solidFill>
-          <a:ln/>
+          <a:ln w="12700">
+            <a:solidFill>
+              <a:srgbClr val="3FCF8E"/>
+            </a:solidFill>
+            <a:prstDash val="solid"/>
+          </a:ln>
         </p:spPr>
       </p:sp>
       <p:sp>
@@ -13467,7 +13659,7 @@
             <a:avLst/>
           </a:prstGeom>
           <a:solidFill>
-            <a:srgbClr val="5FD6A0"/>
+            <a:srgbClr val="5A05F4"/>
           </a:solidFill>
           <a:ln/>
         </p:spPr>
@@ -13499,7 +13691,7 @@
             <a:r>
               <a:rPr lang="en-US" sz="1200" b="1" dirty="0">
                 <a:solidFill>
-                  <a:srgbClr val="102A20"/>
+                  <a:srgbClr val="FFFFFF"/>
                 </a:solidFill>
                 <a:latin typeface="Courier New" pitchFamily="34" charset="0"/>
                 <a:ea typeface="Courier New" pitchFamily="34" charset="-122"/>
@@ -13538,7 +13730,7 @@
             <a:r>
               <a:rPr lang="en-US" sz="1450" b="1" dirty="0">
                 <a:solidFill>
-                  <a:srgbClr val="5FD6A0"/>
+                  <a:srgbClr val="3FCF8E"/>
                 </a:solidFill>
                 <a:latin typeface="Montserrat" pitchFamily="34" charset="0"/>
                 <a:ea typeface="Montserrat" pitchFamily="34" charset="-122"/>
@@ -13580,7 +13772,7 @@
             <a:r>
               <a:rPr lang="en-US" sz="1200" dirty="0">
                 <a:solidFill>
-                  <a:srgbClr val="FFFFFF"/>
+                  <a:srgbClr val="C9C4D6"/>
                 </a:solidFill>
                 <a:latin typeface="Montserrat" pitchFamily="34" charset="0"/>
                 <a:ea typeface="Montserrat" pitchFamily="34" charset="-122"/>
@@ -13609,9 +13801,14 @@
             </a:avLst>
           </a:prstGeom>
           <a:solidFill>
-            <a:srgbClr val="102A20"/>
+            <a:srgbClr val="06180F"/>
           </a:solidFill>
-          <a:ln/>
+          <a:ln w="12700">
+            <a:solidFill>
+              <a:srgbClr val="3FCF8E"/>
+            </a:solidFill>
+            <a:prstDash val="solid"/>
+          </a:ln>
         </p:spPr>
       </p:sp>
       <p:sp>
@@ -13629,7 +13826,7 @@
             <a:avLst/>
           </a:prstGeom>
           <a:solidFill>
-            <a:srgbClr val="5FD6A0"/>
+            <a:srgbClr val="5A05F4"/>
           </a:solidFill>
           <a:ln/>
         </p:spPr>
@@ -13661,7 +13858,7 @@
             <a:r>
               <a:rPr lang="en-US" sz="1200" b="1" dirty="0">
                 <a:solidFill>
-                  <a:srgbClr val="102A20"/>
+                  <a:srgbClr val="FFFFFF"/>
                 </a:solidFill>
                 <a:latin typeface="Courier New" pitchFamily="34" charset="0"/>
                 <a:ea typeface="Courier New" pitchFamily="34" charset="-122"/>
@@ -13700,7 +13897,7 @@
             <a:r>
               <a:rPr lang="en-US" sz="1450" b="1" dirty="0">
                 <a:solidFill>
-                  <a:srgbClr val="5FD6A0"/>
+                  <a:srgbClr val="3FCF8E"/>
                 </a:solidFill>
                 <a:latin typeface="Montserrat" pitchFamily="34" charset="0"/>
                 <a:ea typeface="Montserrat" pitchFamily="34" charset="-122"/>
@@ -13742,7 +13939,7 @@
             <a:r>
               <a:rPr lang="en-US" sz="1200" dirty="0">
                 <a:solidFill>
-                  <a:srgbClr val="FFFFFF"/>
+                  <a:srgbClr val="C9C4D6"/>
                 </a:solidFill>
                 <a:latin typeface="Montserrat" pitchFamily="34" charset="0"/>
                 <a:ea typeface="Montserrat" pitchFamily="34" charset="-122"/>
@@ -13771,9 +13968,14 @@
             </a:avLst>
           </a:prstGeom>
           <a:solidFill>
-            <a:srgbClr val="2E1418"/>
+            <a:srgbClr val="1A0808"/>
           </a:solidFill>
-          <a:ln/>
+          <a:ln w="12700">
+            <a:solidFill>
+              <a:srgbClr val="FF6B6B"/>
+            </a:solidFill>
+            <a:prstDash val="solid"/>
+          </a:ln>
         </p:spPr>
       </p:sp>
       <p:sp>
@@ -13791,7 +13993,7 @@
             <a:avLst/>
           </a:prstGeom>
           <a:solidFill>
-            <a:srgbClr val="FF7B7B"/>
+            <a:srgbClr val="5A05F4"/>
           </a:solidFill>
           <a:ln/>
         </p:spPr>
@@ -13823,7 +14025,7 @@
             <a:r>
               <a:rPr lang="en-US" sz="1200" b="1" dirty="0">
                 <a:solidFill>
-                  <a:srgbClr val="2E1418"/>
+                  <a:srgbClr val="FFFFFF"/>
                 </a:solidFill>
                 <a:latin typeface="Courier New" pitchFamily="34" charset="0"/>
                 <a:ea typeface="Courier New" pitchFamily="34" charset="-122"/>
@@ -13862,7 +14064,7 @@
             <a:r>
               <a:rPr lang="en-US" sz="1450" b="1" dirty="0">
                 <a:solidFill>
-                  <a:srgbClr val="FF7B7B"/>
+                  <a:srgbClr val="FF6B6B"/>
                 </a:solidFill>
                 <a:latin typeface="Montserrat" pitchFamily="34" charset="0"/>
                 <a:ea typeface="Montserrat" pitchFamily="34" charset="-122"/>
@@ -13904,7 +14106,7 @@
             <a:r>
               <a:rPr lang="en-US" sz="1200" dirty="0">
                 <a:solidFill>
-                  <a:srgbClr val="FFFFFF"/>
+                  <a:srgbClr val="C9C4D6"/>
                 </a:solidFill>
                 <a:latin typeface="Montserrat" pitchFamily="34" charset="0"/>
                 <a:ea typeface="Montserrat" pitchFamily="34" charset="-122"/>
@@ -14049,7 +14251,7 @@
             <a:lvl1pPr>
               <a:defRPr sz="850">
                 <a:solidFill>
-                  <a:srgbClr val="8A82A0"/>
+                  <a:srgbClr val="9A94AA"/>
                 </a:solidFill>
                 <a:latin typeface="Courier New"/>
                 <a:ea typeface="Courier New"/>
@@ -14161,7 +14363,7 @@
             <a:r>
               <a:rPr lang="en-US" sz="1300" dirty="0">
                 <a:solidFill>
-                  <a:srgbClr val="AFA9BE"/>
+                  <a:srgbClr val="C9C4D6"/>
                 </a:solidFill>
                 <a:latin typeface="Montserrat" pitchFamily="34" charset="0"/>
                 <a:ea typeface="Montserrat" pitchFamily="34" charset="-122"/>
@@ -14190,9 +14392,14 @@
             </a:avLst>
           </a:prstGeom>
           <a:solidFill>
-            <a:srgbClr val="C9A6FF"/>
+            <a:srgbClr val="1A0B3D"/>
           </a:solidFill>
-          <a:ln/>
+          <a:ln w="12700">
+            <a:solidFill>
+              <a:srgbClr val="5A05F4"/>
+            </a:solidFill>
+            <a:prstDash val="solid"/>
+          </a:ln>
         </p:spPr>
       </p:sp>
       <p:sp>
@@ -14222,7 +14429,7 @@
             <a:r>
               <a:rPr lang="en-US" sz="900" b="1" spc="100" kern="0" dirty="0">
                 <a:solidFill>
-                  <a:srgbClr val="1C1140"/>
+                  <a:srgbClr val="A98BFF"/>
                 </a:solidFill>
                 <a:latin typeface="Courier New" pitchFamily="34" charset="0"/>
                 <a:ea typeface="Courier New" pitchFamily="34" charset="-122"/>
@@ -14275,11 +14482,11 @@
             </a:avLst>
           </a:prstGeom>
           <a:solidFill>
-            <a:srgbClr val="17141F"/>
+            <a:srgbClr val="000000"/>
           </a:solidFill>
           <a:ln w="12700">
             <a:solidFill>
-              <a:srgbClr val="2E2A3A"/>
+              <a:srgbClr val="5E4F85"/>
             </a:solidFill>
             <a:prstDash val="solid"/>
           </a:ln>
@@ -14413,7 +14620,7 @@
             <a:r>
               <a:rPr lang="en-US" sz="1200" dirty="0">
                 <a:solidFill>
-                  <a:srgbClr val="AFA9BE"/>
+                  <a:srgbClr val="C9C4D6"/>
                 </a:solidFill>
                 <a:latin typeface="Montserrat" pitchFamily="34" charset="0"/>
                 <a:ea typeface="Montserrat" pitchFamily="34" charset="-122"/>
@@ -14442,11 +14649,11 @@
             </a:avLst>
           </a:prstGeom>
           <a:solidFill>
-            <a:srgbClr val="17141F"/>
+            <a:srgbClr val="000000"/>
           </a:solidFill>
           <a:ln w="12700">
             <a:solidFill>
-              <a:srgbClr val="2E2A3A"/>
+              <a:srgbClr val="5E4F85"/>
             </a:solidFill>
             <a:prstDash val="solid"/>
           </a:ln>
@@ -14580,7 +14787,7 @@
             <a:r>
               <a:rPr lang="en-US" sz="1200" dirty="0">
                 <a:solidFill>
-                  <a:srgbClr val="AFA9BE"/>
+                  <a:srgbClr val="C9C4D6"/>
                 </a:solidFill>
                 <a:latin typeface="Montserrat" pitchFamily="34" charset="0"/>
                 <a:ea typeface="Montserrat" pitchFamily="34" charset="-122"/>
@@ -14609,11 +14816,11 @@
             </a:avLst>
           </a:prstGeom>
           <a:solidFill>
-            <a:srgbClr val="17141F"/>
+            <a:srgbClr val="000000"/>
           </a:solidFill>
           <a:ln w="12700">
             <a:solidFill>
-              <a:srgbClr val="2E2A3A"/>
+              <a:srgbClr val="5E4F85"/>
             </a:solidFill>
             <a:prstDash val="solid"/>
           </a:ln>
@@ -14747,7 +14954,7 @@
             <a:r>
               <a:rPr lang="en-US" sz="1200" dirty="0">
                 <a:solidFill>
-                  <a:srgbClr val="AFA9BE"/>
+                  <a:srgbClr val="C9C4D6"/>
                 </a:solidFill>
                 <a:latin typeface="Montserrat" pitchFamily="34" charset="0"/>
                 <a:ea typeface="Montserrat" pitchFamily="34" charset="-122"/>
@@ -14776,11 +14983,11 @@
             </a:avLst>
           </a:prstGeom>
           <a:solidFill>
-            <a:srgbClr val="17141F"/>
+            <a:srgbClr val="000000"/>
           </a:solidFill>
           <a:ln w="12700">
             <a:solidFill>
-              <a:srgbClr val="2E2A3A"/>
+              <a:srgbClr val="5E4F85"/>
             </a:solidFill>
             <a:prstDash val="solid"/>
           </a:ln>
@@ -14914,7 +15121,7 @@
             <a:r>
               <a:rPr lang="en-US" sz="1200" dirty="0">
                 <a:solidFill>
-                  <a:srgbClr val="AFA9BE"/>
+                  <a:srgbClr val="C9C4D6"/>
                 </a:solidFill>
                 <a:latin typeface="Montserrat" pitchFamily="34" charset="0"/>
                 <a:ea typeface="Montserrat" pitchFamily="34" charset="-122"/>
@@ -14943,11 +15150,11 @@
             </a:avLst>
           </a:prstGeom>
           <a:solidFill>
-            <a:srgbClr val="17141F"/>
+            <a:srgbClr val="000000"/>
           </a:solidFill>
           <a:ln w="12700">
             <a:solidFill>
-              <a:srgbClr val="2E2A3A"/>
+              <a:srgbClr val="5E4F85"/>
             </a:solidFill>
             <a:prstDash val="solid"/>
           </a:ln>
@@ -15081,7 +15288,7 @@
             <a:r>
               <a:rPr lang="en-US" sz="1200" dirty="0">
                 <a:solidFill>
-                  <a:srgbClr val="AFA9BE"/>
+                  <a:srgbClr val="C9C4D6"/>
                 </a:solidFill>
                 <a:latin typeface="Montserrat" pitchFamily="34" charset="0"/>
                 <a:ea typeface="Montserrat" pitchFamily="34" charset="-122"/>
@@ -15110,11 +15317,11 @@
             </a:avLst>
           </a:prstGeom>
           <a:solidFill>
-            <a:srgbClr val="17141F"/>
+            <a:srgbClr val="000000"/>
           </a:solidFill>
           <a:ln w="12700">
             <a:solidFill>
-              <a:srgbClr val="2E2A3A"/>
+              <a:srgbClr val="5E4F85"/>
             </a:solidFill>
             <a:prstDash val="solid"/>
           </a:ln>
@@ -15248,7 +15455,7 @@
             <a:r>
               <a:rPr lang="en-US" sz="1200" dirty="0">
                 <a:solidFill>
-                  <a:srgbClr val="AFA9BE"/>
+                  <a:srgbClr val="C9C4D6"/>
                 </a:solidFill>
                 <a:latin typeface="Montserrat" pitchFamily="34" charset="0"/>
                 <a:ea typeface="Montserrat" pitchFamily="34" charset="-122"/>
@@ -15290,7 +15497,7 @@
             <a:lvl1pPr>
               <a:defRPr sz="850">
                 <a:solidFill>
-                  <a:srgbClr val="8A82A0"/>
+                  <a:srgbClr val="9A94AA"/>
                 </a:solidFill>
                 <a:latin typeface="Courier New"/>
                 <a:ea typeface="Courier New"/>
@@ -15389,7 +15596,7 @@
             </a:avLst>
           </a:prstGeom>
           <a:solidFill>
-            <a:srgbClr val="5FD6A0"/>
+            <a:srgbClr val="5A05F4"/>
           </a:solidFill>
           <a:ln/>
         </p:spPr>
@@ -15421,7 +15628,7 @@
             <a:r>
               <a:rPr lang="en-US" sz="900" b="1" spc="100" kern="0" dirty="0">
                 <a:solidFill>
-                  <a:srgbClr val="102A20"/>
+                  <a:srgbClr val="FFFFFF"/>
                 </a:solidFill>
                 <a:latin typeface="Courier New" pitchFamily="34" charset="0"/>
                 <a:ea typeface="Courier New" pitchFamily="34" charset="-122"/>
@@ -15557,7 +15764,7 @@
             <a:r>
               <a:rPr lang="en-US" sz="1200" dirty="0">
                 <a:solidFill>
-                  <a:srgbClr val="AFA9BE"/>
+                  <a:srgbClr val="C9C4D6"/>
                 </a:solidFill>
                 <a:latin typeface="Montserrat" pitchFamily="34" charset="0"/>
                 <a:ea typeface="Montserrat" pitchFamily="34" charset="-122"/>
@@ -15669,7 +15876,7 @@
             <a:r>
               <a:rPr lang="en-US" sz="1200" dirty="0">
                 <a:solidFill>
-                  <a:srgbClr val="AFA9BE"/>
+                  <a:srgbClr val="C9C4D6"/>
                 </a:solidFill>
                 <a:latin typeface="Montserrat" pitchFamily="34" charset="0"/>
                 <a:ea typeface="Montserrat" pitchFamily="34" charset="-122"/>
@@ -15781,7 +15988,7 @@
             <a:r>
               <a:rPr lang="en-US" sz="1200" dirty="0">
                 <a:solidFill>
-                  <a:srgbClr val="AFA9BE"/>
+                  <a:srgbClr val="C9C4D6"/>
                 </a:solidFill>
                 <a:latin typeface="Montserrat" pitchFamily="34" charset="0"/>
                 <a:ea typeface="Montserrat" pitchFamily="34" charset="-122"/>
@@ -15893,7 +16100,7 @@
             <a:r>
               <a:rPr lang="en-US" sz="1200" dirty="0">
                 <a:solidFill>
-                  <a:srgbClr val="AFA9BE"/>
+                  <a:srgbClr val="C9C4D6"/>
                 </a:solidFill>
                 <a:latin typeface="Montserrat" pitchFamily="34" charset="0"/>
                 <a:ea typeface="Montserrat" pitchFamily="34" charset="-122"/>
@@ -16005,7 +16212,7 @@
             <a:r>
               <a:rPr lang="en-US" sz="1200" dirty="0">
                 <a:solidFill>
-                  <a:srgbClr val="AFA9BE"/>
+                  <a:srgbClr val="C9C4D6"/>
                 </a:solidFill>
                 <a:latin typeface="Montserrat" pitchFamily="34" charset="0"/>
                 <a:ea typeface="Montserrat" pitchFamily="34" charset="-122"/>
@@ -16032,7 +16239,7 @@
             <a:avLst/>
           </a:prstGeom>
           <a:solidFill>
-            <a:srgbClr val="E8A857"/>
+            <a:srgbClr val="6BA0F8"/>
           </a:solidFill>
           <a:ln/>
         </p:spPr>
@@ -16064,7 +16271,7 @@
             <a:r>
               <a:rPr lang="en-US" sz="1300" b="1" dirty="0">
                 <a:solidFill>
-                  <a:srgbClr val="2A2010"/>
+                  <a:srgbClr val="0B1A38"/>
                 </a:solidFill>
                 <a:latin typeface="Courier New" pitchFamily="34" charset="0"/>
                 <a:ea typeface="Courier New" pitchFamily="34" charset="-122"/>
@@ -16103,7 +16310,7 @@
             <a:r>
               <a:rPr lang="en-US" sz="1400" b="1" dirty="0">
                 <a:solidFill>
-                  <a:srgbClr val="E8A857"/>
+                  <a:srgbClr val="6BA0F8"/>
                 </a:solidFill>
                 <a:latin typeface="Montserrat" pitchFamily="34" charset="0"/>
                 <a:ea typeface="Montserrat" pitchFamily="34" charset="-122"/>
@@ -16117,7 +16324,7 @@
             <a:r>
               <a:rPr lang="en-US" sz="1200" dirty="0">
                 <a:solidFill>
-                  <a:srgbClr val="AFA9BE"/>
+                  <a:srgbClr val="C9C4D6"/>
                 </a:solidFill>
                 <a:latin typeface="Montserrat" pitchFamily="34" charset="0"/>
                 <a:ea typeface="Montserrat" pitchFamily="34" charset="-122"/>
@@ -16159,7 +16366,7 @@
             <a:lvl1pPr>
               <a:defRPr sz="850">
                 <a:solidFill>
-                  <a:srgbClr val="8A82A0"/>
+                  <a:srgbClr val="9A94AA"/>
                 </a:solidFill>
                 <a:latin typeface="Courier New"/>
                 <a:ea typeface="Courier New"/>
@@ -16258,9 +16465,14 @@
             </a:avLst>
           </a:prstGeom>
           <a:solidFill>
-            <a:srgbClr val="E8A857"/>
+            <a:srgbClr val="0B1A38"/>
           </a:solidFill>
-          <a:ln/>
+          <a:ln w="12700">
+            <a:solidFill>
+              <a:srgbClr val="6BA0F8"/>
+            </a:solidFill>
+            <a:prstDash val="solid"/>
+          </a:ln>
         </p:spPr>
       </p:sp>
       <p:sp>
@@ -16290,7 +16502,7 @@
             <a:r>
               <a:rPr lang="en-US" sz="900" b="1" spc="100" kern="0" dirty="0">
                 <a:solidFill>
-                  <a:srgbClr val="2A2010"/>
+                  <a:srgbClr val="6BA0F8"/>
                 </a:solidFill>
                 <a:latin typeface="Courier New" pitchFamily="34" charset="0"/>
                 <a:ea typeface="Courier New" pitchFamily="34" charset="-122"/>
@@ -16343,9 +16555,14 @@
             </a:avLst>
           </a:prstGeom>
           <a:solidFill>
-            <a:srgbClr val="102A20"/>
+            <a:srgbClr val="06180F"/>
           </a:solidFill>
-          <a:ln/>
+          <a:ln w="12700">
+            <a:solidFill>
+              <a:srgbClr val="3FCF8E"/>
+            </a:solidFill>
+            <a:prstDash val="solid"/>
+          </a:ln>
         </p:spPr>
       </p:sp>
       <p:sp>
@@ -16375,7 +16592,7 @@
             <a:r>
               <a:rPr lang="en-US" sz="1450" b="1" dirty="0">
                 <a:solidFill>
-                  <a:srgbClr val="5FD6A0"/>
+                  <a:srgbClr val="3FCF8E"/>
                 </a:solidFill>
                 <a:latin typeface="Montserrat" pitchFamily="34" charset="0"/>
                 <a:ea typeface="Montserrat" pitchFamily="34" charset="-122"/>
@@ -16417,7 +16634,7 @@
             <a:r>
               <a:rPr lang="en-US" sz="1200" dirty="0">
                 <a:solidFill>
-                  <a:srgbClr val="FFFFFF"/>
+                  <a:srgbClr val="C9C4D6"/>
                 </a:solidFill>
                 <a:latin typeface="Montserrat" pitchFamily="34" charset="0"/>
                 <a:ea typeface="Montserrat" pitchFamily="34" charset="-122"/>
@@ -16446,9 +16663,14 @@
             </a:avLst>
           </a:prstGeom>
           <a:solidFill>
-            <a:srgbClr val="2A2010"/>
+            <a:srgbClr val="0B1A38"/>
           </a:solidFill>
-          <a:ln/>
+          <a:ln w="12700">
+            <a:solidFill>
+              <a:srgbClr val="6BA0F8"/>
+            </a:solidFill>
+            <a:prstDash val="solid"/>
+          </a:ln>
         </p:spPr>
       </p:sp>
       <p:sp>
@@ -16478,7 +16700,7 @@
             <a:r>
               <a:rPr lang="en-US" sz="1450" b="1" dirty="0">
                 <a:solidFill>
-                  <a:srgbClr val="E8A857"/>
+                  <a:srgbClr val="6BA0F8"/>
                 </a:solidFill>
                 <a:latin typeface="Montserrat" pitchFamily="34" charset="0"/>
                 <a:ea typeface="Montserrat" pitchFamily="34" charset="-122"/>
@@ -16520,7 +16742,7 @@
             <a:r>
               <a:rPr lang="en-US" sz="1200" dirty="0">
                 <a:solidFill>
-                  <a:srgbClr val="FFFFFF"/>
+                  <a:srgbClr val="C9C4D6"/>
                 </a:solidFill>
                 <a:latin typeface="Montserrat" pitchFamily="34" charset="0"/>
                 <a:ea typeface="Montserrat" pitchFamily="34" charset="-122"/>
@@ -16549,9 +16771,14 @@
             </a:avLst>
           </a:prstGeom>
           <a:solidFill>
-            <a:srgbClr val="2E1418"/>
+            <a:srgbClr val="1A0808"/>
           </a:solidFill>
-          <a:ln/>
+          <a:ln w="12700">
+            <a:solidFill>
+              <a:srgbClr val="FF6B6B"/>
+            </a:solidFill>
+            <a:prstDash val="solid"/>
+          </a:ln>
         </p:spPr>
       </p:sp>
       <p:sp>
@@ -16581,7 +16808,7 @@
             <a:r>
               <a:rPr lang="en-US" sz="1450" b="1" dirty="0">
                 <a:solidFill>
-                  <a:srgbClr val="FF7B7B"/>
+                  <a:srgbClr val="FF6B6B"/>
                 </a:solidFill>
                 <a:latin typeface="Montserrat" pitchFamily="34" charset="0"/>
                 <a:ea typeface="Montserrat" pitchFamily="34" charset="-122"/>
@@ -16623,7 +16850,7 @@
             <a:r>
               <a:rPr lang="en-US" sz="1200" dirty="0">
                 <a:solidFill>
-                  <a:srgbClr val="FFFFFF"/>
+                  <a:srgbClr val="C9C4D6"/>
                 </a:solidFill>
                 <a:latin typeface="Montserrat" pitchFamily="34" charset="0"/>
                 <a:ea typeface="Montserrat" pitchFamily="34" charset="-122"/>
@@ -16652,9 +16879,14 @@
             </a:avLst>
           </a:prstGeom>
           <a:solidFill>
-            <a:srgbClr val="2E1418"/>
+            <a:srgbClr val="1A0808"/>
           </a:solidFill>
-          <a:ln/>
+          <a:ln w="12700">
+            <a:solidFill>
+              <a:srgbClr val="FF6B6B"/>
+            </a:solidFill>
+            <a:prstDash val="solid"/>
+          </a:ln>
         </p:spPr>
       </p:sp>
       <p:sp>
@@ -16684,7 +16916,7 @@
             <a:r>
               <a:rPr lang="en-US" sz="1100" b="1" dirty="0">
                 <a:solidFill>
-                  <a:srgbClr val="FF7B7B"/>
+                  <a:srgbClr val="FF6B6B"/>
                 </a:solidFill>
                 <a:latin typeface="Courier New" pitchFamily="34" charset="0"/>
                 <a:ea typeface="Courier New" pitchFamily="34" charset="-122"/>
@@ -16713,7 +16945,7 @@
           <a:noFill/>
           <a:ln w="15875">
             <a:solidFill>
-              <a:srgbClr val="9B7BE8"/>
+              <a:srgbClr val="8F72E6"/>
             </a:solidFill>
             <a:prstDash val="solid"/>
           </a:ln>
@@ -16734,7 +16966,7 @@
             <a:avLst/>
           </a:prstGeom>
           <a:solidFill>
-            <a:srgbClr val="9B7BE8"/>
+            <a:srgbClr val="8F72E6"/>
           </a:solidFill>
           <a:ln/>
         </p:spPr>
@@ -16756,11 +16988,11 @@
             </a:avLst>
           </a:prstGeom>
           <a:solidFill>
-            <a:srgbClr val="17141F"/>
+            <a:srgbClr val="000000"/>
           </a:solidFill>
           <a:ln w="12700">
             <a:solidFill>
-              <a:srgbClr val="2E2A3A"/>
+              <a:srgbClr val="5E4F85"/>
             </a:solidFill>
             <a:prstDash val="solid"/>
           </a:ln>
@@ -16822,7 +17054,7 @@
           <a:noFill/>
           <a:ln w="15875">
             <a:solidFill>
-              <a:srgbClr val="9B7BE8"/>
+              <a:srgbClr val="8F72E6"/>
             </a:solidFill>
             <a:prstDash val="solid"/>
           </a:ln>
@@ -16843,7 +17075,7 @@
             <a:avLst/>
           </a:prstGeom>
           <a:solidFill>
-            <a:srgbClr val="9B7BE8"/>
+            <a:srgbClr val="8F72E6"/>
           </a:solidFill>
           <a:ln/>
         </p:spPr>
@@ -16865,11 +17097,11 @@
             </a:avLst>
           </a:prstGeom>
           <a:solidFill>
-            <a:srgbClr val="17141F"/>
+            <a:srgbClr val="000000"/>
           </a:solidFill>
           <a:ln w="12700">
             <a:solidFill>
-              <a:srgbClr val="2E2A3A"/>
+              <a:srgbClr val="5E4F85"/>
             </a:solidFill>
             <a:prstDash val="solid"/>
           </a:ln>
@@ -16931,7 +17163,7 @@
           <a:noFill/>
           <a:ln w="15875">
             <a:solidFill>
-              <a:srgbClr val="9B7BE8"/>
+              <a:srgbClr val="8F72E6"/>
             </a:solidFill>
             <a:prstDash val="solid"/>
           </a:ln>
@@ -16952,7 +17184,7 @@
             <a:avLst/>
           </a:prstGeom>
           <a:solidFill>
-            <a:srgbClr val="9B7BE8"/>
+            <a:srgbClr val="8F72E6"/>
           </a:solidFill>
           <a:ln/>
         </p:spPr>
@@ -16974,11 +17206,11 @@
             </a:avLst>
           </a:prstGeom>
           <a:solidFill>
-            <a:srgbClr val="17141F"/>
+            <a:srgbClr val="000000"/>
           </a:solidFill>
           <a:ln w="12700">
             <a:solidFill>
-              <a:srgbClr val="2E2A3A"/>
+              <a:srgbClr val="5E4F85"/>
             </a:solidFill>
             <a:prstDash val="solid"/>
           </a:ln>
@@ -17040,7 +17272,7 @@
           <a:noFill/>
           <a:ln w="15875">
             <a:solidFill>
-              <a:srgbClr val="9B7BE8"/>
+              <a:srgbClr val="8F72E6"/>
             </a:solidFill>
             <a:prstDash val="solid"/>
           </a:ln>
@@ -17061,7 +17293,7 @@
             <a:avLst/>
           </a:prstGeom>
           <a:solidFill>
-            <a:srgbClr val="9B7BE8"/>
+            <a:srgbClr val="8F72E6"/>
           </a:solidFill>
           <a:ln/>
         </p:spPr>
@@ -17083,11 +17315,11 @@
             </a:avLst>
           </a:prstGeom>
           <a:solidFill>
-            <a:srgbClr val="17141F"/>
+            <a:srgbClr val="000000"/>
           </a:solidFill>
           <a:ln w="12700">
             <a:solidFill>
-              <a:srgbClr val="2E2A3A"/>
+              <a:srgbClr val="5E4F85"/>
             </a:solidFill>
             <a:prstDash val="solid"/>
           </a:ln>
@@ -17149,7 +17381,7 @@
           <a:noFill/>
           <a:ln w="15875">
             <a:solidFill>
-              <a:srgbClr val="9B7BE8"/>
+              <a:srgbClr val="8F72E6"/>
             </a:solidFill>
             <a:prstDash val="solid"/>
           </a:ln>
@@ -17170,7 +17402,7 @@
             <a:avLst/>
           </a:prstGeom>
           <a:solidFill>
-            <a:srgbClr val="9B7BE8"/>
+            <a:srgbClr val="8F72E6"/>
           </a:solidFill>
           <a:ln/>
         </p:spPr>
@@ -17192,11 +17424,11 @@
             </a:avLst>
           </a:prstGeom>
           <a:solidFill>
-            <a:srgbClr val="17141F"/>
+            <a:srgbClr val="000000"/>
           </a:solidFill>
           <a:ln w="12700">
             <a:solidFill>
-              <a:srgbClr val="2E2A3A"/>
+              <a:srgbClr val="5E4F85"/>
             </a:solidFill>
             <a:prstDash val="solid"/>
           </a:ln>
@@ -17258,7 +17490,7 @@
           <a:noFill/>
           <a:ln w="15875">
             <a:solidFill>
-              <a:srgbClr val="9B7BE8"/>
+              <a:srgbClr val="8F72E6"/>
             </a:solidFill>
             <a:prstDash val="solid"/>
           </a:ln>
@@ -17279,7 +17511,7 @@
             <a:avLst/>
           </a:prstGeom>
           <a:solidFill>
-            <a:srgbClr val="9B7BE8"/>
+            <a:srgbClr val="8F72E6"/>
           </a:solidFill>
           <a:ln/>
         </p:spPr>
@@ -17301,9 +17533,14 @@
             </a:avLst>
           </a:prstGeom>
           <a:solidFill>
-            <a:srgbClr val="102A20"/>
+            <a:srgbClr val="06180F"/>
           </a:solidFill>
-          <a:ln/>
+          <a:ln w="12700">
+            <a:solidFill>
+              <a:srgbClr val="3FCF8E"/>
+            </a:solidFill>
+            <a:prstDash val="solid"/>
+          </a:ln>
         </p:spPr>
       </p:sp>
       <p:sp>
@@ -17333,7 +17570,7 @@
             <a:r>
               <a:rPr lang="en-US" sz="1100" b="1" dirty="0">
                 <a:solidFill>
-                  <a:srgbClr val="5FD6A0"/>
+                  <a:srgbClr val="3FCF8E"/>
                 </a:solidFill>
                 <a:latin typeface="Courier New" pitchFamily="34" charset="0"/>
                 <a:ea typeface="Courier New" pitchFamily="34" charset="-122"/>
@@ -17439,7 +17676,7 @@
             <a:lvl1pPr>
               <a:defRPr sz="850">
                 <a:solidFill>
-                  <a:srgbClr val="8A82A0"/>
+                  <a:srgbClr val="9A94AA"/>
                 </a:solidFill>
                 <a:latin typeface="Courier New"/>
                 <a:ea typeface="Courier New"/>
@@ -17538,9 +17775,14 @@
             </a:avLst>
           </a:prstGeom>
           <a:solidFill>
-            <a:srgbClr val="E8A857"/>
+            <a:srgbClr val="0B1A38"/>
           </a:solidFill>
-          <a:ln/>
+          <a:ln w="12700">
+            <a:solidFill>
+              <a:srgbClr val="6BA0F8"/>
+            </a:solidFill>
+            <a:prstDash val="solid"/>
+          </a:ln>
         </p:spPr>
       </p:sp>
       <p:sp>
@@ -17570,7 +17812,7 @@
             <a:r>
               <a:rPr lang="en-US" sz="900" b="1" spc="100" kern="0" dirty="0">
                 <a:solidFill>
-                  <a:srgbClr val="2A2010"/>
+                  <a:srgbClr val="6BA0F8"/>
                 </a:solidFill>
                 <a:latin typeface="Courier New" pitchFamily="34" charset="0"/>
                 <a:ea typeface="Courier New" pitchFamily="34" charset="-122"/>
@@ -17623,11 +17865,11 @@
             </a:avLst>
           </a:prstGeom>
           <a:solidFill>
-            <a:srgbClr val="17141F"/>
+            <a:srgbClr val="000000"/>
           </a:solidFill>
           <a:ln w="12700">
             <a:solidFill>
-              <a:srgbClr val="2E2A3A"/>
+              <a:srgbClr val="5E4F85"/>
             </a:solidFill>
             <a:prstDash val="solid"/>
           </a:ln>
@@ -17650,11 +17892,11 @@
             </a:avLst>
           </a:prstGeom>
           <a:solidFill>
-            <a:srgbClr val="1C1140"/>
+            <a:srgbClr val="1A0B3D"/>
           </a:solidFill>
           <a:ln w="12700">
             <a:solidFill>
-              <a:srgbClr val="C9A6FF"/>
+              <a:srgbClr val="A98BFF"/>
             </a:solidFill>
             <a:prstDash val="solid"/>
           </a:ln>
@@ -17675,7 +17917,7 @@
             <a:avLst/>
           </a:prstGeom>
           <a:solidFill>
-            <a:srgbClr val="C9A6FF"/>
+            <a:srgbClr val="A98BFF"/>
           </a:solidFill>
           <a:ln/>
         </p:spPr>
@@ -17695,7 +17937,7 @@
             <a:avLst/>
           </a:prstGeom>
           <a:solidFill>
-            <a:srgbClr val="C9A6FF"/>
+            <a:srgbClr val="A98BFF"/>
           </a:solidFill>
           <a:ln/>
         </p:spPr>
@@ -17756,11 +17998,11 @@
             </a:avLst>
           </a:prstGeom>
           <a:solidFill>
-            <a:srgbClr val="1C1140"/>
+            <a:srgbClr val="1A0B3D"/>
           </a:solidFill>
           <a:ln w="12700">
             <a:solidFill>
-              <a:srgbClr val="C9A6FF"/>
+              <a:srgbClr val="A98BFF"/>
             </a:solidFill>
             <a:prstDash val="solid"/>
           </a:ln>
@@ -17781,7 +18023,7 @@
             <a:avLst/>
           </a:prstGeom>
           <a:solidFill>
-            <a:srgbClr val="C9A6FF"/>
+            <a:srgbClr val="A98BFF"/>
           </a:solidFill>
           <a:ln/>
         </p:spPr>
@@ -17801,7 +18043,7 @@
             <a:avLst/>
           </a:prstGeom>
           <a:solidFill>
-            <a:srgbClr val="C9A6FF"/>
+            <a:srgbClr val="A98BFF"/>
           </a:solidFill>
           <a:ln/>
         </p:spPr>
@@ -17862,11 +18104,11 @@
             </a:avLst>
           </a:prstGeom>
           <a:solidFill>
-            <a:srgbClr val="1C1140"/>
+            <a:srgbClr val="1A0B3D"/>
           </a:solidFill>
           <a:ln w="12700">
             <a:solidFill>
-              <a:srgbClr val="C9A6FF"/>
+              <a:srgbClr val="A98BFF"/>
             </a:solidFill>
             <a:prstDash val="solid"/>
           </a:ln>
@@ -17887,7 +18129,7 @@
             <a:avLst/>
           </a:prstGeom>
           <a:solidFill>
-            <a:srgbClr val="C9A6FF"/>
+            <a:srgbClr val="A98BFF"/>
           </a:solidFill>
           <a:ln/>
         </p:spPr>
@@ -17907,7 +18149,7 @@
             <a:avLst/>
           </a:prstGeom>
           <a:solidFill>
-            <a:srgbClr val="C9A6FF"/>
+            <a:srgbClr val="A98BFF"/>
           </a:solidFill>
           <a:ln/>
         </p:spPr>
@@ -17968,11 +18210,11 @@
             </a:avLst>
           </a:prstGeom>
           <a:solidFill>
-            <a:srgbClr val="1C1140"/>
+            <a:srgbClr val="1A0B3D"/>
           </a:solidFill>
           <a:ln w="12700">
             <a:solidFill>
-              <a:srgbClr val="C9A6FF"/>
+              <a:srgbClr val="A98BFF"/>
             </a:solidFill>
             <a:prstDash val="solid"/>
           </a:ln>
@@ -17993,7 +18235,7 @@
             <a:avLst/>
           </a:prstGeom>
           <a:solidFill>
-            <a:srgbClr val="C9A6FF"/>
+            <a:srgbClr val="A98BFF"/>
           </a:solidFill>
           <a:ln/>
         </p:spPr>
@@ -18013,7 +18255,7 @@
             <a:avLst/>
           </a:prstGeom>
           <a:solidFill>
-            <a:srgbClr val="C9A6FF"/>
+            <a:srgbClr val="A98BFF"/>
           </a:solidFill>
           <a:ln/>
         </p:spPr>
@@ -18074,11 +18316,11 @@
             </a:avLst>
           </a:prstGeom>
           <a:solidFill>
-            <a:srgbClr val="1C1140"/>
+            <a:srgbClr val="1A0B3D"/>
           </a:solidFill>
           <a:ln w="12700">
             <a:solidFill>
-              <a:srgbClr val="C9A6FF"/>
+              <a:srgbClr val="A98BFF"/>
             </a:solidFill>
             <a:prstDash val="solid"/>
           </a:ln>
@@ -18099,7 +18341,7 @@
             <a:avLst/>
           </a:prstGeom>
           <a:solidFill>
-            <a:srgbClr val="C9A6FF"/>
+            <a:srgbClr val="A98BFF"/>
           </a:solidFill>
           <a:ln/>
         </p:spPr>
@@ -18119,7 +18361,7 @@
             <a:avLst/>
           </a:prstGeom>
           <a:solidFill>
-            <a:srgbClr val="C9A6FF"/>
+            <a:srgbClr val="A98BFF"/>
           </a:solidFill>
           <a:ln/>
         </p:spPr>
@@ -18180,11 +18422,11 @@
             </a:avLst>
           </a:prstGeom>
           <a:solidFill>
-            <a:srgbClr val="1C1140"/>
+            <a:srgbClr val="1A0B3D"/>
           </a:solidFill>
           <a:ln w="12700">
             <a:solidFill>
-              <a:srgbClr val="C9A6FF"/>
+              <a:srgbClr val="A98BFF"/>
             </a:solidFill>
             <a:prstDash val="solid"/>
           </a:ln>
@@ -18205,7 +18447,7 @@
             <a:avLst/>
           </a:prstGeom>
           <a:solidFill>
-            <a:srgbClr val="C9A6FF"/>
+            <a:srgbClr val="A98BFF"/>
           </a:solidFill>
           <a:ln/>
         </p:spPr>
@@ -18225,7 +18467,7 @@
             <a:avLst/>
           </a:prstGeom>
           <a:solidFill>
-            <a:srgbClr val="C9A6FF"/>
+            <a:srgbClr val="A98BFF"/>
           </a:solidFill>
           <a:ln/>
         </p:spPr>
@@ -18296,7 +18538,7 @@
             <a:r>
               <a:rPr lang="en-US" sz="1200" i="1" dirty="0">
                 <a:solidFill>
-                  <a:srgbClr val="8A82A0"/>
+                  <a:srgbClr val="9A94AA"/>
                 </a:solidFill>
                 <a:latin typeface="Montserrat" pitchFamily="34" charset="0"/>
                 <a:ea typeface="Montserrat" pitchFamily="34" charset="-122"/>
@@ -18338,7 +18580,7 @@
             <a:lvl1pPr>
               <a:defRPr sz="850">
                 <a:solidFill>
-                  <a:srgbClr val="8A82A0"/>
+                  <a:srgbClr val="9A94AA"/>
                 </a:solidFill>
                 <a:latin typeface="Courier New"/>
                 <a:ea typeface="Courier New"/>
@@ -18437,9 +18679,14 @@
             </a:avLst>
           </a:prstGeom>
           <a:solidFill>
-            <a:srgbClr val="E8A857"/>
+            <a:srgbClr val="0B1A38"/>
           </a:solidFill>
-          <a:ln/>
+          <a:ln w="12700">
+            <a:solidFill>
+              <a:srgbClr val="6BA0F8"/>
+            </a:solidFill>
+            <a:prstDash val="solid"/>
+          </a:ln>
         </p:spPr>
       </p:sp>
       <p:sp>
@@ -18469,7 +18716,7 @@
             <a:r>
               <a:rPr lang="en-US" sz="900" b="1" spc="100" kern="0" dirty="0">
                 <a:solidFill>
-                  <a:srgbClr val="2A2010"/>
+                  <a:srgbClr val="6BA0F8"/>
                 </a:solidFill>
                 <a:latin typeface="Courier New" pitchFamily="34" charset="0"/>
                 <a:ea typeface="Courier New" pitchFamily="34" charset="-122"/>
@@ -18522,11 +18769,11 @@
             </a:avLst>
           </a:prstGeom>
           <a:solidFill>
-            <a:srgbClr val="17141F"/>
+            <a:srgbClr val="000000"/>
           </a:solidFill>
           <a:ln w="12700">
             <a:solidFill>
-              <a:srgbClr val="2E2A3A"/>
+              <a:srgbClr val="5E4F85"/>
             </a:solidFill>
             <a:prstDash val="solid"/>
           </a:ln>
@@ -18547,7 +18794,7 @@
             <a:avLst/>
           </a:prstGeom>
           <a:solidFill>
-            <a:srgbClr val="2E1418"/>
+            <a:srgbClr val="1A0808"/>
           </a:solidFill>
           <a:ln/>
         </p:spPr>
@@ -18567,7 +18814,7 @@
             <a:avLst/>
           </a:prstGeom>
           <a:solidFill>
-            <a:srgbClr val="FF7B7B"/>
+            <a:srgbClr val="FF6B6B"/>
           </a:solidFill>
           <a:ln/>
         </p:spPr>
@@ -18587,7 +18834,7 @@
             <a:avLst/>
           </a:prstGeom>
           <a:solidFill>
-            <a:srgbClr val="FF7B7B"/>
+            <a:srgbClr val="FF6B6B"/>
           </a:solidFill>
           <a:ln/>
         </p:spPr>
@@ -18633,7 +18880,7 @@
             <a:r>
               <a:rPr lang="en-US" sz="1250" dirty="0">
                 <a:solidFill>
-                  <a:srgbClr val="AFA9BE"/>
+                  <a:srgbClr val="C9C4D6"/>
                 </a:solidFill>
                 <a:latin typeface="Montserrat" pitchFamily="34" charset="0"/>
                 <a:ea typeface="Montserrat" pitchFamily="34" charset="-122"/>
@@ -18662,11 +18909,11 @@
             </a:avLst>
           </a:prstGeom>
           <a:solidFill>
-            <a:srgbClr val="17141F"/>
+            <a:srgbClr val="000000"/>
           </a:solidFill>
           <a:ln w="12700">
             <a:solidFill>
-              <a:srgbClr val="2E2A3A"/>
+              <a:srgbClr val="5E4F85"/>
             </a:solidFill>
             <a:prstDash val="solid"/>
           </a:ln>
@@ -18687,7 +18934,7 @@
             <a:avLst/>
           </a:prstGeom>
           <a:solidFill>
-            <a:srgbClr val="2E1418"/>
+            <a:srgbClr val="1A0808"/>
           </a:solidFill>
           <a:ln/>
         </p:spPr>
@@ -18707,7 +18954,7 @@
             <a:avLst/>
           </a:prstGeom>
           <a:solidFill>
-            <a:srgbClr val="FF7B7B"/>
+            <a:srgbClr val="FF6B6B"/>
           </a:solidFill>
           <a:ln/>
         </p:spPr>
@@ -18727,7 +18974,7 @@
             <a:avLst/>
           </a:prstGeom>
           <a:solidFill>
-            <a:srgbClr val="FF7B7B"/>
+            <a:srgbClr val="FF6B6B"/>
           </a:solidFill>
           <a:ln/>
         </p:spPr>
@@ -18773,7 +19020,7 @@
             <a:r>
               <a:rPr lang="en-US" sz="1250" dirty="0">
                 <a:solidFill>
-                  <a:srgbClr val="AFA9BE"/>
+                  <a:srgbClr val="C9C4D6"/>
                 </a:solidFill>
                 <a:latin typeface="Montserrat" pitchFamily="34" charset="0"/>
                 <a:ea typeface="Montserrat" pitchFamily="34" charset="-122"/>
@@ -18802,11 +19049,11 @@
             </a:avLst>
           </a:prstGeom>
           <a:solidFill>
-            <a:srgbClr val="17141F"/>
+            <a:srgbClr val="000000"/>
           </a:solidFill>
           <a:ln w="12700">
             <a:solidFill>
-              <a:srgbClr val="2E2A3A"/>
+              <a:srgbClr val="5E4F85"/>
             </a:solidFill>
             <a:prstDash val="solid"/>
           </a:ln>
@@ -18827,7 +19074,7 @@
             <a:avLst/>
           </a:prstGeom>
           <a:solidFill>
-            <a:srgbClr val="2E1418"/>
+            <a:srgbClr val="1A0808"/>
           </a:solidFill>
           <a:ln/>
         </p:spPr>
@@ -18847,7 +19094,7 @@
             <a:avLst/>
           </a:prstGeom>
           <a:solidFill>
-            <a:srgbClr val="FF7B7B"/>
+            <a:srgbClr val="FF6B6B"/>
           </a:solidFill>
           <a:ln/>
         </p:spPr>
@@ -18867,7 +19114,7 @@
             <a:avLst/>
           </a:prstGeom>
           <a:solidFill>
-            <a:srgbClr val="FF7B7B"/>
+            <a:srgbClr val="FF6B6B"/>
           </a:solidFill>
           <a:ln/>
         </p:spPr>
@@ -18913,7 +19160,7 @@
             <a:r>
               <a:rPr lang="en-US" sz="1250" dirty="0">
                 <a:solidFill>
-                  <a:srgbClr val="AFA9BE"/>
+                  <a:srgbClr val="C9C4D6"/>
                 </a:solidFill>
                 <a:latin typeface="Montserrat" pitchFamily="34" charset="0"/>
                 <a:ea typeface="Montserrat" pitchFamily="34" charset="-122"/>
@@ -18942,11 +19189,11 @@
             </a:avLst>
           </a:prstGeom>
           <a:solidFill>
-            <a:srgbClr val="17141F"/>
+            <a:srgbClr val="000000"/>
           </a:solidFill>
           <a:ln w="12700">
             <a:solidFill>
-              <a:srgbClr val="2E2A3A"/>
+              <a:srgbClr val="5E4F85"/>
             </a:solidFill>
             <a:prstDash val="solid"/>
           </a:ln>
@@ -18967,7 +19214,7 @@
             <a:avLst/>
           </a:prstGeom>
           <a:solidFill>
-            <a:srgbClr val="2E1418"/>
+            <a:srgbClr val="1A0808"/>
           </a:solidFill>
           <a:ln/>
         </p:spPr>
@@ -18987,7 +19234,7 @@
             <a:avLst/>
           </a:prstGeom>
           <a:solidFill>
-            <a:srgbClr val="FF7B7B"/>
+            <a:srgbClr val="FF6B6B"/>
           </a:solidFill>
           <a:ln/>
         </p:spPr>
@@ -19007,7 +19254,7 @@
             <a:avLst/>
           </a:prstGeom>
           <a:solidFill>
-            <a:srgbClr val="FF7B7B"/>
+            <a:srgbClr val="FF6B6B"/>
           </a:solidFill>
           <a:ln/>
         </p:spPr>
@@ -19053,7 +19300,7 @@
             <a:r>
               <a:rPr lang="en-US" sz="1250" dirty="0">
                 <a:solidFill>
-                  <a:srgbClr val="AFA9BE"/>
+                  <a:srgbClr val="C9C4D6"/>
                 </a:solidFill>
                 <a:latin typeface="Montserrat" pitchFamily="34" charset="0"/>
                 <a:ea typeface="Montserrat" pitchFamily="34" charset="-122"/>
@@ -19082,11 +19329,11 @@
             </a:avLst>
           </a:prstGeom>
           <a:solidFill>
-            <a:srgbClr val="17141F"/>
+            <a:srgbClr val="000000"/>
           </a:solidFill>
           <a:ln w="12700">
             <a:solidFill>
-              <a:srgbClr val="2E2A3A"/>
+              <a:srgbClr val="5E4F85"/>
             </a:solidFill>
             <a:prstDash val="solid"/>
           </a:ln>
@@ -19107,7 +19354,7 @@
             <a:avLst/>
           </a:prstGeom>
           <a:solidFill>
-            <a:srgbClr val="2E1418"/>
+            <a:srgbClr val="1A0808"/>
           </a:solidFill>
           <a:ln/>
         </p:spPr>
@@ -19127,7 +19374,7 @@
             <a:avLst/>
           </a:prstGeom>
           <a:solidFill>
-            <a:srgbClr val="FF7B7B"/>
+            <a:srgbClr val="FF6B6B"/>
           </a:solidFill>
           <a:ln/>
         </p:spPr>
@@ -19147,7 +19394,7 @@
             <a:avLst/>
           </a:prstGeom>
           <a:solidFill>
-            <a:srgbClr val="FF7B7B"/>
+            <a:srgbClr val="FF6B6B"/>
           </a:solidFill>
           <a:ln/>
         </p:spPr>
@@ -19193,7 +19440,7 @@
             <a:r>
               <a:rPr lang="en-US" sz="1250" dirty="0">
                 <a:solidFill>
-                  <a:srgbClr val="AFA9BE"/>
+                  <a:srgbClr val="C9C4D6"/>
                 </a:solidFill>
                 <a:latin typeface="Montserrat" pitchFamily="34" charset="0"/>
                 <a:ea typeface="Montserrat" pitchFamily="34" charset="-122"/>
@@ -19235,7 +19482,7 @@
             <a:lvl1pPr>
               <a:defRPr sz="850">
                 <a:solidFill>
-                  <a:srgbClr val="8A82A0"/>
+                  <a:srgbClr val="9A94AA"/>
                 </a:solidFill>
                 <a:latin typeface="Courier New"/>
                 <a:ea typeface="Courier New"/>
@@ -19334,7 +19581,7 @@
             </a:avLst>
           </a:prstGeom>
           <a:solidFill>
-            <a:srgbClr val="5FD6A0"/>
+            <a:srgbClr val="5A05F4"/>
           </a:solidFill>
           <a:ln/>
         </p:spPr>
@@ -19366,7 +19613,7 @@
             <a:r>
               <a:rPr lang="en-US" sz="900" b="1" spc="100" kern="0" dirty="0">
                 <a:solidFill>
-                  <a:srgbClr val="102A20"/>
+                  <a:srgbClr val="FFFFFF"/>
                 </a:solidFill>
                 <a:latin typeface="Courier New" pitchFamily="34" charset="0"/>
                 <a:ea typeface="Courier New" pitchFamily="34" charset="-122"/>
@@ -19419,11 +19666,11 @@
             </a:avLst>
           </a:prstGeom>
           <a:solidFill>
-            <a:srgbClr val="17141F"/>
+            <a:srgbClr val="000000"/>
           </a:solidFill>
           <a:ln w="12700">
             <a:solidFill>
-              <a:srgbClr val="2E2A3A"/>
+              <a:srgbClr val="5E4F85"/>
             </a:solidFill>
             <a:prstDash val="solid"/>
           </a:ln>
@@ -19498,7 +19745,7 @@
             <a:r>
               <a:rPr lang="en-US" sz="1200" dirty="0">
                 <a:solidFill>
-                  <a:srgbClr val="AFA9BE"/>
+                  <a:srgbClr val="C9C4D6"/>
                 </a:solidFill>
                 <a:latin typeface="Montserrat" pitchFamily="34" charset="0"/>
                 <a:ea typeface="Montserrat" pitchFamily="34" charset="-122"/>
@@ -19527,7 +19774,7 @@
             <a:r>
               <a:rPr lang="en-US" sz="1200" dirty="0">
                 <a:solidFill>
-                  <a:srgbClr val="AFA9BE"/>
+                  <a:srgbClr val="C9C4D6"/>
                 </a:solidFill>
                 <a:latin typeface="Montserrat" pitchFamily="34" charset="0"/>
                 <a:ea typeface="Montserrat" pitchFamily="34" charset="-122"/>
@@ -19556,7 +19803,7 @@
             <a:r>
               <a:rPr lang="en-US" sz="1200" dirty="0">
                 <a:solidFill>
-                  <a:srgbClr val="AFA9BE"/>
+                  <a:srgbClr val="C9C4D6"/>
                 </a:solidFill>
                 <a:latin typeface="Montserrat" pitchFamily="34" charset="0"/>
                 <a:ea typeface="Montserrat" pitchFamily="34" charset="-122"/>
@@ -19585,9 +19832,14 @@
             </a:avLst>
           </a:prstGeom>
           <a:solidFill>
-            <a:srgbClr val="2A2010"/>
+            <a:srgbClr val="0B1A38"/>
           </a:solidFill>
-          <a:ln/>
+          <a:ln w="12700">
+            <a:solidFill>
+              <a:srgbClr val="6BA0F8"/>
+            </a:solidFill>
+            <a:prstDash val="solid"/>
+          </a:ln>
         </p:spPr>
       </p:sp>
       <p:sp>
@@ -19617,7 +19869,7 @@
             <a:r>
               <a:rPr lang="en-US" sz="1450" b="1" dirty="0">
                 <a:solidFill>
-                  <a:srgbClr val="E8A857"/>
+                  <a:srgbClr val="6BA0F8"/>
                 </a:solidFill>
                 <a:latin typeface="Montserrat" pitchFamily="34" charset="0"/>
                 <a:ea typeface="Montserrat" pitchFamily="34" charset="-122"/>
@@ -19659,7 +19911,7 @@
             <a:r>
               <a:rPr lang="en-US" sz="1200" dirty="0">
                 <a:solidFill>
-                  <a:srgbClr val="FFFFFF"/>
+                  <a:srgbClr val="C9C4D6"/>
                 </a:solidFill>
                 <a:latin typeface="Montserrat" pitchFamily="34" charset="0"/>
                 <a:ea typeface="Montserrat" pitchFamily="34" charset="-122"/>
@@ -19688,7 +19940,7 @@
             <a:r>
               <a:rPr lang="en-US" sz="1200" dirty="0">
                 <a:solidFill>
-                  <a:srgbClr val="FFFFFF"/>
+                  <a:srgbClr val="C9C4D6"/>
                 </a:solidFill>
                 <a:latin typeface="Montserrat" pitchFamily="34" charset="0"/>
                 <a:ea typeface="Montserrat" pitchFamily="34" charset="-122"/>
@@ -19717,11 +19969,11 @@
             </a:avLst>
           </a:prstGeom>
           <a:solidFill>
-            <a:srgbClr val="17141F"/>
+            <a:srgbClr val="000000"/>
           </a:solidFill>
           <a:ln w="19050">
             <a:solidFill>
-              <a:srgbClr val="C9A6FF"/>
+              <a:srgbClr val="A98BFF"/>
             </a:solidFill>
             <a:prstDash val="solid"/>
           </a:ln>
@@ -19754,7 +20006,7 @@
             <a:r>
               <a:rPr lang="en-US" sz="1500" b="1" dirty="0">
                 <a:solidFill>
-                  <a:srgbClr val="C9A6FF"/>
+                  <a:srgbClr val="A98BFF"/>
                 </a:solidFill>
                 <a:latin typeface="Montserrat" pitchFamily="34" charset="0"/>
                 <a:ea typeface="Montserrat" pitchFamily="34" charset="-122"/>
@@ -19835,7 +20087,7 @@
             <a:lvl1pPr>
               <a:defRPr sz="850">
                 <a:solidFill>
-                  <a:srgbClr val="8A82A0"/>
+                  <a:srgbClr val="9A94AA"/>
                 </a:solidFill>
                 <a:latin typeface="Courier New"/>
                 <a:ea typeface="Courier New"/>
@@ -19944,7 +20196,7 @@
             <a:r>
               <a:rPr lang="en-US" sz="1100" b="1" spc="300" kern="0" dirty="0">
                 <a:solidFill>
-                  <a:srgbClr val="C9B8FB"/>
+                  <a:srgbClr val="C4B3F5"/>
                 </a:solidFill>
                 <a:latin typeface="Courier New" pitchFamily="34" charset="0"/>
                 <a:ea typeface="Courier New" pitchFamily="34" charset="-122"/>
@@ -20283,11 +20535,11 @@
             </a:avLst>
           </a:prstGeom>
           <a:solidFill>
-            <a:srgbClr val="17141F"/>
+            <a:srgbClr val="000000"/>
           </a:solidFill>
           <a:ln w="12700">
             <a:solidFill>
-              <a:srgbClr val="2E2A3A"/>
+              <a:srgbClr val="5E4F85"/>
             </a:solidFill>
             <a:prstDash val="solid"/>
           </a:ln>
@@ -20320,7 +20572,7 @@
             <a:r>
               <a:rPr lang="en-US" sz="1500" b="1" dirty="0">
                 <a:solidFill>
-                  <a:srgbClr val="C9A6FF"/>
+                  <a:srgbClr val="A98BFF"/>
                 </a:solidFill>
                 <a:latin typeface="Montserrat" pitchFamily="34" charset="0"/>
                 <a:ea typeface="Montserrat" pitchFamily="34" charset="-122"/>
@@ -20455,9 +20707,14 @@
             </a:avLst>
           </a:prstGeom>
           <a:solidFill>
-            <a:srgbClr val="C9A6FF"/>
+            <a:srgbClr val="1A0B3D"/>
           </a:solidFill>
-          <a:ln/>
+          <a:ln w="12700">
+            <a:solidFill>
+              <a:srgbClr val="5A05F4"/>
+            </a:solidFill>
+            <a:prstDash val="solid"/>
+          </a:ln>
         </p:spPr>
       </p:sp>
       <p:sp>
@@ -20487,7 +20744,7 @@
             <a:r>
               <a:rPr lang="en-US" sz="900" b="1" spc="100" kern="0" dirty="0">
                 <a:solidFill>
-                  <a:srgbClr val="1C1140"/>
+                  <a:srgbClr val="A98BFF"/>
                 </a:solidFill>
                 <a:latin typeface="Courier New" pitchFamily="34" charset="0"/>
                 <a:ea typeface="Courier New" pitchFamily="34" charset="-122"/>
@@ -20540,11 +20797,11 @@
             </a:avLst>
           </a:prstGeom>
           <a:solidFill>
-            <a:srgbClr val="17141F"/>
+            <a:srgbClr val="000000"/>
           </a:solidFill>
           <a:ln w="12700">
             <a:solidFill>
-              <a:srgbClr val="2E2A3A"/>
+              <a:srgbClr val="5E4F85"/>
             </a:solidFill>
             <a:prstDash val="solid"/>
           </a:ln>
@@ -20665,11 +20922,11 @@
             </a:avLst>
           </a:prstGeom>
           <a:solidFill>
-            <a:srgbClr val="17141F"/>
+            <a:srgbClr val="000000"/>
           </a:solidFill>
           <a:ln w="12700">
             <a:solidFill>
-              <a:srgbClr val="2E2A3A"/>
+              <a:srgbClr val="5E4F85"/>
             </a:solidFill>
             <a:prstDash val="solid"/>
           </a:ln>
@@ -20790,11 +21047,11 @@
             </a:avLst>
           </a:prstGeom>
           <a:solidFill>
-            <a:srgbClr val="17141F"/>
+            <a:srgbClr val="000000"/>
           </a:solidFill>
           <a:ln w="12700">
             <a:solidFill>
-              <a:srgbClr val="2E2A3A"/>
+              <a:srgbClr val="5E4F85"/>
             </a:solidFill>
             <a:prstDash val="solid"/>
           </a:ln>
@@ -20915,11 +21172,11 @@
             </a:avLst>
           </a:prstGeom>
           <a:solidFill>
-            <a:srgbClr val="17141F"/>
+            <a:srgbClr val="000000"/>
           </a:solidFill>
           <a:ln w="12700">
             <a:solidFill>
-              <a:srgbClr val="2E2A3A"/>
+              <a:srgbClr val="5E4F85"/>
             </a:solidFill>
             <a:prstDash val="solid"/>
           </a:ln>
@@ -21040,11 +21297,11 @@
             </a:avLst>
           </a:prstGeom>
           <a:solidFill>
-            <a:srgbClr val="17141F"/>
+            <a:srgbClr val="000000"/>
           </a:solidFill>
           <a:ln w="12700">
             <a:solidFill>
-              <a:srgbClr val="2E2A3A"/>
+              <a:srgbClr val="5E4F85"/>
             </a:solidFill>
             <a:prstDash val="solid"/>
           </a:ln>
@@ -21165,11 +21422,11 @@
             </a:avLst>
           </a:prstGeom>
           <a:solidFill>
-            <a:srgbClr val="17141F"/>
+            <a:srgbClr val="000000"/>
           </a:solidFill>
           <a:ln w="12700">
             <a:solidFill>
-              <a:srgbClr val="2E2A3A"/>
+              <a:srgbClr val="5E4F85"/>
             </a:solidFill>
             <a:prstDash val="solid"/>
           </a:ln>
@@ -21290,11 +21547,11 @@
             </a:avLst>
           </a:prstGeom>
           <a:solidFill>
-            <a:srgbClr val="17141F"/>
+            <a:srgbClr val="000000"/>
           </a:solidFill>
           <a:ln w="12700">
             <a:solidFill>
-              <a:srgbClr val="2E2A3A"/>
+              <a:srgbClr val="5E4F85"/>
             </a:solidFill>
             <a:prstDash val="solid"/>
           </a:ln>
@@ -21415,11 +21672,11 @@
             </a:avLst>
           </a:prstGeom>
           <a:solidFill>
-            <a:srgbClr val="17141F"/>
+            <a:srgbClr val="000000"/>
           </a:solidFill>
           <a:ln w="12700">
             <a:solidFill>
-              <a:srgbClr val="2E2A3A"/>
+              <a:srgbClr val="5E4F85"/>
             </a:solidFill>
             <a:prstDash val="solid"/>
           </a:ln>
@@ -21540,9 +21797,14 @@
             </a:avLst>
           </a:prstGeom>
           <a:solidFill>
-            <a:srgbClr val="2A2010"/>
+            <a:srgbClr val="0B1A38"/>
           </a:solidFill>
-          <a:ln/>
+          <a:ln w="12700">
+            <a:solidFill>
+              <a:srgbClr val="6BA0F8"/>
+            </a:solidFill>
+            <a:prstDash val="solid"/>
+          </a:ln>
         </p:spPr>
       </p:sp>
       <p:sp>
@@ -21560,7 +21822,7 @@
             <a:avLst/>
           </a:prstGeom>
           <a:solidFill>
-            <a:srgbClr val="E8A857"/>
+            <a:srgbClr val="5A05F4"/>
           </a:solidFill>
           <a:ln/>
         </p:spPr>
@@ -21592,7 +21854,7 @@
             <a:r>
               <a:rPr lang="en-US" sz="1200" b="1" dirty="0">
                 <a:solidFill>
-                  <a:srgbClr val="2A2010"/>
+                  <a:srgbClr val="FFFFFF"/>
                 </a:solidFill>
                 <a:latin typeface="Courier New" pitchFamily="34" charset="0"/>
                 <a:ea typeface="Courier New" pitchFamily="34" charset="-122"/>
@@ -21631,7 +21893,7 @@
             <a:r>
               <a:rPr lang="en-US" sz="1450" b="1" dirty="0">
                 <a:solidFill>
-                  <a:srgbClr val="E8A857"/>
+                  <a:srgbClr val="6BA0F8"/>
                 </a:solidFill>
                 <a:latin typeface="Montserrat" pitchFamily="34" charset="0"/>
                 <a:ea typeface="Montserrat" pitchFamily="34" charset="-122"/>
@@ -21660,11 +21922,11 @@
             </a:avLst>
           </a:prstGeom>
           <a:solidFill>
-            <a:srgbClr val="17141F"/>
+            <a:srgbClr val="000000"/>
           </a:solidFill>
           <a:ln w="12700">
             <a:solidFill>
-              <a:srgbClr val="2E2A3A"/>
+              <a:srgbClr val="5E4F85"/>
             </a:solidFill>
             <a:prstDash val="solid"/>
           </a:ln>
@@ -21785,11 +22047,11 @@
             </a:avLst>
           </a:prstGeom>
           <a:solidFill>
-            <a:srgbClr val="17141F"/>
+            <a:srgbClr val="000000"/>
           </a:solidFill>
           <a:ln w="12700">
             <a:solidFill>
-              <a:srgbClr val="2E2A3A"/>
+              <a:srgbClr val="5E4F85"/>
             </a:solidFill>
             <a:prstDash val="solid"/>
           </a:ln>
@@ -21910,11 +22172,11 @@
             </a:avLst>
           </a:prstGeom>
           <a:solidFill>
-            <a:srgbClr val="17141F"/>
+            <a:srgbClr val="000000"/>
           </a:solidFill>
           <a:ln w="12700">
             <a:solidFill>
-              <a:srgbClr val="2E2A3A"/>
+              <a:srgbClr val="5E4F85"/>
             </a:solidFill>
             <a:prstDash val="solid"/>
           </a:ln>
@@ -21992,7 +22254,7 @@
             <a:lvl1pPr>
               <a:defRPr sz="850">
                 <a:solidFill>
-                  <a:srgbClr val="8A82A0"/>
+                  <a:srgbClr val="9A94AA"/>
                 </a:solidFill>
                 <a:latin typeface="Courier New"/>
                 <a:ea typeface="Courier New"/>
@@ -22104,7 +22366,7 @@
             <a:r>
               <a:rPr lang="en-US" sz="1300" dirty="0">
                 <a:solidFill>
-                  <a:srgbClr val="AFA9BE"/>
+                  <a:srgbClr val="C9C4D6"/>
                 </a:solidFill>
                 <a:latin typeface="Montserrat" pitchFamily="34" charset="0"/>
                 <a:ea typeface="Montserrat" pitchFamily="34" charset="-122"/>
@@ -22133,9 +22395,14 @@
             </a:avLst>
           </a:prstGeom>
           <a:solidFill>
-            <a:srgbClr val="C9A6FF"/>
+            <a:srgbClr val="1A0B3D"/>
           </a:solidFill>
-          <a:ln/>
+          <a:ln w="12700">
+            <a:solidFill>
+              <a:srgbClr val="5A05F4"/>
+            </a:solidFill>
+            <a:prstDash val="solid"/>
+          </a:ln>
         </p:spPr>
       </p:sp>
       <p:sp>
@@ -22165,7 +22432,7 @@
             <a:r>
               <a:rPr lang="en-US" sz="900" b="1" spc="100" kern="0" dirty="0">
                 <a:solidFill>
-                  <a:srgbClr val="1C1140"/>
+                  <a:srgbClr val="A98BFF"/>
                 </a:solidFill>
                 <a:latin typeface="Courier New" pitchFamily="34" charset="0"/>
                 <a:ea typeface="Courier New" pitchFamily="34" charset="-122"/>
@@ -22218,11 +22485,11 @@
             </a:avLst>
           </a:prstGeom>
           <a:solidFill>
-            <a:srgbClr val="17141F"/>
+            <a:srgbClr val="000000"/>
           </a:solidFill>
           <a:ln w="12700">
             <a:solidFill>
-              <a:srgbClr val="2E2A3A"/>
+              <a:srgbClr val="5E4F85"/>
             </a:solidFill>
             <a:prstDash val="solid"/>
           </a:ln>
@@ -22255,7 +22522,7 @@
             <a:r>
               <a:rPr lang="en-US" sz="1250" b="1" dirty="0">
                 <a:solidFill>
-                  <a:srgbClr val="C9A6FF"/>
+                  <a:srgbClr val="A98BFF"/>
                 </a:solidFill>
                 <a:latin typeface="Courier New" pitchFamily="34" charset="0"/>
                 <a:ea typeface="Courier New" pitchFamily="34" charset="-122"/>
@@ -22297,7 +22564,7 @@
             <a:r>
               <a:rPr lang="en-US" sz="1150" dirty="0">
                 <a:solidFill>
-                  <a:srgbClr val="AFA9BE"/>
+                  <a:srgbClr val="C9C4D6"/>
                 </a:solidFill>
                 <a:latin typeface="Montserrat" pitchFamily="34" charset="0"/>
                 <a:ea typeface="Montserrat" pitchFamily="34" charset="-122"/>
@@ -22326,11 +22593,11 @@
             </a:avLst>
           </a:prstGeom>
           <a:solidFill>
-            <a:srgbClr val="17141F"/>
+            <a:srgbClr val="000000"/>
           </a:solidFill>
           <a:ln w="12700">
             <a:solidFill>
-              <a:srgbClr val="2E2A3A"/>
+              <a:srgbClr val="5E4F85"/>
             </a:solidFill>
             <a:prstDash val="solid"/>
           </a:ln>
@@ -22363,7 +22630,7 @@
             <a:r>
               <a:rPr lang="en-US" sz="1250" b="1" dirty="0">
                 <a:solidFill>
-                  <a:srgbClr val="C9A6FF"/>
+                  <a:srgbClr val="A98BFF"/>
                 </a:solidFill>
                 <a:latin typeface="Courier New" pitchFamily="34" charset="0"/>
                 <a:ea typeface="Courier New" pitchFamily="34" charset="-122"/>
@@ -22405,7 +22672,7 @@
             <a:r>
               <a:rPr lang="en-US" sz="1150" dirty="0">
                 <a:solidFill>
-                  <a:srgbClr val="AFA9BE"/>
+                  <a:srgbClr val="C9C4D6"/>
                 </a:solidFill>
                 <a:latin typeface="Montserrat" pitchFamily="34" charset="0"/>
                 <a:ea typeface="Montserrat" pitchFamily="34" charset="-122"/>
@@ -22434,11 +22701,11 @@
             </a:avLst>
           </a:prstGeom>
           <a:solidFill>
-            <a:srgbClr val="17141F"/>
+            <a:srgbClr val="000000"/>
           </a:solidFill>
           <a:ln w="12700">
             <a:solidFill>
-              <a:srgbClr val="2E2A3A"/>
+              <a:srgbClr val="5E4F85"/>
             </a:solidFill>
             <a:prstDash val="solid"/>
           </a:ln>
@@ -22471,7 +22738,7 @@
             <a:r>
               <a:rPr lang="en-US" sz="1250" b="1" dirty="0">
                 <a:solidFill>
-                  <a:srgbClr val="C9A6FF"/>
+                  <a:srgbClr val="A98BFF"/>
                 </a:solidFill>
                 <a:latin typeface="Courier New" pitchFamily="34" charset="0"/>
                 <a:ea typeface="Courier New" pitchFamily="34" charset="-122"/>
@@ -22513,7 +22780,7 @@
             <a:r>
               <a:rPr lang="en-US" sz="1150" dirty="0">
                 <a:solidFill>
-                  <a:srgbClr val="AFA9BE"/>
+                  <a:srgbClr val="C9C4D6"/>
                 </a:solidFill>
                 <a:latin typeface="Montserrat" pitchFamily="34" charset="0"/>
                 <a:ea typeface="Montserrat" pitchFamily="34" charset="-122"/>
@@ -22542,11 +22809,11 @@
             </a:avLst>
           </a:prstGeom>
           <a:solidFill>
-            <a:srgbClr val="17141F"/>
+            <a:srgbClr val="000000"/>
           </a:solidFill>
           <a:ln w="12700">
             <a:solidFill>
-              <a:srgbClr val="2E2A3A"/>
+              <a:srgbClr val="5E4F85"/>
             </a:solidFill>
             <a:prstDash val="solid"/>
           </a:ln>
@@ -22579,7 +22846,7 @@
             <a:r>
               <a:rPr lang="en-US" sz="1250" b="1" dirty="0">
                 <a:solidFill>
-                  <a:srgbClr val="C9A6FF"/>
+                  <a:srgbClr val="A98BFF"/>
                 </a:solidFill>
                 <a:latin typeface="Courier New" pitchFamily="34" charset="0"/>
                 <a:ea typeface="Courier New" pitchFamily="34" charset="-122"/>
@@ -22621,7 +22888,7 @@
             <a:r>
               <a:rPr lang="en-US" sz="1150" dirty="0">
                 <a:solidFill>
-                  <a:srgbClr val="AFA9BE"/>
+                  <a:srgbClr val="C9C4D6"/>
                 </a:solidFill>
                 <a:latin typeface="Montserrat" pitchFamily="34" charset="0"/>
                 <a:ea typeface="Montserrat" pitchFamily="34" charset="-122"/>
@@ -22650,11 +22917,11 @@
             </a:avLst>
           </a:prstGeom>
           <a:solidFill>
-            <a:srgbClr val="17141F"/>
+            <a:srgbClr val="000000"/>
           </a:solidFill>
           <a:ln w="12700">
             <a:solidFill>
-              <a:srgbClr val="2E2A3A"/>
+              <a:srgbClr val="5E4F85"/>
             </a:solidFill>
             <a:prstDash val="solid"/>
           </a:ln>
@@ -22687,7 +22954,7 @@
             <a:r>
               <a:rPr lang="en-US" sz="1250" b="1" dirty="0">
                 <a:solidFill>
-                  <a:srgbClr val="C9A6FF"/>
+                  <a:srgbClr val="A98BFF"/>
                 </a:solidFill>
                 <a:latin typeface="Courier New" pitchFamily="34" charset="0"/>
                 <a:ea typeface="Courier New" pitchFamily="34" charset="-122"/>
@@ -22729,7 +22996,7 @@
             <a:r>
               <a:rPr lang="en-US" sz="1150" dirty="0">
                 <a:solidFill>
-                  <a:srgbClr val="AFA9BE"/>
+                  <a:srgbClr val="C9C4D6"/>
                 </a:solidFill>
                 <a:latin typeface="Montserrat" pitchFamily="34" charset="0"/>
                 <a:ea typeface="Montserrat" pitchFamily="34" charset="-122"/>
@@ -22758,11 +23025,11 @@
             </a:avLst>
           </a:prstGeom>
           <a:solidFill>
-            <a:srgbClr val="17141F"/>
+            <a:srgbClr val="000000"/>
           </a:solidFill>
           <a:ln w="12700">
             <a:solidFill>
-              <a:srgbClr val="2E2A3A"/>
+              <a:srgbClr val="5E4F85"/>
             </a:solidFill>
             <a:prstDash val="solid"/>
           </a:ln>
@@ -22795,7 +23062,7 @@
             <a:r>
               <a:rPr lang="en-US" sz="1250" b="1" dirty="0">
                 <a:solidFill>
-                  <a:srgbClr val="C9A6FF"/>
+                  <a:srgbClr val="A98BFF"/>
                 </a:solidFill>
                 <a:latin typeface="Courier New" pitchFamily="34" charset="0"/>
                 <a:ea typeface="Courier New" pitchFamily="34" charset="-122"/>
@@ -22837,7 +23104,7 @@
             <a:r>
               <a:rPr lang="en-US" sz="1150" dirty="0">
                 <a:solidFill>
-                  <a:srgbClr val="AFA9BE"/>
+                  <a:srgbClr val="C9C4D6"/>
                 </a:solidFill>
                 <a:latin typeface="Montserrat" pitchFamily="34" charset="0"/>
                 <a:ea typeface="Montserrat" pitchFamily="34" charset="-122"/>
@@ -22866,11 +23133,11 @@
             </a:avLst>
           </a:prstGeom>
           <a:solidFill>
-            <a:srgbClr val="17141F"/>
+            <a:srgbClr val="000000"/>
           </a:solidFill>
           <a:ln w="12700">
             <a:solidFill>
-              <a:srgbClr val="2E2A3A"/>
+              <a:srgbClr val="5E4F85"/>
             </a:solidFill>
             <a:prstDash val="solid"/>
           </a:ln>
@@ -22948,7 +23215,7 @@
             <a:lvl1pPr>
               <a:defRPr sz="850">
                 <a:solidFill>
-                  <a:srgbClr val="8A82A0"/>
+                  <a:srgbClr val="9A94AA"/>
                 </a:solidFill>
                 <a:latin typeface="Courier New"/>
                 <a:ea typeface="Courier New"/>
@@ -23018,7 +23285,7 @@
             <a:r>
               <a:rPr lang="en-US" sz="2600" b="1" dirty="0">
                 <a:solidFill>
-                  <a:srgbClr val="C9A6FF"/>
+                  <a:srgbClr val="A98BFF"/>
                 </a:solidFill>
                 <a:latin typeface="Courier New" pitchFamily="34" charset="0"/>
                 <a:ea typeface="Courier New" pitchFamily="34" charset="-122"/>
@@ -23086,9 +23353,14 @@
             </a:avLst>
           </a:prstGeom>
           <a:solidFill>
-            <a:srgbClr val="C9A6FF"/>
+            <a:srgbClr val="1A0B3D"/>
           </a:solidFill>
-          <a:ln/>
+          <a:ln w="12700">
+            <a:solidFill>
+              <a:srgbClr val="5A05F4"/>
+            </a:solidFill>
+            <a:prstDash val="solid"/>
+          </a:ln>
         </p:spPr>
       </p:sp>
       <p:sp>
@@ -23118,7 +23390,7 @@
             <a:r>
               <a:rPr lang="en-US" sz="900" b="1" spc="100" kern="0" dirty="0">
                 <a:solidFill>
-                  <a:srgbClr val="1C1140"/>
+                  <a:srgbClr val="A98BFF"/>
                 </a:solidFill>
                 <a:latin typeface="Courier New" pitchFamily="34" charset="0"/>
                 <a:ea typeface="Courier New" pitchFamily="34" charset="-122"/>
@@ -23171,9 +23443,14 @@
             </a:avLst>
           </a:prstGeom>
           <a:solidFill>
-            <a:srgbClr val="102A20"/>
+            <a:srgbClr val="06180F"/>
           </a:solidFill>
-          <a:ln/>
+          <a:ln w="12700">
+            <a:solidFill>
+              <a:srgbClr val="3FCF8E"/>
+            </a:solidFill>
+            <a:prstDash val="solid"/>
+          </a:ln>
         </p:spPr>
       </p:sp>
       <p:sp>
@@ -23203,7 +23480,7 @@
             <a:r>
               <a:rPr lang="en-US" sz="3800" b="1" dirty="0">
                 <a:solidFill>
-                  <a:srgbClr val="5FD6A0"/>
+                  <a:srgbClr val="3FCF8E"/>
                 </a:solidFill>
                 <a:latin typeface="Montserrat" pitchFamily="34" charset="0"/>
                 <a:ea typeface="Montserrat" pitchFamily="34" charset="-122"/>
@@ -23242,7 +23519,7 @@
             <a:r>
               <a:rPr lang="en-US" sz="1150" dirty="0">
                 <a:solidFill>
-                  <a:srgbClr val="5FD6A0"/>
+                  <a:srgbClr val="C9C4D6"/>
                 </a:solidFill>
                 <a:latin typeface="Montserrat" pitchFamily="34" charset="0"/>
                 <a:ea typeface="Montserrat" pitchFamily="34" charset="-122"/>
@@ -23271,9 +23548,14 @@
             </a:avLst>
           </a:prstGeom>
           <a:solidFill>
-            <a:srgbClr val="2E1418"/>
+            <a:srgbClr val="1A0808"/>
           </a:solidFill>
-          <a:ln/>
+          <a:ln w="12700">
+            <a:solidFill>
+              <a:srgbClr val="FF6B6B"/>
+            </a:solidFill>
+            <a:prstDash val="solid"/>
+          </a:ln>
         </p:spPr>
       </p:sp>
       <p:sp>
@@ -23303,7 +23585,7 @@
             <a:r>
               <a:rPr lang="en-US" sz="4400" b="1" dirty="0">
                 <a:solidFill>
-                  <a:srgbClr val="FF7B7B"/>
+                  <a:srgbClr val="FF6B6B"/>
                 </a:solidFill>
                 <a:latin typeface="Montserrat" pitchFamily="34" charset="0"/>
                 <a:ea typeface="Montserrat" pitchFamily="34" charset="-122"/>
@@ -23342,7 +23624,7 @@
             <a:r>
               <a:rPr lang="en-US" sz="1150" dirty="0">
                 <a:solidFill>
-                  <a:srgbClr val="FF7B7B"/>
+                  <a:srgbClr val="C9C4D6"/>
                 </a:solidFill>
                 <a:latin typeface="Montserrat" pitchFamily="34" charset="0"/>
                 <a:ea typeface="Montserrat" pitchFamily="34" charset="-122"/>
@@ -23371,11 +23653,11 @@
             </a:avLst>
           </a:prstGeom>
           <a:solidFill>
-            <a:srgbClr val="17141F"/>
+            <a:srgbClr val="000000"/>
           </a:solidFill>
           <a:ln w="12700">
             <a:solidFill>
-              <a:srgbClr val="2E2A3A"/>
+              <a:srgbClr val="5E4F85"/>
             </a:solidFill>
             <a:prstDash val="solid"/>
           </a:ln>
@@ -23509,7 +23791,7 @@
             <a:r>
               <a:rPr lang="en-US" sz="1200" dirty="0">
                 <a:solidFill>
-                  <a:srgbClr val="AFA9BE"/>
+                  <a:srgbClr val="C9C4D6"/>
                 </a:solidFill>
                 <a:latin typeface="Montserrat" pitchFamily="34" charset="0"/>
                 <a:ea typeface="Montserrat" pitchFamily="34" charset="-122"/>
@@ -23538,11 +23820,11 @@
             </a:avLst>
           </a:prstGeom>
           <a:solidFill>
-            <a:srgbClr val="17141F"/>
+            <a:srgbClr val="000000"/>
           </a:solidFill>
           <a:ln w="12700">
             <a:solidFill>
-              <a:srgbClr val="2E2A3A"/>
+              <a:srgbClr val="5E4F85"/>
             </a:solidFill>
             <a:prstDash val="solid"/>
           </a:ln>
@@ -23676,7 +23958,7 @@
             <a:r>
               <a:rPr lang="en-US" sz="1200" dirty="0">
                 <a:solidFill>
-                  <a:srgbClr val="AFA9BE"/>
+                  <a:srgbClr val="C9C4D6"/>
                 </a:solidFill>
                 <a:latin typeface="Montserrat" pitchFamily="34" charset="0"/>
                 <a:ea typeface="Montserrat" pitchFamily="34" charset="-122"/>
@@ -23705,11 +23987,11 @@
             </a:avLst>
           </a:prstGeom>
           <a:solidFill>
-            <a:srgbClr val="17141F"/>
+            <a:srgbClr val="000000"/>
           </a:solidFill>
           <a:ln w="12700">
             <a:solidFill>
-              <a:srgbClr val="2E2A3A"/>
+              <a:srgbClr val="5E4F85"/>
             </a:solidFill>
             <a:prstDash val="solid"/>
           </a:ln>
@@ -23843,7 +24125,7 @@
             <a:r>
               <a:rPr lang="en-US" sz="1200" dirty="0">
                 <a:solidFill>
-                  <a:srgbClr val="AFA9BE"/>
+                  <a:srgbClr val="C9C4D6"/>
                 </a:solidFill>
                 <a:latin typeface="Montserrat" pitchFamily="34" charset="0"/>
                 <a:ea typeface="Montserrat" pitchFamily="34" charset="-122"/>
@@ -23872,11 +24154,11 @@
             </a:avLst>
           </a:prstGeom>
           <a:solidFill>
-            <a:srgbClr val="17141F"/>
+            <a:srgbClr val="000000"/>
           </a:solidFill>
           <a:ln w="12700">
             <a:solidFill>
-              <a:srgbClr val="2E2A3A"/>
+              <a:srgbClr val="5E4F85"/>
             </a:solidFill>
             <a:prstDash val="solid"/>
           </a:ln>
@@ -24010,7 +24292,7 @@
             <a:r>
               <a:rPr lang="en-US" sz="1200" dirty="0">
                 <a:solidFill>
-                  <a:srgbClr val="AFA9BE"/>
+                  <a:srgbClr val="C9C4D6"/>
                 </a:solidFill>
                 <a:latin typeface="Montserrat" pitchFamily="34" charset="0"/>
                 <a:ea typeface="Montserrat" pitchFamily="34" charset="-122"/>
@@ -24039,9 +24321,14 @@
             </a:avLst>
           </a:prstGeom>
           <a:solidFill>
-            <a:srgbClr val="2E1418"/>
+            <a:srgbClr val="1A0808"/>
           </a:solidFill>
-          <a:ln/>
+          <a:ln w="12700">
+            <a:solidFill>
+              <a:srgbClr val="FF6B6B"/>
+            </a:solidFill>
+            <a:prstDash val="solid"/>
+          </a:ln>
         </p:spPr>
       </p:sp>
       <p:sp>
@@ -24116,7 +24403,7 @@
             <a:lvl1pPr>
               <a:defRPr sz="850">
                 <a:solidFill>
-                  <a:srgbClr val="8A82A0"/>
+                  <a:srgbClr val="9A94AA"/>
                 </a:solidFill>
                 <a:latin typeface="Courier New"/>
                 <a:ea typeface="Courier New"/>
@@ -24186,7 +24473,7 @@
             <a:r>
               <a:rPr lang="en-US" sz="2600" b="1" dirty="0">
                 <a:solidFill>
-                  <a:srgbClr val="C9A6FF"/>
+                  <a:srgbClr val="A98BFF"/>
                 </a:solidFill>
                 <a:latin typeface="Courier New" pitchFamily="34" charset="0"/>
                 <a:ea typeface="Courier New" pitchFamily="34" charset="-122"/>
@@ -24254,9 +24541,14 @@
             </a:avLst>
           </a:prstGeom>
           <a:solidFill>
-            <a:srgbClr val="C9A6FF"/>
+            <a:srgbClr val="1A0B3D"/>
           </a:solidFill>
-          <a:ln/>
+          <a:ln w="12700">
+            <a:solidFill>
+              <a:srgbClr val="5A05F4"/>
+            </a:solidFill>
+            <a:prstDash val="solid"/>
+          </a:ln>
         </p:spPr>
       </p:sp>
       <p:sp>
@@ -24286,7 +24578,7 @@
             <a:r>
               <a:rPr lang="en-US" sz="900" b="1" spc="100" kern="0" dirty="0">
                 <a:solidFill>
-                  <a:srgbClr val="1C1140"/>
+                  <a:srgbClr val="A98BFF"/>
                 </a:solidFill>
                 <a:latin typeface="Courier New" pitchFamily="34" charset="0"/>
                 <a:ea typeface="Courier New" pitchFamily="34" charset="-122"/>
@@ -24339,9 +24631,14 @@
             </a:avLst>
           </a:prstGeom>
           <a:solidFill>
-            <a:srgbClr val="1C1140"/>
+            <a:srgbClr val="1A0B3D"/>
           </a:solidFill>
-          <a:ln/>
+          <a:ln w="12700">
+            <a:solidFill>
+              <a:srgbClr val="5A05F4"/>
+            </a:solidFill>
+            <a:prstDash val="solid"/>
+          </a:ln>
         </p:spPr>
       </p:sp>
       <p:sp>
@@ -24359,7 +24656,7 @@
             <a:avLst/>
           </a:prstGeom>
           <a:solidFill>
-            <a:srgbClr val="C9A6FF"/>
+            <a:srgbClr val="5A05F4"/>
           </a:solidFill>
           <a:ln/>
         </p:spPr>
@@ -24391,7 +24688,7 @@
             <a:r>
               <a:rPr lang="en-US" sz="1200" b="1" dirty="0">
                 <a:solidFill>
-                  <a:srgbClr val="1C1140"/>
+                  <a:srgbClr val="FFFFFF"/>
                 </a:solidFill>
                 <a:latin typeface="Courier New" pitchFamily="34" charset="0"/>
                 <a:ea typeface="Courier New" pitchFamily="34" charset="-122"/>
@@ -24430,7 +24727,7 @@
             <a:r>
               <a:rPr lang="en-US" sz="1450" b="1" dirty="0">
                 <a:solidFill>
-                  <a:srgbClr val="C9A6FF"/>
+                  <a:srgbClr val="A98BFF"/>
                 </a:solidFill>
                 <a:latin typeface="Montserrat" pitchFamily="34" charset="0"/>
                 <a:ea typeface="Montserrat" pitchFamily="34" charset="-122"/>
@@ -24472,7 +24769,7 @@
             <a:r>
               <a:rPr lang="en-US" sz="1200" dirty="0">
                 <a:solidFill>
-                  <a:srgbClr val="FFFFFF"/>
+                  <a:srgbClr val="C9C4D6"/>
                 </a:solidFill>
                 <a:latin typeface="Montserrat" pitchFamily="34" charset="0"/>
                 <a:ea typeface="Montserrat" pitchFamily="34" charset="-122"/>
@@ -24501,9 +24798,14 @@
             </a:avLst>
           </a:prstGeom>
           <a:solidFill>
-            <a:srgbClr val="1C1140"/>
+            <a:srgbClr val="1A0B3D"/>
           </a:solidFill>
-          <a:ln/>
+          <a:ln w="12700">
+            <a:solidFill>
+              <a:srgbClr val="5A05F4"/>
+            </a:solidFill>
+            <a:prstDash val="solid"/>
+          </a:ln>
         </p:spPr>
       </p:sp>
       <p:sp>
@@ -24521,7 +24823,7 @@
             <a:avLst/>
           </a:prstGeom>
           <a:solidFill>
-            <a:srgbClr val="C9A6FF"/>
+            <a:srgbClr val="5A05F4"/>
           </a:solidFill>
           <a:ln/>
         </p:spPr>
@@ -24553,7 +24855,7 @@
             <a:r>
               <a:rPr lang="en-US" sz="1200" b="1" dirty="0">
                 <a:solidFill>
-                  <a:srgbClr val="1C1140"/>
+                  <a:srgbClr val="FFFFFF"/>
                 </a:solidFill>
                 <a:latin typeface="Courier New" pitchFamily="34" charset="0"/>
                 <a:ea typeface="Courier New" pitchFamily="34" charset="-122"/>
@@ -24592,7 +24894,7 @@
             <a:r>
               <a:rPr lang="en-US" sz="1450" b="1" dirty="0">
                 <a:solidFill>
-                  <a:srgbClr val="C9A6FF"/>
+                  <a:srgbClr val="A98BFF"/>
                 </a:solidFill>
                 <a:latin typeface="Montserrat" pitchFamily="34" charset="0"/>
                 <a:ea typeface="Montserrat" pitchFamily="34" charset="-122"/>
@@ -24634,7 +24936,7 @@
             <a:r>
               <a:rPr lang="en-US" sz="1200" dirty="0">
                 <a:solidFill>
-                  <a:srgbClr val="FFFFFF"/>
+                  <a:srgbClr val="C9C4D6"/>
                 </a:solidFill>
                 <a:latin typeface="Montserrat" pitchFamily="34" charset="0"/>
                 <a:ea typeface="Montserrat" pitchFamily="34" charset="-122"/>
@@ -24663,9 +24965,14 @@
             </a:avLst>
           </a:prstGeom>
           <a:solidFill>
-            <a:srgbClr val="1C1140"/>
+            <a:srgbClr val="1A0B3D"/>
           </a:solidFill>
-          <a:ln/>
+          <a:ln w="12700">
+            <a:solidFill>
+              <a:srgbClr val="5A05F4"/>
+            </a:solidFill>
+            <a:prstDash val="solid"/>
+          </a:ln>
         </p:spPr>
       </p:sp>
       <p:sp>
@@ -24683,7 +24990,7 @@
             <a:avLst/>
           </a:prstGeom>
           <a:solidFill>
-            <a:srgbClr val="C9A6FF"/>
+            <a:srgbClr val="5A05F4"/>
           </a:solidFill>
           <a:ln/>
         </p:spPr>
@@ -24715,7 +25022,7 @@
             <a:r>
               <a:rPr lang="en-US" sz="1200" b="1" dirty="0">
                 <a:solidFill>
-                  <a:srgbClr val="1C1140"/>
+                  <a:srgbClr val="FFFFFF"/>
                 </a:solidFill>
                 <a:latin typeface="Courier New" pitchFamily="34" charset="0"/>
                 <a:ea typeface="Courier New" pitchFamily="34" charset="-122"/>
@@ -24754,7 +25061,7 @@
             <a:r>
               <a:rPr lang="en-US" sz="1450" b="1" dirty="0">
                 <a:solidFill>
-                  <a:srgbClr val="C9A6FF"/>
+                  <a:srgbClr val="A98BFF"/>
                 </a:solidFill>
                 <a:latin typeface="Montserrat" pitchFamily="34" charset="0"/>
                 <a:ea typeface="Montserrat" pitchFamily="34" charset="-122"/>
@@ -24796,7 +25103,7 @@
             <a:r>
               <a:rPr lang="en-US" sz="1200" dirty="0">
                 <a:solidFill>
-                  <a:srgbClr val="FFFFFF"/>
+                  <a:srgbClr val="C9C4D6"/>
                 </a:solidFill>
                 <a:latin typeface="Montserrat" pitchFamily="34" charset="0"/>
                 <a:ea typeface="Montserrat" pitchFamily="34" charset="-122"/>
@@ -24825,9 +25132,14 @@
             </a:avLst>
           </a:prstGeom>
           <a:solidFill>
-            <a:srgbClr val="1C1140"/>
+            <a:srgbClr val="1A0B3D"/>
           </a:solidFill>
-          <a:ln/>
+          <a:ln w="12700">
+            <a:solidFill>
+              <a:srgbClr val="5A05F4"/>
+            </a:solidFill>
+            <a:prstDash val="solid"/>
+          </a:ln>
         </p:spPr>
       </p:sp>
       <p:sp>
@@ -24845,7 +25157,7 @@
             <a:avLst/>
           </a:prstGeom>
           <a:solidFill>
-            <a:srgbClr val="C9A6FF"/>
+            <a:srgbClr val="5A05F4"/>
           </a:solidFill>
           <a:ln/>
         </p:spPr>
@@ -24877,7 +25189,7 @@
             <a:r>
               <a:rPr lang="en-US" sz="1200" b="1" dirty="0">
                 <a:solidFill>
-                  <a:srgbClr val="1C1140"/>
+                  <a:srgbClr val="FFFFFF"/>
                 </a:solidFill>
                 <a:latin typeface="Courier New" pitchFamily="34" charset="0"/>
                 <a:ea typeface="Courier New" pitchFamily="34" charset="-122"/>
@@ -24916,7 +25228,7 @@
             <a:r>
               <a:rPr lang="en-US" sz="1450" b="1" dirty="0">
                 <a:solidFill>
-                  <a:srgbClr val="C9A6FF"/>
+                  <a:srgbClr val="A98BFF"/>
                 </a:solidFill>
                 <a:latin typeface="Montserrat" pitchFamily="34" charset="0"/>
                 <a:ea typeface="Montserrat" pitchFamily="34" charset="-122"/>
@@ -24958,7 +25270,7 @@
             <a:r>
               <a:rPr lang="en-US" sz="1200" dirty="0">
                 <a:solidFill>
-                  <a:srgbClr val="FFFFFF"/>
+                  <a:srgbClr val="C9C4D6"/>
                 </a:solidFill>
                 <a:latin typeface="Montserrat" pitchFamily="34" charset="0"/>
                 <a:ea typeface="Montserrat" pitchFamily="34" charset="-122"/>
@@ -24987,11 +25299,11 @@
             </a:avLst>
           </a:prstGeom>
           <a:solidFill>
-            <a:srgbClr val="17141F"/>
+            <a:srgbClr val="000000"/>
           </a:solidFill>
           <a:ln w="12700">
             <a:solidFill>
-              <a:srgbClr val="2E2A3A"/>
+              <a:srgbClr val="5E4F85"/>
             </a:solidFill>
             <a:prstDash val="solid"/>
           </a:ln>
@@ -25095,9 +25407,14 @@
             </a:avLst>
           </a:prstGeom>
           <a:solidFill>
-            <a:srgbClr val="1C1140"/>
+            <a:srgbClr val="1A0B3D"/>
           </a:solidFill>
-          <a:ln/>
+          <a:ln w="12700">
+            <a:solidFill>
+              <a:srgbClr val="5A05F4"/>
+            </a:solidFill>
+            <a:prstDash val="solid"/>
+          </a:ln>
         </p:spPr>
       </p:sp>
       <p:sp>
@@ -25127,7 +25444,7 @@
             <a:r>
               <a:rPr lang="en-US" sz="1100" b="1" dirty="0">
                 <a:solidFill>
-                  <a:srgbClr val="C9A6FF"/>
+                  <a:srgbClr val="A98BFF"/>
                 </a:solidFill>
                 <a:latin typeface="Courier New" pitchFamily="34" charset="0"/>
                 <a:ea typeface="Courier New" pitchFamily="34" charset="-122"/>
@@ -25156,7 +25473,7 @@
           <a:noFill/>
           <a:ln w="15875">
             <a:solidFill>
-              <a:srgbClr val="9B7BE8"/>
+              <a:srgbClr val="8F72E6"/>
             </a:solidFill>
             <a:prstDash val="solid"/>
           </a:ln>
@@ -25177,7 +25494,7 @@
             <a:avLst/>
           </a:prstGeom>
           <a:solidFill>
-            <a:srgbClr val="9B7BE8"/>
+            <a:srgbClr val="8F72E6"/>
           </a:solidFill>
           <a:ln/>
         </p:spPr>
@@ -25199,11 +25516,11 @@
             </a:avLst>
           </a:prstGeom>
           <a:solidFill>
-            <a:srgbClr val="17141F"/>
+            <a:srgbClr val="000000"/>
           </a:solidFill>
           <a:ln w="12700">
             <a:solidFill>
-              <a:srgbClr val="2E2A3A"/>
+              <a:srgbClr val="5E4F85"/>
             </a:solidFill>
             <a:prstDash val="solid"/>
           </a:ln>
@@ -25265,7 +25582,7 @@
           <a:noFill/>
           <a:ln w="15875">
             <a:solidFill>
-              <a:srgbClr val="9B7BE8"/>
+              <a:srgbClr val="8F72E6"/>
             </a:solidFill>
             <a:prstDash val="solid"/>
           </a:ln>
@@ -25286,7 +25603,7 @@
             <a:avLst/>
           </a:prstGeom>
           <a:solidFill>
-            <a:srgbClr val="9B7BE8"/>
+            <a:srgbClr val="8F72E6"/>
           </a:solidFill>
           <a:ln/>
         </p:spPr>
@@ -25308,11 +25625,11 @@
             </a:avLst>
           </a:prstGeom>
           <a:solidFill>
-            <a:srgbClr val="17141F"/>
+            <a:srgbClr val="000000"/>
           </a:solidFill>
           <a:ln w="12700">
             <a:solidFill>
-              <a:srgbClr val="2E2A3A"/>
+              <a:srgbClr val="5E4F85"/>
             </a:solidFill>
             <a:prstDash val="solid"/>
           </a:ln>
@@ -25374,7 +25691,7 @@
           <a:noFill/>
           <a:ln w="15875">
             <a:solidFill>
-              <a:srgbClr val="9B7BE8"/>
+              <a:srgbClr val="8F72E6"/>
             </a:solidFill>
             <a:prstDash val="solid"/>
           </a:ln>
@@ -25395,7 +25712,7 @@
             <a:avLst/>
           </a:prstGeom>
           <a:solidFill>
-            <a:srgbClr val="9B7BE8"/>
+            <a:srgbClr val="8F72E6"/>
           </a:solidFill>
           <a:ln/>
         </p:spPr>
@@ -25417,11 +25734,11 @@
             </a:avLst>
           </a:prstGeom>
           <a:solidFill>
-            <a:srgbClr val="17141F"/>
+            <a:srgbClr val="000000"/>
           </a:solidFill>
           <a:ln w="12700">
             <a:solidFill>
-              <a:srgbClr val="2E2A3A"/>
+              <a:srgbClr val="5E4F85"/>
             </a:solidFill>
             <a:prstDash val="solid"/>
           </a:ln>
@@ -25483,7 +25800,7 @@
           <a:noFill/>
           <a:ln w="15875">
             <a:solidFill>
-              <a:srgbClr val="9B7BE8"/>
+              <a:srgbClr val="8F72E6"/>
             </a:solidFill>
             <a:prstDash val="solid"/>
           </a:ln>
@@ -25504,7 +25821,7 @@
             <a:avLst/>
           </a:prstGeom>
           <a:solidFill>
-            <a:srgbClr val="9B7BE8"/>
+            <a:srgbClr val="8F72E6"/>
           </a:solidFill>
           <a:ln/>
         </p:spPr>
@@ -25526,11 +25843,11 @@
             </a:avLst>
           </a:prstGeom>
           <a:solidFill>
-            <a:srgbClr val="17141F"/>
+            <a:srgbClr val="000000"/>
           </a:solidFill>
           <a:ln w="12700">
             <a:solidFill>
-              <a:srgbClr val="2E2A3A"/>
+              <a:srgbClr val="5E4F85"/>
             </a:solidFill>
             <a:prstDash val="solid"/>
           </a:ln>
@@ -25592,7 +25909,7 @@
           <a:noFill/>
           <a:ln w="15875">
             <a:solidFill>
-              <a:srgbClr val="9B7BE8"/>
+              <a:srgbClr val="8F72E6"/>
             </a:solidFill>
             <a:prstDash val="solid"/>
           </a:ln>
@@ -25613,7 +25930,7 @@
             <a:avLst/>
           </a:prstGeom>
           <a:solidFill>
-            <a:srgbClr val="9B7BE8"/>
+            <a:srgbClr val="8F72E6"/>
           </a:solidFill>
           <a:ln/>
         </p:spPr>
@@ -25635,11 +25952,11 @@
             </a:avLst>
           </a:prstGeom>
           <a:solidFill>
-            <a:srgbClr val="17141F"/>
+            <a:srgbClr val="000000"/>
           </a:solidFill>
           <a:ln w="12700">
             <a:solidFill>
-              <a:srgbClr val="2E2A3A"/>
+              <a:srgbClr val="5E4F85"/>
             </a:solidFill>
             <a:prstDash val="solid"/>
           </a:ln>
@@ -25711,7 +26028,7 @@
             <a:r>
               <a:rPr lang="en-US" sz="1150" i="1" dirty="0">
                 <a:solidFill>
-                  <a:srgbClr val="8A82A0"/>
+                  <a:srgbClr val="9A94AA"/>
                 </a:solidFill>
                 <a:latin typeface="Montserrat" pitchFamily="34" charset="0"/>
                 <a:ea typeface="Montserrat" pitchFamily="34" charset="-122"/>
@@ -25753,7 +26070,7 @@
             <a:lvl1pPr>
               <a:defRPr sz="850">
                 <a:solidFill>
-                  <a:srgbClr val="8A82A0"/>
+                  <a:srgbClr val="9A94AA"/>
                 </a:solidFill>
                 <a:latin typeface="Courier New"/>
                 <a:ea typeface="Courier New"/>
@@ -25823,7 +26140,7 @@
             <a:r>
               <a:rPr lang="en-US" sz="2600" b="1" dirty="0">
                 <a:solidFill>
-                  <a:srgbClr val="C9A6FF"/>
+                  <a:srgbClr val="A98BFF"/>
                 </a:solidFill>
                 <a:latin typeface="Courier New" pitchFamily="34" charset="0"/>
                 <a:ea typeface="Courier New" pitchFamily="34" charset="-122"/>
@@ -25891,9 +26208,14 @@
             </a:avLst>
           </a:prstGeom>
           <a:solidFill>
-            <a:srgbClr val="C9A6FF"/>
+            <a:srgbClr val="1A0B3D"/>
           </a:solidFill>
-          <a:ln/>
+          <a:ln w="12700">
+            <a:solidFill>
+              <a:srgbClr val="5A05F4"/>
+            </a:solidFill>
+            <a:prstDash val="solid"/>
+          </a:ln>
         </p:spPr>
       </p:sp>
       <p:sp>
@@ -25923,7 +26245,7 @@
             <a:r>
               <a:rPr lang="en-US" sz="900" b="1" spc="100" kern="0" dirty="0">
                 <a:solidFill>
-                  <a:srgbClr val="1C1140"/>
+                  <a:srgbClr val="A98BFF"/>
                 </a:solidFill>
                 <a:latin typeface="Courier New" pitchFamily="34" charset="0"/>
                 <a:ea typeface="Courier New" pitchFamily="34" charset="-122"/>
@@ -25976,11 +26298,11 @@
             </a:avLst>
           </a:prstGeom>
           <a:solidFill>
-            <a:srgbClr val="12101A"/>
+            <a:srgbClr val="07060C"/>
           </a:solidFill>
           <a:ln w="12700">
             <a:solidFill>
-              <a:srgbClr val="2E2A3A"/>
+              <a:srgbClr val="5E4F85"/>
             </a:solidFill>
             <a:prstDash val="solid"/>
           </a:ln>
@@ -26036,7 +26358,7 @@
             <a:r>
               <a:rPr lang="en-US" sz="1150" dirty="0">
                 <a:solidFill>
-                  <a:srgbClr val="C9A6FF"/>
+                  <a:srgbClr val="A98BFF"/>
                 </a:solidFill>
                 <a:latin typeface="Courier New" pitchFamily="34" charset="0"/>
                 <a:ea typeface="Courier New" pitchFamily="34" charset="-122"/>
@@ -26053,7 +26375,7 @@
             <a:r>
               <a:rPr lang="en-US" sz="1150" dirty="0">
                 <a:solidFill>
-                  <a:srgbClr val="7FD9A6"/>
+                  <a:srgbClr val="6BA0F8"/>
                 </a:solidFill>
                 <a:latin typeface="Courier New" pitchFamily="34" charset="0"/>
                 <a:ea typeface="Courier New" pitchFamily="34" charset="-122"/>
@@ -26073,7 +26395,7 @@
             <a:r>
               <a:rPr lang="en-US" sz="1150" dirty="0">
                 <a:solidFill>
-                  <a:srgbClr val="C9A6FF"/>
+                  <a:srgbClr val="A98BFF"/>
                 </a:solidFill>
                 <a:latin typeface="Courier New" pitchFamily="34" charset="0"/>
                 <a:ea typeface="Courier New" pitchFamily="34" charset="-122"/>
@@ -26110,7 +26432,7 @@
             <a:r>
               <a:rPr lang="en-US" sz="1150" dirty="0">
                 <a:solidFill>
-                  <a:srgbClr val="7FD9A6"/>
+                  <a:srgbClr val="6BA0F8"/>
                 </a:solidFill>
                 <a:latin typeface="Courier New" pitchFamily="34" charset="0"/>
                 <a:ea typeface="Courier New" pitchFamily="34" charset="-122"/>
@@ -26130,7 +26452,7 @@
             <a:r>
               <a:rPr lang="en-US" sz="1150" dirty="0">
                 <a:solidFill>
-                  <a:srgbClr val="7FD9A6"/>
+                  <a:srgbClr val="6BA0F8"/>
                 </a:solidFill>
                 <a:latin typeface="Courier New" pitchFamily="34" charset="0"/>
                 <a:ea typeface="Courier New" pitchFamily="34" charset="-122"/>
@@ -26190,7 +26512,7 @@
             <a:r>
               <a:rPr lang="en-US" sz="1150" dirty="0">
                 <a:solidFill>
-                  <a:srgbClr val="8A82A0"/>
+                  <a:srgbClr val="9A94AA"/>
                 </a:solidFill>
                 <a:latin typeface="Courier New" pitchFamily="34" charset="0"/>
                 <a:ea typeface="Courier New" pitchFamily="34" charset="-122"/>
@@ -26219,9 +26541,14 @@
             </a:avLst>
           </a:prstGeom>
           <a:solidFill>
-            <a:srgbClr val="2A2010"/>
+            <a:srgbClr val="0B1A38"/>
           </a:solidFill>
-          <a:ln/>
+          <a:ln w="12700">
+            <a:solidFill>
+              <a:srgbClr val="6BA0F8"/>
+            </a:solidFill>
+            <a:prstDash val="solid"/>
+          </a:ln>
         </p:spPr>
       </p:sp>
       <p:sp>
@@ -26283,9 +26610,14 @@
             </a:avLst>
           </a:prstGeom>
           <a:solidFill>
-            <a:srgbClr val="17141F"/>
+            <a:srgbClr val="000000"/>
           </a:solidFill>
-          <a:ln/>
+          <a:ln w="12700">
+            <a:solidFill>
+              <a:srgbClr val="5E4F85"/>
+            </a:solidFill>
+            <a:prstDash val="solid"/>
+          </a:ln>
         </p:spPr>
       </p:sp>
       <p:sp>
@@ -26354,7 +26686,7 @@
             <a:r>
               <a:rPr lang="en-US" sz="1150" dirty="0">
                 <a:solidFill>
-                  <a:srgbClr val="FFFFFF"/>
+                  <a:srgbClr val="C9C4D6"/>
                 </a:solidFill>
                 <a:latin typeface="Montserrat" pitchFamily="34" charset="0"/>
                 <a:ea typeface="Montserrat" pitchFamily="34" charset="-122"/>
@@ -26383,9 +26715,14 @@
             </a:avLst>
           </a:prstGeom>
           <a:solidFill>
-            <a:srgbClr val="17141F"/>
+            <a:srgbClr val="000000"/>
           </a:solidFill>
-          <a:ln/>
+          <a:ln w="12700">
+            <a:solidFill>
+              <a:srgbClr val="5E4F85"/>
+            </a:solidFill>
+            <a:prstDash val="solid"/>
+          </a:ln>
         </p:spPr>
       </p:sp>
       <p:sp>
@@ -26454,7 +26791,7 @@
             <a:r>
               <a:rPr lang="en-US" sz="1150" dirty="0">
                 <a:solidFill>
-                  <a:srgbClr val="FFFFFF"/>
+                  <a:srgbClr val="C9C4D6"/>
                 </a:solidFill>
                 <a:latin typeface="Montserrat" pitchFamily="34" charset="0"/>
                 <a:ea typeface="Montserrat" pitchFamily="34" charset="-122"/>
@@ -26483,9 +26820,14 @@
             </a:avLst>
           </a:prstGeom>
           <a:solidFill>
-            <a:srgbClr val="17141F"/>
+            <a:srgbClr val="000000"/>
           </a:solidFill>
-          <a:ln/>
+          <a:ln w="12700">
+            <a:solidFill>
+              <a:srgbClr val="5E4F85"/>
+            </a:solidFill>
+            <a:prstDash val="solid"/>
+          </a:ln>
         </p:spPr>
       </p:sp>
       <p:sp>
@@ -26554,7 +26896,7 @@
             <a:r>
               <a:rPr lang="en-US" sz="1150" dirty="0">
                 <a:solidFill>
-                  <a:srgbClr val="FFFFFF"/>
+                  <a:srgbClr val="C9C4D6"/>
                 </a:solidFill>
                 <a:latin typeface="Montserrat" pitchFamily="34" charset="0"/>
                 <a:ea typeface="Montserrat" pitchFamily="34" charset="-122"/>
@@ -26593,7 +26935,7 @@
             <a:r>
               <a:rPr lang="en-US" sz="1200" i="1" dirty="0">
                 <a:solidFill>
-                  <a:srgbClr val="C9A6FF"/>
+                  <a:srgbClr val="A98BFF"/>
                 </a:solidFill>
                 <a:latin typeface="Montserrat" pitchFamily="34" charset="0"/>
                 <a:ea typeface="Montserrat" pitchFamily="34" charset="-122"/>
@@ -26635,7 +26977,7 @@
             <a:lvl1pPr>
               <a:defRPr sz="850">
                 <a:solidFill>
-                  <a:srgbClr val="8A82A0"/>
+                  <a:srgbClr val="9A94AA"/>
                 </a:solidFill>
                 <a:latin typeface="Courier New"/>
                 <a:ea typeface="Courier New"/>
@@ -26705,7 +27047,7 @@
             <a:r>
               <a:rPr lang="en-US" sz="2600" b="1" dirty="0">
                 <a:solidFill>
-                  <a:srgbClr val="C9A6FF"/>
+                  <a:srgbClr val="A98BFF"/>
                 </a:solidFill>
                 <a:latin typeface="Courier New" pitchFamily="34" charset="0"/>
                 <a:ea typeface="Courier New" pitchFamily="34" charset="-122"/>
@@ -26773,9 +27115,14 @@
             </a:avLst>
           </a:prstGeom>
           <a:solidFill>
-            <a:srgbClr val="C9A6FF"/>
+            <a:srgbClr val="1A0B3D"/>
           </a:solidFill>
-          <a:ln/>
+          <a:ln w="12700">
+            <a:solidFill>
+              <a:srgbClr val="5A05F4"/>
+            </a:solidFill>
+            <a:prstDash val="solid"/>
+          </a:ln>
         </p:spPr>
       </p:sp>
       <p:sp>
@@ -26805,7 +27152,7 @@
             <a:r>
               <a:rPr lang="en-US" sz="900" b="1" spc="100" kern="0" dirty="0">
                 <a:solidFill>
-                  <a:srgbClr val="1C1140"/>
+                  <a:srgbClr val="A98BFF"/>
                 </a:solidFill>
                 <a:latin typeface="Courier New" pitchFamily="34" charset="0"/>
                 <a:ea typeface="Courier New" pitchFamily="34" charset="-122"/>
@@ -26880,7 +27227,7 @@
                       <a:r>
                         <a:rPr lang="en-US" sz="900" b="1" spc="100" kern="0" dirty="0">
                           <a:solidFill>
-                            <a:srgbClr val="AFA9BE"/>
+                            <a:srgbClr val="C9C4D6"/>
                           </a:solidFill>
                           <a:latin typeface="Courier New" pitchFamily="34" charset="0"/>
                           <a:ea typeface="Courier New" pitchFamily="34" charset="-122"/>
@@ -26898,7 +27245,7 @@
                   <a:tcPr marL="73152" marR="73152" marT="73152" marB="73152" anchor="ctr">
                     <a:lnL w="6350" cap="flat" cmpd="sng" algn="ctr">
                       <a:solidFill>
-                        <a:srgbClr val="2E2A3A"/>
+                        <a:srgbClr val="5E4F85"/>
                       </a:solidFill>
                       <a:prstDash val="solid"/>
                       <a:round/>
@@ -26907,7 +27254,7 @@
                     </a:lnL>
                     <a:lnR w="6350" cap="flat" cmpd="sng" algn="ctr">
                       <a:solidFill>
-                        <a:srgbClr val="2E2A3A"/>
+                        <a:srgbClr val="5E4F85"/>
                       </a:solidFill>
                       <a:prstDash val="solid"/>
                       <a:round/>
@@ -26916,7 +27263,7 @@
                     </a:lnR>
                     <a:lnT w="6350" cap="flat" cmpd="sng" algn="ctr">
                       <a:solidFill>
-                        <a:srgbClr val="2E2A3A"/>
+                        <a:srgbClr val="5E4F85"/>
                       </a:solidFill>
                       <a:prstDash val="solid"/>
                       <a:round/>
@@ -26925,7 +27272,7 @@
                     </a:lnT>
                     <a:lnB w="6350" cap="flat" cmpd="sng" algn="ctr">
                       <a:solidFill>
-                        <a:srgbClr val="2E2A3A"/>
+                        <a:srgbClr val="5E4F85"/>
                       </a:solidFill>
                       <a:prstDash val="solid"/>
                       <a:round/>
@@ -26933,7 +27280,7 @@
                       <a:tailEnd type="none" w="med" len="med"/>
                     </a:lnB>
                     <a:solidFill>
-                      <a:srgbClr val="1F1B2A"/>
+                      <a:srgbClr val="1A0B3D"/>
                     </a:solidFill>
                   </a:tcPr>
                 </a:tc>
@@ -26948,7 +27295,7 @@
                       <a:r>
                         <a:rPr lang="en-US" sz="900" b="1" spc="100" kern="0" dirty="0">
                           <a:solidFill>
-                            <a:srgbClr val="AFA9BE"/>
+                            <a:srgbClr val="C9C4D6"/>
                           </a:solidFill>
                           <a:latin typeface="Courier New" pitchFamily="34" charset="0"/>
                           <a:ea typeface="Courier New" pitchFamily="34" charset="-122"/>
@@ -26966,7 +27313,7 @@
                   <a:tcPr marL="73152" marR="73152" marT="73152" marB="73152" anchor="ctr">
                     <a:lnL w="6350" cap="flat" cmpd="sng" algn="ctr">
                       <a:solidFill>
-                        <a:srgbClr val="2E2A3A"/>
+                        <a:srgbClr val="5E4F85"/>
                       </a:solidFill>
                       <a:prstDash val="solid"/>
                       <a:round/>
@@ -26975,7 +27322,7 @@
                     </a:lnL>
                     <a:lnR w="6350" cap="flat" cmpd="sng" algn="ctr">
                       <a:solidFill>
-                        <a:srgbClr val="2E2A3A"/>
+                        <a:srgbClr val="5E4F85"/>
                       </a:solidFill>
                       <a:prstDash val="solid"/>
                       <a:round/>
@@ -26984,7 +27331,7 @@
                     </a:lnR>
                     <a:lnT w="6350" cap="flat" cmpd="sng" algn="ctr">
                       <a:solidFill>
-                        <a:srgbClr val="2E2A3A"/>
+                        <a:srgbClr val="5E4F85"/>
                       </a:solidFill>
                       <a:prstDash val="solid"/>
                       <a:round/>
@@ -26993,7 +27340,7 @@
                     </a:lnT>
                     <a:lnB w="6350" cap="flat" cmpd="sng" algn="ctr">
                       <a:solidFill>
-                        <a:srgbClr val="2E2A3A"/>
+                        <a:srgbClr val="5E4F85"/>
                       </a:solidFill>
                       <a:prstDash val="solid"/>
                       <a:round/>
@@ -27001,7 +27348,7 @@
                       <a:tailEnd type="none" w="med" len="med"/>
                     </a:lnB>
                     <a:solidFill>
-                      <a:srgbClr val="1F1B2A"/>
+                      <a:srgbClr val="1A0B3D"/>
                     </a:solidFill>
                   </a:tcPr>
                 </a:tc>
@@ -27016,7 +27363,7 @@
                       <a:r>
                         <a:rPr lang="en-US" sz="900" b="1" spc="100" kern="0" dirty="0">
                           <a:solidFill>
-                            <a:srgbClr val="AFA9BE"/>
+                            <a:srgbClr val="C9C4D6"/>
                           </a:solidFill>
                           <a:latin typeface="Courier New" pitchFamily="34" charset="0"/>
                           <a:ea typeface="Courier New" pitchFamily="34" charset="-122"/>
@@ -27034,7 +27381,7 @@
                   <a:tcPr marL="73152" marR="73152" marT="73152" marB="73152" anchor="ctr">
                     <a:lnL w="6350" cap="flat" cmpd="sng" algn="ctr">
                       <a:solidFill>
-                        <a:srgbClr val="2E2A3A"/>
+                        <a:srgbClr val="5E4F85"/>
                       </a:solidFill>
                       <a:prstDash val="solid"/>
                       <a:round/>
@@ -27043,7 +27390,7 @@
                     </a:lnL>
                     <a:lnR w="6350" cap="flat" cmpd="sng" algn="ctr">
                       <a:solidFill>
-                        <a:srgbClr val="2E2A3A"/>
+                        <a:srgbClr val="5E4F85"/>
                       </a:solidFill>
                       <a:prstDash val="solid"/>
                       <a:round/>
@@ -27052,7 +27399,7 @@
                     </a:lnR>
                     <a:lnT w="6350" cap="flat" cmpd="sng" algn="ctr">
                       <a:solidFill>
-                        <a:srgbClr val="2E2A3A"/>
+                        <a:srgbClr val="5E4F85"/>
                       </a:solidFill>
                       <a:prstDash val="solid"/>
                       <a:round/>
@@ -27061,7 +27408,7 @@
                     </a:lnT>
                     <a:lnB w="6350" cap="flat" cmpd="sng" algn="ctr">
                       <a:solidFill>
-                        <a:srgbClr val="2E2A3A"/>
+                        <a:srgbClr val="5E4F85"/>
                       </a:solidFill>
                       <a:prstDash val="solid"/>
                       <a:round/>
@@ -27069,7 +27416,7 @@
                       <a:tailEnd type="none" w="med" len="med"/>
                     </a:lnB>
                     <a:solidFill>
-                      <a:srgbClr val="1F1B2A"/>
+                      <a:srgbClr val="1A0B3D"/>
                     </a:solidFill>
                   </a:tcPr>
                 </a:tc>
@@ -27104,7 +27451,7 @@
                   <a:tcPr marL="73152" marR="73152" marT="73152" marB="73152" anchor="ctr">
                     <a:lnL w="6350" cap="flat" cmpd="sng" algn="ctr">
                       <a:solidFill>
-                        <a:srgbClr val="2E2A3A"/>
+                        <a:srgbClr val="5E4F85"/>
                       </a:solidFill>
                       <a:prstDash val="solid"/>
                       <a:round/>
@@ -27113,7 +27460,7 @@
                     </a:lnL>
                     <a:lnR w="6350" cap="flat" cmpd="sng" algn="ctr">
                       <a:solidFill>
-                        <a:srgbClr val="2E2A3A"/>
+                        <a:srgbClr val="5E4F85"/>
                       </a:solidFill>
                       <a:prstDash val="solid"/>
                       <a:round/>
@@ -27122,7 +27469,7 @@
                     </a:lnR>
                     <a:lnT w="6350" cap="flat" cmpd="sng" algn="ctr">
                       <a:solidFill>
-                        <a:srgbClr val="2E2A3A"/>
+                        <a:srgbClr val="5E4F85"/>
                       </a:solidFill>
                       <a:prstDash val="solid"/>
                       <a:round/>
@@ -27131,7 +27478,7 @@
                     </a:lnT>
                     <a:lnB w="6350" cap="flat" cmpd="sng" algn="ctr">
                       <a:solidFill>
-                        <a:srgbClr val="2E2A3A"/>
+                        <a:srgbClr val="5E4F85"/>
                       </a:solidFill>
                       <a:prstDash val="solid"/>
                       <a:round/>
@@ -27139,7 +27486,7 @@
                       <a:tailEnd type="none" w="med" len="med"/>
                     </a:lnB>
                     <a:solidFill>
-                      <a:srgbClr val="17141F"/>
+                      <a:srgbClr val="000000"/>
                     </a:solidFill>
                   </a:tcPr>
                 </a:tc>
@@ -27172,7 +27519,7 @@
                   <a:tcPr marL="73152" marR="73152" marT="73152" marB="73152" anchor="ctr">
                     <a:lnL w="6350" cap="flat" cmpd="sng" algn="ctr">
                       <a:solidFill>
-                        <a:srgbClr val="2E2A3A"/>
+                        <a:srgbClr val="5E4F85"/>
                       </a:solidFill>
                       <a:prstDash val="solid"/>
                       <a:round/>
@@ -27181,7 +27528,7 @@
                     </a:lnL>
                     <a:lnR w="6350" cap="flat" cmpd="sng" algn="ctr">
                       <a:solidFill>
-                        <a:srgbClr val="2E2A3A"/>
+                        <a:srgbClr val="5E4F85"/>
                       </a:solidFill>
                       <a:prstDash val="solid"/>
                       <a:round/>
@@ -27190,7 +27537,7 @@
                     </a:lnR>
                     <a:lnT w="6350" cap="flat" cmpd="sng" algn="ctr">
                       <a:solidFill>
-                        <a:srgbClr val="2E2A3A"/>
+                        <a:srgbClr val="5E4F85"/>
                       </a:solidFill>
                       <a:prstDash val="solid"/>
                       <a:round/>
@@ -27199,7 +27546,7 @@
                     </a:lnT>
                     <a:lnB w="6350" cap="flat" cmpd="sng" algn="ctr">
                       <a:solidFill>
-                        <a:srgbClr val="2E2A3A"/>
+                        <a:srgbClr val="5E4F85"/>
                       </a:solidFill>
                       <a:prstDash val="solid"/>
                       <a:round/>
@@ -27207,7 +27554,7 @@
                       <a:tailEnd type="none" w="med" len="med"/>
                     </a:lnB>
                     <a:solidFill>
-                      <a:srgbClr val="17141F"/>
+                      <a:srgbClr val="000000"/>
                     </a:solidFill>
                   </a:tcPr>
                 </a:tc>
@@ -27240,7 +27587,7 @@
                   <a:tcPr marL="73152" marR="73152" marT="73152" marB="73152" anchor="ctr">
                     <a:lnL w="6350" cap="flat" cmpd="sng" algn="ctr">
                       <a:solidFill>
-                        <a:srgbClr val="2E2A3A"/>
+                        <a:srgbClr val="5E4F85"/>
                       </a:solidFill>
                       <a:prstDash val="solid"/>
                       <a:round/>
@@ -27249,7 +27596,7 @@
                     </a:lnL>
                     <a:lnR w="6350" cap="flat" cmpd="sng" algn="ctr">
                       <a:solidFill>
-                        <a:srgbClr val="2E2A3A"/>
+                        <a:srgbClr val="5E4F85"/>
                       </a:solidFill>
                       <a:prstDash val="solid"/>
                       <a:round/>
@@ -27258,7 +27605,7 @@
                     </a:lnR>
                     <a:lnT w="6350" cap="flat" cmpd="sng" algn="ctr">
                       <a:solidFill>
-                        <a:srgbClr val="2E2A3A"/>
+                        <a:srgbClr val="5E4F85"/>
                       </a:solidFill>
                       <a:prstDash val="solid"/>
                       <a:round/>
@@ -27267,7 +27614,7 @@
                     </a:lnT>
                     <a:lnB w="6350" cap="flat" cmpd="sng" algn="ctr">
                       <a:solidFill>
-                        <a:srgbClr val="2E2A3A"/>
+                        <a:srgbClr val="5E4F85"/>
                       </a:solidFill>
                       <a:prstDash val="solid"/>
                       <a:round/>
@@ -27275,7 +27622,7 @@
                       <a:tailEnd type="none" w="med" len="med"/>
                     </a:lnB>
                     <a:solidFill>
-                      <a:srgbClr val="17141F"/>
+                      <a:srgbClr val="000000"/>
                     </a:solidFill>
                   </a:tcPr>
                 </a:tc>
@@ -27292,7 +27639,7 @@
                       <a:r>
                         <a:rPr lang="en-US" sz="1150" b="1" dirty="0">
                           <a:solidFill>
-                            <a:srgbClr val="FF7B7B"/>
+                            <a:srgbClr val="FF6B6B"/>
                           </a:solidFill>
                           <a:latin typeface="Montserrat" pitchFamily="34" charset="0"/>
                           <a:ea typeface="Montserrat" pitchFamily="34" charset="-122"/>
@@ -27310,7 +27657,7 @@
                   <a:tcPr marL="73152" marR="73152" marT="73152" marB="73152" anchor="ctr">
                     <a:lnL w="6350" cap="flat" cmpd="sng" algn="ctr">
                       <a:solidFill>
-                        <a:srgbClr val="2E2A3A"/>
+                        <a:srgbClr val="5E4F85"/>
                       </a:solidFill>
                       <a:prstDash val="solid"/>
                       <a:round/>
@@ -27319,7 +27666,7 @@
                     </a:lnL>
                     <a:lnR w="6350" cap="flat" cmpd="sng" algn="ctr">
                       <a:solidFill>
-                        <a:srgbClr val="2E2A3A"/>
+                        <a:srgbClr val="5E4F85"/>
                       </a:solidFill>
                       <a:prstDash val="solid"/>
                       <a:round/>
@@ -27328,7 +27675,7 @@
                     </a:lnR>
                     <a:lnT w="6350" cap="flat" cmpd="sng" algn="ctr">
                       <a:solidFill>
-                        <a:srgbClr val="2E2A3A"/>
+                        <a:srgbClr val="5E4F85"/>
                       </a:solidFill>
                       <a:prstDash val="solid"/>
                       <a:round/>
@@ -27337,7 +27684,7 @@
                     </a:lnT>
                     <a:lnB w="6350" cap="flat" cmpd="sng" algn="ctr">
                       <a:solidFill>
-                        <a:srgbClr val="2E2A3A"/>
+                        <a:srgbClr val="5E4F85"/>
                       </a:solidFill>
                       <a:prstDash val="solid"/>
                       <a:round/>
@@ -27345,7 +27692,7 @@
                       <a:tailEnd type="none" w="med" len="med"/>
                     </a:lnB>
                     <a:solidFill>
-                      <a:srgbClr val="2E1418"/>
+                      <a:srgbClr val="1A0808"/>
                     </a:solidFill>
                   </a:tcPr>
                 </a:tc>
@@ -27378,7 +27725,7 @@
                   <a:tcPr marL="73152" marR="73152" marT="73152" marB="73152" anchor="ctr">
                     <a:lnL w="6350" cap="flat" cmpd="sng" algn="ctr">
                       <a:solidFill>
-                        <a:srgbClr val="2E2A3A"/>
+                        <a:srgbClr val="5E4F85"/>
                       </a:solidFill>
                       <a:prstDash val="solid"/>
                       <a:round/>
@@ -27387,7 +27734,7 @@
                     </a:lnL>
                     <a:lnR w="6350" cap="flat" cmpd="sng" algn="ctr">
                       <a:solidFill>
-                        <a:srgbClr val="2E2A3A"/>
+                        <a:srgbClr val="5E4F85"/>
                       </a:solidFill>
                       <a:prstDash val="solid"/>
                       <a:round/>
@@ -27396,7 +27743,7 @@
                     </a:lnR>
                     <a:lnT w="6350" cap="flat" cmpd="sng" algn="ctr">
                       <a:solidFill>
-                        <a:srgbClr val="2E2A3A"/>
+                        <a:srgbClr val="5E4F85"/>
                       </a:solidFill>
                       <a:prstDash val="solid"/>
                       <a:round/>
@@ -27405,7 +27752,7 @@
                     </a:lnT>
                     <a:lnB w="6350" cap="flat" cmpd="sng" algn="ctr">
                       <a:solidFill>
-                        <a:srgbClr val="2E2A3A"/>
+                        <a:srgbClr val="5E4F85"/>
                       </a:solidFill>
                       <a:prstDash val="solid"/>
                       <a:round/>
@@ -27413,7 +27760,7 @@
                       <a:tailEnd type="none" w="med" len="med"/>
                     </a:lnB>
                     <a:solidFill>
-                      <a:srgbClr val="2E1418"/>
+                      <a:srgbClr val="1A0808"/>
                     </a:solidFill>
                   </a:tcPr>
                 </a:tc>
@@ -27446,7 +27793,7 @@
                   <a:tcPr marL="73152" marR="73152" marT="73152" marB="73152" anchor="ctr">
                     <a:lnL w="6350" cap="flat" cmpd="sng" algn="ctr">
                       <a:solidFill>
-                        <a:srgbClr val="2E2A3A"/>
+                        <a:srgbClr val="5E4F85"/>
                       </a:solidFill>
                       <a:prstDash val="solid"/>
                       <a:round/>
@@ -27455,7 +27802,7 @@
                     </a:lnL>
                     <a:lnR w="6350" cap="flat" cmpd="sng" algn="ctr">
                       <a:solidFill>
-                        <a:srgbClr val="2E2A3A"/>
+                        <a:srgbClr val="5E4F85"/>
                       </a:solidFill>
                       <a:prstDash val="solid"/>
                       <a:round/>
@@ -27464,7 +27811,7 @@
                     </a:lnR>
                     <a:lnT w="6350" cap="flat" cmpd="sng" algn="ctr">
                       <a:solidFill>
-                        <a:srgbClr val="2E2A3A"/>
+                        <a:srgbClr val="5E4F85"/>
                       </a:solidFill>
                       <a:prstDash val="solid"/>
                       <a:round/>
@@ -27473,7 +27820,7 @@
                     </a:lnT>
                     <a:lnB w="6350" cap="flat" cmpd="sng" algn="ctr">
                       <a:solidFill>
-                        <a:srgbClr val="2E2A3A"/>
+                        <a:srgbClr val="5E4F85"/>
                       </a:solidFill>
                       <a:prstDash val="solid"/>
                       <a:round/>
@@ -27481,7 +27828,7 @@
                       <a:tailEnd type="none" w="med" len="med"/>
                     </a:lnB>
                     <a:solidFill>
-                      <a:srgbClr val="2E1418"/>
+                      <a:srgbClr val="1A0808"/>
                     </a:solidFill>
                   </a:tcPr>
                 </a:tc>
@@ -27516,7 +27863,7 @@
                   <a:tcPr marL="73152" marR="73152" marT="73152" marB="73152" anchor="ctr">
                     <a:lnL w="6350" cap="flat" cmpd="sng" algn="ctr">
                       <a:solidFill>
-                        <a:srgbClr val="2E2A3A"/>
+                        <a:srgbClr val="5E4F85"/>
                       </a:solidFill>
                       <a:prstDash val="solid"/>
                       <a:round/>
@@ -27525,7 +27872,7 @@
                     </a:lnL>
                     <a:lnR w="6350" cap="flat" cmpd="sng" algn="ctr">
                       <a:solidFill>
-                        <a:srgbClr val="2E2A3A"/>
+                        <a:srgbClr val="5E4F85"/>
                       </a:solidFill>
                       <a:prstDash val="solid"/>
                       <a:round/>
@@ -27534,7 +27881,7 @@
                     </a:lnR>
                     <a:lnT w="6350" cap="flat" cmpd="sng" algn="ctr">
                       <a:solidFill>
-                        <a:srgbClr val="2E2A3A"/>
+                        <a:srgbClr val="5E4F85"/>
                       </a:solidFill>
                       <a:prstDash val="solid"/>
                       <a:round/>
@@ -27543,7 +27890,7 @@
                     </a:lnT>
                     <a:lnB w="6350" cap="flat" cmpd="sng" algn="ctr">
                       <a:solidFill>
-                        <a:srgbClr val="2E2A3A"/>
+                        <a:srgbClr val="5E4F85"/>
                       </a:solidFill>
                       <a:prstDash val="solid"/>
                       <a:round/>
@@ -27551,7 +27898,7 @@
                       <a:tailEnd type="none" w="med" len="med"/>
                     </a:lnB>
                     <a:solidFill>
-                      <a:srgbClr val="17141F"/>
+                      <a:srgbClr val="000000"/>
                     </a:solidFill>
                   </a:tcPr>
                 </a:tc>
@@ -27584,7 +27931,7 @@
                   <a:tcPr marL="73152" marR="73152" marT="73152" marB="73152" anchor="ctr">
                     <a:lnL w="6350" cap="flat" cmpd="sng" algn="ctr">
                       <a:solidFill>
-                        <a:srgbClr val="2E2A3A"/>
+                        <a:srgbClr val="5E4F85"/>
                       </a:solidFill>
                       <a:prstDash val="solid"/>
                       <a:round/>
@@ -27593,7 +27940,7 @@
                     </a:lnL>
                     <a:lnR w="6350" cap="flat" cmpd="sng" algn="ctr">
                       <a:solidFill>
-                        <a:srgbClr val="2E2A3A"/>
+                        <a:srgbClr val="5E4F85"/>
                       </a:solidFill>
                       <a:prstDash val="solid"/>
                       <a:round/>
@@ -27602,7 +27949,7 @@
                     </a:lnR>
                     <a:lnT w="6350" cap="flat" cmpd="sng" algn="ctr">
                       <a:solidFill>
-                        <a:srgbClr val="2E2A3A"/>
+                        <a:srgbClr val="5E4F85"/>
                       </a:solidFill>
                       <a:prstDash val="solid"/>
                       <a:round/>
@@ -27611,7 +27958,7 @@
                     </a:lnT>
                     <a:lnB w="6350" cap="flat" cmpd="sng" algn="ctr">
                       <a:solidFill>
-                        <a:srgbClr val="2E2A3A"/>
+                        <a:srgbClr val="5E4F85"/>
                       </a:solidFill>
                       <a:prstDash val="solid"/>
                       <a:round/>
@@ -27619,7 +27966,7 @@
                       <a:tailEnd type="none" w="med" len="med"/>
                     </a:lnB>
                     <a:solidFill>
-                      <a:srgbClr val="17141F"/>
+                      <a:srgbClr val="000000"/>
                     </a:solidFill>
                   </a:tcPr>
                 </a:tc>
@@ -27652,7 +27999,7 @@
                   <a:tcPr marL="73152" marR="73152" marT="73152" marB="73152" anchor="ctr">
                     <a:lnL w="6350" cap="flat" cmpd="sng" algn="ctr">
                       <a:solidFill>
-                        <a:srgbClr val="2E2A3A"/>
+                        <a:srgbClr val="5E4F85"/>
                       </a:solidFill>
                       <a:prstDash val="solid"/>
                       <a:round/>
@@ -27661,7 +28008,7 @@
                     </a:lnL>
                     <a:lnR w="6350" cap="flat" cmpd="sng" algn="ctr">
                       <a:solidFill>
-                        <a:srgbClr val="2E2A3A"/>
+                        <a:srgbClr val="5E4F85"/>
                       </a:solidFill>
                       <a:prstDash val="solid"/>
                       <a:round/>
@@ -27670,7 +28017,7 @@
                     </a:lnR>
                     <a:lnT w="6350" cap="flat" cmpd="sng" algn="ctr">
                       <a:solidFill>
-                        <a:srgbClr val="2E2A3A"/>
+                        <a:srgbClr val="5E4F85"/>
                       </a:solidFill>
                       <a:prstDash val="solid"/>
                       <a:round/>
@@ -27679,7 +28026,7 @@
                     </a:lnT>
                     <a:lnB w="6350" cap="flat" cmpd="sng" algn="ctr">
                       <a:solidFill>
-                        <a:srgbClr val="2E2A3A"/>
+                        <a:srgbClr val="5E4F85"/>
                       </a:solidFill>
                       <a:prstDash val="solid"/>
                       <a:round/>
@@ -27687,7 +28034,7 @@
                       <a:tailEnd type="none" w="med" len="med"/>
                     </a:lnB>
                     <a:solidFill>
-                      <a:srgbClr val="17141F"/>
+                      <a:srgbClr val="000000"/>
                     </a:solidFill>
                   </a:tcPr>
                 </a:tc>
@@ -27722,7 +28069,7 @@
                   <a:tcPr marL="73152" marR="73152" marT="73152" marB="73152" anchor="ctr">
                     <a:lnL w="6350" cap="flat" cmpd="sng" algn="ctr">
                       <a:solidFill>
-                        <a:srgbClr val="2E2A3A"/>
+                        <a:srgbClr val="5E4F85"/>
                       </a:solidFill>
                       <a:prstDash val="solid"/>
                       <a:round/>
@@ -27731,7 +28078,7 @@
                     </a:lnL>
                     <a:lnR w="6350" cap="flat" cmpd="sng" algn="ctr">
                       <a:solidFill>
-                        <a:srgbClr val="2E2A3A"/>
+                        <a:srgbClr val="5E4F85"/>
                       </a:solidFill>
                       <a:prstDash val="solid"/>
                       <a:round/>
@@ -27740,7 +28087,7 @@
                     </a:lnR>
                     <a:lnT w="6350" cap="flat" cmpd="sng" algn="ctr">
                       <a:solidFill>
-                        <a:srgbClr val="2E2A3A"/>
+                        <a:srgbClr val="5E4F85"/>
                       </a:solidFill>
                       <a:prstDash val="solid"/>
                       <a:round/>
@@ -27749,7 +28096,7 @@
                     </a:lnT>
                     <a:lnB w="6350" cap="flat" cmpd="sng" algn="ctr">
                       <a:solidFill>
-                        <a:srgbClr val="2E2A3A"/>
+                        <a:srgbClr val="5E4F85"/>
                       </a:solidFill>
                       <a:prstDash val="solid"/>
                       <a:round/>
@@ -27757,7 +28104,7 @@
                       <a:tailEnd type="none" w="med" len="med"/>
                     </a:lnB>
                     <a:solidFill>
-                      <a:srgbClr val="17141F"/>
+                      <a:srgbClr val="000000"/>
                     </a:solidFill>
                   </a:tcPr>
                 </a:tc>
@@ -27790,7 +28137,7 @@
                   <a:tcPr marL="73152" marR="73152" marT="73152" marB="73152" anchor="ctr">
                     <a:lnL w="6350" cap="flat" cmpd="sng" algn="ctr">
                       <a:solidFill>
-                        <a:srgbClr val="2E2A3A"/>
+                        <a:srgbClr val="5E4F85"/>
                       </a:solidFill>
                       <a:prstDash val="solid"/>
                       <a:round/>
@@ -27799,7 +28146,7 @@
                     </a:lnL>
                     <a:lnR w="6350" cap="flat" cmpd="sng" algn="ctr">
                       <a:solidFill>
-                        <a:srgbClr val="2E2A3A"/>
+                        <a:srgbClr val="5E4F85"/>
                       </a:solidFill>
                       <a:prstDash val="solid"/>
                       <a:round/>
@@ -27808,7 +28155,7 @@
                     </a:lnR>
                     <a:lnT w="6350" cap="flat" cmpd="sng" algn="ctr">
                       <a:solidFill>
-                        <a:srgbClr val="2E2A3A"/>
+                        <a:srgbClr val="5E4F85"/>
                       </a:solidFill>
                       <a:prstDash val="solid"/>
                       <a:round/>
@@ -27817,7 +28164,7 @@
                     </a:lnT>
                     <a:lnB w="6350" cap="flat" cmpd="sng" algn="ctr">
                       <a:solidFill>
-                        <a:srgbClr val="2E2A3A"/>
+                        <a:srgbClr val="5E4F85"/>
                       </a:solidFill>
                       <a:prstDash val="solid"/>
                       <a:round/>
@@ -27825,7 +28172,7 @@
                       <a:tailEnd type="none" w="med" len="med"/>
                     </a:lnB>
                     <a:solidFill>
-                      <a:srgbClr val="17141F"/>
+                      <a:srgbClr val="000000"/>
                     </a:solidFill>
                   </a:tcPr>
                 </a:tc>
@@ -27858,7 +28205,7 @@
                   <a:tcPr marL="73152" marR="73152" marT="73152" marB="73152" anchor="ctr">
                     <a:lnL w="6350" cap="flat" cmpd="sng" algn="ctr">
                       <a:solidFill>
-                        <a:srgbClr val="2E2A3A"/>
+                        <a:srgbClr val="5E4F85"/>
                       </a:solidFill>
                       <a:prstDash val="solid"/>
                       <a:round/>
@@ -27867,7 +28214,7 @@
                     </a:lnL>
                     <a:lnR w="6350" cap="flat" cmpd="sng" algn="ctr">
                       <a:solidFill>
-                        <a:srgbClr val="2E2A3A"/>
+                        <a:srgbClr val="5E4F85"/>
                       </a:solidFill>
                       <a:prstDash val="solid"/>
                       <a:round/>
@@ -27876,7 +28223,7 @@
                     </a:lnR>
                     <a:lnT w="6350" cap="flat" cmpd="sng" algn="ctr">
                       <a:solidFill>
-                        <a:srgbClr val="2E2A3A"/>
+                        <a:srgbClr val="5E4F85"/>
                       </a:solidFill>
                       <a:prstDash val="solid"/>
                       <a:round/>
@@ -27885,7 +28232,7 @@
                     </a:lnT>
                     <a:lnB w="6350" cap="flat" cmpd="sng" algn="ctr">
                       <a:solidFill>
-                        <a:srgbClr val="2E2A3A"/>
+                        <a:srgbClr val="5E4F85"/>
                       </a:solidFill>
                       <a:prstDash val="solid"/>
                       <a:round/>
@@ -27893,7 +28240,7 @@
                       <a:tailEnd type="none" w="med" len="med"/>
                     </a:lnB>
                     <a:solidFill>
-                      <a:srgbClr val="17141F"/>
+                      <a:srgbClr val="000000"/>
                     </a:solidFill>
                   </a:tcPr>
                 </a:tc>
@@ -27919,9 +28266,14 @@
             </a:avLst>
           </a:prstGeom>
           <a:solidFill>
-            <a:srgbClr val="2E1418"/>
+            <a:srgbClr val="1A0808"/>
           </a:solidFill>
-          <a:ln/>
+          <a:ln w="12700">
+            <a:solidFill>
+              <a:srgbClr val="FF6B6B"/>
+            </a:solidFill>
+            <a:prstDash val="solid"/>
+          </a:ln>
         </p:spPr>
       </p:sp>
       <p:sp>
@@ -27951,7 +28303,7 @@
             <a:r>
               <a:rPr lang="en-US" sz="950" b="1" spc="150" kern="0" dirty="0">
                 <a:solidFill>
-                  <a:srgbClr val="FF7B7B"/>
+                  <a:srgbClr val="FF6B6B"/>
                 </a:solidFill>
                 <a:latin typeface="Courier New" pitchFamily="34" charset="0"/>
                 <a:ea typeface="Courier New" pitchFamily="34" charset="-122"/>
@@ -28135,7 +28487,7 @@
             <a:r>
               <a:rPr lang="en-US" sz="1150" i="1" dirty="0">
                 <a:solidFill>
-                  <a:srgbClr val="AFA9BE"/>
+                  <a:srgbClr val="C9C4D6"/>
                 </a:solidFill>
                 <a:latin typeface="Montserrat" pitchFamily="34" charset="0"/>
                 <a:ea typeface="Montserrat" pitchFamily="34" charset="-122"/>
@@ -28177,7 +28529,7 @@
             <a:lvl1pPr>
               <a:defRPr sz="850">
                 <a:solidFill>
-                  <a:srgbClr val="8A82A0"/>
+                  <a:srgbClr val="9A94AA"/>
                 </a:solidFill>
                 <a:latin typeface="Courier New"/>
                 <a:ea typeface="Courier New"/>
@@ -28247,7 +28599,7 @@
             <a:r>
               <a:rPr lang="en-US" sz="2600" b="1" dirty="0">
                 <a:solidFill>
-                  <a:srgbClr val="C9A6FF"/>
+                  <a:srgbClr val="A98BFF"/>
                 </a:solidFill>
                 <a:latin typeface="Courier New" pitchFamily="34" charset="0"/>
                 <a:ea typeface="Courier New" pitchFamily="34" charset="-122"/>
@@ -28315,9 +28667,14 @@
             </a:avLst>
           </a:prstGeom>
           <a:solidFill>
-            <a:srgbClr val="C9A6FF"/>
+            <a:srgbClr val="1A0B3D"/>
           </a:solidFill>
-          <a:ln/>
+          <a:ln w="12700">
+            <a:solidFill>
+              <a:srgbClr val="5A05F4"/>
+            </a:solidFill>
+            <a:prstDash val="solid"/>
+          </a:ln>
         </p:spPr>
       </p:sp>
       <p:sp>
@@ -28347,7 +28704,7 @@
             <a:r>
               <a:rPr lang="en-US" sz="900" b="1" spc="100" kern="0" dirty="0">
                 <a:solidFill>
-                  <a:srgbClr val="1C1140"/>
+                  <a:srgbClr val="A98BFF"/>
                 </a:solidFill>
                 <a:latin typeface="Courier New" pitchFamily="34" charset="0"/>
                 <a:ea typeface="Courier New" pitchFamily="34" charset="-122"/>
@@ -28400,11 +28757,11 @@
             </a:avLst>
           </a:prstGeom>
           <a:solidFill>
-            <a:srgbClr val="17141F"/>
+            <a:srgbClr val="000000"/>
           </a:solidFill>
           <a:ln w="12700">
             <a:solidFill>
-              <a:srgbClr val="2E2A3A"/>
+              <a:srgbClr val="5E4F85"/>
             </a:solidFill>
             <a:prstDash val="solid"/>
           </a:ln>
@@ -28476,7 +28833,7 @@
             <a:r>
               <a:rPr lang="en-US" sz="1150" dirty="0">
                 <a:solidFill>
-                  <a:srgbClr val="AFA9BE"/>
+                  <a:srgbClr val="C9C4D6"/>
                 </a:solidFill>
                 <a:latin typeface="Montserrat" pitchFamily="34" charset="0"/>
                 <a:ea typeface="Montserrat" pitchFamily="34" charset="-122"/>
@@ -28505,9 +28862,14 @@
             </a:avLst>
           </a:prstGeom>
           <a:solidFill>
-            <a:srgbClr val="2E1418"/>
+            <a:srgbClr val="1A0808"/>
           </a:solidFill>
-          <a:ln/>
+          <a:ln w="12700">
+            <a:solidFill>
+              <a:srgbClr val="FF6B6B"/>
+            </a:solidFill>
+            <a:prstDash val="solid"/>
+          </a:ln>
         </p:spPr>
       </p:sp>
       <p:sp>
@@ -28537,7 +28899,7 @@
             <a:r>
               <a:rPr lang="en-US" sz="3200" b="1" dirty="0">
                 <a:solidFill>
-                  <a:srgbClr val="FF7B7B"/>
+                  <a:srgbClr val="FF6B6B"/>
                 </a:solidFill>
                 <a:latin typeface="Montserrat" pitchFamily="34" charset="0"/>
                 <a:ea typeface="Montserrat" pitchFamily="34" charset="-122"/>
@@ -28576,7 +28938,7 @@
             <a:r>
               <a:rPr lang="en-US" sz="1150" dirty="0">
                 <a:solidFill>
-                  <a:srgbClr val="FF7B7B"/>
+                  <a:srgbClr val="C9C4D6"/>
                 </a:solidFill>
                 <a:latin typeface="Montserrat" pitchFamily="34" charset="0"/>
                 <a:ea typeface="Montserrat" pitchFamily="34" charset="-122"/>
@@ -28615,7 +28977,7 @@
             <a:r>
               <a:rPr lang="en-US" sz="1150" dirty="0">
                 <a:solidFill>
-                  <a:srgbClr val="AFA9BE"/>
+                  <a:srgbClr val="C9C4D6"/>
                 </a:solidFill>
                 <a:latin typeface="Montserrat" pitchFamily="34" charset="0"/>
                 <a:ea typeface="Montserrat" pitchFamily="34" charset="-122"/>
@@ -28683,7 +29045,7 @@
             </a:avLst>
           </a:prstGeom>
           <a:solidFill>
-            <a:srgbClr val="5FD6A0"/>
+            <a:srgbClr val="3FCF8E"/>
           </a:solidFill>
           <a:ln/>
         </p:spPr>
@@ -28715,7 +29077,7 @@
             <a:r>
               <a:rPr lang="en-US" sz="1150" b="1" dirty="0">
                 <a:solidFill>
-                  <a:srgbClr val="5FD6A0"/>
+                  <a:srgbClr val="3FCF8E"/>
                 </a:solidFill>
                 <a:latin typeface="Montserrat" pitchFamily="34" charset="0"/>
                 <a:ea typeface="Montserrat" pitchFamily="34" charset="-122"/>
@@ -28783,7 +29145,7 @@
             </a:avLst>
           </a:prstGeom>
           <a:solidFill>
-            <a:srgbClr val="C9A6FF"/>
+            <a:srgbClr val="A98BFF"/>
           </a:solidFill>
           <a:ln/>
         </p:spPr>
@@ -28815,7 +29177,7 @@
             <a:r>
               <a:rPr lang="en-US" sz="1150" b="1" dirty="0">
                 <a:solidFill>
-                  <a:srgbClr val="C9A6FF"/>
+                  <a:srgbClr val="A98BFF"/>
                 </a:solidFill>
                 <a:latin typeface="Montserrat" pitchFamily="34" charset="0"/>
                 <a:ea typeface="Montserrat" pitchFamily="34" charset="-122"/>
@@ -28883,7 +29245,7 @@
             </a:avLst>
           </a:prstGeom>
           <a:solidFill>
-            <a:srgbClr val="FF7B7B"/>
+            <a:srgbClr val="FF6B6B"/>
           </a:solidFill>
           <a:ln/>
         </p:spPr>
@@ -28915,7 +29277,7 @@
             <a:r>
               <a:rPr lang="en-US" sz="1150" b="1" dirty="0">
                 <a:solidFill>
-                  <a:srgbClr val="FF7B7B"/>
+                  <a:srgbClr val="FF6B6B"/>
                 </a:solidFill>
                 <a:latin typeface="Montserrat" pitchFamily="34" charset="0"/>
                 <a:ea typeface="Montserrat" pitchFamily="34" charset="-122"/>
@@ -28954,7 +29316,7 @@
             <a:r>
               <a:rPr lang="en-US" sz="1000" i="1" dirty="0">
                 <a:solidFill>
-                  <a:srgbClr val="8A82A0"/>
+                  <a:srgbClr val="9A94AA"/>
                 </a:solidFill>
                 <a:latin typeface="Montserrat" pitchFamily="34" charset="0"/>
                 <a:ea typeface="Montserrat" pitchFamily="34" charset="-122"/>
@@ -28983,9 +29345,14 @@
             </a:avLst>
           </a:prstGeom>
           <a:solidFill>
-            <a:srgbClr val="102A20"/>
+            <a:srgbClr val="06180F"/>
           </a:solidFill>
-          <a:ln/>
+          <a:ln w="12700">
+            <a:solidFill>
+              <a:srgbClr val="3FCF8E"/>
+            </a:solidFill>
+            <a:prstDash val="solid"/>
+          </a:ln>
         </p:spPr>
       </p:sp>
       <p:sp>
@@ -29015,7 +29382,7 @@
             <a:r>
               <a:rPr lang="en-US" sz="950" b="1" spc="150" kern="0" dirty="0">
                 <a:solidFill>
-                  <a:srgbClr val="5FD6A0"/>
+                  <a:srgbClr val="3FCF8E"/>
                 </a:solidFill>
                 <a:latin typeface="Courier New" pitchFamily="34" charset="0"/>
                 <a:ea typeface="Courier New" pitchFamily="34" charset="-122"/>
@@ -29099,7 +29466,7 @@
             <a:lvl1pPr>
               <a:defRPr sz="850">
                 <a:solidFill>
-                  <a:srgbClr val="8A82A0"/>
+                  <a:srgbClr val="9A94AA"/>
                 </a:solidFill>
                 <a:latin typeface="Courier New"/>
                 <a:ea typeface="Courier New"/>

--- a/docs/decks/L01.pptx
+++ b/docs/decks/L01.pptx
@@ -14527,11 +14527,11 @@
         <p:spPr>
           <a:xfrm>
             <a:off x="566928" y="1783080"/>
-            <a:ext cx="3520440" cy="1463040"/>
+            <a:ext cx="3520440" cy="1874520"/>
           </a:xfrm>
           <a:prstGeom prst="roundRect">
             <a:avLst>
-              <a:gd name="adj" fmla="val 7500"/>
+              <a:gd name="adj" fmla="val 5854"/>
             </a:avLst>
           </a:prstGeom>
           <a:solidFill>
@@ -14647,7 +14647,7 @@
         <p:spPr>
           <a:xfrm>
             <a:off x="768096" y="2468880"/>
-            <a:ext cx="3118104" cy="621792"/>
+            <a:ext cx="3118104" cy="1033272"/>
           </a:xfrm>
           <a:prstGeom prst="rect">
             <a:avLst/>
@@ -14689,11 +14689,11 @@
         <p:spPr>
           <a:xfrm>
             <a:off x="4270248" y="1783080"/>
-            <a:ext cx="3520440" cy="1463040"/>
+            <a:ext cx="3520440" cy="1874520"/>
           </a:xfrm>
           <a:prstGeom prst="roundRect">
             <a:avLst>
-              <a:gd name="adj" fmla="val 7500"/>
+              <a:gd name="adj" fmla="val 5854"/>
             </a:avLst>
           </a:prstGeom>
           <a:solidFill>
@@ -14809,7 +14809,7 @@
         <p:spPr>
           <a:xfrm>
             <a:off x="4471416" y="2468880"/>
-            <a:ext cx="3118104" cy="621792"/>
+            <a:ext cx="3118104" cy="1033272"/>
           </a:xfrm>
           <a:prstGeom prst="rect">
             <a:avLst/>
@@ -14851,11 +14851,11 @@
         <p:spPr>
           <a:xfrm>
             <a:off x="7973568" y="1783080"/>
-            <a:ext cx="3520440" cy="1463040"/>
+            <a:ext cx="3520440" cy="1874520"/>
           </a:xfrm>
           <a:prstGeom prst="roundRect">
             <a:avLst>
-              <a:gd name="adj" fmla="val 7500"/>
+              <a:gd name="adj" fmla="val 5854"/>
             </a:avLst>
           </a:prstGeom>
           <a:solidFill>
@@ -14971,7 +14971,7 @@
         <p:spPr>
           <a:xfrm>
             <a:off x="8174736" y="2468880"/>
-            <a:ext cx="3118104" cy="621792"/>
+            <a:ext cx="3118104" cy="1033272"/>
           </a:xfrm>
           <a:prstGeom prst="rect">
             <a:avLst/>
@@ -15012,12 +15012,12 @@
         </p:nvSpPr>
         <p:spPr>
           <a:xfrm>
-            <a:off x="566928" y="3520440"/>
-            <a:ext cx="3520440" cy="1463040"/>
+            <a:off x="566928" y="3886200"/>
+            <a:ext cx="3520440" cy="1874520"/>
           </a:xfrm>
           <a:prstGeom prst="roundRect">
             <a:avLst>
-              <a:gd name="adj" fmla="val 7500"/>
+              <a:gd name="adj" fmla="val 5854"/>
             </a:avLst>
           </a:prstGeom>
           <a:solidFill>
@@ -15034,7 +15034,7 @@
         </p:nvSpPr>
         <p:spPr>
           <a:xfrm>
-            <a:off x="768096" y="3703320"/>
+            <a:off x="768096" y="4069080"/>
             <a:ext cx="384048" cy="384048"/>
           </a:xfrm>
           <a:prstGeom prst="ellipse">
@@ -15054,7 +15054,7 @@
         </p:nvSpPr>
         <p:spPr>
           <a:xfrm>
-            <a:off x="768096" y="3703320"/>
+            <a:off x="768096" y="4069080"/>
             <a:ext cx="384048" cy="384048"/>
           </a:xfrm>
           <a:prstGeom prst="rect">
@@ -15093,7 +15093,7 @@
         </p:nvSpPr>
         <p:spPr>
           <a:xfrm>
-            <a:off x="1280160" y="3675888"/>
+            <a:off x="1280160" y="4041648"/>
             <a:ext cx="2606040" cy="438912"/>
           </a:xfrm>
           <a:prstGeom prst="rect">
@@ -15132,8 +15132,8 @@
         </p:nvSpPr>
         <p:spPr>
           <a:xfrm>
-            <a:off x="768096" y="4206240"/>
-            <a:ext cx="3118104" cy="621792"/>
+            <a:off x="768096" y="4572000"/>
+            <a:ext cx="3118104" cy="1033272"/>
           </a:xfrm>
           <a:prstGeom prst="rect">
             <a:avLst/>
@@ -15174,12 +15174,12 @@
         </p:nvSpPr>
         <p:spPr>
           <a:xfrm>
-            <a:off x="4270248" y="3520440"/>
-            <a:ext cx="3520440" cy="1463040"/>
+            <a:off x="4270248" y="3886200"/>
+            <a:ext cx="3520440" cy="1874520"/>
           </a:xfrm>
           <a:prstGeom prst="roundRect">
             <a:avLst>
-              <a:gd name="adj" fmla="val 7500"/>
+              <a:gd name="adj" fmla="val 5854"/>
             </a:avLst>
           </a:prstGeom>
           <a:solidFill>
@@ -15196,7 +15196,7 @@
         </p:nvSpPr>
         <p:spPr>
           <a:xfrm>
-            <a:off x="4471416" y="3703320"/>
+            <a:off x="4471416" y="4069080"/>
             <a:ext cx="384048" cy="384048"/>
           </a:xfrm>
           <a:prstGeom prst="ellipse">
@@ -15216,7 +15216,7 @@
         </p:nvSpPr>
         <p:spPr>
           <a:xfrm>
-            <a:off x="4471416" y="3703320"/>
+            <a:off x="4471416" y="4069080"/>
             <a:ext cx="384048" cy="384048"/>
           </a:xfrm>
           <a:prstGeom prst="rect">
@@ -15255,7 +15255,7 @@
         </p:nvSpPr>
         <p:spPr>
           <a:xfrm>
-            <a:off x="4983480" y="3675888"/>
+            <a:off x="4983480" y="4041648"/>
             <a:ext cx="2606040" cy="438912"/>
           </a:xfrm>
           <a:prstGeom prst="rect">
@@ -15294,8 +15294,8 @@
         </p:nvSpPr>
         <p:spPr>
           <a:xfrm>
-            <a:off x="4471416" y="4206240"/>
-            <a:ext cx="3118104" cy="621792"/>
+            <a:off x="4471416" y="4572000"/>
+            <a:ext cx="3118104" cy="1033272"/>
           </a:xfrm>
           <a:prstGeom prst="rect">
             <a:avLst/>
@@ -15336,12 +15336,12 @@
         </p:nvSpPr>
         <p:spPr>
           <a:xfrm>
-            <a:off x="7973568" y="3520440"/>
-            <a:ext cx="3520440" cy="1463040"/>
+            <a:off x="7973568" y="3886200"/>
+            <a:ext cx="3520440" cy="1874520"/>
           </a:xfrm>
           <a:prstGeom prst="roundRect">
             <a:avLst>
-              <a:gd name="adj" fmla="val 7500"/>
+              <a:gd name="adj" fmla="val 5854"/>
             </a:avLst>
           </a:prstGeom>
           <a:solidFill>
@@ -15358,7 +15358,7 @@
         </p:nvSpPr>
         <p:spPr>
           <a:xfrm>
-            <a:off x="8174736" y="3703320"/>
+            <a:off x="8174736" y="4069080"/>
             <a:ext cx="384048" cy="384048"/>
           </a:xfrm>
           <a:prstGeom prst="ellipse">
@@ -15378,7 +15378,7 @@
         </p:nvSpPr>
         <p:spPr>
           <a:xfrm>
-            <a:off x="8174736" y="3703320"/>
+            <a:off x="8174736" y="4069080"/>
             <a:ext cx="384048" cy="384048"/>
           </a:xfrm>
           <a:prstGeom prst="rect">
@@ -15417,7 +15417,7 @@
         </p:nvSpPr>
         <p:spPr>
           <a:xfrm>
-            <a:off x="8686800" y="3675888"/>
+            <a:off x="8686800" y="4041648"/>
             <a:ext cx="2606040" cy="438912"/>
           </a:xfrm>
           <a:prstGeom prst="rect">
@@ -15456,8 +15456,8 @@
         </p:nvSpPr>
         <p:spPr>
           <a:xfrm>
-            <a:off x="8174736" y="4206240"/>
-            <a:ext cx="3118104" cy="621792"/>
+            <a:off x="8174736" y="4572000"/>
+            <a:ext cx="3118104" cy="1033272"/>
           </a:xfrm>
           <a:prstGeom prst="rect">
             <a:avLst/>
@@ -19535,11 +19535,11 @@
         <p:spPr>
           <a:xfrm>
             <a:off x="566928" y="1783080"/>
-            <a:ext cx="11064240" cy="2423160"/>
+            <a:ext cx="11064240" cy="3657600"/>
           </a:xfrm>
           <a:prstGeom prst="roundRect">
             <a:avLst>
-              <a:gd name="adj" fmla="val 4528"/>
+              <a:gd name="adj" fmla="val 3000"/>
             </a:avLst>
           </a:prstGeom>
           <a:solidFill>
@@ -19561,7 +19561,7 @@
         </p:nvSpPr>
         <p:spPr>
           <a:xfrm>
-            <a:off x="978408" y="2157984"/>
+            <a:off x="978408" y="2462784"/>
             <a:ext cx="256032" cy="256032"/>
           </a:xfrm>
           <a:prstGeom prst="roundRect">
@@ -19588,7 +19588,7 @@
         </p:nvSpPr>
         <p:spPr>
           <a:xfrm rot="2700000">
-            <a:off x="1041227" y="2297430"/>
+            <a:off x="1041227" y="2602230"/>
             <a:ext cx="58156" cy="27432"/>
           </a:xfrm>
           <a:prstGeom prst="rect">
@@ -19608,7 +19608,7 @@
         </p:nvSpPr>
         <p:spPr>
           <a:xfrm rot="-3000000">
-            <a:off x="1069025" y="2271370"/>
+            <a:off x="1069025" y="2576170"/>
             <a:ext cx="121432" cy="27432"/>
           </a:xfrm>
           <a:prstGeom prst="rect">
@@ -19628,8 +19628,8 @@
         </p:nvSpPr>
         <p:spPr>
           <a:xfrm>
-            <a:off x="1362456" y="2103120"/>
-            <a:ext cx="4617720" cy="384048"/>
+            <a:off x="1362456" y="2261616"/>
+            <a:ext cx="4617720" cy="658368"/>
           </a:xfrm>
           <a:prstGeom prst="rect">
             <a:avLst/>
@@ -19645,7 +19645,7 @@
               <a:buNone/>
             </a:pPr>
             <a:r>
-              <a:rPr lang="en-US" sz="1250" dirty="0">
+              <a:rPr lang="en-US" sz="1400" dirty="0">
                 <a:solidFill>
                   <a:srgbClr val="000000"/>
                 </a:solidFill>
@@ -19655,7 +19655,7 @@
               </a:rPr>
               <a:t>стек піднявся, консоль показує «—»</a:t>
             </a:r>
-            <a:endParaRPr lang="en-US" sz="1250" dirty="0"/>
+            <a:endParaRPr lang="en-US" sz="1400" dirty="0"/>
           </a:p>
         </p:txBody>
       </p:sp>
@@ -19667,7 +19667,7 @@
         </p:nvSpPr>
         <p:spPr>
           <a:xfrm>
-            <a:off x="978408" y="2724912"/>
+            <a:off x="978408" y="3438144"/>
             <a:ext cx="256032" cy="256032"/>
           </a:xfrm>
           <a:prstGeom prst="roundRect">
@@ -19694,7 +19694,7 @@
         </p:nvSpPr>
         <p:spPr>
           <a:xfrm rot="2700000">
-            <a:off x="1041227" y="2864358"/>
+            <a:off x="1041227" y="3577590"/>
             <a:ext cx="58156" cy="27432"/>
           </a:xfrm>
           <a:prstGeom prst="rect">
@@ -19714,7 +19714,7 @@
         </p:nvSpPr>
         <p:spPr>
           <a:xfrm rot="-3000000">
-            <a:off x="1069025" y="2838298"/>
+            <a:off x="1069025" y="3551530"/>
             <a:ext cx="121432" cy="27432"/>
           </a:xfrm>
           <a:prstGeom prst="rect">
@@ -19734,8 +19734,8 @@
         </p:nvSpPr>
         <p:spPr>
           <a:xfrm>
-            <a:off x="1362456" y="2670048"/>
-            <a:ext cx="4617720" cy="384048"/>
+            <a:off x="1362456" y="3236976"/>
+            <a:ext cx="4617720" cy="658368"/>
           </a:xfrm>
           <a:prstGeom prst="rect">
             <a:avLst/>
@@ -19751,7 +19751,7 @@
               <a:buNone/>
             </a:pPr>
             <a:r>
-              <a:rPr lang="en-US" sz="1250" dirty="0">
+              <a:rPr lang="en-US" sz="1400" dirty="0">
                 <a:solidFill>
                   <a:srgbClr val="000000"/>
                 </a:solidFill>
@@ -19761,7 +19761,7 @@
               </a:rPr>
               <a:t>малюю шлях запиту з пам'яті</a:t>
             </a:r>
-            <a:endParaRPr lang="en-US" sz="1250" dirty="0"/>
+            <a:endParaRPr lang="en-US" sz="1400" dirty="0"/>
           </a:p>
         </p:txBody>
       </p:sp>
@@ -19773,7 +19773,7 @@
         </p:nvSpPr>
         <p:spPr>
           <a:xfrm>
-            <a:off x="978408" y="3291840"/>
+            <a:off x="978408" y="4413504"/>
             <a:ext cx="256032" cy="256032"/>
           </a:xfrm>
           <a:prstGeom prst="roundRect">
@@ -19800,7 +19800,7 @@
         </p:nvSpPr>
         <p:spPr>
           <a:xfrm rot="2700000">
-            <a:off x="1041227" y="3431286"/>
+            <a:off x="1041227" y="4552950"/>
             <a:ext cx="58156" cy="27432"/>
           </a:xfrm>
           <a:prstGeom prst="rect">
@@ -19820,7 +19820,7 @@
         </p:nvSpPr>
         <p:spPr>
           <a:xfrm rot="-3000000">
-            <a:off x="1069025" y="3405226"/>
+            <a:off x="1069025" y="4526890"/>
             <a:ext cx="121432" cy="27432"/>
           </a:xfrm>
           <a:prstGeom prst="rect">
@@ -19840,8 +19840,8 @@
         </p:nvSpPr>
         <p:spPr>
           <a:xfrm>
-            <a:off x="1362456" y="3236976"/>
-            <a:ext cx="4617720" cy="384048"/>
+            <a:off x="1362456" y="4212336"/>
+            <a:ext cx="4617720" cy="658368"/>
           </a:xfrm>
           <a:prstGeom prst="rect">
             <a:avLst/>
@@ -19857,7 +19857,7 @@
               <a:buNone/>
             </a:pPr>
             <a:r>
-              <a:rPr lang="en-US" sz="1250" dirty="0">
+              <a:rPr lang="en-US" sz="1400" dirty="0">
                 <a:solidFill>
                   <a:srgbClr val="000000"/>
                 </a:solidFill>
@@ -19867,7 +19867,7 @@
               </a:rPr>
               <a:t>знайшов свій рядок у requests</a:t>
             </a:r>
-            <a:endParaRPr lang="en-US" sz="1250" dirty="0"/>
+            <a:endParaRPr lang="en-US" sz="1400" dirty="0"/>
           </a:p>
         </p:txBody>
       </p:sp>
@@ -19879,7 +19879,7 @@
         </p:nvSpPr>
         <p:spPr>
           <a:xfrm>
-            <a:off x="6144768" y="2157984"/>
+            <a:off x="6144768" y="2462784"/>
             <a:ext cx="256032" cy="256032"/>
           </a:xfrm>
           <a:prstGeom prst="roundRect">
@@ -19906,7 +19906,7 @@
         </p:nvSpPr>
         <p:spPr>
           <a:xfrm rot="2700000">
-            <a:off x="6207587" y="2297430"/>
+            <a:off x="6207587" y="2602230"/>
             <a:ext cx="58156" cy="27432"/>
           </a:xfrm>
           <a:prstGeom prst="rect">
@@ -19926,7 +19926,7 @@
         </p:nvSpPr>
         <p:spPr>
           <a:xfrm rot="-3000000">
-            <a:off x="6235385" y="2271370"/>
+            <a:off x="6235385" y="2576170"/>
             <a:ext cx="121432" cy="27432"/>
           </a:xfrm>
           <a:prstGeom prst="rect">
@@ -19946,8 +19946,8 @@
         </p:nvSpPr>
         <p:spPr>
           <a:xfrm>
-            <a:off x="6528816" y="2103120"/>
-            <a:ext cx="4617720" cy="384048"/>
+            <a:off x="6528816" y="2261616"/>
+            <a:ext cx="4617720" cy="658368"/>
           </a:xfrm>
           <a:prstGeom prst="rect">
             <a:avLst/>
@@ -19963,7 +19963,7 @@
               <a:buNone/>
             </a:pPr>
             <a:r>
-              <a:rPr lang="en-US" sz="1250" dirty="0">
+              <a:rPr lang="en-US" sz="1400" dirty="0">
                 <a:solidFill>
                   <a:srgbClr val="000000"/>
                 </a:solidFill>
@@ -19973,7 +19973,7 @@
               </a:rPr>
               <a:t>бачив поведінку при збої провайдера</a:t>
             </a:r>
-            <a:endParaRPr lang="en-US" sz="1250" dirty="0"/>
+            <a:endParaRPr lang="en-US" sz="1400" dirty="0"/>
           </a:p>
         </p:txBody>
       </p:sp>
@@ -19985,7 +19985,7 @@
         </p:nvSpPr>
         <p:spPr>
           <a:xfrm>
-            <a:off x="6144768" y="2724912"/>
+            <a:off x="6144768" y="3438144"/>
             <a:ext cx="256032" cy="256032"/>
           </a:xfrm>
           <a:prstGeom prst="roundRect">
@@ -20012,7 +20012,7 @@
         </p:nvSpPr>
         <p:spPr>
           <a:xfrm rot="2700000">
-            <a:off x="6207587" y="2864358"/>
+            <a:off x="6207587" y="3577590"/>
             <a:ext cx="58156" cy="27432"/>
           </a:xfrm>
           <a:prstGeom prst="rect">
@@ -20032,7 +20032,7 @@
         </p:nvSpPr>
         <p:spPr>
           <a:xfrm rot="-3000000">
-            <a:off x="6235385" y="2838298"/>
+            <a:off x="6235385" y="3551530"/>
             <a:ext cx="121432" cy="27432"/>
           </a:xfrm>
           <a:prstGeom prst="rect">
@@ -20052,8 +20052,8 @@
         </p:nvSpPr>
         <p:spPr>
           <a:xfrm>
-            <a:off x="6528816" y="2670048"/>
-            <a:ext cx="4617720" cy="384048"/>
+            <a:off x="6528816" y="3236976"/>
+            <a:ext cx="4617720" cy="658368"/>
           </a:xfrm>
           <a:prstGeom prst="rect">
             <a:avLst/>
@@ -20069,7 +20069,7 @@
               <a:buNone/>
             </a:pPr>
             <a:r>
-              <a:rPr lang="en-US" sz="1250" dirty="0">
+              <a:rPr lang="en-US" sz="1400" dirty="0">
                 <a:solidFill>
                   <a:srgbClr val="000000"/>
                 </a:solidFill>
@@ -20079,7 +20079,7 @@
               </a:rPr>
               <a:t>поясню, чому temperature=0 не рятує</a:t>
             </a:r>
-            <a:endParaRPr lang="en-US" sz="1250" dirty="0"/>
+            <a:endParaRPr lang="en-US" sz="1400" dirty="0"/>
           </a:p>
         </p:txBody>
       </p:sp>
@@ -20091,7 +20091,7 @@
         </p:nvSpPr>
         <p:spPr>
           <a:xfrm>
-            <a:off x="6144768" y="3291840"/>
+            <a:off x="6144768" y="4413504"/>
             <a:ext cx="256032" cy="256032"/>
           </a:xfrm>
           <a:prstGeom prst="roundRect">
@@ -20118,7 +20118,7 @@
         </p:nvSpPr>
         <p:spPr>
           <a:xfrm rot="2700000">
-            <a:off x="6207587" y="3431286"/>
+            <a:off x="6207587" y="4552950"/>
             <a:ext cx="58156" cy="27432"/>
           </a:xfrm>
           <a:prstGeom prst="rect">
@@ -20138,7 +20138,7 @@
         </p:nvSpPr>
         <p:spPr>
           <a:xfrm rot="-3000000">
-            <a:off x="6235385" y="3405226"/>
+            <a:off x="6235385" y="4526890"/>
             <a:ext cx="121432" cy="27432"/>
           </a:xfrm>
           <a:prstGeom prst="rect">
@@ -20158,8 +20158,8 @@
         </p:nvSpPr>
         <p:spPr>
           <a:xfrm>
-            <a:off x="6528816" y="3236976"/>
-            <a:ext cx="4617720" cy="384048"/>
+            <a:off x="6528816" y="4212336"/>
+            <a:ext cx="4617720" cy="658368"/>
           </a:xfrm>
           <a:prstGeom prst="rect">
             <a:avLst/>
@@ -20175,7 +20175,7 @@
               <a:buNone/>
             </a:pPr>
             <a:r>
-              <a:rPr lang="en-US" sz="1250" dirty="0">
+              <a:rPr lang="en-US" sz="1400" dirty="0">
                 <a:solidFill>
                   <a:srgbClr val="000000"/>
                 </a:solidFill>
@@ -20185,7 +20185,7 @@
               </a:rPr>
               <a:t>назву дві невидимі категорії відмов</a:t>
             </a:r>
-            <a:endParaRPr lang="en-US" sz="1250" dirty="0"/>
+            <a:endParaRPr lang="en-US" sz="1400" dirty="0"/>
           </a:p>
         </p:txBody>
       </p:sp>
@@ -20197,7 +20197,7 @@
         </p:nvSpPr>
         <p:spPr>
           <a:xfrm>
-            <a:off x="566928" y="4434840"/>
+            <a:off x="566928" y="5669280"/>
             <a:ext cx="10972800" cy="320040"/>
           </a:xfrm>
           <a:prstGeom prst="rect">
@@ -24203,11 +24203,11 @@
         <p:spPr>
           <a:xfrm>
             <a:off x="566928" y="1783080"/>
-            <a:ext cx="3553968" cy="1188720"/>
+            <a:ext cx="3553968" cy="1481328"/>
           </a:xfrm>
           <a:prstGeom prst="roundRect">
             <a:avLst>
-              <a:gd name="adj" fmla="val 7692"/>
+              <a:gd name="adj" fmla="val 6173"/>
             </a:avLst>
           </a:prstGeom>
           <a:solidFill>
@@ -24269,7 +24269,7 @@
         <p:spPr>
           <a:xfrm>
             <a:off x="749808" y="2203704"/>
-            <a:ext cx="3188208" cy="658368"/>
+            <a:ext cx="3188208" cy="950976"/>
           </a:xfrm>
           <a:prstGeom prst="rect">
             <a:avLst/>
@@ -24311,11 +24311,11 @@
         <p:spPr>
           <a:xfrm>
             <a:off x="4322064" y="1783080"/>
-            <a:ext cx="3553968" cy="1188720"/>
+            <a:ext cx="3553968" cy="1481328"/>
           </a:xfrm>
           <a:prstGeom prst="roundRect">
             <a:avLst>
-              <a:gd name="adj" fmla="val 7692"/>
+              <a:gd name="adj" fmla="val 6173"/>
             </a:avLst>
           </a:prstGeom>
           <a:solidFill>
@@ -24377,7 +24377,7 @@
         <p:spPr>
           <a:xfrm>
             <a:off x="4504944" y="2203704"/>
-            <a:ext cx="3188208" cy="658368"/>
+            <a:ext cx="3188208" cy="950976"/>
           </a:xfrm>
           <a:prstGeom prst="rect">
             <a:avLst/>
@@ -24419,11 +24419,11 @@
         <p:spPr>
           <a:xfrm>
             <a:off x="8077200" y="1783080"/>
-            <a:ext cx="3553968" cy="1188720"/>
+            <a:ext cx="3553968" cy="1481328"/>
           </a:xfrm>
           <a:prstGeom prst="roundRect">
             <a:avLst>
-              <a:gd name="adj" fmla="val 7692"/>
+              <a:gd name="adj" fmla="val 6173"/>
             </a:avLst>
           </a:prstGeom>
           <a:solidFill>
@@ -24485,7 +24485,7 @@
         <p:spPr>
           <a:xfrm>
             <a:off x="8260080" y="2203704"/>
-            <a:ext cx="3188208" cy="658368"/>
+            <a:ext cx="3188208" cy="950976"/>
           </a:xfrm>
           <a:prstGeom prst="rect">
             <a:avLst/>
@@ -24526,12 +24526,12 @@
         </p:nvSpPr>
         <p:spPr>
           <a:xfrm>
-            <a:off x="566928" y="3172968"/>
-            <a:ext cx="3553968" cy="1188720"/>
+            <a:off x="566928" y="3465576"/>
+            <a:ext cx="3553968" cy="1481328"/>
           </a:xfrm>
           <a:prstGeom prst="roundRect">
             <a:avLst>
-              <a:gd name="adj" fmla="val 7692"/>
+              <a:gd name="adj" fmla="val 6173"/>
             </a:avLst>
           </a:prstGeom>
           <a:solidFill>
@@ -24553,7 +24553,7 @@
         </p:nvSpPr>
         <p:spPr>
           <a:xfrm>
-            <a:off x="749808" y="3282696"/>
+            <a:off x="749808" y="3575304"/>
             <a:ext cx="3188208" cy="310896"/>
           </a:xfrm>
           <a:prstGeom prst="rect">
@@ -24592,8 +24592,8 @@
         </p:nvSpPr>
         <p:spPr>
           <a:xfrm>
-            <a:off x="749808" y="3593592"/>
-            <a:ext cx="3188208" cy="658368"/>
+            <a:off x="749808" y="3886200"/>
+            <a:ext cx="3188208" cy="950976"/>
           </a:xfrm>
           <a:prstGeom prst="rect">
             <a:avLst/>
@@ -24634,12 +24634,12 @@
         </p:nvSpPr>
         <p:spPr>
           <a:xfrm>
-            <a:off x="4322064" y="3172968"/>
-            <a:ext cx="3553968" cy="1188720"/>
+            <a:off x="4322064" y="3465576"/>
+            <a:ext cx="3553968" cy="1481328"/>
           </a:xfrm>
           <a:prstGeom prst="roundRect">
             <a:avLst>
-              <a:gd name="adj" fmla="val 7692"/>
+              <a:gd name="adj" fmla="val 6173"/>
             </a:avLst>
           </a:prstGeom>
           <a:solidFill>
@@ -24661,7 +24661,7 @@
         </p:nvSpPr>
         <p:spPr>
           <a:xfrm>
-            <a:off x="4504944" y="3282696"/>
+            <a:off x="4504944" y="3575304"/>
             <a:ext cx="3188208" cy="310896"/>
           </a:xfrm>
           <a:prstGeom prst="rect">
@@ -24700,8 +24700,8 @@
         </p:nvSpPr>
         <p:spPr>
           <a:xfrm>
-            <a:off x="4504944" y="3593592"/>
-            <a:ext cx="3188208" cy="658368"/>
+            <a:off x="4504944" y="3886200"/>
+            <a:ext cx="3188208" cy="950976"/>
           </a:xfrm>
           <a:prstGeom prst="rect">
             <a:avLst/>
@@ -24742,12 +24742,12 @@
         </p:nvSpPr>
         <p:spPr>
           <a:xfrm>
-            <a:off x="8077200" y="3172968"/>
-            <a:ext cx="3553968" cy="1188720"/>
+            <a:off x="8077200" y="3465576"/>
+            <a:ext cx="3553968" cy="1481328"/>
           </a:xfrm>
           <a:prstGeom prst="roundRect">
             <a:avLst>
-              <a:gd name="adj" fmla="val 7692"/>
+              <a:gd name="adj" fmla="val 6173"/>
             </a:avLst>
           </a:prstGeom>
           <a:solidFill>
@@ -24769,7 +24769,7 @@
         </p:nvSpPr>
         <p:spPr>
           <a:xfrm>
-            <a:off x="8260080" y="3282696"/>
+            <a:off x="8260080" y="3575304"/>
             <a:ext cx="3188208" cy="310896"/>
           </a:xfrm>
           <a:prstGeom prst="rect">
@@ -24808,8 +24808,8 @@
         </p:nvSpPr>
         <p:spPr>
           <a:xfrm>
-            <a:off x="8260080" y="3593592"/>
-            <a:ext cx="3188208" cy="658368"/>
+            <a:off x="8260080" y="3886200"/>
+            <a:ext cx="3188208" cy="950976"/>
           </a:xfrm>
           <a:prstGeom prst="rect">
             <a:avLst/>
@@ -24850,7 +24850,7 @@
         </p:nvSpPr>
         <p:spPr>
           <a:xfrm>
-            <a:off x="566928" y="4526280"/>
+            <a:off x="566928" y="5138928"/>
             <a:ext cx="11064240" cy="777240"/>
           </a:xfrm>
           <a:prstGeom prst="roundRect">
@@ -24877,7 +24877,7 @@
         </p:nvSpPr>
         <p:spPr>
           <a:xfrm>
-            <a:off x="786384" y="4672584"/>
+            <a:off x="786384" y="5285232"/>
             <a:ext cx="10625328" cy="484632"/>
           </a:xfrm>
           <a:prstGeom prst="rect">

--- a/docs/decks/L01.pptx
+++ b/docs/decks/L01.pptx
@@ -15259,72 +15259,30 @@
           </a:p>
         </p:txBody>
       </p:sp>
-      <p:sp>
-        <p:nvSpPr>
-          <p:cNvPr id="16" name="Shape 14"/>
-          <p:cNvSpPr/>
-          <p:nvPr/>
-        </p:nvSpPr>
-        <p:spPr>
-          <a:xfrm>
-            <a:off x="7178040" y="868680"/>
-            <a:ext cx="4224528" cy="5120640"/>
-          </a:xfrm>
-          <a:prstGeom prst="roundRect">
-            <a:avLst>
-              <a:gd name="adj" fmla="val 5195"/>
-            </a:avLst>
-          </a:prstGeom>
-          <a:solidFill>
-            <a:srgbClr val="000000"/>
-          </a:solidFill>
-          <a:ln w="12700">
-            <a:solidFill>
-              <a:srgbClr val="5E4F85"/>
-            </a:solidFill>
-            <a:prstDash val="solid"/>
-          </a:ln>
-        </p:spPr>
-      </p:sp>
-      <p:sp>
-        <p:nvSpPr>
-          <p:cNvPr id="17" name="Text 15"/>
-          <p:cNvSpPr/>
-          <p:nvPr/>
-        </p:nvSpPr>
-        <p:spPr>
-          <a:xfrm>
-            <a:off x="7178040" y="868680"/>
-            <a:ext cx="4224528" cy="5120640"/>
-          </a:xfrm>
-          <a:prstGeom prst="rect">
-            <a:avLst/>
-          </a:prstGeom>
-          <a:noFill/>
-          <a:ln/>
-        </p:spPr>
-        <p:txBody>
-          <a:bodyPr wrap="square" lIns="0" tIns="0" rIns="0" bIns="0" rtlCol="0" anchor="ctr"/>
-          <a:lstStyle/>
-          <a:p>
-            <a:pPr algn="ctr" indent="0" marL="0">
-              <a:buNone/>
-            </a:pPr>
-            <a:r>
-              <a:rPr lang="en-US" sz="1500" dirty="0">
-                <a:solidFill>
-                  <a:srgbClr val="C4B3F5"/>
-                </a:solidFill>
-                <a:latin typeface="Montserrat" pitchFamily="34" charset="0"/>
-                <a:ea typeface="Montserrat" pitchFamily="34" charset="-122"/>
-                <a:cs typeface="Montserrat" pitchFamily="34" charset="-120"/>
-              </a:rPr>
-              <a:t>фото</a:t>
-            </a:r>
-            <a:endParaRPr lang="en-US" sz="1500" dirty="0"/>
-          </a:p>
-        </p:txBody>
-      </p:sp>
+      <p:pic>
+        <p:nvPicPr>
+          <p:cNvPr id="16" name="Image 0" descr="preencoded.png">    </p:cNvPr>
+          <p:cNvPicPr>
+            <a:picLocks noChangeAspect="1"/>
+          </p:cNvPicPr>
+          <p:nvPr/>
+        </p:nvPicPr>
+        <p:blipFill>
+          <a:blip r:embed="rId1"/>
+          <a:stretch>
+            <a:fillRect/>
+          </a:stretch>
+        </p:blipFill>
+        <p:spPr>
+          <a:xfrm>
+            <a:off x="7123176" y="1161288"/>
+            <a:ext cx="4535424" cy="4535424"/>
+          </a:xfrm>
+          <a:prstGeom prst="rect">
+            <a:avLst/>
+          </a:prstGeom>
+        </p:spPr>
+      </p:pic>
     </p:spTree>
   </p:cSld>
   <p:clrMapOvr>

--- a/docs/decks/L01.pptx
+++ b/docs/decks/L01.pptx
@@ -4894,7 +4894,7 @@
                 <a:ea typeface="Montserrat" pitchFamily="34" charset="-122"/>
                 <a:cs typeface="Montserrat" pitchFamily="34" charset="-120"/>
               </a:rPr>
-              <a:t>Модель не має пам'яті: історію привозите ви — тому довгий діалог дорожчає лінійно.</a:t>
+              <a:t>Модель не має пам'яті: історію привозите ви — тому кожен наступний крок діалогу дорожчає, а сумарна вартість росте швидше за кількість кроків.</a:t>
             </a:r>
             <a:endParaRPr lang="en-US" sz="1300" dirty="0"/>
           </a:p>
@@ -31292,7 +31292,7 @@
                 <a:ea typeface="Montserrat" pitchFamily="34" charset="-122"/>
                 <a:cs typeface="Montserrat" pitchFamily="34" charset="-120"/>
               </a:rPr>
-              <a:t>ціна залежить від поведінки, не від кількості</a:t>
+              <a:t>ціна залежить від поведінки, а не від кількості запитів</a:t>
             </a:r>
             <a:endParaRPr lang="en-US" sz="1200" dirty="0"/>
           </a:p>

--- a/docs/decks/L01.pptx
+++ b/docs/decks/L01.pptx
@@ -5594,7 +5594,7 @@
                       <a:tailEnd type="none" w="med" len="med"/>
                     </a:lnB>
                     <a:solidFill>
-                      <a:srgbClr val="000000"/>
+                      <a:srgbClr val="5A05F4"/>
                     </a:solidFill>
                   </a:tcPr>
                 </a:tc>
@@ -5662,7 +5662,7 @@
                       <a:tailEnd type="none" w="med" len="med"/>
                     </a:lnB>
                     <a:solidFill>
-                      <a:srgbClr val="000000"/>
+                      <a:srgbClr val="5A05F4"/>
                     </a:solidFill>
                   </a:tcPr>
                 </a:tc>
@@ -5730,7 +5730,7 @@
                       <a:tailEnd type="none" w="med" len="med"/>
                     </a:lnB>
                     <a:solidFill>
-                      <a:srgbClr val="000000"/>
+                      <a:srgbClr val="5A05F4"/>
                     </a:solidFill>
                   </a:tcPr>
                 </a:tc>
@@ -5953,7 +5953,7 @@
                       <a:r>
                         <a:rPr lang="en-US" sz="1150" b="1" dirty="0">
                           <a:solidFill>
-                            <a:srgbClr val="FF6B6B"/>
+                            <a:srgbClr val="B3261E"/>
                           </a:solidFill>
                           <a:latin typeface="Montserrat" pitchFamily="34" charset="0"/>
                           <a:ea typeface="Montserrat" pitchFamily="34" charset="-122"/>
@@ -6006,7 +6006,7 @@
                       <a:tailEnd type="none" w="med" len="med"/>
                     </a:lnB>
                     <a:solidFill>
-                      <a:srgbClr val="000000"/>
+                      <a:srgbClr val="F5F3FA"/>
                     </a:solidFill>
                   </a:tcPr>
                 </a:tc>
@@ -6021,7 +6021,7 @@
                       <a:r>
                         <a:rPr lang="en-US" sz="1150" dirty="0">
                           <a:solidFill>
-                            <a:srgbClr val="FF6B6B"/>
+                            <a:srgbClr val="B3261E"/>
                           </a:solidFill>
                           <a:latin typeface="Montserrat" pitchFamily="34" charset="0"/>
                           <a:ea typeface="Montserrat" pitchFamily="34" charset="-122"/>
@@ -6074,7 +6074,7 @@
                       <a:tailEnd type="none" w="med" len="med"/>
                     </a:lnB>
                     <a:solidFill>
-                      <a:srgbClr val="000000"/>
+                      <a:srgbClr val="F5F3FA"/>
                     </a:solidFill>
                   </a:tcPr>
                 </a:tc>
@@ -6089,7 +6089,7 @@
                       <a:r>
                         <a:rPr lang="en-US" sz="1150" dirty="0">
                           <a:solidFill>
-                            <a:srgbClr val="FF6B6B"/>
+                            <a:srgbClr val="B3261E"/>
                           </a:solidFill>
                           <a:latin typeface="Montserrat" pitchFamily="34" charset="0"/>
                           <a:ea typeface="Montserrat" pitchFamily="34" charset="-122"/>
@@ -6142,7 +6142,7 @@
                       <a:tailEnd type="none" w="med" len="med"/>
                     </a:lnB>
                     <a:solidFill>
-                      <a:srgbClr val="000000"/>
+                      <a:srgbClr val="F5F3FA"/>
                     </a:solidFill>
                   </a:tcPr>
                 </a:tc>

--- a/docs/decks/L01.pptx
+++ b/docs/decks/L01.pptx
@@ -5535,7 +5535,7 @@
                     <a:bodyPr/>
                     <a:lstStyle/>
                     <a:p>
-                      <a:pPr indent="0" marL="0">
+                      <a:pPr algn="ctr" indent="0" marL="0">
                         <a:buNone/>
                       </a:pPr>
                       <a:r>
@@ -5603,7 +5603,7 @@
                     <a:bodyPr/>
                     <a:lstStyle/>
                     <a:p>
-                      <a:pPr indent="0" marL="0">
+                      <a:pPr algn="ctr" indent="0" marL="0">
                         <a:buNone/>
                       </a:pPr>
                       <a:r>
@@ -5671,7 +5671,7 @@
                     <a:bodyPr/>
                     <a:lstStyle/>
                     <a:p>
-                      <a:pPr indent="0" marL="0">
+                      <a:pPr algn="ctr" indent="0" marL="0">
                         <a:buNone/>
                       </a:pPr>
                       <a:r>

--- a/docs/decks/L01.pptx
+++ b/docs/decks/L01.pptx
@@ -4,6 +4,9 @@
   <p:sldMasterIdLst>
     <p:sldMasterId id="2147483648" r:id="rId1"/>
   </p:sldMasterIdLst>
+  <p:notesMasterIdLst>
+    <p:notesMasterId r:id="rId33"/>
+  </p:notesMasterIdLst>
   <p:sldIdLst>
     <p:sldId id="256" r:id="rId2"/>
     <p:sldId id="257" r:id="rId3"/>
@@ -37,9 +40,6 @@
     <p:sldId id="285" r:id="rId31"/>
     <p:sldId id="286" r:id="rId32"/>
   </p:sldIdLst>
-  <p:notesMasterIdLst>
-    <p:notesMasterId r:id="rId33"/>
-  </p:notesMasterIdLst>
   <p:sldSz cx="12192000" cy="6858000"/>
   <p:notesSz cx="6858000" cy="12192000"/>
   <p:defaultTextStyle>
@@ -134,6 +134,11 @@
       </a:defRPr>
     </a:lvl9pPr>
   </p:defaultTextStyle>
+  <p:extLst>
+    <p:ext uri="{EFAFB233-063F-42B5-8137-9DF3F51BA10A}">
+      <p15:sldGuideLst xmlns:p15="http://schemas.microsoft.com/office/powerpoint/2012/main"/>
+    </p:ext>
+  </p:extLst>
 </p:presentation>
 </file>
 
@@ -159,234 +164,10 @@
           <a:chExt cx="0" cy="0"/>
         </a:xfrm>
       </p:grpSpPr>
-      <p:sp>
-        <p:nvSpPr>
-          <p:cNvPr id="2" name="Header Placeholder 1"/>
-          <p:cNvSpPr>
-            <a:spLocks noGrp="1"/>
-          </p:cNvSpPr>
-          <p:nvPr>
-            <p:ph type="hdr" sz="quarter"/>
-          </p:nvPr>
-        </p:nvSpPr>
-        <p:spPr>
-          <a:xfrm>
-            <a:off x="0" y="0"/>
-            <a:ext cx="2971800" cy="458788"/>
-          </a:xfrm>
-          <a:prstGeom prst="rect">
-            <a:avLst/>
-          </a:prstGeom>
-        </p:spPr>
-        <p:txBody>
-          <a:bodyPr vert="horz" lIns="91440" tIns="45720" rIns="91440" bIns="45720" rtlCol="0"/>
-          <a:lstStyle>
-            <a:lvl1pPr algn="l">
-              <a:defRPr sz="1200"/>
-            </a:lvl1pPr>
-          </a:lstStyle>
-          <a:p>
-            <a:endParaRPr lang="en-US"/>
-          </a:p>
-        </p:txBody>
-      </p:sp>
-      <p:sp>
-        <p:nvSpPr>
-          <p:cNvPr id="3" name="Date Placeholder 2"/>
-          <p:cNvSpPr>
-            <a:spLocks noGrp="1"/>
-          </p:cNvSpPr>
-          <p:nvPr>
-            <p:ph type="dt" idx="1"/>
-          </p:nvPr>
-        </p:nvSpPr>
-        <p:spPr>
-          <a:xfrm>
-            <a:off x="3884613" y="0"/>
-            <a:ext cx="2971800" cy="458788"/>
-          </a:xfrm>
-          <a:prstGeom prst="rect">
-            <a:avLst/>
-          </a:prstGeom>
-        </p:spPr>
-        <p:txBody>
-          <a:bodyPr vert="horz" lIns="91440" tIns="45720" rIns="91440" bIns="45720" rtlCol="0"/>
-          <a:lstStyle>
-            <a:lvl1pPr algn="r">
-              <a:defRPr sz="1200"/>
-            </a:lvl1pPr>
-          </a:lstStyle>
-          <a:p>
-            <a:fld id="{5282F153-3F37-0F45-9E97-73ACFA13230C}" type="datetimeFigureOut">
-              <a:rPr lang="en-US"/>
-              <a:t>7/23/19</a:t>
-            </a:fld>
-            <a:endParaRPr lang="en-US"/>
-          </a:p>
-        </p:txBody>
-      </p:sp>
-      <p:sp>
-        <p:nvSpPr>
-          <p:cNvPr id="4" name="Slide Image Placeholder 3"/>
-          <p:cNvSpPr>
-            <a:spLocks noGrp="1" noRot="1" noChangeAspect="1"/>
-          </p:cNvSpPr>
-          <p:nvPr>
-            <p:ph type="sldImg" idx="2"/>
-          </p:nvPr>
-        </p:nvSpPr>
-        <p:spPr>
-          <a:xfrm>
-            <a:off x="685800" y="1143000"/>
-            <a:ext cx="5486400" cy="3086100"/>
-          </a:xfrm>
-          <a:prstGeom prst="rect">
-            <a:avLst/>
-          </a:prstGeom>
-          <a:noFill/>
-          <a:ln w="12700">
-            <a:solidFill>
-              <a:prstClr val="black"/>
-            </a:solidFill>
-          </a:ln>
-        </p:spPr>
-        <p:txBody>
-          <a:bodyPr vert="horz" lIns="91440" tIns="45720" rIns="91440" bIns="45720" rtlCol="0" anchor="ctr"/>
-          <a:lstStyle/>
-          <a:p>
-            <a:endParaRPr lang="en-US"/>
-          </a:p>
-        </p:txBody>
-      </p:sp>
-      <p:sp>
-        <p:nvSpPr>
-          <p:cNvPr id="5" name="Notes Placeholder 4"/>
-          <p:cNvSpPr>
-            <a:spLocks noGrp="1"/>
-          </p:cNvSpPr>
-          <p:nvPr>
-            <p:ph type="body" sz="quarter" idx="3"/>
-          </p:nvPr>
-        </p:nvSpPr>
-        <p:spPr>
-          <a:xfrm>
-            <a:off x="685800" y="4400550"/>
-            <a:ext cx="5486400" cy="3600450"/>
-          </a:xfrm>
-          <a:prstGeom prst="rect">
-            <a:avLst/>
-          </a:prstGeom>
-        </p:spPr>
-        <p:txBody>
-          <a:bodyPr vert="horz" lIns="91440" tIns="45720" rIns="91440" bIns="45720" rtlCol="0"/>
-          <a:lstStyle/>
-          <a:p>
-            <a:pPr lvl="0"/>
-            <a:r>
-              <a:rPr lang="en-US"/>
-              <a:t>Click to edit Master text styles</a:t>
-            </a:r>
-          </a:p>
-          <a:p>
-            <a:pPr lvl="1"/>
-            <a:r>
-              <a:rPr lang="en-US"/>
-              <a:t>Second level</a:t>
-            </a:r>
-          </a:p>
-          <a:p>
-            <a:pPr lvl="2"/>
-            <a:r>
-              <a:rPr lang="en-US"/>
-              <a:t>Third level</a:t>
-            </a:r>
-          </a:p>
-          <a:p>
-            <a:pPr lvl="3"/>
-            <a:r>
-              <a:rPr lang="en-US"/>
-              <a:t>Fourth level</a:t>
-            </a:r>
-          </a:p>
-          <a:p>
-            <a:pPr lvl="4"/>
-            <a:r>
-              <a:rPr lang="en-US"/>
-              <a:t>Fifth level</a:t>
-            </a:r>
-          </a:p>
-        </p:txBody>
-      </p:sp>
-      <p:sp>
-        <p:nvSpPr>
-          <p:cNvPr id="6" name="Footer Placeholder 5"/>
-          <p:cNvSpPr>
-            <a:spLocks noGrp="1"/>
-          </p:cNvSpPr>
-          <p:nvPr>
-            <p:ph type="ftr" sz="quarter" idx="4"/>
-          </p:nvPr>
-        </p:nvSpPr>
-        <p:spPr>
-          <a:xfrm>
-            <a:off x="0" y="8685213"/>
-            <a:ext cx="2971800" cy="458787"/>
-          </a:xfrm>
-          <a:prstGeom prst="rect">
-            <a:avLst/>
-          </a:prstGeom>
-        </p:spPr>
-        <p:txBody>
-          <a:bodyPr vert="horz" lIns="91440" tIns="45720" rIns="91440" bIns="45720" rtlCol="0" anchor="b"/>
-          <a:lstStyle>
-            <a:lvl1pPr algn="l">
-              <a:defRPr sz="1200"/>
-            </a:lvl1pPr>
-          </a:lstStyle>
-          <a:p>
-            <a:endParaRPr lang="en-US"/>
-          </a:p>
-        </p:txBody>
-      </p:sp>
-      <p:sp>
-        <p:nvSpPr>
-          <p:cNvPr id="7" name="Slide Number Placeholder 6"/>
-          <p:cNvSpPr>
-            <a:spLocks noGrp="1"/>
-          </p:cNvSpPr>
-          <p:nvPr>
-            <p:ph type="sldNum" sz="quarter" idx="5"/>
-          </p:nvPr>
-        </p:nvSpPr>
-        <p:spPr>
-          <a:xfrm>
-            <a:off x="3884613" y="8685213"/>
-            <a:ext cx="2971800" cy="458787"/>
-          </a:xfrm>
-          <a:prstGeom prst="rect">
-            <a:avLst/>
-          </a:prstGeom>
-        </p:spPr>
-        <p:txBody>
-          <a:bodyPr vert="horz" lIns="91440" tIns="45720" rIns="91440" bIns="45720" rtlCol="0" anchor="b"/>
-          <a:lstStyle>
-            <a:lvl1pPr algn="r">
-              <a:defRPr sz="1200"/>
-            </a:lvl1pPr>
-          </a:lstStyle>
-          <a:p>
-            <a:fld id="{CE5E9CC1-C706-0F49-92D6-E571CC5EEA8F}" type="slidenum">
-              <a:rPr lang="en-US"/>
-              <a:t>‹#›</a:t>
-            </a:fld>
-            <a:endParaRPr lang="en-US"/>
-          </a:p>
-        </p:txBody>
-      </p:sp>
     </p:spTree>
     <p:extLst>
       <p:ext uri="{BB962C8B-B14F-4D97-AF65-F5344CB8AC3E}">
-        <p14:creationId xmlns:p14="http://schemas.microsoft.com/office/powerpoint/2010/main" val="1024086991"/>
+        <p14:creationId xmlns:p14="http://schemas.microsoft.com/office/powerpoint/2010/main" val="407354244"/>
       </p:ext>
     </p:extLst>
   </p:cSld>
@@ -530,10 +311,6 @@
           <a:bodyPr/>
           <a:lstStyle/>
           <a:p>
-            <a:r>
-              <a:rPr lang="en-US" dirty="0"/>
-              <a:t/>
-            </a:r>
             <a:endParaRPr lang="en-US" dirty="0"/>
           </a:p>
         </p:txBody>
@@ -618,10 +395,6 @@
           <a:bodyPr/>
           <a:lstStyle/>
           <a:p>
-            <a:r>
-              <a:rPr lang="en-US" dirty="0"/>
-              <a:t/>
-            </a:r>
             <a:endParaRPr lang="en-US" dirty="0"/>
           </a:p>
         </p:txBody>
@@ -706,10 +479,6 @@
           <a:bodyPr/>
           <a:lstStyle/>
           <a:p>
-            <a:r>
-              <a:rPr lang="en-US" dirty="0"/>
-              <a:t/>
-            </a:r>
             <a:endParaRPr lang="en-US" dirty="0"/>
           </a:p>
         </p:txBody>
@@ -794,10 +563,6 @@
           <a:bodyPr/>
           <a:lstStyle/>
           <a:p>
-            <a:r>
-              <a:rPr lang="en-US" dirty="0"/>
-              <a:t/>
-            </a:r>
             <a:endParaRPr lang="en-US" dirty="0"/>
           </a:p>
         </p:txBody>
@@ -882,10 +647,6 @@
           <a:bodyPr/>
           <a:lstStyle/>
           <a:p>
-            <a:r>
-              <a:rPr lang="en-US" dirty="0"/>
-              <a:t/>
-            </a:r>
             <a:endParaRPr lang="en-US" dirty="0"/>
           </a:p>
         </p:txBody>
@@ -970,10 +731,6 @@
           <a:bodyPr/>
           <a:lstStyle/>
           <a:p>
-            <a:r>
-              <a:rPr lang="en-US" dirty="0"/>
-              <a:t/>
-            </a:r>
             <a:endParaRPr lang="en-US" dirty="0"/>
           </a:p>
         </p:txBody>
@@ -1058,10 +815,6 @@
           <a:bodyPr/>
           <a:lstStyle/>
           <a:p>
-            <a:r>
-              <a:rPr lang="en-US" dirty="0"/>
-              <a:t/>
-            </a:r>
             <a:endParaRPr lang="en-US" dirty="0"/>
           </a:p>
         </p:txBody>
@@ -1146,10 +899,6 @@
           <a:bodyPr/>
           <a:lstStyle/>
           <a:p>
-            <a:r>
-              <a:rPr lang="en-US" dirty="0"/>
-              <a:t/>
-            </a:r>
             <a:endParaRPr lang="en-US" dirty="0"/>
           </a:p>
         </p:txBody>
@@ -1234,10 +983,6 @@
           <a:bodyPr/>
           <a:lstStyle/>
           <a:p>
-            <a:r>
-              <a:rPr lang="en-US" dirty="0"/>
-              <a:t/>
-            </a:r>
             <a:endParaRPr lang="en-US" dirty="0"/>
           </a:p>
         </p:txBody>
@@ -1322,10 +1067,6 @@
           <a:bodyPr/>
           <a:lstStyle/>
           <a:p>
-            <a:r>
-              <a:rPr lang="en-US" dirty="0"/>
-              <a:t/>
-            </a:r>
             <a:endParaRPr lang="en-US" dirty="0"/>
           </a:p>
         </p:txBody>
@@ -1410,10 +1151,6 @@
           <a:bodyPr/>
           <a:lstStyle/>
           <a:p>
-            <a:r>
-              <a:rPr lang="en-US" dirty="0"/>
-              <a:t/>
-            </a:r>
             <a:endParaRPr lang="en-US" dirty="0"/>
           </a:p>
         </p:txBody>
@@ -1498,10 +1235,6 @@
           <a:bodyPr/>
           <a:lstStyle/>
           <a:p>
-            <a:r>
-              <a:rPr lang="en-US" dirty="0"/>
-              <a:t/>
-            </a:r>
             <a:endParaRPr lang="en-US" dirty="0"/>
           </a:p>
         </p:txBody>
@@ -1586,10 +1319,6 @@
           <a:bodyPr/>
           <a:lstStyle/>
           <a:p>
-            <a:r>
-              <a:rPr lang="en-US" dirty="0"/>
-              <a:t/>
-            </a:r>
             <a:endParaRPr lang="en-US" dirty="0"/>
           </a:p>
         </p:txBody>
@@ -1674,10 +1403,6 @@
           <a:bodyPr/>
           <a:lstStyle/>
           <a:p>
-            <a:r>
-              <a:rPr lang="en-US" dirty="0"/>
-              <a:t/>
-            </a:r>
             <a:endParaRPr lang="en-US" dirty="0"/>
           </a:p>
         </p:txBody>
@@ -1762,10 +1487,6 @@
           <a:bodyPr/>
           <a:lstStyle/>
           <a:p>
-            <a:r>
-              <a:rPr lang="en-US" dirty="0"/>
-              <a:t/>
-            </a:r>
             <a:endParaRPr lang="en-US" dirty="0"/>
           </a:p>
         </p:txBody>
@@ -1850,10 +1571,6 @@
           <a:bodyPr/>
           <a:lstStyle/>
           <a:p>
-            <a:r>
-              <a:rPr lang="en-US" dirty="0"/>
-              <a:t/>
-            </a:r>
             <a:endParaRPr lang="en-US" dirty="0"/>
           </a:p>
         </p:txBody>
@@ -1938,10 +1655,6 @@
           <a:bodyPr/>
           <a:lstStyle/>
           <a:p>
-            <a:r>
-              <a:rPr lang="en-US" dirty="0"/>
-              <a:t/>
-            </a:r>
             <a:endParaRPr lang="en-US" dirty="0"/>
           </a:p>
         </p:txBody>
@@ -2026,10 +1739,6 @@
           <a:bodyPr/>
           <a:lstStyle/>
           <a:p>
-            <a:r>
-              <a:rPr lang="en-US" dirty="0"/>
-              <a:t/>
-            </a:r>
             <a:endParaRPr lang="en-US" dirty="0"/>
           </a:p>
         </p:txBody>
@@ -2114,10 +1823,6 @@
           <a:bodyPr/>
           <a:lstStyle/>
           <a:p>
-            <a:r>
-              <a:rPr lang="en-US" dirty="0"/>
-              <a:t/>
-            </a:r>
             <a:endParaRPr lang="en-US" dirty="0"/>
           </a:p>
         </p:txBody>
@@ -2202,10 +1907,6 @@
           <a:bodyPr/>
           <a:lstStyle/>
           <a:p>
-            <a:r>
-              <a:rPr lang="en-US" dirty="0"/>
-              <a:t/>
-            </a:r>
             <a:endParaRPr lang="en-US" dirty="0"/>
           </a:p>
         </p:txBody>
@@ -2290,10 +1991,6 @@
           <a:bodyPr/>
           <a:lstStyle/>
           <a:p>
-            <a:r>
-              <a:rPr lang="en-US" dirty="0"/>
-              <a:t/>
-            </a:r>
             <a:endParaRPr lang="en-US" dirty="0"/>
           </a:p>
         </p:txBody>
@@ -2378,10 +2075,6 @@
           <a:bodyPr/>
           <a:lstStyle/>
           <a:p>
-            <a:r>
-              <a:rPr lang="en-US" dirty="0"/>
-              <a:t/>
-            </a:r>
             <a:endParaRPr lang="en-US" dirty="0"/>
           </a:p>
         </p:txBody>
@@ -2466,10 +2159,6 @@
           <a:bodyPr/>
           <a:lstStyle/>
           <a:p>
-            <a:r>
-              <a:rPr lang="en-US" dirty="0"/>
-              <a:t/>
-            </a:r>
             <a:endParaRPr lang="en-US" dirty="0"/>
           </a:p>
         </p:txBody>
@@ -2554,10 +2243,6 @@
           <a:bodyPr/>
           <a:lstStyle/>
           <a:p>
-            <a:r>
-              <a:rPr lang="en-US" dirty="0"/>
-              <a:t/>
-            </a:r>
             <a:endParaRPr lang="en-US" dirty="0"/>
           </a:p>
         </p:txBody>
@@ -2642,10 +2327,6 @@
           <a:bodyPr/>
           <a:lstStyle/>
           <a:p>
-            <a:r>
-              <a:rPr lang="en-US" dirty="0"/>
-              <a:t/>
-            </a:r>
             <a:endParaRPr lang="en-US" dirty="0"/>
           </a:p>
         </p:txBody>
@@ -2730,10 +2411,6 @@
           <a:bodyPr/>
           <a:lstStyle/>
           <a:p>
-            <a:r>
-              <a:rPr lang="en-US" dirty="0"/>
-              <a:t/>
-            </a:r>
             <a:endParaRPr lang="en-US" dirty="0"/>
           </a:p>
         </p:txBody>
@@ -2818,10 +2495,6 @@
           <a:bodyPr/>
           <a:lstStyle/>
           <a:p>
-            <a:r>
-              <a:rPr lang="en-US" dirty="0"/>
-              <a:t/>
-            </a:r>
             <a:endParaRPr lang="en-US" dirty="0"/>
           </a:p>
         </p:txBody>
@@ -2906,10 +2579,6 @@
           <a:bodyPr/>
           <a:lstStyle/>
           <a:p>
-            <a:r>
-              <a:rPr lang="en-US" dirty="0"/>
-              <a:t/>
-            </a:r>
             <a:endParaRPr lang="en-US" dirty="0"/>
           </a:p>
         </p:txBody>
@@ -2994,10 +2663,6 @@
           <a:bodyPr/>
           <a:lstStyle/>
           <a:p>
-            <a:r>
-              <a:rPr lang="en-US" dirty="0"/>
-              <a:t/>
-            </a:r>
             <a:endParaRPr lang="en-US" dirty="0"/>
           </a:p>
         </p:txBody>
@@ -3082,10 +2747,6 @@
           <a:bodyPr/>
           <a:lstStyle/>
           <a:p>
-            <a:r>
-              <a:rPr lang="en-US" dirty="0"/>
-              <a:t/>
-            </a:r>
             <a:endParaRPr lang="en-US" dirty="0"/>
           </a:p>
         </p:txBody>
@@ -3170,10 +2831,6 @@
           <a:bodyPr/>
           <a:lstStyle/>
           <a:p>
-            <a:r>
-              <a:rPr lang="en-US" dirty="0"/>
-              <a:t/>
-            </a:r>
             <a:endParaRPr lang="en-US" dirty="0"/>
           </a:p>
         </p:txBody>
@@ -3256,7 +2913,7 @@
           </a:prstGeom>
           <a:extLst>
             <a:ext uri="{C572A759-6A51-4108-AA02-DFA0A04FC94B}">
-              <ma14:wrappingTextBoxFlag xmlns:ma14="http://schemas.microsoft.com/office/mac/drawingml/2011/main" val="0"/>
+              <ma14:wrappingTextBoxFlag xmlns="" xmlns:ma14="http://schemas.microsoft.com/office/mac/drawingml/2011/main" val="0"/>
             </a:ext>
           </a:extLst>
         </p:spPr>
@@ -3277,8 +2934,8 @@
           <a:p>
             <a:pPr algn="l"/>
             <a:fld id="{F7021451-1387-4CA6-816F-3879F97B5CBC}" type="slidenum">
-              <a:rPr b="0" lang="en-US"/>
-              <a:t>1000</a:t>
+              <a:rPr lang="en-US" b="0"/>
+              <a:t>‹#›</a:t>
             </a:fld>
             <a:endParaRPr lang="en-US"/>
           </a:p>
@@ -3300,6 +2957,7 @@
         <a:solidFill>
           <a:srgbClr val="000000"/>
         </a:solidFill>
+        <a:effectLst/>
       </p:bgPr>
     </p:bg>
     <p:spTree>
@@ -3318,14 +2976,14 @@
       </p:grpSpPr>
       <p:pic>
         <p:nvPicPr>
-          <p:cNvPr id="2" name="Image 0" descr="preencoded.png">    </p:cNvPr>
+          <p:cNvPr id="2" name="Image 0" descr="preencoded.png"/>
           <p:cNvPicPr>
             <a:picLocks noChangeAspect="1"/>
           </p:cNvPicPr>
           <p:nvPr/>
         </p:nvPicPr>
         <p:blipFill>
-          <a:blip r:embed="rId1"/>
+          <a:blip r:embed="rId2"/>
           <a:stretch>
             <a:fillRect/>
           </a:stretch>
@@ -3356,6 +3014,7 @@
         <a:solidFill>
           <a:srgbClr val="000000"/>
         </a:solidFill>
+        <a:effectLst/>
       </p:bgPr>
     </p:bg>
     <p:spTree>
@@ -3374,14 +3033,14 @@
       </p:grpSpPr>
       <p:pic>
         <p:nvPicPr>
-          <p:cNvPr id="2" name="Image 0" descr="preencoded.png">    </p:cNvPr>
+          <p:cNvPr id="2" name="Image 0" descr="preencoded.png"/>
           <p:cNvPicPr>
             <a:picLocks noChangeAspect="1"/>
           </p:cNvPicPr>
           <p:nvPr/>
         </p:nvPicPr>
         <p:blipFill>
-          <a:blip r:embed="rId1"/>
+          <a:blip r:embed="rId2"/>
           <a:stretch>
             <a:fillRect/>
           </a:stretch>
@@ -3412,6 +3071,7 @@
         <a:solidFill>
           <a:srgbClr val="000000"/>
         </a:solidFill>
+        <a:effectLst/>
       </p:bgPr>
     </p:bg>
     <p:spTree>
@@ -3430,14 +3090,14 @@
       </p:grpSpPr>
       <p:pic>
         <p:nvPicPr>
-          <p:cNvPr id="2" name="Image 0" descr="preencoded.png">    </p:cNvPr>
+          <p:cNvPr id="2" name="Image 0" descr="preencoded.png"/>
           <p:cNvPicPr>
             <a:picLocks noChangeAspect="1"/>
           </p:cNvPicPr>
           <p:nvPr/>
         </p:nvPicPr>
         <p:blipFill>
-          <a:blip r:embed="rId1"/>
+          <a:blip r:embed="rId2"/>
           <a:stretch>
             <a:fillRect/>
           </a:stretch>
@@ -3463,6 +3123,11 @@
 <file path=ppt/slideMasters/slideMaster1.xml><?xml version="1.0" encoding="utf-8"?>
 <p:sldMaster xmlns:a="http://schemas.openxmlformats.org/drawingml/2006/main" xmlns:r="http://schemas.openxmlformats.org/officeDocument/2006/relationships" xmlns:p="http://schemas.openxmlformats.org/presentationml/2006/main">
   <p:cSld>
+    <p:bg>
+      <p:bgRef idx="1001">
+        <a:schemeClr val="bg1"/>
+      </p:bgRef>
+    </p:bg>
     <p:spTree>
       <p:nvGrpSpPr>
         <p:cNvPr id="1" name=""/>
@@ -3497,7 +3162,7 @@
           </a:prstGeom>
           <a:extLst>
             <a:ext uri="{C572A759-6A51-4108-AA02-DFA0A04FC94B}">
-              <ma14:wrappingTextBoxFlag xmlns:ma14="http://schemas.microsoft.com/office/mac/drawingml/2011/main" val="0"/>
+              <ma14:wrappingTextBoxFlag xmlns="" xmlns:ma14="http://schemas.microsoft.com/office/mac/drawingml/2011/main" val="0"/>
             </a:ext>
           </a:extLst>
         </p:spPr>
@@ -3518,8 +3183,8 @@
           <a:p>
             <a:pPr algn="l"/>
             <a:fld id="{F7021451-1387-4CA6-816F-3879F97B5CBC}" type="slidenum">
-              <a:rPr b="0" lang="en-US"/>
-              <a:t>null</a:t>
+              <a:rPr lang="en-US" b="0"/>
+              <a:t>‹#›</a:t>
             </a:fld>
             <a:endParaRPr lang="en-US"/>
           </a:p>
@@ -3826,11 +3491,11 @@
           <a:bodyPr wrap="square" lIns="0" tIns="0" rIns="0" bIns="0" rtlCol="0" anchor="ctr"/>
           <a:lstStyle/>
           <a:p>
-            <a:pPr indent="0" marL="0">
-              <a:buNone/>
-            </a:pPr>
-            <a:r>
-              <a:rPr lang="en-US" sz="1200" b="1" spc="400" kern="0" dirty="0">
+            <a:pPr marL="0" indent="0">
+              <a:buNone/>
+            </a:pPr>
+            <a:r>
+              <a:rPr lang="en-US" sz="1200" b="1" kern="0" spc="400" dirty="0">
                 <a:solidFill>
                   <a:srgbClr val="FFFFFF"/>
                 </a:solidFill>
@@ -3865,11 +3530,11 @@
           <a:bodyPr wrap="square" lIns="0" tIns="0" rIns="0" bIns="0" rtlCol="0" anchor="ctr"/>
           <a:lstStyle/>
           <a:p>
-            <a:pPr indent="0" marL="0">
-              <a:buNone/>
-            </a:pPr>
-            <a:r>
-              <a:rPr lang="en-US" sz="1200" b="1" spc="300" kern="0" dirty="0">
+            <a:pPr marL="0" indent="0">
+              <a:buNone/>
+            </a:pPr>
+            <a:r>
+              <a:rPr lang="en-US" sz="1200" b="1" kern="0" spc="300" dirty="0">
                 <a:solidFill>
                   <a:srgbClr val="C4B3F5"/>
                 </a:solidFill>
@@ -3904,7 +3569,7 @@
           <a:bodyPr wrap="square" lIns="0" tIns="0" rIns="0" bIns="0" rtlCol="0" anchor="t"/>
           <a:lstStyle/>
           <a:p>
-            <a:pPr indent="0" marL="0">
+            <a:pPr marL="0" indent="0">
               <a:lnSpc>
                 <a:spcPct val="102000"/>
               </a:lnSpc>
@@ -3924,7 +3589,7 @@
             <a:endParaRPr lang="en-US" sz="3600" dirty="0"/>
           </a:p>
           <a:p>
-            <a:pPr indent="0" marL="0">
+            <a:pPr marL="0" indent="0">
               <a:lnSpc>
                 <a:spcPct val="102000"/>
               </a:lnSpc>
@@ -3966,7 +3631,7 @@
           <a:bodyPr wrap="square" lIns="0" tIns="0" rIns="0" bIns="0" rtlCol="0" anchor="ctr"/>
           <a:lstStyle/>
           <a:p>
-            <a:pPr indent="0" marL="0">
+            <a:pPr marL="0" indent="0">
               <a:lnSpc>
                 <a:spcPct val="120000"/>
               </a:lnSpc>
@@ -4030,7 +3695,7 @@
           <a:bodyPr wrap="square" lIns="0" tIns="0" rIns="0" bIns="0" rtlCol="0" anchor="ctr"/>
           <a:lstStyle/>
           <a:p>
-            <a:pPr algn="ctr" indent="0" marL="0">
+            <a:pPr marL="0" indent="0" algn="ctr">
               <a:buNone/>
             </a:pPr>
             <a:r>
@@ -4095,7 +3760,7 @@
           <a:bodyPr wrap="square" lIns="0" tIns="0" rIns="0" bIns="0" rtlCol="0" anchor="ctr"/>
           <a:lstStyle/>
           <a:p>
-            <a:pPr algn="ctr" indent="0" marL="0">
+            <a:pPr marL="0" indent="0" algn="ctr">
               <a:buNone/>
             </a:pPr>
             <a:r>
@@ -4160,7 +3825,7 @@
           <a:bodyPr wrap="square" lIns="0" tIns="0" rIns="0" bIns="0" rtlCol="0" anchor="ctr"/>
           <a:lstStyle/>
           <a:p>
-            <a:pPr algn="ctr" indent="0" marL="0">
+            <a:pPr marL="0" indent="0" algn="ctr">
               <a:buNone/>
             </a:pPr>
             <a:r>
@@ -4225,7 +3890,7 @@
           <a:bodyPr wrap="square" lIns="0" tIns="0" rIns="0" bIns="0" rtlCol="0" anchor="ctr"/>
           <a:lstStyle/>
           <a:p>
-            <a:pPr algn="ctr" indent="0" marL="0">
+            <a:pPr marL="0" indent="0" algn="ctr">
               <a:buNone/>
             </a:pPr>
             <a:r>
@@ -4290,7 +3955,7 @@
           <a:bodyPr wrap="square" lIns="0" tIns="0" rIns="0" bIns="0" rtlCol="0" anchor="ctr"/>
           <a:lstStyle/>
           <a:p>
-            <a:pPr algn="ctr" indent="0" marL="0">
+            <a:pPr marL="0" indent="0" algn="ctr">
               <a:buNone/>
             </a:pPr>
             <a:r>
@@ -4355,7 +4020,7 @@
           <a:bodyPr wrap="square" lIns="0" tIns="0" rIns="0" bIns="0" rtlCol="0" anchor="ctr"/>
           <a:lstStyle/>
           <a:p>
-            <a:pPr algn="ctr" indent="0" marL="0">
+            <a:pPr marL="0" indent="0" algn="ctr">
               <a:buNone/>
             </a:pPr>
             <a:r>
@@ -4441,7 +4106,7 @@
           <a:bodyPr wrap="square" lIns="0" tIns="0" rIns="0" bIns="0" rtlCol="0" anchor="ctr"/>
           <a:lstStyle/>
           <a:p>
-            <a:pPr algn="l" indent="0" marL="0">
+            <a:pPr marL="0" indent="0" algn="l">
               <a:buNone/>
             </a:pPr>
             <a:r>
@@ -4480,7 +4145,7 @@
           <a:bodyPr wrap="square" lIns="0" tIns="0" rIns="0" bIns="0" rtlCol="0" anchor="ctr"/>
           <a:lstStyle/>
           <a:p>
-            <a:pPr indent="0" marL="0">
+            <a:pPr marL="0" indent="0">
               <a:buNone/>
             </a:pPr>
             <a:r>
@@ -4546,11 +4211,11 @@
           <a:bodyPr wrap="square" lIns="0" tIns="0" rIns="0" bIns="0" rtlCol="0" anchor="ctr"/>
           <a:lstStyle/>
           <a:p>
-            <a:pPr algn="ctr" indent="0" marL="0">
-              <a:buNone/>
-            </a:pPr>
-            <a:r>
-              <a:rPr lang="en-US" sz="900" b="1" spc="100" kern="0" dirty="0">
+            <a:pPr marL="0" indent="0" algn="ctr">
+              <a:buNone/>
+            </a:pPr>
+            <a:r>
+              <a:rPr lang="en-US" sz="900" b="1" kern="0" spc="100" dirty="0">
                 <a:solidFill>
                   <a:srgbClr val="5A05F4"/>
                 </a:solidFill>
@@ -4566,14 +4231,14 @@
       </p:sp>
       <p:pic>
         <p:nvPicPr>
-          <p:cNvPr id="7" name="Image 0" descr="preencoded.png">    </p:cNvPr>
+          <p:cNvPr id="7" name="Image 0" descr="preencoded.png"/>
           <p:cNvPicPr>
             <a:picLocks noChangeAspect="1"/>
           </p:cNvPicPr>
           <p:nvPr/>
         </p:nvPicPr>
         <p:blipFill>
-          <a:blip r:embed="rId1"/>
+          <a:blip r:embed="rId3"/>
           <a:stretch>
             <a:fillRect/>
           </a:stretch>
@@ -4636,7 +4301,7 @@
           <a:bodyPr wrap="square" lIns="0" tIns="0" rIns="0" bIns="0" rtlCol="0" anchor="t"/>
           <a:lstStyle/>
           <a:p>
-            <a:pPr indent="0" marL="0">
+            <a:pPr marL="0" indent="0">
               <a:lnSpc>
                 <a:spcPct val="130000"/>
               </a:lnSpc>
@@ -4656,7 +4321,7 @@
             <a:endParaRPr lang="en-US" sz="1150" dirty="0"/>
           </a:p>
           <a:p>
-            <a:pPr indent="0" marL="0">
+            <a:pPr marL="0" indent="0">
               <a:lnSpc>
                 <a:spcPct val="130000"/>
               </a:lnSpc>
@@ -4673,7 +4338,21 @@
               </a:rPr>
               <a:t>  "model"</a:t>
             </a:r>
-            <a:pPr indent="0" marL="0">
+            <a:r>
+              <a:rPr lang="en-US" sz="1150" dirty="0">
+                <a:solidFill>
+                  <a:srgbClr val="6BA0F8"/>
+                </a:solidFill>
+                <a:latin typeface="Courier New" pitchFamily="34" charset="0"/>
+                <a:ea typeface="Courier New" pitchFamily="34" charset="-122"/>
+                <a:cs typeface="Courier New" pitchFamily="34" charset="-120"/>
+              </a:rPr>
+              <a:t>: "mock",</a:t>
+            </a:r>
+            <a:endParaRPr lang="en-US" sz="1150" dirty="0"/>
+          </a:p>
+          <a:p>
+            <a:pPr marL="0" indent="0">
               <a:lnSpc>
                 <a:spcPct val="130000"/>
               </a:lnSpc>
@@ -4682,18 +4361,29 @@
             <a:r>
               <a:rPr lang="en-US" sz="1150" dirty="0">
                 <a:solidFill>
-                  <a:srgbClr val="6BA0F8"/>
+                  <a:srgbClr val="A98BFF"/>
                 </a:solidFill>
                 <a:latin typeface="Courier New" pitchFamily="34" charset="0"/>
                 <a:ea typeface="Courier New" pitchFamily="34" charset="-122"/>
                 <a:cs typeface="Courier New" pitchFamily="34" charset="-120"/>
               </a:rPr>
-              <a:t>: "mock",</a:t>
+              <a:t>  "messages"</a:t>
+            </a:r>
+            <a:r>
+              <a:rPr lang="en-US" sz="1150" dirty="0">
+                <a:solidFill>
+                  <a:srgbClr val="D8D4E4"/>
+                </a:solidFill>
+                <a:latin typeface="Courier New" pitchFamily="34" charset="0"/>
+                <a:ea typeface="Courier New" pitchFamily="34" charset="-122"/>
+                <a:cs typeface="Courier New" pitchFamily="34" charset="-120"/>
+              </a:rPr>
+              <a:t>: [</a:t>
             </a:r>
             <a:endParaRPr lang="en-US" sz="1150" dirty="0"/>
           </a:p>
           <a:p>
-            <a:pPr indent="0" marL="0">
+            <a:pPr marL="0" indent="0">
               <a:lnSpc>
                 <a:spcPct val="130000"/>
               </a:lnSpc>
@@ -4702,15 +4392,18 @@
             <a:r>
               <a:rPr lang="en-US" sz="1150" dirty="0">
                 <a:solidFill>
-                  <a:srgbClr val="A98BFF"/>
+                  <a:srgbClr val="6BA0F8"/>
                 </a:solidFill>
                 <a:latin typeface="Courier New" pitchFamily="34" charset="0"/>
                 <a:ea typeface="Courier New" pitchFamily="34" charset="-122"/>
                 <a:cs typeface="Courier New" pitchFamily="34" charset="-120"/>
               </a:rPr>
-              <a:t>  "messages"</a:t>
-            </a:r>
-            <a:pPr indent="0" marL="0">
+              <a:t>    {"role":"system", "content":"…"},</a:t>
+            </a:r>
+            <a:endParaRPr lang="en-US" sz="1150" dirty="0"/>
+          </a:p>
+          <a:p>
+            <a:pPr marL="0" indent="0">
               <a:lnSpc>
                 <a:spcPct val="130000"/>
               </a:lnSpc>
@@ -4719,18 +4412,18 @@
             <a:r>
               <a:rPr lang="en-US" sz="1150" dirty="0">
                 <a:solidFill>
-                  <a:srgbClr val="D8D4E4"/>
+                  <a:srgbClr val="6BA0F8"/>
                 </a:solidFill>
                 <a:latin typeface="Courier New" pitchFamily="34" charset="0"/>
                 <a:ea typeface="Courier New" pitchFamily="34" charset="-122"/>
                 <a:cs typeface="Courier New" pitchFamily="34" charset="-120"/>
               </a:rPr>
-              <a:t>: [</a:t>
+              <a:t>    {"role":"user",   "content":"…"}</a:t>
             </a:r>
             <a:endParaRPr lang="en-US" sz="1150" dirty="0"/>
           </a:p>
           <a:p>
-            <a:pPr indent="0" marL="0">
+            <a:pPr marL="0" indent="0">
               <a:lnSpc>
                 <a:spcPct val="130000"/>
               </a:lnSpc>
@@ -4739,18 +4432,18 @@
             <a:r>
               <a:rPr lang="en-US" sz="1150" dirty="0">
                 <a:solidFill>
-                  <a:srgbClr val="6BA0F8"/>
+                  <a:srgbClr val="D8D4E4"/>
                 </a:solidFill>
                 <a:latin typeface="Courier New" pitchFamily="34" charset="0"/>
                 <a:ea typeface="Courier New" pitchFamily="34" charset="-122"/>
                 <a:cs typeface="Courier New" pitchFamily="34" charset="-120"/>
               </a:rPr>
-              <a:t>    {"role":"system", "content":"…"},</a:t>
+              <a:t>  ]</a:t>
             </a:r>
             <a:endParaRPr lang="en-US" sz="1150" dirty="0"/>
           </a:p>
           <a:p>
-            <a:pPr indent="0" marL="0">
+            <a:pPr marL="0" indent="0">
               <a:lnSpc>
                 <a:spcPct val="130000"/>
               </a:lnSpc>
@@ -4759,58 +4452,18 @@
             <a:r>
               <a:rPr lang="en-US" sz="1150" dirty="0">
                 <a:solidFill>
-                  <a:srgbClr val="6BA0F8"/>
+                  <a:srgbClr val="D8D4E4"/>
                 </a:solidFill>
                 <a:latin typeface="Courier New" pitchFamily="34" charset="0"/>
                 <a:ea typeface="Courier New" pitchFamily="34" charset="-122"/>
                 <a:cs typeface="Courier New" pitchFamily="34" charset="-120"/>
               </a:rPr>
-              <a:t>    {"role":"user",   "content":"…"}</a:t>
+              <a:t>}</a:t>
             </a:r>
             <a:endParaRPr lang="en-US" sz="1150" dirty="0"/>
           </a:p>
           <a:p>
-            <a:pPr indent="0" marL="0">
-              <a:lnSpc>
-                <a:spcPct val="130000"/>
-              </a:lnSpc>
-              <a:buNone/>
-            </a:pPr>
-            <a:r>
-              <a:rPr lang="en-US" sz="1150" dirty="0">
-                <a:solidFill>
-                  <a:srgbClr val="D8D4E4"/>
-                </a:solidFill>
-                <a:latin typeface="Courier New" pitchFamily="34" charset="0"/>
-                <a:ea typeface="Courier New" pitchFamily="34" charset="-122"/>
-                <a:cs typeface="Courier New" pitchFamily="34" charset="-120"/>
-              </a:rPr>
-              <a:t>  ]</a:t>
-            </a:r>
-            <a:endParaRPr lang="en-US" sz="1150" dirty="0"/>
-          </a:p>
-          <a:p>
-            <a:pPr indent="0" marL="0">
-              <a:lnSpc>
-                <a:spcPct val="130000"/>
-              </a:lnSpc>
-              <a:buNone/>
-            </a:pPr>
-            <a:r>
-              <a:rPr lang="en-US" sz="1150" dirty="0">
-                <a:solidFill>
-                  <a:srgbClr val="D8D4E4"/>
-                </a:solidFill>
-                <a:latin typeface="Courier New" pitchFamily="34" charset="0"/>
-                <a:ea typeface="Courier New" pitchFamily="34" charset="-122"/>
-                <a:cs typeface="Courier New" pitchFamily="34" charset="-120"/>
-              </a:rPr>
-              <a:t>}</a:t>
-            </a:r>
-            <a:endParaRPr lang="en-US" sz="1150" dirty="0"/>
-          </a:p>
-          <a:p>
-            <a:pPr indent="0" marL="0">
+            <a:pPr marL="0" indent="0">
               <a:lnSpc>
                 <a:spcPct val="130000"/>
               </a:lnSpc>
@@ -4879,7 +4532,7 @@
           <a:bodyPr wrap="square" lIns="0" tIns="0" rIns="0" bIns="0" rtlCol="0" anchor="ctr"/>
           <a:lstStyle/>
           <a:p>
-            <a:pPr indent="0" marL="0">
+            <a:pPr marL="0" indent="0">
               <a:lnSpc>
                 <a:spcPct val="112000"/>
               </a:lnSpc>
@@ -4943,7 +4596,7 @@
           <a:bodyPr wrap="square" lIns="0" tIns="0" rIns="0" bIns="0" rtlCol="0" anchor="ctr"/>
           <a:lstStyle/>
           <a:p>
-            <a:pPr indent="0" marL="0">
+            <a:pPr marL="0" indent="0">
               <a:buNone/>
             </a:pPr>
             <a:r>
@@ -4982,7 +4635,7 @@
           <a:bodyPr wrap="square" lIns="0" tIns="0" rIns="0" bIns="0" rtlCol="0" anchor="ctr"/>
           <a:lstStyle/>
           <a:p>
-            <a:pPr indent="0" marL="0">
+            <a:pPr marL="0" indent="0">
               <a:buNone/>
             </a:pPr>
             <a:r>
@@ -5043,7 +4696,7 @@
           <a:bodyPr wrap="square" lIns="0" tIns="0" rIns="0" bIns="0" rtlCol="0" anchor="ctr"/>
           <a:lstStyle/>
           <a:p>
-            <a:pPr indent="0" marL="0">
+            <a:pPr marL="0" indent="0">
               <a:buNone/>
             </a:pPr>
             <a:r>
@@ -5082,7 +4735,7 @@
           <a:bodyPr wrap="square" lIns="0" tIns="0" rIns="0" bIns="0" rtlCol="0" anchor="ctr"/>
           <a:lstStyle/>
           <a:p>
-            <a:pPr indent="0" marL="0">
+            <a:pPr marL="0" indent="0">
               <a:buNone/>
             </a:pPr>
             <a:r>
@@ -5143,7 +4796,7 @@
           <a:bodyPr wrap="square" lIns="0" tIns="0" rIns="0" bIns="0" rtlCol="0" anchor="ctr"/>
           <a:lstStyle/>
           <a:p>
-            <a:pPr indent="0" marL="0">
+            <a:pPr marL="0" indent="0">
               <a:buNone/>
             </a:pPr>
             <a:r>
@@ -5182,7 +4835,7 @@
           <a:bodyPr wrap="square" lIns="0" tIns="0" rIns="0" bIns="0" rtlCol="0" anchor="ctr"/>
           <a:lstStyle/>
           <a:p>
-            <a:pPr indent="0" marL="0">
+            <a:pPr marL="0" indent="0">
               <a:buNone/>
             </a:pPr>
             <a:r>
@@ -5221,7 +4874,7 @@
           <a:bodyPr wrap="square" lIns="0" tIns="0" rIns="0" bIns="0" rtlCol="0" anchor="ctr"/>
           <a:lstStyle/>
           <a:p>
-            <a:pPr indent="0" marL="0">
+            <a:pPr marL="0" indent="0">
               <a:buNone/>
             </a:pPr>
             <a:r>
@@ -5259,7 +4912,7 @@
           </a:prstGeom>
           <a:extLst>
             <a:ext uri="{C572A759-6A51-4108-AA02-DFA0A04FC94B}">
-              <ma14:wrappingTextBoxFlag xmlns:ma14="http://schemas.microsoft.com/office/mac/drawingml/2011/main" val="0"/>
+              <ma14:wrappingTextBoxFlag xmlns="" xmlns:ma14="http://schemas.microsoft.com/office/mac/drawingml/2011/main" val="0"/>
             </a:ext>
           </a:extLst>
         </p:spPr>
@@ -5280,7 +4933,7 @@
           <a:p>
             <a:pPr algn="l"/>
             <a:fld id="{F7021451-1387-4CA6-816F-3879F97B5CBC}" type="slidenum">
-              <a:rPr b="0" lang="en-US"/>
+              <a:rPr lang="en-US" b="0"/>
               <a:t>10</a:t>
             </a:fld>
             <a:endParaRPr lang="en-US"/>
@@ -5355,7 +5008,7 @@
           <a:bodyPr wrap="square" lIns="0" tIns="0" rIns="0" bIns="0" rtlCol="0" anchor="ctr"/>
           <a:lstStyle/>
           <a:p>
-            <a:pPr algn="l" indent="0" marL="0">
+            <a:pPr marL="0" indent="0" algn="l">
               <a:buNone/>
             </a:pPr>
             <a:r>
@@ -5394,7 +5047,7 @@
           <a:bodyPr wrap="square" lIns="0" tIns="0" rIns="0" bIns="0" rtlCol="0" anchor="ctr"/>
           <a:lstStyle/>
           <a:p>
-            <a:pPr indent="0" marL="0">
+            <a:pPr marL="0" indent="0">
               <a:buNone/>
             </a:pPr>
             <a:r>
@@ -5460,11 +5113,11 @@
           <a:bodyPr wrap="square" lIns="0" tIns="0" rIns="0" bIns="0" rtlCol="0" anchor="ctr"/>
           <a:lstStyle/>
           <a:p>
-            <a:pPr algn="ctr" indent="0" marL="0">
-              <a:buNone/>
-            </a:pPr>
-            <a:r>
-              <a:rPr lang="en-US" sz="900" b="1" spc="100" kern="0" dirty="0">
+            <a:pPr marL="0" indent="0" algn="ctr">
+              <a:buNone/>
+            </a:pPr>
+            <a:r>
+              <a:rPr lang="en-US" sz="900" b="1" kern="0" spc="100" dirty="0">
                 <a:solidFill>
                   <a:srgbClr val="5A05F4"/>
                 </a:solidFill>
@@ -5480,14 +5133,14 @@
       </p:sp>
       <p:pic>
         <p:nvPicPr>
-          <p:cNvPr id="7" name="Image 0" descr="preencoded.png">    </p:cNvPr>
+          <p:cNvPr id="7" name="Image 0" descr="preencoded.png"/>
           <p:cNvPicPr>
             <a:picLocks noChangeAspect="1"/>
           </p:cNvPicPr>
           <p:nvPr/>
         </p:nvPicPr>
         <p:blipFill>
-          <a:blip r:embed="rId1"/>
+          <a:blip r:embed="rId3"/>
           <a:stretch>
             <a:fillRect/>
           </a:stretch>
@@ -5518,16 +5171,34 @@
         </p:nvGraphicFramePr>
         <p:xfrm>
           <a:off x="566928" y="1600200"/>
-          <a:ext cx="6858000" cy="914400"/>
+          <a:ext cx="6858000" cy="2834640"/>
         </p:xfrm>
         <a:graphic>
           <a:graphicData uri="http://schemas.openxmlformats.org/drawingml/2006/table">
             <a:tbl>
               <a:tblPr/>
               <a:tblGrid>
-                <a:gridCol w="1600200"/>
-                <a:gridCol w="2651760"/>
-                <a:gridCol w="2606040"/>
+                <a:gridCol w="1600200">
+                  <a:extLst>
+                    <a:ext uri="{9D8B030D-6E8A-4147-A177-3AD203B41FA5}">
+                      <a16:colId xmlns:a16="http://schemas.microsoft.com/office/drawing/2014/main" val="20000"/>
+                    </a:ext>
+                  </a:extLst>
+                </a:gridCol>
+                <a:gridCol w="2651760">
+                  <a:extLst>
+                    <a:ext uri="{9D8B030D-6E8A-4147-A177-3AD203B41FA5}">
+                      <a16:colId xmlns:a16="http://schemas.microsoft.com/office/drawing/2014/main" val="20001"/>
+                    </a:ext>
+                  </a:extLst>
+                </a:gridCol>
+                <a:gridCol w="2606040">
+                  <a:extLst>
+                    <a:ext uri="{9D8B030D-6E8A-4147-A177-3AD203B41FA5}">
+                      <a16:colId xmlns:a16="http://schemas.microsoft.com/office/drawing/2014/main" val="20002"/>
+                    </a:ext>
+                  </a:extLst>
+                </a:gridCol>
               </a:tblGrid>
               <a:tr h="566928">
                 <a:tc>
@@ -5535,11 +5206,11 @@
                     <a:bodyPr/>
                     <a:lstStyle/>
                     <a:p>
-                      <a:pPr algn="ctr" indent="0" marL="0">
+                      <a:pPr marL="0" indent="0" algn="ctr">
                         <a:buNone/>
                       </a:pPr>
                       <a:r>
-                        <a:rPr lang="en-US" sz="900" b="1" spc="100" kern="0" dirty="0">
+                        <a:rPr lang="en-US" sz="900" b="1" kern="0" spc="100" dirty="0">
                           <a:solidFill>
                             <a:srgbClr val="FFFFFF"/>
                           </a:solidFill>
@@ -5603,11 +5274,11 @@
                     <a:bodyPr/>
                     <a:lstStyle/>
                     <a:p>
-                      <a:pPr algn="ctr" indent="0" marL="0">
+                      <a:pPr marL="0" indent="0" algn="ctr">
                         <a:buNone/>
                       </a:pPr>
                       <a:r>
-                        <a:rPr lang="en-US" sz="900" b="1" spc="100" kern="0" dirty="0">
+                        <a:rPr lang="en-US" sz="900" b="1" kern="0" spc="100" dirty="0">
                           <a:solidFill>
                             <a:srgbClr val="FFFFFF"/>
                           </a:solidFill>
@@ -5671,11 +5342,11 @@
                     <a:bodyPr/>
                     <a:lstStyle/>
                     <a:p>
-                      <a:pPr algn="ctr" indent="0" marL="0">
+                      <a:pPr marL="0" indent="0" algn="ctr">
                         <a:buNone/>
                       </a:pPr>
                       <a:r>
-                        <a:rPr lang="en-US" sz="900" b="1" spc="100" kern="0" dirty="0">
+                        <a:rPr lang="en-US" sz="900" b="1" kern="0" spc="100" dirty="0">
                           <a:solidFill>
                             <a:srgbClr val="FFFFFF"/>
                           </a:solidFill>
@@ -5734,6 +5405,11 @@
                     </a:solidFill>
                   </a:tcPr>
                 </a:tc>
+                <a:extLst>
+                  <a:ext uri="{0D108BD9-81ED-4DB2-BD59-A6C34878D82A}">
+                    <a16:rowId xmlns:a16="http://schemas.microsoft.com/office/drawing/2014/main" val="10000"/>
+                  </a:ext>
+                </a:extLst>
               </a:tr>
               <a:tr h="566928">
                 <a:tc>
@@ -5741,7 +5417,7 @@
                     <a:bodyPr/>
                     <a:lstStyle/>
                     <a:p>
-                      <a:pPr indent="0" marL="0">
+                      <a:pPr marL="0" indent="0">
                         <a:buNone/>
                       </a:pPr>
                       <a:r>
@@ -5809,7 +5485,7 @@
                     <a:bodyPr/>
                     <a:lstStyle/>
                     <a:p>
-                      <a:pPr indent="0" marL="0">
+                      <a:pPr marL="0" indent="0">
                         <a:buNone/>
                       </a:pPr>
                       <a:r>
@@ -5877,7 +5553,7 @@
                     <a:bodyPr/>
                     <a:lstStyle/>
                     <a:p>
-                      <a:pPr indent="0" marL="0">
+                      <a:pPr marL="0" indent="0">
                         <a:buNone/>
                       </a:pPr>
                       <a:r>
@@ -5940,6 +5616,11 @@
                     </a:solidFill>
                   </a:tcPr>
                 </a:tc>
+                <a:extLst>
+                  <a:ext uri="{0D108BD9-81ED-4DB2-BD59-A6C34878D82A}">
+                    <a16:rowId xmlns:a16="http://schemas.microsoft.com/office/drawing/2014/main" val="10001"/>
+                  </a:ext>
+                </a:extLst>
               </a:tr>
               <a:tr h="566928">
                 <a:tc>
@@ -5947,7 +5628,7 @@
                     <a:bodyPr/>
                     <a:lstStyle/>
                     <a:p>
-                      <a:pPr indent="0" marL="0">
+                      <a:pPr marL="0" indent="0">
                         <a:buNone/>
                       </a:pPr>
                       <a:r>
@@ -6015,7 +5696,7 @@
                     <a:bodyPr/>
                     <a:lstStyle/>
                     <a:p>
-                      <a:pPr indent="0" marL="0">
+                      <a:pPr marL="0" indent="0">
                         <a:buNone/>
                       </a:pPr>
                       <a:r>
@@ -6083,7 +5764,7 @@
                     <a:bodyPr/>
                     <a:lstStyle/>
                     <a:p>
-                      <a:pPr indent="0" marL="0">
+                      <a:pPr marL="0" indent="0">
                         <a:buNone/>
                       </a:pPr>
                       <a:r>
@@ -6146,6 +5827,11 @@
                     </a:solidFill>
                   </a:tcPr>
                 </a:tc>
+                <a:extLst>
+                  <a:ext uri="{0D108BD9-81ED-4DB2-BD59-A6C34878D82A}">
+                    <a16:rowId xmlns:a16="http://schemas.microsoft.com/office/drawing/2014/main" val="10002"/>
+                  </a:ext>
+                </a:extLst>
               </a:tr>
               <a:tr h="566928">
                 <a:tc>
@@ -6153,7 +5839,7 @@
                     <a:bodyPr/>
                     <a:lstStyle/>
                     <a:p>
-                      <a:pPr indent="0" marL="0">
+                      <a:pPr marL="0" indent="0">
                         <a:buNone/>
                       </a:pPr>
                       <a:r>
@@ -6221,7 +5907,7 @@
                     <a:bodyPr/>
                     <a:lstStyle/>
                     <a:p>
-                      <a:pPr indent="0" marL="0">
+                      <a:pPr marL="0" indent="0">
                         <a:buNone/>
                       </a:pPr>
                       <a:r>
@@ -6289,7 +5975,7 @@
                     <a:bodyPr/>
                     <a:lstStyle/>
                     <a:p>
-                      <a:pPr indent="0" marL="0">
+                      <a:pPr marL="0" indent="0">
                         <a:buNone/>
                       </a:pPr>
                       <a:r>
@@ -6352,6 +6038,11 @@
                     </a:solidFill>
                   </a:tcPr>
                 </a:tc>
+                <a:extLst>
+                  <a:ext uri="{0D108BD9-81ED-4DB2-BD59-A6C34878D82A}">
+                    <a16:rowId xmlns:a16="http://schemas.microsoft.com/office/drawing/2014/main" val="10003"/>
+                  </a:ext>
+                </a:extLst>
               </a:tr>
               <a:tr h="566928">
                 <a:tc>
@@ -6359,7 +6050,7 @@
                     <a:bodyPr/>
                     <a:lstStyle/>
                     <a:p>
-                      <a:pPr indent="0" marL="0">
+                      <a:pPr marL="0" indent="0">
                         <a:buNone/>
                       </a:pPr>
                       <a:r>
@@ -6427,7 +6118,7 @@
                     <a:bodyPr/>
                     <a:lstStyle/>
                     <a:p>
-                      <a:pPr indent="0" marL="0">
+                      <a:pPr marL="0" indent="0">
                         <a:buNone/>
                       </a:pPr>
                       <a:r>
@@ -6495,7 +6186,7 @@
                     <a:bodyPr/>
                     <a:lstStyle/>
                     <a:p>
-                      <a:pPr indent="0" marL="0">
+                      <a:pPr marL="0" indent="0">
                         <a:buNone/>
                       </a:pPr>
                       <a:r>
@@ -6558,6 +6249,11 @@
                     </a:solidFill>
                   </a:tcPr>
                 </a:tc>
+                <a:extLst>
+                  <a:ext uri="{0D108BD9-81ED-4DB2-BD59-A6C34878D82A}">
+                    <a16:rowId xmlns:a16="http://schemas.microsoft.com/office/drawing/2014/main" val="10004"/>
+                  </a:ext>
+                </a:extLst>
               </a:tr>
             </a:tbl>
           </a:graphicData>
@@ -6611,11 +6307,11 @@
           <a:bodyPr wrap="square" lIns="0" tIns="0" rIns="0" bIns="0" rtlCol="0" anchor="ctr"/>
           <a:lstStyle/>
           <a:p>
-            <a:pPr indent="0" marL="0">
-              <a:buNone/>
-            </a:pPr>
-            <a:r>
-              <a:rPr lang="en-US" sz="950" b="1" spc="150" kern="0" dirty="0">
+            <a:pPr marL="0" indent="0">
+              <a:buNone/>
+            </a:pPr>
+            <a:r>
+              <a:rPr lang="en-US" sz="950" b="1" kern="0" spc="150" dirty="0">
                 <a:solidFill>
                   <a:srgbClr val="B3261E"/>
                 </a:solidFill>
@@ -6650,7 +6346,7 @@
           <a:bodyPr wrap="square" lIns="0" tIns="0" rIns="0" bIns="0" rtlCol="0" anchor="ctr"/>
           <a:lstStyle/>
           <a:p>
-            <a:pPr indent="0" marL="0">
+            <a:pPr marL="0" indent="0">
               <a:lnSpc>
                 <a:spcPct val="112000"/>
               </a:lnSpc>
@@ -6673,7 +6369,7 @@
       </p:sp>
       <p:sp>
         <p:nvSpPr>
-          <p:cNvPr id="12" name="Shape 8"/>
+          <p:cNvPr id="8" name="Shape 8"/>
           <p:cNvSpPr/>
           <p:nvPr/>
         </p:nvSpPr>
@@ -6714,11 +6410,11 @@
           <a:bodyPr wrap="square" lIns="0" tIns="0" rIns="0" bIns="0" rtlCol="0" anchor="ctr"/>
           <a:lstStyle/>
           <a:p>
-            <a:pPr indent="0" marL="0">
-              <a:buNone/>
-            </a:pPr>
-            <a:r>
-              <a:rPr lang="en-US" sz="950" b="1" spc="150" kern="0" dirty="0">
+            <a:pPr marL="0" indent="0">
+              <a:buNone/>
+            </a:pPr>
+            <a:r>
+              <a:rPr lang="en-US" sz="950" b="1" kern="0" spc="150" dirty="0">
                 <a:solidFill>
                   <a:srgbClr val="FFFFFF"/>
                 </a:solidFill>
@@ -6753,7 +6449,7 @@
           <a:bodyPr wrap="square" lIns="0" tIns="0" rIns="0" bIns="0" rtlCol="0" anchor="ctr"/>
           <a:lstStyle/>
           <a:p>
-            <a:pPr indent="0" marL="0">
+            <a:pPr marL="0" indent="0">
               <a:lnSpc>
                 <a:spcPct val="112000"/>
               </a:lnSpc>
@@ -6795,7 +6491,7 @@
           <a:bodyPr wrap="square" lIns="0" tIns="0" rIns="0" bIns="0" rtlCol="0" anchor="ctr"/>
           <a:lstStyle/>
           <a:p>
-            <a:pPr indent="0" marL="0">
+            <a:pPr marL="0" indent="0">
               <a:buNone/>
             </a:pPr>
             <a:r>
@@ -6833,7 +6529,7 @@
           </a:prstGeom>
           <a:extLst>
             <a:ext uri="{C572A759-6A51-4108-AA02-DFA0A04FC94B}">
-              <ma14:wrappingTextBoxFlag xmlns:ma14="http://schemas.microsoft.com/office/mac/drawingml/2011/main" val="0"/>
+              <ma14:wrappingTextBoxFlag xmlns="" xmlns:ma14="http://schemas.microsoft.com/office/mac/drawingml/2011/main" val="0"/>
             </a:ext>
           </a:extLst>
         </p:spPr>
@@ -6854,7 +6550,7 @@
           <a:p>
             <a:pPr algn="l"/>
             <a:fld id="{F7021451-1387-4CA6-816F-3879F97B5CBC}" type="slidenum">
-              <a:rPr b="0" lang="en-US"/>
+              <a:rPr lang="en-US" b="0"/>
               <a:t>11</a:t>
             </a:fld>
             <a:endParaRPr lang="en-US"/>
@@ -6929,7 +6625,7 @@
           <a:bodyPr wrap="square" lIns="0" tIns="0" rIns="0" bIns="0" rtlCol="0" anchor="ctr"/>
           <a:lstStyle/>
           <a:p>
-            <a:pPr algn="l" indent="0" marL="0">
+            <a:pPr marL="0" indent="0" algn="l">
               <a:buNone/>
             </a:pPr>
             <a:r>
@@ -6968,7 +6664,7 @@
           <a:bodyPr wrap="square" lIns="0" tIns="0" rIns="0" bIns="0" rtlCol="0" anchor="ctr"/>
           <a:lstStyle/>
           <a:p>
-            <a:pPr indent="0" marL="0">
+            <a:pPr marL="0" indent="0">
               <a:buNone/>
             </a:pPr>
             <a:r>
@@ -7034,11 +6730,11 @@
           <a:bodyPr wrap="square" lIns="0" tIns="0" rIns="0" bIns="0" rtlCol="0" anchor="ctr"/>
           <a:lstStyle/>
           <a:p>
-            <a:pPr algn="ctr" indent="0" marL="0">
-              <a:buNone/>
-            </a:pPr>
-            <a:r>
-              <a:rPr lang="en-US" sz="900" b="1" spc="100" kern="0" dirty="0">
+            <a:pPr marL="0" indent="0" algn="ctr">
+              <a:buNone/>
+            </a:pPr>
+            <a:r>
+              <a:rPr lang="en-US" sz="900" b="1" kern="0" spc="100" dirty="0">
                 <a:solidFill>
                   <a:srgbClr val="5A05F4"/>
                 </a:solidFill>
@@ -7054,14 +6750,14 @@
       </p:sp>
       <p:pic>
         <p:nvPicPr>
-          <p:cNvPr id="7" name="Image 0" descr="preencoded.png">    </p:cNvPr>
+          <p:cNvPr id="7" name="Image 0" descr="preencoded.png"/>
           <p:cNvPicPr>
             <a:picLocks noChangeAspect="1"/>
           </p:cNvPicPr>
           <p:nvPr/>
         </p:nvPicPr>
         <p:blipFill>
-          <a:blip r:embed="rId1"/>
+          <a:blip r:embed="rId3"/>
           <a:stretch>
             <a:fillRect/>
           </a:stretch>
@@ -7119,7 +6815,7 @@
           <a:bodyPr wrap="square" lIns="0" tIns="0" rIns="0" bIns="0" rtlCol="0" anchor="ctr"/>
           <a:lstStyle/>
           <a:p>
-            <a:pPr indent="0" marL="0">
+            <a:pPr marL="0" indent="0">
               <a:buNone/>
             </a:pPr>
             <a:r>
@@ -7158,7 +6854,7 @@
           <a:bodyPr wrap="square" lIns="0" tIns="0" rIns="0" bIns="0" rtlCol="0" anchor="t"/>
           <a:lstStyle/>
           <a:p>
-            <a:pPr indent="0" marL="0">
+            <a:pPr marL="0" indent="0">
               <a:buNone/>
             </a:pPr>
             <a:r>
@@ -7219,7 +6915,7 @@
           <a:bodyPr wrap="square" lIns="0" tIns="0" rIns="0" bIns="0" rtlCol="0" anchor="ctr"/>
           <a:lstStyle/>
           <a:p>
-            <a:pPr indent="0" marL="0">
+            <a:pPr marL="0" indent="0">
               <a:buNone/>
             </a:pPr>
             <a:r>
@@ -7258,7 +6954,7 @@
           <a:bodyPr wrap="square" lIns="0" tIns="0" rIns="0" bIns="0" rtlCol="0" anchor="t"/>
           <a:lstStyle/>
           <a:p>
-            <a:pPr indent="0" marL="0">
+            <a:pPr marL="0" indent="0">
               <a:buNone/>
             </a:pPr>
             <a:r>
@@ -7297,7 +6993,7 @@
           <a:bodyPr wrap="square" lIns="0" tIns="0" rIns="0" bIns="0" rtlCol="0" anchor="t"/>
           <a:lstStyle/>
           <a:p>
-            <a:pPr indent="0" marL="0">
+            <a:pPr marL="0" indent="0">
               <a:buNone/>
             </a:pPr>
             <a:r>
@@ -7336,7 +7032,7 @@
           <a:bodyPr wrap="square" lIns="0" tIns="0" rIns="0" bIns="0" rtlCol="0" anchor="ctr"/>
           <a:lstStyle/>
           <a:p>
-            <a:pPr algn="l" indent="0" marL="0">
+            <a:pPr marL="0" indent="0" algn="l">
               <a:buNone/>
             </a:pPr>
             <a:r>
@@ -7397,7 +7093,7 @@
           <a:bodyPr wrap="square" lIns="0" tIns="0" rIns="0" bIns="0" rtlCol="0" anchor="ctr"/>
           <a:lstStyle/>
           <a:p>
-            <a:pPr indent="0" marL="0">
+            <a:pPr marL="0" indent="0">
               <a:buNone/>
             </a:pPr>
             <a:r>
@@ -7436,7 +7132,7 @@
           <a:bodyPr wrap="square" lIns="0" tIns="0" rIns="0" bIns="0" rtlCol="0" anchor="ctr"/>
           <a:lstStyle/>
           <a:p>
-            <a:pPr algn="l" indent="0" marL="0">
+            <a:pPr marL="0" indent="0" algn="l">
               <a:buNone/>
             </a:pPr>
             <a:r>
@@ -7497,7 +7193,7 @@
           <a:bodyPr wrap="square" lIns="0" tIns="0" rIns="0" bIns="0" rtlCol="0" anchor="ctr"/>
           <a:lstStyle/>
           <a:p>
-            <a:pPr indent="0" marL="0">
+            <a:pPr marL="0" indent="0">
               <a:buNone/>
             </a:pPr>
             <a:r>
@@ -7536,7 +7232,7 @@
           <a:bodyPr wrap="square" lIns="0" tIns="0" rIns="0" bIns="0" rtlCol="0" anchor="ctr"/>
           <a:lstStyle/>
           <a:p>
-            <a:pPr algn="l" indent="0" marL="0">
+            <a:pPr marL="0" indent="0" algn="l">
               <a:buNone/>
             </a:pPr>
             <a:r>
@@ -7597,7 +7293,7 @@
           <a:bodyPr wrap="square" lIns="0" tIns="0" rIns="0" bIns="0" rtlCol="0" anchor="ctr"/>
           <a:lstStyle/>
           <a:p>
-            <a:pPr indent="0" marL="0">
+            <a:pPr marL="0" indent="0">
               <a:buNone/>
             </a:pPr>
             <a:r>
@@ -7636,7 +7332,7 @@
           <a:bodyPr wrap="square" lIns="0" tIns="0" rIns="0" bIns="0" rtlCol="0" anchor="ctr"/>
           <a:lstStyle/>
           <a:p>
-            <a:pPr indent="0" marL="0">
+            <a:pPr marL="0" indent="0">
               <a:buNone/>
             </a:pPr>
             <a:r>
@@ -7702,11 +7398,11 @@
           <a:bodyPr wrap="square" lIns="0" tIns="0" rIns="0" bIns="0" rtlCol="0" anchor="ctr"/>
           <a:lstStyle/>
           <a:p>
-            <a:pPr indent="0" marL="0">
-              <a:buNone/>
-            </a:pPr>
-            <a:r>
-              <a:rPr lang="en-US" sz="950" b="1" spc="150" kern="0" dirty="0">
+            <a:pPr marL="0" indent="0">
+              <a:buNone/>
+            </a:pPr>
+            <a:r>
+              <a:rPr lang="en-US" sz="950" b="1" kern="0" spc="150" dirty="0">
                 <a:solidFill>
                   <a:srgbClr val="106B41"/>
                 </a:solidFill>
@@ -7741,7 +7437,7 @@
           <a:bodyPr wrap="square" lIns="0" tIns="0" rIns="0" bIns="0" rtlCol="0" anchor="ctr"/>
           <a:lstStyle/>
           <a:p>
-            <a:pPr indent="0" marL="0">
+            <a:pPr marL="0" indent="0">
               <a:lnSpc>
                 <a:spcPct val="112000"/>
               </a:lnSpc>
@@ -7764,7 +7460,7 @@
       </p:sp>
       <p:sp>
         <p:nvSpPr>
-          <p:cNvPr id="25" name="Slide Number Placeholder 0"/>
+          <p:cNvPr id="28" name="Slide Number Placeholder 0"/>
           <p:cNvSpPr>
             <a:spLocks noGrp="1"/>
           </p:cNvSpPr>
@@ -7782,7 +7478,7 @@
           </a:prstGeom>
           <a:extLst>
             <a:ext uri="{C572A759-6A51-4108-AA02-DFA0A04FC94B}">
-              <ma14:wrappingTextBoxFlag xmlns:ma14="http://schemas.microsoft.com/office/mac/drawingml/2011/main" val="0"/>
+              <ma14:wrappingTextBoxFlag xmlns="" xmlns:ma14="http://schemas.microsoft.com/office/mac/drawingml/2011/main" val="0"/>
             </a:ext>
           </a:extLst>
         </p:spPr>
@@ -7803,7 +7499,7 @@
           <a:p>
             <a:pPr algn="l"/>
             <a:fld id="{F7021451-1387-4CA6-816F-3879F97B5CBC}" type="slidenum">
-              <a:rPr b="0" lang="en-US"/>
+              <a:rPr lang="en-US" b="0"/>
               <a:t>12</a:t>
             </a:fld>
             <a:endParaRPr lang="en-US"/>
@@ -7878,7 +7574,7 @@
           <a:bodyPr wrap="square" lIns="0" tIns="0" rIns="0" bIns="0" rtlCol="0" anchor="ctr"/>
           <a:lstStyle/>
           <a:p>
-            <a:pPr algn="l" indent="0" marL="0">
+            <a:pPr marL="0" indent="0" algn="l">
               <a:buNone/>
             </a:pPr>
             <a:r>
@@ -7917,7 +7613,7 @@
           <a:bodyPr wrap="square" lIns="0" tIns="0" rIns="0" bIns="0" rtlCol="0" anchor="ctr"/>
           <a:lstStyle/>
           <a:p>
-            <a:pPr indent="0" marL="0">
+            <a:pPr marL="0" indent="0">
               <a:buNone/>
             </a:pPr>
             <a:r>
@@ -7983,11 +7679,11 @@
           <a:bodyPr wrap="square" lIns="0" tIns="0" rIns="0" bIns="0" rtlCol="0" anchor="ctr"/>
           <a:lstStyle/>
           <a:p>
-            <a:pPr algn="ctr" indent="0" marL="0">
-              <a:buNone/>
-            </a:pPr>
-            <a:r>
-              <a:rPr lang="en-US" sz="900" b="1" spc="100" kern="0" dirty="0">
+            <a:pPr marL="0" indent="0" algn="ctr">
+              <a:buNone/>
+            </a:pPr>
+            <a:r>
+              <a:rPr lang="en-US" sz="900" b="1" kern="0" spc="100" dirty="0">
                 <a:solidFill>
                   <a:srgbClr val="5A05F4"/>
                 </a:solidFill>
@@ -8003,14 +7699,14 @@
       </p:sp>
       <p:pic>
         <p:nvPicPr>
-          <p:cNvPr id="7" name="Image 0" descr="preencoded.png">    </p:cNvPr>
+          <p:cNvPr id="7" name="Image 0" descr="preencoded.png"/>
           <p:cNvPicPr>
             <a:picLocks noChangeAspect="1"/>
           </p:cNvPicPr>
           <p:nvPr/>
         </p:nvPicPr>
         <p:blipFill>
-          <a:blip r:embed="rId1"/>
+          <a:blip r:embed="rId3"/>
           <a:stretch>
             <a:fillRect/>
           </a:stretch>
@@ -8088,7 +7784,7 @@
           <a:bodyPr wrap="square" lIns="0" tIns="0" rIns="0" bIns="0" rtlCol="0" anchor="ctr"/>
           <a:lstStyle/>
           <a:p>
-            <a:pPr algn="ctr" indent="0" marL="0">
+            <a:pPr marL="0" indent="0" algn="ctr">
               <a:buNone/>
             </a:pPr>
             <a:r>
@@ -8127,7 +7823,7 @@
           <a:bodyPr wrap="square" lIns="0" tIns="0" rIns="0" bIns="0" rtlCol="0" anchor="ctr"/>
           <a:lstStyle/>
           <a:p>
-            <a:pPr indent="0" marL="0">
+            <a:pPr marL="0" indent="0">
               <a:buNone/>
             </a:pPr>
             <a:r>
@@ -8166,7 +7862,7 @@
           <a:bodyPr wrap="square" lIns="0" tIns="0" rIns="0" bIns="0" rtlCol="0" anchor="t"/>
           <a:lstStyle/>
           <a:p>
-            <a:pPr indent="0" marL="0">
+            <a:pPr marL="0" indent="0">
               <a:lnSpc>
                 <a:spcPct val="108000"/>
               </a:lnSpc>
@@ -8250,7 +7946,7 @@
           <a:bodyPr wrap="square" lIns="0" tIns="0" rIns="0" bIns="0" rtlCol="0" anchor="ctr"/>
           <a:lstStyle/>
           <a:p>
-            <a:pPr algn="ctr" indent="0" marL="0">
+            <a:pPr marL="0" indent="0" algn="ctr">
               <a:buNone/>
             </a:pPr>
             <a:r>
@@ -8289,7 +7985,7 @@
           <a:bodyPr wrap="square" lIns="0" tIns="0" rIns="0" bIns="0" rtlCol="0" anchor="ctr"/>
           <a:lstStyle/>
           <a:p>
-            <a:pPr indent="0" marL="0">
+            <a:pPr marL="0" indent="0">
               <a:buNone/>
             </a:pPr>
             <a:r>
@@ -8328,7 +8024,7 @@
           <a:bodyPr wrap="square" lIns="0" tIns="0" rIns="0" bIns="0" rtlCol="0" anchor="t"/>
           <a:lstStyle/>
           <a:p>
-            <a:pPr indent="0" marL="0">
+            <a:pPr marL="0" indent="0">
               <a:lnSpc>
                 <a:spcPct val="108000"/>
               </a:lnSpc>
@@ -8412,7 +8108,7 @@
           <a:bodyPr wrap="square" lIns="0" tIns="0" rIns="0" bIns="0" rtlCol="0" anchor="ctr"/>
           <a:lstStyle/>
           <a:p>
-            <a:pPr algn="ctr" indent="0" marL="0">
+            <a:pPr marL="0" indent="0" algn="ctr">
               <a:buNone/>
             </a:pPr>
             <a:r>
@@ -8451,7 +8147,7 @@
           <a:bodyPr wrap="square" lIns="0" tIns="0" rIns="0" bIns="0" rtlCol="0" anchor="ctr"/>
           <a:lstStyle/>
           <a:p>
-            <a:pPr indent="0" marL="0">
+            <a:pPr marL="0" indent="0">
               <a:buNone/>
             </a:pPr>
             <a:r>
@@ -8490,7 +8186,7 @@
           <a:bodyPr wrap="square" lIns="0" tIns="0" rIns="0" bIns="0" rtlCol="0" anchor="t"/>
           <a:lstStyle/>
           <a:p>
-            <a:pPr indent="0" marL="0">
+            <a:pPr marL="0" indent="0">
               <a:lnSpc>
                 <a:spcPct val="108000"/>
               </a:lnSpc>
@@ -8520,7 +8216,7 @@
         <p:spPr>
           <a:xfrm>
             <a:off x="566928" y="3291840"/>
-            <a:ext cx="3383280" cy="640080"/>
+            <a:ext cx="3250692" cy="640080"/>
           </a:xfrm>
           <a:prstGeom prst="roundRect">
             <a:avLst>
@@ -8554,7 +8250,7 @@
           <a:bodyPr wrap="square" lIns="0" tIns="0" rIns="0" bIns="0" rtlCol="0" anchor="ctr"/>
           <a:lstStyle/>
           <a:p>
-            <a:pPr algn="ctr" indent="0" marL="0">
+            <a:pPr marL="0" indent="0" algn="ctr">
               <a:buNone/>
             </a:pPr>
             <a:r>
@@ -8580,8 +8276,8 @@
         </p:nvSpPr>
         <p:spPr>
           <a:xfrm>
-            <a:off x="4041648" y="3611880"/>
-            <a:ext cx="164592" cy="0"/>
+            <a:off x="3895344" y="3611880"/>
+            <a:ext cx="310896" cy="0"/>
           </a:xfrm>
           <a:prstGeom prst="line">
             <a:avLst/>
@@ -8623,7 +8319,7 @@
         </p:nvSpPr>
         <p:spPr>
           <a:xfrm>
-            <a:off x="4407408" y="3291840"/>
+            <a:off x="4366260" y="3291840"/>
             <a:ext cx="3383280" cy="640080"/>
           </a:xfrm>
           <a:prstGeom prst="roundRect">
@@ -8658,7 +8354,7 @@
           <a:bodyPr wrap="square" lIns="0" tIns="0" rIns="0" bIns="0" rtlCol="0" anchor="ctr"/>
           <a:lstStyle/>
           <a:p>
-            <a:pPr algn="ctr" indent="0" marL="0">
+            <a:pPr marL="0" indent="0" algn="ctr">
               <a:buNone/>
             </a:pPr>
             <a:r>
@@ -8684,8 +8380,8 @@
         </p:nvSpPr>
         <p:spPr>
           <a:xfrm>
-            <a:off x="7882128" y="3611880"/>
-            <a:ext cx="164592" cy="0"/>
+            <a:off x="7790688" y="3611880"/>
+            <a:ext cx="256032" cy="0"/>
           </a:xfrm>
           <a:prstGeom prst="line">
             <a:avLst/>
@@ -8727,8 +8423,8 @@
         </p:nvSpPr>
         <p:spPr>
           <a:xfrm>
-            <a:off x="8247888" y="3291840"/>
-            <a:ext cx="3383280" cy="640080"/>
+            <a:off x="8174735" y="3264408"/>
+            <a:ext cx="3311593" cy="640080"/>
           </a:xfrm>
           <a:prstGeom prst="roundRect">
             <a:avLst>
@@ -8762,7 +8458,7 @@
           <a:bodyPr wrap="square" lIns="0" tIns="0" rIns="0" bIns="0" rtlCol="0" anchor="ctr"/>
           <a:lstStyle/>
           <a:p>
-            <a:pPr algn="ctr" indent="0" marL="0">
+            <a:pPr marL="0" indent="0" algn="ctr">
               <a:buNone/>
             </a:pPr>
             <a:r>
@@ -8789,7 +8485,7 @@
         <p:spPr>
           <a:xfrm>
             <a:off x="566928" y="4434840"/>
-            <a:ext cx="11064240" cy="1234440"/>
+            <a:ext cx="10927080" cy="1234440"/>
           </a:xfrm>
           <a:prstGeom prst="roundRect">
             <a:avLst>
@@ -8828,11 +8524,11 @@
           <a:bodyPr wrap="square" lIns="0" tIns="0" rIns="0" bIns="0" rtlCol="0" anchor="ctr"/>
           <a:lstStyle/>
           <a:p>
-            <a:pPr indent="0" marL="0">
-              <a:buNone/>
-            </a:pPr>
-            <a:r>
-              <a:rPr lang="en-US" sz="950" b="1" spc="150" kern="0" dirty="0">
+            <a:pPr marL="0" indent="0">
+              <a:buNone/>
+            </a:pPr>
+            <a:r>
+              <a:rPr lang="en-US" sz="950" b="1" kern="0" spc="150" dirty="0">
                 <a:solidFill>
                   <a:srgbClr val="106B41"/>
                 </a:solidFill>
@@ -8867,7 +8563,7 @@
           <a:bodyPr wrap="square" lIns="0" tIns="0" rIns="0" bIns="0" rtlCol="0" anchor="ctr"/>
           <a:lstStyle/>
           <a:p>
-            <a:pPr indent="0" marL="0">
+            <a:pPr marL="0" indent="0">
               <a:lnSpc>
                 <a:spcPct val="112000"/>
               </a:lnSpc>
@@ -8890,7 +8586,7 @@
       </p:sp>
       <p:sp>
         <p:nvSpPr>
-          <p:cNvPr id="25" name="Slide Number Placeholder 0"/>
+          <p:cNvPr id="36" name="Slide Number Placeholder 0"/>
           <p:cNvSpPr>
             <a:spLocks noGrp="1"/>
           </p:cNvSpPr>
@@ -8908,7 +8604,7 @@
           </a:prstGeom>
           <a:extLst>
             <a:ext uri="{C572A759-6A51-4108-AA02-DFA0A04FC94B}">
-              <ma14:wrappingTextBoxFlag xmlns:ma14="http://schemas.microsoft.com/office/mac/drawingml/2011/main" val="0"/>
+              <ma14:wrappingTextBoxFlag xmlns="" xmlns:ma14="http://schemas.microsoft.com/office/mac/drawingml/2011/main" val="0"/>
             </a:ext>
           </a:extLst>
         </p:spPr>
@@ -8929,7 +8625,7 @@
           <a:p>
             <a:pPr algn="l"/>
             <a:fld id="{F7021451-1387-4CA6-816F-3879F97B5CBC}" type="slidenum">
-              <a:rPr b="0" lang="en-US"/>
+              <a:rPr lang="en-US" b="0"/>
               <a:t>13</a:t>
             </a:fld>
             <a:endParaRPr lang="en-US"/>
@@ -9004,7 +8700,7 @@
           <a:bodyPr wrap="square" lIns="0" tIns="0" rIns="0" bIns="0" rtlCol="0" anchor="ctr"/>
           <a:lstStyle/>
           <a:p>
-            <a:pPr algn="l" indent="0" marL="0">
+            <a:pPr marL="0" indent="0" algn="l">
               <a:buNone/>
             </a:pPr>
             <a:r>
@@ -9043,7 +8739,7 @@
           <a:bodyPr wrap="square" lIns="0" tIns="0" rIns="0" bIns="0" rtlCol="0" anchor="ctr"/>
           <a:lstStyle/>
           <a:p>
-            <a:pPr indent="0" marL="0">
+            <a:pPr marL="0" indent="0">
               <a:buNone/>
             </a:pPr>
             <a:r>
@@ -9109,11 +8805,11 @@
           <a:bodyPr wrap="square" lIns="0" tIns="0" rIns="0" bIns="0" rtlCol="0" anchor="ctr"/>
           <a:lstStyle/>
           <a:p>
-            <a:pPr algn="ctr" indent="0" marL="0">
-              <a:buNone/>
-            </a:pPr>
-            <a:r>
-              <a:rPr lang="en-US" sz="900" b="1" spc="100" kern="0" dirty="0">
+            <a:pPr marL="0" indent="0" algn="ctr">
+              <a:buNone/>
+            </a:pPr>
+            <a:r>
+              <a:rPr lang="en-US" sz="900" b="1" kern="0" spc="100" dirty="0">
                 <a:solidFill>
                   <a:srgbClr val="5A05F4"/>
                 </a:solidFill>
@@ -9129,14 +8825,14 @@
       </p:sp>
       <p:pic>
         <p:nvPicPr>
-          <p:cNvPr id="7" name="Image 0" descr="preencoded.png">    </p:cNvPr>
+          <p:cNvPr id="7" name="Image 0" descr="preencoded.png"/>
           <p:cNvPicPr>
             <a:picLocks noChangeAspect="1"/>
           </p:cNvPicPr>
           <p:nvPr/>
         </p:nvPicPr>
         <p:blipFill>
-          <a:blip r:embed="rId1"/>
+          <a:blip r:embed="rId3"/>
           <a:stretch>
             <a:fillRect/>
           </a:stretch>
@@ -9172,11 +8868,11 @@
           <a:bodyPr wrap="square" lIns="0" tIns="0" rIns="0" bIns="0" rtlCol="0" anchor="ctr"/>
           <a:lstStyle/>
           <a:p>
-            <a:pPr indent="0" marL="0">
-              <a:buNone/>
-            </a:pPr>
-            <a:r>
-              <a:rPr lang="en-US" sz="950" b="1" spc="100" kern="0" dirty="0">
+            <a:pPr marL="0" indent="0">
+              <a:buNone/>
+            </a:pPr>
+            <a:r>
+              <a:rPr lang="en-US" sz="950" b="1" kern="0" spc="100" dirty="0">
                 <a:solidFill>
                   <a:srgbClr val="6B6B6B"/>
                 </a:solidFill>
@@ -9238,7 +8934,7 @@
           <a:bodyPr wrap="square" lIns="0" tIns="0" rIns="0" bIns="0" rtlCol="0" anchor="ctr"/>
           <a:lstStyle/>
           <a:p>
-            <a:pPr algn="ctr" indent="0" marL="0">
+            <a:pPr marL="0" indent="0" algn="ctr">
               <a:buNone/>
             </a:pPr>
             <a:r>
@@ -9299,7 +8995,7 @@
           <a:bodyPr wrap="square" lIns="0" tIns="0" rIns="0" bIns="0" rtlCol="0" anchor="ctr"/>
           <a:lstStyle/>
           <a:p>
-            <a:pPr algn="ctr" indent="0" marL="0">
+            <a:pPr marL="0" indent="0" algn="ctr">
               <a:buNone/>
             </a:pPr>
             <a:r>
@@ -9338,11 +9034,11 @@
           <a:bodyPr wrap="square" lIns="0" tIns="0" rIns="0" bIns="0" rtlCol="0" anchor="ctr"/>
           <a:lstStyle/>
           <a:p>
-            <a:pPr indent="0" marL="0">
-              <a:buNone/>
-            </a:pPr>
-            <a:r>
-              <a:rPr lang="en-US" sz="950" b="1" spc="100" kern="0" dirty="0">
+            <a:pPr marL="0" indent="0">
+              <a:buNone/>
+            </a:pPr>
+            <a:r>
+              <a:rPr lang="en-US" sz="950" b="1" kern="0" spc="100" dirty="0">
                 <a:solidFill>
                   <a:srgbClr val="6B6B6B"/>
                 </a:solidFill>
@@ -9404,7 +9100,7 @@
           <a:bodyPr wrap="square" lIns="0" tIns="0" rIns="0" bIns="0" rtlCol="0" anchor="ctr"/>
           <a:lstStyle/>
           <a:p>
-            <a:pPr algn="ctr" indent="0" marL="0">
+            <a:pPr marL="0" indent="0" algn="ctr">
               <a:buNone/>
             </a:pPr>
             <a:r>
@@ -9465,7 +9161,7 @@
           <a:bodyPr wrap="square" lIns="0" tIns="0" rIns="0" bIns="0" rtlCol="0" anchor="ctr"/>
           <a:lstStyle/>
           <a:p>
-            <a:pPr algn="ctr" indent="0" marL="0">
+            <a:pPr marL="0" indent="0" algn="ctr">
               <a:buNone/>
             </a:pPr>
             <a:r>
@@ -9504,7 +9200,7 @@
           <a:bodyPr wrap="square" lIns="0" tIns="0" rIns="0" bIns="0" rtlCol="0" anchor="ctr"/>
           <a:lstStyle/>
           <a:p>
-            <a:pPr indent="0" marL="0">
+            <a:pPr marL="0" indent="0">
               <a:buNone/>
             </a:pPr>
             <a:r>
@@ -9570,11 +9266,11 @@
           <a:bodyPr wrap="square" lIns="0" tIns="0" rIns="0" bIns="0" rtlCol="0" anchor="ctr"/>
           <a:lstStyle/>
           <a:p>
-            <a:pPr indent="0" marL="0">
-              <a:buNone/>
-            </a:pPr>
-            <a:r>
-              <a:rPr lang="en-US" sz="950" b="1" spc="150" kern="0" dirty="0">
+            <a:pPr marL="0" indent="0">
+              <a:buNone/>
+            </a:pPr>
+            <a:r>
+              <a:rPr lang="en-US" sz="950" b="1" kern="0" spc="150" dirty="0">
                 <a:solidFill>
                   <a:srgbClr val="B3261E"/>
                 </a:solidFill>
@@ -9609,7 +9305,7 @@
           <a:bodyPr wrap="square" lIns="0" tIns="0" rIns="0" bIns="0" rtlCol="0" anchor="ctr"/>
           <a:lstStyle/>
           <a:p>
-            <a:pPr indent="0" marL="0">
+            <a:pPr marL="0" indent="0">
               <a:lnSpc>
                 <a:spcPct val="112000"/>
               </a:lnSpc>
@@ -9651,7 +9347,7 @@
           <a:bodyPr wrap="square" lIns="0" tIns="0" rIns="0" bIns="0" rtlCol="0" anchor="t"/>
           <a:lstStyle/>
           <a:p>
-            <a:pPr indent="0" marL="0">
+            <a:pPr marL="0" indent="0">
               <a:buNone/>
             </a:pPr>
             <a:r>
@@ -9665,9 +9361,6 @@
               </a:rPr>
               <a:t>time-to-first-token</a:t>
             </a:r>
-            <a:pPr indent="0" marL="0">
-              <a:buNone/>
-            </a:pPr>
             <a:r>
               <a:rPr lang="en-US" sz="1200" dirty="0">
                 <a:solidFill>
@@ -9703,7 +9396,7 @@
           </a:prstGeom>
           <a:extLst>
             <a:ext uri="{C572A759-6A51-4108-AA02-DFA0A04FC94B}">
-              <ma14:wrappingTextBoxFlag xmlns:ma14="http://schemas.microsoft.com/office/mac/drawingml/2011/main" val="0"/>
+              <ma14:wrappingTextBoxFlag xmlns="" xmlns:ma14="http://schemas.microsoft.com/office/mac/drawingml/2011/main" val="0"/>
             </a:ext>
           </a:extLst>
         </p:spPr>
@@ -9724,7 +9417,7 @@
           <a:p>
             <a:pPr algn="l"/>
             <a:fld id="{F7021451-1387-4CA6-816F-3879F97B5CBC}" type="slidenum">
-              <a:rPr b="0" lang="en-US"/>
+              <a:rPr lang="en-US" b="0"/>
               <a:t>14</a:t>
             </a:fld>
             <a:endParaRPr lang="en-US"/>
@@ -9799,7 +9492,7 @@
           <a:bodyPr wrap="square" lIns="0" tIns="0" rIns="0" bIns="0" rtlCol="0" anchor="ctr"/>
           <a:lstStyle/>
           <a:p>
-            <a:pPr algn="l" indent="0" marL="0">
+            <a:pPr marL="0" indent="0" algn="l">
               <a:buNone/>
             </a:pPr>
             <a:r>
@@ -9838,7 +9531,7 @@
           <a:bodyPr wrap="square" lIns="0" tIns="0" rIns="0" bIns="0" rtlCol="0" anchor="ctr"/>
           <a:lstStyle/>
           <a:p>
-            <a:pPr indent="0" marL="0">
+            <a:pPr marL="0" indent="0">
               <a:buNone/>
             </a:pPr>
             <a:r>
@@ -9904,11 +9597,11 @@
           <a:bodyPr wrap="square" lIns="0" tIns="0" rIns="0" bIns="0" rtlCol="0" anchor="ctr"/>
           <a:lstStyle/>
           <a:p>
-            <a:pPr algn="ctr" indent="0" marL="0">
-              <a:buNone/>
-            </a:pPr>
-            <a:r>
-              <a:rPr lang="en-US" sz="900" b="1" spc="100" kern="0" dirty="0">
+            <a:pPr marL="0" indent="0" algn="ctr">
+              <a:buNone/>
+            </a:pPr>
+            <a:r>
+              <a:rPr lang="en-US" sz="900" b="1" kern="0" spc="100" dirty="0">
                 <a:solidFill>
                   <a:srgbClr val="5A05F4"/>
                 </a:solidFill>
@@ -9924,14 +9617,14 @@
       </p:sp>
       <p:pic>
         <p:nvPicPr>
-          <p:cNvPr id="7" name="Image 0" descr="preencoded.png">    </p:cNvPr>
+          <p:cNvPr id="7" name="Image 0" descr="preencoded.png"/>
           <p:cNvPicPr>
             <a:picLocks noChangeAspect="1"/>
           </p:cNvPicPr>
           <p:nvPr/>
         </p:nvPicPr>
         <p:blipFill>
-          <a:blip r:embed="rId1"/>
+          <a:blip r:embed="rId3"/>
           <a:stretch>
             <a:fillRect/>
           </a:stretch>
@@ -9994,11 +9687,11 @@
           <a:bodyPr wrap="square" lIns="0" tIns="0" rIns="0" bIns="0" rtlCol="0" anchor="ctr"/>
           <a:lstStyle/>
           <a:p>
-            <a:pPr indent="0" marL="0">
-              <a:buNone/>
-            </a:pPr>
-            <a:r>
-              <a:rPr lang="en-US" sz="1000" b="1" spc="150" kern="0" dirty="0">
+            <a:pPr marL="0" indent="0">
+              <a:buNone/>
+            </a:pPr>
+            <a:r>
+              <a:rPr lang="en-US" sz="1000" b="1" kern="0" spc="150" dirty="0">
                 <a:solidFill>
                   <a:srgbClr val="106B41"/>
                 </a:solidFill>
@@ -10055,7 +9748,7 @@
           <a:bodyPr wrap="square" lIns="0" tIns="0" rIns="0" bIns="0" rtlCol="0" anchor="ctr"/>
           <a:lstStyle/>
           <a:p>
-            <a:pPr algn="ctr" indent="0" marL="0">
+            <a:pPr marL="0" indent="0" algn="ctr">
               <a:buNone/>
             </a:pPr>
             <a:r>
@@ -10094,7 +9787,7 @@
           <a:bodyPr wrap="square" lIns="0" tIns="0" rIns="0" bIns="0" rtlCol="0" anchor="ctr"/>
           <a:lstStyle/>
           <a:p>
-            <a:pPr indent="0" marL="0">
+            <a:pPr marL="0" indent="0">
               <a:buNone/>
             </a:pPr>
             <a:r>
@@ -10155,7 +9848,7 @@
           <a:bodyPr wrap="square" lIns="0" tIns="0" rIns="0" bIns="0" rtlCol="0" anchor="ctr"/>
           <a:lstStyle/>
           <a:p>
-            <a:pPr algn="ctr" indent="0" marL="0">
+            <a:pPr marL="0" indent="0" algn="ctr">
               <a:buNone/>
             </a:pPr>
             <a:r>
@@ -10194,7 +9887,7 @@
           <a:bodyPr wrap="square" lIns="0" tIns="0" rIns="0" bIns="0" rtlCol="0" anchor="ctr"/>
           <a:lstStyle/>
           <a:p>
-            <a:pPr indent="0" marL="0">
+            <a:pPr marL="0" indent="0">
               <a:buNone/>
             </a:pPr>
             <a:r>
@@ -10255,7 +9948,7 @@
           <a:bodyPr wrap="square" lIns="0" tIns="0" rIns="0" bIns="0" rtlCol="0" anchor="ctr"/>
           <a:lstStyle/>
           <a:p>
-            <a:pPr algn="ctr" indent="0" marL="0">
+            <a:pPr marL="0" indent="0" algn="ctr">
               <a:buNone/>
             </a:pPr>
             <a:r>
@@ -10294,7 +9987,7 @@
           <a:bodyPr wrap="square" lIns="0" tIns="0" rIns="0" bIns="0" rtlCol="0" anchor="ctr"/>
           <a:lstStyle/>
           <a:p>
-            <a:pPr indent="0" marL="0">
+            <a:pPr marL="0" indent="0">
               <a:buNone/>
             </a:pPr>
             <a:r>
@@ -10360,11 +10053,11 @@
           <a:bodyPr wrap="square" lIns="0" tIns="0" rIns="0" bIns="0" rtlCol="0" anchor="ctr"/>
           <a:lstStyle/>
           <a:p>
-            <a:pPr indent="0" marL="0">
-              <a:buNone/>
-            </a:pPr>
-            <a:r>
-              <a:rPr lang="en-US" sz="1000" b="1" spc="150" kern="0" dirty="0">
+            <a:pPr marL="0" indent="0">
+              <a:buNone/>
+            </a:pPr>
+            <a:r>
+              <a:rPr lang="en-US" sz="1000" b="1" kern="0" spc="150" dirty="0">
                 <a:solidFill>
                   <a:srgbClr val="B3261E"/>
                 </a:solidFill>
@@ -10421,7 +10114,7 @@
           <a:bodyPr wrap="square" lIns="0" tIns="0" rIns="0" bIns="0" rtlCol="0" anchor="ctr"/>
           <a:lstStyle/>
           <a:p>
-            <a:pPr indent="0" marL="0">
+            <a:pPr marL="0" indent="0">
               <a:buNone/>
             </a:pPr>
             <a:r>
@@ -10460,7 +10153,7 @@
           <a:bodyPr wrap="square" lIns="0" tIns="0" rIns="0" bIns="0" rtlCol="0" anchor="ctr"/>
           <a:lstStyle/>
           <a:p>
-            <a:pPr indent="0" marL="0">
+            <a:pPr marL="0" indent="0">
               <a:buNone/>
             </a:pPr>
             <a:r>
@@ -10521,7 +10214,7 @@
           <a:bodyPr wrap="square" lIns="0" tIns="0" rIns="0" bIns="0" rtlCol="0" anchor="ctr"/>
           <a:lstStyle/>
           <a:p>
-            <a:pPr indent="0" marL="0">
+            <a:pPr marL="0" indent="0">
               <a:buNone/>
             </a:pPr>
             <a:r>
@@ -10560,7 +10253,7 @@
           <a:bodyPr wrap="square" lIns="0" tIns="0" rIns="0" bIns="0" rtlCol="0" anchor="ctr"/>
           <a:lstStyle/>
           <a:p>
-            <a:pPr indent="0" marL="0">
+            <a:pPr marL="0" indent="0">
               <a:buNone/>
             </a:pPr>
             <a:r>
@@ -10626,7 +10319,7 @@
           <a:bodyPr wrap="square" lIns="0" tIns="0" rIns="0" bIns="0" rtlCol="0" anchor="ctr"/>
           <a:lstStyle/>
           <a:p>
-            <a:pPr indent="0" marL="0">
+            <a:pPr marL="0" indent="0">
               <a:lnSpc>
                 <a:spcPct val="112000"/>
               </a:lnSpc>
@@ -10649,7 +10342,7 @@
       </p:sp>
       <p:sp>
         <p:nvSpPr>
-          <p:cNvPr id="25" name="Slide Number Placeholder 0"/>
+          <p:cNvPr id="29" name="Slide Number Placeholder 0"/>
           <p:cNvSpPr>
             <a:spLocks noGrp="1"/>
           </p:cNvSpPr>
@@ -10667,7 +10360,7 @@
           </a:prstGeom>
           <a:extLst>
             <a:ext uri="{C572A759-6A51-4108-AA02-DFA0A04FC94B}">
-              <ma14:wrappingTextBoxFlag xmlns:ma14="http://schemas.microsoft.com/office/mac/drawingml/2011/main" val="0"/>
+              <ma14:wrappingTextBoxFlag xmlns="" xmlns:ma14="http://schemas.microsoft.com/office/mac/drawingml/2011/main" val="0"/>
             </a:ext>
           </a:extLst>
         </p:spPr>
@@ -10688,7 +10381,7 @@
           <a:p>
             <a:pPr algn="l"/>
             <a:fld id="{F7021451-1387-4CA6-816F-3879F97B5CBC}" type="slidenum">
-              <a:rPr b="0" lang="en-US"/>
+              <a:rPr lang="en-US" b="0"/>
               <a:t>15</a:t>
             </a:fld>
             <a:endParaRPr lang="en-US"/>
@@ -10763,7 +10456,7 @@
           <a:bodyPr wrap="square" lIns="0" tIns="0" rIns="0" bIns="0" rtlCol="0" anchor="ctr"/>
           <a:lstStyle/>
           <a:p>
-            <a:pPr algn="l" indent="0" marL="0">
+            <a:pPr marL="0" indent="0" algn="l">
               <a:buNone/>
             </a:pPr>
             <a:r>
@@ -10802,7 +10495,7 @@
           <a:bodyPr wrap="square" lIns="0" tIns="0" rIns="0" bIns="0" rtlCol="0" anchor="ctr"/>
           <a:lstStyle/>
           <a:p>
-            <a:pPr indent="0" marL="0">
+            <a:pPr marL="0" indent="0">
               <a:buNone/>
             </a:pPr>
             <a:r>
@@ -10868,11 +10561,11 @@
           <a:bodyPr wrap="square" lIns="0" tIns="0" rIns="0" bIns="0" rtlCol="0" anchor="ctr"/>
           <a:lstStyle/>
           <a:p>
-            <a:pPr algn="ctr" indent="0" marL="0">
-              <a:buNone/>
-            </a:pPr>
-            <a:r>
-              <a:rPr lang="en-US" sz="900" b="1" spc="100" kern="0" dirty="0">
+            <a:pPr marL="0" indent="0" algn="ctr">
+              <a:buNone/>
+            </a:pPr>
+            <a:r>
+              <a:rPr lang="en-US" sz="900" b="1" kern="0" spc="100" dirty="0">
                 <a:solidFill>
                   <a:srgbClr val="5A05F4"/>
                 </a:solidFill>
@@ -10888,14 +10581,14 @@
       </p:sp>
       <p:pic>
         <p:nvPicPr>
-          <p:cNvPr id="7" name="Image 0" descr="preencoded.png">    </p:cNvPr>
+          <p:cNvPr id="7" name="Image 0" descr="preencoded.png"/>
           <p:cNvPicPr>
             <a:picLocks noChangeAspect="1"/>
           </p:cNvPicPr>
           <p:nvPr/>
         </p:nvPicPr>
         <p:blipFill>
-          <a:blip r:embed="rId1"/>
+          <a:blip r:embed="rId3"/>
           <a:stretch>
             <a:fillRect/>
           </a:stretch>
@@ -10953,7 +10646,7 @@
           <a:bodyPr wrap="square" lIns="0" tIns="0" rIns="0" bIns="0" rtlCol="0" anchor="ctr"/>
           <a:lstStyle/>
           <a:p>
-            <a:pPr algn="ctr" indent="0" marL="0">
+            <a:pPr marL="0" indent="0" algn="ctr">
               <a:buNone/>
             </a:pPr>
             <a:r>
@@ -11057,7 +10750,7 @@
           <a:bodyPr wrap="square" lIns="0" tIns="0" rIns="0" bIns="0" rtlCol="0" anchor="ctr"/>
           <a:lstStyle/>
           <a:p>
-            <a:pPr algn="ctr" indent="0" marL="0">
+            <a:pPr marL="0" indent="0" algn="ctr">
               <a:buNone/>
             </a:pPr>
             <a:r>
@@ -11161,7 +10854,7 @@
           <a:bodyPr wrap="square" lIns="0" tIns="0" rIns="0" bIns="0" rtlCol="0" anchor="ctr"/>
           <a:lstStyle/>
           <a:p>
-            <a:pPr algn="ctr" indent="0" marL="0">
+            <a:pPr marL="0" indent="0" algn="ctr">
               <a:buNone/>
             </a:pPr>
             <a:r>
@@ -11265,7 +10958,7 @@
           <a:bodyPr wrap="square" lIns="0" tIns="0" rIns="0" bIns="0" rtlCol="0" anchor="ctr"/>
           <a:lstStyle/>
           <a:p>
-            <a:pPr algn="ctr" indent="0" marL="0">
+            <a:pPr marL="0" indent="0" algn="ctr">
               <a:buNone/>
             </a:pPr>
             <a:r>
@@ -11369,7 +11062,7 @@
           <a:bodyPr wrap="square" lIns="0" tIns="0" rIns="0" bIns="0" rtlCol="0" anchor="ctr"/>
           <a:lstStyle/>
           <a:p>
-            <a:pPr algn="ctr" indent="0" marL="0">
+            <a:pPr marL="0" indent="0" algn="ctr">
               <a:buNone/>
             </a:pPr>
             <a:r>
@@ -11478,7 +11171,7 @@
           <a:bodyPr wrap="square" lIns="0" tIns="0" rIns="0" bIns="0" rtlCol="0" anchor="ctr"/>
           <a:lstStyle/>
           <a:p>
-            <a:pPr algn="ctr" indent="0" marL="0">
+            <a:pPr marL="0" indent="0" algn="ctr">
               <a:buNone/>
             </a:pPr>
             <a:r>
@@ -11544,7 +11237,7 @@
           <a:bodyPr wrap="square" lIns="0" tIns="0" rIns="0" bIns="0" rtlCol="0" anchor="t"/>
           <a:lstStyle/>
           <a:p>
-            <a:pPr indent="0" marL="0">
+            <a:pPr marL="0" indent="0">
               <a:lnSpc>
                 <a:spcPct val="130000"/>
               </a:lnSpc>
@@ -11561,12 +11254,6 @@
               </a:rPr>
               <a:t>docker compose up</a:t>
             </a:r>
-            <a:pPr indent="0" marL="0">
-              <a:lnSpc>
-                <a:spcPct val="130000"/>
-              </a:lnSpc>
-              <a:buNone/>
-            </a:pPr>
             <a:r>
               <a:rPr lang="en-US" sz="1300" dirty="0">
                 <a:solidFill>
@@ -11630,7 +11317,7 @@
           <a:bodyPr wrap="square" lIns="0" tIns="0" rIns="0" bIns="0" rtlCol="0" anchor="ctr"/>
           <a:lstStyle/>
           <a:p>
-            <a:pPr indent="0" marL="0">
+            <a:pPr marL="0" indent="0">
               <a:lnSpc>
                 <a:spcPct val="112000"/>
               </a:lnSpc>
@@ -11653,7 +11340,7 @@
       </p:sp>
       <p:sp>
         <p:nvSpPr>
-          <p:cNvPr id="25" name="Slide Number Placeholder 0"/>
+          <p:cNvPr id="34" name="Slide Number Placeholder 0"/>
           <p:cNvSpPr>
             <a:spLocks noGrp="1"/>
           </p:cNvSpPr>
@@ -11671,7 +11358,7 @@
           </a:prstGeom>
           <a:extLst>
             <a:ext uri="{C572A759-6A51-4108-AA02-DFA0A04FC94B}">
-              <ma14:wrappingTextBoxFlag xmlns:ma14="http://schemas.microsoft.com/office/mac/drawingml/2011/main" val="0"/>
+              <ma14:wrappingTextBoxFlag xmlns="" xmlns:ma14="http://schemas.microsoft.com/office/mac/drawingml/2011/main" val="0"/>
             </a:ext>
           </a:extLst>
         </p:spPr>
@@ -11692,7 +11379,7 @@
           <a:p>
             <a:pPr algn="l"/>
             <a:fld id="{F7021451-1387-4CA6-816F-3879F97B5CBC}" type="slidenum">
-              <a:rPr b="0" lang="en-US"/>
+              <a:rPr lang="en-US" b="0"/>
               <a:t>16</a:t>
             </a:fld>
             <a:endParaRPr lang="en-US"/>
@@ -11767,7 +11454,7 @@
           <a:bodyPr wrap="square" lIns="0" tIns="0" rIns="0" bIns="0" rtlCol="0" anchor="ctr"/>
           <a:lstStyle/>
           <a:p>
-            <a:pPr algn="l" indent="0" marL="0">
+            <a:pPr marL="0" indent="0" algn="l">
               <a:buNone/>
             </a:pPr>
             <a:r>
@@ -11806,7 +11493,7 @@
           <a:bodyPr wrap="square" lIns="0" tIns="0" rIns="0" bIns="0" rtlCol="0" anchor="ctr"/>
           <a:lstStyle/>
           <a:p>
-            <a:pPr indent="0" marL="0">
+            <a:pPr marL="0" indent="0">
               <a:buNone/>
             </a:pPr>
             <a:r>
@@ -11872,11 +11559,11 @@
           <a:bodyPr wrap="square" lIns="0" tIns="0" rIns="0" bIns="0" rtlCol="0" anchor="ctr"/>
           <a:lstStyle/>
           <a:p>
-            <a:pPr algn="ctr" indent="0" marL="0">
-              <a:buNone/>
-            </a:pPr>
-            <a:r>
-              <a:rPr lang="en-US" sz="900" b="1" spc="100" kern="0" dirty="0">
+            <a:pPr marL="0" indent="0" algn="ctr">
+              <a:buNone/>
+            </a:pPr>
+            <a:r>
+              <a:rPr lang="en-US" sz="900" b="1" kern="0" spc="100" dirty="0">
                 <a:solidFill>
                   <a:srgbClr val="5A05F4"/>
                 </a:solidFill>
@@ -11892,14 +11579,14 @@
       </p:sp>
       <p:pic>
         <p:nvPicPr>
-          <p:cNvPr id="7" name="Image 0" descr="preencoded.png">    </p:cNvPr>
+          <p:cNvPr id="7" name="Image 0" descr="preencoded.png"/>
           <p:cNvPicPr>
             <a:picLocks noChangeAspect="1"/>
           </p:cNvPicPr>
           <p:nvPr/>
         </p:nvPicPr>
         <p:blipFill>
-          <a:blip r:embed="rId1"/>
+          <a:blip r:embed="rId3"/>
           <a:stretch>
             <a:fillRect/>
           </a:stretch>
@@ -11957,7 +11644,7 @@
           <a:bodyPr wrap="square" lIns="0" tIns="0" rIns="0" bIns="0" rtlCol="0" anchor="ctr"/>
           <a:lstStyle/>
           <a:p>
-            <a:pPr indent="0" marL="0">
+            <a:pPr marL="0" indent="0">
               <a:buNone/>
             </a:pPr>
             <a:r>
@@ -11996,7 +11683,7 @@
           <a:bodyPr wrap="square" lIns="0" tIns="0" rIns="0" bIns="0" rtlCol="0" anchor="ctr"/>
           <a:lstStyle/>
           <a:p>
-            <a:pPr indent="0" marL="0">
+            <a:pPr marL="0" indent="0">
               <a:buNone/>
             </a:pPr>
             <a:r>
@@ -12057,7 +11744,7 @@
           <a:bodyPr wrap="square" lIns="0" tIns="0" rIns="0" bIns="0" rtlCol="0" anchor="ctr"/>
           <a:lstStyle/>
           <a:p>
-            <a:pPr indent="0" marL="0">
+            <a:pPr marL="0" indent="0">
               <a:buNone/>
             </a:pPr>
             <a:r>
@@ -12096,7 +11783,7 @@
           <a:bodyPr wrap="square" lIns="0" tIns="0" rIns="0" bIns="0" rtlCol="0" anchor="ctr"/>
           <a:lstStyle/>
           <a:p>
-            <a:pPr indent="0" marL="0">
+            <a:pPr marL="0" indent="0">
               <a:buNone/>
             </a:pPr>
             <a:r>
@@ -12157,7 +11844,7 @@
           <a:bodyPr wrap="square" lIns="0" tIns="0" rIns="0" bIns="0" rtlCol="0" anchor="ctr"/>
           <a:lstStyle/>
           <a:p>
-            <a:pPr indent="0" marL="0">
+            <a:pPr marL="0" indent="0">
               <a:buNone/>
             </a:pPr>
             <a:r>
@@ -12196,7 +11883,7 @@
           <a:bodyPr wrap="square" lIns="0" tIns="0" rIns="0" bIns="0" rtlCol="0" anchor="ctr"/>
           <a:lstStyle/>
           <a:p>
-            <a:pPr indent="0" marL="0">
+            <a:pPr marL="0" indent="0">
               <a:buNone/>
             </a:pPr>
             <a:r>
@@ -12257,7 +11944,7 @@
           <a:bodyPr wrap="square" lIns="0" tIns="0" rIns="0" bIns="0" rtlCol="0" anchor="ctr"/>
           <a:lstStyle/>
           <a:p>
-            <a:pPr indent="0" marL="0">
+            <a:pPr marL="0" indent="0">
               <a:buNone/>
             </a:pPr>
             <a:r>
@@ -12296,7 +11983,7 @@
           <a:bodyPr wrap="square" lIns="0" tIns="0" rIns="0" bIns="0" rtlCol="0" anchor="ctr"/>
           <a:lstStyle/>
           <a:p>
-            <a:pPr indent="0" marL="0">
+            <a:pPr marL="0" indent="0">
               <a:buNone/>
             </a:pPr>
             <a:r>
@@ -12357,7 +12044,7 @@
           <a:bodyPr wrap="square" lIns="0" tIns="0" rIns="0" bIns="0" rtlCol="0" anchor="ctr"/>
           <a:lstStyle/>
           <a:p>
-            <a:pPr indent="0" marL="0">
+            <a:pPr marL="0" indent="0">
               <a:buNone/>
             </a:pPr>
             <a:r>
@@ -12396,7 +12083,7 @@
           <a:bodyPr wrap="square" lIns="0" tIns="0" rIns="0" bIns="0" rtlCol="0" anchor="ctr"/>
           <a:lstStyle/>
           <a:p>
-            <a:pPr indent="0" marL="0">
+            <a:pPr marL="0" indent="0">
               <a:buNone/>
             </a:pPr>
             <a:r>
@@ -12462,7 +12149,7 @@
           <a:bodyPr wrap="square" lIns="0" tIns="0" rIns="0" bIns="0" rtlCol="0" anchor="ctr"/>
           <a:lstStyle/>
           <a:p>
-            <a:pPr indent="0" marL="0">
+            <a:pPr marL="0" indent="0">
               <a:lnSpc>
                 <a:spcPct val="112000"/>
               </a:lnSpc>
@@ -12503,7 +12190,7 @@
           </a:prstGeom>
           <a:extLst>
             <a:ext uri="{C572A759-6A51-4108-AA02-DFA0A04FC94B}">
-              <ma14:wrappingTextBoxFlag xmlns:ma14="http://schemas.microsoft.com/office/mac/drawingml/2011/main" val="0"/>
+              <ma14:wrappingTextBoxFlag xmlns="" xmlns:ma14="http://schemas.microsoft.com/office/mac/drawingml/2011/main" val="0"/>
             </a:ext>
           </a:extLst>
         </p:spPr>
@@ -12524,7 +12211,7 @@
           <a:p>
             <a:pPr algn="l"/>
             <a:fld id="{F7021451-1387-4CA6-816F-3879F97B5CBC}" type="slidenum">
-              <a:rPr b="0" lang="en-US"/>
+              <a:rPr lang="en-US" b="0"/>
               <a:t>17</a:t>
             </a:fld>
             <a:endParaRPr lang="en-US"/>
@@ -12599,7 +12286,7 @@
           <a:bodyPr wrap="square" lIns="0" tIns="0" rIns="0" bIns="0" rtlCol="0" anchor="ctr"/>
           <a:lstStyle/>
           <a:p>
-            <a:pPr algn="l" indent="0" marL="0">
+            <a:pPr marL="0" indent="0" algn="l">
               <a:buNone/>
             </a:pPr>
             <a:r>
@@ -12638,7 +12325,7 @@
           <a:bodyPr wrap="square" lIns="0" tIns="0" rIns="0" bIns="0" rtlCol="0" anchor="ctr"/>
           <a:lstStyle/>
           <a:p>
-            <a:pPr indent="0" marL="0">
+            <a:pPr marL="0" indent="0">
               <a:buNone/>
             </a:pPr>
             <a:r>
@@ -12704,11 +12391,11 @@
           <a:bodyPr wrap="square" lIns="0" tIns="0" rIns="0" bIns="0" rtlCol="0" anchor="ctr"/>
           <a:lstStyle/>
           <a:p>
-            <a:pPr algn="ctr" indent="0" marL="0">
-              <a:buNone/>
-            </a:pPr>
-            <a:r>
-              <a:rPr lang="en-US" sz="900" b="1" spc="100" kern="0" dirty="0">
+            <a:pPr marL="0" indent="0" algn="ctr">
+              <a:buNone/>
+            </a:pPr>
+            <a:r>
+              <a:rPr lang="en-US" sz="900" b="1" kern="0" spc="100" dirty="0">
                 <a:solidFill>
                   <a:srgbClr val="5A05F4"/>
                 </a:solidFill>
@@ -12724,14 +12411,14 @@
       </p:sp>
       <p:pic>
         <p:nvPicPr>
-          <p:cNvPr id="7" name="Image 0" descr="preencoded.png">    </p:cNvPr>
+          <p:cNvPr id="7" name="Image 0" descr="preencoded.png"/>
           <p:cNvPicPr>
             <a:picLocks noChangeAspect="1"/>
           </p:cNvPicPr>
           <p:nvPr/>
         </p:nvPicPr>
         <p:blipFill>
-          <a:blip r:embed="rId1"/>
+          <a:blip r:embed="rId3"/>
           <a:stretch>
             <a:fillRect/>
           </a:stretch>
@@ -12789,11 +12476,11 @@
           <a:bodyPr wrap="square" lIns="0" tIns="0" rIns="0" bIns="0" rtlCol="0" anchor="ctr"/>
           <a:lstStyle/>
           <a:p>
-            <a:pPr indent="0" marL="0">
-              <a:buNone/>
-            </a:pPr>
-            <a:r>
-              <a:rPr lang="en-US" sz="1100" b="1" spc="200" kern="0" dirty="0">
+            <a:pPr marL="0" indent="0">
+              <a:buNone/>
+            </a:pPr>
+            <a:r>
+              <a:rPr lang="en-US" sz="1100" b="1" kern="0" spc="200" dirty="0">
                 <a:solidFill>
                   <a:srgbClr val="C9C5F2"/>
                 </a:solidFill>
@@ -12828,7 +12515,7 @@
           <a:bodyPr wrap="square" lIns="0" tIns="0" rIns="0" bIns="0" rtlCol="0" anchor="ctr"/>
           <a:lstStyle/>
           <a:p>
-            <a:pPr indent="0" marL="0">
+            <a:pPr marL="0" indent="0">
               <a:buNone/>
             </a:pPr>
             <a:r>
@@ -12867,7 +12554,7 @@
           <a:bodyPr wrap="square" lIns="0" tIns="0" rIns="0" bIns="0" rtlCol="0" anchor="t"/>
           <a:lstStyle/>
           <a:p>
-            <a:pPr indent="0" marL="0">
+            <a:pPr marL="0" indent="0">
               <a:buNone/>
             </a:pPr>
             <a:r>
@@ -12933,11 +12620,11 @@
           <a:bodyPr wrap="square" lIns="0" tIns="0" rIns="0" bIns="0" rtlCol="0" anchor="ctr"/>
           <a:lstStyle/>
           <a:p>
-            <a:pPr indent="0" marL="0">
-              <a:buNone/>
-            </a:pPr>
-            <a:r>
-              <a:rPr lang="en-US" sz="1100" b="1" spc="200" kern="0" dirty="0">
+            <a:pPr marL="0" indent="0">
+              <a:buNone/>
+            </a:pPr>
+            <a:r>
+              <a:rPr lang="en-US" sz="1100" b="1" kern="0" spc="200" dirty="0">
                 <a:solidFill>
                   <a:srgbClr val="6B6B6B"/>
                 </a:solidFill>
@@ -12972,7 +12659,7 @@
           <a:bodyPr wrap="square" lIns="0" tIns="0" rIns="0" bIns="0" rtlCol="0" anchor="ctr"/>
           <a:lstStyle/>
           <a:p>
-            <a:pPr indent="0" marL="0">
+            <a:pPr marL="0" indent="0">
               <a:buNone/>
             </a:pPr>
             <a:r>
@@ -13011,7 +12698,7 @@
           <a:bodyPr wrap="square" lIns="0" tIns="0" rIns="0" bIns="0" rtlCol="0" anchor="t"/>
           <a:lstStyle/>
           <a:p>
-            <a:pPr indent="0" marL="0">
+            <a:pPr marL="0" indent="0">
               <a:buNone/>
             </a:pPr>
             <a:r>
@@ -13077,11 +12764,11 @@
           <a:bodyPr wrap="square" lIns="0" tIns="0" rIns="0" bIns="0" rtlCol="0" anchor="ctr"/>
           <a:lstStyle/>
           <a:p>
-            <a:pPr indent="0" marL="0">
-              <a:buNone/>
-            </a:pPr>
-            <a:r>
-              <a:rPr lang="en-US" sz="950" b="1" spc="150" kern="0" dirty="0">
+            <a:pPr marL="0" indent="0">
+              <a:buNone/>
+            </a:pPr>
+            <a:r>
+              <a:rPr lang="en-US" sz="950" b="1" kern="0" spc="150" dirty="0">
                 <a:solidFill>
                   <a:srgbClr val="106B41"/>
                 </a:solidFill>
@@ -13116,7 +12803,7 @@
           <a:bodyPr wrap="square" lIns="0" tIns="0" rIns="0" bIns="0" rtlCol="0" anchor="ctr"/>
           <a:lstStyle/>
           <a:p>
-            <a:pPr indent="0" marL="0">
+            <a:pPr marL="0" indent="0">
               <a:lnSpc>
                 <a:spcPct val="112000"/>
               </a:lnSpc>
@@ -13185,11 +12872,11 @@
           <a:bodyPr wrap="square" lIns="0" tIns="0" rIns="0" bIns="0" rtlCol="0" anchor="ctr"/>
           <a:lstStyle/>
           <a:p>
-            <a:pPr indent="0" marL="0">
-              <a:buNone/>
-            </a:pPr>
-            <a:r>
-              <a:rPr lang="en-US" sz="950" b="1" spc="150" kern="0" dirty="0">
+            <a:pPr marL="0" indent="0">
+              <a:buNone/>
+            </a:pPr>
+            <a:r>
+              <a:rPr lang="en-US" sz="950" b="1" kern="0" spc="150" dirty="0">
                 <a:solidFill>
                   <a:srgbClr val="B3261E"/>
                 </a:solidFill>
@@ -13224,7 +12911,7 @@
           <a:bodyPr wrap="square" lIns="0" tIns="0" rIns="0" bIns="0" rtlCol="0" anchor="ctr"/>
           <a:lstStyle/>
           <a:p>
-            <a:pPr indent="0" marL="0">
+            <a:pPr marL="0" indent="0">
               <a:lnSpc>
                 <a:spcPct val="112000"/>
               </a:lnSpc>
@@ -13266,7 +12953,7 @@
           <a:bodyPr wrap="square" lIns="0" tIns="0" rIns="0" bIns="0" rtlCol="0" anchor="ctr"/>
           <a:lstStyle/>
           <a:p>
-            <a:pPr indent="0" marL="0">
+            <a:pPr marL="0" indent="0">
               <a:buNone/>
             </a:pPr>
             <a:r>
@@ -13304,7 +12991,7 @@
           </a:prstGeom>
           <a:extLst>
             <a:ext uri="{C572A759-6A51-4108-AA02-DFA0A04FC94B}">
-              <ma14:wrappingTextBoxFlag xmlns:ma14="http://schemas.microsoft.com/office/mac/drawingml/2011/main" val="0"/>
+              <ma14:wrappingTextBoxFlag xmlns="" xmlns:ma14="http://schemas.microsoft.com/office/mac/drawingml/2011/main" val="0"/>
             </a:ext>
           </a:extLst>
         </p:spPr>
@@ -13325,7 +13012,7 @@
           <a:p>
             <a:pPr algn="l"/>
             <a:fld id="{F7021451-1387-4CA6-816F-3879F97B5CBC}" type="slidenum">
-              <a:rPr b="0" lang="en-US"/>
+              <a:rPr lang="en-US" b="0"/>
               <a:t>18</a:t>
             </a:fld>
             <a:endParaRPr lang="en-US"/>
@@ -13400,7 +13087,7 @@
           <a:bodyPr wrap="square" lIns="0" tIns="0" rIns="0" bIns="0" rtlCol="0" anchor="ctr"/>
           <a:lstStyle/>
           <a:p>
-            <a:pPr algn="l" indent="0" marL="0">
+            <a:pPr marL="0" indent="0" algn="l">
               <a:buNone/>
             </a:pPr>
             <a:r>
@@ -13439,7 +13126,7 @@
           <a:bodyPr wrap="square" lIns="0" tIns="0" rIns="0" bIns="0" rtlCol="0" anchor="ctr"/>
           <a:lstStyle/>
           <a:p>
-            <a:pPr indent="0" marL="0">
+            <a:pPr marL="0" indent="0">
               <a:buNone/>
             </a:pPr>
             <a:r>
@@ -13505,11 +13192,11 @@
           <a:bodyPr wrap="square" lIns="0" tIns="0" rIns="0" bIns="0" rtlCol="0" anchor="ctr"/>
           <a:lstStyle/>
           <a:p>
-            <a:pPr algn="ctr" indent="0" marL="0">
-              <a:buNone/>
-            </a:pPr>
-            <a:r>
-              <a:rPr lang="en-US" sz="900" b="1" spc="100" kern="0" dirty="0">
+            <a:pPr marL="0" indent="0" algn="ctr">
+              <a:buNone/>
+            </a:pPr>
+            <a:r>
+              <a:rPr lang="en-US" sz="900" b="1" kern="0" spc="100" dirty="0">
                 <a:solidFill>
                   <a:srgbClr val="5A05F4"/>
                 </a:solidFill>
@@ -13525,14 +13212,14 @@
       </p:sp>
       <p:pic>
         <p:nvPicPr>
-          <p:cNvPr id="7" name="Image 0" descr="preencoded.png">    </p:cNvPr>
+          <p:cNvPr id="7" name="Image 0" descr="preencoded.png"/>
           <p:cNvPicPr>
             <a:picLocks noChangeAspect="1"/>
           </p:cNvPicPr>
           <p:nvPr/>
         </p:nvPicPr>
         <p:blipFill>
-          <a:blip r:embed="rId1"/>
+          <a:blip r:embed="rId3"/>
           <a:stretch>
             <a:fillRect/>
           </a:stretch>
@@ -13595,7 +13282,7 @@
           <a:bodyPr wrap="square" lIns="0" tIns="0" rIns="0" bIns="0" rtlCol="0" anchor="t"/>
           <a:lstStyle/>
           <a:p>
-            <a:pPr indent="0" marL="0">
+            <a:pPr marL="0" indent="0">
               <a:lnSpc>
                 <a:spcPct val="130000"/>
               </a:lnSpc>
@@ -13612,12 +13299,6 @@
               </a:rPr>
               <a:t>request_id · model · </a:t>
             </a:r>
-            <a:pPr indent="0" marL="0">
-              <a:lnSpc>
-                <a:spcPct val="130000"/>
-              </a:lnSpc>
-              <a:buNone/>
-            </a:pPr>
             <a:r>
               <a:rPr lang="en-US" sz="1300" dirty="0">
                 <a:solidFill>
@@ -13629,12 +13310,6 @@
               </a:rPr>
               <a:t>prompt_version</a:t>
             </a:r>
-            <a:pPr indent="0" marL="0">
-              <a:lnSpc>
-                <a:spcPct val="130000"/>
-              </a:lnSpc>
-              <a:buNone/>
-            </a:pPr>
             <a:r>
               <a:rPr lang="en-US" sz="1300" dirty="0">
                 <a:solidFill>
@@ -13646,12 +13321,6 @@
               </a:rPr>
               <a:t> · latency_ms · prompt_tokens · completion_tokens · </a:t>
             </a:r>
-            <a:pPr indent="0" marL="0">
-              <a:lnSpc>
-                <a:spcPct val="130000"/>
-              </a:lnSpc>
-              <a:buNone/>
-            </a:pPr>
             <a:r>
               <a:rPr lang="en-US" sz="1300" dirty="0">
                 <a:solidFill>
@@ -13663,12 +13332,6 @@
               </a:rPr>
               <a:t>cost_usd</a:t>
             </a:r>
-            <a:pPr indent="0" marL="0">
-              <a:lnSpc>
-                <a:spcPct val="130000"/>
-              </a:lnSpc>
-              <a:buNone/>
-            </a:pPr>
             <a:r>
               <a:rPr lang="en-US" sz="1300" dirty="0">
                 <a:solidFill>
@@ -13705,7 +13368,7 @@
           <a:bodyPr wrap="square" lIns="0" tIns="0" rIns="0" bIns="0" rtlCol="0" anchor="ctr"/>
           <a:lstStyle/>
           <a:p>
-            <a:pPr indent="0" marL="0">
+            <a:pPr marL="0" indent="0">
               <a:buNone/>
             </a:pPr>
             <a:r>
@@ -13744,7 +13407,7 @@
           <a:bodyPr wrap="square" lIns="0" tIns="0" rIns="0" bIns="0" rtlCol="0" anchor="ctr"/>
           <a:lstStyle/>
           <a:p>
-            <a:pPr indent="0" marL="0">
+            <a:pPr marL="0" indent="0">
               <a:buNone/>
             </a:pPr>
             <a:r>
@@ -13826,7 +13489,7 @@
           <a:bodyPr wrap="square" lIns="0" tIns="0" rIns="0" bIns="0" rtlCol="0" anchor="ctr"/>
           <a:lstStyle/>
           <a:p>
-            <a:pPr indent="0" marL="0">
+            <a:pPr marL="0" indent="0">
               <a:buNone/>
             </a:pPr>
             <a:r>
@@ -13892,7 +13555,7 @@
           <a:bodyPr wrap="square" lIns="0" tIns="0" rIns="0" bIns="0" rtlCol="0" anchor="ctr"/>
           <a:lstStyle/>
           <a:p>
-            <a:pPr algn="ctr" indent="0" marL="0">
+            <a:pPr marL="0" indent="0" algn="ctr">
               <a:buNone/>
             </a:pPr>
             <a:r>
@@ -13931,7 +13594,7 @@
           <a:bodyPr wrap="square" lIns="0" tIns="0" rIns="0" bIns="0" rtlCol="0" anchor="ctr"/>
           <a:lstStyle/>
           <a:p>
-            <a:pPr indent="0" marL="0">
+            <a:pPr marL="0" indent="0">
               <a:buNone/>
             </a:pPr>
             <a:r>
@@ -14013,7 +13676,7 @@
           <a:bodyPr wrap="square" lIns="0" tIns="0" rIns="0" bIns="0" rtlCol="0" anchor="ctr"/>
           <a:lstStyle/>
           <a:p>
-            <a:pPr indent="0" marL="0">
+            <a:pPr marL="0" indent="0">
               <a:buNone/>
             </a:pPr>
             <a:r>
@@ -14079,7 +13742,7 @@
           <a:bodyPr wrap="square" lIns="0" tIns="0" rIns="0" bIns="0" rtlCol="0" anchor="ctr"/>
           <a:lstStyle/>
           <a:p>
-            <a:pPr algn="ctr" indent="0" marL="0">
+            <a:pPr marL="0" indent="0" algn="ctr">
               <a:buNone/>
             </a:pPr>
             <a:r>
@@ -14118,7 +13781,7 @@
           <a:bodyPr wrap="square" lIns="0" tIns="0" rIns="0" bIns="0" rtlCol="0" anchor="ctr"/>
           <a:lstStyle/>
           <a:p>
-            <a:pPr indent="0" marL="0">
+            <a:pPr marL="0" indent="0">
               <a:buNone/>
             </a:pPr>
             <a:r>
@@ -14200,7 +13863,7 @@
           <a:bodyPr wrap="square" lIns="0" tIns="0" rIns="0" bIns="0" rtlCol="0" anchor="ctr"/>
           <a:lstStyle/>
           <a:p>
-            <a:pPr indent="0" marL="0">
+            <a:pPr marL="0" indent="0">
               <a:buNone/>
             </a:pPr>
             <a:r>
@@ -14266,7 +13929,7 @@
           <a:bodyPr wrap="square" lIns="0" tIns="0" rIns="0" bIns="0" rtlCol="0" anchor="ctr"/>
           <a:lstStyle/>
           <a:p>
-            <a:pPr algn="ctr" indent="0" marL="0">
+            <a:pPr marL="0" indent="0" algn="ctr">
               <a:buNone/>
             </a:pPr>
             <a:r>
@@ -14305,7 +13968,7 @@
           <a:bodyPr wrap="square" lIns="0" tIns="0" rIns="0" bIns="0" rtlCol="0" anchor="ctr"/>
           <a:lstStyle/>
           <a:p>
-            <a:pPr indent="0" marL="0">
+            <a:pPr marL="0" indent="0">
               <a:buNone/>
             </a:pPr>
             <a:r>
@@ -14387,7 +14050,7 @@
           <a:bodyPr wrap="square" lIns="0" tIns="0" rIns="0" bIns="0" rtlCol="0" anchor="ctr"/>
           <a:lstStyle/>
           <a:p>
-            <a:pPr indent="0" marL="0">
+            <a:pPr marL="0" indent="0">
               <a:buNone/>
             </a:pPr>
             <a:r>
@@ -14453,7 +14116,7 @@
           <a:bodyPr wrap="square" lIns="0" tIns="0" rIns="0" bIns="0" rtlCol="0" anchor="ctr"/>
           <a:lstStyle/>
           <a:p>
-            <a:pPr algn="ctr" indent="0" marL="0">
+            <a:pPr marL="0" indent="0" algn="ctr">
               <a:buNone/>
             </a:pPr>
             <a:r>
@@ -14492,7 +14155,7 @@
           <a:bodyPr wrap="square" lIns="0" tIns="0" rIns="0" bIns="0" rtlCol="0" anchor="ctr"/>
           <a:lstStyle/>
           <a:p>
-            <a:pPr indent="0" marL="0">
+            <a:pPr marL="0" indent="0">
               <a:buNone/>
             </a:pPr>
             <a:r>
@@ -14574,7 +14237,7 @@
           <a:bodyPr wrap="square" lIns="0" tIns="0" rIns="0" bIns="0" rtlCol="0" anchor="ctr"/>
           <a:lstStyle/>
           <a:p>
-            <a:pPr indent="0" marL="0">
+            <a:pPr marL="0" indent="0">
               <a:buNone/>
             </a:pPr>
             <a:r>
@@ -14640,7 +14303,7 @@
           <a:bodyPr wrap="square" lIns="0" tIns="0" rIns="0" bIns="0" rtlCol="0" anchor="ctr"/>
           <a:lstStyle/>
           <a:p>
-            <a:pPr algn="ctr" indent="0" marL="0">
+            <a:pPr marL="0" indent="0" algn="ctr">
               <a:buNone/>
             </a:pPr>
             <a:r>
@@ -14706,7 +14369,7 @@
           <a:bodyPr wrap="square" lIns="0" tIns="0" rIns="0" bIns="0" rtlCol="0" anchor="ctr"/>
           <a:lstStyle/>
           <a:p>
-            <a:pPr indent="0" marL="0">
+            <a:pPr marL="0" indent="0">
               <a:lnSpc>
                 <a:spcPct val="112000"/>
               </a:lnSpc>
@@ -14729,7 +14392,7 @@
       </p:sp>
       <p:sp>
         <p:nvSpPr>
-          <p:cNvPr id="25" name="Slide Number Placeholder 0"/>
+          <p:cNvPr id="43" name="Slide Number Placeholder 0"/>
           <p:cNvSpPr>
             <a:spLocks noGrp="1"/>
           </p:cNvSpPr>
@@ -14747,7 +14410,7 @@
           </a:prstGeom>
           <a:extLst>
             <a:ext uri="{C572A759-6A51-4108-AA02-DFA0A04FC94B}">
-              <ma14:wrappingTextBoxFlag xmlns:ma14="http://schemas.microsoft.com/office/mac/drawingml/2011/main" val="0"/>
+              <ma14:wrappingTextBoxFlag xmlns="" xmlns:ma14="http://schemas.microsoft.com/office/mac/drawingml/2011/main" val="0"/>
             </a:ext>
           </a:extLst>
         </p:spPr>
@@ -14768,7 +14431,7 @@
           <a:p>
             <a:pPr algn="l"/>
             <a:fld id="{F7021451-1387-4CA6-816F-3879F97B5CBC}" type="slidenum">
-              <a:rPr b="0" lang="en-US"/>
+              <a:rPr lang="en-US" b="0"/>
               <a:t>19</a:t>
             </a:fld>
             <a:endParaRPr lang="en-US"/>
@@ -14843,7 +14506,7 @@
           <a:bodyPr wrap="square" lIns="0" tIns="0" rIns="0" bIns="0" rtlCol="0" anchor="ctr"/>
           <a:lstStyle/>
           <a:p>
-            <a:pPr indent="0" marL="0">
+            <a:pPr marL="0" indent="0">
               <a:lnSpc>
                 <a:spcPct val="100000"/>
               </a:lnSpc>
@@ -14863,7 +14526,7 @@
             <a:endParaRPr lang="en-US" sz="3400" dirty="0"/>
           </a:p>
           <a:p>
-            <a:pPr indent="0" marL="0">
+            <a:pPr marL="0" indent="0">
               <a:lnSpc>
                 <a:spcPct val="100000"/>
               </a:lnSpc>
@@ -14905,7 +14568,7 @@
           <a:bodyPr wrap="square" lIns="0" tIns="0" rIns="0" bIns="0" rtlCol="0" anchor="t"/>
           <a:lstStyle/>
           <a:p>
-            <a:pPr indent="0" marL="0">
+            <a:pPr marL="0" indent="0">
               <a:lnSpc>
                 <a:spcPct val="115000"/>
               </a:lnSpc>
@@ -14990,7 +14653,7 @@
           <a:bodyPr wrap="square" lIns="0" tIns="0" rIns="0" bIns="0" rtlCol="0" anchor="t"/>
           <a:lstStyle/>
           <a:p>
-            <a:pPr indent="0" marL="0">
+            <a:pPr marL="0" indent="0">
               <a:lnSpc>
                 <a:spcPct val="112000"/>
               </a:lnSpc>
@@ -15052,7 +14715,7 @@
           <a:bodyPr wrap="square" lIns="0" tIns="0" rIns="0" bIns="0" rtlCol="0" anchor="t"/>
           <a:lstStyle/>
           <a:p>
-            <a:pPr indent="0" marL="0">
+            <a:pPr marL="0" indent="0">
               <a:lnSpc>
                 <a:spcPct val="112000"/>
               </a:lnSpc>
@@ -15114,7 +14777,7 @@
           <a:bodyPr wrap="square" lIns="0" tIns="0" rIns="0" bIns="0" rtlCol="0" anchor="t"/>
           <a:lstStyle/>
           <a:p>
-            <a:pPr indent="0" marL="0">
+            <a:pPr marL="0" indent="0">
               <a:lnSpc>
                 <a:spcPct val="112000"/>
               </a:lnSpc>
@@ -15176,7 +14839,7 @@
           <a:bodyPr wrap="square" lIns="0" tIns="0" rIns="0" bIns="0" rtlCol="0" anchor="t"/>
           <a:lstStyle/>
           <a:p>
-            <a:pPr indent="0" marL="0">
+            <a:pPr marL="0" indent="0">
               <a:lnSpc>
                 <a:spcPct val="112000"/>
               </a:lnSpc>
@@ -15238,7 +14901,7 @@
           <a:bodyPr wrap="square" lIns="0" tIns="0" rIns="0" bIns="0" rtlCol="0" anchor="t"/>
           <a:lstStyle/>
           <a:p>
-            <a:pPr indent="0" marL="0">
+            <a:pPr marL="0" indent="0">
               <a:lnSpc>
                 <a:spcPct val="112000"/>
               </a:lnSpc>
@@ -15261,14 +14924,14 @@
       </p:sp>
       <p:pic>
         <p:nvPicPr>
-          <p:cNvPr id="16" name="Image 0" descr="preencoded.png">    </p:cNvPr>
+          <p:cNvPr id="16" name="Image 0" descr="preencoded.png"/>
           <p:cNvPicPr>
             <a:picLocks noChangeAspect="1"/>
           </p:cNvPicPr>
           <p:nvPr/>
         </p:nvPicPr>
         <p:blipFill>
-          <a:blip r:embed="rId1"/>
+          <a:blip r:embed="rId3"/>
           <a:stretch>
             <a:fillRect/>
           </a:stretch>
@@ -15351,7 +15014,7 @@
           <a:bodyPr wrap="square" lIns="0" tIns="0" rIns="0" bIns="0" rtlCol="0" anchor="ctr"/>
           <a:lstStyle/>
           <a:p>
-            <a:pPr algn="l" indent="0" marL="0">
+            <a:pPr marL="0" indent="0" algn="l">
               <a:buNone/>
             </a:pPr>
             <a:r>
@@ -15390,7 +15053,7 @@
           <a:bodyPr wrap="square" lIns="0" tIns="0" rIns="0" bIns="0" rtlCol="0" anchor="ctr"/>
           <a:lstStyle/>
           <a:p>
-            <a:pPr indent="0" marL="0">
+            <a:pPr marL="0" indent="0">
               <a:buNone/>
             </a:pPr>
             <a:r>
@@ -15456,11 +15119,11 @@
           <a:bodyPr wrap="square" lIns="0" tIns="0" rIns="0" bIns="0" rtlCol="0" anchor="ctr"/>
           <a:lstStyle/>
           <a:p>
-            <a:pPr algn="ctr" indent="0" marL="0">
-              <a:buNone/>
-            </a:pPr>
-            <a:r>
-              <a:rPr lang="en-US" sz="900" b="1" spc="100" kern="0" dirty="0">
+            <a:pPr marL="0" indent="0" algn="ctr">
+              <a:buNone/>
+            </a:pPr>
+            <a:r>
+              <a:rPr lang="en-US" sz="900" b="1" kern="0" spc="100" dirty="0">
                 <a:solidFill>
                   <a:srgbClr val="5A05F4"/>
                 </a:solidFill>
@@ -15476,14 +15139,14 @@
       </p:sp>
       <p:pic>
         <p:nvPicPr>
-          <p:cNvPr id="7" name="Image 0" descr="preencoded.png">    </p:cNvPr>
+          <p:cNvPr id="7" name="Image 0" descr="preencoded.png"/>
           <p:cNvPicPr>
             <a:picLocks noChangeAspect="1"/>
           </p:cNvPicPr>
           <p:nvPr/>
         </p:nvPicPr>
         <p:blipFill>
-          <a:blip r:embed="rId1"/>
+          <a:blip r:embed="rId3"/>
           <a:stretch>
             <a:fillRect/>
           </a:stretch>
@@ -15519,11 +15182,11 @@
           <a:bodyPr wrap="square" lIns="0" tIns="0" rIns="0" bIns="0" rtlCol="0" anchor="ctr"/>
           <a:lstStyle/>
           <a:p>
-            <a:pPr indent="0" marL="0">
-              <a:buNone/>
-            </a:pPr>
-            <a:r>
-              <a:rPr lang="en-US" sz="1000" b="1" spc="150" kern="0" dirty="0">
+            <a:pPr marL="0" indent="0">
+              <a:buNone/>
+            </a:pPr>
+            <a:r>
+              <a:rPr lang="en-US" sz="1000" b="1" kern="0" spc="150" dirty="0">
                 <a:solidFill>
                   <a:srgbClr val="6B6B6B"/>
                 </a:solidFill>
@@ -15580,7 +15243,7 @@
           <a:bodyPr wrap="square" lIns="0" tIns="0" rIns="0" bIns="0" rtlCol="0" anchor="ctr"/>
           <a:lstStyle/>
           <a:p>
-            <a:pPr algn="ctr" indent="0" marL="0">
+            <a:pPr marL="0" indent="0" algn="ctr">
               <a:buNone/>
             </a:pPr>
             <a:r>
@@ -15619,7 +15282,7 @@
           <a:bodyPr wrap="square" lIns="0" tIns="0" rIns="0" bIns="0" rtlCol="0" anchor="ctr"/>
           <a:lstStyle/>
           <a:p>
-            <a:pPr indent="0" marL="0">
+            <a:pPr marL="0" indent="0">
               <a:buNone/>
             </a:pPr>
             <a:r>
@@ -15658,7 +15321,7 @@
           <a:bodyPr wrap="square" lIns="0" tIns="0" rIns="0" bIns="0" rtlCol="0" anchor="ctr"/>
           <a:lstStyle/>
           <a:p>
-            <a:pPr indent="0" marL="0">
+            <a:pPr marL="0" indent="0">
               <a:buNone/>
             </a:pPr>
             <a:r>
@@ -15719,7 +15382,7 @@
           <a:bodyPr wrap="square" lIns="0" tIns="0" rIns="0" bIns="0" rtlCol="0" anchor="ctr"/>
           <a:lstStyle/>
           <a:p>
-            <a:pPr algn="ctr" indent="0" marL="0">
+            <a:pPr marL="0" indent="0" algn="ctr">
               <a:buNone/>
             </a:pPr>
             <a:r>
@@ -15758,7 +15421,7 @@
           <a:bodyPr wrap="square" lIns="0" tIns="0" rIns="0" bIns="0" rtlCol="0" anchor="ctr"/>
           <a:lstStyle/>
           <a:p>
-            <a:pPr indent="0" marL="0">
+            <a:pPr marL="0" indent="0">
               <a:buNone/>
             </a:pPr>
             <a:r>
@@ -15797,7 +15460,7 @@
           <a:bodyPr wrap="square" lIns="0" tIns="0" rIns="0" bIns="0" rtlCol="0" anchor="ctr"/>
           <a:lstStyle/>
           <a:p>
-            <a:pPr indent="0" marL="0">
+            <a:pPr marL="0" indent="0">
               <a:buNone/>
             </a:pPr>
             <a:r>
@@ -15858,7 +15521,7 @@
           <a:bodyPr wrap="square" lIns="0" tIns="0" rIns="0" bIns="0" rtlCol="0" anchor="ctr"/>
           <a:lstStyle/>
           <a:p>
-            <a:pPr algn="ctr" indent="0" marL="0">
+            <a:pPr marL="0" indent="0" algn="ctr">
               <a:buNone/>
             </a:pPr>
             <a:r>
@@ -15897,7 +15560,7 @@
           <a:bodyPr wrap="square" lIns="0" tIns="0" rIns="0" bIns="0" rtlCol="0" anchor="ctr"/>
           <a:lstStyle/>
           <a:p>
-            <a:pPr indent="0" marL="0">
+            <a:pPr marL="0" indent="0">
               <a:buNone/>
             </a:pPr>
             <a:r>
@@ -15936,7 +15599,7 @@
           <a:bodyPr wrap="square" lIns="0" tIns="0" rIns="0" bIns="0" rtlCol="0" anchor="ctr"/>
           <a:lstStyle/>
           <a:p>
-            <a:pPr indent="0" marL="0">
+            <a:pPr marL="0" indent="0">
               <a:buNone/>
             </a:pPr>
             <a:r>
@@ -15997,7 +15660,7 @@
           <a:bodyPr wrap="square" lIns="0" tIns="0" rIns="0" bIns="0" rtlCol="0" anchor="ctr"/>
           <a:lstStyle/>
           <a:p>
-            <a:pPr algn="ctr" indent="0" marL="0">
+            <a:pPr marL="0" indent="0" algn="ctr">
               <a:buNone/>
             </a:pPr>
             <a:r>
@@ -16036,7 +15699,7 @@
           <a:bodyPr wrap="square" lIns="0" tIns="0" rIns="0" bIns="0" rtlCol="0" anchor="ctr"/>
           <a:lstStyle/>
           <a:p>
-            <a:pPr indent="0" marL="0">
+            <a:pPr marL="0" indent="0">
               <a:buNone/>
             </a:pPr>
             <a:r>
@@ -16075,7 +15738,7 @@
           <a:bodyPr wrap="square" lIns="0" tIns="0" rIns="0" bIns="0" rtlCol="0" anchor="ctr"/>
           <a:lstStyle/>
           <a:p>
-            <a:pPr indent="0" marL="0">
+            <a:pPr marL="0" indent="0">
               <a:buNone/>
             </a:pPr>
             <a:r>
@@ -16114,7 +15777,7 @@
           <a:bodyPr wrap="square" lIns="0" tIns="0" rIns="0" bIns="0" rtlCol="0" anchor="t"/>
           <a:lstStyle/>
           <a:p>
-            <a:pPr indent="0" marL="0">
+            <a:pPr marL="0" indent="0">
               <a:buNone/>
             </a:pPr>
             <a:r>
@@ -16153,11 +15816,11 @@
           <a:bodyPr wrap="square" lIns="0" tIns="0" rIns="0" bIns="0" rtlCol="0" anchor="ctr"/>
           <a:lstStyle/>
           <a:p>
-            <a:pPr indent="0" marL="0">
-              <a:buNone/>
-            </a:pPr>
-            <a:r>
-              <a:rPr lang="en-US" sz="1000" b="1" spc="150" kern="0" dirty="0">
+            <a:pPr marL="0" indent="0">
+              <a:buNone/>
+            </a:pPr>
+            <a:r>
+              <a:rPr lang="en-US" sz="1000" b="1" kern="0" spc="150" dirty="0">
                 <a:solidFill>
                   <a:srgbClr val="6B6B6B"/>
                 </a:solidFill>
@@ -16214,7 +15877,7 @@
           <a:bodyPr wrap="square" lIns="0" tIns="0" rIns="0" bIns="0" rtlCol="0" anchor="ctr"/>
           <a:lstStyle/>
           <a:p>
-            <a:pPr algn="ctr" indent="0" marL="0">
+            <a:pPr marL="0" indent="0" algn="ctr">
               <a:buNone/>
             </a:pPr>
             <a:r>
@@ -16318,7 +15981,7 @@
           <a:bodyPr wrap="square" lIns="0" tIns="0" rIns="0" bIns="0" rtlCol="0" anchor="ctr"/>
           <a:lstStyle/>
           <a:p>
-            <a:pPr algn="ctr" indent="0" marL="0">
+            <a:pPr marL="0" indent="0" algn="ctr">
               <a:buNone/>
             </a:pPr>
             <a:r>
@@ -16379,7 +16042,7 @@
           <a:bodyPr wrap="square" lIns="0" tIns="0" rIns="0" bIns="0" rtlCol="0" anchor="ctr"/>
           <a:lstStyle/>
           <a:p>
-            <a:pPr algn="ctr" indent="0" marL="0">
+            <a:pPr marL="0" indent="0" algn="ctr">
               <a:buNone/>
             </a:pPr>
             <a:r>
@@ -16483,7 +16146,7 @@
           <a:bodyPr wrap="square" lIns="0" tIns="0" rIns="0" bIns="0" rtlCol="0" anchor="ctr"/>
           <a:lstStyle/>
           <a:p>
-            <a:pPr algn="ctr" indent="0" marL="0">
+            <a:pPr marL="0" indent="0" algn="ctr">
               <a:buNone/>
             </a:pPr>
             <a:r>
@@ -16544,7 +16207,7 @@
           <a:bodyPr wrap="square" lIns="0" tIns="0" rIns="0" bIns="0" rtlCol="0" anchor="ctr"/>
           <a:lstStyle/>
           <a:p>
-            <a:pPr indent="0" marL="0">
+            <a:pPr marL="0" indent="0">
               <a:lnSpc>
                 <a:spcPct val="112000"/>
               </a:lnSpc>
@@ -16613,11 +16276,11 @@
           <a:bodyPr wrap="square" lIns="0" tIns="0" rIns="0" bIns="0" rtlCol="0" anchor="ctr"/>
           <a:lstStyle/>
           <a:p>
-            <a:pPr indent="0" marL="0">
-              <a:buNone/>
-            </a:pPr>
-            <a:r>
-              <a:rPr lang="en-US" sz="950" b="1" spc="150" kern="0" dirty="0">
+            <a:pPr marL="0" indent="0">
+              <a:buNone/>
+            </a:pPr>
+            <a:r>
+              <a:rPr lang="en-US" sz="950" b="1" kern="0" spc="150" dirty="0">
                 <a:solidFill>
                   <a:srgbClr val="434343"/>
                 </a:solidFill>
@@ -16652,7 +16315,7 @@
           <a:bodyPr wrap="square" lIns="0" tIns="0" rIns="0" bIns="0" rtlCol="0" anchor="ctr"/>
           <a:lstStyle/>
           <a:p>
-            <a:pPr indent="0" marL="0">
+            <a:pPr marL="0" indent="0">
               <a:lnSpc>
                 <a:spcPct val="112000"/>
               </a:lnSpc>
@@ -16675,7 +16338,7 @@
       </p:sp>
       <p:sp>
         <p:nvSpPr>
-          <p:cNvPr id="25" name="Slide Number Placeholder 0"/>
+          <p:cNvPr id="44" name="Slide Number Placeholder 0"/>
           <p:cNvSpPr>
             <a:spLocks noGrp="1"/>
           </p:cNvSpPr>
@@ -16693,7 +16356,7 @@
           </a:prstGeom>
           <a:extLst>
             <a:ext uri="{C572A759-6A51-4108-AA02-DFA0A04FC94B}">
-              <ma14:wrappingTextBoxFlag xmlns:ma14="http://schemas.microsoft.com/office/mac/drawingml/2011/main" val="0"/>
+              <ma14:wrappingTextBoxFlag xmlns="" xmlns:ma14="http://schemas.microsoft.com/office/mac/drawingml/2011/main" val="0"/>
             </a:ext>
           </a:extLst>
         </p:spPr>
@@ -16714,7 +16377,7 @@
           <a:p>
             <a:pPr algn="l"/>
             <a:fld id="{F7021451-1387-4CA6-816F-3879F97B5CBC}" type="slidenum">
-              <a:rPr b="0" lang="en-US"/>
+              <a:rPr lang="en-US" b="0"/>
               <a:t>20</a:t>
             </a:fld>
             <a:endParaRPr lang="en-US"/>
@@ -16789,7 +16452,7 @@
           <a:bodyPr wrap="square" lIns="0" tIns="0" rIns="0" bIns="0" rtlCol="0" anchor="ctr"/>
           <a:lstStyle/>
           <a:p>
-            <a:pPr algn="l" indent="0" marL="0">
+            <a:pPr marL="0" indent="0" algn="l">
               <a:buNone/>
             </a:pPr>
             <a:r>
@@ -16828,7 +16491,7 @@
           <a:bodyPr wrap="square" lIns="0" tIns="0" rIns="0" bIns="0" rtlCol="0" anchor="ctr"/>
           <a:lstStyle/>
           <a:p>
-            <a:pPr indent="0" marL="0">
+            <a:pPr marL="0" indent="0">
               <a:buNone/>
             </a:pPr>
             <a:r>
@@ -16894,11 +16557,11 @@
           <a:bodyPr wrap="square" lIns="0" tIns="0" rIns="0" bIns="0" rtlCol="0" anchor="ctr"/>
           <a:lstStyle/>
           <a:p>
-            <a:pPr algn="ctr" indent="0" marL="0">
-              <a:buNone/>
-            </a:pPr>
-            <a:r>
-              <a:rPr lang="en-US" sz="900" b="1" spc="100" kern="0" dirty="0">
+            <a:pPr marL="0" indent="0" algn="ctr">
+              <a:buNone/>
+            </a:pPr>
+            <a:r>
+              <a:rPr lang="en-US" sz="900" b="1" kern="0" spc="100" dirty="0">
                 <a:solidFill>
                   <a:srgbClr val="5A05F4"/>
                 </a:solidFill>
@@ -16960,11 +16623,11 @@
           <a:bodyPr wrap="square" lIns="0" tIns="0" rIns="0" bIns="0" rtlCol="0" anchor="ctr"/>
           <a:lstStyle/>
           <a:p>
-            <a:pPr algn="ctr" indent="0" marL="0">
-              <a:buNone/>
-            </a:pPr>
-            <a:r>
-              <a:rPr lang="en-US" sz="900" b="1" spc="100" kern="0" dirty="0">
+            <a:pPr marL="0" indent="0" algn="ctr">
+              <a:buNone/>
+            </a:pPr>
+            <a:r>
+              <a:rPr lang="en-US" sz="900" b="1" kern="0" spc="100" dirty="0">
                 <a:solidFill>
                   <a:srgbClr val="434343"/>
                 </a:solidFill>
@@ -16980,14 +16643,14 @@
       </p:sp>
       <p:pic>
         <p:nvPicPr>
-          <p:cNvPr id="9" name="Image 0" descr="preencoded.png">    </p:cNvPr>
+          <p:cNvPr id="9" name="Image 0" descr="preencoded.png"/>
           <p:cNvPicPr>
             <a:picLocks noChangeAspect="1"/>
           </p:cNvPicPr>
           <p:nvPr/>
         </p:nvPicPr>
         <p:blipFill>
-          <a:blip r:embed="rId1"/>
+          <a:blip r:embed="rId3"/>
           <a:stretch>
             <a:fillRect/>
           </a:stretch>
@@ -17050,7 +16713,7 @@
           <a:bodyPr wrap="square" lIns="0" tIns="0" rIns="0" bIns="0" rtlCol="0" anchor="t"/>
           <a:lstStyle/>
           <a:p>
-            <a:pPr indent="0" marL="0">
+            <a:pPr marL="0" indent="0">
               <a:lnSpc>
                 <a:spcPct val="130000"/>
               </a:lnSpc>
@@ -17067,7 +16730,21 @@
               </a:rPr>
               <a:t>cp gateway/.env.example gateway/.env</a:t>
             </a:r>
-            <a:pPr indent="0" marL="0">
+            <a:r>
+              <a:rPr lang="en-US" sz="1250" dirty="0">
+                <a:solidFill>
+                  <a:srgbClr val="9A94AA"/>
+                </a:solidFill>
+                <a:latin typeface="Courier New" pitchFamily="34" charset="0"/>
+                <a:ea typeface="Courier New" pitchFamily="34" charset="-122"/>
+                <a:cs typeface="Courier New" pitchFamily="34" charset="-120"/>
+              </a:rPr>
+              <a:t>   # вписати ключ</a:t>
+            </a:r>
+            <a:endParaRPr lang="en-US" sz="1250" dirty="0"/>
+          </a:p>
+          <a:p>
+            <a:pPr marL="0" indent="0">
               <a:lnSpc>
                 <a:spcPct val="130000"/>
               </a:lnSpc>
@@ -17076,18 +16753,29 @@
             <a:r>
               <a:rPr lang="en-US" sz="1250" dirty="0">
                 <a:solidFill>
-                  <a:srgbClr val="9A94AA"/>
+                  <a:srgbClr val="6BA0F8"/>
                 </a:solidFill>
                 <a:latin typeface="Courier New" pitchFamily="34" charset="0"/>
                 <a:ea typeface="Courier New" pitchFamily="34" charset="-122"/>
                 <a:cs typeface="Courier New" pitchFamily="34" charset="-120"/>
               </a:rPr>
-              <a:t>   # вписати ключ</a:t>
+              <a:t>MODEL=назва-моделі docker compose up</a:t>
+            </a:r>
+            <a:r>
+              <a:rPr lang="en-US" sz="1250" dirty="0">
+                <a:solidFill>
+                  <a:srgbClr val="9A94AA"/>
+                </a:solidFill>
+                <a:latin typeface="Courier New" pitchFamily="34" charset="0"/>
+                <a:ea typeface="Courier New" pitchFamily="34" charset="-122"/>
+                <a:cs typeface="Courier New" pitchFamily="34" charset="-120"/>
+              </a:rPr>
+              <a:t>   # реальний провайдер</a:t>
             </a:r>
             <a:endParaRPr lang="en-US" sz="1250" dirty="0"/>
           </a:p>
           <a:p>
-            <a:pPr indent="0" marL="0">
+            <a:pPr marL="0" indent="0">
               <a:lnSpc>
                 <a:spcPct val="130000"/>
               </a:lnSpc>
@@ -17102,51 +16790,8 @@
                 <a:ea typeface="Courier New" pitchFamily="34" charset="-122"/>
                 <a:cs typeface="Courier New" pitchFamily="34" charset="-120"/>
               </a:rPr>
-              <a:t>MODEL=назва-моделі docker compose up</a:t>
-            </a:r>
-            <a:pPr indent="0" marL="0">
-              <a:lnSpc>
-                <a:spcPct val="130000"/>
-              </a:lnSpc>
-              <a:buNone/>
-            </a:pPr>
-            <a:r>
-              <a:rPr lang="en-US" sz="1250" dirty="0">
-                <a:solidFill>
-                  <a:srgbClr val="9A94AA"/>
-                </a:solidFill>
-                <a:latin typeface="Courier New" pitchFamily="34" charset="0"/>
-                <a:ea typeface="Courier New" pitchFamily="34" charset="-122"/>
-                <a:cs typeface="Courier New" pitchFamily="34" charset="-120"/>
-              </a:rPr>
-              <a:t>   # реальний провайдер</a:t>
-            </a:r>
-            <a:endParaRPr lang="en-US" sz="1250" dirty="0"/>
-          </a:p>
-          <a:p>
-            <a:pPr indent="0" marL="0">
-              <a:lnSpc>
-                <a:spcPct val="130000"/>
-              </a:lnSpc>
-              <a:buNone/>
-            </a:pPr>
-            <a:r>
-              <a:rPr lang="en-US" sz="1250" dirty="0">
-                <a:solidFill>
-                  <a:srgbClr val="6BA0F8"/>
-                </a:solidFill>
-                <a:latin typeface="Courier New" pitchFamily="34" charset="0"/>
-                <a:ea typeface="Courier New" pitchFamily="34" charset="-122"/>
-                <a:cs typeface="Courier New" pitchFamily="34" charset="-120"/>
-              </a:rPr>
               <a:t>docker compose --profile advanced up</a:t>
             </a:r>
-            <a:pPr indent="0" marL="0">
-              <a:lnSpc>
-                <a:spcPct val="130000"/>
-              </a:lnSpc>
-              <a:buNone/>
-            </a:pPr>
             <a:r>
               <a:rPr lang="en-US" sz="1250" dirty="0">
                 <a:solidFill>
@@ -17205,7 +16850,7 @@
           <a:bodyPr wrap="square" lIns="0" tIns="0" rIns="0" bIns="0" rtlCol="0" anchor="ctr"/>
           <a:lstStyle/>
           <a:p>
-            <a:pPr indent="0" marL="0">
+            <a:pPr marL="0" indent="0">
               <a:buNone/>
             </a:pPr>
             <a:r>
@@ -17244,7 +16889,7 @@
           <a:bodyPr wrap="square" lIns="0" tIns="0" rIns="0" bIns="0" rtlCol="0" anchor="t"/>
           <a:lstStyle/>
           <a:p>
-            <a:pPr indent="0" marL="0">
+            <a:pPr marL="0" indent="0">
               <a:lnSpc>
                 <a:spcPct val="108000"/>
               </a:lnSpc>
@@ -17308,7 +16953,7 @@
           <a:bodyPr wrap="square" lIns="0" tIns="0" rIns="0" bIns="0" rtlCol="0" anchor="ctr"/>
           <a:lstStyle/>
           <a:p>
-            <a:pPr indent="0" marL="0">
+            <a:pPr marL="0" indent="0">
               <a:buNone/>
             </a:pPr>
             <a:r>
@@ -17347,7 +16992,7 @@
           <a:bodyPr wrap="square" lIns="0" tIns="0" rIns="0" bIns="0" rtlCol="0" anchor="t"/>
           <a:lstStyle/>
           <a:p>
-            <a:pPr indent="0" marL="0">
+            <a:pPr marL="0" indent="0">
               <a:lnSpc>
                 <a:spcPct val="108000"/>
               </a:lnSpc>
@@ -17416,11 +17061,11 @@
           <a:bodyPr wrap="square" lIns="0" tIns="0" rIns="0" bIns="0" rtlCol="0" anchor="ctr"/>
           <a:lstStyle/>
           <a:p>
-            <a:pPr indent="0" marL="0">
-              <a:buNone/>
-            </a:pPr>
-            <a:r>
-              <a:rPr lang="en-US" sz="950" b="1" spc="150" kern="0" dirty="0">
+            <a:pPr marL="0" indent="0">
+              <a:buNone/>
+            </a:pPr>
+            <a:r>
+              <a:rPr lang="en-US" sz="950" b="1" kern="0" spc="150" dirty="0">
                 <a:solidFill>
                   <a:srgbClr val="1A4FBF"/>
                 </a:solidFill>
@@ -17455,7 +17100,7 @@
           <a:bodyPr wrap="square" lIns="0" tIns="0" rIns="0" bIns="0" rtlCol="0" anchor="ctr"/>
           <a:lstStyle/>
           <a:p>
-            <a:pPr indent="0" marL="0">
+            <a:pPr marL="0" indent="0">
               <a:lnSpc>
                 <a:spcPct val="112000"/>
               </a:lnSpc>
@@ -17497,7 +17142,7 @@
           <a:bodyPr wrap="square" lIns="0" tIns="0" rIns="0" bIns="0" rtlCol="0" anchor="ctr"/>
           <a:lstStyle/>
           <a:p>
-            <a:pPr indent="0" marL="0">
+            <a:pPr marL="0" indent="0">
               <a:buNone/>
             </a:pPr>
             <a:r>
@@ -17535,7 +17180,7 @@
           </a:prstGeom>
           <a:extLst>
             <a:ext uri="{C572A759-6A51-4108-AA02-DFA0A04FC94B}">
-              <ma14:wrappingTextBoxFlag xmlns:ma14="http://schemas.microsoft.com/office/mac/drawingml/2011/main" val="0"/>
+              <ma14:wrappingTextBoxFlag xmlns="" xmlns:ma14="http://schemas.microsoft.com/office/mac/drawingml/2011/main" val="0"/>
             </a:ext>
           </a:extLst>
         </p:spPr>
@@ -17556,7 +17201,7 @@
           <a:p>
             <a:pPr algn="l"/>
             <a:fld id="{F7021451-1387-4CA6-816F-3879F97B5CBC}" type="slidenum">
-              <a:rPr b="0" lang="en-US"/>
+              <a:rPr lang="en-US" b="0"/>
               <a:t>21</a:t>
             </a:fld>
             <a:endParaRPr lang="en-US"/>
@@ -17609,11 +17254,11 @@
           <a:bodyPr wrap="square" lIns="0" tIns="0" rIns="0" bIns="0" rtlCol="0" anchor="ctr"/>
           <a:lstStyle/>
           <a:p>
-            <a:pPr indent="0" marL="0">
-              <a:buNone/>
-            </a:pPr>
-            <a:r>
-              <a:rPr lang="en-US" sz="1200" b="1" spc="400" kern="0" dirty="0">
+            <a:pPr marL="0" indent="0">
+              <a:buNone/>
+            </a:pPr>
+            <a:r>
+              <a:rPr lang="en-US" sz="1200" b="1" kern="0" spc="400" dirty="0">
                 <a:solidFill>
                   <a:srgbClr val="FFFFFF"/>
                 </a:solidFill>
@@ -17648,7 +17293,7 @@
           <a:bodyPr wrap="square" lIns="0" tIns="0" rIns="0" bIns="0" rtlCol="0" anchor="ctr"/>
           <a:lstStyle/>
           <a:p>
-            <a:pPr indent="0" marL="0">
+            <a:pPr marL="0" indent="0">
               <a:buNone/>
             </a:pPr>
             <a:r>
@@ -17687,7 +17332,7 @@
           <a:bodyPr wrap="square" lIns="0" tIns="0" rIns="0" bIns="0" rtlCol="0" anchor="t"/>
           <a:lstStyle/>
           <a:p>
-            <a:pPr indent="0" marL="0">
+            <a:pPr marL="0" indent="0">
               <a:buNone/>
             </a:pPr>
             <a:r>
@@ -17748,7 +17393,7 @@
           <a:bodyPr wrap="square" lIns="0" tIns="0" rIns="0" bIns="0" rtlCol="0" anchor="ctr"/>
           <a:lstStyle/>
           <a:p>
-            <a:pPr algn="ctr" indent="0" marL="0">
+            <a:pPr marL="0" indent="0" algn="ctr">
               <a:buNone/>
             </a:pPr>
             <a:r>
@@ -17834,7 +17479,7 @@
           <a:bodyPr wrap="square" lIns="0" tIns="0" rIns="0" bIns="0" rtlCol="0" anchor="ctr"/>
           <a:lstStyle/>
           <a:p>
-            <a:pPr indent="0" marL="0">
+            <a:pPr marL="0" indent="0">
               <a:buNone/>
             </a:pPr>
             <a:r>
@@ -17895,11 +17540,11 @@
           <a:bodyPr wrap="square" lIns="0" tIns="0" rIns="0" bIns="0" rtlCol="0" anchor="ctr"/>
           <a:lstStyle/>
           <a:p>
-            <a:pPr algn="ctr" indent="0" marL="0">
-              <a:buNone/>
-            </a:pPr>
-            <a:r>
-              <a:rPr lang="en-US" sz="900" b="1" spc="100" kern="0" dirty="0">
+            <a:pPr marL="0" indent="0" algn="ctr">
+              <a:buNone/>
+            </a:pPr>
+            <a:r>
+              <a:rPr lang="en-US" sz="900" b="1" kern="0" spc="100" dirty="0">
                 <a:solidFill>
                   <a:srgbClr val="FFFFFF"/>
                 </a:solidFill>
@@ -17915,14 +17560,14 @@
       </p:sp>
       <p:pic>
         <p:nvPicPr>
-          <p:cNvPr id="6" name="Image 0" descr="preencoded.png">    </p:cNvPr>
+          <p:cNvPr id="6" name="Image 0" descr="preencoded.png"/>
           <p:cNvPicPr>
             <a:picLocks noChangeAspect="1"/>
           </p:cNvPicPr>
           <p:nvPr/>
         </p:nvPicPr>
         <p:blipFill>
-          <a:blip r:embed="rId1"/>
+          <a:blip r:embed="rId3"/>
           <a:stretch>
             <a:fillRect/>
           </a:stretch>
@@ -18000,7 +17645,7 @@
           <a:bodyPr wrap="square" lIns="0" tIns="0" rIns="0" bIns="0" rtlCol="0" anchor="ctr"/>
           <a:lstStyle/>
           <a:p>
-            <a:pPr algn="ctr" indent="0" marL="0">
+            <a:pPr marL="0" indent="0" algn="ctr">
               <a:buNone/>
             </a:pPr>
             <a:r>
@@ -18039,7 +17684,7 @@
           <a:bodyPr wrap="square" lIns="0" tIns="0" rIns="0" bIns="0" rtlCol="0" anchor="ctr"/>
           <a:lstStyle/>
           <a:p>
-            <a:pPr indent="0" marL="0">
+            <a:pPr marL="0" indent="0">
               <a:buNone/>
             </a:pPr>
             <a:r>
@@ -18078,7 +17723,7 @@
           <a:bodyPr wrap="square" lIns="0" tIns="0" rIns="0" bIns="0" rtlCol="0" anchor="t"/>
           <a:lstStyle/>
           <a:p>
-            <a:pPr indent="0" marL="0">
+            <a:pPr marL="0" indent="0">
               <a:lnSpc>
                 <a:spcPct val="108000"/>
               </a:lnSpc>
@@ -18162,7 +17807,7 @@
           <a:bodyPr wrap="square" lIns="0" tIns="0" rIns="0" bIns="0" rtlCol="0" anchor="ctr"/>
           <a:lstStyle/>
           <a:p>
-            <a:pPr algn="ctr" indent="0" marL="0">
+            <a:pPr marL="0" indent="0" algn="ctr">
               <a:buNone/>
             </a:pPr>
             <a:r>
@@ -18201,7 +17846,7 @@
           <a:bodyPr wrap="square" lIns="0" tIns="0" rIns="0" bIns="0" rtlCol="0" anchor="ctr"/>
           <a:lstStyle/>
           <a:p>
-            <a:pPr indent="0" marL="0">
+            <a:pPr marL="0" indent="0">
               <a:buNone/>
             </a:pPr>
             <a:r>
@@ -18240,7 +17885,7 @@
           <a:bodyPr wrap="square" lIns="0" tIns="0" rIns="0" bIns="0" rtlCol="0" anchor="t"/>
           <a:lstStyle/>
           <a:p>
-            <a:pPr indent="0" marL="0">
+            <a:pPr marL="0" indent="0">
               <a:lnSpc>
                 <a:spcPct val="108000"/>
               </a:lnSpc>
@@ -18324,7 +17969,7 @@
           <a:bodyPr wrap="square" lIns="0" tIns="0" rIns="0" bIns="0" rtlCol="0" anchor="ctr"/>
           <a:lstStyle/>
           <a:p>
-            <a:pPr algn="ctr" indent="0" marL="0">
+            <a:pPr marL="0" indent="0" algn="ctr">
               <a:buNone/>
             </a:pPr>
             <a:r>
@@ -18363,7 +18008,7 @@
           <a:bodyPr wrap="square" lIns="0" tIns="0" rIns="0" bIns="0" rtlCol="0" anchor="ctr"/>
           <a:lstStyle/>
           <a:p>
-            <a:pPr indent="0" marL="0">
+            <a:pPr marL="0" indent="0">
               <a:buNone/>
             </a:pPr>
             <a:r>
@@ -18402,7 +18047,7 @@
           <a:bodyPr wrap="square" lIns="0" tIns="0" rIns="0" bIns="0" rtlCol="0" anchor="t"/>
           <a:lstStyle/>
           <a:p>
-            <a:pPr indent="0" marL="0">
+            <a:pPr marL="0" indent="0">
               <a:lnSpc>
                 <a:spcPct val="108000"/>
               </a:lnSpc>
@@ -18486,7 +18131,7 @@
           <a:bodyPr wrap="square" lIns="0" tIns="0" rIns="0" bIns="0" rtlCol="0" anchor="ctr"/>
           <a:lstStyle/>
           <a:p>
-            <a:pPr algn="ctr" indent="0" marL="0">
+            <a:pPr marL="0" indent="0" algn="ctr">
               <a:buNone/>
             </a:pPr>
             <a:r>
@@ -18525,7 +18170,7 @@
           <a:bodyPr wrap="square" lIns="0" tIns="0" rIns="0" bIns="0" rtlCol="0" anchor="ctr"/>
           <a:lstStyle/>
           <a:p>
-            <a:pPr indent="0" marL="0">
+            <a:pPr marL="0" indent="0">
               <a:buNone/>
             </a:pPr>
             <a:r>
@@ -18564,7 +18209,7 @@
           <a:bodyPr wrap="square" lIns="0" tIns="0" rIns="0" bIns="0" rtlCol="0" anchor="t"/>
           <a:lstStyle/>
           <a:p>
-            <a:pPr indent="0" marL="0">
+            <a:pPr marL="0" indent="0">
               <a:lnSpc>
                 <a:spcPct val="108000"/>
               </a:lnSpc>
@@ -18648,7 +18293,7 @@
           <a:bodyPr wrap="square" lIns="0" tIns="0" rIns="0" bIns="0" rtlCol="0" anchor="ctr"/>
           <a:lstStyle/>
           <a:p>
-            <a:pPr algn="ctr" indent="0" marL="0">
+            <a:pPr marL="0" indent="0" algn="ctr">
               <a:buNone/>
             </a:pPr>
             <a:r>
@@ -18687,7 +18332,7 @@
           <a:bodyPr wrap="square" lIns="0" tIns="0" rIns="0" bIns="0" rtlCol="0" anchor="ctr"/>
           <a:lstStyle/>
           <a:p>
-            <a:pPr indent="0" marL="0">
+            <a:pPr marL="0" indent="0">
               <a:buNone/>
             </a:pPr>
             <a:r>
@@ -18726,7 +18371,7 @@
           <a:bodyPr wrap="square" lIns="0" tIns="0" rIns="0" bIns="0" rtlCol="0" anchor="t"/>
           <a:lstStyle/>
           <a:p>
-            <a:pPr indent="0" marL="0">
+            <a:pPr marL="0" indent="0">
               <a:lnSpc>
                 <a:spcPct val="108000"/>
               </a:lnSpc>
@@ -18810,7 +18455,7 @@
           <a:bodyPr wrap="square" lIns="0" tIns="0" rIns="0" bIns="0" rtlCol="0" anchor="ctr"/>
           <a:lstStyle/>
           <a:p>
-            <a:pPr algn="ctr" indent="0" marL="0">
+            <a:pPr marL="0" indent="0" algn="ctr">
               <a:buNone/>
             </a:pPr>
             <a:r>
@@ -18849,7 +18494,7 @@
           <a:bodyPr wrap="square" lIns="0" tIns="0" rIns="0" bIns="0" rtlCol="0" anchor="ctr"/>
           <a:lstStyle/>
           <a:p>
-            <a:pPr indent="0" marL="0">
+            <a:pPr marL="0" indent="0">
               <a:buNone/>
             </a:pPr>
             <a:r>
@@ -18888,7 +18533,7 @@
           <a:bodyPr wrap="square" lIns="0" tIns="0" rIns="0" bIns="0" rtlCol="0" anchor="t"/>
           <a:lstStyle/>
           <a:p>
-            <a:pPr indent="0" marL="0">
+            <a:pPr marL="0" indent="0">
               <a:lnSpc>
                 <a:spcPct val="108000"/>
               </a:lnSpc>
@@ -18918,7 +18563,7 @@
         <p:spPr>
           <a:xfrm>
             <a:off x="566928" y="5029200"/>
-            <a:ext cx="11064240" cy="1051560"/>
+            <a:ext cx="10927080" cy="1051560"/>
           </a:xfrm>
           <a:prstGeom prst="roundRect">
             <a:avLst>
@@ -18952,11 +18597,11 @@
           <a:bodyPr wrap="square" lIns="0" tIns="0" rIns="0" bIns="0" rtlCol="0" anchor="ctr"/>
           <a:lstStyle/>
           <a:p>
-            <a:pPr indent="0" marL="0">
-              <a:buNone/>
-            </a:pPr>
-            <a:r>
-              <a:rPr lang="en-US" sz="950" b="1" spc="150" kern="0" dirty="0">
+            <a:pPr marL="0" indent="0">
+              <a:buNone/>
+            </a:pPr>
+            <a:r>
+              <a:rPr lang="en-US" sz="950" b="1" kern="0" spc="150" dirty="0">
                 <a:solidFill>
                   <a:srgbClr val="FFFFFF"/>
                 </a:solidFill>
@@ -18991,7 +18636,7 @@
           <a:bodyPr wrap="square" lIns="0" tIns="0" rIns="0" bIns="0" rtlCol="0" anchor="ctr"/>
           <a:lstStyle/>
           <a:p>
-            <a:pPr indent="0" marL="0">
+            <a:pPr marL="0" indent="0">
               <a:lnSpc>
                 <a:spcPct val="112000"/>
               </a:lnSpc>
@@ -19014,7 +18659,7 @@
       </p:sp>
       <p:sp>
         <p:nvSpPr>
-          <p:cNvPr id="25" name="Slide Number Placeholder 0"/>
+          <p:cNvPr id="40" name="Slide Number Placeholder 0"/>
           <p:cNvSpPr>
             <a:spLocks noGrp="1"/>
           </p:cNvSpPr>
@@ -19032,7 +18677,7 @@
           </a:prstGeom>
           <a:extLst>
             <a:ext uri="{C572A759-6A51-4108-AA02-DFA0A04FC94B}">
-              <ma14:wrappingTextBoxFlag xmlns:ma14="http://schemas.microsoft.com/office/mac/drawingml/2011/main" val="0"/>
+              <ma14:wrappingTextBoxFlag xmlns="" xmlns:ma14="http://schemas.microsoft.com/office/mac/drawingml/2011/main" val="0"/>
             </a:ext>
           </a:extLst>
         </p:spPr>
@@ -19053,7 +18698,7 @@
           <a:p>
             <a:pPr algn="l"/>
             <a:fld id="{F7021451-1387-4CA6-816F-3879F97B5CBC}" type="slidenum">
-              <a:rPr b="0" lang="en-US"/>
+              <a:rPr lang="en-US" b="0"/>
               <a:t>23</a:t>
             </a:fld>
             <a:endParaRPr lang="en-US"/>
@@ -19128,7 +18773,7 @@
           <a:bodyPr wrap="square" lIns="0" tIns="0" rIns="0" bIns="0" rtlCol="0" anchor="ctr"/>
           <a:lstStyle/>
           <a:p>
-            <a:pPr indent="0" marL="0">
+            <a:pPr marL="0" indent="0">
               <a:buNone/>
             </a:pPr>
             <a:r>
@@ -19189,11 +18834,11 @@
           <a:bodyPr wrap="square" lIns="0" tIns="0" rIns="0" bIns="0" rtlCol="0" anchor="ctr"/>
           <a:lstStyle/>
           <a:p>
-            <a:pPr algn="ctr" indent="0" marL="0">
-              <a:buNone/>
-            </a:pPr>
-            <a:r>
-              <a:rPr lang="en-US" sz="900" b="1" spc="100" kern="0" dirty="0">
+            <a:pPr marL="0" indent="0" algn="ctr">
+              <a:buNone/>
+            </a:pPr>
+            <a:r>
+              <a:rPr lang="en-US" sz="900" b="1" kern="0" spc="100" dirty="0">
                 <a:solidFill>
                   <a:srgbClr val="FFFFFF"/>
                 </a:solidFill>
@@ -19209,14 +18854,14 @@
       </p:sp>
       <p:pic>
         <p:nvPicPr>
-          <p:cNvPr id="6" name="Image 0" descr="preencoded.png">    </p:cNvPr>
+          <p:cNvPr id="6" name="Image 0" descr="preencoded.png"/>
           <p:cNvPicPr>
             <a:picLocks noChangeAspect="1"/>
           </p:cNvPicPr>
           <p:nvPr/>
         </p:nvPicPr>
         <p:blipFill>
-          <a:blip r:embed="rId1"/>
+          <a:blip r:embed="rId3"/>
           <a:stretch>
             <a:fillRect/>
           </a:stretch>
@@ -19272,7 +18917,7 @@
           <a:bodyPr wrap="square" lIns="0" tIns="0" rIns="0" bIns="0" rtlCol="0" anchor="ctr"/>
           <a:lstStyle/>
           <a:p>
-            <a:pPr algn="ctr" indent="0" marL="0">
+            <a:pPr marL="0" indent="0" algn="ctr">
               <a:buNone/>
             </a:pPr>
             <a:r>
@@ -19311,7 +18956,7 @@
           <a:bodyPr wrap="square" lIns="0" tIns="0" rIns="0" bIns="0" rtlCol="0" anchor="ctr"/>
           <a:lstStyle/>
           <a:p>
-            <a:pPr indent="0" marL="0">
+            <a:pPr marL="0" indent="0">
               <a:buNone/>
             </a:pPr>
             <a:r>
@@ -19325,9 +18970,6 @@
               </a:rPr>
               <a:t>Підняти стек  </a:t>
             </a:r>
-            <a:pPr indent="0" marL="0">
-              <a:buNone/>
-            </a:pPr>
             <a:r>
               <a:rPr lang="en-US" sz="1200" dirty="0">
                 <a:solidFill>
@@ -19384,7 +19026,7 @@
           <a:bodyPr wrap="square" lIns="0" tIns="0" rIns="0" bIns="0" rtlCol="0" anchor="ctr"/>
           <a:lstStyle/>
           <a:p>
-            <a:pPr algn="ctr" indent="0" marL="0">
+            <a:pPr marL="0" indent="0" algn="ctr">
               <a:buNone/>
             </a:pPr>
             <a:r>
@@ -19423,7 +19065,7 @@
           <a:bodyPr wrap="square" lIns="0" tIns="0" rIns="0" bIns="0" rtlCol="0" anchor="ctr"/>
           <a:lstStyle/>
           <a:p>
-            <a:pPr indent="0" marL="0">
+            <a:pPr marL="0" indent="0">
               <a:buNone/>
             </a:pPr>
             <a:r>
@@ -19437,9 +19079,6 @@
               </a:rPr>
               <a:t>Оглянути половини  </a:t>
             </a:r>
-            <a:pPr indent="0" marL="0">
-              <a:buNone/>
-            </a:pPr>
             <a:r>
               <a:rPr lang="en-US" sz="1200" dirty="0">
                 <a:solidFill>
@@ -19496,7 +19135,7 @@
           <a:bodyPr wrap="square" lIns="0" tIns="0" rIns="0" bIns="0" rtlCol="0" anchor="ctr"/>
           <a:lstStyle/>
           <a:p>
-            <a:pPr algn="ctr" indent="0" marL="0">
+            <a:pPr marL="0" indent="0" algn="ctr">
               <a:buNone/>
             </a:pPr>
             <a:r>
@@ -19535,7 +19174,7 @@
           <a:bodyPr wrap="square" lIns="0" tIns="0" rIns="0" bIns="0" rtlCol="0" anchor="ctr"/>
           <a:lstStyle/>
           <a:p>
-            <a:pPr indent="0" marL="0">
+            <a:pPr marL="0" indent="0">
               <a:buNone/>
             </a:pPr>
             <a:r>
@@ -19549,9 +19188,6 @@
               </a:rPr>
               <a:t>Прочитати код  </a:t>
             </a:r>
-            <a:pPr indent="0" marL="0">
-              <a:buNone/>
-            </a:pPr>
             <a:r>
               <a:rPr lang="en-US" sz="1200" dirty="0">
                 <a:solidFill>
@@ -19608,7 +19244,7 @@
           <a:bodyPr wrap="square" lIns="0" tIns="0" rIns="0" bIns="0" rtlCol="0" anchor="ctr"/>
           <a:lstStyle/>
           <a:p>
-            <a:pPr algn="ctr" indent="0" marL="0">
+            <a:pPr marL="0" indent="0" algn="ctr">
               <a:buNone/>
             </a:pPr>
             <a:r>
@@ -19647,7 +19283,7 @@
           <a:bodyPr wrap="square" lIns="0" tIns="0" rIns="0" bIns="0" rtlCol="0" anchor="ctr"/>
           <a:lstStyle/>
           <a:p>
-            <a:pPr indent="0" marL="0">
+            <a:pPr marL="0" indent="0">
               <a:buNone/>
             </a:pPr>
             <a:r>
@@ -19661,9 +19297,6 @@
               </a:rPr>
               <a:t>Знайти запит у лозі  </a:t>
             </a:r>
-            <a:pPr indent="0" marL="0">
-              <a:buNone/>
-            </a:pPr>
             <a:r>
               <a:rPr lang="en-US" sz="1200" dirty="0">
                 <a:solidFill>
@@ -19720,7 +19353,7 @@
           <a:bodyPr wrap="square" lIns="0" tIns="0" rIns="0" bIns="0" rtlCol="0" anchor="ctr"/>
           <a:lstStyle/>
           <a:p>
-            <a:pPr algn="ctr" indent="0" marL="0">
+            <a:pPr marL="0" indent="0" algn="ctr">
               <a:buNone/>
             </a:pPr>
             <a:r>
@@ -19759,7 +19392,7 @@
           <a:bodyPr wrap="square" lIns="0" tIns="0" rIns="0" bIns="0" rtlCol="0" anchor="ctr"/>
           <a:lstStyle/>
           <a:p>
-            <a:pPr indent="0" marL="0">
+            <a:pPr marL="0" indent="0">
               <a:buNone/>
             </a:pPr>
             <a:r>
@@ -19773,9 +19406,6 @@
               </a:rPr>
               <a:t>Зламати  </a:t>
             </a:r>
-            <a:pPr indent="0" marL="0">
-              <a:buNone/>
-            </a:pPr>
             <a:r>
               <a:rPr lang="en-US" sz="1200" dirty="0">
                 <a:solidFill>
@@ -19832,7 +19462,7 @@
           <a:bodyPr wrap="square" lIns="0" tIns="0" rIns="0" bIns="0" rtlCol="0" anchor="ctr"/>
           <a:lstStyle/>
           <a:p>
-            <a:pPr algn="ctr" indent="0" marL="0">
+            <a:pPr marL="0" indent="0" algn="ctr">
               <a:buNone/>
             </a:pPr>
             <a:r>
@@ -19871,7 +19501,7 @@
           <a:bodyPr wrap="square" lIns="0" tIns="0" rIns="0" bIns="0" rtlCol="0" anchor="ctr"/>
           <a:lstStyle/>
           <a:p>
-            <a:pPr indent="0" marL="0">
+            <a:pPr marL="0" indent="0">
               <a:buNone/>
             </a:pPr>
             <a:r>
@@ -19885,9 +19515,6 @@
               </a:rPr>
               <a:t>Розширений стек · опційно  </a:t>
             </a:r>
-            <a:pPr indent="0" marL="0">
-              <a:buNone/>
-            </a:pPr>
             <a:r>
               <a:rPr lang="en-US" sz="1200" dirty="0">
                 <a:solidFill>
@@ -19923,7 +19550,7 @@
           </a:prstGeom>
           <a:extLst>
             <a:ext uri="{C572A759-6A51-4108-AA02-DFA0A04FC94B}">
-              <ma14:wrappingTextBoxFlag xmlns:ma14="http://schemas.microsoft.com/office/mac/drawingml/2011/main" val="0"/>
+              <ma14:wrappingTextBoxFlag xmlns="" xmlns:ma14="http://schemas.microsoft.com/office/mac/drawingml/2011/main" val="0"/>
             </a:ext>
           </a:extLst>
         </p:spPr>
@@ -19944,7 +19571,7 @@
           <a:p>
             <a:pPr algn="l"/>
             <a:fld id="{F7021451-1387-4CA6-816F-3879F97B5CBC}" type="slidenum">
-              <a:rPr b="0" lang="en-US"/>
+              <a:rPr lang="en-US" b="0"/>
               <a:t>24</a:t>
             </a:fld>
             <a:endParaRPr lang="en-US"/>
@@ -19997,11 +19624,11 @@
           <a:bodyPr wrap="square" lIns="0" tIns="0" rIns="0" bIns="0" rtlCol="0" anchor="ctr"/>
           <a:lstStyle/>
           <a:p>
-            <a:pPr indent="0" marL="0">
-              <a:buNone/>
-            </a:pPr>
-            <a:r>
-              <a:rPr lang="en-US" sz="1200" b="1" spc="400" kern="0" dirty="0">
+            <a:pPr marL="0" indent="0">
+              <a:buNone/>
+            </a:pPr>
+            <a:r>
+              <a:rPr lang="en-US" sz="1200" b="1" kern="0" spc="400" dirty="0">
                 <a:solidFill>
                   <a:srgbClr val="FFFFFF"/>
                 </a:solidFill>
@@ -20036,7 +19663,7 @@
           <a:bodyPr wrap="square" lIns="0" tIns="0" rIns="0" bIns="0" rtlCol="0" anchor="ctr"/>
           <a:lstStyle/>
           <a:p>
-            <a:pPr indent="0" marL="0">
+            <a:pPr marL="0" indent="0">
               <a:buNone/>
             </a:pPr>
             <a:r>
@@ -20075,7 +19702,7 @@
           <a:bodyPr wrap="square" lIns="0" tIns="0" rIns="0" bIns="0" rtlCol="0" anchor="t"/>
           <a:lstStyle/>
           <a:p>
-            <a:pPr indent="0" marL="0">
+            <a:pPr marL="0" indent="0">
               <a:buNone/>
             </a:pPr>
             <a:r>
@@ -20161,7 +19788,7 @@
           <a:bodyPr wrap="square" lIns="0" tIns="0" rIns="0" bIns="0" rtlCol="0" anchor="ctr"/>
           <a:lstStyle/>
           <a:p>
-            <a:pPr indent="0" marL="0">
+            <a:pPr marL="0" indent="0">
               <a:buNone/>
             </a:pPr>
             <a:r>
@@ -20227,11 +19854,11 @@
           <a:bodyPr wrap="square" lIns="0" tIns="0" rIns="0" bIns="0" rtlCol="0" anchor="ctr"/>
           <a:lstStyle/>
           <a:p>
-            <a:pPr algn="ctr" indent="0" marL="0">
-              <a:buNone/>
-            </a:pPr>
-            <a:r>
-              <a:rPr lang="en-US" sz="900" b="1" spc="100" kern="0" dirty="0">
+            <a:pPr marL="0" indent="0" algn="ctr">
+              <a:buNone/>
+            </a:pPr>
+            <a:r>
+              <a:rPr lang="en-US" sz="900" b="1" kern="0" spc="100" dirty="0">
                 <a:solidFill>
                   <a:srgbClr val="1A4FBF"/>
                 </a:solidFill>
@@ -20247,14 +19874,14 @@
       </p:sp>
       <p:pic>
         <p:nvPicPr>
-          <p:cNvPr id="6" name="Image 0" descr="preencoded.png">    </p:cNvPr>
+          <p:cNvPr id="6" name="Image 0" descr="preencoded.png"/>
           <p:cNvPicPr>
             <a:picLocks noChangeAspect="1"/>
           </p:cNvPicPr>
           <p:nvPr/>
         </p:nvPicPr>
         <p:blipFill>
-          <a:blip r:embed="rId1"/>
+          <a:blip r:embed="rId3"/>
           <a:stretch>
             <a:fillRect/>
           </a:stretch>
@@ -20312,7 +19939,7 @@
           <a:bodyPr wrap="square" lIns="0" tIns="0" rIns="0" bIns="0" rtlCol="0" anchor="ctr"/>
           <a:lstStyle/>
           <a:p>
-            <a:pPr indent="0" marL="0">
+            <a:pPr marL="0" indent="0">
               <a:buNone/>
             </a:pPr>
             <a:r>
@@ -20351,7 +19978,7 @@
           <a:bodyPr wrap="square" lIns="0" tIns="0" rIns="0" bIns="0" rtlCol="0" anchor="t"/>
           <a:lstStyle/>
           <a:p>
-            <a:pPr indent="0" marL="0">
+            <a:pPr marL="0" indent="0">
               <a:lnSpc>
                 <a:spcPct val="108000"/>
               </a:lnSpc>
@@ -20415,7 +20042,7 @@
           <a:bodyPr wrap="square" lIns="0" tIns="0" rIns="0" bIns="0" rtlCol="0" anchor="ctr"/>
           <a:lstStyle/>
           <a:p>
-            <a:pPr indent="0" marL="0">
+            <a:pPr marL="0" indent="0">
               <a:buNone/>
             </a:pPr>
             <a:r>
@@ -20454,7 +20081,7 @@
           <a:bodyPr wrap="square" lIns="0" tIns="0" rIns="0" bIns="0" rtlCol="0" anchor="t"/>
           <a:lstStyle/>
           <a:p>
-            <a:pPr indent="0" marL="0">
+            <a:pPr marL="0" indent="0">
               <a:lnSpc>
                 <a:spcPct val="108000"/>
               </a:lnSpc>
@@ -20518,7 +20145,7 @@
           <a:bodyPr wrap="square" lIns="0" tIns="0" rIns="0" bIns="0" rtlCol="0" anchor="ctr"/>
           <a:lstStyle/>
           <a:p>
-            <a:pPr indent="0" marL="0">
+            <a:pPr marL="0" indent="0">
               <a:buNone/>
             </a:pPr>
             <a:r>
@@ -20557,7 +20184,7 @@
           <a:bodyPr wrap="square" lIns="0" tIns="0" rIns="0" bIns="0" rtlCol="0" anchor="t"/>
           <a:lstStyle/>
           <a:p>
-            <a:pPr indent="0" marL="0">
+            <a:pPr marL="0" indent="0">
               <a:lnSpc>
                 <a:spcPct val="108000"/>
               </a:lnSpc>
@@ -20621,7 +20248,7 @@
           <a:bodyPr wrap="square" lIns="0" tIns="0" rIns="0" bIns="0" rtlCol="0" anchor="ctr"/>
           <a:lstStyle/>
           <a:p>
-            <a:pPr algn="ctr" indent="0" marL="0">
+            <a:pPr marL="0" indent="0" algn="ctr">
               <a:buNone/>
             </a:pPr>
             <a:r>
@@ -20725,7 +20352,7 @@
           <a:bodyPr wrap="square" lIns="0" tIns="0" rIns="0" bIns="0" rtlCol="0" anchor="ctr"/>
           <a:lstStyle/>
           <a:p>
-            <a:pPr algn="ctr" indent="0" marL="0">
+            <a:pPr marL="0" indent="0" algn="ctr">
               <a:buNone/>
             </a:pPr>
             <a:r>
@@ -20829,7 +20456,7 @@
           <a:bodyPr wrap="square" lIns="0" tIns="0" rIns="0" bIns="0" rtlCol="0" anchor="ctr"/>
           <a:lstStyle/>
           <a:p>
-            <a:pPr algn="ctr" indent="0" marL="0">
+            <a:pPr marL="0" indent="0" algn="ctr">
               <a:buNone/>
             </a:pPr>
             <a:r>
@@ -20933,7 +20560,7 @@
           <a:bodyPr wrap="square" lIns="0" tIns="0" rIns="0" bIns="0" rtlCol="0" anchor="ctr"/>
           <a:lstStyle/>
           <a:p>
-            <a:pPr algn="ctr" indent="0" marL="0">
+            <a:pPr marL="0" indent="0" algn="ctr">
               <a:buNone/>
             </a:pPr>
             <a:r>
@@ -21037,7 +20664,7 @@
           <a:bodyPr wrap="square" lIns="0" tIns="0" rIns="0" bIns="0" rtlCol="0" anchor="ctr"/>
           <a:lstStyle/>
           <a:p>
-            <a:pPr algn="ctr" indent="0" marL="0">
+            <a:pPr marL="0" indent="0" algn="ctr">
               <a:buNone/>
             </a:pPr>
             <a:r>
@@ -21141,7 +20768,7 @@
           <a:bodyPr wrap="square" lIns="0" tIns="0" rIns="0" bIns="0" rtlCol="0" anchor="ctr"/>
           <a:lstStyle/>
           <a:p>
-            <a:pPr algn="ctr" indent="0" marL="0">
+            <a:pPr marL="0" indent="0" algn="ctr">
               <a:buNone/>
             </a:pPr>
             <a:r>
@@ -21245,7 +20872,7 @@
           <a:bodyPr wrap="square" lIns="0" tIns="0" rIns="0" bIns="0" rtlCol="0" anchor="ctr"/>
           <a:lstStyle/>
           <a:p>
-            <a:pPr algn="ctr" indent="0" marL="0">
+            <a:pPr marL="0" indent="0" algn="ctr">
               <a:buNone/>
             </a:pPr>
             <a:r>
@@ -21306,7 +20933,7 @@
           <a:bodyPr wrap="square" lIns="0" tIns="0" rIns="0" bIns="0" rtlCol="0" anchor="ctr"/>
           <a:lstStyle/>
           <a:p>
-            <a:pPr indent="0" marL="0">
+            <a:pPr marL="0" indent="0">
               <a:lnSpc>
                 <a:spcPct val="112000"/>
               </a:lnSpc>
@@ -21329,7 +20956,7 @@
       </p:sp>
       <p:sp>
         <p:nvSpPr>
-          <p:cNvPr id="25" name="Slide Number Placeholder 0"/>
+          <p:cNvPr id="44" name="Slide Number Placeholder 0"/>
           <p:cNvSpPr>
             <a:spLocks noGrp="1"/>
           </p:cNvSpPr>
@@ -21347,7 +20974,7 @@
           </a:prstGeom>
           <a:extLst>
             <a:ext uri="{C572A759-6A51-4108-AA02-DFA0A04FC94B}">
-              <ma14:wrappingTextBoxFlag xmlns:ma14="http://schemas.microsoft.com/office/mac/drawingml/2011/main" val="0"/>
+              <ma14:wrappingTextBoxFlag xmlns="" xmlns:ma14="http://schemas.microsoft.com/office/mac/drawingml/2011/main" val="0"/>
             </a:ext>
           </a:extLst>
         </p:spPr>
@@ -21368,7 +20995,7 @@
           <a:p>
             <a:pPr algn="l"/>
             <a:fld id="{F7021451-1387-4CA6-816F-3879F97B5CBC}" type="slidenum">
-              <a:rPr b="0" lang="en-US"/>
+              <a:rPr lang="en-US" b="0"/>
               <a:t>26</a:t>
             </a:fld>
             <a:endParaRPr lang="en-US"/>
@@ -21443,7 +21070,7 @@
           <a:bodyPr wrap="square" lIns="0" tIns="0" rIns="0" bIns="0" rtlCol="0" anchor="ctr"/>
           <a:lstStyle/>
           <a:p>
-            <a:pPr indent="0" marL="0">
+            <a:pPr marL="0" indent="0">
               <a:buNone/>
             </a:pPr>
             <a:r>
@@ -21509,11 +21136,11 @@
           <a:bodyPr wrap="square" lIns="0" tIns="0" rIns="0" bIns="0" rtlCol="0" anchor="ctr"/>
           <a:lstStyle/>
           <a:p>
-            <a:pPr algn="ctr" indent="0" marL="0">
-              <a:buNone/>
-            </a:pPr>
-            <a:r>
-              <a:rPr lang="en-US" sz="900" b="1" spc="100" kern="0" dirty="0">
+            <a:pPr marL="0" indent="0" algn="ctr">
+              <a:buNone/>
+            </a:pPr>
+            <a:r>
+              <a:rPr lang="en-US" sz="900" b="1" kern="0" spc="100" dirty="0">
                 <a:solidFill>
                   <a:srgbClr val="1A4FBF"/>
                 </a:solidFill>
@@ -21529,14 +21156,14 @@
       </p:sp>
       <p:pic>
         <p:nvPicPr>
-          <p:cNvPr id="6" name="Image 0" descr="preencoded.png">    </p:cNvPr>
+          <p:cNvPr id="6" name="Image 0" descr="preencoded.png"/>
           <p:cNvPicPr>
             <a:picLocks noChangeAspect="1"/>
           </p:cNvPicPr>
           <p:nvPr/>
         </p:nvPicPr>
         <p:blipFill>
-          <a:blip r:embed="rId1"/>
+          <a:blip r:embed="rId3"/>
           <a:stretch>
             <a:fillRect/>
           </a:stretch>
@@ -21666,7 +21293,7 @@
           <a:bodyPr wrap="square" lIns="0" tIns="0" rIns="0" bIns="0" rtlCol="0" anchor="ctr"/>
           <a:lstStyle/>
           <a:p>
-            <a:pPr indent="0" marL="0">
+            <a:pPr marL="0" indent="0">
               <a:buNone/>
             </a:pPr>
             <a:r>
@@ -21772,7 +21399,7 @@
           <a:bodyPr wrap="square" lIns="0" tIns="0" rIns="0" bIns="0" rtlCol="0" anchor="ctr"/>
           <a:lstStyle/>
           <a:p>
-            <a:pPr indent="0" marL="0">
+            <a:pPr marL="0" indent="0">
               <a:buNone/>
             </a:pPr>
             <a:r>
@@ -21878,7 +21505,7 @@
           <a:bodyPr wrap="square" lIns="0" tIns="0" rIns="0" bIns="0" rtlCol="0" anchor="ctr"/>
           <a:lstStyle/>
           <a:p>
-            <a:pPr indent="0" marL="0">
+            <a:pPr marL="0" indent="0">
               <a:buNone/>
             </a:pPr>
             <a:r>
@@ -21984,7 +21611,7 @@
           <a:bodyPr wrap="square" lIns="0" tIns="0" rIns="0" bIns="0" rtlCol="0" anchor="ctr"/>
           <a:lstStyle/>
           <a:p>
-            <a:pPr indent="0" marL="0">
+            <a:pPr marL="0" indent="0">
               <a:buNone/>
             </a:pPr>
             <a:r>
@@ -22090,7 +21717,7 @@
           <a:bodyPr wrap="square" lIns="0" tIns="0" rIns="0" bIns="0" rtlCol="0" anchor="ctr"/>
           <a:lstStyle/>
           <a:p>
-            <a:pPr indent="0" marL="0">
+            <a:pPr marL="0" indent="0">
               <a:buNone/>
             </a:pPr>
             <a:r>
@@ -22196,7 +21823,7 @@
           <a:bodyPr wrap="square" lIns="0" tIns="0" rIns="0" bIns="0" rtlCol="0" anchor="ctr"/>
           <a:lstStyle/>
           <a:p>
-            <a:pPr indent="0" marL="0">
+            <a:pPr marL="0" indent="0">
               <a:buNone/>
             </a:pPr>
             <a:r>
@@ -22235,7 +21862,7 @@
           <a:bodyPr wrap="square" lIns="0" tIns="0" rIns="0" bIns="0" rtlCol="0" anchor="ctr"/>
           <a:lstStyle/>
           <a:p>
-            <a:pPr indent="0" marL="0">
+            <a:pPr marL="0" indent="0">
               <a:buNone/>
             </a:pPr>
             <a:r>
@@ -22255,7 +21882,7 @@
       </p:sp>
       <p:sp>
         <p:nvSpPr>
-          <p:cNvPr id="25" name="Slide Number Placeholder 0"/>
+          <p:cNvPr id="33" name="Slide Number Placeholder 0"/>
           <p:cNvSpPr>
             <a:spLocks noGrp="1"/>
           </p:cNvSpPr>
@@ -22273,7 +21900,7 @@
           </a:prstGeom>
           <a:extLst>
             <a:ext uri="{C572A759-6A51-4108-AA02-DFA0A04FC94B}">
-              <ma14:wrappingTextBoxFlag xmlns:ma14="http://schemas.microsoft.com/office/mac/drawingml/2011/main" val="0"/>
+              <ma14:wrappingTextBoxFlag xmlns="" xmlns:ma14="http://schemas.microsoft.com/office/mac/drawingml/2011/main" val="0"/>
             </a:ext>
           </a:extLst>
         </p:spPr>
@@ -22294,7 +21921,7 @@
           <a:p>
             <a:pPr algn="l"/>
             <a:fld id="{F7021451-1387-4CA6-816F-3879F97B5CBC}" type="slidenum">
-              <a:rPr b="0" lang="en-US"/>
+              <a:rPr lang="en-US" b="0"/>
               <a:t>27</a:t>
             </a:fld>
             <a:endParaRPr lang="en-US"/>
@@ -22369,7 +21996,7 @@
           <a:bodyPr wrap="square" lIns="0" tIns="0" rIns="0" bIns="0" rtlCol="0" anchor="ctr"/>
           <a:lstStyle/>
           <a:p>
-            <a:pPr indent="0" marL="0">
+            <a:pPr marL="0" indent="0">
               <a:buNone/>
             </a:pPr>
             <a:r>
@@ -22435,11 +22062,11 @@
           <a:bodyPr wrap="square" lIns="0" tIns="0" rIns="0" bIns="0" rtlCol="0" anchor="ctr"/>
           <a:lstStyle/>
           <a:p>
-            <a:pPr algn="ctr" indent="0" marL="0">
-              <a:buNone/>
-            </a:pPr>
-            <a:r>
-              <a:rPr lang="en-US" sz="900" b="1" spc="100" kern="0" dirty="0">
+            <a:pPr marL="0" indent="0" algn="ctr">
+              <a:buNone/>
+            </a:pPr>
+            <a:r>
+              <a:rPr lang="en-US" sz="900" b="1" kern="0" spc="100" dirty="0">
                 <a:solidFill>
                   <a:srgbClr val="1A4FBF"/>
                 </a:solidFill>
@@ -22455,14 +22082,14 @@
       </p:sp>
       <p:pic>
         <p:nvPicPr>
-          <p:cNvPr id="6" name="Image 0" descr="preencoded.png">    </p:cNvPr>
+          <p:cNvPr id="6" name="Image 0" descr="preencoded.png"/>
           <p:cNvPicPr>
             <a:picLocks noChangeAspect="1"/>
           </p:cNvPicPr>
           <p:nvPr/>
         </p:nvPicPr>
         <p:blipFill>
-          <a:blip r:embed="rId1"/>
+          <a:blip r:embed="rId3"/>
           <a:stretch>
             <a:fillRect/>
           </a:stretch>
@@ -22590,7 +22217,7 @@
           <a:bodyPr wrap="square" lIns="0" tIns="0" rIns="0" bIns="0" rtlCol="0" anchor="ctr"/>
           <a:lstStyle/>
           <a:p>
-            <a:pPr indent="0" marL="0">
+            <a:pPr marL="0" indent="0">
               <a:buNone/>
             </a:pPr>
             <a:r>
@@ -22604,9 +22231,6 @@
               </a:rPr>
               <a:t>Ключ у коді застосунку   </a:t>
             </a:r>
-            <a:pPr indent="0" marL="0">
-              <a:buNone/>
-            </a:pPr>
             <a:r>
               <a:rPr lang="en-US" sz="1250" dirty="0">
                 <a:solidFill>
@@ -22735,7 +22359,7 @@
           <a:bodyPr wrap="square" lIns="0" tIns="0" rIns="0" bIns="0" rtlCol="0" anchor="ctr"/>
           <a:lstStyle/>
           <a:p>
-            <a:pPr indent="0" marL="0">
+            <a:pPr marL="0" indent="0">
               <a:buNone/>
             </a:pPr>
             <a:r>
@@ -22749,9 +22373,6 @@
               </a:rPr>
               <a:t>Демо на одному запиті   </a:t>
             </a:r>
-            <a:pPr indent="0" marL="0">
-              <a:buNone/>
-            </a:pPr>
             <a:r>
               <a:rPr lang="en-US" sz="1250" dirty="0">
                 <a:solidFill>
@@ -22880,7 +22501,7 @@
           <a:bodyPr wrap="square" lIns="0" tIns="0" rIns="0" bIns="0" rtlCol="0" anchor="ctr"/>
           <a:lstStyle/>
           <a:p>
-            <a:pPr indent="0" marL="0">
+            <a:pPr marL="0" indent="0">
               <a:buNone/>
             </a:pPr>
             <a:r>
@@ -22894,9 +22515,6 @@
               </a:rPr>
               <a:t>«Логи — коли зламається»   </a:t>
             </a:r>
-            <a:pPr indent="0" marL="0">
-              <a:buNone/>
-            </a:pPr>
             <a:r>
               <a:rPr lang="en-US" sz="1250" dirty="0">
                 <a:solidFill>
@@ -23025,7 +22643,7 @@
           <a:bodyPr wrap="square" lIns="0" tIns="0" rIns="0" bIns="0" rtlCol="0" anchor="ctr"/>
           <a:lstStyle/>
           <a:p>
-            <a:pPr indent="0" marL="0">
+            <a:pPr marL="0" indent="0">
               <a:buNone/>
             </a:pPr>
             <a:r>
@@ -23039,9 +22657,6 @@
               </a:rPr>
               <a:t>Три провайдери одразу   </a:t>
             </a:r>
-            <a:pPr indent="0" marL="0">
-              <a:buNone/>
-            </a:pPr>
             <a:r>
               <a:rPr lang="en-US" sz="1250" dirty="0">
                 <a:solidFill>
@@ -23170,7 +22785,7 @@
           <a:bodyPr wrap="square" lIns="0" tIns="0" rIns="0" bIns="0" rtlCol="0" anchor="ctr"/>
           <a:lstStyle/>
           <a:p>
-            <a:pPr indent="0" marL="0">
+            <a:pPr marL="0" indent="0">
               <a:buNone/>
             </a:pPr>
             <a:r>
@@ -23184,9 +22799,6 @@
               </a:rPr>
               <a:t>Реальний ключ з першого дня   </a:t>
             </a:r>
-            <a:pPr indent="0" marL="0">
-              <a:buNone/>
-            </a:pPr>
             <a:r>
               <a:rPr lang="en-US" sz="1250" dirty="0">
                 <a:solidFill>
@@ -23204,7 +22816,7 @@
       </p:sp>
       <p:sp>
         <p:nvSpPr>
-          <p:cNvPr id="25" name="Slide Number Placeholder 0"/>
+          <p:cNvPr id="32" name="Slide Number Placeholder 0"/>
           <p:cNvSpPr>
             <a:spLocks noGrp="1"/>
           </p:cNvSpPr>
@@ -23222,7 +22834,7 @@
           </a:prstGeom>
           <a:extLst>
             <a:ext uri="{C572A759-6A51-4108-AA02-DFA0A04FC94B}">
-              <ma14:wrappingTextBoxFlag xmlns:ma14="http://schemas.microsoft.com/office/mac/drawingml/2011/main" val="0"/>
+              <ma14:wrappingTextBoxFlag xmlns="" xmlns:ma14="http://schemas.microsoft.com/office/mac/drawingml/2011/main" val="0"/>
             </a:ext>
           </a:extLst>
         </p:spPr>
@@ -23243,7 +22855,7 @@
           <a:p>
             <a:pPr algn="l"/>
             <a:fld id="{F7021451-1387-4CA6-816F-3879F97B5CBC}" type="slidenum">
-              <a:rPr b="0" lang="en-US"/>
+              <a:rPr lang="en-US" b="0"/>
               <a:t>28</a:t>
             </a:fld>
             <a:endParaRPr lang="en-US"/>
@@ -23318,7 +22930,7 @@
           <a:bodyPr wrap="square" lIns="0" tIns="0" rIns="0" bIns="0" rtlCol="0" anchor="ctr"/>
           <a:lstStyle/>
           <a:p>
-            <a:pPr indent="0" marL="0">
+            <a:pPr marL="0" indent="0">
               <a:buNone/>
             </a:pPr>
             <a:r>
@@ -23379,11 +22991,11 @@
           <a:bodyPr wrap="square" lIns="0" tIns="0" rIns="0" bIns="0" rtlCol="0" anchor="ctr"/>
           <a:lstStyle/>
           <a:p>
-            <a:pPr algn="ctr" indent="0" marL="0">
-              <a:buNone/>
-            </a:pPr>
-            <a:r>
-              <a:rPr lang="en-US" sz="900" b="1" spc="100" kern="0" dirty="0">
+            <a:pPr marL="0" indent="0" algn="ctr">
+              <a:buNone/>
+            </a:pPr>
+            <a:r>
+              <a:rPr lang="en-US" sz="900" b="1" kern="0" spc="100" dirty="0">
                 <a:solidFill>
                   <a:srgbClr val="FFFFFF"/>
                 </a:solidFill>
@@ -23399,14 +23011,14 @@
       </p:sp>
       <p:pic>
         <p:nvPicPr>
-          <p:cNvPr id="6" name="Image 0" descr="preencoded.png">    </p:cNvPr>
+          <p:cNvPr id="6" name="Image 0" descr="preencoded.png"/>
           <p:cNvPicPr>
             <a:picLocks noChangeAspect="1"/>
           </p:cNvPicPr>
           <p:nvPr/>
         </p:nvPicPr>
         <p:blipFill>
-          <a:blip r:embed="rId1"/>
+          <a:blip r:embed="rId3"/>
           <a:stretch>
             <a:fillRect/>
           </a:stretch>
@@ -23464,7 +23076,7 @@
           <a:bodyPr wrap="square" lIns="0" tIns="0" rIns="0" bIns="0" rtlCol="0" anchor="ctr"/>
           <a:lstStyle/>
           <a:p>
-            <a:pPr indent="0" marL="0">
+            <a:pPr marL="0" indent="0">
               <a:buNone/>
             </a:pPr>
             <a:r>
@@ -23503,7 +23115,7 @@
           <a:bodyPr wrap="square" lIns="0" tIns="0" rIns="0" bIns="0" rtlCol="0" anchor="t"/>
           <a:lstStyle/>
           <a:p>
-            <a:pPr indent="0" marL="0">
+            <a:pPr marL="0" indent="0">
               <a:lnSpc>
                 <a:spcPct val="108000"/>
               </a:lnSpc>
@@ -23523,7 +23135,7 @@
             <a:endParaRPr lang="en-US" sz="1200" dirty="0"/>
           </a:p>
           <a:p>
-            <a:pPr indent="0" marL="0">
+            <a:pPr marL="0" indent="0">
               <a:lnSpc>
                 <a:spcPct val="108000"/>
               </a:lnSpc>
@@ -23532,7 +23144,7 @@
             <a:endParaRPr lang="en-US" sz="1200" dirty="0"/>
           </a:p>
           <a:p>
-            <a:pPr indent="0" marL="0">
+            <a:pPr marL="0" indent="0">
               <a:lnSpc>
                 <a:spcPct val="108000"/>
               </a:lnSpc>
@@ -23552,7 +23164,7 @@
             <a:endParaRPr lang="en-US" sz="1200" dirty="0"/>
           </a:p>
           <a:p>
-            <a:pPr indent="0" marL="0">
+            <a:pPr marL="0" indent="0">
               <a:lnSpc>
                 <a:spcPct val="108000"/>
               </a:lnSpc>
@@ -23561,7 +23173,7 @@
             <a:endParaRPr lang="en-US" sz="1200" dirty="0"/>
           </a:p>
           <a:p>
-            <a:pPr indent="0" marL="0">
+            <a:pPr marL="0" indent="0">
               <a:lnSpc>
                 <a:spcPct val="108000"/>
               </a:lnSpc>
@@ -23625,7 +23237,7 @@
           <a:bodyPr wrap="square" lIns="0" tIns="0" rIns="0" bIns="0" rtlCol="0" anchor="ctr"/>
           <a:lstStyle/>
           <a:p>
-            <a:pPr indent="0" marL="0">
+            <a:pPr marL="0" indent="0">
               <a:buNone/>
             </a:pPr>
             <a:r>
@@ -23664,7 +23276,7 @@
           <a:bodyPr wrap="square" lIns="0" tIns="0" rIns="0" bIns="0" rtlCol="0" anchor="t"/>
           <a:lstStyle/>
           <a:p>
-            <a:pPr indent="0" marL="0">
+            <a:pPr marL="0" indent="0">
               <a:lnSpc>
                 <a:spcPct val="108000"/>
               </a:lnSpc>
@@ -23684,7 +23296,7 @@
             <a:endParaRPr lang="en-US" sz="1200" dirty="0"/>
           </a:p>
           <a:p>
-            <a:pPr indent="0" marL="0">
+            <a:pPr marL="0" indent="0">
               <a:lnSpc>
                 <a:spcPct val="108000"/>
               </a:lnSpc>
@@ -23693,7 +23305,7 @@
             <a:endParaRPr lang="en-US" sz="1200" dirty="0"/>
           </a:p>
           <a:p>
-            <a:pPr indent="0" marL="0">
+            <a:pPr marL="0" indent="0">
               <a:lnSpc>
                 <a:spcPct val="108000"/>
               </a:lnSpc>
@@ -23762,7 +23374,7 @@
           <a:bodyPr wrap="square" lIns="0" tIns="0" rIns="0" bIns="0" rtlCol="0" anchor="ctr"/>
           <a:lstStyle/>
           <a:p>
-            <a:pPr indent="0" marL="0">
+            <a:pPr marL="0" indent="0">
               <a:buNone/>
             </a:pPr>
             <a:r>
@@ -23801,7 +23413,7 @@
           <a:bodyPr wrap="square" lIns="0" tIns="0" rIns="0" bIns="0" rtlCol="0" anchor="t"/>
           <a:lstStyle/>
           <a:p>
-            <a:pPr indent="0" marL="0">
+            <a:pPr marL="0" indent="0">
               <a:buNone/>
             </a:pPr>
             <a:r>
@@ -23839,7 +23451,7 @@
           </a:prstGeom>
           <a:extLst>
             <a:ext uri="{C572A759-6A51-4108-AA02-DFA0A04FC94B}">
-              <ma14:wrappingTextBoxFlag xmlns:ma14="http://schemas.microsoft.com/office/mac/drawingml/2011/main" val="0"/>
+              <ma14:wrappingTextBoxFlag xmlns="" xmlns:ma14="http://schemas.microsoft.com/office/mac/drawingml/2011/main" val="0"/>
             </a:ext>
           </a:extLst>
         </p:spPr>
@@ -23860,7 +23472,7 @@
           <a:p>
             <a:pPr algn="l"/>
             <a:fld id="{F7021451-1387-4CA6-816F-3879F97B5CBC}" type="slidenum">
-              <a:rPr b="0" lang="en-US"/>
+              <a:rPr lang="en-US" b="0"/>
               <a:t>29</a:t>
             </a:fld>
             <a:endParaRPr lang="en-US"/>
@@ -23935,7 +23547,7 @@
           <a:bodyPr wrap="square" lIns="0" tIns="0" rIns="0" bIns="0" rtlCol="0" anchor="ctr"/>
           <a:lstStyle/>
           <a:p>
-            <a:pPr indent="0" marL="0">
+            <a:pPr marL="0" indent="0">
               <a:buNone/>
             </a:pPr>
             <a:r>
@@ -23974,7 +23586,7 @@
           <a:bodyPr wrap="square" lIns="0" tIns="0" rIns="0" bIns="0" rtlCol="0" anchor="t"/>
           <a:lstStyle/>
           <a:p>
-            <a:pPr indent="0" marL="0">
+            <a:pPr marL="0" indent="0">
               <a:lnSpc>
                 <a:spcPct val="100000"/>
               </a:lnSpc>
@@ -24043,11 +23655,11 @@
           <a:bodyPr wrap="square" lIns="0" tIns="0" rIns="0" bIns="0" rtlCol="0" anchor="ctr"/>
           <a:lstStyle/>
           <a:p>
-            <a:pPr algn="ctr" indent="0" marL="0">
-              <a:buNone/>
-            </a:pPr>
-            <a:r>
-              <a:rPr lang="en-US" sz="900" b="1" spc="100" kern="0" dirty="0">
+            <a:pPr marL="0" indent="0" algn="ctr">
+              <a:buNone/>
+            </a:pPr>
+            <a:r>
+              <a:rPr lang="en-US" sz="900" b="1" kern="0" spc="100" dirty="0">
                 <a:solidFill>
                   <a:srgbClr val="5A05F4"/>
                 </a:solidFill>
@@ -24063,14 +23675,14 @@
       </p:sp>
       <p:pic>
         <p:nvPicPr>
-          <p:cNvPr id="7" name="Image 0" descr="preencoded.png">    </p:cNvPr>
+          <p:cNvPr id="7" name="Image 0" descr="preencoded.png"/>
           <p:cNvPicPr>
             <a:picLocks noChangeAspect="1"/>
           </p:cNvPicPr>
           <p:nvPr/>
         </p:nvPicPr>
         <p:blipFill>
-          <a:blip r:embed="rId1"/>
+          <a:blip r:embed="rId3"/>
           <a:stretch>
             <a:fillRect/>
           </a:stretch>
@@ -24148,7 +23760,7 @@
           <a:bodyPr wrap="square" lIns="0" tIns="0" rIns="0" bIns="0" rtlCol="0" anchor="ctr"/>
           <a:lstStyle/>
           <a:p>
-            <a:pPr algn="ctr" indent="0" marL="0">
+            <a:pPr marL="0" indent="0" algn="ctr">
               <a:buNone/>
             </a:pPr>
             <a:r>
@@ -24187,7 +23799,7 @@
           <a:bodyPr wrap="square" lIns="0" tIns="0" rIns="0" bIns="0" rtlCol="0" anchor="ctr"/>
           <a:lstStyle/>
           <a:p>
-            <a:pPr indent="0" marL="0">
+            <a:pPr marL="0" indent="0">
               <a:buNone/>
             </a:pPr>
             <a:r>
@@ -24226,7 +23838,7 @@
           <a:bodyPr wrap="square" lIns="0" tIns="0" rIns="0" bIns="0" rtlCol="0" anchor="t"/>
           <a:lstStyle/>
           <a:p>
-            <a:pPr indent="0" marL="0">
+            <a:pPr marL="0" indent="0">
               <a:lnSpc>
                 <a:spcPct val="108000"/>
               </a:lnSpc>
@@ -24310,7 +23922,7 @@
           <a:bodyPr wrap="square" lIns="0" tIns="0" rIns="0" bIns="0" rtlCol="0" anchor="ctr"/>
           <a:lstStyle/>
           <a:p>
-            <a:pPr algn="ctr" indent="0" marL="0">
+            <a:pPr marL="0" indent="0" algn="ctr">
               <a:buNone/>
             </a:pPr>
             <a:r>
@@ -24349,7 +23961,7 @@
           <a:bodyPr wrap="square" lIns="0" tIns="0" rIns="0" bIns="0" rtlCol="0" anchor="ctr"/>
           <a:lstStyle/>
           <a:p>
-            <a:pPr indent="0" marL="0">
+            <a:pPr marL="0" indent="0">
               <a:buNone/>
             </a:pPr>
             <a:r>
@@ -24388,7 +24000,7 @@
           <a:bodyPr wrap="square" lIns="0" tIns="0" rIns="0" bIns="0" rtlCol="0" anchor="t"/>
           <a:lstStyle/>
           <a:p>
-            <a:pPr indent="0" marL="0">
+            <a:pPr marL="0" indent="0">
               <a:lnSpc>
                 <a:spcPct val="108000"/>
               </a:lnSpc>
@@ -24472,7 +24084,7 @@
           <a:bodyPr wrap="square" lIns="0" tIns="0" rIns="0" bIns="0" rtlCol="0" anchor="ctr"/>
           <a:lstStyle/>
           <a:p>
-            <a:pPr algn="ctr" indent="0" marL="0">
+            <a:pPr marL="0" indent="0" algn="ctr">
               <a:buNone/>
             </a:pPr>
             <a:r>
@@ -24511,7 +24123,7 @@
           <a:bodyPr wrap="square" lIns="0" tIns="0" rIns="0" bIns="0" rtlCol="0" anchor="ctr"/>
           <a:lstStyle/>
           <a:p>
-            <a:pPr indent="0" marL="0">
+            <a:pPr marL="0" indent="0">
               <a:buNone/>
             </a:pPr>
             <a:r>
@@ -24550,7 +24162,7 @@
           <a:bodyPr wrap="square" lIns="0" tIns="0" rIns="0" bIns="0" rtlCol="0" anchor="t"/>
           <a:lstStyle/>
           <a:p>
-            <a:pPr indent="0" marL="0">
+            <a:pPr marL="0" indent="0">
               <a:lnSpc>
                 <a:spcPct val="108000"/>
               </a:lnSpc>
@@ -24634,7 +24246,7 @@
           <a:bodyPr wrap="square" lIns="0" tIns="0" rIns="0" bIns="0" rtlCol="0" anchor="ctr"/>
           <a:lstStyle/>
           <a:p>
-            <a:pPr algn="ctr" indent="0" marL="0">
+            <a:pPr marL="0" indent="0" algn="ctr">
               <a:buNone/>
             </a:pPr>
             <a:r>
@@ -24673,7 +24285,7 @@
           <a:bodyPr wrap="square" lIns="0" tIns="0" rIns="0" bIns="0" rtlCol="0" anchor="ctr"/>
           <a:lstStyle/>
           <a:p>
-            <a:pPr indent="0" marL="0">
+            <a:pPr marL="0" indent="0">
               <a:buNone/>
             </a:pPr>
             <a:r>
@@ -24712,7 +24324,7 @@
           <a:bodyPr wrap="square" lIns="0" tIns="0" rIns="0" bIns="0" rtlCol="0" anchor="t"/>
           <a:lstStyle/>
           <a:p>
-            <a:pPr indent="0" marL="0">
+            <a:pPr marL="0" indent="0">
               <a:lnSpc>
                 <a:spcPct val="108000"/>
               </a:lnSpc>
@@ -24796,7 +24408,7 @@
           <a:bodyPr wrap="square" lIns="0" tIns="0" rIns="0" bIns="0" rtlCol="0" anchor="ctr"/>
           <a:lstStyle/>
           <a:p>
-            <a:pPr algn="ctr" indent="0" marL="0">
+            <a:pPr marL="0" indent="0" algn="ctr">
               <a:buNone/>
             </a:pPr>
             <a:r>
@@ -24835,7 +24447,7 @@
           <a:bodyPr wrap="square" lIns="0" tIns="0" rIns="0" bIns="0" rtlCol="0" anchor="ctr"/>
           <a:lstStyle/>
           <a:p>
-            <a:pPr indent="0" marL="0">
+            <a:pPr marL="0" indent="0">
               <a:buNone/>
             </a:pPr>
             <a:r>
@@ -24874,7 +24486,7 @@
           <a:bodyPr wrap="square" lIns="0" tIns="0" rIns="0" bIns="0" rtlCol="0" anchor="t"/>
           <a:lstStyle/>
           <a:p>
-            <a:pPr indent="0" marL="0">
+            <a:pPr marL="0" indent="0">
               <a:lnSpc>
                 <a:spcPct val="108000"/>
               </a:lnSpc>
@@ -24958,7 +24570,7 @@
           <a:bodyPr wrap="square" lIns="0" tIns="0" rIns="0" bIns="0" rtlCol="0" anchor="ctr"/>
           <a:lstStyle/>
           <a:p>
-            <a:pPr algn="ctr" indent="0" marL="0">
+            <a:pPr marL="0" indent="0" algn="ctr">
               <a:buNone/>
             </a:pPr>
             <a:r>
@@ -24997,7 +24609,7 @@
           <a:bodyPr wrap="square" lIns="0" tIns="0" rIns="0" bIns="0" rtlCol="0" anchor="ctr"/>
           <a:lstStyle/>
           <a:p>
-            <a:pPr indent="0" marL="0">
+            <a:pPr marL="0" indent="0">
               <a:buNone/>
             </a:pPr>
             <a:r>
@@ -25036,7 +24648,7 @@
           <a:bodyPr wrap="square" lIns="0" tIns="0" rIns="0" bIns="0" rtlCol="0" anchor="t"/>
           <a:lstStyle/>
           <a:p>
-            <a:pPr indent="0" marL="0">
+            <a:pPr marL="0" indent="0">
               <a:lnSpc>
                 <a:spcPct val="108000"/>
               </a:lnSpc>
@@ -25059,7 +24671,7 @@
       </p:sp>
       <p:sp>
         <p:nvSpPr>
-          <p:cNvPr id="25" name="Slide Number Placeholder 0"/>
+          <p:cNvPr id="38" name="Slide Number Placeholder 0"/>
           <p:cNvSpPr>
             <a:spLocks noGrp="1"/>
           </p:cNvSpPr>
@@ -25077,7 +24689,7 @@
           </a:prstGeom>
           <a:extLst>
             <a:ext uri="{C572A759-6A51-4108-AA02-DFA0A04FC94B}">
-              <ma14:wrappingTextBoxFlag xmlns:ma14="http://schemas.microsoft.com/office/mac/drawingml/2011/main" val="0"/>
+              <ma14:wrappingTextBoxFlag xmlns="" xmlns:ma14="http://schemas.microsoft.com/office/mac/drawingml/2011/main" val="0"/>
             </a:ext>
           </a:extLst>
         </p:spPr>
@@ -25098,7 +24710,7 @@
           <a:p>
             <a:pPr algn="l"/>
             <a:fld id="{F7021451-1387-4CA6-816F-3879F97B5CBC}" type="slidenum">
-              <a:rPr b="0" lang="en-US"/>
+              <a:rPr lang="en-US" b="0"/>
               <a:t>3</a:t>
             </a:fld>
             <a:endParaRPr lang="en-US"/>
@@ -25151,11 +24763,11 @@
           <a:bodyPr wrap="square" lIns="0" tIns="0" rIns="0" bIns="0" rtlCol="0" anchor="ctr"/>
           <a:lstStyle/>
           <a:p>
-            <a:pPr indent="0" marL="0">
-              <a:buNone/>
-            </a:pPr>
-            <a:r>
-              <a:rPr lang="en-US" sz="1200" b="1" spc="400" kern="0" dirty="0">
+            <a:pPr marL="0" indent="0">
+              <a:buNone/>
+            </a:pPr>
+            <a:r>
+              <a:rPr lang="en-US" sz="1200" b="1" kern="0" spc="400" dirty="0">
                 <a:solidFill>
                   <a:srgbClr val="FFFFFF"/>
                 </a:solidFill>
@@ -25190,11 +24802,11 @@
           <a:bodyPr wrap="square" lIns="0" tIns="0" rIns="0" bIns="0" rtlCol="0" anchor="ctr"/>
           <a:lstStyle/>
           <a:p>
-            <a:pPr indent="0" marL="0">
-              <a:buNone/>
-            </a:pPr>
-            <a:r>
-              <a:rPr lang="en-US" sz="1100" b="1" spc="300" kern="0" dirty="0">
+            <a:pPr marL="0" indent="0">
+              <a:buNone/>
+            </a:pPr>
+            <a:r>
+              <a:rPr lang="en-US" sz="1100" b="1" kern="0" spc="300" dirty="0">
                 <a:solidFill>
                   <a:srgbClr val="C4B3F5"/>
                 </a:solidFill>
@@ -25249,7 +24861,7 @@
           <a:bodyPr wrap="square" lIns="0" tIns="0" rIns="0" bIns="0" rtlCol="0" anchor="t"/>
           <a:lstStyle/>
           <a:p>
-            <a:pPr indent="0" marL="0">
+            <a:pPr marL="0" indent="0">
               <a:lnSpc>
                 <a:spcPct val="110000"/>
               </a:lnSpc>
@@ -25311,7 +24923,7 @@
           <a:bodyPr wrap="square" lIns="0" tIns="0" rIns="0" bIns="0" rtlCol="0" anchor="t"/>
           <a:lstStyle/>
           <a:p>
-            <a:pPr indent="0" marL="0">
+            <a:pPr marL="0" indent="0">
               <a:lnSpc>
                 <a:spcPct val="110000"/>
               </a:lnSpc>
@@ -25373,7 +24985,7 @@
           <a:bodyPr wrap="square" lIns="0" tIns="0" rIns="0" bIns="0" rtlCol="0" anchor="t"/>
           <a:lstStyle/>
           <a:p>
-            <a:pPr indent="0" marL="0">
+            <a:pPr marL="0" indent="0">
               <a:lnSpc>
                 <a:spcPct val="110000"/>
               </a:lnSpc>
@@ -25435,7 +25047,7 @@
           <a:bodyPr wrap="square" lIns="0" tIns="0" rIns="0" bIns="0" rtlCol="0" anchor="t"/>
           <a:lstStyle/>
           <a:p>
-            <a:pPr indent="0" marL="0">
+            <a:pPr marL="0" indent="0">
               <a:lnSpc>
                 <a:spcPct val="110000"/>
               </a:lnSpc>
@@ -25497,7 +25109,7 @@
           <a:bodyPr wrap="square" lIns="0" tIns="0" rIns="0" bIns="0" rtlCol="0" anchor="t"/>
           <a:lstStyle/>
           <a:p>
-            <a:pPr indent="0" marL="0">
+            <a:pPr marL="0" indent="0">
               <a:lnSpc>
                 <a:spcPct val="110000"/>
               </a:lnSpc>
@@ -25566,7 +25178,7 @@
           <a:bodyPr wrap="square" lIns="0" tIns="0" rIns="0" bIns="0" rtlCol="0" anchor="ctr"/>
           <a:lstStyle/>
           <a:p>
-            <a:pPr indent="0" marL="0">
+            <a:pPr marL="0" indent="0">
               <a:buNone/>
             </a:pPr>
             <a:r>
@@ -25605,7 +25217,7 @@
           <a:bodyPr wrap="square" lIns="0" tIns="0" rIns="0" bIns="0" rtlCol="0" anchor="t"/>
           <a:lstStyle/>
           <a:p>
-            <a:pPr indent="0" marL="0">
+            <a:pPr marL="0" indent="0">
               <a:lnSpc>
                 <a:spcPct val="115000"/>
               </a:lnSpc>
@@ -25672,11 +25284,11 @@
           <a:bodyPr wrap="square" lIns="0" tIns="0" rIns="0" bIns="0" rtlCol="0" anchor="ctr"/>
           <a:lstStyle/>
           <a:p>
-            <a:pPr indent="0" marL="0">
-              <a:buNone/>
-            </a:pPr>
-            <a:r>
-              <a:rPr lang="en-US" sz="1200" b="1" spc="400" kern="0" dirty="0">
+            <a:pPr marL="0" indent="0">
+              <a:buNone/>
+            </a:pPr>
+            <a:r>
+              <a:rPr lang="en-US" sz="1200" b="1" kern="0" spc="400" dirty="0">
                 <a:solidFill>
                   <a:srgbClr val="FFFFFF"/>
                 </a:solidFill>
@@ -25711,7 +25323,7 @@
           <a:bodyPr wrap="square" lIns="0" tIns="0" rIns="0" bIns="0" rtlCol="0" anchor="ctr"/>
           <a:lstStyle/>
           <a:p>
-            <a:pPr indent="0" marL="0">
+            <a:pPr marL="0" indent="0">
               <a:buNone/>
             </a:pPr>
             <a:r>
@@ -25797,7 +25409,7 @@
           <a:bodyPr wrap="square" lIns="0" tIns="0" rIns="0" bIns="0" rtlCol="0" anchor="ctr"/>
           <a:lstStyle/>
           <a:p>
-            <a:pPr indent="0" marL="0">
+            <a:pPr marL="0" indent="0">
               <a:buNone/>
             </a:pPr>
             <a:r>
@@ -25863,11 +25475,11 @@
           <a:bodyPr wrap="square" lIns="0" tIns="0" rIns="0" bIns="0" rtlCol="0" anchor="ctr"/>
           <a:lstStyle/>
           <a:p>
-            <a:pPr algn="ctr" indent="0" marL="0">
-              <a:buNone/>
-            </a:pPr>
-            <a:r>
-              <a:rPr lang="en-US" sz="900" b="1" spc="100" kern="0" dirty="0">
+            <a:pPr marL="0" indent="0" algn="ctr">
+              <a:buNone/>
+            </a:pPr>
+            <a:r>
+              <a:rPr lang="en-US" sz="900" b="1" kern="0" spc="100" dirty="0">
                 <a:solidFill>
                   <a:srgbClr val="5A05F4"/>
                 </a:solidFill>
@@ -25883,14 +25495,14 @@
       </p:sp>
       <p:pic>
         <p:nvPicPr>
-          <p:cNvPr id="6" name="Image 0" descr="preencoded.png">    </p:cNvPr>
+          <p:cNvPr id="6" name="Image 0" descr="preencoded.png"/>
           <p:cNvPicPr>
             <a:picLocks noChangeAspect="1"/>
           </p:cNvPicPr>
           <p:nvPr/>
         </p:nvPicPr>
         <p:blipFill>
-          <a:blip r:embed="rId1"/>
+          <a:blip r:embed="rId3"/>
           <a:stretch>
             <a:fillRect/>
           </a:stretch>
@@ -25968,7 +25580,7 @@
           <a:bodyPr wrap="square" lIns="0" tIns="0" rIns="0" bIns="0" rtlCol="0" anchor="ctr"/>
           <a:lstStyle/>
           <a:p>
-            <a:pPr algn="ctr" indent="0" marL="0">
+            <a:pPr marL="0" indent="0" algn="ctr">
               <a:buNone/>
             </a:pPr>
             <a:r>
@@ -26007,7 +25619,7 @@
           <a:bodyPr wrap="square" lIns="0" tIns="0" rIns="0" bIns="0" rtlCol="0" anchor="ctr"/>
           <a:lstStyle/>
           <a:p>
-            <a:pPr indent="0" marL="0">
+            <a:pPr marL="0" indent="0">
               <a:buNone/>
             </a:pPr>
             <a:r>
@@ -26088,7 +25700,7 @@
           <a:bodyPr wrap="square" lIns="0" tIns="0" rIns="0" bIns="0" rtlCol="0" anchor="ctr"/>
           <a:lstStyle/>
           <a:p>
-            <a:pPr algn="ctr" indent="0" marL="0">
+            <a:pPr marL="0" indent="0" algn="ctr">
               <a:buNone/>
             </a:pPr>
             <a:r>
@@ -26127,7 +25739,7 @@
           <a:bodyPr wrap="square" lIns="0" tIns="0" rIns="0" bIns="0" rtlCol="0" anchor="ctr"/>
           <a:lstStyle/>
           <a:p>
-            <a:pPr indent="0" marL="0">
+            <a:pPr marL="0" indent="0">
               <a:buNone/>
             </a:pPr>
             <a:r>
@@ -26208,7 +25820,7 @@
           <a:bodyPr wrap="square" lIns="0" tIns="0" rIns="0" bIns="0" rtlCol="0" anchor="ctr"/>
           <a:lstStyle/>
           <a:p>
-            <a:pPr algn="ctr" indent="0" marL="0">
+            <a:pPr marL="0" indent="0" algn="ctr">
               <a:buNone/>
             </a:pPr>
             <a:r>
@@ -26247,7 +25859,7 @@
           <a:bodyPr wrap="square" lIns="0" tIns="0" rIns="0" bIns="0" rtlCol="0" anchor="ctr"/>
           <a:lstStyle/>
           <a:p>
-            <a:pPr indent="0" marL="0">
+            <a:pPr marL="0" indent="0">
               <a:buNone/>
             </a:pPr>
             <a:r>
@@ -26328,7 +25940,7 @@
           <a:bodyPr wrap="square" lIns="0" tIns="0" rIns="0" bIns="0" rtlCol="0" anchor="ctr"/>
           <a:lstStyle/>
           <a:p>
-            <a:pPr algn="ctr" indent="0" marL="0">
+            <a:pPr marL="0" indent="0" algn="ctr">
               <a:buNone/>
             </a:pPr>
             <a:r>
@@ -26367,7 +25979,7 @@
           <a:bodyPr wrap="square" lIns="0" tIns="0" rIns="0" bIns="0" rtlCol="0" anchor="ctr"/>
           <a:lstStyle/>
           <a:p>
-            <a:pPr indent="0" marL="0">
+            <a:pPr marL="0" indent="0">
               <a:buNone/>
             </a:pPr>
             <a:r>
@@ -26448,7 +26060,7 @@
           <a:bodyPr wrap="square" lIns="0" tIns="0" rIns="0" bIns="0" rtlCol="0" anchor="ctr"/>
           <a:lstStyle/>
           <a:p>
-            <a:pPr algn="ctr" indent="0" marL="0">
+            <a:pPr marL="0" indent="0" algn="ctr">
               <a:buNone/>
             </a:pPr>
             <a:r>
@@ -26487,7 +26099,7 @@
           <a:bodyPr wrap="square" lIns="0" tIns="0" rIns="0" bIns="0" rtlCol="0" anchor="ctr"/>
           <a:lstStyle/>
           <a:p>
-            <a:pPr indent="0" marL="0">
+            <a:pPr marL="0" indent="0">
               <a:buNone/>
             </a:pPr>
             <a:r>
@@ -26568,7 +26180,7 @@
           <a:bodyPr wrap="square" lIns="0" tIns="0" rIns="0" bIns="0" rtlCol="0" anchor="ctr"/>
           <a:lstStyle/>
           <a:p>
-            <a:pPr algn="ctr" indent="0" marL="0">
+            <a:pPr marL="0" indent="0" algn="ctr">
               <a:buNone/>
             </a:pPr>
             <a:r>
@@ -26607,7 +26219,7 @@
           <a:bodyPr wrap="square" lIns="0" tIns="0" rIns="0" bIns="0" rtlCol="0" anchor="ctr"/>
           <a:lstStyle/>
           <a:p>
-            <a:pPr indent="0" marL="0">
+            <a:pPr marL="0" indent="0">
               <a:buNone/>
             </a:pPr>
             <a:r>
@@ -26688,7 +26300,7 @@
           <a:bodyPr wrap="square" lIns="0" tIns="0" rIns="0" bIns="0" rtlCol="0" anchor="ctr"/>
           <a:lstStyle/>
           <a:p>
-            <a:pPr algn="ctr" indent="0" marL="0">
+            <a:pPr marL="0" indent="0" algn="ctr">
               <a:buNone/>
             </a:pPr>
             <a:r>
@@ -26727,7 +26339,7 @@
           <a:bodyPr wrap="square" lIns="0" tIns="0" rIns="0" bIns="0" rtlCol="0" anchor="ctr"/>
           <a:lstStyle/>
           <a:p>
-            <a:pPr indent="0" marL="0">
+            <a:pPr marL="0" indent="0">
               <a:buNone/>
             </a:pPr>
             <a:r>
@@ -26808,7 +26420,7 @@
           <a:bodyPr wrap="square" lIns="0" tIns="0" rIns="0" bIns="0" rtlCol="0" anchor="ctr"/>
           <a:lstStyle/>
           <a:p>
-            <a:pPr algn="ctr" indent="0" marL="0">
+            <a:pPr marL="0" indent="0" algn="ctr">
               <a:buNone/>
             </a:pPr>
             <a:r>
@@ -26847,7 +26459,7 @@
           <a:bodyPr wrap="square" lIns="0" tIns="0" rIns="0" bIns="0" rtlCol="0" anchor="ctr"/>
           <a:lstStyle/>
           <a:p>
-            <a:pPr indent="0" marL="0">
+            <a:pPr marL="0" indent="0">
               <a:buNone/>
             </a:pPr>
             <a:r>
@@ -26928,7 +26540,7 @@
           <a:bodyPr wrap="square" lIns="0" tIns="0" rIns="0" bIns="0" rtlCol="0" anchor="ctr"/>
           <a:lstStyle/>
           <a:p>
-            <a:pPr algn="ctr" indent="0" marL="0">
+            <a:pPr marL="0" indent="0" algn="ctr">
               <a:buNone/>
             </a:pPr>
             <a:r>
@@ -26967,7 +26579,7 @@
           <a:bodyPr wrap="square" lIns="0" tIns="0" rIns="0" bIns="0" rtlCol="0" anchor="ctr"/>
           <a:lstStyle/>
           <a:p>
-            <a:pPr indent="0" marL="0">
+            <a:pPr marL="0" indent="0">
               <a:buNone/>
             </a:pPr>
             <a:r>
@@ -27048,7 +26660,7 @@
           <a:bodyPr wrap="square" lIns="0" tIns="0" rIns="0" bIns="0" rtlCol="0" anchor="ctr"/>
           <a:lstStyle/>
           <a:p>
-            <a:pPr algn="ctr" indent="0" marL="0">
+            <a:pPr marL="0" indent="0" algn="ctr">
               <a:buNone/>
             </a:pPr>
             <a:r>
@@ -27087,7 +26699,7 @@
           <a:bodyPr wrap="square" lIns="0" tIns="0" rIns="0" bIns="0" rtlCol="0" anchor="ctr"/>
           <a:lstStyle/>
           <a:p>
-            <a:pPr indent="0" marL="0">
+            <a:pPr marL="0" indent="0">
               <a:buNone/>
             </a:pPr>
             <a:r>
@@ -27168,7 +26780,7 @@
           <a:bodyPr wrap="square" lIns="0" tIns="0" rIns="0" bIns="0" rtlCol="0" anchor="ctr"/>
           <a:lstStyle/>
           <a:p>
-            <a:pPr algn="ctr" indent="0" marL="0">
+            <a:pPr marL="0" indent="0" algn="ctr">
               <a:buNone/>
             </a:pPr>
             <a:r>
@@ -27207,7 +26819,7 @@
           <a:bodyPr wrap="square" lIns="0" tIns="0" rIns="0" bIns="0" rtlCol="0" anchor="ctr"/>
           <a:lstStyle/>
           <a:p>
-            <a:pPr indent="0" marL="0">
+            <a:pPr marL="0" indent="0">
               <a:buNone/>
             </a:pPr>
             <a:r>
@@ -27234,7 +26846,7 @@
         <p:spPr>
           <a:xfrm>
             <a:off x="566928" y="5779008"/>
-            <a:ext cx="11064240" cy="402336"/>
+            <a:ext cx="10927080" cy="402336"/>
           </a:xfrm>
           <a:prstGeom prst="roundRect">
             <a:avLst>
@@ -27273,7 +26885,7 @@
           <a:bodyPr wrap="square" lIns="0" tIns="0" rIns="0" bIns="0" rtlCol="0" anchor="ctr"/>
           <a:lstStyle/>
           <a:p>
-            <a:pPr indent="0" marL="0">
+            <a:pPr marL="0" indent="0">
               <a:lnSpc>
                 <a:spcPct val="112000"/>
               </a:lnSpc>
@@ -27296,7 +26908,7 @@
       </p:sp>
       <p:sp>
         <p:nvSpPr>
-          <p:cNvPr id="25" name="Slide Number Placeholder 0"/>
+          <p:cNvPr id="53" name="Slide Number Placeholder 0"/>
           <p:cNvSpPr>
             <a:spLocks noGrp="1"/>
           </p:cNvSpPr>
@@ -27314,7 +26926,7 @@
           </a:prstGeom>
           <a:extLst>
             <a:ext uri="{C572A759-6A51-4108-AA02-DFA0A04FC94B}">
-              <ma14:wrappingTextBoxFlag xmlns:ma14="http://schemas.microsoft.com/office/mac/drawingml/2011/main" val="0"/>
+              <ma14:wrappingTextBoxFlag xmlns="" xmlns:ma14="http://schemas.microsoft.com/office/mac/drawingml/2011/main" val="0"/>
             </a:ext>
           </a:extLst>
         </p:spPr>
@@ -27335,7 +26947,7 @@
           <a:p>
             <a:pPr algn="l"/>
             <a:fld id="{F7021451-1387-4CA6-816F-3879F97B5CBC}" type="slidenum">
-              <a:rPr b="0" lang="en-US"/>
+              <a:rPr lang="en-US" b="0"/>
               <a:t>4</a:t>
             </a:fld>
             <a:endParaRPr lang="en-US"/>
@@ -27410,7 +27022,7 @@
           <a:bodyPr wrap="square" lIns="0" tIns="0" rIns="0" bIns="0" rtlCol="0" anchor="ctr"/>
           <a:lstStyle/>
           <a:p>
-            <a:pPr indent="0" marL="0">
+            <a:pPr marL="0" indent="0">
               <a:buNone/>
             </a:pPr>
             <a:r>
@@ -27449,7 +27061,7 @@
           <a:bodyPr wrap="square" lIns="0" tIns="0" rIns="0" bIns="0" rtlCol="0" anchor="t"/>
           <a:lstStyle/>
           <a:p>
-            <a:pPr indent="0" marL="0">
+            <a:pPr marL="0" indent="0">
               <a:lnSpc>
                 <a:spcPct val="100000"/>
               </a:lnSpc>
@@ -27518,11 +27130,11 @@
           <a:bodyPr wrap="square" lIns="0" tIns="0" rIns="0" bIns="0" rtlCol="0" anchor="ctr"/>
           <a:lstStyle/>
           <a:p>
-            <a:pPr algn="ctr" indent="0" marL="0">
-              <a:buNone/>
-            </a:pPr>
-            <a:r>
-              <a:rPr lang="en-US" sz="900" b="1" spc="100" kern="0" dirty="0">
+            <a:pPr marL="0" indent="0" algn="ctr">
+              <a:buNone/>
+            </a:pPr>
+            <a:r>
+              <a:rPr lang="en-US" sz="900" b="1" kern="0" spc="100" dirty="0">
                 <a:solidFill>
                   <a:srgbClr val="5A05F4"/>
                 </a:solidFill>
@@ -27538,14 +27150,14 @@
       </p:sp>
       <p:pic>
         <p:nvPicPr>
-          <p:cNvPr id="7" name="Image 0" descr="preencoded.png">    </p:cNvPr>
+          <p:cNvPr id="7" name="Image 0" descr="preencoded.png"/>
           <p:cNvPicPr>
             <a:picLocks noChangeAspect="1"/>
           </p:cNvPicPr>
           <p:nvPr/>
         </p:nvPicPr>
         <p:blipFill>
-          <a:blip r:embed="rId1"/>
+          <a:blip r:embed="rId3"/>
           <a:stretch>
             <a:fillRect/>
           </a:stretch>
@@ -27603,7 +27215,7 @@
           <a:bodyPr wrap="square" lIns="0" tIns="0" rIns="0" bIns="0" rtlCol="0" anchor="ctr"/>
           <a:lstStyle/>
           <a:p>
-            <a:pPr algn="ctr" indent="0" marL="0">
+            <a:pPr marL="0" indent="0" algn="ctr">
               <a:buNone/>
             </a:pPr>
             <a:r>
@@ -27669,7 +27281,7 @@
           <a:bodyPr wrap="square" lIns="0" tIns="0" rIns="0" bIns="0" rtlCol="0" anchor="ctr"/>
           <a:lstStyle/>
           <a:p>
-            <a:pPr indent="0" marL="0">
+            <a:pPr marL="0" indent="0">
               <a:buNone/>
             </a:pPr>
             <a:r>
@@ -27683,9 +27295,6 @@
               </a:rPr>
               <a:t>Основа + промпти   </a:t>
             </a:r>
-            <a:pPr indent="0" marL="0">
-              <a:buNone/>
-            </a:pPr>
             <a:r>
               <a:rPr lang="en-US" sz="1150" dirty="0">
                 <a:solidFill>
@@ -27744,7 +27353,7 @@
           <a:bodyPr wrap="square" lIns="0" tIns="0" rIns="0" bIns="0" rtlCol="0" anchor="ctr"/>
           <a:lstStyle/>
           <a:p>
-            <a:pPr algn="ctr" indent="0" marL="0">
+            <a:pPr marL="0" indent="0" algn="ctr">
               <a:buNone/>
             </a:pPr>
             <a:r>
@@ -27810,7 +27419,7 @@
           <a:bodyPr wrap="square" lIns="0" tIns="0" rIns="0" bIns="0" rtlCol="0" anchor="ctr"/>
           <a:lstStyle/>
           <a:p>
-            <a:pPr indent="0" marL="0">
+            <a:pPr marL="0" indent="0">
               <a:buNone/>
             </a:pPr>
             <a:r>
@@ -27824,9 +27433,6 @@
               </a:rPr>
               <a:t>Routing + cost   </a:t>
             </a:r>
-            <a:pPr indent="0" marL="0">
-              <a:buNone/>
-            </a:pPr>
             <a:r>
               <a:rPr lang="en-US" sz="1150" dirty="0">
                 <a:solidFill>
@@ -27885,7 +27491,7 @@
           <a:bodyPr wrap="square" lIns="0" tIns="0" rIns="0" bIns="0" rtlCol="0" anchor="ctr"/>
           <a:lstStyle/>
           <a:p>
-            <a:pPr algn="ctr" indent="0" marL="0">
+            <a:pPr marL="0" indent="0" algn="ctr">
               <a:buNone/>
             </a:pPr>
             <a:r>
@@ -27951,7 +27557,7 @@
           <a:bodyPr wrap="square" lIns="0" tIns="0" rIns="0" bIns="0" rtlCol="0" anchor="ctr"/>
           <a:lstStyle/>
           <a:p>
-            <a:pPr indent="0" marL="0">
+            <a:pPr marL="0" indent="0">
               <a:buNone/>
             </a:pPr>
             <a:r>
@@ -27965,9 +27571,6 @@
               </a:rPr>
               <a:t>Кеш + tools   </a:t>
             </a:r>
-            <a:pPr indent="0" marL="0">
-              <a:buNone/>
-            </a:pPr>
             <a:r>
               <a:rPr lang="en-US" sz="1150" dirty="0">
                 <a:solidFill>
@@ -28026,7 +27629,7 @@
           <a:bodyPr wrap="square" lIns="0" tIns="0" rIns="0" bIns="0" rtlCol="0" anchor="ctr"/>
           <a:lstStyle/>
           <a:p>
-            <a:pPr algn="ctr" indent="0" marL="0">
+            <a:pPr marL="0" indent="0" algn="ctr">
               <a:buNone/>
             </a:pPr>
             <a:r>
@@ -28092,7 +27695,7 @@
           <a:bodyPr wrap="square" lIns="0" tIns="0" rIns="0" bIns="0" rtlCol="0" anchor="ctr"/>
           <a:lstStyle/>
           <a:p>
-            <a:pPr indent="0" marL="0">
+            <a:pPr marL="0" indent="0">
               <a:buNone/>
             </a:pPr>
             <a:r>
@@ -28106,9 +27709,6 @@
               </a:rPr>
               <a:t>Надійність + безпека   </a:t>
             </a:r>
-            <a:pPr indent="0" marL="0">
-              <a:buNone/>
-            </a:pPr>
             <a:r>
               <a:rPr lang="en-US" sz="1150" dirty="0">
                 <a:solidFill>
@@ -28167,7 +27767,7 @@
           <a:bodyPr wrap="square" lIns="0" tIns="0" rIns="0" bIns="0" rtlCol="0" anchor="ctr"/>
           <a:lstStyle/>
           <a:p>
-            <a:pPr algn="ctr" indent="0" marL="0">
+            <a:pPr marL="0" indent="0" algn="ctr">
               <a:buNone/>
             </a:pPr>
             <a:r>
@@ -28233,7 +27833,7 @@
           <a:bodyPr wrap="square" lIns="0" tIns="0" rIns="0" bIns="0" rtlCol="0" anchor="ctr"/>
           <a:lstStyle/>
           <a:p>
-            <a:pPr indent="0" marL="0">
+            <a:pPr marL="0" indent="0">
               <a:buNone/>
             </a:pPr>
             <a:r>
@@ -28247,9 +27847,6 @@
               </a:rPr>
               <a:t>Observability + evals   </a:t>
             </a:r>
-            <a:pPr indent="0" marL="0">
-              <a:buNone/>
-            </a:pPr>
             <a:r>
               <a:rPr lang="en-US" sz="1150" dirty="0">
                 <a:solidFill>
@@ -28308,7 +27905,7 @@
           <a:bodyPr wrap="square" lIns="0" tIns="0" rIns="0" bIns="0" rtlCol="0" anchor="ctr"/>
           <a:lstStyle/>
           <a:p>
-            <a:pPr algn="ctr" indent="0" marL="0">
+            <a:pPr marL="0" indent="0" algn="ctr">
               <a:buNone/>
             </a:pPr>
             <a:r>
@@ -28374,7 +27971,7 @@
           <a:bodyPr wrap="square" lIns="0" tIns="0" rIns="0" bIns="0" rtlCol="0" anchor="ctr"/>
           <a:lstStyle/>
           <a:p>
-            <a:pPr indent="0" marL="0">
+            <a:pPr marL="0" indent="0">
               <a:buNone/>
             </a:pPr>
             <a:r>
@@ -28388,9 +27985,6 @@
               </a:rPr>
               <a:t>CI + фінал   </a:t>
             </a:r>
-            <a:pPr indent="0" marL="0">
-              <a:buNone/>
-            </a:pPr>
             <a:r>
               <a:rPr lang="en-US" sz="1150" dirty="0">
                 <a:solidFill>
@@ -28408,7 +28002,7 @@
       </p:sp>
       <p:sp>
         <p:nvSpPr>
-          <p:cNvPr id="25" name="Slide Number Placeholder 0"/>
+          <p:cNvPr id="32" name="Slide Number Placeholder 0"/>
           <p:cNvSpPr>
             <a:spLocks noGrp="1"/>
           </p:cNvSpPr>
@@ -28426,7 +28020,7 @@
           </a:prstGeom>
           <a:extLst>
             <a:ext uri="{C572A759-6A51-4108-AA02-DFA0A04FC94B}">
-              <ma14:wrappingTextBoxFlag xmlns:ma14="http://schemas.microsoft.com/office/mac/drawingml/2011/main" val="0"/>
+              <ma14:wrappingTextBoxFlag xmlns="" xmlns:ma14="http://schemas.microsoft.com/office/mac/drawingml/2011/main" val="0"/>
             </a:ext>
           </a:extLst>
         </p:spPr>
@@ -28447,7 +28041,7 @@
           <a:p>
             <a:pPr algn="l"/>
             <a:fld id="{F7021451-1387-4CA6-816F-3879F97B5CBC}" type="slidenum">
-              <a:rPr b="0" lang="en-US"/>
+              <a:rPr lang="en-US" b="0"/>
               <a:t>5</a:t>
             </a:fld>
             <a:endParaRPr lang="en-US"/>
@@ -28522,7 +28116,7 @@
           <a:bodyPr wrap="square" lIns="0" tIns="0" rIns="0" bIns="0" rtlCol="0" anchor="ctr"/>
           <a:lstStyle/>
           <a:p>
-            <a:pPr indent="0" marL="0">
+            <a:pPr marL="0" indent="0">
               <a:buNone/>
             </a:pPr>
             <a:r>
@@ -28561,7 +28155,7 @@
           <a:bodyPr wrap="square" lIns="0" tIns="0" rIns="0" bIns="0" rtlCol="0" anchor="t"/>
           <a:lstStyle/>
           <a:p>
-            <a:pPr indent="0" marL="0">
+            <a:pPr marL="0" indent="0">
               <a:lnSpc>
                 <a:spcPct val="100000"/>
               </a:lnSpc>
@@ -28630,11 +28224,11 @@
           <a:bodyPr wrap="square" lIns="0" tIns="0" rIns="0" bIns="0" rtlCol="0" anchor="ctr"/>
           <a:lstStyle/>
           <a:p>
-            <a:pPr algn="ctr" indent="0" marL="0">
-              <a:buNone/>
-            </a:pPr>
-            <a:r>
-              <a:rPr lang="en-US" sz="900" b="1" spc="100" kern="0" dirty="0">
+            <a:pPr marL="0" indent="0" algn="ctr">
+              <a:buNone/>
+            </a:pPr>
+            <a:r>
+              <a:rPr lang="en-US" sz="900" b="1" kern="0" spc="100" dirty="0">
                 <a:solidFill>
                   <a:srgbClr val="5A05F4"/>
                 </a:solidFill>
@@ -28650,14 +28244,14 @@
       </p:sp>
       <p:pic>
         <p:nvPicPr>
-          <p:cNvPr id="7" name="Image 0" descr="preencoded.png">    </p:cNvPr>
+          <p:cNvPr id="7" name="Image 0" descr="preencoded.png"/>
           <p:cNvPicPr>
             <a:picLocks noChangeAspect="1"/>
           </p:cNvPicPr>
           <p:nvPr/>
         </p:nvPicPr>
         <p:blipFill>
-          <a:blip r:embed="rId1"/>
+          <a:blip r:embed="rId3"/>
           <a:stretch>
             <a:fillRect/>
           </a:stretch>
@@ -28720,7 +28314,7 @@
           <a:bodyPr wrap="square" lIns="0" tIns="0" rIns="0" bIns="0" rtlCol="0" anchor="ctr"/>
           <a:lstStyle/>
           <a:p>
-            <a:pPr indent="0" marL="0">
+            <a:pPr marL="0" indent="0">
               <a:buNone/>
             </a:pPr>
             <a:r>
@@ -28759,7 +28353,7 @@
           <a:bodyPr wrap="square" lIns="0" tIns="0" rIns="0" bIns="0" rtlCol="0" anchor="t"/>
           <a:lstStyle/>
           <a:p>
-            <a:pPr indent="0" marL="0">
+            <a:pPr marL="0" indent="0">
               <a:lnSpc>
                 <a:spcPct val="105000"/>
               </a:lnSpc>
@@ -28828,7 +28422,7 @@
           <a:bodyPr wrap="square" lIns="0" tIns="0" rIns="0" bIns="0" rtlCol="0" anchor="ctr"/>
           <a:lstStyle/>
           <a:p>
-            <a:pPr indent="0" marL="0">
+            <a:pPr marL="0" indent="0">
               <a:buNone/>
             </a:pPr>
             <a:r>
@@ -28867,7 +28461,7 @@
           <a:bodyPr wrap="square" lIns="0" tIns="0" rIns="0" bIns="0" rtlCol="0" anchor="t"/>
           <a:lstStyle/>
           <a:p>
-            <a:pPr indent="0" marL="0">
+            <a:pPr marL="0" indent="0">
               <a:lnSpc>
                 <a:spcPct val="105000"/>
               </a:lnSpc>
@@ -28936,7 +28530,7 @@
           <a:bodyPr wrap="square" lIns="0" tIns="0" rIns="0" bIns="0" rtlCol="0" anchor="ctr"/>
           <a:lstStyle/>
           <a:p>
-            <a:pPr indent="0" marL="0">
+            <a:pPr marL="0" indent="0">
               <a:buNone/>
             </a:pPr>
             <a:r>
@@ -28975,7 +28569,7 @@
           <a:bodyPr wrap="square" lIns="0" tIns="0" rIns="0" bIns="0" rtlCol="0" anchor="t"/>
           <a:lstStyle/>
           <a:p>
-            <a:pPr indent="0" marL="0">
+            <a:pPr marL="0" indent="0">
               <a:lnSpc>
                 <a:spcPct val="105000"/>
               </a:lnSpc>
@@ -29044,7 +28638,7 @@
           <a:bodyPr wrap="square" lIns="0" tIns="0" rIns="0" bIns="0" rtlCol="0" anchor="ctr"/>
           <a:lstStyle/>
           <a:p>
-            <a:pPr indent="0" marL="0">
+            <a:pPr marL="0" indent="0">
               <a:buNone/>
             </a:pPr>
             <a:r>
@@ -29083,7 +28677,7 @@
           <a:bodyPr wrap="square" lIns="0" tIns="0" rIns="0" bIns="0" rtlCol="0" anchor="t"/>
           <a:lstStyle/>
           <a:p>
-            <a:pPr indent="0" marL="0">
+            <a:pPr marL="0" indent="0">
               <a:lnSpc>
                 <a:spcPct val="105000"/>
               </a:lnSpc>
@@ -29152,7 +28746,7 @@
           <a:bodyPr wrap="square" lIns="0" tIns="0" rIns="0" bIns="0" rtlCol="0" anchor="ctr"/>
           <a:lstStyle/>
           <a:p>
-            <a:pPr indent="0" marL="0">
+            <a:pPr marL="0" indent="0">
               <a:buNone/>
             </a:pPr>
             <a:r>
@@ -29191,7 +28785,7 @@
           <a:bodyPr wrap="square" lIns="0" tIns="0" rIns="0" bIns="0" rtlCol="0" anchor="t"/>
           <a:lstStyle/>
           <a:p>
-            <a:pPr indent="0" marL="0">
+            <a:pPr marL="0" indent="0">
               <a:lnSpc>
                 <a:spcPct val="105000"/>
               </a:lnSpc>
@@ -29260,7 +28854,7 @@
           <a:bodyPr wrap="square" lIns="0" tIns="0" rIns="0" bIns="0" rtlCol="0" anchor="ctr"/>
           <a:lstStyle/>
           <a:p>
-            <a:pPr indent="0" marL="0">
+            <a:pPr marL="0" indent="0">
               <a:buNone/>
             </a:pPr>
             <a:r>
@@ -29299,7 +28893,7 @@
           <a:bodyPr wrap="square" lIns="0" tIns="0" rIns="0" bIns="0" rtlCol="0" anchor="t"/>
           <a:lstStyle/>
           <a:p>
-            <a:pPr indent="0" marL="0">
+            <a:pPr marL="0" indent="0">
               <a:lnSpc>
                 <a:spcPct val="105000"/>
               </a:lnSpc>
@@ -29368,7 +28962,7 @@
           <a:bodyPr wrap="square" lIns="0" tIns="0" rIns="0" bIns="0" rtlCol="0" anchor="ctr"/>
           <a:lstStyle/>
           <a:p>
-            <a:pPr indent="0" marL="0">
+            <a:pPr marL="0" indent="0">
               <a:lnSpc>
                 <a:spcPct val="112000"/>
               </a:lnSpc>
@@ -29391,7 +28985,7 @@
       </p:sp>
       <p:sp>
         <p:nvSpPr>
-          <p:cNvPr id="25" name="Slide Number Placeholder 0"/>
+          <p:cNvPr id="28" name="Slide Number Placeholder 0"/>
           <p:cNvSpPr>
             <a:spLocks noGrp="1"/>
           </p:cNvSpPr>
@@ -29409,7 +29003,7 @@
           </a:prstGeom>
           <a:extLst>
             <a:ext uri="{C572A759-6A51-4108-AA02-DFA0A04FC94B}">
-              <ma14:wrappingTextBoxFlag xmlns:ma14="http://schemas.microsoft.com/office/mac/drawingml/2011/main" val="0"/>
+              <ma14:wrappingTextBoxFlag xmlns="" xmlns:ma14="http://schemas.microsoft.com/office/mac/drawingml/2011/main" val="0"/>
             </a:ext>
           </a:extLst>
         </p:spPr>
@@ -29430,7 +29024,7 @@
           <a:p>
             <a:pPr algn="l"/>
             <a:fld id="{F7021451-1387-4CA6-816F-3879F97B5CBC}" type="slidenum">
-              <a:rPr b="0" lang="en-US"/>
+              <a:rPr lang="en-US" b="0"/>
               <a:t>6</a:t>
             </a:fld>
             <a:endParaRPr lang="en-US"/>
@@ -29483,11 +29077,11 @@
           <a:bodyPr wrap="square" lIns="0" tIns="0" rIns="0" bIns="0" rtlCol="0" anchor="ctr"/>
           <a:lstStyle/>
           <a:p>
-            <a:pPr indent="0" marL="0">
-              <a:buNone/>
-            </a:pPr>
-            <a:r>
-              <a:rPr lang="en-US" sz="1200" b="1" spc="400" kern="0" dirty="0">
+            <a:pPr marL="0" indent="0">
+              <a:buNone/>
+            </a:pPr>
+            <a:r>
+              <a:rPr lang="en-US" sz="1200" b="1" kern="0" spc="400" dirty="0">
                 <a:solidFill>
                   <a:srgbClr val="FFFFFF"/>
                 </a:solidFill>
@@ -29522,7 +29116,7 @@
           <a:bodyPr wrap="square" lIns="0" tIns="0" rIns="0" bIns="0" rtlCol="0" anchor="ctr"/>
           <a:lstStyle/>
           <a:p>
-            <a:pPr indent="0" marL="0">
+            <a:pPr marL="0" indent="0">
               <a:buNone/>
             </a:pPr>
             <a:r>
@@ -29561,7 +29155,7 @@
           <a:bodyPr wrap="square" lIns="0" tIns="0" rIns="0" bIns="0" rtlCol="0" anchor="t"/>
           <a:lstStyle/>
           <a:p>
-            <a:pPr indent="0" marL="0">
+            <a:pPr marL="0" indent="0">
               <a:buNone/>
             </a:pPr>
             <a:r>
@@ -29647,7 +29241,7 @@
           <a:bodyPr wrap="square" lIns="0" tIns="0" rIns="0" bIns="0" rtlCol="0" anchor="ctr"/>
           <a:lstStyle/>
           <a:p>
-            <a:pPr algn="l" indent="0" marL="0">
+            <a:pPr marL="0" indent="0" algn="l">
               <a:buNone/>
             </a:pPr>
             <a:r>
@@ -29686,7 +29280,7 @@
           <a:bodyPr wrap="square" lIns="0" tIns="0" rIns="0" bIns="0" rtlCol="0" anchor="ctr"/>
           <a:lstStyle/>
           <a:p>
-            <a:pPr indent="0" marL="0">
+            <a:pPr marL="0" indent="0">
               <a:buNone/>
             </a:pPr>
             <a:r>
@@ -29752,11 +29346,11 @@
           <a:bodyPr wrap="square" lIns="0" tIns="0" rIns="0" bIns="0" rtlCol="0" anchor="ctr"/>
           <a:lstStyle/>
           <a:p>
-            <a:pPr algn="ctr" indent="0" marL="0">
-              <a:buNone/>
-            </a:pPr>
-            <a:r>
-              <a:rPr lang="en-US" sz="900" b="1" spc="100" kern="0" dirty="0">
+            <a:pPr marL="0" indent="0" algn="ctr">
+              <a:buNone/>
+            </a:pPr>
+            <a:r>
+              <a:rPr lang="en-US" sz="900" b="1" kern="0" spc="100" dirty="0">
                 <a:solidFill>
                   <a:srgbClr val="5A05F4"/>
                 </a:solidFill>
@@ -29772,14 +29366,14 @@
       </p:sp>
       <p:pic>
         <p:nvPicPr>
-          <p:cNvPr id="7" name="Image 0" descr="preencoded.png">    </p:cNvPr>
+          <p:cNvPr id="7" name="Image 0" descr="preencoded.png"/>
           <p:cNvPicPr>
             <a:picLocks noChangeAspect="1"/>
           </p:cNvPicPr>
           <p:nvPr/>
         </p:nvPicPr>
         <p:blipFill>
-          <a:blip r:embed="rId1"/>
+          <a:blip r:embed="rId3"/>
           <a:stretch>
             <a:fillRect/>
           </a:stretch>
@@ -29837,7 +29431,7 @@
           <a:bodyPr wrap="square" lIns="0" tIns="0" rIns="0" bIns="0" rtlCol="0" anchor="ctr"/>
           <a:lstStyle/>
           <a:p>
-            <a:pPr indent="0" marL="0">
+            <a:pPr marL="0" indent="0">
               <a:buNone/>
             </a:pPr>
             <a:r>
@@ -29876,7 +29470,7 @@
           <a:bodyPr wrap="square" lIns="0" tIns="0" rIns="0" bIns="0" rtlCol="0" anchor="t"/>
           <a:lstStyle/>
           <a:p>
-            <a:pPr indent="0" marL="0">
+            <a:pPr marL="0" indent="0">
               <a:buNone/>
             </a:pPr>
             <a:r>
@@ -29937,7 +29531,7 @@
           <a:bodyPr wrap="square" lIns="0" tIns="0" rIns="0" bIns="0" rtlCol="0" anchor="ctr"/>
           <a:lstStyle/>
           <a:p>
-            <a:pPr indent="0" marL="0">
+            <a:pPr marL="0" indent="0">
               <a:buNone/>
             </a:pPr>
             <a:r>
@@ -29976,7 +29570,7 @@
           <a:bodyPr wrap="square" lIns="0" tIns="0" rIns="0" bIns="0" rtlCol="0" anchor="t"/>
           <a:lstStyle/>
           <a:p>
-            <a:pPr indent="0" marL="0">
+            <a:pPr marL="0" indent="0">
               <a:buNone/>
             </a:pPr>
             <a:r>
@@ -30057,7 +29651,7 @@
           <a:bodyPr wrap="square" lIns="0" tIns="0" rIns="0" bIns="0" rtlCol="0" anchor="ctr"/>
           <a:lstStyle/>
           <a:p>
-            <a:pPr algn="ctr" indent="0" marL="0">
+            <a:pPr marL="0" indent="0" algn="ctr">
               <a:buNone/>
             </a:pPr>
             <a:r>
@@ -30096,7 +29690,7 @@
           <a:bodyPr wrap="square" lIns="0" tIns="0" rIns="0" bIns="0" rtlCol="0" anchor="ctr"/>
           <a:lstStyle/>
           <a:p>
-            <a:pPr indent="0" marL="0">
+            <a:pPr marL="0" indent="0">
               <a:buNone/>
             </a:pPr>
             <a:r>
@@ -30135,7 +29729,7 @@
           <a:bodyPr wrap="square" lIns="0" tIns="0" rIns="0" bIns="0" rtlCol="0" anchor="t"/>
           <a:lstStyle/>
           <a:p>
-            <a:pPr indent="0" marL="0">
+            <a:pPr marL="0" indent="0">
               <a:lnSpc>
                 <a:spcPct val="108000"/>
               </a:lnSpc>
@@ -30219,7 +29813,7 @@
           <a:bodyPr wrap="square" lIns="0" tIns="0" rIns="0" bIns="0" rtlCol="0" anchor="ctr"/>
           <a:lstStyle/>
           <a:p>
-            <a:pPr algn="ctr" indent="0" marL="0">
+            <a:pPr marL="0" indent="0" algn="ctr">
               <a:buNone/>
             </a:pPr>
             <a:r>
@@ -30258,7 +29852,7 @@
           <a:bodyPr wrap="square" lIns="0" tIns="0" rIns="0" bIns="0" rtlCol="0" anchor="ctr"/>
           <a:lstStyle/>
           <a:p>
-            <a:pPr indent="0" marL="0">
+            <a:pPr marL="0" indent="0">
               <a:buNone/>
             </a:pPr>
             <a:r>
@@ -30297,7 +29891,7 @@
           <a:bodyPr wrap="square" lIns="0" tIns="0" rIns="0" bIns="0" rtlCol="0" anchor="t"/>
           <a:lstStyle/>
           <a:p>
-            <a:pPr indent="0" marL="0">
+            <a:pPr marL="0" indent="0">
               <a:lnSpc>
                 <a:spcPct val="108000"/>
               </a:lnSpc>
@@ -30381,7 +29975,7 @@
           <a:bodyPr wrap="square" lIns="0" tIns="0" rIns="0" bIns="0" rtlCol="0" anchor="ctr"/>
           <a:lstStyle/>
           <a:p>
-            <a:pPr algn="ctr" indent="0" marL="0">
+            <a:pPr marL="0" indent="0" algn="ctr">
               <a:buNone/>
             </a:pPr>
             <a:r>
@@ -30420,7 +30014,7 @@
           <a:bodyPr wrap="square" lIns="0" tIns="0" rIns="0" bIns="0" rtlCol="0" anchor="ctr"/>
           <a:lstStyle/>
           <a:p>
-            <a:pPr indent="0" marL="0">
+            <a:pPr marL="0" indent="0">
               <a:buNone/>
             </a:pPr>
             <a:r>
@@ -30459,7 +30053,7 @@
           <a:bodyPr wrap="square" lIns="0" tIns="0" rIns="0" bIns="0" rtlCol="0" anchor="t"/>
           <a:lstStyle/>
           <a:p>
-            <a:pPr indent="0" marL="0">
+            <a:pPr marL="0" indent="0">
               <a:lnSpc>
                 <a:spcPct val="108000"/>
               </a:lnSpc>
@@ -30543,7 +30137,7 @@
           <a:bodyPr wrap="square" lIns="0" tIns="0" rIns="0" bIns="0" rtlCol="0" anchor="ctr"/>
           <a:lstStyle/>
           <a:p>
-            <a:pPr algn="ctr" indent="0" marL="0">
+            <a:pPr marL="0" indent="0" algn="ctr">
               <a:buNone/>
             </a:pPr>
             <a:r>
@@ -30582,7 +30176,7 @@
           <a:bodyPr wrap="square" lIns="0" tIns="0" rIns="0" bIns="0" rtlCol="0" anchor="ctr"/>
           <a:lstStyle/>
           <a:p>
-            <a:pPr indent="0" marL="0">
+            <a:pPr marL="0" indent="0">
               <a:buNone/>
             </a:pPr>
             <a:r>
@@ -30621,7 +30215,7 @@
           <a:bodyPr wrap="square" lIns="0" tIns="0" rIns="0" bIns="0" rtlCol="0" anchor="t"/>
           <a:lstStyle/>
           <a:p>
-            <a:pPr indent="0" marL="0">
+            <a:pPr marL="0" indent="0">
               <a:lnSpc>
                 <a:spcPct val="108000"/>
               </a:lnSpc>
@@ -30651,7 +30245,7 @@
         <p:spPr>
           <a:xfrm>
             <a:off x="4160520" y="5349240"/>
-            <a:ext cx="7470648" cy="566928"/>
+            <a:ext cx="7680960" cy="566928"/>
           </a:xfrm>
           <a:prstGeom prst="roundRect">
             <a:avLst>
@@ -30690,7 +30284,7 @@
           <a:bodyPr wrap="square" lIns="0" tIns="0" rIns="0" bIns="0" rtlCol="0" anchor="ctr"/>
           <a:lstStyle/>
           <a:p>
-            <a:pPr indent="0" marL="0">
+            <a:pPr marL="0" indent="0">
               <a:lnSpc>
                 <a:spcPct val="112000"/>
               </a:lnSpc>
@@ -30713,7 +30307,7 @@
       </p:sp>
       <p:sp>
         <p:nvSpPr>
-          <p:cNvPr id="25" name="Slide Number Placeholder 0"/>
+          <p:cNvPr id="36" name="Slide Number Placeholder 0"/>
           <p:cNvSpPr>
             <a:spLocks noGrp="1"/>
           </p:cNvSpPr>
@@ -30731,7 +30325,7 @@
           </a:prstGeom>
           <a:extLst>
             <a:ext uri="{C572A759-6A51-4108-AA02-DFA0A04FC94B}">
-              <ma14:wrappingTextBoxFlag xmlns:ma14="http://schemas.microsoft.com/office/mac/drawingml/2011/main" val="0"/>
+              <ma14:wrappingTextBoxFlag xmlns="" xmlns:ma14="http://schemas.microsoft.com/office/mac/drawingml/2011/main" val="0"/>
             </a:ext>
           </a:extLst>
         </p:spPr>
@@ -30752,7 +30346,7 @@
           <a:p>
             <a:pPr algn="l"/>
             <a:fld id="{F7021451-1387-4CA6-816F-3879F97B5CBC}" type="slidenum">
-              <a:rPr b="0" lang="en-US"/>
+              <a:rPr lang="en-US" b="0"/>
               <a:t>8</a:t>
             </a:fld>
             <a:endParaRPr lang="en-US"/>
@@ -30827,7 +30421,7 @@
           <a:bodyPr wrap="square" lIns="0" tIns="0" rIns="0" bIns="0" rtlCol="0" anchor="ctr"/>
           <a:lstStyle/>
           <a:p>
-            <a:pPr algn="l" indent="0" marL="0">
+            <a:pPr marL="0" indent="0" algn="l">
               <a:buNone/>
             </a:pPr>
             <a:r>
@@ -30866,7 +30460,7 @@
           <a:bodyPr wrap="square" lIns="0" tIns="0" rIns="0" bIns="0" rtlCol="0" anchor="ctr"/>
           <a:lstStyle/>
           <a:p>
-            <a:pPr indent="0" marL="0">
+            <a:pPr marL="0" indent="0">
               <a:buNone/>
             </a:pPr>
             <a:r>
@@ -30932,11 +30526,11 @@
           <a:bodyPr wrap="square" lIns="0" tIns="0" rIns="0" bIns="0" rtlCol="0" anchor="ctr"/>
           <a:lstStyle/>
           <a:p>
-            <a:pPr algn="ctr" indent="0" marL="0">
-              <a:buNone/>
-            </a:pPr>
-            <a:r>
-              <a:rPr lang="en-US" sz="900" b="1" spc="100" kern="0" dirty="0">
+            <a:pPr marL="0" indent="0" algn="ctr">
+              <a:buNone/>
+            </a:pPr>
+            <a:r>
+              <a:rPr lang="en-US" sz="900" b="1" kern="0" spc="100" dirty="0">
                 <a:solidFill>
                   <a:srgbClr val="5A05F4"/>
                 </a:solidFill>
@@ -30952,14 +30546,14 @@
       </p:sp>
       <p:pic>
         <p:nvPicPr>
-          <p:cNvPr id="7" name="Image 0" descr="preencoded.png">    </p:cNvPr>
+          <p:cNvPr id="7" name="Image 0" descr="preencoded.png"/>
           <p:cNvPicPr>
             <a:picLocks noChangeAspect="1"/>
           </p:cNvPicPr>
           <p:nvPr/>
         </p:nvPicPr>
         <p:blipFill>
-          <a:blip r:embed="rId1"/>
+          <a:blip r:embed="rId3"/>
           <a:stretch>
             <a:fillRect/>
           </a:stretch>
@@ -31037,7 +30631,7 @@
           <a:bodyPr wrap="square" lIns="0" tIns="0" rIns="0" bIns="0" rtlCol="0" anchor="ctr"/>
           <a:lstStyle/>
           <a:p>
-            <a:pPr algn="ctr" indent="0" marL="0">
+            <a:pPr marL="0" indent="0" algn="ctr">
               <a:buNone/>
             </a:pPr>
             <a:r>
@@ -31076,7 +30670,7 @@
           <a:bodyPr wrap="square" lIns="0" tIns="0" rIns="0" bIns="0" rtlCol="0" anchor="ctr"/>
           <a:lstStyle/>
           <a:p>
-            <a:pPr indent="0" marL="0">
+            <a:pPr marL="0" indent="0">
               <a:buNone/>
             </a:pPr>
             <a:r>
@@ -31115,7 +30709,7 @@
           <a:bodyPr wrap="square" lIns="0" tIns="0" rIns="0" bIns="0" rtlCol="0" anchor="t"/>
           <a:lstStyle/>
           <a:p>
-            <a:pPr indent="0" marL="0">
+            <a:pPr marL="0" indent="0">
               <a:lnSpc>
                 <a:spcPct val="108000"/>
               </a:lnSpc>
@@ -31199,7 +30793,7 @@
           <a:bodyPr wrap="square" lIns="0" tIns="0" rIns="0" bIns="0" rtlCol="0" anchor="ctr"/>
           <a:lstStyle/>
           <a:p>
-            <a:pPr algn="ctr" indent="0" marL="0">
+            <a:pPr marL="0" indent="0" algn="ctr">
               <a:buNone/>
             </a:pPr>
             <a:r>
@@ -31238,7 +30832,7 @@
           <a:bodyPr wrap="square" lIns="0" tIns="0" rIns="0" bIns="0" rtlCol="0" anchor="ctr"/>
           <a:lstStyle/>
           <a:p>
-            <a:pPr indent="0" marL="0">
+            <a:pPr marL="0" indent="0">
               <a:buNone/>
             </a:pPr>
             <a:r>
@@ -31277,7 +30871,7 @@
           <a:bodyPr wrap="square" lIns="0" tIns="0" rIns="0" bIns="0" rtlCol="0" anchor="t"/>
           <a:lstStyle/>
           <a:p>
-            <a:pPr indent="0" marL="0">
+            <a:pPr marL="0" indent="0">
               <a:lnSpc>
                 <a:spcPct val="108000"/>
               </a:lnSpc>
@@ -31361,7 +30955,7 @@
           <a:bodyPr wrap="square" lIns="0" tIns="0" rIns="0" bIns="0" rtlCol="0" anchor="ctr"/>
           <a:lstStyle/>
           <a:p>
-            <a:pPr algn="ctr" indent="0" marL="0">
+            <a:pPr marL="0" indent="0" algn="ctr">
               <a:buNone/>
             </a:pPr>
             <a:r>
@@ -31400,7 +30994,7 @@
           <a:bodyPr wrap="square" lIns="0" tIns="0" rIns="0" bIns="0" rtlCol="0" anchor="ctr"/>
           <a:lstStyle/>
           <a:p>
-            <a:pPr indent="0" marL="0">
+            <a:pPr marL="0" indent="0">
               <a:buNone/>
             </a:pPr>
             <a:r>
@@ -31439,7 +31033,7 @@
           <a:bodyPr wrap="square" lIns="0" tIns="0" rIns="0" bIns="0" rtlCol="0" anchor="t"/>
           <a:lstStyle/>
           <a:p>
-            <a:pPr indent="0" marL="0">
+            <a:pPr marL="0" indent="0">
               <a:lnSpc>
                 <a:spcPct val="108000"/>
               </a:lnSpc>
@@ -31523,7 +31117,7 @@
           <a:bodyPr wrap="square" lIns="0" tIns="0" rIns="0" bIns="0" rtlCol="0" anchor="ctr"/>
           <a:lstStyle/>
           <a:p>
-            <a:pPr algn="ctr" indent="0" marL="0">
+            <a:pPr marL="0" indent="0" algn="ctr">
               <a:buNone/>
             </a:pPr>
             <a:r>
@@ -31562,7 +31156,7 @@
           <a:bodyPr wrap="square" lIns="0" tIns="0" rIns="0" bIns="0" rtlCol="0" anchor="ctr"/>
           <a:lstStyle/>
           <a:p>
-            <a:pPr indent="0" marL="0">
+            <a:pPr marL="0" indent="0">
               <a:buNone/>
             </a:pPr>
             <a:r>
@@ -31601,7 +31195,7 @@
           <a:bodyPr wrap="square" lIns="0" tIns="0" rIns="0" bIns="0" rtlCol="0" anchor="t"/>
           <a:lstStyle/>
           <a:p>
-            <a:pPr indent="0" marL="0">
+            <a:pPr marL="0" indent="0">
               <a:lnSpc>
                 <a:spcPct val="108000"/>
               </a:lnSpc>
@@ -31670,11 +31264,11 @@
           <a:bodyPr wrap="square" lIns="0" tIns="0" rIns="0" bIns="0" rtlCol="0" anchor="ctr"/>
           <a:lstStyle/>
           <a:p>
-            <a:pPr indent="0" marL="0">
-              <a:buNone/>
-            </a:pPr>
-            <a:r>
-              <a:rPr lang="en-US" sz="950" b="1" spc="150" kern="0" dirty="0">
+            <a:pPr marL="0" indent="0">
+              <a:buNone/>
+            </a:pPr>
+            <a:r>
+              <a:rPr lang="en-US" sz="950" b="1" kern="0" spc="150" dirty="0">
                 <a:solidFill>
                   <a:srgbClr val="434343"/>
                 </a:solidFill>
@@ -31709,7 +31303,7 @@
           <a:bodyPr wrap="square" lIns="0" tIns="0" rIns="0" bIns="0" rtlCol="0" anchor="ctr"/>
           <a:lstStyle/>
           <a:p>
-            <a:pPr indent="0" marL="0">
+            <a:pPr marL="0" indent="0">
               <a:lnSpc>
                 <a:spcPct val="112000"/>
               </a:lnSpc>
@@ -31773,7 +31367,7 @@
           <a:bodyPr wrap="square" lIns="0" tIns="0" rIns="0" bIns="0" rtlCol="0" anchor="ctr"/>
           <a:lstStyle/>
           <a:p>
-            <a:pPr algn="ctr" indent="0" marL="0">
+            <a:pPr marL="0" indent="0" algn="ctr">
               <a:buNone/>
             </a:pPr>
             <a:r>
@@ -31877,7 +31471,7 @@
           <a:bodyPr wrap="square" lIns="0" tIns="0" rIns="0" bIns="0" rtlCol="0" anchor="ctr"/>
           <a:lstStyle/>
           <a:p>
-            <a:pPr algn="ctr" indent="0" marL="0">
+            <a:pPr marL="0" indent="0" algn="ctr">
               <a:buNone/>
             </a:pPr>
             <a:r>
@@ -31981,7 +31575,7 @@
           <a:bodyPr wrap="square" lIns="0" tIns="0" rIns="0" bIns="0" rtlCol="0" anchor="ctr"/>
           <a:lstStyle/>
           <a:p>
-            <a:pPr algn="ctr" indent="0" marL="0">
+            <a:pPr marL="0" indent="0" algn="ctr">
               <a:buNone/>
             </a:pPr>
             <a:r>
@@ -32085,7 +31679,7 @@
           <a:bodyPr wrap="square" lIns="0" tIns="0" rIns="0" bIns="0" rtlCol="0" anchor="ctr"/>
           <a:lstStyle/>
           <a:p>
-            <a:pPr algn="ctr" indent="0" marL="0">
+            <a:pPr marL="0" indent="0" algn="ctr">
               <a:buNone/>
             </a:pPr>
             <a:r>
@@ -32189,7 +31783,7 @@
           <a:bodyPr wrap="square" lIns="0" tIns="0" rIns="0" bIns="0" rtlCol="0" anchor="ctr"/>
           <a:lstStyle/>
           <a:p>
-            <a:pPr algn="ctr" indent="0" marL="0">
+            <a:pPr marL="0" indent="0" algn="ctr">
               <a:buNone/>
             </a:pPr>
             <a:r>
@@ -32293,7 +31887,7 @@
           <a:bodyPr wrap="square" lIns="0" tIns="0" rIns="0" bIns="0" rtlCol="0" anchor="ctr"/>
           <a:lstStyle/>
           <a:p>
-            <a:pPr algn="ctr" indent="0" marL="0">
+            <a:pPr marL="0" indent="0" algn="ctr">
               <a:buNone/>
             </a:pPr>
             <a:r>
@@ -32332,7 +31926,7 @@
           <a:bodyPr wrap="square" lIns="0" tIns="0" rIns="0" bIns="0" rtlCol="0" anchor="ctr"/>
           <a:lstStyle/>
           <a:p>
-            <a:pPr indent="0" marL="0">
+            <a:pPr marL="0" indent="0">
               <a:buNone/>
             </a:pPr>
             <a:r>
@@ -32352,7 +31946,7 @@
       </p:sp>
       <p:sp>
         <p:nvSpPr>
-          <p:cNvPr id="25" name="Slide Number Placeholder 0"/>
+          <p:cNvPr id="54" name="Slide Number Placeholder 0"/>
           <p:cNvSpPr>
             <a:spLocks noGrp="1"/>
           </p:cNvSpPr>
@@ -32370,7 +31964,7 @@
           </a:prstGeom>
           <a:extLst>
             <a:ext uri="{C572A759-6A51-4108-AA02-DFA0A04FC94B}">
-              <ma14:wrappingTextBoxFlag xmlns:ma14="http://schemas.microsoft.com/office/mac/drawingml/2011/main" val="0"/>
+              <ma14:wrappingTextBoxFlag xmlns="" xmlns:ma14="http://schemas.microsoft.com/office/mac/drawingml/2011/main" val="0"/>
             </a:ext>
           </a:extLst>
         </p:spPr>
@@ -32391,7 +31985,7 @@
           <a:p>
             <a:pPr algn="l"/>
             <a:fld id="{F7021451-1387-4CA6-816F-3879F97B5CBC}" type="slidenum">
-              <a:rPr b="0" lang="en-US"/>
+              <a:rPr lang="en-US" b="0"/>
               <a:t>9</a:t>
             </a:fld>
             <a:endParaRPr lang="en-US"/>
@@ -32699,4 +32293,299 @@
     </a:ext>
   </a:extLst>
 </a:theme>
+</file>
+
+<file path=ppt/theme/theme2.xml><?xml version="1.0" encoding="utf-8"?>
+<a:theme xmlns:a="http://schemas.openxmlformats.org/drawingml/2006/main" name="Office Theme">
+  <a:themeElements>
+    <a:clrScheme name="Office">
+      <a:dk1>
+        <a:sysClr val="windowText" lastClr="000000"/>
+      </a:dk1>
+      <a:lt1>
+        <a:sysClr val="window" lastClr="FFFFFF"/>
+      </a:lt1>
+      <a:dk2>
+        <a:srgbClr val="44546A"/>
+      </a:dk2>
+      <a:lt2>
+        <a:srgbClr val="E7E6E6"/>
+      </a:lt2>
+      <a:accent1>
+        <a:srgbClr val="4472C4"/>
+      </a:accent1>
+      <a:accent2>
+        <a:srgbClr val="ED7D31"/>
+      </a:accent2>
+      <a:accent3>
+        <a:srgbClr val="A5A5A5"/>
+      </a:accent3>
+      <a:accent4>
+        <a:srgbClr val="FFC000"/>
+      </a:accent4>
+      <a:accent5>
+        <a:srgbClr val="5B9BD5"/>
+      </a:accent5>
+      <a:accent6>
+        <a:srgbClr val="70AD47"/>
+      </a:accent6>
+      <a:hlink>
+        <a:srgbClr val="0563C1"/>
+      </a:hlink>
+      <a:folHlink>
+        <a:srgbClr val="954F72"/>
+      </a:folHlink>
+    </a:clrScheme>
+    <a:fontScheme name="Office">
+      <a:majorFont>
+        <a:latin typeface="Calibri Light" panose="020F0302020204030204"/>
+        <a:ea typeface=""/>
+        <a:cs typeface=""/>
+        <a:font script="Jpan" typeface="游ゴシック Light"/>
+        <a:font script="Hang" typeface="맑은 고딕"/>
+        <a:font script="Hans" typeface="等线 Light"/>
+        <a:font script="Hant" typeface="新細明體"/>
+        <a:font script="Arab" typeface="Times New Roman"/>
+        <a:font script="Hebr" typeface="Times New Roman"/>
+        <a:font script="Thai" typeface="Angsana New"/>
+        <a:font script="Ethi" typeface="Nyala"/>
+        <a:font script="Beng" typeface="Vrinda"/>
+        <a:font script="Gujr" typeface="Shruti"/>
+        <a:font script="Khmr" typeface="MoolBoran"/>
+        <a:font script="Knda" typeface="Tunga"/>
+        <a:font script="Guru" typeface="Raavi"/>
+        <a:font script="Cans" typeface="Euphemia"/>
+        <a:font script="Cher" typeface="Plantagenet Cherokee"/>
+        <a:font script="Yiii" typeface="Microsoft Yi Baiti"/>
+        <a:font script="Tibt" typeface="Microsoft Himalaya"/>
+        <a:font script="Thaa" typeface="MV Boli"/>
+        <a:font script="Deva" typeface="Mangal"/>
+        <a:font script="Telu" typeface="Gautami"/>
+        <a:font script="Taml" typeface="Latha"/>
+        <a:font script="Syrc" typeface="Estrangelo Edessa"/>
+        <a:font script="Orya" typeface="Kalinga"/>
+        <a:font script="Mlym" typeface="Kartika"/>
+        <a:font script="Laoo" typeface="DokChampa"/>
+        <a:font script="Sinh" typeface="Iskoola Pota"/>
+        <a:font script="Mong" typeface="Mongolian Baiti"/>
+        <a:font script="Viet" typeface="Times New Roman"/>
+        <a:font script="Uigh" typeface="Microsoft Uighur"/>
+        <a:font script="Geor" typeface="Sylfaen"/>
+        <a:font script="Armn" typeface="Arial"/>
+        <a:font script="Bugi" typeface="Leelawadee UI"/>
+        <a:font script="Bopo" typeface="Microsoft JhengHei"/>
+        <a:font script="Java" typeface="Javanese Text"/>
+        <a:font script="Lisu" typeface="Segoe UI"/>
+        <a:font script="Mymr" typeface="Myanmar Text"/>
+        <a:font script="Nkoo" typeface="Ebrima"/>
+        <a:font script="Olck" typeface="Nirmala UI"/>
+        <a:font script="Osma" typeface="Ebrima"/>
+        <a:font script="Phag" typeface="Phagspa"/>
+        <a:font script="Syrn" typeface="Estrangelo Edessa"/>
+        <a:font script="Syrj" typeface="Estrangelo Edessa"/>
+        <a:font script="Syre" typeface="Estrangelo Edessa"/>
+        <a:font script="Sora" typeface="Nirmala UI"/>
+        <a:font script="Tale" typeface="Microsoft Tai Le"/>
+        <a:font script="Talu" typeface="Microsoft New Tai Lue"/>
+        <a:font script="Tfng" typeface="Ebrima"/>
+      </a:majorFont>
+      <a:minorFont>
+        <a:latin typeface="Calibri" panose="020F0502020204030204"/>
+        <a:ea typeface=""/>
+        <a:cs typeface=""/>
+        <a:font script="Jpan" typeface="游ゴシック"/>
+        <a:font script="Hang" typeface="맑은 고딕"/>
+        <a:font script="Hans" typeface="等线"/>
+        <a:font script="Hant" typeface="新細明體"/>
+        <a:font script="Arab" typeface="Arial"/>
+        <a:font script="Hebr" typeface="Arial"/>
+        <a:font script="Thai" typeface="Cordia New"/>
+        <a:font script="Ethi" typeface="Nyala"/>
+        <a:font script="Beng" typeface="Vrinda"/>
+        <a:font script="Gujr" typeface="Shruti"/>
+        <a:font script="Khmr" typeface="DaunPenh"/>
+        <a:font script="Knda" typeface="Tunga"/>
+        <a:font script="Guru" typeface="Raavi"/>
+        <a:font script="Cans" typeface="Euphemia"/>
+        <a:font script="Cher" typeface="Plantagenet Cherokee"/>
+        <a:font script="Yiii" typeface="Microsoft Yi Baiti"/>
+        <a:font script="Tibt" typeface="Microsoft Himalaya"/>
+        <a:font script="Thaa" typeface="MV Boli"/>
+        <a:font script="Deva" typeface="Mangal"/>
+        <a:font script="Telu" typeface="Gautami"/>
+        <a:font script="Taml" typeface="Latha"/>
+        <a:font script="Syrc" typeface="Estrangelo Edessa"/>
+        <a:font script="Orya" typeface="Kalinga"/>
+        <a:font script="Mlym" typeface="Kartika"/>
+        <a:font script="Laoo" typeface="DokChampa"/>
+        <a:font script="Sinh" typeface="Iskoola Pota"/>
+        <a:font script="Mong" typeface="Mongolian Baiti"/>
+        <a:font script="Viet" typeface="Arial"/>
+        <a:font script="Uigh" typeface="Microsoft Uighur"/>
+        <a:font script="Geor" typeface="Sylfaen"/>
+        <a:font script="Armn" typeface="Arial"/>
+        <a:font script="Bugi" typeface="Leelawadee UI"/>
+        <a:font script="Bopo" typeface="Microsoft JhengHei"/>
+        <a:font script="Java" typeface="Javanese Text"/>
+        <a:font script="Lisu" typeface="Segoe UI"/>
+        <a:font script="Mymr" typeface="Myanmar Text"/>
+        <a:font script="Nkoo" typeface="Ebrima"/>
+        <a:font script="Olck" typeface="Nirmala UI"/>
+        <a:font script="Osma" typeface="Ebrima"/>
+        <a:font script="Phag" typeface="Phagspa"/>
+        <a:font script="Syrn" typeface="Estrangelo Edessa"/>
+        <a:font script="Syrj" typeface="Estrangelo Edessa"/>
+        <a:font script="Syre" typeface="Estrangelo Edessa"/>
+        <a:font script="Sora" typeface="Nirmala UI"/>
+        <a:font script="Tale" typeface="Microsoft Tai Le"/>
+        <a:font script="Talu" typeface="Microsoft New Tai Lue"/>
+        <a:font script="Tfng" typeface="Ebrima"/>
+      </a:minorFont>
+    </a:fontScheme>
+    <a:fmtScheme name="Office">
+      <a:fillStyleLst>
+        <a:solidFill>
+          <a:schemeClr val="phClr"/>
+        </a:solidFill>
+        <a:gradFill rotWithShape="1">
+          <a:gsLst>
+            <a:gs pos="0">
+              <a:schemeClr val="phClr">
+                <a:lumMod val="110000"/>
+                <a:satMod val="105000"/>
+                <a:tint val="67000"/>
+              </a:schemeClr>
+            </a:gs>
+            <a:gs pos="50000">
+              <a:schemeClr val="phClr">
+                <a:lumMod val="105000"/>
+                <a:satMod val="103000"/>
+                <a:tint val="73000"/>
+              </a:schemeClr>
+            </a:gs>
+            <a:gs pos="100000">
+              <a:schemeClr val="phClr">
+                <a:lumMod val="105000"/>
+                <a:satMod val="109000"/>
+                <a:tint val="81000"/>
+              </a:schemeClr>
+            </a:gs>
+          </a:gsLst>
+          <a:lin ang="5400000" scaled="0"/>
+        </a:gradFill>
+        <a:gradFill rotWithShape="1">
+          <a:gsLst>
+            <a:gs pos="0">
+              <a:schemeClr val="phClr">
+                <a:satMod val="103000"/>
+                <a:lumMod val="102000"/>
+                <a:tint val="94000"/>
+              </a:schemeClr>
+            </a:gs>
+            <a:gs pos="50000">
+              <a:schemeClr val="phClr">
+                <a:satMod val="110000"/>
+                <a:lumMod val="100000"/>
+                <a:shade val="100000"/>
+              </a:schemeClr>
+            </a:gs>
+            <a:gs pos="100000">
+              <a:schemeClr val="phClr">
+                <a:lumMod val="99000"/>
+                <a:satMod val="120000"/>
+                <a:shade val="78000"/>
+              </a:schemeClr>
+            </a:gs>
+          </a:gsLst>
+          <a:lin ang="5400000" scaled="0"/>
+        </a:gradFill>
+      </a:fillStyleLst>
+      <a:lnStyleLst>
+        <a:ln w="6350" cap="flat" cmpd="sng" algn="ctr">
+          <a:solidFill>
+            <a:schemeClr val="phClr"/>
+          </a:solidFill>
+          <a:prstDash val="solid"/>
+          <a:miter lim="800000"/>
+        </a:ln>
+        <a:ln w="12700" cap="flat" cmpd="sng" algn="ctr">
+          <a:solidFill>
+            <a:schemeClr val="phClr"/>
+          </a:solidFill>
+          <a:prstDash val="solid"/>
+          <a:miter lim="800000"/>
+        </a:ln>
+        <a:ln w="19050" cap="flat" cmpd="sng" algn="ctr">
+          <a:solidFill>
+            <a:schemeClr val="phClr"/>
+          </a:solidFill>
+          <a:prstDash val="solid"/>
+          <a:miter lim="800000"/>
+        </a:ln>
+      </a:lnStyleLst>
+      <a:effectStyleLst>
+        <a:effectStyle>
+          <a:effectLst/>
+        </a:effectStyle>
+        <a:effectStyle>
+          <a:effectLst/>
+        </a:effectStyle>
+        <a:effectStyle>
+          <a:effectLst>
+            <a:outerShdw blurRad="57150" dist="19050" dir="5400000" algn="ctr" rotWithShape="0">
+              <a:srgbClr val="000000">
+                <a:alpha val="63000"/>
+              </a:srgbClr>
+            </a:outerShdw>
+          </a:effectLst>
+        </a:effectStyle>
+      </a:effectStyleLst>
+      <a:bgFillStyleLst>
+        <a:solidFill>
+          <a:schemeClr val="phClr"/>
+        </a:solidFill>
+        <a:solidFill>
+          <a:schemeClr val="phClr">
+            <a:tint val="95000"/>
+            <a:satMod val="170000"/>
+          </a:schemeClr>
+        </a:solidFill>
+        <a:gradFill rotWithShape="1">
+          <a:gsLst>
+            <a:gs pos="0">
+              <a:schemeClr val="phClr">
+                <a:tint val="93000"/>
+                <a:satMod val="150000"/>
+                <a:shade val="98000"/>
+                <a:lumMod val="102000"/>
+              </a:schemeClr>
+            </a:gs>
+            <a:gs pos="50000">
+              <a:schemeClr val="phClr">
+                <a:tint val="98000"/>
+                <a:satMod val="130000"/>
+                <a:shade val="90000"/>
+                <a:lumMod val="103000"/>
+              </a:schemeClr>
+            </a:gs>
+            <a:gs pos="100000">
+              <a:schemeClr val="phClr">
+                <a:shade val="63000"/>
+                <a:satMod val="120000"/>
+              </a:schemeClr>
+            </a:gs>
+          </a:gsLst>
+          <a:lin ang="5400000" scaled="0"/>
+        </a:gradFill>
+      </a:bgFillStyleLst>
+    </a:fmtScheme>
+  </a:themeElements>
+  <a:objectDefaults/>
+  <a:extraClrSchemeLst/>
+  <a:extLst>
+    <a:ext uri="{05A4C25C-085E-4340-85A3-A5531E510DB2}">
+      <thm15:themeFamily xmlns:thm15="http://schemas.microsoft.com/office/thememl/2012/main" name="Office Theme" id="{62F939B6-93AF-4DB8-9C6B-D6C7DFDC589F}" vid="{4A3C46E8-61CC-4603-A589-7422A47A8E4A}"/>
+    </a:ext>
+  </a:extLst>
+</a:theme>
 </file>
--- a/docs/decks/L01.pptx
+++ b/docs/decks/L01.pptx
@@ -4,9 +4,6 @@
   <p:sldMasterIdLst>
     <p:sldMasterId id="2147483648" r:id="rId1"/>
   </p:sldMasterIdLst>
-  <p:notesMasterIdLst>
-    <p:notesMasterId r:id="rId33"/>
-  </p:notesMasterIdLst>
   <p:sldIdLst>
     <p:sldId id="256" r:id="rId2"/>
     <p:sldId id="257" r:id="rId3"/>
@@ -40,6 +37,9 @@
     <p:sldId id="285" r:id="rId31"/>
     <p:sldId id="286" r:id="rId32"/>
   </p:sldIdLst>
+  <p:notesMasterIdLst>
+    <p:notesMasterId r:id="rId33"/>
+  </p:notesMasterIdLst>
   <p:sldSz cx="12192000" cy="6858000"/>
   <p:notesSz cx="6858000" cy="12192000"/>
   <p:defaultTextStyle>
@@ -134,11 +134,6 @@
       </a:defRPr>
     </a:lvl9pPr>
   </p:defaultTextStyle>
-  <p:extLst>
-    <p:ext uri="{EFAFB233-063F-42B5-8137-9DF3F51BA10A}">
-      <p15:sldGuideLst xmlns:p15="http://schemas.microsoft.com/office/powerpoint/2012/main"/>
-    </p:ext>
-  </p:extLst>
 </p:presentation>
 </file>
 
@@ -164,10 +159,234 @@
           <a:chExt cx="0" cy="0"/>
         </a:xfrm>
       </p:grpSpPr>
+      <p:sp>
+        <p:nvSpPr>
+          <p:cNvPr id="2" name="Header Placeholder 1"/>
+          <p:cNvSpPr>
+            <a:spLocks noGrp="1"/>
+          </p:cNvSpPr>
+          <p:nvPr>
+            <p:ph type="hdr" sz="quarter"/>
+          </p:nvPr>
+        </p:nvSpPr>
+        <p:spPr>
+          <a:xfrm>
+            <a:off x="0" y="0"/>
+            <a:ext cx="2971800" cy="458788"/>
+          </a:xfrm>
+          <a:prstGeom prst="rect">
+            <a:avLst/>
+          </a:prstGeom>
+        </p:spPr>
+        <p:txBody>
+          <a:bodyPr vert="horz" lIns="91440" tIns="45720" rIns="91440" bIns="45720" rtlCol="0"/>
+          <a:lstStyle>
+            <a:lvl1pPr algn="l">
+              <a:defRPr sz="1200"/>
+            </a:lvl1pPr>
+          </a:lstStyle>
+          <a:p>
+            <a:endParaRPr lang="en-US"/>
+          </a:p>
+        </p:txBody>
+      </p:sp>
+      <p:sp>
+        <p:nvSpPr>
+          <p:cNvPr id="3" name="Date Placeholder 2"/>
+          <p:cNvSpPr>
+            <a:spLocks noGrp="1"/>
+          </p:cNvSpPr>
+          <p:nvPr>
+            <p:ph type="dt" idx="1"/>
+          </p:nvPr>
+        </p:nvSpPr>
+        <p:spPr>
+          <a:xfrm>
+            <a:off x="3884613" y="0"/>
+            <a:ext cx="2971800" cy="458788"/>
+          </a:xfrm>
+          <a:prstGeom prst="rect">
+            <a:avLst/>
+          </a:prstGeom>
+        </p:spPr>
+        <p:txBody>
+          <a:bodyPr vert="horz" lIns="91440" tIns="45720" rIns="91440" bIns="45720" rtlCol="0"/>
+          <a:lstStyle>
+            <a:lvl1pPr algn="r">
+              <a:defRPr sz="1200"/>
+            </a:lvl1pPr>
+          </a:lstStyle>
+          <a:p>
+            <a:fld id="{5282F153-3F37-0F45-9E97-73ACFA13230C}" type="datetimeFigureOut">
+              <a:rPr lang="en-US"/>
+              <a:t>7/23/19</a:t>
+            </a:fld>
+            <a:endParaRPr lang="en-US"/>
+          </a:p>
+        </p:txBody>
+      </p:sp>
+      <p:sp>
+        <p:nvSpPr>
+          <p:cNvPr id="4" name="Slide Image Placeholder 3"/>
+          <p:cNvSpPr>
+            <a:spLocks noGrp="1" noRot="1" noChangeAspect="1"/>
+          </p:cNvSpPr>
+          <p:nvPr>
+            <p:ph type="sldImg" idx="2"/>
+          </p:nvPr>
+        </p:nvSpPr>
+        <p:spPr>
+          <a:xfrm>
+            <a:off x="685800" y="1143000"/>
+            <a:ext cx="5486400" cy="3086100"/>
+          </a:xfrm>
+          <a:prstGeom prst="rect">
+            <a:avLst/>
+          </a:prstGeom>
+          <a:noFill/>
+          <a:ln w="12700">
+            <a:solidFill>
+              <a:prstClr val="black"/>
+            </a:solidFill>
+          </a:ln>
+        </p:spPr>
+        <p:txBody>
+          <a:bodyPr vert="horz" lIns="91440" tIns="45720" rIns="91440" bIns="45720" rtlCol="0" anchor="ctr"/>
+          <a:lstStyle/>
+          <a:p>
+            <a:endParaRPr lang="en-US"/>
+          </a:p>
+        </p:txBody>
+      </p:sp>
+      <p:sp>
+        <p:nvSpPr>
+          <p:cNvPr id="5" name="Notes Placeholder 4"/>
+          <p:cNvSpPr>
+            <a:spLocks noGrp="1"/>
+          </p:cNvSpPr>
+          <p:nvPr>
+            <p:ph type="body" sz="quarter" idx="3"/>
+          </p:nvPr>
+        </p:nvSpPr>
+        <p:spPr>
+          <a:xfrm>
+            <a:off x="685800" y="4400550"/>
+            <a:ext cx="5486400" cy="3600450"/>
+          </a:xfrm>
+          <a:prstGeom prst="rect">
+            <a:avLst/>
+          </a:prstGeom>
+        </p:spPr>
+        <p:txBody>
+          <a:bodyPr vert="horz" lIns="91440" tIns="45720" rIns="91440" bIns="45720" rtlCol="0"/>
+          <a:lstStyle/>
+          <a:p>
+            <a:pPr lvl="0"/>
+            <a:r>
+              <a:rPr lang="en-US"/>
+              <a:t>Click to edit Master text styles</a:t>
+            </a:r>
+          </a:p>
+          <a:p>
+            <a:pPr lvl="1"/>
+            <a:r>
+              <a:rPr lang="en-US"/>
+              <a:t>Second level</a:t>
+            </a:r>
+          </a:p>
+          <a:p>
+            <a:pPr lvl="2"/>
+            <a:r>
+              <a:rPr lang="en-US"/>
+              <a:t>Third level</a:t>
+            </a:r>
+          </a:p>
+          <a:p>
+            <a:pPr lvl="3"/>
+            <a:r>
+              <a:rPr lang="en-US"/>
+              <a:t>Fourth level</a:t>
+            </a:r>
+          </a:p>
+          <a:p>
+            <a:pPr lvl="4"/>
+            <a:r>
+              <a:rPr lang="en-US"/>
+              <a:t>Fifth level</a:t>
+            </a:r>
+          </a:p>
+        </p:txBody>
+      </p:sp>
+      <p:sp>
+        <p:nvSpPr>
+          <p:cNvPr id="6" name="Footer Placeholder 5"/>
+          <p:cNvSpPr>
+            <a:spLocks noGrp="1"/>
+          </p:cNvSpPr>
+          <p:nvPr>
+            <p:ph type="ftr" sz="quarter" idx="4"/>
+          </p:nvPr>
+        </p:nvSpPr>
+        <p:spPr>
+          <a:xfrm>
+            <a:off x="0" y="8685213"/>
+            <a:ext cx="2971800" cy="458787"/>
+          </a:xfrm>
+          <a:prstGeom prst="rect">
+            <a:avLst/>
+          </a:prstGeom>
+        </p:spPr>
+        <p:txBody>
+          <a:bodyPr vert="horz" lIns="91440" tIns="45720" rIns="91440" bIns="45720" rtlCol="0" anchor="b"/>
+          <a:lstStyle>
+            <a:lvl1pPr algn="l">
+              <a:defRPr sz="1200"/>
+            </a:lvl1pPr>
+          </a:lstStyle>
+          <a:p>
+            <a:endParaRPr lang="en-US"/>
+          </a:p>
+        </p:txBody>
+      </p:sp>
+      <p:sp>
+        <p:nvSpPr>
+          <p:cNvPr id="7" name="Slide Number Placeholder 6"/>
+          <p:cNvSpPr>
+            <a:spLocks noGrp="1"/>
+          </p:cNvSpPr>
+          <p:nvPr>
+            <p:ph type="sldNum" sz="quarter" idx="5"/>
+          </p:nvPr>
+        </p:nvSpPr>
+        <p:spPr>
+          <a:xfrm>
+            <a:off x="3884613" y="8685213"/>
+            <a:ext cx="2971800" cy="458787"/>
+          </a:xfrm>
+          <a:prstGeom prst="rect">
+            <a:avLst/>
+          </a:prstGeom>
+        </p:spPr>
+        <p:txBody>
+          <a:bodyPr vert="horz" lIns="91440" tIns="45720" rIns="91440" bIns="45720" rtlCol="0" anchor="b"/>
+          <a:lstStyle>
+            <a:lvl1pPr algn="r">
+              <a:defRPr sz="1200"/>
+            </a:lvl1pPr>
+          </a:lstStyle>
+          <a:p>
+            <a:fld id="{CE5E9CC1-C706-0F49-92D6-E571CC5EEA8F}" type="slidenum">
+              <a:rPr lang="en-US"/>
+              <a:t>‹#›</a:t>
+            </a:fld>
+            <a:endParaRPr lang="en-US"/>
+          </a:p>
+        </p:txBody>
+      </p:sp>
     </p:spTree>
     <p:extLst>
       <p:ext uri="{BB962C8B-B14F-4D97-AF65-F5344CB8AC3E}">
-        <p14:creationId xmlns:p14="http://schemas.microsoft.com/office/powerpoint/2010/main" val="407354244"/>
+        <p14:creationId xmlns:p14="http://schemas.microsoft.com/office/powerpoint/2010/main" val="1024086991"/>
       </p:ext>
     </p:extLst>
   </p:cSld>
@@ -311,6 +530,10 @@
           <a:bodyPr/>
           <a:lstStyle/>
           <a:p>
+            <a:r>
+              <a:rPr lang="en-US" dirty="0"/>
+              <a:t/>
+            </a:r>
             <a:endParaRPr lang="en-US" dirty="0"/>
           </a:p>
         </p:txBody>
@@ -395,6 +618,10 @@
           <a:bodyPr/>
           <a:lstStyle/>
           <a:p>
+            <a:r>
+              <a:rPr lang="en-US" dirty="0"/>
+              <a:t/>
+            </a:r>
             <a:endParaRPr lang="en-US" dirty="0"/>
           </a:p>
         </p:txBody>
@@ -479,6 +706,10 @@
           <a:bodyPr/>
           <a:lstStyle/>
           <a:p>
+            <a:r>
+              <a:rPr lang="en-US" dirty="0"/>
+              <a:t/>
+            </a:r>
             <a:endParaRPr lang="en-US" dirty="0"/>
           </a:p>
         </p:txBody>
@@ -563,6 +794,10 @@
           <a:bodyPr/>
           <a:lstStyle/>
           <a:p>
+            <a:r>
+              <a:rPr lang="en-US" dirty="0"/>
+              <a:t/>
+            </a:r>
             <a:endParaRPr lang="en-US" dirty="0"/>
           </a:p>
         </p:txBody>
@@ -647,6 +882,10 @@
           <a:bodyPr/>
           <a:lstStyle/>
           <a:p>
+            <a:r>
+              <a:rPr lang="en-US" dirty="0"/>
+              <a:t/>
+            </a:r>
             <a:endParaRPr lang="en-US" dirty="0"/>
           </a:p>
         </p:txBody>
@@ -731,6 +970,10 @@
           <a:bodyPr/>
           <a:lstStyle/>
           <a:p>
+            <a:r>
+              <a:rPr lang="en-US" dirty="0"/>
+              <a:t/>
+            </a:r>
             <a:endParaRPr lang="en-US" dirty="0"/>
           </a:p>
         </p:txBody>
@@ -815,6 +1058,10 @@
           <a:bodyPr/>
           <a:lstStyle/>
           <a:p>
+            <a:r>
+              <a:rPr lang="en-US" dirty="0"/>
+              <a:t/>
+            </a:r>
             <a:endParaRPr lang="en-US" dirty="0"/>
           </a:p>
         </p:txBody>
@@ -899,6 +1146,10 @@
           <a:bodyPr/>
           <a:lstStyle/>
           <a:p>
+            <a:r>
+              <a:rPr lang="en-US" dirty="0"/>
+              <a:t/>
+            </a:r>
             <a:endParaRPr lang="en-US" dirty="0"/>
           </a:p>
         </p:txBody>
@@ -983,6 +1234,10 @@
           <a:bodyPr/>
           <a:lstStyle/>
           <a:p>
+            <a:r>
+              <a:rPr lang="en-US" dirty="0"/>
+              <a:t/>
+            </a:r>
             <a:endParaRPr lang="en-US" dirty="0"/>
           </a:p>
         </p:txBody>
@@ -1067,6 +1322,10 @@
           <a:bodyPr/>
           <a:lstStyle/>
           <a:p>
+            <a:r>
+              <a:rPr lang="en-US" dirty="0"/>
+              <a:t/>
+            </a:r>
             <a:endParaRPr lang="en-US" dirty="0"/>
           </a:p>
         </p:txBody>
@@ -1151,6 +1410,10 @@
           <a:bodyPr/>
           <a:lstStyle/>
           <a:p>
+            <a:r>
+              <a:rPr lang="en-US" dirty="0"/>
+              <a:t/>
+            </a:r>
             <a:endParaRPr lang="en-US" dirty="0"/>
           </a:p>
         </p:txBody>
@@ -1235,6 +1498,10 @@
           <a:bodyPr/>
           <a:lstStyle/>
           <a:p>
+            <a:r>
+              <a:rPr lang="en-US" dirty="0"/>
+              <a:t/>
+            </a:r>
             <a:endParaRPr lang="en-US" dirty="0"/>
           </a:p>
         </p:txBody>
@@ -1319,6 +1586,10 @@
           <a:bodyPr/>
           <a:lstStyle/>
           <a:p>
+            <a:r>
+              <a:rPr lang="en-US" dirty="0"/>
+              <a:t/>
+            </a:r>
             <a:endParaRPr lang="en-US" dirty="0"/>
           </a:p>
         </p:txBody>
@@ -1403,6 +1674,10 @@
           <a:bodyPr/>
           <a:lstStyle/>
           <a:p>
+            <a:r>
+              <a:rPr lang="en-US" dirty="0"/>
+              <a:t/>
+            </a:r>
             <a:endParaRPr lang="en-US" dirty="0"/>
           </a:p>
         </p:txBody>
@@ -1487,6 +1762,10 @@
           <a:bodyPr/>
           <a:lstStyle/>
           <a:p>
+            <a:r>
+              <a:rPr lang="en-US" dirty="0"/>
+              <a:t/>
+            </a:r>
             <a:endParaRPr lang="en-US" dirty="0"/>
           </a:p>
         </p:txBody>
@@ -1571,6 +1850,10 @@
           <a:bodyPr/>
           <a:lstStyle/>
           <a:p>
+            <a:r>
+              <a:rPr lang="en-US" dirty="0"/>
+              <a:t/>
+            </a:r>
             <a:endParaRPr lang="en-US" dirty="0"/>
           </a:p>
         </p:txBody>
@@ -1655,6 +1938,10 @@
           <a:bodyPr/>
           <a:lstStyle/>
           <a:p>
+            <a:r>
+              <a:rPr lang="en-US" dirty="0"/>
+              <a:t/>
+            </a:r>
             <a:endParaRPr lang="en-US" dirty="0"/>
           </a:p>
         </p:txBody>
@@ -1739,6 +2026,10 @@
           <a:bodyPr/>
           <a:lstStyle/>
           <a:p>
+            <a:r>
+              <a:rPr lang="en-US" dirty="0"/>
+              <a:t/>
+            </a:r>
             <a:endParaRPr lang="en-US" dirty="0"/>
           </a:p>
         </p:txBody>
@@ -1823,6 +2114,10 @@
           <a:bodyPr/>
           <a:lstStyle/>
           <a:p>
+            <a:r>
+              <a:rPr lang="en-US" dirty="0"/>
+              <a:t/>
+            </a:r>
             <a:endParaRPr lang="en-US" dirty="0"/>
           </a:p>
         </p:txBody>
@@ -1907,6 +2202,10 @@
           <a:bodyPr/>
           <a:lstStyle/>
           <a:p>
+            <a:r>
+              <a:rPr lang="en-US" dirty="0"/>
+              <a:t/>
+            </a:r>
             <a:endParaRPr lang="en-US" dirty="0"/>
           </a:p>
         </p:txBody>
@@ -1991,6 +2290,10 @@
           <a:bodyPr/>
           <a:lstStyle/>
           <a:p>
+            <a:r>
+              <a:rPr lang="en-US" dirty="0"/>
+              <a:t/>
+            </a:r>
             <a:endParaRPr lang="en-US" dirty="0"/>
           </a:p>
         </p:txBody>
@@ -2075,6 +2378,10 @@
           <a:bodyPr/>
           <a:lstStyle/>
           <a:p>
+            <a:r>
+              <a:rPr lang="en-US" dirty="0"/>
+              <a:t/>
+            </a:r>
             <a:endParaRPr lang="en-US" dirty="0"/>
           </a:p>
         </p:txBody>
@@ -2159,6 +2466,10 @@
           <a:bodyPr/>
           <a:lstStyle/>
           <a:p>
+            <a:r>
+              <a:rPr lang="en-US" dirty="0"/>
+              <a:t/>
+            </a:r>
             <a:endParaRPr lang="en-US" dirty="0"/>
           </a:p>
         </p:txBody>
@@ -2243,6 +2554,10 @@
           <a:bodyPr/>
           <a:lstStyle/>
           <a:p>
+            <a:r>
+              <a:rPr lang="en-US" dirty="0"/>
+              <a:t/>
+            </a:r>
             <a:endParaRPr lang="en-US" dirty="0"/>
           </a:p>
         </p:txBody>
@@ -2327,6 +2642,10 @@
           <a:bodyPr/>
           <a:lstStyle/>
           <a:p>
+            <a:r>
+              <a:rPr lang="en-US" dirty="0"/>
+              <a:t/>
+            </a:r>
             <a:endParaRPr lang="en-US" dirty="0"/>
           </a:p>
         </p:txBody>
@@ -2411,6 +2730,10 @@
           <a:bodyPr/>
           <a:lstStyle/>
           <a:p>
+            <a:r>
+              <a:rPr lang="en-US" dirty="0"/>
+              <a:t/>
+            </a:r>
             <a:endParaRPr lang="en-US" dirty="0"/>
           </a:p>
         </p:txBody>
@@ -2495,6 +2818,10 @@
           <a:bodyPr/>
           <a:lstStyle/>
           <a:p>
+            <a:r>
+              <a:rPr lang="en-US" dirty="0"/>
+              <a:t/>
+            </a:r>
             <a:endParaRPr lang="en-US" dirty="0"/>
           </a:p>
         </p:txBody>
@@ -2579,6 +2906,10 @@
           <a:bodyPr/>
           <a:lstStyle/>
           <a:p>
+            <a:r>
+              <a:rPr lang="en-US" dirty="0"/>
+              <a:t/>
+            </a:r>
             <a:endParaRPr lang="en-US" dirty="0"/>
           </a:p>
         </p:txBody>
@@ -2663,6 +2994,10 @@
           <a:bodyPr/>
           <a:lstStyle/>
           <a:p>
+            <a:r>
+              <a:rPr lang="en-US" dirty="0"/>
+              <a:t/>
+            </a:r>
             <a:endParaRPr lang="en-US" dirty="0"/>
           </a:p>
         </p:txBody>
@@ -2747,6 +3082,10 @@
           <a:bodyPr/>
           <a:lstStyle/>
           <a:p>
+            <a:r>
+              <a:rPr lang="en-US" dirty="0"/>
+              <a:t/>
+            </a:r>
             <a:endParaRPr lang="en-US" dirty="0"/>
           </a:p>
         </p:txBody>
@@ -2831,6 +3170,10 @@
           <a:bodyPr/>
           <a:lstStyle/>
           <a:p>
+            <a:r>
+              <a:rPr lang="en-US" dirty="0"/>
+              <a:t/>
+            </a:r>
             <a:endParaRPr lang="en-US" dirty="0"/>
           </a:p>
         </p:txBody>
@@ -2913,7 +3256,7 @@
           </a:prstGeom>
           <a:extLst>
             <a:ext uri="{C572A759-6A51-4108-AA02-DFA0A04FC94B}">
-              <ma14:wrappingTextBoxFlag xmlns="" xmlns:ma14="http://schemas.microsoft.com/office/mac/drawingml/2011/main" val="0"/>
+              <ma14:wrappingTextBoxFlag xmlns:ma14="http://schemas.microsoft.com/office/mac/drawingml/2011/main" val="0"/>
             </a:ext>
           </a:extLst>
         </p:spPr>
@@ -2934,8 +3277,8 @@
           <a:p>
             <a:pPr algn="l"/>
             <a:fld id="{F7021451-1387-4CA6-816F-3879F97B5CBC}" type="slidenum">
-              <a:rPr lang="en-US" b="0"/>
-              <a:t>‹#›</a:t>
+              <a:rPr b="0" lang="en-US"/>
+              <a:t>1000</a:t>
             </a:fld>
             <a:endParaRPr lang="en-US"/>
           </a:p>
@@ -2957,7 +3300,6 @@
         <a:solidFill>
           <a:srgbClr val="000000"/>
         </a:solidFill>
-        <a:effectLst/>
       </p:bgPr>
     </p:bg>
     <p:spTree>
@@ -2976,14 +3318,14 @@
       </p:grpSpPr>
       <p:pic>
         <p:nvPicPr>
-          <p:cNvPr id="2" name="Image 0" descr="preencoded.png"/>
+          <p:cNvPr id="2" name="Image 0" descr="preencoded.png">    </p:cNvPr>
           <p:cNvPicPr>
             <a:picLocks noChangeAspect="1"/>
           </p:cNvPicPr>
           <p:nvPr/>
         </p:nvPicPr>
         <p:blipFill>
-          <a:blip r:embed="rId2"/>
+          <a:blip r:embed="rId1"/>
           <a:stretch>
             <a:fillRect/>
           </a:stretch>
@@ -3014,7 +3356,6 @@
         <a:solidFill>
           <a:srgbClr val="000000"/>
         </a:solidFill>
-        <a:effectLst/>
       </p:bgPr>
     </p:bg>
     <p:spTree>
@@ -3033,14 +3374,14 @@
       </p:grpSpPr>
       <p:pic>
         <p:nvPicPr>
-          <p:cNvPr id="2" name="Image 0" descr="preencoded.png"/>
+          <p:cNvPr id="2" name="Image 0" descr="preencoded.png">    </p:cNvPr>
           <p:cNvPicPr>
             <a:picLocks noChangeAspect="1"/>
           </p:cNvPicPr>
           <p:nvPr/>
         </p:nvPicPr>
         <p:blipFill>
-          <a:blip r:embed="rId2"/>
+          <a:blip r:embed="rId1"/>
           <a:stretch>
             <a:fillRect/>
           </a:stretch>
@@ -3071,7 +3412,6 @@
         <a:solidFill>
           <a:srgbClr val="000000"/>
         </a:solidFill>
-        <a:effectLst/>
       </p:bgPr>
     </p:bg>
     <p:spTree>
@@ -3090,14 +3430,14 @@
       </p:grpSpPr>
       <p:pic>
         <p:nvPicPr>
-          <p:cNvPr id="2" name="Image 0" descr="preencoded.png"/>
+          <p:cNvPr id="2" name="Image 0" descr="preencoded.png">    </p:cNvPr>
           <p:cNvPicPr>
             <a:picLocks noChangeAspect="1"/>
           </p:cNvPicPr>
           <p:nvPr/>
         </p:nvPicPr>
         <p:blipFill>
-          <a:blip r:embed="rId2"/>
+          <a:blip r:embed="rId1"/>
           <a:stretch>
             <a:fillRect/>
           </a:stretch>
@@ -3123,11 +3463,6 @@
 <file path=ppt/slideMasters/slideMaster1.xml><?xml version="1.0" encoding="utf-8"?>
 <p:sldMaster xmlns:a="http://schemas.openxmlformats.org/drawingml/2006/main" xmlns:r="http://schemas.openxmlformats.org/officeDocument/2006/relationships" xmlns:p="http://schemas.openxmlformats.org/presentationml/2006/main">
   <p:cSld>
-    <p:bg>
-      <p:bgRef idx="1001">
-        <a:schemeClr val="bg1"/>
-      </p:bgRef>
-    </p:bg>
     <p:spTree>
       <p:nvGrpSpPr>
         <p:cNvPr id="1" name=""/>
@@ -3162,7 +3497,7 @@
           </a:prstGeom>
           <a:extLst>
             <a:ext uri="{C572A759-6A51-4108-AA02-DFA0A04FC94B}">
-              <ma14:wrappingTextBoxFlag xmlns="" xmlns:ma14="http://schemas.microsoft.com/office/mac/drawingml/2011/main" val="0"/>
+              <ma14:wrappingTextBoxFlag xmlns:ma14="http://schemas.microsoft.com/office/mac/drawingml/2011/main" val="0"/>
             </a:ext>
           </a:extLst>
         </p:spPr>
@@ -3183,8 +3518,8 @@
           <a:p>
             <a:pPr algn="l"/>
             <a:fld id="{F7021451-1387-4CA6-816F-3879F97B5CBC}" type="slidenum">
-              <a:rPr lang="en-US" b="0"/>
-              <a:t>‹#›</a:t>
+              <a:rPr b="0" lang="en-US"/>
+              <a:t>null</a:t>
             </a:fld>
             <a:endParaRPr lang="en-US"/>
           </a:p>
@@ -3491,11 +3826,11 @@
           <a:bodyPr wrap="square" lIns="0" tIns="0" rIns="0" bIns="0" rtlCol="0" anchor="ctr"/>
           <a:lstStyle/>
           <a:p>
-            <a:pPr marL="0" indent="0">
-              <a:buNone/>
-            </a:pPr>
-            <a:r>
-              <a:rPr lang="en-US" sz="1200" b="1" kern="0" spc="400" dirty="0">
+            <a:pPr indent="0" marL="0">
+              <a:buNone/>
+            </a:pPr>
+            <a:r>
+              <a:rPr lang="en-US" sz="1200" b="1" spc="400" kern="0" dirty="0">
                 <a:solidFill>
                   <a:srgbClr val="FFFFFF"/>
                 </a:solidFill>
@@ -3530,11 +3865,11 @@
           <a:bodyPr wrap="square" lIns="0" tIns="0" rIns="0" bIns="0" rtlCol="0" anchor="ctr"/>
           <a:lstStyle/>
           <a:p>
-            <a:pPr marL="0" indent="0">
-              <a:buNone/>
-            </a:pPr>
-            <a:r>
-              <a:rPr lang="en-US" sz="1200" b="1" kern="0" spc="300" dirty="0">
+            <a:pPr indent="0" marL="0">
+              <a:buNone/>
+            </a:pPr>
+            <a:r>
+              <a:rPr lang="en-US" sz="1200" b="1" spc="300" kern="0" dirty="0">
                 <a:solidFill>
                   <a:srgbClr val="C4B3F5"/>
                 </a:solidFill>
@@ -3569,7 +3904,7 @@
           <a:bodyPr wrap="square" lIns="0" tIns="0" rIns="0" bIns="0" rtlCol="0" anchor="t"/>
           <a:lstStyle/>
           <a:p>
-            <a:pPr marL="0" indent="0">
+            <a:pPr indent="0" marL="0">
               <a:lnSpc>
                 <a:spcPct val="102000"/>
               </a:lnSpc>
@@ -3589,7 +3924,7 @@
             <a:endParaRPr lang="en-US" sz="3600" dirty="0"/>
           </a:p>
           <a:p>
-            <a:pPr marL="0" indent="0">
+            <a:pPr indent="0" marL="0">
               <a:lnSpc>
                 <a:spcPct val="102000"/>
               </a:lnSpc>
@@ -3631,7 +3966,7 @@
           <a:bodyPr wrap="square" lIns="0" tIns="0" rIns="0" bIns="0" rtlCol="0" anchor="ctr"/>
           <a:lstStyle/>
           <a:p>
-            <a:pPr marL="0" indent="0">
+            <a:pPr indent="0" marL="0">
               <a:lnSpc>
                 <a:spcPct val="120000"/>
               </a:lnSpc>
@@ -3695,7 +4030,7 @@
           <a:bodyPr wrap="square" lIns="0" tIns="0" rIns="0" bIns="0" rtlCol="0" anchor="ctr"/>
           <a:lstStyle/>
           <a:p>
-            <a:pPr marL="0" indent="0" algn="ctr">
+            <a:pPr algn="ctr" indent="0" marL="0">
               <a:buNone/>
             </a:pPr>
             <a:r>
@@ -3760,7 +4095,7 @@
           <a:bodyPr wrap="square" lIns="0" tIns="0" rIns="0" bIns="0" rtlCol="0" anchor="ctr"/>
           <a:lstStyle/>
           <a:p>
-            <a:pPr marL="0" indent="0" algn="ctr">
+            <a:pPr algn="ctr" indent="0" marL="0">
               <a:buNone/>
             </a:pPr>
             <a:r>
@@ -3825,7 +4160,7 @@
           <a:bodyPr wrap="square" lIns="0" tIns="0" rIns="0" bIns="0" rtlCol="0" anchor="ctr"/>
           <a:lstStyle/>
           <a:p>
-            <a:pPr marL="0" indent="0" algn="ctr">
+            <a:pPr algn="ctr" indent="0" marL="0">
               <a:buNone/>
             </a:pPr>
             <a:r>
@@ -3890,7 +4225,7 @@
           <a:bodyPr wrap="square" lIns="0" tIns="0" rIns="0" bIns="0" rtlCol="0" anchor="ctr"/>
           <a:lstStyle/>
           <a:p>
-            <a:pPr marL="0" indent="0" algn="ctr">
+            <a:pPr algn="ctr" indent="0" marL="0">
               <a:buNone/>
             </a:pPr>
             <a:r>
@@ -3955,7 +4290,7 @@
           <a:bodyPr wrap="square" lIns="0" tIns="0" rIns="0" bIns="0" rtlCol="0" anchor="ctr"/>
           <a:lstStyle/>
           <a:p>
-            <a:pPr marL="0" indent="0" algn="ctr">
+            <a:pPr algn="ctr" indent="0" marL="0">
               <a:buNone/>
             </a:pPr>
             <a:r>
@@ -4020,7 +4355,7 @@
           <a:bodyPr wrap="square" lIns="0" tIns="0" rIns="0" bIns="0" rtlCol="0" anchor="ctr"/>
           <a:lstStyle/>
           <a:p>
-            <a:pPr marL="0" indent="0" algn="ctr">
+            <a:pPr algn="ctr" indent="0" marL="0">
               <a:buNone/>
             </a:pPr>
             <a:r>
@@ -4106,7 +4441,7 @@
           <a:bodyPr wrap="square" lIns="0" tIns="0" rIns="0" bIns="0" rtlCol="0" anchor="ctr"/>
           <a:lstStyle/>
           <a:p>
-            <a:pPr marL="0" indent="0" algn="l">
+            <a:pPr algn="l" indent="0" marL="0">
               <a:buNone/>
             </a:pPr>
             <a:r>
@@ -4145,7 +4480,7 @@
           <a:bodyPr wrap="square" lIns="0" tIns="0" rIns="0" bIns="0" rtlCol="0" anchor="ctr"/>
           <a:lstStyle/>
           <a:p>
-            <a:pPr marL="0" indent="0">
+            <a:pPr indent="0" marL="0">
               <a:buNone/>
             </a:pPr>
             <a:r>
@@ -4211,11 +4546,11 @@
           <a:bodyPr wrap="square" lIns="0" tIns="0" rIns="0" bIns="0" rtlCol="0" anchor="ctr"/>
           <a:lstStyle/>
           <a:p>
-            <a:pPr marL="0" indent="0" algn="ctr">
-              <a:buNone/>
-            </a:pPr>
-            <a:r>
-              <a:rPr lang="en-US" sz="900" b="1" kern="0" spc="100" dirty="0">
+            <a:pPr algn="ctr" indent="0" marL="0">
+              <a:buNone/>
+            </a:pPr>
+            <a:r>
+              <a:rPr lang="en-US" sz="900" b="1" spc="100" kern="0" dirty="0">
                 <a:solidFill>
                   <a:srgbClr val="5A05F4"/>
                 </a:solidFill>
@@ -4231,14 +4566,14 @@
       </p:sp>
       <p:pic>
         <p:nvPicPr>
-          <p:cNvPr id="7" name="Image 0" descr="preencoded.png"/>
+          <p:cNvPr id="7" name="Image 0" descr="preencoded.png">    </p:cNvPr>
           <p:cNvPicPr>
             <a:picLocks noChangeAspect="1"/>
           </p:cNvPicPr>
           <p:nvPr/>
         </p:nvPicPr>
         <p:blipFill>
-          <a:blip r:embed="rId3"/>
+          <a:blip r:embed="rId1"/>
           <a:stretch>
             <a:fillRect/>
           </a:stretch>
@@ -4301,7 +4636,7 @@
           <a:bodyPr wrap="square" lIns="0" tIns="0" rIns="0" bIns="0" rtlCol="0" anchor="t"/>
           <a:lstStyle/>
           <a:p>
-            <a:pPr marL="0" indent="0">
+            <a:pPr indent="0" marL="0">
               <a:lnSpc>
                 <a:spcPct val="130000"/>
               </a:lnSpc>
@@ -4321,7 +4656,7 @@
             <a:endParaRPr lang="en-US" sz="1150" dirty="0"/>
           </a:p>
           <a:p>
-            <a:pPr marL="0" indent="0">
+            <a:pPr indent="0" marL="0">
               <a:lnSpc>
                 <a:spcPct val="130000"/>
               </a:lnSpc>
@@ -4338,6 +4673,12 @@
               </a:rPr>
               <a:t>  "model"</a:t>
             </a:r>
+            <a:pPr indent="0" marL="0">
+              <a:lnSpc>
+                <a:spcPct val="130000"/>
+              </a:lnSpc>
+              <a:buNone/>
+            </a:pPr>
             <a:r>
               <a:rPr lang="en-US" sz="1150" dirty="0">
                 <a:solidFill>
@@ -4352,7 +4693,7 @@
             <a:endParaRPr lang="en-US" sz="1150" dirty="0"/>
           </a:p>
           <a:p>
-            <a:pPr marL="0" indent="0">
+            <a:pPr indent="0" marL="0">
               <a:lnSpc>
                 <a:spcPct val="130000"/>
               </a:lnSpc>
@@ -4369,6 +4710,12 @@
               </a:rPr>
               <a:t>  "messages"</a:t>
             </a:r>
+            <a:pPr indent="0" marL="0">
+              <a:lnSpc>
+                <a:spcPct val="130000"/>
+              </a:lnSpc>
+              <a:buNone/>
+            </a:pPr>
             <a:r>
               <a:rPr lang="en-US" sz="1150" dirty="0">
                 <a:solidFill>
@@ -4383,7 +4730,7 @@
             <a:endParaRPr lang="en-US" sz="1150" dirty="0"/>
           </a:p>
           <a:p>
-            <a:pPr marL="0" indent="0">
+            <a:pPr indent="0" marL="0">
               <a:lnSpc>
                 <a:spcPct val="130000"/>
               </a:lnSpc>
@@ -4403,7 +4750,7 @@
             <a:endParaRPr lang="en-US" sz="1150" dirty="0"/>
           </a:p>
           <a:p>
-            <a:pPr marL="0" indent="0">
+            <a:pPr indent="0" marL="0">
               <a:lnSpc>
                 <a:spcPct val="130000"/>
               </a:lnSpc>
@@ -4423,7 +4770,7 @@
             <a:endParaRPr lang="en-US" sz="1150" dirty="0"/>
           </a:p>
           <a:p>
-            <a:pPr marL="0" indent="0">
+            <a:pPr indent="0" marL="0">
               <a:lnSpc>
                 <a:spcPct val="130000"/>
               </a:lnSpc>
@@ -4443,7 +4790,7 @@
             <a:endParaRPr lang="en-US" sz="1150" dirty="0"/>
           </a:p>
           <a:p>
-            <a:pPr marL="0" indent="0">
+            <a:pPr indent="0" marL="0">
               <a:lnSpc>
                 <a:spcPct val="130000"/>
               </a:lnSpc>
@@ -4463,7 +4810,7 @@
             <a:endParaRPr lang="en-US" sz="1150" dirty="0"/>
           </a:p>
           <a:p>
-            <a:pPr marL="0" indent="0">
+            <a:pPr indent="0" marL="0">
               <a:lnSpc>
                 <a:spcPct val="130000"/>
               </a:lnSpc>
@@ -4532,7 +4879,7 @@
           <a:bodyPr wrap="square" lIns="0" tIns="0" rIns="0" bIns="0" rtlCol="0" anchor="ctr"/>
           <a:lstStyle/>
           <a:p>
-            <a:pPr marL="0" indent="0">
+            <a:pPr indent="0" marL="0">
               <a:lnSpc>
                 <a:spcPct val="112000"/>
               </a:lnSpc>
@@ -4596,7 +4943,7 @@
           <a:bodyPr wrap="square" lIns="0" tIns="0" rIns="0" bIns="0" rtlCol="0" anchor="ctr"/>
           <a:lstStyle/>
           <a:p>
-            <a:pPr marL="0" indent="0">
+            <a:pPr indent="0" marL="0">
               <a:buNone/>
             </a:pPr>
             <a:r>
@@ -4635,7 +4982,7 @@
           <a:bodyPr wrap="square" lIns="0" tIns="0" rIns="0" bIns="0" rtlCol="0" anchor="ctr"/>
           <a:lstStyle/>
           <a:p>
-            <a:pPr marL="0" indent="0">
+            <a:pPr indent="0" marL="0">
               <a:buNone/>
             </a:pPr>
             <a:r>
@@ -4696,7 +5043,7 @@
           <a:bodyPr wrap="square" lIns="0" tIns="0" rIns="0" bIns="0" rtlCol="0" anchor="ctr"/>
           <a:lstStyle/>
           <a:p>
-            <a:pPr marL="0" indent="0">
+            <a:pPr indent="0" marL="0">
               <a:buNone/>
             </a:pPr>
             <a:r>
@@ -4735,7 +5082,7 @@
           <a:bodyPr wrap="square" lIns="0" tIns="0" rIns="0" bIns="0" rtlCol="0" anchor="ctr"/>
           <a:lstStyle/>
           <a:p>
-            <a:pPr marL="0" indent="0">
+            <a:pPr indent="0" marL="0">
               <a:buNone/>
             </a:pPr>
             <a:r>
@@ -4796,7 +5143,7 @@
           <a:bodyPr wrap="square" lIns="0" tIns="0" rIns="0" bIns="0" rtlCol="0" anchor="ctr"/>
           <a:lstStyle/>
           <a:p>
-            <a:pPr marL="0" indent="0">
+            <a:pPr indent="0" marL="0">
               <a:buNone/>
             </a:pPr>
             <a:r>
@@ -4835,7 +5182,7 @@
           <a:bodyPr wrap="square" lIns="0" tIns="0" rIns="0" bIns="0" rtlCol="0" anchor="ctr"/>
           <a:lstStyle/>
           <a:p>
-            <a:pPr marL="0" indent="0">
+            <a:pPr indent="0" marL="0">
               <a:buNone/>
             </a:pPr>
             <a:r>
@@ -4874,7 +5221,7 @@
           <a:bodyPr wrap="square" lIns="0" tIns="0" rIns="0" bIns="0" rtlCol="0" anchor="ctr"/>
           <a:lstStyle/>
           <a:p>
-            <a:pPr marL="0" indent="0">
+            <a:pPr indent="0" marL="0">
               <a:buNone/>
             </a:pPr>
             <a:r>
@@ -4912,7 +5259,7 @@
           </a:prstGeom>
           <a:extLst>
             <a:ext uri="{C572A759-6A51-4108-AA02-DFA0A04FC94B}">
-              <ma14:wrappingTextBoxFlag xmlns="" xmlns:ma14="http://schemas.microsoft.com/office/mac/drawingml/2011/main" val="0"/>
+              <ma14:wrappingTextBoxFlag xmlns:ma14="http://schemas.microsoft.com/office/mac/drawingml/2011/main" val="0"/>
             </a:ext>
           </a:extLst>
         </p:spPr>
@@ -4933,7 +5280,7 @@
           <a:p>
             <a:pPr algn="l"/>
             <a:fld id="{F7021451-1387-4CA6-816F-3879F97B5CBC}" type="slidenum">
-              <a:rPr lang="en-US" b="0"/>
+              <a:rPr b="0" lang="en-US"/>
               <a:t>10</a:t>
             </a:fld>
             <a:endParaRPr lang="en-US"/>
@@ -5008,7 +5355,7 @@
           <a:bodyPr wrap="square" lIns="0" tIns="0" rIns="0" bIns="0" rtlCol="0" anchor="ctr"/>
           <a:lstStyle/>
           <a:p>
-            <a:pPr marL="0" indent="0" algn="l">
+            <a:pPr algn="l" indent="0" marL="0">
               <a:buNone/>
             </a:pPr>
             <a:r>
@@ -5047,7 +5394,7 @@
           <a:bodyPr wrap="square" lIns="0" tIns="0" rIns="0" bIns="0" rtlCol="0" anchor="ctr"/>
           <a:lstStyle/>
           <a:p>
-            <a:pPr marL="0" indent="0">
+            <a:pPr indent="0" marL="0">
               <a:buNone/>
             </a:pPr>
             <a:r>
@@ -5113,11 +5460,11 @@
           <a:bodyPr wrap="square" lIns="0" tIns="0" rIns="0" bIns="0" rtlCol="0" anchor="ctr"/>
           <a:lstStyle/>
           <a:p>
-            <a:pPr marL="0" indent="0" algn="ctr">
-              <a:buNone/>
-            </a:pPr>
-            <a:r>
-              <a:rPr lang="en-US" sz="900" b="1" kern="0" spc="100" dirty="0">
+            <a:pPr algn="ctr" indent="0" marL="0">
+              <a:buNone/>
+            </a:pPr>
+            <a:r>
+              <a:rPr lang="en-US" sz="900" b="1" spc="100" kern="0" dirty="0">
                 <a:solidFill>
                   <a:srgbClr val="5A05F4"/>
                 </a:solidFill>
@@ -5133,14 +5480,14 @@
       </p:sp>
       <p:pic>
         <p:nvPicPr>
-          <p:cNvPr id="7" name="Image 0" descr="preencoded.png"/>
+          <p:cNvPr id="7" name="Image 0" descr="preencoded.png">    </p:cNvPr>
           <p:cNvPicPr>
             <a:picLocks noChangeAspect="1"/>
           </p:cNvPicPr>
           <p:nvPr/>
         </p:nvPicPr>
         <p:blipFill>
-          <a:blip r:embed="rId3"/>
+          <a:blip r:embed="rId1"/>
           <a:stretch>
             <a:fillRect/>
           </a:stretch>
@@ -5171,34 +5518,16 @@
         </p:nvGraphicFramePr>
         <p:xfrm>
           <a:off x="566928" y="1600200"/>
-          <a:ext cx="6858000" cy="2834640"/>
+          <a:ext cx="6858000" cy="914400"/>
         </p:xfrm>
         <a:graphic>
           <a:graphicData uri="http://schemas.openxmlformats.org/drawingml/2006/table">
             <a:tbl>
               <a:tblPr/>
               <a:tblGrid>
-                <a:gridCol w="1600200">
-                  <a:extLst>
-                    <a:ext uri="{9D8B030D-6E8A-4147-A177-3AD203B41FA5}">
-                      <a16:colId xmlns:a16="http://schemas.microsoft.com/office/drawing/2014/main" val="20000"/>
-                    </a:ext>
-                  </a:extLst>
-                </a:gridCol>
-                <a:gridCol w="2651760">
-                  <a:extLst>
-                    <a:ext uri="{9D8B030D-6E8A-4147-A177-3AD203B41FA5}">
-                      <a16:colId xmlns:a16="http://schemas.microsoft.com/office/drawing/2014/main" val="20001"/>
-                    </a:ext>
-                  </a:extLst>
-                </a:gridCol>
-                <a:gridCol w="2606040">
-                  <a:extLst>
-                    <a:ext uri="{9D8B030D-6E8A-4147-A177-3AD203B41FA5}">
-                      <a16:colId xmlns:a16="http://schemas.microsoft.com/office/drawing/2014/main" val="20002"/>
-                    </a:ext>
-                  </a:extLst>
-                </a:gridCol>
+                <a:gridCol w="1600200"/>
+                <a:gridCol w="2651760"/>
+                <a:gridCol w="2606040"/>
               </a:tblGrid>
               <a:tr h="566928">
                 <a:tc>
@@ -5206,11 +5535,11 @@
                     <a:bodyPr/>
                     <a:lstStyle/>
                     <a:p>
-                      <a:pPr marL="0" indent="0" algn="ctr">
+                      <a:pPr algn="ctr" indent="0" marL="0">
                         <a:buNone/>
                       </a:pPr>
                       <a:r>
-                        <a:rPr lang="en-US" sz="900" b="1" kern="0" spc="100" dirty="0">
+                        <a:rPr lang="en-US" sz="900" b="1" spc="100" kern="0" dirty="0">
                           <a:solidFill>
                             <a:srgbClr val="FFFFFF"/>
                           </a:solidFill>
@@ -5274,11 +5603,11 @@
                     <a:bodyPr/>
                     <a:lstStyle/>
                     <a:p>
-                      <a:pPr marL="0" indent="0" algn="ctr">
+                      <a:pPr algn="ctr" indent="0" marL="0">
                         <a:buNone/>
                       </a:pPr>
                       <a:r>
-                        <a:rPr lang="en-US" sz="900" b="1" kern="0" spc="100" dirty="0">
+                        <a:rPr lang="en-US" sz="900" b="1" spc="100" kern="0" dirty="0">
                           <a:solidFill>
                             <a:srgbClr val="FFFFFF"/>
                           </a:solidFill>
@@ -5342,11 +5671,11 @@
                     <a:bodyPr/>
                     <a:lstStyle/>
                     <a:p>
-                      <a:pPr marL="0" indent="0" algn="ctr">
+                      <a:pPr algn="ctr" indent="0" marL="0">
                         <a:buNone/>
                       </a:pPr>
                       <a:r>
-                        <a:rPr lang="en-US" sz="900" b="1" kern="0" spc="100" dirty="0">
+                        <a:rPr lang="en-US" sz="900" b="1" spc="100" kern="0" dirty="0">
                           <a:solidFill>
                             <a:srgbClr val="FFFFFF"/>
                           </a:solidFill>
@@ -5405,11 +5734,6 @@
                     </a:solidFill>
                   </a:tcPr>
                 </a:tc>
-                <a:extLst>
-                  <a:ext uri="{0D108BD9-81ED-4DB2-BD59-A6C34878D82A}">
-                    <a16:rowId xmlns:a16="http://schemas.microsoft.com/office/drawing/2014/main" val="10000"/>
-                  </a:ext>
-                </a:extLst>
               </a:tr>
               <a:tr h="566928">
                 <a:tc>
@@ -5417,7 +5741,7 @@
                     <a:bodyPr/>
                     <a:lstStyle/>
                     <a:p>
-                      <a:pPr marL="0" indent="0">
+                      <a:pPr indent="0" marL="0">
                         <a:buNone/>
                       </a:pPr>
                       <a:r>
@@ -5485,7 +5809,7 @@
                     <a:bodyPr/>
                     <a:lstStyle/>
                     <a:p>
-                      <a:pPr marL="0" indent="0">
+                      <a:pPr indent="0" marL="0">
                         <a:buNone/>
                       </a:pPr>
                       <a:r>
@@ -5553,7 +5877,7 @@
                     <a:bodyPr/>
                     <a:lstStyle/>
                     <a:p>
-                      <a:pPr marL="0" indent="0">
+                      <a:pPr indent="0" marL="0">
                         <a:buNone/>
                       </a:pPr>
                       <a:r>
@@ -5616,11 +5940,6 @@
                     </a:solidFill>
                   </a:tcPr>
                 </a:tc>
-                <a:extLst>
-                  <a:ext uri="{0D108BD9-81ED-4DB2-BD59-A6C34878D82A}">
-                    <a16:rowId xmlns:a16="http://schemas.microsoft.com/office/drawing/2014/main" val="10001"/>
-                  </a:ext>
-                </a:extLst>
               </a:tr>
               <a:tr h="566928">
                 <a:tc>
@@ -5628,7 +5947,7 @@
                     <a:bodyPr/>
                     <a:lstStyle/>
                     <a:p>
-                      <a:pPr marL="0" indent="0">
+                      <a:pPr indent="0" marL="0">
                         <a:buNone/>
                       </a:pPr>
                       <a:r>
@@ -5696,7 +6015,7 @@
                     <a:bodyPr/>
                     <a:lstStyle/>
                     <a:p>
-                      <a:pPr marL="0" indent="0">
+                      <a:pPr indent="0" marL="0">
                         <a:buNone/>
                       </a:pPr>
                       <a:r>
@@ -5708,7 +6027,7 @@
                           <a:ea typeface="Montserrat" pitchFamily="34" charset="-122"/>
                           <a:cs typeface="Montserrat" pitchFamily="34" charset="-120"/>
                         </a:rPr>
-                        <a:t>вдарилась у max_tokens</a:t>
+                        <a:t>досягла ліміту max_tokens</a:t>
                       </a:r>
                       <a:endParaRPr lang="en-US" sz="1150" dirty="0">
                         <a:latin typeface="Montserrat" charset="0"/>
@@ -5764,7 +6083,7 @@
                     <a:bodyPr/>
                     <a:lstStyle/>
                     <a:p>
-                      <a:pPr marL="0" indent="0">
+                      <a:pPr indent="0" marL="0">
                         <a:buNone/>
                       </a:pPr>
                       <a:r>
@@ -5827,11 +6146,6 @@
                     </a:solidFill>
                   </a:tcPr>
                 </a:tc>
-                <a:extLst>
-                  <a:ext uri="{0D108BD9-81ED-4DB2-BD59-A6C34878D82A}">
-                    <a16:rowId xmlns:a16="http://schemas.microsoft.com/office/drawing/2014/main" val="10002"/>
-                  </a:ext>
-                </a:extLst>
               </a:tr>
               <a:tr h="566928">
                 <a:tc>
@@ -5839,7 +6153,7 @@
                     <a:bodyPr/>
                     <a:lstStyle/>
                     <a:p>
-                      <a:pPr marL="0" indent="0">
+                      <a:pPr indent="0" marL="0">
                         <a:buNone/>
                       </a:pPr>
                       <a:r>
@@ -5907,7 +6221,7 @@
                     <a:bodyPr/>
                     <a:lstStyle/>
                     <a:p>
-                      <a:pPr marL="0" indent="0">
+                      <a:pPr indent="0" marL="0">
                         <a:buNone/>
                       </a:pPr>
                       <a:r>
@@ -5975,7 +6289,7 @@
                     <a:bodyPr/>
                     <a:lstStyle/>
                     <a:p>
-                      <a:pPr marL="0" indent="0">
+                      <a:pPr indent="0" marL="0">
                         <a:buNone/>
                       </a:pPr>
                       <a:r>
@@ -6038,11 +6352,6 @@
                     </a:solidFill>
                   </a:tcPr>
                 </a:tc>
-                <a:extLst>
-                  <a:ext uri="{0D108BD9-81ED-4DB2-BD59-A6C34878D82A}">
-                    <a16:rowId xmlns:a16="http://schemas.microsoft.com/office/drawing/2014/main" val="10003"/>
-                  </a:ext>
-                </a:extLst>
               </a:tr>
               <a:tr h="566928">
                 <a:tc>
@@ -6050,7 +6359,7 @@
                     <a:bodyPr/>
                     <a:lstStyle/>
                     <a:p>
-                      <a:pPr marL="0" indent="0">
+                      <a:pPr indent="0" marL="0">
                         <a:buNone/>
                       </a:pPr>
                       <a:r>
@@ -6118,7 +6427,7 @@
                     <a:bodyPr/>
                     <a:lstStyle/>
                     <a:p>
-                      <a:pPr marL="0" indent="0">
+                      <a:pPr indent="0" marL="0">
                         <a:buNone/>
                       </a:pPr>
                       <a:r>
@@ -6186,7 +6495,7 @@
                     <a:bodyPr/>
                     <a:lstStyle/>
                     <a:p>
-                      <a:pPr marL="0" indent="0">
+                      <a:pPr indent="0" marL="0">
                         <a:buNone/>
                       </a:pPr>
                       <a:r>
@@ -6249,11 +6558,6 @@
                     </a:solidFill>
                   </a:tcPr>
                 </a:tc>
-                <a:extLst>
-                  <a:ext uri="{0D108BD9-81ED-4DB2-BD59-A6C34878D82A}">
-                    <a16:rowId xmlns:a16="http://schemas.microsoft.com/office/drawing/2014/main" val="10004"/>
-                  </a:ext>
-                </a:extLst>
               </a:tr>
             </a:tbl>
           </a:graphicData>
@@ -6288,30 +6592,89 @@
       </p:sp>
       <p:sp>
         <p:nvSpPr>
-          <p:cNvPr id="10" name="Text 6"/>
-          <p:cNvSpPr/>
-          <p:nvPr/>
-        </p:nvSpPr>
-        <p:spPr>
-          <a:xfrm>
-            <a:off x="7854696" y="1728216"/>
-            <a:ext cx="3557016" cy="219456"/>
-          </a:xfrm>
-          <a:prstGeom prst="rect">
-            <a:avLst/>
-          </a:prstGeom>
-          <a:noFill/>
-          <a:ln/>
-        </p:spPr>
-        <p:txBody>
-          <a:bodyPr wrap="square" lIns="0" tIns="0" rIns="0" bIns="0" rtlCol="0" anchor="ctr"/>
-          <a:lstStyle/>
-          <a:p>
-            <a:pPr marL="0" indent="0">
-              <a:buNone/>
-            </a:pPr>
-            <a:r>
-              <a:rPr lang="en-US" sz="950" b="1" kern="0" spc="150" dirty="0">
+          <p:cNvPr id="10" name="Shape 6"/>
+          <p:cNvSpPr/>
+          <p:nvPr/>
+        </p:nvSpPr>
+        <p:spPr>
+          <a:xfrm>
+            <a:off x="7818120" y="2382012"/>
+            <a:ext cx="310896" cy="310896"/>
+          </a:xfrm>
+          <a:prstGeom prst="ellipse">
+            <a:avLst/>
+          </a:prstGeom>
+          <a:solidFill>
+            <a:srgbClr val="B3261E"/>
+          </a:solidFill>
+          <a:ln/>
+        </p:spPr>
+      </p:sp>
+      <p:sp>
+        <p:nvSpPr>
+          <p:cNvPr id="11" name="Text 7"/>
+          <p:cNvSpPr/>
+          <p:nvPr/>
+        </p:nvSpPr>
+        <p:spPr>
+          <a:xfrm>
+            <a:off x="7818120" y="2382012"/>
+            <a:ext cx="310896" cy="310896"/>
+          </a:xfrm>
+          <a:prstGeom prst="rect">
+            <a:avLst/>
+          </a:prstGeom>
+          <a:noFill/>
+          <a:ln/>
+        </p:spPr>
+        <p:txBody>
+          <a:bodyPr wrap="square" lIns="0" tIns="0" rIns="0" bIns="0" rtlCol="0" anchor="ctr"/>
+          <a:lstStyle/>
+          <a:p>
+            <a:pPr algn="ctr" indent="0" marL="0">
+              <a:buNone/>
+            </a:pPr>
+            <a:r>
+              <a:rPr lang="en-US" sz="1200" b="1" dirty="0">
+                <a:solidFill>
+                  <a:srgbClr val="FFFFFF"/>
+                </a:solidFill>
+                <a:latin typeface="Arial" pitchFamily="34" charset="0"/>
+                <a:ea typeface="Arial" pitchFamily="34" charset="-122"/>
+                <a:cs typeface="Arial" pitchFamily="34" charset="-120"/>
+              </a:rPr>
+              <a:t>✕</a:t>
+            </a:r>
+            <a:endParaRPr lang="en-US" sz="1200" dirty="0"/>
+          </a:p>
+        </p:txBody>
+      </p:sp>
+      <p:sp>
+        <p:nvSpPr>
+          <p:cNvPr id="12" name="Text 8"/>
+          <p:cNvSpPr/>
+          <p:nvPr/>
+        </p:nvSpPr>
+        <p:spPr>
+          <a:xfrm>
+            <a:off x="8311896" y="1728216"/>
+            <a:ext cx="3099816" cy="219456"/>
+          </a:xfrm>
+          <a:prstGeom prst="rect">
+            <a:avLst/>
+          </a:prstGeom>
+          <a:noFill/>
+          <a:ln/>
+        </p:spPr>
+        <p:txBody>
+          <a:bodyPr wrap="square" lIns="0" tIns="0" rIns="0" bIns="0" rtlCol="0" anchor="ctr"/>
+          <a:lstStyle/>
+          <a:p>
+            <a:pPr indent="0" marL="0">
+              <a:buNone/>
+            </a:pPr>
+            <a:r>
+              <a:rPr lang="en-US" sz="950" b="1" spc="150" kern="0" dirty="0">
                 <a:solidFill>
                   <a:srgbClr val="B3261E"/>
                 </a:solidFill>
@@ -6327,26 +6690,26 @@
       </p:sp>
       <p:sp>
         <p:nvSpPr>
-          <p:cNvPr id="11" name="Text 7"/>
-          <p:cNvSpPr/>
-          <p:nvPr/>
-        </p:nvSpPr>
-        <p:spPr>
-          <a:xfrm>
-            <a:off x="7854696" y="1984248"/>
-            <a:ext cx="3557016" cy="1362456"/>
-          </a:xfrm>
-          <a:prstGeom prst="rect">
-            <a:avLst/>
-          </a:prstGeom>
-          <a:noFill/>
-          <a:ln/>
-        </p:spPr>
-        <p:txBody>
-          <a:bodyPr wrap="square" lIns="0" tIns="0" rIns="0" bIns="0" rtlCol="0" anchor="ctr"/>
-          <a:lstStyle/>
-          <a:p>
-            <a:pPr marL="0" indent="0">
+          <p:cNvPr id="13" name="Text 9"/>
+          <p:cNvSpPr/>
+          <p:nvPr/>
+        </p:nvSpPr>
+        <p:spPr>
+          <a:xfrm>
+            <a:off x="8311896" y="1984248"/>
+            <a:ext cx="3099816" cy="1362456"/>
+          </a:xfrm>
+          <a:prstGeom prst="rect">
+            <a:avLst/>
+          </a:prstGeom>
+          <a:noFill/>
+          <a:ln/>
+        </p:spPr>
+        <p:txBody>
+          <a:bodyPr wrap="square" lIns="0" tIns="0" rIns="0" bIns="0" rtlCol="0" anchor="ctr"/>
+          <a:lstStyle/>
+          <a:p>
+            <a:pPr indent="0" marL="0">
               <a:lnSpc>
                 <a:spcPct val="112000"/>
               </a:lnSpc>
@@ -6369,7 +6732,7 @@
       </p:sp>
       <p:sp>
         <p:nvSpPr>
-          <p:cNvPr id="8" name="Shape 8"/>
+          <p:cNvPr id="14" name="Shape 10"/>
           <p:cNvSpPr/>
           <p:nvPr/>
         </p:nvSpPr>
@@ -6391,7 +6754,7 @@
       </p:sp>
       <p:sp>
         <p:nvSpPr>
-          <p:cNvPr id="13" name="Text 9"/>
+          <p:cNvPr id="15" name="Text 11"/>
           <p:cNvSpPr/>
           <p:nvPr/>
         </p:nvSpPr>
@@ -6410,11 +6773,11 @@
           <a:bodyPr wrap="square" lIns="0" tIns="0" rIns="0" bIns="0" rtlCol="0" anchor="ctr"/>
           <a:lstStyle/>
           <a:p>
-            <a:pPr marL="0" indent="0">
-              <a:buNone/>
-            </a:pPr>
-            <a:r>
-              <a:rPr lang="en-US" sz="950" b="1" kern="0" spc="150" dirty="0">
+            <a:pPr indent="0" marL="0">
+              <a:buNone/>
+            </a:pPr>
+            <a:r>
+              <a:rPr lang="en-US" sz="950" b="1" spc="150" kern="0" dirty="0">
                 <a:solidFill>
                   <a:srgbClr val="FFFFFF"/>
                 </a:solidFill>
@@ -6430,7 +6793,7 @@
       </p:sp>
       <p:sp>
         <p:nvSpPr>
-          <p:cNvPr id="14" name="Text 10"/>
+          <p:cNvPr id="16" name="Text 12"/>
           <p:cNvSpPr/>
           <p:nvPr/>
         </p:nvSpPr>
@@ -6449,7 +6812,7 @@
           <a:bodyPr wrap="square" lIns="0" tIns="0" rIns="0" bIns="0" rtlCol="0" anchor="ctr"/>
           <a:lstStyle/>
           <a:p>
-            <a:pPr marL="0" indent="0">
+            <a:pPr indent="0" marL="0">
               <a:lnSpc>
                 <a:spcPct val="112000"/>
               </a:lnSpc>
@@ -6472,7 +6835,7 @@
       </p:sp>
       <p:sp>
         <p:nvSpPr>
-          <p:cNvPr id="15" name="Text 11"/>
+          <p:cNvPr id="17" name="Text 13"/>
           <p:cNvSpPr/>
           <p:nvPr/>
         </p:nvSpPr>
@@ -6491,7 +6854,7 @@
           <a:bodyPr wrap="square" lIns="0" tIns="0" rIns="0" bIns="0" rtlCol="0" anchor="ctr"/>
           <a:lstStyle/>
           <a:p>
-            <a:pPr marL="0" indent="0">
+            <a:pPr indent="0" marL="0">
               <a:buNone/>
             </a:pPr>
             <a:r>
@@ -6529,7 +6892,7 @@
           </a:prstGeom>
           <a:extLst>
             <a:ext uri="{C572A759-6A51-4108-AA02-DFA0A04FC94B}">
-              <ma14:wrappingTextBoxFlag xmlns="" xmlns:ma14="http://schemas.microsoft.com/office/mac/drawingml/2011/main" val="0"/>
+              <ma14:wrappingTextBoxFlag xmlns:ma14="http://schemas.microsoft.com/office/mac/drawingml/2011/main" val="0"/>
             </a:ext>
           </a:extLst>
         </p:spPr>
@@ -6550,7 +6913,7 @@
           <a:p>
             <a:pPr algn="l"/>
             <a:fld id="{F7021451-1387-4CA6-816F-3879F97B5CBC}" type="slidenum">
-              <a:rPr lang="en-US" b="0"/>
+              <a:rPr b="0" lang="en-US"/>
               <a:t>11</a:t>
             </a:fld>
             <a:endParaRPr lang="en-US"/>
@@ -6625,7 +6988,7 @@
           <a:bodyPr wrap="square" lIns="0" tIns="0" rIns="0" bIns="0" rtlCol="0" anchor="ctr"/>
           <a:lstStyle/>
           <a:p>
-            <a:pPr marL="0" indent="0" algn="l">
+            <a:pPr algn="l" indent="0" marL="0">
               <a:buNone/>
             </a:pPr>
             <a:r>
@@ -6664,7 +7027,7 @@
           <a:bodyPr wrap="square" lIns="0" tIns="0" rIns="0" bIns="0" rtlCol="0" anchor="ctr"/>
           <a:lstStyle/>
           <a:p>
-            <a:pPr marL="0" indent="0">
+            <a:pPr indent="0" marL="0">
               <a:buNone/>
             </a:pPr>
             <a:r>
@@ -6730,11 +7093,11 @@
           <a:bodyPr wrap="square" lIns="0" tIns="0" rIns="0" bIns="0" rtlCol="0" anchor="ctr"/>
           <a:lstStyle/>
           <a:p>
-            <a:pPr marL="0" indent="0" algn="ctr">
-              <a:buNone/>
-            </a:pPr>
-            <a:r>
-              <a:rPr lang="en-US" sz="900" b="1" kern="0" spc="100" dirty="0">
+            <a:pPr algn="ctr" indent="0" marL="0">
+              <a:buNone/>
+            </a:pPr>
+            <a:r>
+              <a:rPr lang="en-US" sz="900" b="1" spc="100" kern="0" dirty="0">
                 <a:solidFill>
                   <a:srgbClr val="5A05F4"/>
                 </a:solidFill>
@@ -6750,14 +7113,14 @@
       </p:sp>
       <p:pic>
         <p:nvPicPr>
-          <p:cNvPr id="7" name="Image 0" descr="preencoded.png"/>
+          <p:cNvPr id="7" name="Image 0" descr="preencoded.png">    </p:cNvPr>
           <p:cNvPicPr>
             <a:picLocks noChangeAspect="1"/>
           </p:cNvPicPr>
           <p:nvPr/>
         </p:nvPicPr>
         <p:blipFill>
-          <a:blip r:embed="rId3"/>
+          <a:blip r:embed="rId1"/>
           <a:stretch>
             <a:fillRect/>
           </a:stretch>
@@ -6815,7 +7178,7 @@
           <a:bodyPr wrap="square" lIns="0" tIns="0" rIns="0" bIns="0" rtlCol="0" anchor="ctr"/>
           <a:lstStyle/>
           <a:p>
-            <a:pPr marL="0" indent="0">
+            <a:pPr indent="0" marL="0">
               <a:buNone/>
             </a:pPr>
             <a:r>
@@ -6854,7 +7217,7 @@
           <a:bodyPr wrap="square" lIns="0" tIns="0" rIns="0" bIns="0" rtlCol="0" anchor="t"/>
           <a:lstStyle/>
           <a:p>
-            <a:pPr marL="0" indent="0">
+            <a:pPr indent="0" marL="0">
               <a:buNone/>
             </a:pPr>
             <a:r>
@@ -6915,7 +7278,7 @@
           <a:bodyPr wrap="square" lIns="0" tIns="0" rIns="0" bIns="0" rtlCol="0" anchor="ctr"/>
           <a:lstStyle/>
           <a:p>
-            <a:pPr marL="0" indent="0">
+            <a:pPr indent="0" marL="0">
               <a:buNone/>
             </a:pPr>
             <a:r>
@@ -6954,7 +7317,7 @@
           <a:bodyPr wrap="square" lIns="0" tIns="0" rIns="0" bIns="0" rtlCol="0" anchor="t"/>
           <a:lstStyle/>
           <a:p>
-            <a:pPr marL="0" indent="0">
+            <a:pPr indent="0" marL="0">
               <a:buNone/>
             </a:pPr>
             <a:r>
@@ -6993,7 +7356,7 @@
           <a:bodyPr wrap="square" lIns="0" tIns="0" rIns="0" bIns="0" rtlCol="0" anchor="t"/>
           <a:lstStyle/>
           <a:p>
-            <a:pPr marL="0" indent="0">
+            <a:pPr indent="0" marL="0">
               <a:buNone/>
             </a:pPr>
             <a:r>
@@ -7032,7 +7395,7 @@
           <a:bodyPr wrap="square" lIns="0" tIns="0" rIns="0" bIns="0" rtlCol="0" anchor="ctr"/>
           <a:lstStyle/>
           <a:p>
-            <a:pPr marL="0" indent="0" algn="l">
+            <a:pPr algn="l" indent="0" marL="0">
               <a:buNone/>
             </a:pPr>
             <a:r>
@@ -7093,7 +7456,7 @@
           <a:bodyPr wrap="square" lIns="0" tIns="0" rIns="0" bIns="0" rtlCol="0" anchor="ctr"/>
           <a:lstStyle/>
           <a:p>
-            <a:pPr marL="0" indent="0">
+            <a:pPr indent="0" marL="0">
               <a:buNone/>
             </a:pPr>
             <a:r>
@@ -7132,7 +7495,7 @@
           <a:bodyPr wrap="square" lIns="0" tIns="0" rIns="0" bIns="0" rtlCol="0" anchor="ctr"/>
           <a:lstStyle/>
           <a:p>
-            <a:pPr marL="0" indent="0" algn="l">
+            <a:pPr algn="l" indent="0" marL="0">
               <a:buNone/>
             </a:pPr>
             <a:r>
@@ -7193,7 +7556,7 @@
           <a:bodyPr wrap="square" lIns="0" tIns="0" rIns="0" bIns="0" rtlCol="0" anchor="ctr"/>
           <a:lstStyle/>
           <a:p>
-            <a:pPr marL="0" indent="0">
+            <a:pPr indent="0" marL="0">
               <a:buNone/>
             </a:pPr>
             <a:r>
@@ -7232,7 +7595,7 @@
           <a:bodyPr wrap="square" lIns="0" tIns="0" rIns="0" bIns="0" rtlCol="0" anchor="ctr"/>
           <a:lstStyle/>
           <a:p>
-            <a:pPr marL="0" indent="0" algn="l">
+            <a:pPr algn="l" indent="0" marL="0">
               <a:buNone/>
             </a:pPr>
             <a:r>
@@ -7293,7 +7656,7 @@
           <a:bodyPr wrap="square" lIns="0" tIns="0" rIns="0" bIns="0" rtlCol="0" anchor="ctr"/>
           <a:lstStyle/>
           <a:p>
-            <a:pPr marL="0" indent="0">
+            <a:pPr indent="0" marL="0">
               <a:buNone/>
             </a:pPr>
             <a:r>
@@ -7332,7 +7695,7 @@
           <a:bodyPr wrap="square" lIns="0" tIns="0" rIns="0" bIns="0" rtlCol="0" anchor="ctr"/>
           <a:lstStyle/>
           <a:p>
-            <a:pPr marL="0" indent="0">
+            <a:pPr indent="0" marL="0">
               <a:buNone/>
             </a:pPr>
             <a:r>
@@ -7379,30 +7742,89 @@
       </p:sp>
       <p:sp>
         <p:nvSpPr>
-          <p:cNvPr id="26" name="Text 23"/>
-          <p:cNvSpPr/>
-          <p:nvPr/>
-        </p:nvSpPr>
-        <p:spPr>
-          <a:xfrm>
-            <a:off x="4425696" y="4700016"/>
-            <a:ext cx="6986016" cy="219456"/>
-          </a:xfrm>
-          <a:prstGeom prst="rect">
-            <a:avLst/>
-          </a:prstGeom>
-          <a:noFill/>
-          <a:ln/>
-        </p:spPr>
-        <p:txBody>
-          <a:bodyPr wrap="square" lIns="0" tIns="0" rIns="0" bIns="0" rtlCol="0" anchor="ctr"/>
-          <a:lstStyle/>
-          <a:p>
-            <a:pPr marL="0" indent="0">
-              <a:buNone/>
-            </a:pPr>
-            <a:r>
-              <a:rPr lang="en-US" sz="950" b="1" kern="0" spc="150" dirty="0">
+          <p:cNvPr id="26" name="Shape 23"/>
+          <p:cNvSpPr/>
+          <p:nvPr/>
+        </p:nvSpPr>
+        <p:spPr>
+          <a:xfrm>
+            <a:off x="4389120" y="5056632"/>
+            <a:ext cx="310896" cy="310896"/>
+          </a:xfrm>
+          <a:prstGeom prst="ellipse">
+            <a:avLst/>
+          </a:prstGeom>
+          <a:solidFill>
+            <a:srgbClr val="106B41"/>
+          </a:solidFill>
+          <a:ln/>
+        </p:spPr>
+      </p:sp>
+      <p:sp>
+        <p:nvSpPr>
+          <p:cNvPr id="27" name="Text 24"/>
+          <p:cNvSpPr/>
+          <p:nvPr/>
+        </p:nvSpPr>
+        <p:spPr>
+          <a:xfrm>
+            <a:off x="4389120" y="5056632"/>
+            <a:ext cx="310896" cy="310896"/>
+          </a:xfrm>
+          <a:prstGeom prst="rect">
+            <a:avLst/>
+          </a:prstGeom>
+          <a:noFill/>
+          <a:ln/>
+        </p:spPr>
+        <p:txBody>
+          <a:bodyPr wrap="square" lIns="0" tIns="0" rIns="0" bIns="0" rtlCol="0" anchor="ctr"/>
+          <a:lstStyle/>
+          <a:p>
+            <a:pPr algn="ctr" indent="0" marL="0">
+              <a:buNone/>
+            </a:pPr>
+            <a:r>
+              <a:rPr lang="en-US" sz="1200" b="1" dirty="0">
+                <a:solidFill>
+                  <a:srgbClr val="FFFFFF"/>
+                </a:solidFill>
+                <a:latin typeface="Arial" pitchFamily="34" charset="0"/>
+                <a:ea typeface="Arial" pitchFamily="34" charset="-122"/>
+                <a:cs typeface="Arial" pitchFamily="34" charset="-120"/>
+              </a:rPr>
+              <a:t>◆</a:t>
+            </a:r>
+            <a:endParaRPr lang="en-US" sz="1200" dirty="0"/>
+          </a:p>
+        </p:txBody>
+      </p:sp>
+      <p:sp>
+        <p:nvSpPr>
+          <p:cNvPr id="28" name="Text 25"/>
+          <p:cNvSpPr/>
+          <p:nvPr/>
+        </p:nvSpPr>
+        <p:spPr>
+          <a:xfrm>
+            <a:off x="4882896" y="4700016"/>
+            <a:ext cx="6528816" cy="219456"/>
+          </a:xfrm>
+          <a:prstGeom prst="rect">
+            <a:avLst/>
+          </a:prstGeom>
+          <a:noFill/>
+          <a:ln/>
+        </p:spPr>
+        <p:txBody>
+          <a:bodyPr wrap="square" lIns="0" tIns="0" rIns="0" bIns="0" rtlCol="0" anchor="ctr"/>
+          <a:lstStyle/>
+          <a:p>
+            <a:pPr indent="0" marL="0">
+              <a:buNone/>
+            </a:pPr>
+            <a:r>
+              <a:rPr lang="en-US" sz="950" b="1" spc="150" kern="0" dirty="0">
                 <a:solidFill>
                   <a:srgbClr val="106B41"/>
                 </a:solidFill>
@@ -7418,26 +7840,26 @@
       </p:sp>
       <p:sp>
         <p:nvSpPr>
-          <p:cNvPr id="27" name="Text 24"/>
-          <p:cNvSpPr/>
-          <p:nvPr/>
-        </p:nvSpPr>
-        <p:spPr>
-          <a:xfrm>
-            <a:off x="4425696" y="4956048"/>
-            <a:ext cx="6986016" cy="768096"/>
-          </a:xfrm>
-          <a:prstGeom prst="rect">
-            <a:avLst/>
-          </a:prstGeom>
-          <a:noFill/>
-          <a:ln/>
-        </p:spPr>
-        <p:txBody>
-          <a:bodyPr wrap="square" lIns="0" tIns="0" rIns="0" bIns="0" rtlCol="0" anchor="ctr"/>
-          <a:lstStyle/>
-          <a:p>
-            <a:pPr marL="0" indent="0">
+          <p:cNvPr id="29" name="Text 26"/>
+          <p:cNvSpPr/>
+          <p:nvPr/>
+        </p:nvSpPr>
+        <p:spPr>
+          <a:xfrm>
+            <a:off x="4882896" y="4956048"/>
+            <a:ext cx="6528816" cy="768096"/>
+          </a:xfrm>
+          <a:prstGeom prst="rect">
+            <a:avLst/>
+          </a:prstGeom>
+          <a:noFill/>
+          <a:ln/>
+        </p:spPr>
+        <p:txBody>
+          <a:bodyPr wrap="square" lIns="0" tIns="0" rIns="0" bIns="0" rtlCol="0" anchor="ctr"/>
+          <a:lstStyle/>
+          <a:p>
+            <a:pPr indent="0" marL="0">
               <a:lnSpc>
                 <a:spcPct val="112000"/>
               </a:lnSpc>
@@ -7460,7 +7882,7 @@
       </p:sp>
       <p:sp>
         <p:nvSpPr>
-          <p:cNvPr id="28" name="Slide Number Placeholder 0"/>
+          <p:cNvPr id="25" name="Slide Number Placeholder 0"/>
           <p:cNvSpPr>
             <a:spLocks noGrp="1"/>
           </p:cNvSpPr>
@@ -7478,7 +7900,7 @@
           </a:prstGeom>
           <a:extLst>
             <a:ext uri="{C572A759-6A51-4108-AA02-DFA0A04FC94B}">
-              <ma14:wrappingTextBoxFlag xmlns="" xmlns:ma14="http://schemas.microsoft.com/office/mac/drawingml/2011/main" val="0"/>
+              <ma14:wrappingTextBoxFlag xmlns:ma14="http://schemas.microsoft.com/office/mac/drawingml/2011/main" val="0"/>
             </a:ext>
           </a:extLst>
         </p:spPr>
@@ -7499,7 +7921,7 @@
           <a:p>
             <a:pPr algn="l"/>
             <a:fld id="{F7021451-1387-4CA6-816F-3879F97B5CBC}" type="slidenum">
-              <a:rPr lang="en-US" b="0"/>
+              <a:rPr b="0" lang="en-US"/>
               <a:t>12</a:t>
             </a:fld>
             <a:endParaRPr lang="en-US"/>
@@ -7574,7 +7996,7 @@
           <a:bodyPr wrap="square" lIns="0" tIns="0" rIns="0" bIns="0" rtlCol="0" anchor="ctr"/>
           <a:lstStyle/>
           <a:p>
-            <a:pPr marL="0" indent="0" algn="l">
+            <a:pPr algn="l" indent="0" marL="0">
               <a:buNone/>
             </a:pPr>
             <a:r>
@@ -7613,7 +8035,7 @@
           <a:bodyPr wrap="square" lIns="0" tIns="0" rIns="0" bIns="0" rtlCol="0" anchor="ctr"/>
           <a:lstStyle/>
           <a:p>
-            <a:pPr marL="0" indent="0">
+            <a:pPr indent="0" marL="0">
               <a:buNone/>
             </a:pPr>
             <a:r>
@@ -7679,11 +8101,11 @@
           <a:bodyPr wrap="square" lIns="0" tIns="0" rIns="0" bIns="0" rtlCol="0" anchor="ctr"/>
           <a:lstStyle/>
           <a:p>
-            <a:pPr marL="0" indent="0" algn="ctr">
-              <a:buNone/>
-            </a:pPr>
-            <a:r>
-              <a:rPr lang="en-US" sz="900" b="1" kern="0" spc="100" dirty="0">
+            <a:pPr algn="ctr" indent="0" marL="0">
+              <a:buNone/>
+            </a:pPr>
+            <a:r>
+              <a:rPr lang="en-US" sz="900" b="1" spc="100" kern="0" dirty="0">
                 <a:solidFill>
                   <a:srgbClr val="5A05F4"/>
                 </a:solidFill>
@@ -7699,14 +8121,14 @@
       </p:sp>
       <p:pic>
         <p:nvPicPr>
-          <p:cNvPr id="7" name="Image 0" descr="preencoded.png"/>
+          <p:cNvPr id="7" name="Image 0" descr="preencoded.png">    </p:cNvPr>
           <p:cNvPicPr>
             <a:picLocks noChangeAspect="1"/>
           </p:cNvPicPr>
           <p:nvPr/>
         </p:nvPicPr>
         <p:blipFill>
-          <a:blip r:embed="rId3"/>
+          <a:blip r:embed="rId1"/>
           <a:stretch>
             <a:fillRect/>
           </a:stretch>
@@ -7784,7 +8206,7 @@
           <a:bodyPr wrap="square" lIns="0" tIns="0" rIns="0" bIns="0" rtlCol="0" anchor="ctr"/>
           <a:lstStyle/>
           <a:p>
-            <a:pPr marL="0" indent="0" algn="ctr">
+            <a:pPr algn="ctr" indent="0" marL="0">
               <a:buNone/>
             </a:pPr>
             <a:r>
@@ -7823,7 +8245,7 @@
           <a:bodyPr wrap="square" lIns="0" tIns="0" rIns="0" bIns="0" rtlCol="0" anchor="ctr"/>
           <a:lstStyle/>
           <a:p>
-            <a:pPr marL="0" indent="0">
+            <a:pPr indent="0" marL="0">
               <a:buNone/>
             </a:pPr>
             <a:r>
@@ -7862,7 +8284,7 @@
           <a:bodyPr wrap="square" lIns="0" tIns="0" rIns="0" bIns="0" rtlCol="0" anchor="t"/>
           <a:lstStyle/>
           <a:p>
-            <a:pPr marL="0" indent="0">
+            <a:pPr indent="0" marL="0">
               <a:lnSpc>
                 <a:spcPct val="108000"/>
               </a:lnSpc>
@@ -7946,7 +8368,7 @@
           <a:bodyPr wrap="square" lIns="0" tIns="0" rIns="0" bIns="0" rtlCol="0" anchor="ctr"/>
           <a:lstStyle/>
           <a:p>
-            <a:pPr marL="0" indent="0" algn="ctr">
+            <a:pPr algn="ctr" indent="0" marL="0">
               <a:buNone/>
             </a:pPr>
             <a:r>
@@ -7985,7 +8407,7 @@
           <a:bodyPr wrap="square" lIns="0" tIns="0" rIns="0" bIns="0" rtlCol="0" anchor="ctr"/>
           <a:lstStyle/>
           <a:p>
-            <a:pPr marL="0" indent="0">
+            <a:pPr indent="0" marL="0">
               <a:buNone/>
             </a:pPr>
             <a:r>
@@ -8024,7 +8446,7 @@
           <a:bodyPr wrap="square" lIns="0" tIns="0" rIns="0" bIns="0" rtlCol="0" anchor="t"/>
           <a:lstStyle/>
           <a:p>
-            <a:pPr marL="0" indent="0">
+            <a:pPr indent="0" marL="0">
               <a:lnSpc>
                 <a:spcPct val="108000"/>
               </a:lnSpc>
@@ -8108,7 +8530,7 @@
           <a:bodyPr wrap="square" lIns="0" tIns="0" rIns="0" bIns="0" rtlCol="0" anchor="ctr"/>
           <a:lstStyle/>
           <a:p>
-            <a:pPr marL="0" indent="0" algn="ctr">
+            <a:pPr algn="ctr" indent="0" marL="0">
               <a:buNone/>
             </a:pPr>
             <a:r>
@@ -8147,7 +8569,7 @@
           <a:bodyPr wrap="square" lIns="0" tIns="0" rIns="0" bIns="0" rtlCol="0" anchor="ctr"/>
           <a:lstStyle/>
           <a:p>
-            <a:pPr marL="0" indent="0">
+            <a:pPr indent="0" marL="0">
               <a:buNone/>
             </a:pPr>
             <a:r>
@@ -8186,7 +8608,7 @@
           <a:bodyPr wrap="square" lIns="0" tIns="0" rIns="0" bIns="0" rtlCol="0" anchor="t"/>
           <a:lstStyle/>
           <a:p>
-            <a:pPr marL="0" indent="0">
+            <a:pPr indent="0" marL="0">
               <a:lnSpc>
                 <a:spcPct val="108000"/>
               </a:lnSpc>
@@ -8216,7 +8638,7 @@
         <p:spPr>
           <a:xfrm>
             <a:off x="566928" y="3291840"/>
-            <a:ext cx="3250692" cy="640080"/>
+            <a:ext cx="3383280" cy="640080"/>
           </a:xfrm>
           <a:prstGeom prst="roundRect">
             <a:avLst>
@@ -8250,7 +8672,7 @@
           <a:bodyPr wrap="square" lIns="0" tIns="0" rIns="0" bIns="0" rtlCol="0" anchor="ctr"/>
           <a:lstStyle/>
           <a:p>
-            <a:pPr marL="0" indent="0" algn="ctr">
+            <a:pPr algn="ctr" indent="0" marL="0">
               <a:buNone/>
             </a:pPr>
             <a:r>
@@ -8276,8 +8698,8 @@
         </p:nvSpPr>
         <p:spPr>
           <a:xfrm>
-            <a:off x="3895344" y="3611880"/>
-            <a:ext cx="310896" cy="0"/>
+            <a:off x="4041648" y="3611880"/>
+            <a:ext cx="164592" cy="0"/>
           </a:xfrm>
           <a:prstGeom prst="line">
             <a:avLst/>
@@ -8319,7 +8741,7 @@
         </p:nvSpPr>
         <p:spPr>
           <a:xfrm>
-            <a:off x="4366260" y="3291840"/>
+            <a:off x="4407408" y="3291840"/>
             <a:ext cx="3383280" cy="640080"/>
           </a:xfrm>
           <a:prstGeom prst="roundRect">
@@ -8354,7 +8776,7 @@
           <a:bodyPr wrap="square" lIns="0" tIns="0" rIns="0" bIns="0" rtlCol="0" anchor="ctr"/>
           <a:lstStyle/>
           <a:p>
-            <a:pPr marL="0" indent="0" algn="ctr">
+            <a:pPr algn="ctr" indent="0" marL="0">
               <a:buNone/>
             </a:pPr>
             <a:r>
@@ -8380,8 +8802,8 @@
         </p:nvSpPr>
         <p:spPr>
           <a:xfrm>
-            <a:off x="7790688" y="3611880"/>
-            <a:ext cx="256032" cy="0"/>
+            <a:off x="7882128" y="3611880"/>
+            <a:ext cx="164592" cy="0"/>
           </a:xfrm>
           <a:prstGeom prst="line">
             <a:avLst/>
@@ -8423,8 +8845,8 @@
         </p:nvSpPr>
         <p:spPr>
           <a:xfrm>
-            <a:off x="8174735" y="3264408"/>
-            <a:ext cx="3311593" cy="640080"/>
+            <a:off x="8247888" y="3291840"/>
+            <a:ext cx="3383280" cy="640080"/>
           </a:xfrm>
           <a:prstGeom prst="roundRect">
             <a:avLst>
@@ -8458,7 +8880,7 @@
           <a:bodyPr wrap="square" lIns="0" tIns="0" rIns="0" bIns="0" rtlCol="0" anchor="ctr"/>
           <a:lstStyle/>
           <a:p>
-            <a:pPr marL="0" indent="0" algn="ctr">
+            <a:pPr algn="ctr" indent="0" marL="0">
               <a:buNone/>
             </a:pPr>
             <a:r>
@@ -8485,7 +8907,7 @@
         <p:spPr>
           <a:xfrm>
             <a:off x="566928" y="4434840"/>
-            <a:ext cx="10927080" cy="1234440"/>
+            <a:ext cx="11064240" cy="1234440"/>
           </a:xfrm>
           <a:prstGeom prst="roundRect">
             <a:avLst>
@@ -8505,30 +8927,89 @@
       </p:sp>
       <p:sp>
         <p:nvSpPr>
-          <p:cNvPr id="34" name="Text 31"/>
-          <p:cNvSpPr/>
-          <p:nvPr/>
-        </p:nvSpPr>
-        <p:spPr>
-          <a:xfrm>
-            <a:off x="786384" y="4562856"/>
-            <a:ext cx="10625328" cy="219456"/>
-          </a:xfrm>
-          <a:prstGeom prst="rect">
-            <a:avLst/>
-          </a:prstGeom>
-          <a:noFill/>
-          <a:ln/>
-        </p:spPr>
-        <p:txBody>
-          <a:bodyPr wrap="square" lIns="0" tIns="0" rIns="0" bIns="0" rtlCol="0" anchor="ctr"/>
-          <a:lstStyle/>
-          <a:p>
-            <a:pPr marL="0" indent="0">
-              <a:buNone/>
-            </a:pPr>
-            <a:r>
-              <a:rPr lang="en-US" sz="950" b="1" kern="0" spc="150" dirty="0">
+          <p:cNvPr id="34" name="Shape 31"/>
+          <p:cNvSpPr/>
+          <p:nvPr/>
+        </p:nvSpPr>
+        <p:spPr>
+          <a:xfrm>
+            <a:off x="749808" y="4896612"/>
+            <a:ext cx="310896" cy="310896"/>
+          </a:xfrm>
+          <a:prstGeom prst="ellipse">
+            <a:avLst/>
+          </a:prstGeom>
+          <a:solidFill>
+            <a:srgbClr val="106B41"/>
+          </a:solidFill>
+          <a:ln/>
+        </p:spPr>
+      </p:sp>
+      <p:sp>
+        <p:nvSpPr>
+          <p:cNvPr id="35" name="Text 32"/>
+          <p:cNvSpPr/>
+          <p:nvPr/>
+        </p:nvSpPr>
+        <p:spPr>
+          <a:xfrm>
+            <a:off x="749808" y="4896612"/>
+            <a:ext cx="310896" cy="310896"/>
+          </a:xfrm>
+          <a:prstGeom prst="rect">
+            <a:avLst/>
+          </a:prstGeom>
+          <a:noFill/>
+          <a:ln/>
+        </p:spPr>
+        <p:txBody>
+          <a:bodyPr wrap="square" lIns="0" tIns="0" rIns="0" bIns="0" rtlCol="0" anchor="ctr"/>
+          <a:lstStyle/>
+          <a:p>
+            <a:pPr algn="ctr" indent="0" marL="0">
+              <a:buNone/>
+            </a:pPr>
+            <a:r>
+              <a:rPr lang="en-US" sz="1200" b="1" dirty="0">
+                <a:solidFill>
+                  <a:srgbClr val="FFFFFF"/>
+                </a:solidFill>
+                <a:latin typeface="Arial" pitchFamily="34" charset="0"/>
+                <a:ea typeface="Arial" pitchFamily="34" charset="-122"/>
+                <a:cs typeface="Arial" pitchFamily="34" charset="-120"/>
+              </a:rPr>
+              <a:t>◆</a:t>
+            </a:r>
+            <a:endParaRPr lang="en-US" sz="1200" dirty="0"/>
+          </a:p>
+        </p:txBody>
+      </p:sp>
+      <p:sp>
+        <p:nvSpPr>
+          <p:cNvPr id="36" name="Text 33"/>
+          <p:cNvSpPr/>
+          <p:nvPr/>
+        </p:nvSpPr>
+        <p:spPr>
+          <a:xfrm>
+            <a:off x="1243584" y="4562856"/>
+            <a:ext cx="10168128" cy="219456"/>
+          </a:xfrm>
+          <a:prstGeom prst="rect">
+            <a:avLst/>
+          </a:prstGeom>
+          <a:noFill/>
+          <a:ln/>
+        </p:spPr>
+        <p:txBody>
+          <a:bodyPr wrap="square" lIns="0" tIns="0" rIns="0" bIns="0" rtlCol="0" anchor="ctr"/>
+          <a:lstStyle/>
+          <a:p>
+            <a:pPr indent="0" marL="0">
+              <a:buNone/>
+            </a:pPr>
+            <a:r>
+              <a:rPr lang="en-US" sz="950" b="1" spc="150" kern="0" dirty="0">
                 <a:solidFill>
                   <a:srgbClr val="106B41"/>
                 </a:solidFill>
@@ -8544,26 +9025,26 @@
       </p:sp>
       <p:sp>
         <p:nvSpPr>
-          <p:cNvPr id="35" name="Text 32"/>
-          <p:cNvSpPr/>
-          <p:nvPr/>
-        </p:nvSpPr>
-        <p:spPr>
-          <a:xfrm>
-            <a:off x="786384" y="4818888"/>
-            <a:ext cx="10625328" cy="722376"/>
-          </a:xfrm>
-          <a:prstGeom prst="rect">
-            <a:avLst/>
-          </a:prstGeom>
-          <a:noFill/>
-          <a:ln/>
-        </p:spPr>
-        <p:txBody>
-          <a:bodyPr wrap="square" lIns="0" tIns="0" rIns="0" bIns="0" rtlCol="0" anchor="ctr"/>
-          <a:lstStyle/>
-          <a:p>
-            <a:pPr marL="0" indent="0">
+          <p:cNvPr id="37" name="Text 34"/>
+          <p:cNvSpPr/>
+          <p:nvPr/>
+        </p:nvSpPr>
+        <p:spPr>
+          <a:xfrm>
+            <a:off x="1243584" y="4818888"/>
+            <a:ext cx="10168128" cy="722376"/>
+          </a:xfrm>
+          <a:prstGeom prst="rect">
+            <a:avLst/>
+          </a:prstGeom>
+          <a:noFill/>
+          <a:ln/>
+        </p:spPr>
+        <p:txBody>
+          <a:bodyPr wrap="square" lIns="0" tIns="0" rIns="0" bIns="0" rtlCol="0" anchor="ctr"/>
+          <a:lstStyle/>
+          <a:p>
+            <a:pPr indent="0" marL="0">
               <a:lnSpc>
                 <a:spcPct val="112000"/>
               </a:lnSpc>
@@ -8586,7 +9067,7 @@
       </p:sp>
       <p:sp>
         <p:nvSpPr>
-          <p:cNvPr id="36" name="Slide Number Placeholder 0"/>
+          <p:cNvPr id="25" name="Slide Number Placeholder 0"/>
           <p:cNvSpPr>
             <a:spLocks noGrp="1"/>
           </p:cNvSpPr>
@@ -8604,7 +9085,7 @@
           </a:prstGeom>
           <a:extLst>
             <a:ext uri="{C572A759-6A51-4108-AA02-DFA0A04FC94B}">
-              <ma14:wrappingTextBoxFlag xmlns="" xmlns:ma14="http://schemas.microsoft.com/office/mac/drawingml/2011/main" val="0"/>
+              <ma14:wrappingTextBoxFlag xmlns:ma14="http://schemas.microsoft.com/office/mac/drawingml/2011/main" val="0"/>
             </a:ext>
           </a:extLst>
         </p:spPr>
@@ -8625,7 +9106,7 @@
           <a:p>
             <a:pPr algn="l"/>
             <a:fld id="{F7021451-1387-4CA6-816F-3879F97B5CBC}" type="slidenum">
-              <a:rPr lang="en-US" b="0"/>
+              <a:rPr b="0" lang="en-US"/>
               <a:t>13</a:t>
             </a:fld>
             <a:endParaRPr lang="en-US"/>
@@ -8700,7 +9181,7 @@
           <a:bodyPr wrap="square" lIns="0" tIns="0" rIns="0" bIns="0" rtlCol="0" anchor="ctr"/>
           <a:lstStyle/>
           <a:p>
-            <a:pPr marL="0" indent="0" algn="l">
+            <a:pPr algn="l" indent="0" marL="0">
               <a:buNone/>
             </a:pPr>
             <a:r>
@@ -8739,7 +9220,7 @@
           <a:bodyPr wrap="square" lIns="0" tIns="0" rIns="0" bIns="0" rtlCol="0" anchor="ctr"/>
           <a:lstStyle/>
           <a:p>
-            <a:pPr marL="0" indent="0">
+            <a:pPr indent="0" marL="0">
               <a:buNone/>
             </a:pPr>
             <a:r>
@@ -8805,11 +9286,11 @@
           <a:bodyPr wrap="square" lIns="0" tIns="0" rIns="0" bIns="0" rtlCol="0" anchor="ctr"/>
           <a:lstStyle/>
           <a:p>
-            <a:pPr marL="0" indent="0" algn="ctr">
-              <a:buNone/>
-            </a:pPr>
-            <a:r>
-              <a:rPr lang="en-US" sz="900" b="1" kern="0" spc="100" dirty="0">
+            <a:pPr algn="ctr" indent="0" marL="0">
+              <a:buNone/>
+            </a:pPr>
+            <a:r>
+              <a:rPr lang="en-US" sz="900" b="1" spc="100" kern="0" dirty="0">
                 <a:solidFill>
                   <a:srgbClr val="5A05F4"/>
                 </a:solidFill>
@@ -8825,14 +9306,14 @@
       </p:sp>
       <p:pic>
         <p:nvPicPr>
-          <p:cNvPr id="7" name="Image 0" descr="preencoded.png"/>
+          <p:cNvPr id="7" name="Image 0" descr="preencoded.png">    </p:cNvPr>
           <p:cNvPicPr>
             <a:picLocks noChangeAspect="1"/>
           </p:cNvPicPr>
           <p:nvPr/>
         </p:nvPicPr>
         <p:blipFill>
-          <a:blip r:embed="rId3"/>
+          <a:blip r:embed="rId1"/>
           <a:stretch>
             <a:fillRect/>
           </a:stretch>
@@ -8868,11 +9349,11 @@
           <a:bodyPr wrap="square" lIns="0" tIns="0" rIns="0" bIns="0" rtlCol="0" anchor="ctr"/>
           <a:lstStyle/>
           <a:p>
-            <a:pPr marL="0" indent="0">
-              <a:buNone/>
-            </a:pPr>
-            <a:r>
-              <a:rPr lang="en-US" sz="950" b="1" kern="0" spc="100" dirty="0">
+            <a:pPr indent="0" marL="0">
+              <a:buNone/>
+            </a:pPr>
+            <a:r>
+              <a:rPr lang="en-US" sz="950" b="1" spc="100" kern="0" dirty="0">
                 <a:solidFill>
                   <a:srgbClr val="6B6B6B"/>
                 </a:solidFill>
@@ -8934,7 +9415,7 @@
           <a:bodyPr wrap="square" lIns="0" tIns="0" rIns="0" bIns="0" rtlCol="0" anchor="ctr"/>
           <a:lstStyle/>
           <a:p>
-            <a:pPr marL="0" indent="0" algn="ctr">
+            <a:pPr algn="ctr" indent="0" marL="0">
               <a:buNone/>
             </a:pPr>
             <a:r>
@@ -8995,7 +9476,7 @@
           <a:bodyPr wrap="square" lIns="0" tIns="0" rIns="0" bIns="0" rtlCol="0" anchor="ctr"/>
           <a:lstStyle/>
           <a:p>
-            <a:pPr marL="0" indent="0" algn="ctr">
+            <a:pPr algn="ctr" indent="0" marL="0">
               <a:buNone/>
             </a:pPr>
             <a:r>
@@ -9034,11 +9515,11 @@
           <a:bodyPr wrap="square" lIns="0" tIns="0" rIns="0" bIns="0" rtlCol="0" anchor="ctr"/>
           <a:lstStyle/>
           <a:p>
-            <a:pPr marL="0" indent="0">
-              <a:buNone/>
-            </a:pPr>
-            <a:r>
-              <a:rPr lang="en-US" sz="950" b="1" kern="0" spc="100" dirty="0">
+            <a:pPr indent="0" marL="0">
+              <a:buNone/>
+            </a:pPr>
+            <a:r>
+              <a:rPr lang="en-US" sz="950" b="1" spc="100" kern="0" dirty="0">
                 <a:solidFill>
                   <a:srgbClr val="6B6B6B"/>
                 </a:solidFill>
@@ -9100,7 +9581,7 @@
           <a:bodyPr wrap="square" lIns="0" tIns="0" rIns="0" bIns="0" rtlCol="0" anchor="ctr"/>
           <a:lstStyle/>
           <a:p>
-            <a:pPr marL="0" indent="0" algn="ctr">
+            <a:pPr algn="ctr" indent="0" marL="0">
               <a:buNone/>
             </a:pPr>
             <a:r>
@@ -9161,7 +9642,7 @@
           <a:bodyPr wrap="square" lIns="0" tIns="0" rIns="0" bIns="0" rtlCol="0" anchor="ctr"/>
           <a:lstStyle/>
           <a:p>
-            <a:pPr marL="0" indent="0" algn="ctr">
+            <a:pPr algn="ctr" indent="0" marL="0">
               <a:buNone/>
             </a:pPr>
             <a:r>
@@ -9200,7 +9681,7 @@
           <a:bodyPr wrap="square" lIns="0" tIns="0" rIns="0" bIns="0" rtlCol="0" anchor="ctr"/>
           <a:lstStyle/>
           <a:p>
-            <a:pPr marL="0" indent="0">
+            <a:pPr indent="0" marL="0">
               <a:buNone/>
             </a:pPr>
             <a:r>
@@ -9247,30 +9728,89 @@
       </p:sp>
       <p:sp>
         <p:nvSpPr>
-          <p:cNvPr id="20" name="Text 17"/>
-          <p:cNvSpPr/>
-          <p:nvPr/>
-        </p:nvSpPr>
-        <p:spPr>
-          <a:xfrm>
-            <a:off x="786384" y="4288536"/>
-            <a:ext cx="10625328" cy="219456"/>
-          </a:xfrm>
-          <a:prstGeom prst="rect">
-            <a:avLst/>
-          </a:prstGeom>
-          <a:noFill/>
-          <a:ln/>
-        </p:spPr>
-        <p:txBody>
-          <a:bodyPr wrap="square" lIns="0" tIns="0" rIns="0" bIns="0" rtlCol="0" anchor="ctr"/>
-          <a:lstStyle/>
-          <a:p>
-            <a:pPr marL="0" indent="0">
-              <a:buNone/>
-            </a:pPr>
-            <a:r>
-              <a:rPr lang="en-US" sz="950" b="1" kern="0" spc="150" dirty="0">
+          <p:cNvPr id="20" name="Shape 17"/>
+          <p:cNvSpPr/>
+          <p:nvPr/>
+        </p:nvSpPr>
+        <p:spPr>
+          <a:xfrm>
+            <a:off x="749808" y="4599432"/>
+            <a:ext cx="310896" cy="310896"/>
+          </a:xfrm>
+          <a:prstGeom prst="ellipse">
+            <a:avLst/>
+          </a:prstGeom>
+          <a:solidFill>
+            <a:srgbClr val="B3261E"/>
+          </a:solidFill>
+          <a:ln/>
+        </p:spPr>
+      </p:sp>
+      <p:sp>
+        <p:nvSpPr>
+          <p:cNvPr id="21" name="Text 18"/>
+          <p:cNvSpPr/>
+          <p:nvPr/>
+        </p:nvSpPr>
+        <p:spPr>
+          <a:xfrm>
+            <a:off x="749808" y="4599432"/>
+            <a:ext cx="310896" cy="310896"/>
+          </a:xfrm>
+          <a:prstGeom prst="rect">
+            <a:avLst/>
+          </a:prstGeom>
+          <a:noFill/>
+          <a:ln/>
+        </p:spPr>
+        <p:txBody>
+          <a:bodyPr wrap="square" lIns="0" tIns="0" rIns="0" bIns="0" rtlCol="0" anchor="ctr"/>
+          <a:lstStyle/>
+          <a:p>
+            <a:pPr algn="ctr" indent="0" marL="0">
+              <a:buNone/>
+            </a:pPr>
+            <a:r>
+              <a:rPr lang="en-US" sz="1200" b="1" dirty="0">
+                <a:solidFill>
+                  <a:srgbClr val="FFFFFF"/>
+                </a:solidFill>
+                <a:latin typeface="Arial" pitchFamily="34" charset="0"/>
+                <a:ea typeface="Arial" pitchFamily="34" charset="-122"/>
+                <a:cs typeface="Arial" pitchFamily="34" charset="-120"/>
+              </a:rPr>
+              <a:t>✕</a:t>
+            </a:r>
+            <a:endParaRPr lang="en-US" sz="1200" dirty="0"/>
+          </a:p>
+        </p:txBody>
+      </p:sp>
+      <p:sp>
+        <p:nvSpPr>
+          <p:cNvPr id="22" name="Text 19"/>
+          <p:cNvSpPr/>
+          <p:nvPr/>
+        </p:nvSpPr>
+        <p:spPr>
+          <a:xfrm>
+            <a:off x="1243584" y="4288536"/>
+            <a:ext cx="10168128" cy="219456"/>
+          </a:xfrm>
+          <a:prstGeom prst="rect">
+            <a:avLst/>
+          </a:prstGeom>
+          <a:noFill/>
+          <a:ln/>
+        </p:spPr>
+        <p:txBody>
+          <a:bodyPr wrap="square" lIns="0" tIns="0" rIns="0" bIns="0" rtlCol="0" anchor="ctr"/>
+          <a:lstStyle/>
+          <a:p>
+            <a:pPr indent="0" marL="0">
+              <a:buNone/>
+            </a:pPr>
+            <a:r>
+              <a:rPr lang="en-US" sz="950" b="1" spc="150" kern="0" dirty="0">
                 <a:solidFill>
                   <a:srgbClr val="B3261E"/>
                 </a:solidFill>
@@ -9286,26 +9826,26 @@
       </p:sp>
       <p:sp>
         <p:nvSpPr>
-          <p:cNvPr id="21" name="Text 18"/>
-          <p:cNvSpPr/>
-          <p:nvPr/>
-        </p:nvSpPr>
-        <p:spPr>
-          <a:xfrm>
-            <a:off x="786384" y="4544568"/>
-            <a:ext cx="10625328" cy="676656"/>
-          </a:xfrm>
-          <a:prstGeom prst="rect">
-            <a:avLst/>
-          </a:prstGeom>
-          <a:noFill/>
-          <a:ln/>
-        </p:spPr>
-        <p:txBody>
-          <a:bodyPr wrap="square" lIns="0" tIns="0" rIns="0" bIns="0" rtlCol="0" anchor="ctr"/>
-          <a:lstStyle/>
-          <a:p>
-            <a:pPr marL="0" indent="0">
+          <p:cNvPr id="23" name="Text 20"/>
+          <p:cNvSpPr/>
+          <p:nvPr/>
+        </p:nvSpPr>
+        <p:spPr>
+          <a:xfrm>
+            <a:off x="1243584" y="4544568"/>
+            <a:ext cx="10168128" cy="676656"/>
+          </a:xfrm>
+          <a:prstGeom prst="rect">
+            <a:avLst/>
+          </a:prstGeom>
+          <a:noFill/>
+          <a:ln/>
+        </p:spPr>
+        <p:txBody>
+          <a:bodyPr wrap="square" lIns="0" tIns="0" rIns="0" bIns="0" rtlCol="0" anchor="ctr"/>
+          <a:lstStyle/>
+          <a:p>
+            <a:pPr indent="0" marL="0">
               <a:lnSpc>
                 <a:spcPct val="112000"/>
               </a:lnSpc>
@@ -9328,7 +9868,7 @@
       </p:sp>
       <p:sp>
         <p:nvSpPr>
-          <p:cNvPr id="22" name="Text 19"/>
+          <p:cNvPr id="24" name="Text 21"/>
           <p:cNvSpPr/>
           <p:nvPr/>
         </p:nvSpPr>
@@ -9347,7 +9887,7 @@
           <a:bodyPr wrap="square" lIns="0" tIns="0" rIns="0" bIns="0" rtlCol="0" anchor="t"/>
           <a:lstStyle/>
           <a:p>
-            <a:pPr marL="0" indent="0">
+            <a:pPr indent="0" marL="0">
               <a:buNone/>
             </a:pPr>
             <a:r>
@@ -9361,6 +9901,9 @@
               </a:rPr>
               <a:t>time-to-first-token</a:t>
             </a:r>
+            <a:pPr indent="0" marL="0">
+              <a:buNone/>
+            </a:pPr>
             <a:r>
               <a:rPr lang="en-US" sz="1200" dirty="0">
                 <a:solidFill>
@@ -9396,7 +9939,7 @@
           </a:prstGeom>
           <a:extLst>
             <a:ext uri="{C572A759-6A51-4108-AA02-DFA0A04FC94B}">
-              <ma14:wrappingTextBoxFlag xmlns="" xmlns:ma14="http://schemas.microsoft.com/office/mac/drawingml/2011/main" val="0"/>
+              <ma14:wrappingTextBoxFlag xmlns:ma14="http://schemas.microsoft.com/office/mac/drawingml/2011/main" val="0"/>
             </a:ext>
           </a:extLst>
         </p:spPr>
@@ -9417,7 +9960,7 @@
           <a:p>
             <a:pPr algn="l"/>
             <a:fld id="{F7021451-1387-4CA6-816F-3879F97B5CBC}" type="slidenum">
-              <a:rPr lang="en-US" b="0"/>
+              <a:rPr b="0" lang="en-US"/>
               <a:t>14</a:t>
             </a:fld>
             <a:endParaRPr lang="en-US"/>
@@ -9492,7 +10035,7 @@
           <a:bodyPr wrap="square" lIns="0" tIns="0" rIns="0" bIns="0" rtlCol="0" anchor="ctr"/>
           <a:lstStyle/>
           <a:p>
-            <a:pPr marL="0" indent="0" algn="l">
+            <a:pPr algn="l" indent="0" marL="0">
               <a:buNone/>
             </a:pPr>
             <a:r>
@@ -9531,7 +10074,7 @@
           <a:bodyPr wrap="square" lIns="0" tIns="0" rIns="0" bIns="0" rtlCol="0" anchor="ctr"/>
           <a:lstStyle/>
           <a:p>
-            <a:pPr marL="0" indent="0">
+            <a:pPr indent="0" marL="0">
               <a:buNone/>
             </a:pPr>
             <a:r>
@@ -9597,11 +10140,11 @@
           <a:bodyPr wrap="square" lIns="0" tIns="0" rIns="0" bIns="0" rtlCol="0" anchor="ctr"/>
           <a:lstStyle/>
           <a:p>
-            <a:pPr marL="0" indent="0" algn="ctr">
-              <a:buNone/>
-            </a:pPr>
-            <a:r>
-              <a:rPr lang="en-US" sz="900" b="1" kern="0" spc="100" dirty="0">
+            <a:pPr algn="ctr" indent="0" marL="0">
+              <a:buNone/>
+            </a:pPr>
+            <a:r>
+              <a:rPr lang="en-US" sz="900" b="1" spc="100" kern="0" dirty="0">
                 <a:solidFill>
                   <a:srgbClr val="5A05F4"/>
                 </a:solidFill>
@@ -9617,14 +10160,14 @@
       </p:sp>
       <p:pic>
         <p:nvPicPr>
-          <p:cNvPr id="7" name="Image 0" descr="preencoded.png"/>
+          <p:cNvPr id="7" name="Image 0" descr="preencoded.png">    </p:cNvPr>
           <p:cNvPicPr>
             <a:picLocks noChangeAspect="1"/>
           </p:cNvPicPr>
           <p:nvPr/>
         </p:nvPicPr>
         <p:blipFill>
-          <a:blip r:embed="rId3"/>
+          <a:blip r:embed="rId1"/>
           <a:stretch>
             <a:fillRect/>
           </a:stretch>
@@ -9687,11 +10230,11 @@
           <a:bodyPr wrap="square" lIns="0" tIns="0" rIns="0" bIns="0" rtlCol="0" anchor="ctr"/>
           <a:lstStyle/>
           <a:p>
-            <a:pPr marL="0" indent="0">
-              <a:buNone/>
-            </a:pPr>
-            <a:r>
-              <a:rPr lang="en-US" sz="1000" b="1" kern="0" spc="150" dirty="0">
+            <a:pPr indent="0" marL="0">
+              <a:buNone/>
+            </a:pPr>
+            <a:r>
+              <a:rPr lang="en-US" sz="1000" b="1" spc="150" kern="0" dirty="0">
                 <a:solidFill>
                   <a:srgbClr val="106B41"/>
                 </a:solidFill>
@@ -9748,7 +10291,7 @@
           <a:bodyPr wrap="square" lIns="0" tIns="0" rIns="0" bIns="0" rtlCol="0" anchor="ctr"/>
           <a:lstStyle/>
           <a:p>
-            <a:pPr marL="0" indent="0" algn="ctr">
+            <a:pPr algn="ctr" indent="0" marL="0">
               <a:buNone/>
             </a:pPr>
             <a:r>
@@ -9787,7 +10330,7 @@
           <a:bodyPr wrap="square" lIns="0" tIns="0" rIns="0" bIns="0" rtlCol="0" anchor="ctr"/>
           <a:lstStyle/>
           <a:p>
-            <a:pPr marL="0" indent="0">
+            <a:pPr indent="0" marL="0">
               <a:buNone/>
             </a:pPr>
             <a:r>
@@ -9848,7 +10391,7 @@
           <a:bodyPr wrap="square" lIns="0" tIns="0" rIns="0" bIns="0" rtlCol="0" anchor="ctr"/>
           <a:lstStyle/>
           <a:p>
-            <a:pPr marL="0" indent="0" algn="ctr">
+            <a:pPr algn="ctr" indent="0" marL="0">
               <a:buNone/>
             </a:pPr>
             <a:r>
@@ -9887,7 +10430,7 @@
           <a:bodyPr wrap="square" lIns="0" tIns="0" rIns="0" bIns="0" rtlCol="0" anchor="ctr"/>
           <a:lstStyle/>
           <a:p>
-            <a:pPr marL="0" indent="0">
+            <a:pPr indent="0" marL="0">
               <a:buNone/>
             </a:pPr>
             <a:r>
@@ -9948,7 +10491,7 @@
           <a:bodyPr wrap="square" lIns="0" tIns="0" rIns="0" bIns="0" rtlCol="0" anchor="ctr"/>
           <a:lstStyle/>
           <a:p>
-            <a:pPr marL="0" indent="0" algn="ctr">
+            <a:pPr algn="ctr" indent="0" marL="0">
               <a:buNone/>
             </a:pPr>
             <a:r>
@@ -9987,7 +10530,7 @@
           <a:bodyPr wrap="square" lIns="0" tIns="0" rIns="0" bIns="0" rtlCol="0" anchor="ctr"/>
           <a:lstStyle/>
           <a:p>
-            <a:pPr marL="0" indent="0">
+            <a:pPr indent="0" marL="0">
               <a:buNone/>
             </a:pPr>
             <a:r>
@@ -10053,11 +10596,11 @@
           <a:bodyPr wrap="square" lIns="0" tIns="0" rIns="0" bIns="0" rtlCol="0" anchor="ctr"/>
           <a:lstStyle/>
           <a:p>
-            <a:pPr marL="0" indent="0">
-              <a:buNone/>
-            </a:pPr>
-            <a:r>
-              <a:rPr lang="en-US" sz="1000" b="1" kern="0" spc="150" dirty="0">
+            <a:pPr indent="0" marL="0">
+              <a:buNone/>
+            </a:pPr>
+            <a:r>
+              <a:rPr lang="en-US" sz="1000" b="1" spc="150" kern="0" dirty="0">
                 <a:solidFill>
                   <a:srgbClr val="B3261E"/>
                 </a:solidFill>
@@ -10114,7 +10657,7 @@
           <a:bodyPr wrap="square" lIns="0" tIns="0" rIns="0" bIns="0" rtlCol="0" anchor="ctr"/>
           <a:lstStyle/>
           <a:p>
-            <a:pPr marL="0" indent="0">
+            <a:pPr indent="0" marL="0">
               <a:buNone/>
             </a:pPr>
             <a:r>
@@ -10126,7 +10669,7 @@
                 <a:ea typeface="Montserrat" pitchFamily="34" charset="-122"/>
                 <a:cs typeface="Montserrat" pitchFamily="34" charset="-120"/>
               </a:rPr>
-              <a:t>200 + сміття</a:t>
+              <a:t>200 + невалідний вміст</a:t>
             </a:r>
             <a:endParaRPr lang="en-US" sz="1500" dirty="0"/>
           </a:p>
@@ -10153,7 +10696,7 @@
           <a:bodyPr wrap="square" lIns="0" tIns="0" rIns="0" bIns="0" rtlCol="0" anchor="ctr"/>
           <a:lstStyle/>
           <a:p>
-            <a:pPr marL="0" indent="0">
+            <a:pPr indent="0" marL="0">
               <a:buNone/>
             </a:pPr>
             <a:r>
@@ -10214,7 +10757,7 @@
           <a:bodyPr wrap="square" lIns="0" tIns="0" rIns="0" bIns="0" rtlCol="0" anchor="ctr"/>
           <a:lstStyle/>
           <a:p>
-            <a:pPr marL="0" indent="0">
+            <a:pPr indent="0" marL="0">
               <a:buNone/>
             </a:pPr>
             <a:r>
@@ -10226,7 +10769,7 @@
                 <a:ea typeface="Montserrat" pitchFamily="34" charset="-122"/>
                 <a:cs typeface="Montserrat" pitchFamily="34" charset="-120"/>
               </a:rPr>
-              <a:t>200 + тихо гірше</a:t>
+              <a:t>200 + деградація якості</a:t>
             </a:r>
             <a:endParaRPr lang="en-US" sz="1500" dirty="0"/>
           </a:p>
@@ -10253,7 +10796,7 @@
           <a:bodyPr wrap="square" lIns="0" tIns="0" rIns="0" bIns="0" rtlCol="0" anchor="ctr"/>
           <a:lstStyle/>
           <a:p>
-            <a:pPr marL="0" indent="0">
+            <a:pPr indent="0" marL="0">
               <a:buNone/>
             </a:pPr>
             <a:r>
@@ -10319,7 +10862,7 @@
           <a:bodyPr wrap="square" lIns="0" tIns="0" rIns="0" bIns="0" rtlCol="0" anchor="ctr"/>
           <a:lstStyle/>
           <a:p>
-            <a:pPr marL="0" indent="0">
+            <a:pPr indent="0" marL="0">
               <a:lnSpc>
                 <a:spcPct val="112000"/>
               </a:lnSpc>
@@ -10342,7 +10885,7 @@
       </p:sp>
       <p:sp>
         <p:nvSpPr>
-          <p:cNvPr id="29" name="Slide Number Placeholder 0"/>
+          <p:cNvPr id="25" name="Slide Number Placeholder 0"/>
           <p:cNvSpPr>
             <a:spLocks noGrp="1"/>
           </p:cNvSpPr>
@@ -10360,7 +10903,7 @@
           </a:prstGeom>
           <a:extLst>
             <a:ext uri="{C572A759-6A51-4108-AA02-DFA0A04FC94B}">
-              <ma14:wrappingTextBoxFlag xmlns="" xmlns:ma14="http://schemas.microsoft.com/office/mac/drawingml/2011/main" val="0"/>
+              <ma14:wrappingTextBoxFlag xmlns:ma14="http://schemas.microsoft.com/office/mac/drawingml/2011/main" val="0"/>
             </a:ext>
           </a:extLst>
         </p:spPr>
@@ -10381,7 +10924,7 @@
           <a:p>
             <a:pPr algn="l"/>
             <a:fld id="{F7021451-1387-4CA6-816F-3879F97B5CBC}" type="slidenum">
-              <a:rPr lang="en-US" b="0"/>
+              <a:rPr b="0" lang="en-US"/>
               <a:t>15</a:t>
             </a:fld>
             <a:endParaRPr lang="en-US"/>
@@ -10456,7 +10999,7 @@
           <a:bodyPr wrap="square" lIns="0" tIns="0" rIns="0" bIns="0" rtlCol="0" anchor="ctr"/>
           <a:lstStyle/>
           <a:p>
-            <a:pPr marL="0" indent="0" algn="l">
+            <a:pPr algn="l" indent="0" marL="0">
               <a:buNone/>
             </a:pPr>
             <a:r>
@@ -10495,7 +11038,7 @@
           <a:bodyPr wrap="square" lIns="0" tIns="0" rIns="0" bIns="0" rtlCol="0" anchor="ctr"/>
           <a:lstStyle/>
           <a:p>
-            <a:pPr marL="0" indent="0">
+            <a:pPr indent="0" marL="0">
               <a:buNone/>
             </a:pPr>
             <a:r>
@@ -10561,11 +11104,11 @@
           <a:bodyPr wrap="square" lIns="0" tIns="0" rIns="0" bIns="0" rtlCol="0" anchor="ctr"/>
           <a:lstStyle/>
           <a:p>
-            <a:pPr marL="0" indent="0" algn="ctr">
-              <a:buNone/>
-            </a:pPr>
-            <a:r>
-              <a:rPr lang="en-US" sz="900" b="1" kern="0" spc="100" dirty="0">
+            <a:pPr algn="ctr" indent="0" marL="0">
+              <a:buNone/>
+            </a:pPr>
+            <a:r>
+              <a:rPr lang="en-US" sz="900" b="1" spc="100" kern="0" dirty="0">
                 <a:solidFill>
                   <a:srgbClr val="5A05F4"/>
                 </a:solidFill>
@@ -10581,14 +11124,14 @@
       </p:sp>
       <p:pic>
         <p:nvPicPr>
-          <p:cNvPr id="7" name="Image 0" descr="preencoded.png"/>
+          <p:cNvPr id="7" name="Image 0" descr="preencoded.png">    </p:cNvPr>
           <p:cNvPicPr>
             <a:picLocks noChangeAspect="1"/>
           </p:cNvPicPr>
           <p:nvPr/>
         </p:nvPicPr>
         <p:blipFill>
-          <a:blip r:embed="rId3"/>
+          <a:blip r:embed="rId1"/>
           <a:stretch>
             <a:fillRect/>
           </a:stretch>
@@ -10646,7 +11189,7 @@
           <a:bodyPr wrap="square" lIns="0" tIns="0" rIns="0" bIns="0" rtlCol="0" anchor="ctr"/>
           <a:lstStyle/>
           <a:p>
-            <a:pPr marL="0" indent="0" algn="ctr">
+            <a:pPr algn="ctr" indent="0" marL="0">
               <a:buNone/>
             </a:pPr>
             <a:r>
@@ -10750,7 +11293,7 @@
           <a:bodyPr wrap="square" lIns="0" tIns="0" rIns="0" bIns="0" rtlCol="0" anchor="ctr"/>
           <a:lstStyle/>
           <a:p>
-            <a:pPr marL="0" indent="0" algn="ctr">
+            <a:pPr algn="ctr" indent="0" marL="0">
               <a:buNone/>
             </a:pPr>
             <a:r>
@@ -10854,7 +11397,7 @@
           <a:bodyPr wrap="square" lIns="0" tIns="0" rIns="0" bIns="0" rtlCol="0" anchor="ctr"/>
           <a:lstStyle/>
           <a:p>
-            <a:pPr marL="0" indent="0" algn="ctr">
+            <a:pPr algn="ctr" indent="0" marL="0">
               <a:buNone/>
             </a:pPr>
             <a:r>
@@ -10958,7 +11501,7 @@
           <a:bodyPr wrap="square" lIns="0" tIns="0" rIns="0" bIns="0" rtlCol="0" anchor="ctr"/>
           <a:lstStyle/>
           <a:p>
-            <a:pPr marL="0" indent="0" algn="ctr">
+            <a:pPr algn="ctr" indent="0" marL="0">
               <a:buNone/>
             </a:pPr>
             <a:r>
@@ -11062,7 +11605,7 @@
           <a:bodyPr wrap="square" lIns="0" tIns="0" rIns="0" bIns="0" rtlCol="0" anchor="ctr"/>
           <a:lstStyle/>
           <a:p>
-            <a:pPr marL="0" indent="0" algn="ctr">
+            <a:pPr algn="ctr" indent="0" marL="0">
               <a:buNone/>
             </a:pPr>
             <a:r>
@@ -11171,7 +11714,7 @@
           <a:bodyPr wrap="square" lIns="0" tIns="0" rIns="0" bIns="0" rtlCol="0" anchor="ctr"/>
           <a:lstStyle/>
           <a:p>
-            <a:pPr marL="0" indent="0" algn="ctr">
+            <a:pPr algn="ctr" indent="0" marL="0">
               <a:buNone/>
             </a:pPr>
             <a:r>
@@ -11237,7 +11780,7 @@
           <a:bodyPr wrap="square" lIns="0" tIns="0" rIns="0" bIns="0" rtlCol="0" anchor="t"/>
           <a:lstStyle/>
           <a:p>
-            <a:pPr marL="0" indent="0">
+            <a:pPr indent="0" marL="0">
               <a:lnSpc>
                 <a:spcPct val="130000"/>
               </a:lnSpc>
@@ -11254,6 +11797,12 @@
               </a:rPr>
               <a:t>docker compose up</a:t>
             </a:r>
+            <a:pPr indent="0" marL="0">
+              <a:lnSpc>
+                <a:spcPct val="130000"/>
+              </a:lnSpc>
+              <a:buNone/>
+            </a:pPr>
             <a:r>
               <a:rPr lang="en-US" sz="1300" dirty="0">
                 <a:solidFill>
@@ -11317,7 +11866,7 @@
           <a:bodyPr wrap="square" lIns="0" tIns="0" rIns="0" bIns="0" rtlCol="0" anchor="ctr"/>
           <a:lstStyle/>
           <a:p>
-            <a:pPr marL="0" indent="0">
+            <a:pPr indent="0" marL="0">
               <a:lnSpc>
                 <a:spcPct val="112000"/>
               </a:lnSpc>
@@ -11340,7 +11889,7 @@
       </p:sp>
       <p:sp>
         <p:nvSpPr>
-          <p:cNvPr id="34" name="Slide Number Placeholder 0"/>
+          <p:cNvPr id="25" name="Slide Number Placeholder 0"/>
           <p:cNvSpPr>
             <a:spLocks noGrp="1"/>
           </p:cNvSpPr>
@@ -11358,7 +11907,7 @@
           </a:prstGeom>
           <a:extLst>
             <a:ext uri="{C572A759-6A51-4108-AA02-DFA0A04FC94B}">
-              <ma14:wrappingTextBoxFlag xmlns="" xmlns:ma14="http://schemas.microsoft.com/office/mac/drawingml/2011/main" val="0"/>
+              <ma14:wrappingTextBoxFlag xmlns:ma14="http://schemas.microsoft.com/office/mac/drawingml/2011/main" val="0"/>
             </a:ext>
           </a:extLst>
         </p:spPr>
@@ -11379,7 +11928,7 @@
           <a:p>
             <a:pPr algn="l"/>
             <a:fld id="{F7021451-1387-4CA6-816F-3879F97B5CBC}" type="slidenum">
-              <a:rPr lang="en-US" b="0"/>
+              <a:rPr b="0" lang="en-US"/>
               <a:t>16</a:t>
             </a:fld>
             <a:endParaRPr lang="en-US"/>
@@ -11454,7 +12003,7 @@
           <a:bodyPr wrap="square" lIns="0" tIns="0" rIns="0" bIns="0" rtlCol="0" anchor="ctr"/>
           <a:lstStyle/>
           <a:p>
-            <a:pPr marL="0" indent="0" algn="l">
+            <a:pPr algn="l" indent="0" marL="0">
               <a:buNone/>
             </a:pPr>
             <a:r>
@@ -11493,7 +12042,7 @@
           <a:bodyPr wrap="square" lIns="0" tIns="0" rIns="0" bIns="0" rtlCol="0" anchor="ctr"/>
           <a:lstStyle/>
           <a:p>
-            <a:pPr marL="0" indent="0">
+            <a:pPr indent="0" marL="0">
               <a:buNone/>
             </a:pPr>
             <a:r>
@@ -11559,11 +12108,11 @@
           <a:bodyPr wrap="square" lIns="0" tIns="0" rIns="0" bIns="0" rtlCol="0" anchor="ctr"/>
           <a:lstStyle/>
           <a:p>
-            <a:pPr marL="0" indent="0" algn="ctr">
-              <a:buNone/>
-            </a:pPr>
-            <a:r>
-              <a:rPr lang="en-US" sz="900" b="1" kern="0" spc="100" dirty="0">
+            <a:pPr algn="ctr" indent="0" marL="0">
+              <a:buNone/>
+            </a:pPr>
+            <a:r>
+              <a:rPr lang="en-US" sz="900" b="1" spc="100" kern="0" dirty="0">
                 <a:solidFill>
                   <a:srgbClr val="5A05F4"/>
                 </a:solidFill>
@@ -11579,14 +12128,14 @@
       </p:sp>
       <p:pic>
         <p:nvPicPr>
-          <p:cNvPr id="7" name="Image 0" descr="preencoded.png"/>
+          <p:cNvPr id="7" name="Image 0" descr="preencoded.png">    </p:cNvPr>
           <p:cNvPicPr>
             <a:picLocks noChangeAspect="1"/>
           </p:cNvPicPr>
           <p:nvPr/>
         </p:nvPicPr>
         <p:blipFill>
-          <a:blip r:embed="rId3"/>
+          <a:blip r:embed="rId1"/>
           <a:stretch>
             <a:fillRect/>
           </a:stretch>
@@ -11644,7 +12193,7 @@
           <a:bodyPr wrap="square" lIns="0" tIns="0" rIns="0" bIns="0" rtlCol="0" anchor="ctr"/>
           <a:lstStyle/>
           <a:p>
-            <a:pPr marL="0" indent="0">
+            <a:pPr indent="0" marL="0">
               <a:buNone/>
             </a:pPr>
             <a:r>
@@ -11683,7 +12232,7 @@
           <a:bodyPr wrap="square" lIns="0" tIns="0" rIns="0" bIns="0" rtlCol="0" anchor="ctr"/>
           <a:lstStyle/>
           <a:p>
-            <a:pPr marL="0" indent="0">
+            <a:pPr indent="0" marL="0">
               <a:buNone/>
             </a:pPr>
             <a:r>
@@ -11744,7 +12293,7 @@
           <a:bodyPr wrap="square" lIns="0" tIns="0" rIns="0" bIns="0" rtlCol="0" anchor="ctr"/>
           <a:lstStyle/>
           <a:p>
-            <a:pPr marL="0" indent="0">
+            <a:pPr indent="0" marL="0">
               <a:buNone/>
             </a:pPr>
             <a:r>
@@ -11783,7 +12332,7 @@
           <a:bodyPr wrap="square" lIns="0" tIns="0" rIns="0" bIns="0" rtlCol="0" anchor="ctr"/>
           <a:lstStyle/>
           <a:p>
-            <a:pPr marL="0" indent="0">
+            <a:pPr indent="0" marL="0">
               <a:buNone/>
             </a:pPr>
             <a:r>
@@ -11844,7 +12393,7 @@
           <a:bodyPr wrap="square" lIns="0" tIns="0" rIns="0" bIns="0" rtlCol="0" anchor="ctr"/>
           <a:lstStyle/>
           <a:p>
-            <a:pPr marL="0" indent="0">
+            <a:pPr indent="0" marL="0">
               <a:buNone/>
             </a:pPr>
             <a:r>
@@ -11883,7 +12432,7 @@
           <a:bodyPr wrap="square" lIns="0" tIns="0" rIns="0" bIns="0" rtlCol="0" anchor="ctr"/>
           <a:lstStyle/>
           <a:p>
-            <a:pPr marL="0" indent="0">
+            <a:pPr indent="0" marL="0">
               <a:buNone/>
             </a:pPr>
             <a:r>
@@ -11944,7 +12493,7 @@
           <a:bodyPr wrap="square" lIns="0" tIns="0" rIns="0" bIns="0" rtlCol="0" anchor="ctr"/>
           <a:lstStyle/>
           <a:p>
-            <a:pPr marL="0" indent="0">
+            <a:pPr indent="0" marL="0">
               <a:buNone/>
             </a:pPr>
             <a:r>
@@ -11983,7 +12532,7 @@
           <a:bodyPr wrap="square" lIns="0" tIns="0" rIns="0" bIns="0" rtlCol="0" anchor="ctr"/>
           <a:lstStyle/>
           <a:p>
-            <a:pPr marL="0" indent="0">
+            <a:pPr indent="0" marL="0">
               <a:buNone/>
             </a:pPr>
             <a:r>
@@ -12044,7 +12593,7 @@
           <a:bodyPr wrap="square" lIns="0" tIns="0" rIns="0" bIns="0" rtlCol="0" anchor="ctr"/>
           <a:lstStyle/>
           <a:p>
-            <a:pPr marL="0" indent="0">
+            <a:pPr indent="0" marL="0">
               <a:buNone/>
             </a:pPr>
             <a:r>
@@ -12083,7 +12632,7 @@
           <a:bodyPr wrap="square" lIns="0" tIns="0" rIns="0" bIns="0" rtlCol="0" anchor="ctr"/>
           <a:lstStyle/>
           <a:p>
-            <a:pPr marL="0" indent="0">
+            <a:pPr indent="0" marL="0">
               <a:buNone/>
             </a:pPr>
             <a:r>
@@ -12149,7 +12698,7 @@
           <a:bodyPr wrap="square" lIns="0" tIns="0" rIns="0" bIns="0" rtlCol="0" anchor="ctr"/>
           <a:lstStyle/>
           <a:p>
-            <a:pPr marL="0" indent="0">
+            <a:pPr indent="0" marL="0">
               <a:lnSpc>
                 <a:spcPct val="112000"/>
               </a:lnSpc>
@@ -12190,7 +12739,7 @@
           </a:prstGeom>
           <a:extLst>
             <a:ext uri="{C572A759-6A51-4108-AA02-DFA0A04FC94B}">
-              <ma14:wrappingTextBoxFlag xmlns="" xmlns:ma14="http://schemas.microsoft.com/office/mac/drawingml/2011/main" val="0"/>
+              <ma14:wrappingTextBoxFlag xmlns:ma14="http://schemas.microsoft.com/office/mac/drawingml/2011/main" val="0"/>
             </a:ext>
           </a:extLst>
         </p:spPr>
@@ -12211,7 +12760,7 @@
           <a:p>
             <a:pPr algn="l"/>
             <a:fld id="{F7021451-1387-4CA6-816F-3879F97B5CBC}" type="slidenum">
-              <a:rPr lang="en-US" b="0"/>
+              <a:rPr b="0" lang="en-US"/>
               <a:t>17</a:t>
             </a:fld>
             <a:endParaRPr lang="en-US"/>
@@ -12286,7 +12835,7 @@
           <a:bodyPr wrap="square" lIns="0" tIns="0" rIns="0" bIns="0" rtlCol="0" anchor="ctr"/>
           <a:lstStyle/>
           <a:p>
-            <a:pPr marL="0" indent="0" algn="l">
+            <a:pPr algn="l" indent="0" marL="0">
               <a:buNone/>
             </a:pPr>
             <a:r>
@@ -12325,7 +12874,7 @@
           <a:bodyPr wrap="square" lIns="0" tIns="0" rIns="0" bIns="0" rtlCol="0" anchor="ctr"/>
           <a:lstStyle/>
           <a:p>
-            <a:pPr marL="0" indent="0">
+            <a:pPr indent="0" marL="0">
               <a:buNone/>
             </a:pPr>
             <a:r>
@@ -12391,11 +12940,11 @@
           <a:bodyPr wrap="square" lIns="0" tIns="0" rIns="0" bIns="0" rtlCol="0" anchor="ctr"/>
           <a:lstStyle/>
           <a:p>
-            <a:pPr marL="0" indent="0" algn="ctr">
-              <a:buNone/>
-            </a:pPr>
-            <a:r>
-              <a:rPr lang="en-US" sz="900" b="1" kern="0" spc="100" dirty="0">
+            <a:pPr algn="ctr" indent="0" marL="0">
+              <a:buNone/>
+            </a:pPr>
+            <a:r>
+              <a:rPr lang="en-US" sz="900" b="1" spc="100" kern="0" dirty="0">
                 <a:solidFill>
                   <a:srgbClr val="5A05F4"/>
                 </a:solidFill>
@@ -12411,14 +12960,14 @@
       </p:sp>
       <p:pic>
         <p:nvPicPr>
-          <p:cNvPr id="7" name="Image 0" descr="preencoded.png"/>
+          <p:cNvPr id="7" name="Image 0" descr="preencoded.png">    </p:cNvPr>
           <p:cNvPicPr>
             <a:picLocks noChangeAspect="1"/>
           </p:cNvPicPr>
           <p:nvPr/>
         </p:nvPicPr>
         <p:blipFill>
-          <a:blip r:embed="rId3"/>
+          <a:blip r:embed="rId1"/>
           <a:stretch>
             <a:fillRect/>
           </a:stretch>
@@ -12476,11 +13025,11 @@
           <a:bodyPr wrap="square" lIns="0" tIns="0" rIns="0" bIns="0" rtlCol="0" anchor="ctr"/>
           <a:lstStyle/>
           <a:p>
-            <a:pPr marL="0" indent="0">
-              <a:buNone/>
-            </a:pPr>
-            <a:r>
-              <a:rPr lang="en-US" sz="1100" b="1" kern="0" spc="200" dirty="0">
+            <a:pPr indent="0" marL="0">
+              <a:buNone/>
+            </a:pPr>
+            <a:r>
+              <a:rPr lang="en-US" sz="1100" b="1" spc="200" kern="0" dirty="0">
                 <a:solidFill>
                   <a:srgbClr val="C9C5F2"/>
                 </a:solidFill>
@@ -12515,7 +13064,7 @@
           <a:bodyPr wrap="square" lIns="0" tIns="0" rIns="0" bIns="0" rtlCol="0" anchor="ctr"/>
           <a:lstStyle/>
           <a:p>
-            <a:pPr marL="0" indent="0">
+            <a:pPr indent="0" marL="0">
               <a:buNone/>
             </a:pPr>
             <a:r>
@@ -12554,7 +13103,7 @@
           <a:bodyPr wrap="square" lIns="0" tIns="0" rIns="0" bIns="0" rtlCol="0" anchor="t"/>
           <a:lstStyle/>
           <a:p>
-            <a:pPr marL="0" indent="0">
+            <a:pPr indent="0" marL="0">
               <a:buNone/>
             </a:pPr>
             <a:r>
@@ -12620,11 +13169,11 @@
           <a:bodyPr wrap="square" lIns="0" tIns="0" rIns="0" bIns="0" rtlCol="0" anchor="ctr"/>
           <a:lstStyle/>
           <a:p>
-            <a:pPr marL="0" indent="0">
-              <a:buNone/>
-            </a:pPr>
-            <a:r>
-              <a:rPr lang="en-US" sz="1100" b="1" kern="0" spc="200" dirty="0">
+            <a:pPr indent="0" marL="0">
+              <a:buNone/>
+            </a:pPr>
+            <a:r>
+              <a:rPr lang="en-US" sz="1100" b="1" spc="200" kern="0" dirty="0">
                 <a:solidFill>
                   <a:srgbClr val="6B6B6B"/>
                 </a:solidFill>
@@ -12659,7 +13208,7 @@
           <a:bodyPr wrap="square" lIns="0" tIns="0" rIns="0" bIns="0" rtlCol="0" anchor="ctr"/>
           <a:lstStyle/>
           <a:p>
-            <a:pPr marL="0" indent="0">
+            <a:pPr indent="0" marL="0">
               <a:buNone/>
             </a:pPr>
             <a:r>
@@ -12698,7 +13247,7 @@
           <a:bodyPr wrap="square" lIns="0" tIns="0" rIns="0" bIns="0" rtlCol="0" anchor="t"/>
           <a:lstStyle/>
           <a:p>
-            <a:pPr marL="0" indent="0">
+            <a:pPr indent="0" marL="0">
               <a:buNone/>
             </a:pPr>
             <a:r>
@@ -12745,30 +13294,89 @@
       </p:sp>
       <p:sp>
         <p:nvSpPr>
-          <p:cNvPr id="17" name="Text 14"/>
-          <p:cNvSpPr/>
-          <p:nvPr/>
-        </p:nvSpPr>
-        <p:spPr>
-          <a:xfrm>
-            <a:off x="786384" y="3968496"/>
-            <a:ext cx="4910328" cy="219456"/>
-          </a:xfrm>
-          <a:prstGeom prst="rect">
-            <a:avLst/>
-          </a:prstGeom>
-          <a:noFill/>
-          <a:ln/>
-        </p:spPr>
-        <p:txBody>
-          <a:bodyPr wrap="square" lIns="0" tIns="0" rIns="0" bIns="0" rtlCol="0" anchor="ctr"/>
-          <a:lstStyle/>
-          <a:p>
-            <a:pPr marL="0" indent="0">
-              <a:buNone/>
-            </a:pPr>
-            <a:r>
-              <a:rPr lang="en-US" sz="950" b="1" kern="0" spc="150" dirty="0">
+          <p:cNvPr id="17" name="Shape 14"/>
+          <p:cNvSpPr/>
+          <p:nvPr/>
+        </p:nvSpPr>
+        <p:spPr>
+          <a:xfrm>
+            <a:off x="749808" y="4530852"/>
+            <a:ext cx="310896" cy="310896"/>
+          </a:xfrm>
+          <a:prstGeom prst="ellipse">
+            <a:avLst/>
+          </a:prstGeom>
+          <a:solidFill>
+            <a:srgbClr val="106B41"/>
+          </a:solidFill>
+          <a:ln/>
+        </p:spPr>
+      </p:sp>
+      <p:sp>
+        <p:nvSpPr>
+          <p:cNvPr id="18" name="Text 15"/>
+          <p:cNvSpPr/>
+          <p:nvPr/>
+        </p:nvSpPr>
+        <p:spPr>
+          <a:xfrm>
+            <a:off x="749808" y="4530852"/>
+            <a:ext cx="310896" cy="310896"/>
+          </a:xfrm>
+          <a:prstGeom prst="rect">
+            <a:avLst/>
+          </a:prstGeom>
+          <a:noFill/>
+          <a:ln/>
+        </p:spPr>
+        <p:txBody>
+          <a:bodyPr wrap="square" lIns="0" tIns="0" rIns="0" bIns="0" rtlCol="0" anchor="ctr"/>
+          <a:lstStyle/>
+          <a:p>
+            <a:pPr algn="ctr" indent="0" marL="0">
+              <a:buNone/>
+            </a:pPr>
+            <a:r>
+              <a:rPr lang="en-US" sz="1200" b="1" dirty="0">
+                <a:solidFill>
+                  <a:srgbClr val="FFFFFF"/>
+                </a:solidFill>
+                <a:latin typeface="Arial" pitchFamily="34" charset="0"/>
+                <a:ea typeface="Arial" pitchFamily="34" charset="-122"/>
+                <a:cs typeface="Arial" pitchFamily="34" charset="-120"/>
+              </a:rPr>
+              <a:t>◆</a:t>
+            </a:r>
+            <a:endParaRPr lang="en-US" sz="1200" dirty="0"/>
+          </a:p>
+        </p:txBody>
+      </p:sp>
+      <p:sp>
+        <p:nvSpPr>
+          <p:cNvPr id="19" name="Text 16"/>
+          <p:cNvSpPr/>
+          <p:nvPr/>
+        </p:nvSpPr>
+        <p:spPr>
+          <a:xfrm>
+            <a:off x="1243584" y="3968496"/>
+            <a:ext cx="4453128" cy="219456"/>
+          </a:xfrm>
+          <a:prstGeom prst="rect">
+            <a:avLst/>
+          </a:prstGeom>
+          <a:noFill/>
+          <a:ln/>
+        </p:spPr>
+        <p:txBody>
+          <a:bodyPr wrap="square" lIns="0" tIns="0" rIns="0" bIns="0" rtlCol="0" anchor="ctr"/>
+          <a:lstStyle/>
+          <a:p>
+            <a:pPr indent="0" marL="0">
+              <a:buNone/>
+            </a:pPr>
+            <a:r>
+              <a:rPr lang="en-US" sz="950" b="1" spc="150" kern="0" dirty="0">
                 <a:solidFill>
                   <a:srgbClr val="106B41"/>
                 </a:solidFill>
@@ -12784,26 +13392,26 @@
       </p:sp>
       <p:sp>
         <p:nvSpPr>
-          <p:cNvPr id="18" name="Text 15"/>
-          <p:cNvSpPr/>
-          <p:nvPr/>
-        </p:nvSpPr>
-        <p:spPr>
-          <a:xfrm>
-            <a:off x="786384" y="4224528"/>
-            <a:ext cx="4910328" cy="1179576"/>
-          </a:xfrm>
-          <a:prstGeom prst="rect">
-            <a:avLst/>
-          </a:prstGeom>
-          <a:noFill/>
-          <a:ln/>
-        </p:spPr>
-        <p:txBody>
-          <a:bodyPr wrap="square" lIns="0" tIns="0" rIns="0" bIns="0" rtlCol="0" anchor="ctr"/>
-          <a:lstStyle/>
-          <a:p>
-            <a:pPr marL="0" indent="0">
+          <p:cNvPr id="20" name="Text 17"/>
+          <p:cNvSpPr/>
+          <p:nvPr/>
+        </p:nvSpPr>
+        <p:spPr>
+          <a:xfrm>
+            <a:off x="1243584" y="4224528"/>
+            <a:ext cx="4453128" cy="1179576"/>
+          </a:xfrm>
+          <a:prstGeom prst="rect">
+            <a:avLst/>
+          </a:prstGeom>
+          <a:noFill/>
+          <a:ln/>
+        </p:spPr>
+        <p:txBody>
+          <a:bodyPr wrap="square" lIns="0" tIns="0" rIns="0" bIns="0" rtlCol="0" anchor="ctr"/>
+          <a:lstStyle/>
+          <a:p>
+            <a:pPr indent="0" marL="0">
               <a:lnSpc>
                 <a:spcPct val="112000"/>
               </a:lnSpc>
@@ -12826,7 +13434,7 @@
       </p:sp>
       <p:sp>
         <p:nvSpPr>
-          <p:cNvPr id="19" name="Shape 16"/>
+          <p:cNvPr id="21" name="Shape 18"/>
           <p:cNvSpPr/>
           <p:nvPr/>
         </p:nvSpPr>
@@ -12853,30 +13461,89 @@
       </p:sp>
       <p:sp>
         <p:nvSpPr>
-          <p:cNvPr id="20" name="Text 17"/>
-          <p:cNvSpPr/>
-          <p:nvPr/>
-        </p:nvSpPr>
-        <p:spPr>
-          <a:xfrm>
-            <a:off x="6501384" y="3968496"/>
-            <a:ext cx="4910328" cy="219456"/>
-          </a:xfrm>
-          <a:prstGeom prst="rect">
-            <a:avLst/>
-          </a:prstGeom>
-          <a:noFill/>
-          <a:ln/>
-        </p:spPr>
-        <p:txBody>
-          <a:bodyPr wrap="square" lIns="0" tIns="0" rIns="0" bIns="0" rtlCol="0" anchor="ctr"/>
-          <a:lstStyle/>
-          <a:p>
-            <a:pPr marL="0" indent="0">
-              <a:buNone/>
-            </a:pPr>
-            <a:r>
-              <a:rPr lang="en-US" sz="950" b="1" kern="0" spc="150" dirty="0">
+          <p:cNvPr id="22" name="Shape 19"/>
+          <p:cNvSpPr/>
+          <p:nvPr/>
+        </p:nvSpPr>
+        <p:spPr>
+          <a:xfrm>
+            <a:off x="6464808" y="4530852"/>
+            <a:ext cx="310896" cy="310896"/>
+          </a:xfrm>
+          <a:prstGeom prst="ellipse">
+            <a:avLst/>
+          </a:prstGeom>
+          <a:solidFill>
+            <a:srgbClr val="B3261E"/>
+          </a:solidFill>
+          <a:ln/>
+        </p:spPr>
+      </p:sp>
+      <p:sp>
+        <p:nvSpPr>
+          <p:cNvPr id="23" name="Text 20"/>
+          <p:cNvSpPr/>
+          <p:nvPr/>
+        </p:nvSpPr>
+        <p:spPr>
+          <a:xfrm>
+            <a:off x="6464808" y="4530852"/>
+            <a:ext cx="310896" cy="310896"/>
+          </a:xfrm>
+          <a:prstGeom prst="rect">
+            <a:avLst/>
+          </a:prstGeom>
+          <a:noFill/>
+          <a:ln/>
+        </p:spPr>
+        <p:txBody>
+          <a:bodyPr wrap="square" lIns="0" tIns="0" rIns="0" bIns="0" rtlCol="0" anchor="ctr"/>
+          <a:lstStyle/>
+          <a:p>
+            <a:pPr algn="ctr" indent="0" marL="0">
+              <a:buNone/>
+            </a:pPr>
+            <a:r>
+              <a:rPr lang="en-US" sz="1200" b="1" dirty="0">
+                <a:solidFill>
+                  <a:srgbClr val="FFFFFF"/>
+                </a:solidFill>
+                <a:latin typeface="Arial" pitchFamily="34" charset="0"/>
+                <a:ea typeface="Arial" pitchFamily="34" charset="-122"/>
+                <a:cs typeface="Arial" pitchFamily="34" charset="-120"/>
+              </a:rPr>
+              <a:t>✕</a:t>
+            </a:r>
+            <a:endParaRPr lang="en-US" sz="1200" dirty="0"/>
+          </a:p>
+        </p:txBody>
+      </p:sp>
+      <p:sp>
+        <p:nvSpPr>
+          <p:cNvPr id="24" name="Text 21"/>
+          <p:cNvSpPr/>
+          <p:nvPr/>
+        </p:nvSpPr>
+        <p:spPr>
+          <a:xfrm>
+            <a:off x="6958584" y="3968496"/>
+            <a:ext cx="4453128" cy="219456"/>
+          </a:xfrm>
+          <a:prstGeom prst="rect">
+            <a:avLst/>
+          </a:prstGeom>
+          <a:noFill/>
+          <a:ln/>
+        </p:spPr>
+        <p:txBody>
+          <a:bodyPr wrap="square" lIns="0" tIns="0" rIns="0" bIns="0" rtlCol="0" anchor="ctr"/>
+          <a:lstStyle/>
+          <a:p>
+            <a:pPr indent="0" marL="0">
+              <a:buNone/>
+            </a:pPr>
+            <a:r>
+              <a:rPr lang="en-US" sz="950" b="1" spc="150" kern="0" dirty="0">
                 <a:solidFill>
                   <a:srgbClr val="B3261E"/>
                 </a:solidFill>
@@ -12892,26 +13559,26 @@
       </p:sp>
       <p:sp>
         <p:nvSpPr>
-          <p:cNvPr id="21" name="Text 18"/>
-          <p:cNvSpPr/>
-          <p:nvPr/>
-        </p:nvSpPr>
-        <p:spPr>
-          <a:xfrm>
-            <a:off x="6501384" y="4224528"/>
-            <a:ext cx="4910328" cy="1179576"/>
-          </a:xfrm>
-          <a:prstGeom prst="rect">
-            <a:avLst/>
-          </a:prstGeom>
-          <a:noFill/>
-          <a:ln/>
-        </p:spPr>
-        <p:txBody>
-          <a:bodyPr wrap="square" lIns="0" tIns="0" rIns="0" bIns="0" rtlCol="0" anchor="ctr"/>
-          <a:lstStyle/>
-          <a:p>
-            <a:pPr marL="0" indent="0">
+          <p:cNvPr id="25" name="Text 22"/>
+          <p:cNvSpPr/>
+          <p:nvPr/>
+        </p:nvSpPr>
+        <p:spPr>
+          <a:xfrm>
+            <a:off x="6958584" y="4224528"/>
+            <a:ext cx="4453128" cy="1179576"/>
+          </a:xfrm>
+          <a:prstGeom prst="rect">
+            <a:avLst/>
+          </a:prstGeom>
+          <a:noFill/>
+          <a:ln/>
+        </p:spPr>
+        <p:txBody>
+          <a:bodyPr wrap="square" lIns="0" tIns="0" rIns="0" bIns="0" rtlCol="0" anchor="ctr"/>
+          <a:lstStyle/>
+          <a:p>
+            <a:pPr indent="0" marL="0">
               <a:lnSpc>
                 <a:spcPct val="112000"/>
               </a:lnSpc>
@@ -12934,7 +13601,7 @@
       </p:sp>
       <p:sp>
         <p:nvSpPr>
-          <p:cNvPr id="22" name="Text 19"/>
+          <p:cNvPr id="26" name="Text 23"/>
           <p:cNvSpPr/>
           <p:nvPr/>
         </p:nvSpPr>
@@ -12953,7 +13620,7 @@
           <a:bodyPr wrap="square" lIns="0" tIns="0" rIns="0" bIns="0" rtlCol="0" anchor="ctr"/>
           <a:lstStyle/>
           <a:p>
-            <a:pPr marL="0" indent="0">
+            <a:pPr indent="0" marL="0">
               <a:buNone/>
             </a:pPr>
             <a:r>
@@ -12991,7 +13658,7 @@
           </a:prstGeom>
           <a:extLst>
             <a:ext uri="{C572A759-6A51-4108-AA02-DFA0A04FC94B}">
-              <ma14:wrappingTextBoxFlag xmlns="" xmlns:ma14="http://schemas.microsoft.com/office/mac/drawingml/2011/main" val="0"/>
+              <ma14:wrappingTextBoxFlag xmlns:ma14="http://schemas.microsoft.com/office/mac/drawingml/2011/main" val="0"/>
             </a:ext>
           </a:extLst>
         </p:spPr>
@@ -13012,7 +13679,7 @@
           <a:p>
             <a:pPr algn="l"/>
             <a:fld id="{F7021451-1387-4CA6-816F-3879F97B5CBC}" type="slidenum">
-              <a:rPr lang="en-US" b="0"/>
+              <a:rPr b="0" lang="en-US"/>
               <a:t>18</a:t>
             </a:fld>
             <a:endParaRPr lang="en-US"/>
@@ -13087,7 +13754,7 @@
           <a:bodyPr wrap="square" lIns="0" tIns="0" rIns="0" bIns="0" rtlCol="0" anchor="ctr"/>
           <a:lstStyle/>
           <a:p>
-            <a:pPr marL="0" indent="0" algn="l">
+            <a:pPr algn="l" indent="0" marL="0">
               <a:buNone/>
             </a:pPr>
             <a:r>
@@ -13126,7 +13793,7 @@
           <a:bodyPr wrap="square" lIns="0" tIns="0" rIns="0" bIns="0" rtlCol="0" anchor="ctr"/>
           <a:lstStyle/>
           <a:p>
-            <a:pPr marL="0" indent="0">
+            <a:pPr indent="0" marL="0">
               <a:buNone/>
             </a:pPr>
             <a:r>
@@ -13192,11 +13859,11 @@
           <a:bodyPr wrap="square" lIns="0" tIns="0" rIns="0" bIns="0" rtlCol="0" anchor="ctr"/>
           <a:lstStyle/>
           <a:p>
-            <a:pPr marL="0" indent="0" algn="ctr">
-              <a:buNone/>
-            </a:pPr>
-            <a:r>
-              <a:rPr lang="en-US" sz="900" b="1" kern="0" spc="100" dirty="0">
+            <a:pPr algn="ctr" indent="0" marL="0">
+              <a:buNone/>
+            </a:pPr>
+            <a:r>
+              <a:rPr lang="en-US" sz="900" b="1" spc="100" kern="0" dirty="0">
                 <a:solidFill>
                   <a:srgbClr val="5A05F4"/>
                 </a:solidFill>
@@ -13212,14 +13879,14 @@
       </p:sp>
       <p:pic>
         <p:nvPicPr>
-          <p:cNvPr id="7" name="Image 0" descr="preencoded.png"/>
+          <p:cNvPr id="7" name="Image 0" descr="preencoded.png">    </p:cNvPr>
           <p:cNvPicPr>
             <a:picLocks noChangeAspect="1"/>
           </p:cNvPicPr>
           <p:nvPr/>
         </p:nvPicPr>
         <p:blipFill>
-          <a:blip r:embed="rId3"/>
+          <a:blip r:embed="rId1"/>
           <a:stretch>
             <a:fillRect/>
           </a:stretch>
@@ -13282,7 +13949,7 @@
           <a:bodyPr wrap="square" lIns="0" tIns="0" rIns="0" bIns="0" rtlCol="0" anchor="t"/>
           <a:lstStyle/>
           <a:p>
-            <a:pPr marL="0" indent="0">
+            <a:pPr indent="0" marL="0">
               <a:lnSpc>
                 <a:spcPct val="130000"/>
               </a:lnSpc>
@@ -13299,6 +13966,12 @@
               </a:rPr>
               <a:t>request_id · model · </a:t>
             </a:r>
+            <a:pPr indent="0" marL="0">
+              <a:lnSpc>
+                <a:spcPct val="130000"/>
+              </a:lnSpc>
+              <a:buNone/>
+            </a:pPr>
             <a:r>
               <a:rPr lang="en-US" sz="1300" dirty="0">
                 <a:solidFill>
@@ -13310,6 +13983,12 @@
               </a:rPr>
               <a:t>prompt_version</a:t>
             </a:r>
+            <a:pPr indent="0" marL="0">
+              <a:lnSpc>
+                <a:spcPct val="130000"/>
+              </a:lnSpc>
+              <a:buNone/>
+            </a:pPr>
             <a:r>
               <a:rPr lang="en-US" sz="1300" dirty="0">
                 <a:solidFill>
@@ -13321,6 +14000,12 @@
               </a:rPr>
               <a:t> · latency_ms · prompt_tokens · completion_tokens · </a:t>
             </a:r>
+            <a:pPr indent="0" marL="0">
+              <a:lnSpc>
+                <a:spcPct val="130000"/>
+              </a:lnSpc>
+              <a:buNone/>
+            </a:pPr>
             <a:r>
               <a:rPr lang="en-US" sz="1300" dirty="0">
                 <a:solidFill>
@@ -13332,6 +14017,12 @@
               </a:rPr>
               <a:t>cost_usd</a:t>
             </a:r>
+            <a:pPr indent="0" marL="0">
+              <a:lnSpc>
+                <a:spcPct val="130000"/>
+              </a:lnSpc>
+              <a:buNone/>
+            </a:pPr>
             <a:r>
               <a:rPr lang="en-US" sz="1300" dirty="0">
                 <a:solidFill>
@@ -13368,7 +14059,7 @@
           <a:bodyPr wrap="square" lIns="0" tIns="0" rIns="0" bIns="0" rtlCol="0" anchor="ctr"/>
           <a:lstStyle/>
           <a:p>
-            <a:pPr marL="0" indent="0">
+            <a:pPr indent="0" marL="0">
               <a:buNone/>
             </a:pPr>
             <a:r>
@@ -13407,7 +14098,7 @@
           <a:bodyPr wrap="square" lIns="0" tIns="0" rIns="0" bIns="0" rtlCol="0" anchor="ctr"/>
           <a:lstStyle/>
           <a:p>
-            <a:pPr marL="0" indent="0">
+            <a:pPr indent="0" marL="0">
               <a:buNone/>
             </a:pPr>
             <a:r>
@@ -13489,7 +14180,7 @@
           <a:bodyPr wrap="square" lIns="0" tIns="0" rIns="0" bIns="0" rtlCol="0" anchor="ctr"/>
           <a:lstStyle/>
           <a:p>
-            <a:pPr marL="0" indent="0">
+            <a:pPr indent="0" marL="0">
               <a:buNone/>
             </a:pPr>
             <a:r>
@@ -13555,7 +14246,7 @@
           <a:bodyPr wrap="square" lIns="0" tIns="0" rIns="0" bIns="0" rtlCol="0" anchor="ctr"/>
           <a:lstStyle/>
           <a:p>
-            <a:pPr marL="0" indent="0" algn="ctr">
+            <a:pPr algn="ctr" indent="0" marL="0">
               <a:buNone/>
             </a:pPr>
             <a:r>
@@ -13594,7 +14285,7 @@
           <a:bodyPr wrap="square" lIns="0" tIns="0" rIns="0" bIns="0" rtlCol="0" anchor="ctr"/>
           <a:lstStyle/>
           <a:p>
-            <a:pPr marL="0" indent="0">
+            <a:pPr indent="0" marL="0">
               <a:buNone/>
             </a:pPr>
             <a:r>
@@ -13676,7 +14367,7 @@
           <a:bodyPr wrap="square" lIns="0" tIns="0" rIns="0" bIns="0" rtlCol="0" anchor="ctr"/>
           <a:lstStyle/>
           <a:p>
-            <a:pPr marL="0" indent="0">
+            <a:pPr indent="0" marL="0">
               <a:buNone/>
             </a:pPr>
             <a:r>
@@ -13742,7 +14433,7 @@
           <a:bodyPr wrap="square" lIns="0" tIns="0" rIns="0" bIns="0" rtlCol="0" anchor="ctr"/>
           <a:lstStyle/>
           <a:p>
-            <a:pPr marL="0" indent="0" algn="ctr">
+            <a:pPr algn="ctr" indent="0" marL="0">
               <a:buNone/>
             </a:pPr>
             <a:r>
@@ -13781,7 +14472,7 @@
           <a:bodyPr wrap="square" lIns="0" tIns="0" rIns="0" bIns="0" rtlCol="0" anchor="ctr"/>
           <a:lstStyle/>
           <a:p>
-            <a:pPr marL="0" indent="0">
+            <a:pPr indent="0" marL="0">
               <a:buNone/>
             </a:pPr>
             <a:r>
@@ -13863,7 +14554,7 @@
           <a:bodyPr wrap="square" lIns="0" tIns="0" rIns="0" bIns="0" rtlCol="0" anchor="ctr"/>
           <a:lstStyle/>
           <a:p>
-            <a:pPr marL="0" indent="0">
+            <a:pPr indent="0" marL="0">
               <a:buNone/>
             </a:pPr>
             <a:r>
@@ -13929,7 +14620,7 @@
           <a:bodyPr wrap="square" lIns="0" tIns="0" rIns="0" bIns="0" rtlCol="0" anchor="ctr"/>
           <a:lstStyle/>
           <a:p>
-            <a:pPr marL="0" indent="0" algn="ctr">
+            <a:pPr algn="ctr" indent="0" marL="0">
               <a:buNone/>
             </a:pPr>
             <a:r>
@@ -13968,7 +14659,7 @@
           <a:bodyPr wrap="square" lIns="0" tIns="0" rIns="0" bIns="0" rtlCol="0" anchor="ctr"/>
           <a:lstStyle/>
           <a:p>
-            <a:pPr marL="0" indent="0">
+            <a:pPr indent="0" marL="0">
               <a:buNone/>
             </a:pPr>
             <a:r>
@@ -14050,7 +14741,7 @@
           <a:bodyPr wrap="square" lIns="0" tIns="0" rIns="0" bIns="0" rtlCol="0" anchor="ctr"/>
           <a:lstStyle/>
           <a:p>
-            <a:pPr marL="0" indent="0">
+            <a:pPr indent="0" marL="0">
               <a:buNone/>
             </a:pPr>
             <a:r>
@@ -14116,7 +14807,7 @@
           <a:bodyPr wrap="square" lIns="0" tIns="0" rIns="0" bIns="0" rtlCol="0" anchor="ctr"/>
           <a:lstStyle/>
           <a:p>
-            <a:pPr marL="0" indent="0" algn="ctr">
+            <a:pPr algn="ctr" indent="0" marL="0">
               <a:buNone/>
             </a:pPr>
             <a:r>
@@ -14155,7 +14846,7 @@
           <a:bodyPr wrap="square" lIns="0" tIns="0" rIns="0" bIns="0" rtlCol="0" anchor="ctr"/>
           <a:lstStyle/>
           <a:p>
-            <a:pPr marL="0" indent="0">
+            <a:pPr indent="0" marL="0">
               <a:buNone/>
             </a:pPr>
             <a:r>
@@ -14237,7 +14928,7 @@
           <a:bodyPr wrap="square" lIns="0" tIns="0" rIns="0" bIns="0" rtlCol="0" anchor="ctr"/>
           <a:lstStyle/>
           <a:p>
-            <a:pPr marL="0" indent="0">
+            <a:pPr indent="0" marL="0">
               <a:buNone/>
             </a:pPr>
             <a:r>
@@ -14303,7 +14994,7 @@
           <a:bodyPr wrap="square" lIns="0" tIns="0" rIns="0" bIns="0" rtlCol="0" anchor="ctr"/>
           <a:lstStyle/>
           <a:p>
-            <a:pPr marL="0" indent="0" algn="ctr">
+            <a:pPr algn="ctr" indent="0" marL="0">
               <a:buNone/>
             </a:pPr>
             <a:r>
@@ -14369,7 +15060,7 @@
           <a:bodyPr wrap="square" lIns="0" tIns="0" rIns="0" bIns="0" rtlCol="0" anchor="ctr"/>
           <a:lstStyle/>
           <a:p>
-            <a:pPr marL="0" indent="0">
+            <a:pPr indent="0" marL="0">
               <a:lnSpc>
                 <a:spcPct val="112000"/>
               </a:lnSpc>
@@ -14392,7 +15083,7 @@
       </p:sp>
       <p:sp>
         <p:nvSpPr>
-          <p:cNvPr id="43" name="Slide Number Placeholder 0"/>
+          <p:cNvPr id="25" name="Slide Number Placeholder 0"/>
           <p:cNvSpPr>
             <a:spLocks noGrp="1"/>
           </p:cNvSpPr>
@@ -14410,7 +15101,7 @@
           </a:prstGeom>
           <a:extLst>
             <a:ext uri="{C572A759-6A51-4108-AA02-DFA0A04FC94B}">
-              <ma14:wrappingTextBoxFlag xmlns="" xmlns:ma14="http://schemas.microsoft.com/office/mac/drawingml/2011/main" val="0"/>
+              <ma14:wrappingTextBoxFlag xmlns:ma14="http://schemas.microsoft.com/office/mac/drawingml/2011/main" val="0"/>
             </a:ext>
           </a:extLst>
         </p:spPr>
@@ -14431,7 +15122,7 @@
           <a:p>
             <a:pPr algn="l"/>
             <a:fld id="{F7021451-1387-4CA6-816F-3879F97B5CBC}" type="slidenum">
-              <a:rPr lang="en-US" b="0"/>
+              <a:rPr b="0" lang="en-US"/>
               <a:t>19</a:t>
             </a:fld>
             <a:endParaRPr lang="en-US"/>
@@ -14506,7 +15197,7 @@
           <a:bodyPr wrap="square" lIns="0" tIns="0" rIns="0" bIns="0" rtlCol="0" anchor="ctr"/>
           <a:lstStyle/>
           <a:p>
-            <a:pPr marL="0" indent="0">
+            <a:pPr indent="0" marL="0">
               <a:lnSpc>
                 <a:spcPct val="100000"/>
               </a:lnSpc>
@@ -14526,7 +15217,7 @@
             <a:endParaRPr lang="en-US" sz="3400" dirty="0"/>
           </a:p>
           <a:p>
-            <a:pPr marL="0" indent="0">
+            <a:pPr indent="0" marL="0">
               <a:lnSpc>
                 <a:spcPct val="100000"/>
               </a:lnSpc>
@@ -14568,7 +15259,7 @@
           <a:bodyPr wrap="square" lIns="0" tIns="0" rIns="0" bIns="0" rtlCol="0" anchor="t"/>
           <a:lstStyle/>
           <a:p>
-            <a:pPr marL="0" indent="0">
+            <a:pPr indent="0" marL="0">
               <a:lnSpc>
                 <a:spcPct val="115000"/>
               </a:lnSpc>
@@ -14653,7 +15344,7 @@
           <a:bodyPr wrap="square" lIns="0" tIns="0" rIns="0" bIns="0" rtlCol="0" anchor="t"/>
           <a:lstStyle/>
           <a:p>
-            <a:pPr marL="0" indent="0">
+            <a:pPr indent="0" marL="0">
               <a:lnSpc>
                 <a:spcPct val="112000"/>
               </a:lnSpc>
@@ -14715,7 +15406,7 @@
           <a:bodyPr wrap="square" lIns="0" tIns="0" rIns="0" bIns="0" rtlCol="0" anchor="t"/>
           <a:lstStyle/>
           <a:p>
-            <a:pPr marL="0" indent="0">
+            <a:pPr indent="0" marL="0">
               <a:lnSpc>
                 <a:spcPct val="112000"/>
               </a:lnSpc>
@@ -14777,7 +15468,7 @@
           <a:bodyPr wrap="square" lIns="0" tIns="0" rIns="0" bIns="0" rtlCol="0" anchor="t"/>
           <a:lstStyle/>
           <a:p>
-            <a:pPr marL="0" indent="0">
+            <a:pPr indent="0" marL="0">
               <a:lnSpc>
                 <a:spcPct val="112000"/>
               </a:lnSpc>
@@ -14839,7 +15530,7 @@
           <a:bodyPr wrap="square" lIns="0" tIns="0" rIns="0" bIns="0" rtlCol="0" anchor="t"/>
           <a:lstStyle/>
           <a:p>
-            <a:pPr marL="0" indent="0">
+            <a:pPr indent="0" marL="0">
               <a:lnSpc>
                 <a:spcPct val="112000"/>
               </a:lnSpc>
@@ -14901,7 +15592,7 @@
           <a:bodyPr wrap="square" lIns="0" tIns="0" rIns="0" bIns="0" rtlCol="0" anchor="t"/>
           <a:lstStyle/>
           <a:p>
-            <a:pPr marL="0" indent="0">
+            <a:pPr indent="0" marL="0">
               <a:lnSpc>
                 <a:spcPct val="112000"/>
               </a:lnSpc>
@@ -14924,14 +15615,14 @@
       </p:sp>
       <p:pic>
         <p:nvPicPr>
-          <p:cNvPr id="16" name="Image 0" descr="preencoded.png"/>
+          <p:cNvPr id="16" name="Image 0" descr="preencoded.png">    </p:cNvPr>
           <p:cNvPicPr>
             <a:picLocks noChangeAspect="1"/>
           </p:cNvPicPr>
           <p:nvPr/>
         </p:nvPicPr>
         <p:blipFill>
-          <a:blip r:embed="rId3"/>
+          <a:blip r:embed="rId1"/>
           <a:stretch>
             <a:fillRect/>
           </a:stretch>
@@ -15014,7 +15705,7 @@
           <a:bodyPr wrap="square" lIns="0" tIns="0" rIns="0" bIns="0" rtlCol="0" anchor="ctr"/>
           <a:lstStyle/>
           <a:p>
-            <a:pPr marL="0" indent="0" algn="l">
+            <a:pPr algn="l" indent="0" marL="0">
               <a:buNone/>
             </a:pPr>
             <a:r>
@@ -15053,7 +15744,7 @@
           <a:bodyPr wrap="square" lIns="0" tIns="0" rIns="0" bIns="0" rtlCol="0" anchor="ctr"/>
           <a:lstStyle/>
           <a:p>
-            <a:pPr marL="0" indent="0">
+            <a:pPr indent="0" marL="0">
               <a:buNone/>
             </a:pPr>
             <a:r>
@@ -15119,11 +15810,11 @@
           <a:bodyPr wrap="square" lIns="0" tIns="0" rIns="0" bIns="0" rtlCol="0" anchor="ctr"/>
           <a:lstStyle/>
           <a:p>
-            <a:pPr marL="0" indent="0" algn="ctr">
-              <a:buNone/>
-            </a:pPr>
-            <a:r>
-              <a:rPr lang="en-US" sz="900" b="1" kern="0" spc="100" dirty="0">
+            <a:pPr algn="ctr" indent="0" marL="0">
+              <a:buNone/>
+            </a:pPr>
+            <a:r>
+              <a:rPr lang="en-US" sz="900" b="1" spc="100" kern="0" dirty="0">
                 <a:solidFill>
                   <a:srgbClr val="5A05F4"/>
                 </a:solidFill>
@@ -15139,14 +15830,14 @@
       </p:sp>
       <p:pic>
         <p:nvPicPr>
-          <p:cNvPr id="7" name="Image 0" descr="preencoded.png"/>
+          <p:cNvPr id="7" name="Image 0" descr="preencoded.png">    </p:cNvPr>
           <p:cNvPicPr>
             <a:picLocks noChangeAspect="1"/>
           </p:cNvPicPr>
           <p:nvPr/>
         </p:nvPicPr>
         <p:blipFill>
-          <a:blip r:embed="rId3"/>
+          <a:blip r:embed="rId1"/>
           <a:stretch>
             <a:fillRect/>
           </a:stretch>
@@ -15182,11 +15873,11 @@
           <a:bodyPr wrap="square" lIns="0" tIns="0" rIns="0" bIns="0" rtlCol="0" anchor="ctr"/>
           <a:lstStyle/>
           <a:p>
-            <a:pPr marL="0" indent="0">
-              <a:buNone/>
-            </a:pPr>
-            <a:r>
-              <a:rPr lang="en-US" sz="1000" b="1" kern="0" spc="150" dirty="0">
+            <a:pPr indent="0" marL="0">
+              <a:buNone/>
+            </a:pPr>
+            <a:r>
+              <a:rPr lang="en-US" sz="1000" b="1" spc="150" kern="0" dirty="0">
                 <a:solidFill>
                   <a:srgbClr val="6B6B6B"/>
                 </a:solidFill>
@@ -15194,7 +15885,7 @@
                 <a:ea typeface="Courier New" pitchFamily="34" charset="-122"/>
                 <a:cs typeface="Courier New" pitchFamily="34" charset="-120"/>
               </a:rPr>
-              <a:t>СУПЕРСИЛА 1 · ПАДАЄ НА ЗАМОВЛЕННЯ</a:t>
+              <a:t>ВЛАСТИВІСТЬ 1 · КЕРОВАНІ ЗБОЇ</a:t>
             </a:r>
             <a:endParaRPr lang="en-US" sz="1000" dirty="0"/>
           </a:p>
@@ -15243,7 +15934,7 @@
           <a:bodyPr wrap="square" lIns="0" tIns="0" rIns="0" bIns="0" rtlCol="0" anchor="ctr"/>
           <a:lstStyle/>
           <a:p>
-            <a:pPr marL="0" indent="0" algn="ctr">
+            <a:pPr algn="ctr" indent="0" marL="0">
               <a:buNone/>
             </a:pPr>
             <a:r>
@@ -15282,7 +15973,7 @@
           <a:bodyPr wrap="square" lIns="0" tIns="0" rIns="0" bIns="0" rtlCol="0" anchor="ctr"/>
           <a:lstStyle/>
           <a:p>
-            <a:pPr marL="0" indent="0">
+            <a:pPr indent="0" marL="0">
               <a:buNone/>
             </a:pPr>
             <a:r>
@@ -15294,7 +15985,7 @@
                 <a:ea typeface="Montserrat" pitchFamily="34" charset="-122"/>
                 <a:cs typeface="Montserrat" pitchFamily="34" charset="-120"/>
               </a:rPr>
-              <a:t>провайдер лежить</a:t>
+              <a:t>провайдер недоступний</a:t>
             </a:r>
             <a:endParaRPr lang="en-US" sz="1200" dirty="0"/>
           </a:p>
@@ -15321,7 +16012,7 @@
           <a:bodyPr wrap="square" lIns="0" tIns="0" rIns="0" bIns="0" rtlCol="0" anchor="ctr"/>
           <a:lstStyle/>
           <a:p>
-            <a:pPr marL="0" indent="0">
+            <a:pPr indent="0" marL="0">
               <a:buNone/>
             </a:pPr>
             <a:r>
@@ -15382,7 +16073,7 @@
           <a:bodyPr wrap="square" lIns="0" tIns="0" rIns="0" bIns="0" rtlCol="0" anchor="ctr"/>
           <a:lstStyle/>
           <a:p>
-            <a:pPr marL="0" indent="0" algn="ctr">
+            <a:pPr algn="ctr" indent="0" marL="0">
               <a:buNone/>
             </a:pPr>
             <a:r>
@@ -15421,7 +16112,7 @@
           <a:bodyPr wrap="square" lIns="0" tIns="0" rIns="0" bIns="0" rtlCol="0" anchor="ctr"/>
           <a:lstStyle/>
           <a:p>
-            <a:pPr marL="0" indent="0">
+            <a:pPr indent="0" marL="0">
               <a:buNone/>
             </a:pPr>
             <a:r>
@@ -15460,7 +16151,7 @@
           <a:bodyPr wrap="square" lIns="0" tIns="0" rIns="0" bIns="0" rtlCol="0" anchor="ctr"/>
           <a:lstStyle/>
           <a:p>
-            <a:pPr marL="0" indent="0">
+            <a:pPr indent="0" marL="0">
               <a:buNone/>
             </a:pPr>
             <a:r>
@@ -15521,7 +16212,7 @@
           <a:bodyPr wrap="square" lIns="0" tIns="0" rIns="0" bIns="0" rtlCol="0" anchor="ctr"/>
           <a:lstStyle/>
           <a:p>
-            <a:pPr marL="0" indent="0" algn="ctr">
+            <a:pPr algn="ctr" indent="0" marL="0">
               <a:buNone/>
             </a:pPr>
             <a:r>
@@ -15560,7 +16251,7 @@
           <a:bodyPr wrap="square" lIns="0" tIns="0" rIns="0" bIns="0" rtlCol="0" anchor="ctr"/>
           <a:lstStyle/>
           <a:p>
-            <a:pPr marL="0" indent="0">
+            <a:pPr indent="0" marL="0">
               <a:buNone/>
             </a:pPr>
             <a:r>
@@ -15599,7 +16290,7 @@
           <a:bodyPr wrap="square" lIns="0" tIns="0" rIns="0" bIns="0" rtlCol="0" anchor="ctr"/>
           <a:lstStyle/>
           <a:p>
-            <a:pPr marL="0" indent="0">
+            <a:pPr indent="0" marL="0">
               <a:buNone/>
             </a:pPr>
             <a:r>
@@ -15660,7 +16351,7 @@
           <a:bodyPr wrap="square" lIns="0" tIns="0" rIns="0" bIns="0" rtlCol="0" anchor="ctr"/>
           <a:lstStyle/>
           <a:p>
-            <a:pPr marL="0" indent="0" algn="ctr">
+            <a:pPr algn="ctr" indent="0" marL="0">
               <a:buNone/>
             </a:pPr>
             <a:r>
@@ -15699,7 +16390,7 @@
           <a:bodyPr wrap="square" lIns="0" tIns="0" rIns="0" bIns="0" rtlCol="0" anchor="ctr"/>
           <a:lstStyle/>
           <a:p>
-            <a:pPr marL="0" indent="0">
+            <a:pPr indent="0" marL="0">
               <a:buNone/>
             </a:pPr>
             <a:r>
@@ -15738,7 +16429,7 @@
           <a:bodyPr wrap="square" lIns="0" tIns="0" rIns="0" bIns="0" rtlCol="0" anchor="ctr"/>
           <a:lstStyle/>
           <a:p>
-            <a:pPr marL="0" indent="0">
+            <a:pPr indent="0" marL="0">
               <a:buNone/>
             </a:pPr>
             <a:r>
@@ -15777,7 +16468,7 @@
           <a:bodyPr wrap="square" lIns="0" tIns="0" rIns="0" bIns="0" rtlCol="0" anchor="t"/>
           <a:lstStyle/>
           <a:p>
-            <a:pPr marL="0" indent="0">
+            <a:pPr indent="0" marL="0">
               <a:buNone/>
             </a:pPr>
             <a:r>
@@ -15816,11 +16507,11 @@
           <a:bodyPr wrap="square" lIns="0" tIns="0" rIns="0" bIns="0" rtlCol="0" anchor="ctr"/>
           <a:lstStyle/>
           <a:p>
-            <a:pPr marL="0" indent="0">
-              <a:buNone/>
-            </a:pPr>
-            <a:r>
-              <a:rPr lang="en-US" sz="1000" b="1" kern="0" spc="150" dirty="0">
+            <a:pPr indent="0" marL="0">
+              <a:buNone/>
+            </a:pPr>
+            <a:r>
+              <a:rPr lang="en-US" sz="1000" b="1" spc="150" kern="0" dirty="0">
                 <a:solidFill>
                   <a:srgbClr val="6B6B6B"/>
                 </a:solidFill>
@@ -15828,7 +16519,7 @@
                 <a:ea typeface="Courier New" pitchFamily="34" charset="-122"/>
                 <a:cs typeface="Courier New" pitchFamily="34" charset="-120"/>
               </a:rPr>
-              <a:t>СУПЕРСИЛА 2 · РЕАГУЄ НА ПРОМПТ</a:t>
+              <a:t>ВЛАСТИВІСТЬ 2 · ЧУТЛИВІСТЬ ДО ПРОМПТА</a:t>
             </a:r>
             <a:endParaRPr lang="en-US" sz="1000" dirty="0"/>
           </a:p>
@@ -15877,7 +16568,7 @@
           <a:bodyPr wrap="square" lIns="0" tIns="0" rIns="0" bIns="0" rtlCol="0" anchor="ctr"/>
           <a:lstStyle/>
           <a:p>
-            <a:pPr marL="0" indent="0" algn="ctr">
+            <a:pPr algn="ctr" indent="0" marL="0">
               <a:buNone/>
             </a:pPr>
             <a:r>
@@ -15981,7 +16672,7 @@
           <a:bodyPr wrap="square" lIns="0" tIns="0" rIns="0" bIns="0" rtlCol="0" anchor="ctr"/>
           <a:lstStyle/>
           <a:p>
-            <a:pPr marL="0" indent="0" algn="ctr">
+            <a:pPr algn="ctr" indent="0" marL="0">
               <a:buNone/>
             </a:pPr>
             <a:r>
@@ -16042,7 +16733,7 @@
           <a:bodyPr wrap="square" lIns="0" tIns="0" rIns="0" bIns="0" rtlCol="0" anchor="ctr"/>
           <a:lstStyle/>
           <a:p>
-            <a:pPr marL="0" indent="0" algn="ctr">
+            <a:pPr algn="ctr" indent="0" marL="0">
               <a:buNone/>
             </a:pPr>
             <a:r>
@@ -16146,7 +16837,7 @@
           <a:bodyPr wrap="square" lIns="0" tIns="0" rIns="0" bIns="0" rtlCol="0" anchor="ctr"/>
           <a:lstStyle/>
           <a:p>
-            <a:pPr marL="0" indent="0" algn="ctr">
+            <a:pPr algn="ctr" indent="0" marL="0">
               <a:buNone/>
             </a:pPr>
             <a:r>
@@ -16207,7 +16898,7 @@
           <a:bodyPr wrap="square" lIns="0" tIns="0" rIns="0" bIns="0" rtlCol="0" anchor="ctr"/>
           <a:lstStyle/>
           <a:p>
-            <a:pPr marL="0" indent="0">
+            <a:pPr indent="0" marL="0">
               <a:lnSpc>
                 <a:spcPct val="112000"/>
               </a:lnSpc>
@@ -16276,11 +16967,11 @@
           <a:bodyPr wrap="square" lIns="0" tIns="0" rIns="0" bIns="0" rtlCol="0" anchor="ctr"/>
           <a:lstStyle/>
           <a:p>
-            <a:pPr marL="0" indent="0">
-              <a:buNone/>
-            </a:pPr>
-            <a:r>
-              <a:rPr lang="en-US" sz="950" b="1" kern="0" spc="150" dirty="0">
+            <a:pPr indent="0" marL="0">
+              <a:buNone/>
+            </a:pPr>
+            <a:r>
+              <a:rPr lang="en-US" sz="950" b="1" spc="150" kern="0" dirty="0">
                 <a:solidFill>
                   <a:srgbClr val="434343"/>
                 </a:solidFill>
@@ -16315,7 +17006,7 @@
           <a:bodyPr wrap="square" lIns="0" tIns="0" rIns="0" bIns="0" rtlCol="0" anchor="ctr"/>
           <a:lstStyle/>
           <a:p>
-            <a:pPr marL="0" indent="0">
+            <a:pPr indent="0" marL="0">
               <a:lnSpc>
                 <a:spcPct val="112000"/>
               </a:lnSpc>
@@ -16338,7 +17029,7 @@
       </p:sp>
       <p:sp>
         <p:nvSpPr>
-          <p:cNvPr id="44" name="Slide Number Placeholder 0"/>
+          <p:cNvPr id="25" name="Slide Number Placeholder 0"/>
           <p:cNvSpPr>
             <a:spLocks noGrp="1"/>
           </p:cNvSpPr>
@@ -16356,7 +17047,7 @@
           </a:prstGeom>
           <a:extLst>
             <a:ext uri="{C572A759-6A51-4108-AA02-DFA0A04FC94B}">
-              <ma14:wrappingTextBoxFlag xmlns="" xmlns:ma14="http://schemas.microsoft.com/office/mac/drawingml/2011/main" val="0"/>
+              <ma14:wrappingTextBoxFlag xmlns:ma14="http://schemas.microsoft.com/office/mac/drawingml/2011/main" val="0"/>
             </a:ext>
           </a:extLst>
         </p:spPr>
@@ -16377,7 +17068,7 @@
           <a:p>
             <a:pPr algn="l"/>
             <a:fld id="{F7021451-1387-4CA6-816F-3879F97B5CBC}" type="slidenum">
-              <a:rPr lang="en-US" b="0"/>
+              <a:rPr b="0" lang="en-US"/>
               <a:t>20</a:t>
             </a:fld>
             <a:endParaRPr lang="en-US"/>
@@ -16452,7 +17143,7 @@
           <a:bodyPr wrap="square" lIns="0" tIns="0" rIns="0" bIns="0" rtlCol="0" anchor="ctr"/>
           <a:lstStyle/>
           <a:p>
-            <a:pPr marL="0" indent="0" algn="l">
+            <a:pPr algn="l" indent="0" marL="0">
               <a:buNone/>
             </a:pPr>
             <a:r>
@@ -16491,7 +17182,7 @@
           <a:bodyPr wrap="square" lIns="0" tIns="0" rIns="0" bIns="0" rtlCol="0" anchor="ctr"/>
           <a:lstStyle/>
           <a:p>
-            <a:pPr marL="0" indent="0">
+            <a:pPr indent="0" marL="0">
               <a:buNone/>
             </a:pPr>
             <a:r>
@@ -16557,11 +17248,11 @@
           <a:bodyPr wrap="square" lIns="0" tIns="0" rIns="0" bIns="0" rtlCol="0" anchor="ctr"/>
           <a:lstStyle/>
           <a:p>
-            <a:pPr marL="0" indent="0" algn="ctr">
-              <a:buNone/>
-            </a:pPr>
-            <a:r>
-              <a:rPr lang="en-US" sz="900" b="1" kern="0" spc="100" dirty="0">
+            <a:pPr algn="ctr" indent="0" marL="0">
+              <a:buNone/>
+            </a:pPr>
+            <a:r>
+              <a:rPr lang="en-US" sz="900" b="1" spc="100" kern="0" dirty="0">
                 <a:solidFill>
                   <a:srgbClr val="5A05F4"/>
                 </a:solidFill>
@@ -16623,11 +17314,11 @@
           <a:bodyPr wrap="square" lIns="0" tIns="0" rIns="0" bIns="0" rtlCol="0" anchor="ctr"/>
           <a:lstStyle/>
           <a:p>
-            <a:pPr marL="0" indent="0" algn="ctr">
-              <a:buNone/>
-            </a:pPr>
-            <a:r>
-              <a:rPr lang="en-US" sz="900" b="1" kern="0" spc="100" dirty="0">
+            <a:pPr algn="ctr" indent="0" marL="0">
+              <a:buNone/>
+            </a:pPr>
+            <a:r>
+              <a:rPr lang="en-US" sz="900" b="1" spc="100" kern="0" dirty="0">
                 <a:solidFill>
                   <a:srgbClr val="434343"/>
                 </a:solidFill>
@@ -16643,14 +17334,14 @@
       </p:sp>
       <p:pic>
         <p:nvPicPr>
-          <p:cNvPr id="9" name="Image 0" descr="preencoded.png"/>
+          <p:cNvPr id="9" name="Image 0" descr="preencoded.png">    </p:cNvPr>
           <p:cNvPicPr>
             <a:picLocks noChangeAspect="1"/>
           </p:cNvPicPr>
           <p:nvPr/>
         </p:nvPicPr>
         <p:blipFill>
-          <a:blip r:embed="rId3"/>
+          <a:blip r:embed="rId1"/>
           <a:stretch>
             <a:fillRect/>
           </a:stretch>
@@ -16713,7 +17404,7 @@
           <a:bodyPr wrap="square" lIns="0" tIns="0" rIns="0" bIns="0" rtlCol="0" anchor="t"/>
           <a:lstStyle/>
           <a:p>
-            <a:pPr marL="0" indent="0">
+            <a:pPr indent="0" marL="0">
               <a:lnSpc>
                 <a:spcPct val="130000"/>
               </a:lnSpc>
@@ -16730,6 +17421,12 @@
               </a:rPr>
               <a:t>cp gateway/.env.example gateway/.env</a:t>
             </a:r>
+            <a:pPr indent="0" marL="0">
+              <a:lnSpc>
+                <a:spcPct val="130000"/>
+              </a:lnSpc>
+              <a:buNone/>
+            </a:pPr>
             <a:r>
               <a:rPr lang="en-US" sz="1250" dirty="0">
                 <a:solidFill>
@@ -16744,7 +17441,7 @@
             <a:endParaRPr lang="en-US" sz="1250" dirty="0"/>
           </a:p>
           <a:p>
-            <a:pPr marL="0" indent="0">
+            <a:pPr indent="0" marL="0">
               <a:lnSpc>
                 <a:spcPct val="130000"/>
               </a:lnSpc>
@@ -16761,6 +17458,12 @@
               </a:rPr>
               <a:t>MODEL=назва-моделі docker compose up</a:t>
             </a:r>
+            <a:pPr indent="0" marL="0">
+              <a:lnSpc>
+                <a:spcPct val="130000"/>
+              </a:lnSpc>
+              <a:buNone/>
+            </a:pPr>
             <a:r>
               <a:rPr lang="en-US" sz="1250" dirty="0">
                 <a:solidFill>
@@ -16775,7 +17478,7 @@
             <a:endParaRPr lang="en-US" sz="1250" dirty="0"/>
           </a:p>
           <a:p>
-            <a:pPr marL="0" indent="0">
+            <a:pPr indent="0" marL="0">
               <a:lnSpc>
                 <a:spcPct val="130000"/>
               </a:lnSpc>
@@ -16792,6 +17495,12 @@
               </a:rPr>
               <a:t>docker compose --profile advanced up</a:t>
             </a:r>
+            <a:pPr indent="0" marL="0">
+              <a:lnSpc>
+                <a:spcPct val="130000"/>
+              </a:lnSpc>
+              <a:buNone/>
+            </a:pPr>
             <a:r>
               <a:rPr lang="en-US" sz="1250" dirty="0">
                 <a:solidFill>
@@ -16850,7 +17559,7 @@
           <a:bodyPr wrap="square" lIns="0" tIns="0" rIns="0" bIns="0" rtlCol="0" anchor="ctr"/>
           <a:lstStyle/>
           <a:p>
-            <a:pPr marL="0" indent="0">
+            <a:pPr indent="0" marL="0">
               <a:buNone/>
             </a:pPr>
             <a:r>
@@ -16889,7 +17598,7 @@
           <a:bodyPr wrap="square" lIns="0" tIns="0" rIns="0" bIns="0" rtlCol="0" anchor="t"/>
           <a:lstStyle/>
           <a:p>
-            <a:pPr marL="0" indent="0">
+            <a:pPr indent="0" marL="0">
               <a:lnSpc>
                 <a:spcPct val="108000"/>
               </a:lnSpc>
@@ -16953,7 +17662,7 @@
           <a:bodyPr wrap="square" lIns="0" tIns="0" rIns="0" bIns="0" rtlCol="0" anchor="ctr"/>
           <a:lstStyle/>
           <a:p>
-            <a:pPr marL="0" indent="0">
+            <a:pPr indent="0" marL="0">
               <a:buNone/>
             </a:pPr>
             <a:r>
@@ -16992,7 +17701,7 @@
           <a:bodyPr wrap="square" lIns="0" tIns="0" rIns="0" bIns="0" rtlCol="0" anchor="t"/>
           <a:lstStyle/>
           <a:p>
-            <a:pPr marL="0" indent="0">
+            <a:pPr indent="0" marL="0">
               <a:lnSpc>
                 <a:spcPct val="108000"/>
               </a:lnSpc>
@@ -17042,30 +17751,89 @@
       </p:sp>
       <p:sp>
         <p:nvSpPr>
-          <p:cNvPr id="19" name="Text 16"/>
-          <p:cNvSpPr/>
-          <p:nvPr/>
-        </p:nvSpPr>
-        <p:spPr>
-          <a:xfrm>
-            <a:off x="8284464" y="3557016"/>
-            <a:ext cx="3127248" cy="219456"/>
-          </a:xfrm>
-          <a:prstGeom prst="rect">
-            <a:avLst/>
-          </a:prstGeom>
-          <a:noFill/>
-          <a:ln/>
-        </p:spPr>
-        <p:txBody>
-          <a:bodyPr wrap="square" lIns="0" tIns="0" rIns="0" bIns="0" rtlCol="0" anchor="ctr"/>
-          <a:lstStyle/>
-          <a:p>
-            <a:pPr marL="0" indent="0">
-              <a:buNone/>
-            </a:pPr>
-            <a:r>
-              <a:rPr lang="en-US" sz="950" b="1" kern="0" spc="150" dirty="0">
+          <p:cNvPr id="19" name="Shape 16"/>
+          <p:cNvSpPr/>
+          <p:nvPr/>
+        </p:nvSpPr>
+        <p:spPr>
+          <a:xfrm>
+            <a:off x="8247888" y="4142232"/>
+            <a:ext cx="310896" cy="310896"/>
+          </a:xfrm>
+          <a:prstGeom prst="ellipse">
+            <a:avLst/>
+          </a:prstGeom>
+          <a:solidFill>
+            <a:srgbClr val="1A4FBF"/>
+          </a:solidFill>
+          <a:ln/>
+        </p:spPr>
+      </p:sp>
+      <p:sp>
+        <p:nvSpPr>
+          <p:cNvPr id="20" name="Text 17"/>
+          <p:cNvSpPr/>
+          <p:nvPr/>
+        </p:nvSpPr>
+        <p:spPr>
+          <a:xfrm>
+            <a:off x="8247888" y="4142232"/>
+            <a:ext cx="310896" cy="310896"/>
+          </a:xfrm>
+          <a:prstGeom prst="rect">
+            <a:avLst/>
+          </a:prstGeom>
+          <a:noFill/>
+          <a:ln/>
+        </p:spPr>
+        <p:txBody>
+          <a:bodyPr wrap="square" lIns="0" tIns="0" rIns="0" bIns="0" rtlCol="0" anchor="ctr"/>
+          <a:lstStyle/>
+          <a:p>
+            <a:pPr algn="ctr" indent="0" marL="0">
+              <a:buNone/>
+            </a:pPr>
+            <a:r>
+              <a:rPr lang="en-US" sz="1200" b="1" dirty="0">
+                <a:solidFill>
+                  <a:srgbClr val="FFFFFF"/>
+                </a:solidFill>
+                <a:latin typeface="Arial" pitchFamily="34" charset="0"/>
+                <a:ea typeface="Arial" pitchFamily="34" charset="-122"/>
+                <a:cs typeface="Arial" pitchFamily="34" charset="-120"/>
+              </a:rPr>
+              <a:t>★</a:t>
+            </a:r>
+            <a:endParaRPr lang="en-US" sz="1200" dirty="0"/>
+          </a:p>
+        </p:txBody>
+      </p:sp>
+      <p:sp>
+        <p:nvSpPr>
+          <p:cNvPr id="21" name="Text 18"/>
+          <p:cNvSpPr/>
+          <p:nvPr/>
+        </p:nvSpPr>
+        <p:spPr>
+          <a:xfrm>
+            <a:off x="8741664" y="3557016"/>
+            <a:ext cx="2670048" cy="219456"/>
+          </a:xfrm>
+          <a:prstGeom prst="rect">
+            <a:avLst/>
+          </a:prstGeom>
+          <a:noFill/>
+          <a:ln/>
+        </p:spPr>
+        <p:txBody>
+          <a:bodyPr wrap="square" lIns="0" tIns="0" rIns="0" bIns="0" rtlCol="0" anchor="ctr"/>
+          <a:lstStyle/>
+          <a:p>
+            <a:pPr indent="0" marL="0">
+              <a:buNone/>
+            </a:pPr>
+            <a:r>
+              <a:rPr lang="en-US" sz="950" b="1" spc="150" kern="0" dirty="0">
                 <a:solidFill>
                   <a:srgbClr val="1A4FBF"/>
                 </a:solidFill>
@@ -17073,7 +17841,7 @@
                 <a:ea typeface="Courier New" pitchFamily="34" charset="-122"/>
                 <a:cs typeface="Courier New" pitchFamily="34" charset="-120"/>
               </a:rPr>
-              <a:t>ЛАЙФХАК</a:t>
+              <a:t>ПОРАДА</a:t>
             </a:r>
             <a:endParaRPr lang="en-US" sz="950" dirty="0"/>
           </a:p>
@@ -17081,26 +17849,26 @@
       </p:sp>
       <p:sp>
         <p:nvSpPr>
-          <p:cNvPr id="20" name="Text 17"/>
-          <p:cNvSpPr/>
-          <p:nvPr/>
-        </p:nvSpPr>
-        <p:spPr>
-          <a:xfrm>
-            <a:off x="8284464" y="3813048"/>
-            <a:ext cx="3127248" cy="1225296"/>
-          </a:xfrm>
-          <a:prstGeom prst="rect">
-            <a:avLst/>
-          </a:prstGeom>
-          <a:noFill/>
-          <a:ln/>
-        </p:spPr>
-        <p:txBody>
-          <a:bodyPr wrap="square" lIns="0" tIns="0" rIns="0" bIns="0" rtlCol="0" anchor="ctr"/>
-          <a:lstStyle/>
-          <a:p>
-            <a:pPr marL="0" indent="0">
+          <p:cNvPr id="22" name="Text 19"/>
+          <p:cNvSpPr/>
+          <p:nvPr/>
+        </p:nvSpPr>
+        <p:spPr>
+          <a:xfrm>
+            <a:off x="8741664" y="3813048"/>
+            <a:ext cx="2670048" cy="1225296"/>
+          </a:xfrm>
+          <a:prstGeom prst="rect">
+            <a:avLst/>
+          </a:prstGeom>
+          <a:noFill/>
+          <a:ln/>
+        </p:spPr>
+        <p:txBody>
+          <a:bodyPr wrap="square" lIns="0" tIns="0" rIns="0" bIns="0" rtlCol="0" anchor="ctr"/>
+          <a:lstStyle/>
+          <a:p>
+            <a:pPr indent="0" marL="0">
               <a:lnSpc>
                 <a:spcPct val="112000"/>
               </a:lnSpc>
@@ -17123,7 +17891,7 @@
       </p:sp>
       <p:sp>
         <p:nvSpPr>
-          <p:cNvPr id="21" name="Text 18"/>
+          <p:cNvPr id="23" name="Text 20"/>
           <p:cNvSpPr/>
           <p:nvPr/>
         </p:nvSpPr>
@@ -17142,7 +17910,7 @@
           <a:bodyPr wrap="square" lIns="0" tIns="0" rIns="0" bIns="0" rtlCol="0" anchor="ctr"/>
           <a:lstStyle/>
           <a:p>
-            <a:pPr marL="0" indent="0">
+            <a:pPr indent="0" marL="0">
               <a:buNone/>
             </a:pPr>
             <a:r>
@@ -17180,7 +17948,7 @@
           </a:prstGeom>
           <a:extLst>
             <a:ext uri="{C572A759-6A51-4108-AA02-DFA0A04FC94B}">
-              <ma14:wrappingTextBoxFlag xmlns="" xmlns:ma14="http://schemas.microsoft.com/office/mac/drawingml/2011/main" val="0"/>
+              <ma14:wrappingTextBoxFlag xmlns:ma14="http://schemas.microsoft.com/office/mac/drawingml/2011/main" val="0"/>
             </a:ext>
           </a:extLst>
         </p:spPr>
@@ -17201,7 +17969,7 @@
           <a:p>
             <a:pPr algn="l"/>
             <a:fld id="{F7021451-1387-4CA6-816F-3879F97B5CBC}" type="slidenum">
-              <a:rPr lang="en-US" b="0"/>
+              <a:rPr b="0" lang="en-US"/>
               <a:t>21</a:t>
             </a:fld>
             <a:endParaRPr lang="en-US"/>
@@ -17254,11 +18022,11 @@
           <a:bodyPr wrap="square" lIns="0" tIns="0" rIns="0" bIns="0" rtlCol="0" anchor="ctr"/>
           <a:lstStyle/>
           <a:p>
-            <a:pPr marL="0" indent="0">
-              <a:buNone/>
-            </a:pPr>
-            <a:r>
-              <a:rPr lang="en-US" sz="1200" b="1" kern="0" spc="400" dirty="0">
+            <a:pPr indent="0" marL="0">
+              <a:buNone/>
+            </a:pPr>
+            <a:r>
+              <a:rPr lang="en-US" sz="1200" b="1" spc="400" kern="0" dirty="0">
                 <a:solidFill>
                   <a:srgbClr val="FFFFFF"/>
                 </a:solidFill>
@@ -17293,7 +18061,7 @@
           <a:bodyPr wrap="square" lIns="0" tIns="0" rIns="0" bIns="0" rtlCol="0" anchor="ctr"/>
           <a:lstStyle/>
           <a:p>
-            <a:pPr marL="0" indent="0">
+            <a:pPr indent="0" marL="0">
               <a:buNone/>
             </a:pPr>
             <a:r>
@@ -17332,7 +18100,7 @@
           <a:bodyPr wrap="square" lIns="0" tIns="0" rIns="0" bIns="0" rtlCol="0" anchor="t"/>
           <a:lstStyle/>
           <a:p>
-            <a:pPr marL="0" indent="0">
+            <a:pPr indent="0" marL="0">
               <a:buNone/>
             </a:pPr>
             <a:r>
@@ -17393,7 +18161,7 @@
           <a:bodyPr wrap="square" lIns="0" tIns="0" rIns="0" bIns="0" rtlCol="0" anchor="ctr"/>
           <a:lstStyle/>
           <a:p>
-            <a:pPr marL="0" indent="0" algn="ctr">
+            <a:pPr algn="ctr" indent="0" marL="0">
               <a:buNone/>
             </a:pPr>
             <a:r>
@@ -17479,7 +18247,7 @@
           <a:bodyPr wrap="square" lIns="0" tIns="0" rIns="0" bIns="0" rtlCol="0" anchor="ctr"/>
           <a:lstStyle/>
           <a:p>
-            <a:pPr marL="0" indent="0">
+            <a:pPr indent="0" marL="0">
               <a:buNone/>
             </a:pPr>
             <a:r>
@@ -17540,11 +18308,11 @@
           <a:bodyPr wrap="square" lIns="0" tIns="0" rIns="0" bIns="0" rtlCol="0" anchor="ctr"/>
           <a:lstStyle/>
           <a:p>
-            <a:pPr marL="0" indent="0" algn="ctr">
-              <a:buNone/>
-            </a:pPr>
-            <a:r>
-              <a:rPr lang="en-US" sz="900" b="1" kern="0" spc="100" dirty="0">
+            <a:pPr algn="ctr" indent="0" marL="0">
+              <a:buNone/>
+            </a:pPr>
+            <a:r>
+              <a:rPr lang="en-US" sz="900" b="1" spc="100" kern="0" dirty="0">
                 <a:solidFill>
                   <a:srgbClr val="FFFFFF"/>
                 </a:solidFill>
@@ -17560,14 +18328,14 @@
       </p:sp>
       <p:pic>
         <p:nvPicPr>
-          <p:cNvPr id="6" name="Image 0" descr="preencoded.png"/>
+          <p:cNvPr id="6" name="Image 0" descr="preencoded.png">    </p:cNvPr>
           <p:cNvPicPr>
             <a:picLocks noChangeAspect="1"/>
           </p:cNvPicPr>
           <p:nvPr/>
         </p:nvPicPr>
         <p:blipFill>
-          <a:blip r:embed="rId3"/>
+          <a:blip r:embed="rId1"/>
           <a:stretch>
             <a:fillRect/>
           </a:stretch>
@@ -17645,7 +18413,7 @@
           <a:bodyPr wrap="square" lIns="0" tIns="0" rIns="0" bIns="0" rtlCol="0" anchor="ctr"/>
           <a:lstStyle/>
           <a:p>
-            <a:pPr marL="0" indent="0" algn="ctr">
+            <a:pPr algn="ctr" indent="0" marL="0">
               <a:buNone/>
             </a:pPr>
             <a:r>
@@ -17684,7 +18452,7 @@
           <a:bodyPr wrap="square" lIns="0" tIns="0" rIns="0" bIns="0" rtlCol="0" anchor="ctr"/>
           <a:lstStyle/>
           <a:p>
-            <a:pPr marL="0" indent="0">
+            <a:pPr indent="0" marL="0">
               <a:buNone/>
             </a:pPr>
             <a:r>
@@ -17723,7 +18491,7 @@
           <a:bodyPr wrap="square" lIns="0" tIns="0" rIns="0" bIns="0" rtlCol="0" anchor="t"/>
           <a:lstStyle/>
           <a:p>
-            <a:pPr marL="0" indent="0">
+            <a:pPr indent="0" marL="0">
               <a:lnSpc>
                 <a:spcPct val="108000"/>
               </a:lnSpc>
@@ -17807,7 +18575,7 @@
           <a:bodyPr wrap="square" lIns="0" tIns="0" rIns="0" bIns="0" rtlCol="0" anchor="ctr"/>
           <a:lstStyle/>
           <a:p>
-            <a:pPr marL="0" indent="0" algn="ctr">
+            <a:pPr algn="ctr" indent="0" marL="0">
               <a:buNone/>
             </a:pPr>
             <a:r>
@@ -17846,7 +18614,7 @@
           <a:bodyPr wrap="square" lIns="0" tIns="0" rIns="0" bIns="0" rtlCol="0" anchor="ctr"/>
           <a:lstStyle/>
           <a:p>
-            <a:pPr marL="0" indent="0">
+            <a:pPr indent="0" marL="0">
               <a:buNone/>
             </a:pPr>
             <a:r>
@@ -17885,7 +18653,7 @@
           <a:bodyPr wrap="square" lIns="0" tIns="0" rIns="0" bIns="0" rtlCol="0" anchor="t"/>
           <a:lstStyle/>
           <a:p>
-            <a:pPr marL="0" indent="0">
+            <a:pPr indent="0" marL="0">
               <a:lnSpc>
                 <a:spcPct val="108000"/>
               </a:lnSpc>
@@ -17969,7 +18737,7 @@
           <a:bodyPr wrap="square" lIns="0" tIns="0" rIns="0" bIns="0" rtlCol="0" anchor="ctr"/>
           <a:lstStyle/>
           <a:p>
-            <a:pPr marL="0" indent="0" algn="ctr">
+            <a:pPr algn="ctr" indent="0" marL="0">
               <a:buNone/>
             </a:pPr>
             <a:r>
@@ -18008,7 +18776,7 @@
           <a:bodyPr wrap="square" lIns="0" tIns="0" rIns="0" bIns="0" rtlCol="0" anchor="ctr"/>
           <a:lstStyle/>
           <a:p>
-            <a:pPr marL="0" indent="0">
+            <a:pPr indent="0" marL="0">
               <a:buNone/>
             </a:pPr>
             <a:r>
@@ -18047,7 +18815,7 @@
           <a:bodyPr wrap="square" lIns="0" tIns="0" rIns="0" bIns="0" rtlCol="0" anchor="t"/>
           <a:lstStyle/>
           <a:p>
-            <a:pPr marL="0" indent="0">
+            <a:pPr indent="0" marL="0">
               <a:lnSpc>
                 <a:spcPct val="108000"/>
               </a:lnSpc>
@@ -18131,7 +18899,7 @@
           <a:bodyPr wrap="square" lIns="0" tIns="0" rIns="0" bIns="0" rtlCol="0" anchor="ctr"/>
           <a:lstStyle/>
           <a:p>
-            <a:pPr marL="0" indent="0" algn="ctr">
+            <a:pPr algn="ctr" indent="0" marL="0">
               <a:buNone/>
             </a:pPr>
             <a:r>
@@ -18170,7 +18938,7 @@
           <a:bodyPr wrap="square" lIns="0" tIns="0" rIns="0" bIns="0" rtlCol="0" anchor="ctr"/>
           <a:lstStyle/>
           <a:p>
-            <a:pPr marL="0" indent="0">
+            <a:pPr indent="0" marL="0">
               <a:buNone/>
             </a:pPr>
             <a:r>
@@ -18209,7 +18977,7 @@
           <a:bodyPr wrap="square" lIns="0" tIns="0" rIns="0" bIns="0" rtlCol="0" anchor="t"/>
           <a:lstStyle/>
           <a:p>
-            <a:pPr marL="0" indent="0">
+            <a:pPr indent="0" marL="0">
               <a:lnSpc>
                 <a:spcPct val="108000"/>
               </a:lnSpc>
@@ -18293,7 +19061,7 @@
           <a:bodyPr wrap="square" lIns="0" tIns="0" rIns="0" bIns="0" rtlCol="0" anchor="ctr"/>
           <a:lstStyle/>
           <a:p>
-            <a:pPr marL="0" indent="0" algn="ctr">
+            <a:pPr algn="ctr" indent="0" marL="0">
               <a:buNone/>
             </a:pPr>
             <a:r>
@@ -18332,7 +19100,7 @@
           <a:bodyPr wrap="square" lIns="0" tIns="0" rIns="0" bIns="0" rtlCol="0" anchor="ctr"/>
           <a:lstStyle/>
           <a:p>
-            <a:pPr marL="0" indent="0">
+            <a:pPr indent="0" marL="0">
               <a:buNone/>
             </a:pPr>
             <a:r>
@@ -18371,7 +19139,7 @@
           <a:bodyPr wrap="square" lIns="0" tIns="0" rIns="0" bIns="0" rtlCol="0" anchor="t"/>
           <a:lstStyle/>
           <a:p>
-            <a:pPr marL="0" indent="0">
+            <a:pPr indent="0" marL="0">
               <a:lnSpc>
                 <a:spcPct val="108000"/>
               </a:lnSpc>
@@ -18455,7 +19223,7 @@
           <a:bodyPr wrap="square" lIns="0" tIns="0" rIns="0" bIns="0" rtlCol="0" anchor="ctr"/>
           <a:lstStyle/>
           <a:p>
-            <a:pPr marL="0" indent="0" algn="ctr">
+            <a:pPr algn="ctr" indent="0" marL="0">
               <a:buNone/>
             </a:pPr>
             <a:r>
@@ -18494,7 +19262,7 @@
           <a:bodyPr wrap="square" lIns="0" tIns="0" rIns="0" bIns="0" rtlCol="0" anchor="ctr"/>
           <a:lstStyle/>
           <a:p>
-            <a:pPr marL="0" indent="0">
+            <a:pPr indent="0" marL="0">
               <a:buNone/>
             </a:pPr>
             <a:r>
@@ -18533,7 +19301,7 @@
           <a:bodyPr wrap="square" lIns="0" tIns="0" rIns="0" bIns="0" rtlCol="0" anchor="t"/>
           <a:lstStyle/>
           <a:p>
-            <a:pPr marL="0" indent="0">
+            <a:pPr indent="0" marL="0">
               <a:lnSpc>
                 <a:spcPct val="108000"/>
               </a:lnSpc>
@@ -18563,7 +19331,7 @@
         <p:spPr>
           <a:xfrm>
             <a:off x="566928" y="5029200"/>
-            <a:ext cx="10927080" cy="1051560"/>
+            <a:ext cx="11064240" cy="1051560"/>
           </a:xfrm>
           <a:prstGeom prst="roundRect">
             <a:avLst>
@@ -18578,30 +19346,89 @@
       </p:sp>
       <p:sp>
         <p:nvSpPr>
-          <p:cNvPr id="38" name="Text 35"/>
-          <p:cNvSpPr/>
-          <p:nvPr/>
-        </p:nvSpPr>
-        <p:spPr>
-          <a:xfrm>
-            <a:off x="786384" y="5157216"/>
-            <a:ext cx="10625328" cy="219456"/>
-          </a:xfrm>
-          <a:prstGeom prst="rect">
-            <a:avLst/>
-          </a:prstGeom>
-          <a:noFill/>
-          <a:ln/>
-        </p:spPr>
-        <p:txBody>
-          <a:bodyPr wrap="square" lIns="0" tIns="0" rIns="0" bIns="0" rtlCol="0" anchor="ctr"/>
-          <a:lstStyle/>
-          <a:p>
-            <a:pPr marL="0" indent="0">
-              <a:buNone/>
-            </a:pPr>
-            <a:r>
-              <a:rPr lang="en-US" sz="950" b="1" kern="0" spc="150" dirty="0">
+          <p:cNvPr id="38" name="Shape 35"/>
+          <p:cNvSpPr/>
+          <p:nvPr/>
+        </p:nvSpPr>
+        <p:spPr>
+          <a:xfrm>
+            <a:off x="749808" y="5399532"/>
+            <a:ext cx="310896" cy="310896"/>
+          </a:xfrm>
+          <a:prstGeom prst="ellipse">
+            <a:avLst/>
+          </a:prstGeom>
+          <a:solidFill>
+            <a:srgbClr val="FFFFFF"/>
+          </a:solidFill>
+          <a:ln/>
+        </p:spPr>
+      </p:sp>
+      <p:sp>
+        <p:nvSpPr>
+          <p:cNvPr id="39" name="Text 36"/>
+          <p:cNvSpPr/>
+          <p:nvPr/>
+        </p:nvSpPr>
+        <p:spPr>
+          <a:xfrm>
+            <a:off x="749808" y="5399532"/>
+            <a:ext cx="310896" cy="310896"/>
+          </a:xfrm>
+          <a:prstGeom prst="rect">
+            <a:avLst/>
+          </a:prstGeom>
+          <a:noFill/>
+          <a:ln/>
+        </p:spPr>
+        <p:txBody>
+          <a:bodyPr wrap="square" lIns="0" tIns="0" rIns="0" bIns="0" rtlCol="0" anchor="ctr"/>
+          <a:lstStyle/>
+          <a:p>
+            <a:pPr algn="ctr" indent="0" marL="0">
+              <a:buNone/>
+            </a:pPr>
+            <a:r>
+              <a:rPr lang="en-US" sz="1200" b="1" dirty="0">
+                <a:solidFill>
+                  <a:srgbClr val="5A05F4"/>
+                </a:solidFill>
+                <a:latin typeface="Arial" pitchFamily="34" charset="0"/>
+                <a:ea typeface="Arial" pitchFamily="34" charset="-122"/>
+                <a:cs typeface="Arial" pitchFamily="34" charset="-120"/>
+              </a:rPr>
+              <a:t>?</a:t>
+            </a:r>
+            <a:endParaRPr lang="en-US" sz="1200" dirty="0"/>
+          </a:p>
+        </p:txBody>
+      </p:sp>
+      <p:sp>
+        <p:nvSpPr>
+          <p:cNvPr id="40" name="Text 37"/>
+          <p:cNvSpPr/>
+          <p:nvPr/>
+        </p:nvSpPr>
+        <p:spPr>
+          <a:xfrm>
+            <a:off x="1243584" y="5157216"/>
+            <a:ext cx="10168128" cy="219456"/>
+          </a:xfrm>
+          <a:prstGeom prst="rect">
+            <a:avLst/>
+          </a:prstGeom>
+          <a:noFill/>
+          <a:ln/>
+        </p:spPr>
+        <p:txBody>
+          <a:bodyPr wrap="square" lIns="0" tIns="0" rIns="0" bIns="0" rtlCol="0" anchor="ctr"/>
+          <a:lstStyle/>
+          <a:p>
+            <a:pPr indent="0" marL="0">
+              <a:buNone/>
+            </a:pPr>
+            <a:r>
+              <a:rPr lang="en-US" sz="950" b="1" spc="150" kern="0" dirty="0">
                 <a:solidFill>
                   <a:srgbClr val="FFFFFF"/>
                 </a:solidFill>
@@ -18617,26 +19444,26 @@
       </p:sp>
       <p:sp>
         <p:nvSpPr>
-          <p:cNvPr id="39" name="Text 36"/>
-          <p:cNvSpPr/>
-          <p:nvPr/>
-        </p:nvSpPr>
-        <p:spPr>
-          <a:xfrm>
-            <a:off x="786384" y="5413248"/>
-            <a:ext cx="10625328" cy="539496"/>
-          </a:xfrm>
-          <a:prstGeom prst="rect">
-            <a:avLst/>
-          </a:prstGeom>
-          <a:noFill/>
-          <a:ln/>
-        </p:spPr>
-        <p:txBody>
-          <a:bodyPr wrap="square" lIns="0" tIns="0" rIns="0" bIns="0" rtlCol="0" anchor="ctr"/>
-          <a:lstStyle/>
-          <a:p>
-            <a:pPr marL="0" indent="0">
+          <p:cNvPr id="41" name="Text 38"/>
+          <p:cNvSpPr/>
+          <p:nvPr/>
+        </p:nvSpPr>
+        <p:spPr>
+          <a:xfrm>
+            <a:off x="1243584" y="5413248"/>
+            <a:ext cx="10168128" cy="539496"/>
+          </a:xfrm>
+          <a:prstGeom prst="rect">
+            <a:avLst/>
+          </a:prstGeom>
+          <a:noFill/>
+          <a:ln/>
+        </p:spPr>
+        <p:txBody>
+          <a:bodyPr wrap="square" lIns="0" tIns="0" rIns="0" bIns="0" rtlCol="0" anchor="ctr"/>
+          <a:lstStyle/>
+          <a:p>
+            <a:pPr indent="0" marL="0">
               <a:lnSpc>
                 <a:spcPct val="112000"/>
               </a:lnSpc>
@@ -18659,7 +19486,7 @@
       </p:sp>
       <p:sp>
         <p:nvSpPr>
-          <p:cNvPr id="40" name="Slide Number Placeholder 0"/>
+          <p:cNvPr id="25" name="Slide Number Placeholder 0"/>
           <p:cNvSpPr>
             <a:spLocks noGrp="1"/>
           </p:cNvSpPr>
@@ -18677,7 +19504,7 @@
           </a:prstGeom>
           <a:extLst>
             <a:ext uri="{C572A759-6A51-4108-AA02-DFA0A04FC94B}">
-              <ma14:wrappingTextBoxFlag xmlns="" xmlns:ma14="http://schemas.microsoft.com/office/mac/drawingml/2011/main" val="0"/>
+              <ma14:wrappingTextBoxFlag xmlns:ma14="http://schemas.microsoft.com/office/mac/drawingml/2011/main" val="0"/>
             </a:ext>
           </a:extLst>
         </p:spPr>
@@ -18698,7 +19525,7 @@
           <a:p>
             <a:pPr algn="l"/>
             <a:fld id="{F7021451-1387-4CA6-816F-3879F97B5CBC}" type="slidenum">
-              <a:rPr lang="en-US" b="0"/>
+              <a:rPr b="0" lang="en-US"/>
               <a:t>23</a:t>
             </a:fld>
             <a:endParaRPr lang="en-US"/>
@@ -18773,7 +19600,7 @@
           <a:bodyPr wrap="square" lIns="0" tIns="0" rIns="0" bIns="0" rtlCol="0" anchor="ctr"/>
           <a:lstStyle/>
           <a:p>
-            <a:pPr marL="0" indent="0">
+            <a:pPr indent="0" marL="0">
               <a:buNone/>
             </a:pPr>
             <a:r>
@@ -18834,11 +19661,11 @@
           <a:bodyPr wrap="square" lIns="0" tIns="0" rIns="0" bIns="0" rtlCol="0" anchor="ctr"/>
           <a:lstStyle/>
           <a:p>
-            <a:pPr marL="0" indent="0" algn="ctr">
-              <a:buNone/>
-            </a:pPr>
-            <a:r>
-              <a:rPr lang="en-US" sz="900" b="1" kern="0" spc="100" dirty="0">
+            <a:pPr algn="ctr" indent="0" marL="0">
+              <a:buNone/>
+            </a:pPr>
+            <a:r>
+              <a:rPr lang="en-US" sz="900" b="1" spc="100" kern="0" dirty="0">
                 <a:solidFill>
                   <a:srgbClr val="FFFFFF"/>
                 </a:solidFill>
@@ -18854,14 +19681,14 @@
       </p:sp>
       <p:pic>
         <p:nvPicPr>
-          <p:cNvPr id="6" name="Image 0" descr="preencoded.png"/>
+          <p:cNvPr id="6" name="Image 0" descr="preencoded.png">    </p:cNvPr>
           <p:cNvPicPr>
             <a:picLocks noChangeAspect="1"/>
           </p:cNvPicPr>
           <p:nvPr/>
         </p:nvPicPr>
         <p:blipFill>
-          <a:blip r:embed="rId3"/>
+          <a:blip r:embed="rId1"/>
           <a:stretch>
             <a:fillRect/>
           </a:stretch>
@@ -18917,7 +19744,7 @@
           <a:bodyPr wrap="square" lIns="0" tIns="0" rIns="0" bIns="0" rtlCol="0" anchor="ctr"/>
           <a:lstStyle/>
           <a:p>
-            <a:pPr marL="0" indent="0" algn="ctr">
+            <a:pPr algn="ctr" indent="0" marL="0">
               <a:buNone/>
             </a:pPr>
             <a:r>
@@ -18956,7 +19783,7 @@
           <a:bodyPr wrap="square" lIns="0" tIns="0" rIns="0" bIns="0" rtlCol="0" anchor="ctr"/>
           <a:lstStyle/>
           <a:p>
-            <a:pPr marL="0" indent="0">
+            <a:pPr indent="0" marL="0">
               <a:buNone/>
             </a:pPr>
             <a:r>
@@ -18970,6 +19797,9 @@
               </a:rPr>
               <a:t>Підняти стек  </a:t>
             </a:r>
+            <a:pPr indent="0" marL="0">
+              <a:buNone/>
+            </a:pPr>
             <a:r>
               <a:rPr lang="en-US" sz="1200" dirty="0">
                 <a:solidFill>
@@ -19026,7 +19856,7 @@
           <a:bodyPr wrap="square" lIns="0" tIns="0" rIns="0" bIns="0" rtlCol="0" anchor="ctr"/>
           <a:lstStyle/>
           <a:p>
-            <a:pPr marL="0" indent="0" algn="ctr">
+            <a:pPr algn="ctr" indent="0" marL="0">
               <a:buNone/>
             </a:pPr>
             <a:r>
@@ -19065,7 +19895,7 @@
           <a:bodyPr wrap="square" lIns="0" tIns="0" rIns="0" bIns="0" rtlCol="0" anchor="ctr"/>
           <a:lstStyle/>
           <a:p>
-            <a:pPr marL="0" indent="0">
+            <a:pPr indent="0" marL="0">
               <a:buNone/>
             </a:pPr>
             <a:r>
@@ -19079,6 +19909,9 @@
               </a:rPr>
               <a:t>Оглянути половини  </a:t>
             </a:r>
+            <a:pPr indent="0" marL="0">
+              <a:buNone/>
+            </a:pPr>
             <a:r>
               <a:rPr lang="en-US" sz="1200" dirty="0">
                 <a:solidFill>
@@ -19135,7 +19968,7 @@
           <a:bodyPr wrap="square" lIns="0" tIns="0" rIns="0" bIns="0" rtlCol="0" anchor="ctr"/>
           <a:lstStyle/>
           <a:p>
-            <a:pPr marL="0" indent="0" algn="ctr">
+            <a:pPr algn="ctr" indent="0" marL="0">
               <a:buNone/>
             </a:pPr>
             <a:r>
@@ -19174,7 +20007,7 @@
           <a:bodyPr wrap="square" lIns="0" tIns="0" rIns="0" bIns="0" rtlCol="0" anchor="ctr"/>
           <a:lstStyle/>
           <a:p>
-            <a:pPr marL="0" indent="0">
+            <a:pPr indent="0" marL="0">
               <a:buNone/>
             </a:pPr>
             <a:r>
@@ -19188,6 +20021,9 @@
               </a:rPr>
               <a:t>Прочитати код  </a:t>
             </a:r>
+            <a:pPr indent="0" marL="0">
+              <a:buNone/>
+            </a:pPr>
             <a:r>
               <a:rPr lang="en-US" sz="1200" dirty="0">
                 <a:solidFill>
@@ -19244,7 +20080,7 @@
           <a:bodyPr wrap="square" lIns="0" tIns="0" rIns="0" bIns="0" rtlCol="0" anchor="ctr"/>
           <a:lstStyle/>
           <a:p>
-            <a:pPr marL="0" indent="0" algn="ctr">
+            <a:pPr algn="ctr" indent="0" marL="0">
               <a:buNone/>
             </a:pPr>
             <a:r>
@@ -19283,7 +20119,7 @@
           <a:bodyPr wrap="square" lIns="0" tIns="0" rIns="0" bIns="0" rtlCol="0" anchor="ctr"/>
           <a:lstStyle/>
           <a:p>
-            <a:pPr marL="0" indent="0">
+            <a:pPr indent="0" marL="0">
               <a:buNone/>
             </a:pPr>
             <a:r>
@@ -19297,6 +20133,9 @@
               </a:rPr>
               <a:t>Знайти запит у лозі  </a:t>
             </a:r>
+            <a:pPr indent="0" marL="0">
+              <a:buNone/>
+            </a:pPr>
             <a:r>
               <a:rPr lang="en-US" sz="1200" dirty="0">
                 <a:solidFill>
@@ -19353,7 +20192,7 @@
           <a:bodyPr wrap="square" lIns="0" tIns="0" rIns="0" bIns="0" rtlCol="0" anchor="ctr"/>
           <a:lstStyle/>
           <a:p>
-            <a:pPr marL="0" indent="0" algn="ctr">
+            <a:pPr algn="ctr" indent="0" marL="0">
               <a:buNone/>
             </a:pPr>
             <a:r>
@@ -19392,7 +20231,7 @@
           <a:bodyPr wrap="square" lIns="0" tIns="0" rIns="0" bIns="0" rtlCol="0" anchor="ctr"/>
           <a:lstStyle/>
           <a:p>
-            <a:pPr marL="0" indent="0">
+            <a:pPr indent="0" marL="0">
               <a:buNone/>
             </a:pPr>
             <a:r>
@@ -19406,6 +20245,9 @@
               </a:rPr>
               <a:t>Зламати  </a:t>
             </a:r>
+            <a:pPr indent="0" marL="0">
+              <a:buNone/>
+            </a:pPr>
             <a:r>
               <a:rPr lang="en-US" sz="1200" dirty="0">
                 <a:solidFill>
@@ -19462,7 +20304,7 @@
           <a:bodyPr wrap="square" lIns="0" tIns="0" rIns="0" bIns="0" rtlCol="0" anchor="ctr"/>
           <a:lstStyle/>
           <a:p>
-            <a:pPr marL="0" indent="0" algn="ctr">
+            <a:pPr algn="ctr" indent="0" marL="0">
               <a:buNone/>
             </a:pPr>
             <a:r>
@@ -19501,7 +20343,7 @@
           <a:bodyPr wrap="square" lIns="0" tIns="0" rIns="0" bIns="0" rtlCol="0" anchor="ctr"/>
           <a:lstStyle/>
           <a:p>
-            <a:pPr marL="0" indent="0">
+            <a:pPr indent="0" marL="0">
               <a:buNone/>
             </a:pPr>
             <a:r>
@@ -19515,6 +20357,9 @@
               </a:rPr>
               <a:t>Розширений стек · опційно  </a:t>
             </a:r>
+            <a:pPr indent="0" marL="0">
+              <a:buNone/>
+            </a:pPr>
             <a:r>
               <a:rPr lang="en-US" sz="1200" dirty="0">
                 <a:solidFill>
@@ -19550,7 +20395,7 @@
           </a:prstGeom>
           <a:extLst>
             <a:ext uri="{C572A759-6A51-4108-AA02-DFA0A04FC94B}">
-              <ma14:wrappingTextBoxFlag xmlns="" xmlns:ma14="http://schemas.microsoft.com/office/mac/drawingml/2011/main" val="0"/>
+              <ma14:wrappingTextBoxFlag xmlns:ma14="http://schemas.microsoft.com/office/mac/drawingml/2011/main" val="0"/>
             </a:ext>
           </a:extLst>
         </p:spPr>
@@ -19571,7 +20416,7 @@
           <a:p>
             <a:pPr algn="l"/>
             <a:fld id="{F7021451-1387-4CA6-816F-3879F97B5CBC}" type="slidenum">
-              <a:rPr lang="en-US" b="0"/>
+              <a:rPr b="0" lang="en-US"/>
               <a:t>24</a:t>
             </a:fld>
             <a:endParaRPr lang="en-US"/>
@@ -19624,11 +20469,11 @@
           <a:bodyPr wrap="square" lIns="0" tIns="0" rIns="0" bIns="0" rtlCol="0" anchor="ctr"/>
           <a:lstStyle/>
           <a:p>
-            <a:pPr marL="0" indent="0">
-              <a:buNone/>
-            </a:pPr>
-            <a:r>
-              <a:rPr lang="en-US" sz="1200" b="1" kern="0" spc="400" dirty="0">
+            <a:pPr indent="0" marL="0">
+              <a:buNone/>
+            </a:pPr>
+            <a:r>
+              <a:rPr lang="en-US" sz="1200" b="1" spc="400" kern="0" dirty="0">
                 <a:solidFill>
                   <a:srgbClr val="FFFFFF"/>
                 </a:solidFill>
@@ -19663,7 +20508,7 @@
           <a:bodyPr wrap="square" lIns="0" tIns="0" rIns="0" bIns="0" rtlCol="0" anchor="ctr"/>
           <a:lstStyle/>
           <a:p>
-            <a:pPr marL="0" indent="0">
+            <a:pPr indent="0" marL="0">
               <a:buNone/>
             </a:pPr>
             <a:r>
@@ -19702,7 +20547,7 @@
           <a:bodyPr wrap="square" lIns="0" tIns="0" rIns="0" bIns="0" rtlCol="0" anchor="t"/>
           <a:lstStyle/>
           <a:p>
-            <a:pPr marL="0" indent="0">
+            <a:pPr indent="0" marL="0">
               <a:buNone/>
             </a:pPr>
             <a:r>
@@ -19788,7 +20633,7 @@
           <a:bodyPr wrap="square" lIns="0" tIns="0" rIns="0" bIns="0" rtlCol="0" anchor="ctr"/>
           <a:lstStyle/>
           <a:p>
-            <a:pPr marL="0" indent="0">
+            <a:pPr indent="0" marL="0">
               <a:buNone/>
             </a:pPr>
             <a:r>
@@ -19854,11 +20699,11 @@
           <a:bodyPr wrap="square" lIns="0" tIns="0" rIns="0" bIns="0" rtlCol="0" anchor="ctr"/>
           <a:lstStyle/>
           <a:p>
-            <a:pPr marL="0" indent="0" algn="ctr">
-              <a:buNone/>
-            </a:pPr>
-            <a:r>
-              <a:rPr lang="en-US" sz="900" b="1" kern="0" spc="100" dirty="0">
+            <a:pPr algn="ctr" indent="0" marL="0">
+              <a:buNone/>
+            </a:pPr>
+            <a:r>
+              <a:rPr lang="en-US" sz="900" b="1" spc="100" kern="0" dirty="0">
                 <a:solidFill>
                   <a:srgbClr val="1A4FBF"/>
                 </a:solidFill>
@@ -19874,14 +20719,14 @@
       </p:sp>
       <p:pic>
         <p:nvPicPr>
-          <p:cNvPr id="6" name="Image 0" descr="preencoded.png"/>
+          <p:cNvPr id="6" name="Image 0" descr="preencoded.png">    </p:cNvPr>
           <p:cNvPicPr>
             <a:picLocks noChangeAspect="1"/>
           </p:cNvPicPr>
           <p:nvPr/>
         </p:nvPicPr>
         <p:blipFill>
-          <a:blip r:embed="rId3"/>
+          <a:blip r:embed="rId1"/>
           <a:stretch>
             <a:fillRect/>
           </a:stretch>
@@ -19939,7 +20784,7 @@
           <a:bodyPr wrap="square" lIns="0" tIns="0" rIns="0" bIns="0" rtlCol="0" anchor="ctr"/>
           <a:lstStyle/>
           <a:p>
-            <a:pPr marL="0" indent="0">
+            <a:pPr indent="0" marL="0">
               <a:buNone/>
             </a:pPr>
             <a:r>
@@ -19978,7 +20823,7 @@
           <a:bodyPr wrap="square" lIns="0" tIns="0" rIns="0" bIns="0" rtlCol="0" anchor="t"/>
           <a:lstStyle/>
           <a:p>
-            <a:pPr marL="0" indent="0">
+            <a:pPr indent="0" marL="0">
               <a:lnSpc>
                 <a:spcPct val="108000"/>
               </a:lnSpc>
@@ -20042,7 +20887,7 @@
           <a:bodyPr wrap="square" lIns="0" tIns="0" rIns="0" bIns="0" rtlCol="0" anchor="ctr"/>
           <a:lstStyle/>
           <a:p>
-            <a:pPr marL="0" indent="0">
+            <a:pPr indent="0" marL="0">
               <a:buNone/>
             </a:pPr>
             <a:r>
@@ -20081,7 +20926,7 @@
           <a:bodyPr wrap="square" lIns="0" tIns="0" rIns="0" bIns="0" rtlCol="0" anchor="t"/>
           <a:lstStyle/>
           <a:p>
-            <a:pPr marL="0" indent="0">
+            <a:pPr indent="0" marL="0">
               <a:lnSpc>
                 <a:spcPct val="108000"/>
               </a:lnSpc>
@@ -20145,7 +20990,7 @@
           <a:bodyPr wrap="square" lIns="0" tIns="0" rIns="0" bIns="0" rtlCol="0" anchor="ctr"/>
           <a:lstStyle/>
           <a:p>
-            <a:pPr marL="0" indent="0">
+            <a:pPr indent="0" marL="0">
               <a:buNone/>
             </a:pPr>
             <a:r>
@@ -20184,7 +21029,7 @@
           <a:bodyPr wrap="square" lIns="0" tIns="0" rIns="0" bIns="0" rtlCol="0" anchor="t"/>
           <a:lstStyle/>
           <a:p>
-            <a:pPr marL="0" indent="0">
+            <a:pPr indent="0" marL="0">
               <a:lnSpc>
                 <a:spcPct val="108000"/>
               </a:lnSpc>
@@ -20248,7 +21093,7 @@
           <a:bodyPr wrap="square" lIns="0" tIns="0" rIns="0" bIns="0" rtlCol="0" anchor="ctr"/>
           <a:lstStyle/>
           <a:p>
-            <a:pPr marL="0" indent="0" algn="ctr">
+            <a:pPr algn="ctr" indent="0" marL="0">
               <a:buNone/>
             </a:pPr>
             <a:r>
@@ -20352,7 +21197,7 @@
           <a:bodyPr wrap="square" lIns="0" tIns="0" rIns="0" bIns="0" rtlCol="0" anchor="ctr"/>
           <a:lstStyle/>
           <a:p>
-            <a:pPr marL="0" indent="0" algn="ctr">
+            <a:pPr algn="ctr" indent="0" marL="0">
               <a:buNone/>
             </a:pPr>
             <a:r>
@@ -20456,7 +21301,7 @@
           <a:bodyPr wrap="square" lIns="0" tIns="0" rIns="0" bIns="0" rtlCol="0" anchor="ctr"/>
           <a:lstStyle/>
           <a:p>
-            <a:pPr marL="0" indent="0" algn="ctr">
+            <a:pPr algn="ctr" indent="0" marL="0">
               <a:buNone/>
             </a:pPr>
             <a:r>
@@ -20560,7 +21405,7 @@
           <a:bodyPr wrap="square" lIns="0" tIns="0" rIns="0" bIns="0" rtlCol="0" anchor="ctr"/>
           <a:lstStyle/>
           <a:p>
-            <a:pPr marL="0" indent="0" algn="ctr">
+            <a:pPr algn="ctr" indent="0" marL="0">
               <a:buNone/>
             </a:pPr>
             <a:r>
@@ -20664,7 +21509,7 @@
           <a:bodyPr wrap="square" lIns="0" tIns="0" rIns="0" bIns="0" rtlCol="0" anchor="ctr"/>
           <a:lstStyle/>
           <a:p>
-            <a:pPr marL="0" indent="0" algn="ctr">
+            <a:pPr algn="ctr" indent="0" marL="0">
               <a:buNone/>
             </a:pPr>
             <a:r>
@@ -20768,7 +21613,7 @@
           <a:bodyPr wrap="square" lIns="0" tIns="0" rIns="0" bIns="0" rtlCol="0" anchor="ctr"/>
           <a:lstStyle/>
           <a:p>
-            <a:pPr marL="0" indent="0" algn="ctr">
+            <a:pPr algn="ctr" indent="0" marL="0">
               <a:buNone/>
             </a:pPr>
             <a:r>
@@ -20872,7 +21717,7 @@
           <a:bodyPr wrap="square" lIns="0" tIns="0" rIns="0" bIns="0" rtlCol="0" anchor="ctr"/>
           <a:lstStyle/>
           <a:p>
-            <a:pPr marL="0" indent="0" algn="ctr">
+            <a:pPr algn="ctr" indent="0" marL="0">
               <a:buNone/>
             </a:pPr>
             <a:r>
@@ -20933,7 +21778,7 @@
           <a:bodyPr wrap="square" lIns="0" tIns="0" rIns="0" bIns="0" rtlCol="0" anchor="ctr"/>
           <a:lstStyle/>
           <a:p>
-            <a:pPr marL="0" indent="0">
+            <a:pPr indent="0" marL="0">
               <a:lnSpc>
                 <a:spcPct val="112000"/>
               </a:lnSpc>
@@ -20956,7 +21801,7 @@
       </p:sp>
       <p:sp>
         <p:nvSpPr>
-          <p:cNvPr id="44" name="Slide Number Placeholder 0"/>
+          <p:cNvPr id="25" name="Slide Number Placeholder 0"/>
           <p:cNvSpPr>
             <a:spLocks noGrp="1"/>
           </p:cNvSpPr>
@@ -20974,7 +21819,7 @@
           </a:prstGeom>
           <a:extLst>
             <a:ext uri="{C572A759-6A51-4108-AA02-DFA0A04FC94B}">
-              <ma14:wrappingTextBoxFlag xmlns="" xmlns:ma14="http://schemas.microsoft.com/office/mac/drawingml/2011/main" val="0"/>
+              <ma14:wrappingTextBoxFlag xmlns:ma14="http://schemas.microsoft.com/office/mac/drawingml/2011/main" val="0"/>
             </a:ext>
           </a:extLst>
         </p:spPr>
@@ -20995,7 +21840,7 @@
           <a:p>
             <a:pPr algn="l"/>
             <a:fld id="{F7021451-1387-4CA6-816F-3879F97B5CBC}" type="slidenum">
-              <a:rPr lang="en-US" b="0"/>
+              <a:rPr b="0" lang="en-US"/>
               <a:t>26</a:t>
             </a:fld>
             <a:endParaRPr lang="en-US"/>
@@ -21070,7 +21915,7 @@
           <a:bodyPr wrap="square" lIns="0" tIns="0" rIns="0" bIns="0" rtlCol="0" anchor="ctr"/>
           <a:lstStyle/>
           <a:p>
-            <a:pPr marL="0" indent="0">
+            <a:pPr indent="0" marL="0">
               <a:buNone/>
             </a:pPr>
             <a:r>
@@ -21136,11 +21981,11 @@
           <a:bodyPr wrap="square" lIns="0" tIns="0" rIns="0" bIns="0" rtlCol="0" anchor="ctr"/>
           <a:lstStyle/>
           <a:p>
-            <a:pPr marL="0" indent="0" algn="ctr">
-              <a:buNone/>
-            </a:pPr>
-            <a:r>
-              <a:rPr lang="en-US" sz="900" b="1" kern="0" spc="100" dirty="0">
+            <a:pPr algn="ctr" indent="0" marL="0">
+              <a:buNone/>
+            </a:pPr>
+            <a:r>
+              <a:rPr lang="en-US" sz="900" b="1" spc="100" kern="0" dirty="0">
                 <a:solidFill>
                   <a:srgbClr val="1A4FBF"/>
                 </a:solidFill>
@@ -21156,14 +22001,14 @@
       </p:sp>
       <p:pic>
         <p:nvPicPr>
-          <p:cNvPr id="6" name="Image 0" descr="preencoded.png"/>
+          <p:cNvPr id="6" name="Image 0" descr="preencoded.png">    </p:cNvPr>
           <p:cNvPicPr>
             <a:picLocks noChangeAspect="1"/>
           </p:cNvPicPr>
           <p:nvPr/>
         </p:nvPicPr>
         <p:blipFill>
-          <a:blip r:embed="rId3"/>
+          <a:blip r:embed="rId1"/>
           <a:stretch>
             <a:fillRect/>
           </a:stretch>
@@ -21293,7 +22138,7 @@
           <a:bodyPr wrap="square" lIns="0" tIns="0" rIns="0" bIns="0" rtlCol="0" anchor="ctr"/>
           <a:lstStyle/>
           <a:p>
-            <a:pPr marL="0" indent="0">
+            <a:pPr indent="0" marL="0">
               <a:buNone/>
             </a:pPr>
             <a:r>
@@ -21399,7 +22244,7 @@
           <a:bodyPr wrap="square" lIns="0" tIns="0" rIns="0" bIns="0" rtlCol="0" anchor="ctr"/>
           <a:lstStyle/>
           <a:p>
-            <a:pPr marL="0" indent="0">
+            <a:pPr indent="0" marL="0">
               <a:buNone/>
             </a:pPr>
             <a:r>
@@ -21505,7 +22350,7 @@
           <a:bodyPr wrap="square" lIns="0" tIns="0" rIns="0" bIns="0" rtlCol="0" anchor="ctr"/>
           <a:lstStyle/>
           <a:p>
-            <a:pPr marL="0" indent="0">
+            <a:pPr indent="0" marL="0">
               <a:buNone/>
             </a:pPr>
             <a:r>
@@ -21611,7 +22456,7 @@
           <a:bodyPr wrap="square" lIns="0" tIns="0" rIns="0" bIns="0" rtlCol="0" anchor="ctr"/>
           <a:lstStyle/>
           <a:p>
-            <a:pPr marL="0" indent="0">
+            <a:pPr indent="0" marL="0">
               <a:buNone/>
             </a:pPr>
             <a:r>
@@ -21717,7 +22562,7 @@
           <a:bodyPr wrap="square" lIns="0" tIns="0" rIns="0" bIns="0" rtlCol="0" anchor="ctr"/>
           <a:lstStyle/>
           <a:p>
-            <a:pPr marL="0" indent="0">
+            <a:pPr indent="0" marL="0">
               <a:buNone/>
             </a:pPr>
             <a:r>
@@ -21823,7 +22668,7 @@
           <a:bodyPr wrap="square" lIns="0" tIns="0" rIns="0" bIns="0" rtlCol="0" anchor="ctr"/>
           <a:lstStyle/>
           <a:p>
-            <a:pPr marL="0" indent="0">
+            <a:pPr indent="0" marL="0">
               <a:buNone/>
             </a:pPr>
             <a:r>
@@ -21862,7 +22707,7 @@
           <a:bodyPr wrap="square" lIns="0" tIns="0" rIns="0" bIns="0" rtlCol="0" anchor="ctr"/>
           <a:lstStyle/>
           <a:p>
-            <a:pPr marL="0" indent="0">
+            <a:pPr indent="0" marL="0">
               <a:buNone/>
             </a:pPr>
             <a:r>
@@ -21882,7 +22727,7 @@
       </p:sp>
       <p:sp>
         <p:nvSpPr>
-          <p:cNvPr id="33" name="Slide Number Placeholder 0"/>
+          <p:cNvPr id="25" name="Slide Number Placeholder 0"/>
           <p:cNvSpPr>
             <a:spLocks noGrp="1"/>
           </p:cNvSpPr>
@@ -21900,7 +22745,7 @@
           </a:prstGeom>
           <a:extLst>
             <a:ext uri="{C572A759-6A51-4108-AA02-DFA0A04FC94B}">
-              <ma14:wrappingTextBoxFlag xmlns="" xmlns:ma14="http://schemas.microsoft.com/office/mac/drawingml/2011/main" val="0"/>
+              <ma14:wrappingTextBoxFlag xmlns:ma14="http://schemas.microsoft.com/office/mac/drawingml/2011/main" val="0"/>
             </a:ext>
           </a:extLst>
         </p:spPr>
@@ -21921,7 +22766,7 @@
           <a:p>
             <a:pPr algn="l"/>
             <a:fld id="{F7021451-1387-4CA6-816F-3879F97B5CBC}" type="slidenum">
-              <a:rPr lang="en-US" b="0"/>
+              <a:rPr b="0" lang="en-US"/>
               <a:t>27</a:t>
             </a:fld>
             <a:endParaRPr lang="en-US"/>
@@ -21996,7 +22841,7 @@
           <a:bodyPr wrap="square" lIns="0" tIns="0" rIns="0" bIns="0" rtlCol="0" anchor="ctr"/>
           <a:lstStyle/>
           <a:p>
-            <a:pPr marL="0" indent="0">
+            <a:pPr indent="0" marL="0">
               <a:buNone/>
             </a:pPr>
             <a:r>
@@ -22062,11 +22907,11 @@
           <a:bodyPr wrap="square" lIns="0" tIns="0" rIns="0" bIns="0" rtlCol="0" anchor="ctr"/>
           <a:lstStyle/>
           <a:p>
-            <a:pPr marL="0" indent="0" algn="ctr">
-              <a:buNone/>
-            </a:pPr>
-            <a:r>
-              <a:rPr lang="en-US" sz="900" b="1" kern="0" spc="100" dirty="0">
+            <a:pPr algn="ctr" indent="0" marL="0">
+              <a:buNone/>
+            </a:pPr>
+            <a:r>
+              <a:rPr lang="en-US" sz="900" b="1" spc="100" kern="0" dirty="0">
                 <a:solidFill>
                   <a:srgbClr val="1A4FBF"/>
                 </a:solidFill>
@@ -22082,14 +22927,14 @@
       </p:sp>
       <p:pic>
         <p:nvPicPr>
-          <p:cNvPr id="6" name="Image 0" descr="preencoded.png"/>
+          <p:cNvPr id="6" name="Image 0" descr="preencoded.png">    </p:cNvPr>
           <p:cNvPicPr>
             <a:picLocks noChangeAspect="1"/>
           </p:cNvPicPr>
           <p:nvPr/>
         </p:nvPicPr>
         <p:blipFill>
-          <a:blip r:embed="rId3"/>
+          <a:blip r:embed="rId1"/>
           <a:stretch>
             <a:fillRect/>
           </a:stretch>
@@ -22217,7 +23062,7 @@
           <a:bodyPr wrap="square" lIns="0" tIns="0" rIns="0" bIns="0" rtlCol="0" anchor="ctr"/>
           <a:lstStyle/>
           <a:p>
-            <a:pPr marL="0" indent="0">
+            <a:pPr indent="0" marL="0">
               <a:buNone/>
             </a:pPr>
             <a:r>
@@ -22231,6 +23076,9 @@
               </a:rPr>
               <a:t>Ключ у коді застосунку   </a:t>
             </a:r>
+            <a:pPr indent="0" marL="0">
+              <a:buNone/>
+            </a:pPr>
             <a:r>
               <a:rPr lang="en-US" sz="1250" dirty="0">
                 <a:solidFill>
@@ -22359,7 +23207,7 @@
           <a:bodyPr wrap="square" lIns="0" tIns="0" rIns="0" bIns="0" rtlCol="0" anchor="ctr"/>
           <a:lstStyle/>
           <a:p>
-            <a:pPr marL="0" indent="0">
+            <a:pPr indent="0" marL="0">
               <a:buNone/>
             </a:pPr>
             <a:r>
@@ -22373,6 +23221,9 @@
               </a:rPr>
               <a:t>Демо на одному запиті   </a:t>
             </a:r>
+            <a:pPr indent="0" marL="0">
+              <a:buNone/>
+            </a:pPr>
             <a:r>
               <a:rPr lang="en-US" sz="1250" dirty="0">
                 <a:solidFill>
@@ -22501,7 +23352,7 @@
           <a:bodyPr wrap="square" lIns="0" tIns="0" rIns="0" bIns="0" rtlCol="0" anchor="ctr"/>
           <a:lstStyle/>
           <a:p>
-            <a:pPr marL="0" indent="0">
+            <a:pPr indent="0" marL="0">
               <a:buNone/>
             </a:pPr>
             <a:r>
@@ -22515,6 +23366,9 @@
               </a:rPr>
               <a:t>«Логи — коли зламається»   </a:t>
             </a:r>
+            <a:pPr indent="0" marL="0">
+              <a:buNone/>
+            </a:pPr>
             <a:r>
               <a:rPr lang="en-US" sz="1250" dirty="0">
                 <a:solidFill>
@@ -22643,7 +23497,7 @@
           <a:bodyPr wrap="square" lIns="0" tIns="0" rIns="0" bIns="0" rtlCol="0" anchor="ctr"/>
           <a:lstStyle/>
           <a:p>
-            <a:pPr marL="0" indent="0">
+            <a:pPr indent="0" marL="0">
               <a:buNone/>
             </a:pPr>
             <a:r>
@@ -22657,6 +23511,9 @@
               </a:rPr>
               <a:t>Три провайдери одразу   </a:t>
             </a:r>
+            <a:pPr indent="0" marL="0">
+              <a:buNone/>
+            </a:pPr>
             <a:r>
               <a:rPr lang="en-US" sz="1250" dirty="0">
                 <a:solidFill>
@@ -22785,7 +23642,7 @@
           <a:bodyPr wrap="square" lIns="0" tIns="0" rIns="0" bIns="0" rtlCol="0" anchor="ctr"/>
           <a:lstStyle/>
           <a:p>
-            <a:pPr marL="0" indent="0">
+            <a:pPr indent="0" marL="0">
               <a:buNone/>
             </a:pPr>
             <a:r>
@@ -22799,6 +23656,9 @@
               </a:rPr>
               <a:t>Реальний ключ з першого дня   </a:t>
             </a:r>
+            <a:pPr indent="0" marL="0">
+              <a:buNone/>
+            </a:pPr>
             <a:r>
               <a:rPr lang="en-US" sz="1250" dirty="0">
                 <a:solidFill>
@@ -22816,7 +23676,7 @@
       </p:sp>
       <p:sp>
         <p:nvSpPr>
-          <p:cNvPr id="32" name="Slide Number Placeholder 0"/>
+          <p:cNvPr id="25" name="Slide Number Placeholder 0"/>
           <p:cNvSpPr>
             <a:spLocks noGrp="1"/>
           </p:cNvSpPr>
@@ -22834,7 +23694,7 @@
           </a:prstGeom>
           <a:extLst>
             <a:ext uri="{C572A759-6A51-4108-AA02-DFA0A04FC94B}">
-              <ma14:wrappingTextBoxFlag xmlns="" xmlns:ma14="http://schemas.microsoft.com/office/mac/drawingml/2011/main" val="0"/>
+              <ma14:wrappingTextBoxFlag xmlns:ma14="http://schemas.microsoft.com/office/mac/drawingml/2011/main" val="0"/>
             </a:ext>
           </a:extLst>
         </p:spPr>
@@ -22855,7 +23715,7 @@
           <a:p>
             <a:pPr algn="l"/>
             <a:fld id="{F7021451-1387-4CA6-816F-3879F97B5CBC}" type="slidenum">
-              <a:rPr lang="en-US" b="0"/>
+              <a:rPr b="0" lang="en-US"/>
               <a:t>28</a:t>
             </a:fld>
             <a:endParaRPr lang="en-US"/>
@@ -22930,7 +23790,7 @@
           <a:bodyPr wrap="square" lIns="0" tIns="0" rIns="0" bIns="0" rtlCol="0" anchor="ctr"/>
           <a:lstStyle/>
           <a:p>
-            <a:pPr marL="0" indent="0">
+            <a:pPr indent="0" marL="0">
               <a:buNone/>
             </a:pPr>
             <a:r>
@@ -22991,11 +23851,11 @@
           <a:bodyPr wrap="square" lIns="0" tIns="0" rIns="0" bIns="0" rtlCol="0" anchor="ctr"/>
           <a:lstStyle/>
           <a:p>
-            <a:pPr marL="0" indent="0" algn="ctr">
-              <a:buNone/>
-            </a:pPr>
-            <a:r>
-              <a:rPr lang="en-US" sz="900" b="1" kern="0" spc="100" dirty="0">
+            <a:pPr algn="ctr" indent="0" marL="0">
+              <a:buNone/>
+            </a:pPr>
+            <a:r>
+              <a:rPr lang="en-US" sz="900" b="1" spc="100" kern="0" dirty="0">
                 <a:solidFill>
                   <a:srgbClr val="FFFFFF"/>
                 </a:solidFill>
@@ -23011,14 +23871,14 @@
       </p:sp>
       <p:pic>
         <p:nvPicPr>
-          <p:cNvPr id="6" name="Image 0" descr="preencoded.png"/>
+          <p:cNvPr id="6" name="Image 0" descr="preencoded.png">    </p:cNvPr>
           <p:cNvPicPr>
             <a:picLocks noChangeAspect="1"/>
           </p:cNvPicPr>
           <p:nvPr/>
         </p:nvPicPr>
         <p:blipFill>
-          <a:blip r:embed="rId3"/>
+          <a:blip r:embed="rId1"/>
           <a:stretch>
             <a:fillRect/>
           </a:stretch>
@@ -23076,7 +23936,7 @@
           <a:bodyPr wrap="square" lIns="0" tIns="0" rIns="0" bIns="0" rtlCol="0" anchor="ctr"/>
           <a:lstStyle/>
           <a:p>
-            <a:pPr marL="0" indent="0">
+            <a:pPr indent="0" marL="0">
               <a:buNone/>
             </a:pPr>
             <a:r>
@@ -23115,7 +23975,7 @@
           <a:bodyPr wrap="square" lIns="0" tIns="0" rIns="0" bIns="0" rtlCol="0" anchor="t"/>
           <a:lstStyle/>
           <a:p>
-            <a:pPr marL="0" indent="0">
+            <a:pPr indent="0" marL="0">
               <a:lnSpc>
                 <a:spcPct val="108000"/>
               </a:lnSpc>
@@ -23135,7 +23995,7 @@
             <a:endParaRPr lang="en-US" sz="1200" dirty="0"/>
           </a:p>
           <a:p>
-            <a:pPr marL="0" indent="0">
+            <a:pPr indent="0" marL="0">
               <a:lnSpc>
                 <a:spcPct val="108000"/>
               </a:lnSpc>
@@ -23144,7 +24004,7 @@
             <a:endParaRPr lang="en-US" sz="1200" dirty="0"/>
           </a:p>
           <a:p>
-            <a:pPr marL="0" indent="0">
+            <a:pPr indent="0" marL="0">
               <a:lnSpc>
                 <a:spcPct val="108000"/>
               </a:lnSpc>
@@ -23164,7 +24024,7 @@
             <a:endParaRPr lang="en-US" sz="1200" dirty="0"/>
           </a:p>
           <a:p>
-            <a:pPr marL="0" indent="0">
+            <a:pPr indent="0" marL="0">
               <a:lnSpc>
                 <a:spcPct val="108000"/>
               </a:lnSpc>
@@ -23173,7 +24033,7 @@
             <a:endParaRPr lang="en-US" sz="1200" dirty="0"/>
           </a:p>
           <a:p>
-            <a:pPr marL="0" indent="0">
+            <a:pPr indent="0" marL="0">
               <a:lnSpc>
                 <a:spcPct val="108000"/>
               </a:lnSpc>
@@ -23237,7 +24097,7 @@
           <a:bodyPr wrap="square" lIns="0" tIns="0" rIns="0" bIns="0" rtlCol="0" anchor="ctr"/>
           <a:lstStyle/>
           <a:p>
-            <a:pPr marL="0" indent="0">
+            <a:pPr indent="0" marL="0">
               <a:buNone/>
             </a:pPr>
             <a:r>
@@ -23276,7 +24136,7 @@
           <a:bodyPr wrap="square" lIns="0" tIns="0" rIns="0" bIns="0" rtlCol="0" anchor="t"/>
           <a:lstStyle/>
           <a:p>
-            <a:pPr marL="0" indent="0">
+            <a:pPr indent="0" marL="0">
               <a:lnSpc>
                 <a:spcPct val="108000"/>
               </a:lnSpc>
@@ -23296,7 +24156,7 @@
             <a:endParaRPr lang="en-US" sz="1200" dirty="0"/>
           </a:p>
           <a:p>
-            <a:pPr marL="0" indent="0">
+            <a:pPr indent="0" marL="0">
               <a:lnSpc>
                 <a:spcPct val="108000"/>
               </a:lnSpc>
@@ -23305,7 +24165,7 @@
             <a:endParaRPr lang="en-US" sz="1200" dirty="0"/>
           </a:p>
           <a:p>
-            <a:pPr marL="0" indent="0">
+            <a:pPr indent="0" marL="0">
               <a:lnSpc>
                 <a:spcPct val="108000"/>
               </a:lnSpc>
@@ -23374,7 +24234,7 @@
           <a:bodyPr wrap="square" lIns="0" tIns="0" rIns="0" bIns="0" rtlCol="0" anchor="ctr"/>
           <a:lstStyle/>
           <a:p>
-            <a:pPr marL="0" indent="0">
+            <a:pPr indent="0" marL="0">
               <a:buNone/>
             </a:pPr>
             <a:r>
@@ -23413,7 +24273,7 @@
           <a:bodyPr wrap="square" lIns="0" tIns="0" rIns="0" bIns="0" rtlCol="0" anchor="t"/>
           <a:lstStyle/>
           <a:p>
-            <a:pPr marL="0" indent="0">
+            <a:pPr indent="0" marL="0">
               <a:buNone/>
             </a:pPr>
             <a:r>
@@ -23451,7 +24311,7 @@
           </a:prstGeom>
           <a:extLst>
             <a:ext uri="{C572A759-6A51-4108-AA02-DFA0A04FC94B}">
-              <ma14:wrappingTextBoxFlag xmlns="" xmlns:ma14="http://schemas.microsoft.com/office/mac/drawingml/2011/main" val="0"/>
+              <ma14:wrappingTextBoxFlag xmlns:ma14="http://schemas.microsoft.com/office/mac/drawingml/2011/main" val="0"/>
             </a:ext>
           </a:extLst>
         </p:spPr>
@@ -23472,7 +24332,7 @@
           <a:p>
             <a:pPr algn="l"/>
             <a:fld id="{F7021451-1387-4CA6-816F-3879F97B5CBC}" type="slidenum">
-              <a:rPr lang="en-US" b="0"/>
+              <a:rPr b="0" lang="en-US"/>
               <a:t>29</a:t>
             </a:fld>
             <a:endParaRPr lang="en-US"/>
@@ -23547,7 +24407,7 @@
           <a:bodyPr wrap="square" lIns="0" tIns="0" rIns="0" bIns="0" rtlCol="0" anchor="ctr"/>
           <a:lstStyle/>
           <a:p>
-            <a:pPr marL="0" indent="0">
+            <a:pPr indent="0" marL="0">
               <a:buNone/>
             </a:pPr>
             <a:r>
@@ -23586,7 +24446,7 @@
           <a:bodyPr wrap="square" lIns="0" tIns="0" rIns="0" bIns="0" rtlCol="0" anchor="t"/>
           <a:lstStyle/>
           <a:p>
-            <a:pPr marL="0" indent="0">
+            <a:pPr indent="0" marL="0">
               <a:lnSpc>
                 <a:spcPct val="100000"/>
               </a:lnSpc>
@@ -23655,11 +24515,11 @@
           <a:bodyPr wrap="square" lIns="0" tIns="0" rIns="0" bIns="0" rtlCol="0" anchor="ctr"/>
           <a:lstStyle/>
           <a:p>
-            <a:pPr marL="0" indent="0" algn="ctr">
-              <a:buNone/>
-            </a:pPr>
-            <a:r>
-              <a:rPr lang="en-US" sz="900" b="1" kern="0" spc="100" dirty="0">
+            <a:pPr algn="ctr" indent="0" marL="0">
+              <a:buNone/>
+            </a:pPr>
+            <a:r>
+              <a:rPr lang="en-US" sz="900" b="1" spc="100" kern="0" dirty="0">
                 <a:solidFill>
                   <a:srgbClr val="5A05F4"/>
                 </a:solidFill>
@@ -23675,14 +24535,14 @@
       </p:sp>
       <p:pic>
         <p:nvPicPr>
-          <p:cNvPr id="7" name="Image 0" descr="preencoded.png"/>
+          <p:cNvPr id="7" name="Image 0" descr="preencoded.png">    </p:cNvPr>
           <p:cNvPicPr>
             <a:picLocks noChangeAspect="1"/>
           </p:cNvPicPr>
           <p:nvPr/>
         </p:nvPicPr>
         <p:blipFill>
-          <a:blip r:embed="rId3"/>
+          <a:blip r:embed="rId1"/>
           <a:stretch>
             <a:fillRect/>
           </a:stretch>
@@ -23760,7 +24620,7 @@
           <a:bodyPr wrap="square" lIns="0" tIns="0" rIns="0" bIns="0" rtlCol="0" anchor="ctr"/>
           <a:lstStyle/>
           <a:p>
-            <a:pPr marL="0" indent="0" algn="ctr">
+            <a:pPr algn="ctr" indent="0" marL="0">
               <a:buNone/>
             </a:pPr>
             <a:r>
@@ -23799,7 +24659,7 @@
           <a:bodyPr wrap="square" lIns="0" tIns="0" rIns="0" bIns="0" rtlCol="0" anchor="ctr"/>
           <a:lstStyle/>
           <a:p>
-            <a:pPr marL="0" indent="0">
+            <a:pPr indent="0" marL="0">
               <a:buNone/>
             </a:pPr>
             <a:r>
@@ -23838,7 +24698,7 @@
           <a:bodyPr wrap="square" lIns="0" tIns="0" rIns="0" bIns="0" rtlCol="0" anchor="t"/>
           <a:lstStyle/>
           <a:p>
-            <a:pPr marL="0" indent="0">
+            <a:pPr indent="0" marL="0">
               <a:lnSpc>
                 <a:spcPct val="108000"/>
               </a:lnSpc>
@@ -23922,7 +24782,7 @@
           <a:bodyPr wrap="square" lIns="0" tIns="0" rIns="0" bIns="0" rtlCol="0" anchor="ctr"/>
           <a:lstStyle/>
           <a:p>
-            <a:pPr marL="0" indent="0" algn="ctr">
+            <a:pPr algn="ctr" indent="0" marL="0">
               <a:buNone/>
             </a:pPr>
             <a:r>
@@ -23961,7 +24821,7 @@
           <a:bodyPr wrap="square" lIns="0" tIns="0" rIns="0" bIns="0" rtlCol="0" anchor="ctr"/>
           <a:lstStyle/>
           <a:p>
-            <a:pPr marL="0" indent="0">
+            <a:pPr indent="0" marL="0">
               <a:buNone/>
             </a:pPr>
             <a:r>
@@ -24000,7 +24860,7 @@
           <a:bodyPr wrap="square" lIns="0" tIns="0" rIns="0" bIns="0" rtlCol="0" anchor="t"/>
           <a:lstStyle/>
           <a:p>
-            <a:pPr marL="0" indent="0">
+            <a:pPr indent="0" marL="0">
               <a:lnSpc>
                 <a:spcPct val="108000"/>
               </a:lnSpc>
@@ -24084,7 +24944,7 @@
           <a:bodyPr wrap="square" lIns="0" tIns="0" rIns="0" bIns="0" rtlCol="0" anchor="ctr"/>
           <a:lstStyle/>
           <a:p>
-            <a:pPr marL="0" indent="0" algn="ctr">
+            <a:pPr algn="ctr" indent="0" marL="0">
               <a:buNone/>
             </a:pPr>
             <a:r>
@@ -24123,7 +24983,7 @@
           <a:bodyPr wrap="square" lIns="0" tIns="0" rIns="0" bIns="0" rtlCol="0" anchor="ctr"/>
           <a:lstStyle/>
           <a:p>
-            <a:pPr marL="0" indent="0">
+            <a:pPr indent="0" marL="0">
               <a:buNone/>
             </a:pPr>
             <a:r>
@@ -24162,7 +25022,7 @@
           <a:bodyPr wrap="square" lIns="0" tIns="0" rIns="0" bIns="0" rtlCol="0" anchor="t"/>
           <a:lstStyle/>
           <a:p>
-            <a:pPr marL="0" indent="0">
+            <a:pPr indent="0" marL="0">
               <a:lnSpc>
                 <a:spcPct val="108000"/>
               </a:lnSpc>
@@ -24246,7 +25106,7 @@
           <a:bodyPr wrap="square" lIns="0" tIns="0" rIns="0" bIns="0" rtlCol="0" anchor="ctr"/>
           <a:lstStyle/>
           <a:p>
-            <a:pPr marL="0" indent="0" algn="ctr">
+            <a:pPr algn="ctr" indent="0" marL="0">
               <a:buNone/>
             </a:pPr>
             <a:r>
@@ -24285,7 +25145,7 @@
           <a:bodyPr wrap="square" lIns="0" tIns="0" rIns="0" bIns="0" rtlCol="0" anchor="ctr"/>
           <a:lstStyle/>
           <a:p>
-            <a:pPr marL="0" indent="0">
+            <a:pPr indent="0" marL="0">
               <a:buNone/>
             </a:pPr>
             <a:r>
@@ -24324,7 +25184,7 @@
           <a:bodyPr wrap="square" lIns="0" tIns="0" rIns="0" bIns="0" rtlCol="0" anchor="t"/>
           <a:lstStyle/>
           <a:p>
-            <a:pPr marL="0" indent="0">
+            <a:pPr indent="0" marL="0">
               <a:lnSpc>
                 <a:spcPct val="108000"/>
               </a:lnSpc>
@@ -24408,7 +25268,7 @@
           <a:bodyPr wrap="square" lIns="0" tIns="0" rIns="0" bIns="0" rtlCol="0" anchor="ctr"/>
           <a:lstStyle/>
           <a:p>
-            <a:pPr marL="0" indent="0" algn="ctr">
+            <a:pPr algn="ctr" indent="0" marL="0">
               <a:buNone/>
             </a:pPr>
             <a:r>
@@ -24447,7 +25307,7 @@
           <a:bodyPr wrap="square" lIns="0" tIns="0" rIns="0" bIns="0" rtlCol="0" anchor="ctr"/>
           <a:lstStyle/>
           <a:p>
-            <a:pPr marL="0" indent="0">
+            <a:pPr indent="0" marL="0">
               <a:buNone/>
             </a:pPr>
             <a:r>
@@ -24486,7 +25346,7 @@
           <a:bodyPr wrap="square" lIns="0" tIns="0" rIns="0" bIns="0" rtlCol="0" anchor="t"/>
           <a:lstStyle/>
           <a:p>
-            <a:pPr marL="0" indent="0">
+            <a:pPr indent="0" marL="0">
               <a:lnSpc>
                 <a:spcPct val="108000"/>
               </a:lnSpc>
@@ -24570,7 +25430,7 @@
           <a:bodyPr wrap="square" lIns="0" tIns="0" rIns="0" bIns="0" rtlCol="0" anchor="ctr"/>
           <a:lstStyle/>
           <a:p>
-            <a:pPr marL="0" indent="0" algn="ctr">
+            <a:pPr algn="ctr" indent="0" marL="0">
               <a:buNone/>
             </a:pPr>
             <a:r>
@@ -24609,7 +25469,7 @@
           <a:bodyPr wrap="square" lIns="0" tIns="0" rIns="0" bIns="0" rtlCol="0" anchor="ctr"/>
           <a:lstStyle/>
           <a:p>
-            <a:pPr marL="0" indent="0">
+            <a:pPr indent="0" marL="0">
               <a:buNone/>
             </a:pPr>
             <a:r>
@@ -24648,7 +25508,7 @@
           <a:bodyPr wrap="square" lIns="0" tIns="0" rIns="0" bIns="0" rtlCol="0" anchor="t"/>
           <a:lstStyle/>
           <a:p>
-            <a:pPr marL="0" indent="0">
+            <a:pPr indent="0" marL="0">
               <a:lnSpc>
                 <a:spcPct val="108000"/>
               </a:lnSpc>
@@ -24671,7 +25531,7 @@
       </p:sp>
       <p:sp>
         <p:nvSpPr>
-          <p:cNvPr id="38" name="Slide Number Placeholder 0"/>
+          <p:cNvPr id="25" name="Slide Number Placeholder 0"/>
           <p:cNvSpPr>
             <a:spLocks noGrp="1"/>
           </p:cNvSpPr>
@@ -24689,7 +25549,7 @@
           </a:prstGeom>
           <a:extLst>
             <a:ext uri="{C572A759-6A51-4108-AA02-DFA0A04FC94B}">
-              <ma14:wrappingTextBoxFlag xmlns="" xmlns:ma14="http://schemas.microsoft.com/office/mac/drawingml/2011/main" val="0"/>
+              <ma14:wrappingTextBoxFlag xmlns:ma14="http://schemas.microsoft.com/office/mac/drawingml/2011/main" val="0"/>
             </a:ext>
           </a:extLst>
         </p:spPr>
@@ -24710,7 +25570,7 @@
           <a:p>
             <a:pPr algn="l"/>
             <a:fld id="{F7021451-1387-4CA6-816F-3879F97B5CBC}" type="slidenum">
-              <a:rPr lang="en-US" b="0"/>
+              <a:rPr b="0" lang="en-US"/>
               <a:t>3</a:t>
             </a:fld>
             <a:endParaRPr lang="en-US"/>
@@ -24763,11 +25623,11 @@
           <a:bodyPr wrap="square" lIns="0" tIns="0" rIns="0" bIns="0" rtlCol="0" anchor="ctr"/>
           <a:lstStyle/>
           <a:p>
-            <a:pPr marL="0" indent="0">
-              <a:buNone/>
-            </a:pPr>
-            <a:r>
-              <a:rPr lang="en-US" sz="1200" b="1" kern="0" spc="400" dirty="0">
+            <a:pPr indent="0" marL="0">
+              <a:buNone/>
+            </a:pPr>
+            <a:r>
+              <a:rPr lang="en-US" sz="1200" b="1" spc="400" kern="0" dirty="0">
                 <a:solidFill>
                   <a:srgbClr val="FFFFFF"/>
                 </a:solidFill>
@@ -24802,11 +25662,11 @@
           <a:bodyPr wrap="square" lIns="0" tIns="0" rIns="0" bIns="0" rtlCol="0" anchor="ctr"/>
           <a:lstStyle/>
           <a:p>
-            <a:pPr marL="0" indent="0">
-              <a:buNone/>
-            </a:pPr>
-            <a:r>
-              <a:rPr lang="en-US" sz="1100" b="1" kern="0" spc="300" dirty="0">
+            <a:pPr indent="0" marL="0">
+              <a:buNone/>
+            </a:pPr>
+            <a:r>
+              <a:rPr lang="en-US" sz="1100" b="1" spc="300" kern="0" dirty="0">
                 <a:solidFill>
                   <a:srgbClr val="C4B3F5"/>
                 </a:solidFill>
@@ -24861,7 +25721,7 @@
           <a:bodyPr wrap="square" lIns="0" tIns="0" rIns="0" bIns="0" rtlCol="0" anchor="t"/>
           <a:lstStyle/>
           <a:p>
-            <a:pPr marL="0" indent="0">
+            <a:pPr indent="0" marL="0">
               <a:lnSpc>
                 <a:spcPct val="110000"/>
               </a:lnSpc>
@@ -24923,7 +25783,7 @@
           <a:bodyPr wrap="square" lIns="0" tIns="0" rIns="0" bIns="0" rtlCol="0" anchor="t"/>
           <a:lstStyle/>
           <a:p>
-            <a:pPr marL="0" indent="0">
+            <a:pPr indent="0" marL="0">
               <a:lnSpc>
                 <a:spcPct val="110000"/>
               </a:lnSpc>
@@ -24985,7 +25845,7 @@
           <a:bodyPr wrap="square" lIns="0" tIns="0" rIns="0" bIns="0" rtlCol="0" anchor="t"/>
           <a:lstStyle/>
           <a:p>
-            <a:pPr marL="0" indent="0">
+            <a:pPr indent="0" marL="0">
               <a:lnSpc>
                 <a:spcPct val="110000"/>
               </a:lnSpc>
@@ -25047,7 +25907,7 @@
           <a:bodyPr wrap="square" lIns="0" tIns="0" rIns="0" bIns="0" rtlCol="0" anchor="t"/>
           <a:lstStyle/>
           <a:p>
-            <a:pPr marL="0" indent="0">
+            <a:pPr indent="0" marL="0">
               <a:lnSpc>
                 <a:spcPct val="110000"/>
               </a:lnSpc>
@@ -25109,7 +25969,7 @@
           <a:bodyPr wrap="square" lIns="0" tIns="0" rIns="0" bIns="0" rtlCol="0" anchor="t"/>
           <a:lstStyle/>
           <a:p>
-            <a:pPr marL="0" indent="0">
+            <a:pPr indent="0" marL="0">
               <a:lnSpc>
                 <a:spcPct val="110000"/>
               </a:lnSpc>
@@ -25178,7 +26038,7 @@
           <a:bodyPr wrap="square" lIns="0" tIns="0" rIns="0" bIns="0" rtlCol="0" anchor="ctr"/>
           <a:lstStyle/>
           <a:p>
-            <a:pPr marL="0" indent="0">
+            <a:pPr indent="0" marL="0">
               <a:buNone/>
             </a:pPr>
             <a:r>
@@ -25217,7 +26077,7 @@
           <a:bodyPr wrap="square" lIns="0" tIns="0" rIns="0" bIns="0" rtlCol="0" anchor="t"/>
           <a:lstStyle/>
           <a:p>
-            <a:pPr marL="0" indent="0">
+            <a:pPr indent="0" marL="0">
               <a:lnSpc>
                 <a:spcPct val="115000"/>
               </a:lnSpc>
@@ -25284,11 +26144,11 @@
           <a:bodyPr wrap="square" lIns="0" tIns="0" rIns="0" bIns="0" rtlCol="0" anchor="ctr"/>
           <a:lstStyle/>
           <a:p>
-            <a:pPr marL="0" indent="0">
-              <a:buNone/>
-            </a:pPr>
-            <a:r>
-              <a:rPr lang="en-US" sz="1200" b="1" kern="0" spc="400" dirty="0">
+            <a:pPr indent="0" marL="0">
+              <a:buNone/>
+            </a:pPr>
+            <a:r>
+              <a:rPr lang="en-US" sz="1200" b="1" spc="400" kern="0" dirty="0">
                 <a:solidFill>
                   <a:srgbClr val="FFFFFF"/>
                 </a:solidFill>
@@ -25323,7 +26183,7 @@
           <a:bodyPr wrap="square" lIns="0" tIns="0" rIns="0" bIns="0" rtlCol="0" anchor="ctr"/>
           <a:lstStyle/>
           <a:p>
-            <a:pPr marL="0" indent="0">
+            <a:pPr indent="0" marL="0">
               <a:buNone/>
             </a:pPr>
             <a:r>
@@ -25409,7 +26269,7 @@
           <a:bodyPr wrap="square" lIns="0" tIns="0" rIns="0" bIns="0" rtlCol="0" anchor="ctr"/>
           <a:lstStyle/>
           <a:p>
-            <a:pPr marL="0" indent="0">
+            <a:pPr indent="0" marL="0">
               <a:buNone/>
             </a:pPr>
             <a:r>
@@ -25475,11 +26335,11 @@
           <a:bodyPr wrap="square" lIns="0" tIns="0" rIns="0" bIns="0" rtlCol="0" anchor="ctr"/>
           <a:lstStyle/>
           <a:p>
-            <a:pPr marL="0" indent="0" algn="ctr">
-              <a:buNone/>
-            </a:pPr>
-            <a:r>
-              <a:rPr lang="en-US" sz="900" b="1" kern="0" spc="100" dirty="0">
+            <a:pPr algn="ctr" indent="0" marL="0">
+              <a:buNone/>
+            </a:pPr>
+            <a:r>
+              <a:rPr lang="en-US" sz="900" b="1" spc="100" kern="0" dirty="0">
                 <a:solidFill>
                   <a:srgbClr val="5A05F4"/>
                 </a:solidFill>
@@ -25495,14 +26355,14 @@
       </p:sp>
       <p:pic>
         <p:nvPicPr>
-          <p:cNvPr id="6" name="Image 0" descr="preencoded.png"/>
+          <p:cNvPr id="6" name="Image 0" descr="preencoded.png">    </p:cNvPr>
           <p:cNvPicPr>
             <a:picLocks noChangeAspect="1"/>
           </p:cNvPicPr>
           <p:nvPr/>
         </p:nvPicPr>
         <p:blipFill>
-          <a:blip r:embed="rId3"/>
+          <a:blip r:embed="rId1"/>
           <a:stretch>
             <a:fillRect/>
           </a:stretch>
@@ -25580,7 +26440,7 @@
           <a:bodyPr wrap="square" lIns="0" tIns="0" rIns="0" bIns="0" rtlCol="0" anchor="ctr"/>
           <a:lstStyle/>
           <a:p>
-            <a:pPr marL="0" indent="0" algn="ctr">
+            <a:pPr algn="ctr" indent="0" marL="0">
               <a:buNone/>
             </a:pPr>
             <a:r>
@@ -25619,7 +26479,7 @@
           <a:bodyPr wrap="square" lIns="0" tIns="0" rIns="0" bIns="0" rtlCol="0" anchor="ctr"/>
           <a:lstStyle/>
           <a:p>
-            <a:pPr marL="0" indent="0">
+            <a:pPr indent="0" marL="0">
               <a:buNone/>
             </a:pPr>
             <a:r>
@@ -25700,7 +26560,7 @@
           <a:bodyPr wrap="square" lIns="0" tIns="0" rIns="0" bIns="0" rtlCol="0" anchor="ctr"/>
           <a:lstStyle/>
           <a:p>
-            <a:pPr marL="0" indent="0" algn="ctr">
+            <a:pPr algn="ctr" indent="0" marL="0">
               <a:buNone/>
             </a:pPr>
             <a:r>
@@ -25739,7 +26599,7 @@
           <a:bodyPr wrap="square" lIns="0" tIns="0" rIns="0" bIns="0" rtlCol="0" anchor="ctr"/>
           <a:lstStyle/>
           <a:p>
-            <a:pPr marL="0" indent="0">
+            <a:pPr indent="0" marL="0">
               <a:buNone/>
             </a:pPr>
             <a:r>
@@ -25820,7 +26680,7 @@
           <a:bodyPr wrap="square" lIns="0" tIns="0" rIns="0" bIns="0" rtlCol="0" anchor="ctr"/>
           <a:lstStyle/>
           <a:p>
-            <a:pPr marL="0" indent="0" algn="ctr">
+            <a:pPr algn="ctr" indent="0" marL="0">
               <a:buNone/>
             </a:pPr>
             <a:r>
@@ -25859,7 +26719,7 @@
           <a:bodyPr wrap="square" lIns="0" tIns="0" rIns="0" bIns="0" rtlCol="0" anchor="ctr"/>
           <a:lstStyle/>
           <a:p>
-            <a:pPr marL="0" indent="0">
+            <a:pPr indent="0" marL="0">
               <a:buNone/>
             </a:pPr>
             <a:r>
@@ -25940,7 +26800,7 @@
           <a:bodyPr wrap="square" lIns="0" tIns="0" rIns="0" bIns="0" rtlCol="0" anchor="ctr"/>
           <a:lstStyle/>
           <a:p>
-            <a:pPr marL="0" indent="0" algn="ctr">
+            <a:pPr algn="ctr" indent="0" marL="0">
               <a:buNone/>
             </a:pPr>
             <a:r>
@@ -25979,7 +26839,7 @@
           <a:bodyPr wrap="square" lIns="0" tIns="0" rIns="0" bIns="0" rtlCol="0" anchor="ctr"/>
           <a:lstStyle/>
           <a:p>
-            <a:pPr marL="0" indent="0">
+            <a:pPr indent="0" marL="0">
               <a:buNone/>
             </a:pPr>
             <a:r>
@@ -26060,7 +26920,7 @@
           <a:bodyPr wrap="square" lIns="0" tIns="0" rIns="0" bIns="0" rtlCol="0" anchor="ctr"/>
           <a:lstStyle/>
           <a:p>
-            <a:pPr marL="0" indent="0" algn="ctr">
+            <a:pPr algn="ctr" indent="0" marL="0">
               <a:buNone/>
             </a:pPr>
             <a:r>
@@ -26099,7 +26959,7 @@
           <a:bodyPr wrap="square" lIns="0" tIns="0" rIns="0" bIns="0" rtlCol="0" anchor="ctr"/>
           <a:lstStyle/>
           <a:p>
-            <a:pPr marL="0" indent="0">
+            <a:pPr indent="0" marL="0">
               <a:buNone/>
             </a:pPr>
             <a:r>
@@ -26180,7 +27040,7 @@
           <a:bodyPr wrap="square" lIns="0" tIns="0" rIns="0" bIns="0" rtlCol="0" anchor="ctr"/>
           <a:lstStyle/>
           <a:p>
-            <a:pPr marL="0" indent="0" algn="ctr">
+            <a:pPr algn="ctr" indent="0" marL="0">
               <a:buNone/>
             </a:pPr>
             <a:r>
@@ -26219,7 +27079,7 @@
           <a:bodyPr wrap="square" lIns="0" tIns="0" rIns="0" bIns="0" rtlCol="0" anchor="ctr"/>
           <a:lstStyle/>
           <a:p>
-            <a:pPr marL="0" indent="0">
+            <a:pPr indent="0" marL="0">
               <a:buNone/>
             </a:pPr>
             <a:r>
@@ -26300,7 +27160,7 @@
           <a:bodyPr wrap="square" lIns="0" tIns="0" rIns="0" bIns="0" rtlCol="0" anchor="ctr"/>
           <a:lstStyle/>
           <a:p>
-            <a:pPr marL="0" indent="0" algn="ctr">
+            <a:pPr algn="ctr" indent="0" marL="0">
               <a:buNone/>
             </a:pPr>
             <a:r>
@@ -26339,7 +27199,7 @@
           <a:bodyPr wrap="square" lIns="0" tIns="0" rIns="0" bIns="0" rtlCol="0" anchor="ctr"/>
           <a:lstStyle/>
           <a:p>
-            <a:pPr marL="0" indent="0">
+            <a:pPr indent="0" marL="0">
               <a:buNone/>
             </a:pPr>
             <a:r>
@@ -26420,7 +27280,7 @@
           <a:bodyPr wrap="square" lIns="0" tIns="0" rIns="0" bIns="0" rtlCol="0" anchor="ctr"/>
           <a:lstStyle/>
           <a:p>
-            <a:pPr marL="0" indent="0" algn="ctr">
+            <a:pPr algn="ctr" indent="0" marL="0">
               <a:buNone/>
             </a:pPr>
             <a:r>
@@ -26459,7 +27319,7 @@
           <a:bodyPr wrap="square" lIns="0" tIns="0" rIns="0" bIns="0" rtlCol="0" anchor="ctr"/>
           <a:lstStyle/>
           <a:p>
-            <a:pPr marL="0" indent="0">
+            <a:pPr indent="0" marL="0">
               <a:buNone/>
             </a:pPr>
             <a:r>
@@ -26540,7 +27400,7 @@
           <a:bodyPr wrap="square" lIns="0" tIns="0" rIns="0" bIns="0" rtlCol="0" anchor="ctr"/>
           <a:lstStyle/>
           <a:p>
-            <a:pPr marL="0" indent="0" algn="ctr">
+            <a:pPr algn="ctr" indent="0" marL="0">
               <a:buNone/>
             </a:pPr>
             <a:r>
@@ -26579,7 +27439,7 @@
           <a:bodyPr wrap="square" lIns="0" tIns="0" rIns="0" bIns="0" rtlCol="0" anchor="ctr"/>
           <a:lstStyle/>
           <a:p>
-            <a:pPr marL="0" indent="0">
+            <a:pPr indent="0" marL="0">
               <a:buNone/>
             </a:pPr>
             <a:r>
@@ -26660,7 +27520,7 @@
           <a:bodyPr wrap="square" lIns="0" tIns="0" rIns="0" bIns="0" rtlCol="0" anchor="ctr"/>
           <a:lstStyle/>
           <a:p>
-            <a:pPr marL="0" indent="0" algn="ctr">
+            <a:pPr algn="ctr" indent="0" marL="0">
               <a:buNone/>
             </a:pPr>
             <a:r>
@@ -26699,7 +27559,7 @@
           <a:bodyPr wrap="square" lIns="0" tIns="0" rIns="0" bIns="0" rtlCol="0" anchor="ctr"/>
           <a:lstStyle/>
           <a:p>
-            <a:pPr marL="0" indent="0">
+            <a:pPr indent="0" marL="0">
               <a:buNone/>
             </a:pPr>
             <a:r>
@@ -26780,7 +27640,7 @@
           <a:bodyPr wrap="square" lIns="0" tIns="0" rIns="0" bIns="0" rtlCol="0" anchor="ctr"/>
           <a:lstStyle/>
           <a:p>
-            <a:pPr marL="0" indent="0" algn="ctr">
+            <a:pPr algn="ctr" indent="0" marL="0">
               <a:buNone/>
             </a:pPr>
             <a:r>
@@ -26819,7 +27679,7 @@
           <a:bodyPr wrap="square" lIns="0" tIns="0" rIns="0" bIns="0" rtlCol="0" anchor="ctr"/>
           <a:lstStyle/>
           <a:p>
-            <a:pPr marL="0" indent="0">
+            <a:pPr indent="0" marL="0">
               <a:buNone/>
             </a:pPr>
             <a:r>
@@ -26846,7 +27706,7 @@
         <p:spPr>
           <a:xfrm>
             <a:off x="566928" y="5779008"/>
-            <a:ext cx="10927080" cy="402336"/>
+            <a:ext cx="11064240" cy="402336"/>
           </a:xfrm>
           <a:prstGeom prst="roundRect">
             <a:avLst>
@@ -26885,7 +27745,7 @@
           <a:bodyPr wrap="square" lIns="0" tIns="0" rIns="0" bIns="0" rtlCol="0" anchor="ctr"/>
           <a:lstStyle/>
           <a:p>
-            <a:pPr marL="0" indent="0">
+            <a:pPr indent="0" marL="0">
               <a:lnSpc>
                 <a:spcPct val="112000"/>
               </a:lnSpc>
@@ -26908,7 +27768,7 @@
       </p:sp>
       <p:sp>
         <p:nvSpPr>
-          <p:cNvPr id="53" name="Slide Number Placeholder 0"/>
+          <p:cNvPr id="25" name="Slide Number Placeholder 0"/>
           <p:cNvSpPr>
             <a:spLocks noGrp="1"/>
           </p:cNvSpPr>
@@ -26926,7 +27786,7 @@
           </a:prstGeom>
           <a:extLst>
             <a:ext uri="{C572A759-6A51-4108-AA02-DFA0A04FC94B}">
-              <ma14:wrappingTextBoxFlag xmlns="" xmlns:ma14="http://schemas.microsoft.com/office/mac/drawingml/2011/main" val="0"/>
+              <ma14:wrappingTextBoxFlag xmlns:ma14="http://schemas.microsoft.com/office/mac/drawingml/2011/main" val="0"/>
             </a:ext>
           </a:extLst>
         </p:spPr>
@@ -26947,7 +27807,7 @@
           <a:p>
             <a:pPr algn="l"/>
             <a:fld id="{F7021451-1387-4CA6-816F-3879F97B5CBC}" type="slidenum">
-              <a:rPr lang="en-US" b="0"/>
+              <a:rPr b="0" lang="en-US"/>
               <a:t>4</a:t>
             </a:fld>
             <a:endParaRPr lang="en-US"/>
@@ -27022,7 +27882,7 @@
           <a:bodyPr wrap="square" lIns="0" tIns="0" rIns="0" bIns="0" rtlCol="0" anchor="ctr"/>
           <a:lstStyle/>
           <a:p>
-            <a:pPr marL="0" indent="0">
+            <a:pPr indent="0" marL="0">
               <a:buNone/>
             </a:pPr>
             <a:r>
@@ -27061,7 +27921,7 @@
           <a:bodyPr wrap="square" lIns="0" tIns="0" rIns="0" bIns="0" rtlCol="0" anchor="t"/>
           <a:lstStyle/>
           <a:p>
-            <a:pPr marL="0" indent="0">
+            <a:pPr indent="0" marL="0">
               <a:lnSpc>
                 <a:spcPct val="100000"/>
               </a:lnSpc>
@@ -27130,11 +27990,11 @@
           <a:bodyPr wrap="square" lIns="0" tIns="0" rIns="0" bIns="0" rtlCol="0" anchor="ctr"/>
           <a:lstStyle/>
           <a:p>
-            <a:pPr marL="0" indent="0" algn="ctr">
-              <a:buNone/>
-            </a:pPr>
-            <a:r>
-              <a:rPr lang="en-US" sz="900" b="1" kern="0" spc="100" dirty="0">
+            <a:pPr algn="ctr" indent="0" marL="0">
+              <a:buNone/>
+            </a:pPr>
+            <a:r>
+              <a:rPr lang="en-US" sz="900" b="1" spc="100" kern="0" dirty="0">
                 <a:solidFill>
                   <a:srgbClr val="5A05F4"/>
                 </a:solidFill>
@@ -27150,14 +28010,14 @@
       </p:sp>
       <p:pic>
         <p:nvPicPr>
-          <p:cNvPr id="7" name="Image 0" descr="preencoded.png"/>
+          <p:cNvPr id="7" name="Image 0" descr="preencoded.png">    </p:cNvPr>
           <p:cNvPicPr>
             <a:picLocks noChangeAspect="1"/>
           </p:cNvPicPr>
           <p:nvPr/>
         </p:nvPicPr>
         <p:blipFill>
-          <a:blip r:embed="rId3"/>
+          <a:blip r:embed="rId1"/>
           <a:stretch>
             <a:fillRect/>
           </a:stretch>
@@ -27215,7 +28075,7 @@
           <a:bodyPr wrap="square" lIns="0" tIns="0" rIns="0" bIns="0" rtlCol="0" anchor="ctr"/>
           <a:lstStyle/>
           <a:p>
-            <a:pPr marL="0" indent="0" algn="ctr">
+            <a:pPr algn="ctr" indent="0" marL="0">
               <a:buNone/>
             </a:pPr>
             <a:r>
@@ -27281,7 +28141,7 @@
           <a:bodyPr wrap="square" lIns="0" tIns="0" rIns="0" bIns="0" rtlCol="0" anchor="ctr"/>
           <a:lstStyle/>
           <a:p>
-            <a:pPr marL="0" indent="0">
+            <a:pPr indent="0" marL="0">
               <a:buNone/>
             </a:pPr>
             <a:r>
@@ -27295,6 +28155,9 @@
               </a:rPr>
               <a:t>Основа + промпти   </a:t>
             </a:r>
+            <a:pPr indent="0" marL="0">
+              <a:buNone/>
+            </a:pPr>
             <a:r>
               <a:rPr lang="en-US" sz="1150" dirty="0">
                 <a:solidFill>
@@ -27353,7 +28216,7 @@
           <a:bodyPr wrap="square" lIns="0" tIns="0" rIns="0" bIns="0" rtlCol="0" anchor="ctr"/>
           <a:lstStyle/>
           <a:p>
-            <a:pPr marL="0" indent="0" algn="ctr">
+            <a:pPr algn="ctr" indent="0" marL="0">
               <a:buNone/>
             </a:pPr>
             <a:r>
@@ -27419,7 +28282,7 @@
           <a:bodyPr wrap="square" lIns="0" tIns="0" rIns="0" bIns="0" rtlCol="0" anchor="ctr"/>
           <a:lstStyle/>
           <a:p>
-            <a:pPr marL="0" indent="0">
+            <a:pPr indent="0" marL="0">
               <a:buNone/>
             </a:pPr>
             <a:r>
@@ -27433,6 +28296,9 @@
               </a:rPr>
               <a:t>Routing + cost   </a:t>
             </a:r>
+            <a:pPr indent="0" marL="0">
+              <a:buNone/>
+            </a:pPr>
             <a:r>
               <a:rPr lang="en-US" sz="1150" dirty="0">
                 <a:solidFill>
@@ -27491,7 +28357,7 @@
           <a:bodyPr wrap="square" lIns="0" tIns="0" rIns="0" bIns="0" rtlCol="0" anchor="ctr"/>
           <a:lstStyle/>
           <a:p>
-            <a:pPr marL="0" indent="0" algn="ctr">
+            <a:pPr algn="ctr" indent="0" marL="0">
               <a:buNone/>
             </a:pPr>
             <a:r>
@@ -27557,7 +28423,7 @@
           <a:bodyPr wrap="square" lIns="0" tIns="0" rIns="0" bIns="0" rtlCol="0" anchor="ctr"/>
           <a:lstStyle/>
           <a:p>
-            <a:pPr marL="0" indent="0">
+            <a:pPr indent="0" marL="0">
               <a:buNone/>
             </a:pPr>
             <a:r>
@@ -27571,6 +28437,9 @@
               </a:rPr>
               <a:t>Кеш + tools   </a:t>
             </a:r>
+            <a:pPr indent="0" marL="0">
+              <a:buNone/>
+            </a:pPr>
             <a:r>
               <a:rPr lang="en-US" sz="1150" dirty="0">
                 <a:solidFill>
@@ -27629,7 +28498,7 @@
           <a:bodyPr wrap="square" lIns="0" tIns="0" rIns="0" bIns="0" rtlCol="0" anchor="ctr"/>
           <a:lstStyle/>
           <a:p>
-            <a:pPr marL="0" indent="0" algn="ctr">
+            <a:pPr algn="ctr" indent="0" marL="0">
               <a:buNone/>
             </a:pPr>
             <a:r>
@@ -27695,7 +28564,7 @@
           <a:bodyPr wrap="square" lIns="0" tIns="0" rIns="0" bIns="0" rtlCol="0" anchor="ctr"/>
           <a:lstStyle/>
           <a:p>
-            <a:pPr marL="0" indent="0">
+            <a:pPr indent="0" marL="0">
               <a:buNone/>
             </a:pPr>
             <a:r>
@@ -27709,6 +28578,9 @@
               </a:rPr>
               <a:t>Надійність + безпека   </a:t>
             </a:r>
+            <a:pPr indent="0" marL="0">
+              <a:buNone/>
+            </a:pPr>
             <a:r>
               <a:rPr lang="en-US" sz="1150" dirty="0">
                 <a:solidFill>
@@ -27767,7 +28639,7 @@
           <a:bodyPr wrap="square" lIns="0" tIns="0" rIns="0" bIns="0" rtlCol="0" anchor="ctr"/>
           <a:lstStyle/>
           <a:p>
-            <a:pPr marL="0" indent="0" algn="ctr">
+            <a:pPr algn="ctr" indent="0" marL="0">
               <a:buNone/>
             </a:pPr>
             <a:r>
@@ -27833,7 +28705,7 @@
           <a:bodyPr wrap="square" lIns="0" tIns="0" rIns="0" bIns="0" rtlCol="0" anchor="ctr"/>
           <a:lstStyle/>
           <a:p>
-            <a:pPr marL="0" indent="0">
+            <a:pPr indent="0" marL="0">
               <a:buNone/>
             </a:pPr>
             <a:r>
@@ -27847,6 +28719,9 @@
               </a:rPr>
               <a:t>Observability + evals   </a:t>
             </a:r>
+            <a:pPr indent="0" marL="0">
+              <a:buNone/>
+            </a:pPr>
             <a:r>
               <a:rPr lang="en-US" sz="1150" dirty="0">
                 <a:solidFill>
@@ -27905,7 +28780,7 @@
           <a:bodyPr wrap="square" lIns="0" tIns="0" rIns="0" bIns="0" rtlCol="0" anchor="ctr"/>
           <a:lstStyle/>
           <a:p>
-            <a:pPr marL="0" indent="0" algn="ctr">
+            <a:pPr algn="ctr" indent="0" marL="0">
               <a:buNone/>
             </a:pPr>
             <a:r>
@@ -27971,7 +28846,7 @@
           <a:bodyPr wrap="square" lIns="0" tIns="0" rIns="0" bIns="0" rtlCol="0" anchor="ctr"/>
           <a:lstStyle/>
           <a:p>
-            <a:pPr marL="0" indent="0">
+            <a:pPr indent="0" marL="0">
               <a:buNone/>
             </a:pPr>
             <a:r>
@@ -27985,6 +28860,9 @@
               </a:rPr>
               <a:t>CI + фінал   </a:t>
             </a:r>
+            <a:pPr indent="0" marL="0">
+              <a:buNone/>
+            </a:pPr>
             <a:r>
               <a:rPr lang="en-US" sz="1150" dirty="0">
                 <a:solidFill>
@@ -28002,7 +28880,7 @@
       </p:sp>
       <p:sp>
         <p:nvSpPr>
-          <p:cNvPr id="32" name="Slide Number Placeholder 0"/>
+          <p:cNvPr id="25" name="Slide Number Placeholder 0"/>
           <p:cNvSpPr>
             <a:spLocks noGrp="1"/>
           </p:cNvSpPr>
@@ -28020,7 +28898,7 @@
           </a:prstGeom>
           <a:extLst>
             <a:ext uri="{C572A759-6A51-4108-AA02-DFA0A04FC94B}">
-              <ma14:wrappingTextBoxFlag xmlns="" xmlns:ma14="http://schemas.microsoft.com/office/mac/drawingml/2011/main" val="0"/>
+              <ma14:wrappingTextBoxFlag xmlns:ma14="http://schemas.microsoft.com/office/mac/drawingml/2011/main" val="0"/>
             </a:ext>
           </a:extLst>
         </p:spPr>
@@ -28041,7 +28919,7 @@
           <a:p>
             <a:pPr algn="l"/>
             <a:fld id="{F7021451-1387-4CA6-816F-3879F97B5CBC}" type="slidenum">
-              <a:rPr lang="en-US" b="0"/>
+              <a:rPr b="0" lang="en-US"/>
               <a:t>5</a:t>
             </a:fld>
             <a:endParaRPr lang="en-US"/>
@@ -28116,7 +28994,7 @@
           <a:bodyPr wrap="square" lIns="0" tIns="0" rIns="0" bIns="0" rtlCol="0" anchor="ctr"/>
           <a:lstStyle/>
           <a:p>
-            <a:pPr marL="0" indent="0">
+            <a:pPr indent="0" marL="0">
               <a:buNone/>
             </a:pPr>
             <a:r>
@@ -28155,7 +29033,7 @@
           <a:bodyPr wrap="square" lIns="0" tIns="0" rIns="0" bIns="0" rtlCol="0" anchor="t"/>
           <a:lstStyle/>
           <a:p>
-            <a:pPr marL="0" indent="0">
+            <a:pPr indent="0" marL="0">
               <a:lnSpc>
                 <a:spcPct val="100000"/>
               </a:lnSpc>
@@ -28224,11 +29102,11 @@
           <a:bodyPr wrap="square" lIns="0" tIns="0" rIns="0" bIns="0" rtlCol="0" anchor="ctr"/>
           <a:lstStyle/>
           <a:p>
-            <a:pPr marL="0" indent="0" algn="ctr">
-              <a:buNone/>
-            </a:pPr>
-            <a:r>
-              <a:rPr lang="en-US" sz="900" b="1" kern="0" spc="100" dirty="0">
+            <a:pPr algn="ctr" indent="0" marL="0">
+              <a:buNone/>
+            </a:pPr>
+            <a:r>
+              <a:rPr lang="en-US" sz="900" b="1" spc="100" kern="0" dirty="0">
                 <a:solidFill>
                   <a:srgbClr val="5A05F4"/>
                 </a:solidFill>
@@ -28244,14 +29122,14 @@
       </p:sp>
       <p:pic>
         <p:nvPicPr>
-          <p:cNvPr id="7" name="Image 0" descr="preencoded.png"/>
+          <p:cNvPr id="7" name="Image 0" descr="preencoded.png">    </p:cNvPr>
           <p:cNvPicPr>
             <a:picLocks noChangeAspect="1"/>
           </p:cNvPicPr>
           <p:nvPr/>
         </p:nvPicPr>
         <p:blipFill>
-          <a:blip r:embed="rId3"/>
+          <a:blip r:embed="rId1"/>
           <a:stretch>
             <a:fillRect/>
           </a:stretch>
@@ -28314,7 +29192,7 @@
           <a:bodyPr wrap="square" lIns="0" tIns="0" rIns="0" bIns="0" rtlCol="0" anchor="ctr"/>
           <a:lstStyle/>
           <a:p>
-            <a:pPr marL="0" indent="0">
+            <a:pPr indent="0" marL="0">
               <a:buNone/>
             </a:pPr>
             <a:r>
@@ -28353,7 +29231,7 @@
           <a:bodyPr wrap="square" lIns="0" tIns="0" rIns="0" bIns="0" rtlCol="0" anchor="t"/>
           <a:lstStyle/>
           <a:p>
-            <a:pPr marL="0" indent="0">
+            <a:pPr indent="0" marL="0">
               <a:lnSpc>
                 <a:spcPct val="105000"/>
               </a:lnSpc>
@@ -28422,7 +29300,7 @@
           <a:bodyPr wrap="square" lIns="0" tIns="0" rIns="0" bIns="0" rtlCol="0" anchor="ctr"/>
           <a:lstStyle/>
           <a:p>
-            <a:pPr marL="0" indent="0">
+            <a:pPr indent="0" marL="0">
               <a:buNone/>
             </a:pPr>
             <a:r>
@@ -28461,7 +29339,7 @@
           <a:bodyPr wrap="square" lIns="0" tIns="0" rIns="0" bIns="0" rtlCol="0" anchor="t"/>
           <a:lstStyle/>
           <a:p>
-            <a:pPr marL="0" indent="0">
+            <a:pPr indent="0" marL="0">
               <a:lnSpc>
                 <a:spcPct val="105000"/>
               </a:lnSpc>
@@ -28530,7 +29408,7 @@
           <a:bodyPr wrap="square" lIns="0" tIns="0" rIns="0" bIns="0" rtlCol="0" anchor="ctr"/>
           <a:lstStyle/>
           <a:p>
-            <a:pPr marL="0" indent="0">
+            <a:pPr indent="0" marL="0">
               <a:buNone/>
             </a:pPr>
             <a:r>
@@ -28569,7 +29447,7 @@
           <a:bodyPr wrap="square" lIns="0" tIns="0" rIns="0" bIns="0" rtlCol="0" anchor="t"/>
           <a:lstStyle/>
           <a:p>
-            <a:pPr marL="0" indent="0">
+            <a:pPr indent="0" marL="0">
               <a:lnSpc>
                 <a:spcPct val="105000"/>
               </a:lnSpc>
@@ -28638,7 +29516,7 @@
           <a:bodyPr wrap="square" lIns="0" tIns="0" rIns="0" bIns="0" rtlCol="0" anchor="ctr"/>
           <a:lstStyle/>
           <a:p>
-            <a:pPr marL="0" indent="0">
+            <a:pPr indent="0" marL="0">
               <a:buNone/>
             </a:pPr>
             <a:r>
@@ -28677,7 +29555,7 @@
           <a:bodyPr wrap="square" lIns="0" tIns="0" rIns="0" bIns="0" rtlCol="0" anchor="t"/>
           <a:lstStyle/>
           <a:p>
-            <a:pPr marL="0" indent="0">
+            <a:pPr indent="0" marL="0">
               <a:lnSpc>
                 <a:spcPct val="105000"/>
               </a:lnSpc>
@@ -28746,7 +29624,7 @@
           <a:bodyPr wrap="square" lIns="0" tIns="0" rIns="0" bIns="0" rtlCol="0" anchor="ctr"/>
           <a:lstStyle/>
           <a:p>
-            <a:pPr marL="0" indent="0">
+            <a:pPr indent="0" marL="0">
               <a:buNone/>
             </a:pPr>
             <a:r>
@@ -28785,7 +29663,7 @@
           <a:bodyPr wrap="square" lIns="0" tIns="0" rIns="0" bIns="0" rtlCol="0" anchor="t"/>
           <a:lstStyle/>
           <a:p>
-            <a:pPr marL="0" indent="0">
+            <a:pPr indent="0" marL="0">
               <a:lnSpc>
                 <a:spcPct val="105000"/>
               </a:lnSpc>
@@ -28854,7 +29732,7 @@
           <a:bodyPr wrap="square" lIns="0" tIns="0" rIns="0" bIns="0" rtlCol="0" anchor="ctr"/>
           <a:lstStyle/>
           <a:p>
-            <a:pPr marL="0" indent="0">
+            <a:pPr indent="0" marL="0">
               <a:buNone/>
             </a:pPr>
             <a:r>
@@ -28893,7 +29771,7 @@
           <a:bodyPr wrap="square" lIns="0" tIns="0" rIns="0" bIns="0" rtlCol="0" anchor="t"/>
           <a:lstStyle/>
           <a:p>
-            <a:pPr marL="0" indent="0">
+            <a:pPr indent="0" marL="0">
               <a:lnSpc>
                 <a:spcPct val="105000"/>
               </a:lnSpc>
@@ -28962,7 +29840,7 @@
           <a:bodyPr wrap="square" lIns="0" tIns="0" rIns="0" bIns="0" rtlCol="0" anchor="ctr"/>
           <a:lstStyle/>
           <a:p>
-            <a:pPr marL="0" indent="0">
+            <a:pPr indent="0" marL="0">
               <a:lnSpc>
                 <a:spcPct val="112000"/>
               </a:lnSpc>
@@ -28985,7 +29863,7 @@
       </p:sp>
       <p:sp>
         <p:nvSpPr>
-          <p:cNvPr id="28" name="Slide Number Placeholder 0"/>
+          <p:cNvPr id="25" name="Slide Number Placeholder 0"/>
           <p:cNvSpPr>
             <a:spLocks noGrp="1"/>
           </p:cNvSpPr>
@@ -29003,7 +29881,7 @@
           </a:prstGeom>
           <a:extLst>
             <a:ext uri="{C572A759-6A51-4108-AA02-DFA0A04FC94B}">
-              <ma14:wrappingTextBoxFlag xmlns="" xmlns:ma14="http://schemas.microsoft.com/office/mac/drawingml/2011/main" val="0"/>
+              <ma14:wrappingTextBoxFlag xmlns:ma14="http://schemas.microsoft.com/office/mac/drawingml/2011/main" val="0"/>
             </a:ext>
           </a:extLst>
         </p:spPr>
@@ -29024,7 +29902,7 @@
           <a:p>
             <a:pPr algn="l"/>
             <a:fld id="{F7021451-1387-4CA6-816F-3879F97B5CBC}" type="slidenum">
-              <a:rPr lang="en-US" b="0"/>
+              <a:rPr b="0" lang="en-US"/>
               <a:t>6</a:t>
             </a:fld>
             <a:endParaRPr lang="en-US"/>
@@ -29077,11 +29955,11 @@
           <a:bodyPr wrap="square" lIns="0" tIns="0" rIns="0" bIns="0" rtlCol="0" anchor="ctr"/>
           <a:lstStyle/>
           <a:p>
-            <a:pPr marL="0" indent="0">
-              <a:buNone/>
-            </a:pPr>
-            <a:r>
-              <a:rPr lang="en-US" sz="1200" b="1" kern="0" spc="400" dirty="0">
+            <a:pPr indent="0" marL="0">
+              <a:buNone/>
+            </a:pPr>
+            <a:r>
+              <a:rPr lang="en-US" sz="1200" b="1" spc="400" kern="0" dirty="0">
                 <a:solidFill>
                   <a:srgbClr val="FFFFFF"/>
                 </a:solidFill>
@@ -29116,7 +29994,7 @@
           <a:bodyPr wrap="square" lIns="0" tIns="0" rIns="0" bIns="0" rtlCol="0" anchor="ctr"/>
           <a:lstStyle/>
           <a:p>
-            <a:pPr marL="0" indent="0">
+            <a:pPr indent="0" marL="0">
               <a:buNone/>
             </a:pPr>
             <a:r>
@@ -29155,7 +30033,7 @@
           <a:bodyPr wrap="square" lIns="0" tIns="0" rIns="0" bIns="0" rtlCol="0" anchor="t"/>
           <a:lstStyle/>
           <a:p>
-            <a:pPr marL="0" indent="0">
+            <a:pPr indent="0" marL="0">
               <a:buNone/>
             </a:pPr>
             <a:r>
@@ -29241,7 +30119,7 @@
           <a:bodyPr wrap="square" lIns="0" tIns="0" rIns="0" bIns="0" rtlCol="0" anchor="ctr"/>
           <a:lstStyle/>
           <a:p>
-            <a:pPr marL="0" indent="0" algn="l">
+            <a:pPr algn="l" indent="0" marL="0">
               <a:buNone/>
             </a:pPr>
             <a:r>
@@ -29280,7 +30158,7 @@
           <a:bodyPr wrap="square" lIns="0" tIns="0" rIns="0" bIns="0" rtlCol="0" anchor="ctr"/>
           <a:lstStyle/>
           <a:p>
-            <a:pPr marL="0" indent="0">
+            <a:pPr indent="0" marL="0">
               <a:buNone/>
             </a:pPr>
             <a:r>
@@ -29346,11 +30224,11 @@
           <a:bodyPr wrap="square" lIns="0" tIns="0" rIns="0" bIns="0" rtlCol="0" anchor="ctr"/>
           <a:lstStyle/>
           <a:p>
-            <a:pPr marL="0" indent="0" algn="ctr">
-              <a:buNone/>
-            </a:pPr>
-            <a:r>
-              <a:rPr lang="en-US" sz="900" b="1" kern="0" spc="100" dirty="0">
+            <a:pPr algn="ctr" indent="0" marL="0">
+              <a:buNone/>
+            </a:pPr>
+            <a:r>
+              <a:rPr lang="en-US" sz="900" b="1" spc="100" kern="0" dirty="0">
                 <a:solidFill>
                   <a:srgbClr val="5A05F4"/>
                 </a:solidFill>
@@ -29366,14 +30244,14 @@
       </p:sp>
       <p:pic>
         <p:nvPicPr>
-          <p:cNvPr id="7" name="Image 0" descr="preencoded.png"/>
+          <p:cNvPr id="7" name="Image 0" descr="preencoded.png">    </p:cNvPr>
           <p:cNvPicPr>
             <a:picLocks noChangeAspect="1"/>
           </p:cNvPicPr>
           <p:nvPr/>
         </p:nvPicPr>
         <p:blipFill>
-          <a:blip r:embed="rId3"/>
+          <a:blip r:embed="rId1"/>
           <a:stretch>
             <a:fillRect/>
           </a:stretch>
@@ -29431,7 +30309,7 @@
           <a:bodyPr wrap="square" lIns="0" tIns="0" rIns="0" bIns="0" rtlCol="0" anchor="ctr"/>
           <a:lstStyle/>
           <a:p>
-            <a:pPr marL="0" indent="0">
+            <a:pPr indent="0" marL="0">
               <a:buNone/>
             </a:pPr>
             <a:r>
@@ -29470,7 +30348,7 @@
           <a:bodyPr wrap="square" lIns="0" tIns="0" rIns="0" bIns="0" rtlCol="0" anchor="t"/>
           <a:lstStyle/>
           <a:p>
-            <a:pPr marL="0" indent="0">
+            <a:pPr indent="0" marL="0">
               <a:buNone/>
             </a:pPr>
             <a:r>
@@ -29531,7 +30409,7 @@
           <a:bodyPr wrap="square" lIns="0" tIns="0" rIns="0" bIns="0" rtlCol="0" anchor="ctr"/>
           <a:lstStyle/>
           <a:p>
-            <a:pPr marL="0" indent="0">
+            <a:pPr indent="0" marL="0">
               <a:buNone/>
             </a:pPr>
             <a:r>
@@ -29570,7 +30448,7 @@
           <a:bodyPr wrap="square" lIns="0" tIns="0" rIns="0" bIns="0" rtlCol="0" anchor="t"/>
           <a:lstStyle/>
           <a:p>
-            <a:pPr marL="0" indent="0">
+            <a:pPr indent="0" marL="0">
               <a:buNone/>
             </a:pPr>
             <a:r>
@@ -29651,7 +30529,7 @@
           <a:bodyPr wrap="square" lIns="0" tIns="0" rIns="0" bIns="0" rtlCol="0" anchor="ctr"/>
           <a:lstStyle/>
           <a:p>
-            <a:pPr marL="0" indent="0" algn="ctr">
+            <a:pPr algn="ctr" indent="0" marL="0">
               <a:buNone/>
             </a:pPr>
             <a:r>
@@ -29690,7 +30568,7 @@
           <a:bodyPr wrap="square" lIns="0" tIns="0" rIns="0" bIns="0" rtlCol="0" anchor="ctr"/>
           <a:lstStyle/>
           <a:p>
-            <a:pPr marL="0" indent="0">
+            <a:pPr indent="0" marL="0">
               <a:buNone/>
             </a:pPr>
             <a:r>
@@ -29729,7 +30607,7 @@
           <a:bodyPr wrap="square" lIns="0" tIns="0" rIns="0" bIns="0" rtlCol="0" anchor="t"/>
           <a:lstStyle/>
           <a:p>
-            <a:pPr marL="0" indent="0">
+            <a:pPr indent="0" marL="0">
               <a:lnSpc>
                 <a:spcPct val="108000"/>
               </a:lnSpc>
@@ -29813,7 +30691,7 @@
           <a:bodyPr wrap="square" lIns="0" tIns="0" rIns="0" bIns="0" rtlCol="0" anchor="ctr"/>
           <a:lstStyle/>
           <a:p>
-            <a:pPr marL="0" indent="0" algn="ctr">
+            <a:pPr algn="ctr" indent="0" marL="0">
               <a:buNone/>
             </a:pPr>
             <a:r>
@@ -29852,7 +30730,7 @@
           <a:bodyPr wrap="square" lIns="0" tIns="0" rIns="0" bIns="0" rtlCol="0" anchor="ctr"/>
           <a:lstStyle/>
           <a:p>
-            <a:pPr marL="0" indent="0">
+            <a:pPr indent="0" marL="0">
               <a:buNone/>
             </a:pPr>
             <a:r>
@@ -29891,7 +30769,7 @@
           <a:bodyPr wrap="square" lIns="0" tIns="0" rIns="0" bIns="0" rtlCol="0" anchor="t"/>
           <a:lstStyle/>
           <a:p>
-            <a:pPr marL="0" indent="0">
+            <a:pPr indent="0" marL="0">
               <a:lnSpc>
                 <a:spcPct val="108000"/>
               </a:lnSpc>
@@ -29975,7 +30853,7 @@
           <a:bodyPr wrap="square" lIns="0" tIns="0" rIns="0" bIns="0" rtlCol="0" anchor="ctr"/>
           <a:lstStyle/>
           <a:p>
-            <a:pPr marL="0" indent="0" algn="ctr">
+            <a:pPr algn="ctr" indent="0" marL="0">
               <a:buNone/>
             </a:pPr>
             <a:r>
@@ -30014,7 +30892,7 @@
           <a:bodyPr wrap="square" lIns="0" tIns="0" rIns="0" bIns="0" rtlCol="0" anchor="ctr"/>
           <a:lstStyle/>
           <a:p>
-            <a:pPr marL="0" indent="0">
+            <a:pPr indent="0" marL="0">
               <a:buNone/>
             </a:pPr>
             <a:r>
@@ -30053,7 +30931,7 @@
           <a:bodyPr wrap="square" lIns="0" tIns="0" rIns="0" bIns="0" rtlCol="0" anchor="t"/>
           <a:lstStyle/>
           <a:p>
-            <a:pPr marL="0" indent="0">
+            <a:pPr indent="0" marL="0">
               <a:lnSpc>
                 <a:spcPct val="108000"/>
               </a:lnSpc>
@@ -30137,7 +31015,7 @@
           <a:bodyPr wrap="square" lIns="0" tIns="0" rIns="0" bIns="0" rtlCol="0" anchor="ctr"/>
           <a:lstStyle/>
           <a:p>
-            <a:pPr marL="0" indent="0" algn="ctr">
+            <a:pPr algn="ctr" indent="0" marL="0">
               <a:buNone/>
             </a:pPr>
             <a:r>
@@ -30176,7 +31054,7 @@
           <a:bodyPr wrap="square" lIns="0" tIns="0" rIns="0" bIns="0" rtlCol="0" anchor="ctr"/>
           <a:lstStyle/>
           <a:p>
-            <a:pPr marL="0" indent="0">
+            <a:pPr indent="0" marL="0">
               <a:buNone/>
             </a:pPr>
             <a:r>
@@ -30215,7 +31093,7 @@
           <a:bodyPr wrap="square" lIns="0" tIns="0" rIns="0" bIns="0" rtlCol="0" anchor="t"/>
           <a:lstStyle/>
           <a:p>
-            <a:pPr marL="0" indent="0">
+            <a:pPr indent="0" marL="0">
               <a:lnSpc>
                 <a:spcPct val="108000"/>
               </a:lnSpc>
@@ -30230,7 +31108,7 @@
                 <a:ea typeface="Montserrat" pitchFamily="34" charset="-122"/>
                 <a:cs typeface="Montserrat" pitchFamily="34" charset="-120"/>
               </a:rPr>
-              <a:t>«бот верзе дурниці», а графіки зелені</a:t>
+              <a:t>«бот відповідає не по темі», а графіки зелені</a:t>
             </a:r>
             <a:endParaRPr lang="en-US" sz="1200" dirty="0"/>
           </a:p>
@@ -30245,7 +31123,7 @@
         <p:spPr>
           <a:xfrm>
             <a:off x="4160520" y="5349240"/>
-            <a:ext cx="7680960" cy="566928"/>
+            <a:ext cx="7470648" cy="566928"/>
           </a:xfrm>
           <a:prstGeom prst="roundRect">
             <a:avLst>
@@ -30284,7 +31162,7 @@
           <a:bodyPr wrap="square" lIns="0" tIns="0" rIns="0" bIns="0" rtlCol="0" anchor="ctr"/>
           <a:lstStyle/>
           <a:p>
-            <a:pPr marL="0" indent="0">
+            <a:pPr indent="0" marL="0">
               <a:lnSpc>
                 <a:spcPct val="112000"/>
               </a:lnSpc>
@@ -30307,7 +31185,7 @@
       </p:sp>
       <p:sp>
         <p:nvSpPr>
-          <p:cNvPr id="36" name="Slide Number Placeholder 0"/>
+          <p:cNvPr id="25" name="Slide Number Placeholder 0"/>
           <p:cNvSpPr>
             <a:spLocks noGrp="1"/>
           </p:cNvSpPr>
@@ -30325,7 +31203,7 @@
           </a:prstGeom>
           <a:extLst>
             <a:ext uri="{C572A759-6A51-4108-AA02-DFA0A04FC94B}">
-              <ma14:wrappingTextBoxFlag xmlns="" xmlns:ma14="http://schemas.microsoft.com/office/mac/drawingml/2011/main" val="0"/>
+              <ma14:wrappingTextBoxFlag xmlns:ma14="http://schemas.microsoft.com/office/mac/drawingml/2011/main" val="0"/>
             </a:ext>
           </a:extLst>
         </p:spPr>
@@ -30346,7 +31224,7 @@
           <a:p>
             <a:pPr algn="l"/>
             <a:fld id="{F7021451-1387-4CA6-816F-3879F97B5CBC}" type="slidenum">
-              <a:rPr lang="en-US" b="0"/>
+              <a:rPr b="0" lang="en-US"/>
               <a:t>8</a:t>
             </a:fld>
             <a:endParaRPr lang="en-US"/>
@@ -30421,7 +31299,7 @@
           <a:bodyPr wrap="square" lIns="0" tIns="0" rIns="0" bIns="0" rtlCol="0" anchor="ctr"/>
           <a:lstStyle/>
           <a:p>
-            <a:pPr marL="0" indent="0" algn="l">
+            <a:pPr algn="l" indent="0" marL="0">
               <a:buNone/>
             </a:pPr>
             <a:r>
@@ -30460,7 +31338,7 @@
           <a:bodyPr wrap="square" lIns="0" tIns="0" rIns="0" bIns="0" rtlCol="0" anchor="ctr"/>
           <a:lstStyle/>
           <a:p>
-            <a:pPr marL="0" indent="0">
+            <a:pPr indent="0" marL="0">
               <a:buNone/>
             </a:pPr>
             <a:r>
@@ -30526,11 +31404,11 @@
           <a:bodyPr wrap="square" lIns="0" tIns="0" rIns="0" bIns="0" rtlCol="0" anchor="ctr"/>
           <a:lstStyle/>
           <a:p>
-            <a:pPr marL="0" indent="0" algn="ctr">
-              <a:buNone/>
-            </a:pPr>
-            <a:r>
-              <a:rPr lang="en-US" sz="900" b="1" kern="0" spc="100" dirty="0">
+            <a:pPr algn="ctr" indent="0" marL="0">
+              <a:buNone/>
+            </a:pPr>
+            <a:r>
+              <a:rPr lang="en-US" sz="900" b="1" spc="100" kern="0" dirty="0">
                 <a:solidFill>
                   <a:srgbClr val="5A05F4"/>
                 </a:solidFill>
@@ -30546,14 +31424,14 @@
       </p:sp>
       <p:pic>
         <p:nvPicPr>
-          <p:cNvPr id="7" name="Image 0" descr="preencoded.png"/>
+          <p:cNvPr id="7" name="Image 0" descr="preencoded.png">    </p:cNvPr>
           <p:cNvPicPr>
             <a:picLocks noChangeAspect="1"/>
           </p:cNvPicPr>
           <p:nvPr/>
         </p:nvPicPr>
         <p:blipFill>
-          <a:blip r:embed="rId3"/>
+          <a:blip r:embed="rId1"/>
           <a:stretch>
             <a:fillRect/>
           </a:stretch>
@@ -30631,7 +31509,7 @@
           <a:bodyPr wrap="square" lIns="0" tIns="0" rIns="0" bIns="0" rtlCol="0" anchor="ctr"/>
           <a:lstStyle/>
           <a:p>
-            <a:pPr marL="0" indent="0" algn="ctr">
+            <a:pPr algn="ctr" indent="0" marL="0">
               <a:buNone/>
             </a:pPr>
             <a:r>
@@ -30670,7 +31548,7 @@
           <a:bodyPr wrap="square" lIns="0" tIns="0" rIns="0" bIns="0" rtlCol="0" anchor="ctr"/>
           <a:lstStyle/>
           <a:p>
-            <a:pPr marL="0" indent="0">
+            <a:pPr indent="0" marL="0">
               <a:buNone/>
             </a:pPr>
             <a:r>
@@ -30709,7 +31587,7 @@
           <a:bodyPr wrap="square" lIns="0" tIns="0" rIns="0" bIns="0" rtlCol="0" anchor="t"/>
           <a:lstStyle/>
           <a:p>
-            <a:pPr marL="0" indent="0">
+            <a:pPr indent="0" marL="0">
               <a:lnSpc>
                 <a:spcPct val="108000"/>
               </a:lnSpc>
@@ -30793,7 +31671,7 @@
           <a:bodyPr wrap="square" lIns="0" tIns="0" rIns="0" bIns="0" rtlCol="0" anchor="ctr"/>
           <a:lstStyle/>
           <a:p>
-            <a:pPr marL="0" indent="0" algn="ctr">
+            <a:pPr algn="ctr" indent="0" marL="0">
               <a:buNone/>
             </a:pPr>
             <a:r>
@@ -30832,7 +31710,7 @@
           <a:bodyPr wrap="square" lIns="0" tIns="0" rIns="0" bIns="0" rtlCol="0" anchor="ctr"/>
           <a:lstStyle/>
           <a:p>
-            <a:pPr marL="0" indent="0">
+            <a:pPr indent="0" marL="0">
               <a:buNone/>
             </a:pPr>
             <a:r>
@@ -30871,7 +31749,7 @@
           <a:bodyPr wrap="square" lIns="0" tIns="0" rIns="0" bIns="0" rtlCol="0" anchor="t"/>
           <a:lstStyle/>
           <a:p>
-            <a:pPr marL="0" indent="0">
+            <a:pPr indent="0" marL="0">
               <a:lnSpc>
                 <a:spcPct val="108000"/>
               </a:lnSpc>
@@ -30955,7 +31833,7 @@
           <a:bodyPr wrap="square" lIns="0" tIns="0" rIns="0" bIns="0" rtlCol="0" anchor="ctr"/>
           <a:lstStyle/>
           <a:p>
-            <a:pPr marL="0" indent="0" algn="ctr">
+            <a:pPr algn="ctr" indent="0" marL="0">
               <a:buNone/>
             </a:pPr>
             <a:r>
@@ -30994,7 +31872,7 @@
           <a:bodyPr wrap="square" lIns="0" tIns="0" rIns="0" bIns="0" rtlCol="0" anchor="ctr"/>
           <a:lstStyle/>
           <a:p>
-            <a:pPr marL="0" indent="0">
+            <a:pPr indent="0" marL="0">
               <a:buNone/>
             </a:pPr>
             <a:r>
@@ -31033,7 +31911,7 @@
           <a:bodyPr wrap="square" lIns="0" tIns="0" rIns="0" bIns="0" rtlCol="0" anchor="t"/>
           <a:lstStyle/>
           <a:p>
-            <a:pPr marL="0" indent="0">
+            <a:pPr indent="0" marL="0">
               <a:lnSpc>
                 <a:spcPct val="108000"/>
               </a:lnSpc>
@@ -31117,7 +31995,7 @@
           <a:bodyPr wrap="square" lIns="0" tIns="0" rIns="0" bIns="0" rtlCol="0" anchor="ctr"/>
           <a:lstStyle/>
           <a:p>
-            <a:pPr marL="0" indent="0" algn="ctr">
+            <a:pPr algn="ctr" indent="0" marL="0">
               <a:buNone/>
             </a:pPr>
             <a:r>
@@ -31156,7 +32034,7 @@
           <a:bodyPr wrap="square" lIns="0" tIns="0" rIns="0" bIns="0" rtlCol="0" anchor="ctr"/>
           <a:lstStyle/>
           <a:p>
-            <a:pPr marL="0" indent="0">
+            <a:pPr indent="0" marL="0">
               <a:buNone/>
             </a:pPr>
             <a:r>
@@ -31195,7 +32073,7 @@
           <a:bodyPr wrap="square" lIns="0" tIns="0" rIns="0" bIns="0" rtlCol="0" anchor="t"/>
           <a:lstStyle/>
           <a:p>
-            <a:pPr marL="0" indent="0">
+            <a:pPr indent="0" marL="0">
               <a:lnSpc>
                 <a:spcPct val="108000"/>
               </a:lnSpc>
@@ -31264,11 +32142,11 @@
           <a:bodyPr wrap="square" lIns="0" tIns="0" rIns="0" bIns="0" rtlCol="0" anchor="ctr"/>
           <a:lstStyle/>
           <a:p>
-            <a:pPr marL="0" indent="0">
-              <a:buNone/>
-            </a:pPr>
-            <a:r>
-              <a:rPr lang="en-US" sz="950" b="1" kern="0" spc="150" dirty="0">
+            <a:pPr indent="0" marL="0">
+              <a:buNone/>
+            </a:pPr>
+            <a:r>
+              <a:rPr lang="en-US" sz="950" b="1" spc="150" kern="0" dirty="0">
                 <a:solidFill>
                   <a:srgbClr val="434343"/>
                 </a:solidFill>
@@ -31303,7 +32181,7 @@
           <a:bodyPr wrap="square" lIns="0" tIns="0" rIns="0" bIns="0" rtlCol="0" anchor="ctr"/>
           <a:lstStyle/>
           <a:p>
-            <a:pPr marL="0" indent="0">
+            <a:pPr indent="0" marL="0">
               <a:lnSpc>
                 <a:spcPct val="112000"/>
               </a:lnSpc>
@@ -31367,7 +32245,7 @@
           <a:bodyPr wrap="square" lIns="0" tIns="0" rIns="0" bIns="0" rtlCol="0" anchor="ctr"/>
           <a:lstStyle/>
           <a:p>
-            <a:pPr marL="0" indent="0" algn="ctr">
+            <a:pPr algn="ctr" indent="0" marL="0">
               <a:buNone/>
             </a:pPr>
             <a:r>
@@ -31471,7 +32349,7 @@
           <a:bodyPr wrap="square" lIns="0" tIns="0" rIns="0" bIns="0" rtlCol="0" anchor="ctr"/>
           <a:lstStyle/>
           <a:p>
-            <a:pPr marL="0" indent="0" algn="ctr">
+            <a:pPr algn="ctr" indent="0" marL="0">
               <a:buNone/>
             </a:pPr>
             <a:r>
@@ -31575,7 +32453,7 @@
           <a:bodyPr wrap="square" lIns="0" tIns="0" rIns="0" bIns="0" rtlCol="0" anchor="ctr"/>
           <a:lstStyle/>
           <a:p>
-            <a:pPr marL="0" indent="0" algn="ctr">
+            <a:pPr algn="ctr" indent="0" marL="0">
               <a:buNone/>
             </a:pPr>
             <a:r>
@@ -31679,7 +32557,7 @@
           <a:bodyPr wrap="square" lIns="0" tIns="0" rIns="0" bIns="0" rtlCol="0" anchor="ctr"/>
           <a:lstStyle/>
           <a:p>
-            <a:pPr marL="0" indent="0" algn="ctr">
+            <a:pPr algn="ctr" indent="0" marL="0">
               <a:buNone/>
             </a:pPr>
             <a:r>
@@ -31783,7 +32661,7 @@
           <a:bodyPr wrap="square" lIns="0" tIns="0" rIns="0" bIns="0" rtlCol="0" anchor="ctr"/>
           <a:lstStyle/>
           <a:p>
-            <a:pPr marL="0" indent="0" algn="ctr">
+            <a:pPr algn="ctr" indent="0" marL="0">
               <a:buNone/>
             </a:pPr>
             <a:r>
@@ -31887,7 +32765,7 @@
           <a:bodyPr wrap="square" lIns="0" tIns="0" rIns="0" bIns="0" rtlCol="0" anchor="ctr"/>
           <a:lstStyle/>
           <a:p>
-            <a:pPr marL="0" indent="0" algn="ctr">
+            <a:pPr algn="ctr" indent="0" marL="0">
               <a:buNone/>
             </a:pPr>
             <a:r>
@@ -31926,7 +32804,7 @@
           <a:bodyPr wrap="square" lIns="0" tIns="0" rIns="0" bIns="0" rtlCol="0" anchor="ctr"/>
           <a:lstStyle/>
           <a:p>
-            <a:pPr marL="0" indent="0">
+            <a:pPr indent="0" marL="0">
               <a:buNone/>
             </a:pPr>
             <a:r>
@@ -31946,7 +32824,7 @@
       </p:sp>
       <p:sp>
         <p:nvSpPr>
-          <p:cNvPr id="54" name="Slide Number Placeholder 0"/>
+          <p:cNvPr id="25" name="Slide Number Placeholder 0"/>
           <p:cNvSpPr>
             <a:spLocks noGrp="1"/>
           </p:cNvSpPr>
@@ -31964,7 +32842,7 @@
           </a:prstGeom>
           <a:extLst>
             <a:ext uri="{C572A759-6A51-4108-AA02-DFA0A04FC94B}">
-              <ma14:wrappingTextBoxFlag xmlns="" xmlns:ma14="http://schemas.microsoft.com/office/mac/drawingml/2011/main" val="0"/>
+              <ma14:wrappingTextBoxFlag xmlns:ma14="http://schemas.microsoft.com/office/mac/drawingml/2011/main" val="0"/>
             </a:ext>
           </a:extLst>
         </p:spPr>
@@ -31985,7 +32863,7 @@
           <a:p>
             <a:pPr algn="l"/>
             <a:fld id="{F7021451-1387-4CA6-816F-3879F97B5CBC}" type="slidenum">
-              <a:rPr lang="en-US" b="0"/>
+              <a:rPr b="0" lang="en-US"/>
               <a:t>9</a:t>
             </a:fld>
             <a:endParaRPr lang="en-US"/>
@@ -32293,299 +33171,4 @@
     </a:ext>
   </a:extLst>
 </a:theme>
-</file>
-
-<file path=ppt/theme/theme2.xml><?xml version="1.0" encoding="utf-8"?>
-<a:theme xmlns:a="http://schemas.openxmlformats.org/drawingml/2006/main" name="Office Theme">
-  <a:themeElements>
-    <a:clrScheme name="Office">
-      <a:dk1>
-        <a:sysClr val="windowText" lastClr="000000"/>
-      </a:dk1>
-      <a:lt1>
-        <a:sysClr val="window" lastClr="FFFFFF"/>
-      </a:lt1>
-      <a:dk2>
-        <a:srgbClr val="44546A"/>
-      </a:dk2>
-      <a:lt2>
-        <a:srgbClr val="E7E6E6"/>
-      </a:lt2>
-      <a:accent1>
-        <a:srgbClr val="4472C4"/>
-      </a:accent1>
-      <a:accent2>
-        <a:srgbClr val="ED7D31"/>
-      </a:accent2>
-      <a:accent3>
-        <a:srgbClr val="A5A5A5"/>
-      </a:accent3>
-      <a:accent4>
-        <a:srgbClr val="FFC000"/>
-      </a:accent4>
-      <a:accent5>
-        <a:srgbClr val="5B9BD5"/>
-      </a:accent5>
-      <a:accent6>
-        <a:srgbClr val="70AD47"/>
-      </a:accent6>
-      <a:hlink>
-        <a:srgbClr val="0563C1"/>
-      </a:hlink>
-      <a:folHlink>
-        <a:srgbClr val="954F72"/>
-      </a:folHlink>
-    </a:clrScheme>
-    <a:fontScheme name="Office">
-      <a:majorFont>
-        <a:latin typeface="Calibri Light" panose="020F0302020204030204"/>
-        <a:ea typeface=""/>
-        <a:cs typeface=""/>
-        <a:font script="Jpan" typeface="游ゴシック Light"/>
-        <a:font script="Hang" typeface="맑은 고딕"/>
-        <a:font script="Hans" typeface="等线 Light"/>
-        <a:font script="Hant" typeface="新細明體"/>
-        <a:font script="Arab" typeface="Times New Roman"/>
-        <a:font script="Hebr" typeface="Times New Roman"/>
-        <a:font script="Thai" typeface="Angsana New"/>
-        <a:font script="Ethi" typeface="Nyala"/>
-        <a:font script="Beng" typeface="Vrinda"/>
-        <a:font script="Gujr" typeface="Shruti"/>
-        <a:font script="Khmr" typeface="MoolBoran"/>
-        <a:font script="Knda" typeface="Tunga"/>
-        <a:font script="Guru" typeface="Raavi"/>
-        <a:font script="Cans" typeface="Euphemia"/>
-        <a:font script="Cher" typeface="Plantagenet Cherokee"/>
-        <a:font script="Yiii" typeface="Microsoft Yi Baiti"/>
-        <a:font script="Tibt" typeface="Microsoft Himalaya"/>
-        <a:font script="Thaa" typeface="MV Boli"/>
-        <a:font script="Deva" typeface="Mangal"/>
-        <a:font script="Telu" typeface="Gautami"/>
-        <a:font script="Taml" typeface="Latha"/>
-        <a:font script="Syrc" typeface="Estrangelo Edessa"/>
-        <a:font script="Orya" typeface="Kalinga"/>
-        <a:font script="Mlym" typeface="Kartika"/>
-        <a:font script="Laoo" typeface="DokChampa"/>
-        <a:font script="Sinh" typeface="Iskoola Pota"/>
-        <a:font script="Mong" typeface="Mongolian Baiti"/>
-        <a:font script="Viet" typeface="Times New Roman"/>
-        <a:font script="Uigh" typeface="Microsoft Uighur"/>
-        <a:font script="Geor" typeface="Sylfaen"/>
-        <a:font script="Armn" typeface="Arial"/>
-        <a:font script="Bugi" typeface="Leelawadee UI"/>
-        <a:font script="Bopo" typeface="Microsoft JhengHei"/>
-        <a:font script="Java" typeface="Javanese Text"/>
-        <a:font script="Lisu" typeface="Segoe UI"/>
-        <a:font script="Mymr" typeface="Myanmar Text"/>
-        <a:font script="Nkoo" typeface="Ebrima"/>
-        <a:font script="Olck" typeface="Nirmala UI"/>
-        <a:font script="Osma" typeface="Ebrima"/>
-        <a:font script="Phag" typeface="Phagspa"/>
-        <a:font script="Syrn" typeface="Estrangelo Edessa"/>
-        <a:font script="Syrj" typeface="Estrangelo Edessa"/>
-        <a:font script="Syre" typeface="Estrangelo Edessa"/>
-        <a:font script="Sora" typeface="Nirmala UI"/>
-        <a:font script="Tale" typeface="Microsoft Tai Le"/>
-        <a:font script="Talu" typeface="Microsoft New Tai Lue"/>
-        <a:font script="Tfng" typeface="Ebrima"/>
-      </a:majorFont>
-      <a:minorFont>
-        <a:latin typeface="Calibri" panose="020F0502020204030204"/>
-        <a:ea typeface=""/>
-        <a:cs typeface=""/>
-        <a:font script="Jpan" typeface="游ゴシック"/>
-        <a:font script="Hang" typeface="맑은 고딕"/>
-        <a:font script="Hans" typeface="等线"/>
-        <a:font script="Hant" typeface="新細明體"/>
-        <a:font script="Arab" typeface="Arial"/>
-        <a:font script="Hebr" typeface="Arial"/>
-        <a:font script="Thai" typeface="Cordia New"/>
-        <a:font script="Ethi" typeface="Nyala"/>
-        <a:font script="Beng" typeface="Vrinda"/>
-        <a:font script="Gujr" typeface="Shruti"/>
-        <a:font script="Khmr" typeface="DaunPenh"/>
-        <a:font script="Knda" typeface="Tunga"/>
-        <a:font script="Guru" typeface="Raavi"/>
-        <a:font script="Cans" typeface="Euphemia"/>
-        <a:font script="Cher" typeface="Plantagenet Cherokee"/>
-        <a:font script="Yiii" typeface="Microsoft Yi Baiti"/>
-        <a:font script="Tibt" typeface="Microsoft Himalaya"/>
-        <a:font script="Thaa" typeface="MV Boli"/>
-        <a:font script="Deva" typeface="Mangal"/>
-        <a:font script="Telu" typeface="Gautami"/>
-        <a:font script="Taml" typeface="Latha"/>
-        <a:font script="Syrc" typeface="Estrangelo Edessa"/>
-        <a:font script="Orya" typeface="Kalinga"/>
-        <a:font script="Mlym" typeface="Kartika"/>
-        <a:font script="Laoo" typeface="DokChampa"/>
-        <a:font script="Sinh" typeface="Iskoola Pota"/>
-        <a:font script="Mong" typeface="Mongolian Baiti"/>
-        <a:font script="Viet" typeface="Arial"/>
-        <a:font script="Uigh" typeface="Microsoft Uighur"/>
-        <a:font script="Geor" typeface="Sylfaen"/>
-        <a:font script="Armn" typeface="Arial"/>
-        <a:font script="Bugi" typeface="Leelawadee UI"/>
-        <a:font script="Bopo" typeface="Microsoft JhengHei"/>
-        <a:font script="Java" typeface="Javanese Text"/>
-        <a:font script="Lisu" typeface="Segoe UI"/>
-        <a:font script="Mymr" typeface="Myanmar Text"/>
-        <a:font script="Nkoo" typeface="Ebrima"/>
-        <a:font script="Olck" typeface="Nirmala UI"/>
-        <a:font script="Osma" typeface="Ebrima"/>
-        <a:font script="Phag" typeface="Phagspa"/>
-        <a:font script="Syrn" typeface="Estrangelo Edessa"/>
-        <a:font script="Syrj" typeface="Estrangelo Edessa"/>
-        <a:font script="Syre" typeface="Estrangelo Edessa"/>
-        <a:font script="Sora" typeface="Nirmala UI"/>
-        <a:font script="Tale" typeface="Microsoft Tai Le"/>
-        <a:font script="Talu" typeface="Microsoft New Tai Lue"/>
-        <a:font script="Tfng" typeface="Ebrima"/>
-      </a:minorFont>
-    </a:fontScheme>
-    <a:fmtScheme name="Office">
-      <a:fillStyleLst>
-        <a:solidFill>
-          <a:schemeClr val="phClr"/>
-        </a:solidFill>
-        <a:gradFill rotWithShape="1">
-          <a:gsLst>
-            <a:gs pos="0">
-              <a:schemeClr val="phClr">
-                <a:lumMod val="110000"/>
-                <a:satMod val="105000"/>
-                <a:tint val="67000"/>
-              </a:schemeClr>
-            </a:gs>
-            <a:gs pos="50000">
-              <a:schemeClr val="phClr">
-                <a:lumMod val="105000"/>
-                <a:satMod val="103000"/>
-                <a:tint val="73000"/>
-              </a:schemeClr>
-            </a:gs>
-            <a:gs pos="100000">
-              <a:schemeClr val="phClr">
-                <a:lumMod val="105000"/>
-                <a:satMod val="109000"/>
-                <a:tint val="81000"/>
-              </a:schemeClr>
-            </a:gs>
-          </a:gsLst>
-          <a:lin ang="5400000" scaled="0"/>
-        </a:gradFill>
-        <a:gradFill rotWithShape="1">
-          <a:gsLst>
-            <a:gs pos="0">
-              <a:schemeClr val="phClr">
-                <a:satMod val="103000"/>
-                <a:lumMod val="102000"/>
-                <a:tint val="94000"/>
-              </a:schemeClr>
-            </a:gs>
-            <a:gs pos="50000">
-              <a:schemeClr val="phClr">
-                <a:satMod val="110000"/>
-                <a:lumMod val="100000"/>
-                <a:shade val="100000"/>
-              </a:schemeClr>
-            </a:gs>
-            <a:gs pos="100000">
-              <a:schemeClr val="phClr">
-                <a:lumMod val="99000"/>
-                <a:satMod val="120000"/>
-                <a:shade val="78000"/>
-              </a:schemeClr>
-            </a:gs>
-          </a:gsLst>
-          <a:lin ang="5400000" scaled="0"/>
-        </a:gradFill>
-      </a:fillStyleLst>
-      <a:lnStyleLst>
-        <a:ln w="6350" cap="flat" cmpd="sng" algn="ctr">
-          <a:solidFill>
-            <a:schemeClr val="phClr"/>
-          </a:solidFill>
-          <a:prstDash val="solid"/>
-          <a:miter lim="800000"/>
-        </a:ln>
-        <a:ln w="12700" cap="flat" cmpd="sng" algn="ctr">
-          <a:solidFill>
-            <a:schemeClr val="phClr"/>
-          </a:solidFill>
-          <a:prstDash val="solid"/>
-          <a:miter lim="800000"/>
-        </a:ln>
-        <a:ln w="19050" cap="flat" cmpd="sng" algn="ctr">
-          <a:solidFill>
-            <a:schemeClr val="phClr"/>
-          </a:solidFill>
-          <a:prstDash val="solid"/>
-          <a:miter lim="800000"/>
-        </a:ln>
-      </a:lnStyleLst>
-      <a:effectStyleLst>
-        <a:effectStyle>
-          <a:effectLst/>
-        </a:effectStyle>
-        <a:effectStyle>
-          <a:effectLst/>
-        </a:effectStyle>
-        <a:effectStyle>
-          <a:effectLst>
-            <a:outerShdw blurRad="57150" dist="19050" dir="5400000" algn="ctr" rotWithShape="0">
-              <a:srgbClr val="000000">
-                <a:alpha val="63000"/>
-              </a:srgbClr>
-            </a:outerShdw>
-          </a:effectLst>
-        </a:effectStyle>
-      </a:effectStyleLst>
-      <a:bgFillStyleLst>
-        <a:solidFill>
-          <a:schemeClr val="phClr"/>
-        </a:solidFill>
-        <a:solidFill>
-          <a:schemeClr val="phClr">
-            <a:tint val="95000"/>
-            <a:satMod val="170000"/>
-          </a:schemeClr>
-        </a:solidFill>
-        <a:gradFill rotWithShape="1">
-          <a:gsLst>
-            <a:gs pos="0">
-              <a:schemeClr val="phClr">
-                <a:tint val="93000"/>
-                <a:satMod val="150000"/>
-                <a:shade val="98000"/>
-                <a:lumMod val="102000"/>
-              </a:schemeClr>
-            </a:gs>
-            <a:gs pos="50000">
-              <a:schemeClr val="phClr">
-                <a:tint val="98000"/>
-                <a:satMod val="130000"/>
-                <a:shade val="90000"/>
-                <a:lumMod val="103000"/>
-              </a:schemeClr>
-            </a:gs>
-            <a:gs pos="100000">
-              <a:schemeClr val="phClr">
-                <a:shade val="63000"/>
-                <a:satMod val="120000"/>
-              </a:schemeClr>
-            </a:gs>
-          </a:gsLst>
-          <a:lin ang="5400000" scaled="0"/>
-        </a:gradFill>
-      </a:bgFillStyleLst>
-    </a:fmtScheme>
-  </a:themeElements>
-  <a:objectDefaults/>
-  <a:extraClrSchemeLst/>
-  <a:extLst>
-    <a:ext uri="{05A4C25C-085E-4340-85A3-A5531E510DB2}">
-      <thm15:themeFamily xmlns:thm15="http://schemas.microsoft.com/office/thememl/2012/main" name="Office Theme" id="{62F939B6-93AF-4DB8-9C6B-D6C7DFDC589F}" vid="{4A3C46E8-61CC-4603-A589-7422A47A8E4A}"/>
-    </a:ext>
-  </a:extLst>
-</a:theme>
 </file>
--- a/docs/decks/L01.pptx
+++ b/docs/decks/L01.pptx
@@ -18358,29 +18358,7 @@
         </p:nvSpPr>
         <p:spPr>
           <a:xfrm>
-            <a:off x="566928" y="1645920"/>
-            <a:ext cx="3520440" cy="1417320"/>
-          </a:xfrm>
-          <a:prstGeom prst="roundRect">
-            <a:avLst>
-              <a:gd name="adj" fmla="val 7742"/>
-            </a:avLst>
-          </a:prstGeom>
-          <a:solidFill>
-            <a:srgbClr val="000000"/>
-          </a:solidFill>
-          <a:ln/>
-        </p:spPr>
-      </p:sp>
-      <p:sp>
-        <p:nvSpPr>
-          <p:cNvPr id="8" name="Shape 5"/>
-          <p:cNvSpPr/>
-          <p:nvPr/>
-        </p:nvSpPr>
-        <p:spPr>
-          <a:xfrm>
-            <a:off x="768096" y="1828800"/>
+            <a:off x="566928" y="1691640"/>
             <a:ext cx="384048" cy="384048"/>
           </a:xfrm>
           <a:prstGeom prst="ellipse">
@@ -18394,13 +18372,13 @@
       </p:sp>
       <p:sp>
         <p:nvSpPr>
-          <p:cNvPr id="9" name="Text 6"/>
-          <p:cNvSpPr/>
-          <p:nvPr/>
-        </p:nvSpPr>
-        <p:spPr>
-          <a:xfrm>
-            <a:off x="768096" y="1828800"/>
+          <p:cNvPr id="8" name="Text 5"/>
+          <p:cNvSpPr/>
+          <p:nvPr/>
+        </p:nvSpPr>
+        <p:spPr>
+          <a:xfrm>
+            <a:off x="566928" y="1691640"/>
             <a:ext cx="384048" cy="384048"/>
           </a:xfrm>
           <a:prstGeom prst="rect">
@@ -18433,14 +18411,14 @@
       </p:sp>
       <p:sp>
         <p:nvSpPr>
-          <p:cNvPr id="10" name="Text 7"/>
-          <p:cNvSpPr/>
-          <p:nvPr/>
-        </p:nvSpPr>
-        <p:spPr>
-          <a:xfrm>
-            <a:off x="1280160" y="1801368"/>
-            <a:ext cx="2606040" cy="438912"/>
+          <p:cNvPr id="9" name="Text 6"/>
+          <p:cNvSpPr/>
+          <p:nvPr/>
+        </p:nvSpPr>
+        <p:spPr>
+          <a:xfrm>
+            <a:off x="1115568" y="1691640"/>
+            <a:ext cx="6492240" cy="384048"/>
           </a:xfrm>
           <a:prstGeom prst="rect">
             <a:avLst/>
@@ -18456,51 +18434,23 @@
               <a:buNone/>
             </a:pPr>
             <a:r>
-              <a:rPr lang="en-US" sz="1450" b="1" dirty="0">
-                <a:solidFill>
-                  <a:srgbClr val="3FCF8E"/>
+              <a:rPr lang="en-US" sz="1400" b="1" dirty="0">
+                <a:solidFill>
+                  <a:srgbClr val="000000"/>
                 </a:solidFill>
                 <a:latin typeface="Montserrat" pitchFamily="34" charset="0"/>
                 <a:ea typeface="Montserrat" pitchFamily="34" charset="-122"/>
                 <a:cs typeface="Montserrat" pitchFamily="34" charset="-120"/>
               </a:rPr>
-              <a:t>стек піднявся</a:t>
-            </a:r>
-            <a:endParaRPr lang="en-US" sz="1450" dirty="0"/>
-          </a:p>
-        </p:txBody>
-      </p:sp>
-      <p:sp>
-        <p:nvSpPr>
-          <p:cNvPr id="11" name="Text 8"/>
-          <p:cNvSpPr/>
-          <p:nvPr/>
-        </p:nvSpPr>
-        <p:spPr>
-          <a:xfrm>
-            <a:off x="768096" y="2331720"/>
-            <a:ext cx="3118104" cy="576072"/>
-          </a:xfrm>
-          <a:prstGeom prst="rect">
-            <a:avLst/>
-          </a:prstGeom>
-          <a:noFill/>
-          <a:ln/>
-        </p:spPr>
-        <p:txBody>
-          <a:bodyPr wrap="square" lIns="0" tIns="0" rIns="0" bIns="0" rtlCol="0" anchor="t"/>
-          <a:lstStyle/>
-          <a:p>
+              <a:t>стек піднявся  </a:t>
+            </a:r>
             <a:pPr indent="0" marL="0">
-              <a:lnSpc>
-                <a:spcPct val="108000"/>
-              </a:lnSpc>
               <a:buNone/>
             </a:pPr>
             <a:r>
               <a:rPr lang="en-US" sz="1200" dirty="0">
                 <a:solidFill>
-                  <a:srgbClr val="E9E4F7"/>
+                  <a:srgbClr val="434343"/>
                 </a:solidFill>
                 <a:latin typeface="Montserrat" pitchFamily="34" charset="0"/>
                 <a:ea typeface="Montserrat" pitchFamily="34" charset="-122"/>
@@ -18508,41 +18458,19 @@
               </a:rPr>
               <a:t>docker compose up --build</a:t>
             </a:r>
-            <a:endParaRPr lang="en-US" sz="1200" dirty="0"/>
-          </a:p>
-        </p:txBody>
-      </p:sp>
-      <p:sp>
-        <p:nvSpPr>
-          <p:cNvPr id="12" name="Shape 9"/>
-          <p:cNvSpPr/>
-          <p:nvPr/>
-        </p:nvSpPr>
-        <p:spPr>
-          <a:xfrm>
-            <a:off x="4270248" y="1645920"/>
-            <a:ext cx="3520440" cy="1417320"/>
-          </a:xfrm>
-          <a:prstGeom prst="roundRect">
-            <a:avLst>
-              <a:gd name="adj" fmla="val 7742"/>
-            </a:avLst>
-          </a:prstGeom>
-          <a:solidFill>
-            <a:srgbClr val="000000"/>
-          </a:solidFill>
-          <a:ln/>
-        </p:spPr>
-      </p:sp>
-      <p:sp>
-        <p:nvSpPr>
-          <p:cNvPr id="13" name="Shape 10"/>
-          <p:cNvSpPr/>
-          <p:nvPr/>
-        </p:nvSpPr>
-        <p:spPr>
-          <a:xfrm>
-            <a:off x="4471416" y="1828800"/>
+            <a:endParaRPr lang="en-US" sz="1400" dirty="0"/>
+          </a:p>
+        </p:txBody>
+      </p:sp>
+      <p:sp>
+        <p:nvSpPr>
+          <p:cNvPr id="10" name="Shape 7"/>
+          <p:cNvSpPr/>
+          <p:nvPr/>
+        </p:nvSpPr>
+        <p:spPr>
+          <a:xfrm>
+            <a:off x="566928" y="2221992"/>
             <a:ext cx="384048" cy="384048"/>
           </a:xfrm>
           <a:prstGeom prst="ellipse">
@@ -18556,13 +18484,13 @@
       </p:sp>
       <p:sp>
         <p:nvSpPr>
-          <p:cNvPr id="14" name="Text 11"/>
-          <p:cNvSpPr/>
-          <p:nvPr/>
-        </p:nvSpPr>
-        <p:spPr>
-          <a:xfrm>
-            <a:off x="4471416" y="1828800"/>
+          <p:cNvPr id="11" name="Text 8"/>
+          <p:cNvSpPr/>
+          <p:nvPr/>
+        </p:nvSpPr>
+        <p:spPr>
+          <a:xfrm>
+            <a:off x="566928" y="2221992"/>
             <a:ext cx="384048" cy="384048"/>
           </a:xfrm>
           <a:prstGeom prst="rect">
@@ -18595,14 +18523,14 @@
       </p:sp>
       <p:sp>
         <p:nvSpPr>
-          <p:cNvPr id="15" name="Text 12"/>
-          <p:cNvSpPr/>
-          <p:nvPr/>
-        </p:nvSpPr>
-        <p:spPr>
-          <a:xfrm>
-            <a:off x="4983480" y="1801368"/>
-            <a:ext cx="2606040" cy="438912"/>
+          <p:cNvPr id="12" name="Text 9"/>
+          <p:cNvSpPr/>
+          <p:nvPr/>
+        </p:nvSpPr>
+        <p:spPr>
+          <a:xfrm>
+            <a:off x="1115568" y="2221992"/>
+            <a:ext cx="6492240" cy="384048"/>
           </a:xfrm>
           <a:prstGeom prst="rect">
             <a:avLst/>
@@ -18618,51 +18546,23 @@
               <a:buNone/>
             </a:pPr>
             <a:r>
-              <a:rPr lang="en-US" sz="1450" b="1" dirty="0">
-                <a:solidFill>
-                  <a:srgbClr val="3FCF8E"/>
+              <a:rPr lang="en-US" sz="1400" b="1" dirty="0">
+                <a:solidFill>
+                  <a:srgbClr val="000000"/>
                 </a:solidFill>
                 <a:latin typeface="Montserrat" pitchFamily="34" charset="0"/>
                 <a:ea typeface="Montserrat" pitchFamily="34" charset="-122"/>
                 <a:cs typeface="Montserrat" pitchFamily="34" charset="-120"/>
               </a:rPr>
-              <a:t>чат відповідає</a:t>
-            </a:r>
-            <a:endParaRPr lang="en-US" sz="1450" dirty="0"/>
-          </a:p>
-        </p:txBody>
-      </p:sp>
-      <p:sp>
-        <p:nvSpPr>
-          <p:cNvPr id="16" name="Text 13"/>
-          <p:cNvSpPr/>
-          <p:nvPr/>
-        </p:nvSpPr>
-        <p:spPr>
-          <a:xfrm>
-            <a:off x="4471416" y="2331720"/>
-            <a:ext cx="3118104" cy="576072"/>
-          </a:xfrm>
-          <a:prstGeom prst="rect">
-            <a:avLst/>
-          </a:prstGeom>
-          <a:noFill/>
-          <a:ln/>
-        </p:spPr>
-        <p:txBody>
-          <a:bodyPr wrap="square" lIns="0" tIns="0" rIns="0" bIns="0" rtlCol="0" anchor="t"/>
-          <a:lstStyle/>
-          <a:p>
+              <a:t>чат відповідає  </a:t>
+            </a:r>
             <a:pPr indent="0" marL="0">
-              <a:lnSpc>
-                <a:spcPct val="108000"/>
-              </a:lnSpc>
               <a:buNone/>
             </a:pPr>
             <a:r>
               <a:rPr lang="en-US" sz="1200" dirty="0">
                 <a:solidFill>
-                  <a:srgbClr val="E9E4F7"/>
+                  <a:srgbClr val="434343"/>
                 </a:solidFill>
                 <a:latin typeface="Montserrat" pitchFamily="34" charset="0"/>
                 <a:ea typeface="Montserrat" pitchFamily="34" charset="-122"/>
@@ -18670,41 +18570,19 @@
               </a:rPr>
               <a:t>«Як скинути пароль?»</a:t>
             </a:r>
-            <a:endParaRPr lang="en-US" sz="1200" dirty="0"/>
-          </a:p>
-        </p:txBody>
-      </p:sp>
-      <p:sp>
-        <p:nvSpPr>
-          <p:cNvPr id="17" name="Shape 14"/>
-          <p:cNvSpPr/>
-          <p:nvPr/>
-        </p:nvSpPr>
-        <p:spPr>
-          <a:xfrm>
-            <a:off x="7973568" y="1645920"/>
-            <a:ext cx="3520440" cy="1417320"/>
-          </a:xfrm>
-          <a:prstGeom prst="roundRect">
-            <a:avLst>
-              <a:gd name="adj" fmla="val 7742"/>
-            </a:avLst>
-          </a:prstGeom>
-          <a:solidFill>
-            <a:srgbClr val="000000"/>
-          </a:solidFill>
-          <a:ln/>
-        </p:spPr>
-      </p:sp>
-      <p:sp>
-        <p:nvSpPr>
-          <p:cNvPr id="18" name="Shape 15"/>
-          <p:cNvSpPr/>
-          <p:nvPr/>
-        </p:nvSpPr>
-        <p:spPr>
-          <a:xfrm>
-            <a:off x="8174736" y="1828800"/>
+            <a:endParaRPr lang="en-US" sz="1400" dirty="0"/>
+          </a:p>
+        </p:txBody>
+      </p:sp>
+      <p:sp>
+        <p:nvSpPr>
+          <p:cNvPr id="13" name="Shape 10"/>
+          <p:cNvSpPr/>
+          <p:nvPr/>
+        </p:nvSpPr>
+        <p:spPr>
+          <a:xfrm>
+            <a:off x="566928" y="2752344"/>
             <a:ext cx="384048" cy="384048"/>
           </a:xfrm>
           <a:prstGeom prst="ellipse">
@@ -18718,13 +18596,13 @@
       </p:sp>
       <p:sp>
         <p:nvSpPr>
-          <p:cNvPr id="19" name="Text 16"/>
-          <p:cNvSpPr/>
-          <p:nvPr/>
-        </p:nvSpPr>
-        <p:spPr>
-          <a:xfrm>
-            <a:off x="8174736" y="1828800"/>
+          <p:cNvPr id="14" name="Text 11"/>
+          <p:cNvSpPr/>
+          <p:nvPr/>
+        </p:nvSpPr>
+        <p:spPr>
+          <a:xfrm>
+            <a:off x="566928" y="2752344"/>
             <a:ext cx="384048" cy="384048"/>
           </a:xfrm>
           <a:prstGeom prst="rect">
@@ -18757,14 +18635,14 @@
       </p:sp>
       <p:sp>
         <p:nvSpPr>
-          <p:cNvPr id="20" name="Text 17"/>
-          <p:cNvSpPr/>
-          <p:nvPr/>
-        </p:nvSpPr>
-        <p:spPr>
-          <a:xfrm>
-            <a:off x="8686800" y="1801368"/>
-            <a:ext cx="2606040" cy="438912"/>
+          <p:cNvPr id="15" name="Text 12"/>
+          <p:cNvSpPr/>
+          <p:nvPr/>
+        </p:nvSpPr>
+        <p:spPr>
+          <a:xfrm>
+            <a:off x="1115568" y="2752344"/>
+            <a:ext cx="6492240" cy="384048"/>
           </a:xfrm>
           <a:prstGeom prst="rect">
             <a:avLst/>
@@ -18780,51 +18658,23 @@
               <a:buNone/>
             </a:pPr>
             <a:r>
-              <a:rPr lang="en-US" sz="1450" b="1" dirty="0">
-                <a:solidFill>
-                  <a:srgbClr val="3FCF8E"/>
+              <a:rPr lang="en-US" sz="1400" b="1" dirty="0">
+                <a:solidFill>
+                  <a:srgbClr val="000000"/>
                 </a:solidFill>
                 <a:latin typeface="Montserrat" pitchFamily="34" charset="0"/>
                 <a:ea typeface="Montserrat" pitchFamily="34" charset="-122"/>
                 <a:cs typeface="Montserrat" pitchFamily="34" charset="-120"/>
               </a:rPr>
-              <a:t>консоль порожня</a:t>
-            </a:r>
-            <a:endParaRPr lang="en-US" sz="1450" dirty="0"/>
-          </a:p>
-        </p:txBody>
-      </p:sp>
-      <p:sp>
-        <p:nvSpPr>
-          <p:cNvPr id="21" name="Text 18"/>
-          <p:cNvSpPr/>
-          <p:nvPr/>
-        </p:nvSpPr>
-        <p:spPr>
-          <a:xfrm>
-            <a:off x="8174736" y="2331720"/>
-            <a:ext cx="3118104" cy="576072"/>
-          </a:xfrm>
-          <a:prstGeom prst="rect">
-            <a:avLst/>
-          </a:prstGeom>
-          <a:noFill/>
-          <a:ln/>
-        </p:spPr>
-        <p:txBody>
-          <a:bodyPr wrap="square" lIns="0" tIns="0" rIns="0" bIns="0" rtlCol="0" anchor="t"/>
-          <a:lstStyle/>
-          <a:p>
+              <a:t>консоль порожня  </a:t>
+            </a:r>
             <a:pPr indent="0" marL="0">
-              <a:lnSpc>
-                <a:spcPct val="108000"/>
-              </a:lnSpc>
               <a:buNone/>
             </a:pPr>
             <a:r>
               <a:rPr lang="en-US" sz="1200" dirty="0">
                 <a:solidFill>
-                  <a:srgbClr val="E9E4F7"/>
+                  <a:srgbClr val="434343"/>
                 </a:solidFill>
                 <a:latin typeface="Montserrat" pitchFamily="34" charset="0"/>
                 <a:ea typeface="Montserrat" pitchFamily="34" charset="-122"/>
@@ -18832,41 +18682,19 @@
               </a:rPr>
               <a:t>«—» у кожній плитці</a:t>
             </a:r>
-            <a:endParaRPr lang="en-US" sz="1200" dirty="0"/>
-          </a:p>
-        </p:txBody>
-      </p:sp>
-      <p:sp>
-        <p:nvSpPr>
-          <p:cNvPr id="22" name="Shape 19"/>
-          <p:cNvSpPr/>
-          <p:nvPr/>
-        </p:nvSpPr>
-        <p:spPr>
-          <a:xfrm>
-            <a:off x="566928" y="3246120"/>
-            <a:ext cx="3520440" cy="1417320"/>
-          </a:xfrm>
-          <a:prstGeom prst="roundRect">
-            <a:avLst>
-              <a:gd name="adj" fmla="val 7742"/>
-            </a:avLst>
-          </a:prstGeom>
-          <a:solidFill>
-            <a:srgbClr val="000000"/>
-          </a:solidFill>
-          <a:ln/>
-        </p:spPr>
-      </p:sp>
-      <p:sp>
-        <p:nvSpPr>
-          <p:cNvPr id="23" name="Shape 20"/>
-          <p:cNvSpPr/>
-          <p:nvPr/>
-        </p:nvSpPr>
-        <p:spPr>
-          <a:xfrm>
-            <a:off x="768096" y="3429000"/>
+            <a:endParaRPr lang="en-US" sz="1400" dirty="0"/>
+          </a:p>
+        </p:txBody>
+      </p:sp>
+      <p:sp>
+        <p:nvSpPr>
+          <p:cNvPr id="16" name="Shape 13"/>
+          <p:cNvSpPr/>
+          <p:nvPr/>
+        </p:nvSpPr>
+        <p:spPr>
+          <a:xfrm>
+            <a:off x="566928" y="3282696"/>
             <a:ext cx="384048" cy="384048"/>
           </a:xfrm>
           <a:prstGeom prst="ellipse">
@@ -18880,13 +18708,13 @@
       </p:sp>
       <p:sp>
         <p:nvSpPr>
-          <p:cNvPr id="24" name="Text 21"/>
-          <p:cNvSpPr/>
-          <p:nvPr/>
-        </p:nvSpPr>
-        <p:spPr>
-          <a:xfrm>
-            <a:off x="768096" y="3429000"/>
+          <p:cNvPr id="17" name="Text 14"/>
+          <p:cNvSpPr/>
+          <p:nvPr/>
+        </p:nvSpPr>
+        <p:spPr>
+          <a:xfrm>
+            <a:off x="566928" y="3282696"/>
             <a:ext cx="384048" cy="384048"/>
           </a:xfrm>
           <a:prstGeom prst="rect">
@@ -18919,14 +18747,14 @@
       </p:sp>
       <p:sp>
         <p:nvSpPr>
-          <p:cNvPr id="25" name="Text 22"/>
-          <p:cNvSpPr/>
-          <p:nvPr/>
-        </p:nvSpPr>
-        <p:spPr>
-          <a:xfrm>
-            <a:off x="1280160" y="3401568"/>
-            <a:ext cx="2606040" cy="438912"/>
+          <p:cNvPr id="18" name="Text 15"/>
+          <p:cNvSpPr/>
+          <p:nvPr/>
+        </p:nvSpPr>
+        <p:spPr>
+          <a:xfrm>
+            <a:off x="1115568" y="3282696"/>
+            <a:ext cx="6492240" cy="384048"/>
           </a:xfrm>
           <a:prstGeom prst="rect">
             <a:avLst/>
@@ -18942,51 +18770,23 @@
               <a:buNone/>
             </a:pPr>
             <a:r>
-              <a:rPr lang="en-US" sz="1450" b="1" dirty="0">
-                <a:solidFill>
-                  <a:srgbClr val="3FCF8E"/>
+              <a:rPr lang="en-US" sz="1400" b="1" dirty="0">
+                <a:solidFill>
+                  <a:srgbClr val="000000"/>
                 </a:solidFill>
                 <a:latin typeface="Montserrat" pitchFamily="34" charset="0"/>
                 <a:ea typeface="Montserrat" pitchFamily="34" charset="-122"/>
                 <a:cs typeface="Montserrat" pitchFamily="34" charset="-120"/>
               </a:rPr>
-              <a:t>TODO у коді</a:t>
-            </a:r>
-            <a:endParaRPr lang="en-US" sz="1450" dirty="0"/>
-          </a:p>
-        </p:txBody>
-      </p:sp>
-      <p:sp>
-        <p:nvSpPr>
-          <p:cNvPr id="26" name="Text 23"/>
-          <p:cNvSpPr/>
-          <p:nvPr/>
-        </p:nvSpPr>
-        <p:spPr>
-          <a:xfrm>
-            <a:off x="768096" y="3931920"/>
-            <a:ext cx="3118104" cy="576072"/>
-          </a:xfrm>
-          <a:prstGeom prst="rect">
-            <a:avLst/>
-          </a:prstGeom>
-          <a:noFill/>
-          <a:ln/>
-        </p:spPr>
-        <p:txBody>
-          <a:bodyPr wrap="square" lIns="0" tIns="0" rIns="0" bIns="0" rtlCol="0" anchor="t"/>
-          <a:lstStyle/>
-          <a:p>
+              <a:t>TODO у коді  </a:t>
+            </a:r>
             <a:pPr indent="0" marL="0">
-              <a:lnSpc>
-                <a:spcPct val="108000"/>
-              </a:lnSpc>
               <a:buNone/>
             </a:pPr>
             <a:r>
               <a:rPr lang="en-US" sz="1200" dirty="0">
                 <a:solidFill>
-                  <a:srgbClr val="E9E4F7"/>
+                  <a:srgbClr val="434343"/>
                 </a:solidFill>
                 <a:latin typeface="Montserrat" pitchFamily="34" charset="0"/>
                 <a:ea typeface="Montserrat" pitchFamily="34" charset="-122"/>
@@ -18994,41 +18794,19 @@
               </a:rPr>
               <a:t>мапа роботи на 6 тижнів</a:t>
             </a:r>
-            <a:endParaRPr lang="en-US" sz="1200" dirty="0"/>
-          </a:p>
-        </p:txBody>
-      </p:sp>
-      <p:sp>
-        <p:nvSpPr>
-          <p:cNvPr id="27" name="Shape 24"/>
-          <p:cNvSpPr/>
-          <p:nvPr/>
-        </p:nvSpPr>
-        <p:spPr>
-          <a:xfrm>
-            <a:off x="4270248" y="3246120"/>
-            <a:ext cx="3520440" cy="1417320"/>
-          </a:xfrm>
-          <a:prstGeom prst="roundRect">
-            <a:avLst>
-              <a:gd name="adj" fmla="val 7742"/>
-            </a:avLst>
-          </a:prstGeom>
-          <a:solidFill>
-            <a:srgbClr val="000000"/>
-          </a:solidFill>
-          <a:ln/>
-        </p:spPr>
-      </p:sp>
-      <p:sp>
-        <p:nvSpPr>
-          <p:cNvPr id="28" name="Shape 25"/>
-          <p:cNvSpPr/>
-          <p:nvPr/>
-        </p:nvSpPr>
-        <p:spPr>
-          <a:xfrm>
-            <a:off x="4471416" y="3429000"/>
+            <a:endParaRPr lang="en-US" sz="1400" dirty="0"/>
+          </a:p>
+        </p:txBody>
+      </p:sp>
+      <p:sp>
+        <p:nvSpPr>
+          <p:cNvPr id="19" name="Shape 16"/>
+          <p:cNvSpPr/>
+          <p:nvPr/>
+        </p:nvSpPr>
+        <p:spPr>
+          <a:xfrm>
+            <a:off x="566928" y="3813048"/>
             <a:ext cx="384048" cy="384048"/>
           </a:xfrm>
           <a:prstGeom prst="ellipse">
@@ -19042,13 +18820,13 @@
       </p:sp>
       <p:sp>
         <p:nvSpPr>
-          <p:cNvPr id="29" name="Text 26"/>
-          <p:cNvSpPr/>
-          <p:nvPr/>
-        </p:nvSpPr>
-        <p:spPr>
-          <a:xfrm>
-            <a:off x="4471416" y="3429000"/>
+          <p:cNvPr id="20" name="Text 17"/>
+          <p:cNvSpPr/>
+          <p:nvPr/>
+        </p:nvSpPr>
+        <p:spPr>
+          <a:xfrm>
+            <a:off x="566928" y="3813048"/>
             <a:ext cx="384048" cy="384048"/>
           </a:xfrm>
           <a:prstGeom prst="rect">
@@ -19081,14 +18859,14 @@
       </p:sp>
       <p:sp>
         <p:nvSpPr>
-          <p:cNvPr id="30" name="Text 27"/>
-          <p:cNvSpPr/>
-          <p:nvPr/>
-        </p:nvSpPr>
-        <p:spPr>
-          <a:xfrm>
-            <a:off x="4983480" y="3401568"/>
-            <a:ext cx="2606040" cy="438912"/>
+          <p:cNvPr id="21" name="Text 18"/>
+          <p:cNvSpPr/>
+          <p:nvPr/>
+        </p:nvSpPr>
+        <p:spPr>
+          <a:xfrm>
+            <a:off x="1115568" y="3813048"/>
+            <a:ext cx="6492240" cy="384048"/>
           </a:xfrm>
           <a:prstGeom prst="rect">
             <a:avLst/>
@@ -19104,51 +18882,23 @@
               <a:buNone/>
             </a:pPr>
             <a:r>
-              <a:rPr lang="en-US" sz="1450" b="1" dirty="0">
-                <a:solidFill>
-                  <a:srgbClr val="3FCF8E"/>
+              <a:rPr lang="en-US" sz="1400" b="1" dirty="0">
+                <a:solidFill>
+                  <a:srgbClr val="000000"/>
                 </a:solidFill>
                 <a:latin typeface="Montserrat" pitchFamily="34" charset="0"/>
                 <a:ea typeface="Montserrat" pitchFamily="34" charset="-122"/>
                 <a:cs typeface="Montserrat" pitchFamily="34" charset="-120"/>
               </a:rPr>
-              <a:t>рядок у лозі</a:t>
-            </a:r>
-            <a:endParaRPr lang="en-US" sz="1450" dirty="0"/>
-          </a:p>
-        </p:txBody>
-      </p:sp>
-      <p:sp>
-        <p:nvSpPr>
-          <p:cNvPr id="31" name="Text 28"/>
-          <p:cNvSpPr/>
-          <p:nvPr/>
-        </p:nvSpPr>
-        <p:spPr>
-          <a:xfrm>
-            <a:off x="4471416" y="3931920"/>
-            <a:ext cx="3118104" cy="576072"/>
-          </a:xfrm>
-          <a:prstGeom prst="rect">
-            <a:avLst/>
-          </a:prstGeom>
-          <a:noFill/>
-          <a:ln/>
-        </p:spPr>
-        <p:txBody>
-          <a:bodyPr wrap="square" lIns="0" tIns="0" rIns="0" bIns="0" rtlCol="0" anchor="t"/>
-          <a:lstStyle/>
-          <a:p>
+              <a:t>рядок у лозі  </a:t>
+            </a:r>
             <a:pPr indent="0" marL="0">
-              <a:lnSpc>
-                <a:spcPct val="108000"/>
-              </a:lnSpc>
               <a:buNone/>
             </a:pPr>
             <a:r>
               <a:rPr lang="en-US" sz="1200" dirty="0">
                 <a:solidFill>
-                  <a:srgbClr val="E9E4F7"/>
+                  <a:srgbClr val="434343"/>
                 </a:solidFill>
                 <a:latin typeface="Montserrat" pitchFamily="34" charset="0"/>
                 <a:ea typeface="Montserrat" pitchFamily="34" charset="-122"/>
@@ -19156,61 +18906,39 @@
               </a:rPr>
               <a:t>таблиця requests</a:t>
             </a:r>
-            <a:endParaRPr lang="en-US" sz="1200" dirty="0"/>
-          </a:p>
-        </p:txBody>
-      </p:sp>
-      <p:sp>
-        <p:nvSpPr>
-          <p:cNvPr id="32" name="Shape 29"/>
-          <p:cNvSpPr/>
-          <p:nvPr/>
-        </p:nvSpPr>
-        <p:spPr>
-          <a:xfrm>
-            <a:off x="7973568" y="3246120"/>
-            <a:ext cx="3520440" cy="1417320"/>
-          </a:xfrm>
-          <a:prstGeom prst="roundRect">
-            <a:avLst>
-              <a:gd name="adj" fmla="val 7742"/>
-            </a:avLst>
-          </a:prstGeom>
-          <a:solidFill>
-            <a:srgbClr val="000000"/>
-          </a:solidFill>
-          <a:ln/>
-        </p:spPr>
-      </p:sp>
-      <p:sp>
-        <p:nvSpPr>
-          <p:cNvPr id="33" name="Shape 30"/>
-          <p:cNvSpPr/>
-          <p:nvPr/>
-        </p:nvSpPr>
-        <p:spPr>
-          <a:xfrm>
-            <a:off x="8174736" y="3429000"/>
+            <a:endParaRPr lang="en-US" sz="1400" dirty="0"/>
+          </a:p>
+        </p:txBody>
+      </p:sp>
+      <p:sp>
+        <p:nvSpPr>
+          <p:cNvPr id="22" name="Shape 19"/>
+          <p:cNvSpPr/>
+          <p:nvPr/>
+        </p:nvSpPr>
+        <p:spPr>
+          <a:xfrm>
+            <a:off x="566928" y="4343400"/>
             <a:ext cx="384048" cy="384048"/>
           </a:xfrm>
           <a:prstGeom prst="ellipse">
             <a:avLst/>
           </a:prstGeom>
           <a:solidFill>
-            <a:srgbClr val="5A05F4"/>
-          </a:solidFill>
-          <a:ln/>
-        </p:spPr>
-      </p:sp>
-      <p:sp>
-        <p:nvSpPr>
-          <p:cNvPr id="34" name="Text 31"/>
-          <p:cNvSpPr/>
-          <p:nvPr/>
-        </p:nvSpPr>
-        <p:spPr>
-          <a:xfrm>
-            <a:off x="8174736" y="3429000"/>
+            <a:srgbClr val="B3261E"/>
+          </a:solidFill>
+          <a:ln/>
+        </p:spPr>
+      </p:sp>
+      <p:sp>
+        <p:nvSpPr>
+          <p:cNvPr id="23" name="Text 20"/>
+          <p:cNvSpPr/>
+          <p:nvPr/>
+        </p:nvSpPr>
+        <p:spPr>
+          <a:xfrm>
+            <a:off x="566928" y="4343400"/>
             <a:ext cx="384048" cy="384048"/>
           </a:xfrm>
           <a:prstGeom prst="rect">
@@ -19243,14 +18971,14 @@
       </p:sp>
       <p:sp>
         <p:nvSpPr>
-          <p:cNvPr id="35" name="Text 32"/>
-          <p:cNvSpPr/>
-          <p:nvPr/>
-        </p:nvSpPr>
-        <p:spPr>
-          <a:xfrm>
-            <a:off x="8686800" y="3401568"/>
-            <a:ext cx="2606040" cy="438912"/>
+          <p:cNvPr id="24" name="Text 21"/>
+          <p:cNvSpPr/>
+          <p:nvPr/>
+        </p:nvSpPr>
+        <p:spPr>
+          <a:xfrm>
+            <a:off x="1115568" y="4343400"/>
+            <a:ext cx="6492240" cy="384048"/>
           </a:xfrm>
           <a:prstGeom prst="rect">
             <a:avLst/>
@@ -19266,51 +18994,23 @@
               <a:buNone/>
             </a:pPr>
             <a:r>
-              <a:rPr lang="en-US" sz="1450" b="1" dirty="0">
-                <a:solidFill>
-                  <a:srgbClr val="FF6B6B"/>
+              <a:rPr lang="en-US" sz="1400" b="1" dirty="0">
+                <a:solidFill>
+                  <a:srgbClr val="B3261E"/>
                 </a:solidFill>
                 <a:latin typeface="Montserrat" pitchFamily="34" charset="0"/>
                 <a:ea typeface="Montserrat" pitchFamily="34" charset="-122"/>
                 <a:cs typeface="Montserrat" pitchFamily="34" charset="-120"/>
               </a:rPr>
-              <a:t>чесний злам</a:t>
-            </a:r>
-            <a:endParaRPr lang="en-US" sz="1450" dirty="0"/>
-          </a:p>
-        </p:txBody>
-      </p:sp>
-      <p:sp>
-        <p:nvSpPr>
-          <p:cNvPr id="36" name="Text 33"/>
-          <p:cNvSpPr/>
-          <p:nvPr/>
-        </p:nvSpPr>
-        <p:spPr>
-          <a:xfrm>
-            <a:off x="8174736" y="3931920"/>
-            <a:ext cx="3118104" cy="576072"/>
-          </a:xfrm>
-          <a:prstGeom prst="rect">
-            <a:avLst/>
-          </a:prstGeom>
-          <a:noFill/>
-          <a:ln/>
-        </p:spPr>
-        <p:txBody>
-          <a:bodyPr wrap="square" lIns="0" tIns="0" rIns="0" bIns="0" rtlCol="0" anchor="t"/>
-          <a:lstStyle/>
-          <a:p>
+              <a:t>чесний злам  </a:t>
+            </a:r>
             <a:pPr indent="0" marL="0">
-              <a:lnSpc>
-                <a:spcPct val="108000"/>
-              </a:lnSpc>
               <a:buNone/>
             </a:pPr>
             <a:r>
               <a:rPr lang="en-US" sz="1200" dirty="0">
                 <a:solidFill>
-                  <a:srgbClr val="E9E4F7"/>
+                  <a:srgbClr val="434343"/>
                 </a:solidFill>
                 <a:latin typeface="Montserrat" pitchFamily="34" charset="0"/>
                 <a:ea typeface="Montserrat" pitchFamily="34" charset="-122"/>
@@ -19318,13 +19018,792 @@
               </a:rPr>
               <a:t>__fail_503 — і жодного плану Б</a:t>
             </a:r>
-            <a:endParaRPr lang="en-US" sz="1200" dirty="0"/>
+            <a:endParaRPr lang="en-US" sz="1400" dirty="0"/>
+          </a:p>
+        </p:txBody>
+      </p:sp>
+      <p:sp>
+        <p:nvSpPr>
+          <p:cNvPr id="25" name="Shape 22"/>
+          <p:cNvSpPr/>
+          <p:nvPr/>
+        </p:nvSpPr>
+        <p:spPr>
+          <a:xfrm>
+            <a:off x="7772400" y="1691640"/>
+            <a:ext cx="3858768" cy="3017520"/>
+          </a:xfrm>
+          <a:prstGeom prst="roundRect">
+            <a:avLst>
+              <a:gd name="adj" fmla="val 2424"/>
+            </a:avLst>
+          </a:prstGeom>
+          <a:solidFill>
+            <a:srgbClr val="0A0810"/>
+          </a:solidFill>
+          <a:ln w="12700">
+            <a:solidFill>
+              <a:srgbClr val="D9D9D9"/>
+            </a:solidFill>
+            <a:prstDash val="solid"/>
+          </a:ln>
+        </p:spPr>
+      </p:sp>
+      <p:sp>
+        <p:nvSpPr>
+          <p:cNvPr id="26" name="Shape 23"/>
+          <p:cNvSpPr/>
+          <p:nvPr/>
+        </p:nvSpPr>
+        <p:spPr>
+          <a:xfrm>
+            <a:off x="7900416" y="1810512"/>
+            <a:ext cx="73152" cy="73152"/>
+          </a:xfrm>
+          <a:prstGeom prst="ellipse">
+            <a:avLst/>
+          </a:prstGeom>
+          <a:solidFill>
+            <a:srgbClr val="FF6B6B"/>
+          </a:solidFill>
+          <a:ln/>
+        </p:spPr>
+      </p:sp>
+      <p:sp>
+        <p:nvSpPr>
+          <p:cNvPr id="27" name="Shape 24"/>
+          <p:cNvSpPr/>
+          <p:nvPr/>
+        </p:nvSpPr>
+        <p:spPr>
+          <a:xfrm>
+            <a:off x="8046720" y="1810512"/>
+            <a:ext cx="73152" cy="73152"/>
+          </a:xfrm>
+          <a:prstGeom prst="ellipse">
+            <a:avLst/>
+          </a:prstGeom>
+          <a:solidFill>
+            <a:srgbClr val="6BA0F8"/>
+          </a:solidFill>
+          <a:ln/>
+        </p:spPr>
+      </p:sp>
+      <p:sp>
+        <p:nvSpPr>
+          <p:cNvPr id="28" name="Shape 25"/>
+          <p:cNvSpPr/>
+          <p:nvPr/>
+        </p:nvSpPr>
+        <p:spPr>
+          <a:xfrm>
+            <a:off x="8193024" y="1810512"/>
+            <a:ext cx="73152" cy="73152"/>
+          </a:xfrm>
+          <a:prstGeom prst="ellipse">
+            <a:avLst/>
+          </a:prstGeom>
+          <a:solidFill>
+            <a:srgbClr val="3FCF8E"/>
+          </a:solidFill>
+          <a:ln/>
+        </p:spPr>
+      </p:sp>
+      <p:sp>
+        <p:nvSpPr>
+          <p:cNvPr id="29" name="Text 26"/>
+          <p:cNvSpPr/>
+          <p:nvPr/>
+        </p:nvSpPr>
+        <p:spPr>
+          <a:xfrm>
+            <a:off x="8375904" y="1691640"/>
+            <a:ext cx="3145536" cy="310896"/>
+          </a:xfrm>
+          <a:prstGeom prst="rect">
+            <a:avLst/>
+          </a:prstGeom>
+          <a:noFill/>
+          <a:ln/>
+        </p:spPr>
+        <p:txBody>
+          <a:bodyPr wrap="square" lIns="0" tIns="0" rIns="0" bIns="0" rtlCol="0" anchor="ctr"/>
+          <a:lstStyle/>
+          <a:p>
+            <a:pPr indent="0" marL="0">
+              <a:buNone/>
+            </a:pPr>
+            <a:r>
+              <a:rPr lang="en-US" sz="800" dirty="0">
+                <a:solidFill>
+                  <a:srgbClr val="9A94AA"/>
+                </a:solidFill>
+                <a:latin typeface="Courier New" pitchFamily="34" charset="0"/>
+                <a:ea typeface="Courier New" pitchFamily="34" charset="-122"/>
+                <a:cs typeface="Courier New" pitchFamily="34" charset="-120"/>
+              </a:rPr>
+              <a:t>консоль · точка А</a:t>
+            </a:r>
+            <a:endParaRPr lang="en-US" sz="800" dirty="0"/>
+          </a:p>
+        </p:txBody>
+      </p:sp>
+      <p:sp>
+        <p:nvSpPr>
+          <p:cNvPr id="30" name="Shape 27"/>
+          <p:cNvSpPr/>
+          <p:nvPr/>
+        </p:nvSpPr>
+        <p:spPr>
+          <a:xfrm>
+            <a:off x="7772400" y="2002536"/>
+            <a:ext cx="3858768" cy="0"/>
+          </a:xfrm>
+          <a:prstGeom prst="line">
+            <a:avLst/>
+          </a:prstGeom>
+          <a:noFill/>
+          <a:ln w="9525">
+            <a:solidFill>
+              <a:srgbClr val="2A2438"/>
+            </a:solidFill>
+            <a:prstDash val="solid"/>
+          </a:ln>
+        </p:spPr>
+      </p:sp>
+      <p:sp>
+        <p:nvSpPr>
+          <p:cNvPr id="31" name="Shape 28"/>
+          <p:cNvSpPr/>
+          <p:nvPr/>
+        </p:nvSpPr>
+        <p:spPr>
+          <a:xfrm>
+            <a:off x="7882128" y="2093976"/>
+            <a:ext cx="1139952" cy="1216152"/>
+          </a:xfrm>
+          <a:prstGeom prst="roundRect">
+            <a:avLst>
+              <a:gd name="adj" fmla="val 4011"/>
+            </a:avLst>
+          </a:prstGeom>
+          <a:solidFill>
+            <a:srgbClr val="0A0810"/>
+          </a:solidFill>
+          <a:ln w="12700">
+            <a:solidFill>
+              <a:srgbClr val="2A2438"/>
+            </a:solidFill>
+            <a:prstDash val="solid"/>
+          </a:ln>
+        </p:spPr>
+      </p:sp>
+      <p:sp>
+        <p:nvSpPr>
+          <p:cNvPr id="32" name="Text 29"/>
+          <p:cNvSpPr/>
+          <p:nvPr/>
+        </p:nvSpPr>
+        <p:spPr>
+          <a:xfrm>
+            <a:off x="7955280" y="2130552"/>
+            <a:ext cx="993648" cy="316200"/>
+          </a:xfrm>
+          <a:prstGeom prst="rect">
+            <a:avLst/>
+          </a:prstGeom>
+          <a:noFill/>
+          <a:ln/>
+        </p:spPr>
+        <p:txBody>
+          <a:bodyPr wrap="square" lIns="0" tIns="0" rIns="0" bIns="0" rtlCol="0" anchor="t"/>
+          <a:lstStyle/>
+          <a:p>
+            <a:pPr indent="0" marL="0">
+              <a:buNone/>
+            </a:pPr>
+            <a:r>
+              <a:rPr lang="en-US" sz="750" dirty="0">
+                <a:solidFill>
+                  <a:srgbClr val="9A94AA"/>
+                </a:solidFill>
+                <a:latin typeface="Courier New" pitchFamily="34" charset="0"/>
+                <a:ea typeface="Courier New" pitchFamily="34" charset="-122"/>
+                <a:cs typeface="Courier New" pitchFamily="34" charset="-120"/>
+              </a:rPr>
+              <a:t>requests</a:t>
+            </a:r>
+            <a:endParaRPr lang="en-US" sz="750" dirty="0"/>
+          </a:p>
+        </p:txBody>
+      </p:sp>
+      <p:sp>
+        <p:nvSpPr>
+          <p:cNvPr id="33" name="Text 30"/>
+          <p:cNvSpPr/>
+          <p:nvPr/>
+        </p:nvSpPr>
+        <p:spPr>
+          <a:xfrm>
+            <a:off x="7955280" y="2507468"/>
+            <a:ext cx="993648" cy="705368"/>
+          </a:xfrm>
+          <a:prstGeom prst="rect">
+            <a:avLst/>
+          </a:prstGeom>
+          <a:noFill/>
+          <a:ln/>
+        </p:spPr>
+        <p:txBody>
+          <a:bodyPr wrap="square" lIns="0" tIns="0" rIns="0" bIns="0" rtlCol="0" anchor="ctr"/>
+          <a:lstStyle/>
+          <a:p>
+            <a:pPr indent="0" marL="0">
+              <a:buNone/>
+            </a:pPr>
+            <a:r>
+              <a:rPr lang="en-US" sz="1500" dirty="0">
+                <a:solidFill>
+                  <a:srgbClr val="9A94AA"/>
+                </a:solidFill>
+                <a:latin typeface="Courier New" pitchFamily="34" charset="0"/>
+                <a:ea typeface="Courier New" pitchFamily="34" charset="-122"/>
+                <a:cs typeface="Courier New" pitchFamily="34" charset="-120"/>
+              </a:rPr>
+              <a:t>—</a:t>
+            </a:r>
+            <a:endParaRPr lang="en-US" sz="1500" dirty="0"/>
+          </a:p>
+        </p:txBody>
+      </p:sp>
+      <p:sp>
+        <p:nvSpPr>
+          <p:cNvPr id="34" name="Shape 31"/>
+          <p:cNvSpPr/>
+          <p:nvPr/>
+        </p:nvSpPr>
+        <p:spPr>
+          <a:xfrm>
+            <a:off x="9131808" y="2093976"/>
+            <a:ext cx="1139952" cy="1216152"/>
+          </a:xfrm>
+          <a:prstGeom prst="roundRect">
+            <a:avLst>
+              <a:gd name="adj" fmla="val 4011"/>
+            </a:avLst>
+          </a:prstGeom>
+          <a:solidFill>
+            <a:srgbClr val="0A0810"/>
+          </a:solidFill>
+          <a:ln w="12700">
+            <a:solidFill>
+              <a:srgbClr val="2A2438"/>
+            </a:solidFill>
+            <a:prstDash val="solid"/>
+          </a:ln>
+        </p:spPr>
+      </p:sp>
+      <p:sp>
+        <p:nvSpPr>
+          <p:cNvPr id="35" name="Text 32"/>
+          <p:cNvSpPr/>
+          <p:nvPr/>
+        </p:nvSpPr>
+        <p:spPr>
+          <a:xfrm>
+            <a:off x="9204960" y="2130552"/>
+            <a:ext cx="993648" cy="316200"/>
+          </a:xfrm>
+          <a:prstGeom prst="rect">
+            <a:avLst/>
+          </a:prstGeom>
+          <a:noFill/>
+          <a:ln/>
+        </p:spPr>
+        <p:txBody>
+          <a:bodyPr wrap="square" lIns="0" tIns="0" rIns="0" bIns="0" rtlCol="0" anchor="t"/>
+          <a:lstStyle/>
+          <a:p>
+            <a:pPr indent="0" marL="0">
+              <a:buNone/>
+            </a:pPr>
+            <a:r>
+              <a:rPr lang="en-US" sz="750" dirty="0">
+                <a:solidFill>
+                  <a:srgbClr val="9A94AA"/>
+                </a:solidFill>
+                <a:latin typeface="Courier New" pitchFamily="34" charset="0"/>
+                <a:ea typeface="Courier New" pitchFamily="34" charset="-122"/>
+                <a:cs typeface="Courier New" pitchFamily="34" charset="-120"/>
+              </a:rPr>
+              <a:t>cost</a:t>
+            </a:r>
+            <a:endParaRPr lang="en-US" sz="750" dirty="0"/>
+          </a:p>
+        </p:txBody>
+      </p:sp>
+      <p:sp>
+        <p:nvSpPr>
+          <p:cNvPr id="36" name="Text 33"/>
+          <p:cNvSpPr/>
+          <p:nvPr/>
+        </p:nvSpPr>
+        <p:spPr>
+          <a:xfrm>
+            <a:off x="9204960" y="2507468"/>
+            <a:ext cx="993648" cy="705368"/>
+          </a:xfrm>
+          <a:prstGeom prst="rect">
+            <a:avLst/>
+          </a:prstGeom>
+          <a:noFill/>
+          <a:ln/>
+        </p:spPr>
+        <p:txBody>
+          <a:bodyPr wrap="square" lIns="0" tIns="0" rIns="0" bIns="0" rtlCol="0" anchor="ctr"/>
+          <a:lstStyle/>
+          <a:p>
+            <a:pPr indent="0" marL="0">
+              <a:buNone/>
+            </a:pPr>
+            <a:r>
+              <a:rPr lang="en-US" sz="1500" dirty="0">
+                <a:solidFill>
+                  <a:srgbClr val="9A94AA"/>
+                </a:solidFill>
+                <a:latin typeface="Courier New" pitchFamily="34" charset="0"/>
+                <a:ea typeface="Courier New" pitchFamily="34" charset="-122"/>
+                <a:cs typeface="Courier New" pitchFamily="34" charset="-120"/>
+              </a:rPr>
+              <a:t>—</a:t>
+            </a:r>
+            <a:endParaRPr lang="en-US" sz="1500" dirty="0"/>
           </a:p>
         </p:txBody>
       </p:sp>
       <p:sp>
         <p:nvSpPr>
           <p:cNvPr id="37" name="Shape 34"/>
+          <p:cNvSpPr/>
+          <p:nvPr/>
+        </p:nvSpPr>
+        <p:spPr>
+          <a:xfrm>
+            <a:off x="10381488" y="2093976"/>
+            <a:ext cx="1139952" cy="1216152"/>
+          </a:xfrm>
+          <a:prstGeom prst="roundRect">
+            <a:avLst>
+              <a:gd name="adj" fmla="val 4011"/>
+            </a:avLst>
+          </a:prstGeom>
+          <a:solidFill>
+            <a:srgbClr val="0A0810"/>
+          </a:solidFill>
+          <a:ln w="12700">
+            <a:solidFill>
+              <a:srgbClr val="2A2438"/>
+            </a:solidFill>
+            <a:prstDash val="solid"/>
+          </a:ln>
+        </p:spPr>
+      </p:sp>
+      <p:sp>
+        <p:nvSpPr>
+          <p:cNvPr id="38" name="Text 35"/>
+          <p:cNvSpPr/>
+          <p:nvPr/>
+        </p:nvSpPr>
+        <p:spPr>
+          <a:xfrm>
+            <a:off x="10454640" y="2130552"/>
+            <a:ext cx="993648" cy="316200"/>
+          </a:xfrm>
+          <a:prstGeom prst="rect">
+            <a:avLst/>
+          </a:prstGeom>
+          <a:noFill/>
+          <a:ln/>
+        </p:spPr>
+        <p:txBody>
+          <a:bodyPr wrap="square" lIns="0" tIns="0" rIns="0" bIns="0" rtlCol="0" anchor="t"/>
+          <a:lstStyle/>
+          <a:p>
+            <a:pPr indent="0" marL="0">
+              <a:buNone/>
+            </a:pPr>
+            <a:r>
+              <a:rPr lang="en-US" sz="750" dirty="0">
+                <a:solidFill>
+                  <a:srgbClr val="9A94AA"/>
+                </a:solidFill>
+                <a:latin typeface="Courier New" pitchFamily="34" charset="0"/>
+                <a:ea typeface="Courier New" pitchFamily="34" charset="-122"/>
+                <a:cs typeface="Courier New" pitchFamily="34" charset="-120"/>
+              </a:rPr>
+              <a:t>p95</a:t>
+            </a:r>
+            <a:endParaRPr lang="en-US" sz="750" dirty="0"/>
+          </a:p>
+        </p:txBody>
+      </p:sp>
+      <p:sp>
+        <p:nvSpPr>
+          <p:cNvPr id="39" name="Text 36"/>
+          <p:cNvSpPr/>
+          <p:nvPr/>
+        </p:nvSpPr>
+        <p:spPr>
+          <a:xfrm>
+            <a:off x="10454640" y="2507468"/>
+            <a:ext cx="993648" cy="705368"/>
+          </a:xfrm>
+          <a:prstGeom prst="rect">
+            <a:avLst/>
+          </a:prstGeom>
+          <a:noFill/>
+          <a:ln/>
+        </p:spPr>
+        <p:txBody>
+          <a:bodyPr wrap="square" lIns="0" tIns="0" rIns="0" bIns="0" rtlCol="0" anchor="ctr"/>
+          <a:lstStyle/>
+          <a:p>
+            <a:pPr indent="0" marL="0">
+              <a:buNone/>
+            </a:pPr>
+            <a:r>
+              <a:rPr lang="en-US" sz="1500" dirty="0">
+                <a:solidFill>
+                  <a:srgbClr val="9A94AA"/>
+                </a:solidFill>
+                <a:latin typeface="Courier New" pitchFamily="34" charset="0"/>
+                <a:ea typeface="Courier New" pitchFamily="34" charset="-122"/>
+                <a:cs typeface="Courier New" pitchFamily="34" charset="-120"/>
+              </a:rPr>
+              <a:t>—</a:t>
+            </a:r>
+            <a:endParaRPr lang="en-US" sz="1500" dirty="0"/>
+          </a:p>
+        </p:txBody>
+      </p:sp>
+      <p:sp>
+        <p:nvSpPr>
+          <p:cNvPr id="40" name="Shape 37"/>
+          <p:cNvSpPr/>
+          <p:nvPr/>
+        </p:nvSpPr>
+        <p:spPr>
+          <a:xfrm>
+            <a:off x="7882128" y="3401568"/>
+            <a:ext cx="1139952" cy="1216152"/>
+          </a:xfrm>
+          <a:prstGeom prst="roundRect">
+            <a:avLst>
+              <a:gd name="adj" fmla="val 4011"/>
+            </a:avLst>
+          </a:prstGeom>
+          <a:solidFill>
+            <a:srgbClr val="0A0810"/>
+          </a:solidFill>
+          <a:ln w="12700">
+            <a:solidFill>
+              <a:srgbClr val="2A2438"/>
+            </a:solidFill>
+            <a:prstDash val="solid"/>
+          </a:ln>
+        </p:spPr>
+      </p:sp>
+      <p:sp>
+        <p:nvSpPr>
+          <p:cNvPr id="41" name="Text 38"/>
+          <p:cNvSpPr/>
+          <p:nvPr/>
+        </p:nvSpPr>
+        <p:spPr>
+          <a:xfrm>
+            <a:off x="7955280" y="3438144"/>
+            <a:ext cx="993648" cy="316200"/>
+          </a:xfrm>
+          <a:prstGeom prst="rect">
+            <a:avLst/>
+          </a:prstGeom>
+          <a:noFill/>
+          <a:ln/>
+        </p:spPr>
+        <p:txBody>
+          <a:bodyPr wrap="square" lIns="0" tIns="0" rIns="0" bIns="0" rtlCol="0" anchor="t"/>
+          <a:lstStyle/>
+          <a:p>
+            <a:pPr indent="0" marL="0">
+              <a:buNone/>
+            </a:pPr>
+            <a:r>
+              <a:rPr lang="en-US" sz="750" dirty="0">
+                <a:solidFill>
+                  <a:srgbClr val="9A94AA"/>
+                </a:solidFill>
+                <a:latin typeface="Courier New" pitchFamily="34" charset="0"/>
+                <a:ea typeface="Courier New" pitchFamily="34" charset="-122"/>
+                <a:cs typeface="Courier New" pitchFamily="34" charset="-120"/>
+              </a:rPr>
+              <a:t>error</a:t>
+            </a:r>
+            <a:endParaRPr lang="en-US" sz="750" dirty="0"/>
+          </a:p>
+        </p:txBody>
+      </p:sp>
+      <p:sp>
+        <p:nvSpPr>
+          <p:cNvPr id="42" name="Text 39"/>
+          <p:cNvSpPr/>
+          <p:nvPr/>
+        </p:nvSpPr>
+        <p:spPr>
+          <a:xfrm>
+            <a:off x="7955280" y="3815060"/>
+            <a:ext cx="993648" cy="705368"/>
+          </a:xfrm>
+          <a:prstGeom prst="rect">
+            <a:avLst/>
+          </a:prstGeom>
+          <a:noFill/>
+          <a:ln/>
+        </p:spPr>
+        <p:txBody>
+          <a:bodyPr wrap="square" lIns="0" tIns="0" rIns="0" bIns="0" rtlCol="0" anchor="ctr"/>
+          <a:lstStyle/>
+          <a:p>
+            <a:pPr indent="0" marL="0">
+              <a:buNone/>
+            </a:pPr>
+            <a:r>
+              <a:rPr lang="en-US" sz="1500" dirty="0">
+                <a:solidFill>
+                  <a:srgbClr val="9A94AA"/>
+                </a:solidFill>
+                <a:latin typeface="Courier New" pitchFamily="34" charset="0"/>
+                <a:ea typeface="Courier New" pitchFamily="34" charset="-122"/>
+                <a:cs typeface="Courier New" pitchFamily="34" charset="-120"/>
+              </a:rPr>
+              <a:t>—</a:t>
+            </a:r>
+            <a:endParaRPr lang="en-US" sz="1500" dirty="0"/>
+          </a:p>
+        </p:txBody>
+      </p:sp>
+      <p:sp>
+        <p:nvSpPr>
+          <p:cNvPr id="43" name="Shape 40"/>
+          <p:cNvSpPr/>
+          <p:nvPr/>
+        </p:nvSpPr>
+        <p:spPr>
+          <a:xfrm>
+            <a:off x="9131808" y="3401568"/>
+            <a:ext cx="1139952" cy="1216152"/>
+          </a:xfrm>
+          <a:prstGeom prst="roundRect">
+            <a:avLst>
+              <a:gd name="adj" fmla="val 4011"/>
+            </a:avLst>
+          </a:prstGeom>
+          <a:solidFill>
+            <a:srgbClr val="0A0810"/>
+          </a:solidFill>
+          <a:ln w="12700">
+            <a:solidFill>
+              <a:srgbClr val="2A2438"/>
+            </a:solidFill>
+            <a:prstDash val="solid"/>
+          </a:ln>
+        </p:spPr>
+      </p:sp>
+      <p:sp>
+        <p:nvSpPr>
+          <p:cNvPr id="44" name="Text 41"/>
+          <p:cNvSpPr/>
+          <p:nvPr/>
+        </p:nvSpPr>
+        <p:spPr>
+          <a:xfrm>
+            <a:off x="9204960" y="3438144"/>
+            <a:ext cx="993648" cy="316200"/>
+          </a:xfrm>
+          <a:prstGeom prst="rect">
+            <a:avLst/>
+          </a:prstGeom>
+          <a:noFill/>
+          <a:ln/>
+        </p:spPr>
+        <p:txBody>
+          <a:bodyPr wrap="square" lIns="0" tIns="0" rIns="0" bIns="0" rtlCol="0" anchor="t"/>
+          <a:lstStyle/>
+          <a:p>
+            <a:pPr indent="0" marL="0">
+              <a:buNone/>
+            </a:pPr>
+            <a:r>
+              <a:rPr lang="en-US" sz="750" dirty="0">
+                <a:solidFill>
+                  <a:srgbClr val="9A94AA"/>
+                </a:solidFill>
+                <a:latin typeface="Courier New" pitchFamily="34" charset="0"/>
+                <a:ea typeface="Courier New" pitchFamily="34" charset="-122"/>
+                <a:cs typeface="Courier New" pitchFamily="34" charset="-120"/>
+              </a:rPr>
+              <a:t>cache-hit</a:t>
+            </a:r>
+            <a:endParaRPr lang="en-US" sz="750" dirty="0"/>
+          </a:p>
+        </p:txBody>
+      </p:sp>
+      <p:sp>
+        <p:nvSpPr>
+          <p:cNvPr id="45" name="Text 42"/>
+          <p:cNvSpPr/>
+          <p:nvPr/>
+        </p:nvSpPr>
+        <p:spPr>
+          <a:xfrm>
+            <a:off x="9204960" y="3815060"/>
+            <a:ext cx="993648" cy="705368"/>
+          </a:xfrm>
+          <a:prstGeom prst="rect">
+            <a:avLst/>
+          </a:prstGeom>
+          <a:noFill/>
+          <a:ln/>
+        </p:spPr>
+        <p:txBody>
+          <a:bodyPr wrap="square" lIns="0" tIns="0" rIns="0" bIns="0" rtlCol="0" anchor="ctr"/>
+          <a:lstStyle/>
+          <a:p>
+            <a:pPr indent="0" marL="0">
+              <a:buNone/>
+            </a:pPr>
+            <a:r>
+              <a:rPr lang="en-US" sz="1500" dirty="0">
+                <a:solidFill>
+                  <a:srgbClr val="9A94AA"/>
+                </a:solidFill>
+                <a:latin typeface="Courier New" pitchFamily="34" charset="0"/>
+                <a:ea typeface="Courier New" pitchFamily="34" charset="-122"/>
+                <a:cs typeface="Courier New" pitchFamily="34" charset="-120"/>
+              </a:rPr>
+              <a:t>—</a:t>
+            </a:r>
+            <a:endParaRPr lang="en-US" sz="1500" dirty="0"/>
+          </a:p>
+        </p:txBody>
+      </p:sp>
+      <p:sp>
+        <p:nvSpPr>
+          <p:cNvPr id="46" name="Shape 43"/>
+          <p:cNvSpPr/>
+          <p:nvPr/>
+        </p:nvSpPr>
+        <p:spPr>
+          <a:xfrm>
+            <a:off x="10381488" y="3401568"/>
+            <a:ext cx="1139952" cy="1216152"/>
+          </a:xfrm>
+          <a:prstGeom prst="roundRect">
+            <a:avLst>
+              <a:gd name="adj" fmla="val 4011"/>
+            </a:avLst>
+          </a:prstGeom>
+          <a:solidFill>
+            <a:srgbClr val="0A0810"/>
+          </a:solidFill>
+          <a:ln w="12700">
+            <a:solidFill>
+              <a:srgbClr val="2A2438"/>
+            </a:solidFill>
+            <a:prstDash val="solid"/>
+          </a:ln>
+        </p:spPr>
+      </p:sp>
+      <p:sp>
+        <p:nvSpPr>
+          <p:cNvPr id="47" name="Text 44"/>
+          <p:cNvSpPr/>
+          <p:nvPr/>
+        </p:nvSpPr>
+        <p:spPr>
+          <a:xfrm>
+            <a:off x="10454640" y="3438144"/>
+            <a:ext cx="993648" cy="316200"/>
+          </a:xfrm>
+          <a:prstGeom prst="rect">
+            <a:avLst/>
+          </a:prstGeom>
+          <a:noFill/>
+          <a:ln/>
+        </p:spPr>
+        <p:txBody>
+          <a:bodyPr wrap="square" lIns="0" tIns="0" rIns="0" bIns="0" rtlCol="0" anchor="t"/>
+          <a:lstStyle/>
+          <a:p>
+            <a:pPr indent="0" marL="0">
+              <a:buNone/>
+            </a:pPr>
+            <a:r>
+              <a:rPr lang="en-US" sz="750" dirty="0">
+                <a:solidFill>
+                  <a:srgbClr val="9A94AA"/>
+                </a:solidFill>
+                <a:latin typeface="Courier New" pitchFamily="34" charset="0"/>
+                <a:ea typeface="Courier New" pitchFamily="34" charset="-122"/>
+                <a:cs typeface="Courier New" pitchFamily="34" charset="-120"/>
+              </a:rPr>
+              <a:t>fallback</a:t>
+            </a:r>
+            <a:endParaRPr lang="en-US" sz="750" dirty="0"/>
+          </a:p>
+        </p:txBody>
+      </p:sp>
+      <p:sp>
+        <p:nvSpPr>
+          <p:cNvPr id="48" name="Text 45"/>
+          <p:cNvSpPr/>
+          <p:nvPr/>
+        </p:nvSpPr>
+        <p:spPr>
+          <a:xfrm>
+            <a:off x="10454640" y="3815060"/>
+            <a:ext cx="993648" cy="705368"/>
+          </a:xfrm>
+          <a:prstGeom prst="rect">
+            <a:avLst/>
+          </a:prstGeom>
+          <a:noFill/>
+          <a:ln/>
+        </p:spPr>
+        <p:txBody>
+          <a:bodyPr wrap="square" lIns="0" tIns="0" rIns="0" bIns="0" rtlCol="0" anchor="ctr"/>
+          <a:lstStyle/>
+          <a:p>
+            <a:pPr indent="0" marL="0">
+              <a:buNone/>
+            </a:pPr>
+            <a:r>
+              <a:rPr lang="en-US" sz="1500" dirty="0">
+                <a:solidFill>
+                  <a:srgbClr val="9A94AA"/>
+                </a:solidFill>
+                <a:latin typeface="Courier New" pitchFamily="34" charset="0"/>
+                <a:ea typeface="Courier New" pitchFamily="34" charset="-122"/>
+                <a:cs typeface="Courier New" pitchFamily="34" charset="-120"/>
+              </a:rPr>
+              <a:t>—</a:t>
+            </a:r>
+            <a:endParaRPr lang="en-US" sz="1500" dirty="0"/>
+          </a:p>
+        </p:txBody>
+      </p:sp>
+      <p:sp>
+        <p:nvSpPr>
+          <p:cNvPr id="49" name="Shape 46"/>
           <p:cNvSpPr/>
           <p:nvPr/>
         </p:nvSpPr>
@@ -19346,7 +19825,7 @@
       </p:sp>
       <p:sp>
         <p:nvSpPr>
-          <p:cNvPr id="38" name="Shape 35"/>
+          <p:cNvPr id="50" name="Shape 47"/>
           <p:cNvSpPr/>
           <p:nvPr/>
         </p:nvSpPr>
@@ -19366,7 +19845,7 @@
       </p:sp>
       <p:sp>
         <p:nvSpPr>
-          <p:cNvPr id="39" name="Text 36"/>
+          <p:cNvPr id="51" name="Text 48"/>
           <p:cNvSpPr/>
           <p:nvPr/>
         </p:nvSpPr>
@@ -19405,7 +19884,7 @@
       </p:sp>
       <p:sp>
         <p:nvSpPr>
-          <p:cNvPr id="40" name="Text 37"/>
+          <p:cNvPr id="52" name="Text 49"/>
           <p:cNvSpPr/>
           <p:nvPr/>
         </p:nvSpPr>
@@ -19444,7 +19923,7 @@
       </p:sp>
       <p:sp>
         <p:nvSpPr>
-          <p:cNvPr id="41" name="Text 38"/>
+          <p:cNvPr id="53" name="Text 50"/>
           <p:cNvSpPr/>
           <p:nvPr/>
         </p:nvSpPr>

--- a/docs/decks/L01.pptx
+++ b/docs/decks/L01.pptx
@@ -3877,7 +3877,7 @@
                 <a:ea typeface="Courier New" pitchFamily="34" charset="-122"/>
                 <a:cs typeface="Courier New" pitchFamily="34" charset="-120"/>
               </a:rPr>
-              <a:t>ТИЖДЕНЬ 1 · УРОК 1 З 12</a:t>
+              <a:t>ТИЖДЕНЬ 1 · ТЕМА 1 З 12</a:t>
             </a:r>
             <a:endParaRPr lang="en-US" sz="1200" dirty="0"/>
           </a:p>
@@ -4492,7 +4492,7 @@
                 <a:ea typeface="Unbounded" pitchFamily="34" charset="-122"/>
                 <a:cs typeface="Unbounded" pitchFamily="34" charset="-120"/>
               </a:rPr>
-              <a:t>Анатомія виклику: що летить у модель</a:t>
+              <a:t>Структура LLM-виклику та базовий API-контракт</a:t>
             </a:r>
             <a:endParaRPr lang="en-US" sz="2400" dirty="0"/>
           </a:p>
@@ -4894,7 +4894,7 @@
                 <a:ea typeface="Montserrat" pitchFamily="34" charset="-122"/>
                 <a:cs typeface="Montserrat" pitchFamily="34" charset="-120"/>
               </a:rPr>
-              <a:t>Модель не має пам'яті: історію привозите ви — тому кожен наступний крок діалогу дорожчає, а сумарна вартість росте швидше за кількість кроків.</a:t>
+              <a:t>Модель не має пам'яті: історію привозите Ви — тому кожен наступний крок діалогу дорожчає, а сумарна вартість росте швидше за кількість кроків.</a:t>
             </a:r>
             <a:endParaRPr lang="en-US" sz="1300" dirty="0"/>
           </a:p>
@@ -5233,7 +5233,7 @@
                 <a:ea typeface="Montserrat" pitchFamily="34" charset="-122"/>
                 <a:cs typeface="Montserrat" pitchFamily="34" charset="-120"/>
               </a:rPr>
-              <a:t>system — це той промпт, який наступного уроку переїде в реєстр.</a:t>
+              <a:t>system — це той промпт, яка у наступній темі переїде в реєстр.</a:t>
             </a:r>
             <a:endParaRPr lang="en-US" sz="1200" dirty="0"/>
           </a:p>
@@ -6233,7 +6233,7 @@
                           <a:ea typeface="Montserrat" pitchFamily="34" charset="-122"/>
                           <a:cs typeface="Montserrat" pitchFamily="34" charset="-120"/>
                         </a:rPr>
-                        <a:t>просить інструмент (урок 6)</a:t>
+                        <a:t>просить інструмент (Тема 6)</a:t>
                       </a:r>
                       <a:endParaRPr lang="en-US" sz="1150" dirty="0">
                         <a:latin typeface="Montserrat" charset="0"/>
@@ -6827,7 +6827,7 @@
                 <a:ea typeface="Montserrat" pitchFamily="34" charset="-122"/>
                 <a:cs typeface="Montserrat" pitchFamily="34" charset="-120"/>
               </a:rPr>
-              <a:t>Вхідні · вихідні · кеш провайдера. Єдине джерело правди про гроші (урок 4).</a:t>
+              <a:t>Вхідні · вихідні · кеш провайдера. Єдине джерело правди про гроші (Тема 4).</a:t>
             </a:r>
             <a:endParaRPr lang="en-US" sz="1300" dirty="0"/>
           </a:p>
@@ -8047,7 +8047,7 @@
                 <a:ea typeface="Unbounded" pitchFamily="34" charset="-122"/>
                 <a:cs typeface="Unbounded" pitchFamily="34" charset="-120"/>
               </a:rPr>
-              <a:t>temperature = 0 — це не детермінізм</a:t>
+              <a:t>Чому temperature=0 не гарантує детермінізму</a:t>
             </a:r>
             <a:endParaRPr lang="en-US" sz="2400" dirty="0"/>
           </a:p>
@@ -9232,7 +9232,7 @@
                 <a:ea typeface="Unbounded" pitchFamily="34" charset="-122"/>
                 <a:cs typeface="Unbounded" pitchFamily="34" charset="-120"/>
               </a:rPr>
-              <a:t>Латентність: час залежить від довжини відповіді</a:t>
+              <a:t>Від чого залежить латентність LLM-виклику</a:t>
             </a:r>
             <a:endParaRPr lang="en-US" sz="2400" dirty="0"/>
           </a:p>
@@ -10086,7 +10086,7 @@
                 <a:ea typeface="Unbounded" pitchFamily="34" charset="-122"/>
                 <a:cs typeface="Unbounded" pitchFamily="34" charset="-120"/>
               </a:rPr>
-              <a:t>П'ять способів зламатися — і сліпа зона моніторингу</a:t>
+              <a:t>Типові сценарії відмови LLM-виклику</a:t>
             </a:r>
             <a:endParaRPr lang="en-US" sz="2400" dirty="0"/>
           </a:p>
@@ -11881,7 +11881,7 @@
                 <a:ea typeface="Montserrat" pitchFamily="34" charset="-122"/>
                 <a:cs typeface="Montserrat" pitchFamily="34" charset="-120"/>
               </a:rPr>
-              <a:t>Ті самі ролі ви зустрінете в будь-якому проді — незалежно від інструментів.</a:t>
+              <a:t>Ті самі ролі Ви зустрінете в будь-якому проді — незалежно від інструментів.</a:t>
             </a:r>
             <a:endParaRPr lang="en-US" sz="1300" dirty="0"/>
           </a:p>
@@ -12054,7 +12054,7 @@
                 <a:ea typeface="Unbounded" pitchFamily="34" charset="-122"/>
                 <a:cs typeface="Unbounded" pitchFamily="34" charset="-120"/>
               </a:rPr>
-              <a:t>П'ять компонентів — і ваші стосунки з ними</a:t>
+              <a:t>Архітектура стека: компоненти та межі відповідальності</a:t>
             </a:r>
             <a:endParaRPr lang="en-US" sz="2400" dirty="0"/>
           </a:p>
@@ -12344,7 +12344,7 @@
                 <a:ea typeface="Montserrat" pitchFamily="34" charset="-122"/>
                 <a:cs typeface="Montserrat" pitchFamily="34" charset="-120"/>
               </a:rPr>
-              <a:t>контур керування: модель, кеш, fallback, вартість — тут уся ваша робота</a:t>
+              <a:t>контур керування: модель, кеш, fallback, вартість — тут уся Ваша робота</a:t>
             </a:r>
             <a:endParaRPr lang="en-US" sz="1150" dirty="0"/>
           </a:p>
@@ -12713,7 +12713,7 @@
                 <a:ea typeface="Montserrat" pitchFamily="34" charset="-122"/>
                 <a:cs typeface="Montserrat" pitchFamily="34" charset="-120"/>
               </a:rPr>
-              <a:t>Права колонка чесно ділить стек: що ви будуєте — і чим просто користуєтесь.</a:t>
+              <a:t>Права колонка чесно ділить стек: що Ви будуєте — і чим просто користуєтесь.</a:t>
             </a:r>
             <a:endParaRPr lang="en-US" sz="1300" dirty="0"/>
           </a:p>
@@ -13593,7 +13593,7 @@
                 <a:ea typeface="Montserrat" pitchFamily="34" charset="-122"/>
                 <a:cs typeface="Montserrat" pitchFamily="34" charset="-120"/>
               </a:rPr>
-              <a:t>Рішення в адаптері — ви клікаєте прапорці, а не будуєте механізм.</a:t>
+              <a:t>Рішення в адаптері — Ви клікаєте прапорці, а не будуєте механізм.</a:t>
             </a:r>
             <a:endParaRPr lang="en-US" sz="1300" dirty="0"/>
           </a:p>
@@ -13805,7 +13805,7 @@
                 <a:ea typeface="Unbounded" pitchFamily="34" charset="-122"/>
                 <a:cs typeface="Unbounded" pitchFamily="34" charset="-120"/>
               </a:rPr>
-              <a:t>Unified log: рядок, з якого виростає весь курс</a:t>
+              <a:t>Unified log як основа операційного контролю</a:t>
             </a:r>
             <a:endParaRPr lang="en-US" sz="2400" dirty="0"/>
           </a:p>
@@ -14071,7 +14071,7 @@
                 <a:ea typeface="Montserrat" pitchFamily="34" charset="-122"/>
                 <a:cs typeface="Montserrat" pitchFamily="34" charset="-120"/>
               </a:rPr>
-              <a:t>підсвічені поля сьогодні порожні — це ваша робота на два тижні</a:t>
+              <a:t>підсвічені поля сьогодні порожні — це Ваша робота на два тижні</a:t>
             </a:r>
             <a:endParaRPr lang="en-US" sz="1150" dirty="0"/>
           </a:p>
@@ -15756,7 +15756,7 @@
                 <a:ea typeface="Unbounded" pitchFamily="34" charset="-122"/>
                 <a:cs typeface="Unbounded" pitchFamily="34" charset="-120"/>
               </a:rPr>
-              <a:t>Mock: керовані збої + чутливість до промпта</a:t>
+              <a:t>Mock-провайдер для керованого тестування</a:t>
             </a:r>
             <a:endParaRPr lang="en-US" sz="2400" dirty="0"/>
           </a:p>
@@ -16163,7 +16163,7 @@
                 <a:ea typeface="Courier New" pitchFamily="34" charset="-122"/>
                 <a:cs typeface="Courier New" pitchFamily="34" charset="-120"/>
               </a:rPr>
-              <a:t>урок 7</a:t>
+              <a:t>Тема 7</a:t>
             </a:r>
             <a:endParaRPr lang="en-US" sz="1000" dirty="0"/>
           </a:p>
@@ -17194,7 +17194,7 @@
                 <a:ea typeface="Unbounded" pitchFamily="34" charset="-122"/>
                 <a:cs typeface="Unbounded" pitchFamily="34" charset="-120"/>
               </a:rPr>
-              <a:t>Реальний ключ і розширений стек</a:t>
+              <a:t>Підключення реального провайдера та розширеного стека</a:t>
             </a:r>
             <a:endParaRPr lang="en-US" sz="2400" dirty="0"/>
           </a:p>
@@ -17208,7 +17208,7 @@
         </p:nvSpPr>
         <p:spPr>
           <a:xfrm>
-            <a:off x="1280160" y="1218895"/>
+            <a:off x="1280160" y="1413662"/>
             <a:ext cx="777240" cy="256032"/>
           </a:xfrm>
           <a:prstGeom prst="roundRect">
@@ -17235,7 +17235,7 @@
         </p:nvSpPr>
         <p:spPr>
           <a:xfrm>
-            <a:off x="1280160" y="1218895"/>
+            <a:off x="1280160" y="1413662"/>
             <a:ext cx="777240" cy="256032"/>
           </a:xfrm>
           <a:prstGeom prst="rect">
@@ -17274,7 +17274,7 @@
         </p:nvSpPr>
         <p:spPr>
           <a:xfrm>
-            <a:off x="2167128" y="1218895"/>
+            <a:off x="2167128" y="1413662"/>
             <a:ext cx="864108" cy="256032"/>
           </a:xfrm>
           <a:prstGeom prst="roundRect">
@@ -17301,7 +17301,7 @@
         </p:nvSpPr>
         <p:spPr>
           <a:xfrm>
-            <a:off x="2167128" y="1218895"/>
+            <a:off x="2167128" y="1413662"/>
             <a:ext cx="864108" cy="256032"/>
           </a:xfrm>
           <a:prstGeom prst="rect">
@@ -18259,7 +18259,7 @@
                 <a:ea typeface="Unbounded" pitchFamily="34" charset="-122"/>
                 <a:cs typeface="Unbounded" pitchFamily="34" charset="-120"/>
               </a:rPr>
-              <a:t>Зараз ви побачите — і навіщо</a:t>
+              <a:t>Зараз Ви побачите — і навіщо</a:t>
             </a:r>
             <a:endParaRPr lang="en-US" sz="2400" dirty="0"/>
           </a:p>
@@ -20091,7 +20091,7 @@
                 <a:ea typeface="Unbounded" pitchFamily="34" charset="-122"/>
                 <a:cs typeface="Unbounded" pitchFamily="34" charset="-120"/>
               </a:rPr>
-              <a:t>Лабораторна: п'ять кроків + один опційний</a:t>
+              <a:t>Лабораторна робота: запуск, перевірка та відтворення збою</a:t>
             </a:r>
             <a:endParaRPr lang="en-US" sz="2400" dirty="0"/>
           </a:p>
@@ -22272,7 +22272,7 @@
                 <a:ea typeface="Montserrat" pitchFamily="34" charset="-122"/>
                 <a:cs typeface="Montserrat" pitchFamily="34" charset="-120"/>
               </a:rPr>
-              <a:t>Точку Б ви збудуєте самі — шар за шаром, тиждень за тижнем. Сьогоднішній скріншот консолі збережіть: на тижні 6 порівняєте.</a:t>
+              <a:t>Точку Б Ви збудуєте самі — шар за шаром, тиждень за тижнем. Сьогоднішній скріншот консолі збережіть: на тижні 6 порівняєте.</a:t>
             </a:r>
             <a:endParaRPr lang="en-US" sz="1300" dirty="0"/>
           </a:p>
@@ -24725,7 +24725,7 @@
                 <a:ea typeface="Montserrat" pitchFamily="34" charset="-122"/>
                 <a:cs typeface="Montserrat" pitchFamily="34" charset="-120"/>
               </a:rPr>
-              <a:t>ДЗ тижня 1 — здається після уроку 2</a:t>
+              <a:t>ДЗ тижня 1 — здається після Теми 2</a:t>
             </a:r>
             <a:endParaRPr lang="en-US" sz="1500" dirty="0"/>
           </a:p>
@@ -24764,7 +24764,7 @@
                 <a:ea typeface="Montserrat" pitchFamily="34" charset="-122"/>
                 <a:cs typeface="Montserrat" pitchFamily="34" charset="-120"/>
               </a:rPr>
-              <a:t>Логування + prompt registry. Тиждень здається одним PR у своєму репозиторії; критерії — у файлі ДЗ після наступного уроку.</a:t>
+              <a:t>Логування + prompt registry. Тиждень здається одним PR у своєму репозиторії; критерії — у файлі ДЗ після наступної теми.</a:t>
             </a:r>
             <a:endParaRPr lang="en-US" sz="1250" dirty="0"/>
           </a:p>
@@ -24898,7 +24898,7 @@
                 <a:ea typeface="Unbounded" pitchFamily="34" charset="-122"/>
                 <a:cs typeface="Unbounded" pitchFamily="34" charset="-120"/>
               </a:rPr>
-              <a:t>Що ви зможете після уроку</a:t>
+              <a:t>Що Ви зможете після теми</a:t>
             </a:r>
             <a:endParaRPr lang="en-US" sz="2400" dirty="0"/>
           </a:p>
@@ -26153,7 +26153,7 @@
                 <a:ea typeface="Courier New" pitchFamily="34" charset="-122"/>
                 <a:cs typeface="Courier New" pitchFamily="34" charset="-120"/>
               </a:rPr>
-              <a:t>ПІДСУМОК УРОКУ 1</a:t>
+              <a:t>ПІДСУМОК ТЕМИ 1</a:t>
             </a:r>
             <a:endParaRPr lang="en-US" sz="1100" dirty="0"/>
           </a:p>
@@ -26529,7 +26529,7 @@
                 <a:ea typeface="Montserrat" pitchFamily="34" charset="-122"/>
                 <a:cs typeface="Montserrat" pitchFamily="34" charset="-120"/>
               </a:rPr>
-              <a:t>Наступний крок → Урок 2 · Prompt lifecycle: промпт як production-артефакт</a:t>
+              <a:t>Наступний крок → Тема 2 · Prompt lifecycle: промпт як production-артефакт</a:t>
             </a:r>
             <a:endParaRPr lang="en-US" sz="1500" dirty="0"/>
           </a:p>
@@ -27090,7 +27090,7 @@
                 <a:ea typeface="Montserrat" pitchFamily="34" charset="-122"/>
                 <a:cs typeface="Montserrat" pitchFamily="34" charset="-120"/>
               </a:rPr>
-              <a:t>Анатомія виклику</a:t>
+              <a:t>Структура виклику</a:t>
             </a:r>
             <a:endParaRPr lang="en-US" sz="1450" dirty="0"/>
           </a:p>
@@ -27450,7 +27450,7 @@
                 <a:ea typeface="Montserrat" pitchFamily="34" charset="-122"/>
                 <a:cs typeface="Montserrat" pitchFamily="34" charset="-120"/>
               </a:rPr>
-              <a:t>П'ять способів зламатися</a:t>
+              <a:t>Сценарії відмови виклику</a:t>
             </a:r>
             <a:endParaRPr lang="en-US" sz="1450" dirty="0"/>
           </a:p>
@@ -27570,7 +27570,7 @@
                 <a:ea typeface="Montserrat" pitchFamily="34" charset="-122"/>
                 <a:cs typeface="Montserrat" pitchFamily="34" charset="-120"/>
               </a:rPr>
-              <a:t>Стек: вирішує vs виконує</a:t>
+              <a:t>Архітектура стека</a:t>
             </a:r>
             <a:endParaRPr lang="en-US" sz="1450" dirty="0"/>
           </a:p>
@@ -28239,7 +28239,7 @@
                 <a:ea typeface="Montserrat" pitchFamily="34" charset="-122"/>
                 <a:cs typeface="Montserrat" pitchFamily="34" charset="-120"/>
               </a:rPr>
-              <a:t>Перші п'ять блоків — об'єкт керування. Наступні — каркас, який ви будуватимете шість тижнів.</a:t>
+              <a:t>Перші п'ять блоків — об'єкт керування. Наступні — каркас, який Ви будуватимете шість тижнів.</a:t>
             </a:r>
             <a:endParaRPr lang="en-US" sz="1300" dirty="0"/>
           </a:p>
@@ -28415,7 +28415,7 @@
                 <a:ea typeface="Montserrat" pitchFamily="34" charset="-122"/>
                 <a:cs typeface="Montserrat" pitchFamily="34" charset="-120"/>
               </a:rPr>
-              <a:t>Кожен тиждень — два уроки; кожен наступний шар лягає на той самий контур керування</a:t>
+              <a:t>Кожен тиждень — дві теми; кожен наступний шар лягає на той самий контур керування</a:t>
             </a:r>
             <a:endParaRPr lang="en-US" sz="1300" dirty="0"/>
           </a:p>
@@ -30649,7 +30649,7 @@
                 <a:ea typeface="Unbounded" pitchFamily="34" charset="-122"/>
                 <a:cs typeface="Unbounded" pitchFamily="34" charset="-120"/>
               </a:rPr>
-              <a:t>Чому демо за день — а прод ніколи?</a:t>
+              <a:t>Чому 200 OK не підтверджує працездатності LLM-системи</a:t>
             </a:r>
             <a:endParaRPr lang="en-US" sz="2400" dirty="0"/>
           </a:p>
@@ -30839,7 +30839,7 @@
                 <a:ea typeface="Montserrat" pitchFamily="34" charset="-122"/>
                 <a:cs typeface="Montserrat" pitchFamily="34" charset="-120"/>
               </a:rPr>
-              <a:t>усе, що каже вам HTTP</a:t>
+              <a:t>усе, що каже Вам HTTP</a:t>
             </a:r>
             <a:endParaRPr lang="en-US" sz="1150" dirty="0"/>
           </a:p>
@@ -32567,7 +32567,7 @@
                 <a:ea typeface="Montserrat" pitchFamily="34" charset="-122"/>
                 <a:cs typeface="Montserrat" pitchFamily="34" charset="-120"/>
               </a:rPr>
-              <a:t>ваш uptime залежить від чужого</a:t>
+              <a:t>Ваш uptime залежить від чужого</a:t>
             </a:r>
             <a:endParaRPr lang="en-US" sz="1200" dirty="0"/>
           </a:p>

--- a/docs/decks/L01.pptx
+++ b/docs/decks/L01.pptx
@@ -5233,7 +5233,7 @@
                 <a:ea typeface="Montserrat" pitchFamily="34" charset="-122"/>
                 <a:cs typeface="Montserrat" pitchFamily="34" charset="-120"/>
               </a:rPr>
-              <a:t>system — це той промпт, яка у наступній темі переїде в реєстр.</a:t>
+              <a:t>system — це той промпт, який у наступній темі переїде в реєстр.</a:t>
             </a:r>
             <a:endParaRPr lang="en-US" sz="1200" dirty="0"/>
           </a:p>
@@ -7707,7 +7707,7 @@
                 <a:ea typeface="Montserrat" pitchFamily="34" charset="-122"/>
                 <a:cs typeface="Montserrat" pitchFamily="34" charset="-120"/>
               </a:rPr>
-              <a:t>схематично: порядок величин, а не точні коефіцієнти — прайс розбираємо в уроці 4</a:t>
+              <a:t>схематично: порядок величин, а не точні коефіцієнти — прайс розбираємо в Темі 4</a:t>
             </a:r>
             <a:endParaRPr lang="en-US" sz="1000" dirty="0"/>
           </a:p>

--- a/docs/decks/L01.pptx
+++ b/docs/decks/L01.pptx
@@ -21038,7 +21038,7 @@
                 <a:ea typeface="Montserrat" pitchFamily="34" charset="-122"/>
                 <a:cs typeface="Montserrat" pitchFamily="34" charset="-120"/>
               </a:rPr>
-              <a:t>що це довело · перевір себе · антипатерни тижня</a:t>
+              <a:t>що це довело · перевірте себе · антипатерни тижня</a:t>
             </a:r>
             <a:endParaRPr lang="en-US" sz="1500" dirty="0"/>
           </a:p>
@@ -22406,7 +22406,7 @@
                 <a:ea typeface="Unbounded" pitchFamily="34" charset="-122"/>
                 <a:cs typeface="Unbounded" pitchFamily="34" charset="-120"/>
               </a:rPr>
-              <a:t>Перевір себе</a:t>
+              <a:t>Перевірте себе</a:t>
             </a:r>
             <a:endParaRPr lang="en-US" sz="2400" dirty="0"/>
           </a:p>
@@ -24498,7 +24498,7 @@
                 <a:ea typeface="Montserrat" pitchFamily="34" charset="-122"/>
                 <a:cs typeface="Montserrat" pitchFamily="34" charset="-120"/>
               </a:rPr>
-              <a:t>• витримати чек-лист «перевір себе»</a:t>
+              <a:t>• витримати чек-лист «перевірте себе»</a:t>
             </a:r>
             <a:endParaRPr lang="en-US" sz="1200" dirty="0"/>
           </a:p>
